--- a/TBK_rd_gap_slides.pptx
+++ b/TBK_rd_gap_slides.pptx
@@ -11,6 +11,8 @@
     <p:sldId id="259" r:id="rId10"/>
     <p:sldId id="260" r:id="rId11"/>
     <p:sldId id="261" r:id="rId12"/>
+    <p:sldId id="262" r:id="rId13"/>
+    <p:sldId id="263" r:id="rId14"/>
   </p:sldIdLst>
   <p:sldSz cx="12191695" cy="6858000" type="screen4x3"/>
   <p:notesSz cx="6858000" cy="9144000"/>
@@ -3910,7 +3912,7 @@
         <p:spPr>
           <a:xfrm>
             <a:off x="914400" y="3108960"/>
-            <a:ext cx="10332720" cy="731520"/>
+            <a:ext cx="10332720" cy="822960"/>
           </a:xfrm>
           <a:prstGeom prst="rect">
             <a:avLst/>
@@ -3930,7 +3932,7 @@
                   <a:srgbClr val="D0DCE8"/>
                 </a:solidFill>
               </a:rPr>
-              <a:t>TBK Co., Ltd. (7277.T) — market evolution, competitor innovation, and the reinvestment requirement</a:t>
+              <a:t>TBK Co., Ltd. (7277.T) — brakes and pumps: market evolution, competitor innovation, and the reinvestment requirement</a:t>
             </a:r>
           </a:p>
         </p:txBody>
@@ -3964,7 +3966,7 @@
                   <a:srgbClr val="A8B8C8"/>
                 </a:solidFill>
               </a:rPr>
-              <a:t>Based on peer-reviewed and verified industry research plus competitor filings  |  June 2026</a:t>
+              <a:t>Based on peer-reviewed and adversarially verified research plus competitor filings  |  June 2026</a:t>
             </a:r>
           </a:p>
         </p:txBody>
@@ -4017,7 +4019,7 @@
                   <a:srgbClr val="FFFFFF"/>
                 </a:solidFill>
               </a:rPr>
-              <a:t>The market has moved: drum brakes are a shrinking island</a:t>
+              <a:t>Brakes: drum brakes are a shrinking island</a:t>
             </a:r>
           </a:p>
         </p:txBody>
@@ -4649,7 +4651,7 @@
                   <a:srgbClr val="FFFFFF"/>
                 </a:solidFill>
               </a:rPr>
-              <a:t>Competitors kept innovating — in brakes and in pumps</a:t>
+              <a:t>Pumps: electrification grows the category — and reallocates it</a:t>
             </a:r>
           </a:p>
         </p:txBody>
@@ -4683,7 +4685,7 @@
                   <a:srgbClr val="595959"/>
                 </a:solidFill>
               </a:rPr>
-              <a:t>Every relevant peer has repositioned its product line for discs, electronics, and electrification</a:t>
+              <a:t>Verified findings: peer-reviewed thermal studies, regulatory texts, and adversarial company documents</a:t>
             </a:r>
           </a:p>
         </p:txBody>
@@ -4697,7 +4699,7 @@
         <p:spPr>
           <a:xfrm>
             <a:off x="457200" y="1417320"/>
-            <a:ext cx="5577840" cy="5120640"/>
+            <a:ext cx="3657600" cy="2834640"/>
           </a:xfrm>
           <a:prstGeom prst="rect">
             <a:avLst/>
@@ -4723,97 +4725,97 @@
                   <a:srgbClr val="1F4E78"/>
                 </a:solidFill>
               </a:rPr>
-              <a:t>BRAKES — from castings to systems</a:t>
-            </a:r>
-          </a:p>
-          <a:p>
-            <a:pPr>
-              <a:spcBef>
-                <a:spcPts val="400"/>
-              </a:spcBef>
-            </a:pPr>
-            <a:r>
-              <a:rPr sz="1150">
-                <a:solidFill>
-                  <a:srgbClr val="202020"/>
-                </a:solidFill>
-              </a:rPr>
-              <a:t>Knorr-Bremse/Bendix: ADB standard on Peterbilt/Kenworth steer axles (2013); ~20M discs in field; Global Scalable Brake Control platform; driverless-truck braking (ATLAS-L4)</a:t>
-            </a:r>
-          </a:p>
-          <a:p>
-            <a:pPr>
-              <a:spcBef>
-                <a:spcPts val="400"/>
-              </a:spcBef>
-            </a:pPr>
-            <a:r>
-              <a:rPr sz="1150">
-                <a:solidFill>
-                  <a:srgbClr val="202020"/>
-                </a:solidFill>
-              </a:rPr>
-              <a:t>ZF/Wabco: EBS + ADAS integration; $7bn acquisition built the #2 systems house</a:t>
-            </a:r>
-          </a:p>
-          <a:p>
-            <a:pPr>
-              <a:spcBef>
-                <a:spcPts val="400"/>
-              </a:spcBef>
-            </a:pPr>
-            <a:r>
-              <a:rPr sz="1150">
-                <a:solidFill>
-                  <a:srgbClr val="202020"/>
-                </a:solidFill>
-              </a:rPr>
-              <a:t>Brembo: Sensify brake-by-wire; 6.1% of sales into R&amp;D</a:t>
-            </a:r>
-          </a:p>
-          <a:p>
-            <a:pPr>
-              <a:spcBef>
-                <a:spcPts val="400"/>
-              </a:spcBef>
-            </a:pPr>
-            <a:r>
-              <a:rPr sz="1150">
-                <a:solidFill>
-                  <a:srgbClr val="202020"/>
-                </a:solidFill>
-              </a:rPr>
-              <a:t>Akebono: electro-mechanical brakes (EMB) + copper-free friction — spending up despite losses</a:t>
-            </a:r>
-          </a:p>
-          <a:p>
-            <a:pPr>
-              <a:spcBef>
-                <a:spcPts val="400"/>
-              </a:spcBef>
-            </a:pPr>
-            <a:r>
-              <a:rPr sz="1150">
-                <a:solidFill>
-                  <a:srgbClr val="202020"/>
-                </a:solidFill>
-              </a:rPr>
-              <a:t>SAF-Holland/Haldex: trailer ADB + EBS at low cost</a:t>
-            </a:r>
-          </a:p>
-          <a:p>
-            <a:pPr>
-              <a:spcBef>
-                <a:spcPts val="400"/>
-              </a:spcBef>
-            </a:pPr>
-            <a:r>
-              <a:rPr sz="1150">
-                <a:solidFill>
-                  <a:srgbClr val="202020"/>
-                </a:solidFill>
-              </a:rPr>
-              <a:t>Consolidation priced the lesson: Haldex sold at HALF Knorr-Bremse's blocked 2017 offer after staying sub-scale</a:t>
+              <a:t>Diesel era — refined commodity</a:t>
+            </a:r>
+          </a:p>
+          <a:p>
+            <a:pPr>
+              <a:spcBef>
+                <a:spcPts val="400"/>
+              </a:spcBef>
+            </a:pPr>
+            <a:r>
+              <a:rPr sz="1200">
+                <a:solidFill>
+                  <a:srgbClr val="202020"/>
+                </a:solidFill>
+              </a:rPr>
+              <a:t>Pumps = only ~1-2% of fuel energy</a:t>
+            </a:r>
+          </a:p>
+          <a:p>
+            <a:pPr>
+              <a:spcBef>
+                <a:spcPts val="400"/>
+              </a:spcBef>
+            </a:pPr>
+            <a:r>
+              <a:rPr sz="1200">
+                <a:solidFill>
+                  <a:srgbClr val="202020"/>
+                </a:solidFill>
+              </a:rPr>
+              <a:t>E-coolant pump on 13L truck engine</a:t>
+            </a:r>
+          </a:p>
+          <a:p>
+            <a:pPr>
+              <a:spcBef>
+                <a:spcPts val="400"/>
+              </a:spcBef>
+            </a:pPr>
+            <a:r>
+              <a:rPr sz="1200">
+                <a:solidFill>
+                  <a:srgbClr val="202020"/>
+                </a:solidFill>
+              </a:rPr>
+              <a:t>saves just 0.71-0.94% (TU Graz 2021)</a:t>
+            </a:r>
+          </a:p>
+          <a:p>
+            <a:pPr>
+              <a:spcBef>
+                <a:spcPts val="400"/>
+              </a:spcBef>
+            </a:pPr>
+            <a:r>
+              <a:rPr sz="1200">
+                <a:solidFill>
+                  <a:srgbClr val="202020"/>
+                </a:solidFill>
+              </a:rPr>
+              <a:t>Variable pumps: ~1-1.5% verified vs</a:t>
+            </a:r>
+          </a:p>
+          <a:p>
+            <a:pPr>
+              <a:spcBef>
+                <a:spcPts val="400"/>
+              </a:spcBef>
+            </a:pPr>
+            <a:r>
+              <a:rPr sz="1200">
+                <a:solidFill>
+                  <a:srgbClr val="202020"/>
+                </a:solidFill>
+              </a:rPr>
+              <a:t>3-6% in industry marketing</a:t>
+            </a:r>
+          </a:p>
+          <a:p>
+            <a:pPr>
+              <a:spcBef>
+                <a:spcPts val="400"/>
+              </a:spcBef>
+            </a:pPr>
+            <a:r>
+              <a:rPr sz="1200">
+                <a:solidFill>
+                  <a:srgbClr val="202020"/>
+                </a:solidFill>
+              </a:rPr>
+              <a:t>Small lever → slow innovation</a:t>
             </a:r>
           </a:p>
         </p:txBody>
@@ -4826,8 +4828,138 @@
         </p:nvSpPr>
         <p:spPr>
           <a:xfrm>
-            <a:off x="6217920" y="1417320"/>
-            <a:ext cx="5532120" cy="5120640"/>
+            <a:off x="4297680" y="1417320"/>
+            <a:ext cx="3657600" cy="2834640"/>
+          </a:xfrm>
+          <a:prstGeom prst="rect">
+            <a:avLst/>
+          </a:prstGeom>
+          <a:solidFill>
+            <a:srgbClr val="F2F2F2"/>
+          </a:solidFill>
+          <a:ln w="15875">
+            <a:solidFill>
+              <a:srgbClr val="7F1D1D"/>
+            </a:solidFill>
+          </a:ln>
+        </p:spPr>
+        <p:txBody>
+          <a:bodyPr wrap="square" lIns="137160" rIns="137160" tIns="109728">
+            <a:spAutoFit/>
+          </a:bodyPr>
+          <a:lstStyle/>
+          <a:p>
+            <a:r>
+              <a:rPr sz="1500" b="1">
+                <a:solidFill>
+                  <a:srgbClr val="7F1D1D"/>
+                </a:solidFill>
+              </a:rPr>
+              <a:t>Regulation — Japan pushed least</a:t>
+            </a:r>
+          </a:p>
+          <a:p>
+            <a:pPr>
+              <a:spcBef>
+                <a:spcPts val="400"/>
+              </a:spcBef>
+            </a:pPr>
+            <a:r>
+              <a:rPr sz="1200">
+                <a:solidFill>
+                  <a:srgbClr val="202020"/>
+                </a:solidFill>
+              </a:rPr>
+              <a:t>US GEM: codified credits for</a:t>
+            </a:r>
+          </a:p>
+          <a:p>
+            <a:pPr>
+              <a:spcBef>
+                <a:spcPts val="400"/>
+              </a:spcBef>
+            </a:pPr>
+            <a:r>
+              <a:rPr sz="1200">
+                <a:solidFill>
+                  <a:srgbClr val="202020"/>
+                </a:solidFill>
+              </a:rPr>
+              <a:t>electric pumps (0.5-1 g/ton-mi)</a:t>
+            </a:r>
+          </a:p>
+          <a:p>
+            <a:pPr>
+              <a:spcBef>
+                <a:spcPts val="400"/>
+              </a:spcBef>
+            </a:pPr>
+            <a:r>
+              <a:rPr sz="1200">
+                <a:solidFill>
+                  <a:srgbClr val="202020"/>
+                </a:solidFill>
+              </a:rPr>
+              <a:t>EU VECTO: pump tech classes;</a:t>
+            </a:r>
+          </a:p>
+          <a:p>
+            <a:pPr>
+              <a:spcBef>
+                <a:spcPts val="400"/>
+              </a:spcBef>
+            </a:pPr>
+            <a:r>
+              <a:rPr sz="1200">
+                <a:solidFill>
+                  <a:srgbClr val="202020"/>
+                </a:solidFill>
+              </a:rPr>
+              <a:t>62.5% of fleet still fixed-displ.</a:t>
+            </a:r>
+          </a:p>
+          <a:p>
+            <a:pPr>
+              <a:spcBef>
+                <a:spcPts val="400"/>
+              </a:spcBef>
+            </a:pPr>
+            <a:r>
+              <a:rPr sz="1200">
+                <a:solidFill>
+                  <a:srgbClr val="202020"/>
+                </a:solidFill>
+              </a:rPr>
+              <a:t>Japan: NO accessory-level signal —</a:t>
+            </a:r>
+          </a:p>
+          <a:p>
+            <a:pPr>
+              <a:spcBef>
+                <a:spcPts val="400"/>
+              </a:spcBef>
+            </a:pPr>
+            <a:r>
+              <a:rPr sz="1200">
+                <a:solidFill>
+                  <a:srgbClr val="202020"/>
+                </a:solidFill>
+              </a:rPr>
+              <a:t>protected short-term, atrophied long-term</a:t>
+            </a:r>
+          </a:p>
+        </p:txBody>
+      </p:sp>
+      <p:sp>
+        <p:nvSpPr>
+          <p:cNvPr id="6" name="TextBox 5"/>
+          <p:cNvSpPr txBox="1"/>
+          <p:nvPr/>
+        </p:nvSpPr>
+        <p:spPr>
+          <a:xfrm>
+            <a:off x="8138160" y="1417320"/>
+            <a:ext cx="3611880" cy="2834640"/>
           </a:xfrm>
           <a:prstGeom prst="rect">
             <a:avLst/>
@@ -4853,112 +4985,297 @@
                   <a:srgbClr val="548235"/>
                 </a:solidFill>
               </a:rPr>
-              <a:t>PUMPS — mechanical → electric thermal management</a:t>
-            </a:r>
-          </a:p>
-          <a:p>
-            <a:pPr>
-              <a:spcBef>
-                <a:spcPts val="400"/>
-              </a:spcBef>
-            </a:pPr>
-            <a:r>
-              <a:rPr sz="1150">
-                <a:solidFill>
-                  <a:srgbClr val="202020"/>
-                </a:solidFill>
-              </a:rPr>
-              <a:t>Aisin: record ¥250bn R&amp;D plan; e-water/oil pumps + coolant valves inside the eAxle strategy</a:t>
-            </a:r>
-          </a:p>
-          <a:p>
-            <a:pPr>
-              <a:spcBef>
-                <a:spcPts val="400"/>
-              </a:spcBef>
-            </a:pPr>
-            <a:r>
-              <a:rPr sz="1150">
-                <a:solidFill>
-                  <a:srgbClr val="202020"/>
-                </a:solidFill>
-              </a:rPr>
-              <a:t>Mahle: thermal-management modules; €1.2bn BEV module order (2024) — largest in company history</a:t>
-            </a:r>
-          </a:p>
-          <a:p>
-            <a:pPr>
-              <a:spcBef>
-                <a:spcPts val="400"/>
-              </a:spcBef>
-            </a:pPr>
-            <a:r>
-              <a:rPr sz="1150">
-                <a:solidFill>
-                  <a:srgbClr val="202020"/>
-                </a:solidFill>
-              </a:rPr>
-              <a:t>Hanon: BEV heat pumps, CO2 refrigerant, e-coolant pumps (~4-6% of sales)</a:t>
-            </a:r>
-          </a:p>
-          <a:p>
-            <a:pPr>
-              <a:spcBef>
-                <a:spcPts val="400"/>
-              </a:spcBef>
-            </a:pPr>
-            <a:r>
-              <a:rPr sz="1150">
-                <a:solidFill>
-                  <a:srgbClr val="202020"/>
-                </a:solidFill>
-              </a:rPr>
-              <a:t>Mikuni (3x TBK's size): e-oil pump ALREADY in production for a Japanese small BEV truck</a:t>
-            </a:r>
-          </a:p>
-          <a:p>
-            <a:pPr>
-              <a:spcBef>
-                <a:spcPts val="400"/>
-              </a:spcBef>
-            </a:pPr>
-            <a:r>
-              <a:rPr sz="1150">
-                <a:solidFill>
-                  <a:srgbClr val="202020"/>
-                </a:solidFill>
-              </a:rPr>
-              <a:t>Yamada: e-water pumps shipping in Honda EVs/FCEVs (2024)</a:t>
-            </a:r>
-          </a:p>
-          <a:p>
-            <a:pPr>
-              <a:spcBef>
-                <a:spcPts val="400"/>
-              </a:spcBef>
-            </a:pPr>
-            <a:r>
-              <a:rPr sz="1150">
-                <a:solidFill>
-                  <a:srgbClr val="202020"/>
-                </a:solidFill>
-              </a:rPr>
-              <a:t>Concentric/Pierburg: 400-800V e-coolant pump families; e-products 24% of Concentric sales</a:t>
-            </a:r>
-          </a:p>
-          <a:p>
-            <a:pPr>
-              <a:spcBef>
-                <a:spcPts val="400"/>
-              </a:spcBef>
-            </a:pPr>
-            <a:r>
-              <a:rPr sz="1150">
-                <a:solidFill>
-                  <a:srgbClr val="202020"/>
-                </a:solidFill>
-              </a:rPr>
-              <a:t>The pattern: every pump peer redirected R&amp;D to electric pumps &amp; BEV thermal — the exact adjacency open to TBK</a:t>
+              <a:t>ZEV trucks — content multiplies</a:t>
+            </a:r>
+          </a:p>
+          <a:p>
+            <a:pPr>
+              <a:spcBef>
+                <a:spcPts val="400"/>
+              </a:spcBef>
+            </a:pPr>
+            <a:r>
+              <a:rPr sz="1200">
+                <a:solidFill>
+                  <a:srgbClr val="202020"/>
+                </a:solidFill>
+              </a:rPr>
+              <a:t>BEV: 2-4 coolant loops vs 1 pump</a:t>
+            </a:r>
+          </a:p>
+          <a:p>
+            <a:pPr>
+              <a:spcBef>
+                <a:spcPts val="400"/>
+              </a:spcBef>
+            </a:pPr>
+            <a:r>
+              <a:rPr sz="1200">
+                <a:solidFill>
+                  <a:srgbClr val="202020"/>
+                </a:solidFill>
+              </a:rPr>
+              <a:t>(battery &lt;40°C, motor ~85°C)</a:t>
+            </a:r>
+          </a:p>
+          <a:p>
+            <a:pPr>
+              <a:spcBef>
+                <a:spcPts val="400"/>
+              </a:spcBef>
+            </a:pPr>
+            <a:r>
+              <a:rPr sz="1200">
+                <a:solidFill>
+                  <a:srgbClr val="202020"/>
+                </a:solidFill>
+              </a:rPr>
+              <a:t>FCEV: 40-45% of fuel energy out</a:t>
+            </a:r>
+          </a:p>
+          <a:p>
+            <a:pPr>
+              <a:spcBef>
+                <a:spcPts val="400"/>
+              </a:spcBef>
+            </a:pPr>
+            <a:r>
+              <a:rPr sz="1200">
+                <a:solidFill>
+                  <a:srgbClr val="202020"/>
+                </a:solidFill>
+              </a:rPr>
+              <a:t>via coolant; 1.5-2x heat exchanger</a:t>
+            </a:r>
+          </a:p>
+          <a:p>
+            <a:pPr>
+              <a:spcBef>
+                <a:spcPts val="400"/>
+              </a:spcBef>
+            </a:pPr>
+            <a:r>
+              <a:rPr sz="1200">
+                <a:solidFill>
+                  <a:srgbClr val="202020"/>
+                </a:solidFill>
+              </a:rPr>
+              <a:t>HV e-pump ≈ 4-8x unit value</a:t>
+            </a:r>
+          </a:p>
+          <a:p>
+            <a:pPr>
+              <a:spcBef>
+                <a:spcPts val="400"/>
+              </a:spcBef>
+            </a:pPr>
+            <a:r>
+              <a:rPr sz="1200">
+                <a:solidFill>
+                  <a:srgbClr val="202020"/>
+                </a:solidFill>
+              </a:rPr>
+              <a:t>→ content/vehicle ~8-30x diesel</a:t>
+            </a:r>
+          </a:p>
+        </p:txBody>
+      </p:sp>
+      <p:sp>
+        <p:nvSpPr>
+          <p:cNvPr id="7" name="TextBox 6"/>
+          <p:cNvSpPr txBox="1"/>
+          <p:nvPr/>
+        </p:nvSpPr>
+        <p:spPr>
+          <a:xfrm>
+            <a:off x="457200" y="4434840"/>
+            <a:ext cx="5577840" cy="2103120"/>
+          </a:xfrm>
+          <a:prstGeom prst="rect">
+            <a:avLst/>
+          </a:prstGeom>
+          <a:solidFill>
+            <a:srgbClr val="F2F2F2"/>
+          </a:solidFill>
+          <a:ln w="15875">
+            <a:solidFill>
+              <a:srgbClr val="7F1D1D"/>
+            </a:solidFill>
+          </a:ln>
+        </p:spPr>
+        <p:txBody>
+          <a:bodyPr wrap="square" lIns="137160" rIns="137160" tIns="109728">
+            <a:spAutoFit/>
+          </a:bodyPr>
+          <a:lstStyle/>
+          <a:p>
+            <a:r>
+              <a:rPr sz="1500" b="1">
+                <a:solidFill>
+                  <a:srgbClr val="7F1D1D"/>
+                </a:solidFill>
+              </a:rPr>
+              <a:t>The adversarial record on ICE pumps</a:t>
+            </a:r>
+          </a:p>
+          <a:p>
+            <a:pPr>
+              <a:spcBef>
+                <a:spcPts val="400"/>
+              </a:spcBef>
+            </a:pPr>
+            <a:r>
+              <a:rPr sz="1200">
+                <a:solidFill>
+                  <a:srgbClr val="202020"/>
+                </a:solidFill>
+              </a:rPr>
+              <a:t>Rheinmetall sold Pierburg (€2bn rev) for €350M ≈ 0.18x sales, after ~€550M impairments</a:t>
+            </a:r>
+          </a:p>
+          <a:p>
+            <a:pPr>
+              <a:spcBef>
+                <a:spcPts val="400"/>
+              </a:spcBef>
+            </a:pPr>
+            <a:r>
+              <a:rPr sz="1200">
+                <a:solidFill>
+                  <a:srgbClr val="202020"/>
+                </a:solidFill>
+              </a:rPr>
+              <a:t>Dayco carved out OE engine components; SHW cites Asian entrants + price-downs</a:t>
+            </a:r>
+          </a:p>
+          <a:p>
+            <a:pPr>
+              <a:spcBef>
+                <a:spcPts val="400"/>
+              </a:spcBef>
+            </a:pPr>
+            <a:r>
+              <a:rPr sz="1200">
+                <a:solidFill>
+                  <a:srgbClr val="202020"/>
+                </a:solidFill>
+              </a:rPr>
+              <a:t>Hanon forced to unwind flattering R&amp;D capitalization</a:t>
+            </a:r>
+          </a:p>
+          <a:p>
+            <a:pPr>
+              <a:spcBef>
+                <a:spcPts val="400"/>
+              </a:spcBef>
+            </a:pPr>
+            <a:r>
+              <a:rPr sz="1200">
+                <a:solidFill>
+                  <a:srgbClr val="202020"/>
+                </a:solidFill>
+              </a:rPr>
+              <a:t>EC antitrust (M.8102): pump niches at 90-100% concentration — sockets are sticky</a:t>
+            </a:r>
+          </a:p>
+        </p:txBody>
+      </p:sp>
+      <p:sp>
+        <p:nvSpPr>
+          <p:cNvPr id="8" name="TextBox 7"/>
+          <p:cNvSpPr txBox="1"/>
+          <p:nvPr/>
+        </p:nvSpPr>
+        <p:spPr>
+          <a:xfrm>
+            <a:off x="6217920" y="4434840"/>
+            <a:ext cx="5532120" cy="2103120"/>
+          </a:xfrm>
+          <a:prstGeom prst="rect">
+            <a:avLst/>
+          </a:prstGeom>
+          <a:solidFill>
+            <a:srgbClr val="F2F2F2"/>
+          </a:solidFill>
+          <a:ln w="15875">
+            <a:solidFill>
+              <a:srgbClr val="548235"/>
+            </a:solidFill>
+          </a:ln>
+        </p:spPr>
+        <p:txBody>
+          <a:bodyPr wrap="square" lIns="137160" rIns="137160" tIns="109728">
+            <a:spAutoFit/>
+          </a:bodyPr>
+          <a:lstStyle/>
+          <a:p>
+            <a:r>
+              <a:rPr sz="1500" b="1">
+                <a:solidFill>
+                  <a:srgbClr val="548235"/>
+                </a:solidFill>
+              </a:rPr>
+              <a:t>Japan: slow melt, early sockets</a:t>
+            </a:r>
+          </a:p>
+          <a:p>
+            <a:pPr>
+              <a:spcBef>
+                <a:spcPts val="400"/>
+              </a:spcBef>
+            </a:pPr>
+            <a:r>
+              <a:rPr sz="1200">
+                <a:solidFill>
+                  <a:srgbClr val="202020"/>
+                </a:solidFill>
+              </a:rPr>
+              <a:t>TBK's own filing: EV shift in buses/small-medium trucks may cut pump demand</a:t>
+            </a:r>
+          </a:p>
+          <a:p>
+            <a:pPr>
+              <a:spcBef>
+                <a:spcPts val="400"/>
+              </a:spcBef>
+            </a:pPr>
+            <a:r>
+              <a:rPr sz="1200">
+                <a:solidFill>
+                  <a:srgbClr val="202020"/>
+                </a:solidFill>
+              </a:rPr>
+              <a:t>BEV truck volumes tiny today (Dutro Z EV: ~400 units yr 1) — diesel persists past 2030</a:t>
+            </a:r>
+          </a:p>
+          <a:p>
+            <a:pPr>
+              <a:spcBef>
+                <a:spcPts val="400"/>
+              </a:spcBef>
+            </a:pPr>
+            <a:r>
+              <a:rPr sz="1200">
+                <a:solidFill>
+                  <a:srgbClr val="202020"/>
+                </a:solidFill>
+              </a:rPr>
+              <a:t>BUT: Mikuni already produces e-oil pumps for a domestic small BEV truck (2022)</a:t>
+            </a:r>
+          </a:p>
+          <a:p>
+            <a:pPr>
+              <a:spcBef>
+                <a:spcPts val="400"/>
+              </a:spcBef>
+            </a:pPr>
+            <a:r>
+              <a:rPr sz="1200">
+                <a:solidFill>
+                  <a:srgbClr val="202020"/>
+                </a:solidFill>
+              </a:rPr>
+              <a:t>Sockets are awarded years before volume (Pierburg order book runs 2028-35)</a:t>
             </a:r>
           </a:p>
         </p:txBody>
@@ -5011,6 +5328,719 @@
                   <a:srgbClr val="FFFFFF"/>
                 </a:solidFill>
               </a:rPr>
+              <a:t>Same customers — two different purchase decisions</a:t>
+            </a:r>
+          </a:p>
+        </p:txBody>
+      </p:sp>
+      <p:sp>
+        <p:nvSpPr>
+          <p:cNvPr id="3" name="TextBox 2"/>
+          <p:cNvSpPr txBox="1"/>
+          <p:nvPr/>
+        </p:nvSpPr>
+        <p:spPr>
+          <a:xfrm>
+            <a:off x="457200" y="914400"/>
+            <a:ext cx="11247120" cy="365760"/>
+          </a:xfrm>
+          <a:prstGeom prst="rect">
+            <a:avLst/>
+          </a:prstGeom>
+          <a:noFill/>
+        </p:spPr>
+        <p:txBody>
+          <a:bodyPr wrap="square">
+            <a:spAutoFit/>
+          </a:bodyPr>
+          <a:lstStyle/>
+          <a:p>
+            <a:pPr algn="l"/>
+            <a:r>
+              <a:rPr sz="1200" b="0">
+                <a:solidFill>
+                  <a:srgbClr val="595959"/>
+                </a:solidFill>
+              </a:rPr>
+              <a:t>Isuzu, Fuso, Hino, Komatsu buy both product lines, but through different people, cycles, and triggers</a:t>
+            </a:r>
+          </a:p>
+        </p:txBody>
+      </p:sp>
+      <p:sp>
+        <p:nvSpPr>
+          <p:cNvPr id="4" name="TextBox 3"/>
+          <p:cNvSpPr txBox="1"/>
+          <p:nvPr/>
+        </p:nvSpPr>
+        <p:spPr>
+          <a:xfrm>
+            <a:off x="457200" y="1417320"/>
+            <a:ext cx="5577840" cy="3657600"/>
+          </a:xfrm>
+          <a:prstGeom prst="rect">
+            <a:avLst/>
+          </a:prstGeom>
+          <a:solidFill>
+            <a:srgbClr val="F2F2F2"/>
+          </a:solidFill>
+          <a:ln w="15875">
+            <a:solidFill>
+              <a:srgbClr val="1F4E78"/>
+            </a:solidFill>
+          </a:ln>
+        </p:spPr>
+        <p:txBody>
+          <a:bodyPr wrap="square" lIns="137160" rIns="137160" tIns="109728">
+            <a:spAutoFit/>
+          </a:bodyPr>
+          <a:lstStyle/>
+          <a:p>
+            <a:r>
+              <a:rPr sz="1500" b="1">
+                <a:solidFill>
+                  <a:srgbClr val="1F4E78"/>
+                </a:solidFill>
+              </a:rPr>
+              <a:t>BRAKES — safety &amp; chassis domain</a:t>
+            </a:r>
+          </a:p>
+          <a:p>
+            <a:pPr>
+              <a:spcBef>
+                <a:spcPts val="400"/>
+              </a:spcBef>
+            </a:pPr>
+            <a:r>
+              <a:rPr sz="1200">
+                <a:solidFill>
+                  <a:srgbClr val="202020"/>
+                </a:solidFill>
+              </a:rPr>
+              <a:t>Decision owners: chassis/safety engineering + homologation, OEM-wide platform decisions</a:t>
+            </a:r>
+          </a:p>
+          <a:p>
+            <a:pPr>
+              <a:spcBef>
+                <a:spcPts val="400"/>
+              </a:spcBef>
+            </a:pPr>
+            <a:r>
+              <a:rPr sz="1200">
+                <a:solidFill>
+                  <a:srgbClr val="202020"/>
+                </a:solidFill>
+              </a:rPr>
+              <a:t>Trigger: regulation (stopping distance, EBS/AEB, brake dust) and platform renewals — spec flips are abrupt and fleet-wide (Europe converted in ~5 yrs)</a:t>
+            </a:r>
+          </a:p>
+          <a:p>
+            <a:pPr>
+              <a:spcBef>
+                <a:spcPts val="400"/>
+              </a:spcBef>
+            </a:pPr>
+            <a:r>
+              <a:rPr sz="1200">
+                <a:solidFill>
+                  <a:srgbClr val="202020"/>
+                </a:solidFill>
+              </a:rPr>
+              <a:t>Cycle: long platform homologation; switching mid-cycle is rare → incumbent until the flip, then winner-takes-platform</a:t>
+            </a:r>
+          </a:p>
+          <a:p>
+            <a:pPr>
+              <a:spcBef>
+                <a:spcPts val="400"/>
+              </a:spcBef>
+            </a:pPr>
+            <a:r>
+              <a:rPr sz="1200">
+                <a:solidFill>
+                  <a:srgbClr val="202020"/>
+                </a:solidFill>
+              </a:rPr>
+              <a:t>Revenue model: aftermarket-heavy (wear parts annuity) — but discs + regen shrink friction events</a:t>
+            </a:r>
+          </a:p>
+          <a:p>
+            <a:pPr>
+              <a:spcBef>
+                <a:spcPts val="400"/>
+              </a:spcBef>
+            </a:pPr>
+            <a:r>
+              <a:rPr sz="1200">
+                <a:solidFill>
+                  <a:srgbClr val="202020"/>
+                </a:solidFill>
+              </a:rPr>
+              <a:t>TBK sales motion: defend drum platforms while qualifying ADB for the domestic disc flip; access EBS/systems layer via Brakes India alliance</a:t>
+            </a:r>
+          </a:p>
+        </p:txBody>
+      </p:sp>
+      <p:sp>
+        <p:nvSpPr>
+          <p:cNvPr id="5" name="TextBox 4"/>
+          <p:cNvSpPr txBox="1"/>
+          <p:nvPr/>
+        </p:nvSpPr>
+        <p:spPr>
+          <a:xfrm>
+            <a:off x="6217920" y="1417320"/>
+            <a:ext cx="5532120" cy="3657600"/>
+          </a:xfrm>
+          <a:prstGeom prst="rect">
+            <a:avLst/>
+          </a:prstGeom>
+          <a:solidFill>
+            <a:srgbClr val="F2F2F2"/>
+          </a:solidFill>
+          <a:ln w="15875">
+            <a:solidFill>
+              <a:srgbClr val="548235"/>
+            </a:solidFill>
+          </a:ln>
+        </p:spPr>
+        <p:txBody>
+          <a:bodyPr wrap="square" lIns="137160" rIns="137160" tIns="109728">
+            <a:spAutoFit/>
+          </a:bodyPr>
+          <a:lstStyle/>
+          <a:p>
+            <a:r>
+              <a:rPr sz="1500" b="1">
+                <a:solidFill>
+                  <a:srgbClr val="548235"/>
+                </a:solidFill>
+              </a:rPr>
+              <a:t>PUMPS — powertrain &amp; thermal domain</a:t>
+            </a:r>
+          </a:p>
+          <a:p>
+            <a:pPr>
+              <a:spcBef>
+                <a:spcPts val="400"/>
+              </a:spcBef>
+            </a:pPr>
+            <a:r>
+              <a:rPr sz="1200">
+                <a:solidFill>
+                  <a:srgbClr val="202020"/>
+                </a:solidFill>
+              </a:rPr>
+              <a:t>Decision owners: engine/e-powertrain and thermal-architecture teams, decided at program kick-off per powertrain program</a:t>
+            </a:r>
+          </a:p>
+          <a:p>
+            <a:pPr>
+              <a:spcBef>
+                <a:spcPts val="400"/>
+              </a:spcBef>
+            </a:pPr>
+            <a:r>
+              <a:rPr sz="1200">
+                <a:solidFill>
+                  <a:srgbClr val="202020"/>
+                </a:solidFill>
+              </a:rPr>
+              <a:t>Trigger: efficiency/cost in ICE era (weak in Japan — no regulatory credit); now EV thermal architecture awards 2-4 sockets at once</a:t>
+            </a:r>
+          </a:p>
+          <a:p>
+            <a:pPr>
+              <a:spcBef>
+                <a:spcPts val="400"/>
+              </a:spcBef>
+            </a:pPr>
+            <a:r>
+              <a:rPr sz="1200">
+                <a:solidFill>
+                  <a:srgbClr val="202020"/>
+                </a:solidFill>
+              </a:rPr>
+              <a:t>Cycle: sockets fixed years before volume (orders running 2028-35 signed now); concentrated niches — share lost is rarely regained</a:t>
+            </a:r>
+          </a:p>
+          <a:p>
+            <a:pPr>
+              <a:spcBef>
+                <a:spcPts val="400"/>
+              </a:spcBef>
+            </a:pPr>
+            <a:r>
+              <a:rPr sz="1200">
+                <a:solidFill>
+                  <a:srgbClr val="202020"/>
+                </a:solidFill>
+              </a:rPr>
+              <a:t>Revenue model: OE-heavy, little aftermarket (pumps last engine life) — value is in content growth per vehicle, not wear parts</a:t>
+            </a:r>
+          </a:p>
+          <a:p>
+            <a:pPr>
+              <a:spcBef>
+                <a:spcPts val="400"/>
+              </a:spcBef>
+            </a:pPr>
+            <a:r>
+              <a:rPr sz="1200">
+                <a:solidFill>
+                  <a:srgbClr val="202020"/>
+                </a:solidFill>
+              </a:rPr>
+              <a:t>TBK sales motion: convert dominant mechanical-pump incumbency into e-pump/TCU sockets on Isuzu/Fuso/Hino EV &amp; FC programs before Mikuni/Yamada lock them</a:t>
+            </a:r>
+          </a:p>
+        </p:txBody>
+      </p:sp>
+      <p:sp>
+        <p:nvSpPr>
+          <p:cNvPr id="6" name="TextBox 5"/>
+          <p:cNvSpPr txBox="1"/>
+          <p:nvPr/>
+        </p:nvSpPr>
+        <p:spPr>
+          <a:xfrm>
+            <a:off x="457200" y="5257800"/>
+            <a:ext cx="11247120" cy="1371600"/>
+          </a:xfrm>
+          <a:prstGeom prst="rect">
+            <a:avLst/>
+          </a:prstGeom>
+          <a:noFill/>
+        </p:spPr>
+        <p:txBody>
+          <a:bodyPr wrap="square">
+            <a:spAutoFit/>
+          </a:bodyPr>
+          <a:lstStyle/>
+          <a:p>
+            <a:pPr algn="l"/>
+            <a:r>
+              <a:rPr sz="1300" b="1">
+                <a:solidFill>
+                  <a:srgbClr val="1F4E78"/>
+                </a:solidFill>
+              </a:rPr>
+              <a:t>Implication: one customer list, two sales motions and two R&amp;D programs. Brake timing is regulatory/platform-driven (defend + be ready for the flip); pump timing is program-driven and running NOW (sockets being awarded while diesel volume still pays the bills). TBK must be present in both rooms at the same OEMs — chassis engineering for ADB, thermal/e-powertrain teams for e-pumps — which argues for ring-fenced teams and budgets per domain, not one shared engineering pool.</a:t>
+            </a:r>
+          </a:p>
+        </p:txBody>
+      </p:sp>
+    </p:spTree>
+  </p:cSld>
+  <p:clrMapOvr>
+    <a:masterClrMapping/>
+  </p:clrMapOvr>
+</p:sld>
+</file>
+
+<file path=ppt/slides/slide5.xml><?xml version="1.0" encoding="utf-8"?>
+<p:sld xmlns:a="http://schemas.openxmlformats.org/drawingml/2006/main" xmlns:p="http://schemas.openxmlformats.org/presentationml/2006/main" xmlns:r="http://schemas.openxmlformats.org/officeDocument/2006/relationships">
+  <p:cSld>
+    <p:spTree>
+      <p:nvGrpSpPr>
+        <p:cNvPr id="1" name=""/>
+        <p:cNvGrpSpPr/>
+        <p:nvPr/>
+      </p:nvGrpSpPr>
+      <p:grpSpPr/>
+      <p:sp>
+        <p:nvSpPr>
+          <p:cNvPr id="2" name="TextBox 1"/>
+          <p:cNvSpPr txBox="1"/>
+          <p:nvPr/>
+        </p:nvSpPr>
+        <p:spPr>
+          <a:xfrm>
+            <a:off x="0" y="0"/>
+            <a:ext cx="12191695" cy="868680"/>
+          </a:xfrm>
+          <a:prstGeom prst="rect">
+            <a:avLst/>
+          </a:prstGeom>
+          <a:solidFill>
+            <a:srgbClr val="1F4E78"/>
+          </a:solidFill>
+        </p:spPr>
+        <p:txBody>
+          <a:bodyPr wrap="square" lIns="457200" tIns="164592">
+            <a:spAutoFit/>
+          </a:bodyPr>
+          <a:lstStyle/>
+          <a:p>
+            <a:r>
+              <a:rPr sz="2600" b="1">
+                <a:solidFill>
+                  <a:srgbClr val="FFFFFF"/>
+                </a:solidFill>
+              </a:rPr>
+              <a:t>Competitors kept innovating — in brakes and in pumps</a:t>
+            </a:r>
+          </a:p>
+        </p:txBody>
+      </p:sp>
+      <p:sp>
+        <p:nvSpPr>
+          <p:cNvPr id="3" name="TextBox 2"/>
+          <p:cNvSpPr txBox="1"/>
+          <p:nvPr/>
+        </p:nvSpPr>
+        <p:spPr>
+          <a:xfrm>
+            <a:off x="457200" y="914400"/>
+            <a:ext cx="11247120" cy="365760"/>
+          </a:xfrm>
+          <a:prstGeom prst="rect">
+            <a:avLst/>
+          </a:prstGeom>
+          <a:noFill/>
+        </p:spPr>
+        <p:txBody>
+          <a:bodyPr wrap="square">
+            <a:spAutoFit/>
+          </a:bodyPr>
+          <a:lstStyle/>
+          <a:p>
+            <a:pPr algn="l"/>
+            <a:r>
+              <a:rPr sz="1200" b="0">
+                <a:solidFill>
+                  <a:srgbClr val="595959"/>
+                </a:solidFill>
+              </a:rPr>
+              <a:t>Every relevant peer has repositioned its product line for discs, electronics, and electrification</a:t>
+            </a:r>
+          </a:p>
+        </p:txBody>
+      </p:sp>
+      <p:sp>
+        <p:nvSpPr>
+          <p:cNvPr id="4" name="TextBox 3"/>
+          <p:cNvSpPr txBox="1"/>
+          <p:nvPr/>
+        </p:nvSpPr>
+        <p:spPr>
+          <a:xfrm>
+            <a:off x="457200" y="1417320"/>
+            <a:ext cx="5577840" cy="5120640"/>
+          </a:xfrm>
+          <a:prstGeom prst="rect">
+            <a:avLst/>
+          </a:prstGeom>
+          <a:solidFill>
+            <a:srgbClr val="F2F2F2"/>
+          </a:solidFill>
+          <a:ln w="15875">
+            <a:solidFill>
+              <a:srgbClr val="1F4E78"/>
+            </a:solidFill>
+          </a:ln>
+        </p:spPr>
+        <p:txBody>
+          <a:bodyPr wrap="square" lIns="137160" rIns="137160" tIns="109728">
+            <a:spAutoFit/>
+          </a:bodyPr>
+          <a:lstStyle/>
+          <a:p>
+            <a:r>
+              <a:rPr sz="1500" b="1">
+                <a:solidFill>
+                  <a:srgbClr val="1F4E78"/>
+                </a:solidFill>
+              </a:rPr>
+              <a:t>BRAKES — from castings to systems</a:t>
+            </a:r>
+          </a:p>
+          <a:p>
+            <a:pPr>
+              <a:spcBef>
+                <a:spcPts val="400"/>
+              </a:spcBef>
+            </a:pPr>
+            <a:r>
+              <a:rPr sz="1150">
+                <a:solidFill>
+                  <a:srgbClr val="202020"/>
+                </a:solidFill>
+              </a:rPr>
+              <a:t>Knorr-Bremse/Bendix: ADB standard on Peterbilt/Kenworth steer axles (2013); ~20M discs in field; Global Scalable Brake Control platform; driverless-truck braking (ATLAS-L4)</a:t>
+            </a:r>
+          </a:p>
+          <a:p>
+            <a:pPr>
+              <a:spcBef>
+                <a:spcPts val="400"/>
+              </a:spcBef>
+            </a:pPr>
+            <a:r>
+              <a:rPr sz="1150">
+                <a:solidFill>
+                  <a:srgbClr val="202020"/>
+                </a:solidFill>
+              </a:rPr>
+              <a:t>ZF/Wabco: EBS + ADAS integration; $7bn acquisition built the #2 systems house</a:t>
+            </a:r>
+          </a:p>
+          <a:p>
+            <a:pPr>
+              <a:spcBef>
+                <a:spcPts val="400"/>
+              </a:spcBef>
+            </a:pPr>
+            <a:r>
+              <a:rPr sz="1150">
+                <a:solidFill>
+                  <a:srgbClr val="202020"/>
+                </a:solidFill>
+              </a:rPr>
+              <a:t>Brembo: Sensify brake-by-wire; 6.1% of sales into R&amp;D</a:t>
+            </a:r>
+          </a:p>
+          <a:p>
+            <a:pPr>
+              <a:spcBef>
+                <a:spcPts val="400"/>
+              </a:spcBef>
+            </a:pPr>
+            <a:r>
+              <a:rPr sz="1150">
+                <a:solidFill>
+                  <a:srgbClr val="202020"/>
+                </a:solidFill>
+              </a:rPr>
+              <a:t>Akebono: electro-mechanical brakes (EMB) + copper-free friction — spending up despite losses</a:t>
+            </a:r>
+          </a:p>
+          <a:p>
+            <a:pPr>
+              <a:spcBef>
+                <a:spcPts val="400"/>
+              </a:spcBef>
+            </a:pPr>
+            <a:r>
+              <a:rPr sz="1150">
+                <a:solidFill>
+                  <a:srgbClr val="202020"/>
+                </a:solidFill>
+              </a:rPr>
+              <a:t>SAF-Holland/Haldex: trailer ADB + EBS at low cost</a:t>
+            </a:r>
+          </a:p>
+          <a:p>
+            <a:pPr>
+              <a:spcBef>
+                <a:spcPts val="400"/>
+              </a:spcBef>
+            </a:pPr>
+            <a:r>
+              <a:rPr sz="1150">
+                <a:solidFill>
+                  <a:srgbClr val="202020"/>
+                </a:solidFill>
+              </a:rPr>
+              <a:t>Consolidation priced the lesson: Haldex sold at HALF Knorr-Bremse's blocked 2017 offer after staying sub-scale</a:t>
+            </a:r>
+          </a:p>
+        </p:txBody>
+      </p:sp>
+      <p:sp>
+        <p:nvSpPr>
+          <p:cNvPr id="5" name="TextBox 4"/>
+          <p:cNvSpPr txBox="1"/>
+          <p:nvPr/>
+        </p:nvSpPr>
+        <p:spPr>
+          <a:xfrm>
+            <a:off x="6217920" y="1417320"/>
+            <a:ext cx="5532120" cy="5120640"/>
+          </a:xfrm>
+          <a:prstGeom prst="rect">
+            <a:avLst/>
+          </a:prstGeom>
+          <a:solidFill>
+            <a:srgbClr val="F2F2F2"/>
+          </a:solidFill>
+          <a:ln w="15875">
+            <a:solidFill>
+              <a:srgbClr val="548235"/>
+            </a:solidFill>
+          </a:ln>
+        </p:spPr>
+        <p:txBody>
+          <a:bodyPr wrap="square" lIns="137160" rIns="137160" tIns="109728">
+            <a:spAutoFit/>
+          </a:bodyPr>
+          <a:lstStyle/>
+          <a:p>
+            <a:r>
+              <a:rPr sz="1500" b="1">
+                <a:solidFill>
+                  <a:srgbClr val="548235"/>
+                </a:solidFill>
+              </a:rPr>
+              <a:t>PUMPS — mechanical → electric thermal management</a:t>
+            </a:r>
+          </a:p>
+          <a:p>
+            <a:pPr>
+              <a:spcBef>
+                <a:spcPts val="400"/>
+              </a:spcBef>
+            </a:pPr>
+            <a:r>
+              <a:rPr sz="1150">
+                <a:solidFill>
+                  <a:srgbClr val="202020"/>
+                </a:solidFill>
+              </a:rPr>
+              <a:t>Aisin: record ¥250bn R&amp;D plan; e-water/oil pumps + coolant valves inside the eAxle strategy</a:t>
+            </a:r>
+          </a:p>
+          <a:p>
+            <a:pPr>
+              <a:spcBef>
+                <a:spcPts val="400"/>
+              </a:spcBef>
+            </a:pPr>
+            <a:r>
+              <a:rPr sz="1150">
+                <a:solidFill>
+                  <a:srgbClr val="202020"/>
+                </a:solidFill>
+              </a:rPr>
+              <a:t>Mahle: thermal-management modules; €1.2bn BEV module order (2024) — largest in company history</a:t>
+            </a:r>
+          </a:p>
+          <a:p>
+            <a:pPr>
+              <a:spcBef>
+                <a:spcPts val="400"/>
+              </a:spcBef>
+            </a:pPr>
+            <a:r>
+              <a:rPr sz="1150">
+                <a:solidFill>
+                  <a:srgbClr val="202020"/>
+                </a:solidFill>
+              </a:rPr>
+              <a:t>Hanon: BEV heat pumps, CO2 refrigerant, e-coolant pumps (~4-6% of sales)</a:t>
+            </a:r>
+          </a:p>
+          <a:p>
+            <a:pPr>
+              <a:spcBef>
+                <a:spcPts val="400"/>
+              </a:spcBef>
+            </a:pPr>
+            <a:r>
+              <a:rPr sz="1150">
+                <a:solidFill>
+                  <a:srgbClr val="202020"/>
+                </a:solidFill>
+              </a:rPr>
+              <a:t>Mikuni (3x TBK's size): e-oil pump ALREADY in production for a Japanese small BEV truck</a:t>
+            </a:r>
+          </a:p>
+          <a:p>
+            <a:pPr>
+              <a:spcBef>
+                <a:spcPts val="400"/>
+              </a:spcBef>
+            </a:pPr>
+            <a:r>
+              <a:rPr sz="1150">
+                <a:solidFill>
+                  <a:srgbClr val="202020"/>
+                </a:solidFill>
+              </a:rPr>
+              <a:t>Yamada: e-water pumps shipping in Honda EVs/FCEVs (2024)</a:t>
+            </a:r>
+          </a:p>
+          <a:p>
+            <a:pPr>
+              <a:spcBef>
+                <a:spcPts val="400"/>
+              </a:spcBef>
+            </a:pPr>
+            <a:r>
+              <a:rPr sz="1150">
+                <a:solidFill>
+                  <a:srgbClr val="202020"/>
+                </a:solidFill>
+              </a:rPr>
+              <a:t>Concentric/Pierburg: 400-800V e-coolant pump families; e-products 24% of Concentric sales</a:t>
+            </a:r>
+          </a:p>
+          <a:p>
+            <a:pPr>
+              <a:spcBef>
+                <a:spcPts val="400"/>
+              </a:spcBef>
+            </a:pPr>
+            <a:r>
+              <a:rPr sz="1150">
+                <a:solidFill>
+                  <a:srgbClr val="202020"/>
+                </a:solidFill>
+              </a:rPr>
+              <a:t>The pattern: every pump peer redirected R&amp;D to electric pumps &amp; BEV thermal — the exact adjacency open to TBK</a:t>
+            </a:r>
+          </a:p>
+        </p:txBody>
+      </p:sp>
+    </p:spTree>
+  </p:cSld>
+  <p:clrMapOvr>
+    <a:masterClrMapping/>
+  </p:clrMapOvr>
+</p:sld>
+</file>
+
+<file path=ppt/slides/slide6.xml><?xml version="1.0" encoding="utf-8"?>
+<p:sld xmlns:a="http://schemas.openxmlformats.org/drawingml/2006/main" xmlns:p="http://schemas.openxmlformats.org/presentationml/2006/main" xmlns:r="http://schemas.openxmlformats.org/officeDocument/2006/relationships">
+  <p:cSld>
+    <p:spTree>
+      <p:nvGrpSpPr>
+        <p:cNvPr id="1" name=""/>
+        <p:cNvGrpSpPr/>
+        <p:nvPr/>
+      </p:nvGrpSpPr>
+      <p:grpSpPr/>
+      <p:sp>
+        <p:nvSpPr>
+          <p:cNvPr id="2" name="TextBox 1"/>
+          <p:cNvSpPr txBox="1"/>
+          <p:nvPr/>
+        </p:nvSpPr>
+        <p:spPr>
+          <a:xfrm>
+            <a:off x="0" y="0"/>
+            <a:ext cx="12191695" cy="868680"/>
+          </a:xfrm>
+          <a:prstGeom prst="rect">
+            <a:avLst/>
+          </a:prstGeom>
+          <a:solidFill>
+            <a:srgbClr val="1F4E78"/>
+          </a:solidFill>
+        </p:spPr>
+        <p:txBody>
+          <a:bodyPr wrap="square" lIns="457200" tIns="164592">
+            <a:spAutoFit/>
+          </a:bodyPr>
+          <a:lstStyle/>
+          <a:p>
+            <a:r>
+              <a:rPr sz="2600" b="1">
+                <a:solidFill>
+                  <a:srgbClr val="FFFFFF"/>
+                </a:solidFill>
+              </a:rPr>
               <a:t>What competitors spend on R&amp;D</a:t>
             </a:r>
           </a:p>
@@ -5287,7 +6317,7 @@
                   <a:srgbClr val="595959"/>
                 </a:solidFill>
               </a:rPr>
-              <a:t>Brake systems players spend 6-9% of sales; pump/thermal players cluster at 4-5.5%. TBK sits at 2.2% — trailer-parts intensity, while facing a systems transition. *Hanon shown mid-range of conflicting filings; Concentric per secondary source.</a:t>
+              <a:t>Brake systems players spend 6-9% of sales; pump/thermal players cluster at 4-5.5%. TBK sits at 2.2% — trailer-parts intensity, while facing a systems transition in brakes AND a socket race in pumps. *Hanon mid-range of conflicting filings; Concentric per secondary source.</a:t>
             </a:r>
           </a:p>
         </p:txBody>
@@ -5300,7 +6330,7 @@
 </p:sld>
 </file>
 
-<file path=ppt/slides/slide5.xml><?xml version="1.0" encoding="utf-8"?>
+<file path=ppt/slides/slide7.xml><?xml version="1.0" encoding="utf-8"?>
 <p:sld xmlns:a="http://schemas.openxmlformats.org/drawingml/2006/main" xmlns:p="http://schemas.openxmlformats.org/presentationml/2006/main" xmlns:r="http://schemas.openxmlformats.org/officeDocument/2006/relationships">
   <p:cSld>
     <p:spTree>
@@ -5620,7 +6650,7 @@
 </p:sld>
 </file>
 
-<file path=ppt/slides/slide6.xml><?xml version="1.0" encoding="utf-8"?>
+<file path=ppt/slides/slide8.xml><?xml version="1.0" encoding="utf-8"?>
 <p:sld xmlns:a="http://schemas.openxmlformats.org/drawingml/2006/main" xmlns:p="http://schemas.openxmlformats.org/presentationml/2006/main" xmlns:r="http://schemas.openxmlformats.org/officeDocument/2006/relationships">
   <p:cSld>
     <p:spTree>
@@ -5827,7 +6857,7 @@
                   <a:srgbClr val="202020"/>
                 </a:solidFill>
               </a:rPr>
-              <a:t>~$50M targeted at ADB</a:t>
+              <a:t>~$50M split between ADB</a:t>
             </a:r>
           </a:p>
           <a:p>
@@ -5842,7 +6872,22 @@
                   <a:srgbClr val="202020"/>
                 </a:solidFill>
               </a:rPr>
-              <a:t>industrialization + e-pumps)</a:t>
+              <a:t>industrialization and e-pump/TCU</a:t>
+            </a:r>
+          </a:p>
+          <a:p>
+            <a:pPr>
+              <a:spcBef>
+                <a:spcPts val="400"/>
+              </a:spcBef>
+            </a:pPr>
+            <a:r>
+              <a:rPr sz="1200">
+                <a:solidFill>
+                  <a:srgbClr val="202020"/>
+                </a:solidFill>
+              </a:rPr>
+              <a:t>programs)</a:t>
             </a:r>
           </a:p>
           <a:p>
@@ -5980,7 +7025,7 @@
                   <a:srgbClr val="595959"/>
                 </a:solidFill>
               </a:rPr>
-              <a:t>Allocation discipline is the condition: gate the catch-up to (1) air disc brake industrialization for the Japanese OEM transition and (2) electric water/oil pumps — the two niches where Mikuni/Yamada-scale budgets demonstrably win sockets. Systems/ADAS access via the Brakes India alliance, not in-house spend.</a:t>
+              <a:t>Allocation discipline, per domain: (1) brakes — ADB industrialization for the Japanese disc flip, systems/ADAS access via Brakes India, timed to regulation and platform renewals; (2) pumps — e-pump/TCU sockets on Isuzu/Fuso/Hino electrified programs, timed to program kick-offs happening NOW. Two decision rooms at the same customers — two ring-fenced programs.</a:t>
             </a:r>
           </a:p>
         </p:txBody>

--- a/TBK_rd_gap_slides.pptx
+++ b/TBK_rd_gap_slides.pptx
@@ -11,6 +11,7 @@
     <p:sldId id="259" r:id="rId10"/>
     <p:sldId id="260" r:id="rId11"/>
     <p:sldId id="261" r:id="rId12"/>
+    <p:sldId id="264" r:id="rId15"/>
     <p:sldId id="262" r:id="rId13"/>
     <p:sldId id="263" r:id="rId14"/>
   </p:sldIdLst>
@@ -840,6 +841,267 @@
         <a:p>
           <a:pPr>
             <a:defRPr sz="1100"/>
+          </a:pPr>
+        </a:p>
+      </c:txPr>
+    </c:legend>
+    <c:dispBlanksAs val="gap"/>
+  </c:chart>
+  <c:txPr>
+    <a:bodyPr/>
+    <a:lstStyle/>
+    <a:p>
+      <a:pPr>
+        <a:defRPr sz="1800"/>
+      </a:pPr>
+      <a:endParaRPr lang="en-US"/>
+    </a:p>
+  </c:txPr>
+  <c:externalData r:id="rId1">
+    <c:autoUpdate val="0"/>
+  </c:externalData>
+</c:chartSpace>
+</file>
+
+<file path=ppt/charts/chart4.xml><?xml version="1.0" encoding="utf-8"?>
+<c:chartSpace xmlns:c="http://schemas.openxmlformats.org/drawingml/2006/chart" xmlns:a="http://schemas.openxmlformats.org/drawingml/2006/main" xmlns:r="http://schemas.openxmlformats.org/officeDocument/2006/relationships">
+  <c:date1904 val="0"/>
+  <c:chart>
+    <c:title>
+      <c:tx>
+        <c:rich>
+          <a:bodyPr/>
+          <a:lstStyle/>
+          <a:p>
+            <a:r>
+              <a:rPr sz="1300"/>
+              <a:t>TBK gross profit (¥bn): actual vs peer-margin scenarios</a:t>
+            </a:r>
+          </a:p>
+        </c:rich>
+      </c:tx>
+      <c:layout/>
+      <c:overlay val="0"/>
+    </c:title>
+    <c:autoTitleDeleted val="0"/>
+    <c:plotArea>
+      <c:barChart>
+        <c:barDir val="col"/>
+        <c:grouping val="stacked"/>
+        <c:ser>
+          <c:idx val="0"/>
+          <c:order val="0"/>
+          <c:tx>
+            <c:strRef>
+              <c:f>Sheet1!$B$1</c:f>
+              <c:strCache>
+                <c:ptCount val="1"/>
+                <c:pt idx="0">
+                  <c:v>Brakes (¥bn)</c:v>
+                </c:pt>
+              </c:strCache>
+            </c:strRef>
+          </c:tx>
+          <c:spPr>
+            <a:solidFill>
+              <a:srgbClr val="1F4E78"/>
+            </a:solidFill>
+          </c:spPr>
+          <c:cat>
+            <c:strRef>
+              <c:f>Sheet1!$A$2:$A$4</c:f>
+              <c:strCache>
+                <c:ptCount val="3"/>
+                <c:pt idx="0">
+                  <c:v>Actual
+FY3/2025</c:v>
+                </c:pt>
+                <c:pt idx="1">
+                  <c:v>At peer
+MEDIAN</c:v>
+                </c:pt>
+                <c:pt idx="2">
+                  <c:v>At peer
+AVERAGE</c:v>
+                </c:pt>
+              </c:strCache>
+            </c:strRef>
+          </c:cat>
+          <c:val>
+            <c:numRef>
+              <c:f>Sheet1!$B$2:$B$4</c:f>
+              <c:numCache>
+                <c:formatCode>General</c:formatCode>
+                <c:ptCount val="3"/>
+                <c:pt idx="1">
+                  <c:v>4.4</c:v>
+                </c:pt>
+                <c:pt idx="2">
+                  <c:v>4.0</c:v>
+                </c:pt>
+              </c:numCache>
+            </c:numRef>
+          </c:val>
+        </c:ser>
+        <c:ser>
+          <c:idx val="1"/>
+          <c:order val="1"/>
+          <c:tx>
+            <c:strRef>
+              <c:f>Sheet1!$C$1</c:f>
+              <c:strCache>
+                <c:ptCount val="1"/>
+                <c:pt idx="0">
+                  <c:v>Pumps / engine components (¥bn)</c:v>
+                </c:pt>
+              </c:strCache>
+            </c:strRef>
+          </c:tx>
+          <c:spPr>
+            <a:solidFill>
+              <a:srgbClr val="548235"/>
+            </a:solidFill>
+          </c:spPr>
+          <c:cat>
+            <c:strRef>
+              <c:f>Sheet1!$A$2:$A$4</c:f>
+              <c:strCache>
+                <c:ptCount val="3"/>
+                <c:pt idx="0">
+                  <c:v>Actual
+FY3/2025</c:v>
+                </c:pt>
+                <c:pt idx="1">
+                  <c:v>At peer
+MEDIAN</c:v>
+                </c:pt>
+                <c:pt idx="2">
+                  <c:v>At peer
+AVERAGE</c:v>
+                </c:pt>
+              </c:strCache>
+            </c:strRef>
+          </c:cat>
+          <c:val>
+            <c:numRef>
+              <c:f>Sheet1!$C$2:$C$4</c:f>
+              <c:numCache>
+                <c:formatCode>General</c:formatCode>
+                <c:ptCount val="3"/>
+                <c:pt idx="1">
+                  <c:v>4.3</c:v>
+                </c:pt>
+                <c:pt idx="2">
+                  <c:v>5.1</c:v>
+                </c:pt>
+              </c:numCache>
+            </c:numRef>
+          </c:val>
+        </c:ser>
+        <c:ser>
+          <c:idx val="2"/>
+          <c:order val="2"/>
+          <c:tx>
+            <c:strRef>
+              <c:f>Sheet1!$D$1</c:f>
+              <c:strCache>
+                <c:ptCount val="1"/>
+                <c:pt idx="0">
+                  <c:v>Actual blended (¥bn)</c:v>
+                </c:pt>
+              </c:strCache>
+            </c:strRef>
+          </c:tx>
+          <c:spPr>
+            <a:solidFill>
+              <a:srgbClr val="7F1D1D"/>
+            </a:solidFill>
+          </c:spPr>
+          <c:cat>
+            <c:strRef>
+              <c:f>Sheet1!$A$2:$A$4</c:f>
+              <c:strCache>
+                <c:ptCount val="3"/>
+                <c:pt idx="0">
+                  <c:v>Actual
+FY3/2025</c:v>
+                </c:pt>
+                <c:pt idx="1">
+                  <c:v>At peer
+MEDIAN</c:v>
+                </c:pt>
+                <c:pt idx="2">
+                  <c:v>At peer
+AVERAGE</c:v>
+                </c:pt>
+              </c:strCache>
+            </c:strRef>
+          </c:cat>
+          <c:val>
+            <c:numRef>
+              <c:f>Sheet1!$D$2:$D$4</c:f>
+              <c:numCache>
+                <c:formatCode>General</c:formatCode>
+                <c:ptCount val="3"/>
+                <c:pt idx="0">
+                  <c:v>5.8</c:v>
+                </c:pt>
+              </c:numCache>
+            </c:numRef>
+          </c:val>
+        </c:ser>
+        <c:overlap val="100"/>
+        <c:axId val="-2068027336"/>
+        <c:axId val="-2113994440"/>
+      </c:barChart>
+      <c:catAx>
+        <c:axId val="-2068027336"/>
+        <c:scaling>
+          <c:orientation val="minMax"/>
+        </c:scaling>
+        <c:delete val="0"/>
+        <c:axPos val="b"/>
+        <c:majorTickMark val="out"/>
+        <c:minorTickMark val="none"/>
+        <c:tickLblPos val="nextTo"/>
+        <c:txPr>
+          <a:bodyPr/>
+          <a:lstStyle/>
+          <a:p>
+            <a:pPr>
+              <a:defRPr sz="1000"/>
+            </a:pPr>
+          </a:p>
+        </c:txPr>
+        <c:crossAx val="-2113994440"/>
+        <c:crosses val="autoZero"/>
+        <c:auto val="1"/>
+        <c:lblAlgn val="ctr"/>
+        <c:lblOffset val="100"/>
+        <c:noMultiLvlLbl val="0"/>
+      </c:catAx>
+      <c:valAx>
+        <c:axId val="-2113994440"/>
+        <c:scaling/>
+        <c:delete val="0"/>
+        <c:axPos val="l"/>
+        <c:majorGridlines/>
+        <c:majorTickMark val="out"/>
+        <c:minorTickMark val="none"/>
+        <c:tickLblPos val="nextTo"/>
+        <c:crossAx val="-2068027336"/>
+        <c:crosses val="autoZero"/>
+      </c:valAx>
+    </c:plotArea>
+    <c:legend>
+      <c:legendPos val="b"/>
+      <c:overlay val="0"/>
+      <c:txPr>
+        <a:bodyPr/>
+        <a:lstStyle/>
+        <a:p>
+          <a:pPr>
+            <a:defRPr sz="1000"/>
           </a:pPr>
         </a:p>
       </c:txPr>
@@ -7026,6 +7288,360 @@
                 </a:solidFill>
               </a:rPr>
               <a:t>Allocation discipline, per domain: (1) brakes — ADB industrialization for the Japanese disc flip, systems/ADAS access via Brakes India, timed to regulation and platform renewals; (2) pumps — e-pump/TCU sockets on Isuzu/Fuso/Hino electrified programs, timed to program kick-offs happening NOW. Two decision rooms at the same customers — two ring-fenced programs.</a:t>
+            </a:r>
+          </a:p>
+        </p:txBody>
+      </p:sp>
+    </p:spTree>
+  </p:cSld>
+  <p:clrMapOvr>
+    <a:masterClrMapping/>
+  </p:clrMapOvr>
+</p:sld>
+</file>
+
+<file path=ppt/slides/slide9.xml><?xml version="1.0" encoding="utf-8"?>
+<p:sld xmlns:a="http://schemas.openxmlformats.org/drawingml/2006/main" xmlns:p="http://schemas.openxmlformats.org/presentationml/2006/main" xmlns:r="http://schemas.openxmlformats.org/officeDocument/2006/relationships">
+  <p:cSld>
+    <p:spTree>
+      <p:nvGrpSpPr>
+        <p:cNvPr id="1" name=""/>
+        <p:cNvGrpSpPr/>
+        <p:nvPr/>
+      </p:nvGrpSpPr>
+      <p:grpSpPr/>
+      <p:sp>
+        <p:nvSpPr>
+          <p:cNvPr id="2" name="TextBox 1"/>
+          <p:cNvSpPr txBox="1"/>
+          <p:nvPr/>
+        </p:nvSpPr>
+        <p:spPr>
+          <a:xfrm>
+            <a:off x="0" y="0"/>
+            <a:ext cx="12191695" cy="868680"/>
+          </a:xfrm>
+          <a:prstGeom prst="rect">
+            <a:avLst/>
+          </a:prstGeom>
+          <a:solidFill>
+            <a:srgbClr val="1F4E78"/>
+          </a:solidFill>
+        </p:spPr>
+        <p:txBody>
+          <a:bodyPr wrap="square" lIns="457200" tIns="164592">
+            <a:spAutoFit/>
+          </a:bodyPr>
+          <a:lstStyle/>
+          <a:p>
+            <a:r>
+              <a:rPr sz="2600" b="1">
+                <a:solidFill>
+                  <a:srgbClr val="FFFFFF"/>
+                </a:solidFill>
+              </a:rPr>
+              <a:t>At peer gross margins, TBK's gross profit rises 51-57%</a:t>
+            </a:r>
+          </a:p>
+        </p:txBody>
+      </p:sp>
+      <p:sp>
+        <p:nvSpPr>
+          <p:cNvPr id="3" name="TextBox 2"/>
+          <p:cNvSpPr txBox="1"/>
+          <p:nvPr/>
+        </p:nvSpPr>
+        <p:spPr>
+          <a:xfrm>
+            <a:off x="457200" y="914400"/>
+            <a:ext cx="11247120" cy="365760"/>
+          </a:xfrm>
+          <a:prstGeom prst="rect">
+            <a:avLst/>
+          </a:prstGeom>
+          <a:noFill/>
+        </p:spPr>
+        <p:txBody>
+          <a:bodyPr wrap="square">
+            <a:spAutoFit/>
+          </a:bodyPr>
+          <a:lstStyle/>
+          <a:p>
+            <a:pPr algn="l"/>
+            <a:r>
+              <a:rPr sz="1200" b="0">
+                <a:solidFill>
+                  <a:srgbClr val="595959"/>
+                </a:solidFill>
+              </a:rPr>
+              <a:t>TBK FY3/2025 division sales x comparable-peer margin statistics (nature-of-expense reporters excluded)</a:t>
+            </a:r>
+          </a:p>
+        </p:txBody>
+      </p:sp>
+      <p:graphicFrame>
+        <p:nvGraphicFramePr>
+          <p:cNvPr id="4" name="Chart 3"/>
+          <p:cNvGraphicFramePr>
+            <a:graphicFrameLocks noGrp="1"/>
+          </p:cNvGraphicFramePr>
+          <p:nvPr/>
+        </p:nvGraphicFramePr>
+        <p:xfrm>
+          <a:off x="457200" y="1463040"/>
+          <a:ext cx="6035040" cy="4023360"/>
+        </p:xfrm>
+        <a:graphic>
+          <a:graphicData uri="http://schemas.openxmlformats.org/drawingml/2006/chart">
+            <c:chart xmlns:c="http://schemas.openxmlformats.org/drawingml/2006/chart" r:id="rId2"/>
+          </a:graphicData>
+        </a:graphic>
+      </p:graphicFrame>
+      <p:sp>
+        <p:nvSpPr>
+          <p:cNvPr id="5" name="TextBox 4"/>
+          <p:cNvSpPr txBox="1"/>
+          <p:nvPr/>
+        </p:nvSpPr>
+        <p:spPr>
+          <a:xfrm>
+            <a:off x="6766560" y="1463040"/>
+            <a:ext cx="4983480" cy="2331720"/>
+          </a:xfrm>
+          <a:prstGeom prst="rect">
+            <a:avLst/>
+          </a:prstGeom>
+          <a:solidFill>
+            <a:srgbClr val="F2F2F2"/>
+          </a:solidFill>
+          <a:ln w="15875">
+            <a:solidFill>
+              <a:srgbClr val="1F4E78"/>
+            </a:solidFill>
+          </a:ln>
+        </p:spPr>
+        <p:txBody>
+          <a:bodyPr wrap="square" lIns="137160" rIns="137160" tIns="109728">
+            <a:spAutoFit/>
+          </a:bodyPr>
+          <a:lstStyle/>
+          <a:p>
+            <a:r>
+              <a:rPr sz="1500" b="1">
+                <a:solidFill>
+                  <a:srgbClr val="1F4E78"/>
+                </a:solidFill>
+              </a:rPr>
+              <a:t>Peer margin statistics (comparable set only)</a:t>
+            </a:r>
+          </a:p>
+          <a:p>
+            <a:pPr>
+              <a:spcBef>
+                <a:spcPts val="400"/>
+              </a:spcBef>
+            </a:pPr>
+            <a:r>
+              <a:rPr sz="1150">
+                <a:solidFill>
+                  <a:srgbClr val="202020"/>
+                </a:solidFill>
+              </a:rPr>
+              <a:t>BRAKES — avg 21.0% | median 23.4%</a:t>
+            </a:r>
+          </a:p>
+          <a:p>
+            <a:pPr>
+              <a:spcBef>
+                <a:spcPts val="400"/>
+              </a:spcBef>
+            </a:pPr>
+            <a:r>
+              <a:rPr sz="1150">
+                <a:solidFill>
+                  <a:srgbClr val="202020"/>
+                </a:solidFill>
+              </a:rPr>
+              <a:t>(Haldex 27.3%, Cummins 24.7%, SAF-Holland ~22%, Akebono 10.0% — Akebono drags the average below the median)</a:t>
+            </a:r>
+          </a:p>
+          <a:p>
+            <a:pPr>
+              <a:spcBef>
+                <a:spcPts val="400"/>
+              </a:spcBef>
+            </a:pPr>
+            <a:r>
+              <a:rPr sz="1150">
+                <a:solidFill>
+                  <a:srgbClr val="202020"/>
+                </a:solidFill>
+              </a:rPr>
+              <a:t>PUMPS — avg 14.3% | median 12.1%</a:t>
+            </a:r>
+          </a:p>
+          <a:p>
+            <a:pPr>
+              <a:spcBef>
+                <a:spcPts val="400"/>
+              </a:spcBef>
+            </a:pPr>
+            <a:r>
+              <a:rPr sz="1150">
+                <a:solidFill>
+                  <a:srgbClr val="202020"/>
+                </a:solidFill>
+              </a:rPr>
+              <a:t>(TPR 21.7%, Aisin 12.1%, Hanon 9.1% — TPR lifts the average above the median)</a:t>
+            </a:r>
+          </a:p>
+        </p:txBody>
+      </p:sp>
+      <p:sp>
+        <p:nvSpPr>
+          <p:cNvPr id="6" name="TextBox 5"/>
+          <p:cNvSpPr txBox="1"/>
+          <p:nvPr/>
+        </p:nvSpPr>
+        <p:spPr>
+          <a:xfrm>
+            <a:off x="6766560" y="3931920"/>
+            <a:ext cx="4983480" cy="2331720"/>
+          </a:xfrm>
+          <a:prstGeom prst="rect">
+            <a:avLst/>
+          </a:prstGeom>
+          <a:solidFill>
+            <a:srgbClr val="F2F2F2"/>
+          </a:solidFill>
+          <a:ln w="15875">
+            <a:solidFill>
+              <a:srgbClr val="548235"/>
+            </a:solidFill>
+          </a:ln>
+        </p:spPr>
+        <p:txBody>
+          <a:bodyPr wrap="square" lIns="137160" rIns="137160" tIns="109728">
+            <a:spAutoFit/>
+          </a:bodyPr>
+          <a:lstStyle/>
+          <a:p>
+            <a:r>
+              <a:rPr sz="1500" b="1">
+                <a:solidFill>
+                  <a:srgbClr val="548235"/>
+                </a:solidFill>
+              </a:rPr>
+              <a:t>The math (TBK FY3/2025, ¥M)</a:t>
+            </a:r>
+          </a:p>
+          <a:p>
+            <a:pPr>
+              <a:spcBef>
+                <a:spcPts val="400"/>
+              </a:spcBef>
+            </a:pPr>
+            <a:r>
+              <a:rPr sz="1150">
+                <a:solidFill>
+                  <a:srgbClr val="202020"/>
+                </a:solidFill>
+              </a:rPr>
+              <a:t>Brakes ¥18,863 x 21.0% / 23.4% = ¥3,961 / ¥4,405</a:t>
+            </a:r>
+          </a:p>
+          <a:p>
+            <a:pPr>
+              <a:spcBef>
+                <a:spcPts val="400"/>
+              </a:spcBef>
+            </a:pPr>
+            <a:r>
+              <a:rPr sz="1150">
+                <a:solidFill>
+                  <a:srgbClr val="202020"/>
+                </a:solidFill>
+              </a:rPr>
+              <a:t>Pumps &amp; eng. comp. ¥35,552 x 14.3% / 12.1% = ¥5,084 / ¥4,302</a:t>
+            </a:r>
+          </a:p>
+          <a:p>
+            <a:pPr>
+              <a:spcBef>
+                <a:spcPts val="400"/>
+              </a:spcBef>
+            </a:pPr>
+            <a:r>
+              <a:rPr sz="1150">
+                <a:solidFill>
+                  <a:srgbClr val="202020"/>
+                </a:solidFill>
+              </a:rPr>
+              <a:t>TOTAL: avg ¥9,045 (16.6% blended) | median ¥8,706 (16.0%)</a:t>
+            </a:r>
+          </a:p>
+          <a:p>
+            <a:pPr>
+              <a:spcBef>
+                <a:spcPts val="400"/>
+              </a:spcBef>
+            </a:pPr>
+            <a:r>
+              <a:rPr sz="1150">
+                <a:solidFill>
+                  <a:srgbClr val="202020"/>
+                </a:solidFill>
+              </a:rPr>
+              <a:t>vs actual ¥5,768 (10.6%)</a:t>
+            </a:r>
+          </a:p>
+          <a:p>
+            <a:pPr>
+              <a:spcBef>
+                <a:spcPts val="400"/>
+              </a:spcBef>
+            </a:pPr>
+            <a:r>
+              <a:rPr sz="1150">
+                <a:solidFill>
+                  <a:srgbClr val="202020"/>
+                </a:solidFill>
+              </a:rPr>
+              <a:t>UPLIFT: +¥2.9-3.3bn gross profit = +51-57%</a:t>
+            </a:r>
+          </a:p>
+        </p:txBody>
+      </p:sp>
+      <p:sp>
+        <p:nvSpPr>
+          <p:cNvPr id="7" name="TextBox 6"/>
+          <p:cNvSpPr txBox="1"/>
+          <p:nvPr/>
+        </p:nvSpPr>
+        <p:spPr>
+          <a:xfrm>
+            <a:off x="457200" y="5669280"/>
+            <a:ext cx="11247120" cy="1005840"/>
+          </a:xfrm>
+          <a:prstGeom prst="rect">
+            <a:avLst/>
+          </a:prstGeom>
+          <a:noFill/>
+        </p:spPr>
+        <p:txBody>
+          <a:bodyPr wrap="square">
+            <a:spAutoFit/>
+          </a:bodyPr>
+          <a:lstStyle/>
+          <a:p>
+            <a:pPr algn="l"/>
+            <a:r>
+              <a:rPr sz="1200" b="0">
+                <a:solidFill>
+                  <a:srgbClr val="595959"/>
+                </a:solidFill>
+              </a:rPr>
+              <a:t>Read: closing the margin gap to mere peer parity adds ~¥3bn of annual gross profit at constant sales — by itself enough to fund the entire R&amp;D catch-up program (~¥2.6bn/yr incl. deficit repayment). Caveats: TBK's filings split products only into 'brakes' and 'engine components &amp; other' (pumps not separated — castings/engine parts included); peer set excludes Knorr-Bremse/Brembo (materials-only accounting) and customers Isuzu/Hino.</a:t>
             </a:r>
           </a:p>
         </p:txBody>

--- a/TBK_rd_gap_slides.pptx
+++ b/TBK_rd_gap_slides.pptx
@@ -11,9 +11,9 @@
     <p:sldId id="259" r:id="rId10"/>
     <p:sldId id="260" r:id="rId11"/>
     <p:sldId id="261" r:id="rId12"/>
-    <p:sldId id="264" r:id="rId15"/>
     <p:sldId id="262" r:id="rId13"/>
     <p:sldId id="263" r:id="rId14"/>
+    <p:sldId id="264" r:id="rId15"/>
   </p:sldIdLst>
   <p:sldSz cx="12191695" cy="6858000" type="screen4x3"/>
   <p:notesSz cx="6858000" cy="9144000"/>
@@ -333,8 +333,8 @@
           <a:lstStyle/>
           <a:p>
             <a:r>
-              <a:rPr sz="1400"/>
-              <a:t>Actual R&amp;D vs peer-floor benchmark (US$M)</a:t>
+              <a:rPr sz="1300"/>
+              <a:t>TBK gross profit (¥bn): actual FY3/2026 vs peer-margin scenarios</a:t>
             </a:r>
           </a:p>
         </c:rich>
@@ -346,7 +346,7 @@
     <c:plotArea>
       <c:barChart>
         <c:barDir val="col"/>
-        <c:grouping val="clustered"/>
+        <c:grouping val="stacked"/>
         <c:ser>
           <c:idx val="0"/>
           <c:order val="0"/>
@@ -356,83 +356,47 @@
               <c:strCache>
                 <c:ptCount val="1"/>
                 <c:pt idx="0">
-                  <c:v>TBK actual R&amp;D ($M)</c:v>
+                  <c:v>Brakes (¥bn)</c:v>
                 </c:pt>
               </c:strCache>
             </c:strRef>
           </c:tx>
           <c:spPr>
             <a:solidFill>
-              <a:srgbClr val="7F1D1D"/>
+              <a:srgbClr val="1F4E78"/>
             </a:solidFill>
           </c:spPr>
           <c:cat>
             <c:strRef>
-              <c:f>Sheet1!$A$2:$A$10</c:f>
+              <c:f>Sheet1!$A$2:$A$4</c:f>
               <c:strCache>
-                <c:ptCount val="9"/>
+                <c:ptCount val="3"/>
                 <c:pt idx="0">
-                  <c:v>2017</c:v>
+                  <c:v>Actual
+FY3/2026</c:v>
                 </c:pt>
                 <c:pt idx="1">
-                  <c:v>2018</c:v>
+                  <c:v>At peer
+MEDIAN</c:v>
                 </c:pt>
                 <c:pt idx="2">
-                  <c:v>2019</c:v>
-                </c:pt>
-                <c:pt idx="3">
-                  <c:v>2020</c:v>
-                </c:pt>
-                <c:pt idx="4">
-                  <c:v>2021</c:v>
-                </c:pt>
-                <c:pt idx="5">
-                  <c:v>2022</c:v>
-                </c:pt>
-                <c:pt idx="6">
-                  <c:v>2023</c:v>
-                </c:pt>
-                <c:pt idx="7">
-                  <c:v>2024</c:v>
-                </c:pt>
-                <c:pt idx="8">
-                  <c:v>2025</c:v>
+                  <c:v>At peer
+AVERAGE</c:v>
                 </c:pt>
               </c:strCache>
             </c:strRef>
           </c:cat>
           <c:val>
             <c:numRef>
-              <c:f>Sheet1!$B$2:$B$10</c:f>
+              <c:f>Sheet1!$B$2:$B$4</c:f>
               <c:numCache>
                 <c:formatCode>General</c:formatCode>
-                <c:ptCount val="9"/>
-                <c:pt idx="0">
-                  <c:v>11.1</c:v>
-                </c:pt>
+                <c:ptCount val="3"/>
                 <c:pt idx="1">
-                  <c:v>11.4</c:v>
+                  <c:v>4.4</c:v>
                 </c:pt>
                 <c:pt idx="2">
-                  <c:v>10.6</c:v>
-                </c:pt>
-                <c:pt idx="3">
-                  <c:v>11.4</c:v>
-                </c:pt>
-                <c:pt idx="4">
-                  <c:v>11.6</c:v>
-                </c:pt>
-                <c:pt idx="5">
-                  <c:v>11.8</c:v>
-                </c:pt>
-                <c:pt idx="6">
-                  <c:v>8.9</c:v>
-                </c:pt>
-                <c:pt idx="7">
-                  <c:v>8.1</c:v>
-                </c:pt>
-                <c:pt idx="8">
-                  <c:v>7.8</c:v>
+                  <c:v>4.0</c:v>
                 </c:pt>
               </c:numCache>
             </c:numRef>
@@ -447,88 +411,105 @@
               <c:strCache>
                 <c:ptCount val="1"/>
                 <c:pt idx="0">
-                  <c:v>At 4.5% of sales ($M)</c:v>
+                  <c:v>Pumps / engine components (¥bn)</c:v>
                 </c:pt>
               </c:strCache>
             </c:strRef>
           </c:tx>
           <c:spPr>
             <a:solidFill>
-              <a:srgbClr val="1F4E78"/>
+              <a:srgbClr val="548235"/>
             </a:solidFill>
           </c:spPr>
           <c:cat>
             <c:strRef>
-              <c:f>Sheet1!$A$2:$A$10</c:f>
+              <c:f>Sheet1!$A$2:$A$4</c:f>
               <c:strCache>
-                <c:ptCount val="9"/>
+                <c:ptCount val="3"/>
                 <c:pt idx="0">
-                  <c:v>2017</c:v>
+                  <c:v>Actual
+FY3/2026</c:v>
                 </c:pt>
                 <c:pt idx="1">
-                  <c:v>2018</c:v>
+                  <c:v>At peer
+MEDIAN</c:v>
                 </c:pt>
                 <c:pt idx="2">
-                  <c:v>2019</c:v>
-                </c:pt>
-                <c:pt idx="3">
-                  <c:v>2020</c:v>
-                </c:pt>
-                <c:pt idx="4">
-                  <c:v>2021</c:v>
-                </c:pt>
-                <c:pt idx="5">
-                  <c:v>2022</c:v>
-                </c:pt>
-                <c:pt idx="6">
-                  <c:v>2023</c:v>
-                </c:pt>
-                <c:pt idx="7">
-                  <c:v>2024</c:v>
-                </c:pt>
-                <c:pt idx="8">
-                  <c:v>2025</c:v>
+                  <c:v>At peer
+AVERAGE</c:v>
                 </c:pt>
               </c:strCache>
             </c:strRef>
           </c:cat>
           <c:val>
             <c:numRef>
-              <c:f>Sheet1!$C$2:$C$10</c:f>
+              <c:f>Sheet1!$C$2:$C$4</c:f>
               <c:numCache>
                 <c:formatCode>General</c:formatCode>
-                <c:ptCount val="9"/>
-                <c:pt idx="0">
-                  <c:v>19.4</c:v>
-                </c:pt>
+                <c:ptCount val="3"/>
                 <c:pt idx="1">
-                  <c:v>20.9</c:v>
+                  <c:v>4.3</c:v>
                 </c:pt>
                 <c:pt idx="2">
-                  <c:v>21.8</c:v>
-                </c:pt>
-                <c:pt idx="3">
-                  <c:v>21.3</c:v>
-                </c:pt>
-                <c:pt idx="4">
-                  <c:v>18.7</c:v>
-                </c:pt>
-                <c:pt idx="5">
-                  <c:v>20.5</c:v>
-                </c:pt>
-                <c:pt idx="6">
-                  <c:v>17.8</c:v>
-                </c:pt>
-                <c:pt idx="7">
-                  <c:v>17.7</c:v>
-                </c:pt>
-                <c:pt idx="8">
-                  <c:v>16.1</c:v>
+                  <c:v>5.1</c:v>
                 </c:pt>
               </c:numCache>
             </c:numRef>
           </c:val>
         </c:ser>
+        <c:ser>
+          <c:idx val="2"/>
+          <c:order val="2"/>
+          <c:tx>
+            <c:strRef>
+              <c:f>Sheet1!$D$1</c:f>
+              <c:strCache>
+                <c:ptCount val="1"/>
+                <c:pt idx="0">
+                  <c:v>Actual blended (¥bn)</c:v>
+                </c:pt>
+              </c:strCache>
+            </c:strRef>
+          </c:tx>
+          <c:spPr>
+            <a:solidFill>
+              <a:srgbClr val="7F1D1D"/>
+            </a:solidFill>
+          </c:spPr>
+          <c:cat>
+            <c:strRef>
+              <c:f>Sheet1!$A$2:$A$4</c:f>
+              <c:strCache>
+                <c:ptCount val="3"/>
+                <c:pt idx="0">
+                  <c:v>Actual
+FY3/2026</c:v>
+                </c:pt>
+                <c:pt idx="1">
+                  <c:v>At peer
+MEDIAN</c:v>
+                </c:pt>
+                <c:pt idx="2">
+                  <c:v>At peer
+AVERAGE</c:v>
+                </c:pt>
+              </c:strCache>
+            </c:strRef>
+          </c:cat>
+          <c:val>
+            <c:numRef>
+              <c:f>Sheet1!$D$2:$D$4</c:f>
+              <c:numCache>
+                <c:formatCode>General</c:formatCode>
+                <c:ptCount val="3"/>
+                <c:pt idx="0">
+                  <c:v>6.8</c:v>
+                </c:pt>
+              </c:numCache>
+            </c:numRef>
+          </c:val>
+        </c:ser>
+        <c:overlap val="100"/>
         <c:axId val="-2068027336"/>
         <c:axId val="-2113994440"/>
       </c:barChart>
@@ -579,7 +560,7 @@
         <a:lstStyle/>
         <a:p>
           <a:pPr>
-            <a:defRPr sz="1100"/>
+            <a:defRPr sz="1000"/>
           </a:pPr>
         </a:p>
       </c:txPr>
@@ -614,7 +595,7 @@
           <a:p>
             <a:r>
               <a:rPr sz="1400"/>
-              <a:t>R&amp;D spend plan (US$M per year)</a:t>
+              <a:t>Actual R&amp;D vs peer-floor benchmark (US$M)</a:t>
             </a:r>
           </a:p>
         </c:rich>
@@ -626,7 +607,7 @@
     <c:plotArea>
       <c:barChart>
         <c:barDir val="col"/>
-        <c:grouping val="stacked"/>
+        <c:grouping val="clustered"/>
         <c:ser>
           <c:idx val="0"/>
           <c:order val="0"/>
@@ -636,73 +617,83 @@
               <c:strCache>
                 <c:ptCount val="1"/>
                 <c:pt idx="0">
-                  <c:v>Parity run-rate (~4.5-5% of sales)</c:v>
+                  <c:v>TBK actual R&amp;D ($M)</c:v>
                 </c:pt>
               </c:strCache>
             </c:strRef>
           </c:tx>
           <c:spPr>
             <a:solidFill>
-              <a:srgbClr val="1F4E78"/>
+              <a:srgbClr val="7F1D1D"/>
             </a:solidFill>
           </c:spPr>
           <c:cat>
             <c:strRef>
-              <c:f>Sheet1!$A$2:$A$8</c:f>
+              <c:f>Sheet1!$A$2:$A$10</c:f>
               <c:strCache>
-                <c:ptCount val="7"/>
+                <c:ptCount val="9"/>
                 <c:pt idx="0">
-                  <c:v>FY25
-actual</c:v>
+                  <c:v>2017</c:v>
                 </c:pt>
                 <c:pt idx="1">
-                  <c:v>FY27</c:v>
+                  <c:v>2018</c:v>
                 </c:pt>
                 <c:pt idx="2">
-                  <c:v>FY28</c:v>
+                  <c:v>2019</c:v>
                 </c:pt>
                 <c:pt idx="3">
-                  <c:v>FY29</c:v>
+                  <c:v>2020</c:v>
                 </c:pt>
                 <c:pt idx="4">
-                  <c:v>FY30</c:v>
+                  <c:v>2021</c:v>
                 </c:pt>
                 <c:pt idx="5">
-                  <c:v>FY31</c:v>
+                  <c:v>2022</c:v>
                 </c:pt>
                 <c:pt idx="6">
-                  <c:v>Steady state
-FY32+</c:v>
+                  <c:v>2023</c:v>
+                </c:pt>
+                <c:pt idx="7">
+                  <c:v>2024</c:v>
+                </c:pt>
+                <c:pt idx="8">
+                  <c:v>2025</c:v>
                 </c:pt>
               </c:strCache>
             </c:strRef>
           </c:cat>
           <c:val>
             <c:numRef>
-              <c:f>Sheet1!$B$2:$B$8</c:f>
+              <c:f>Sheet1!$B$2:$B$10</c:f>
               <c:numCache>
                 <c:formatCode>General</c:formatCode>
-                <c:ptCount val="7"/>
+                <c:ptCount val="9"/>
                 <c:pt idx="0">
+                  <c:v>11.1</c:v>
+                </c:pt>
+                <c:pt idx="1">
+                  <c:v>11.4</c:v>
+                </c:pt>
+                <c:pt idx="2">
+                  <c:v>10.6</c:v>
+                </c:pt>
+                <c:pt idx="3">
+                  <c:v>11.4</c:v>
+                </c:pt>
+                <c:pt idx="4">
+                  <c:v>11.6</c:v>
+                </c:pt>
+                <c:pt idx="5">
+                  <c:v>11.8</c:v>
+                </c:pt>
+                <c:pt idx="6">
+                  <c:v>8.9</c:v>
+                </c:pt>
+                <c:pt idx="7">
+                  <c:v>8.1</c:v>
+                </c:pt>
+                <c:pt idx="8">
                   <c:v>7.8</c:v>
-                </c:pt>
-                <c:pt idx="1">
-                  <c:v>17</c:v>
-                </c:pt>
-                <c:pt idx="2">
-                  <c:v>17</c:v>
-                </c:pt>
-                <c:pt idx="3">
-                  <c:v>17</c:v>
-                </c:pt>
-                <c:pt idx="4">
-                  <c:v>17</c:v>
-                </c:pt>
-                <c:pt idx="5">
-                  <c:v>17</c:v>
-                </c:pt>
-                <c:pt idx="6">
-                  <c:v>17</c:v>
                 </c:pt>
               </c:numCache>
             </c:numRef>
@@ -717,79 +708,88 @@
               <c:strCache>
                 <c:ptCount val="1"/>
                 <c:pt idx="0">
-                  <c:v>Deficit repayment (catch-up)</c:v>
+                  <c:v>At 4.5% of sales ($M)</c:v>
                 </c:pt>
               </c:strCache>
             </c:strRef>
           </c:tx>
           <c:spPr>
             <a:solidFill>
-              <a:srgbClr val="548235"/>
+              <a:srgbClr val="1F4E78"/>
             </a:solidFill>
           </c:spPr>
           <c:cat>
             <c:strRef>
-              <c:f>Sheet1!$A$2:$A$8</c:f>
+              <c:f>Sheet1!$A$2:$A$10</c:f>
               <c:strCache>
-                <c:ptCount val="7"/>
+                <c:ptCount val="9"/>
                 <c:pt idx="0">
-                  <c:v>FY25
-actual</c:v>
+                  <c:v>2017</c:v>
                 </c:pt>
                 <c:pt idx="1">
-                  <c:v>FY27</c:v>
+                  <c:v>2018</c:v>
                 </c:pt>
                 <c:pt idx="2">
-                  <c:v>FY28</c:v>
+                  <c:v>2019</c:v>
                 </c:pt>
                 <c:pt idx="3">
-                  <c:v>FY29</c:v>
+                  <c:v>2020</c:v>
                 </c:pt>
                 <c:pt idx="4">
-                  <c:v>FY30</c:v>
+                  <c:v>2021</c:v>
                 </c:pt>
                 <c:pt idx="5">
-                  <c:v>FY31</c:v>
+                  <c:v>2022</c:v>
                 </c:pt>
                 <c:pt idx="6">
-                  <c:v>Steady state
-FY32+</c:v>
+                  <c:v>2023</c:v>
+                </c:pt>
+                <c:pt idx="7">
+                  <c:v>2024</c:v>
+                </c:pt>
+                <c:pt idx="8">
+                  <c:v>2025</c:v>
                 </c:pt>
               </c:strCache>
             </c:strRef>
           </c:cat>
           <c:val>
             <c:numRef>
-              <c:f>Sheet1!$C$2:$C$8</c:f>
+              <c:f>Sheet1!$C$2:$C$10</c:f>
               <c:numCache>
                 <c:formatCode>General</c:formatCode>
-                <c:ptCount val="7"/>
+                <c:ptCount val="9"/>
                 <c:pt idx="0">
-                  <c:v>0</c:v>
+                  <c:v>19.4</c:v>
                 </c:pt>
                 <c:pt idx="1">
-                  <c:v>10</c:v>
+                  <c:v>20.9</c:v>
                 </c:pt>
                 <c:pt idx="2">
-                  <c:v>10</c:v>
+                  <c:v>21.8</c:v>
                 </c:pt>
                 <c:pt idx="3">
-                  <c:v>10</c:v>
+                  <c:v>21.3</c:v>
                 </c:pt>
                 <c:pt idx="4">
-                  <c:v>10</c:v>
+                  <c:v>18.7</c:v>
                 </c:pt>
                 <c:pt idx="5">
-                  <c:v>10</c:v>
+                  <c:v>20.5</c:v>
                 </c:pt>
                 <c:pt idx="6">
-                  <c:v>0</c:v>
+                  <c:v>17.8</c:v>
+                </c:pt>
+                <c:pt idx="7">
+                  <c:v>17.7</c:v>
+                </c:pt>
+                <c:pt idx="8">
+                  <c:v>16.1</c:v>
                 </c:pt>
               </c:numCache>
             </c:numRef>
           </c:val>
         </c:ser>
-        <c:overlap val="100"/>
         <c:axId val="-2068027336"/>
         <c:axId val="-2113994440"/>
       </c:barChart>
@@ -808,7 +808,7 @@
           <a:lstStyle/>
           <a:p>
             <a:pPr>
-              <a:defRPr sz="900"/>
+              <a:defRPr sz="1000"/>
             </a:pPr>
           </a:p>
         </c:txPr>
@@ -874,8 +874,8 @@
           <a:lstStyle/>
           <a:p>
             <a:r>
-              <a:rPr sz="1300"/>
-              <a:t>TBK gross profit (¥bn): actual vs peer-margin scenarios</a:t>
+              <a:rPr sz="1400"/>
+              <a:t>R&amp;D spend plan (US$M per year)</a:t>
             </a:r>
           </a:p>
         </c:rich>
@@ -897,7 +897,7 @@
               <c:strCache>
                 <c:ptCount val="1"/>
                 <c:pt idx="0">
-                  <c:v>Brakes (¥bn)</c:v>
+                  <c:v>Parity run-rate (~4.5-5% of sales)</c:v>
                 </c:pt>
               </c:strCache>
             </c:strRef>
@@ -909,35 +909,61 @@
           </c:spPr>
           <c:cat>
             <c:strRef>
-              <c:f>Sheet1!$A$2:$A$4</c:f>
+              <c:f>Sheet1!$A$2:$A$8</c:f>
               <c:strCache>
-                <c:ptCount val="3"/>
+                <c:ptCount val="7"/>
                 <c:pt idx="0">
-                  <c:v>Actual
-FY3/2025</c:v>
+                  <c:v>FY26
+actual est.</c:v>
                 </c:pt>
                 <c:pt idx="1">
-                  <c:v>At peer
-MEDIAN</c:v>
+                  <c:v>FY27</c:v>
                 </c:pt>
                 <c:pt idx="2">
-                  <c:v>At peer
-AVERAGE</c:v>
+                  <c:v>FY28</c:v>
+                </c:pt>
+                <c:pt idx="3">
+                  <c:v>FY29</c:v>
+                </c:pt>
+                <c:pt idx="4">
+                  <c:v>FY30</c:v>
+                </c:pt>
+                <c:pt idx="5">
+                  <c:v>FY31</c:v>
+                </c:pt>
+                <c:pt idx="6">
+                  <c:v>Steady state
+FY32+</c:v>
                 </c:pt>
               </c:strCache>
             </c:strRef>
           </c:cat>
           <c:val>
             <c:numRef>
-              <c:f>Sheet1!$B$2:$B$4</c:f>
+              <c:f>Sheet1!$B$2:$B$8</c:f>
               <c:numCache>
                 <c:formatCode>General</c:formatCode>
-                <c:ptCount val="3"/>
+                <c:ptCount val="7"/>
+                <c:pt idx="0">
+                  <c:v>7.8</c:v>
+                </c:pt>
                 <c:pt idx="1">
-                  <c:v>4.4</c:v>
+                  <c:v>17</c:v>
                 </c:pt>
                 <c:pt idx="2">
-                  <c:v>4.0</c:v>
+                  <c:v>17</c:v>
+                </c:pt>
+                <c:pt idx="3">
+                  <c:v>17</c:v>
+                </c:pt>
+                <c:pt idx="4">
+                  <c:v>17</c:v>
+                </c:pt>
+                <c:pt idx="5">
+                  <c:v>17</c:v>
+                </c:pt>
+                <c:pt idx="6">
+                  <c:v>17</c:v>
                 </c:pt>
               </c:numCache>
             </c:numRef>
@@ -952,7 +978,7 @@
               <c:strCache>
                 <c:ptCount val="1"/>
                 <c:pt idx="0">
-                  <c:v>Pumps / engine components (¥bn)</c:v>
+                  <c:v>Deficit repayment (catch-up)</c:v>
                 </c:pt>
               </c:strCache>
             </c:strRef>
@@ -964,87 +990,61 @@
           </c:spPr>
           <c:cat>
             <c:strRef>
-              <c:f>Sheet1!$A$2:$A$4</c:f>
+              <c:f>Sheet1!$A$2:$A$8</c:f>
               <c:strCache>
-                <c:ptCount val="3"/>
+                <c:ptCount val="7"/>
                 <c:pt idx="0">
-                  <c:v>Actual
-FY3/2025</c:v>
+                  <c:v>FY26
+actual est.</c:v>
                 </c:pt>
                 <c:pt idx="1">
-                  <c:v>At peer
-MEDIAN</c:v>
+                  <c:v>FY27</c:v>
                 </c:pt>
                 <c:pt idx="2">
-                  <c:v>At peer
-AVERAGE</c:v>
+                  <c:v>FY28</c:v>
+                </c:pt>
+                <c:pt idx="3">
+                  <c:v>FY29</c:v>
+                </c:pt>
+                <c:pt idx="4">
+                  <c:v>FY30</c:v>
+                </c:pt>
+                <c:pt idx="5">
+                  <c:v>FY31</c:v>
+                </c:pt>
+                <c:pt idx="6">
+                  <c:v>Steady state
+FY32+</c:v>
                 </c:pt>
               </c:strCache>
             </c:strRef>
           </c:cat>
           <c:val>
             <c:numRef>
-              <c:f>Sheet1!$C$2:$C$4</c:f>
+              <c:f>Sheet1!$C$2:$C$8</c:f>
               <c:numCache>
                 <c:formatCode>General</c:formatCode>
-                <c:ptCount val="3"/>
+                <c:ptCount val="7"/>
+                <c:pt idx="0">
+                  <c:v>0</c:v>
+                </c:pt>
                 <c:pt idx="1">
-                  <c:v>4.3</c:v>
+                  <c:v>10</c:v>
                 </c:pt>
                 <c:pt idx="2">
-                  <c:v>5.1</c:v>
-                </c:pt>
-              </c:numCache>
-            </c:numRef>
-          </c:val>
-        </c:ser>
-        <c:ser>
-          <c:idx val="2"/>
-          <c:order val="2"/>
-          <c:tx>
-            <c:strRef>
-              <c:f>Sheet1!$D$1</c:f>
-              <c:strCache>
-                <c:ptCount val="1"/>
-                <c:pt idx="0">
-                  <c:v>Actual blended (¥bn)</c:v>
-                </c:pt>
-              </c:strCache>
-            </c:strRef>
-          </c:tx>
-          <c:spPr>
-            <a:solidFill>
-              <a:srgbClr val="7F1D1D"/>
-            </a:solidFill>
-          </c:spPr>
-          <c:cat>
-            <c:strRef>
-              <c:f>Sheet1!$A$2:$A$4</c:f>
-              <c:strCache>
-                <c:ptCount val="3"/>
-                <c:pt idx="0">
-                  <c:v>Actual
-FY3/2025</c:v>
-                </c:pt>
-                <c:pt idx="1">
-                  <c:v>At peer
-MEDIAN</c:v>
-                </c:pt>
-                <c:pt idx="2">
-                  <c:v>At peer
-AVERAGE</c:v>
-                </c:pt>
-              </c:strCache>
-            </c:strRef>
-          </c:cat>
-          <c:val>
-            <c:numRef>
-              <c:f>Sheet1!$D$2:$D$4</c:f>
-              <c:numCache>
-                <c:formatCode>General</c:formatCode>
-                <c:ptCount val="3"/>
-                <c:pt idx="0">
-                  <c:v>5.8</c:v>
+                  <c:v>10</c:v>
+                </c:pt>
+                <c:pt idx="3">
+                  <c:v>10</c:v>
+                </c:pt>
+                <c:pt idx="4">
+                  <c:v>10</c:v>
+                </c:pt>
+                <c:pt idx="5">
+                  <c:v>10</c:v>
+                </c:pt>
+                <c:pt idx="6">
+                  <c:v>0</c:v>
                 </c:pt>
               </c:numCache>
             </c:numRef>
@@ -1069,7 +1069,7 @@
           <a:lstStyle/>
           <a:p>
             <a:pPr>
-              <a:defRPr sz="1000"/>
+              <a:defRPr sz="900"/>
             </a:pPr>
           </a:p>
         </c:txPr>
@@ -1101,7 +1101,7 @@
         <a:lstStyle/>
         <a:p>
           <a:pPr>
-            <a:defRPr sz="1000"/>
+            <a:defRPr sz="1100"/>
           </a:pPr>
         </a:p>
       </c:txPr>
@@ -4228,7 +4228,7 @@
                   <a:srgbClr val="A8B8C8"/>
                 </a:solidFill>
               </a:rPr>
-              <a:t>Based on peer-reviewed and adversarially verified research plus competitor filings  |  June 2026</a:t>
+              <a:t>Based on peer-reviewed and adversarially verified research, competitor filings, and TBK's audited FY3/2026 results  |  June 2026</a:t>
             </a:r>
           </a:p>
         </p:txBody>
@@ -6632,6 +6632,360 @@
                   <a:srgbClr val="FFFFFF"/>
                 </a:solidFill>
               </a:rPr>
+              <a:t>At peer gross margins, TBK's gross profit rises 28-33%</a:t>
+            </a:r>
+          </a:p>
+        </p:txBody>
+      </p:sp>
+      <p:sp>
+        <p:nvSpPr>
+          <p:cNvPr id="3" name="TextBox 2"/>
+          <p:cNvSpPr txBox="1"/>
+          <p:nvPr/>
+        </p:nvSpPr>
+        <p:spPr>
+          <a:xfrm>
+            <a:off x="457200" y="914400"/>
+            <a:ext cx="11247120" cy="365760"/>
+          </a:xfrm>
+          <a:prstGeom prst="rect">
+            <a:avLst/>
+          </a:prstGeom>
+          <a:noFill/>
+        </p:spPr>
+        <p:txBody>
+          <a:bodyPr wrap="square">
+            <a:spAutoFit/>
+          </a:bodyPr>
+          <a:lstStyle/>
+          <a:p>
+            <a:pPr algn="l"/>
+            <a:r>
+              <a:rPr sz="1200" b="0">
+                <a:solidFill>
+                  <a:srgbClr val="595959"/>
+                </a:solidFill>
+              </a:rPr>
+              <a:t>Updated to TBK's audited FY3/2026 results (tanshin, May 2026): gross margin recovered to 12.5% — gap to peers narrowed but remains</a:t>
+            </a:r>
+          </a:p>
+        </p:txBody>
+      </p:sp>
+      <p:graphicFrame>
+        <p:nvGraphicFramePr>
+          <p:cNvPr id="4" name="Chart 3"/>
+          <p:cNvGraphicFramePr>
+            <a:graphicFrameLocks noGrp="1"/>
+          </p:cNvGraphicFramePr>
+          <p:nvPr/>
+        </p:nvGraphicFramePr>
+        <p:xfrm>
+          <a:off x="457200" y="1463040"/>
+          <a:ext cx="6035040" cy="4023360"/>
+        </p:xfrm>
+        <a:graphic>
+          <a:graphicData uri="http://schemas.openxmlformats.org/drawingml/2006/chart">
+            <c:chart xmlns:c="http://schemas.openxmlformats.org/drawingml/2006/chart" r:id="rId2"/>
+          </a:graphicData>
+        </a:graphic>
+      </p:graphicFrame>
+      <p:sp>
+        <p:nvSpPr>
+          <p:cNvPr id="5" name="TextBox 4"/>
+          <p:cNvSpPr txBox="1"/>
+          <p:nvPr/>
+        </p:nvSpPr>
+        <p:spPr>
+          <a:xfrm>
+            <a:off x="6766560" y="1463040"/>
+            <a:ext cx="4983480" cy="2331720"/>
+          </a:xfrm>
+          <a:prstGeom prst="rect">
+            <a:avLst/>
+          </a:prstGeom>
+          <a:solidFill>
+            <a:srgbClr val="F2F2F2"/>
+          </a:solidFill>
+          <a:ln w="15875">
+            <a:solidFill>
+              <a:srgbClr val="1F4E78"/>
+            </a:solidFill>
+          </a:ln>
+        </p:spPr>
+        <p:txBody>
+          <a:bodyPr wrap="square" lIns="137160" rIns="137160" tIns="109728">
+            <a:spAutoFit/>
+          </a:bodyPr>
+          <a:lstStyle/>
+          <a:p>
+            <a:r>
+              <a:rPr sz="1500" b="1">
+                <a:solidFill>
+                  <a:srgbClr val="1F4E78"/>
+                </a:solidFill>
+              </a:rPr>
+              <a:t>Peer margin statistics (comparable set only)</a:t>
+            </a:r>
+          </a:p>
+          <a:p>
+            <a:pPr>
+              <a:spcBef>
+                <a:spcPts val="400"/>
+              </a:spcBef>
+            </a:pPr>
+            <a:r>
+              <a:rPr sz="1150">
+                <a:solidFill>
+                  <a:srgbClr val="202020"/>
+                </a:solidFill>
+              </a:rPr>
+              <a:t>BRAKES — avg 21.0% | median 23.4%</a:t>
+            </a:r>
+          </a:p>
+          <a:p>
+            <a:pPr>
+              <a:spcBef>
+                <a:spcPts val="400"/>
+              </a:spcBef>
+            </a:pPr>
+            <a:r>
+              <a:rPr sz="1150">
+                <a:solidFill>
+                  <a:srgbClr val="202020"/>
+                </a:solidFill>
+              </a:rPr>
+              <a:t>(Haldex 27.3%, Cummins 24.7%, SAF-Holland ~22%, Akebono 10.0%)</a:t>
+            </a:r>
+          </a:p>
+          <a:p>
+            <a:pPr>
+              <a:spcBef>
+                <a:spcPts val="400"/>
+              </a:spcBef>
+            </a:pPr>
+            <a:r>
+              <a:rPr sz="1150">
+                <a:solidFill>
+                  <a:srgbClr val="202020"/>
+                </a:solidFill>
+              </a:rPr>
+              <a:t>PUMPS — avg 14.3% | median 12.1%</a:t>
+            </a:r>
+          </a:p>
+          <a:p>
+            <a:pPr>
+              <a:spcBef>
+                <a:spcPts val="400"/>
+              </a:spcBef>
+            </a:pPr>
+            <a:r>
+              <a:rPr sz="1150">
+                <a:solidFill>
+                  <a:srgbClr val="202020"/>
+                </a:solidFill>
+              </a:rPr>
+              <a:t>(TPR 21.7%, Aisin 12.1%, Hanon 9.1%)</a:t>
+            </a:r>
+          </a:p>
+        </p:txBody>
+      </p:sp>
+      <p:sp>
+        <p:nvSpPr>
+          <p:cNvPr id="6" name="TextBox 5"/>
+          <p:cNvSpPr txBox="1"/>
+          <p:nvPr/>
+        </p:nvSpPr>
+        <p:spPr>
+          <a:xfrm>
+            <a:off x="6766560" y="3931920"/>
+            <a:ext cx="4983480" cy="2331720"/>
+          </a:xfrm>
+          <a:prstGeom prst="rect">
+            <a:avLst/>
+          </a:prstGeom>
+          <a:solidFill>
+            <a:srgbClr val="F2F2F2"/>
+          </a:solidFill>
+          <a:ln w="15875">
+            <a:solidFill>
+              <a:srgbClr val="548235"/>
+            </a:solidFill>
+          </a:ln>
+        </p:spPr>
+        <p:txBody>
+          <a:bodyPr wrap="square" lIns="137160" rIns="137160" tIns="109728">
+            <a:spAutoFit/>
+          </a:bodyPr>
+          <a:lstStyle/>
+          <a:p>
+            <a:r>
+              <a:rPr sz="1500" b="1">
+                <a:solidFill>
+                  <a:srgbClr val="548235"/>
+                </a:solidFill>
+              </a:rPr>
+              <a:t>The math (TBK FY3/2026, ¥M)</a:t>
+            </a:r>
+          </a:p>
+          <a:p>
+            <a:pPr>
+              <a:spcBef>
+                <a:spcPts val="400"/>
+              </a:spcBef>
+            </a:pPr>
+            <a:r>
+              <a:rPr sz="1150">
+                <a:solidFill>
+                  <a:srgbClr val="202020"/>
+                </a:solidFill>
+              </a:rPr>
+              <a:t>Sales ¥54,756; division split est. from FY3/25 (34.7% / 65.3%)</a:t>
+            </a:r>
+          </a:p>
+          <a:p>
+            <a:pPr>
+              <a:spcBef>
+                <a:spcPts val="400"/>
+              </a:spcBef>
+            </a:pPr>
+            <a:r>
+              <a:rPr sz="1150">
+                <a:solidFill>
+                  <a:srgbClr val="202020"/>
+                </a:solidFill>
+              </a:rPr>
+              <a:t>Brakes ~¥18,981 x 21.0% / 23.4% = ¥3,986 / ¥4,432</a:t>
+            </a:r>
+          </a:p>
+          <a:p>
+            <a:pPr>
+              <a:spcBef>
+                <a:spcPts val="400"/>
+              </a:spcBef>
+            </a:pPr>
+            <a:r>
+              <a:rPr sz="1150">
+                <a:solidFill>
+                  <a:srgbClr val="202020"/>
+                </a:solidFill>
+              </a:rPr>
+              <a:t>Pumps &amp; eng. comp. ~¥35,775 x 14.3% / 12.1% = ¥5,116 / ¥4,329</a:t>
+            </a:r>
+          </a:p>
+          <a:p>
+            <a:pPr>
+              <a:spcBef>
+                <a:spcPts val="400"/>
+              </a:spcBef>
+            </a:pPr>
+            <a:r>
+              <a:rPr sz="1150">
+                <a:solidFill>
+                  <a:srgbClr val="202020"/>
+                </a:solidFill>
+              </a:rPr>
+              <a:t>TOTAL: avg ¥9,102 (16.6%) | median ¥8,761 (16.0%)</a:t>
+            </a:r>
+          </a:p>
+          <a:p>
+            <a:pPr>
+              <a:spcBef>
+                <a:spcPts val="400"/>
+              </a:spcBef>
+            </a:pPr>
+            <a:r>
+              <a:rPr sz="1150">
+                <a:solidFill>
+                  <a:srgbClr val="202020"/>
+                </a:solidFill>
+              </a:rPr>
+              <a:t>vs actual ¥6,825 (12.5%) → UPLIFT +¥1.9-2.3bn = +28-33%</a:t>
+            </a:r>
+          </a:p>
+        </p:txBody>
+      </p:sp>
+      <p:sp>
+        <p:nvSpPr>
+          <p:cNvPr id="7" name="TextBox 6"/>
+          <p:cNvSpPr txBox="1"/>
+          <p:nvPr/>
+        </p:nvSpPr>
+        <p:spPr>
+          <a:xfrm>
+            <a:off x="457200" y="5669280"/>
+            <a:ext cx="11247120" cy="1097280"/>
+          </a:xfrm>
+          <a:prstGeom prst="rect">
+            <a:avLst/>
+          </a:prstGeom>
+          <a:noFill/>
+        </p:spPr>
+        <p:txBody>
+          <a:bodyPr wrap="square">
+            <a:spAutoFit/>
+          </a:bodyPr>
+          <a:lstStyle/>
+          <a:p>
+            <a:pPr algn="l"/>
+            <a:r>
+              <a:rPr sz="1150" b="0">
+                <a:solidFill>
+                  <a:srgbClr val="595959"/>
+                </a:solidFill>
+              </a:rPr>
+              <a:t>FY3/2026 marks real progress: gross margin 10.6% → 12.5% (cost of sales cut ¥0.7bn on flat sales), operating profit +59%, North America exited, ¥1.1bn equity raised from Brakes India, capex up to ¥3.3bn. Even so, peer-parity margins would add ~¥2bn more gross profit — still roughly the cost of the full R&amp;D catch-up program (~¥2.6bn/yr). Caveats: FY3/26 division split estimated (yuho due June 2026); peer set excludes nature-of-expense reporters and customers.</a:t>
+            </a:r>
+          </a:p>
+        </p:txBody>
+      </p:sp>
+    </p:spTree>
+  </p:cSld>
+  <p:clrMapOvr>
+    <a:masterClrMapping/>
+  </p:clrMapOvr>
+</p:sld>
+</file>
+
+<file path=ppt/slides/slide8.xml><?xml version="1.0" encoding="utf-8"?>
+<p:sld xmlns:a="http://schemas.openxmlformats.org/drawingml/2006/main" xmlns:p="http://schemas.openxmlformats.org/presentationml/2006/main" xmlns:r="http://schemas.openxmlformats.org/officeDocument/2006/relationships">
+  <p:cSld>
+    <p:spTree>
+      <p:nvGrpSpPr>
+        <p:cNvPr id="1" name=""/>
+        <p:cNvGrpSpPr/>
+        <p:nvPr/>
+      </p:nvGrpSpPr>
+      <p:grpSpPr/>
+      <p:sp>
+        <p:nvSpPr>
+          <p:cNvPr id="2" name="TextBox 1"/>
+          <p:cNvSpPr txBox="1"/>
+          <p:nvPr/>
+        </p:nvSpPr>
+        <p:spPr>
+          <a:xfrm>
+            <a:off x="0" y="0"/>
+            <a:ext cx="12191695" cy="868680"/>
+          </a:xfrm>
+          <a:prstGeom prst="rect">
+            <a:avLst/>
+          </a:prstGeom>
+          <a:solidFill>
+            <a:srgbClr val="1F4E78"/>
+          </a:solidFill>
+        </p:spPr>
+        <p:txBody>
+          <a:bodyPr wrap="square" lIns="457200" tIns="164592">
+            <a:spAutoFit/>
+          </a:bodyPr>
+          <a:lstStyle/>
+          <a:p>
+            <a:r>
+              <a:rPr sz="2600" b="1">
+                <a:solidFill>
+                  <a:srgbClr val="FFFFFF"/>
+                </a:solidFill>
+              </a:rPr>
               <a:t>TBK's accumulated R&amp;D deficit: ~US$100M over a decade</a:t>
             </a:r>
           </a:p>
@@ -6899,7 +7253,7 @@
                   <a:srgbClr val="595959"/>
                 </a:solidFill>
               </a:rPr>
-              <a:t>Compounding the problem: TBK's marginal return on invested capital has been negative on every horizon (-2% to -10%) — the deficit is in direction as well as amount. Capex also fell from $59M (FY16) to $16M (FY25).</a:t>
+              <a:t>Compounding the problem: TBK's marginal return on invested capital has been negative on every horizon (-2% to -10%) — the deficit is in direction as well as amount. Capex fell to $16M by FY25, though FY3/26 shows a turn: capex back up to ¥3.3bn and ¥1.1bn equity raised from Brakes India.</a:t>
             </a:r>
           </a:p>
         </p:txBody>
@@ -6912,7 +7266,7 @@
 </p:sld>
 </file>
 
-<file path=ppt/slides/slide8.xml><?xml version="1.0" encoding="utf-8"?>
+<file path=ppt/slides/slide9.xml><?xml version="1.0" encoding="utf-8"?>
 <p:sld xmlns:a="http://schemas.openxmlformats.org/drawingml/2006/main" xmlns:p="http://schemas.openxmlformats.org/presentationml/2006/main" xmlns:r="http://schemas.openxmlformats.org/officeDocument/2006/relationships">
   <p:cSld>
     <p:spTree>
@@ -7287,361 +7641,7 @@
                   <a:srgbClr val="595959"/>
                 </a:solidFill>
               </a:rPr>
-              <a:t>Allocation discipline, per domain: (1) brakes — ADB industrialization for the Japanese disc flip, systems/ADAS access via Brakes India, timed to regulation and platform renewals; (2) pumps — e-pump/TCU sockets on Isuzu/Fuso/Hino electrified programs, timed to program kick-offs happening NOW. Two decision rooms at the same customers — two ring-fenced programs.</a:t>
-            </a:r>
-          </a:p>
-        </p:txBody>
-      </p:sp>
-    </p:spTree>
-  </p:cSld>
-  <p:clrMapOvr>
-    <a:masterClrMapping/>
-  </p:clrMapOvr>
-</p:sld>
-</file>
-
-<file path=ppt/slides/slide9.xml><?xml version="1.0" encoding="utf-8"?>
-<p:sld xmlns:a="http://schemas.openxmlformats.org/drawingml/2006/main" xmlns:p="http://schemas.openxmlformats.org/presentationml/2006/main" xmlns:r="http://schemas.openxmlformats.org/officeDocument/2006/relationships">
-  <p:cSld>
-    <p:spTree>
-      <p:nvGrpSpPr>
-        <p:cNvPr id="1" name=""/>
-        <p:cNvGrpSpPr/>
-        <p:nvPr/>
-      </p:nvGrpSpPr>
-      <p:grpSpPr/>
-      <p:sp>
-        <p:nvSpPr>
-          <p:cNvPr id="2" name="TextBox 1"/>
-          <p:cNvSpPr txBox="1"/>
-          <p:nvPr/>
-        </p:nvSpPr>
-        <p:spPr>
-          <a:xfrm>
-            <a:off x="0" y="0"/>
-            <a:ext cx="12191695" cy="868680"/>
-          </a:xfrm>
-          <a:prstGeom prst="rect">
-            <a:avLst/>
-          </a:prstGeom>
-          <a:solidFill>
-            <a:srgbClr val="1F4E78"/>
-          </a:solidFill>
-        </p:spPr>
-        <p:txBody>
-          <a:bodyPr wrap="square" lIns="457200" tIns="164592">
-            <a:spAutoFit/>
-          </a:bodyPr>
-          <a:lstStyle/>
-          <a:p>
-            <a:r>
-              <a:rPr sz="2600" b="1">
-                <a:solidFill>
-                  <a:srgbClr val="FFFFFF"/>
-                </a:solidFill>
-              </a:rPr>
-              <a:t>At peer gross margins, TBK's gross profit rises 51-57%</a:t>
-            </a:r>
-          </a:p>
-        </p:txBody>
-      </p:sp>
-      <p:sp>
-        <p:nvSpPr>
-          <p:cNvPr id="3" name="TextBox 2"/>
-          <p:cNvSpPr txBox="1"/>
-          <p:nvPr/>
-        </p:nvSpPr>
-        <p:spPr>
-          <a:xfrm>
-            <a:off x="457200" y="914400"/>
-            <a:ext cx="11247120" cy="365760"/>
-          </a:xfrm>
-          <a:prstGeom prst="rect">
-            <a:avLst/>
-          </a:prstGeom>
-          <a:noFill/>
-        </p:spPr>
-        <p:txBody>
-          <a:bodyPr wrap="square">
-            <a:spAutoFit/>
-          </a:bodyPr>
-          <a:lstStyle/>
-          <a:p>
-            <a:pPr algn="l"/>
-            <a:r>
-              <a:rPr sz="1200" b="0">
-                <a:solidFill>
-                  <a:srgbClr val="595959"/>
-                </a:solidFill>
-              </a:rPr>
-              <a:t>TBK FY3/2025 division sales x comparable-peer margin statistics (nature-of-expense reporters excluded)</a:t>
-            </a:r>
-          </a:p>
-        </p:txBody>
-      </p:sp>
-      <p:graphicFrame>
-        <p:nvGraphicFramePr>
-          <p:cNvPr id="4" name="Chart 3"/>
-          <p:cNvGraphicFramePr>
-            <a:graphicFrameLocks noGrp="1"/>
-          </p:cNvGraphicFramePr>
-          <p:nvPr/>
-        </p:nvGraphicFramePr>
-        <p:xfrm>
-          <a:off x="457200" y="1463040"/>
-          <a:ext cx="6035040" cy="4023360"/>
-        </p:xfrm>
-        <a:graphic>
-          <a:graphicData uri="http://schemas.openxmlformats.org/drawingml/2006/chart">
-            <c:chart xmlns:c="http://schemas.openxmlformats.org/drawingml/2006/chart" r:id="rId2"/>
-          </a:graphicData>
-        </a:graphic>
-      </p:graphicFrame>
-      <p:sp>
-        <p:nvSpPr>
-          <p:cNvPr id="5" name="TextBox 4"/>
-          <p:cNvSpPr txBox="1"/>
-          <p:nvPr/>
-        </p:nvSpPr>
-        <p:spPr>
-          <a:xfrm>
-            <a:off x="6766560" y="1463040"/>
-            <a:ext cx="4983480" cy="2331720"/>
-          </a:xfrm>
-          <a:prstGeom prst="rect">
-            <a:avLst/>
-          </a:prstGeom>
-          <a:solidFill>
-            <a:srgbClr val="F2F2F2"/>
-          </a:solidFill>
-          <a:ln w="15875">
-            <a:solidFill>
-              <a:srgbClr val="1F4E78"/>
-            </a:solidFill>
-          </a:ln>
-        </p:spPr>
-        <p:txBody>
-          <a:bodyPr wrap="square" lIns="137160" rIns="137160" tIns="109728">
-            <a:spAutoFit/>
-          </a:bodyPr>
-          <a:lstStyle/>
-          <a:p>
-            <a:r>
-              <a:rPr sz="1500" b="1">
-                <a:solidFill>
-                  <a:srgbClr val="1F4E78"/>
-                </a:solidFill>
-              </a:rPr>
-              <a:t>Peer margin statistics (comparable set only)</a:t>
-            </a:r>
-          </a:p>
-          <a:p>
-            <a:pPr>
-              <a:spcBef>
-                <a:spcPts val="400"/>
-              </a:spcBef>
-            </a:pPr>
-            <a:r>
-              <a:rPr sz="1150">
-                <a:solidFill>
-                  <a:srgbClr val="202020"/>
-                </a:solidFill>
-              </a:rPr>
-              <a:t>BRAKES — avg 21.0% | median 23.4%</a:t>
-            </a:r>
-          </a:p>
-          <a:p>
-            <a:pPr>
-              <a:spcBef>
-                <a:spcPts val="400"/>
-              </a:spcBef>
-            </a:pPr>
-            <a:r>
-              <a:rPr sz="1150">
-                <a:solidFill>
-                  <a:srgbClr val="202020"/>
-                </a:solidFill>
-              </a:rPr>
-              <a:t>(Haldex 27.3%, Cummins 24.7%, SAF-Holland ~22%, Akebono 10.0% — Akebono drags the average below the median)</a:t>
-            </a:r>
-          </a:p>
-          <a:p>
-            <a:pPr>
-              <a:spcBef>
-                <a:spcPts val="400"/>
-              </a:spcBef>
-            </a:pPr>
-            <a:r>
-              <a:rPr sz="1150">
-                <a:solidFill>
-                  <a:srgbClr val="202020"/>
-                </a:solidFill>
-              </a:rPr>
-              <a:t>PUMPS — avg 14.3% | median 12.1%</a:t>
-            </a:r>
-          </a:p>
-          <a:p>
-            <a:pPr>
-              <a:spcBef>
-                <a:spcPts val="400"/>
-              </a:spcBef>
-            </a:pPr>
-            <a:r>
-              <a:rPr sz="1150">
-                <a:solidFill>
-                  <a:srgbClr val="202020"/>
-                </a:solidFill>
-              </a:rPr>
-              <a:t>(TPR 21.7%, Aisin 12.1%, Hanon 9.1% — TPR lifts the average above the median)</a:t>
-            </a:r>
-          </a:p>
-        </p:txBody>
-      </p:sp>
-      <p:sp>
-        <p:nvSpPr>
-          <p:cNvPr id="6" name="TextBox 5"/>
-          <p:cNvSpPr txBox="1"/>
-          <p:nvPr/>
-        </p:nvSpPr>
-        <p:spPr>
-          <a:xfrm>
-            <a:off x="6766560" y="3931920"/>
-            <a:ext cx="4983480" cy="2331720"/>
-          </a:xfrm>
-          <a:prstGeom prst="rect">
-            <a:avLst/>
-          </a:prstGeom>
-          <a:solidFill>
-            <a:srgbClr val="F2F2F2"/>
-          </a:solidFill>
-          <a:ln w="15875">
-            <a:solidFill>
-              <a:srgbClr val="548235"/>
-            </a:solidFill>
-          </a:ln>
-        </p:spPr>
-        <p:txBody>
-          <a:bodyPr wrap="square" lIns="137160" rIns="137160" tIns="109728">
-            <a:spAutoFit/>
-          </a:bodyPr>
-          <a:lstStyle/>
-          <a:p>
-            <a:r>
-              <a:rPr sz="1500" b="1">
-                <a:solidFill>
-                  <a:srgbClr val="548235"/>
-                </a:solidFill>
-              </a:rPr>
-              <a:t>The math (TBK FY3/2025, ¥M)</a:t>
-            </a:r>
-          </a:p>
-          <a:p>
-            <a:pPr>
-              <a:spcBef>
-                <a:spcPts val="400"/>
-              </a:spcBef>
-            </a:pPr>
-            <a:r>
-              <a:rPr sz="1150">
-                <a:solidFill>
-                  <a:srgbClr val="202020"/>
-                </a:solidFill>
-              </a:rPr>
-              <a:t>Brakes ¥18,863 x 21.0% / 23.4% = ¥3,961 / ¥4,405</a:t>
-            </a:r>
-          </a:p>
-          <a:p>
-            <a:pPr>
-              <a:spcBef>
-                <a:spcPts val="400"/>
-              </a:spcBef>
-            </a:pPr>
-            <a:r>
-              <a:rPr sz="1150">
-                <a:solidFill>
-                  <a:srgbClr val="202020"/>
-                </a:solidFill>
-              </a:rPr>
-              <a:t>Pumps &amp; eng. comp. ¥35,552 x 14.3% / 12.1% = ¥5,084 / ¥4,302</a:t>
-            </a:r>
-          </a:p>
-          <a:p>
-            <a:pPr>
-              <a:spcBef>
-                <a:spcPts val="400"/>
-              </a:spcBef>
-            </a:pPr>
-            <a:r>
-              <a:rPr sz="1150">
-                <a:solidFill>
-                  <a:srgbClr val="202020"/>
-                </a:solidFill>
-              </a:rPr>
-              <a:t>TOTAL: avg ¥9,045 (16.6% blended) | median ¥8,706 (16.0%)</a:t>
-            </a:r>
-          </a:p>
-          <a:p>
-            <a:pPr>
-              <a:spcBef>
-                <a:spcPts val="400"/>
-              </a:spcBef>
-            </a:pPr>
-            <a:r>
-              <a:rPr sz="1150">
-                <a:solidFill>
-                  <a:srgbClr val="202020"/>
-                </a:solidFill>
-              </a:rPr>
-              <a:t>vs actual ¥5,768 (10.6%)</a:t>
-            </a:r>
-          </a:p>
-          <a:p>
-            <a:pPr>
-              <a:spcBef>
-                <a:spcPts val="400"/>
-              </a:spcBef>
-            </a:pPr>
-            <a:r>
-              <a:rPr sz="1150">
-                <a:solidFill>
-                  <a:srgbClr val="202020"/>
-                </a:solidFill>
-              </a:rPr>
-              <a:t>UPLIFT: +¥2.9-3.3bn gross profit = +51-57%</a:t>
-            </a:r>
-          </a:p>
-        </p:txBody>
-      </p:sp>
-      <p:sp>
-        <p:nvSpPr>
-          <p:cNvPr id="7" name="TextBox 6"/>
-          <p:cNvSpPr txBox="1"/>
-          <p:nvPr/>
-        </p:nvSpPr>
-        <p:spPr>
-          <a:xfrm>
-            <a:off x="457200" y="5669280"/>
-            <a:ext cx="11247120" cy="1005840"/>
-          </a:xfrm>
-          <a:prstGeom prst="rect">
-            <a:avLst/>
-          </a:prstGeom>
-          <a:noFill/>
-        </p:spPr>
-        <p:txBody>
-          <a:bodyPr wrap="square">
-            <a:spAutoFit/>
-          </a:bodyPr>
-          <a:lstStyle/>
-          <a:p>
-            <a:pPr algn="l"/>
-            <a:r>
-              <a:rPr sz="1200" b="0">
-                <a:solidFill>
-                  <a:srgbClr val="595959"/>
-                </a:solidFill>
-              </a:rPr>
-              <a:t>Read: closing the margin gap to mere peer parity adds ~¥3bn of annual gross profit at constant sales — by itself enough to fund the entire R&amp;D catch-up program (~¥2.6bn/yr incl. deficit repayment). Caveats: TBK's filings split products only into 'brakes' and 'engine components &amp; other' (pumps not separated — castings/engine parts included); peer set excludes Knorr-Bremse/Brembo (materials-only accounting) and customers Isuzu/Hino.</a:t>
+              <a:t>Allocation discipline, per domain: (1) brakes — ADB industrialization for the Japanese disc flip, systems/ADAS access via Brakes India, timed to regulation and platform renewals; (2) pumps — e-pump/TCU sockets on Isuzu/Fuso/Hino electrified programs, timed to program kick-offs happening NOW. Funding: FY3/26 margin recovery (+¥1bn gross profit) plus peer-parity margin upside (~¥2bn) covers the program.</a:t>
             </a:r>
           </a:p>
         </p:txBody>

--- a/TBK_rd_gap_slides.pptx
+++ b/TBK_rd_gap_slides.pptx
@@ -165,19 +165,19 @@
               <c:strCache>
                 <c:ptCount val="11"/>
                 <c:pt idx="0">
+                  <c:v>SAF-Holland</c:v>
+                </c:pt>
+                <c:pt idx="1">
                   <c:v>TBK</c:v>
                 </c:pt>
-                <c:pt idx="1">
-                  <c:v>SAF-Holland</c:v>
-                </c:pt>
                 <c:pt idx="2">
+                  <c:v>Concentric*</c:v>
+                </c:pt>
+                <c:pt idx="3">
                   <c:v>Cummins</c:v>
                 </c:pt>
-                <c:pt idx="3">
+                <c:pt idx="4">
                   <c:v>Aisin</c:v>
-                </c:pt>
-                <c:pt idx="4">
-                  <c:v>Concentric*</c:v>
                 </c:pt>
                 <c:pt idx="5">
                   <c:v>Hanon*</c:v>
@@ -207,19 +207,19 @@
                 <c:formatCode>General</c:formatCode>
                 <c:ptCount val="11"/>
                 <c:pt idx="0">
+                  <c:v>2.1</c:v>
+                </c:pt>
+                <c:pt idx="1">
                   <c:v>2.2</c:v>
                 </c:pt>
-                <c:pt idx="1">
-                  <c:v>2.1</c:v>
-                </c:pt>
                 <c:pt idx="2">
+                  <c:v>2.3</c:v>
+                </c:pt>
+                <c:pt idx="3">
                   <c:v>4.3</c:v>
                 </c:pt>
-                <c:pt idx="3">
+                <c:pt idx="4">
                   <c:v>4.8</c:v>
-                </c:pt>
-                <c:pt idx="4">
-                  <c:v>5.0</c:v>
                 </c:pt>
                 <c:pt idx="5">
                   <c:v>5.0</c:v>
@@ -448,10 +448,10 @@
                 <c:formatCode>General</c:formatCode>
                 <c:ptCount val="3"/>
                 <c:pt idx="1">
-                  <c:v>4.3</c:v>
+                  <c:v>6.0</c:v>
                 </c:pt>
                 <c:pt idx="2">
-                  <c:v>5.1</c:v>
+                  <c:v>6.1</c:v>
                 </c:pt>
               </c:numCache>
             </c:numRef>
@@ -4228,7 +4228,7 @@
                   <a:srgbClr val="A8B8C8"/>
                 </a:solidFill>
               </a:rPr>
-              <a:t>Based on peer-reviewed and adversarially verified research, competitor filings, and TBK's audited FY3/2026 results  |  June 2026</a:t>
+              <a:t>Based on peer-reviewed and adversarially verified research, competitor filings (incl. Concentric AR2023), and TBK's audited FY3/2026 results  |  June 2026</a:t>
             </a:r>
           </a:p>
         </p:txBody>
@@ -6235,7 +6235,7 @@
                   <a:srgbClr val="202020"/>
                 </a:solidFill>
               </a:rPr>
-              <a:t>Concentric/Pierburg: 400-800V e-coolant pump families; e-products 24% of Concentric sales</a:t>
+              <a:t>Concentric: e-products 20% of 2023 sales (AR2023), 25% gross margin on focused niches; Pierburg: 400-800V e-coolant pump families</a:t>
             </a:r>
           </a:p>
           <a:p>
@@ -6405,7 +6405,7 @@
               </a:spcBef>
             </a:pPr>
             <a:r>
-              <a:rPr sz="1250">
+              <a:rPr sz="1200">
                 <a:solidFill>
                   <a:srgbClr val="202020"/>
                 </a:solidFill>
@@ -6420,7 +6420,7 @@
               </a:spcBef>
             </a:pPr>
             <a:r>
-              <a:rPr sz="1250">
+              <a:rPr sz="1200">
                 <a:solidFill>
                   <a:srgbClr val="202020"/>
                 </a:solidFill>
@@ -6435,7 +6435,7 @@
               </a:spcBef>
             </a:pPr>
             <a:r>
-              <a:rPr sz="1250">
+              <a:rPr sz="1200">
                 <a:solidFill>
                   <a:srgbClr val="202020"/>
                 </a:solidFill>
@@ -6450,7 +6450,7 @@
               </a:spcBef>
             </a:pPr>
             <a:r>
-              <a:rPr sz="1250">
+              <a:rPr sz="1200">
                 <a:solidFill>
                   <a:srgbClr val="202020"/>
                 </a:solidFill>
@@ -6465,7 +6465,7 @@
               </a:spcBef>
             </a:pPr>
             <a:r>
-              <a:rPr sz="1250">
+              <a:rPr sz="1200">
                 <a:solidFill>
                   <a:srgbClr val="202020"/>
                 </a:solidFill>
@@ -6480,7 +6480,7 @@
               </a:spcBef>
             </a:pPr>
             <a:r>
-              <a:rPr sz="1250">
+              <a:rPr sz="1200">
                 <a:solidFill>
                   <a:srgbClr val="202020"/>
                 </a:solidFill>
@@ -6495,7 +6495,7 @@
               </a:spcBef>
             </a:pPr>
             <a:r>
-              <a:rPr sz="1250">
+              <a:rPr sz="1200">
                 <a:solidFill>
                   <a:srgbClr val="202020"/>
                 </a:solidFill>
@@ -6510,7 +6510,7 @@
               </a:spcBef>
             </a:pPr>
             <a:r>
-              <a:rPr sz="1250">
+              <a:rPr sz="1200">
                 <a:solidFill>
                   <a:srgbClr val="202020"/>
                 </a:solidFill>
@@ -6525,7 +6525,7 @@
               </a:spcBef>
             </a:pPr>
             <a:r>
-              <a:rPr sz="1250">
+              <a:rPr sz="1200">
                 <a:solidFill>
                   <a:srgbClr val="202020"/>
                 </a:solidFill>
@@ -6540,7 +6540,22 @@
               </a:spcBef>
             </a:pPr>
             <a:r>
-              <a:rPr sz="1250">
+              <a:rPr sz="1200">
+                <a:solidFill>
+                  <a:srgbClr val="202020"/>
+                </a:solidFill>
+              </a:rPr>
+              <a:t>Concentric MSEK 95 (~$9M)*</a:t>
+            </a:r>
+          </a:p>
+          <a:p>
+            <a:pPr>
+              <a:spcBef>
+                <a:spcPts val="400"/>
+              </a:spcBef>
+            </a:pPr>
+            <a:r>
+              <a:rPr sz="1200">
                 <a:solidFill>
                   <a:srgbClr val="202020"/>
                 </a:solidFill>
@@ -6559,7 +6574,7 @@
         <p:spPr>
           <a:xfrm>
             <a:off x="457200" y="5715000"/>
-            <a:ext cx="11247120" cy="914400"/>
+            <a:ext cx="11247120" cy="1005840"/>
           </a:xfrm>
           <a:prstGeom prst="rect">
             <a:avLst/>
@@ -6574,12 +6589,12 @@
           <a:p>
             <a:pPr algn="l"/>
             <a:r>
-              <a:rPr sz="1200" b="0">
+              <a:rPr sz="1150" b="0">
                 <a:solidFill>
                   <a:srgbClr val="595959"/>
                 </a:solidFill>
               </a:rPr>
-              <a:t>Brake systems players spend 6-9% of sales; pump/thermal players cluster at 4-5.5%. TBK sits at 2.2% — trailer-parts intensity, while facing a systems transition in brakes AND a socket race in pumps. *Hanon mid-range of conflicting filings; Concentric per secondary source.</a:t>
+              <a:t>Brake systems players spend 6-9% of sales; large pump/thermal players cluster at 4-5.5%. TBK sits at 2.2%. *Concentric (AR2023, verified): expensed product development only 2.3% — yet 25% gross margin: niche dominance, not raw R&amp;D scale, drives pump profitability. The catch-up case rests on the larger peers and on winning specific e-pump sockets. *Hanon mid-range of conflicting filings.</a:t>
             </a:r>
           </a:p>
         </p:txBody>
@@ -6632,7 +6647,7 @@
                   <a:srgbClr val="FFFFFF"/>
                 </a:solidFill>
               </a:rPr>
-              <a:t>At peer gross margins, TBK's gross profit rises 28-33%</a:t>
+              <a:t>At peer gross margins, TBK's gross profit rises ~50%</a:t>
             </a:r>
           </a:p>
         </p:txBody>
@@ -6666,7 +6681,7 @@
                   <a:srgbClr val="595959"/>
                 </a:solidFill>
               </a:rPr>
-              <a:t>Updated to TBK's audited FY3/2026 results (tanshin, May 2026): gross margin recovered to 12.5% — gap to peers narrowed but remains</a:t>
+              <a:t>TBK audited FY3/2026 (GM 12.5%) x comparable-peer margins — pump panel now includes Concentric's verified 25.2% (AR2023)</a:t>
             </a:r>
           </a:p>
         </p:txBody>
@@ -6769,7 +6784,7 @@
                   <a:srgbClr val="202020"/>
                 </a:solidFill>
               </a:rPr>
-              <a:t>PUMPS — avg 14.3% | median 12.1%</a:t>
+              <a:t>PUMPS — avg 17.0% | median 16.9%</a:t>
             </a:r>
           </a:p>
           <a:p>
@@ -6784,7 +6799,7 @@
                   <a:srgbClr val="202020"/>
                 </a:solidFill>
               </a:rPr>
-              <a:t>(TPR 21.7%, Aisin 12.1%, Hanon 9.1%)</a:t>
+              <a:t>(Concentric 25.2% verified AR2023, TPR 21.7%, Aisin 12.1%, Hanon 9.1%)</a:t>
             </a:r>
           </a:p>
         </p:txBody>
@@ -6869,7 +6884,7 @@
                   <a:srgbClr val="202020"/>
                 </a:solidFill>
               </a:rPr>
-              <a:t>Pumps &amp; eng. comp. ~¥35,775 x 14.3% / 12.1% = ¥5,116 / ¥4,329</a:t>
+              <a:t>Pumps &amp; eng. comp. ~¥35,775 x 17.0% / 16.9% = ¥6,082 / ¥6,046</a:t>
             </a:r>
           </a:p>
           <a:p>
@@ -6884,7 +6899,7 @@
                   <a:srgbClr val="202020"/>
                 </a:solidFill>
               </a:rPr>
-              <a:t>TOTAL: avg ¥9,102 (16.6%) | median ¥8,761 (16.0%)</a:t>
+              <a:t>TOTAL: avg ¥10,068 (18.4%) | median ¥10,478 (19.1%)</a:t>
             </a:r>
           </a:p>
           <a:p>
@@ -6899,7 +6914,7 @@
                   <a:srgbClr val="202020"/>
                 </a:solidFill>
               </a:rPr>
-              <a:t>vs actual ¥6,825 (12.5%) → UPLIFT +¥1.9-2.3bn = +28-33%</a:t>
+              <a:t>vs actual ¥6,825 (12.5%) → UPLIFT +¥3.2-3.7bn = +48-54%</a:t>
             </a:r>
           </a:p>
         </p:txBody>
@@ -6933,7 +6948,7 @@
                   <a:srgbClr val="595959"/>
                 </a:solidFill>
               </a:rPr>
-              <a:t>FY3/2026 marks real progress: gross margin 10.6% → 12.5% (cost of sales cut ¥0.7bn on flat sales), operating profit +59%, North America exited, ¥1.1bn equity raised from Brakes India, capex up to ¥3.3bn. Even so, peer-parity margins would add ~¥2bn more gross profit — still roughly the cost of the full R&amp;D catch-up program (~¥2.6bn/yr). Caveats: FY3/26 division split estimated (yuho due June 2026); peer set excludes nature-of-expense reporters and customers.</a:t>
+              <a:t>FY3/2026 marks real progress (GM 10.6% → 12.5%, OP +59%, North America exited, ¥1.1bn raised from Brakes India, capex up to ¥3.3bn) — but Concentric's verified 25.2% raises the pump bar: peer-parity margins would add ~¥3.2-3.7bn gross profit, comfortably funding the R&amp;D catch-up (~¥2.6bn/yr). Caveats: FY3/26 division split estimated (yuho due June 2026); peer set excludes nature-of-expense reporters and customers.</a:t>
             </a:r>
           </a:p>
         </p:txBody>
@@ -7636,12 +7651,12 @@
           <a:p>
             <a:pPr algn="l"/>
             <a:r>
-              <a:rPr sz="1200" b="0">
+              <a:rPr sz="1150" b="0">
                 <a:solidFill>
                   <a:srgbClr val="595959"/>
                 </a:solidFill>
               </a:rPr>
-              <a:t>Allocation discipline, per domain: (1) brakes — ADB industrialization for the Japanese disc flip, systems/ADAS access via Brakes India, timed to regulation and platform renewals; (2) pumps — e-pump/TCU sockets on Isuzu/Fuso/Hino electrified programs, timed to program kick-offs happening NOW. Funding: FY3/26 margin recovery (+¥1bn gross profit) plus peer-parity margin upside (~¥2bn) covers the program.</a:t>
+              <a:t>Allocation discipline, per domain: (1) brakes — ADB industrialization for the Japanese disc flip, systems/ADAS access via Brakes India, timed to regulation and platform renewals; (2) pumps — e-pump/TCU sockets on Isuzu/Fuso/Hino electrified programs, timed to program kick-offs happening NOW. Funding: FY3/26 margin recovery (+¥1bn gross profit) plus peer-parity margin upside (~¥3.2-3.7bn) covers the program. The Concentric lesson: focused niche engineering at 2.3% intensity earns 25% gross margins — spend must buy sockets, not just scale.</a:t>
             </a:r>
           </a:p>
         </p:txBody>

--- a/TBK_rd_gap_slides.pptx
+++ b/TBK_rd_gap_slides.pptx
@@ -14,6 +14,7 @@
     <p:sldId id="262" r:id="rId13"/>
     <p:sldId id="263" r:id="rId14"/>
     <p:sldId id="264" r:id="rId15"/>
+    <p:sldId id="265" r:id="rId16"/>
   </p:sldIdLst>
   <p:sldSz cx="12191695" cy="6858000" type="screen4x3"/>
   <p:notesSz cx="6858000" cy="9144000"/>
@@ -333,8 +334,8 @@
           <a:lstStyle/>
           <a:p>
             <a:r>
-              <a:rPr sz="1300"/>
-              <a:t>TBK gross profit (¥bn): actual FY3/2026 vs peer-margin scenarios</a:t>
+              <a:rPr sz="1400"/>
+              <a:t>Gross margin: TBK vs peers, by business (%)</a:t>
             </a:r>
           </a:p>
         </c:rich>
@@ -346,7 +347,7 @@
     <c:plotArea>
       <c:barChart>
         <c:barDir val="col"/>
-        <c:grouping val="stacked"/>
+        <c:grouping val="clustered"/>
         <c:ser>
           <c:idx val="0"/>
           <c:order val="0"/>
@@ -356,47 +357,43 @@
               <c:strCache>
                 <c:ptCount val="1"/>
                 <c:pt idx="0">
-                  <c:v>Brakes (¥bn)</c:v>
+                  <c:v>TBK gross margin</c:v>
                 </c:pt>
               </c:strCache>
             </c:strRef>
           </c:tx>
           <c:spPr>
             <a:solidFill>
-              <a:srgbClr val="1F4E78"/>
+              <a:srgbClr val="7F1D1D"/>
             </a:solidFill>
           </c:spPr>
           <c:cat>
             <c:strRef>
-              <c:f>Sheet1!$A$2:$A$4</c:f>
+              <c:f>Sheet1!$A$2:$A$3</c:f>
               <c:strCache>
-                <c:ptCount val="3"/>
+                <c:ptCount val="2"/>
                 <c:pt idx="0">
-                  <c:v>Actual
-FY3/2026</c:v>
+                  <c:v>BRAKES
+(TBK sales ~$127M)</c:v>
                 </c:pt>
                 <c:pt idx="1">
-                  <c:v>At peer
-MEDIAN</c:v>
-                </c:pt>
-                <c:pt idx="2">
-                  <c:v>At peer
-AVERAGE</c:v>
+                  <c:v>PUMPS &amp; ENGINE COMP.
+(TBK sales ~$238M)</c:v>
                 </c:pt>
               </c:strCache>
             </c:strRef>
           </c:cat>
           <c:val>
             <c:numRef>
-              <c:f>Sheet1!$B$2:$B$4</c:f>
+              <c:f>Sheet1!$B$2:$B$3</c:f>
               <c:numCache>
                 <c:formatCode>General</c:formatCode>
-                <c:ptCount val="3"/>
+                <c:ptCount val="2"/>
+                <c:pt idx="0">
+                  <c:v>12.5</c:v>
+                </c:pt>
                 <c:pt idx="1">
-                  <c:v>4.4</c:v>
-                </c:pt>
-                <c:pt idx="2">
-                  <c:v>4.0</c:v>
+                  <c:v>12.5</c:v>
                 </c:pt>
               </c:numCache>
             </c:numRef>
@@ -411,47 +408,43 @@
               <c:strCache>
                 <c:ptCount val="1"/>
                 <c:pt idx="0">
-                  <c:v>Pumps / engine components (¥bn)</c:v>
+                  <c:v>Peer average</c:v>
                 </c:pt>
               </c:strCache>
             </c:strRef>
           </c:tx>
           <c:spPr>
             <a:solidFill>
-              <a:srgbClr val="548235"/>
+              <a:srgbClr val="1F4E78"/>
             </a:solidFill>
           </c:spPr>
           <c:cat>
             <c:strRef>
-              <c:f>Sheet1!$A$2:$A$4</c:f>
+              <c:f>Sheet1!$A$2:$A$3</c:f>
               <c:strCache>
-                <c:ptCount val="3"/>
+                <c:ptCount val="2"/>
                 <c:pt idx="0">
-                  <c:v>Actual
-FY3/2026</c:v>
+                  <c:v>BRAKES
+(TBK sales ~$127M)</c:v>
                 </c:pt>
                 <c:pt idx="1">
-                  <c:v>At peer
-MEDIAN</c:v>
-                </c:pt>
-                <c:pt idx="2">
-                  <c:v>At peer
-AVERAGE</c:v>
+                  <c:v>PUMPS &amp; ENGINE COMP.
+(TBK sales ~$238M)</c:v>
                 </c:pt>
               </c:strCache>
             </c:strRef>
           </c:cat>
           <c:val>
             <c:numRef>
-              <c:f>Sheet1!$C$2:$C$4</c:f>
+              <c:f>Sheet1!$C$2:$C$3</c:f>
               <c:numCache>
                 <c:formatCode>General</c:formatCode>
-                <c:ptCount val="3"/>
+                <c:ptCount val="2"/>
+                <c:pt idx="0">
+                  <c:v>21.0</c:v>
+                </c:pt>
                 <c:pt idx="1">
-                  <c:v>6.0</c:v>
-                </c:pt>
-                <c:pt idx="2">
-                  <c:v>6.1</c:v>
+                  <c:v>17.0</c:v>
                 </c:pt>
               </c:numCache>
             </c:numRef>
@@ -466,50 +459,67 @@
               <c:strCache>
                 <c:ptCount val="1"/>
                 <c:pt idx="0">
-                  <c:v>Actual blended (¥bn)</c:v>
+                  <c:v>Peer median</c:v>
                 </c:pt>
               </c:strCache>
             </c:strRef>
           </c:tx>
           <c:spPr>
             <a:solidFill>
-              <a:srgbClr val="7F1D1D"/>
+              <a:srgbClr val="548235"/>
             </a:solidFill>
           </c:spPr>
           <c:cat>
             <c:strRef>
-              <c:f>Sheet1!$A$2:$A$4</c:f>
+              <c:f>Sheet1!$A$2:$A$3</c:f>
               <c:strCache>
-                <c:ptCount val="3"/>
+                <c:ptCount val="2"/>
                 <c:pt idx="0">
-                  <c:v>Actual
-FY3/2026</c:v>
+                  <c:v>BRAKES
+(TBK sales ~$127M)</c:v>
                 </c:pt>
                 <c:pt idx="1">
-                  <c:v>At peer
-MEDIAN</c:v>
-                </c:pt>
-                <c:pt idx="2">
-                  <c:v>At peer
-AVERAGE</c:v>
+                  <c:v>PUMPS &amp; ENGINE COMP.
+(TBK sales ~$238M)</c:v>
                 </c:pt>
               </c:strCache>
             </c:strRef>
           </c:cat>
           <c:val>
             <c:numRef>
-              <c:f>Sheet1!$D$2:$D$4</c:f>
+              <c:f>Sheet1!$D$2:$D$3</c:f>
               <c:numCache>
                 <c:formatCode>General</c:formatCode>
-                <c:ptCount val="3"/>
+                <c:ptCount val="2"/>
                 <c:pt idx="0">
-                  <c:v>6.8</c:v>
+                  <c:v>23.4</c:v>
+                </c:pt>
+                <c:pt idx="1">
+                  <c:v>16.9</c:v>
                 </c:pt>
               </c:numCache>
             </c:numRef>
           </c:val>
         </c:ser>
-        <c:overlap val="100"/>
+        <c:dLbls>
+          <c:numFmt formatCode="0.0&quot;%&quot;" sourceLinked="0"/>
+          <c:txPr>
+            <a:bodyPr/>
+            <a:lstStyle/>
+            <a:p>
+              <a:pPr>
+                <a:defRPr sz="1100"/>
+              </a:pPr>
+            </a:p>
+          </c:txPr>
+          <c:showLegendKey val="0"/>
+          <c:showVal val="1"/>
+          <c:showCatName val="0"/>
+          <c:showSerName val="0"/>
+          <c:showPercent val="0"/>
+          <c:showBubbleSize val="0"/>
+          <c:showLeaderLines val="1"/>
+        </c:dLbls>
         <c:axId val="-2068027336"/>
         <c:axId val="-2113994440"/>
       </c:barChart>
@@ -528,7 +538,7 @@
           <a:lstStyle/>
           <a:p>
             <a:pPr>
-              <a:defRPr sz="1000"/>
+              <a:defRPr sz="1100"/>
             </a:pPr>
           </a:p>
         </c:txPr>
@@ -560,7 +570,7 @@
         <a:lstStyle/>
         <a:p>
           <a:pPr>
-            <a:defRPr sz="1000"/>
+            <a:defRPr sz="1200"/>
           </a:pPr>
         </a:p>
       </c:txPr>
@@ -595,7 +605,7 @@
           <a:p>
             <a:r>
               <a:rPr sz="1400"/>
-              <a:t>Actual R&amp;D vs peer-floor benchmark (US$M)</a:t>
+              <a:t>TBK annual gross profit (US$M)</a:t>
             </a:r>
           </a:p>
         </c:rich>
@@ -607,7 +617,7 @@
     <c:plotArea>
       <c:barChart>
         <c:barDir val="col"/>
-        <c:grouping val="clustered"/>
+        <c:grouping val="stacked"/>
         <c:ser>
           <c:idx val="0"/>
           <c:order val="0"/>
@@ -617,83 +627,47 @@
               <c:strCache>
                 <c:ptCount val="1"/>
                 <c:pt idx="0">
-                  <c:v>TBK actual R&amp;D ($M)</c:v>
+                  <c:v>Brakes ($M)</c:v>
                 </c:pt>
               </c:strCache>
             </c:strRef>
           </c:tx>
           <c:spPr>
             <a:solidFill>
-              <a:srgbClr val="7F1D1D"/>
+              <a:srgbClr val="1F4E78"/>
             </a:solidFill>
           </c:spPr>
           <c:cat>
             <c:strRef>
-              <c:f>Sheet1!$A$2:$A$10</c:f>
+              <c:f>Sheet1!$A$2:$A$4</c:f>
               <c:strCache>
-                <c:ptCount val="9"/>
+                <c:ptCount val="3"/>
                 <c:pt idx="0">
-                  <c:v>2017</c:v>
+                  <c:v>Actual
+FY3/2026</c:v>
                 </c:pt>
                 <c:pt idx="1">
-                  <c:v>2018</c:v>
+                  <c:v>At peer
+average</c:v>
                 </c:pt>
                 <c:pt idx="2">
-                  <c:v>2019</c:v>
-                </c:pt>
-                <c:pt idx="3">
-                  <c:v>2020</c:v>
-                </c:pt>
-                <c:pt idx="4">
-                  <c:v>2021</c:v>
-                </c:pt>
-                <c:pt idx="5">
-                  <c:v>2022</c:v>
-                </c:pt>
-                <c:pt idx="6">
-                  <c:v>2023</c:v>
-                </c:pt>
-                <c:pt idx="7">
-                  <c:v>2024</c:v>
-                </c:pt>
-                <c:pt idx="8">
-                  <c:v>2025</c:v>
+                  <c:v>At peer
+median</c:v>
                 </c:pt>
               </c:strCache>
             </c:strRef>
           </c:cat>
           <c:val>
             <c:numRef>
-              <c:f>Sheet1!$B$2:$B$10</c:f>
+              <c:f>Sheet1!$B$2:$B$4</c:f>
               <c:numCache>
                 <c:formatCode>General</c:formatCode>
-                <c:ptCount val="9"/>
-                <c:pt idx="0">
-                  <c:v>11.1</c:v>
-                </c:pt>
+                <c:ptCount val="3"/>
                 <c:pt idx="1">
-                  <c:v>11.4</c:v>
+                  <c:v>26.6</c:v>
                 </c:pt>
                 <c:pt idx="2">
-                  <c:v>10.6</c:v>
-                </c:pt>
-                <c:pt idx="3">
-                  <c:v>11.4</c:v>
-                </c:pt>
-                <c:pt idx="4">
-                  <c:v>11.6</c:v>
-                </c:pt>
-                <c:pt idx="5">
-                  <c:v>11.8</c:v>
-                </c:pt>
-                <c:pt idx="6">
-                  <c:v>8.9</c:v>
-                </c:pt>
-                <c:pt idx="7">
-                  <c:v>8.1</c:v>
-                </c:pt>
-                <c:pt idx="8">
-                  <c:v>7.8</c:v>
+                  <c:v>29.5</c:v>
                 </c:pt>
               </c:numCache>
             </c:numRef>
@@ -708,88 +682,124 @@
               <c:strCache>
                 <c:ptCount val="1"/>
                 <c:pt idx="0">
-                  <c:v>At 4.5% of sales ($M)</c:v>
+                  <c:v>Pumps &amp; engine components ($M)</c:v>
                 </c:pt>
               </c:strCache>
             </c:strRef>
           </c:tx>
           <c:spPr>
             <a:solidFill>
-              <a:srgbClr val="1F4E78"/>
+              <a:srgbClr val="548235"/>
             </a:solidFill>
           </c:spPr>
           <c:cat>
             <c:strRef>
-              <c:f>Sheet1!$A$2:$A$10</c:f>
+              <c:f>Sheet1!$A$2:$A$4</c:f>
               <c:strCache>
-                <c:ptCount val="9"/>
+                <c:ptCount val="3"/>
                 <c:pt idx="0">
-                  <c:v>2017</c:v>
+                  <c:v>Actual
+FY3/2026</c:v>
                 </c:pt>
                 <c:pt idx="1">
-                  <c:v>2018</c:v>
+                  <c:v>At peer
+average</c:v>
                 </c:pt>
                 <c:pt idx="2">
-                  <c:v>2019</c:v>
-                </c:pt>
-                <c:pt idx="3">
-                  <c:v>2020</c:v>
-                </c:pt>
-                <c:pt idx="4">
-                  <c:v>2021</c:v>
-                </c:pt>
-                <c:pt idx="5">
-                  <c:v>2022</c:v>
-                </c:pt>
-                <c:pt idx="6">
-                  <c:v>2023</c:v>
-                </c:pt>
-                <c:pt idx="7">
-                  <c:v>2024</c:v>
-                </c:pt>
-                <c:pt idx="8">
-                  <c:v>2025</c:v>
+                  <c:v>At peer
+median</c:v>
                 </c:pt>
               </c:strCache>
             </c:strRef>
           </c:cat>
           <c:val>
             <c:numRef>
-              <c:f>Sheet1!$C$2:$C$10</c:f>
+              <c:f>Sheet1!$C$2:$C$4</c:f>
               <c:numCache>
                 <c:formatCode>General</c:formatCode>
-                <c:ptCount val="9"/>
-                <c:pt idx="0">
-                  <c:v>19.4</c:v>
-                </c:pt>
+                <c:ptCount val="3"/>
                 <c:pt idx="1">
-                  <c:v>20.9</c:v>
+                  <c:v>40.5</c:v>
                 </c:pt>
                 <c:pt idx="2">
-                  <c:v>21.8</c:v>
-                </c:pt>
-                <c:pt idx="3">
-                  <c:v>21.3</c:v>
-                </c:pt>
-                <c:pt idx="4">
-                  <c:v>18.7</c:v>
-                </c:pt>
-                <c:pt idx="5">
-                  <c:v>20.5</c:v>
-                </c:pt>
-                <c:pt idx="6">
-                  <c:v>17.8</c:v>
-                </c:pt>
-                <c:pt idx="7">
-                  <c:v>17.7</c:v>
-                </c:pt>
-                <c:pt idx="8">
-                  <c:v>16.1</c:v>
+                  <c:v>40.3</c:v>
                 </c:pt>
               </c:numCache>
             </c:numRef>
           </c:val>
         </c:ser>
+        <c:ser>
+          <c:idx val="2"/>
+          <c:order val="2"/>
+          <c:tx>
+            <c:strRef>
+              <c:f>Sheet1!$D$1</c:f>
+              <c:strCache>
+                <c:ptCount val="1"/>
+                <c:pt idx="0">
+                  <c:v>Actual blended ($M)</c:v>
+                </c:pt>
+              </c:strCache>
+            </c:strRef>
+          </c:tx>
+          <c:spPr>
+            <a:solidFill>
+              <a:srgbClr val="7F1D1D"/>
+            </a:solidFill>
+          </c:spPr>
+          <c:cat>
+            <c:strRef>
+              <c:f>Sheet1!$A$2:$A$4</c:f>
+              <c:strCache>
+                <c:ptCount val="3"/>
+                <c:pt idx="0">
+                  <c:v>Actual
+FY3/2026</c:v>
+                </c:pt>
+                <c:pt idx="1">
+                  <c:v>At peer
+average</c:v>
+                </c:pt>
+                <c:pt idx="2">
+                  <c:v>At peer
+median</c:v>
+                </c:pt>
+              </c:strCache>
+            </c:strRef>
+          </c:cat>
+          <c:val>
+            <c:numRef>
+              <c:f>Sheet1!$D$2:$D$4</c:f>
+              <c:numCache>
+                <c:formatCode>General</c:formatCode>
+                <c:ptCount val="3"/>
+                <c:pt idx="0">
+                  <c:v>45.5</c:v>
+                </c:pt>
+              </c:numCache>
+            </c:numRef>
+          </c:val>
+        </c:ser>
+        <c:dLbls>
+          <c:numFmt formatCode="$0.0&quot;M&quot;" sourceLinked="0"/>
+          <c:txPr>
+            <a:bodyPr/>
+            <a:lstStyle/>
+            <a:p>
+              <a:pPr>
+                <a:defRPr sz="1000"/>
+              </a:pPr>
+            </a:p>
+          </c:txPr>
+          <c:showLegendKey val="0"/>
+          <c:showVal val="1"/>
+          <c:showCatName val="0"/>
+          <c:showSerName val="0"/>
+          <c:showPercent val="0"/>
+          <c:showBubbleSize val="0"/>
+          <c:showLeaderLines val="1"/>
+        </c:dLbls>
+        <c:overlap val="100"/>
         <c:axId val="-2068027336"/>
         <c:axId val="-2113994440"/>
       </c:barChart>
@@ -808,7 +818,7 @@
           <a:lstStyle/>
           <a:p>
             <a:pPr>
-              <a:defRPr sz="1000"/>
+              <a:defRPr sz="1100"/>
             </a:pPr>
           </a:p>
         </c:txPr>
@@ -864,6 +874,286 @@
 </file>
 
 <file path=ppt/charts/chart4.xml><?xml version="1.0" encoding="utf-8"?>
+<c:chartSpace xmlns:c="http://schemas.openxmlformats.org/drawingml/2006/chart" xmlns:a="http://schemas.openxmlformats.org/drawingml/2006/main" xmlns:r="http://schemas.openxmlformats.org/officeDocument/2006/relationships">
+  <c:date1904 val="0"/>
+  <c:chart>
+    <c:title>
+      <c:tx>
+        <c:rich>
+          <a:bodyPr/>
+          <a:lstStyle/>
+          <a:p>
+            <a:r>
+              <a:rPr sz="1400"/>
+              <a:t>Actual R&amp;D vs peer-floor benchmark (US$M)</a:t>
+            </a:r>
+          </a:p>
+        </c:rich>
+      </c:tx>
+      <c:layout/>
+      <c:overlay val="0"/>
+    </c:title>
+    <c:autoTitleDeleted val="0"/>
+    <c:plotArea>
+      <c:barChart>
+        <c:barDir val="col"/>
+        <c:grouping val="clustered"/>
+        <c:ser>
+          <c:idx val="0"/>
+          <c:order val="0"/>
+          <c:tx>
+            <c:strRef>
+              <c:f>Sheet1!$B$1</c:f>
+              <c:strCache>
+                <c:ptCount val="1"/>
+                <c:pt idx="0">
+                  <c:v>TBK actual R&amp;D ($M)</c:v>
+                </c:pt>
+              </c:strCache>
+            </c:strRef>
+          </c:tx>
+          <c:spPr>
+            <a:solidFill>
+              <a:srgbClr val="7F1D1D"/>
+            </a:solidFill>
+          </c:spPr>
+          <c:cat>
+            <c:strRef>
+              <c:f>Sheet1!$A$2:$A$10</c:f>
+              <c:strCache>
+                <c:ptCount val="9"/>
+                <c:pt idx="0">
+                  <c:v>2017</c:v>
+                </c:pt>
+                <c:pt idx="1">
+                  <c:v>2018</c:v>
+                </c:pt>
+                <c:pt idx="2">
+                  <c:v>2019</c:v>
+                </c:pt>
+                <c:pt idx="3">
+                  <c:v>2020</c:v>
+                </c:pt>
+                <c:pt idx="4">
+                  <c:v>2021</c:v>
+                </c:pt>
+                <c:pt idx="5">
+                  <c:v>2022</c:v>
+                </c:pt>
+                <c:pt idx="6">
+                  <c:v>2023</c:v>
+                </c:pt>
+                <c:pt idx="7">
+                  <c:v>2024</c:v>
+                </c:pt>
+                <c:pt idx="8">
+                  <c:v>2025</c:v>
+                </c:pt>
+              </c:strCache>
+            </c:strRef>
+          </c:cat>
+          <c:val>
+            <c:numRef>
+              <c:f>Sheet1!$B$2:$B$10</c:f>
+              <c:numCache>
+                <c:formatCode>General</c:formatCode>
+                <c:ptCount val="9"/>
+                <c:pt idx="0">
+                  <c:v>11.1</c:v>
+                </c:pt>
+                <c:pt idx="1">
+                  <c:v>11.4</c:v>
+                </c:pt>
+                <c:pt idx="2">
+                  <c:v>10.6</c:v>
+                </c:pt>
+                <c:pt idx="3">
+                  <c:v>11.4</c:v>
+                </c:pt>
+                <c:pt idx="4">
+                  <c:v>11.6</c:v>
+                </c:pt>
+                <c:pt idx="5">
+                  <c:v>11.8</c:v>
+                </c:pt>
+                <c:pt idx="6">
+                  <c:v>8.9</c:v>
+                </c:pt>
+                <c:pt idx="7">
+                  <c:v>8.1</c:v>
+                </c:pt>
+                <c:pt idx="8">
+                  <c:v>7.8</c:v>
+                </c:pt>
+              </c:numCache>
+            </c:numRef>
+          </c:val>
+        </c:ser>
+        <c:ser>
+          <c:idx val="1"/>
+          <c:order val="1"/>
+          <c:tx>
+            <c:strRef>
+              <c:f>Sheet1!$C$1</c:f>
+              <c:strCache>
+                <c:ptCount val="1"/>
+                <c:pt idx="0">
+                  <c:v>At 4.5% of sales ($M)</c:v>
+                </c:pt>
+              </c:strCache>
+            </c:strRef>
+          </c:tx>
+          <c:spPr>
+            <a:solidFill>
+              <a:srgbClr val="1F4E78"/>
+            </a:solidFill>
+          </c:spPr>
+          <c:cat>
+            <c:strRef>
+              <c:f>Sheet1!$A$2:$A$10</c:f>
+              <c:strCache>
+                <c:ptCount val="9"/>
+                <c:pt idx="0">
+                  <c:v>2017</c:v>
+                </c:pt>
+                <c:pt idx="1">
+                  <c:v>2018</c:v>
+                </c:pt>
+                <c:pt idx="2">
+                  <c:v>2019</c:v>
+                </c:pt>
+                <c:pt idx="3">
+                  <c:v>2020</c:v>
+                </c:pt>
+                <c:pt idx="4">
+                  <c:v>2021</c:v>
+                </c:pt>
+                <c:pt idx="5">
+                  <c:v>2022</c:v>
+                </c:pt>
+                <c:pt idx="6">
+                  <c:v>2023</c:v>
+                </c:pt>
+                <c:pt idx="7">
+                  <c:v>2024</c:v>
+                </c:pt>
+                <c:pt idx="8">
+                  <c:v>2025</c:v>
+                </c:pt>
+              </c:strCache>
+            </c:strRef>
+          </c:cat>
+          <c:val>
+            <c:numRef>
+              <c:f>Sheet1!$C$2:$C$10</c:f>
+              <c:numCache>
+                <c:formatCode>General</c:formatCode>
+                <c:ptCount val="9"/>
+                <c:pt idx="0">
+                  <c:v>19.4</c:v>
+                </c:pt>
+                <c:pt idx="1">
+                  <c:v>20.9</c:v>
+                </c:pt>
+                <c:pt idx="2">
+                  <c:v>21.8</c:v>
+                </c:pt>
+                <c:pt idx="3">
+                  <c:v>21.3</c:v>
+                </c:pt>
+                <c:pt idx="4">
+                  <c:v>18.7</c:v>
+                </c:pt>
+                <c:pt idx="5">
+                  <c:v>20.5</c:v>
+                </c:pt>
+                <c:pt idx="6">
+                  <c:v>17.8</c:v>
+                </c:pt>
+                <c:pt idx="7">
+                  <c:v>17.7</c:v>
+                </c:pt>
+                <c:pt idx="8">
+                  <c:v>16.1</c:v>
+                </c:pt>
+              </c:numCache>
+            </c:numRef>
+          </c:val>
+        </c:ser>
+        <c:axId val="-2068027336"/>
+        <c:axId val="-2113994440"/>
+      </c:barChart>
+      <c:catAx>
+        <c:axId val="-2068027336"/>
+        <c:scaling>
+          <c:orientation val="minMax"/>
+        </c:scaling>
+        <c:delete val="0"/>
+        <c:axPos val="b"/>
+        <c:majorTickMark val="out"/>
+        <c:minorTickMark val="none"/>
+        <c:tickLblPos val="nextTo"/>
+        <c:txPr>
+          <a:bodyPr/>
+          <a:lstStyle/>
+          <a:p>
+            <a:pPr>
+              <a:defRPr sz="1000"/>
+            </a:pPr>
+          </a:p>
+        </c:txPr>
+        <c:crossAx val="-2113994440"/>
+        <c:crosses val="autoZero"/>
+        <c:auto val="1"/>
+        <c:lblAlgn val="ctr"/>
+        <c:lblOffset val="100"/>
+        <c:noMultiLvlLbl val="0"/>
+      </c:catAx>
+      <c:valAx>
+        <c:axId val="-2113994440"/>
+        <c:scaling/>
+        <c:delete val="0"/>
+        <c:axPos val="l"/>
+        <c:majorGridlines/>
+        <c:majorTickMark val="out"/>
+        <c:minorTickMark val="none"/>
+        <c:tickLblPos val="nextTo"/>
+        <c:crossAx val="-2068027336"/>
+        <c:crosses val="autoZero"/>
+      </c:valAx>
+    </c:plotArea>
+    <c:legend>
+      <c:legendPos val="b"/>
+      <c:overlay val="0"/>
+      <c:txPr>
+        <a:bodyPr/>
+        <a:lstStyle/>
+        <a:p>
+          <a:pPr>
+            <a:defRPr sz="1100"/>
+          </a:pPr>
+        </a:p>
+      </c:txPr>
+    </c:legend>
+    <c:dispBlanksAs val="gap"/>
+  </c:chart>
+  <c:txPr>
+    <a:bodyPr/>
+    <a:lstStyle/>
+    <a:p>
+      <a:pPr>
+        <a:defRPr sz="1800"/>
+      </a:pPr>
+      <a:endParaRPr lang="en-US"/>
+    </a:p>
+  </c:txPr>
+  <c:externalData r:id="rId1">
+    <c:autoUpdate val="0"/>
+  </c:externalData>
+</c:chartSpace>
+</file>
+
+<file path=ppt/charts/chart5.xml><?xml version="1.0" encoding="utf-8"?>
 <c:chartSpace xmlns:c="http://schemas.openxmlformats.org/drawingml/2006/chart" xmlns:a="http://schemas.openxmlformats.org/drawingml/2006/main" xmlns:r="http://schemas.openxmlformats.org/officeDocument/2006/relationships">
   <c:date1904 val="0"/>
   <c:chart>
@@ -4241,6 +4531,394 @@
 </p:sld>
 </file>
 
+<file path=ppt/slides/slide10.xml><?xml version="1.0" encoding="utf-8"?>
+<p:sld xmlns:a="http://schemas.openxmlformats.org/drawingml/2006/main" xmlns:p="http://schemas.openxmlformats.org/presentationml/2006/main" xmlns:r="http://schemas.openxmlformats.org/officeDocument/2006/relationships">
+  <p:cSld>
+    <p:spTree>
+      <p:nvGrpSpPr>
+        <p:cNvPr id="1" name=""/>
+        <p:cNvGrpSpPr/>
+        <p:nvPr/>
+      </p:nvGrpSpPr>
+      <p:grpSpPr/>
+      <p:sp>
+        <p:nvSpPr>
+          <p:cNvPr id="2" name="TextBox 1"/>
+          <p:cNvSpPr txBox="1"/>
+          <p:nvPr/>
+        </p:nvSpPr>
+        <p:spPr>
+          <a:xfrm>
+            <a:off x="0" y="0"/>
+            <a:ext cx="12191695" cy="868680"/>
+          </a:xfrm>
+          <a:prstGeom prst="rect">
+            <a:avLst/>
+          </a:prstGeom>
+          <a:solidFill>
+            <a:srgbClr val="1F4E78"/>
+          </a:solidFill>
+        </p:spPr>
+        <p:txBody>
+          <a:bodyPr wrap="square" lIns="457200" tIns="164592">
+            <a:spAutoFit/>
+          </a:bodyPr>
+          <a:lstStyle/>
+          <a:p>
+            <a:r>
+              <a:rPr sz="2600" b="1">
+                <a:solidFill>
+                  <a:srgbClr val="FFFFFF"/>
+                </a:solidFill>
+              </a:rPr>
+              <a:t>The reinvestment requirement: two phases</a:t>
+            </a:r>
+          </a:p>
+        </p:txBody>
+      </p:sp>
+      <p:sp>
+        <p:nvSpPr>
+          <p:cNvPr id="3" name="TextBox 2"/>
+          <p:cNvSpPr txBox="1"/>
+          <p:nvPr/>
+        </p:nvSpPr>
+        <p:spPr>
+          <a:xfrm>
+            <a:off x="457200" y="914400"/>
+            <a:ext cx="11247120" cy="365760"/>
+          </a:xfrm>
+          <a:prstGeom prst="rect">
+            <a:avLst/>
+          </a:prstGeom>
+          <a:noFill/>
+        </p:spPr>
+        <p:txBody>
+          <a:bodyPr wrap="square">
+            <a:spAutoFit/>
+          </a:bodyPr>
+          <a:lstStyle/>
+          <a:p>
+            <a:pPr algn="l"/>
+            <a:r>
+              <a:rPr sz="1200" b="0">
+                <a:solidFill>
+                  <a:srgbClr val="595959"/>
+                </a:solidFill>
+              </a:rPr>
+              <a:t>Catch-up to repay the technological deficit, then a permanently higher run-rate to match peers</a:t>
+            </a:r>
+          </a:p>
+        </p:txBody>
+      </p:sp>
+      <p:graphicFrame>
+        <p:nvGraphicFramePr>
+          <p:cNvPr id="4" name="Chart 3"/>
+          <p:cNvGraphicFramePr>
+            <a:graphicFrameLocks noGrp="1"/>
+          </p:cNvGraphicFramePr>
+          <p:nvPr/>
+        </p:nvGraphicFramePr>
+        <p:xfrm>
+          <a:off x="457200" y="1463040"/>
+          <a:ext cx="6949440" cy="4023360"/>
+        </p:xfrm>
+        <a:graphic>
+          <a:graphicData uri="http://schemas.openxmlformats.org/drawingml/2006/chart">
+            <c:chart xmlns:c="http://schemas.openxmlformats.org/drawingml/2006/chart" r:id="rId2"/>
+          </a:graphicData>
+        </a:graphic>
+      </p:graphicFrame>
+      <p:sp>
+        <p:nvSpPr>
+          <p:cNvPr id="5" name="TextBox 4"/>
+          <p:cNvSpPr txBox="1"/>
+          <p:nvPr/>
+        </p:nvSpPr>
+        <p:spPr>
+          <a:xfrm>
+            <a:off x="7680960" y="1463040"/>
+            <a:ext cx="4069080" cy="4023360"/>
+          </a:xfrm>
+          <a:prstGeom prst="rect">
+            <a:avLst/>
+          </a:prstGeom>
+          <a:solidFill>
+            <a:srgbClr val="F2F2F2"/>
+          </a:solidFill>
+          <a:ln w="15875">
+            <a:solidFill>
+              <a:srgbClr val="548235"/>
+            </a:solidFill>
+          </a:ln>
+        </p:spPr>
+        <p:txBody>
+          <a:bodyPr wrap="square" lIns="137160" rIns="137160" tIns="109728">
+            <a:spAutoFit/>
+          </a:bodyPr>
+          <a:lstStyle/>
+          <a:p>
+            <a:r>
+              <a:rPr sz="1500" b="1">
+                <a:solidFill>
+                  <a:srgbClr val="548235"/>
+                </a:solidFill>
+              </a:rPr>
+              <a:t>The numbers</a:t>
+            </a:r>
+          </a:p>
+          <a:p>
+            <a:pPr>
+              <a:spcBef>
+                <a:spcPts val="400"/>
+              </a:spcBef>
+            </a:pPr>
+            <a:r>
+              <a:rPr sz="1200">
+                <a:solidFill>
+                  <a:srgbClr val="202020"/>
+                </a:solidFill>
+              </a:rPr>
+              <a:t>PHASE 1 — Catch-up (5 yrs):</a:t>
+            </a:r>
+          </a:p>
+          <a:p>
+            <a:pPr>
+              <a:spcBef>
+                <a:spcPts val="400"/>
+              </a:spcBef>
+            </a:pPr>
+            <a:r>
+              <a:rPr sz="1200">
+                <a:solidFill>
+                  <a:srgbClr val="202020"/>
+                </a:solidFill>
+              </a:rPr>
+              <a:t>~$27M/yr ≈ 7.5% of sales</a:t>
+            </a:r>
+          </a:p>
+          <a:p>
+            <a:pPr>
+              <a:spcBef>
+                <a:spcPts val="400"/>
+              </a:spcBef>
+            </a:pPr>
+            <a:r>
+              <a:rPr sz="1200">
+                <a:solidFill>
+                  <a:srgbClr val="202020"/>
+                </a:solidFill>
+              </a:rPr>
+              <a:t>= parity run-rate ($16-18M)</a:t>
+            </a:r>
+          </a:p>
+          <a:p>
+            <a:pPr>
+              <a:spcBef>
+                <a:spcPts val="400"/>
+              </a:spcBef>
+            </a:pPr>
+            <a:r>
+              <a:rPr sz="1200">
+                <a:solidFill>
+                  <a:srgbClr val="202020"/>
+                </a:solidFill>
+              </a:rPr>
+              <a:t>+ deficit repayment (~$10M/yr,</a:t>
+            </a:r>
+          </a:p>
+          <a:p>
+            <a:pPr>
+              <a:spcBef>
+                <a:spcPts val="400"/>
+              </a:spcBef>
+            </a:pPr>
+            <a:r>
+              <a:rPr sz="1200">
+                <a:solidFill>
+                  <a:srgbClr val="202020"/>
+                </a:solidFill>
+              </a:rPr>
+              <a:t>~$50M split between ADB</a:t>
+            </a:r>
+          </a:p>
+          <a:p>
+            <a:pPr>
+              <a:spcBef>
+                <a:spcPts val="400"/>
+              </a:spcBef>
+            </a:pPr>
+            <a:r>
+              <a:rPr sz="1200">
+                <a:solidFill>
+                  <a:srgbClr val="202020"/>
+                </a:solidFill>
+              </a:rPr>
+              <a:t>industrialization and e-pump/TCU</a:t>
+            </a:r>
+          </a:p>
+          <a:p>
+            <a:pPr>
+              <a:spcBef>
+                <a:spcPts val="400"/>
+              </a:spcBef>
+            </a:pPr>
+            <a:r>
+              <a:rPr sz="1200">
+                <a:solidFill>
+                  <a:srgbClr val="202020"/>
+                </a:solidFill>
+              </a:rPr>
+              <a:t>programs)</a:t>
+            </a:r>
+          </a:p>
+          <a:p>
+            <a:pPr>
+              <a:spcBef>
+                <a:spcPts val="400"/>
+              </a:spcBef>
+            </a:pPr>
+            <a:r>
+              <a:rPr sz="1200">
+                <a:solidFill>
+                  <a:srgbClr val="202020"/>
+                </a:solidFill>
+              </a:rPr>
+              <a:t>Total: ~$135M over 5 years</a:t>
+            </a:r>
+          </a:p>
+          <a:p>
+            <a:pPr>
+              <a:spcBef>
+                <a:spcPts val="400"/>
+              </a:spcBef>
+            </a:pPr>
+          </a:p>
+          <a:p>
+            <a:pPr>
+              <a:spcBef>
+                <a:spcPts val="400"/>
+              </a:spcBef>
+            </a:pPr>
+            <a:r>
+              <a:rPr sz="1200">
+                <a:solidFill>
+                  <a:srgbClr val="202020"/>
+                </a:solidFill>
+              </a:rPr>
+              <a:t>PHASE 2 — Steady state:</a:t>
+            </a:r>
+          </a:p>
+          <a:p>
+            <a:pPr>
+              <a:spcBef>
+                <a:spcPts val="400"/>
+              </a:spcBef>
+            </a:pPr>
+            <a:r>
+              <a:rPr sz="1200">
+                <a:solidFill>
+                  <a:srgbClr val="202020"/>
+                </a:solidFill>
+              </a:rPr>
+              <a:t>$16-18M/yr ≈ 4.5-5% of sales</a:t>
+            </a:r>
+          </a:p>
+          <a:p>
+            <a:pPr>
+              <a:spcBef>
+                <a:spcPts val="400"/>
+              </a:spcBef>
+            </a:pPr>
+            <a:r>
+              <a:rPr sz="1200">
+                <a:solidFill>
+                  <a:srgbClr val="202020"/>
+                </a:solidFill>
+              </a:rPr>
+              <a:t>= 2.2x today's spend, forever</a:t>
+            </a:r>
+          </a:p>
+          <a:p>
+            <a:pPr>
+              <a:spcBef>
+                <a:spcPts val="400"/>
+              </a:spcBef>
+            </a:pPr>
+          </a:p>
+          <a:p>
+            <a:pPr>
+              <a:spcBef>
+                <a:spcPts val="400"/>
+              </a:spcBef>
+            </a:pPr>
+            <a:r>
+              <a:rPr sz="1200">
+                <a:solidFill>
+                  <a:srgbClr val="202020"/>
+                </a:solidFill>
+              </a:rPr>
+              <a:t>Plus one-off ADB line capex</a:t>
+            </a:r>
+          </a:p>
+          <a:p>
+            <a:pPr>
+              <a:spcBef>
+                <a:spcPts val="400"/>
+              </a:spcBef>
+            </a:pPr>
+            <a:r>
+              <a:rPr sz="1200">
+                <a:solidFill>
+                  <a:srgbClr val="202020"/>
+                </a:solidFill>
+              </a:rPr>
+              <a:t>(~$30-50M, outside R&amp;D line)</a:t>
+            </a:r>
+          </a:p>
+        </p:txBody>
+      </p:sp>
+      <p:sp>
+        <p:nvSpPr>
+          <p:cNvPr id="6" name="TextBox 5"/>
+          <p:cNvSpPr txBox="1"/>
+          <p:nvPr/>
+        </p:nvSpPr>
+        <p:spPr>
+          <a:xfrm>
+            <a:off x="457200" y="5715000"/>
+            <a:ext cx="11247120" cy="1005840"/>
+          </a:xfrm>
+          <a:prstGeom prst="rect">
+            <a:avLst/>
+          </a:prstGeom>
+          <a:noFill/>
+        </p:spPr>
+        <p:txBody>
+          <a:bodyPr wrap="square">
+            <a:spAutoFit/>
+          </a:bodyPr>
+          <a:lstStyle/>
+          <a:p>
+            <a:pPr algn="l"/>
+            <a:r>
+              <a:rPr sz="1150" b="0">
+                <a:solidFill>
+                  <a:srgbClr val="595959"/>
+                </a:solidFill>
+              </a:rPr>
+              <a:t>Allocation discipline, per domain: (1) brakes — ADB industrialization for the Japanese disc flip, systems/ADAS access via Brakes India, timed to regulation and platform renewals; (2) pumps — e-pump/TCU sockets on Isuzu/Fuso/Hino electrified programs, timed to program kick-offs happening NOW. Funding: the ~$22-24M/yr peer-margin prize covers the ~$27M/yr program almost fully. The Concentric lesson: focused niche engineering at 2.3% intensity earns 25% gross margins — spend must buy sockets, not just scale.</a:t>
+            </a:r>
+          </a:p>
+        </p:txBody>
+      </p:sp>
+    </p:spTree>
+  </p:cSld>
+  <p:clrMapOvr>
+    <a:masterClrMapping/>
+  </p:clrMapOvr>
+</p:sld>
+</file>
+
 <file path=ppt/slides/slide2.xml><?xml version="1.0" encoding="utf-8"?>
 <p:sld xmlns:a="http://schemas.openxmlformats.org/drawingml/2006/main" xmlns:p="http://schemas.openxmlformats.org/presentationml/2006/main" xmlns:r="http://schemas.openxmlformats.org/officeDocument/2006/relationships">
   <p:cSld>
@@ -6647,7 +7325,7 @@
                   <a:srgbClr val="FFFFFF"/>
                 </a:solidFill>
               </a:rPr>
-              <a:t>At peer gross margins, TBK's gross profit rises ~50%</a:t>
+              <a:t>TBK underperforms peer gross margins in BOTH businesses</a:t>
             </a:r>
           </a:p>
         </p:txBody>
@@ -6681,7 +7359,7 @@
                   <a:srgbClr val="595959"/>
                 </a:solidFill>
               </a:rPr>
-              <a:t>TBK audited FY3/2026 (GM 12.5%) x comparable-peer margins — pump panel now includes Concentric's verified 25.2% (AR2023)</a:t>
+              <a:t>TBK audited FY3/2026 (blended 12.5%) vs comparable peers per panel  |  all figures USD at ¥150/USD</a:t>
             </a:r>
           </a:p>
         </p:txBody>
@@ -6696,7 +7374,7 @@
         </p:nvGraphicFramePr>
         <p:xfrm>
           <a:off x="457200" y="1463040"/>
-          <a:ext cx="6035040" cy="4023360"/>
+          <a:ext cx="6675120" cy="4206240"/>
         </p:xfrm>
         <a:graphic>
           <a:graphicData uri="http://schemas.openxmlformats.org/drawingml/2006/chart">
@@ -6712,8 +7390,8 @@
         </p:nvSpPr>
         <p:spPr>
           <a:xfrm>
-            <a:off x="6766560" y="1463040"/>
-            <a:ext cx="4983480" cy="2331720"/>
+            <a:off x="7406640" y="1463040"/>
+            <a:ext cx="4343400" cy="2103120"/>
           </a:xfrm>
           <a:prstGeom prst="rect">
             <a:avLst/>
@@ -6739,67 +7417,67 @@
                   <a:srgbClr val="1F4E78"/>
                 </a:solidFill>
               </a:rPr>
-              <a:t>Peer margin statistics (comparable set only)</a:t>
-            </a:r>
-          </a:p>
-          <a:p>
-            <a:pPr>
-              <a:spcBef>
-                <a:spcPts val="400"/>
-              </a:spcBef>
-            </a:pPr>
-            <a:r>
-              <a:rPr sz="1150">
-                <a:solidFill>
-                  <a:srgbClr val="202020"/>
-                </a:solidFill>
-              </a:rPr>
-              <a:t>BRAKES — avg 21.0% | median 23.4%</a:t>
-            </a:r>
-          </a:p>
-          <a:p>
-            <a:pPr>
-              <a:spcBef>
-                <a:spcPts val="400"/>
-              </a:spcBef>
-            </a:pPr>
-            <a:r>
-              <a:rPr sz="1150">
-                <a:solidFill>
-                  <a:srgbClr val="202020"/>
-                </a:solidFill>
-              </a:rPr>
-              <a:t>(Haldex 27.3%, Cummins 24.7%, SAF-Holland ~22%, Akebono 10.0%)</a:t>
-            </a:r>
-          </a:p>
-          <a:p>
-            <a:pPr>
-              <a:spcBef>
-                <a:spcPts val="400"/>
-              </a:spcBef>
-            </a:pPr>
-            <a:r>
-              <a:rPr sz="1150">
-                <a:solidFill>
-                  <a:srgbClr val="202020"/>
-                </a:solidFill>
-              </a:rPr>
-              <a:t>PUMPS — avg 17.0% | median 16.9%</a:t>
-            </a:r>
-          </a:p>
-          <a:p>
-            <a:pPr>
-              <a:spcBef>
-                <a:spcPts val="400"/>
-              </a:spcBef>
-            </a:pPr>
-            <a:r>
-              <a:rPr sz="1150">
-                <a:solidFill>
-                  <a:srgbClr val="202020"/>
-                </a:solidFill>
-              </a:rPr>
-              <a:t>(Concentric 25.2% verified AR2023, TPR 21.7%, Aisin 12.1%, Hanon 9.1%)</a:t>
+              <a:t>Brake peers (comparable basis)</a:t>
+            </a:r>
+          </a:p>
+          <a:p>
+            <a:pPr>
+              <a:spcBef>
+                <a:spcPts val="400"/>
+              </a:spcBef>
+            </a:pPr>
+            <a:r>
+              <a:rPr sz="1250">
+                <a:solidFill>
+                  <a:srgbClr val="202020"/>
+                </a:solidFill>
+              </a:rPr>
+              <a:t>Haldex 27.3% | Cummins 24.7%</a:t>
+            </a:r>
+          </a:p>
+          <a:p>
+            <a:pPr>
+              <a:spcBef>
+                <a:spcPts val="400"/>
+              </a:spcBef>
+            </a:pPr>
+            <a:r>
+              <a:rPr sz="1250">
+                <a:solidFill>
+                  <a:srgbClr val="202020"/>
+                </a:solidFill>
+              </a:rPr>
+              <a:t>SAF-Holland ~22% | Akebono 10.0%</a:t>
+            </a:r>
+          </a:p>
+          <a:p>
+            <a:pPr>
+              <a:spcBef>
+                <a:spcPts val="400"/>
+              </a:spcBef>
+            </a:pPr>
+            <a:r>
+              <a:rPr sz="1250">
+                <a:solidFill>
+                  <a:srgbClr val="202020"/>
+                </a:solidFill>
+              </a:rPr>
+              <a:t>TBK trails every brake peer except</a:t>
+            </a:r>
+          </a:p>
+          <a:p>
+            <a:pPr>
+              <a:spcBef>
+                <a:spcPts val="400"/>
+              </a:spcBef>
+            </a:pPr>
+            <a:r>
+              <a:rPr sz="1250">
+                <a:solidFill>
+                  <a:srgbClr val="202020"/>
+                </a:solidFill>
+              </a:rPr>
+              <a:t>Akebono — by 9-11 points</a:t>
             </a:r>
           </a:p>
         </p:txBody>
@@ -6812,8 +7490,8 @@
         </p:nvSpPr>
         <p:spPr>
           <a:xfrm>
-            <a:off x="6766560" y="3931920"/>
-            <a:ext cx="4983480" cy="2331720"/>
+            <a:off x="7406640" y="3703320"/>
+            <a:ext cx="4343400" cy="2103120"/>
           </a:xfrm>
           <a:prstGeom prst="rect">
             <a:avLst/>
@@ -6839,82 +7517,82 @@
                   <a:srgbClr val="548235"/>
                 </a:solidFill>
               </a:rPr>
-              <a:t>The math (TBK FY3/2026, ¥M)</a:t>
-            </a:r>
-          </a:p>
-          <a:p>
-            <a:pPr>
-              <a:spcBef>
-                <a:spcPts val="400"/>
-              </a:spcBef>
-            </a:pPr>
-            <a:r>
-              <a:rPr sz="1150">
-                <a:solidFill>
-                  <a:srgbClr val="202020"/>
-                </a:solidFill>
-              </a:rPr>
-              <a:t>Sales ¥54,756; division split est. from FY3/25 (34.7% / 65.3%)</a:t>
-            </a:r>
-          </a:p>
-          <a:p>
-            <a:pPr>
-              <a:spcBef>
-                <a:spcPts val="400"/>
-              </a:spcBef>
-            </a:pPr>
-            <a:r>
-              <a:rPr sz="1150">
-                <a:solidFill>
-                  <a:srgbClr val="202020"/>
-                </a:solidFill>
-              </a:rPr>
-              <a:t>Brakes ~¥18,981 x 21.0% / 23.4% = ¥3,986 / ¥4,432</a:t>
-            </a:r>
-          </a:p>
-          <a:p>
-            <a:pPr>
-              <a:spcBef>
-                <a:spcPts val="400"/>
-              </a:spcBef>
-            </a:pPr>
-            <a:r>
-              <a:rPr sz="1150">
-                <a:solidFill>
-                  <a:srgbClr val="202020"/>
-                </a:solidFill>
-              </a:rPr>
-              <a:t>Pumps &amp; eng. comp. ~¥35,775 x 17.0% / 16.9% = ¥6,082 / ¥6,046</a:t>
-            </a:r>
-          </a:p>
-          <a:p>
-            <a:pPr>
-              <a:spcBef>
-                <a:spcPts val="400"/>
-              </a:spcBef>
-            </a:pPr>
-            <a:r>
-              <a:rPr sz="1150">
-                <a:solidFill>
-                  <a:srgbClr val="202020"/>
-                </a:solidFill>
-              </a:rPr>
-              <a:t>TOTAL: avg ¥10,068 (18.4%) | median ¥10,478 (19.1%)</a:t>
-            </a:r>
-          </a:p>
-          <a:p>
-            <a:pPr>
-              <a:spcBef>
-                <a:spcPts val="400"/>
-              </a:spcBef>
-            </a:pPr>
-            <a:r>
-              <a:rPr sz="1150">
-                <a:solidFill>
-                  <a:srgbClr val="202020"/>
-                </a:solidFill>
-              </a:rPr>
-              <a:t>vs actual ¥6,825 (12.5%) → UPLIFT +¥3.2-3.7bn = +48-54%</a:t>
+              <a:t>Pump peers (comparable basis)</a:t>
+            </a:r>
+          </a:p>
+          <a:p>
+            <a:pPr>
+              <a:spcBef>
+                <a:spcPts val="400"/>
+              </a:spcBef>
+            </a:pPr>
+            <a:r>
+              <a:rPr sz="1250">
+                <a:solidFill>
+                  <a:srgbClr val="202020"/>
+                </a:solidFill>
+              </a:rPr>
+              <a:t>Concentric 25.2% (verified AR2023)</a:t>
+            </a:r>
+          </a:p>
+          <a:p>
+            <a:pPr>
+              <a:spcBef>
+                <a:spcPts val="400"/>
+              </a:spcBef>
+            </a:pPr>
+            <a:r>
+              <a:rPr sz="1250">
+                <a:solidFill>
+                  <a:srgbClr val="202020"/>
+                </a:solidFill>
+              </a:rPr>
+              <a:t>TPR 21.7% | Aisin 12.1% | Hanon 9.1%</a:t>
+            </a:r>
+          </a:p>
+          <a:p>
+            <a:pPr>
+              <a:spcBef>
+                <a:spcPts val="400"/>
+              </a:spcBef>
+            </a:pPr>
+            <a:r>
+              <a:rPr sz="1250">
+                <a:solidFill>
+                  <a:srgbClr val="202020"/>
+                </a:solidFill>
+              </a:rPr>
+              <a:t>TBK trails the panel average by</a:t>
+            </a:r>
+          </a:p>
+          <a:p>
+            <a:pPr>
+              <a:spcBef>
+                <a:spcPts val="400"/>
+              </a:spcBef>
+            </a:pPr>
+            <a:r>
+              <a:rPr sz="1250">
+                <a:solidFill>
+                  <a:srgbClr val="202020"/>
+                </a:solidFill>
+              </a:rPr>
+              <a:t>~4.5 points — and the pure-play</a:t>
+            </a:r>
+          </a:p>
+          <a:p>
+            <a:pPr>
+              <a:spcBef>
+                <a:spcPts val="400"/>
+              </a:spcBef>
+            </a:pPr>
+            <a:r>
+              <a:rPr sz="1250">
+                <a:solidFill>
+                  <a:srgbClr val="202020"/>
+                </a:solidFill>
+              </a:rPr>
+              <a:t>CV pump comp by ~13 points</a:t>
             </a:r>
           </a:p>
         </p:txBody>
@@ -6927,8 +7605,8 @@
         </p:nvSpPr>
         <p:spPr>
           <a:xfrm>
-            <a:off x="457200" y="5669280"/>
-            <a:ext cx="11247120" cy="1097280"/>
+            <a:off x="457200" y="5806440"/>
+            <a:ext cx="11247120" cy="822960"/>
           </a:xfrm>
           <a:prstGeom prst="rect">
             <a:avLst/>
@@ -6948,7 +7626,7 @@
                   <a:srgbClr val="595959"/>
                 </a:solidFill>
               </a:rPr>
-              <a:t>FY3/2026 marks real progress (GM 10.6% → 12.5%, OP +59%, North America exited, ¥1.1bn raised from Brakes India, capex up to ¥3.3bn) — but Concentric's verified 25.2% raises the pump bar: peer-parity margins would add ~¥3.2-3.7bn gross profit, comfortably funding the R&amp;D catch-up (~¥2.6bn/yr). Caveats: FY3/26 division split estimated (yuho due June 2026); peer set excludes nature-of-expense reporters and customers.</a:t>
+              <a:t>TBK does not disclose gross profit per division, so its blended 12.5% is shown against both panels. Even on the most charitable reading — assuming all underperformance sits in one business — TBK is below peer average in the other. Peer set: IFRS cost-of-sales / JGAAP reporters only.</a:t>
             </a:r>
           </a:p>
         </p:txBody>
@@ -7001,6 +7679,367 @@
                   <a:srgbClr val="FFFFFF"/>
                 </a:solidFill>
               </a:rPr>
+              <a:t>Closing the margin gap is worth ~$22-24M more gross profit per year</a:t>
+            </a:r>
+          </a:p>
+        </p:txBody>
+      </p:sp>
+      <p:sp>
+        <p:nvSpPr>
+          <p:cNvPr id="3" name="TextBox 2"/>
+          <p:cNvSpPr txBox="1"/>
+          <p:nvPr/>
+        </p:nvSpPr>
+        <p:spPr>
+          <a:xfrm>
+            <a:off x="457200" y="914400"/>
+            <a:ext cx="11247120" cy="365760"/>
+          </a:xfrm>
+          <a:prstGeom prst="rect">
+            <a:avLst/>
+          </a:prstGeom>
+          <a:noFill/>
+        </p:spPr>
+        <p:txBody>
+          <a:bodyPr wrap="square">
+            <a:spAutoFit/>
+          </a:bodyPr>
+          <a:lstStyle/>
+          <a:p>
+            <a:pPr algn="l"/>
+            <a:r>
+              <a:rPr sz="1200" b="0">
+                <a:solidFill>
+                  <a:srgbClr val="595959"/>
+                </a:solidFill>
+              </a:rPr>
+              <a:t>TBK FY3/2026 sales ($365M) at peer margins  |  USD at ¥150/USD  |  division split estimated from FY3/2025 (35% / 65%)</a:t>
+            </a:r>
+          </a:p>
+        </p:txBody>
+      </p:sp>
+      <p:graphicFrame>
+        <p:nvGraphicFramePr>
+          <p:cNvPr id="4" name="Chart 3"/>
+          <p:cNvGraphicFramePr>
+            <a:graphicFrameLocks noGrp="1"/>
+          </p:cNvGraphicFramePr>
+          <p:nvPr/>
+        </p:nvGraphicFramePr>
+        <p:xfrm>
+          <a:off x="457200" y="1463040"/>
+          <a:ext cx="6217920" cy="4206240"/>
+        </p:xfrm>
+        <a:graphic>
+          <a:graphicData uri="http://schemas.openxmlformats.org/drawingml/2006/chart">
+            <c:chart xmlns:c="http://schemas.openxmlformats.org/drawingml/2006/chart" r:id="rId2"/>
+          </a:graphicData>
+        </a:graphic>
+      </p:graphicFrame>
+      <p:sp>
+        <p:nvSpPr>
+          <p:cNvPr id="5" name="TextBox 4"/>
+          <p:cNvSpPr txBox="1"/>
+          <p:nvPr/>
+        </p:nvSpPr>
+        <p:spPr>
+          <a:xfrm>
+            <a:off x="6949440" y="1463040"/>
+            <a:ext cx="4800600" cy="1828800"/>
+          </a:xfrm>
+          <a:prstGeom prst="rect">
+            <a:avLst/>
+          </a:prstGeom>
+          <a:solidFill>
+            <a:srgbClr val="F2F2F2"/>
+          </a:solidFill>
+          <a:ln w="15875">
+            <a:solidFill>
+              <a:srgbClr val="1F4E78"/>
+            </a:solidFill>
+          </a:ln>
+        </p:spPr>
+        <p:txBody>
+          <a:bodyPr wrap="square" lIns="137160" rIns="137160" tIns="109728">
+            <a:spAutoFit/>
+          </a:bodyPr>
+          <a:lstStyle/>
+          <a:p>
+            <a:r>
+              <a:rPr sz="1500" b="1">
+                <a:solidFill>
+                  <a:srgbClr val="1F4E78"/>
+                </a:solidFill>
+              </a:rPr>
+              <a:t>The annual prize</a:t>
+            </a:r>
+          </a:p>
+          <a:p>
+            <a:pPr>
+              <a:spcBef>
+                <a:spcPts val="400"/>
+              </a:spcBef>
+            </a:pPr>
+            <a:r>
+              <a:rPr sz="1300">
+                <a:solidFill>
+                  <a:srgbClr val="202020"/>
+                </a:solidFill>
+              </a:rPr>
+              <a:t>+$21.6M/yr at peer AVERAGE margins</a:t>
+            </a:r>
+          </a:p>
+          <a:p>
+            <a:pPr>
+              <a:spcBef>
+                <a:spcPts val="400"/>
+              </a:spcBef>
+            </a:pPr>
+            <a:r>
+              <a:rPr sz="1300">
+                <a:solidFill>
+                  <a:srgbClr val="202020"/>
+                </a:solidFill>
+              </a:rPr>
+              <a:t>+$24.4M/yr at peer MEDIAN margins</a:t>
+            </a:r>
+          </a:p>
+          <a:p>
+            <a:pPr>
+              <a:spcBef>
+                <a:spcPts val="400"/>
+              </a:spcBef>
+            </a:pPr>
+            <a:r>
+              <a:rPr sz="1300">
+                <a:solidFill>
+                  <a:srgbClr val="202020"/>
+                </a:solidFill>
+              </a:rPr>
+              <a:t>≈ +50% on today's $45.5M gross profit</a:t>
+            </a:r>
+          </a:p>
+          <a:p>
+            <a:pPr>
+              <a:spcBef>
+                <a:spcPts val="400"/>
+              </a:spcBef>
+            </a:pPr>
+            <a:r>
+              <a:rPr sz="1300">
+                <a:solidFill>
+                  <a:srgbClr val="202020"/>
+                </a:solidFill>
+              </a:rPr>
+              <a:t>Split roughly half brakes, half pumps (~$11-14M each)</a:t>
+            </a:r>
+          </a:p>
+        </p:txBody>
+      </p:sp>
+      <p:sp>
+        <p:nvSpPr>
+          <p:cNvPr id="6" name="TextBox 5"/>
+          <p:cNvSpPr txBox="1"/>
+          <p:nvPr/>
+        </p:nvSpPr>
+        <p:spPr>
+          <a:xfrm>
+            <a:off x="6949440" y="3429000"/>
+            <a:ext cx="4800600" cy="2377440"/>
+          </a:xfrm>
+          <a:prstGeom prst="rect">
+            <a:avLst/>
+          </a:prstGeom>
+          <a:solidFill>
+            <a:srgbClr val="F2F2F2"/>
+          </a:solidFill>
+          <a:ln w="15875">
+            <a:solidFill>
+              <a:srgbClr val="548235"/>
+            </a:solidFill>
+          </a:ln>
+        </p:spPr>
+        <p:txBody>
+          <a:bodyPr wrap="square" lIns="137160" rIns="137160" tIns="109728">
+            <a:spAutoFit/>
+          </a:bodyPr>
+          <a:lstStyle/>
+          <a:p>
+            <a:r>
+              <a:rPr sz="1500" b="1">
+                <a:solidFill>
+                  <a:srgbClr val="548235"/>
+                </a:solidFill>
+              </a:rPr>
+              <a:t>What it funds</a:t>
+            </a:r>
+          </a:p>
+          <a:p>
+            <a:pPr>
+              <a:spcBef>
+                <a:spcPts val="400"/>
+              </a:spcBef>
+            </a:pPr>
+            <a:r>
+              <a:rPr sz="1300">
+                <a:solidFill>
+                  <a:srgbClr val="202020"/>
+                </a:solidFill>
+              </a:rPr>
+              <a:t>The entire R&amp;D catch-up program costs ~$27M/yr</a:t>
+            </a:r>
+          </a:p>
+          <a:p>
+            <a:pPr>
+              <a:spcBef>
+                <a:spcPts val="400"/>
+              </a:spcBef>
+            </a:pPr>
+            <a:r>
+              <a:rPr sz="1300">
+                <a:solidFill>
+                  <a:srgbClr val="202020"/>
+                </a:solidFill>
+              </a:rPr>
+              <a:t>(parity run-rate $17M + deficit repayment $10M)</a:t>
+            </a:r>
+          </a:p>
+          <a:p>
+            <a:pPr>
+              <a:spcBef>
+                <a:spcPts val="400"/>
+              </a:spcBef>
+            </a:pPr>
+            <a:r>
+              <a:rPr sz="1300">
+                <a:solidFill>
+                  <a:srgbClr val="202020"/>
+                </a:solidFill>
+              </a:rPr>
+              <a:t>→ closing ~90% of the margin gap pays for ALL of it</a:t>
+            </a:r>
+          </a:p>
+          <a:p>
+            <a:pPr>
+              <a:spcBef>
+                <a:spcPts val="400"/>
+              </a:spcBef>
+            </a:pPr>
+          </a:p>
+          <a:p>
+            <a:pPr>
+              <a:spcBef>
+                <a:spcPts val="400"/>
+              </a:spcBef>
+            </a:pPr>
+            <a:r>
+              <a:rPr sz="1300">
+                <a:solidFill>
+                  <a:srgbClr val="202020"/>
+                </a:solidFill>
+              </a:rPr>
+              <a:t>FY3/2026 already delivered the first ~$7M/yr</a:t>
+            </a:r>
+          </a:p>
+          <a:p>
+            <a:pPr>
+              <a:spcBef>
+                <a:spcPts val="400"/>
+              </a:spcBef>
+            </a:pPr>
+            <a:r>
+              <a:rPr sz="1300">
+                <a:solidFill>
+                  <a:srgbClr val="202020"/>
+                </a:solidFill>
+              </a:rPr>
+              <a:t>(margin 10.6% → 12.5%) — the path is proven, not theoretical</a:t>
+            </a:r>
+          </a:p>
+        </p:txBody>
+      </p:sp>
+      <p:sp>
+        <p:nvSpPr>
+          <p:cNvPr id="7" name="TextBox 6"/>
+          <p:cNvSpPr txBox="1"/>
+          <p:nvPr/>
+        </p:nvSpPr>
+        <p:spPr>
+          <a:xfrm>
+            <a:off x="457200" y="5806440"/>
+            <a:ext cx="11247120" cy="822960"/>
+          </a:xfrm>
+          <a:prstGeom prst="rect">
+            <a:avLst/>
+          </a:prstGeom>
+          <a:noFill/>
+        </p:spPr>
+        <p:txBody>
+          <a:bodyPr wrap="square">
+            <a:spAutoFit/>
+          </a:bodyPr>
+          <a:lstStyle/>
+          <a:p>
+            <a:pPr algn="l"/>
+            <a:r>
+              <a:rPr sz="1150" b="0">
+                <a:solidFill>
+                  <a:srgbClr val="595959"/>
+                </a:solidFill>
+              </a:rPr>
+              <a:t>Method: brakes ~$127M sales x peer avg 21.0% / median 23.4%; pumps &amp; engine components ~$238M x 17.0% / 16.9%; vs actual blended 12.5%. Margin levers per the benchmark: aftermarket/branded content, niche pricing power (Concentric/TPR model), price-down discipline, and mix shift to disc brakes and e-pumps.</a:t>
+            </a:r>
+          </a:p>
+        </p:txBody>
+      </p:sp>
+    </p:spTree>
+  </p:cSld>
+  <p:clrMapOvr>
+    <a:masterClrMapping/>
+  </p:clrMapOvr>
+</p:sld>
+</file>
+
+<file path=ppt/slides/slide9.xml><?xml version="1.0" encoding="utf-8"?>
+<p:sld xmlns:a="http://schemas.openxmlformats.org/drawingml/2006/main" xmlns:p="http://schemas.openxmlformats.org/presentationml/2006/main" xmlns:r="http://schemas.openxmlformats.org/officeDocument/2006/relationships">
+  <p:cSld>
+    <p:spTree>
+      <p:nvGrpSpPr>
+        <p:cNvPr id="1" name=""/>
+        <p:cNvGrpSpPr/>
+        <p:nvPr/>
+      </p:nvGrpSpPr>
+      <p:grpSpPr/>
+      <p:sp>
+        <p:nvSpPr>
+          <p:cNvPr id="2" name="TextBox 1"/>
+          <p:cNvSpPr txBox="1"/>
+          <p:nvPr/>
+        </p:nvSpPr>
+        <p:spPr>
+          <a:xfrm>
+            <a:off x="0" y="0"/>
+            <a:ext cx="12191695" cy="868680"/>
+          </a:xfrm>
+          <a:prstGeom prst="rect">
+            <a:avLst/>
+          </a:prstGeom>
+          <a:solidFill>
+            <a:srgbClr val="1F4E78"/>
+          </a:solidFill>
+        </p:spPr>
+        <p:txBody>
+          <a:bodyPr wrap="square" lIns="457200" tIns="164592">
+            <a:spAutoFit/>
+          </a:bodyPr>
+          <a:lstStyle/>
+          <a:p>
+            <a:r>
+              <a:rPr sz="2600" b="1">
+                <a:solidFill>
+                  <a:srgbClr val="FFFFFF"/>
+                </a:solidFill>
+              </a:rPr>
               <a:t>TBK's accumulated R&amp;D deficit: ~US$100M over a decade</a:t>
             </a:r>
           </a:p>
@@ -7269,394 +8308,6 @@
                 </a:solidFill>
               </a:rPr>
               <a:t>Compounding the problem: TBK's marginal return on invested capital has been negative on every horizon (-2% to -10%) — the deficit is in direction as well as amount. Capex fell to $16M by FY25, though FY3/26 shows a turn: capex back up to ¥3.3bn and ¥1.1bn equity raised from Brakes India.</a:t>
-            </a:r>
-          </a:p>
-        </p:txBody>
-      </p:sp>
-    </p:spTree>
-  </p:cSld>
-  <p:clrMapOvr>
-    <a:masterClrMapping/>
-  </p:clrMapOvr>
-</p:sld>
-</file>
-
-<file path=ppt/slides/slide9.xml><?xml version="1.0" encoding="utf-8"?>
-<p:sld xmlns:a="http://schemas.openxmlformats.org/drawingml/2006/main" xmlns:p="http://schemas.openxmlformats.org/presentationml/2006/main" xmlns:r="http://schemas.openxmlformats.org/officeDocument/2006/relationships">
-  <p:cSld>
-    <p:spTree>
-      <p:nvGrpSpPr>
-        <p:cNvPr id="1" name=""/>
-        <p:cNvGrpSpPr/>
-        <p:nvPr/>
-      </p:nvGrpSpPr>
-      <p:grpSpPr/>
-      <p:sp>
-        <p:nvSpPr>
-          <p:cNvPr id="2" name="TextBox 1"/>
-          <p:cNvSpPr txBox="1"/>
-          <p:nvPr/>
-        </p:nvSpPr>
-        <p:spPr>
-          <a:xfrm>
-            <a:off x="0" y="0"/>
-            <a:ext cx="12191695" cy="868680"/>
-          </a:xfrm>
-          <a:prstGeom prst="rect">
-            <a:avLst/>
-          </a:prstGeom>
-          <a:solidFill>
-            <a:srgbClr val="1F4E78"/>
-          </a:solidFill>
-        </p:spPr>
-        <p:txBody>
-          <a:bodyPr wrap="square" lIns="457200" tIns="164592">
-            <a:spAutoFit/>
-          </a:bodyPr>
-          <a:lstStyle/>
-          <a:p>
-            <a:r>
-              <a:rPr sz="2600" b="1">
-                <a:solidFill>
-                  <a:srgbClr val="FFFFFF"/>
-                </a:solidFill>
-              </a:rPr>
-              <a:t>The reinvestment requirement: two phases</a:t>
-            </a:r>
-          </a:p>
-        </p:txBody>
-      </p:sp>
-      <p:sp>
-        <p:nvSpPr>
-          <p:cNvPr id="3" name="TextBox 2"/>
-          <p:cNvSpPr txBox="1"/>
-          <p:nvPr/>
-        </p:nvSpPr>
-        <p:spPr>
-          <a:xfrm>
-            <a:off x="457200" y="914400"/>
-            <a:ext cx="11247120" cy="365760"/>
-          </a:xfrm>
-          <a:prstGeom prst="rect">
-            <a:avLst/>
-          </a:prstGeom>
-          <a:noFill/>
-        </p:spPr>
-        <p:txBody>
-          <a:bodyPr wrap="square">
-            <a:spAutoFit/>
-          </a:bodyPr>
-          <a:lstStyle/>
-          <a:p>
-            <a:pPr algn="l"/>
-            <a:r>
-              <a:rPr sz="1200" b="0">
-                <a:solidFill>
-                  <a:srgbClr val="595959"/>
-                </a:solidFill>
-              </a:rPr>
-              <a:t>Catch-up to repay the technological deficit, then a permanently higher run-rate to match peers</a:t>
-            </a:r>
-          </a:p>
-        </p:txBody>
-      </p:sp>
-      <p:graphicFrame>
-        <p:nvGraphicFramePr>
-          <p:cNvPr id="4" name="Chart 3"/>
-          <p:cNvGraphicFramePr>
-            <a:graphicFrameLocks noGrp="1"/>
-          </p:cNvGraphicFramePr>
-          <p:nvPr/>
-        </p:nvGraphicFramePr>
-        <p:xfrm>
-          <a:off x="457200" y="1463040"/>
-          <a:ext cx="6949440" cy="4023360"/>
-        </p:xfrm>
-        <a:graphic>
-          <a:graphicData uri="http://schemas.openxmlformats.org/drawingml/2006/chart">
-            <c:chart xmlns:c="http://schemas.openxmlformats.org/drawingml/2006/chart" r:id="rId2"/>
-          </a:graphicData>
-        </a:graphic>
-      </p:graphicFrame>
-      <p:sp>
-        <p:nvSpPr>
-          <p:cNvPr id="5" name="TextBox 4"/>
-          <p:cNvSpPr txBox="1"/>
-          <p:nvPr/>
-        </p:nvSpPr>
-        <p:spPr>
-          <a:xfrm>
-            <a:off x="7680960" y="1463040"/>
-            <a:ext cx="4069080" cy="4023360"/>
-          </a:xfrm>
-          <a:prstGeom prst="rect">
-            <a:avLst/>
-          </a:prstGeom>
-          <a:solidFill>
-            <a:srgbClr val="F2F2F2"/>
-          </a:solidFill>
-          <a:ln w="15875">
-            <a:solidFill>
-              <a:srgbClr val="548235"/>
-            </a:solidFill>
-          </a:ln>
-        </p:spPr>
-        <p:txBody>
-          <a:bodyPr wrap="square" lIns="137160" rIns="137160" tIns="109728">
-            <a:spAutoFit/>
-          </a:bodyPr>
-          <a:lstStyle/>
-          <a:p>
-            <a:r>
-              <a:rPr sz="1500" b="1">
-                <a:solidFill>
-                  <a:srgbClr val="548235"/>
-                </a:solidFill>
-              </a:rPr>
-              <a:t>The numbers</a:t>
-            </a:r>
-          </a:p>
-          <a:p>
-            <a:pPr>
-              <a:spcBef>
-                <a:spcPts val="400"/>
-              </a:spcBef>
-            </a:pPr>
-            <a:r>
-              <a:rPr sz="1200">
-                <a:solidFill>
-                  <a:srgbClr val="202020"/>
-                </a:solidFill>
-              </a:rPr>
-              <a:t>PHASE 1 — Catch-up (5 yrs):</a:t>
-            </a:r>
-          </a:p>
-          <a:p>
-            <a:pPr>
-              <a:spcBef>
-                <a:spcPts val="400"/>
-              </a:spcBef>
-            </a:pPr>
-            <a:r>
-              <a:rPr sz="1200">
-                <a:solidFill>
-                  <a:srgbClr val="202020"/>
-                </a:solidFill>
-              </a:rPr>
-              <a:t>~$27M/yr ≈ 7.5% of sales</a:t>
-            </a:r>
-          </a:p>
-          <a:p>
-            <a:pPr>
-              <a:spcBef>
-                <a:spcPts val="400"/>
-              </a:spcBef>
-            </a:pPr>
-            <a:r>
-              <a:rPr sz="1200">
-                <a:solidFill>
-                  <a:srgbClr val="202020"/>
-                </a:solidFill>
-              </a:rPr>
-              <a:t>= parity run-rate ($16-18M)</a:t>
-            </a:r>
-          </a:p>
-          <a:p>
-            <a:pPr>
-              <a:spcBef>
-                <a:spcPts val="400"/>
-              </a:spcBef>
-            </a:pPr>
-            <a:r>
-              <a:rPr sz="1200">
-                <a:solidFill>
-                  <a:srgbClr val="202020"/>
-                </a:solidFill>
-              </a:rPr>
-              <a:t>+ deficit repayment (~$10M/yr,</a:t>
-            </a:r>
-          </a:p>
-          <a:p>
-            <a:pPr>
-              <a:spcBef>
-                <a:spcPts val="400"/>
-              </a:spcBef>
-            </a:pPr>
-            <a:r>
-              <a:rPr sz="1200">
-                <a:solidFill>
-                  <a:srgbClr val="202020"/>
-                </a:solidFill>
-              </a:rPr>
-              <a:t>~$50M split between ADB</a:t>
-            </a:r>
-          </a:p>
-          <a:p>
-            <a:pPr>
-              <a:spcBef>
-                <a:spcPts val="400"/>
-              </a:spcBef>
-            </a:pPr>
-            <a:r>
-              <a:rPr sz="1200">
-                <a:solidFill>
-                  <a:srgbClr val="202020"/>
-                </a:solidFill>
-              </a:rPr>
-              <a:t>industrialization and e-pump/TCU</a:t>
-            </a:r>
-          </a:p>
-          <a:p>
-            <a:pPr>
-              <a:spcBef>
-                <a:spcPts val="400"/>
-              </a:spcBef>
-            </a:pPr>
-            <a:r>
-              <a:rPr sz="1200">
-                <a:solidFill>
-                  <a:srgbClr val="202020"/>
-                </a:solidFill>
-              </a:rPr>
-              <a:t>programs)</a:t>
-            </a:r>
-          </a:p>
-          <a:p>
-            <a:pPr>
-              <a:spcBef>
-                <a:spcPts val="400"/>
-              </a:spcBef>
-            </a:pPr>
-            <a:r>
-              <a:rPr sz="1200">
-                <a:solidFill>
-                  <a:srgbClr val="202020"/>
-                </a:solidFill>
-              </a:rPr>
-              <a:t>Total: ~$135M over 5 years</a:t>
-            </a:r>
-          </a:p>
-          <a:p>
-            <a:pPr>
-              <a:spcBef>
-                <a:spcPts val="400"/>
-              </a:spcBef>
-            </a:pPr>
-          </a:p>
-          <a:p>
-            <a:pPr>
-              <a:spcBef>
-                <a:spcPts val="400"/>
-              </a:spcBef>
-            </a:pPr>
-            <a:r>
-              <a:rPr sz="1200">
-                <a:solidFill>
-                  <a:srgbClr val="202020"/>
-                </a:solidFill>
-              </a:rPr>
-              <a:t>PHASE 2 — Steady state:</a:t>
-            </a:r>
-          </a:p>
-          <a:p>
-            <a:pPr>
-              <a:spcBef>
-                <a:spcPts val="400"/>
-              </a:spcBef>
-            </a:pPr>
-            <a:r>
-              <a:rPr sz="1200">
-                <a:solidFill>
-                  <a:srgbClr val="202020"/>
-                </a:solidFill>
-              </a:rPr>
-              <a:t>$16-18M/yr ≈ 4.5-5% of sales</a:t>
-            </a:r>
-          </a:p>
-          <a:p>
-            <a:pPr>
-              <a:spcBef>
-                <a:spcPts val="400"/>
-              </a:spcBef>
-            </a:pPr>
-            <a:r>
-              <a:rPr sz="1200">
-                <a:solidFill>
-                  <a:srgbClr val="202020"/>
-                </a:solidFill>
-              </a:rPr>
-              <a:t>= 2.2x today's spend, forever</a:t>
-            </a:r>
-          </a:p>
-          <a:p>
-            <a:pPr>
-              <a:spcBef>
-                <a:spcPts val="400"/>
-              </a:spcBef>
-            </a:pPr>
-          </a:p>
-          <a:p>
-            <a:pPr>
-              <a:spcBef>
-                <a:spcPts val="400"/>
-              </a:spcBef>
-            </a:pPr>
-            <a:r>
-              <a:rPr sz="1200">
-                <a:solidFill>
-                  <a:srgbClr val="202020"/>
-                </a:solidFill>
-              </a:rPr>
-              <a:t>Plus one-off ADB line capex</a:t>
-            </a:r>
-          </a:p>
-          <a:p>
-            <a:pPr>
-              <a:spcBef>
-                <a:spcPts val="400"/>
-              </a:spcBef>
-            </a:pPr>
-            <a:r>
-              <a:rPr sz="1200">
-                <a:solidFill>
-                  <a:srgbClr val="202020"/>
-                </a:solidFill>
-              </a:rPr>
-              <a:t>(~$30-50M, outside R&amp;D line)</a:t>
-            </a:r>
-          </a:p>
-        </p:txBody>
-      </p:sp>
-      <p:sp>
-        <p:nvSpPr>
-          <p:cNvPr id="6" name="TextBox 5"/>
-          <p:cNvSpPr txBox="1"/>
-          <p:nvPr/>
-        </p:nvSpPr>
-        <p:spPr>
-          <a:xfrm>
-            <a:off x="457200" y="5715000"/>
-            <a:ext cx="11247120" cy="1005840"/>
-          </a:xfrm>
-          <a:prstGeom prst="rect">
-            <a:avLst/>
-          </a:prstGeom>
-          <a:noFill/>
-        </p:spPr>
-        <p:txBody>
-          <a:bodyPr wrap="square">
-            <a:spAutoFit/>
-          </a:bodyPr>
-          <a:lstStyle/>
-          <a:p>
-            <a:pPr algn="l"/>
-            <a:r>
-              <a:rPr sz="1150" b="0">
-                <a:solidFill>
-                  <a:srgbClr val="595959"/>
-                </a:solidFill>
-              </a:rPr>
-              <a:t>Allocation discipline, per domain: (1) brakes — ADB industrialization for the Japanese disc flip, systems/ADAS access via Brakes India, timed to regulation and platform renewals; (2) pumps — e-pump/TCU sockets on Isuzu/Fuso/Hino electrified programs, timed to program kick-offs happening NOW. Funding: FY3/26 margin recovery (+¥1bn gross profit) plus peer-parity margin upside (~¥3.2-3.7bn) covers the program. The Concentric lesson: focused niche engineering at 2.3% intensity earns 25% gross margins — spend must buy sockets, not just scale.</a:t>
             </a:r>
           </a:p>
         </p:txBody>

--- a/TBK_rd_gap_slides.pptx
+++ b/TBK_rd_gap_slides.pptx
@@ -15,6 +15,7 @@
     <p:sldId id="263" r:id="rId14"/>
     <p:sldId id="264" r:id="rId15"/>
     <p:sldId id="265" r:id="rId16"/>
+    <p:sldId id="266" r:id="rId17"/>
   </p:sldIdLst>
   <p:sldSz cx="12191695" cy="6858000" type="screen4x3"/>
   <p:notesSz cx="6858000" cy="9144000"/>
@@ -885,6 +886,270 @@
           <a:p>
             <a:r>
               <a:rPr sz="1400"/>
+              <a:t>OPEX as % of sales: TBK vs peers, by business</a:t>
+            </a:r>
+          </a:p>
+        </c:rich>
+      </c:tx>
+      <c:layout/>
+      <c:overlay val="0"/>
+    </c:title>
+    <c:autoTitleDeleted val="0"/>
+    <c:plotArea>
+      <c:barChart>
+        <c:barDir val="col"/>
+        <c:grouping val="clustered"/>
+        <c:ser>
+          <c:idx val="0"/>
+          <c:order val="0"/>
+          <c:tx>
+            <c:strRef>
+              <c:f>Sheet1!$B$1</c:f>
+              <c:strCache>
+                <c:ptCount val="1"/>
+                <c:pt idx="0">
+                  <c:v>TBK (blended)</c:v>
+                </c:pt>
+              </c:strCache>
+            </c:strRef>
+          </c:tx>
+          <c:spPr>
+            <a:solidFill>
+              <a:srgbClr val="7F1D1D"/>
+            </a:solidFill>
+          </c:spPr>
+          <c:cat>
+            <c:strRef>
+              <c:f>Sheet1!$A$2:$A$3</c:f>
+              <c:strCache>
+                <c:ptCount val="2"/>
+                <c:pt idx="0">
+                  <c:v>BRAKES panel</c:v>
+                </c:pt>
+                <c:pt idx="1">
+                  <c:v>PUMPS panel</c:v>
+                </c:pt>
+              </c:strCache>
+            </c:strRef>
+          </c:cat>
+          <c:val>
+            <c:numRef>
+              <c:f>Sheet1!$B$2:$B$3</c:f>
+              <c:numCache>
+                <c:formatCode>General</c:formatCode>
+                <c:ptCount val="2"/>
+                <c:pt idx="0">
+                  <c:v>9.7</c:v>
+                </c:pt>
+                <c:pt idx="1">
+                  <c:v>9.7</c:v>
+                </c:pt>
+              </c:numCache>
+            </c:numRef>
+          </c:val>
+        </c:ser>
+        <c:ser>
+          <c:idx val="1"/>
+          <c:order val="1"/>
+          <c:tx>
+            <c:strRef>
+              <c:f>Sheet1!$C$1</c:f>
+              <c:strCache>
+                <c:ptCount val="1"/>
+                <c:pt idx="0">
+                  <c:v>Peer average</c:v>
+                </c:pt>
+              </c:strCache>
+            </c:strRef>
+          </c:tx>
+          <c:spPr>
+            <a:solidFill>
+              <a:srgbClr val="1F4E78"/>
+            </a:solidFill>
+          </c:spPr>
+          <c:cat>
+            <c:strRef>
+              <c:f>Sheet1!$A$2:$A$3</c:f>
+              <c:strCache>
+                <c:ptCount val="2"/>
+                <c:pt idx="0">
+                  <c:v>BRAKES panel</c:v>
+                </c:pt>
+                <c:pt idx="1">
+                  <c:v>PUMPS panel</c:v>
+                </c:pt>
+              </c:strCache>
+            </c:strRef>
+          </c:cat>
+          <c:val>
+            <c:numRef>
+              <c:f>Sheet1!$C$2:$C$3</c:f>
+              <c:numCache>
+                <c:formatCode>General</c:formatCode>
+                <c:ptCount val="2"/>
+                <c:pt idx="0">
+                  <c:v>13.8</c:v>
+                </c:pt>
+                <c:pt idx="1">
+                  <c:v>10.4</c:v>
+                </c:pt>
+              </c:numCache>
+            </c:numRef>
+          </c:val>
+        </c:ser>
+        <c:ser>
+          <c:idx val="2"/>
+          <c:order val="2"/>
+          <c:tx>
+            <c:strRef>
+              <c:f>Sheet1!$D$1</c:f>
+              <c:strCache>
+                <c:ptCount val="1"/>
+                <c:pt idx="0">
+                  <c:v>Peer median</c:v>
+                </c:pt>
+              </c:strCache>
+            </c:strRef>
+          </c:tx>
+          <c:spPr>
+            <a:solidFill>
+              <a:srgbClr val="548235"/>
+            </a:solidFill>
+          </c:spPr>
+          <c:cat>
+            <c:strRef>
+              <c:f>Sheet1!$A$2:$A$3</c:f>
+              <c:strCache>
+                <c:ptCount val="2"/>
+                <c:pt idx="0">
+                  <c:v>BRAKES panel</c:v>
+                </c:pt>
+                <c:pt idx="1">
+                  <c:v>PUMPS panel</c:v>
+                </c:pt>
+              </c:strCache>
+            </c:strRef>
+          </c:cat>
+          <c:val>
+            <c:numRef>
+              <c:f>Sheet1!$D$2:$D$3</c:f>
+              <c:numCache>
+                <c:formatCode>General</c:formatCode>
+                <c:ptCount val="2"/>
+                <c:pt idx="0">
+                  <c:v>13.6</c:v>
+                </c:pt>
+                <c:pt idx="1">
+                  <c:v>9.3</c:v>
+                </c:pt>
+              </c:numCache>
+            </c:numRef>
+          </c:val>
+        </c:ser>
+        <c:dLbls>
+          <c:numFmt formatCode="0.0&quot;%&quot;" sourceLinked="0"/>
+          <c:txPr>
+            <a:bodyPr/>
+            <a:lstStyle/>
+            <a:p>
+              <a:pPr>
+                <a:defRPr sz="1100"/>
+              </a:pPr>
+            </a:p>
+          </c:txPr>
+          <c:showLegendKey val="0"/>
+          <c:showVal val="1"/>
+          <c:showCatName val="0"/>
+          <c:showSerName val="0"/>
+          <c:showPercent val="0"/>
+          <c:showBubbleSize val="0"/>
+          <c:showLeaderLines val="1"/>
+        </c:dLbls>
+        <c:axId val="-2068027336"/>
+        <c:axId val="-2113994440"/>
+      </c:barChart>
+      <c:catAx>
+        <c:axId val="-2068027336"/>
+        <c:scaling>
+          <c:orientation val="minMax"/>
+        </c:scaling>
+        <c:delete val="0"/>
+        <c:axPos val="b"/>
+        <c:majorTickMark val="out"/>
+        <c:minorTickMark val="none"/>
+        <c:tickLblPos val="nextTo"/>
+        <c:txPr>
+          <a:bodyPr/>
+          <a:lstStyle/>
+          <a:p>
+            <a:pPr>
+              <a:defRPr sz="1100"/>
+            </a:pPr>
+          </a:p>
+        </c:txPr>
+        <c:crossAx val="-2113994440"/>
+        <c:crosses val="autoZero"/>
+        <c:auto val="1"/>
+        <c:lblAlgn val="ctr"/>
+        <c:lblOffset val="100"/>
+        <c:noMultiLvlLbl val="0"/>
+      </c:catAx>
+      <c:valAx>
+        <c:axId val="-2113994440"/>
+        <c:scaling/>
+        <c:delete val="0"/>
+        <c:axPos val="l"/>
+        <c:majorGridlines/>
+        <c:majorTickMark val="out"/>
+        <c:minorTickMark val="none"/>
+        <c:tickLblPos val="nextTo"/>
+        <c:crossAx val="-2068027336"/>
+        <c:crosses val="autoZero"/>
+      </c:valAx>
+    </c:plotArea>
+    <c:legend>
+      <c:legendPos val="b"/>
+      <c:overlay val="0"/>
+      <c:txPr>
+        <a:bodyPr/>
+        <a:lstStyle/>
+        <a:p>
+          <a:pPr>
+            <a:defRPr sz="1200"/>
+          </a:pPr>
+        </a:p>
+      </c:txPr>
+    </c:legend>
+    <c:dispBlanksAs val="gap"/>
+  </c:chart>
+  <c:txPr>
+    <a:bodyPr/>
+    <a:lstStyle/>
+    <a:p>
+      <a:pPr>
+        <a:defRPr sz="1800"/>
+      </a:pPr>
+      <a:endParaRPr lang="en-US"/>
+    </a:p>
+  </c:txPr>
+  <c:externalData r:id="rId1">
+    <c:autoUpdate val="0"/>
+  </c:externalData>
+</c:chartSpace>
+</file>
+
+<file path=ppt/charts/chart5.xml><?xml version="1.0" encoding="utf-8"?>
+<c:chartSpace xmlns:c="http://schemas.openxmlformats.org/drawingml/2006/chart" xmlns:a="http://schemas.openxmlformats.org/drawingml/2006/main" xmlns:r="http://schemas.openxmlformats.org/officeDocument/2006/relationships">
+  <c:date1904 val="0"/>
+  <c:chart>
+    <c:title>
+      <c:tx>
+        <c:rich>
+          <a:bodyPr/>
+          <a:lstStyle/>
+          <a:p>
+            <a:r>
+              <a:rPr sz="1400"/>
               <a:t>Actual R&amp;D vs peer-floor benchmark (US$M)</a:t>
             </a:r>
           </a:p>
@@ -1153,7 +1418,7 @@
 </c:chartSpace>
 </file>
 
-<file path=ppt/charts/chart5.xml><?xml version="1.0" encoding="utf-8"?>
+<file path=ppt/charts/chart6.xml><?xml version="1.0" encoding="utf-8"?>
 <c:chartSpace xmlns:c="http://schemas.openxmlformats.org/drawingml/2006/chart" xmlns:a="http://schemas.openxmlformats.org/drawingml/2006/main" xmlns:r="http://schemas.openxmlformats.org/officeDocument/2006/relationships">
   <c:date1904 val="0"/>
   <c:chart>
@@ -4571,7 +4836,7 @@
                   <a:srgbClr val="FFFFFF"/>
                 </a:solidFill>
               </a:rPr>
-              <a:t>The reinvestment requirement: two phases</a:t>
+              <a:t>TBK's accumulated R&amp;D deficit: ~US$100M over a decade</a:t>
             </a:r>
           </a:p>
         </p:txBody>
@@ -4605,7 +4870,7 @@
                   <a:srgbClr val="595959"/>
                 </a:solidFill>
               </a:rPr>
-              <a:t>Catch-up to repay the technological deficit, then a permanently higher run-rate to match peers</a:t>
+              <a:t>TBK dataset FY2016-2025; benchmark = blended peer floor for a brake + pump supplier</a:t>
             </a:r>
           </a:p>
         </p:txBody>
@@ -4647,6 +4912,326 @@
           </a:solidFill>
           <a:ln w="15875">
             <a:solidFill>
+              <a:srgbClr val="7F1D1D"/>
+            </a:solidFill>
+          </a:ln>
+        </p:spPr>
+        <p:txBody>
+          <a:bodyPr wrap="square" lIns="137160" rIns="137160" tIns="109728">
+            <a:spAutoFit/>
+          </a:bodyPr>
+          <a:lstStyle/>
+          <a:p>
+            <a:r>
+              <a:rPr sz="1500" b="1">
+                <a:solidFill>
+                  <a:srgbClr val="7F1D1D"/>
+                </a:solidFill>
+              </a:rPr>
+              <a:t>The deficit, quantified</a:t>
+            </a:r>
+          </a:p>
+          <a:p>
+            <a:pPr>
+              <a:spcBef>
+                <a:spcPts val="400"/>
+              </a:spcBef>
+            </a:pPr>
+            <a:r>
+              <a:rPr sz="1250">
+                <a:solidFill>
+                  <a:srgbClr val="202020"/>
+                </a:solidFill>
+              </a:rPr>
+              <a:t>Cumulative sales FY16-25: $4.26bn</a:t>
+            </a:r>
+          </a:p>
+          <a:p>
+            <a:pPr>
+              <a:spcBef>
+                <a:spcPts val="400"/>
+              </a:spcBef>
+            </a:pPr>
+            <a:r>
+              <a:rPr sz="1250">
+                <a:solidFill>
+                  <a:srgbClr val="202020"/>
+                </a:solidFill>
+              </a:rPr>
+              <a:t>Cumulative R&amp;D: $93.5M (2.2%)</a:t>
+            </a:r>
+          </a:p>
+          <a:p>
+            <a:pPr>
+              <a:spcBef>
+                <a:spcPts val="400"/>
+              </a:spcBef>
+            </a:pPr>
+          </a:p>
+          <a:p>
+            <a:pPr>
+              <a:spcBef>
+                <a:spcPts val="400"/>
+              </a:spcBef>
+            </a:pPr>
+            <a:r>
+              <a:rPr sz="1250">
+                <a:solidFill>
+                  <a:srgbClr val="202020"/>
+                </a:solidFill>
+              </a:rPr>
+              <a:t>Gap vs 4.0% benchmark: ~$77M</a:t>
+            </a:r>
+          </a:p>
+          <a:p>
+            <a:pPr>
+              <a:spcBef>
+                <a:spcPts val="400"/>
+              </a:spcBef>
+            </a:pPr>
+            <a:r>
+              <a:rPr sz="1250">
+                <a:solidFill>
+                  <a:srgbClr val="202020"/>
+                </a:solidFill>
+              </a:rPr>
+              <a:t>Gap vs 4.5% benchmark: ~$98M</a:t>
+            </a:r>
+          </a:p>
+          <a:p>
+            <a:pPr>
+              <a:spcBef>
+                <a:spcPts val="400"/>
+              </a:spcBef>
+            </a:pPr>
+            <a:r>
+              <a:rPr sz="1250">
+                <a:solidFill>
+                  <a:srgbClr val="202020"/>
+                </a:solidFill>
+              </a:rPr>
+              <a:t>Gap vs 5.0% benchmark: ~$120M</a:t>
+            </a:r>
+          </a:p>
+          <a:p>
+            <a:pPr>
+              <a:spcBef>
+                <a:spcPts val="400"/>
+              </a:spcBef>
+            </a:pPr>
+          </a:p>
+          <a:p>
+            <a:pPr>
+              <a:spcBef>
+                <a:spcPts val="400"/>
+              </a:spcBef>
+            </a:pPr>
+            <a:r>
+              <a:rPr sz="1250">
+                <a:solidFill>
+                  <a:srgbClr val="202020"/>
+                </a:solidFill>
+              </a:rPr>
+              <a:t>Central estimate: ~US$100M</a:t>
+            </a:r>
+          </a:p>
+          <a:p>
+            <a:pPr>
+              <a:spcBef>
+                <a:spcPts val="400"/>
+              </a:spcBef>
+            </a:pPr>
+          </a:p>
+          <a:p>
+            <a:pPr>
+              <a:spcBef>
+                <a:spcPts val="400"/>
+              </a:spcBef>
+            </a:pPr>
+            <a:r>
+              <a:rPr sz="1250">
+                <a:solidFill>
+                  <a:srgbClr val="202020"/>
+                </a:solidFill>
+              </a:rPr>
+              <a:t>And intensity is FALLING:</a:t>
+            </a:r>
+          </a:p>
+          <a:p>
+            <a:pPr>
+              <a:spcBef>
+                <a:spcPts val="400"/>
+              </a:spcBef>
+            </a:pPr>
+            <a:r>
+              <a:rPr sz="1250">
+                <a:solidFill>
+                  <a:srgbClr val="202020"/>
+                </a:solidFill>
+              </a:rPr>
+              <a:t>2.6% (FY22) → 2.2% (FY25)</a:t>
+            </a:r>
+          </a:p>
+        </p:txBody>
+      </p:sp>
+      <p:sp>
+        <p:nvSpPr>
+          <p:cNvPr id="6" name="TextBox 5"/>
+          <p:cNvSpPr txBox="1"/>
+          <p:nvPr/>
+        </p:nvSpPr>
+        <p:spPr>
+          <a:xfrm>
+            <a:off x="457200" y="5715000"/>
+            <a:ext cx="11247120" cy="914400"/>
+          </a:xfrm>
+          <a:prstGeom prst="rect">
+            <a:avLst/>
+          </a:prstGeom>
+          <a:noFill/>
+        </p:spPr>
+        <p:txBody>
+          <a:bodyPr wrap="square">
+            <a:spAutoFit/>
+          </a:bodyPr>
+          <a:lstStyle/>
+          <a:p>
+            <a:pPr algn="l"/>
+            <a:r>
+              <a:rPr sz="1200" b="0">
+                <a:solidFill>
+                  <a:srgbClr val="595959"/>
+                </a:solidFill>
+              </a:rPr>
+              <a:t>Compounding the problem: TBK's marginal return on invested capital has been negative on every horizon (-2% to -10%) — the deficit is in direction as well as amount. Capex fell to $16M by FY25, though FY3/26 shows a turn: capex back up to ¥3.3bn and ¥1.1bn equity raised from Brakes India.</a:t>
+            </a:r>
+          </a:p>
+        </p:txBody>
+      </p:sp>
+    </p:spTree>
+  </p:cSld>
+  <p:clrMapOvr>
+    <a:masterClrMapping/>
+  </p:clrMapOvr>
+</p:sld>
+</file>
+
+<file path=ppt/slides/slide11.xml><?xml version="1.0" encoding="utf-8"?>
+<p:sld xmlns:a="http://schemas.openxmlformats.org/drawingml/2006/main" xmlns:p="http://schemas.openxmlformats.org/presentationml/2006/main" xmlns:r="http://schemas.openxmlformats.org/officeDocument/2006/relationships">
+  <p:cSld>
+    <p:spTree>
+      <p:nvGrpSpPr>
+        <p:cNvPr id="1" name=""/>
+        <p:cNvGrpSpPr/>
+        <p:nvPr/>
+      </p:nvGrpSpPr>
+      <p:grpSpPr/>
+      <p:sp>
+        <p:nvSpPr>
+          <p:cNvPr id="2" name="TextBox 1"/>
+          <p:cNvSpPr txBox="1"/>
+          <p:nvPr/>
+        </p:nvSpPr>
+        <p:spPr>
+          <a:xfrm>
+            <a:off x="0" y="0"/>
+            <a:ext cx="12191695" cy="868680"/>
+          </a:xfrm>
+          <a:prstGeom prst="rect">
+            <a:avLst/>
+          </a:prstGeom>
+          <a:solidFill>
+            <a:srgbClr val="1F4E78"/>
+          </a:solidFill>
+        </p:spPr>
+        <p:txBody>
+          <a:bodyPr wrap="square" lIns="457200" tIns="164592">
+            <a:spAutoFit/>
+          </a:bodyPr>
+          <a:lstStyle/>
+          <a:p>
+            <a:r>
+              <a:rPr sz="2600" b="1">
+                <a:solidFill>
+                  <a:srgbClr val="FFFFFF"/>
+                </a:solidFill>
+              </a:rPr>
+              <a:t>The reinvestment requirement: two phases</a:t>
+            </a:r>
+          </a:p>
+        </p:txBody>
+      </p:sp>
+      <p:sp>
+        <p:nvSpPr>
+          <p:cNvPr id="3" name="TextBox 2"/>
+          <p:cNvSpPr txBox="1"/>
+          <p:nvPr/>
+        </p:nvSpPr>
+        <p:spPr>
+          <a:xfrm>
+            <a:off x="457200" y="914400"/>
+            <a:ext cx="11247120" cy="365760"/>
+          </a:xfrm>
+          <a:prstGeom prst="rect">
+            <a:avLst/>
+          </a:prstGeom>
+          <a:noFill/>
+        </p:spPr>
+        <p:txBody>
+          <a:bodyPr wrap="square">
+            <a:spAutoFit/>
+          </a:bodyPr>
+          <a:lstStyle/>
+          <a:p>
+            <a:pPr algn="l"/>
+            <a:r>
+              <a:rPr sz="1200" b="0">
+                <a:solidFill>
+                  <a:srgbClr val="595959"/>
+                </a:solidFill>
+              </a:rPr>
+              <a:t>Catch-up to repay the technological deficit, then a permanently higher run-rate to match peers</a:t>
+            </a:r>
+          </a:p>
+        </p:txBody>
+      </p:sp>
+      <p:graphicFrame>
+        <p:nvGraphicFramePr>
+          <p:cNvPr id="4" name="Chart 3"/>
+          <p:cNvGraphicFramePr>
+            <a:graphicFrameLocks noGrp="1"/>
+          </p:cNvGraphicFramePr>
+          <p:nvPr/>
+        </p:nvGraphicFramePr>
+        <p:xfrm>
+          <a:off x="457200" y="1463040"/>
+          <a:ext cx="6949440" cy="4023360"/>
+        </p:xfrm>
+        <a:graphic>
+          <a:graphicData uri="http://schemas.openxmlformats.org/drawingml/2006/chart">
+            <c:chart xmlns:c="http://schemas.openxmlformats.org/drawingml/2006/chart" r:id="rId2"/>
+          </a:graphicData>
+        </a:graphic>
+      </p:graphicFrame>
+      <p:sp>
+        <p:nvSpPr>
+          <p:cNvPr id="5" name="TextBox 4"/>
+          <p:cNvSpPr txBox="1"/>
+          <p:nvPr/>
+        </p:nvSpPr>
+        <p:spPr>
+          <a:xfrm>
+            <a:off x="7680960" y="1463040"/>
+            <a:ext cx="4069080" cy="4023360"/>
+          </a:xfrm>
+          <a:prstGeom prst="rect">
+            <a:avLst/>
+          </a:prstGeom>
+          <a:solidFill>
+            <a:srgbClr val="F2F2F2"/>
+          </a:solidFill>
+          <a:ln w="15875">
+            <a:solidFill>
               <a:srgbClr val="548235"/>
             </a:solidFill>
           </a:ln>
@@ -8040,7 +8625,7 @@
                   <a:srgbClr val="FFFFFF"/>
                 </a:solidFill>
               </a:rPr>
-              <a:t>TBK's accumulated R&amp;D deficit: ~US$100M over a decade</a:t>
+              <a:t>OPEX: TBK's problem is not cost discipline — it under-spends</a:t>
             </a:r>
           </a:p>
         </p:txBody>
@@ -8074,7 +8659,7 @@
                   <a:srgbClr val="595959"/>
                 </a:solidFill>
               </a:rPr>
-              <a:t>TBK dataset FY2016-2025; benchmark = blended peer floor for a brake + pump supplier</a:t>
+              <a:t>OPEX = gross margin − operating margin (captures SG&amp;A + R&amp;D + other operating items), comparable peer set  |  USD at ¥150/USD</a:t>
             </a:r>
           </a:p>
         </p:txBody>
@@ -8089,7 +8674,7 @@
         </p:nvGraphicFramePr>
         <p:xfrm>
           <a:off x="457200" y="1463040"/>
-          <a:ext cx="6949440" cy="4023360"/>
+          <a:ext cx="6675120" cy="4206240"/>
         </p:xfrm>
         <a:graphic>
           <a:graphicData uri="http://schemas.openxmlformats.org/drawingml/2006/chart">
@@ -8105,8 +8690,8 @@
         </p:nvSpPr>
         <p:spPr>
           <a:xfrm>
-            <a:off x="7680960" y="1463040"/>
-            <a:ext cx="4069080" cy="4023360"/>
+            <a:off x="7406640" y="1463040"/>
+            <a:ext cx="4343400" cy="2103120"/>
           </a:xfrm>
           <a:prstGeom prst="rect">
             <a:avLst/>
@@ -8116,7 +8701,7 @@
           </a:solidFill>
           <a:ln w="15875">
             <a:solidFill>
-              <a:srgbClr val="7F1D1D"/>
+              <a:srgbClr val="1F4E78"/>
             </a:solidFill>
           </a:ln>
         </p:spPr>
@@ -8129,151 +8714,100 @@
             <a:r>
               <a:rPr sz="1500" b="1">
                 <a:solidFill>
-                  <a:srgbClr val="7F1D1D"/>
-                </a:solidFill>
-              </a:rPr>
-              <a:t>The deficit, quantified</a:t>
-            </a:r>
-          </a:p>
-          <a:p>
-            <a:pPr>
-              <a:spcBef>
-                <a:spcPts val="400"/>
-              </a:spcBef>
-            </a:pPr>
-            <a:r>
-              <a:rPr sz="1250">
-                <a:solidFill>
-                  <a:srgbClr val="202020"/>
-                </a:solidFill>
-              </a:rPr>
-              <a:t>Cumulative sales FY16-25: $4.26bn</a:t>
-            </a:r>
-          </a:p>
-          <a:p>
-            <a:pPr>
-              <a:spcBef>
-                <a:spcPts val="400"/>
-              </a:spcBef>
-            </a:pPr>
-            <a:r>
-              <a:rPr sz="1250">
-                <a:solidFill>
-                  <a:srgbClr val="202020"/>
-                </a:solidFill>
-              </a:rPr>
-              <a:t>Cumulative R&amp;D: $93.5M (2.2%)</a:t>
-            </a:r>
-          </a:p>
-          <a:p>
-            <a:pPr>
-              <a:spcBef>
-                <a:spcPts val="400"/>
-              </a:spcBef>
-            </a:pPr>
-          </a:p>
-          <a:p>
-            <a:pPr>
-              <a:spcBef>
-                <a:spcPts val="400"/>
-              </a:spcBef>
-            </a:pPr>
-            <a:r>
-              <a:rPr sz="1250">
-                <a:solidFill>
-                  <a:srgbClr val="202020"/>
-                </a:solidFill>
-              </a:rPr>
-              <a:t>Gap vs 4.0% benchmark: ~$77M</a:t>
-            </a:r>
-          </a:p>
-          <a:p>
-            <a:pPr>
-              <a:spcBef>
-                <a:spcPts val="400"/>
-              </a:spcBef>
-            </a:pPr>
-            <a:r>
-              <a:rPr sz="1250">
-                <a:solidFill>
-                  <a:srgbClr val="202020"/>
-                </a:solidFill>
-              </a:rPr>
-              <a:t>Gap vs 4.5% benchmark: ~$98M</a:t>
-            </a:r>
-          </a:p>
-          <a:p>
-            <a:pPr>
-              <a:spcBef>
-                <a:spcPts val="400"/>
-              </a:spcBef>
-            </a:pPr>
-            <a:r>
-              <a:rPr sz="1250">
-                <a:solidFill>
-                  <a:srgbClr val="202020"/>
-                </a:solidFill>
-              </a:rPr>
-              <a:t>Gap vs 5.0% benchmark: ~$120M</a:t>
-            </a:r>
-          </a:p>
-          <a:p>
-            <a:pPr>
-              <a:spcBef>
-                <a:spcPts val="400"/>
-              </a:spcBef>
-            </a:pPr>
-          </a:p>
-          <a:p>
-            <a:pPr>
-              <a:spcBef>
-                <a:spcPts val="400"/>
-              </a:spcBef>
-            </a:pPr>
-            <a:r>
-              <a:rPr sz="1250">
-                <a:solidFill>
-                  <a:srgbClr val="202020"/>
-                </a:solidFill>
-              </a:rPr>
-              <a:t>Central estimate: ~US$100M</a:t>
-            </a:r>
-          </a:p>
-          <a:p>
-            <a:pPr>
-              <a:spcBef>
-                <a:spcPts val="400"/>
-              </a:spcBef>
-            </a:pPr>
-          </a:p>
-          <a:p>
-            <a:pPr>
-              <a:spcBef>
-                <a:spcPts val="400"/>
-              </a:spcBef>
-            </a:pPr>
-            <a:r>
-              <a:rPr sz="1250">
-                <a:solidFill>
-                  <a:srgbClr val="202020"/>
-                </a:solidFill>
-              </a:rPr>
-              <a:t>And intensity is FALLING:</a:t>
-            </a:r>
-          </a:p>
-          <a:p>
-            <a:pPr>
-              <a:spcBef>
-                <a:spcPts val="400"/>
-              </a:spcBef>
-            </a:pPr>
-            <a:r>
-              <a:rPr sz="1250">
-                <a:solidFill>
-                  <a:srgbClr val="202020"/>
-                </a:solidFill>
-              </a:rPr>
-              <a:t>2.6% (FY22) → 2.2% (FY25)</a:t>
+                  <a:srgbClr val="1F4E78"/>
+                </a:solidFill>
+              </a:rPr>
+              <a:t>Peers spend MORE below the line…</a:t>
+            </a:r>
+          </a:p>
+          <a:p>
+            <a:pPr>
+              <a:spcBef>
+                <a:spcPts val="400"/>
+              </a:spcBef>
+            </a:pPr>
+            <a:r>
+              <a:rPr sz="1150">
+                <a:solidFill>
+                  <a:srgbClr val="202020"/>
+                </a:solidFill>
+              </a:rPr>
+              <a:t>Brakes: Haldex 19.9%, Cummins 13.7%</a:t>
+            </a:r>
+          </a:p>
+          <a:p>
+            <a:pPr>
+              <a:spcBef>
+                <a:spcPts val="400"/>
+              </a:spcBef>
+            </a:pPr>
+            <a:r>
+              <a:rPr sz="1150">
+                <a:solidFill>
+                  <a:srgbClr val="202020"/>
+                </a:solidFill>
+              </a:rPr>
+              <a:t>(SG&amp;A 9.6% + R&amp;D 4.3%), SAF-H 13.4%,</a:t>
+            </a:r>
+          </a:p>
+          <a:p>
+            <a:pPr>
+              <a:spcBef>
+                <a:spcPts val="400"/>
+              </a:spcBef>
+            </a:pPr>
+            <a:r>
+              <a:rPr sz="1150">
+                <a:solidFill>
+                  <a:srgbClr val="202020"/>
+                </a:solidFill>
+              </a:rPr>
+              <a:t>Akebono 8.1%</a:t>
+            </a:r>
+          </a:p>
+          <a:p>
+            <a:pPr>
+              <a:spcBef>
+                <a:spcPts val="400"/>
+              </a:spcBef>
+            </a:pPr>
+            <a:r>
+              <a:rPr sz="1150">
+                <a:solidFill>
+                  <a:srgbClr val="202020"/>
+                </a:solidFill>
+              </a:rPr>
+              <a:t>Pumps: TPR 16.3%, Concentric 11.0%,</a:t>
+            </a:r>
+          </a:p>
+          <a:p>
+            <a:pPr>
+              <a:spcBef>
+                <a:spcPts val="400"/>
+              </a:spcBef>
+            </a:pPr>
+            <a:r>
+              <a:rPr sz="1150">
+                <a:solidFill>
+                  <a:srgbClr val="202020"/>
+                </a:solidFill>
+              </a:rPr>
+              <a:t>Aisin 7.6%, Hanon 6.6%</a:t>
+            </a:r>
+          </a:p>
+          <a:p>
+            <a:pPr>
+              <a:spcBef>
+                <a:spcPts val="400"/>
+              </a:spcBef>
+            </a:pPr>
+            <a:r>
+              <a:rPr sz="1150">
+                <a:solidFill>
+                  <a:srgbClr val="202020"/>
+                </a:solidFill>
+              </a:rPr>
+              <a:t>TBK SG&amp;A (incl. its ~2.2% R&amp;D): 9.7%</a:t>
             </a:r>
           </a:p>
         </p:txBody>
@@ -8286,7 +8820,137 @@
         </p:nvSpPr>
         <p:spPr>
           <a:xfrm>
-            <a:off x="457200" y="5715000"/>
+            <a:off x="7406640" y="3703320"/>
+            <a:ext cx="4343400" cy="2103120"/>
+          </a:xfrm>
+          <a:prstGeom prst="rect">
+            <a:avLst/>
+          </a:prstGeom>
+          <a:solidFill>
+            <a:srgbClr val="F2F2F2"/>
+          </a:solidFill>
+          <a:ln w="15875">
+            <a:solidFill>
+              <a:srgbClr val="548235"/>
+            </a:solidFill>
+          </a:ln>
+        </p:spPr>
+        <p:txBody>
+          <a:bodyPr wrap="square" lIns="137160" rIns="137160" tIns="109728">
+            <a:spAutoFit/>
+          </a:bodyPr>
+          <a:lstStyle/>
+          <a:p>
+            <a:r>
+              <a:rPr sz="1500" b="1">
+                <a:solidFill>
+                  <a:srgbClr val="548235"/>
+                </a:solidFill>
+              </a:rPr>
+              <a:t>…and still earn 2.5x the margin</a:t>
+            </a:r>
+          </a:p>
+          <a:p>
+            <a:pPr>
+              <a:spcBef>
+                <a:spcPts val="400"/>
+              </a:spcBef>
+            </a:pPr>
+            <a:r>
+              <a:rPr sz="1150">
+                <a:solidFill>
+                  <a:srgbClr val="202020"/>
+                </a:solidFill>
+              </a:rPr>
+              <a:t>Operating margin: TBK 2.7% vs</a:t>
+            </a:r>
+          </a:p>
+          <a:p>
+            <a:pPr>
+              <a:spcBef>
+                <a:spcPts val="400"/>
+              </a:spcBef>
+            </a:pPr>
+            <a:r>
+              <a:rPr sz="1150">
+                <a:solidFill>
+                  <a:srgbClr val="202020"/>
+                </a:solidFill>
+              </a:rPr>
+              <a:t>brake peers avg 7.2% | pump peers avg 6.7%</a:t>
+            </a:r>
+          </a:p>
+          <a:p>
+            <a:pPr>
+              <a:spcBef>
+                <a:spcPts val="400"/>
+              </a:spcBef>
+            </a:pPr>
+            <a:r>
+              <a:rPr sz="1150">
+                <a:solidFill>
+                  <a:srgbClr val="202020"/>
+                </a:solidFill>
+              </a:rPr>
+              <a:t>At peer GM AND peer opex, TBK would</a:t>
+            </a:r>
+          </a:p>
+          <a:p>
+            <a:pPr>
+              <a:spcBef>
+                <a:spcPts val="400"/>
+              </a:spcBef>
+            </a:pPr>
+            <a:r>
+              <a:rPr sz="1150">
+                <a:solidFill>
+                  <a:srgbClr val="202020"/>
+                </a:solidFill>
+              </a:rPr>
+              <a:t>spend ~$7M MORE opex ($42M vs $35M)</a:t>
+            </a:r>
+          </a:p>
+          <a:p>
+            <a:pPr>
+              <a:spcBef>
+                <a:spcPts val="400"/>
+              </a:spcBef>
+            </a:pPr>
+            <a:r>
+              <a:rPr sz="1150">
+                <a:solidFill>
+                  <a:srgbClr val="202020"/>
+                </a:solidFill>
+              </a:rPr>
+              <a:t>yet earn ~$25M operating profit vs</a:t>
+            </a:r>
+          </a:p>
+          <a:p>
+            <a:pPr>
+              <a:spcBef>
+                <a:spcPts val="400"/>
+              </a:spcBef>
+            </a:pPr>
+            <a:r>
+              <a:rPr sz="1150">
+                <a:solidFill>
+                  <a:srgbClr val="202020"/>
+                </a:solidFill>
+              </a:rPr>
+              <a:t>$10M actual → +$15M/yr</a:t>
+            </a:r>
+          </a:p>
+        </p:txBody>
+      </p:sp>
+      <p:sp>
+        <p:nvSpPr>
+          <p:cNvPr id="7" name="TextBox 6"/>
+          <p:cNvSpPr txBox="1"/>
+          <p:nvPr/>
+        </p:nvSpPr>
+        <p:spPr>
+          <a:xfrm>
+            <a:off x="457200" y="5806440"/>
             <a:ext cx="11247120" cy="914400"/>
           </a:xfrm>
           <a:prstGeom prst="rect">
@@ -8302,12 +8966,12 @@
           <a:p>
             <a:pPr algn="l"/>
             <a:r>
-              <a:rPr sz="1200" b="0">
+              <a:rPr sz="1150" b="0">
                 <a:solidFill>
                   <a:srgbClr val="595959"/>
                 </a:solidFill>
               </a:rPr>
-              <a:t>Compounding the problem: TBK's marginal return on invested capital has been negative on every horizon (-2% to -10%) — the deficit is in direction as well as amount. Capex fell to $16M by FY25, though FY3/26 shows a turn: capex back up to ¥3.3bn and ¥1.1bn equity raised from Brakes India.</a:t>
+              <a:t>Concentric's history makes the point: opex rose 10.3% (2022) → 11.7% (2023) as it funded the e-pump transition, yet 5-yr operating margin averaged 18.4% (23.5% pre-EMP in 2019) — high gross margins pay for development. Implication for TBK: cutting opex is the wrong lever; the gap is in COGS/gross margin, and peer-level opex means spending MORE below the line — exactly the R&amp;D catch-up program.</a:t>
             </a:r>
           </a:p>
         </p:txBody>

--- a/TBK_rd_gap_slides.pptx
+++ b/TBK_rd_gap_slides.pptx
@@ -8625,7 +8625,7 @@
                   <a:srgbClr val="FFFFFF"/>
                 </a:solidFill>
               </a:rPr>
-              <a:t>OPEX: TBK's problem is not cost discipline — it under-spends</a:t>
+              <a:t>Why TBK looks lean on OPEX: its factory costs hide in COGS</a:t>
             </a:r>
           </a:p>
         </p:txBody>
@@ -8659,7 +8659,7 @@
                   <a:srgbClr val="595959"/>
                 </a:solidFill>
               </a:rPr>
-              <a:t>OPEX = gross margin − operating margin (captures SG&amp;A + R&amp;D + other operating items), comparable peer set  |  USD at ¥150/USD</a:t>
+              <a:t>OPEX here = gross margin − operating margin (SG&amp;A + R&amp;D). Under JGAAP, factory overhead, depreciation and idle capacity sit in COST OF SALES  |  USD at ¥150/USD</a:t>
             </a:r>
           </a:p>
         </p:txBody>
@@ -8717,7 +8717,7 @@
                   <a:srgbClr val="1F4E78"/>
                 </a:solidFill>
               </a:rPr>
-              <a:t>Peers spend MORE below the line…</a:t>
+              <a:t>The lean look is an artifact</a:t>
             </a:r>
           </a:p>
           <a:p>
@@ -8732,7 +8732,7 @@
                   <a:srgbClr val="202020"/>
                 </a:solidFill>
               </a:rPr>
-              <a:t>Brakes: Haldex 19.9%, Cummins 13.7%</a:t>
+              <a:t>TBK's 9.7% covers only SG&amp;A + its</a:t>
             </a:r>
           </a:p>
           <a:p>
@@ -8747,7 +8747,7 @@
                   <a:srgbClr val="202020"/>
                 </a:solidFill>
               </a:rPr>
-              <a:t>(SG&amp;A 9.6% + R&amp;D 4.3%), SAF-H 13.4%,</a:t>
+              <a:t>thin ~2.2% R&amp;D — the future-building costs</a:t>
             </a:r>
           </a:p>
           <a:p>
@@ -8762,7 +8762,7 @@
                   <a:srgbClr val="202020"/>
                 </a:solidFill>
               </a:rPr>
-              <a:t>Akebono 8.1%</a:t>
+              <a:t>it has starved. The factory burden is in COGS:</a:t>
             </a:r>
           </a:p>
           <a:p>
@@ -8777,7 +8777,7 @@
                   <a:srgbClr val="202020"/>
                 </a:solidFill>
               </a:rPr>
-              <a:t>Pumps: TPR 16.3%, Concentric 11.0%,</a:t>
+              <a:t>PP&amp;E 39% of sales vs Concentric ~12% (3x)</a:t>
             </a:r>
           </a:p>
           <a:p>
@@ -8792,7 +8792,7 @@
                   <a:srgbClr val="202020"/>
                 </a:solidFill>
               </a:rPr>
-              <a:t>Aisin 7.6%, Hanon 6.6%</a:t>
+              <a:t>Depreciation 5.3% of sales; China: 12.8% of</a:t>
             </a:r>
           </a:p>
           <a:p>
@@ -8807,7 +8807,7 @@
                   <a:srgbClr val="202020"/>
                 </a:solidFill>
               </a:rPr>
-              <a:t>TBK SG&amp;A (incl. its ~2.2% R&amp;D): 9.7%</a:t>
+              <a:t>segment sales + losses both years</a:t>
             </a:r>
           </a:p>
         </p:txBody>
@@ -8831,7 +8831,7 @@
           </a:solidFill>
           <a:ln w="15875">
             <a:solidFill>
-              <a:srgbClr val="548235"/>
+              <a:srgbClr val="7F1D1D"/>
             </a:solidFill>
           </a:ln>
         </p:spPr>
@@ -8844,10 +8844,10 @@
             <a:r>
               <a:rPr sz="1500" b="1">
                 <a:solidFill>
-                  <a:srgbClr val="548235"/>
-                </a:solidFill>
-              </a:rPr>
-              <a:t>…and still earn 2.5x the margin</a:t>
+                  <a:srgbClr val="7F1D1D"/>
+                </a:solidFill>
+              </a:rPr>
+              <a:t>Restructuring bypasses BOTH metrics</a:t>
             </a:r>
           </a:p>
           <a:p>
@@ -8862,7 +8862,7 @@
                   <a:srgbClr val="202020"/>
                 </a:solidFill>
               </a:rPr>
-              <a:t>Operating margin: TBK 2.7% vs</a:t>
+              <a:t>Impairments ¥459M + ¥712M and</a:t>
             </a:r>
           </a:p>
           <a:p>
@@ -8877,7 +8877,7 @@
                   <a:srgbClr val="202020"/>
                 </a:solidFill>
               </a:rPr>
-              <a:t>brake peers avg 7.2% | pump peers avg 6.7%</a:t>
+              <a:t>restructuring losses ¥775M + ¥297M</a:t>
             </a:r>
           </a:p>
           <a:p>
@@ -8892,7 +8892,7 @@
                   <a:srgbClr val="202020"/>
                 </a:solidFill>
               </a:rPr>
-              <a:t>At peer GM AND peer opex, TBK would</a:t>
+              <a:t>(&gt;¥2.2bn in 2 years) booked as JGAAP</a:t>
             </a:r>
           </a:p>
           <a:p>
@@ -8907,7 +8907,7 @@
                   <a:srgbClr val="202020"/>
                 </a:solidFill>
               </a:rPr>
-              <a:t>spend ~$7M MORE opex ($42M vs $35M)</a:t>
+              <a:t>extraordinary items — below operating</a:t>
             </a:r>
           </a:p>
           <a:p>
@@ -8922,7 +8922,7 @@
                   <a:srgbClr val="202020"/>
                 </a:solidFill>
               </a:rPr>
-              <a:t>yet earn ~$25M operating profit vs</a:t>
+              <a:t>profit, invisible to GM and OPEX alike.</a:t>
             </a:r>
           </a:p>
           <a:p>
@@ -8937,7 +8937,7 @@
                   <a:srgbClr val="202020"/>
                 </a:solidFill>
               </a:rPr>
-              <a:t>$10M actual → +$15M/yr</a:t>
+              <a:t>That IS the underutilized-footprint cost</a:t>
             </a:r>
           </a:p>
         </p:txBody>
@@ -8971,7 +8971,7 @@
                   <a:srgbClr val="595959"/>
                 </a:solidFill>
               </a:rPr>
-              <a:t>Concentric's history makes the point: opex rose 10.3% (2022) → 11.7% (2023) as it funded the e-pump transition, yet 5-yr operating margin averaged 18.4% (23.5% pre-EMP in 2019) — high gross margins pay for development. Implication for TBK: cutting opex is the wrong lever; the gap is in COGS/gross margin, and peer-level opex means spending MORE below the line — exactly the R&amp;D catch-up program.</a:t>
+              <a:t>Two-front program, mapped to the P&amp;L: (1) footprint/utilization repair attacks COGS — the $22-24M/yr gross-margin prize (North America exit and the ¥712M Japan impairment show it has started); (2) R&amp;D catch-up deliberately GROWS opex toward peer levels (peers spend 10-14% incl. 4%+ R&amp;D and earn 2.5x TBK's operating margin — Concentric grew opex 10.3%→11.7% funding its e-pump transition at 18.4% avg OPM). Cut above the line, invest below it.</a:t>
             </a:r>
           </a:p>
         </p:txBody>

--- a/TBK_rd_gap_slides.pptx
+++ b/TBK_rd_gap_slides.pptx
@@ -16,6 +16,7 @@
     <p:sldId id="264" r:id="rId15"/>
     <p:sldId id="265" r:id="rId16"/>
     <p:sldId id="266" r:id="rId17"/>
+    <p:sldId id="267" r:id="rId18"/>
   </p:sldIdLst>
   <p:sldSz cx="12191695" cy="6858000" type="screen4x3"/>
   <p:notesSz cx="6858000" cy="9144000"/>
@@ -4836,6 +4837,405 @@
                   <a:srgbClr val="FFFFFF"/>
                 </a:solidFill>
               </a:rPr>
+              <a:t>Why TBK looks lean on OPEX: its factory costs hide in COGS</a:t>
+            </a:r>
+          </a:p>
+        </p:txBody>
+      </p:sp>
+      <p:sp>
+        <p:nvSpPr>
+          <p:cNvPr id="3" name="TextBox 2"/>
+          <p:cNvSpPr txBox="1"/>
+          <p:nvPr/>
+        </p:nvSpPr>
+        <p:spPr>
+          <a:xfrm>
+            <a:off x="457200" y="914400"/>
+            <a:ext cx="11247120" cy="365760"/>
+          </a:xfrm>
+          <a:prstGeom prst="rect">
+            <a:avLst/>
+          </a:prstGeom>
+          <a:noFill/>
+        </p:spPr>
+        <p:txBody>
+          <a:bodyPr wrap="square">
+            <a:spAutoFit/>
+          </a:bodyPr>
+          <a:lstStyle/>
+          <a:p>
+            <a:pPr algn="l"/>
+            <a:r>
+              <a:rPr sz="1200" b="0">
+                <a:solidFill>
+                  <a:srgbClr val="595959"/>
+                </a:solidFill>
+              </a:rPr>
+              <a:t>OPEX here = gross margin − operating margin (SG&amp;A + R&amp;D). Under JGAAP, factory overhead, depreciation and idle capacity sit in COST OF SALES  |  USD at ¥150/USD</a:t>
+            </a:r>
+          </a:p>
+        </p:txBody>
+      </p:sp>
+      <p:graphicFrame>
+        <p:nvGraphicFramePr>
+          <p:cNvPr id="4" name="Chart 3"/>
+          <p:cNvGraphicFramePr>
+            <a:graphicFrameLocks noGrp="1"/>
+          </p:cNvGraphicFramePr>
+          <p:nvPr/>
+        </p:nvGraphicFramePr>
+        <p:xfrm>
+          <a:off x="457200" y="1463040"/>
+          <a:ext cx="6675120" cy="4206240"/>
+        </p:xfrm>
+        <a:graphic>
+          <a:graphicData uri="http://schemas.openxmlformats.org/drawingml/2006/chart">
+            <c:chart xmlns:c="http://schemas.openxmlformats.org/drawingml/2006/chart" r:id="rId2"/>
+          </a:graphicData>
+        </a:graphic>
+      </p:graphicFrame>
+      <p:sp>
+        <p:nvSpPr>
+          <p:cNvPr id="5" name="TextBox 4"/>
+          <p:cNvSpPr txBox="1"/>
+          <p:nvPr/>
+        </p:nvSpPr>
+        <p:spPr>
+          <a:xfrm>
+            <a:off x="7406640" y="1463040"/>
+            <a:ext cx="4343400" cy="2103120"/>
+          </a:xfrm>
+          <a:prstGeom prst="rect">
+            <a:avLst/>
+          </a:prstGeom>
+          <a:solidFill>
+            <a:srgbClr val="F2F2F2"/>
+          </a:solidFill>
+          <a:ln w="15875">
+            <a:solidFill>
+              <a:srgbClr val="1F4E78"/>
+            </a:solidFill>
+          </a:ln>
+        </p:spPr>
+        <p:txBody>
+          <a:bodyPr wrap="square" lIns="137160" rIns="137160" tIns="109728">
+            <a:spAutoFit/>
+          </a:bodyPr>
+          <a:lstStyle/>
+          <a:p>
+            <a:r>
+              <a:rPr sz="1500" b="1">
+                <a:solidFill>
+                  <a:srgbClr val="1F4E78"/>
+                </a:solidFill>
+              </a:rPr>
+              <a:t>The lean look is an artifact</a:t>
+            </a:r>
+          </a:p>
+          <a:p>
+            <a:pPr>
+              <a:spcBef>
+                <a:spcPts val="400"/>
+              </a:spcBef>
+            </a:pPr>
+            <a:r>
+              <a:rPr sz="1150">
+                <a:solidFill>
+                  <a:srgbClr val="202020"/>
+                </a:solidFill>
+              </a:rPr>
+              <a:t>TBK's 9.7% covers only SG&amp;A + its</a:t>
+            </a:r>
+          </a:p>
+          <a:p>
+            <a:pPr>
+              <a:spcBef>
+                <a:spcPts val="400"/>
+              </a:spcBef>
+            </a:pPr>
+            <a:r>
+              <a:rPr sz="1150">
+                <a:solidFill>
+                  <a:srgbClr val="202020"/>
+                </a:solidFill>
+              </a:rPr>
+              <a:t>thin ~2.2% R&amp;D — the future-building costs</a:t>
+            </a:r>
+          </a:p>
+          <a:p>
+            <a:pPr>
+              <a:spcBef>
+                <a:spcPts val="400"/>
+              </a:spcBef>
+            </a:pPr>
+            <a:r>
+              <a:rPr sz="1150">
+                <a:solidFill>
+                  <a:srgbClr val="202020"/>
+                </a:solidFill>
+              </a:rPr>
+              <a:t>it has starved. The factory burden is in COGS:</a:t>
+            </a:r>
+          </a:p>
+          <a:p>
+            <a:pPr>
+              <a:spcBef>
+                <a:spcPts val="400"/>
+              </a:spcBef>
+            </a:pPr>
+            <a:r>
+              <a:rPr sz="1150">
+                <a:solidFill>
+                  <a:srgbClr val="202020"/>
+                </a:solidFill>
+              </a:rPr>
+              <a:t>PP&amp;E 39% of sales vs Concentric ~12% (3x)</a:t>
+            </a:r>
+          </a:p>
+          <a:p>
+            <a:pPr>
+              <a:spcBef>
+                <a:spcPts val="400"/>
+              </a:spcBef>
+            </a:pPr>
+            <a:r>
+              <a:rPr sz="1150">
+                <a:solidFill>
+                  <a:srgbClr val="202020"/>
+                </a:solidFill>
+              </a:rPr>
+              <a:t>Depreciation 5.3% of sales; China: 12.8% of</a:t>
+            </a:r>
+          </a:p>
+          <a:p>
+            <a:pPr>
+              <a:spcBef>
+                <a:spcPts val="400"/>
+              </a:spcBef>
+            </a:pPr>
+            <a:r>
+              <a:rPr sz="1150">
+                <a:solidFill>
+                  <a:srgbClr val="202020"/>
+                </a:solidFill>
+              </a:rPr>
+              <a:t>segment sales + losses both years</a:t>
+            </a:r>
+          </a:p>
+        </p:txBody>
+      </p:sp>
+      <p:sp>
+        <p:nvSpPr>
+          <p:cNvPr id="6" name="TextBox 5"/>
+          <p:cNvSpPr txBox="1"/>
+          <p:nvPr/>
+        </p:nvSpPr>
+        <p:spPr>
+          <a:xfrm>
+            <a:off x="7406640" y="3703320"/>
+            <a:ext cx="4343400" cy="2103120"/>
+          </a:xfrm>
+          <a:prstGeom prst="rect">
+            <a:avLst/>
+          </a:prstGeom>
+          <a:solidFill>
+            <a:srgbClr val="F2F2F2"/>
+          </a:solidFill>
+          <a:ln w="15875">
+            <a:solidFill>
+              <a:srgbClr val="7F1D1D"/>
+            </a:solidFill>
+          </a:ln>
+        </p:spPr>
+        <p:txBody>
+          <a:bodyPr wrap="square" lIns="137160" rIns="137160" tIns="109728">
+            <a:spAutoFit/>
+          </a:bodyPr>
+          <a:lstStyle/>
+          <a:p>
+            <a:r>
+              <a:rPr sz="1500" b="1">
+                <a:solidFill>
+                  <a:srgbClr val="7F1D1D"/>
+                </a:solidFill>
+              </a:rPr>
+              <a:t>Restructuring bypasses BOTH metrics</a:t>
+            </a:r>
+          </a:p>
+          <a:p>
+            <a:pPr>
+              <a:spcBef>
+                <a:spcPts val="400"/>
+              </a:spcBef>
+            </a:pPr>
+            <a:r>
+              <a:rPr sz="1150">
+                <a:solidFill>
+                  <a:srgbClr val="202020"/>
+                </a:solidFill>
+              </a:rPr>
+              <a:t>Impairments ¥459M + ¥712M and</a:t>
+            </a:r>
+          </a:p>
+          <a:p>
+            <a:pPr>
+              <a:spcBef>
+                <a:spcPts val="400"/>
+              </a:spcBef>
+            </a:pPr>
+            <a:r>
+              <a:rPr sz="1150">
+                <a:solidFill>
+                  <a:srgbClr val="202020"/>
+                </a:solidFill>
+              </a:rPr>
+              <a:t>restructuring losses ¥775M + ¥297M</a:t>
+            </a:r>
+          </a:p>
+          <a:p>
+            <a:pPr>
+              <a:spcBef>
+                <a:spcPts val="400"/>
+              </a:spcBef>
+            </a:pPr>
+            <a:r>
+              <a:rPr sz="1150">
+                <a:solidFill>
+                  <a:srgbClr val="202020"/>
+                </a:solidFill>
+              </a:rPr>
+              <a:t>(&gt;¥2.2bn in 2 years) booked as JGAAP</a:t>
+            </a:r>
+          </a:p>
+          <a:p>
+            <a:pPr>
+              <a:spcBef>
+                <a:spcPts val="400"/>
+              </a:spcBef>
+            </a:pPr>
+            <a:r>
+              <a:rPr sz="1150">
+                <a:solidFill>
+                  <a:srgbClr val="202020"/>
+                </a:solidFill>
+              </a:rPr>
+              <a:t>extraordinary items — below operating</a:t>
+            </a:r>
+          </a:p>
+          <a:p>
+            <a:pPr>
+              <a:spcBef>
+                <a:spcPts val="400"/>
+              </a:spcBef>
+            </a:pPr>
+            <a:r>
+              <a:rPr sz="1150">
+                <a:solidFill>
+                  <a:srgbClr val="202020"/>
+                </a:solidFill>
+              </a:rPr>
+              <a:t>profit, invisible to GM and OPEX alike.</a:t>
+            </a:r>
+          </a:p>
+          <a:p>
+            <a:pPr>
+              <a:spcBef>
+                <a:spcPts val="400"/>
+              </a:spcBef>
+            </a:pPr>
+            <a:r>
+              <a:rPr sz="1150">
+                <a:solidFill>
+                  <a:srgbClr val="202020"/>
+                </a:solidFill>
+              </a:rPr>
+              <a:t>That IS the underutilized-footprint cost</a:t>
+            </a:r>
+          </a:p>
+        </p:txBody>
+      </p:sp>
+      <p:sp>
+        <p:nvSpPr>
+          <p:cNvPr id="7" name="TextBox 6"/>
+          <p:cNvSpPr txBox="1"/>
+          <p:nvPr/>
+        </p:nvSpPr>
+        <p:spPr>
+          <a:xfrm>
+            <a:off x="457200" y="5806440"/>
+            <a:ext cx="11247120" cy="914400"/>
+          </a:xfrm>
+          <a:prstGeom prst="rect">
+            <a:avLst/>
+          </a:prstGeom>
+          <a:noFill/>
+        </p:spPr>
+        <p:txBody>
+          <a:bodyPr wrap="square">
+            <a:spAutoFit/>
+          </a:bodyPr>
+          <a:lstStyle/>
+          <a:p>
+            <a:pPr algn="l"/>
+            <a:r>
+              <a:rPr sz="1150" b="0">
+                <a:solidFill>
+                  <a:srgbClr val="595959"/>
+                </a:solidFill>
+              </a:rPr>
+              <a:t>Two-front program, mapped to the P&amp;L: (1) footprint/utilization repair attacks COGS — the $22-24M/yr gross-margin prize (North America exit and the ¥712M Japan impairment show it has started); (2) R&amp;D catch-up deliberately GROWS opex toward peer levels (peers spend 10-14% incl. 4%+ R&amp;D and earn 2.5x TBK's operating margin — Concentric grew opex 10.3%→11.7% funding its e-pump transition at 18.4% avg OPM). Cut above the line, invest below it.</a:t>
+            </a:r>
+          </a:p>
+        </p:txBody>
+      </p:sp>
+    </p:spTree>
+  </p:cSld>
+  <p:clrMapOvr>
+    <a:masterClrMapping/>
+  </p:clrMapOvr>
+</p:sld>
+</file>
+
+<file path=ppt/slides/slide11.xml><?xml version="1.0" encoding="utf-8"?>
+<p:sld xmlns:a="http://schemas.openxmlformats.org/drawingml/2006/main" xmlns:p="http://schemas.openxmlformats.org/presentationml/2006/main" xmlns:r="http://schemas.openxmlformats.org/officeDocument/2006/relationships">
+  <p:cSld>
+    <p:spTree>
+      <p:nvGrpSpPr>
+        <p:cNvPr id="1" name=""/>
+        <p:cNvGrpSpPr/>
+        <p:nvPr/>
+      </p:nvGrpSpPr>
+      <p:grpSpPr/>
+      <p:sp>
+        <p:nvSpPr>
+          <p:cNvPr id="2" name="TextBox 1"/>
+          <p:cNvSpPr txBox="1"/>
+          <p:nvPr/>
+        </p:nvSpPr>
+        <p:spPr>
+          <a:xfrm>
+            <a:off x="0" y="0"/>
+            <a:ext cx="12191695" cy="868680"/>
+          </a:xfrm>
+          <a:prstGeom prst="rect">
+            <a:avLst/>
+          </a:prstGeom>
+          <a:solidFill>
+            <a:srgbClr val="1F4E78"/>
+          </a:solidFill>
+        </p:spPr>
+        <p:txBody>
+          <a:bodyPr wrap="square" lIns="457200" tIns="164592">
+            <a:spAutoFit/>
+          </a:bodyPr>
+          <a:lstStyle/>
+          <a:p>
+            <a:r>
+              <a:rPr sz="2600" b="1">
+                <a:solidFill>
+                  <a:srgbClr val="FFFFFF"/>
+                </a:solidFill>
+              </a:rPr>
               <a:t>TBK's accumulated R&amp;D deficit: ~US$100M over a decade</a:t>
             </a:r>
           </a:p>
@@ -5116,7 +5516,7 @@
 </p:sld>
 </file>
 
-<file path=ppt/slides/slide11.xml><?xml version="1.0" encoding="utf-8"?>
+<file path=ppt/slides/slide12.xml><?xml version="1.0" encoding="utf-8"?>
 <p:sld xmlns:a="http://schemas.openxmlformats.org/drawingml/2006/main" xmlns:p="http://schemas.openxmlformats.org/presentationml/2006/main" xmlns:r="http://schemas.openxmlformats.org/officeDocument/2006/relationships">
   <p:cSld>
     <p:spTree>
@@ -7910,6 +8310,467 @@
                   <a:srgbClr val="FFFFFF"/>
                 </a:solidFill>
               </a:rPr>
+              <a:t>The case that TBK's gross margin is structurally too low</a:t>
+            </a:r>
+          </a:p>
+        </p:txBody>
+      </p:sp>
+      <p:sp>
+        <p:nvSpPr>
+          <p:cNvPr id="3" name="TextBox 2"/>
+          <p:cNvSpPr txBox="1"/>
+          <p:nvPr/>
+        </p:nvSpPr>
+        <p:spPr>
+          <a:xfrm>
+            <a:off x="457200" y="914400"/>
+            <a:ext cx="11247120" cy="365760"/>
+          </a:xfrm>
+          <a:prstGeom prst="rect">
+            <a:avLst/>
+          </a:prstGeom>
+          <a:noFill/>
+        </p:spPr>
+        <p:txBody>
+          <a:bodyPr wrap="square">
+            <a:spAutoFit/>
+          </a:bodyPr>
+          <a:lstStyle/>
+          <a:p>
+            <a:pPr algn="l"/>
+            <a:r>
+              <a:rPr sz="1200" b="0">
+                <a:solidFill>
+                  <a:srgbClr val="595959"/>
+                </a:solidFill>
+              </a:rPr>
+              <a:t>TBK FY3/2026: 12.5% gross margin, 2.7% operating margin — four independent lines of evidence say this is a fixable defect, not the nature of the business</a:t>
+            </a:r>
+          </a:p>
+        </p:txBody>
+      </p:sp>
+      <p:sp>
+        <p:nvSpPr>
+          <p:cNvPr id="4" name="TextBox 3"/>
+          <p:cNvSpPr txBox="1"/>
+          <p:nvPr/>
+        </p:nvSpPr>
+        <p:spPr>
+          <a:xfrm>
+            <a:off x="457200" y="1417320"/>
+            <a:ext cx="5577840" cy="2148840"/>
+          </a:xfrm>
+          <a:prstGeom prst="rect">
+            <a:avLst/>
+          </a:prstGeom>
+          <a:solidFill>
+            <a:srgbClr val="F2F2F2"/>
+          </a:solidFill>
+          <a:ln w="15875">
+            <a:solidFill>
+              <a:srgbClr val="1F4E78"/>
+            </a:solidFill>
+          </a:ln>
+        </p:spPr>
+        <p:txBody>
+          <a:bodyPr wrap="square" lIns="137160" rIns="137160" tIns="109728">
+            <a:spAutoFit/>
+          </a:bodyPr>
+          <a:lstStyle/>
+          <a:p>
+            <a:r>
+              <a:rPr sz="1500" b="1">
+                <a:solidFill>
+                  <a:srgbClr val="1F4E78"/>
+                </a:solidFill>
+              </a:rPr>
+              <a:t>1. Peers prove the products can carry more</a:t>
+            </a:r>
+          </a:p>
+          <a:p>
+            <a:pPr>
+              <a:spcBef>
+                <a:spcPts val="400"/>
+              </a:spcBef>
+            </a:pPr>
+            <a:r>
+              <a:rPr sz="1150">
+                <a:solidFill>
+                  <a:srgbClr val="202020"/>
+                </a:solidFill>
+              </a:rPr>
+              <a:t>Every comparable brake peer except Akebono earns 22-27% (Haldex 27.3%, Cummins 24.7%, SAF-Holland ~22%)</a:t>
+            </a:r>
+          </a:p>
+          <a:p>
+            <a:pPr>
+              <a:spcBef>
+                <a:spcPts val="400"/>
+              </a:spcBef>
+            </a:pPr>
+            <a:r>
+              <a:rPr sz="1150">
+                <a:solidFill>
+                  <a:srgbClr val="202020"/>
+                </a:solidFill>
+              </a:rPr>
+              <a:t>Pump peers: Concentric 25.2% (verified AR2023), TPR 21.7% — the high-share niche players, i.e. exactly TBK's structural position in Japanese truck pumps</a:t>
+            </a:r>
+          </a:p>
+          <a:p>
+            <a:pPr>
+              <a:spcBef>
+                <a:spcPts val="400"/>
+              </a:spcBef>
+            </a:pPr>
+            <a:r>
+              <a:rPr sz="1150">
+                <a:solidFill>
+                  <a:srgbClr val="202020"/>
+                </a:solidFill>
+              </a:rPr>
+              <a:t>Same product categories, same customers' industry — 5-15 points more margin</a:t>
+            </a:r>
+          </a:p>
+        </p:txBody>
+      </p:sp>
+      <p:sp>
+        <p:nvSpPr>
+          <p:cNvPr id="5" name="TextBox 4"/>
+          <p:cNvSpPr txBox="1"/>
+          <p:nvPr/>
+        </p:nvSpPr>
+        <p:spPr>
+          <a:xfrm>
+            <a:off x="6217920" y="1417320"/>
+            <a:ext cx="5532120" cy="2148840"/>
+          </a:xfrm>
+          <a:prstGeom prst="rect">
+            <a:avLst/>
+          </a:prstGeom>
+          <a:solidFill>
+            <a:srgbClr val="F2F2F2"/>
+          </a:solidFill>
+          <a:ln w="15875">
+            <a:solidFill>
+              <a:srgbClr val="7F1D1D"/>
+            </a:solidFill>
+          </a:ln>
+        </p:spPr>
+        <p:txBody>
+          <a:bodyPr wrap="square" lIns="137160" rIns="137160" tIns="109728">
+            <a:spAutoFit/>
+          </a:bodyPr>
+          <a:lstStyle/>
+          <a:p>
+            <a:r>
+              <a:rPr sz="1500" b="1">
+                <a:solidFill>
+                  <a:srgbClr val="7F1D1D"/>
+                </a:solidFill>
+              </a:rPr>
+              <a:t>2. TBK earns LESS than its own customers</a:t>
+            </a:r>
+          </a:p>
+          <a:p>
+            <a:pPr>
+              <a:spcBef>
+                <a:spcPts val="400"/>
+              </a:spcBef>
+            </a:pPr>
+            <a:r>
+              <a:rPr sz="1150">
+                <a:solidFill>
+                  <a:srgbClr val="202020"/>
+                </a:solidFill>
+              </a:rPr>
+              <a:t>Isuzu gross margin ~19%, Hino ~17% vs TBK 12.5%</a:t>
+            </a:r>
+          </a:p>
+          <a:p>
+            <a:pPr>
+              <a:spcBef>
+                <a:spcPts val="400"/>
+              </a:spcBef>
+            </a:pPr>
+            <a:r>
+              <a:rPr sz="1150">
+                <a:solidFill>
+                  <a:srgbClr val="202020"/>
+                </a:solidFill>
+              </a:rPr>
+              <a:t>Healthy specialist suppliers out-margin their OEMs (Knorr-Bremse 13% EBIT vs truck OEMs' mid-single digits)</a:t>
+            </a:r>
+          </a:p>
+          <a:p>
+            <a:pPr>
+              <a:spcBef>
+                <a:spcPts val="400"/>
+              </a:spcBef>
+            </a:pPr>
+            <a:r>
+              <a:rPr sz="1150">
+                <a:solidFill>
+                  <a:srgbClr val="202020"/>
+                </a:solidFill>
+              </a:rPr>
+              <a:t>Inverted economics = pricing power sits with the customer: keiretsu concentration (Isuzu alone ¥12bn = 22% of sales) and annual price-downs, against commodity drum/mechanical products with no systems, electronics or branded-aftermarket content to defend price</a:t>
+            </a:r>
+          </a:p>
+        </p:txBody>
+      </p:sp>
+      <p:sp>
+        <p:nvSpPr>
+          <p:cNvPr id="6" name="TextBox 5"/>
+          <p:cNvSpPr txBox="1"/>
+          <p:nvPr/>
+        </p:nvSpPr>
+        <p:spPr>
+          <a:xfrm>
+            <a:off x="457200" y="3703320"/>
+            <a:ext cx="5577840" cy="2148840"/>
+          </a:xfrm>
+          <a:prstGeom prst="rect">
+            <a:avLst/>
+          </a:prstGeom>
+          <a:solidFill>
+            <a:srgbClr val="F2F2F2"/>
+          </a:solidFill>
+          <a:ln w="15875">
+            <a:solidFill>
+              <a:srgbClr val="1F4E78"/>
+            </a:solidFill>
+          </a:ln>
+        </p:spPr>
+        <p:txBody>
+          <a:bodyPr wrap="square" lIns="137160" rIns="137160" tIns="109728">
+            <a:spAutoFit/>
+          </a:bodyPr>
+          <a:lstStyle/>
+          <a:p>
+            <a:r>
+              <a:rPr sz="1500" b="1">
+                <a:solidFill>
+                  <a:srgbClr val="1F4E78"/>
+                </a:solidFill>
+              </a:rPr>
+              <a:t>3. The COGS line carries an underloaded footprint</a:t>
+            </a:r>
+          </a:p>
+          <a:p>
+            <a:pPr>
+              <a:spcBef>
+                <a:spcPts val="400"/>
+              </a:spcBef>
+            </a:pPr>
+            <a:r>
+              <a:rPr sz="1150">
+                <a:solidFill>
+                  <a:srgbClr val="202020"/>
+                </a:solidFill>
+              </a:rPr>
+              <a:t>PP&amp;E at 39% of sales — 3x Concentric's ~12%; depreciation 5.3% of sales</a:t>
+            </a:r>
+          </a:p>
+          <a:p>
+            <a:pPr>
+              <a:spcBef>
+                <a:spcPts val="400"/>
+              </a:spcBef>
+            </a:pPr>
+            <a:r>
+              <a:rPr sz="1150">
+                <a:solidFill>
+                  <a:srgbClr val="202020"/>
+                </a:solidFill>
+              </a:rPr>
+              <a:t>China: depreciation 12.8% of segment sales, losses both years; Japan segment margin just 1.6%</a:t>
+            </a:r>
+          </a:p>
+          <a:p>
+            <a:pPr>
+              <a:spcBef>
+                <a:spcPts val="400"/>
+              </a:spcBef>
+            </a:pPr>
+            <a:r>
+              <a:rPr sz="1150">
+                <a:solidFill>
+                  <a:srgbClr val="202020"/>
+                </a:solidFill>
+              </a:rPr>
+              <a:t>&gt;¥2.2bn impairments + restructuring losses in 2 years = the cost of underutilized plants crystallizing (booked below the operating line, so the true factory burden is even larger than the margin gap shows)</a:t>
+            </a:r>
+          </a:p>
+        </p:txBody>
+      </p:sp>
+      <p:sp>
+        <p:nvSpPr>
+          <p:cNvPr id="7" name="TextBox 6"/>
+          <p:cNvSpPr txBox="1"/>
+          <p:nvPr/>
+        </p:nvSpPr>
+        <p:spPr>
+          <a:xfrm>
+            <a:off x="6217920" y="3703320"/>
+            <a:ext cx="5532120" cy="2148840"/>
+          </a:xfrm>
+          <a:prstGeom prst="rect">
+            <a:avLst/>
+          </a:prstGeom>
+          <a:solidFill>
+            <a:srgbClr val="F2F2F2"/>
+          </a:solidFill>
+          <a:ln w="15875">
+            <a:solidFill>
+              <a:srgbClr val="548235"/>
+            </a:solidFill>
+          </a:ln>
+        </p:spPr>
+        <p:txBody>
+          <a:bodyPr wrap="square" lIns="137160" rIns="137160" tIns="109728">
+            <a:spAutoFit/>
+          </a:bodyPr>
+          <a:lstStyle/>
+          <a:p>
+            <a:r>
+              <a:rPr sz="1500" b="1">
+                <a:solidFill>
+                  <a:srgbClr val="548235"/>
+                </a:solidFill>
+              </a:rPr>
+              <a:t>4. The repair has already started — and works</a:t>
+            </a:r>
+          </a:p>
+          <a:p>
+            <a:pPr>
+              <a:spcBef>
+                <a:spcPts val="400"/>
+              </a:spcBef>
+            </a:pPr>
+            <a:r>
+              <a:rPr sz="1150">
+                <a:solidFill>
+                  <a:srgbClr val="202020"/>
+                </a:solidFill>
+              </a:rPr>
+              <a:t>FY3/2026: gross margin 10.6% → 12.5% in one year (cost of sales cut ¥0.7bn on flat sales); North America exited; ¥712M Japan impairment = footprint action</a:t>
+            </a:r>
+          </a:p>
+          <a:p>
+            <a:pPr>
+              <a:spcBef>
+                <a:spcPts val="400"/>
+              </a:spcBef>
+            </a:pPr>
+            <a:r>
+              <a:rPr sz="1150">
+                <a:solidFill>
+                  <a:srgbClr val="202020"/>
+                </a:solidFill>
+              </a:rPr>
+              <a:t>Concentric's playbook validates the destination: focused niches, 25% gross margin, opex GROWING into the e-transition at 18.4% average operating margin</a:t>
+            </a:r>
+          </a:p>
+          <a:p>
+            <a:pPr>
+              <a:spcBef>
+                <a:spcPts val="400"/>
+              </a:spcBef>
+            </a:pPr>
+            <a:r>
+              <a:rPr sz="1150">
+                <a:solidFill>
+                  <a:srgbClr val="202020"/>
+                </a:solidFill>
+              </a:rPr>
+              <a:t>Nothing about brakes or pumps caps TBK at 12.5% — peers with the same products price and load their factories better</a:t>
+            </a:r>
+          </a:p>
+        </p:txBody>
+      </p:sp>
+      <p:sp>
+        <p:nvSpPr>
+          <p:cNvPr id="8" name="TextBox 7"/>
+          <p:cNvSpPr txBox="1"/>
+          <p:nvPr/>
+        </p:nvSpPr>
+        <p:spPr>
+          <a:xfrm>
+            <a:off x="457200" y="5943600"/>
+            <a:ext cx="11247120" cy="822960"/>
+          </a:xfrm>
+          <a:prstGeom prst="rect">
+            <a:avLst/>
+          </a:prstGeom>
+          <a:noFill/>
+        </p:spPr>
+        <p:txBody>
+          <a:bodyPr wrap="square">
+            <a:spAutoFit/>
+          </a:bodyPr>
+          <a:lstStyle/>
+          <a:p>
+            <a:pPr algn="l"/>
+            <a:r>
+              <a:rPr sz="1300" b="1">
+                <a:solidFill>
+                  <a:srgbClr val="1F4E78"/>
+                </a:solidFill>
+              </a:rPr>
+              <a:t>Conclusion: at peer margins TBK's existing sales generate $22-24M more gross profit per year (next pages) — enough to fund the entire R&amp;D catch-up. The margin is the constraint, and it is self-inflicted: underloaded factories in COGS, commodity mix, and customer-held pricing power — all addressable.</a:t>
+            </a:r>
+          </a:p>
+        </p:txBody>
+      </p:sp>
+    </p:spTree>
+  </p:cSld>
+  <p:clrMapOvr>
+    <a:masterClrMapping/>
+  </p:clrMapOvr>
+</p:sld>
+</file>
+
+<file path=ppt/slides/slide8.xml><?xml version="1.0" encoding="utf-8"?>
+<p:sld xmlns:a="http://schemas.openxmlformats.org/drawingml/2006/main" xmlns:p="http://schemas.openxmlformats.org/presentationml/2006/main" xmlns:r="http://schemas.openxmlformats.org/officeDocument/2006/relationships">
+  <p:cSld>
+    <p:spTree>
+      <p:nvGrpSpPr>
+        <p:cNvPr id="1" name=""/>
+        <p:cNvGrpSpPr/>
+        <p:nvPr/>
+      </p:nvGrpSpPr>
+      <p:grpSpPr/>
+      <p:sp>
+        <p:nvSpPr>
+          <p:cNvPr id="2" name="TextBox 1"/>
+          <p:cNvSpPr txBox="1"/>
+          <p:nvPr/>
+        </p:nvSpPr>
+        <p:spPr>
+          <a:xfrm>
+            <a:off x="0" y="0"/>
+            <a:ext cx="12191695" cy="868680"/>
+          </a:xfrm>
+          <a:prstGeom prst="rect">
+            <a:avLst/>
+          </a:prstGeom>
+          <a:solidFill>
+            <a:srgbClr val="1F4E78"/>
+          </a:solidFill>
+        </p:spPr>
+        <p:txBody>
+          <a:bodyPr wrap="square" lIns="457200" tIns="164592">
+            <a:spAutoFit/>
+          </a:bodyPr>
+          <a:lstStyle/>
+          <a:p>
+            <a:r>
+              <a:rPr sz="2600" b="1">
+                <a:solidFill>
+                  <a:srgbClr val="FFFFFF"/>
+                </a:solidFill>
+              </a:rPr>
               <a:t>TBK underperforms peer gross margins in BOTH businesses</a:t>
             </a:r>
           </a:p>
@@ -8224,7 +9085,7 @@
 </p:sld>
 </file>
 
-<file path=ppt/slides/slide8.xml><?xml version="1.0" encoding="utf-8"?>
+<file path=ppt/slides/slide9.xml><?xml version="1.0" encoding="utf-8"?>
 <p:sld xmlns:a="http://schemas.openxmlformats.org/drawingml/2006/main" xmlns:p="http://schemas.openxmlformats.org/presentationml/2006/main" xmlns:r="http://schemas.openxmlformats.org/officeDocument/2006/relationships">
   <p:cSld>
     <p:spTree>
@@ -8573,405 +9434,6 @@
                 </a:solidFill>
               </a:rPr>
               <a:t>Method: brakes ~$127M sales x peer avg 21.0% / median 23.4%; pumps &amp; engine components ~$238M x 17.0% / 16.9%; vs actual blended 12.5%. Margin levers per the benchmark: aftermarket/branded content, niche pricing power (Concentric/TPR model), price-down discipline, and mix shift to disc brakes and e-pumps.</a:t>
-            </a:r>
-          </a:p>
-        </p:txBody>
-      </p:sp>
-    </p:spTree>
-  </p:cSld>
-  <p:clrMapOvr>
-    <a:masterClrMapping/>
-  </p:clrMapOvr>
-</p:sld>
-</file>
-
-<file path=ppt/slides/slide9.xml><?xml version="1.0" encoding="utf-8"?>
-<p:sld xmlns:a="http://schemas.openxmlformats.org/drawingml/2006/main" xmlns:p="http://schemas.openxmlformats.org/presentationml/2006/main" xmlns:r="http://schemas.openxmlformats.org/officeDocument/2006/relationships">
-  <p:cSld>
-    <p:spTree>
-      <p:nvGrpSpPr>
-        <p:cNvPr id="1" name=""/>
-        <p:cNvGrpSpPr/>
-        <p:nvPr/>
-      </p:nvGrpSpPr>
-      <p:grpSpPr/>
-      <p:sp>
-        <p:nvSpPr>
-          <p:cNvPr id="2" name="TextBox 1"/>
-          <p:cNvSpPr txBox="1"/>
-          <p:nvPr/>
-        </p:nvSpPr>
-        <p:spPr>
-          <a:xfrm>
-            <a:off x="0" y="0"/>
-            <a:ext cx="12191695" cy="868680"/>
-          </a:xfrm>
-          <a:prstGeom prst="rect">
-            <a:avLst/>
-          </a:prstGeom>
-          <a:solidFill>
-            <a:srgbClr val="1F4E78"/>
-          </a:solidFill>
-        </p:spPr>
-        <p:txBody>
-          <a:bodyPr wrap="square" lIns="457200" tIns="164592">
-            <a:spAutoFit/>
-          </a:bodyPr>
-          <a:lstStyle/>
-          <a:p>
-            <a:r>
-              <a:rPr sz="2600" b="1">
-                <a:solidFill>
-                  <a:srgbClr val="FFFFFF"/>
-                </a:solidFill>
-              </a:rPr>
-              <a:t>Why TBK looks lean on OPEX: its factory costs hide in COGS</a:t>
-            </a:r>
-          </a:p>
-        </p:txBody>
-      </p:sp>
-      <p:sp>
-        <p:nvSpPr>
-          <p:cNvPr id="3" name="TextBox 2"/>
-          <p:cNvSpPr txBox="1"/>
-          <p:nvPr/>
-        </p:nvSpPr>
-        <p:spPr>
-          <a:xfrm>
-            <a:off x="457200" y="914400"/>
-            <a:ext cx="11247120" cy="365760"/>
-          </a:xfrm>
-          <a:prstGeom prst="rect">
-            <a:avLst/>
-          </a:prstGeom>
-          <a:noFill/>
-        </p:spPr>
-        <p:txBody>
-          <a:bodyPr wrap="square">
-            <a:spAutoFit/>
-          </a:bodyPr>
-          <a:lstStyle/>
-          <a:p>
-            <a:pPr algn="l"/>
-            <a:r>
-              <a:rPr sz="1200" b="0">
-                <a:solidFill>
-                  <a:srgbClr val="595959"/>
-                </a:solidFill>
-              </a:rPr>
-              <a:t>OPEX here = gross margin − operating margin (SG&amp;A + R&amp;D). Under JGAAP, factory overhead, depreciation and idle capacity sit in COST OF SALES  |  USD at ¥150/USD</a:t>
-            </a:r>
-          </a:p>
-        </p:txBody>
-      </p:sp>
-      <p:graphicFrame>
-        <p:nvGraphicFramePr>
-          <p:cNvPr id="4" name="Chart 3"/>
-          <p:cNvGraphicFramePr>
-            <a:graphicFrameLocks noGrp="1"/>
-          </p:cNvGraphicFramePr>
-          <p:nvPr/>
-        </p:nvGraphicFramePr>
-        <p:xfrm>
-          <a:off x="457200" y="1463040"/>
-          <a:ext cx="6675120" cy="4206240"/>
-        </p:xfrm>
-        <a:graphic>
-          <a:graphicData uri="http://schemas.openxmlformats.org/drawingml/2006/chart">
-            <c:chart xmlns:c="http://schemas.openxmlformats.org/drawingml/2006/chart" r:id="rId2"/>
-          </a:graphicData>
-        </a:graphic>
-      </p:graphicFrame>
-      <p:sp>
-        <p:nvSpPr>
-          <p:cNvPr id="5" name="TextBox 4"/>
-          <p:cNvSpPr txBox="1"/>
-          <p:nvPr/>
-        </p:nvSpPr>
-        <p:spPr>
-          <a:xfrm>
-            <a:off x="7406640" y="1463040"/>
-            <a:ext cx="4343400" cy="2103120"/>
-          </a:xfrm>
-          <a:prstGeom prst="rect">
-            <a:avLst/>
-          </a:prstGeom>
-          <a:solidFill>
-            <a:srgbClr val="F2F2F2"/>
-          </a:solidFill>
-          <a:ln w="15875">
-            <a:solidFill>
-              <a:srgbClr val="1F4E78"/>
-            </a:solidFill>
-          </a:ln>
-        </p:spPr>
-        <p:txBody>
-          <a:bodyPr wrap="square" lIns="137160" rIns="137160" tIns="109728">
-            <a:spAutoFit/>
-          </a:bodyPr>
-          <a:lstStyle/>
-          <a:p>
-            <a:r>
-              <a:rPr sz="1500" b="1">
-                <a:solidFill>
-                  <a:srgbClr val="1F4E78"/>
-                </a:solidFill>
-              </a:rPr>
-              <a:t>The lean look is an artifact</a:t>
-            </a:r>
-          </a:p>
-          <a:p>
-            <a:pPr>
-              <a:spcBef>
-                <a:spcPts val="400"/>
-              </a:spcBef>
-            </a:pPr>
-            <a:r>
-              <a:rPr sz="1150">
-                <a:solidFill>
-                  <a:srgbClr val="202020"/>
-                </a:solidFill>
-              </a:rPr>
-              <a:t>TBK's 9.7% covers only SG&amp;A + its</a:t>
-            </a:r>
-          </a:p>
-          <a:p>
-            <a:pPr>
-              <a:spcBef>
-                <a:spcPts val="400"/>
-              </a:spcBef>
-            </a:pPr>
-            <a:r>
-              <a:rPr sz="1150">
-                <a:solidFill>
-                  <a:srgbClr val="202020"/>
-                </a:solidFill>
-              </a:rPr>
-              <a:t>thin ~2.2% R&amp;D — the future-building costs</a:t>
-            </a:r>
-          </a:p>
-          <a:p>
-            <a:pPr>
-              <a:spcBef>
-                <a:spcPts val="400"/>
-              </a:spcBef>
-            </a:pPr>
-            <a:r>
-              <a:rPr sz="1150">
-                <a:solidFill>
-                  <a:srgbClr val="202020"/>
-                </a:solidFill>
-              </a:rPr>
-              <a:t>it has starved. The factory burden is in COGS:</a:t>
-            </a:r>
-          </a:p>
-          <a:p>
-            <a:pPr>
-              <a:spcBef>
-                <a:spcPts val="400"/>
-              </a:spcBef>
-            </a:pPr>
-            <a:r>
-              <a:rPr sz="1150">
-                <a:solidFill>
-                  <a:srgbClr val="202020"/>
-                </a:solidFill>
-              </a:rPr>
-              <a:t>PP&amp;E 39% of sales vs Concentric ~12% (3x)</a:t>
-            </a:r>
-          </a:p>
-          <a:p>
-            <a:pPr>
-              <a:spcBef>
-                <a:spcPts val="400"/>
-              </a:spcBef>
-            </a:pPr>
-            <a:r>
-              <a:rPr sz="1150">
-                <a:solidFill>
-                  <a:srgbClr val="202020"/>
-                </a:solidFill>
-              </a:rPr>
-              <a:t>Depreciation 5.3% of sales; China: 12.8% of</a:t>
-            </a:r>
-          </a:p>
-          <a:p>
-            <a:pPr>
-              <a:spcBef>
-                <a:spcPts val="400"/>
-              </a:spcBef>
-            </a:pPr>
-            <a:r>
-              <a:rPr sz="1150">
-                <a:solidFill>
-                  <a:srgbClr val="202020"/>
-                </a:solidFill>
-              </a:rPr>
-              <a:t>segment sales + losses both years</a:t>
-            </a:r>
-          </a:p>
-        </p:txBody>
-      </p:sp>
-      <p:sp>
-        <p:nvSpPr>
-          <p:cNvPr id="6" name="TextBox 5"/>
-          <p:cNvSpPr txBox="1"/>
-          <p:nvPr/>
-        </p:nvSpPr>
-        <p:spPr>
-          <a:xfrm>
-            <a:off x="7406640" y="3703320"/>
-            <a:ext cx="4343400" cy="2103120"/>
-          </a:xfrm>
-          <a:prstGeom prst="rect">
-            <a:avLst/>
-          </a:prstGeom>
-          <a:solidFill>
-            <a:srgbClr val="F2F2F2"/>
-          </a:solidFill>
-          <a:ln w="15875">
-            <a:solidFill>
-              <a:srgbClr val="7F1D1D"/>
-            </a:solidFill>
-          </a:ln>
-        </p:spPr>
-        <p:txBody>
-          <a:bodyPr wrap="square" lIns="137160" rIns="137160" tIns="109728">
-            <a:spAutoFit/>
-          </a:bodyPr>
-          <a:lstStyle/>
-          <a:p>
-            <a:r>
-              <a:rPr sz="1500" b="1">
-                <a:solidFill>
-                  <a:srgbClr val="7F1D1D"/>
-                </a:solidFill>
-              </a:rPr>
-              <a:t>Restructuring bypasses BOTH metrics</a:t>
-            </a:r>
-          </a:p>
-          <a:p>
-            <a:pPr>
-              <a:spcBef>
-                <a:spcPts val="400"/>
-              </a:spcBef>
-            </a:pPr>
-            <a:r>
-              <a:rPr sz="1150">
-                <a:solidFill>
-                  <a:srgbClr val="202020"/>
-                </a:solidFill>
-              </a:rPr>
-              <a:t>Impairments ¥459M + ¥712M and</a:t>
-            </a:r>
-          </a:p>
-          <a:p>
-            <a:pPr>
-              <a:spcBef>
-                <a:spcPts val="400"/>
-              </a:spcBef>
-            </a:pPr>
-            <a:r>
-              <a:rPr sz="1150">
-                <a:solidFill>
-                  <a:srgbClr val="202020"/>
-                </a:solidFill>
-              </a:rPr>
-              <a:t>restructuring losses ¥775M + ¥297M</a:t>
-            </a:r>
-          </a:p>
-          <a:p>
-            <a:pPr>
-              <a:spcBef>
-                <a:spcPts val="400"/>
-              </a:spcBef>
-            </a:pPr>
-            <a:r>
-              <a:rPr sz="1150">
-                <a:solidFill>
-                  <a:srgbClr val="202020"/>
-                </a:solidFill>
-              </a:rPr>
-              <a:t>(&gt;¥2.2bn in 2 years) booked as JGAAP</a:t>
-            </a:r>
-          </a:p>
-          <a:p>
-            <a:pPr>
-              <a:spcBef>
-                <a:spcPts val="400"/>
-              </a:spcBef>
-            </a:pPr>
-            <a:r>
-              <a:rPr sz="1150">
-                <a:solidFill>
-                  <a:srgbClr val="202020"/>
-                </a:solidFill>
-              </a:rPr>
-              <a:t>extraordinary items — below operating</a:t>
-            </a:r>
-          </a:p>
-          <a:p>
-            <a:pPr>
-              <a:spcBef>
-                <a:spcPts val="400"/>
-              </a:spcBef>
-            </a:pPr>
-            <a:r>
-              <a:rPr sz="1150">
-                <a:solidFill>
-                  <a:srgbClr val="202020"/>
-                </a:solidFill>
-              </a:rPr>
-              <a:t>profit, invisible to GM and OPEX alike.</a:t>
-            </a:r>
-          </a:p>
-          <a:p>
-            <a:pPr>
-              <a:spcBef>
-                <a:spcPts val="400"/>
-              </a:spcBef>
-            </a:pPr>
-            <a:r>
-              <a:rPr sz="1150">
-                <a:solidFill>
-                  <a:srgbClr val="202020"/>
-                </a:solidFill>
-              </a:rPr>
-              <a:t>That IS the underutilized-footprint cost</a:t>
-            </a:r>
-          </a:p>
-        </p:txBody>
-      </p:sp>
-      <p:sp>
-        <p:nvSpPr>
-          <p:cNvPr id="7" name="TextBox 6"/>
-          <p:cNvSpPr txBox="1"/>
-          <p:nvPr/>
-        </p:nvSpPr>
-        <p:spPr>
-          <a:xfrm>
-            <a:off x="457200" y="5806440"/>
-            <a:ext cx="11247120" cy="914400"/>
-          </a:xfrm>
-          <a:prstGeom prst="rect">
-            <a:avLst/>
-          </a:prstGeom>
-          <a:noFill/>
-        </p:spPr>
-        <p:txBody>
-          <a:bodyPr wrap="square">
-            <a:spAutoFit/>
-          </a:bodyPr>
-          <a:lstStyle/>
-          <a:p>
-            <a:pPr algn="l"/>
-            <a:r>
-              <a:rPr sz="1150" b="0">
-                <a:solidFill>
-                  <a:srgbClr val="595959"/>
-                </a:solidFill>
-              </a:rPr>
-              <a:t>Two-front program, mapped to the P&amp;L: (1) footprint/utilization repair attacks COGS — the $22-24M/yr gross-margin prize (North America exit and the ¥712M Japan impairment show it has started); (2) R&amp;D catch-up deliberately GROWS opex toward peer levels (peers spend 10-14% incl. 4%+ R&amp;D and earn 2.5x TBK's operating margin — Concentric grew opex 10.3%→11.7% funding its e-pump transition at 18.4% avg OPM). Cut above the line, invest below it.</a:t>
             </a:r>
           </a:p>
         </p:txBody>

--- a/TBK_rd_gap_slides.pptx
+++ b/TBK_rd_gap_slides.pptx
@@ -17,6 +17,7 @@
     <p:sldId id="265" r:id="rId16"/>
     <p:sldId id="266" r:id="rId17"/>
     <p:sldId id="267" r:id="rId18"/>
+    <p:sldId id="268" r:id="rId19"/>
   </p:sldIdLst>
   <p:sldSz cx="12191695" cy="6858000" type="screen4x3"/>
   <p:notesSz cx="6858000" cy="9144000"/>
@@ -164,9 +165,9 @@
           </c:spPr>
           <c:cat>
             <c:strRef>
-              <c:f>Sheet1!$A$2:$A$12</c:f>
+              <c:f>Sheet1!$A$2:$A$13</c:f>
               <c:strCache>
-                <c:ptCount val="11"/>
+                <c:ptCount val="12"/>
                 <c:pt idx="0">
                   <c:v>SAF-Holland</c:v>
                 </c:pt>
@@ -180,24 +181,27 @@
                   <c:v>Cummins</c:v>
                 </c:pt>
                 <c:pt idx="4">
+                  <c:v>Akebono</c:v>
+                </c:pt>
+                <c:pt idx="5">
                   <c:v>Aisin</c:v>
                 </c:pt>
-                <c:pt idx="5">
+                <c:pt idx="6">
                   <c:v>Hanon*</c:v>
                 </c:pt>
-                <c:pt idx="6">
+                <c:pt idx="7">
                   <c:v>Mahle</c:v>
                 </c:pt>
-                <c:pt idx="7">
+                <c:pt idx="8">
                   <c:v>Mikuni</c:v>
                 </c:pt>
-                <c:pt idx="8">
+                <c:pt idx="9">
                   <c:v>Brembo</c:v>
                 </c:pt>
-                <c:pt idx="9">
+                <c:pt idx="10">
                   <c:v>Knorr-Bremse</c:v>
                 </c:pt>
-                <c:pt idx="10">
+                <c:pt idx="11">
                   <c:v>ZF</c:v>
                 </c:pt>
               </c:strCache>
@@ -205,12 +209,12 @@
           </c:cat>
           <c:val>
             <c:numRef>
-              <c:f>Sheet1!$B$2:$B$12</c:f>
+              <c:f>Sheet1!$B$2:$B$13</c:f>
               <c:numCache>
                 <c:formatCode>General</c:formatCode>
-                <c:ptCount val="11"/>
+                <c:ptCount val="12"/>
                 <c:pt idx="0">
-                  <c:v>2.1</c:v>
+                  <c:v>1.7</c:v>
                 </c:pt>
                 <c:pt idx="1">
                   <c:v>2.2</c:v>
@@ -219,27 +223,30 @@
                   <c:v>2.3</c:v>
                 </c:pt>
                 <c:pt idx="3">
+                  <c:v>4.1</c:v>
+                </c:pt>
+                <c:pt idx="4">
                   <c:v>4.3</c:v>
                 </c:pt>
-                <c:pt idx="4">
+                <c:pt idx="5">
                   <c:v>4.8</c:v>
                 </c:pt>
-                <c:pt idx="5">
+                <c:pt idx="6">
                   <c:v>5.0</c:v>
-                </c:pt>
-                <c:pt idx="6">
-                  <c:v>5.4</c:v>
                 </c:pt>
                 <c:pt idx="7">
                   <c:v>5.4</c:v>
                 </c:pt>
                 <c:pt idx="8">
+                  <c:v>5.9</c:v>
+                </c:pt>
+                <c:pt idx="9">
                   <c:v>6.1</c:v>
                 </c:pt>
-                <c:pt idx="9">
-                  <c:v>6.9</c:v>
-                </c:pt>
                 <c:pt idx="10">
+                  <c:v>6.8</c:v>
+                </c:pt>
+                <c:pt idx="11">
                   <c:v>8.6</c:v>
                 </c:pt>
               </c:numCache>
@@ -326,6 +333,183 @@
 </file>
 
 <file path=ppt/charts/chart2.xml><?xml version="1.0" encoding="utf-8"?>
+<c:chartSpace xmlns:c="http://schemas.openxmlformats.org/drawingml/2006/chart" xmlns:a="http://schemas.openxmlformats.org/drawingml/2006/main" xmlns:r="http://schemas.openxmlformats.org/officeDocument/2006/relationships">
+  <c:date1904 val="0"/>
+  <c:chart>
+    <c:title>
+      <c:tx>
+        <c:rich>
+          <a:bodyPr/>
+          <a:lstStyle/>
+          <a:p>
+            <a:r>
+              <a:rPr sz="1400"/>
+              <a:t>Capitalized R&amp;D stock, US$M (2025)</a:t>
+            </a:r>
+          </a:p>
+        </c:rich>
+      </c:tx>
+      <c:layout/>
+      <c:overlay val="0"/>
+    </c:title>
+    <c:autoTitleDeleted val="0"/>
+    <c:plotArea>
+      <c:barChart>
+        <c:barDir val="col"/>
+        <c:grouping val="clustered"/>
+        <c:ser>
+          <c:idx val="0"/>
+          <c:order val="0"/>
+          <c:tx>
+            <c:strRef>
+              <c:f>Sheet1!$B$1</c:f>
+              <c:strCache>
+                <c:ptCount val="1"/>
+                <c:pt idx="0">
+                  <c:v>R&amp;D Capital Base ($M)</c:v>
+                </c:pt>
+              </c:strCache>
+            </c:strRef>
+          </c:tx>
+          <c:spPr>
+            <a:solidFill>
+              <a:srgbClr val="1F4E78"/>
+            </a:solidFill>
+          </c:spPr>
+          <c:cat>
+            <c:strRef>
+              <c:f>Sheet1!$A$2:$A$7</c:f>
+              <c:strCache>
+                <c:ptCount val="6"/>
+                <c:pt idx="0">
+                  <c:v>TBK</c:v>
+                </c:pt>
+                <c:pt idx="1">
+                  <c:v>Akebono</c:v>
+                </c:pt>
+                <c:pt idx="2">
+                  <c:v>SAF-Holland</c:v>
+                </c:pt>
+                <c:pt idx="3">
+                  <c:v>Mikuni</c:v>
+                </c:pt>
+                <c:pt idx="4">
+                  <c:v>Knorr-Bremse</c:v>
+                </c:pt>
+                <c:pt idx="5">
+                  <c:v>Cummins</c:v>
+                </c:pt>
+              </c:strCache>
+            </c:strRef>
+          </c:cat>
+          <c:val>
+            <c:numRef>
+              <c:f>Sheet1!$B$2:$B$7</c:f>
+              <c:numCache>
+                <c:formatCode>General</c:formatCode>
+                <c:ptCount val="6"/>
+                <c:pt idx="0">
+                  <c:v>43</c:v>
+                </c:pt>
+                <c:pt idx="1">
+                  <c:v>123</c:v>
+                </c:pt>
+                <c:pt idx="2">
+                  <c:v>131</c:v>
+                </c:pt>
+                <c:pt idx="3">
+                  <c:v>194</c:v>
+                </c:pt>
+                <c:pt idx="4">
+                  <c:v>2569</c:v>
+                </c:pt>
+                <c:pt idx="5">
+                  <c:v>5594</c:v>
+                </c:pt>
+              </c:numCache>
+            </c:numRef>
+          </c:val>
+        </c:ser>
+        <c:dLbls>
+          <c:numFmt formatCode="#,##0" sourceLinked="0"/>
+          <c:txPr>
+            <a:bodyPr/>
+            <a:lstStyle/>
+            <a:p>
+              <a:pPr>
+                <a:defRPr sz="1100"/>
+              </a:pPr>
+            </a:p>
+          </c:txPr>
+          <c:showLegendKey val="0"/>
+          <c:showVal val="1"/>
+          <c:showCatName val="0"/>
+          <c:showSerName val="0"/>
+          <c:showPercent val="0"/>
+          <c:showBubbleSize val="0"/>
+          <c:showLeaderLines val="1"/>
+        </c:dLbls>
+        <c:axId val="-2068027336"/>
+        <c:axId val="-2113994440"/>
+      </c:barChart>
+      <c:catAx>
+        <c:axId val="-2068027336"/>
+        <c:scaling>
+          <c:orientation val="minMax"/>
+        </c:scaling>
+        <c:delete val="0"/>
+        <c:axPos val="b"/>
+        <c:majorTickMark val="out"/>
+        <c:minorTickMark val="none"/>
+        <c:tickLblPos val="nextTo"/>
+        <c:txPr>
+          <a:bodyPr/>
+          <a:lstStyle/>
+          <a:p>
+            <a:pPr>
+              <a:defRPr sz="1100"/>
+            </a:pPr>
+          </a:p>
+        </c:txPr>
+        <c:crossAx val="-2113994440"/>
+        <c:crosses val="autoZero"/>
+        <c:auto val="1"/>
+        <c:lblAlgn val="ctr"/>
+        <c:lblOffset val="100"/>
+        <c:noMultiLvlLbl val="0"/>
+      </c:catAx>
+      <c:valAx>
+        <c:axId val="-2113994440"/>
+        <c:scaling/>
+        <c:delete val="0"/>
+        <c:axPos val="l"/>
+        <c:majorGridlines/>
+        <c:majorTickMark val="out"/>
+        <c:minorTickMark val="none"/>
+        <c:tickLblPos val="nextTo"/>
+        <c:crossAx val="-2068027336"/>
+        <c:crosses val="autoZero"/>
+      </c:valAx>
+    </c:plotArea>
+    <c:dispBlanksAs val="gap"/>
+  </c:chart>
+  <c:txPr>
+    <a:bodyPr/>
+    <a:lstStyle/>
+    <a:p>
+      <a:pPr>
+        <a:defRPr sz="1800"/>
+      </a:pPr>
+      <a:endParaRPr lang="en-US"/>
+    </a:p>
+  </c:txPr>
+  <c:externalData r:id="rId1">
+    <c:autoUpdate val="0"/>
+  </c:externalData>
+</c:chartSpace>
+</file>
+
+<file path=ppt/charts/chart3.xml><?xml version="1.0" encoding="utf-8"?>
 <c:chartSpace xmlns:c="http://schemas.openxmlformats.org/drawingml/2006/chart" xmlns:a="http://schemas.openxmlformats.org/drawingml/2006/main" xmlns:r="http://schemas.openxmlformats.org/officeDocument/2006/relationships">
   <c:date1904 val="0"/>
   <c:chart>
@@ -595,7 +779,7 @@
 </c:chartSpace>
 </file>
 
-<file path=ppt/charts/chart3.xml><?xml version="1.0" encoding="utf-8"?>
+<file path=ppt/charts/chart4.xml><?xml version="1.0" encoding="utf-8"?>
 <c:chartSpace xmlns:c="http://schemas.openxmlformats.org/drawingml/2006/chart" xmlns:a="http://schemas.openxmlformats.org/drawingml/2006/main" xmlns:r="http://schemas.openxmlformats.org/officeDocument/2006/relationships">
   <c:date1904 val="0"/>
   <c:chart>
@@ -875,7 +1059,7 @@
 </c:chartSpace>
 </file>
 
-<file path=ppt/charts/chart4.xml><?xml version="1.0" encoding="utf-8"?>
+<file path=ppt/charts/chart5.xml><?xml version="1.0" encoding="utf-8"?>
 <c:chartSpace xmlns:c="http://schemas.openxmlformats.org/drawingml/2006/chart" xmlns:a="http://schemas.openxmlformats.org/drawingml/2006/main" xmlns:r="http://schemas.openxmlformats.org/officeDocument/2006/relationships">
   <c:date1904 val="0"/>
   <c:chart>
@@ -1139,7 +1323,7 @@
 </c:chartSpace>
 </file>
 
-<file path=ppt/charts/chart5.xml><?xml version="1.0" encoding="utf-8"?>
+<file path=ppt/charts/chart6.xml><?xml version="1.0" encoding="utf-8"?>
 <c:chartSpace xmlns:c="http://schemas.openxmlformats.org/drawingml/2006/chart" xmlns:a="http://schemas.openxmlformats.org/drawingml/2006/main" xmlns:r="http://schemas.openxmlformats.org/officeDocument/2006/relationships">
   <c:date1904 val="0"/>
   <c:chart>
@@ -1419,7 +1603,7 @@
 </c:chartSpace>
 </file>
 
-<file path=ppt/charts/chart6.xml><?xml version="1.0" encoding="utf-8"?>
+<file path=ppt/charts/chart7.xml><?xml version="1.0" encoding="utf-8"?>
 <c:chartSpace xmlns:c="http://schemas.openxmlformats.org/drawingml/2006/chart" xmlns:a="http://schemas.openxmlformats.org/drawingml/2006/main" xmlns:r="http://schemas.openxmlformats.org/officeDocument/2006/relationships">
   <c:date1904 val="0"/>
   <c:chart>
@@ -4837,6 +5021,367 @@
                   <a:srgbClr val="FFFFFF"/>
                 </a:solidFill>
               </a:rPr>
+              <a:t>Closing the margin gap is worth ~$22-24M more gross profit per year</a:t>
+            </a:r>
+          </a:p>
+        </p:txBody>
+      </p:sp>
+      <p:sp>
+        <p:nvSpPr>
+          <p:cNvPr id="3" name="TextBox 2"/>
+          <p:cNvSpPr txBox="1"/>
+          <p:nvPr/>
+        </p:nvSpPr>
+        <p:spPr>
+          <a:xfrm>
+            <a:off x="457200" y="914400"/>
+            <a:ext cx="11247120" cy="365760"/>
+          </a:xfrm>
+          <a:prstGeom prst="rect">
+            <a:avLst/>
+          </a:prstGeom>
+          <a:noFill/>
+        </p:spPr>
+        <p:txBody>
+          <a:bodyPr wrap="square">
+            <a:spAutoFit/>
+          </a:bodyPr>
+          <a:lstStyle/>
+          <a:p>
+            <a:pPr algn="l"/>
+            <a:r>
+              <a:rPr sz="1200" b="0">
+                <a:solidFill>
+                  <a:srgbClr val="595959"/>
+                </a:solidFill>
+              </a:rPr>
+              <a:t>TBK FY3/2026 sales ($365M) at peer margins  |  USD at ¥150/USD  |  division split estimated from FY3/2025 (35% / 65%)</a:t>
+            </a:r>
+          </a:p>
+        </p:txBody>
+      </p:sp>
+      <p:graphicFrame>
+        <p:nvGraphicFramePr>
+          <p:cNvPr id="4" name="Chart 3"/>
+          <p:cNvGraphicFramePr>
+            <a:graphicFrameLocks noGrp="1"/>
+          </p:cNvGraphicFramePr>
+          <p:nvPr/>
+        </p:nvGraphicFramePr>
+        <p:xfrm>
+          <a:off x="457200" y="1463040"/>
+          <a:ext cx="6217920" cy="4206240"/>
+        </p:xfrm>
+        <a:graphic>
+          <a:graphicData uri="http://schemas.openxmlformats.org/drawingml/2006/chart">
+            <c:chart xmlns:c="http://schemas.openxmlformats.org/drawingml/2006/chart" r:id="rId2"/>
+          </a:graphicData>
+        </a:graphic>
+      </p:graphicFrame>
+      <p:sp>
+        <p:nvSpPr>
+          <p:cNvPr id="5" name="TextBox 4"/>
+          <p:cNvSpPr txBox="1"/>
+          <p:nvPr/>
+        </p:nvSpPr>
+        <p:spPr>
+          <a:xfrm>
+            <a:off x="6949440" y="1463040"/>
+            <a:ext cx="4800600" cy="1828800"/>
+          </a:xfrm>
+          <a:prstGeom prst="rect">
+            <a:avLst/>
+          </a:prstGeom>
+          <a:solidFill>
+            <a:srgbClr val="F2F2F2"/>
+          </a:solidFill>
+          <a:ln w="15875">
+            <a:solidFill>
+              <a:srgbClr val="1F4E78"/>
+            </a:solidFill>
+          </a:ln>
+        </p:spPr>
+        <p:txBody>
+          <a:bodyPr wrap="square" lIns="137160" rIns="137160" tIns="109728">
+            <a:spAutoFit/>
+          </a:bodyPr>
+          <a:lstStyle/>
+          <a:p>
+            <a:r>
+              <a:rPr sz="1500" b="1">
+                <a:solidFill>
+                  <a:srgbClr val="1F4E78"/>
+                </a:solidFill>
+              </a:rPr>
+              <a:t>The annual prize</a:t>
+            </a:r>
+          </a:p>
+          <a:p>
+            <a:pPr>
+              <a:spcBef>
+                <a:spcPts val="400"/>
+              </a:spcBef>
+            </a:pPr>
+            <a:r>
+              <a:rPr sz="1300">
+                <a:solidFill>
+                  <a:srgbClr val="202020"/>
+                </a:solidFill>
+              </a:rPr>
+              <a:t>+$21.6M/yr at peer AVERAGE margins</a:t>
+            </a:r>
+          </a:p>
+          <a:p>
+            <a:pPr>
+              <a:spcBef>
+                <a:spcPts val="400"/>
+              </a:spcBef>
+            </a:pPr>
+            <a:r>
+              <a:rPr sz="1300">
+                <a:solidFill>
+                  <a:srgbClr val="202020"/>
+                </a:solidFill>
+              </a:rPr>
+              <a:t>+$24.4M/yr at peer MEDIAN margins</a:t>
+            </a:r>
+          </a:p>
+          <a:p>
+            <a:pPr>
+              <a:spcBef>
+                <a:spcPts val="400"/>
+              </a:spcBef>
+            </a:pPr>
+            <a:r>
+              <a:rPr sz="1300">
+                <a:solidFill>
+                  <a:srgbClr val="202020"/>
+                </a:solidFill>
+              </a:rPr>
+              <a:t>≈ +50% on today's $45.5M gross profit</a:t>
+            </a:r>
+          </a:p>
+          <a:p>
+            <a:pPr>
+              <a:spcBef>
+                <a:spcPts val="400"/>
+              </a:spcBef>
+            </a:pPr>
+            <a:r>
+              <a:rPr sz="1300">
+                <a:solidFill>
+                  <a:srgbClr val="202020"/>
+                </a:solidFill>
+              </a:rPr>
+              <a:t>Split roughly half brakes, half pumps (~$11-14M each)</a:t>
+            </a:r>
+          </a:p>
+        </p:txBody>
+      </p:sp>
+      <p:sp>
+        <p:nvSpPr>
+          <p:cNvPr id="6" name="TextBox 5"/>
+          <p:cNvSpPr txBox="1"/>
+          <p:nvPr/>
+        </p:nvSpPr>
+        <p:spPr>
+          <a:xfrm>
+            <a:off x="6949440" y="3429000"/>
+            <a:ext cx="4800600" cy="2377440"/>
+          </a:xfrm>
+          <a:prstGeom prst="rect">
+            <a:avLst/>
+          </a:prstGeom>
+          <a:solidFill>
+            <a:srgbClr val="F2F2F2"/>
+          </a:solidFill>
+          <a:ln w="15875">
+            <a:solidFill>
+              <a:srgbClr val="548235"/>
+            </a:solidFill>
+          </a:ln>
+        </p:spPr>
+        <p:txBody>
+          <a:bodyPr wrap="square" lIns="137160" rIns="137160" tIns="109728">
+            <a:spAutoFit/>
+          </a:bodyPr>
+          <a:lstStyle/>
+          <a:p>
+            <a:r>
+              <a:rPr sz="1500" b="1">
+                <a:solidFill>
+                  <a:srgbClr val="548235"/>
+                </a:solidFill>
+              </a:rPr>
+              <a:t>What it funds</a:t>
+            </a:r>
+          </a:p>
+          <a:p>
+            <a:pPr>
+              <a:spcBef>
+                <a:spcPts val="400"/>
+              </a:spcBef>
+            </a:pPr>
+            <a:r>
+              <a:rPr sz="1300">
+                <a:solidFill>
+                  <a:srgbClr val="202020"/>
+                </a:solidFill>
+              </a:rPr>
+              <a:t>The entire R&amp;D catch-up program costs ~$27M/yr</a:t>
+            </a:r>
+          </a:p>
+          <a:p>
+            <a:pPr>
+              <a:spcBef>
+                <a:spcPts val="400"/>
+              </a:spcBef>
+            </a:pPr>
+            <a:r>
+              <a:rPr sz="1300">
+                <a:solidFill>
+                  <a:srgbClr val="202020"/>
+                </a:solidFill>
+              </a:rPr>
+              <a:t>(parity run-rate $17M + deficit repayment $10M)</a:t>
+            </a:r>
+          </a:p>
+          <a:p>
+            <a:pPr>
+              <a:spcBef>
+                <a:spcPts val="400"/>
+              </a:spcBef>
+            </a:pPr>
+            <a:r>
+              <a:rPr sz="1300">
+                <a:solidFill>
+                  <a:srgbClr val="202020"/>
+                </a:solidFill>
+              </a:rPr>
+              <a:t>→ closing ~90% of the margin gap pays for ALL of it</a:t>
+            </a:r>
+          </a:p>
+          <a:p>
+            <a:pPr>
+              <a:spcBef>
+                <a:spcPts val="400"/>
+              </a:spcBef>
+            </a:pPr>
+          </a:p>
+          <a:p>
+            <a:pPr>
+              <a:spcBef>
+                <a:spcPts val="400"/>
+              </a:spcBef>
+            </a:pPr>
+            <a:r>
+              <a:rPr sz="1300">
+                <a:solidFill>
+                  <a:srgbClr val="202020"/>
+                </a:solidFill>
+              </a:rPr>
+              <a:t>FY3/2026 already delivered the first ~$7M/yr</a:t>
+            </a:r>
+          </a:p>
+          <a:p>
+            <a:pPr>
+              <a:spcBef>
+                <a:spcPts val="400"/>
+              </a:spcBef>
+            </a:pPr>
+            <a:r>
+              <a:rPr sz="1300">
+                <a:solidFill>
+                  <a:srgbClr val="202020"/>
+                </a:solidFill>
+              </a:rPr>
+              <a:t>(margin 10.6% → 12.5%) — the path is proven, not theoretical</a:t>
+            </a:r>
+          </a:p>
+        </p:txBody>
+      </p:sp>
+      <p:sp>
+        <p:nvSpPr>
+          <p:cNvPr id="7" name="TextBox 6"/>
+          <p:cNvSpPr txBox="1"/>
+          <p:nvPr/>
+        </p:nvSpPr>
+        <p:spPr>
+          <a:xfrm>
+            <a:off x="457200" y="5806440"/>
+            <a:ext cx="11247120" cy="822960"/>
+          </a:xfrm>
+          <a:prstGeom prst="rect">
+            <a:avLst/>
+          </a:prstGeom>
+          <a:noFill/>
+        </p:spPr>
+        <p:txBody>
+          <a:bodyPr wrap="square">
+            <a:spAutoFit/>
+          </a:bodyPr>
+          <a:lstStyle/>
+          <a:p>
+            <a:pPr algn="l"/>
+            <a:r>
+              <a:rPr sz="1150" b="0">
+                <a:solidFill>
+                  <a:srgbClr val="595959"/>
+                </a:solidFill>
+              </a:rPr>
+              <a:t>Method: brakes ~$127M sales x peer avg 21.0% / median 23.4%; pumps &amp; engine components ~$238M x 17.0% / 16.9%; vs actual blended 12.5%. Margin levers per the benchmark: aftermarket/branded content, niche pricing power (Concentric/TPR model), price-down discipline, and mix shift to disc brakes and e-pumps.</a:t>
+            </a:r>
+          </a:p>
+        </p:txBody>
+      </p:sp>
+    </p:spTree>
+  </p:cSld>
+  <p:clrMapOvr>
+    <a:masterClrMapping/>
+  </p:clrMapOvr>
+</p:sld>
+</file>
+
+<file path=ppt/slides/slide11.xml><?xml version="1.0" encoding="utf-8"?>
+<p:sld xmlns:a="http://schemas.openxmlformats.org/drawingml/2006/main" xmlns:p="http://schemas.openxmlformats.org/presentationml/2006/main" xmlns:r="http://schemas.openxmlformats.org/officeDocument/2006/relationships">
+  <p:cSld>
+    <p:spTree>
+      <p:nvGrpSpPr>
+        <p:cNvPr id="1" name=""/>
+        <p:cNvGrpSpPr/>
+        <p:nvPr/>
+      </p:nvGrpSpPr>
+      <p:grpSpPr/>
+      <p:sp>
+        <p:nvSpPr>
+          <p:cNvPr id="2" name="TextBox 1"/>
+          <p:cNvSpPr txBox="1"/>
+          <p:nvPr/>
+        </p:nvSpPr>
+        <p:spPr>
+          <a:xfrm>
+            <a:off x="0" y="0"/>
+            <a:ext cx="12191695" cy="868680"/>
+          </a:xfrm>
+          <a:prstGeom prst="rect">
+            <a:avLst/>
+          </a:prstGeom>
+          <a:solidFill>
+            <a:srgbClr val="1F4E78"/>
+          </a:solidFill>
+        </p:spPr>
+        <p:txBody>
+          <a:bodyPr wrap="square" lIns="457200" tIns="164592">
+            <a:spAutoFit/>
+          </a:bodyPr>
+          <a:lstStyle/>
+          <a:p>
+            <a:r>
+              <a:rPr sz="2600" b="1">
+                <a:solidFill>
+                  <a:srgbClr val="FFFFFF"/>
+                </a:solidFill>
+              </a:rPr>
               <a:t>Why TBK looks lean on OPEX: its factory costs hide in COGS</a:t>
             </a:r>
           </a:p>
@@ -5196,7 +5741,7 @@
 </p:sld>
 </file>
 
-<file path=ppt/slides/slide11.xml><?xml version="1.0" encoding="utf-8"?>
+<file path=ppt/slides/slide12.xml><?xml version="1.0" encoding="utf-8"?>
 <p:sld xmlns:a="http://schemas.openxmlformats.org/drawingml/2006/main" xmlns:p="http://schemas.openxmlformats.org/presentationml/2006/main" xmlns:r="http://schemas.openxmlformats.org/officeDocument/2006/relationships">
   <p:cSld>
     <p:spTree>
@@ -5516,7 +6061,7 @@
 </p:sld>
 </file>
 
-<file path=ppt/slides/slide12.xml><?xml version="1.0" encoding="utf-8"?>
+<file path=ppt/slides/slide13.xml><?xml version="1.0" encoding="utf-8"?>
 <p:sld xmlns:a="http://schemas.openxmlformats.org/drawingml/2006/main" xmlns:p="http://schemas.openxmlformats.org/presentationml/2006/main" xmlns:r="http://schemas.openxmlformats.org/officeDocument/2006/relationships">
   <p:cSld>
     <p:spTree>
@@ -8257,7 +8802,7 @@
                   <a:srgbClr val="595959"/>
                 </a:solidFill>
               </a:rPr>
-              <a:t>Brake systems players spend 6-9% of sales; large pump/thermal players cluster at 4-5.5%. TBK sits at 2.2%. *Concentric (AR2023, verified): expensed product development only 2.3% — yet 25% gross margin: niche dominance, not raw R&amp;D scale, drives pump profitability. The catch-up case rests on the larger peers and on winning specific e-pump sockets. *Hanon mid-range of conflicting filings.</a:t>
+              <a:t>Brake systems players spend 6-9% of sales; large pump/thermal players cluster at 4-5.5%; Akebono now at 4.3% (EMB + copper-free friction ramp, per consistent peer dataset). TBK sits at 2.2%. *Concentric (AR2023, verified): expensed product development only 2.3% — yet 25% gross margin: niche dominance, not raw R&amp;D scale, drives pump profitability. *Hanon mid-range of conflicting filings.</a:t>
             </a:r>
           </a:p>
         </p:txBody>
@@ -8310,7 +8855,7 @@
                   <a:srgbClr val="FFFFFF"/>
                 </a:solidFill>
               </a:rPr>
-              <a:t>The case that TBK's gross margin is structurally too low</a:t>
+              <a:t>The stock, not the flow: competitors' capitalized R&amp;D</a:t>
             </a:r>
           </a:p>
         </p:txBody>
@@ -8344,21 +8889,39 @@
                   <a:srgbClr val="595959"/>
                 </a:solidFill>
               </a:rPr>
-              <a:t>TBK FY3/2026: 12.5% gross margin, 2.7% operating margin — four independent lines of evidence say this is a fixable defect, not the nature of the business</a:t>
-            </a:r>
-          </a:p>
-        </p:txBody>
-      </p:sp>
-      <p:sp>
-        <p:nvSpPr>
-          <p:cNvPr id="4" name="TextBox 3"/>
+              <a:t>R&amp;D Capital Base = cumulative R&amp;D capitalized and amortized on a consistent basis (peer dataset, 2025, USD) — the knowledge asset each company has built</a:t>
+            </a:r>
+          </a:p>
+        </p:txBody>
+      </p:sp>
+      <p:graphicFrame>
+        <p:nvGraphicFramePr>
+          <p:cNvPr id="4" name="Chart 3"/>
+          <p:cNvGraphicFramePr>
+            <a:graphicFrameLocks noGrp="1"/>
+          </p:cNvGraphicFramePr>
+          <p:nvPr/>
+        </p:nvGraphicFramePr>
+        <p:xfrm>
+          <a:off x="457200" y="1463040"/>
+          <a:ext cx="6675120" cy="4206240"/>
+        </p:xfrm>
+        <a:graphic>
+          <a:graphicData uri="http://schemas.openxmlformats.org/drawingml/2006/chart">
+            <c:chart xmlns:c="http://schemas.openxmlformats.org/drawingml/2006/chart" r:id="rId2"/>
+          </a:graphicData>
+        </a:graphic>
+      </p:graphicFrame>
+      <p:sp>
+        <p:nvSpPr>
+          <p:cNvPr id="5" name="TextBox 4"/>
           <p:cNvSpPr txBox="1"/>
           <p:nvPr/>
         </p:nvSpPr>
         <p:spPr>
           <a:xfrm>
-            <a:off x="457200" y="1417320"/>
-            <a:ext cx="5577840" cy="2148840"/>
+            <a:off x="7406640" y="1463040"/>
+            <a:ext cx="4343400" cy="2103120"/>
           </a:xfrm>
           <a:prstGeom prst="rect">
             <a:avLst/>
@@ -8384,137 +8947,97 @@
                   <a:srgbClr val="1F4E78"/>
                 </a:solidFill>
               </a:rPr>
-              <a:t>1. Peers prove the products can carry more</a:t>
-            </a:r>
-          </a:p>
-          <a:p>
-            <a:pPr>
-              <a:spcBef>
-                <a:spcPts val="400"/>
-              </a:spcBef>
-            </a:pPr>
-            <a:r>
-              <a:rPr sz="1150">
-                <a:solidFill>
-                  <a:srgbClr val="202020"/>
-                </a:solidFill>
-              </a:rPr>
-              <a:t>Every comparable brake peer except Akebono earns 22-27% (Haldex 27.3%, Cummins 24.7%, SAF-Holland ~22%)</a:t>
-            </a:r>
-          </a:p>
-          <a:p>
-            <a:pPr>
-              <a:spcBef>
-                <a:spcPts val="400"/>
-              </a:spcBef>
-            </a:pPr>
-            <a:r>
-              <a:rPr sz="1150">
-                <a:solidFill>
-                  <a:srgbClr val="202020"/>
-                </a:solidFill>
-              </a:rPr>
-              <a:t>Pump peers: Concentric 25.2% (verified AR2023), TPR 21.7% — the high-share niche players, i.e. exactly TBK's structural position in Japanese truck pumps</a:t>
-            </a:r>
-          </a:p>
-          <a:p>
-            <a:pPr>
-              <a:spcBef>
-                <a:spcPts val="400"/>
-              </a:spcBef>
-            </a:pPr>
-            <a:r>
-              <a:rPr sz="1150">
-                <a:solidFill>
-                  <a:srgbClr val="202020"/>
-                </a:solidFill>
-              </a:rPr>
-              <a:t>Same product categories, same customers' industry — 5-15 points more margin</a:t>
-            </a:r>
-          </a:p>
-        </p:txBody>
-      </p:sp>
-      <p:sp>
-        <p:nvSpPr>
-          <p:cNvPr id="5" name="TextBox 4"/>
-          <p:cNvSpPr txBox="1"/>
-          <p:nvPr/>
-        </p:nvSpPr>
-        <p:spPr>
-          <a:xfrm>
-            <a:off x="6217920" y="1417320"/>
-            <a:ext cx="5532120" cy="2148840"/>
-          </a:xfrm>
-          <a:prstGeom prst="rect">
-            <a:avLst/>
-          </a:prstGeom>
-          <a:solidFill>
-            <a:srgbClr val="F2F2F2"/>
-          </a:solidFill>
-          <a:ln w="15875">
-            <a:solidFill>
-              <a:srgbClr val="7F1D1D"/>
-            </a:solidFill>
-          </a:ln>
-        </p:spPr>
-        <p:txBody>
-          <a:bodyPr wrap="square" lIns="137160" rIns="137160" tIns="109728">
-            <a:spAutoFit/>
-          </a:bodyPr>
-          <a:lstStyle/>
-          <a:p>
-            <a:r>
-              <a:rPr sz="1500" b="1">
-                <a:solidFill>
-                  <a:srgbClr val="7F1D1D"/>
-                </a:solidFill>
-              </a:rPr>
-              <a:t>2. TBK earns LESS than its own customers</a:t>
-            </a:r>
-          </a:p>
-          <a:p>
-            <a:pPr>
-              <a:spcBef>
-                <a:spcPts val="400"/>
-              </a:spcBef>
-            </a:pPr>
-            <a:r>
-              <a:rPr sz="1150">
-                <a:solidFill>
-                  <a:srgbClr val="202020"/>
-                </a:solidFill>
-              </a:rPr>
-              <a:t>Isuzu gross margin ~19%, Hino ~17% vs TBK 12.5%</a:t>
-            </a:r>
-          </a:p>
-          <a:p>
-            <a:pPr>
-              <a:spcBef>
-                <a:spcPts val="400"/>
-              </a:spcBef>
-            </a:pPr>
-            <a:r>
-              <a:rPr sz="1150">
-                <a:solidFill>
-                  <a:srgbClr val="202020"/>
-                </a:solidFill>
-              </a:rPr>
-              <a:t>Healthy specialist suppliers out-margin their OEMs (Knorr-Bremse 13% EBIT vs truck OEMs' mid-single digits)</a:t>
-            </a:r>
-          </a:p>
-          <a:p>
-            <a:pPr>
-              <a:spcBef>
-                <a:spcPts val="400"/>
-              </a:spcBef>
-            </a:pPr>
-            <a:r>
-              <a:rPr sz="1150">
-                <a:solidFill>
-                  <a:srgbClr val="202020"/>
-                </a:solidFill>
-              </a:rPr>
-              <a:t>Inverted economics = pricing power sits with the customer: keiretsu concentration (Isuzu alone ¥12bn = 22% of sales) and annual price-downs, against commodity drum/mechanical products with no systems, electronics or branded-aftermarket content to defend price</a:t>
+              <a:t>The stock gap</a:t>
+            </a:r>
+          </a:p>
+          <a:p>
+            <a:pPr>
+              <a:spcBef>
+                <a:spcPts val="400"/>
+              </a:spcBef>
+            </a:pPr>
+            <a:r>
+              <a:rPr sz="1250">
+                <a:solidFill>
+                  <a:srgbClr val="202020"/>
+                </a:solidFill>
+              </a:rPr>
+              <a:t>Cummins $5.6bn — 130x TBK</a:t>
+            </a:r>
+          </a:p>
+          <a:p>
+            <a:pPr>
+              <a:spcBef>
+                <a:spcPts val="400"/>
+              </a:spcBef>
+            </a:pPr>
+            <a:r>
+              <a:rPr sz="1250">
+                <a:solidFill>
+                  <a:srgbClr val="202020"/>
+                </a:solidFill>
+              </a:rPr>
+              <a:t>Knorr-Bremse $2.6bn — 60x TBK</a:t>
+            </a:r>
+          </a:p>
+          <a:p>
+            <a:pPr>
+              <a:spcBef>
+                <a:spcPts val="400"/>
+              </a:spcBef>
+            </a:pPr>
+            <a:r>
+              <a:rPr sz="1250">
+                <a:solidFill>
+                  <a:srgbClr val="202020"/>
+                </a:solidFill>
+              </a:rPr>
+              <a:t>Mikuni $194M — 4.5x TBK</a:t>
+            </a:r>
+          </a:p>
+          <a:p>
+            <a:pPr>
+              <a:spcBef>
+                <a:spcPts val="400"/>
+              </a:spcBef>
+            </a:pPr>
+            <a:r>
+              <a:rPr sz="1250">
+                <a:solidFill>
+                  <a:srgbClr val="202020"/>
+                </a:solidFill>
+              </a:rPr>
+              <a:t>SAF-Holland $131M | Akebono $123M</a:t>
+            </a:r>
+          </a:p>
+          <a:p>
+            <a:pPr>
+              <a:spcBef>
+                <a:spcPts val="400"/>
+              </a:spcBef>
+            </a:pPr>
+            <a:r>
+              <a:rPr sz="1250">
+                <a:solidFill>
+                  <a:srgbClr val="202020"/>
+                </a:solidFill>
+              </a:rPr>
+              <a:t>TBK: $43M — the smallest knowledge</a:t>
+            </a:r>
+          </a:p>
+          <a:p>
+            <a:pPr>
+              <a:spcBef>
+                <a:spcPts val="400"/>
+              </a:spcBef>
+            </a:pPr>
+            <a:r>
+              <a:rPr sz="1250">
+                <a:solidFill>
+                  <a:srgbClr val="202020"/>
+                </a:solidFill>
+              </a:rPr>
+              <a:t>base in the peer set</a:t>
             </a:r>
           </a:p>
         </p:txBody>
@@ -8527,93 +9050,8 @@
         </p:nvSpPr>
         <p:spPr>
           <a:xfrm>
-            <a:off x="457200" y="3703320"/>
-            <a:ext cx="5577840" cy="2148840"/>
-          </a:xfrm>
-          <a:prstGeom prst="rect">
-            <a:avLst/>
-          </a:prstGeom>
-          <a:solidFill>
-            <a:srgbClr val="F2F2F2"/>
-          </a:solidFill>
-          <a:ln w="15875">
-            <a:solidFill>
-              <a:srgbClr val="1F4E78"/>
-            </a:solidFill>
-          </a:ln>
-        </p:spPr>
-        <p:txBody>
-          <a:bodyPr wrap="square" lIns="137160" rIns="137160" tIns="109728">
-            <a:spAutoFit/>
-          </a:bodyPr>
-          <a:lstStyle/>
-          <a:p>
-            <a:r>
-              <a:rPr sz="1500" b="1">
-                <a:solidFill>
-                  <a:srgbClr val="1F4E78"/>
-                </a:solidFill>
-              </a:rPr>
-              <a:t>3. The COGS line carries an underloaded footprint</a:t>
-            </a:r>
-          </a:p>
-          <a:p>
-            <a:pPr>
-              <a:spcBef>
-                <a:spcPts val="400"/>
-              </a:spcBef>
-            </a:pPr>
-            <a:r>
-              <a:rPr sz="1150">
-                <a:solidFill>
-                  <a:srgbClr val="202020"/>
-                </a:solidFill>
-              </a:rPr>
-              <a:t>PP&amp;E at 39% of sales — 3x Concentric's ~12%; depreciation 5.3% of sales</a:t>
-            </a:r>
-          </a:p>
-          <a:p>
-            <a:pPr>
-              <a:spcBef>
-                <a:spcPts val="400"/>
-              </a:spcBef>
-            </a:pPr>
-            <a:r>
-              <a:rPr sz="1150">
-                <a:solidFill>
-                  <a:srgbClr val="202020"/>
-                </a:solidFill>
-              </a:rPr>
-              <a:t>China: depreciation 12.8% of segment sales, losses both years; Japan segment margin just 1.6%</a:t>
-            </a:r>
-          </a:p>
-          <a:p>
-            <a:pPr>
-              <a:spcBef>
-                <a:spcPts val="400"/>
-              </a:spcBef>
-            </a:pPr>
-            <a:r>
-              <a:rPr sz="1150">
-                <a:solidFill>
-                  <a:srgbClr val="202020"/>
-                </a:solidFill>
-              </a:rPr>
-              <a:t>&gt;¥2.2bn impairments + restructuring losses in 2 years = the cost of underutilized plants crystallizing (booked below the operating line, so the true factory burden is even larger than the margin gap shows)</a:t>
-            </a:r>
-          </a:p>
-        </p:txBody>
-      </p:sp>
-      <p:sp>
-        <p:nvSpPr>
-          <p:cNvPr id="7" name="TextBox 6"/>
-          <p:cNvSpPr txBox="1"/>
-          <p:nvPr/>
-        </p:nvSpPr>
-        <p:spPr>
-          <a:xfrm>
-            <a:off x="6217920" y="3703320"/>
-            <a:ext cx="5532120" cy="2148840"/>
+            <a:off x="7406640" y="3703320"/>
+            <a:ext cx="4343400" cy="2103120"/>
           </a:xfrm>
           <a:prstGeom prst="rect">
             <a:avLst/>
@@ -8639,66 +9077,111 @@
                   <a:srgbClr val="548235"/>
                 </a:solidFill>
               </a:rPr>
-              <a:t>4. The repair has already started — and works</a:t>
-            </a:r>
-          </a:p>
-          <a:p>
-            <a:pPr>
-              <a:spcBef>
-                <a:spcPts val="400"/>
-              </a:spcBef>
-            </a:pPr>
-            <a:r>
-              <a:rPr sz="1150">
-                <a:solidFill>
-                  <a:srgbClr val="202020"/>
-                </a:solidFill>
-              </a:rPr>
-              <a:t>FY3/2026: gross margin 10.6% → 12.5% in one year (cost of sales cut ¥0.7bn on flat sales); North America exited; ¥712M Japan impairment = footprint action</a:t>
-            </a:r>
-          </a:p>
-          <a:p>
-            <a:pPr>
-              <a:spcBef>
-                <a:spcPts val="400"/>
-              </a:spcBef>
-            </a:pPr>
-            <a:r>
-              <a:rPr sz="1150">
-                <a:solidFill>
-                  <a:srgbClr val="202020"/>
-                </a:solidFill>
-              </a:rPr>
-              <a:t>Concentric's playbook validates the destination: focused niches, 25% gross margin, opex GROWING into the e-transition at 18.4% average operating margin</a:t>
-            </a:r>
-          </a:p>
-          <a:p>
-            <a:pPr>
-              <a:spcBef>
-                <a:spcPts val="400"/>
-              </a:spcBef>
-            </a:pPr>
-            <a:r>
-              <a:rPr sz="1150">
-                <a:solidFill>
-                  <a:srgbClr val="202020"/>
-                </a:solidFill>
-              </a:rPr>
-              <a:t>Nothing about brakes or pumps caps TBK at 12.5% — peers with the same products price and load their factories better</a:t>
-            </a:r>
-          </a:p>
-        </p:txBody>
-      </p:sp>
-      <p:sp>
-        <p:nvSpPr>
-          <p:cNvPr id="8" name="TextBox 7"/>
+              <a:t>Knowledge intensity (RDCB / sales)</a:t>
+            </a:r>
+          </a:p>
+          <a:p>
+            <a:pPr>
+              <a:spcBef>
+                <a:spcPts val="400"/>
+              </a:spcBef>
+            </a:pPr>
+            <a:r>
+              <a:rPr sz="1250">
+                <a:solidFill>
+                  <a:srgbClr val="202020"/>
+                </a:solidFill>
+              </a:rPr>
+              <a:t>Knorr-Bremse 29% | Mikuni 29%</a:t>
+            </a:r>
+          </a:p>
+          <a:p>
+            <a:pPr>
+              <a:spcBef>
+                <a:spcPts val="400"/>
+              </a:spcBef>
+            </a:pPr>
+            <a:r>
+              <a:rPr sz="1250">
+                <a:solidFill>
+                  <a:srgbClr val="202020"/>
+                </a:solidFill>
+              </a:rPr>
+              <a:t>Cummins 17%</a:t>
+            </a:r>
+          </a:p>
+          <a:p>
+            <a:pPr>
+              <a:spcBef>
+                <a:spcPts val="400"/>
+              </a:spcBef>
+            </a:pPr>
+            <a:r>
+              <a:rPr sz="1250">
+                <a:solidFill>
+                  <a:srgbClr val="202020"/>
+                </a:solidFill>
+              </a:rPr>
+              <a:t>TBK 12% | Akebono 12%</a:t>
+            </a:r>
+          </a:p>
+          <a:p>
+            <a:pPr>
+              <a:spcBef>
+                <a:spcPts val="400"/>
+              </a:spcBef>
+            </a:pPr>
+            <a:r>
+              <a:rPr sz="1250">
+                <a:solidFill>
+                  <a:srgbClr val="202020"/>
+                </a:solidFill>
+              </a:rPr>
+              <a:t>SAF-Holland 7%</a:t>
+            </a:r>
+          </a:p>
+          <a:p>
+            <a:pPr>
+              <a:spcBef>
+                <a:spcPts val="400"/>
+              </a:spcBef>
+            </a:pPr>
+            <a:r>
+              <a:rPr sz="1250">
+                <a:solidFill>
+                  <a:srgbClr val="202020"/>
+                </a:solidFill>
+              </a:rPr>
+              <a:t>The systems winners run structurally</a:t>
+            </a:r>
+          </a:p>
+          <a:p>
+            <a:pPr>
+              <a:spcBef>
+                <a:spcPts val="400"/>
+              </a:spcBef>
+            </a:pPr>
+            <a:r>
+              <a:rPr sz="1250">
+                <a:solidFill>
+                  <a:srgbClr val="202020"/>
+                </a:solidFill>
+              </a:rPr>
+              <a:t>knowledge-intensive business models</a:t>
+            </a:r>
+          </a:p>
+        </p:txBody>
+      </p:sp>
+      <p:sp>
+        <p:nvSpPr>
+          <p:cNvPr id="7" name="TextBox 6"/>
           <p:cNvSpPr txBox="1"/>
           <p:nvPr/>
         </p:nvSpPr>
         <p:spPr>
           <a:xfrm>
-            <a:off x="457200" y="5943600"/>
-            <a:ext cx="11247120" cy="822960"/>
+            <a:off x="457200" y="5806440"/>
+            <a:ext cx="11247120" cy="914400"/>
           </a:xfrm>
           <a:prstGeom prst="rect">
             <a:avLst/>
@@ -8713,12 +9196,12 @@
           <a:p>
             <a:pPr algn="l"/>
             <a:r>
-              <a:rPr sz="1300" b="1">
-                <a:solidFill>
-                  <a:srgbClr val="1F4E78"/>
-                </a:solidFill>
-              </a:rPr>
-              <a:t>Conclusion: at peer margins TBK's existing sales generate $22-24M more gross profit per year (next pages) — enough to fund the entire R&amp;D catch-up. The margin is the constraint, and it is self-inflicted: underloaded factories in COGS, commodity mix, and customer-held pricing power — all addressable.</a:t>
+              <a:rPr sz="1150" b="0">
+                <a:solidFill>
+                  <a:srgbClr val="595959"/>
+                </a:solidFill>
+              </a:rPr>
+              <a:t>Why it matters: the R&amp;D gap is cumulative, not annual. A decade of under-spending leaves TBK rebuilding a depleted asset while competitors amortize billions of accumulated know-how into every bid (brake control software, ADB iterations, e-pump motor/inverter design). This is why the catch-up phase must run YEARS at elevated spend — one good budget year cannot rebuild a stock — and why partnering (Brakes India) to borrow an existing knowledge base is rational.</a:t>
             </a:r>
           </a:p>
         </p:txBody>
@@ -8771,6 +9254,467 @@
                   <a:srgbClr val="FFFFFF"/>
                 </a:solidFill>
               </a:rPr>
+              <a:t>The case that TBK's gross margin is structurally too low</a:t>
+            </a:r>
+          </a:p>
+        </p:txBody>
+      </p:sp>
+      <p:sp>
+        <p:nvSpPr>
+          <p:cNvPr id="3" name="TextBox 2"/>
+          <p:cNvSpPr txBox="1"/>
+          <p:nvPr/>
+        </p:nvSpPr>
+        <p:spPr>
+          <a:xfrm>
+            <a:off x="457200" y="914400"/>
+            <a:ext cx="11247120" cy="365760"/>
+          </a:xfrm>
+          <a:prstGeom prst="rect">
+            <a:avLst/>
+          </a:prstGeom>
+          <a:noFill/>
+        </p:spPr>
+        <p:txBody>
+          <a:bodyPr wrap="square">
+            <a:spAutoFit/>
+          </a:bodyPr>
+          <a:lstStyle/>
+          <a:p>
+            <a:pPr algn="l"/>
+            <a:r>
+              <a:rPr sz="1200" b="0">
+                <a:solidFill>
+                  <a:srgbClr val="595959"/>
+                </a:solidFill>
+              </a:rPr>
+              <a:t>TBK FY3/2026: 12.5% gross margin, 2.7% operating margin — four independent lines of evidence say this is a fixable defect, not the nature of the business</a:t>
+            </a:r>
+          </a:p>
+        </p:txBody>
+      </p:sp>
+      <p:sp>
+        <p:nvSpPr>
+          <p:cNvPr id="4" name="TextBox 3"/>
+          <p:cNvSpPr txBox="1"/>
+          <p:nvPr/>
+        </p:nvSpPr>
+        <p:spPr>
+          <a:xfrm>
+            <a:off x="457200" y="1417320"/>
+            <a:ext cx="5577840" cy="2148840"/>
+          </a:xfrm>
+          <a:prstGeom prst="rect">
+            <a:avLst/>
+          </a:prstGeom>
+          <a:solidFill>
+            <a:srgbClr val="F2F2F2"/>
+          </a:solidFill>
+          <a:ln w="15875">
+            <a:solidFill>
+              <a:srgbClr val="1F4E78"/>
+            </a:solidFill>
+          </a:ln>
+        </p:spPr>
+        <p:txBody>
+          <a:bodyPr wrap="square" lIns="137160" rIns="137160" tIns="109728">
+            <a:spAutoFit/>
+          </a:bodyPr>
+          <a:lstStyle/>
+          <a:p>
+            <a:r>
+              <a:rPr sz="1500" b="1">
+                <a:solidFill>
+                  <a:srgbClr val="1F4E78"/>
+                </a:solidFill>
+              </a:rPr>
+              <a:t>1. Peers prove the products can carry more</a:t>
+            </a:r>
+          </a:p>
+          <a:p>
+            <a:pPr>
+              <a:spcBef>
+                <a:spcPts val="400"/>
+              </a:spcBef>
+            </a:pPr>
+            <a:r>
+              <a:rPr sz="1150">
+                <a:solidFill>
+                  <a:srgbClr val="202020"/>
+                </a:solidFill>
+              </a:rPr>
+              <a:t>Every comparable brake peer except Akebono earns 22-27% (Haldex 27.3%, Cummins 24.7%, SAF-Holland ~22%)</a:t>
+            </a:r>
+          </a:p>
+          <a:p>
+            <a:pPr>
+              <a:spcBef>
+                <a:spcPts val="400"/>
+              </a:spcBef>
+            </a:pPr>
+            <a:r>
+              <a:rPr sz="1150">
+                <a:solidFill>
+                  <a:srgbClr val="202020"/>
+                </a:solidFill>
+              </a:rPr>
+              <a:t>Pump peers: Concentric 25.2% (verified AR2023), TPR 21.7% — the high-share niche players, i.e. exactly TBK's structural position in Japanese truck pumps</a:t>
+            </a:r>
+          </a:p>
+          <a:p>
+            <a:pPr>
+              <a:spcBef>
+                <a:spcPts val="400"/>
+              </a:spcBef>
+            </a:pPr>
+            <a:r>
+              <a:rPr sz="1150">
+                <a:solidFill>
+                  <a:srgbClr val="202020"/>
+                </a:solidFill>
+              </a:rPr>
+              <a:t>Same product categories, same customers' industry — 5-15 points more margin</a:t>
+            </a:r>
+          </a:p>
+        </p:txBody>
+      </p:sp>
+      <p:sp>
+        <p:nvSpPr>
+          <p:cNvPr id="5" name="TextBox 4"/>
+          <p:cNvSpPr txBox="1"/>
+          <p:nvPr/>
+        </p:nvSpPr>
+        <p:spPr>
+          <a:xfrm>
+            <a:off x="6217920" y="1417320"/>
+            <a:ext cx="5532120" cy="2148840"/>
+          </a:xfrm>
+          <a:prstGeom prst="rect">
+            <a:avLst/>
+          </a:prstGeom>
+          <a:solidFill>
+            <a:srgbClr val="F2F2F2"/>
+          </a:solidFill>
+          <a:ln w="15875">
+            <a:solidFill>
+              <a:srgbClr val="7F1D1D"/>
+            </a:solidFill>
+          </a:ln>
+        </p:spPr>
+        <p:txBody>
+          <a:bodyPr wrap="square" lIns="137160" rIns="137160" tIns="109728">
+            <a:spAutoFit/>
+          </a:bodyPr>
+          <a:lstStyle/>
+          <a:p>
+            <a:r>
+              <a:rPr sz="1500" b="1">
+                <a:solidFill>
+                  <a:srgbClr val="7F1D1D"/>
+                </a:solidFill>
+              </a:rPr>
+              <a:t>2. TBK earns LESS than its own customers</a:t>
+            </a:r>
+          </a:p>
+          <a:p>
+            <a:pPr>
+              <a:spcBef>
+                <a:spcPts val="400"/>
+              </a:spcBef>
+            </a:pPr>
+            <a:r>
+              <a:rPr sz="1150">
+                <a:solidFill>
+                  <a:srgbClr val="202020"/>
+                </a:solidFill>
+              </a:rPr>
+              <a:t>Isuzu gross margin ~19%, Hino ~17% vs TBK 12.5%</a:t>
+            </a:r>
+          </a:p>
+          <a:p>
+            <a:pPr>
+              <a:spcBef>
+                <a:spcPts val="400"/>
+              </a:spcBef>
+            </a:pPr>
+            <a:r>
+              <a:rPr sz="1150">
+                <a:solidFill>
+                  <a:srgbClr val="202020"/>
+                </a:solidFill>
+              </a:rPr>
+              <a:t>Healthy specialist suppliers out-margin their OEMs (Knorr-Bremse 13% EBIT vs truck OEMs' mid-single digits)</a:t>
+            </a:r>
+          </a:p>
+          <a:p>
+            <a:pPr>
+              <a:spcBef>
+                <a:spcPts val="400"/>
+              </a:spcBef>
+            </a:pPr>
+            <a:r>
+              <a:rPr sz="1150">
+                <a:solidFill>
+                  <a:srgbClr val="202020"/>
+                </a:solidFill>
+              </a:rPr>
+              <a:t>Inverted economics = pricing power sits with the customer: keiretsu concentration (Isuzu alone ¥12bn = 22% of sales) and annual price-downs, against commodity drum/mechanical products with no systems, electronics or branded-aftermarket content to defend price</a:t>
+            </a:r>
+          </a:p>
+        </p:txBody>
+      </p:sp>
+      <p:sp>
+        <p:nvSpPr>
+          <p:cNvPr id="6" name="TextBox 5"/>
+          <p:cNvSpPr txBox="1"/>
+          <p:nvPr/>
+        </p:nvSpPr>
+        <p:spPr>
+          <a:xfrm>
+            <a:off x="457200" y="3703320"/>
+            <a:ext cx="5577840" cy="2148840"/>
+          </a:xfrm>
+          <a:prstGeom prst="rect">
+            <a:avLst/>
+          </a:prstGeom>
+          <a:solidFill>
+            <a:srgbClr val="F2F2F2"/>
+          </a:solidFill>
+          <a:ln w="15875">
+            <a:solidFill>
+              <a:srgbClr val="1F4E78"/>
+            </a:solidFill>
+          </a:ln>
+        </p:spPr>
+        <p:txBody>
+          <a:bodyPr wrap="square" lIns="137160" rIns="137160" tIns="109728">
+            <a:spAutoFit/>
+          </a:bodyPr>
+          <a:lstStyle/>
+          <a:p>
+            <a:r>
+              <a:rPr sz="1500" b="1">
+                <a:solidFill>
+                  <a:srgbClr val="1F4E78"/>
+                </a:solidFill>
+              </a:rPr>
+              <a:t>3. The COGS line carries an underloaded footprint</a:t>
+            </a:r>
+          </a:p>
+          <a:p>
+            <a:pPr>
+              <a:spcBef>
+                <a:spcPts val="400"/>
+              </a:spcBef>
+            </a:pPr>
+            <a:r>
+              <a:rPr sz="1150">
+                <a:solidFill>
+                  <a:srgbClr val="202020"/>
+                </a:solidFill>
+              </a:rPr>
+              <a:t>PP&amp;E at 39% of sales — 3x Concentric's ~12%; depreciation 5.3% of sales</a:t>
+            </a:r>
+          </a:p>
+          <a:p>
+            <a:pPr>
+              <a:spcBef>
+                <a:spcPts val="400"/>
+              </a:spcBef>
+            </a:pPr>
+            <a:r>
+              <a:rPr sz="1150">
+                <a:solidFill>
+                  <a:srgbClr val="202020"/>
+                </a:solidFill>
+              </a:rPr>
+              <a:t>China: depreciation 12.8% of segment sales, losses both years; Japan segment margin just 1.6%</a:t>
+            </a:r>
+          </a:p>
+          <a:p>
+            <a:pPr>
+              <a:spcBef>
+                <a:spcPts val="400"/>
+              </a:spcBef>
+            </a:pPr>
+            <a:r>
+              <a:rPr sz="1150">
+                <a:solidFill>
+                  <a:srgbClr val="202020"/>
+                </a:solidFill>
+              </a:rPr>
+              <a:t>&gt;¥2.2bn impairments + restructuring losses in 2 years = the cost of underutilized plants crystallizing (booked below the operating line, so the true factory burden is even larger than the margin gap shows)</a:t>
+            </a:r>
+          </a:p>
+        </p:txBody>
+      </p:sp>
+      <p:sp>
+        <p:nvSpPr>
+          <p:cNvPr id="7" name="TextBox 6"/>
+          <p:cNvSpPr txBox="1"/>
+          <p:nvPr/>
+        </p:nvSpPr>
+        <p:spPr>
+          <a:xfrm>
+            <a:off x="6217920" y="3703320"/>
+            <a:ext cx="5532120" cy="2148840"/>
+          </a:xfrm>
+          <a:prstGeom prst="rect">
+            <a:avLst/>
+          </a:prstGeom>
+          <a:solidFill>
+            <a:srgbClr val="F2F2F2"/>
+          </a:solidFill>
+          <a:ln w="15875">
+            <a:solidFill>
+              <a:srgbClr val="548235"/>
+            </a:solidFill>
+          </a:ln>
+        </p:spPr>
+        <p:txBody>
+          <a:bodyPr wrap="square" lIns="137160" rIns="137160" tIns="109728">
+            <a:spAutoFit/>
+          </a:bodyPr>
+          <a:lstStyle/>
+          <a:p>
+            <a:r>
+              <a:rPr sz="1500" b="1">
+                <a:solidFill>
+                  <a:srgbClr val="548235"/>
+                </a:solidFill>
+              </a:rPr>
+              <a:t>4. The repair has already started — and works</a:t>
+            </a:r>
+          </a:p>
+          <a:p>
+            <a:pPr>
+              <a:spcBef>
+                <a:spcPts val="400"/>
+              </a:spcBef>
+            </a:pPr>
+            <a:r>
+              <a:rPr sz="1150">
+                <a:solidFill>
+                  <a:srgbClr val="202020"/>
+                </a:solidFill>
+              </a:rPr>
+              <a:t>FY3/2026: gross margin 10.6% → 12.5% in one year (cost of sales cut ¥0.7bn on flat sales); North America exited; ¥712M Japan impairment = footprint action</a:t>
+            </a:r>
+          </a:p>
+          <a:p>
+            <a:pPr>
+              <a:spcBef>
+                <a:spcPts val="400"/>
+              </a:spcBef>
+            </a:pPr>
+            <a:r>
+              <a:rPr sz="1150">
+                <a:solidFill>
+                  <a:srgbClr val="202020"/>
+                </a:solidFill>
+              </a:rPr>
+              <a:t>Concentric's playbook validates the destination: focused niches, 25% gross margin, opex GROWING into the e-transition at 18.4% average operating margin</a:t>
+            </a:r>
+          </a:p>
+          <a:p>
+            <a:pPr>
+              <a:spcBef>
+                <a:spcPts val="400"/>
+              </a:spcBef>
+            </a:pPr>
+            <a:r>
+              <a:rPr sz="1150">
+                <a:solidFill>
+                  <a:srgbClr val="202020"/>
+                </a:solidFill>
+              </a:rPr>
+              <a:t>Nothing about brakes or pumps caps TBK at 12.5% — peers with the same products price and load their factories better</a:t>
+            </a:r>
+          </a:p>
+        </p:txBody>
+      </p:sp>
+      <p:sp>
+        <p:nvSpPr>
+          <p:cNvPr id="8" name="TextBox 7"/>
+          <p:cNvSpPr txBox="1"/>
+          <p:nvPr/>
+        </p:nvSpPr>
+        <p:spPr>
+          <a:xfrm>
+            <a:off x="457200" y="5943600"/>
+            <a:ext cx="11247120" cy="822960"/>
+          </a:xfrm>
+          <a:prstGeom prst="rect">
+            <a:avLst/>
+          </a:prstGeom>
+          <a:noFill/>
+        </p:spPr>
+        <p:txBody>
+          <a:bodyPr wrap="square">
+            <a:spAutoFit/>
+          </a:bodyPr>
+          <a:lstStyle/>
+          <a:p>
+            <a:pPr algn="l"/>
+            <a:r>
+              <a:rPr sz="1300" b="1">
+                <a:solidFill>
+                  <a:srgbClr val="1F4E78"/>
+                </a:solidFill>
+              </a:rPr>
+              <a:t>Conclusion: at peer margins TBK's existing sales generate $22-24M more gross profit per year (next pages) — enough to fund the entire R&amp;D catch-up. The margin is the constraint, and it is self-inflicted: underloaded factories in COGS, commodity mix, and customer-held pricing power — all addressable.</a:t>
+            </a:r>
+          </a:p>
+        </p:txBody>
+      </p:sp>
+    </p:spTree>
+  </p:cSld>
+  <p:clrMapOvr>
+    <a:masterClrMapping/>
+  </p:clrMapOvr>
+</p:sld>
+</file>
+
+<file path=ppt/slides/slide9.xml><?xml version="1.0" encoding="utf-8"?>
+<p:sld xmlns:a="http://schemas.openxmlformats.org/drawingml/2006/main" xmlns:p="http://schemas.openxmlformats.org/presentationml/2006/main" xmlns:r="http://schemas.openxmlformats.org/officeDocument/2006/relationships">
+  <p:cSld>
+    <p:spTree>
+      <p:nvGrpSpPr>
+        <p:cNvPr id="1" name=""/>
+        <p:cNvGrpSpPr/>
+        <p:nvPr/>
+      </p:nvGrpSpPr>
+      <p:grpSpPr/>
+      <p:sp>
+        <p:nvSpPr>
+          <p:cNvPr id="2" name="TextBox 1"/>
+          <p:cNvSpPr txBox="1"/>
+          <p:nvPr/>
+        </p:nvSpPr>
+        <p:spPr>
+          <a:xfrm>
+            <a:off x="0" y="0"/>
+            <a:ext cx="12191695" cy="868680"/>
+          </a:xfrm>
+          <a:prstGeom prst="rect">
+            <a:avLst/>
+          </a:prstGeom>
+          <a:solidFill>
+            <a:srgbClr val="1F4E78"/>
+          </a:solidFill>
+        </p:spPr>
+        <p:txBody>
+          <a:bodyPr wrap="square" lIns="457200" tIns="164592">
+            <a:spAutoFit/>
+          </a:bodyPr>
+          <a:lstStyle/>
+          <a:p>
+            <a:r>
+              <a:rPr sz="2600" b="1">
+                <a:solidFill>
+                  <a:srgbClr val="FFFFFF"/>
+                </a:solidFill>
+              </a:rPr>
               <a:t>TBK underperforms peer gross margins in BOTH businesses</a:t>
             </a:r>
           </a:p>
@@ -9073,367 +10017,6 @@
                 </a:solidFill>
               </a:rPr>
               <a:t>TBK does not disclose gross profit per division, so its blended 12.5% is shown against both panels. Even on the most charitable reading — assuming all underperformance sits in one business — TBK is below peer average in the other. Peer set: IFRS cost-of-sales / JGAAP reporters only.</a:t>
-            </a:r>
-          </a:p>
-        </p:txBody>
-      </p:sp>
-    </p:spTree>
-  </p:cSld>
-  <p:clrMapOvr>
-    <a:masterClrMapping/>
-  </p:clrMapOvr>
-</p:sld>
-</file>
-
-<file path=ppt/slides/slide9.xml><?xml version="1.0" encoding="utf-8"?>
-<p:sld xmlns:a="http://schemas.openxmlformats.org/drawingml/2006/main" xmlns:p="http://schemas.openxmlformats.org/presentationml/2006/main" xmlns:r="http://schemas.openxmlformats.org/officeDocument/2006/relationships">
-  <p:cSld>
-    <p:spTree>
-      <p:nvGrpSpPr>
-        <p:cNvPr id="1" name=""/>
-        <p:cNvGrpSpPr/>
-        <p:nvPr/>
-      </p:nvGrpSpPr>
-      <p:grpSpPr/>
-      <p:sp>
-        <p:nvSpPr>
-          <p:cNvPr id="2" name="TextBox 1"/>
-          <p:cNvSpPr txBox="1"/>
-          <p:nvPr/>
-        </p:nvSpPr>
-        <p:spPr>
-          <a:xfrm>
-            <a:off x="0" y="0"/>
-            <a:ext cx="12191695" cy="868680"/>
-          </a:xfrm>
-          <a:prstGeom prst="rect">
-            <a:avLst/>
-          </a:prstGeom>
-          <a:solidFill>
-            <a:srgbClr val="1F4E78"/>
-          </a:solidFill>
-        </p:spPr>
-        <p:txBody>
-          <a:bodyPr wrap="square" lIns="457200" tIns="164592">
-            <a:spAutoFit/>
-          </a:bodyPr>
-          <a:lstStyle/>
-          <a:p>
-            <a:r>
-              <a:rPr sz="2600" b="1">
-                <a:solidFill>
-                  <a:srgbClr val="FFFFFF"/>
-                </a:solidFill>
-              </a:rPr>
-              <a:t>Closing the margin gap is worth ~$22-24M more gross profit per year</a:t>
-            </a:r>
-          </a:p>
-        </p:txBody>
-      </p:sp>
-      <p:sp>
-        <p:nvSpPr>
-          <p:cNvPr id="3" name="TextBox 2"/>
-          <p:cNvSpPr txBox="1"/>
-          <p:nvPr/>
-        </p:nvSpPr>
-        <p:spPr>
-          <a:xfrm>
-            <a:off x="457200" y="914400"/>
-            <a:ext cx="11247120" cy="365760"/>
-          </a:xfrm>
-          <a:prstGeom prst="rect">
-            <a:avLst/>
-          </a:prstGeom>
-          <a:noFill/>
-        </p:spPr>
-        <p:txBody>
-          <a:bodyPr wrap="square">
-            <a:spAutoFit/>
-          </a:bodyPr>
-          <a:lstStyle/>
-          <a:p>
-            <a:pPr algn="l"/>
-            <a:r>
-              <a:rPr sz="1200" b="0">
-                <a:solidFill>
-                  <a:srgbClr val="595959"/>
-                </a:solidFill>
-              </a:rPr>
-              <a:t>TBK FY3/2026 sales ($365M) at peer margins  |  USD at ¥150/USD  |  division split estimated from FY3/2025 (35% / 65%)</a:t>
-            </a:r>
-          </a:p>
-        </p:txBody>
-      </p:sp>
-      <p:graphicFrame>
-        <p:nvGraphicFramePr>
-          <p:cNvPr id="4" name="Chart 3"/>
-          <p:cNvGraphicFramePr>
-            <a:graphicFrameLocks noGrp="1"/>
-          </p:cNvGraphicFramePr>
-          <p:nvPr/>
-        </p:nvGraphicFramePr>
-        <p:xfrm>
-          <a:off x="457200" y="1463040"/>
-          <a:ext cx="6217920" cy="4206240"/>
-        </p:xfrm>
-        <a:graphic>
-          <a:graphicData uri="http://schemas.openxmlformats.org/drawingml/2006/chart">
-            <c:chart xmlns:c="http://schemas.openxmlformats.org/drawingml/2006/chart" r:id="rId2"/>
-          </a:graphicData>
-        </a:graphic>
-      </p:graphicFrame>
-      <p:sp>
-        <p:nvSpPr>
-          <p:cNvPr id="5" name="TextBox 4"/>
-          <p:cNvSpPr txBox="1"/>
-          <p:nvPr/>
-        </p:nvSpPr>
-        <p:spPr>
-          <a:xfrm>
-            <a:off x="6949440" y="1463040"/>
-            <a:ext cx="4800600" cy="1828800"/>
-          </a:xfrm>
-          <a:prstGeom prst="rect">
-            <a:avLst/>
-          </a:prstGeom>
-          <a:solidFill>
-            <a:srgbClr val="F2F2F2"/>
-          </a:solidFill>
-          <a:ln w="15875">
-            <a:solidFill>
-              <a:srgbClr val="1F4E78"/>
-            </a:solidFill>
-          </a:ln>
-        </p:spPr>
-        <p:txBody>
-          <a:bodyPr wrap="square" lIns="137160" rIns="137160" tIns="109728">
-            <a:spAutoFit/>
-          </a:bodyPr>
-          <a:lstStyle/>
-          <a:p>
-            <a:r>
-              <a:rPr sz="1500" b="1">
-                <a:solidFill>
-                  <a:srgbClr val="1F4E78"/>
-                </a:solidFill>
-              </a:rPr>
-              <a:t>The annual prize</a:t>
-            </a:r>
-          </a:p>
-          <a:p>
-            <a:pPr>
-              <a:spcBef>
-                <a:spcPts val="400"/>
-              </a:spcBef>
-            </a:pPr>
-            <a:r>
-              <a:rPr sz="1300">
-                <a:solidFill>
-                  <a:srgbClr val="202020"/>
-                </a:solidFill>
-              </a:rPr>
-              <a:t>+$21.6M/yr at peer AVERAGE margins</a:t>
-            </a:r>
-          </a:p>
-          <a:p>
-            <a:pPr>
-              <a:spcBef>
-                <a:spcPts val="400"/>
-              </a:spcBef>
-            </a:pPr>
-            <a:r>
-              <a:rPr sz="1300">
-                <a:solidFill>
-                  <a:srgbClr val="202020"/>
-                </a:solidFill>
-              </a:rPr>
-              <a:t>+$24.4M/yr at peer MEDIAN margins</a:t>
-            </a:r>
-          </a:p>
-          <a:p>
-            <a:pPr>
-              <a:spcBef>
-                <a:spcPts val="400"/>
-              </a:spcBef>
-            </a:pPr>
-            <a:r>
-              <a:rPr sz="1300">
-                <a:solidFill>
-                  <a:srgbClr val="202020"/>
-                </a:solidFill>
-              </a:rPr>
-              <a:t>≈ +50% on today's $45.5M gross profit</a:t>
-            </a:r>
-          </a:p>
-          <a:p>
-            <a:pPr>
-              <a:spcBef>
-                <a:spcPts val="400"/>
-              </a:spcBef>
-            </a:pPr>
-            <a:r>
-              <a:rPr sz="1300">
-                <a:solidFill>
-                  <a:srgbClr val="202020"/>
-                </a:solidFill>
-              </a:rPr>
-              <a:t>Split roughly half brakes, half pumps (~$11-14M each)</a:t>
-            </a:r>
-          </a:p>
-        </p:txBody>
-      </p:sp>
-      <p:sp>
-        <p:nvSpPr>
-          <p:cNvPr id="6" name="TextBox 5"/>
-          <p:cNvSpPr txBox="1"/>
-          <p:nvPr/>
-        </p:nvSpPr>
-        <p:spPr>
-          <a:xfrm>
-            <a:off x="6949440" y="3429000"/>
-            <a:ext cx="4800600" cy="2377440"/>
-          </a:xfrm>
-          <a:prstGeom prst="rect">
-            <a:avLst/>
-          </a:prstGeom>
-          <a:solidFill>
-            <a:srgbClr val="F2F2F2"/>
-          </a:solidFill>
-          <a:ln w="15875">
-            <a:solidFill>
-              <a:srgbClr val="548235"/>
-            </a:solidFill>
-          </a:ln>
-        </p:spPr>
-        <p:txBody>
-          <a:bodyPr wrap="square" lIns="137160" rIns="137160" tIns="109728">
-            <a:spAutoFit/>
-          </a:bodyPr>
-          <a:lstStyle/>
-          <a:p>
-            <a:r>
-              <a:rPr sz="1500" b="1">
-                <a:solidFill>
-                  <a:srgbClr val="548235"/>
-                </a:solidFill>
-              </a:rPr>
-              <a:t>What it funds</a:t>
-            </a:r>
-          </a:p>
-          <a:p>
-            <a:pPr>
-              <a:spcBef>
-                <a:spcPts val="400"/>
-              </a:spcBef>
-            </a:pPr>
-            <a:r>
-              <a:rPr sz="1300">
-                <a:solidFill>
-                  <a:srgbClr val="202020"/>
-                </a:solidFill>
-              </a:rPr>
-              <a:t>The entire R&amp;D catch-up program costs ~$27M/yr</a:t>
-            </a:r>
-          </a:p>
-          <a:p>
-            <a:pPr>
-              <a:spcBef>
-                <a:spcPts val="400"/>
-              </a:spcBef>
-            </a:pPr>
-            <a:r>
-              <a:rPr sz="1300">
-                <a:solidFill>
-                  <a:srgbClr val="202020"/>
-                </a:solidFill>
-              </a:rPr>
-              <a:t>(parity run-rate $17M + deficit repayment $10M)</a:t>
-            </a:r>
-          </a:p>
-          <a:p>
-            <a:pPr>
-              <a:spcBef>
-                <a:spcPts val="400"/>
-              </a:spcBef>
-            </a:pPr>
-            <a:r>
-              <a:rPr sz="1300">
-                <a:solidFill>
-                  <a:srgbClr val="202020"/>
-                </a:solidFill>
-              </a:rPr>
-              <a:t>→ closing ~90% of the margin gap pays for ALL of it</a:t>
-            </a:r>
-          </a:p>
-          <a:p>
-            <a:pPr>
-              <a:spcBef>
-                <a:spcPts val="400"/>
-              </a:spcBef>
-            </a:pPr>
-          </a:p>
-          <a:p>
-            <a:pPr>
-              <a:spcBef>
-                <a:spcPts val="400"/>
-              </a:spcBef>
-            </a:pPr>
-            <a:r>
-              <a:rPr sz="1300">
-                <a:solidFill>
-                  <a:srgbClr val="202020"/>
-                </a:solidFill>
-              </a:rPr>
-              <a:t>FY3/2026 already delivered the first ~$7M/yr</a:t>
-            </a:r>
-          </a:p>
-          <a:p>
-            <a:pPr>
-              <a:spcBef>
-                <a:spcPts val="400"/>
-              </a:spcBef>
-            </a:pPr>
-            <a:r>
-              <a:rPr sz="1300">
-                <a:solidFill>
-                  <a:srgbClr val="202020"/>
-                </a:solidFill>
-              </a:rPr>
-              <a:t>(margin 10.6% → 12.5%) — the path is proven, not theoretical</a:t>
-            </a:r>
-          </a:p>
-        </p:txBody>
-      </p:sp>
-      <p:sp>
-        <p:nvSpPr>
-          <p:cNvPr id="7" name="TextBox 6"/>
-          <p:cNvSpPr txBox="1"/>
-          <p:nvPr/>
-        </p:nvSpPr>
-        <p:spPr>
-          <a:xfrm>
-            <a:off x="457200" y="5806440"/>
-            <a:ext cx="11247120" cy="822960"/>
-          </a:xfrm>
-          <a:prstGeom prst="rect">
-            <a:avLst/>
-          </a:prstGeom>
-          <a:noFill/>
-        </p:spPr>
-        <p:txBody>
-          <a:bodyPr wrap="square">
-            <a:spAutoFit/>
-          </a:bodyPr>
-          <a:lstStyle/>
-          <a:p>
-            <a:pPr algn="l"/>
-            <a:r>
-              <a:rPr sz="1150" b="0">
-                <a:solidFill>
-                  <a:srgbClr val="595959"/>
-                </a:solidFill>
-              </a:rPr>
-              <a:t>Method: brakes ~$127M sales x peer avg 21.0% / median 23.4%; pumps &amp; engine components ~$238M x 17.0% / 16.9%; vs actual blended 12.5%. Margin levers per the benchmark: aftermarket/branded content, niche pricing power (Concentric/TPR model), price-down discipline, and mix shift to disc brakes and e-pumps.</a:t>
             </a:r>
           </a:p>
         </p:txBody>

--- a/TBK_rd_gap_slides.pptx
+++ b/TBK_rd_gap_slides.pptx
@@ -18,6 +18,8 @@
     <p:sldId id="266" r:id="rId17"/>
     <p:sldId id="267" r:id="rId18"/>
     <p:sldId id="268" r:id="rId19"/>
+    <p:sldId id="269" r:id="rId20"/>
+    <p:sldId id="270" r:id="rId21"/>
   </p:sldIdLst>
   <p:sldSz cx="12191695" cy="6858000" type="screen4x3"/>
   <p:notesSz cx="6858000" cy="9144000"/>
@@ -6437,6 +6439,1021 @@
                 </a:solidFill>
               </a:rPr>
               <a:t>Allocation discipline, per domain: (1) brakes — ADB industrialization for the Japanese disc flip, systems/ADAS access via Brakes India, timed to regulation and platform renewals; (2) pumps — e-pump/TCU sockets on Isuzu/Fuso/Hino electrified programs, timed to program kick-offs happening NOW. Funding: the ~$22-24M/yr peer-margin prize covers the ~$27M/yr program almost fully. The Concentric lesson: focused niche engineering at 2.3% intensity earns 25% gross margins — spend must buy sockets, not just scale.</a:t>
+            </a:r>
+          </a:p>
+        </p:txBody>
+      </p:sp>
+    </p:spTree>
+  </p:cSld>
+  <p:clrMapOvr>
+    <a:masterClrMapping/>
+  </p:clrMapOvr>
+</p:sld>
+</file>
+
+<file path=ppt/slides/slide14.xml><?xml version="1.0" encoding="utf-8"?>
+<p:sld xmlns:a="http://schemas.openxmlformats.org/drawingml/2006/main" xmlns:p="http://schemas.openxmlformats.org/presentationml/2006/main" xmlns:r="http://schemas.openxmlformats.org/officeDocument/2006/relationships">
+  <p:cSld>
+    <p:spTree>
+      <p:nvGrpSpPr>
+        <p:cNvPr id="1" name=""/>
+        <p:cNvGrpSpPr/>
+        <p:nvPr/>
+      </p:nvGrpSpPr>
+      <p:grpSpPr/>
+      <p:sp>
+        <p:nvSpPr>
+          <p:cNvPr id="2" name="TextBox 1"/>
+          <p:cNvSpPr txBox="1"/>
+          <p:nvPr/>
+        </p:nvSpPr>
+        <p:spPr>
+          <a:xfrm>
+            <a:off x="0" y="0"/>
+            <a:ext cx="12191695" cy="868680"/>
+          </a:xfrm>
+          <a:prstGeom prst="rect">
+            <a:avLst/>
+          </a:prstGeom>
+          <a:solidFill>
+            <a:srgbClr val="1F4E78"/>
+          </a:solidFill>
+        </p:spPr>
+        <p:txBody>
+          <a:bodyPr wrap="square" lIns="457200" tIns="164592">
+            <a:spAutoFit/>
+          </a:bodyPr>
+          <a:lstStyle/>
+          <a:p>
+            <a:r>
+              <a:rPr sz="2600" b="1">
+                <a:solidFill>
+                  <a:srgbClr val="FFFFFF"/>
+                </a:solidFill>
+              </a:rPr>
+              <a:t>Research quality &amp; methodology notes</a:t>
+            </a:r>
+          </a:p>
+        </p:txBody>
+      </p:sp>
+      <p:sp>
+        <p:nvSpPr>
+          <p:cNvPr id="3" name="TextBox 2"/>
+          <p:cNvSpPr txBox="1"/>
+          <p:nvPr/>
+        </p:nvSpPr>
+        <p:spPr>
+          <a:xfrm>
+            <a:off x="457200" y="914400"/>
+            <a:ext cx="11247120" cy="365760"/>
+          </a:xfrm>
+          <a:prstGeom prst="rect">
+            <a:avLst/>
+          </a:prstGeom>
+          <a:noFill/>
+        </p:spPr>
+        <p:txBody>
+          <a:bodyPr wrap="square">
+            <a:spAutoFit/>
+          </a:bodyPr>
+          <a:lstStyle/>
+          <a:p>
+            <a:pPr algn="l"/>
+            <a:r>
+              <a:rPr sz="1200" b="0">
+                <a:solidFill>
+                  <a:srgbClr val="595959"/>
+                </a:solidFill>
+              </a:rPr>
+              <a:t>How this material was produced, verified, and where its limits are</a:t>
+            </a:r>
+          </a:p>
+        </p:txBody>
+      </p:sp>
+      <p:sp>
+        <p:nvSpPr>
+          <p:cNvPr id="4" name="TextBox 3"/>
+          <p:cNvSpPr txBox="1"/>
+          <p:nvPr/>
+        </p:nvSpPr>
+        <p:spPr>
+          <a:xfrm>
+            <a:off x="457200" y="1417320"/>
+            <a:ext cx="5577840" cy="2377440"/>
+          </a:xfrm>
+          <a:prstGeom prst="rect">
+            <a:avLst/>
+          </a:prstGeom>
+          <a:solidFill>
+            <a:srgbClr val="F2F2F2"/>
+          </a:solidFill>
+          <a:ln w="15875">
+            <a:solidFill>
+              <a:srgbClr val="1F4E78"/>
+            </a:solidFill>
+          </a:ln>
+        </p:spPr>
+        <p:txBody>
+          <a:bodyPr wrap="square" lIns="137160" rIns="137160" tIns="109728">
+            <a:spAutoFit/>
+          </a:bodyPr>
+          <a:lstStyle/>
+          <a:p>
+            <a:r>
+              <a:rPr sz="1500" b="1">
+                <a:solidFill>
+                  <a:srgbClr val="1F4E78"/>
+                </a:solidFill>
+              </a:rPr>
+              <a:t>Method &amp; confidence tiers</a:t>
+            </a:r>
+          </a:p>
+          <a:p>
+            <a:pPr>
+              <a:spcBef>
+                <a:spcPts val="400"/>
+              </a:spcBef>
+            </a:pPr>
+            <a:r>
+              <a:rPr sz="1100">
+                <a:solidFill>
+                  <a:srgbClr val="202020"/>
+                </a:solidFill>
+              </a:rPr>
+              <a:t>Two deep-research studies (brake market; pump market): 5 parallel search angles each, claims extracted as falsifiable statements, then ADVERSARIAL VERIFICATION — 3 independent voters per claim set, actively attempting refutation</a:t>
+            </a:r>
+          </a:p>
+          <a:p>
+            <a:pPr>
+              <a:spcBef>
+                <a:spcPts val="400"/>
+              </a:spcBef>
+            </a:pPr>
+            <a:r>
+              <a:rPr sz="1100">
+                <a:solidFill>
+                  <a:srgbClr val="202020"/>
+                </a:solidFill>
+              </a:rPr>
+              <a:t>Tier 1: peer-reviewed papers, primary regulation, audited filings (TBK tanshin, Concentric AR2023, SEC)</a:t>
+            </a:r>
+          </a:p>
+          <a:p>
+            <a:pPr>
+              <a:spcBef>
+                <a:spcPts val="400"/>
+              </a:spcBef>
+            </a:pPr>
+            <a:r>
+              <a:rPr sz="1100">
+                <a:solidFill>
+                  <a:srgbClr val="202020"/>
+                </a:solidFill>
+              </a:rPr>
+              <a:t>Tier 2: government data and multi-source-verified company/industry figures</a:t>
+            </a:r>
+          </a:p>
+          <a:p>
+            <a:pPr>
+              <a:spcBef>
+                <a:spcPts val="400"/>
+              </a:spcBef>
+            </a:pPr>
+            <a:r>
+              <a:rPr sz="1100">
+                <a:solidFill>
+                  <a:srgbClr val="202020"/>
+                </a:solidFill>
+              </a:rPr>
+              <a:t>Tier 3: single-source estimates and market research — always labeled in the underlying documents</a:t>
+            </a:r>
+          </a:p>
+        </p:txBody>
+      </p:sp>
+      <p:sp>
+        <p:nvSpPr>
+          <p:cNvPr id="5" name="TextBox 4"/>
+          <p:cNvSpPr txBox="1"/>
+          <p:nvPr/>
+        </p:nvSpPr>
+        <p:spPr>
+          <a:xfrm>
+            <a:off x="6217920" y="1417320"/>
+            <a:ext cx="5532120" cy="2377440"/>
+          </a:xfrm>
+          <a:prstGeom prst="rect">
+            <a:avLst/>
+          </a:prstGeom>
+          <a:solidFill>
+            <a:srgbClr val="F2F2F2"/>
+          </a:solidFill>
+          <a:ln w="15875">
+            <a:solidFill>
+              <a:srgbClr val="7F1D1D"/>
+            </a:solidFill>
+          </a:ln>
+        </p:spPr>
+        <p:txBody>
+          <a:bodyPr wrap="square" lIns="137160" rIns="137160" tIns="109728">
+            <a:spAutoFit/>
+          </a:bodyPr>
+          <a:lstStyle/>
+          <a:p>
+            <a:r>
+              <a:rPr sz="1500" b="1">
+                <a:solidFill>
+                  <a:srgbClr val="7F1D1D"/>
+                </a:solidFill>
+              </a:rPr>
+              <a:t>Corrections made by verification (transparency)</a:t>
+            </a:r>
+          </a:p>
+          <a:p>
+            <a:pPr>
+              <a:spcBef>
+                <a:spcPts val="400"/>
+              </a:spcBef>
+            </a:pPr>
+            <a:r>
+              <a:rPr sz="1100">
+                <a:solidFill>
+                  <a:srgbClr val="202020"/>
+                </a:solidFill>
+              </a:rPr>
+              <a:t>TBK's famous '~70% share' belongs to its WATER PUMPS, not brakes (brakes: 'top share', unaudited)</a:t>
+            </a:r>
+          </a:p>
+          <a:p>
+            <a:pPr>
+              <a:spcBef>
+                <a:spcPts val="400"/>
+              </a:spcBef>
+            </a:pPr>
+            <a:r>
+              <a:rPr sz="1100">
+                <a:solidFill>
+                  <a:srgbClr val="202020"/>
+                </a:solidFill>
+              </a:rPr>
+              <a:t>Euro 7 heavy-duty brake-dust limits apply ~2030, not 2028/29 (those are exhaust dates)</a:t>
+            </a:r>
+          </a:p>
+          <a:p>
+            <a:pPr>
+              <a:spcBef>
+                <a:spcPts val="400"/>
+              </a:spcBef>
+            </a:pPr>
+            <a:r>
+              <a:rPr sz="1100">
+                <a:solidFill>
+                  <a:srgbClr val="202020"/>
+                </a:solidFill>
+              </a:rPr>
+              <a:t>Concentric R&amp;D = 2.3% of sales per AR2023 — the circulating '~5%' was wrong</a:t>
+            </a:r>
+          </a:p>
+          <a:p>
+            <a:pPr>
+              <a:spcBef>
+                <a:spcPts val="400"/>
+              </a:spcBef>
+            </a:pPr>
+            <a:r>
+              <a:rPr sz="1100">
+                <a:solidFill>
+                  <a:srgbClr val="202020"/>
+                </a:solidFill>
+              </a:rPr>
+              <a:t>'85-90% of Asia on drums' could not be corroborated — stated as 'majority' only</a:t>
+            </a:r>
+          </a:p>
+          <a:p>
+            <a:pPr>
+              <a:spcBef>
+                <a:spcPts val="400"/>
+              </a:spcBef>
+            </a:pPr>
+            <a:r>
+              <a:rPr sz="1100">
+                <a:solidFill>
+                  <a:srgbClr val="202020"/>
+                </a:solidFill>
+              </a:rPr>
+              <a:t>A claimed TBK-Mikuni alliance is erroneous (conflation with Mikuni-Suzuki)</a:t>
+            </a:r>
+          </a:p>
+          <a:p>
+            <a:pPr>
+              <a:spcBef>
+                <a:spcPts val="400"/>
+              </a:spcBef>
+            </a:pPr>
+            <a:r>
+              <a:rPr sz="1100">
+                <a:solidFill>
+                  <a:srgbClr val="202020"/>
+                </a:solidFill>
+              </a:rPr>
+              <a:t>Aggregator's 'TBK FY26 ¥138M profit' contradicted by the audited tanshin (-¥131M)</a:t>
+            </a:r>
+          </a:p>
+        </p:txBody>
+      </p:sp>
+      <p:sp>
+        <p:nvSpPr>
+          <p:cNvPr id="6" name="TextBox 5"/>
+          <p:cNvSpPr txBox="1"/>
+          <p:nvPr/>
+        </p:nvSpPr>
+        <p:spPr>
+          <a:xfrm>
+            <a:off x="457200" y="3931920"/>
+            <a:ext cx="5577840" cy="2377440"/>
+          </a:xfrm>
+          <a:prstGeom prst="rect">
+            <a:avLst/>
+          </a:prstGeom>
+          <a:solidFill>
+            <a:srgbClr val="F2F2F2"/>
+          </a:solidFill>
+          <a:ln w="15875">
+            <a:solidFill>
+              <a:srgbClr val="1F4E78"/>
+            </a:solidFill>
+          </a:ln>
+        </p:spPr>
+        <p:txBody>
+          <a:bodyPr wrap="square" lIns="137160" rIns="137160" tIns="109728">
+            <a:spAutoFit/>
+          </a:bodyPr>
+          <a:lstStyle/>
+          <a:p>
+            <a:r>
+              <a:rPr sz="1500" b="1">
+                <a:solidFill>
+                  <a:srgbClr val="1F4E78"/>
+                </a:solidFill>
+              </a:rPr>
+              <a:t>Known limitations</a:t>
+            </a:r>
+          </a:p>
+          <a:p>
+            <a:pPr>
+              <a:spcBef>
+                <a:spcPts val="400"/>
+              </a:spcBef>
+            </a:pPr>
+            <a:r>
+              <a:rPr sz="1100">
+                <a:solidFill>
+                  <a:srgbClr val="202020"/>
+                </a:solidFill>
+              </a:rPr>
+              <a:t>Full-text retrieval was blocked in the research environment: paywalled SAE/journal numbers rest on abstracts; flagged where unverified</a:t>
+            </a:r>
+          </a:p>
+          <a:p>
+            <a:pPr>
+              <a:spcBef>
+                <a:spcPts val="400"/>
+              </a:spcBef>
+            </a:pPr>
+            <a:r>
+              <a:rPr sz="1100">
+                <a:solidFill>
+                  <a:srgbClr val="202020"/>
+                </a:solidFill>
+              </a:rPr>
+              <a:t>No peer discloses brake-only or pump-only R&amp;D, gross profit, or segment margins — group figures used; ratios are the valid comparison</a:t>
+            </a:r>
+          </a:p>
+          <a:p>
+            <a:pPr>
+              <a:spcBef>
+                <a:spcPts val="400"/>
+              </a:spcBef>
+            </a:pPr>
+            <a:r>
+              <a:rPr sz="1100">
+                <a:solidFill>
+                  <a:srgbClr val="202020"/>
+                </a:solidFill>
+              </a:rPr>
+              <a:t>Accounting bases differ: German/Italian nature-of-expense 'gross margins' (Knorr ~50%, Brembo ~50%) are materials-only and EXCLUDED from margin comparisons; JGAAP fully expenses R&amp;D while IFRS peers capitalize part</a:t>
+            </a:r>
+          </a:p>
+          <a:p>
+            <a:pPr>
+              <a:spcBef>
+                <a:spcPts val="400"/>
+              </a:spcBef>
+            </a:pPr>
+            <a:r>
+              <a:rPr sz="1100">
+                <a:solidFill>
+                  <a:srgbClr val="202020"/>
+                </a:solidFill>
+              </a:rPr>
+              <a:t>TBK FY3/26 division split estimated from FY3/25 (yuho due June 2026); USD at ¥150/USD</a:t>
+            </a:r>
+          </a:p>
+        </p:txBody>
+      </p:sp>
+      <p:sp>
+        <p:nvSpPr>
+          <p:cNvPr id="7" name="TextBox 6"/>
+          <p:cNvSpPr txBox="1"/>
+          <p:nvPr/>
+        </p:nvSpPr>
+        <p:spPr>
+          <a:xfrm>
+            <a:off x="6217920" y="3931920"/>
+            <a:ext cx="5532120" cy="2377440"/>
+          </a:xfrm>
+          <a:prstGeom prst="rect">
+            <a:avLst/>
+          </a:prstGeom>
+          <a:solidFill>
+            <a:srgbClr val="F2F2F2"/>
+          </a:solidFill>
+          <a:ln w="15875">
+            <a:solidFill>
+              <a:srgbClr val="548235"/>
+            </a:solidFill>
+          </a:ln>
+        </p:spPr>
+        <p:txBody>
+          <a:bodyPr wrap="square" lIns="137160" rIns="137160" tIns="109728">
+            <a:spAutoFit/>
+          </a:bodyPr>
+          <a:lstStyle/>
+          <a:p>
+            <a:r>
+              <a:rPr sz="1500" b="1">
+                <a:solidFill>
+                  <a:srgbClr val="548235"/>
+                </a:solidFill>
+              </a:rPr>
+              <a:t>Data hierarchy &amp; framework constructs</a:t>
+            </a:r>
+          </a:p>
+          <a:p>
+            <a:pPr>
+              <a:spcBef>
+                <a:spcPts val="400"/>
+              </a:spcBef>
+            </a:pPr>
+            <a:r>
+              <a:rPr sz="1100">
+                <a:solidFill>
+                  <a:srgbClr val="202020"/>
+                </a:solidFill>
+              </a:rPr>
+              <a:t>Where sources conflict, the audited primary document wins (e.g., TBK tanshin over aggregators)</a:t>
+            </a:r>
+          </a:p>
+          <a:p>
+            <a:pPr>
+              <a:spcBef>
+                <a:spcPts val="400"/>
+              </a:spcBef>
+            </a:pPr>
+            <a:r>
+              <a:rPr sz="1100">
+                <a:solidFill>
+                  <a:srgbClr val="202020"/>
+                </a:solidFill>
+              </a:rPr>
+              <a:t>Consistent-basis peer metrics (margins, R&amp;D, ROIC) come from the user-provided 10-year/LTM peer dataset — same methodology across all 7 companies</a:t>
+            </a:r>
+          </a:p>
+          <a:p>
+            <a:pPr>
+              <a:spcBef>
+                <a:spcPts val="400"/>
+              </a:spcBef>
+            </a:pPr>
+            <a:r>
+              <a:rPr sz="1100">
+                <a:solidFill>
+                  <a:srgbClr val="202020"/>
+                </a:solidFill>
+              </a:rPr>
+              <a:t>ROIIC (ROICm) = return on incremental invested capital over the stated horizon; RR = reinvestment rate; R&amp;D Capital Base = cumulative R&amp;D capitalized/amortized per the dataset framework — a modeling construct, not a balance-sheet line</a:t>
+            </a:r>
+          </a:p>
+          <a:p>
+            <a:pPr>
+              <a:spcBef>
+                <a:spcPts val="400"/>
+              </a:spcBef>
+            </a:pPr>
+            <a:r>
+              <a:rPr sz="1100">
+                <a:solidFill>
+                  <a:srgbClr val="202020"/>
+                </a:solidFill>
+              </a:rPr>
+              <a:t>Scenario pages state assumptions on-slide; peer-margin scenarios use comparable reporters only</a:t>
+            </a:r>
+          </a:p>
+        </p:txBody>
+      </p:sp>
+    </p:spTree>
+  </p:cSld>
+  <p:clrMapOvr>
+    <a:masterClrMapping/>
+  </p:clrMapOvr>
+</p:sld>
+</file>
+
+<file path=ppt/slides/slide15.xml><?xml version="1.0" encoding="utf-8"?>
+<p:sld xmlns:a="http://schemas.openxmlformats.org/drawingml/2006/main" xmlns:p="http://schemas.openxmlformats.org/presentationml/2006/main" xmlns:r="http://schemas.openxmlformats.org/officeDocument/2006/relationships">
+  <p:cSld>
+    <p:spTree>
+      <p:nvGrpSpPr>
+        <p:cNvPr id="1" name=""/>
+        <p:cNvGrpSpPr/>
+        <p:nvPr/>
+      </p:nvGrpSpPr>
+      <p:grpSpPr/>
+      <p:sp>
+        <p:nvSpPr>
+          <p:cNvPr id="2" name="TextBox 1"/>
+          <p:cNvSpPr txBox="1"/>
+          <p:nvPr/>
+        </p:nvSpPr>
+        <p:spPr>
+          <a:xfrm>
+            <a:off x="0" y="0"/>
+            <a:ext cx="12191695" cy="868680"/>
+          </a:xfrm>
+          <a:prstGeom prst="rect">
+            <a:avLst/>
+          </a:prstGeom>
+          <a:solidFill>
+            <a:srgbClr val="1F4E78"/>
+          </a:solidFill>
+        </p:spPr>
+        <p:txBody>
+          <a:bodyPr wrap="square" lIns="457200" tIns="164592">
+            <a:spAutoFit/>
+          </a:bodyPr>
+          <a:lstStyle/>
+          <a:p>
+            <a:r>
+              <a:rPr sz="2600" b="1">
+                <a:solidFill>
+                  <a:srgbClr val="FFFFFF"/>
+                </a:solidFill>
+              </a:rPr>
+              <a:t>Sources</a:t>
+            </a:r>
+          </a:p>
+        </p:txBody>
+      </p:sp>
+      <p:sp>
+        <p:nvSpPr>
+          <p:cNvPr id="3" name="TextBox 2"/>
+          <p:cNvSpPr txBox="1"/>
+          <p:nvPr/>
+        </p:nvSpPr>
+        <p:spPr>
+          <a:xfrm>
+            <a:off x="457200" y="1188720"/>
+            <a:ext cx="5577840" cy="2606040"/>
+          </a:xfrm>
+          <a:prstGeom prst="rect">
+            <a:avLst/>
+          </a:prstGeom>
+          <a:solidFill>
+            <a:srgbClr val="F2F2F2"/>
+          </a:solidFill>
+          <a:ln w="15875">
+            <a:solidFill>
+              <a:srgbClr val="1F4E78"/>
+            </a:solidFill>
+          </a:ln>
+        </p:spPr>
+        <p:txBody>
+          <a:bodyPr wrap="square" lIns="137160" rIns="137160" tIns="109728">
+            <a:spAutoFit/>
+          </a:bodyPr>
+          <a:lstStyle/>
+          <a:p>
+            <a:r>
+              <a:rPr sz="1500" b="1">
+                <a:solidFill>
+                  <a:srgbClr val="1F4E78"/>
+                </a:solidFill>
+              </a:rPr>
+              <a:t>Primary &amp; audited</a:t>
+            </a:r>
+          </a:p>
+          <a:p>
+            <a:pPr>
+              <a:spcBef>
+                <a:spcPts val="400"/>
+              </a:spcBef>
+            </a:pPr>
+            <a:r>
+              <a:rPr sz="1000">
+                <a:solidFill>
+                  <a:srgbClr val="202020"/>
+                </a:solidFill>
+              </a:rPr>
+              <a:t>TBK Co., Ltd. — Consolidated Financial Results FY ended 31 Mar 2026 (tanshin, 14 May 2026); securities-report risk factors (有価証券報告書 via kitaishihon/irbank)</a:t>
+            </a:r>
+          </a:p>
+          <a:p>
+            <a:pPr>
+              <a:spcBef>
+                <a:spcPts val="400"/>
+              </a:spcBef>
+            </a:pPr>
+            <a:r>
+              <a:rPr sz="1000">
+                <a:solidFill>
+                  <a:srgbClr val="202020"/>
+                </a:solidFill>
+              </a:rPr>
+              <a:t>Concentric AB — Annual Report 2023 (income statement, balance sheet, 5-year key figures)</a:t>
+            </a:r>
+          </a:p>
+          <a:p>
+            <a:pPr>
+              <a:spcBef>
+                <a:spcPts val="400"/>
+              </a:spcBef>
+            </a:pPr>
+            <a:r>
+              <a:rPr sz="1000">
+                <a:solidFill>
+                  <a:srgbClr val="202020"/>
+                </a:solidFill>
+              </a:rPr>
+              <a:t>User-provided datasets: TBK 10-year financials; Peers 10-year; Peers LTM (7 companies, consistent methodology)</a:t>
+            </a:r>
+          </a:p>
+          <a:p>
+            <a:pPr>
+              <a:spcBef>
+                <a:spcPts val="400"/>
+              </a:spcBef>
+            </a:pPr>
+            <a:r>
+              <a:rPr sz="1000">
+                <a:solidFill>
+                  <a:srgbClr val="202020"/>
+                </a:solidFill>
+              </a:rPr>
+              <a:t>SEC filings: Cummins 10-K/10-Q/8-K (FY2024-25); WABCO &amp; Meritor merger 8-Ks</a:t>
+            </a:r>
+          </a:p>
+          <a:p>
+            <a:pPr>
+              <a:spcBef>
+                <a:spcPts val="400"/>
+              </a:spcBef>
+            </a:pPr>
+            <a:r>
+              <a:rPr sz="1000">
+                <a:solidFill>
+                  <a:srgbClr val="202020"/>
+                </a:solidFill>
+              </a:rPr>
+              <a:t>Company releases: Knorr-Bremse FY2023-25; ZF AR2024-25; SAF-Holland AR2024; Mahle AR2024-25; Haldex year-end 2021; Rheinmetall FY2025 + AEQUITA divestment (3 Jun 2026); Circle BidCo/A.P. Møller offer documents (2024); Brakes India-TBK alliance (Dec 2025)</a:t>
+            </a:r>
+          </a:p>
+        </p:txBody>
+      </p:sp>
+      <p:sp>
+        <p:nvSpPr>
+          <p:cNvPr id="4" name="TextBox 3"/>
+          <p:cNvSpPr txBox="1"/>
+          <p:nvPr/>
+        </p:nvSpPr>
+        <p:spPr>
+          <a:xfrm>
+            <a:off x="6217920" y="1188720"/>
+            <a:ext cx="5532120" cy="2606040"/>
+          </a:xfrm>
+          <a:prstGeom prst="rect">
+            <a:avLst/>
+          </a:prstGeom>
+          <a:solidFill>
+            <a:srgbClr val="F2F2F2"/>
+          </a:solidFill>
+          <a:ln w="15875">
+            <a:solidFill>
+              <a:srgbClr val="1F4E78"/>
+            </a:solidFill>
+          </a:ln>
+        </p:spPr>
+        <p:txBody>
+          <a:bodyPr wrap="square" lIns="137160" rIns="137160" tIns="109728">
+            <a:spAutoFit/>
+          </a:bodyPr>
+          <a:lstStyle/>
+          <a:p>
+            <a:r>
+              <a:rPr sz="1500" b="1">
+                <a:solidFill>
+                  <a:srgbClr val="1F4E78"/>
+                </a:solidFill>
+              </a:rPr>
+              <a:t>Peer-reviewed &amp; academic</a:t>
+            </a:r>
+          </a:p>
+          <a:p>
+            <a:pPr>
+              <a:spcBef>
+                <a:spcPts val="400"/>
+              </a:spcBef>
+            </a:pPr>
+            <a:r>
+              <a:rPr sz="1000">
+                <a:solidFill>
+                  <a:srgbClr val="202020"/>
+                </a:solidFill>
+              </a:rPr>
+              <a:t>Göhring &amp; von Glasner, SAE 902206 (1990); Kajiyama et al. (Isuzu/TBK), SAE 902200 (1990); Day, Harding &amp; Newcomb, Proc IMechE (1984); Hoover et al., SAE 2005-01-3614; Subel &amp; Kienhöfer, Proc IMechE D (2020)</a:t>
+            </a:r>
+          </a:p>
+          <a:p>
+            <a:pPr>
+              <a:spcBef>
+                <a:spcPts val="400"/>
+              </a:spcBef>
+            </a:pPr>
+            <a:r>
+              <a:rPr sz="1000">
+                <a:solidFill>
+                  <a:srgbClr val="202020"/>
+                </a:solidFill>
+              </a:rPr>
+              <a:t>Ampadu, Alrejjal &amp; Ksaibati, JSDTL 8(1) 2023 — disc vs drum cost-effectiveness</a:t>
+            </a:r>
+          </a:p>
+          <a:p>
+            <a:pPr>
+              <a:spcBef>
+                <a:spcPts val="400"/>
+              </a:spcBef>
+            </a:pPr>
+            <a:r>
+              <a:rPr sz="1000">
+                <a:solidFill>
+                  <a:srgbClr val="202020"/>
+                </a:solidFill>
+              </a:rPr>
+              <a:t>Granitz et al., SN Applied Sciences (2021) — e-coolant pump, 13L HD diesel; Bitsis &amp; Miwa, SAE 2018-01-0980; Cummins SuperTruck 2, SAE 2019-01-0247; MIT S.M. thesis (2012) — HD parasitic losses</a:t>
+            </a:r>
+          </a:p>
+          <a:p>
+            <a:pPr>
+              <a:spcBef>
+                <a:spcPts val="400"/>
+              </a:spcBef>
+            </a:pPr>
+            <a:r>
+              <a:rPr sz="1000">
+                <a:solidFill>
+                  <a:srgbClr val="202020"/>
+                </a:solidFill>
+              </a:rPr>
+              <a:t>Zhang et al., J. Hazardous Materials 465 (2024); Hagino, Atmosphere 15:75 (2024, JARI); Environmental Pollution (2023) — regen braking &amp; brake wear</a:t>
+            </a:r>
+          </a:p>
+          <a:p>
+            <a:pPr>
+              <a:spcBef>
+                <a:spcPts val="400"/>
+              </a:spcBef>
+            </a:pPr>
+            <a:r>
+              <a:rPr sz="1000">
+                <a:solidFill>
+                  <a:srgbClr val="202020"/>
+                </a:solidFill>
+              </a:rPr>
+              <a:t>Energies 16:4024 (2023), 19:1748 (2026); Sustainability 15:3132 (2023); Energies 16:168 (2023) — BEV/FCEV truck &amp; bus thermal management</a:t>
+            </a:r>
+          </a:p>
+        </p:txBody>
+      </p:sp>
+      <p:sp>
+        <p:nvSpPr>
+          <p:cNvPr id="5" name="TextBox 4"/>
+          <p:cNvSpPr txBox="1"/>
+          <p:nvPr/>
+        </p:nvSpPr>
+        <p:spPr>
+          <a:xfrm>
+            <a:off x="457200" y="3977639"/>
+            <a:ext cx="5577840" cy="2606040"/>
+          </a:xfrm>
+          <a:prstGeom prst="rect">
+            <a:avLst/>
+          </a:prstGeom>
+          <a:solidFill>
+            <a:srgbClr val="F2F2F2"/>
+          </a:solidFill>
+          <a:ln w="15875">
+            <a:solidFill>
+              <a:srgbClr val="1F4E78"/>
+            </a:solidFill>
+          </a:ln>
+        </p:spPr>
+        <p:txBody>
+          <a:bodyPr wrap="square" lIns="137160" rIns="137160" tIns="109728">
+            <a:spAutoFit/>
+          </a:bodyPr>
+          <a:lstStyle/>
+          <a:p>
+            <a:r>
+              <a:rPr sz="1500" b="1">
+                <a:solidFill>
+                  <a:srgbClr val="1F4E78"/>
+                </a:solidFill>
+              </a:rPr>
+              <a:t>Regulatory &amp; legal</a:t>
+            </a:r>
+          </a:p>
+          <a:p>
+            <a:pPr>
+              <a:spcBef>
+                <a:spcPts val="400"/>
+              </a:spcBef>
+            </a:pPr>
+            <a:r>
+              <a:rPr sz="1000">
+                <a:solidFill>
+                  <a:srgbClr val="202020"/>
+                </a:solidFill>
+              </a:rPr>
+              <a:t>NHTSA: FMVSS 121 final rule 74 FR 37122 (2009) + Regulatory Impact Analysis; DOT HS 811 367 (2010, NADS simulator); ESV 07-0242 (2007); heavy-vehicle AEB NPRM (2023)</a:t>
+            </a:r>
+          </a:p>
+          <a:p>
+            <a:pPr>
+              <a:spcBef>
+                <a:spcPts val="400"/>
+              </a:spcBef>
+            </a:pPr>
+            <a:r>
+              <a:rPr sz="1000">
+                <a:solidFill>
+                  <a:srgbClr val="202020"/>
+                </a:solidFill>
+              </a:rPr>
+              <a:t>UNECE Regulation No. 13 (braking, Type-II fade tests)</a:t>
+            </a:r>
+          </a:p>
+          <a:p>
+            <a:pPr>
+              <a:spcBef>
+                <a:spcPts val="400"/>
+              </a:spcBef>
+            </a:pPr>
+            <a:r>
+              <a:rPr sz="1000">
+                <a:solidFill>
+                  <a:srgbClr val="202020"/>
+                </a:solidFill>
+              </a:rPr>
+              <a:t>EU: Reg 2019/1242 &amp; 2024/1610 (HDV CO2); Reg 2024/1257 (Euro 7); Reg 2017/2400 Annex IX (VECTO auxiliaries) + JRC112015; EPA Phase 2 (40 CFR 1037.520 accessory credits) &amp; Phase 3 (2024)</a:t>
+            </a:r>
+          </a:p>
+          <a:p>
+            <a:pPr>
+              <a:spcBef>
+                <a:spcPts val="400"/>
+              </a:spcBef>
+            </a:pPr>
+            <a:r>
+              <a:rPr sz="1000">
+                <a:solidFill>
+                  <a:srgbClr val="202020"/>
+                </a:solidFill>
+              </a:rPr>
+              <a:t>EC merger decisions: M.8102 Valeo/FTE (2017, 90-100% concentration, Raicam remedy); Knorr-Bremse/Haldex Phase II (IP-17-2126, 2017)</a:t>
+            </a:r>
+          </a:p>
+          <a:p>
+            <a:pPr>
+              <a:spcBef>
+                <a:spcPts val="400"/>
+              </a:spcBef>
+            </a:pPr>
+            <a:r>
+              <a:rPr sz="1000">
+                <a:solidFill>
+                  <a:srgbClr val="202020"/>
+                </a:solidFill>
+              </a:rPr>
+              <a:t>Japan: MY2025 HDV fuel-economy standards (via ICCT/TransportPolicy); METI supplier-transition studies (2023, 2025); FMCSA Crash Cost Methodology (2025); AAA Foundation (2017)</a:t>
+            </a:r>
+          </a:p>
+        </p:txBody>
+      </p:sp>
+      <p:sp>
+        <p:nvSpPr>
+          <p:cNvPr id="6" name="TextBox 5"/>
+          <p:cNvSpPr txBox="1"/>
+          <p:nvPr/>
+        </p:nvSpPr>
+        <p:spPr>
+          <a:xfrm>
+            <a:off x="6217920" y="3977639"/>
+            <a:ext cx="5532120" cy="2606040"/>
+          </a:xfrm>
+          <a:prstGeom prst="rect">
+            <a:avLst/>
+          </a:prstGeom>
+          <a:solidFill>
+            <a:srgbClr val="F2F2F2"/>
+          </a:solidFill>
+          <a:ln w="15875">
+            <a:solidFill>
+              <a:srgbClr val="1F4E78"/>
+            </a:solidFill>
+          </a:ln>
+        </p:spPr>
+        <p:txBody>
+          <a:bodyPr wrap="square" lIns="137160" rIns="137160" tIns="109728">
+            <a:spAutoFit/>
+          </a:bodyPr>
+          <a:lstStyle/>
+          <a:p>
+            <a:r>
+              <a:rPr sz="1500" b="1">
+                <a:solidFill>
+                  <a:srgbClr val="1F4E78"/>
+                </a:solidFill>
+              </a:rPr>
+              <a:t>Industry &amp; financial data (verified, labeled where single-source)</a:t>
+            </a:r>
+          </a:p>
+          <a:p>
+            <a:pPr>
+              <a:spcBef>
+                <a:spcPts val="400"/>
+              </a:spcBef>
+            </a:pPr>
+            <a:r>
+              <a:rPr sz="1000">
+                <a:solidFill>
+                  <a:srgbClr val="202020"/>
+                </a:solidFill>
+              </a:rPr>
+              <a:t>Adoption data: Haldex ADB history; Bendix/Knorr production milestones; FleetOwner, TruckingInfo, Fleet Maintenance, Transport Topics, Fleet Equipment; NACFE confidence reports; NAS 25542; DOE SuperTruck (OSTI)</a:t>
+            </a:r>
+          </a:p>
+          <a:p>
+            <a:pPr>
+              <a:spcBef>
+                <a:spcPts val="400"/>
+              </a:spcBef>
+            </a:pPr>
+            <a:r>
+              <a:rPr sz="1000">
+                <a:solidFill>
+                  <a:srgbClr val="202020"/>
+                </a:solidFill>
+              </a:rPr>
+              <a:t>Deal records: Knorr-Bremse-Bendix (2002); ZF-Wabco $7bn (2020); Cummins-Meritor $3.7bn (2022); SAF-Holland-Haldex (2022); Concentric take-private SEK 230 (2024); Pierburg-AEQUITA €350M (2026)</a:t>
+            </a:r>
+          </a:p>
+          <a:p>
+            <a:pPr>
+              <a:spcBef>
+                <a:spcPts val="400"/>
+              </a:spcBef>
+            </a:pPr>
+            <a:r>
+              <a:rPr sz="1000">
+                <a:solidFill>
+                  <a:srgbClr val="202020"/>
+                </a:solidFill>
+              </a:rPr>
+              <a:t>Japanese filings via irbank, kitaishihon, buffett-code, kabutan, MarkLines (incl. TBK JSAE 2022 exhibit; Mikuni 2022 BEV-truck e-oil pump disclosure; Yamada e-water pump adoptions)</a:t>
+            </a:r>
+          </a:p>
+          <a:p>
+            <a:pPr>
+              <a:spcBef>
+                <a:spcPts val="400"/>
+              </a:spcBef>
+            </a:pPr>
+            <a:r>
+              <a:rPr sz="1000">
+                <a:solidFill>
+                  <a:srgbClr val="202020"/>
+                </a:solidFill>
+              </a:rPr>
+              <a:t>Aggregators for computed ratios: macrotrends, stockanalysis, Simply Wall St — cross-checked against filings; market research (MarketsandMarkets, GVR, IDTechEx) used directionally only</a:t>
             </a:r>
           </a:p>
         </p:txBody>

--- a/TBK_rd_gap_slides.pptx
+++ b/TBK_rd_gap_slides.pptx
@@ -20,6 +20,11 @@
     <p:sldId id="268" r:id="rId19"/>
     <p:sldId id="269" r:id="rId20"/>
     <p:sldId id="270" r:id="rId21"/>
+    <p:sldId id="271" r:id="rId22"/>
+    <p:sldId id="272" r:id="rId23"/>
+    <p:sldId id="273" r:id="rId24"/>
+    <p:sldId id="274" r:id="rId25"/>
+    <p:sldId id="275" r:id="rId26"/>
   </p:sldIdLst>
   <p:sldSz cx="12191695" cy="6858000" type="screen4x3"/>
   <p:notesSz cx="6858000" cy="9144000"/>
@@ -334,6 +339,1010 @@
 </c:chartSpace>
 </file>
 
+<file path=ppt/charts/chart10.xml><?xml version="1.0" encoding="utf-8"?>
+<c:chartSpace xmlns:c="http://schemas.openxmlformats.org/drawingml/2006/chart" xmlns:a="http://schemas.openxmlformats.org/drawingml/2006/main" xmlns:r="http://schemas.openxmlformats.org/officeDocument/2006/relationships">
+  <c:date1904 val="0"/>
+  <c:chart>
+    <c:title>
+      <c:tx>
+        <c:rich>
+          <a:bodyPr/>
+          <a:lstStyle/>
+          <a:p>
+            <a:r>
+              <a:rPr sz="1200"/>
+              <a:t>Phase 1 — Structural durability (Ch1-5)</a:t>
+            </a:r>
+          </a:p>
+        </c:rich>
+      </c:tx>
+      <c:layout/>
+      <c:overlay val="0"/>
+    </c:title>
+    <c:autoTitleDeleted val="0"/>
+    <c:plotArea>
+      <c:barChart>
+        <c:barDir val="col"/>
+        <c:grouping val="clustered"/>
+        <c:ser>
+          <c:idx val="0"/>
+          <c:order val="0"/>
+          <c:tx>
+            <c:strRef>
+              <c:f>Sheet1!$B$1</c:f>
+              <c:strCache>
+                <c:ptCount val="1"/>
+                <c:pt idx="0">
+                  <c:v>TBK</c:v>
+                </c:pt>
+              </c:strCache>
+            </c:strRef>
+          </c:tx>
+          <c:spPr>
+            <a:solidFill>
+              <a:srgbClr val="7F1D1D"/>
+            </a:solidFill>
+          </c:spPr>
+          <c:cat>
+            <c:strRef>
+              <c:f>Sheet1!$A$2:$A$6</c:f>
+              <c:strCache>
+                <c:ptCount val="5"/>
+                <c:pt idx="0">
+                  <c:v>Criticality</c:v>
+                </c:pt>
+                <c:pt idx="1">
+                  <c:v>Standard</c:v>
+                </c:pt>
+                <c:pt idx="2">
+                  <c:v>Hegemony</c:v>
+                </c:pt>
+                <c:pt idx="3">
+                  <c:v>Ecosystem</c:v>
+                </c:pt>
+                <c:pt idx="4">
+                  <c:v>Lifecycle</c:v>
+                </c:pt>
+              </c:strCache>
+            </c:strRef>
+          </c:cat>
+          <c:val>
+            <c:numRef>
+              <c:f>Sheet1!$B$2:$B$6</c:f>
+              <c:numCache>
+                <c:formatCode>General</c:formatCode>
+                <c:ptCount val="5"/>
+                <c:pt idx="0">
+                  <c:v>7.5</c:v>
+                </c:pt>
+                <c:pt idx="1">
+                  <c:v>6.0</c:v>
+                </c:pt>
+                <c:pt idx="2">
+                  <c:v>8.0</c:v>
+                </c:pt>
+                <c:pt idx="3">
+                  <c:v>2.0</c:v>
+                </c:pt>
+                <c:pt idx="4">
+                  <c:v>3.0</c:v>
+                </c:pt>
+              </c:numCache>
+            </c:numRef>
+          </c:val>
+        </c:ser>
+        <c:ser>
+          <c:idx val="1"/>
+          <c:order val="1"/>
+          <c:tx>
+            <c:strRef>
+              <c:f>Sheet1!$C$1</c:f>
+              <c:strCache>
+                <c:ptCount val="1"/>
+                <c:pt idx="0">
+                  <c:v>Mikuni</c:v>
+                </c:pt>
+              </c:strCache>
+            </c:strRef>
+          </c:tx>
+          <c:spPr>
+            <a:solidFill>
+              <a:srgbClr val="BF9000"/>
+            </a:solidFill>
+          </c:spPr>
+          <c:cat>
+            <c:strRef>
+              <c:f>Sheet1!$A$2:$A$6</c:f>
+              <c:strCache>
+                <c:ptCount val="5"/>
+                <c:pt idx="0">
+                  <c:v>Criticality</c:v>
+                </c:pt>
+                <c:pt idx="1">
+                  <c:v>Standard</c:v>
+                </c:pt>
+                <c:pt idx="2">
+                  <c:v>Hegemony</c:v>
+                </c:pt>
+                <c:pt idx="3">
+                  <c:v>Ecosystem</c:v>
+                </c:pt>
+                <c:pt idx="4">
+                  <c:v>Lifecycle</c:v>
+                </c:pt>
+              </c:strCache>
+            </c:strRef>
+          </c:cat>
+          <c:val>
+            <c:numRef>
+              <c:f>Sheet1!$C$2:$C$6</c:f>
+              <c:numCache>
+                <c:formatCode>General</c:formatCode>
+                <c:ptCount val="5"/>
+                <c:pt idx="0">
+                  <c:v>7.0</c:v>
+                </c:pt>
+                <c:pt idx="1">
+                  <c:v>5.0</c:v>
+                </c:pt>
+                <c:pt idx="2">
+                  <c:v>4.0</c:v>
+                </c:pt>
+                <c:pt idx="3">
+                  <c:v>2.0</c:v>
+                </c:pt>
+                <c:pt idx="4">
+                  <c:v>4.0</c:v>
+                </c:pt>
+              </c:numCache>
+            </c:numRef>
+          </c:val>
+        </c:ser>
+        <c:ser>
+          <c:idx val="2"/>
+          <c:order val="2"/>
+          <c:tx>
+            <c:strRef>
+              <c:f>Sheet1!$D$1</c:f>
+              <c:strCache>
+                <c:ptCount val="1"/>
+                <c:pt idx="0">
+                  <c:v>Concentric</c:v>
+                </c:pt>
+              </c:strCache>
+            </c:strRef>
+          </c:tx>
+          <c:spPr>
+            <a:solidFill>
+              <a:srgbClr val="548235"/>
+            </a:solidFill>
+          </c:spPr>
+          <c:cat>
+            <c:strRef>
+              <c:f>Sheet1!$A$2:$A$6</c:f>
+              <c:strCache>
+                <c:ptCount val="5"/>
+                <c:pt idx="0">
+                  <c:v>Criticality</c:v>
+                </c:pt>
+                <c:pt idx="1">
+                  <c:v>Standard</c:v>
+                </c:pt>
+                <c:pt idx="2">
+                  <c:v>Hegemony</c:v>
+                </c:pt>
+                <c:pt idx="3">
+                  <c:v>Ecosystem</c:v>
+                </c:pt>
+                <c:pt idx="4">
+                  <c:v>Lifecycle</c:v>
+                </c:pt>
+              </c:strCache>
+            </c:strRef>
+          </c:cat>
+          <c:val>
+            <c:numRef>
+              <c:f>Sheet1!$D$2:$D$6</c:f>
+              <c:numCache>
+                <c:formatCode>General</c:formatCode>
+                <c:ptCount val="5"/>
+                <c:pt idx="0">
+                  <c:v>7.0</c:v>
+                </c:pt>
+                <c:pt idx="1">
+                  <c:v>6.0</c:v>
+                </c:pt>
+                <c:pt idx="2">
+                  <c:v>7.5</c:v>
+                </c:pt>
+                <c:pt idx="3">
+                  <c:v>2.5</c:v>
+                </c:pt>
+                <c:pt idx="4">
+                  <c:v>7.0</c:v>
+                </c:pt>
+              </c:numCache>
+            </c:numRef>
+          </c:val>
+        </c:ser>
+        <c:ser>
+          <c:idx val="3"/>
+          <c:order val="3"/>
+          <c:tx>
+            <c:strRef>
+              <c:f>Sheet1!$E$1</c:f>
+              <c:strCache>
+                <c:ptCount val="1"/>
+                <c:pt idx="0">
+                  <c:v>Aisin</c:v>
+                </c:pt>
+              </c:strCache>
+            </c:strRef>
+          </c:tx>
+          <c:spPr>
+            <a:solidFill>
+              <a:srgbClr val="1F4E78"/>
+            </a:solidFill>
+          </c:spPr>
+          <c:cat>
+            <c:strRef>
+              <c:f>Sheet1!$A$2:$A$6</c:f>
+              <c:strCache>
+                <c:ptCount val="5"/>
+                <c:pt idx="0">
+                  <c:v>Criticality</c:v>
+                </c:pt>
+                <c:pt idx="1">
+                  <c:v>Standard</c:v>
+                </c:pt>
+                <c:pt idx="2">
+                  <c:v>Hegemony</c:v>
+                </c:pt>
+                <c:pt idx="3">
+                  <c:v>Ecosystem</c:v>
+                </c:pt>
+                <c:pt idx="4">
+                  <c:v>Lifecycle</c:v>
+                </c:pt>
+              </c:strCache>
+            </c:strRef>
+          </c:cat>
+          <c:val>
+            <c:numRef>
+              <c:f>Sheet1!$E$2:$E$6</c:f>
+              <c:numCache>
+                <c:formatCode>General</c:formatCode>
+                <c:ptCount val="5"/>
+                <c:pt idx="0">
+                  <c:v>7.0</c:v>
+                </c:pt>
+                <c:pt idx="1">
+                  <c:v>7.0</c:v>
+                </c:pt>
+                <c:pt idx="2">
+                  <c:v>6.0</c:v>
+                </c:pt>
+                <c:pt idx="3">
+                  <c:v>5.0</c:v>
+                </c:pt>
+                <c:pt idx="4">
+                  <c:v>5.0</c:v>
+                </c:pt>
+              </c:numCache>
+            </c:numRef>
+          </c:val>
+        </c:ser>
+        <c:ser>
+          <c:idx val="4"/>
+          <c:order val="4"/>
+          <c:tx>
+            <c:strRef>
+              <c:f>Sheet1!$F$1</c:f>
+              <c:strCache>
+                <c:ptCount val="1"/>
+                <c:pt idx="0">
+                  <c:v>TPR</c:v>
+                </c:pt>
+              </c:strCache>
+            </c:strRef>
+          </c:tx>
+          <c:spPr>
+            <a:solidFill>
+              <a:srgbClr val="808080"/>
+            </a:solidFill>
+          </c:spPr>
+          <c:cat>
+            <c:strRef>
+              <c:f>Sheet1!$A$2:$A$6</c:f>
+              <c:strCache>
+                <c:ptCount val="5"/>
+                <c:pt idx="0">
+                  <c:v>Criticality</c:v>
+                </c:pt>
+                <c:pt idx="1">
+                  <c:v>Standard</c:v>
+                </c:pt>
+                <c:pt idx="2">
+                  <c:v>Hegemony</c:v>
+                </c:pt>
+                <c:pt idx="3">
+                  <c:v>Ecosystem</c:v>
+                </c:pt>
+                <c:pt idx="4">
+                  <c:v>Lifecycle</c:v>
+                </c:pt>
+              </c:strCache>
+            </c:strRef>
+          </c:cat>
+          <c:val>
+            <c:numRef>
+              <c:f>Sheet1!$F$2:$F$6</c:f>
+              <c:numCache>
+                <c:formatCode>General</c:formatCode>
+                <c:ptCount val="5"/>
+                <c:pt idx="0">
+                  <c:v>7.5</c:v>
+                </c:pt>
+                <c:pt idx="1">
+                  <c:v>6.0</c:v>
+                </c:pt>
+                <c:pt idx="2">
+                  <c:v>7.5</c:v>
+                </c:pt>
+                <c:pt idx="3">
+                  <c:v>2.0</c:v>
+                </c:pt>
+                <c:pt idx="4">
+                  <c:v>6.0</c:v>
+                </c:pt>
+              </c:numCache>
+            </c:numRef>
+          </c:val>
+        </c:ser>
+        <c:ser>
+          <c:idx val="5"/>
+          <c:order val="5"/>
+          <c:tx>
+            <c:strRef>
+              <c:f>Sheet1!$G$1</c:f>
+              <c:strCache>
+                <c:ptCount val="1"/>
+                <c:pt idx="0">
+                  <c:v>Hanon</c:v>
+                </c:pt>
+              </c:strCache>
+            </c:strRef>
+          </c:tx>
+          <c:spPr>
+            <a:solidFill>
+              <a:srgbClr val="4FB3BF"/>
+            </a:solidFill>
+          </c:spPr>
+          <c:cat>
+            <c:strRef>
+              <c:f>Sheet1!$A$2:$A$6</c:f>
+              <c:strCache>
+                <c:ptCount val="5"/>
+                <c:pt idx="0">
+                  <c:v>Criticality</c:v>
+                </c:pt>
+                <c:pt idx="1">
+                  <c:v>Standard</c:v>
+                </c:pt>
+                <c:pt idx="2">
+                  <c:v>Hegemony</c:v>
+                </c:pt>
+                <c:pt idx="3">
+                  <c:v>Ecosystem</c:v>
+                </c:pt>
+                <c:pt idx="4">
+                  <c:v>Lifecycle</c:v>
+                </c:pt>
+              </c:strCache>
+            </c:strRef>
+          </c:cat>
+          <c:val>
+            <c:numRef>
+              <c:f>Sheet1!$G$2:$G$6</c:f>
+              <c:numCache>
+                <c:formatCode>General</c:formatCode>
+                <c:ptCount val="5"/>
+                <c:pt idx="0">
+                  <c:v>7.0</c:v>
+                </c:pt>
+                <c:pt idx="1">
+                  <c:v>5.5</c:v>
+                </c:pt>
+                <c:pt idx="2">
+                  <c:v>6.5</c:v>
+                </c:pt>
+                <c:pt idx="3">
+                  <c:v>2.5</c:v>
+                </c:pt>
+                <c:pt idx="4">
+                  <c:v>3.5</c:v>
+                </c:pt>
+              </c:numCache>
+            </c:numRef>
+          </c:val>
+        </c:ser>
+        <c:axId val="-2068027336"/>
+        <c:axId val="-2113994440"/>
+      </c:barChart>
+      <c:catAx>
+        <c:axId val="-2068027336"/>
+        <c:scaling>
+          <c:orientation val="minMax"/>
+        </c:scaling>
+        <c:delete val="0"/>
+        <c:axPos val="b"/>
+        <c:majorTickMark val="out"/>
+        <c:minorTickMark val="none"/>
+        <c:tickLblPos val="nextTo"/>
+        <c:txPr>
+          <a:bodyPr/>
+          <a:lstStyle/>
+          <a:p>
+            <a:pPr>
+              <a:defRPr sz="900"/>
+            </a:pPr>
+          </a:p>
+        </c:txPr>
+        <c:crossAx val="-2113994440"/>
+        <c:crosses val="autoZero"/>
+        <c:auto val="1"/>
+        <c:lblAlgn val="ctr"/>
+        <c:lblOffset val="100"/>
+        <c:noMultiLvlLbl val="0"/>
+      </c:catAx>
+      <c:valAx>
+        <c:axId val="-2113994440"/>
+        <c:scaling>
+          <c:max val="10.0"/>
+        </c:scaling>
+        <c:delete val="0"/>
+        <c:axPos val="l"/>
+        <c:majorGridlines/>
+        <c:majorTickMark val="out"/>
+        <c:minorTickMark val="none"/>
+        <c:tickLblPos val="nextTo"/>
+        <c:crossAx val="-2068027336"/>
+        <c:crosses val="autoZero"/>
+      </c:valAx>
+    </c:plotArea>
+    <c:legend>
+      <c:legendPos val="b"/>
+      <c:overlay val="0"/>
+      <c:txPr>
+        <a:bodyPr/>
+        <a:lstStyle/>
+        <a:p>
+          <a:pPr>
+            <a:defRPr sz="900"/>
+          </a:pPr>
+        </a:p>
+      </c:txPr>
+    </c:legend>
+    <c:dispBlanksAs val="gap"/>
+  </c:chart>
+  <c:txPr>
+    <a:bodyPr/>
+    <a:lstStyle/>
+    <a:p>
+      <a:pPr>
+        <a:defRPr sz="1800"/>
+      </a:pPr>
+      <a:endParaRPr lang="en-US"/>
+    </a:p>
+  </c:txPr>
+  <c:externalData r:id="rId1">
+    <c:autoUpdate val="0"/>
+  </c:externalData>
+</c:chartSpace>
+</file>
+
+<file path=ppt/charts/chart11.xml><?xml version="1.0" encoding="utf-8"?>
+<c:chartSpace xmlns:c="http://schemas.openxmlformats.org/drawingml/2006/chart" xmlns:a="http://schemas.openxmlformats.org/drawingml/2006/main" xmlns:r="http://schemas.openxmlformats.org/officeDocument/2006/relationships">
+  <c:date1904 val="0"/>
+  <c:chart>
+    <c:title>
+      <c:tx>
+        <c:rich>
+          <a:bodyPr/>
+          <a:lstStyle/>
+          <a:p>
+            <a:r>
+              <a:rPr sz="1200"/>
+              <a:t>Phases 2-3 — Endurance &amp; compounding engine (Ch6-10)</a:t>
+            </a:r>
+          </a:p>
+        </c:rich>
+      </c:tx>
+      <c:layout/>
+      <c:overlay val="0"/>
+    </c:title>
+    <c:autoTitleDeleted val="0"/>
+    <c:plotArea>
+      <c:barChart>
+        <c:barDir val="col"/>
+        <c:grouping val="clustered"/>
+        <c:ser>
+          <c:idx val="0"/>
+          <c:order val="0"/>
+          <c:tx>
+            <c:strRef>
+              <c:f>Sheet1!$B$1</c:f>
+              <c:strCache>
+                <c:ptCount val="1"/>
+                <c:pt idx="0">
+                  <c:v>TBK</c:v>
+                </c:pt>
+              </c:strCache>
+            </c:strRef>
+          </c:tx>
+          <c:spPr>
+            <a:solidFill>
+              <a:srgbClr val="7F1D1D"/>
+            </a:solidFill>
+          </c:spPr>
+          <c:cat>
+            <c:strRef>
+              <c:f>Sheet1!$A$2:$A$6</c:f>
+              <c:strCache>
+                <c:ptCount val="5"/>
+                <c:pt idx="0">
+                  <c:v>Substitution</c:v>
+                </c:pt>
+                <c:pt idx="1">
+                  <c:v>Demand</c:v>
+                </c:pt>
+                <c:pt idx="2">
+                  <c:v>Capital alloc.</c:v>
+                </c:pt>
+                <c:pt idx="3">
+                  <c:v>Runway</c:v>
+                </c:pt>
+                <c:pt idx="4">
+                  <c:v>Rev-Lindy</c:v>
+                </c:pt>
+              </c:strCache>
+            </c:strRef>
+          </c:cat>
+          <c:val>
+            <c:numRef>
+              <c:f>Sheet1!$B$2:$B$6</c:f>
+              <c:numCache>
+                <c:formatCode>General</c:formatCode>
+                <c:ptCount val="5"/>
+                <c:pt idx="0">
+                  <c:v>3.5</c:v>
+                </c:pt>
+                <c:pt idx="1">
+                  <c:v>7.0</c:v>
+                </c:pt>
+                <c:pt idx="2">
+                  <c:v>2.0</c:v>
+                </c:pt>
+                <c:pt idx="3">
+                  <c:v>3.0</c:v>
+                </c:pt>
+                <c:pt idx="4">
+                  <c:v>4.0</c:v>
+                </c:pt>
+              </c:numCache>
+            </c:numRef>
+          </c:val>
+        </c:ser>
+        <c:ser>
+          <c:idx val="1"/>
+          <c:order val="1"/>
+          <c:tx>
+            <c:strRef>
+              <c:f>Sheet1!$C$1</c:f>
+              <c:strCache>
+                <c:ptCount val="1"/>
+                <c:pt idx="0">
+                  <c:v>Mikuni</c:v>
+                </c:pt>
+              </c:strCache>
+            </c:strRef>
+          </c:tx>
+          <c:spPr>
+            <a:solidFill>
+              <a:srgbClr val="BF9000"/>
+            </a:solidFill>
+          </c:spPr>
+          <c:cat>
+            <c:strRef>
+              <c:f>Sheet1!$A$2:$A$6</c:f>
+              <c:strCache>
+                <c:ptCount val="5"/>
+                <c:pt idx="0">
+                  <c:v>Substitution</c:v>
+                </c:pt>
+                <c:pt idx="1">
+                  <c:v>Demand</c:v>
+                </c:pt>
+                <c:pt idx="2">
+                  <c:v>Capital alloc.</c:v>
+                </c:pt>
+                <c:pt idx="3">
+                  <c:v>Runway</c:v>
+                </c:pt>
+                <c:pt idx="4">
+                  <c:v>Rev-Lindy</c:v>
+                </c:pt>
+              </c:strCache>
+            </c:strRef>
+          </c:cat>
+          <c:val>
+            <c:numRef>
+              <c:f>Sheet1!$C$2:$C$6</c:f>
+              <c:numCache>
+                <c:formatCode>General</c:formatCode>
+                <c:ptCount val="5"/>
+                <c:pt idx="0">
+                  <c:v>3.0</c:v>
+                </c:pt>
+                <c:pt idx="1">
+                  <c:v>7.0</c:v>
+                </c:pt>
+                <c:pt idx="2">
+                  <c:v>2.5</c:v>
+                </c:pt>
+                <c:pt idx="3">
+                  <c:v>5.5</c:v>
+                </c:pt>
+                <c:pt idx="4">
+                  <c:v>4.5</c:v>
+                </c:pt>
+              </c:numCache>
+            </c:numRef>
+          </c:val>
+        </c:ser>
+        <c:ser>
+          <c:idx val="2"/>
+          <c:order val="2"/>
+          <c:tx>
+            <c:strRef>
+              <c:f>Sheet1!$D$1</c:f>
+              <c:strCache>
+                <c:ptCount val="1"/>
+                <c:pt idx="0">
+                  <c:v>Concentric</c:v>
+                </c:pt>
+              </c:strCache>
+            </c:strRef>
+          </c:tx>
+          <c:spPr>
+            <a:solidFill>
+              <a:srgbClr val="548235"/>
+            </a:solidFill>
+          </c:spPr>
+          <c:cat>
+            <c:strRef>
+              <c:f>Sheet1!$A$2:$A$6</c:f>
+              <c:strCache>
+                <c:ptCount val="5"/>
+                <c:pt idx="0">
+                  <c:v>Substitution</c:v>
+                </c:pt>
+                <c:pt idx="1">
+                  <c:v>Demand</c:v>
+                </c:pt>
+                <c:pt idx="2">
+                  <c:v>Capital alloc.</c:v>
+                </c:pt>
+                <c:pt idx="3">
+                  <c:v>Runway</c:v>
+                </c:pt>
+                <c:pt idx="4">
+                  <c:v>Rev-Lindy</c:v>
+                </c:pt>
+              </c:strCache>
+            </c:strRef>
+          </c:cat>
+          <c:val>
+            <c:numRef>
+              <c:f>Sheet1!$D$2:$D$6</c:f>
+              <c:numCache>
+                <c:formatCode>General</c:formatCode>
+                <c:ptCount val="5"/>
+                <c:pt idx="0">
+                  <c:v>5.0</c:v>
+                </c:pt>
+                <c:pt idx="1">
+                  <c:v>7.5</c:v>
+                </c:pt>
+                <c:pt idx="2">
+                  <c:v>7.5</c:v>
+                </c:pt>
+                <c:pt idx="3">
+                  <c:v>7.0</c:v>
+                </c:pt>
+                <c:pt idx="4">
+                  <c:v>5.5</c:v>
+                </c:pt>
+              </c:numCache>
+            </c:numRef>
+          </c:val>
+        </c:ser>
+        <c:ser>
+          <c:idx val="3"/>
+          <c:order val="3"/>
+          <c:tx>
+            <c:strRef>
+              <c:f>Sheet1!$E$1</c:f>
+              <c:strCache>
+                <c:ptCount val="1"/>
+                <c:pt idx="0">
+                  <c:v>Aisin</c:v>
+                </c:pt>
+              </c:strCache>
+            </c:strRef>
+          </c:tx>
+          <c:spPr>
+            <a:solidFill>
+              <a:srgbClr val="1F4E78"/>
+            </a:solidFill>
+          </c:spPr>
+          <c:cat>
+            <c:strRef>
+              <c:f>Sheet1!$A$2:$A$6</c:f>
+              <c:strCache>
+                <c:ptCount val="5"/>
+                <c:pt idx="0">
+                  <c:v>Substitution</c:v>
+                </c:pt>
+                <c:pt idx="1">
+                  <c:v>Demand</c:v>
+                </c:pt>
+                <c:pt idx="2">
+                  <c:v>Capital alloc.</c:v>
+                </c:pt>
+                <c:pt idx="3">
+                  <c:v>Runway</c:v>
+                </c:pt>
+                <c:pt idx="4">
+                  <c:v>Rev-Lindy</c:v>
+                </c:pt>
+              </c:strCache>
+            </c:strRef>
+          </c:cat>
+          <c:val>
+            <c:numRef>
+              <c:f>Sheet1!$E$2:$E$6</c:f>
+              <c:numCache>
+                <c:formatCode>General</c:formatCode>
+                <c:ptCount val="5"/>
+                <c:pt idx="0">
+                  <c:v>4.0</c:v>
+                </c:pt>
+                <c:pt idx="1">
+                  <c:v>7.0</c:v>
+                </c:pt>
+                <c:pt idx="2">
+                  <c:v>4.5</c:v>
+                </c:pt>
+                <c:pt idx="3">
+                  <c:v>6.0</c:v>
+                </c:pt>
+                <c:pt idx="4">
+                  <c:v>4.5</c:v>
+                </c:pt>
+              </c:numCache>
+            </c:numRef>
+          </c:val>
+        </c:ser>
+        <c:ser>
+          <c:idx val="4"/>
+          <c:order val="4"/>
+          <c:tx>
+            <c:strRef>
+              <c:f>Sheet1!$F$1</c:f>
+              <c:strCache>
+                <c:ptCount val="1"/>
+                <c:pt idx="0">
+                  <c:v>TPR</c:v>
+                </c:pt>
+              </c:strCache>
+            </c:strRef>
+          </c:tx>
+          <c:spPr>
+            <a:solidFill>
+              <a:srgbClr val="808080"/>
+            </a:solidFill>
+          </c:spPr>
+          <c:cat>
+            <c:strRef>
+              <c:f>Sheet1!$A$2:$A$6</c:f>
+              <c:strCache>
+                <c:ptCount val="5"/>
+                <c:pt idx="0">
+                  <c:v>Substitution</c:v>
+                </c:pt>
+                <c:pt idx="1">
+                  <c:v>Demand</c:v>
+                </c:pt>
+                <c:pt idx="2">
+                  <c:v>Capital alloc.</c:v>
+                </c:pt>
+                <c:pt idx="3">
+                  <c:v>Runway</c:v>
+                </c:pt>
+                <c:pt idx="4">
+                  <c:v>Rev-Lindy</c:v>
+                </c:pt>
+              </c:strCache>
+            </c:strRef>
+          </c:cat>
+          <c:val>
+            <c:numRef>
+              <c:f>Sheet1!$F$2:$F$6</c:f>
+              <c:numCache>
+                <c:formatCode>General</c:formatCode>
+                <c:ptCount val="5"/>
+                <c:pt idx="0">
+                  <c:v>2.5</c:v>
+                </c:pt>
+                <c:pt idx="1">
+                  <c:v>4.0</c:v>
+                </c:pt>
+                <c:pt idx="2">
+                  <c:v>4.0</c:v>
+                </c:pt>
+                <c:pt idx="3">
+                  <c:v>4.0</c:v>
+                </c:pt>
+                <c:pt idx="4">
+                  <c:v>3.5</c:v>
+                </c:pt>
+              </c:numCache>
+            </c:numRef>
+          </c:val>
+        </c:ser>
+        <c:ser>
+          <c:idx val="5"/>
+          <c:order val="5"/>
+          <c:tx>
+            <c:strRef>
+              <c:f>Sheet1!$G$1</c:f>
+              <c:strCache>
+                <c:ptCount val="1"/>
+                <c:pt idx="0">
+                  <c:v>Hanon</c:v>
+                </c:pt>
+              </c:strCache>
+            </c:strRef>
+          </c:tx>
+          <c:spPr>
+            <a:solidFill>
+              <a:srgbClr val="4FB3BF"/>
+            </a:solidFill>
+          </c:spPr>
+          <c:cat>
+            <c:strRef>
+              <c:f>Sheet1!$A$2:$A$6</c:f>
+              <c:strCache>
+                <c:ptCount val="5"/>
+                <c:pt idx="0">
+                  <c:v>Substitution</c:v>
+                </c:pt>
+                <c:pt idx="1">
+                  <c:v>Demand</c:v>
+                </c:pt>
+                <c:pt idx="2">
+                  <c:v>Capital alloc.</c:v>
+                </c:pt>
+                <c:pt idx="3">
+                  <c:v>Runway</c:v>
+                </c:pt>
+                <c:pt idx="4">
+                  <c:v>Rev-Lindy</c:v>
+                </c:pt>
+              </c:strCache>
+            </c:strRef>
+          </c:cat>
+          <c:val>
+            <c:numRef>
+              <c:f>Sheet1!$G$2:$G$6</c:f>
+              <c:numCache>
+                <c:formatCode>General</c:formatCode>
+                <c:ptCount val="5"/>
+                <c:pt idx="0">
+                  <c:v>7.0</c:v>
+                </c:pt>
+                <c:pt idx="1">
+                  <c:v>8.0</c:v>
+                </c:pt>
+                <c:pt idx="2">
+                  <c:v>2.0</c:v>
+                </c:pt>
+                <c:pt idx="3">
+                  <c:v>5.0</c:v>
+                </c:pt>
+                <c:pt idx="4">
+                  <c:v>5.0</c:v>
+                </c:pt>
+              </c:numCache>
+            </c:numRef>
+          </c:val>
+        </c:ser>
+        <c:axId val="-2068027336"/>
+        <c:axId val="-2113994440"/>
+      </c:barChart>
+      <c:catAx>
+        <c:axId val="-2068027336"/>
+        <c:scaling>
+          <c:orientation val="minMax"/>
+        </c:scaling>
+        <c:delete val="0"/>
+        <c:axPos val="b"/>
+        <c:majorTickMark val="out"/>
+        <c:minorTickMark val="none"/>
+        <c:tickLblPos val="nextTo"/>
+        <c:txPr>
+          <a:bodyPr/>
+          <a:lstStyle/>
+          <a:p>
+            <a:pPr>
+              <a:defRPr sz="900"/>
+            </a:pPr>
+          </a:p>
+        </c:txPr>
+        <c:crossAx val="-2113994440"/>
+        <c:crosses val="autoZero"/>
+        <c:auto val="1"/>
+        <c:lblAlgn val="ctr"/>
+        <c:lblOffset val="100"/>
+        <c:noMultiLvlLbl val="0"/>
+      </c:catAx>
+      <c:valAx>
+        <c:axId val="-2113994440"/>
+        <c:scaling>
+          <c:max val="10.0"/>
+        </c:scaling>
+        <c:delete val="0"/>
+        <c:axPos val="l"/>
+        <c:majorGridlines/>
+        <c:majorTickMark val="out"/>
+        <c:minorTickMark val="none"/>
+        <c:tickLblPos val="nextTo"/>
+        <c:crossAx val="-2068027336"/>
+        <c:crosses val="autoZero"/>
+      </c:valAx>
+    </c:plotArea>
+    <c:legend>
+      <c:legendPos val="b"/>
+      <c:overlay val="0"/>
+      <c:txPr>
+        <a:bodyPr/>
+        <a:lstStyle/>
+        <a:p>
+          <a:pPr>
+            <a:defRPr sz="900"/>
+          </a:pPr>
+        </a:p>
+      </c:txPr>
+    </c:legend>
+    <c:dispBlanksAs val="gap"/>
+  </c:chart>
+  <c:txPr>
+    <a:bodyPr/>
+    <a:lstStyle/>
+    <a:p>
+      <a:pPr>
+        <a:defRPr sz="1800"/>
+      </a:pPr>
+      <a:endParaRPr lang="en-US"/>
+    </a:p>
+  </c:txPr>
+  <c:externalData r:id="rId1">
+    <c:autoUpdate val="0"/>
+  </c:externalData>
+</c:chartSpace>
+</file>
+
 <file path=ppt/charts/chart2.xml><?xml version="1.0" encoding="utf-8"?>
 <c:chartSpace xmlns:c="http://schemas.openxmlformats.org/drawingml/2006/chart" xmlns:a="http://schemas.openxmlformats.org/drawingml/2006/main" xmlns:r="http://schemas.openxmlformats.org/officeDocument/2006/relationships">
   <c:date1904 val="0"/>
@@ -1849,6 +2858,624 @@
       </c:txPr>
     </c:legend>
     <c:dispBlanksAs val="gap"/>
+  </c:chart>
+  <c:txPr>
+    <a:bodyPr/>
+    <a:lstStyle/>
+    <a:p>
+      <a:pPr>
+        <a:defRPr sz="1800"/>
+      </a:pPr>
+      <a:endParaRPr lang="en-US"/>
+    </a:p>
+  </c:txPr>
+  <c:externalData r:id="rId1">
+    <c:autoUpdate val="0"/>
+  </c:externalData>
+</c:chartSpace>
+</file>
+
+<file path=ppt/charts/chart8.xml><?xml version="1.0" encoding="utf-8"?>
+<c:chartSpace xmlns:c="http://schemas.openxmlformats.org/drawingml/2006/chart" xmlns:a="http://schemas.openxmlformats.org/drawingml/2006/main" xmlns:r="http://schemas.openxmlformats.org/officeDocument/2006/relationships">
+  <c:date1904 val="0"/>
+  <c:chart>
+    <c:title>
+      <c:tx>
+        <c:rich>
+          <a:bodyPr/>
+          <a:lstStyle/>
+          <a:p>
+            <a:r>
+              <a:rPr sz="1300"/>
+              <a:t>Final weighted moat scores (TBK in red)</a:t>
+            </a:r>
+          </a:p>
+        </c:rich>
+      </c:tx>
+      <c:layout/>
+      <c:overlay val="0"/>
+    </c:title>
+    <c:autoTitleDeleted val="0"/>
+    <c:plotArea>
+      <c:barChart>
+        <c:barDir val="bar"/>
+        <c:grouping val="clustered"/>
+        <c:ser>
+          <c:idx val="0"/>
+          <c:order val="0"/>
+          <c:tx>
+            <c:strRef>
+              <c:f>Sheet1!$B$1</c:f>
+              <c:strCache>
+                <c:ptCount val="1"/>
+                <c:pt idx="0">
+                  <c:v>Moat score</c:v>
+                </c:pt>
+              </c:strCache>
+            </c:strRef>
+          </c:tx>
+          <c:spPr>
+            <a:solidFill>
+              <a:srgbClr val="1F4E78"/>
+            </a:solidFill>
+          </c:spPr>
+          <c:dPt>
+            <c:idx val="4"/>
+            <c:spPr>
+              <a:solidFill>
+                <a:srgbClr val="7F1D1D"/>
+              </a:solidFill>
+            </c:spPr>
+          </c:dPt>
+          <c:cat>
+            <c:strRef>
+              <c:f>Sheet1!$A$2:$A$14</c:f>
+              <c:strCache>
+                <c:ptCount val="13"/>
+                <c:pt idx="0">
+                  <c:v>Akebono</c:v>
+                </c:pt>
+                <c:pt idx="1">
+                  <c:v>Mikuni</c:v>
+                </c:pt>
+                <c:pt idx="2">
+                  <c:v>ZF</c:v>
+                </c:pt>
+                <c:pt idx="3">
+                  <c:v>Mahle</c:v>
+                </c:pt>
+                <c:pt idx="4">
+                  <c:v>TBK</c:v>
+                </c:pt>
+                <c:pt idx="5">
+                  <c:v>TPR</c:v>
+                </c:pt>
+                <c:pt idx="6">
+                  <c:v>Hanon</c:v>
+                </c:pt>
+                <c:pt idx="7">
+                  <c:v>Aisin</c:v>
+                </c:pt>
+                <c:pt idx="8">
+                  <c:v>SAF-Holland</c:v>
+                </c:pt>
+                <c:pt idx="9">
+                  <c:v>Cummins</c:v>
+                </c:pt>
+                <c:pt idx="10">
+                  <c:v>Brembo</c:v>
+                </c:pt>
+                <c:pt idx="11">
+                  <c:v>Concentric</c:v>
+                </c:pt>
+                <c:pt idx="12">
+                  <c:v>Knorr-Bremse</c:v>
+                </c:pt>
+              </c:strCache>
+            </c:strRef>
+          </c:cat>
+          <c:val>
+            <c:numRef>
+              <c:f>Sheet1!$B$2:$B$14</c:f>
+              <c:numCache>
+                <c:formatCode>General</c:formatCode>
+                <c:ptCount val="13"/>
+                <c:pt idx="0">
+                  <c:v>4.95</c:v>
+                </c:pt>
+                <c:pt idx="1">
+                  <c:v>5.0</c:v>
+                </c:pt>
+                <c:pt idx="2">
+                  <c:v>5.25</c:v>
+                </c:pt>
+                <c:pt idx="3">
+                  <c:v>5.35</c:v>
+                </c:pt>
+                <c:pt idx="4">
+                  <c:v>5.38</c:v>
+                </c:pt>
+                <c:pt idx="5">
+                  <c:v>5.45</c:v>
+                </c:pt>
+                <c:pt idx="6">
+                  <c:v>5.88</c:v>
+                </c:pt>
+                <c:pt idx="7">
+                  <c:v>6.25</c:v>
+                </c:pt>
+                <c:pt idx="8">
+                  <c:v>6.59</c:v>
+                </c:pt>
+                <c:pt idx="9">
+                  <c:v>6.73</c:v>
+                </c:pt>
+                <c:pt idx="10">
+                  <c:v>6.73</c:v>
+                </c:pt>
+                <c:pt idx="11">
+                  <c:v>6.98</c:v>
+                </c:pt>
+                <c:pt idx="12">
+                  <c:v>7.55</c:v>
+                </c:pt>
+              </c:numCache>
+            </c:numRef>
+          </c:val>
+        </c:ser>
+        <c:dLbls>
+          <c:numFmt formatCode="0.00" sourceLinked="0"/>
+          <c:txPr>
+            <a:bodyPr/>
+            <a:lstStyle/>
+            <a:p>
+              <a:pPr>
+                <a:defRPr sz="1000"/>
+              </a:pPr>
+            </a:p>
+          </c:txPr>
+          <c:showLegendKey val="0"/>
+          <c:showVal val="1"/>
+          <c:showCatName val="0"/>
+          <c:showSerName val="0"/>
+          <c:showPercent val="0"/>
+          <c:showBubbleSize val="0"/>
+          <c:showLeaderLines val="1"/>
+        </c:dLbls>
+        <c:axId val="-2068027336"/>
+        <c:axId val="-2113994440"/>
+      </c:barChart>
+      <c:catAx>
+        <c:axId val="-2068027336"/>
+        <c:scaling>
+          <c:orientation val="minMax"/>
+        </c:scaling>
+        <c:delete val="0"/>
+        <c:axPos val="l"/>
+        <c:majorTickMark val="out"/>
+        <c:minorTickMark val="none"/>
+        <c:tickLblPos val="nextTo"/>
+        <c:txPr>
+          <a:bodyPr/>
+          <a:lstStyle/>
+          <a:p>
+            <a:pPr>
+              <a:defRPr sz="1000"/>
+            </a:pPr>
+          </a:p>
+        </c:txPr>
+        <c:crossAx val="-2113994440"/>
+        <c:crosses val="autoZero"/>
+        <c:auto val="1"/>
+        <c:lblAlgn val="ctr"/>
+        <c:lblOffset val="100"/>
+        <c:noMultiLvlLbl val="0"/>
+      </c:catAx>
+      <c:valAx>
+        <c:axId val="-2113994440"/>
+        <c:scaling/>
+        <c:delete val="0"/>
+        <c:axPos val="b"/>
+        <c:majorGridlines/>
+        <c:majorTickMark val="out"/>
+        <c:minorTickMark val="none"/>
+        <c:tickLblPos val="nextTo"/>
+        <c:crossAx val="-2068027336"/>
+        <c:crosses val="autoZero"/>
+      </c:valAx>
+    </c:plotArea>
+    <c:dispBlanksAs val="gap"/>
+  </c:chart>
+  <c:txPr>
+    <a:bodyPr/>
+    <a:lstStyle/>
+    <a:p>
+      <a:pPr>
+        <a:defRPr sz="1800"/>
+      </a:pPr>
+      <a:endParaRPr lang="en-US"/>
+    </a:p>
+  </c:txPr>
+  <c:externalData r:id="rId1">
+    <c:autoUpdate val="0"/>
+  </c:externalData>
+</c:chartSpace>
+</file>
+
+<file path=ppt/charts/chart9.xml><?xml version="1.0" encoding="utf-8"?>
+<c:chartSpace xmlns:c="http://schemas.openxmlformats.org/drawingml/2006/chart" xmlns:a="http://schemas.openxmlformats.org/drawingml/2006/main" xmlns:r="http://schemas.openxmlformats.org/officeDocument/2006/relationships">
+  <c:date1904 val="0"/>
+  <c:roundedCorners val="0"/>
+  <mc:AlternateContent xmlns:mc="http://schemas.openxmlformats.org/markup-compatibility/2006">
+    <mc:Choice xmlns:c14="http://schemas.microsoft.com/office/drawing/2007/8/2/chart" Requires="c14">
+      <c14:style val="118"/>
+    </mc:Choice>
+    <mc:Fallback>
+      <c:style val="18"/>
+    </mc:Fallback>
+  </mc:AlternateContent>
+  <c:chart>
+    <c:autoTitleDeleted val="1"/>
+    <c:plotArea>
+      <c:layout/>
+      <c:radarChart>
+        <c:radarStyle val="marker"/>
+        <c:varyColors val="0"/>
+        <c:ser>
+          <c:idx val="0"/>
+          <c:order val="0"/>
+          <c:tx>
+            <c:strRef>
+              <c:f>Sheet1!$B$1</c:f>
+              <c:strCache>
+                <c:ptCount val="1"/>
+                <c:pt idx="0">
+                  <c:v>TBK</c:v>
+                </c:pt>
+              </c:strCache>
+            </c:strRef>
+          </c:tx>
+          <c:spPr>
+            <a:ln w="28575">
+              <a:solidFill>
+                <a:srgbClr val="7F1D1D"/>
+              </a:solidFill>
+            </a:ln>
+          </c:spPr>
+          <c:cat>
+            <c:strRef>
+              <c:f>Sheet1!$A$2:$A$11</c:f>
+              <c:strCache>
+                <c:ptCount val="10"/>
+                <c:pt idx="0">
+                  <c:v>Criticality</c:v>
+                </c:pt>
+                <c:pt idx="1">
+                  <c:v>Standard premium</c:v>
+                </c:pt>
+                <c:pt idx="2">
+                  <c:v>Market hegemony</c:v>
+                </c:pt>
+                <c:pt idx="3">
+                  <c:v>Ecosystem</c:v>
+                </c:pt>
+                <c:pt idx="4">
+                  <c:v>Lifecycle cost adv.</c:v>
+                </c:pt>
+                <c:pt idx="5">
+                  <c:v>Substitution resistance</c:v>
+                </c:pt>
+                <c:pt idx="6">
+                  <c:v>Demand horizon</c:v>
+                </c:pt>
+                <c:pt idx="7">
+                  <c:v>Capital allocation</c:v>
+                </c:pt>
+                <c:pt idx="8">
+                  <c:v>Reinvestment runway</c:v>
+                </c:pt>
+                <c:pt idx="9">
+                  <c:v>Reverse- Lindy</c:v>
+                </c:pt>
+              </c:strCache>
+            </c:strRef>
+          </c:cat>
+          <c:val>
+            <c:numRef>
+              <c:f>Sheet1!$B$2:$B$11</c:f>
+              <c:numCache>
+                <c:formatCode>General</c:formatCode>
+                <c:ptCount val="10"/>
+                <c:pt idx="0">
+                  <c:v>7.5</c:v>
+                </c:pt>
+                <c:pt idx="1">
+                  <c:v>6.0</c:v>
+                </c:pt>
+                <c:pt idx="2">
+                  <c:v>8.0</c:v>
+                </c:pt>
+                <c:pt idx="3">
+                  <c:v>2.0</c:v>
+                </c:pt>
+                <c:pt idx="4">
+                  <c:v>3.0</c:v>
+                </c:pt>
+                <c:pt idx="5">
+                  <c:v>3.5</c:v>
+                </c:pt>
+                <c:pt idx="6">
+                  <c:v>7.0</c:v>
+                </c:pt>
+                <c:pt idx="7">
+                  <c:v>2.0</c:v>
+                </c:pt>
+                <c:pt idx="8">
+                  <c:v>3.0</c:v>
+                </c:pt>
+                <c:pt idx="9">
+                  <c:v>4.0</c:v>
+                </c:pt>
+              </c:numCache>
+            </c:numRef>
+          </c:val>
+          <c:smooth val="0"/>
+        </c:ser>
+        <c:ser>
+          <c:idx val="1"/>
+          <c:order val="1"/>
+          <c:tx>
+            <c:strRef>
+              <c:f>Sheet1!$C$1</c:f>
+              <c:strCache>
+                <c:ptCount val="1"/>
+                <c:pt idx="0">
+                  <c:v>Concentric</c:v>
+                </c:pt>
+              </c:strCache>
+            </c:strRef>
+          </c:tx>
+          <c:spPr>
+            <a:ln w="28575">
+              <a:solidFill>
+                <a:srgbClr val="548235"/>
+              </a:solidFill>
+            </a:ln>
+          </c:spPr>
+          <c:cat>
+            <c:strRef>
+              <c:f>Sheet1!$A$2:$A$11</c:f>
+              <c:strCache>
+                <c:ptCount val="10"/>
+                <c:pt idx="0">
+                  <c:v>Criticality</c:v>
+                </c:pt>
+                <c:pt idx="1">
+                  <c:v>Standard premium</c:v>
+                </c:pt>
+                <c:pt idx="2">
+                  <c:v>Market hegemony</c:v>
+                </c:pt>
+                <c:pt idx="3">
+                  <c:v>Ecosystem</c:v>
+                </c:pt>
+                <c:pt idx="4">
+                  <c:v>Lifecycle cost adv.</c:v>
+                </c:pt>
+                <c:pt idx="5">
+                  <c:v>Substitution resistance</c:v>
+                </c:pt>
+                <c:pt idx="6">
+                  <c:v>Demand horizon</c:v>
+                </c:pt>
+                <c:pt idx="7">
+                  <c:v>Capital allocation</c:v>
+                </c:pt>
+                <c:pt idx="8">
+                  <c:v>Reinvestment runway</c:v>
+                </c:pt>
+                <c:pt idx="9">
+                  <c:v>Reverse- Lindy</c:v>
+                </c:pt>
+              </c:strCache>
+            </c:strRef>
+          </c:cat>
+          <c:val>
+            <c:numRef>
+              <c:f>Sheet1!$C$2:$C$11</c:f>
+              <c:numCache>
+                <c:formatCode>General</c:formatCode>
+                <c:ptCount val="10"/>
+                <c:pt idx="0">
+                  <c:v>7.0</c:v>
+                </c:pt>
+                <c:pt idx="1">
+                  <c:v>6.0</c:v>
+                </c:pt>
+                <c:pt idx="2">
+                  <c:v>7.5</c:v>
+                </c:pt>
+                <c:pt idx="3">
+                  <c:v>2.5</c:v>
+                </c:pt>
+                <c:pt idx="4">
+                  <c:v>7.0</c:v>
+                </c:pt>
+                <c:pt idx="5">
+                  <c:v>5.0</c:v>
+                </c:pt>
+                <c:pt idx="6">
+                  <c:v>7.5</c:v>
+                </c:pt>
+                <c:pt idx="7">
+                  <c:v>7.5</c:v>
+                </c:pt>
+                <c:pt idx="8">
+                  <c:v>7.0</c:v>
+                </c:pt>
+                <c:pt idx="9">
+                  <c:v>5.5</c:v>
+                </c:pt>
+              </c:numCache>
+            </c:numRef>
+          </c:val>
+          <c:smooth val="0"/>
+        </c:ser>
+        <c:ser>
+          <c:idx val="2"/>
+          <c:order val="2"/>
+          <c:tx>
+            <c:strRef>
+              <c:f>Sheet1!$D$1</c:f>
+              <c:strCache>
+                <c:ptCount val="1"/>
+                <c:pt idx="0">
+                  <c:v>Peer avg (6 scored)</c:v>
+                </c:pt>
+              </c:strCache>
+            </c:strRef>
+          </c:tx>
+          <c:spPr>
+            <a:ln w="28575">
+              <a:solidFill>
+                <a:srgbClr val="595959"/>
+              </a:solidFill>
+            </a:ln>
+          </c:spPr>
+          <c:cat>
+            <c:strRef>
+              <c:f>Sheet1!$A$2:$A$11</c:f>
+              <c:strCache>
+                <c:ptCount val="10"/>
+                <c:pt idx="0">
+                  <c:v>Criticality</c:v>
+                </c:pt>
+                <c:pt idx="1">
+                  <c:v>Standard premium</c:v>
+                </c:pt>
+                <c:pt idx="2">
+                  <c:v>Market hegemony</c:v>
+                </c:pt>
+                <c:pt idx="3">
+                  <c:v>Ecosystem</c:v>
+                </c:pt>
+                <c:pt idx="4">
+                  <c:v>Lifecycle cost adv.</c:v>
+                </c:pt>
+                <c:pt idx="5">
+                  <c:v>Substitution resistance</c:v>
+                </c:pt>
+                <c:pt idx="6">
+                  <c:v>Demand horizon</c:v>
+                </c:pt>
+                <c:pt idx="7">
+                  <c:v>Capital allocation</c:v>
+                </c:pt>
+                <c:pt idx="8">
+                  <c:v>Reinvestment runway</c:v>
+                </c:pt>
+                <c:pt idx="9">
+                  <c:v>Reverse- Lindy</c:v>
+                </c:pt>
+              </c:strCache>
+            </c:strRef>
+          </c:cat>
+          <c:val>
+            <c:numRef>
+              <c:f>Sheet1!$D$2:$D$11</c:f>
+              <c:numCache>
+                <c:formatCode>General</c:formatCode>
+                <c:ptCount val="10"/>
+                <c:pt idx="0">
+                  <c:v>7.17</c:v>
+                </c:pt>
+                <c:pt idx="1">
+                  <c:v>5.92</c:v>
+                </c:pt>
+                <c:pt idx="2">
+                  <c:v>6.58</c:v>
+                </c:pt>
+                <c:pt idx="3">
+                  <c:v>2.67</c:v>
+                </c:pt>
+                <c:pt idx="4">
+                  <c:v>4.75</c:v>
+                </c:pt>
+                <c:pt idx="5">
+                  <c:v>4.17</c:v>
+                </c:pt>
+                <c:pt idx="6">
+                  <c:v>6.75</c:v>
+                </c:pt>
+                <c:pt idx="7">
+                  <c:v>3.75</c:v>
+                </c:pt>
+                <c:pt idx="8">
+                  <c:v>5.08</c:v>
+                </c:pt>
+                <c:pt idx="9">
+                  <c:v>4.5</c:v>
+                </c:pt>
+              </c:numCache>
+            </c:numRef>
+          </c:val>
+          <c:smooth val="0"/>
+        </c:ser>
+        <c:axId val="2073612648"/>
+        <c:axId val="-2112772216"/>
+      </c:radarChart>
+      <c:catAx>
+        <c:axId val="2073612648"/>
+        <c:scaling>
+          <c:orientation val="minMax"/>
+        </c:scaling>
+        <c:delete val="0"/>
+        <c:axPos val="b"/>
+        <c:majorGridlines/>
+        <c:numFmt formatCode="m/d/yy" sourceLinked="1"/>
+        <c:majorTickMark val="out"/>
+        <c:minorTickMark val="none"/>
+        <c:tickLblPos val="nextTo"/>
+        <c:crossAx val="-2112772216"/>
+        <c:crosses val="autoZero"/>
+        <c:auto val="1"/>
+        <c:lblAlgn val="ctr"/>
+        <c:lblOffset val="100"/>
+        <c:noMultiLvlLbl val="0"/>
+      </c:catAx>
+      <c:valAx>
+        <c:axId val="-2112772216"/>
+        <c:scaling>
+          <c:orientation val="minMax"/>
+        </c:scaling>
+        <c:delete val="0"/>
+        <c:axPos val="l"/>
+        <c:majorGridlines/>
+        <c:numFmt formatCode="General" sourceLinked="1"/>
+        <c:majorTickMark val="cross"/>
+        <c:minorTickMark val="none"/>
+        <c:tickLblPos val="nextTo"/>
+        <c:crossAx val="2073612648"/>
+        <c:crosses val="autoZero"/>
+        <c:crossBetween val="between"/>
+      </c:valAx>
+    </c:plotArea>
+    <c:legend>
+      <c:legendPos val="b"/>
+      <c:overlay val="0"/>
+      <c:txPr>
+        <a:bodyPr/>
+        <a:lstStyle/>
+        <a:p>
+          <a:pPr>
+            <a:defRPr sz="1100"/>
+          </a:pPr>
+        </a:p>
+      </c:txPr>
+    </c:legend>
+    <c:plotVisOnly val="1"/>
+    <c:dispBlanksAs val="gap"/>
+    <c:showDLblsOverMax val="0"/>
   </c:chart>
   <c:txPr>
     <a:bodyPr/>
@@ -6491,7 +8118,7 @@
                   <a:srgbClr val="FFFFFF"/>
                 </a:solidFill>
               </a:rPr>
-              <a:t>Research quality &amp; methodology notes</a:t>
+              <a:t>Product evaluation I: external quality &amp; service evidence</a:t>
             </a:r>
           </a:p>
         </p:txBody>
@@ -6525,7 +8152,7 @@
                   <a:srgbClr val="595959"/>
                 </a:solidFill>
               </a:rPr>
-              <a:t>How this material was produced, verified, and where its limits are</a:t>
+              <a:t>Evidence hierarchy: NHTSA recalls (supplier named by law) &gt; OEM-granted awards &gt; independent surveys &gt; patents &gt; self-claims. Japan's MLIT does not name suppliers</a:t>
             </a:r>
           </a:p>
         </p:txBody>
@@ -6539,7 +8166,7 @@
         <p:spPr>
           <a:xfrm>
             <a:off x="457200" y="1417320"/>
-            <a:ext cx="5577840" cy="2377440"/>
+            <a:ext cx="5577840" cy="2286000"/>
           </a:xfrm>
           <a:prstGeom prst="rect">
             <a:avLst/>
@@ -6565,7 +8192,7 @@
                   <a:srgbClr val="1F4E78"/>
                 </a:solidFill>
               </a:rPr>
-              <a:t>Method &amp; confidence tiers</a:t>
+              <a:t>The validated leaders</a:t>
             </a:r>
           </a:p>
           <a:p>
@@ -6580,7 +8207,7 @@
                   <a:srgbClr val="202020"/>
                 </a:solidFill>
               </a:rPr>
-              <a:t>Two deep-research studies (brake market; pump market): 5 parallel search angles each, claims extracted as falsifiable statements, then ADVERSARIAL VERIFICATION — 3 independent voters per claim set, actively attempting refutation</a:t>
+              <a:t>Knorr-Bremse/Bendix: PACCAR supplier-performance award 6 consecutive yrs; 3 plants on PACCAR's &lt;=10 defects-per-million list; ETM 'Best Brand - Brakes' (German fleet/driver vote) 19 YEARS RUNNING; ~85% of NA air-disc wheel ends</a:t>
             </a:r>
           </a:p>
           <a:p>
@@ -6595,7 +8222,7 @@
                   <a:srgbClr val="202020"/>
                 </a:solidFill>
               </a:rPr>
-              <a:t>Tier 1: peer-reviewed papers, primary regulation, audited filings (TBK tanshin, Concentric AR2023, SEC)</a:t>
+              <a:t>Meritor/Cummins: Daimler 'Masters of Quality' + 2020 global quality award ('1.3M axles/brakes at low defect rate'); DTNA EXTENDED its ADB contract — revealed preference</a:t>
             </a:r>
           </a:p>
           <a:p>
@@ -6610,22 +8237,7 @@
                   <a:srgbClr val="202020"/>
                 </a:solidFill>
               </a:rPr>
-              <a:t>Tier 2: government data and multi-source-verified company/industry figures</a:t>
-            </a:r>
-          </a:p>
-          <a:p>
-            <a:pPr>
-              <a:spcBef>
-                <a:spcPts val="400"/>
-              </a:spcBef>
-            </a:pPr>
-            <a:r>
-              <a:rPr sz="1100">
-                <a:solidFill>
-                  <a:srgbClr val="202020"/>
-                </a:solidFill>
-              </a:rPr>
-              <a:t>Tier 3: single-source estimates and market research — always labeled in the underlying documents</a:t>
+              <a:t>Brembo: all 10 F1 teams; AMS brake-brand vote 11 of 13 years</a:t>
             </a:r>
           </a:p>
         </p:txBody>
@@ -6639,7 +8251,7 @@
         <p:spPr>
           <a:xfrm>
             <a:off x="6217920" y="1417320"/>
-            <a:ext cx="5532120" cy="2377440"/>
+            <a:ext cx="5532120" cy="2286000"/>
           </a:xfrm>
           <a:prstGeom prst="rect">
             <a:avLst/>
@@ -6665,7 +8277,7 @@
                   <a:srgbClr val="7F1D1D"/>
                 </a:solidFill>
               </a:rPr>
-              <a:t>Corrections made by verification (transparency)</a:t>
+              <a:t>The adverse records</a:t>
             </a:r>
           </a:p>
           <a:p>
@@ -6680,7 +8292,7 @@
                   <a:srgbClr val="202020"/>
                 </a:solidFill>
               </a:rPr>
-              <a:t>TBK's famous '~70% share' belongs to its WATER PUMPS, not brakes (brakes: 'top share', unaudited)</a:t>
+              <a:t>Bendix: 2019 ADB22X caliper recall (fire risk); 2024-25 EC-80 ECU recall, 442k units (software fix) — scale produces both install base and recalls</a:t>
             </a:r>
           </a:p>
           <a:p>
@@ -6695,7 +8307,7 @@
                   <a:srgbClr val="202020"/>
                 </a:solidFill>
               </a:rPr>
-              <a:t>Euro 7 heavy-duty brake-dust limits apply ~2030, not 2028/29 (those are exhaust dates)</a:t>
+              <a:t>Haldex: lost a WILLFUL patent-infringement verdict to Bendix (copied its ADB); two modest component recalls</a:t>
             </a:r>
           </a:p>
           <a:p>
@@ -6710,52 +8322,7 @@
                   <a:srgbClr val="202020"/>
                 </a:solidFill>
               </a:rPr>
-              <a:t>Concentric R&amp;D = 2.3% of sales per AR2023 — the circulating '~5%' was wrong</a:t>
-            </a:r>
-          </a:p>
-          <a:p>
-            <a:pPr>
-              <a:spcBef>
-                <a:spcPts val="400"/>
-              </a:spcBef>
-            </a:pPr>
-            <a:r>
-              <a:rPr sz="1100">
-                <a:solidFill>
-                  <a:srgbClr val="202020"/>
-                </a:solidFill>
-              </a:rPr>
-              <a:t>'85-90% of Asia on drums' could not be corroborated — stated as 'majority' only</a:t>
-            </a:r>
-          </a:p>
-          <a:p>
-            <a:pPr>
-              <a:spcBef>
-                <a:spcPts val="400"/>
-              </a:spcBef>
-            </a:pPr>
-            <a:r>
-              <a:rPr sz="1100">
-                <a:solidFill>
-                  <a:srgbClr val="202020"/>
-                </a:solidFill>
-              </a:rPr>
-              <a:t>A claimed TBK-Mikuni alliance is erroneous (conflation with Mikuni-Suzuki)</a:t>
-            </a:r>
-          </a:p>
-          <a:p>
-            <a:pPr>
-              <a:spcBef>
-                <a:spcPts val="400"/>
-              </a:spcBef>
-            </a:pPr>
-            <a:r>
-              <a:rPr sz="1100">
-                <a:solidFill>
-                  <a:srgbClr val="202020"/>
-                </a:solidFill>
-              </a:rPr>
-              <a:t>Aggregator's 'TBK FY26 ¥138M profit' contradicted by the audited tanshin (-¥131M)</a:t>
+              <a:t>Akebono: the only Japanese supplier with documented adverse events — 2015 GM recall of its brake products + 2019-21 inspection-data falsification (no recall, governance black mark)</a:t>
             </a:r>
           </a:p>
         </p:txBody>
@@ -6768,8 +8335,8 @@
         </p:nvSpPr>
         <p:spPr>
           <a:xfrm>
-            <a:off x="457200" y="3931920"/>
-            <a:ext cx="5577840" cy="2377440"/>
+            <a:off x="457200" y="3840480"/>
+            <a:ext cx="5577840" cy="2240280"/>
           </a:xfrm>
           <a:prstGeom prst="rect">
             <a:avLst/>
@@ -6795,7 +8362,7 @@
                   <a:srgbClr val="1F4E78"/>
                 </a:solidFill>
               </a:rPr>
-              <a:t>Known limitations</a:t>
+              <a:t>TBK: externally invisible — in BOTH directions</a:t>
             </a:r>
           </a:p>
           <a:p>
@@ -6810,7 +8377,7 @@
                   <a:srgbClr val="202020"/>
                 </a:solidFill>
               </a:rPr>
-              <a:t>Full-text retrieval was blocked in the research environment: paywalled SAE/journal numbers rest on abstracts; flagged where unverified</a:t>
+              <a:t>No OEM award findable, no survey presence, no service network beyond Japan/Thailand</a:t>
             </a:r>
           </a:p>
           <a:p>
@@ -6825,7 +8392,7 @@
                   <a:srgbClr val="202020"/>
                 </a:solidFill>
               </a:rPr>
-              <a:t>No peer discloses brake-only or pump-only R&amp;D, gross profit, or segment margins — group figures used; ratios are the valid comparison</a:t>
+              <a:t>BUT also: no recall, no scandal, no misconduct report in Japanese-language search — a meaningful null in a scandal-rich industry (cf. Akebono)</a:t>
             </a:r>
           </a:p>
           <a:p>
@@ -6840,7 +8407,7 @@
                   <a:srgbClr val="202020"/>
                 </a:solidFill>
               </a:rPr>
-              <a:t>Accounting bases differ: German/Italian nature-of-expense 'gross margins' (Knorr ~50%, Brembo ~50%) are materials-only and EXCLUDED from margin comparisons; JGAAP fully expenses R&amp;D while IFRS peers capitalize part</a:t>
+              <a:t>75 years inside Isuzu/Fuso/Hino = quality is probably fine; 'probably fine, unproven' is the ceiling the evidence supports</a:t>
             </a:r>
           </a:p>
           <a:p>
@@ -6855,7 +8422,7 @@
                   <a:srgbClr val="202020"/>
                 </a:solidFill>
               </a:rPr>
-              <a:t>TBK FY3/26 division split estimated from FY3/25 (yuho due June 2026); USD at ¥150/USD</a:t>
+              <a:t>Dataset moat scores align: Knorr 7.55 top, Akebono 4.95 bottom — TBK was unscored: literally unmeasurable from outside</a:t>
             </a:r>
           </a:p>
         </p:txBody>
@@ -6868,8 +8435,8 @@
         </p:nvSpPr>
         <p:spPr>
           <a:xfrm>
-            <a:off x="6217920" y="3931920"/>
-            <a:ext cx="5532120" cy="2377440"/>
+            <a:off x="6217920" y="3840480"/>
+            <a:ext cx="5532120" cy="2240280"/>
           </a:xfrm>
           <a:prstGeom prst="rect">
             <a:avLst/>
@@ -6895,7 +8462,7 @@
                   <a:srgbClr val="548235"/>
                 </a:solidFill>
               </a:rPr>
-              <a:t>Data hierarchy &amp; framework constructs</a:t>
+              <a:t>TCO &amp; service: only proxies exist</a:t>
             </a:r>
           </a:p>
           <a:p>
@@ -6910,7 +8477,7 @@
                   <a:srgbClr val="202020"/>
                 </a:solidFill>
               </a:rPr>
-              <a:t>Where sources conflict, the audited primary document wins (e.g., TBK tanshin over aggregators)</a:t>
+              <a:t>Brand-level TCO data is NOT public (fleets don't publish; IMR studies paywalled) — standing must be inferred:</a:t>
             </a:r>
           </a:p>
           <a:p>
@@ -6925,7 +8492,7 @@
                   <a:srgbClr val="202020"/>
                 </a:solidFill>
               </a:rPr>
-              <a:t>Consistent-basis peer metrics (margins, R&amp;D, ROIC) come from the user-provided 10-year/LTM peer dataset — same methodology across all 7 companies</a:t>
+              <a:t>Install base: Bendix 20M+ ADBs in field | Contract renewals: Meritor-DTNA extension | Networks: Knorr's pan-EMEA certified workshop network vs TBK's Japan+Thailand footprint</a:t>
             </a:r>
           </a:p>
           <a:p>
@@ -6940,22 +8507,41 @@
                   <a:srgbClr val="202020"/>
                 </a:solidFill>
               </a:rPr>
-              <a:t>ROIIC (ROICm) = return on incremental invested capital over the stated horizon; RR = reinvestment rate; R&amp;D Capital Base = cumulative R&amp;D capitalized/amortized per the dataset framework — a modeling construct, not a balance-sheet line</a:t>
-            </a:r>
-          </a:p>
-          <a:p>
-            <a:pPr>
-              <a:spcBef>
-                <a:spcPts val="400"/>
-              </a:spcBef>
-            </a:pPr>
-            <a:r>
-              <a:rPr sz="1100">
-                <a:solidFill>
-                  <a:srgbClr val="202020"/>
-                </a:solidFill>
-              </a:rPr>
-              <a:t>Scenario pages state assumptions on-slide; peer-margin scenarios use comparable reporters only</a:t>
+              <a:t>On every proxy the systems players lead — and TBK does not appear</a:t>
+            </a:r>
+          </a:p>
+        </p:txBody>
+      </p:sp>
+      <p:sp>
+        <p:nvSpPr>
+          <p:cNvPr id="8" name="TextBox 7"/>
+          <p:cNvSpPr txBox="1"/>
+          <p:nvPr/>
+        </p:nvSpPr>
+        <p:spPr>
+          <a:xfrm>
+            <a:off x="457200" y="6172200"/>
+            <a:ext cx="11247120" cy="548640"/>
+          </a:xfrm>
+          <a:prstGeom prst="rect">
+            <a:avLst/>
+          </a:prstGeom>
+          <a:noFill/>
+        </p:spPr>
+        <p:txBody>
+          <a:bodyPr wrap="square">
+            <a:spAutoFit/>
+          </a:bodyPr>
+          <a:lstStyle/>
+          <a:p>
+            <a:pPr algn="l"/>
+            <a:r>
+              <a:rPr sz="1200" b="1">
+                <a:solidFill>
+                  <a:srgbClr val="1F4E78"/>
+                </a:solidFill>
+              </a:rPr>
+              <a:t>Strategic point: TBK's quality reputation is held entirely inside the keiretsu — like its market share, it cannot be sold to new customers. Making quality externally legible (awards, certifications, published data) is a cheap, necessary complement to the R&amp;D program.</a:t>
             </a:r>
           </a:p>
         </p:txBody>
@@ -7008,7 +8594,7 @@
                   <a:srgbClr val="FFFFFF"/>
                 </a:solidFill>
               </a:rPr>
-              <a:t>Sources</a:t>
+              <a:t>Product evaluation II: innovation output</a:t>
             </a:r>
           </a:p>
         </p:txBody>
@@ -7021,8 +8607,42 @@
         </p:nvSpPr>
         <p:spPr>
           <a:xfrm>
-            <a:off x="457200" y="1188720"/>
-            <a:ext cx="5577840" cy="2606040"/>
+            <a:off x="457200" y="914400"/>
+            <a:ext cx="11247120" cy="365760"/>
+          </a:xfrm>
+          <a:prstGeom prst="rect">
+            <a:avLst/>
+          </a:prstGeom>
+          <a:noFill/>
+        </p:spPr>
+        <p:txBody>
+          <a:bodyPr wrap="square">
+            <a:spAutoFit/>
+          </a:bodyPr>
+          <a:lstStyle/>
+          <a:p>
+            <a:pPr algn="l"/>
+            <a:r>
+              <a:rPr sz="1200" b="0">
+                <a:solidFill>
+                  <a:srgbClr val="595959"/>
+                </a:solidFill>
+              </a:rPr>
+              <a:t>Patents, documented product firsts, and technical-society awards — the externally visible output of R&amp;D</a:t>
+            </a:r>
+          </a:p>
+        </p:txBody>
+      </p:sp>
+      <p:sp>
+        <p:nvSpPr>
+          <p:cNvPr id="4" name="TextBox 3"/>
+          <p:cNvSpPr txBox="1"/>
+          <p:nvPr/>
+        </p:nvSpPr>
+        <p:spPr>
+          <a:xfrm>
+            <a:off x="457200" y="1417320"/>
+            <a:ext cx="5577840" cy="2286000"/>
           </a:xfrm>
           <a:prstGeom prst="rect">
             <a:avLst/>
@@ -7048,96 +8668,241 @@
                   <a:srgbClr val="1F4E78"/>
                 </a:solidFill>
               </a:rPr>
-              <a:t>Primary &amp; audited</a:t>
-            </a:r>
-          </a:p>
-          <a:p>
-            <a:pPr>
-              <a:spcBef>
-                <a:spcPts val="400"/>
-              </a:spcBef>
-            </a:pPr>
-            <a:r>
-              <a:rPr sz="1000">
-                <a:solidFill>
-                  <a:srgbClr val="202020"/>
-                </a:solidFill>
-              </a:rPr>
-              <a:t>TBK Co., Ltd. — Consolidated Financial Results FY ended 31 Mar 2026 (tanshin, 14 May 2026); securities-report risk factors (有価証券報告書 via kitaishihon/irbank)</a:t>
-            </a:r>
-          </a:p>
-          <a:p>
-            <a:pPr>
-              <a:spcBef>
-                <a:spcPts val="400"/>
-              </a:spcBef>
-            </a:pPr>
-            <a:r>
-              <a:rPr sz="1000">
-                <a:solidFill>
-                  <a:srgbClr val="202020"/>
-                </a:solidFill>
-              </a:rPr>
-              <a:t>Concentric AB — Annual Report 2023 (income statement, balance sheet, 5-year key figures)</a:t>
-            </a:r>
-          </a:p>
-          <a:p>
-            <a:pPr>
-              <a:spcBef>
-                <a:spcPts val="400"/>
-              </a:spcBef>
-            </a:pPr>
-            <a:r>
-              <a:rPr sz="1000">
-                <a:solidFill>
-                  <a:srgbClr val="202020"/>
-                </a:solidFill>
-              </a:rPr>
-              <a:t>User-provided datasets: TBK 10-year financials; Peers 10-year; Peers LTM (7 companies, consistent methodology)</a:t>
-            </a:r>
-          </a:p>
-          <a:p>
-            <a:pPr>
-              <a:spcBef>
-                <a:spcPts val="400"/>
-              </a:spcBef>
-            </a:pPr>
-            <a:r>
-              <a:rPr sz="1000">
-                <a:solidFill>
-                  <a:srgbClr val="202020"/>
-                </a:solidFill>
-              </a:rPr>
-              <a:t>SEC filings: Cummins 10-K/10-Q/8-K (FY2024-25); WABCO &amp; Meritor merger 8-Ks</a:t>
-            </a:r>
-          </a:p>
-          <a:p>
-            <a:pPr>
-              <a:spcBef>
-                <a:spcPts val="400"/>
-              </a:spcBef>
-            </a:pPr>
-            <a:r>
-              <a:rPr sz="1000">
-                <a:solidFill>
-                  <a:srgbClr val="202020"/>
-                </a:solidFill>
-              </a:rPr>
-              <a:t>Company releases: Knorr-Bremse FY2023-25; ZF AR2024-25; SAF-Holland AR2024; Mahle AR2024-25; Haldex year-end 2021; Rheinmetall FY2025 + AEQUITA divestment (3 Jun 2026); Circle BidCo/A.P. Møller offer documents (2024); Brakes India-TBK alliance (Dec 2025)</a:t>
-            </a:r>
-          </a:p>
-        </p:txBody>
-      </p:sp>
-      <p:sp>
-        <p:nvSpPr>
-          <p:cNvPr id="4" name="TextBox 3"/>
+              <a:t>The patent gap (independent registries)</a:t>
+            </a:r>
+          </a:p>
+          <a:p>
+            <a:pPr>
+              <a:spcBef>
+                <a:spcPts val="400"/>
+              </a:spcBef>
+            </a:pPr>
+            <a:r>
+              <a:rPr sz="1100">
+                <a:solidFill>
+                  <a:srgbClr val="202020"/>
+                </a:solidFill>
+              </a:rPr>
+              <a:t>Knorr-Bremse: ~2,900 patent families / 10,900+ patents (~7,500 in the truck division)</a:t>
+            </a:r>
+          </a:p>
+          <a:p>
+            <a:pPr>
+              <a:spcBef>
+                <a:spcPts val="400"/>
+              </a:spcBef>
+            </a:pPr>
+            <a:r>
+              <a:rPr sz="1100">
+                <a:solidFill>
+                  <a:srgbClr val="202020"/>
+                </a:solidFill>
+              </a:rPr>
+              <a:t>Aisin: ~680 JP applications/yr; Clarivate Top-100 Global Innovator 7 consecutive years</a:t>
+            </a:r>
+          </a:p>
+          <a:p>
+            <a:pPr>
+              <a:spcBef>
+                <a:spcPts val="400"/>
+              </a:spcBef>
+            </a:pPr>
+            <a:r>
+              <a:rPr sz="1100">
+                <a:solidFill>
+                  <a:srgbClr val="202020"/>
+                </a:solidFill>
+              </a:rPr>
+              <a:t>Akebono: ~321 US-registered patents</a:t>
+            </a:r>
+          </a:p>
+          <a:p>
+            <a:pPr>
+              <a:spcBef>
+                <a:spcPts val="400"/>
+              </a:spcBef>
+            </a:pPr>
+            <a:r>
+              <a:rPr sz="1100">
+                <a:solidFill>
+                  <a:srgbClr val="202020"/>
+                </a:solidFill>
+              </a:rPr>
+              <a:t>Mikuni: e-oil-pump fault-detection patents — its BEV-truck win is engineering-backed</a:t>
+            </a:r>
+          </a:p>
+          <a:p>
+            <a:pPr>
+              <a:spcBef>
+                <a:spcPts val="400"/>
+              </a:spcBef>
+            </a:pPr>
+            <a:r>
+              <a:rPr sz="1100">
+                <a:solidFill>
+                  <a:srgbClr val="202020"/>
+                </a:solidFill>
+              </a:rPr>
+              <a:t>TBK: 2-3 patent GRANTS PER YEAR — two to three orders of magnitude below the leaders.</a:t>
+            </a:r>
+          </a:p>
+          <a:p>
+            <a:pPr>
+              <a:spcBef>
+                <a:spcPts val="400"/>
+              </a:spcBef>
+            </a:pPr>
+            <a:r>
+              <a:rPr sz="1100">
+                <a:solidFill>
+                  <a:srgbClr val="202020"/>
+                </a:solidFill>
+              </a:rPr>
+              <a:t>Independently confirms the capitalized-R&amp;D finding ($43M vs $2.6-5.6bn) from a different data source</a:t>
+            </a:r>
+          </a:p>
+        </p:txBody>
+      </p:sp>
+      <p:sp>
+        <p:nvSpPr>
+          <p:cNvPr id="5" name="TextBox 4"/>
           <p:cNvSpPr txBox="1"/>
           <p:nvPr/>
         </p:nvSpPr>
         <p:spPr>
           <a:xfrm>
-            <a:off x="6217920" y="1188720"/>
-            <a:ext cx="5532120" cy="2606040"/>
+            <a:off x="6217920" y="1417320"/>
+            <a:ext cx="5532120" cy="2286000"/>
+          </a:xfrm>
+          <a:prstGeom prst="rect">
+            <a:avLst/>
+          </a:prstGeom>
+          <a:solidFill>
+            <a:srgbClr val="F2F2F2"/>
+          </a:solidFill>
+          <a:ln w="15875">
+            <a:solidFill>
+              <a:srgbClr val="548235"/>
+            </a:solidFill>
+          </a:ln>
+        </p:spPr>
+        <p:txBody>
+          <a:bodyPr wrap="square" lIns="137160" rIns="137160" tIns="109728">
+            <a:spAutoFit/>
+          </a:bodyPr>
+          <a:lstStyle/>
+          <a:p>
+            <a:r>
+              <a:rPr sz="1500" b="1">
+                <a:solidFill>
+                  <a:srgbClr val="548235"/>
+                </a:solidFill>
+              </a:rPr>
+              <a:t>Documented product firsts</a:t>
+            </a:r>
+          </a:p>
+          <a:p>
+            <a:pPr>
+              <a:spcBef>
+                <a:spcPts val="400"/>
+              </a:spcBef>
+            </a:pPr>
+            <a:r>
+              <a:rPr sz="1100">
+                <a:solidFill>
+                  <a:srgbClr val="202020"/>
+                </a:solidFill>
+              </a:rPr>
+              <a:t>Knorr: EBS 1989; series air disc brake 1992; Actros/Scania volume 1996</a:t>
+            </a:r>
+          </a:p>
+          <a:p>
+            <a:pPr>
+              <a:spcBef>
+                <a:spcPts val="400"/>
+              </a:spcBef>
+            </a:pPr>
+            <a:r>
+              <a:rPr sz="1100">
+                <a:solidFill>
+                  <a:srgbClr val="202020"/>
+                </a:solidFill>
+              </a:rPr>
+              <a:t>Bendix ADB22X: 2005, now ~85% of NA air-disc wheel ends</a:t>
+            </a:r>
+          </a:p>
+          <a:p>
+            <a:pPr>
+              <a:spcBef>
+                <a:spcPts val="400"/>
+              </a:spcBef>
+            </a:pPr>
+            <a:r>
+              <a:rPr sz="1100">
+                <a:solidFill>
+                  <a:srgbClr val="202020"/>
+                </a:solidFill>
+              </a:rPr>
+              <a:t>UD Quon 2017: first all-disc Japanese heavy truck</a:t>
+            </a:r>
+          </a:p>
+          <a:p>
+            <a:pPr>
+              <a:spcBef>
+                <a:spcPts val="400"/>
+              </a:spcBef>
+            </a:pPr>
+            <a:r>
+              <a:rPr sz="1100">
+                <a:solidFill>
+                  <a:srgbClr val="202020"/>
+                </a:solidFill>
+              </a:rPr>
+              <a:t>Mikuni 2022: e-oil pump in production for a domestic small BEV truck</a:t>
+            </a:r>
+          </a:p>
+          <a:p>
+            <a:pPr>
+              <a:spcBef>
+                <a:spcPts val="400"/>
+              </a:spcBef>
+            </a:pPr>
+            <a:r>
+              <a:rPr sz="1100">
+                <a:solidFill>
+                  <a:srgbClr val="202020"/>
+                </a:solidFill>
+              </a:rPr>
+              <a:t>Akebono FY2023: JSME Technology Award — world-first electric parking brake unit for medium/light trucks (innovating through distress)</a:t>
+            </a:r>
+          </a:p>
+          <a:p>
+            <a:pPr>
+              <a:spcBef>
+                <a:spcPts val="400"/>
+              </a:spcBef>
+            </a:pPr>
+            <a:r>
+              <a:rPr sz="1100">
+                <a:solidFill>
+                  <a:srgbClr val="202020"/>
+                </a:solidFill>
+              </a:rPr>
+              <a:t>TBK: retarders since the 1960s; 19.5" ADB exhibited (year unconfirmed: 2019 vs 2022 sources conflict); e-pumps/TCU in development</a:t>
+            </a:r>
+          </a:p>
+        </p:txBody>
+      </p:sp>
+      <p:sp>
+        <p:nvSpPr>
+          <p:cNvPr id="6" name="TextBox 5"/>
+          <p:cNvSpPr txBox="1"/>
+          <p:nvPr/>
+        </p:nvSpPr>
+        <p:spPr>
+          <a:xfrm>
+            <a:off x="457200" y="3840480"/>
+            <a:ext cx="11292840" cy="1737360"/>
           </a:xfrm>
           <a:prstGeom prst="rect">
             <a:avLst/>
@@ -7163,86 +8928,161 @@
                   <a:srgbClr val="1F4E78"/>
                 </a:solidFill>
               </a:rPr>
-              <a:t>Peer-reviewed &amp; academic</a:t>
-            </a:r>
-          </a:p>
-          <a:p>
-            <a:pPr>
-              <a:spcBef>
-                <a:spcPts val="400"/>
-              </a:spcBef>
-            </a:pPr>
-            <a:r>
-              <a:rPr sz="1000">
-                <a:solidFill>
-                  <a:srgbClr val="202020"/>
-                </a:solidFill>
-              </a:rPr>
-              <a:t>Göhring &amp; von Glasner, SAE 902206 (1990); Kajiyama et al. (Isuzu/TBK), SAE 902200 (1990); Day, Harding &amp; Newcomb, Proc IMechE (1984); Hoover et al., SAE 2005-01-3614; Subel &amp; Kienhöfer, Proc IMechE D (2020)</a:t>
-            </a:r>
-          </a:p>
-          <a:p>
-            <a:pPr>
-              <a:spcBef>
-                <a:spcPts val="400"/>
-              </a:spcBef>
-            </a:pPr>
-            <a:r>
-              <a:rPr sz="1000">
-                <a:solidFill>
-                  <a:srgbClr val="202020"/>
-                </a:solidFill>
-              </a:rPr>
-              <a:t>Ampadu, Alrejjal &amp; Ksaibati, JSDTL 8(1) 2023 — disc vs drum cost-effectiveness</a:t>
-            </a:r>
-          </a:p>
-          <a:p>
-            <a:pPr>
-              <a:spcBef>
-                <a:spcPts val="400"/>
-              </a:spcBef>
-            </a:pPr>
-            <a:r>
-              <a:rPr sz="1000">
-                <a:solidFill>
-                  <a:srgbClr val="202020"/>
-                </a:solidFill>
-              </a:rPr>
-              <a:t>Granitz et al., SN Applied Sciences (2021) — e-coolant pump, 13L HD diesel; Bitsis &amp; Miwa, SAE 2018-01-0980; Cummins SuperTruck 2, SAE 2019-01-0247; MIT S.M. thesis (2012) — HD parasitic losses</a:t>
-            </a:r>
-          </a:p>
-          <a:p>
-            <a:pPr>
-              <a:spcBef>
-                <a:spcPts val="400"/>
-              </a:spcBef>
-            </a:pPr>
-            <a:r>
-              <a:rPr sz="1000">
-                <a:solidFill>
-                  <a:srgbClr val="202020"/>
-                </a:solidFill>
-              </a:rPr>
-              <a:t>Zhang et al., J. Hazardous Materials 465 (2024); Hagino, Atmosphere 15:75 (2024, JARI); Environmental Pollution (2023) — regen braking &amp; brake wear</a:t>
-            </a:r>
-          </a:p>
-          <a:p>
-            <a:pPr>
-              <a:spcBef>
-                <a:spcPts val="400"/>
-              </a:spcBef>
-            </a:pPr>
-            <a:r>
-              <a:rPr sz="1000">
-                <a:solidFill>
-                  <a:srgbClr val="202020"/>
-                </a:solidFill>
-              </a:rPr>
-              <a:t>Energies 16:4024 (2023), 19:1748 (2026); Sustainability 15:3132 (2023); Energies 16:168 (2023) — BEV/FCEV truck &amp; bus thermal management</a:t>
-            </a:r>
-          </a:p>
-        </p:txBody>
-      </p:sp>
+              <a:t>The pattern — and TBK's fix</a:t>
+            </a:r>
+          </a:p>
+          <a:p>
+            <a:pPr>
+              <a:spcBef>
+                <a:spcPts val="400"/>
+              </a:spcBef>
+            </a:pPr>
+            <a:r>
+              <a:rPr sz="1150">
+                <a:solidFill>
+                  <a:srgbClr val="202020"/>
+                </a:solidFill>
+              </a:rPr>
+              <a:t>Innovation output tracks the moat and margin rankings almost perfectly: the companies with validated quality (Knorr, Cummins) also hold the patent fortresses and the product firsts; the distressed (Akebono) still out-publish TBK; even the similarly-sized peer (Mikuni) protects its e-pump work with patents.</a:t>
+            </a:r>
+          </a:p>
+          <a:p>
+            <a:pPr>
+              <a:spcBef>
+                <a:spcPts val="400"/>
+              </a:spcBef>
+            </a:pPr>
+            <a:r>
+              <a:rPr sz="1150">
+                <a:solidFill>
+                  <a:srgbClr val="202020"/>
+                </a:solidFill>
+              </a:rPr>
+              <a:t>TBK's innovation is real but INVISIBLE: 75 years of retarder/brake/pump engineering, an ADB prototype, e-pumps and a thermal control unit in development — none of it patented at scale, published at JSAE, or externally awarded. Invisible innovation cannot win sockets outside the keiretsu.</a:t>
+            </a:r>
+          </a:p>
+          <a:p>
+            <a:pPr>
+              <a:spcBef>
+                <a:spcPts val="400"/>
+              </a:spcBef>
+            </a:pPr>
+            <a:r>
+              <a:rPr sz="1150">
+                <a:solidFill>
+                  <a:srgbClr val="202020"/>
+                </a:solidFill>
+              </a:rPr>
+              <a:t>Fix costs little: patent the e-pump/TCU and ADB work (Mikuni shows the value), publish, pursue external validation — a required complement to the R&amp;D spend itself.</a:t>
+            </a:r>
+          </a:p>
+        </p:txBody>
+      </p:sp>
+    </p:spTree>
+  </p:cSld>
+  <p:clrMapOvr>
+    <a:masterClrMapping/>
+  </p:clrMapOvr>
+</p:sld>
+</file>
+
+<file path=ppt/slides/slide16.xml><?xml version="1.0" encoding="utf-8"?>
+<p:sld xmlns:a="http://schemas.openxmlformats.org/drawingml/2006/main" xmlns:p="http://schemas.openxmlformats.org/presentationml/2006/main" xmlns:r="http://schemas.openxmlformats.org/officeDocument/2006/relationships">
+  <p:cSld>
+    <p:spTree>
+      <p:nvGrpSpPr>
+        <p:cNvPr id="1" name=""/>
+        <p:cNvGrpSpPr/>
+        <p:nvPr/>
+      </p:nvGrpSpPr>
+      <p:grpSpPr/>
+      <p:sp>
+        <p:nvSpPr>
+          <p:cNvPr id="2" name="TextBox 1"/>
+          <p:cNvSpPr txBox="1"/>
+          <p:nvPr/>
+        </p:nvSpPr>
+        <p:spPr>
+          <a:xfrm>
+            <a:off x="0" y="0"/>
+            <a:ext cx="12191695" cy="868680"/>
+          </a:xfrm>
+          <a:prstGeom prst="rect">
+            <a:avLst/>
+          </a:prstGeom>
+          <a:solidFill>
+            <a:srgbClr val="1F4E78"/>
+          </a:solidFill>
+        </p:spPr>
+        <p:txBody>
+          <a:bodyPr wrap="square" lIns="457200" tIns="164592">
+            <a:spAutoFit/>
+          </a:bodyPr>
+          <a:lstStyle/>
+          <a:p>
+            <a:r>
+              <a:rPr sz="2600" b="1">
+                <a:solidFill>
+                  <a:srgbClr val="FFFFFF"/>
+                </a:solidFill>
+              </a:rPr>
+              <a:t>Moat framework ranking: TBK scores 5.38 — 9th of 13</a:t>
+            </a:r>
+          </a:p>
+        </p:txBody>
+      </p:sp>
+      <p:sp>
+        <p:nvSpPr>
+          <p:cNvPr id="3" name="TextBox 2"/>
+          <p:cNvSpPr txBox="1"/>
+          <p:nvPr/>
+        </p:nvSpPr>
+        <p:spPr>
+          <a:xfrm>
+            <a:off x="457200" y="914400"/>
+            <a:ext cx="11247120" cy="365760"/>
+          </a:xfrm>
+          <a:prstGeom prst="rect">
+            <a:avLst/>
+          </a:prstGeom>
+          <a:noFill/>
+        </p:spPr>
+        <p:txBody>
+          <a:bodyPr wrap="square">
+            <a:spAutoFit/>
+          </a:bodyPr>
+          <a:lstStyle/>
+          <a:p>
+            <a:pPr algn="l"/>
+            <a:r>
+              <a:rPr sz="1200" b="0">
+                <a:solidFill>
+                  <a:srgbClr val="595959"/>
+                </a:solidFill>
+              </a:rPr>
+              <a:t>Unified Niche Compounder Methodology v3.2: 10 weighted criteria, domain-blended internal/external evidence. Thresholds: &gt;7.8 Compounder, 6.5-7.8 Watchlist, &lt;6.5 Pass</a:t>
+            </a:r>
+          </a:p>
+        </p:txBody>
+      </p:sp>
+      <p:graphicFrame>
+        <p:nvGraphicFramePr>
+          <p:cNvPr id="4" name="Chart 3"/>
+          <p:cNvGraphicFramePr>
+            <a:graphicFrameLocks noGrp="1"/>
+          </p:cNvGraphicFramePr>
+          <p:nvPr/>
+        </p:nvGraphicFramePr>
+        <p:xfrm>
+          <a:off x="457200" y="1463040"/>
+          <a:ext cx="6675120" cy="4572000"/>
+        </p:xfrm>
+        <a:graphic>
+          <a:graphicData uri="http://schemas.openxmlformats.org/drawingml/2006/chart">
+            <c:chart xmlns:c="http://schemas.openxmlformats.org/drawingml/2006/chart" r:id="rId2"/>
+          </a:graphicData>
+        </a:graphic>
+      </p:graphicFrame>
       <p:sp>
         <p:nvSpPr>
           <p:cNvPr id="5" name="TextBox 4"/>
@@ -7251,8 +9091,8 @@
         </p:nvSpPr>
         <p:spPr>
           <a:xfrm>
-            <a:off x="457200" y="3977639"/>
-            <a:ext cx="5577840" cy="2606040"/>
+            <a:off x="7406640" y="1463040"/>
+            <a:ext cx="4343400" cy="2194560"/>
           </a:xfrm>
           <a:prstGeom prst="rect">
             <a:avLst/>
@@ -7278,82 +9118,112 @@
                   <a:srgbClr val="1F4E78"/>
                 </a:solidFill>
               </a:rPr>
-              <a:t>Regulatory &amp; legal</a:t>
-            </a:r>
-          </a:p>
-          <a:p>
-            <a:pPr>
-              <a:spcBef>
-                <a:spcPts val="400"/>
-              </a:spcBef>
-            </a:pPr>
-            <a:r>
-              <a:rPr sz="1000">
-                <a:solidFill>
-                  <a:srgbClr val="202020"/>
-                </a:solidFill>
-              </a:rPr>
-              <a:t>NHTSA: FMVSS 121 final rule 74 FR 37122 (2009) + Regulatory Impact Analysis; DOT HS 811 367 (2010, NADS simulator); ESV 07-0242 (2007); heavy-vehicle AEB NPRM (2023)</a:t>
-            </a:r>
-          </a:p>
-          <a:p>
-            <a:pPr>
-              <a:spcBef>
-                <a:spcPts val="400"/>
-              </a:spcBef>
-            </a:pPr>
-            <a:r>
-              <a:rPr sz="1000">
-                <a:solidFill>
-                  <a:srgbClr val="202020"/>
-                </a:solidFill>
-              </a:rPr>
-              <a:t>UNECE Regulation No. 13 (braking, Type-II fade tests)</a:t>
-            </a:r>
-          </a:p>
-          <a:p>
-            <a:pPr>
-              <a:spcBef>
-                <a:spcPts val="400"/>
-              </a:spcBef>
-            </a:pPr>
-            <a:r>
-              <a:rPr sz="1000">
-                <a:solidFill>
-                  <a:srgbClr val="202020"/>
-                </a:solidFill>
-              </a:rPr>
-              <a:t>EU: Reg 2019/1242 &amp; 2024/1610 (HDV CO2); Reg 2024/1257 (Euro 7); Reg 2017/2400 Annex IX (VECTO auxiliaries) + JRC112015; EPA Phase 2 (40 CFR 1037.520 accessory credits) &amp; Phase 3 (2024)</a:t>
-            </a:r>
-          </a:p>
-          <a:p>
-            <a:pPr>
-              <a:spcBef>
-                <a:spcPts val="400"/>
-              </a:spcBef>
-            </a:pPr>
-            <a:r>
-              <a:rPr sz="1000">
-                <a:solidFill>
-                  <a:srgbClr val="202020"/>
-                </a:solidFill>
-              </a:rPr>
-              <a:t>EC merger decisions: M.8102 Valeo/FTE (2017, 90-100% concentration, Raicam remedy); Knorr-Bremse/Haldex Phase II (IP-17-2126, 2017)</a:t>
-            </a:r>
-          </a:p>
-          <a:p>
-            <a:pPr>
-              <a:spcBef>
-                <a:spcPts val="400"/>
-              </a:spcBef>
-            </a:pPr>
-            <a:r>
-              <a:rPr sz="1000">
-                <a:solidFill>
-                  <a:srgbClr val="202020"/>
-                </a:solidFill>
-              </a:rPr>
-              <a:t>Japan: MY2025 HDV fuel-economy standards (via ICCT/TransportPolicy); METI supplier-transition studies (2023, 2025); FMCSA Crash Cost Methodology (2025); AAA Foundation (2017)</a:t>
+              <a:t>Bands</a:t>
+            </a:r>
+          </a:p>
+          <a:p>
+            <a:pPr>
+              <a:spcBef>
+                <a:spcPts val="400"/>
+              </a:spcBef>
+            </a:pPr>
+            <a:r>
+              <a:rPr sz="1200">
+                <a:solidFill>
+                  <a:srgbClr val="202020"/>
+                </a:solidFill>
+              </a:rPr>
+              <a:t>Compounder Target (&gt;7.8): NONE —</a:t>
+            </a:r>
+          </a:p>
+          <a:p>
+            <a:pPr>
+              <a:spcBef>
+                <a:spcPts val="400"/>
+              </a:spcBef>
+            </a:pPr>
+            <a:r>
+              <a:rPr sz="1200">
+                <a:solidFill>
+                  <a:srgbClr val="202020"/>
+                </a:solidFill>
+              </a:rPr>
+              <a:t>no company in this industry qualifies</a:t>
+            </a:r>
+          </a:p>
+          <a:p>
+            <a:pPr>
+              <a:spcBef>
+                <a:spcPts val="400"/>
+              </a:spcBef>
+            </a:pPr>
+            <a:r>
+              <a:rPr sz="1200">
+                <a:solidFill>
+                  <a:srgbClr val="202020"/>
+                </a:solidFill>
+              </a:rPr>
+              <a:t>Watchlist (6.5-7.8): Knorr 7.55,</a:t>
+            </a:r>
+          </a:p>
+          <a:p>
+            <a:pPr>
+              <a:spcBef>
+                <a:spcPts val="400"/>
+              </a:spcBef>
+            </a:pPr>
+            <a:r>
+              <a:rPr sz="1200">
+                <a:solidFill>
+                  <a:srgbClr val="202020"/>
+                </a:solidFill>
+              </a:rPr>
+              <a:t>Concentric 6.98, Brembo/Cummins 6.73,</a:t>
+            </a:r>
+          </a:p>
+          <a:p>
+            <a:pPr>
+              <a:spcBef>
+                <a:spcPts val="400"/>
+              </a:spcBef>
+            </a:pPr>
+            <a:r>
+              <a:rPr sz="1200">
+                <a:solidFill>
+                  <a:srgbClr val="202020"/>
+                </a:solidFill>
+              </a:rPr>
+              <a:t>SAF-Holland 6.59</a:t>
+            </a:r>
+          </a:p>
+          <a:p>
+            <a:pPr>
+              <a:spcBef>
+                <a:spcPts val="400"/>
+              </a:spcBef>
+            </a:pPr>
+            <a:r>
+              <a:rPr sz="1200">
+                <a:solidFill>
+                  <a:srgbClr val="202020"/>
+                </a:solidFill>
+              </a:rPr>
+              <a:t>Pass (&lt;6.5): everyone else —</a:t>
+            </a:r>
+          </a:p>
+          <a:p>
+            <a:pPr>
+              <a:spcBef>
+                <a:spcPts val="400"/>
+              </a:spcBef>
+            </a:pPr>
+            <a:r>
+              <a:rPr sz="1200">
+                <a:solidFill>
+                  <a:srgbClr val="202020"/>
+                </a:solidFill>
+              </a:rPr>
+              <a:t>incl. TBK 5.38, Mikuni 5.00</a:t>
             </a:r>
           </a:p>
         </p:txBody>
@@ -7366,8 +9236,717 @@
         </p:nvSpPr>
         <p:spPr>
           <a:xfrm>
-            <a:off x="6217920" y="3977639"/>
-            <a:ext cx="5532120" cy="2606040"/>
+            <a:off x="7406640" y="3794760"/>
+            <a:ext cx="4343400" cy="2240280"/>
+          </a:xfrm>
+          <a:prstGeom prst="rect">
+            <a:avLst/>
+          </a:prstGeom>
+          <a:solidFill>
+            <a:srgbClr val="F2F2F2"/>
+          </a:solidFill>
+          <a:ln w="15875">
+            <a:solidFill>
+              <a:srgbClr val="7F1D1D"/>
+            </a:solidFill>
+          </a:ln>
+        </p:spPr>
+        <p:txBody>
+          <a:bodyPr wrap="square" lIns="137160" rIns="137160" tIns="109728">
+            <a:spAutoFit/>
+          </a:bodyPr>
+          <a:lstStyle/>
+          <a:p>
+            <a:r>
+              <a:rPr sz="1500" b="1">
+                <a:solidFill>
+                  <a:srgbClr val="7F1D1D"/>
+                </a:solidFill>
+              </a:rPr>
+              <a:t>TBK's decomposition is unique</a:t>
+            </a:r>
+          </a:p>
+          <a:p>
+            <a:pPr>
+              <a:spcBef>
+                <a:spcPts val="400"/>
+              </a:spcBef>
+            </a:pPr>
+            <a:r>
+              <a:rPr sz="1200">
+                <a:solidFill>
+                  <a:srgbClr val="202020"/>
+                </a:solidFill>
+              </a:rPr>
+              <a:t>The strongest STATIC moat of the</a:t>
+            </a:r>
+          </a:p>
+          <a:p>
+            <a:pPr>
+              <a:spcBef>
+                <a:spcPts val="400"/>
+              </a:spcBef>
+            </a:pPr>
+            <a:r>
+              <a:rPr sz="1200">
+                <a:solidFill>
+                  <a:srgbClr val="202020"/>
+                </a:solidFill>
+              </a:rPr>
+              <a:t>unscored set (Criticality 7.5 +</a:t>
+            </a:r>
+          </a:p>
+          <a:p>
+            <a:pPr>
+              <a:spcBef>
+                <a:spcPts val="400"/>
+              </a:spcBef>
+            </a:pPr>
+            <a:r>
+              <a:rPr sz="1200">
+                <a:solidFill>
+                  <a:srgbClr val="202020"/>
+                </a:solidFill>
+              </a:rPr>
+              <a:t>Hegemony 8.0 = 2.33 of its 5.38)</a:t>
+            </a:r>
+          </a:p>
+          <a:p>
+            <a:pPr>
+              <a:spcBef>
+                <a:spcPts val="400"/>
+              </a:spcBef>
+            </a:pPr>
+            <a:r>
+              <a:rPr sz="1200">
+                <a:solidFill>
+                  <a:srgbClr val="202020"/>
+                </a:solidFill>
+              </a:rPr>
+              <a:t>…drained by the worst COMPOUNDING</a:t>
+            </a:r>
+          </a:p>
+          <a:p>
+            <a:pPr>
+              <a:spcBef>
+                <a:spcPts val="400"/>
+              </a:spcBef>
+            </a:pPr>
+            <a:r>
+              <a:rPr sz="1200">
+                <a:solidFill>
+                  <a:srgbClr val="202020"/>
+                </a:solidFill>
+              </a:rPr>
+              <a:t>engine in the whole group (Capital</a:t>
+            </a:r>
+          </a:p>
+          <a:p>
+            <a:pPr>
+              <a:spcBef>
+                <a:spcPts val="400"/>
+              </a:spcBef>
+            </a:pPr>
+            <a:r>
+              <a:rPr sz="1200">
+                <a:solidFill>
+                  <a:srgbClr val="202020"/>
+                </a:solidFill>
+              </a:rPr>
+              <a:t>allocation 2.0 + Runway 3.0 = just</a:t>
+            </a:r>
+          </a:p>
+          <a:p>
+            <a:pPr>
+              <a:spcBef>
+                <a:spcPts val="400"/>
+              </a:spcBef>
+            </a:pPr>
+            <a:r>
+              <a:rPr sz="1200">
+                <a:solidFill>
+                  <a:srgbClr val="202020"/>
+                </a:solidFill>
+              </a:rPr>
+              <a:t>0.50 of a possible 2.00)</a:t>
+            </a:r>
+          </a:p>
+          <a:p>
+            <a:pPr>
+              <a:spcBef>
+                <a:spcPts val="400"/>
+              </a:spcBef>
+            </a:pPr>
+            <a:r>
+              <a:rPr sz="1200">
+                <a:solidFill>
+                  <a:srgbClr val="202020"/>
+                </a:solidFill>
+              </a:rPr>
+              <a:t>Durable problem, fragile solution</a:t>
+            </a:r>
+          </a:p>
+        </p:txBody>
+      </p:sp>
+    </p:spTree>
+  </p:cSld>
+  <p:clrMapOvr>
+    <a:masterClrMapping/>
+  </p:clrMapOvr>
+</p:sld>
+</file>
+
+<file path=ppt/slides/slide17.xml><?xml version="1.0" encoding="utf-8"?>
+<p:sld xmlns:a="http://schemas.openxmlformats.org/drawingml/2006/main" xmlns:p="http://schemas.openxmlformats.org/presentationml/2006/main" xmlns:r="http://schemas.openxmlformats.org/officeDocument/2006/relationships">
+  <p:cSld>
+    <p:spTree>
+      <p:nvGrpSpPr>
+        <p:cNvPr id="1" name=""/>
+        <p:cNvGrpSpPr/>
+        <p:nvPr/>
+      </p:nvGrpSpPr>
+      <p:grpSpPr/>
+      <p:sp>
+        <p:nvSpPr>
+          <p:cNvPr id="2" name="TextBox 1"/>
+          <p:cNvSpPr txBox="1"/>
+          <p:nvPr/>
+        </p:nvSpPr>
+        <p:spPr>
+          <a:xfrm>
+            <a:off x="0" y="0"/>
+            <a:ext cx="12191695" cy="868680"/>
+          </a:xfrm>
+          <a:prstGeom prst="rect">
+            <a:avLst/>
+          </a:prstGeom>
+          <a:solidFill>
+            <a:srgbClr val="1F4E78"/>
+          </a:solidFill>
+        </p:spPr>
+        <p:txBody>
+          <a:bodyPr wrap="square" lIns="457200" tIns="164592">
+            <a:spAutoFit/>
+          </a:bodyPr>
+          <a:lstStyle/>
+          <a:p>
+            <a:r>
+              <a:rPr sz="2600" b="1">
+                <a:solidFill>
+                  <a:srgbClr val="FFFFFF"/>
+                </a:solidFill>
+              </a:rPr>
+              <a:t>TBK's moat profile: where it is strong, where it bleeds</a:t>
+            </a:r>
+          </a:p>
+        </p:txBody>
+      </p:sp>
+      <p:sp>
+        <p:nvSpPr>
+          <p:cNvPr id="3" name="TextBox 2"/>
+          <p:cNvSpPr txBox="1"/>
+          <p:nvPr/>
+        </p:nvSpPr>
+        <p:spPr>
+          <a:xfrm>
+            <a:off x="457200" y="914400"/>
+            <a:ext cx="11247120" cy="365760"/>
+          </a:xfrm>
+          <a:prstGeom prst="rect">
+            <a:avLst/>
+          </a:prstGeom>
+          <a:noFill/>
+        </p:spPr>
+        <p:txBody>
+          <a:bodyPr wrap="square">
+            <a:spAutoFit/>
+          </a:bodyPr>
+          <a:lstStyle/>
+          <a:p>
+            <a:pPr algn="l"/>
+            <a:r>
+              <a:rPr sz="1200" b="0">
+                <a:solidFill>
+                  <a:srgbClr val="595959"/>
+                </a:solidFill>
+              </a:rPr>
+              <a:t>Chapter scores (1-10) — TBK vs Concentric (best newly-scored) vs Mikuni vs average of the 6 newly-scored peers</a:t>
+            </a:r>
+          </a:p>
+        </p:txBody>
+      </p:sp>
+      <p:graphicFrame>
+        <p:nvGraphicFramePr>
+          <p:cNvPr id="4" name="Chart 3"/>
+          <p:cNvGraphicFramePr>
+            <a:graphicFrameLocks noGrp="1"/>
+          </p:cNvGraphicFramePr>
+          <p:nvPr/>
+        </p:nvGraphicFramePr>
+        <p:xfrm>
+          <a:off x="365760" y="1371600"/>
+          <a:ext cx="6400800" cy="4846320"/>
+        </p:xfrm>
+        <a:graphic>
+          <a:graphicData uri="http://schemas.openxmlformats.org/drawingml/2006/chart">
+            <c:chart xmlns:c="http://schemas.openxmlformats.org/drawingml/2006/chart" r:id="rId2"/>
+          </a:graphicData>
+        </a:graphic>
+      </p:graphicFrame>
+      <p:sp>
+        <p:nvSpPr>
+          <p:cNvPr id="5" name="TextBox 4"/>
+          <p:cNvSpPr txBox="1"/>
+          <p:nvPr/>
+        </p:nvSpPr>
+        <p:spPr>
+          <a:xfrm>
+            <a:off x="7040880" y="1417320"/>
+            <a:ext cx="4709160" cy="2286000"/>
+          </a:xfrm>
+          <a:prstGeom prst="rect">
+            <a:avLst/>
+          </a:prstGeom>
+          <a:solidFill>
+            <a:srgbClr val="F2F2F2"/>
+          </a:solidFill>
+          <a:ln w="15875">
+            <a:solidFill>
+              <a:srgbClr val="548235"/>
+            </a:solidFill>
+          </a:ln>
+        </p:spPr>
+        <p:txBody>
+          <a:bodyPr wrap="square" lIns="137160" rIns="137160" tIns="109728">
+            <a:spAutoFit/>
+          </a:bodyPr>
+          <a:lstStyle/>
+          <a:p>
+            <a:r>
+              <a:rPr sz="1500" b="1">
+                <a:solidFill>
+                  <a:srgbClr val="548235"/>
+                </a:solidFill>
+              </a:rPr>
+              <a:t>TBK's STRONG points</a:t>
+            </a:r>
+          </a:p>
+          <a:p>
+            <a:pPr>
+              <a:spcBef>
+                <a:spcPts val="400"/>
+              </a:spcBef>
+            </a:pPr>
+            <a:r>
+              <a:rPr sz="1150">
+                <a:solidFill>
+                  <a:srgbClr val="202020"/>
+                </a:solidFill>
+              </a:rPr>
+              <a:t>Market hegemony 8.0 — top domestic share in entry-proof niches (best score in the set on this criterion)</a:t>
+            </a:r>
+          </a:p>
+          <a:p>
+            <a:pPr>
+              <a:spcBef>
+                <a:spcPts val="400"/>
+              </a:spcBef>
+            </a:pPr>
+            <a:r>
+              <a:rPr sz="1150">
+                <a:solidFill>
+                  <a:srgbClr val="202020"/>
+                </a:solidFill>
+              </a:rPr>
+              <a:t>Criticality 7.5 — life-support product: &lt;1% of truck cost protecting 100% of value</a:t>
+            </a:r>
+          </a:p>
+          <a:p>
+            <a:pPr>
+              <a:spcBef>
+                <a:spcPts val="400"/>
+              </a:spcBef>
+            </a:pPr>
+            <a:r>
+              <a:rPr sz="1150">
+                <a:solidFill>
+                  <a:srgbClr val="202020"/>
+                </a:solidFill>
+              </a:rPr>
+              <a:t>Demand horizon 7.0 — stopping &amp; cooling heavy trucks is permanent; content GROWS with electrification</a:t>
+            </a:r>
+          </a:p>
+        </p:txBody>
+      </p:sp>
+      <p:sp>
+        <p:nvSpPr>
+          <p:cNvPr id="6" name="TextBox 5"/>
+          <p:cNvSpPr txBox="1"/>
+          <p:nvPr/>
+        </p:nvSpPr>
+        <p:spPr>
+          <a:xfrm>
+            <a:off x="7040880" y="3840480"/>
+            <a:ext cx="4709160" cy="2286000"/>
+          </a:xfrm>
+          <a:prstGeom prst="rect">
+            <a:avLst/>
+          </a:prstGeom>
+          <a:solidFill>
+            <a:srgbClr val="F2F2F2"/>
+          </a:solidFill>
+          <a:ln w="15875">
+            <a:solidFill>
+              <a:srgbClr val="7F1D1D"/>
+            </a:solidFill>
+          </a:ln>
+        </p:spPr>
+        <p:txBody>
+          <a:bodyPr wrap="square" lIns="137160" rIns="137160" tIns="109728">
+            <a:spAutoFit/>
+          </a:bodyPr>
+          <a:lstStyle/>
+          <a:p>
+            <a:r>
+              <a:rPr sz="1500" b="1">
+                <a:solidFill>
+                  <a:srgbClr val="7F1D1D"/>
+                </a:solidFill>
+              </a:rPr>
+              <a:t>TBK's WEAK points</a:t>
+            </a:r>
+          </a:p>
+          <a:p>
+            <a:pPr>
+              <a:spcBef>
+                <a:spcPts val="400"/>
+              </a:spcBef>
+            </a:pPr>
+            <a:r>
+              <a:rPr sz="1150">
+                <a:solidFill>
+                  <a:srgbClr val="202020"/>
+                </a:solidFill>
+              </a:rPr>
+              <a:t>Capital allocation 2.0 — ROIIC negative at every horizon with 100% reinvestment (worst in the group)</a:t>
+            </a:r>
+          </a:p>
+          <a:p>
+            <a:pPr>
+              <a:spcBef>
+                <a:spcPts val="400"/>
+              </a:spcBef>
+            </a:pPr>
+            <a:r>
+              <a:rPr sz="1150">
+                <a:solidFill>
+                  <a:srgbClr val="202020"/>
+                </a:solidFill>
+              </a:rPr>
+              <a:t>Ecosystem 2.0 — standalone hardware, no installed-base annuity (vs Knorr's EBS/TruckServices)</a:t>
+            </a:r>
+          </a:p>
+          <a:p>
+            <a:pPr>
+              <a:spcBef>
+                <a:spcPts val="400"/>
+              </a:spcBef>
+            </a:pPr>
+            <a:r>
+              <a:rPr sz="1150">
+                <a:solidFill>
+                  <a:srgbClr val="202020"/>
+                </a:solidFill>
+              </a:rPr>
+              <a:t>Lifecycle cost 3.0 — no cost edge: underloaded plants in COGS</a:t>
+            </a:r>
+          </a:p>
+          <a:p>
+            <a:pPr>
+              <a:spcBef>
+                <a:spcPts val="400"/>
+              </a:spcBef>
+            </a:pPr>
+            <a:r>
+              <a:rPr sz="1150">
+                <a:solidFill>
+                  <a:srgbClr val="202020"/>
+                </a:solidFill>
+              </a:rPr>
+              <a:t>Reinvestment runway 3.0 — runway exists but unproven; $43M knowledge stock</a:t>
+            </a:r>
+          </a:p>
+          <a:p>
+            <a:pPr>
+              <a:spcBef>
+                <a:spcPts val="400"/>
+              </a:spcBef>
+            </a:pPr>
+            <a:r>
+              <a:rPr sz="1150">
+                <a:solidFill>
+                  <a:srgbClr val="202020"/>
+                </a:solidFill>
+              </a:rPr>
+              <a:t>Substitution 3.5 — both products in active displacement</a:t>
+            </a:r>
+          </a:p>
+        </p:txBody>
+      </p:sp>
+    </p:spTree>
+  </p:cSld>
+  <p:clrMapOvr>
+    <a:masterClrMapping/>
+  </p:clrMapOvr>
+</p:sld>
+</file>
+
+<file path=ppt/slides/slide18.xml><?xml version="1.0" encoding="utf-8"?>
+<p:sld xmlns:a="http://schemas.openxmlformats.org/drawingml/2006/main" xmlns:p="http://schemas.openxmlformats.org/presentationml/2006/main" xmlns:r="http://schemas.openxmlformats.org/officeDocument/2006/relationships">
+  <p:cSld>
+    <p:spTree>
+      <p:nvGrpSpPr>
+        <p:cNvPr id="1" name=""/>
+        <p:cNvGrpSpPr/>
+        <p:nvPr/>
+      </p:nvGrpSpPr>
+      <p:grpSpPr/>
+      <p:sp>
+        <p:nvSpPr>
+          <p:cNvPr id="2" name="TextBox 1"/>
+          <p:cNvSpPr txBox="1"/>
+          <p:nvPr/>
+        </p:nvSpPr>
+        <p:spPr>
+          <a:xfrm>
+            <a:off x="0" y="0"/>
+            <a:ext cx="12191695" cy="868680"/>
+          </a:xfrm>
+          <a:prstGeom prst="rect">
+            <a:avLst/>
+          </a:prstGeom>
+          <a:solidFill>
+            <a:srgbClr val="1F4E78"/>
+          </a:solidFill>
+        </p:spPr>
+        <p:txBody>
+          <a:bodyPr wrap="square" lIns="457200" tIns="164592">
+            <a:spAutoFit/>
+          </a:bodyPr>
+          <a:lstStyle/>
+          <a:p>
+            <a:r>
+              <a:rPr sz="2600" b="1">
+                <a:solidFill>
+                  <a:srgbClr val="FFFFFF"/>
+                </a:solidFill>
+              </a:rPr>
+              <a:t>Moat criteria: TBK vs competitors, criterion by criterion</a:t>
+            </a:r>
+          </a:p>
+        </p:txBody>
+      </p:sp>
+      <p:sp>
+        <p:nvSpPr>
+          <p:cNvPr id="3" name="TextBox 2"/>
+          <p:cNvSpPr txBox="1"/>
+          <p:nvPr/>
+        </p:nvSpPr>
+        <p:spPr>
+          <a:xfrm>
+            <a:off x="457200" y="914400"/>
+            <a:ext cx="11247120" cy="365760"/>
+          </a:xfrm>
+          <a:prstGeom prst="rect">
+            <a:avLst/>
+          </a:prstGeom>
+          <a:noFill/>
+        </p:spPr>
+        <p:txBody>
+          <a:bodyPr wrap="square">
+            <a:spAutoFit/>
+          </a:bodyPr>
+          <a:lstStyle/>
+          <a:p>
+            <a:pPr algn="l"/>
+            <a:r>
+              <a:rPr sz="1200" b="0">
+                <a:solidFill>
+                  <a:srgbClr val="595959"/>
+                </a:solidFill>
+              </a:rPr>
+              <a:t>Newly-scored companies (chapter detail unavailable for the 5 pre-scored names). TBK in red</a:t>
+            </a:r>
+          </a:p>
+        </p:txBody>
+      </p:sp>
+      <p:graphicFrame>
+        <p:nvGraphicFramePr>
+          <p:cNvPr id="4" name="Chart 3"/>
+          <p:cNvGraphicFramePr>
+            <a:graphicFrameLocks noGrp="1"/>
+          </p:cNvGraphicFramePr>
+          <p:nvPr/>
+        </p:nvGraphicFramePr>
+        <p:xfrm>
+          <a:off x="365760" y="1417320"/>
+          <a:ext cx="5669280" cy="4297680"/>
+        </p:xfrm>
+        <a:graphic>
+          <a:graphicData uri="http://schemas.openxmlformats.org/drawingml/2006/chart">
+            <c:chart xmlns:c="http://schemas.openxmlformats.org/drawingml/2006/chart" r:id="rId2"/>
+          </a:graphicData>
+        </a:graphic>
+      </p:graphicFrame>
+      <p:graphicFrame>
+        <p:nvGraphicFramePr>
+          <p:cNvPr id="5" name="Chart 4"/>
+          <p:cNvGraphicFramePr>
+            <a:graphicFrameLocks noGrp="1"/>
+          </p:cNvGraphicFramePr>
+          <p:nvPr/>
+        </p:nvGraphicFramePr>
+        <p:xfrm>
+          <a:off x="6172200" y="1417320"/>
+          <a:ext cx="5669280" cy="4297680"/>
+        </p:xfrm>
+        <a:graphic>
+          <a:graphicData uri="http://schemas.openxmlformats.org/drawingml/2006/chart">
+            <c:chart xmlns:c="http://schemas.openxmlformats.org/drawingml/2006/chart" r:id="rId3"/>
+          </a:graphicData>
+        </a:graphic>
+      </p:graphicFrame>
+      <p:sp>
+        <p:nvSpPr>
+          <p:cNvPr id="6" name="TextBox 5"/>
+          <p:cNvSpPr txBox="1"/>
+          <p:nvPr/>
+        </p:nvSpPr>
+        <p:spPr>
+          <a:xfrm>
+            <a:off x="457200" y="5806440"/>
+            <a:ext cx="11247120" cy="822960"/>
+          </a:xfrm>
+          <a:prstGeom prst="rect">
+            <a:avLst/>
+          </a:prstGeom>
+          <a:noFill/>
+        </p:spPr>
+        <p:txBody>
+          <a:bodyPr wrap="square">
+            <a:spAutoFit/>
+          </a:bodyPr>
+          <a:lstStyle/>
+          <a:p>
+            <a:pPr algn="l"/>
+            <a:r>
+              <a:rPr sz="1150" b="0">
+                <a:solidFill>
+                  <a:srgbClr val="595959"/>
+                </a:solidFill>
+              </a:rPr>
+              <a:t>Read: in Phase 1 (left) TBK leads or matches on Criticality and Hegemony and collapses on Ecosystem/Lifecycle cost. In Phases 2-3 (right) TBK is last or near-last on every engine criterion — while Concentric (green) leads precisely there. Closing the gap to Concentric is execution (allocation, substitution positioning), not moat-building: the moat already exists.</a:t>
+            </a:r>
+          </a:p>
+        </p:txBody>
+      </p:sp>
+    </p:spTree>
+  </p:cSld>
+  <p:clrMapOvr>
+    <a:masterClrMapping/>
+  </p:clrMapOvr>
+</p:sld>
+</file>
+
+<file path=ppt/slides/slide19.xml><?xml version="1.0" encoding="utf-8"?>
+<p:sld xmlns:a="http://schemas.openxmlformats.org/drawingml/2006/main" xmlns:p="http://schemas.openxmlformats.org/presentationml/2006/main" xmlns:r="http://schemas.openxmlformats.org/officeDocument/2006/relationships">
+  <p:cSld>
+    <p:spTree>
+      <p:nvGrpSpPr>
+        <p:cNvPr id="1" name=""/>
+        <p:cNvGrpSpPr/>
+        <p:nvPr/>
+      </p:nvGrpSpPr>
+      <p:grpSpPr/>
+      <p:sp>
+        <p:nvSpPr>
+          <p:cNvPr id="2" name="TextBox 1"/>
+          <p:cNvSpPr txBox="1"/>
+          <p:nvPr/>
+        </p:nvSpPr>
+        <p:spPr>
+          <a:xfrm>
+            <a:off x="0" y="0"/>
+            <a:ext cx="12191695" cy="868680"/>
+          </a:xfrm>
+          <a:prstGeom prst="rect">
+            <a:avLst/>
+          </a:prstGeom>
+          <a:solidFill>
+            <a:srgbClr val="1F4E78"/>
+          </a:solidFill>
+        </p:spPr>
+        <p:txBody>
+          <a:bodyPr wrap="square" lIns="457200" tIns="164592">
+            <a:spAutoFit/>
+          </a:bodyPr>
+          <a:lstStyle/>
+          <a:p>
+            <a:r>
+              <a:rPr sz="2600" b="1">
+                <a:solidFill>
+                  <a:srgbClr val="FFFFFF"/>
+                </a:solidFill>
+              </a:rPr>
+              <a:t>Research quality &amp; methodology notes</a:t>
+            </a:r>
+          </a:p>
+        </p:txBody>
+      </p:sp>
+      <p:sp>
+        <p:nvSpPr>
+          <p:cNvPr id="3" name="TextBox 2"/>
+          <p:cNvSpPr txBox="1"/>
+          <p:nvPr/>
+        </p:nvSpPr>
+        <p:spPr>
+          <a:xfrm>
+            <a:off x="457200" y="914400"/>
+            <a:ext cx="11247120" cy="365760"/>
+          </a:xfrm>
+          <a:prstGeom prst="rect">
+            <a:avLst/>
+          </a:prstGeom>
+          <a:noFill/>
+        </p:spPr>
+        <p:txBody>
+          <a:bodyPr wrap="square">
+            <a:spAutoFit/>
+          </a:bodyPr>
+          <a:lstStyle/>
+          <a:p>
+            <a:pPr algn="l"/>
+            <a:r>
+              <a:rPr sz="1200" b="0">
+                <a:solidFill>
+                  <a:srgbClr val="595959"/>
+                </a:solidFill>
+              </a:rPr>
+              <a:t>How this material was produced, verified, and where its limits are</a:t>
+            </a:r>
+          </a:p>
+        </p:txBody>
+      </p:sp>
+      <p:sp>
+        <p:nvSpPr>
+          <p:cNvPr id="4" name="TextBox 3"/>
+          <p:cNvSpPr txBox="1"/>
+          <p:nvPr/>
+        </p:nvSpPr>
+        <p:spPr>
+          <a:xfrm>
+            <a:off x="457200" y="1417320"/>
+            <a:ext cx="5577840" cy="2377440"/>
           </a:xfrm>
           <a:prstGeom prst="rect">
             <a:avLst/>
@@ -7393,67 +9972,397 @@
                   <a:srgbClr val="1F4E78"/>
                 </a:solidFill>
               </a:rPr>
-              <a:t>Industry &amp; financial data (verified, labeled where single-source)</a:t>
-            </a:r>
-          </a:p>
-          <a:p>
-            <a:pPr>
-              <a:spcBef>
-                <a:spcPts val="400"/>
-              </a:spcBef>
-            </a:pPr>
-            <a:r>
-              <a:rPr sz="1000">
-                <a:solidFill>
-                  <a:srgbClr val="202020"/>
-                </a:solidFill>
-              </a:rPr>
-              <a:t>Adoption data: Haldex ADB history; Bendix/Knorr production milestones; FleetOwner, TruckingInfo, Fleet Maintenance, Transport Topics, Fleet Equipment; NACFE confidence reports; NAS 25542; DOE SuperTruck (OSTI)</a:t>
-            </a:r>
-          </a:p>
-          <a:p>
-            <a:pPr>
-              <a:spcBef>
-                <a:spcPts val="400"/>
-              </a:spcBef>
-            </a:pPr>
-            <a:r>
-              <a:rPr sz="1000">
-                <a:solidFill>
-                  <a:srgbClr val="202020"/>
-                </a:solidFill>
-              </a:rPr>
-              <a:t>Deal records: Knorr-Bremse-Bendix (2002); ZF-Wabco $7bn (2020); Cummins-Meritor $3.7bn (2022); SAF-Holland-Haldex (2022); Concentric take-private SEK 230 (2024); Pierburg-AEQUITA €350M (2026)</a:t>
-            </a:r>
-          </a:p>
-          <a:p>
-            <a:pPr>
-              <a:spcBef>
-                <a:spcPts val="400"/>
-              </a:spcBef>
-            </a:pPr>
-            <a:r>
-              <a:rPr sz="1000">
-                <a:solidFill>
-                  <a:srgbClr val="202020"/>
-                </a:solidFill>
-              </a:rPr>
-              <a:t>Japanese filings via irbank, kitaishihon, buffett-code, kabutan, MarkLines (incl. TBK JSAE 2022 exhibit; Mikuni 2022 BEV-truck e-oil pump disclosure; Yamada e-water pump adoptions)</a:t>
-            </a:r>
-          </a:p>
-          <a:p>
-            <a:pPr>
-              <a:spcBef>
-                <a:spcPts val="400"/>
-              </a:spcBef>
-            </a:pPr>
-            <a:r>
-              <a:rPr sz="1000">
-                <a:solidFill>
-                  <a:srgbClr val="202020"/>
-                </a:solidFill>
-              </a:rPr>
-              <a:t>Aggregators for computed ratios: macrotrends, stockanalysis, Simply Wall St — cross-checked against filings; market research (MarketsandMarkets, GVR, IDTechEx) used directionally only</a:t>
+              <a:t>Method &amp; confidence tiers</a:t>
+            </a:r>
+          </a:p>
+          <a:p>
+            <a:pPr>
+              <a:spcBef>
+                <a:spcPts val="400"/>
+              </a:spcBef>
+            </a:pPr>
+            <a:r>
+              <a:rPr sz="1100">
+                <a:solidFill>
+                  <a:srgbClr val="202020"/>
+                </a:solidFill>
+              </a:rPr>
+              <a:t>Two deep-research studies (brake market; pump market): 5 parallel search angles each, claims extracted as falsifiable statements, then ADVERSARIAL VERIFICATION — 3 independent voters per claim set, actively attempting refutation</a:t>
+            </a:r>
+          </a:p>
+          <a:p>
+            <a:pPr>
+              <a:spcBef>
+                <a:spcPts val="400"/>
+              </a:spcBef>
+            </a:pPr>
+            <a:r>
+              <a:rPr sz="1100">
+                <a:solidFill>
+                  <a:srgbClr val="202020"/>
+                </a:solidFill>
+              </a:rPr>
+              <a:t>Tier 1: peer-reviewed papers, primary regulation, audited filings (TBK tanshin, Concentric AR2023, SEC)</a:t>
+            </a:r>
+          </a:p>
+          <a:p>
+            <a:pPr>
+              <a:spcBef>
+                <a:spcPts val="400"/>
+              </a:spcBef>
+            </a:pPr>
+            <a:r>
+              <a:rPr sz="1100">
+                <a:solidFill>
+                  <a:srgbClr val="202020"/>
+                </a:solidFill>
+              </a:rPr>
+              <a:t>Tier 2: government data and multi-source-verified company/industry figures</a:t>
+            </a:r>
+          </a:p>
+          <a:p>
+            <a:pPr>
+              <a:spcBef>
+                <a:spcPts val="400"/>
+              </a:spcBef>
+            </a:pPr>
+            <a:r>
+              <a:rPr sz="1100">
+                <a:solidFill>
+                  <a:srgbClr val="202020"/>
+                </a:solidFill>
+              </a:rPr>
+              <a:t>Tier 3: single-source estimates and market research — always labeled in the underlying documents</a:t>
+            </a:r>
+          </a:p>
+        </p:txBody>
+      </p:sp>
+      <p:sp>
+        <p:nvSpPr>
+          <p:cNvPr id="5" name="TextBox 4"/>
+          <p:cNvSpPr txBox="1"/>
+          <p:nvPr/>
+        </p:nvSpPr>
+        <p:spPr>
+          <a:xfrm>
+            <a:off x="6217920" y="1417320"/>
+            <a:ext cx="5532120" cy="2377440"/>
+          </a:xfrm>
+          <a:prstGeom prst="rect">
+            <a:avLst/>
+          </a:prstGeom>
+          <a:solidFill>
+            <a:srgbClr val="F2F2F2"/>
+          </a:solidFill>
+          <a:ln w="15875">
+            <a:solidFill>
+              <a:srgbClr val="7F1D1D"/>
+            </a:solidFill>
+          </a:ln>
+        </p:spPr>
+        <p:txBody>
+          <a:bodyPr wrap="square" lIns="137160" rIns="137160" tIns="109728">
+            <a:spAutoFit/>
+          </a:bodyPr>
+          <a:lstStyle/>
+          <a:p>
+            <a:r>
+              <a:rPr sz="1500" b="1">
+                <a:solidFill>
+                  <a:srgbClr val="7F1D1D"/>
+                </a:solidFill>
+              </a:rPr>
+              <a:t>Corrections made by verification (transparency)</a:t>
+            </a:r>
+          </a:p>
+          <a:p>
+            <a:pPr>
+              <a:spcBef>
+                <a:spcPts val="400"/>
+              </a:spcBef>
+            </a:pPr>
+            <a:r>
+              <a:rPr sz="1100">
+                <a:solidFill>
+                  <a:srgbClr val="202020"/>
+                </a:solidFill>
+              </a:rPr>
+              <a:t>TBK's famous '~70% share' belongs to its WATER PUMPS, not brakes (brakes: 'top share', unaudited)</a:t>
+            </a:r>
+          </a:p>
+          <a:p>
+            <a:pPr>
+              <a:spcBef>
+                <a:spcPts val="400"/>
+              </a:spcBef>
+            </a:pPr>
+            <a:r>
+              <a:rPr sz="1100">
+                <a:solidFill>
+                  <a:srgbClr val="202020"/>
+                </a:solidFill>
+              </a:rPr>
+              <a:t>Euro 7 heavy-duty brake-dust limits apply ~2030, not 2028/29 (those are exhaust dates)</a:t>
+            </a:r>
+          </a:p>
+          <a:p>
+            <a:pPr>
+              <a:spcBef>
+                <a:spcPts val="400"/>
+              </a:spcBef>
+            </a:pPr>
+            <a:r>
+              <a:rPr sz="1100">
+                <a:solidFill>
+                  <a:srgbClr val="202020"/>
+                </a:solidFill>
+              </a:rPr>
+              <a:t>Concentric R&amp;D = 2.3% of sales per AR2023 — the circulating '~5%' was wrong</a:t>
+            </a:r>
+          </a:p>
+          <a:p>
+            <a:pPr>
+              <a:spcBef>
+                <a:spcPts val="400"/>
+              </a:spcBef>
+            </a:pPr>
+            <a:r>
+              <a:rPr sz="1100">
+                <a:solidFill>
+                  <a:srgbClr val="202020"/>
+                </a:solidFill>
+              </a:rPr>
+              <a:t>'85-90% of Asia on drums' could not be corroborated — stated as 'majority' only</a:t>
+            </a:r>
+          </a:p>
+          <a:p>
+            <a:pPr>
+              <a:spcBef>
+                <a:spcPts val="400"/>
+              </a:spcBef>
+            </a:pPr>
+            <a:r>
+              <a:rPr sz="1100">
+                <a:solidFill>
+                  <a:srgbClr val="202020"/>
+                </a:solidFill>
+              </a:rPr>
+              <a:t>A claimed TBK-Mikuni alliance is erroneous (conflation with Mikuni-Suzuki)</a:t>
+            </a:r>
+          </a:p>
+          <a:p>
+            <a:pPr>
+              <a:spcBef>
+                <a:spcPts val="400"/>
+              </a:spcBef>
+            </a:pPr>
+            <a:r>
+              <a:rPr sz="1100">
+                <a:solidFill>
+                  <a:srgbClr val="202020"/>
+                </a:solidFill>
+              </a:rPr>
+              <a:t>Aggregator's 'TBK FY26 ¥138M profit' contradicted by the audited tanshin (-¥131M)</a:t>
+            </a:r>
+          </a:p>
+        </p:txBody>
+      </p:sp>
+      <p:sp>
+        <p:nvSpPr>
+          <p:cNvPr id="6" name="TextBox 5"/>
+          <p:cNvSpPr txBox="1"/>
+          <p:nvPr/>
+        </p:nvSpPr>
+        <p:spPr>
+          <a:xfrm>
+            <a:off x="457200" y="3931920"/>
+            <a:ext cx="5577840" cy="2377440"/>
+          </a:xfrm>
+          <a:prstGeom prst="rect">
+            <a:avLst/>
+          </a:prstGeom>
+          <a:solidFill>
+            <a:srgbClr val="F2F2F2"/>
+          </a:solidFill>
+          <a:ln w="15875">
+            <a:solidFill>
+              <a:srgbClr val="1F4E78"/>
+            </a:solidFill>
+          </a:ln>
+        </p:spPr>
+        <p:txBody>
+          <a:bodyPr wrap="square" lIns="137160" rIns="137160" tIns="109728">
+            <a:spAutoFit/>
+          </a:bodyPr>
+          <a:lstStyle/>
+          <a:p>
+            <a:r>
+              <a:rPr sz="1500" b="1">
+                <a:solidFill>
+                  <a:srgbClr val="1F4E78"/>
+                </a:solidFill>
+              </a:rPr>
+              <a:t>Known limitations</a:t>
+            </a:r>
+          </a:p>
+          <a:p>
+            <a:pPr>
+              <a:spcBef>
+                <a:spcPts val="400"/>
+              </a:spcBef>
+            </a:pPr>
+            <a:r>
+              <a:rPr sz="1100">
+                <a:solidFill>
+                  <a:srgbClr val="202020"/>
+                </a:solidFill>
+              </a:rPr>
+              <a:t>Full-text retrieval was blocked in the research environment: paywalled SAE/journal numbers rest on abstracts; flagged where unverified</a:t>
+            </a:r>
+          </a:p>
+          <a:p>
+            <a:pPr>
+              <a:spcBef>
+                <a:spcPts val="400"/>
+              </a:spcBef>
+            </a:pPr>
+            <a:r>
+              <a:rPr sz="1100">
+                <a:solidFill>
+                  <a:srgbClr val="202020"/>
+                </a:solidFill>
+              </a:rPr>
+              <a:t>No peer discloses brake-only or pump-only R&amp;D, gross profit, or segment margins — group figures used; ratios are the valid comparison</a:t>
+            </a:r>
+          </a:p>
+          <a:p>
+            <a:pPr>
+              <a:spcBef>
+                <a:spcPts val="400"/>
+              </a:spcBef>
+            </a:pPr>
+            <a:r>
+              <a:rPr sz="1100">
+                <a:solidFill>
+                  <a:srgbClr val="202020"/>
+                </a:solidFill>
+              </a:rPr>
+              <a:t>Accounting bases differ: German/Italian nature-of-expense 'gross margins' (Knorr ~50%, Brembo ~50%) are materials-only and EXCLUDED from margin comparisons; JGAAP fully expenses R&amp;D while IFRS peers capitalize part</a:t>
+            </a:r>
+          </a:p>
+          <a:p>
+            <a:pPr>
+              <a:spcBef>
+                <a:spcPts val="400"/>
+              </a:spcBef>
+            </a:pPr>
+            <a:r>
+              <a:rPr sz="1100">
+                <a:solidFill>
+                  <a:srgbClr val="202020"/>
+                </a:solidFill>
+              </a:rPr>
+              <a:t>TBK FY3/26 division split estimated from FY3/25 (yuho due June 2026); USD at ¥150/USD</a:t>
+            </a:r>
+          </a:p>
+        </p:txBody>
+      </p:sp>
+      <p:sp>
+        <p:nvSpPr>
+          <p:cNvPr id="7" name="TextBox 6"/>
+          <p:cNvSpPr txBox="1"/>
+          <p:nvPr/>
+        </p:nvSpPr>
+        <p:spPr>
+          <a:xfrm>
+            <a:off x="6217920" y="3931920"/>
+            <a:ext cx="5532120" cy="2377440"/>
+          </a:xfrm>
+          <a:prstGeom prst="rect">
+            <a:avLst/>
+          </a:prstGeom>
+          <a:solidFill>
+            <a:srgbClr val="F2F2F2"/>
+          </a:solidFill>
+          <a:ln w="15875">
+            <a:solidFill>
+              <a:srgbClr val="548235"/>
+            </a:solidFill>
+          </a:ln>
+        </p:spPr>
+        <p:txBody>
+          <a:bodyPr wrap="square" lIns="137160" rIns="137160" tIns="109728">
+            <a:spAutoFit/>
+          </a:bodyPr>
+          <a:lstStyle/>
+          <a:p>
+            <a:r>
+              <a:rPr sz="1500" b="1">
+                <a:solidFill>
+                  <a:srgbClr val="548235"/>
+                </a:solidFill>
+              </a:rPr>
+              <a:t>Data hierarchy &amp; framework constructs</a:t>
+            </a:r>
+          </a:p>
+          <a:p>
+            <a:pPr>
+              <a:spcBef>
+                <a:spcPts val="400"/>
+              </a:spcBef>
+            </a:pPr>
+            <a:r>
+              <a:rPr sz="1100">
+                <a:solidFill>
+                  <a:srgbClr val="202020"/>
+                </a:solidFill>
+              </a:rPr>
+              <a:t>Where sources conflict, the audited primary document wins (e.g., TBK tanshin over aggregators)</a:t>
+            </a:r>
+          </a:p>
+          <a:p>
+            <a:pPr>
+              <a:spcBef>
+                <a:spcPts val="400"/>
+              </a:spcBef>
+            </a:pPr>
+            <a:r>
+              <a:rPr sz="1100">
+                <a:solidFill>
+                  <a:srgbClr val="202020"/>
+                </a:solidFill>
+              </a:rPr>
+              <a:t>Consistent-basis peer metrics (margins, R&amp;D, ROIC) come from the user-provided 10-year/LTM peer dataset — same methodology across all 7 companies</a:t>
+            </a:r>
+          </a:p>
+          <a:p>
+            <a:pPr>
+              <a:spcBef>
+                <a:spcPts val="400"/>
+              </a:spcBef>
+            </a:pPr>
+            <a:r>
+              <a:rPr sz="1100">
+                <a:solidFill>
+                  <a:srgbClr val="202020"/>
+                </a:solidFill>
+              </a:rPr>
+              <a:t>ROIIC (ROICm) = return on incremental invested capital over the stated horizon; RR = reinvestment rate; R&amp;D Capital Base = cumulative R&amp;D capitalized/amortized per the dataset framework — a modeling construct, not a balance-sheet line</a:t>
+            </a:r>
+          </a:p>
+          <a:p>
+            <a:pPr>
+              <a:spcBef>
+                <a:spcPts val="400"/>
+              </a:spcBef>
+            </a:pPr>
+            <a:r>
+              <a:rPr sz="1100">
+                <a:solidFill>
+                  <a:srgbClr val="202020"/>
+                </a:solidFill>
+              </a:rPr>
+              <a:t>Scenario pages state assumptions on-slide; peer-margin scenarios use comparable reporters only</a:t>
             </a:r>
           </a:p>
         </p:txBody>
@@ -8086,6 +10995,504 @@
                 </a:solidFill>
               </a:rPr>
               <a:t>Value shifts: wear parts → corrosion/NVH/low-dust + retarders &amp; blending</a:t>
+            </a:r>
+          </a:p>
+        </p:txBody>
+      </p:sp>
+    </p:spTree>
+  </p:cSld>
+  <p:clrMapOvr>
+    <a:masterClrMapping/>
+  </p:clrMapOvr>
+</p:sld>
+</file>
+
+<file path=ppt/slides/slide20.xml><?xml version="1.0" encoding="utf-8"?>
+<p:sld xmlns:a="http://schemas.openxmlformats.org/drawingml/2006/main" xmlns:p="http://schemas.openxmlformats.org/presentationml/2006/main" xmlns:r="http://schemas.openxmlformats.org/officeDocument/2006/relationships">
+  <p:cSld>
+    <p:spTree>
+      <p:nvGrpSpPr>
+        <p:cNvPr id="1" name=""/>
+        <p:cNvGrpSpPr/>
+        <p:nvPr/>
+      </p:nvGrpSpPr>
+      <p:grpSpPr/>
+      <p:sp>
+        <p:nvSpPr>
+          <p:cNvPr id="2" name="TextBox 1"/>
+          <p:cNvSpPr txBox="1"/>
+          <p:nvPr/>
+        </p:nvSpPr>
+        <p:spPr>
+          <a:xfrm>
+            <a:off x="0" y="0"/>
+            <a:ext cx="12191695" cy="868680"/>
+          </a:xfrm>
+          <a:prstGeom prst="rect">
+            <a:avLst/>
+          </a:prstGeom>
+          <a:solidFill>
+            <a:srgbClr val="1F4E78"/>
+          </a:solidFill>
+        </p:spPr>
+        <p:txBody>
+          <a:bodyPr wrap="square" lIns="457200" tIns="164592">
+            <a:spAutoFit/>
+          </a:bodyPr>
+          <a:lstStyle/>
+          <a:p>
+            <a:r>
+              <a:rPr sz="2600" b="1">
+                <a:solidFill>
+                  <a:srgbClr val="FFFFFF"/>
+                </a:solidFill>
+              </a:rPr>
+              <a:t>Sources</a:t>
+            </a:r>
+          </a:p>
+        </p:txBody>
+      </p:sp>
+      <p:sp>
+        <p:nvSpPr>
+          <p:cNvPr id="3" name="TextBox 2"/>
+          <p:cNvSpPr txBox="1"/>
+          <p:nvPr/>
+        </p:nvSpPr>
+        <p:spPr>
+          <a:xfrm>
+            <a:off x="457200" y="1188720"/>
+            <a:ext cx="5577840" cy="2606040"/>
+          </a:xfrm>
+          <a:prstGeom prst="rect">
+            <a:avLst/>
+          </a:prstGeom>
+          <a:solidFill>
+            <a:srgbClr val="F2F2F2"/>
+          </a:solidFill>
+          <a:ln w="15875">
+            <a:solidFill>
+              <a:srgbClr val="1F4E78"/>
+            </a:solidFill>
+          </a:ln>
+        </p:spPr>
+        <p:txBody>
+          <a:bodyPr wrap="square" lIns="137160" rIns="137160" tIns="109728">
+            <a:spAutoFit/>
+          </a:bodyPr>
+          <a:lstStyle/>
+          <a:p>
+            <a:r>
+              <a:rPr sz="1500" b="1">
+                <a:solidFill>
+                  <a:srgbClr val="1F4E78"/>
+                </a:solidFill>
+              </a:rPr>
+              <a:t>Primary &amp; audited</a:t>
+            </a:r>
+          </a:p>
+          <a:p>
+            <a:pPr>
+              <a:spcBef>
+                <a:spcPts val="400"/>
+              </a:spcBef>
+            </a:pPr>
+            <a:r>
+              <a:rPr sz="1000">
+                <a:solidFill>
+                  <a:srgbClr val="202020"/>
+                </a:solidFill>
+              </a:rPr>
+              <a:t>TBK Co., Ltd. — Consolidated Financial Results FY ended 31 Mar 2026 (tanshin, 14 May 2026); securities-report risk factors (有価証券報告書 via kitaishihon/irbank)</a:t>
+            </a:r>
+          </a:p>
+          <a:p>
+            <a:pPr>
+              <a:spcBef>
+                <a:spcPts val="400"/>
+              </a:spcBef>
+            </a:pPr>
+            <a:r>
+              <a:rPr sz="1000">
+                <a:solidFill>
+                  <a:srgbClr val="202020"/>
+                </a:solidFill>
+              </a:rPr>
+              <a:t>Concentric AB — Annual Report 2023 (income statement, balance sheet, 5-year key figures)</a:t>
+            </a:r>
+          </a:p>
+          <a:p>
+            <a:pPr>
+              <a:spcBef>
+                <a:spcPts val="400"/>
+              </a:spcBef>
+            </a:pPr>
+            <a:r>
+              <a:rPr sz="1000">
+                <a:solidFill>
+                  <a:srgbClr val="202020"/>
+                </a:solidFill>
+              </a:rPr>
+              <a:t>User-provided datasets: TBK 10-year financials; Peers 10-year; Peers LTM (7 companies, consistent methodology)</a:t>
+            </a:r>
+          </a:p>
+          <a:p>
+            <a:pPr>
+              <a:spcBef>
+                <a:spcPts val="400"/>
+              </a:spcBef>
+            </a:pPr>
+            <a:r>
+              <a:rPr sz="1000">
+                <a:solidFill>
+                  <a:srgbClr val="202020"/>
+                </a:solidFill>
+              </a:rPr>
+              <a:t>SEC filings: Cummins 10-K/10-Q/8-K (FY2024-25); WABCO &amp; Meritor merger 8-Ks</a:t>
+            </a:r>
+          </a:p>
+          <a:p>
+            <a:pPr>
+              <a:spcBef>
+                <a:spcPts val="400"/>
+              </a:spcBef>
+            </a:pPr>
+            <a:r>
+              <a:rPr sz="1000">
+                <a:solidFill>
+                  <a:srgbClr val="202020"/>
+                </a:solidFill>
+              </a:rPr>
+              <a:t>Company releases: Knorr-Bremse FY2023-25; ZF AR2024-25; SAF-Holland AR2024; Mahle AR2024-25; Haldex year-end 2021; Rheinmetall FY2025 + AEQUITA divestment (3 Jun 2026); Circle BidCo/A.P. Møller offer documents (2024); Brakes India-TBK alliance (Dec 2025)</a:t>
+            </a:r>
+          </a:p>
+        </p:txBody>
+      </p:sp>
+      <p:sp>
+        <p:nvSpPr>
+          <p:cNvPr id="4" name="TextBox 3"/>
+          <p:cNvSpPr txBox="1"/>
+          <p:nvPr/>
+        </p:nvSpPr>
+        <p:spPr>
+          <a:xfrm>
+            <a:off x="6217920" y="1188720"/>
+            <a:ext cx="5532120" cy="2606040"/>
+          </a:xfrm>
+          <a:prstGeom prst="rect">
+            <a:avLst/>
+          </a:prstGeom>
+          <a:solidFill>
+            <a:srgbClr val="F2F2F2"/>
+          </a:solidFill>
+          <a:ln w="15875">
+            <a:solidFill>
+              <a:srgbClr val="1F4E78"/>
+            </a:solidFill>
+          </a:ln>
+        </p:spPr>
+        <p:txBody>
+          <a:bodyPr wrap="square" lIns="137160" rIns="137160" tIns="109728">
+            <a:spAutoFit/>
+          </a:bodyPr>
+          <a:lstStyle/>
+          <a:p>
+            <a:r>
+              <a:rPr sz="1500" b="1">
+                <a:solidFill>
+                  <a:srgbClr val="1F4E78"/>
+                </a:solidFill>
+              </a:rPr>
+              <a:t>Peer-reviewed &amp; academic</a:t>
+            </a:r>
+          </a:p>
+          <a:p>
+            <a:pPr>
+              <a:spcBef>
+                <a:spcPts val="400"/>
+              </a:spcBef>
+            </a:pPr>
+            <a:r>
+              <a:rPr sz="1000">
+                <a:solidFill>
+                  <a:srgbClr val="202020"/>
+                </a:solidFill>
+              </a:rPr>
+              <a:t>Göhring &amp; von Glasner, SAE 902206 (1990); Kajiyama et al. (Isuzu/TBK), SAE 902200 (1990); Day, Harding &amp; Newcomb, Proc IMechE (1984); Hoover et al., SAE 2005-01-3614; Subel &amp; Kienhöfer, Proc IMechE D (2020)</a:t>
+            </a:r>
+          </a:p>
+          <a:p>
+            <a:pPr>
+              <a:spcBef>
+                <a:spcPts val="400"/>
+              </a:spcBef>
+            </a:pPr>
+            <a:r>
+              <a:rPr sz="1000">
+                <a:solidFill>
+                  <a:srgbClr val="202020"/>
+                </a:solidFill>
+              </a:rPr>
+              <a:t>Ampadu, Alrejjal &amp; Ksaibati, JSDTL 8(1) 2023 — disc vs drum cost-effectiveness</a:t>
+            </a:r>
+          </a:p>
+          <a:p>
+            <a:pPr>
+              <a:spcBef>
+                <a:spcPts val="400"/>
+              </a:spcBef>
+            </a:pPr>
+            <a:r>
+              <a:rPr sz="1000">
+                <a:solidFill>
+                  <a:srgbClr val="202020"/>
+                </a:solidFill>
+              </a:rPr>
+              <a:t>Granitz et al., SN Applied Sciences (2021) — e-coolant pump, 13L HD diesel; Bitsis &amp; Miwa, SAE 2018-01-0980; Cummins SuperTruck 2, SAE 2019-01-0247; MIT S.M. thesis (2012) — HD parasitic losses</a:t>
+            </a:r>
+          </a:p>
+          <a:p>
+            <a:pPr>
+              <a:spcBef>
+                <a:spcPts val="400"/>
+              </a:spcBef>
+            </a:pPr>
+            <a:r>
+              <a:rPr sz="1000">
+                <a:solidFill>
+                  <a:srgbClr val="202020"/>
+                </a:solidFill>
+              </a:rPr>
+              <a:t>Zhang et al., J. Hazardous Materials 465 (2024); Hagino, Atmosphere 15:75 (2024, JARI); Environmental Pollution (2023) — regen braking &amp; brake wear</a:t>
+            </a:r>
+          </a:p>
+          <a:p>
+            <a:pPr>
+              <a:spcBef>
+                <a:spcPts val="400"/>
+              </a:spcBef>
+            </a:pPr>
+            <a:r>
+              <a:rPr sz="1000">
+                <a:solidFill>
+                  <a:srgbClr val="202020"/>
+                </a:solidFill>
+              </a:rPr>
+              <a:t>Energies 16:4024 (2023), 19:1748 (2026); Sustainability 15:3132 (2023); Energies 16:168 (2023) — BEV/FCEV truck &amp; bus thermal management</a:t>
+            </a:r>
+          </a:p>
+        </p:txBody>
+      </p:sp>
+      <p:sp>
+        <p:nvSpPr>
+          <p:cNvPr id="5" name="TextBox 4"/>
+          <p:cNvSpPr txBox="1"/>
+          <p:nvPr/>
+        </p:nvSpPr>
+        <p:spPr>
+          <a:xfrm>
+            <a:off x="457200" y="3977639"/>
+            <a:ext cx="5577840" cy="2606040"/>
+          </a:xfrm>
+          <a:prstGeom prst="rect">
+            <a:avLst/>
+          </a:prstGeom>
+          <a:solidFill>
+            <a:srgbClr val="F2F2F2"/>
+          </a:solidFill>
+          <a:ln w="15875">
+            <a:solidFill>
+              <a:srgbClr val="1F4E78"/>
+            </a:solidFill>
+          </a:ln>
+        </p:spPr>
+        <p:txBody>
+          <a:bodyPr wrap="square" lIns="137160" rIns="137160" tIns="109728">
+            <a:spAutoFit/>
+          </a:bodyPr>
+          <a:lstStyle/>
+          <a:p>
+            <a:r>
+              <a:rPr sz="1500" b="1">
+                <a:solidFill>
+                  <a:srgbClr val="1F4E78"/>
+                </a:solidFill>
+              </a:rPr>
+              <a:t>Regulatory &amp; legal</a:t>
+            </a:r>
+          </a:p>
+          <a:p>
+            <a:pPr>
+              <a:spcBef>
+                <a:spcPts val="400"/>
+              </a:spcBef>
+            </a:pPr>
+            <a:r>
+              <a:rPr sz="1000">
+                <a:solidFill>
+                  <a:srgbClr val="202020"/>
+                </a:solidFill>
+              </a:rPr>
+              <a:t>NHTSA: FMVSS 121 final rule 74 FR 37122 (2009) + Regulatory Impact Analysis; DOT HS 811 367 (2010, NADS simulator); ESV 07-0242 (2007); heavy-vehicle AEB NPRM (2023)</a:t>
+            </a:r>
+          </a:p>
+          <a:p>
+            <a:pPr>
+              <a:spcBef>
+                <a:spcPts val="400"/>
+              </a:spcBef>
+            </a:pPr>
+            <a:r>
+              <a:rPr sz="1000">
+                <a:solidFill>
+                  <a:srgbClr val="202020"/>
+                </a:solidFill>
+              </a:rPr>
+              <a:t>UNECE Regulation No. 13 (braking, Type-II fade tests)</a:t>
+            </a:r>
+          </a:p>
+          <a:p>
+            <a:pPr>
+              <a:spcBef>
+                <a:spcPts val="400"/>
+              </a:spcBef>
+            </a:pPr>
+            <a:r>
+              <a:rPr sz="1000">
+                <a:solidFill>
+                  <a:srgbClr val="202020"/>
+                </a:solidFill>
+              </a:rPr>
+              <a:t>EU: Reg 2019/1242 &amp; 2024/1610 (HDV CO2); Reg 2024/1257 (Euro 7); Reg 2017/2400 Annex IX (VECTO auxiliaries) + JRC112015; EPA Phase 2 (40 CFR 1037.520 accessory credits) &amp; Phase 3 (2024)</a:t>
+            </a:r>
+          </a:p>
+          <a:p>
+            <a:pPr>
+              <a:spcBef>
+                <a:spcPts val="400"/>
+              </a:spcBef>
+            </a:pPr>
+            <a:r>
+              <a:rPr sz="1000">
+                <a:solidFill>
+                  <a:srgbClr val="202020"/>
+                </a:solidFill>
+              </a:rPr>
+              <a:t>EC merger decisions: M.8102 Valeo/FTE (2017, 90-100% concentration, Raicam remedy); Knorr-Bremse/Haldex Phase II (IP-17-2126, 2017)</a:t>
+            </a:r>
+          </a:p>
+          <a:p>
+            <a:pPr>
+              <a:spcBef>
+                <a:spcPts val="400"/>
+              </a:spcBef>
+            </a:pPr>
+            <a:r>
+              <a:rPr sz="1000">
+                <a:solidFill>
+                  <a:srgbClr val="202020"/>
+                </a:solidFill>
+              </a:rPr>
+              <a:t>Japan: MY2025 HDV fuel-economy standards (via ICCT/TransportPolicy); METI supplier-transition studies (2023, 2025); FMCSA Crash Cost Methodology (2025); AAA Foundation (2017)</a:t>
+            </a:r>
+          </a:p>
+        </p:txBody>
+      </p:sp>
+      <p:sp>
+        <p:nvSpPr>
+          <p:cNvPr id="6" name="TextBox 5"/>
+          <p:cNvSpPr txBox="1"/>
+          <p:nvPr/>
+        </p:nvSpPr>
+        <p:spPr>
+          <a:xfrm>
+            <a:off x="6217920" y="3977639"/>
+            <a:ext cx="5532120" cy="2606040"/>
+          </a:xfrm>
+          <a:prstGeom prst="rect">
+            <a:avLst/>
+          </a:prstGeom>
+          <a:solidFill>
+            <a:srgbClr val="F2F2F2"/>
+          </a:solidFill>
+          <a:ln w="15875">
+            <a:solidFill>
+              <a:srgbClr val="1F4E78"/>
+            </a:solidFill>
+          </a:ln>
+        </p:spPr>
+        <p:txBody>
+          <a:bodyPr wrap="square" lIns="137160" rIns="137160" tIns="109728">
+            <a:spAutoFit/>
+          </a:bodyPr>
+          <a:lstStyle/>
+          <a:p>
+            <a:r>
+              <a:rPr sz="1500" b="1">
+                <a:solidFill>
+                  <a:srgbClr val="1F4E78"/>
+                </a:solidFill>
+              </a:rPr>
+              <a:t>Industry &amp; financial data (verified, labeled where single-source)</a:t>
+            </a:r>
+          </a:p>
+          <a:p>
+            <a:pPr>
+              <a:spcBef>
+                <a:spcPts val="400"/>
+              </a:spcBef>
+            </a:pPr>
+            <a:r>
+              <a:rPr sz="1000">
+                <a:solidFill>
+                  <a:srgbClr val="202020"/>
+                </a:solidFill>
+              </a:rPr>
+              <a:t>Adoption data: Haldex ADB history; Bendix/Knorr production milestones; FleetOwner, TruckingInfo, Fleet Maintenance, Transport Topics, Fleet Equipment; NACFE confidence reports; NAS 25542; DOE SuperTruck (OSTI)</a:t>
+            </a:r>
+          </a:p>
+          <a:p>
+            <a:pPr>
+              <a:spcBef>
+                <a:spcPts val="400"/>
+              </a:spcBef>
+            </a:pPr>
+            <a:r>
+              <a:rPr sz="1000">
+                <a:solidFill>
+                  <a:srgbClr val="202020"/>
+                </a:solidFill>
+              </a:rPr>
+              <a:t>Deal records: Knorr-Bremse-Bendix (2002); ZF-Wabco $7bn (2020); Cummins-Meritor $3.7bn (2022); SAF-Holland-Haldex (2022); Concentric take-private SEK 230 (2024); Pierburg-AEQUITA €350M (2026)</a:t>
+            </a:r>
+          </a:p>
+          <a:p>
+            <a:pPr>
+              <a:spcBef>
+                <a:spcPts val="400"/>
+              </a:spcBef>
+            </a:pPr>
+            <a:r>
+              <a:rPr sz="1000">
+                <a:solidFill>
+                  <a:srgbClr val="202020"/>
+                </a:solidFill>
+              </a:rPr>
+              <a:t>Japanese filings via irbank, kitaishihon, buffett-code, kabutan, MarkLines (incl. TBK JSAE 2022 exhibit; Mikuni 2022 BEV-truck e-oil pump disclosure; Yamada e-water pump adoptions)</a:t>
+            </a:r>
+          </a:p>
+          <a:p>
+            <a:pPr>
+              <a:spcBef>
+                <a:spcPts val="400"/>
+              </a:spcBef>
+            </a:pPr>
+            <a:r>
+              <a:rPr sz="1000">
+                <a:solidFill>
+                  <a:srgbClr val="202020"/>
+                </a:solidFill>
+              </a:rPr>
+              <a:t>Aggregators for computed ratios: macrotrends, stockanalysis, Simply Wall St — cross-checked against filings; market research (MarketsandMarkets, GVR, IDTechEx) used directionally only</a:t>
             </a:r>
           </a:p>
         </p:txBody>

--- a/TBK_rd_gap_slides.pptx
+++ b/TBK_rd_gap_slides.pptx
@@ -25,6 +25,7 @@
     <p:sldId id="273" r:id="rId24"/>
     <p:sldId id="274" r:id="rId25"/>
     <p:sldId id="275" r:id="rId26"/>
+    <p:sldId id="276" r:id="rId27"/>
   </p:sldIdLst>
   <p:sldSz cx="12191695" cy="6858000" type="screen4x3"/>
   <p:notesSz cx="6858000" cy="9144000"/>
@@ -342,6 +343,397 @@
 <file path=ppt/charts/chart10.xml><?xml version="1.0" encoding="utf-8"?>
 <c:chartSpace xmlns:c="http://schemas.openxmlformats.org/drawingml/2006/chart" xmlns:a="http://schemas.openxmlformats.org/drawingml/2006/main" xmlns:r="http://schemas.openxmlformats.org/officeDocument/2006/relationships">
   <c:date1904 val="0"/>
+  <c:roundedCorners val="0"/>
+  <mc:AlternateContent xmlns:mc="http://schemas.openxmlformats.org/markup-compatibility/2006">
+    <mc:Choice xmlns:c14="http://schemas.microsoft.com/office/drawing/2007/8/2/chart" Requires="c14">
+      <c14:style val="118"/>
+    </mc:Choice>
+    <mc:Fallback>
+      <c:style val="18"/>
+    </mc:Fallback>
+  </mc:AlternateContent>
+  <c:chart>
+    <c:autoTitleDeleted val="1"/>
+    <c:plotArea>
+      <c:layout/>
+      <c:radarChart>
+        <c:radarStyle val="marker"/>
+        <c:varyColors val="0"/>
+        <c:ser>
+          <c:idx val="0"/>
+          <c:order val="0"/>
+          <c:tx>
+            <c:strRef>
+              <c:f>Sheet1!$B$1</c:f>
+              <c:strCache>
+                <c:ptCount val="1"/>
+                <c:pt idx="0">
+                  <c:v>TBK</c:v>
+                </c:pt>
+              </c:strCache>
+            </c:strRef>
+          </c:tx>
+          <c:spPr>
+            <a:ln w="28575">
+              <a:solidFill>
+                <a:srgbClr val="7F1D1D"/>
+              </a:solidFill>
+            </a:ln>
+          </c:spPr>
+          <c:cat>
+            <c:strRef>
+              <c:f>Sheet1!$A$2:$A$11</c:f>
+              <c:strCache>
+                <c:ptCount val="10"/>
+                <c:pt idx="0">
+                  <c:v>Criticality</c:v>
+                </c:pt>
+                <c:pt idx="1">
+                  <c:v>Standard premium</c:v>
+                </c:pt>
+                <c:pt idx="2">
+                  <c:v>Market hegemony</c:v>
+                </c:pt>
+                <c:pt idx="3">
+                  <c:v>Ecosystem</c:v>
+                </c:pt>
+                <c:pt idx="4">
+                  <c:v>Lifecycle cost adv.</c:v>
+                </c:pt>
+                <c:pt idx="5">
+                  <c:v>Substitution resistance</c:v>
+                </c:pt>
+                <c:pt idx="6">
+                  <c:v>Demand horizon</c:v>
+                </c:pt>
+                <c:pt idx="7">
+                  <c:v>Capital allocation</c:v>
+                </c:pt>
+                <c:pt idx="8">
+                  <c:v>Reinvestment runway</c:v>
+                </c:pt>
+                <c:pt idx="9">
+                  <c:v>Reverse- Lindy</c:v>
+                </c:pt>
+              </c:strCache>
+            </c:strRef>
+          </c:cat>
+          <c:val>
+            <c:numRef>
+              <c:f>Sheet1!$B$2:$B$11</c:f>
+              <c:numCache>
+                <c:formatCode>General</c:formatCode>
+                <c:ptCount val="10"/>
+                <c:pt idx="0">
+                  <c:v>7.5</c:v>
+                </c:pt>
+                <c:pt idx="1">
+                  <c:v>6.0</c:v>
+                </c:pt>
+                <c:pt idx="2">
+                  <c:v>8.0</c:v>
+                </c:pt>
+                <c:pt idx="3">
+                  <c:v>2.0</c:v>
+                </c:pt>
+                <c:pt idx="4">
+                  <c:v>3.0</c:v>
+                </c:pt>
+                <c:pt idx="5">
+                  <c:v>3.5</c:v>
+                </c:pt>
+                <c:pt idx="6">
+                  <c:v>7.0</c:v>
+                </c:pt>
+                <c:pt idx="7">
+                  <c:v>2.0</c:v>
+                </c:pt>
+                <c:pt idx="8">
+                  <c:v>3.0</c:v>
+                </c:pt>
+                <c:pt idx="9">
+                  <c:v>4.0</c:v>
+                </c:pt>
+              </c:numCache>
+            </c:numRef>
+          </c:val>
+          <c:smooth val="0"/>
+        </c:ser>
+        <c:ser>
+          <c:idx val="1"/>
+          <c:order val="1"/>
+          <c:tx>
+            <c:strRef>
+              <c:f>Sheet1!$C$1</c:f>
+              <c:strCache>
+                <c:ptCount val="1"/>
+                <c:pt idx="0">
+                  <c:v>Concentric</c:v>
+                </c:pt>
+              </c:strCache>
+            </c:strRef>
+          </c:tx>
+          <c:spPr>
+            <a:ln w="28575">
+              <a:solidFill>
+                <a:srgbClr val="548235"/>
+              </a:solidFill>
+            </a:ln>
+          </c:spPr>
+          <c:cat>
+            <c:strRef>
+              <c:f>Sheet1!$A$2:$A$11</c:f>
+              <c:strCache>
+                <c:ptCount val="10"/>
+                <c:pt idx="0">
+                  <c:v>Criticality</c:v>
+                </c:pt>
+                <c:pt idx="1">
+                  <c:v>Standard premium</c:v>
+                </c:pt>
+                <c:pt idx="2">
+                  <c:v>Market hegemony</c:v>
+                </c:pt>
+                <c:pt idx="3">
+                  <c:v>Ecosystem</c:v>
+                </c:pt>
+                <c:pt idx="4">
+                  <c:v>Lifecycle cost adv.</c:v>
+                </c:pt>
+                <c:pt idx="5">
+                  <c:v>Substitution resistance</c:v>
+                </c:pt>
+                <c:pt idx="6">
+                  <c:v>Demand horizon</c:v>
+                </c:pt>
+                <c:pt idx="7">
+                  <c:v>Capital allocation</c:v>
+                </c:pt>
+                <c:pt idx="8">
+                  <c:v>Reinvestment runway</c:v>
+                </c:pt>
+                <c:pt idx="9">
+                  <c:v>Reverse- Lindy</c:v>
+                </c:pt>
+              </c:strCache>
+            </c:strRef>
+          </c:cat>
+          <c:val>
+            <c:numRef>
+              <c:f>Sheet1!$C$2:$C$11</c:f>
+              <c:numCache>
+                <c:formatCode>General</c:formatCode>
+                <c:ptCount val="10"/>
+                <c:pt idx="0">
+                  <c:v>7.0</c:v>
+                </c:pt>
+                <c:pt idx="1">
+                  <c:v>6.0</c:v>
+                </c:pt>
+                <c:pt idx="2">
+                  <c:v>7.5</c:v>
+                </c:pt>
+                <c:pt idx="3">
+                  <c:v>2.5</c:v>
+                </c:pt>
+                <c:pt idx="4">
+                  <c:v>7.0</c:v>
+                </c:pt>
+                <c:pt idx="5">
+                  <c:v>5.0</c:v>
+                </c:pt>
+                <c:pt idx="6">
+                  <c:v>7.5</c:v>
+                </c:pt>
+                <c:pt idx="7">
+                  <c:v>7.5</c:v>
+                </c:pt>
+                <c:pt idx="8">
+                  <c:v>7.0</c:v>
+                </c:pt>
+                <c:pt idx="9">
+                  <c:v>5.5</c:v>
+                </c:pt>
+              </c:numCache>
+            </c:numRef>
+          </c:val>
+          <c:smooth val="0"/>
+        </c:ser>
+        <c:ser>
+          <c:idx val="2"/>
+          <c:order val="2"/>
+          <c:tx>
+            <c:strRef>
+              <c:f>Sheet1!$D$1</c:f>
+              <c:strCache>
+                <c:ptCount val="1"/>
+                <c:pt idx="0">
+                  <c:v>Peer avg (6 scored)</c:v>
+                </c:pt>
+              </c:strCache>
+            </c:strRef>
+          </c:tx>
+          <c:spPr>
+            <a:ln w="28575">
+              <a:solidFill>
+                <a:srgbClr val="595959"/>
+              </a:solidFill>
+            </a:ln>
+          </c:spPr>
+          <c:cat>
+            <c:strRef>
+              <c:f>Sheet1!$A$2:$A$11</c:f>
+              <c:strCache>
+                <c:ptCount val="10"/>
+                <c:pt idx="0">
+                  <c:v>Criticality</c:v>
+                </c:pt>
+                <c:pt idx="1">
+                  <c:v>Standard premium</c:v>
+                </c:pt>
+                <c:pt idx="2">
+                  <c:v>Market hegemony</c:v>
+                </c:pt>
+                <c:pt idx="3">
+                  <c:v>Ecosystem</c:v>
+                </c:pt>
+                <c:pt idx="4">
+                  <c:v>Lifecycle cost adv.</c:v>
+                </c:pt>
+                <c:pt idx="5">
+                  <c:v>Substitution resistance</c:v>
+                </c:pt>
+                <c:pt idx="6">
+                  <c:v>Demand horizon</c:v>
+                </c:pt>
+                <c:pt idx="7">
+                  <c:v>Capital allocation</c:v>
+                </c:pt>
+                <c:pt idx="8">
+                  <c:v>Reinvestment runway</c:v>
+                </c:pt>
+                <c:pt idx="9">
+                  <c:v>Reverse- Lindy</c:v>
+                </c:pt>
+              </c:strCache>
+            </c:strRef>
+          </c:cat>
+          <c:val>
+            <c:numRef>
+              <c:f>Sheet1!$D$2:$D$11</c:f>
+              <c:numCache>
+                <c:formatCode>General</c:formatCode>
+                <c:ptCount val="10"/>
+                <c:pt idx="0">
+                  <c:v>7.17</c:v>
+                </c:pt>
+                <c:pt idx="1">
+                  <c:v>5.92</c:v>
+                </c:pt>
+                <c:pt idx="2">
+                  <c:v>6.58</c:v>
+                </c:pt>
+                <c:pt idx="3">
+                  <c:v>2.67</c:v>
+                </c:pt>
+                <c:pt idx="4">
+                  <c:v>4.75</c:v>
+                </c:pt>
+                <c:pt idx="5">
+                  <c:v>4.17</c:v>
+                </c:pt>
+                <c:pt idx="6">
+                  <c:v>6.75</c:v>
+                </c:pt>
+                <c:pt idx="7">
+                  <c:v>3.75</c:v>
+                </c:pt>
+                <c:pt idx="8">
+                  <c:v>5.08</c:v>
+                </c:pt>
+                <c:pt idx="9">
+                  <c:v>4.5</c:v>
+                </c:pt>
+              </c:numCache>
+            </c:numRef>
+          </c:val>
+          <c:smooth val="0"/>
+        </c:ser>
+        <c:axId val="2073612648"/>
+        <c:axId val="-2112772216"/>
+      </c:radarChart>
+      <c:catAx>
+        <c:axId val="2073612648"/>
+        <c:scaling>
+          <c:orientation val="minMax"/>
+        </c:scaling>
+        <c:delete val="0"/>
+        <c:axPos val="b"/>
+        <c:majorGridlines/>
+        <c:numFmt formatCode="m/d/yy" sourceLinked="1"/>
+        <c:majorTickMark val="out"/>
+        <c:minorTickMark val="none"/>
+        <c:tickLblPos val="nextTo"/>
+        <c:crossAx val="-2112772216"/>
+        <c:crosses val="autoZero"/>
+        <c:auto val="1"/>
+        <c:lblAlgn val="ctr"/>
+        <c:lblOffset val="100"/>
+        <c:noMultiLvlLbl val="0"/>
+      </c:catAx>
+      <c:valAx>
+        <c:axId val="-2112772216"/>
+        <c:scaling>
+          <c:orientation val="minMax"/>
+        </c:scaling>
+        <c:delete val="0"/>
+        <c:axPos val="l"/>
+        <c:majorGridlines/>
+        <c:numFmt formatCode="General" sourceLinked="1"/>
+        <c:majorTickMark val="cross"/>
+        <c:minorTickMark val="none"/>
+        <c:tickLblPos val="nextTo"/>
+        <c:crossAx val="2073612648"/>
+        <c:crosses val="autoZero"/>
+        <c:crossBetween val="between"/>
+      </c:valAx>
+    </c:plotArea>
+    <c:legend>
+      <c:legendPos val="b"/>
+      <c:overlay val="0"/>
+      <c:txPr>
+        <a:bodyPr/>
+        <a:lstStyle/>
+        <a:p>
+          <a:pPr>
+            <a:defRPr sz="1100"/>
+          </a:pPr>
+        </a:p>
+      </c:txPr>
+    </c:legend>
+    <c:plotVisOnly val="1"/>
+    <c:dispBlanksAs val="gap"/>
+    <c:showDLblsOverMax val="0"/>
+  </c:chart>
+  <c:txPr>
+    <a:bodyPr/>
+    <a:lstStyle/>
+    <a:p>
+      <a:pPr>
+        <a:defRPr sz="1800"/>
+      </a:pPr>
+      <a:endParaRPr lang="en-US"/>
+    </a:p>
+  </c:txPr>
+  <c:externalData r:id="rId1">
+    <c:autoUpdate val="0"/>
+  </c:externalData>
+</c:chartSpace>
+</file>
+
+<file path=ppt/charts/chart11.xml><?xml version="1.0" encoding="utf-8"?>
+<c:chartSpace xmlns:c="http://schemas.openxmlformats.org/drawingml/2006/chart" xmlns:a="http://schemas.openxmlformats.org/drawingml/2006/main" xmlns:r="http://schemas.openxmlformats.org/officeDocument/2006/relationships">
+  <c:date1904 val="0"/>
   <c:chart>
     <c:title>
       <c:tx>
@@ -841,7 +1233,7 @@
 </c:chartSpace>
 </file>
 
-<file path=ppt/charts/chart11.xml><?xml version="1.0" encoding="utf-8"?>
+<file path=ppt/charts/chart12.xml><?xml version="1.0" encoding="utf-8"?>
 <c:chartSpace xmlns:c="http://schemas.openxmlformats.org/drawingml/2006/chart" xmlns:a="http://schemas.openxmlformats.org/drawingml/2006/main" xmlns:r="http://schemas.openxmlformats.org/officeDocument/2006/relationships">
   <c:date1904 val="0"/>
   <c:chart>
@@ -2081,6 +2473,244 @@
           <a:lstStyle/>
           <a:p>
             <a:r>
+              <a:rPr sz="1300"/>
+              <a:t>Contribution margin by product (%)</a:t>
+            </a:r>
+          </a:p>
+        </c:rich>
+      </c:tx>
+      <c:layout/>
+      <c:overlay val="0"/>
+    </c:title>
+    <c:autoTitleDeleted val="0"/>
+    <c:plotArea>
+      <c:barChart>
+        <c:barDir val="col"/>
+        <c:grouping val="clustered"/>
+        <c:ser>
+          <c:idx val="0"/>
+          <c:order val="0"/>
+          <c:tx>
+            <c:strRef>
+              <c:f>Sheet1!$B$1</c:f>
+              <c:strCache>
+                <c:ptCount val="1"/>
+                <c:pt idx="0">
+                  <c:v>TBKK marginal profit %</c:v>
+                </c:pt>
+              </c:strCache>
+            </c:strRef>
+          </c:tx>
+          <c:spPr>
+            <a:solidFill>
+              <a:srgbClr val="7F1D1D"/>
+            </a:solidFill>
+          </c:spPr>
+          <c:cat>
+            <c:strRef>
+              <c:f>Sheet1!$A$2:$A$5</c:f>
+              <c:strCache>
+                <c:ptCount val="4"/>
+                <c:pt idx="0">
+                  <c:v>Water pumps</c:v>
+                </c:pt>
+                <c:pt idx="1">
+                  <c:v>Oil pumps</c:v>
+                </c:pt>
+                <c:pt idx="2">
+                  <c:v>GROUP TOTAL</c:v>
+                </c:pt>
+                <c:pt idx="3">
+                  <c:v>Concentric value-added
+(semi-var./electric/ALFDEX)</c:v>
+                </c:pt>
+              </c:strCache>
+            </c:strRef>
+          </c:cat>
+          <c:val>
+            <c:numRef>
+              <c:f>Sheet1!$B$2:$B$5</c:f>
+              <c:numCache>
+                <c:formatCode>General</c:formatCode>
+                <c:ptCount val="4"/>
+                <c:pt idx="0">
+                  <c:v>19.5</c:v>
+                </c:pt>
+                <c:pt idx="1">
+                  <c:v>22.6</c:v>
+                </c:pt>
+                <c:pt idx="2">
+                  <c:v>22.7</c:v>
+                </c:pt>
+              </c:numCache>
+            </c:numRef>
+          </c:val>
+        </c:ser>
+        <c:ser>
+          <c:idx val="1"/>
+          <c:order val="1"/>
+          <c:tx>
+            <c:strRef>
+              <c:f>Sheet1!$C$1</c:f>
+              <c:strCache>
+                <c:ptCount val="1"/>
+                <c:pt idx="0">
+                  <c:v>Concentric Contribution I %</c:v>
+                </c:pt>
+              </c:strCache>
+            </c:strRef>
+          </c:tx>
+          <c:spPr>
+            <a:solidFill>
+              <a:srgbClr val="548235"/>
+            </a:solidFill>
+          </c:spPr>
+          <c:cat>
+            <c:strRef>
+              <c:f>Sheet1!$A$2:$A$5</c:f>
+              <c:strCache>
+                <c:ptCount val="4"/>
+                <c:pt idx="0">
+                  <c:v>Water pumps</c:v>
+                </c:pt>
+                <c:pt idx="1">
+                  <c:v>Oil pumps</c:v>
+                </c:pt>
+                <c:pt idx="2">
+                  <c:v>GROUP TOTAL</c:v>
+                </c:pt>
+                <c:pt idx="3">
+                  <c:v>Concentric value-added
+(semi-var./electric/ALFDEX)</c:v>
+                </c:pt>
+              </c:strCache>
+            </c:strRef>
+          </c:cat>
+          <c:val>
+            <c:numRef>
+              <c:f>Sheet1!$C$2:$C$5</c:f>
+              <c:numCache>
+                <c:formatCode>General</c:formatCode>
+                <c:ptCount val="4"/>
+                <c:pt idx="0">
+                  <c:v>38.2</c:v>
+                </c:pt>
+                <c:pt idx="1">
+                  <c:v>42.9</c:v>
+                </c:pt>
+                <c:pt idx="2">
+                  <c:v>44.5</c:v>
+                </c:pt>
+                <c:pt idx="3">
+                  <c:v>56.0</c:v>
+                </c:pt>
+              </c:numCache>
+            </c:numRef>
+          </c:val>
+        </c:ser>
+        <c:dLbls>
+          <c:numFmt formatCode="0.0&quot;%&quot;" sourceLinked="0"/>
+          <c:txPr>
+            <a:bodyPr/>
+            <a:lstStyle/>
+            <a:p>
+              <a:pPr>
+                <a:defRPr sz="1000"/>
+              </a:pPr>
+            </a:p>
+          </c:txPr>
+          <c:showLegendKey val="0"/>
+          <c:showVal val="1"/>
+          <c:showCatName val="0"/>
+          <c:showSerName val="0"/>
+          <c:showPercent val="0"/>
+          <c:showBubbleSize val="0"/>
+          <c:showLeaderLines val="1"/>
+        </c:dLbls>
+        <c:axId val="-2068027336"/>
+        <c:axId val="-2113994440"/>
+      </c:barChart>
+      <c:catAx>
+        <c:axId val="-2068027336"/>
+        <c:scaling>
+          <c:orientation val="minMax"/>
+        </c:scaling>
+        <c:delete val="0"/>
+        <c:axPos val="b"/>
+        <c:majorTickMark val="out"/>
+        <c:minorTickMark val="none"/>
+        <c:tickLblPos val="nextTo"/>
+        <c:txPr>
+          <a:bodyPr/>
+          <a:lstStyle/>
+          <a:p>
+            <a:pPr>
+              <a:defRPr sz="1000"/>
+            </a:pPr>
+          </a:p>
+        </c:txPr>
+        <c:crossAx val="-2113994440"/>
+        <c:crosses val="autoZero"/>
+        <c:auto val="1"/>
+        <c:lblAlgn val="ctr"/>
+        <c:lblOffset val="100"/>
+        <c:noMultiLvlLbl val="0"/>
+      </c:catAx>
+      <c:valAx>
+        <c:axId val="-2113994440"/>
+        <c:scaling/>
+        <c:delete val="0"/>
+        <c:axPos val="l"/>
+        <c:majorGridlines/>
+        <c:majorTickMark val="out"/>
+        <c:minorTickMark val="none"/>
+        <c:tickLblPos val="nextTo"/>
+        <c:crossAx val="-2068027336"/>
+        <c:crosses val="autoZero"/>
+      </c:valAx>
+    </c:plotArea>
+    <c:legend>
+      <c:legendPos val="b"/>
+      <c:overlay val="0"/>
+      <c:txPr>
+        <a:bodyPr/>
+        <a:lstStyle/>
+        <a:p>
+          <a:pPr>
+            <a:defRPr sz="1100"/>
+          </a:pPr>
+        </a:p>
+      </c:txPr>
+    </c:legend>
+    <c:dispBlanksAs val="gap"/>
+  </c:chart>
+  <c:txPr>
+    <a:bodyPr/>
+    <a:lstStyle/>
+    <a:p>
+      <a:pPr>
+        <a:defRPr sz="1800"/>
+      </a:pPr>
+      <a:endParaRPr lang="en-US"/>
+    </a:p>
+  </c:txPr>
+  <c:externalData r:id="rId1">
+    <c:autoUpdate val="0"/>
+  </c:externalData>
+</c:chartSpace>
+</file>
+
+<file path=ppt/charts/chart6.xml><?xml version="1.0" encoding="utf-8"?>
+<c:chartSpace xmlns:c="http://schemas.openxmlformats.org/drawingml/2006/chart" xmlns:a="http://schemas.openxmlformats.org/drawingml/2006/main" xmlns:r="http://schemas.openxmlformats.org/officeDocument/2006/relationships">
+  <c:date1904 val="0"/>
+  <c:chart>
+    <c:title>
+      <c:tx>
+        <c:rich>
+          <a:bodyPr/>
+          <a:lstStyle/>
+          <a:p>
+            <a:r>
               <a:rPr sz="1400"/>
               <a:t>OPEX as % of sales: TBK vs peers, by business</a:t>
             </a:r>
@@ -2334,7 +2964,7 @@
 </c:chartSpace>
 </file>
 
-<file path=ppt/charts/chart6.xml><?xml version="1.0" encoding="utf-8"?>
+<file path=ppt/charts/chart7.xml><?xml version="1.0" encoding="utf-8"?>
 <c:chartSpace xmlns:c="http://schemas.openxmlformats.org/drawingml/2006/chart" xmlns:a="http://schemas.openxmlformats.org/drawingml/2006/main" xmlns:r="http://schemas.openxmlformats.org/officeDocument/2006/relationships">
   <c:date1904 val="0"/>
   <c:chart>
@@ -2560,267 +3190,6 @@
           <a:p>
             <a:pPr>
               <a:defRPr sz="1000"/>
-            </a:pPr>
-          </a:p>
-        </c:txPr>
-        <c:crossAx val="-2113994440"/>
-        <c:crosses val="autoZero"/>
-        <c:auto val="1"/>
-        <c:lblAlgn val="ctr"/>
-        <c:lblOffset val="100"/>
-        <c:noMultiLvlLbl val="0"/>
-      </c:catAx>
-      <c:valAx>
-        <c:axId val="-2113994440"/>
-        <c:scaling/>
-        <c:delete val="0"/>
-        <c:axPos val="l"/>
-        <c:majorGridlines/>
-        <c:majorTickMark val="out"/>
-        <c:minorTickMark val="none"/>
-        <c:tickLblPos val="nextTo"/>
-        <c:crossAx val="-2068027336"/>
-        <c:crosses val="autoZero"/>
-      </c:valAx>
-    </c:plotArea>
-    <c:legend>
-      <c:legendPos val="b"/>
-      <c:overlay val="0"/>
-      <c:txPr>
-        <a:bodyPr/>
-        <a:lstStyle/>
-        <a:p>
-          <a:pPr>
-            <a:defRPr sz="1100"/>
-          </a:pPr>
-        </a:p>
-      </c:txPr>
-    </c:legend>
-    <c:dispBlanksAs val="gap"/>
-  </c:chart>
-  <c:txPr>
-    <a:bodyPr/>
-    <a:lstStyle/>
-    <a:p>
-      <a:pPr>
-        <a:defRPr sz="1800"/>
-      </a:pPr>
-      <a:endParaRPr lang="en-US"/>
-    </a:p>
-  </c:txPr>
-  <c:externalData r:id="rId1">
-    <c:autoUpdate val="0"/>
-  </c:externalData>
-</c:chartSpace>
-</file>
-
-<file path=ppt/charts/chart7.xml><?xml version="1.0" encoding="utf-8"?>
-<c:chartSpace xmlns:c="http://schemas.openxmlformats.org/drawingml/2006/chart" xmlns:a="http://schemas.openxmlformats.org/drawingml/2006/main" xmlns:r="http://schemas.openxmlformats.org/officeDocument/2006/relationships">
-  <c:date1904 val="0"/>
-  <c:chart>
-    <c:title>
-      <c:tx>
-        <c:rich>
-          <a:bodyPr/>
-          <a:lstStyle/>
-          <a:p>
-            <a:r>
-              <a:rPr sz="1400"/>
-              <a:t>R&amp;D spend plan (US$M per year)</a:t>
-            </a:r>
-          </a:p>
-        </c:rich>
-      </c:tx>
-      <c:layout/>
-      <c:overlay val="0"/>
-    </c:title>
-    <c:autoTitleDeleted val="0"/>
-    <c:plotArea>
-      <c:barChart>
-        <c:barDir val="col"/>
-        <c:grouping val="stacked"/>
-        <c:ser>
-          <c:idx val="0"/>
-          <c:order val="0"/>
-          <c:tx>
-            <c:strRef>
-              <c:f>Sheet1!$B$1</c:f>
-              <c:strCache>
-                <c:ptCount val="1"/>
-                <c:pt idx="0">
-                  <c:v>Parity run-rate (~4.5-5% of sales)</c:v>
-                </c:pt>
-              </c:strCache>
-            </c:strRef>
-          </c:tx>
-          <c:spPr>
-            <a:solidFill>
-              <a:srgbClr val="1F4E78"/>
-            </a:solidFill>
-          </c:spPr>
-          <c:cat>
-            <c:strRef>
-              <c:f>Sheet1!$A$2:$A$8</c:f>
-              <c:strCache>
-                <c:ptCount val="7"/>
-                <c:pt idx="0">
-                  <c:v>FY26
-actual est.</c:v>
-                </c:pt>
-                <c:pt idx="1">
-                  <c:v>FY27</c:v>
-                </c:pt>
-                <c:pt idx="2">
-                  <c:v>FY28</c:v>
-                </c:pt>
-                <c:pt idx="3">
-                  <c:v>FY29</c:v>
-                </c:pt>
-                <c:pt idx="4">
-                  <c:v>FY30</c:v>
-                </c:pt>
-                <c:pt idx="5">
-                  <c:v>FY31</c:v>
-                </c:pt>
-                <c:pt idx="6">
-                  <c:v>Steady state
-FY32+</c:v>
-                </c:pt>
-              </c:strCache>
-            </c:strRef>
-          </c:cat>
-          <c:val>
-            <c:numRef>
-              <c:f>Sheet1!$B$2:$B$8</c:f>
-              <c:numCache>
-                <c:formatCode>General</c:formatCode>
-                <c:ptCount val="7"/>
-                <c:pt idx="0">
-                  <c:v>7.8</c:v>
-                </c:pt>
-                <c:pt idx="1">
-                  <c:v>17</c:v>
-                </c:pt>
-                <c:pt idx="2">
-                  <c:v>17</c:v>
-                </c:pt>
-                <c:pt idx="3">
-                  <c:v>17</c:v>
-                </c:pt>
-                <c:pt idx="4">
-                  <c:v>17</c:v>
-                </c:pt>
-                <c:pt idx="5">
-                  <c:v>17</c:v>
-                </c:pt>
-                <c:pt idx="6">
-                  <c:v>17</c:v>
-                </c:pt>
-              </c:numCache>
-            </c:numRef>
-          </c:val>
-        </c:ser>
-        <c:ser>
-          <c:idx val="1"/>
-          <c:order val="1"/>
-          <c:tx>
-            <c:strRef>
-              <c:f>Sheet1!$C$1</c:f>
-              <c:strCache>
-                <c:ptCount val="1"/>
-                <c:pt idx="0">
-                  <c:v>Deficit repayment (catch-up)</c:v>
-                </c:pt>
-              </c:strCache>
-            </c:strRef>
-          </c:tx>
-          <c:spPr>
-            <a:solidFill>
-              <a:srgbClr val="548235"/>
-            </a:solidFill>
-          </c:spPr>
-          <c:cat>
-            <c:strRef>
-              <c:f>Sheet1!$A$2:$A$8</c:f>
-              <c:strCache>
-                <c:ptCount val="7"/>
-                <c:pt idx="0">
-                  <c:v>FY26
-actual est.</c:v>
-                </c:pt>
-                <c:pt idx="1">
-                  <c:v>FY27</c:v>
-                </c:pt>
-                <c:pt idx="2">
-                  <c:v>FY28</c:v>
-                </c:pt>
-                <c:pt idx="3">
-                  <c:v>FY29</c:v>
-                </c:pt>
-                <c:pt idx="4">
-                  <c:v>FY30</c:v>
-                </c:pt>
-                <c:pt idx="5">
-                  <c:v>FY31</c:v>
-                </c:pt>
-                <c:pt idx="6">
-                  <c:v>Steady state
-FY32+</c:v>
-                </c:pt>
-              </c:strCache>
-            </c:strRef>
-          </c:cat>
-          <c:val>
-            <c:numRef>
-              <c:f>Sheet1!$C$2:$C$8</c:f>
-              <c:numCache>
-                <c:formatCode>General</c:formatCode>
-                <c:ptCount val="7"/>
-                <c:pt idx="0">
-                  <c:v>0</c:v>
-                </c:pt>
-                <c:pt idx="1">
-                  <c:v>10</c:v>
-                </c:pt>
-                <c:pt idx="2">
-                  <c:v>10</c:v>
-                </c:pt>
-                <c:pt idx="3">
-                  <c:v>10</c:v>
-                </c:pt>
-                <c:pt idx="4">
-                  <c:v>10</c:v>
-                </c:pt>
-                <c:pt idx="5">
-                  <c:v>10</c:v>
-                </c:pt>
-                <c:pt idx="6">
-                  <c:v>0</c:v>
-                </c:pt>
-              </c:numCache>
-            </c:numRef>
-          </c:val>
-        </c:ser>
-        <c:overlap val="100"/>
-        <c:axId val="-2068027336"/>
-        <c:axId val="-2113994440"/>
-      </c:barChart>
-      <c:catAx>
-        <c:axId val="-2068027336"/>
-        <c:scaling>
-          <c:orientation val="minMax"/>
-        </c:scaling>
-        <c:delete val="0"/>
-        <c:axPos val="b"/>
-        <c:majorTickMark val="out"/>
-        <c:minorTickMark val="none"/>
-        <c:tickLblPos val="nextTo"/>
-        <c:txPr>
-          <a:bodyPr/>
-          <a:lstStyle/>
-          <a:p>
-            <a:pPr>
-              <a:defRPr sz="900"/>
             </a:pPr>
           </a:p>
         </c:txPr>
@@ -2886,6 +3255,267 @@
           <a:lstStyle/>
           <a:p>
             <a:r>
+              <a:rPr sz="1400"/>
+              <a:t>R&amp;D spend plan (US$M per year)</a:t>
+            </a:r>
+          </a:p>
+        </c:rich>
+      </c:tx>
+      <c:layout/>
+      <c:overlay val="0"/>
+    </c:title>
+    <c:autoTitleDeleted val="0"/>
+    <c:plotArea>
+      <c:barChart>
+        <c:barDir val="col"/>
+        <c:grouping val="stacked"/>
+        <c:ser>
+          <c:idx val="0"/>
+          <c:order val="0"/>
+          <c:tx>
+            <c:strRef>
+              <c:f>Sheet1!$B$1</c:f>
+              <c:strCache>
+                <c:ptCount val="1"/>
+                <c:pt idx="0">
+                  <c:v>Parity run-rate (~4.5-5% of sales)</c:v>
+                </c:pt>
+              </c:strCache>
+            </c:strRef>
+          </c:tx>
+          <c:spPr>
+            <a:solidFill>
+              <a:srgbClr val="1F4E78"/>
+            </a:solidFill>
+          </c:spPr>
+          <c:cat>
+            <c:strRef>
+              <c:f>Sheet1!$A$2:$A$8</c:f>
+              <c:strCache>
+                <c:ptCount val="7"/>
+                <c:pt idx="0">
+                  <c:v>FY26
+actual est.</c:v>
+                </c:pt>
+                <c:pt idx="1">
+                  <c:v>FY27</c:v>
+                </c:pt>
+                <c:pt idx="2">
+                  <c:v>FY28</c:v>
+                </c:pt>
+                <c:pt idx="3">
+                  <c:v>FY29</c:v>
+                </c:pt>
+                <c:pt idx="4">
+                  <c:v>FY30</c:v>
+                </c:pt>
+                <c:pt idx="5">
+                  <c:v>FY31</c:v>
+                </c:pt>
+                <c:pt idx="6">
+                  <c:v>Steady state
+FY32+</c:v>
+                </c:pt>
+              </c:strCache>
+            </c:strRef>
+          </c:cat>
+          <c:val>
+            <c:numRef>
+              <c:f>Sheet1!$B$2:$B$8</c:f>
+              <c:numCache>
+                <c:formatCode>General</c:formatCode>
+                <c:ptCount val="7"/>
+                <c:pt idx="0">
+                  <c:v>7.8</c:v>
+                </c:pt>
+                <c:pt idx="1">
+                  <c:v>17</c:v>
+                </c:pt>
+                <c:pt idx="2">
+                  <c:v>17</c:v>
+                </c:pt>
+                <c:pt idx="3">
+                  <c:v>17</c:v>
+                </c:pt>
+                <c:pt idx="4">
+                  <c:v>17</c:v>
+                </c:pt>
+                <c:pt idx="5">
+                  <c:v>17</c:v>
+                </c:pt>
+                <c:pt idx="6">
+                  <c:v>17</c:v>
+                </c:pt>
+              </c:numCache>
+            </c:numRef>
+          </c:val>
+        </c:ser>
+        <c:ser>
+          <c:idx val="1"/>
+          <c:order val="1"/>
+          <c:tx>
+            <c:strRef>
+              <c:f>Sheet1!$C$1</c:f>
+              <c:strCache>
+                <c:ptCount val="1"/>
+                <c:pt idx="0">
+                  <c:v>Deficit repayment (catch-up)</c:v>
+                </c:pt>
+              </c:strCache>
+            </c:strRef>
+          </c:tx>
+          <c:spPr>
+            <a:solidFill>
+              <a:srgbClr val="548235"/>
+            </a:solidFill>
+          </c:spPr>
+          <c:cat>
+            <c:strRef>
+              <c:f>Sheet1!$A$2:$A$8</c:f>
+              <c:strCache>
+                <c:ptCount val="7"/>
+                <c:pt idx="0">
+                  <c:v>FY26
+actual est.</c:v>
+                </c:pt>
+                <c:pt idx="1">
+                  <c:v>FY27</c:v>
+                </c:pt>
+                <c:pt idx="2">
+                  <c:v>FY28</c:v>
+                </c:pt>
+                <c:pt idx="3">
+                  <c:v>FY29</c:v>
+                </c:pt>
+                <c:pt idx="4">
+                  <c:v>FY30</c:v>
+                </c:pt>
+                <c:pt idx="5">
+                  <c:v>FY31</c:v>
+                </c:pt>
+                <c:pt idx="6">
+                  <c:v>Steady state
+FY32+</c:v>
+                </c:pt>
+              </c:strCache>
+            </c:strRef>
+          </c:cat>
+          <c:val>
+            <c:numRef>
+              <c:f>Sheet1!$C$2:$C$8</c:f>
+              <c:numCache>
+                <c:formatCode>General</c:formatCode>
+                <c:ptCount val="7"/>
+                <c:pt idx="0">
+                  <c:v>0</c:v>
+                </c:pt>
+                <c:pt idx="1">
+                  <c:v>10</c:v>
+                </c:pt>
+                <c:pt idx="2">
+                  <c:v>10</c:v>
+                </c:pt>
+                <c:pt idx="3">
+                  <c:v>10</c:v>
+                </c:pt>
+                <c:pt idx="4">
+                  <c:v>10</c:v>
+                </c:pt>
+                <c:pt idx="5">
+                  <c:v>10</c:v>
+                </c:pt>
+                <c:pt idx="6">
+                  <c:v>0</c:v>
+                </c:pt>
+              </c:numCache>
+            </c:numRef>
+          </c:val>
+        </c:ser>
+        <c:overlap val="100"/>
+        <c:axId val="-2068027336"/>
+        <c:axId val="-2113994440"/>
+      </c:barChart>
+      <c:catAx>
+        <c:axId val="-2068027336"/>
+        <c:scaling>
+          <c:orientation val="minMax"/>
+        </c:scaling>
+        <c:delete val="0"/>
+        <c:axPos val="b"/>
+        <c:majorTickMark val="out"/>
+        <c:minorTickMark val="none"/>
+        <c:tickLblPos val="nextTo"/>
+        <c:txPr>
+          <a:bodyPr/>
+          <a:lstStyle/>
+          <a:p>
+            <a:pPr>
+              <a:defRPr sz="900"/>
+            </a:pPr>
+          </a:p>
+        </c:txPr>
+        <c:crossAx val="-2113994440"/>
+        <c:crosses val="autoZero"/>
+        <c:auto val="1"/>
+        <c:lblAlgn val="ctr"/>
+        <c:lblOffset val="100"/>
+        <c:noMultiLvlLbl val="0"/>
+      </c:catAx>
+      <c:valAx>
+        <c:axId val="-2113994440"/>
+        <c:scaling/>
+        <c:delete val="0"/>
+        <c:axPos val="l"/>
+        <c:majorGridlines/>
+        <c:majorTickMark val="out"/>
+        <c:minorTickMark val="none"/>
+        <c:tickLblPos val="nextTo"/>
+        <c:crossAx val="-2068027336"/>
+        <c:crosses val="autoZero"/>
+      </c:valAx>
+    </c:plotArea>
+    <c:legend>
+      <c:legendPos val="b"/>
+      <c:overlay val="0"/>
+      <c:txPr>
+        <a:bodyPr/>
+        <a:lstStyle/>
+        <a:p>
+          <a:pPr>
+            <a:defRPr sz="1100"/>
+          </a:pPr>
+        </a:p>
+      </c:txPr>
+    </c:legend>
+    <c:dispBlanksAs val="gap"/>
+  </c:chart>
+  <c:txPr>
+    <a:bodyPr/>
+    <a:lstStyle/>
+    <a:p>
+      <a:pPr>
+        <a:defRPr sz="1800"/>
+      </a:pPr>
+      <a:endParaRPr lang="en-US"/>
+    </a:p>
+  </c:txPr>
+  <c:externalData r:id="rId1">
+    <c:autoUpdate val="0"/>
+  </c:externalData>
+</c:chartSpace>
+</file>
+
+<file path=ppt/charts/chart9.xml><?xml version="1.0" encoding="utf-8"?>
+<c:chartSpace xmlns:c="http://schemas.openxmlformats.org/drawingml/2006/chart" xmlns:a="http://schemas.openxmlformats.org/drawingml/2006/main" xmlns:r="http://schemas.openxmlformats.org/officeDocument/2006/relationships">
+  <c:date1904 val="0"/>
+  <c:chart>
+    <c:title>
+      <c:tx>
+        <c:rich>
+          <a:bodyPr/>
+          <a:lstStyle/>
+          <a:p>
+            <a:r>
               <a:rPr sz="1300"/>
               <a:t>Final weighted moat scores (TBK in red)</a:t>
             </a:r>
@@ -3085,397 +3715,6 @@
       </c:valAx>
     </c:plotArea>
     <c:dispBlanksAs val="gap"/>
-  </c:chart>
-  <c:txPr>
-    <a:bodyPr/>
-    <a:lstStyle/>
-    <a:p>
-      <a:pPr>
-        <a:defRPr sz="1800"/>
-      </a:pPr>
-      <a:endParaRPr lang="en-US"/>
-    </a:p>
-  </c:txPr>
-  <c:externalData r:id="rId1">
-    <c:autoUpdate val="0"/>
-  </c:externalData>
-</c:chartSpace>
-</file>
-
-<file path=ppt/charts/chart9.xml><?xml version="1.0" encoding="utf-8"?>
-<c:chartSpace xmlns:c="http://schemas.openxmlformats.org/drawingml/2006/chart" xmlns:a="http://schemas.openxmlformats.org/drawingml/2006/main" xmlns:r="http://schemas.openxmlformats.org/officeDocument/2006/relationships">
-  <c:date1904 val="0"/>
-  <c:roundedCorners val="0"/>
-  <mc:AlternateContent xmlns:mc="http://schemas.openxmlformats.org/markup-compatibility/2006">
-    <mc:Choice xmlns:c14="http://schemas.microsoft.com/office/drawing/2007/8/2/chart" Requires="c14">
-      <c14:style val="118"/>
-    </mc:Choice>
-    <mc:Fallback>
-      <c:style val="18"/>
-    </mc:Fallback>
-  </mc:AlternateContent>
-  <c:chart>
-    <c:autoTitleDeleted val="1"/>
-    <c:plotArea>
-      <c:layout/>
-      <c:radarChart>
-        <c:radarStyle val="marker"/>
-        <c:varyColors val="0"/>
-        <c:ser>
-          <c:idx val="0"/>
-          <c:order val="0"/>
-          <c:tx>
-            <c:strRef>
-              <c:f>Sheet1!$B$1</c:f>
-              <c:strCache>
-                <c:ptCount val="1"/>
-                <c:pt idx="0">
-                  <c:v>TBK</c:v>
-                </c:pt>
-              </c:strCache>
-            </c:strRef>
-          </c:tx>
-          <c:spPr>
-            <a:ln w="28575">
-              <a:solidFill>
-                <a:srgbClr val="7F1D1D"/>
-              </a:solidFill>
-            </a:ln>
-          </c:spPr>
-          <c:cat>
-            <c:strRef>
-              <c:f>Sheet1!$A$2:$A$11</c:f>
-              <c:strCache>
-                <c:ptCount val="10"/>
-                <c:pt idx="0">
-                  <c:v>Criticality</c:v>
-                </c:pt>
-                <c:pt idx="1">
-                  <c:v>Standard premium</c:v>
-                </c:pt>
-                <c:pt idx="2">
-                  <c:v>Market hegemony</c:v>
-                </c:pt>
-                <c:pt idx="3">
-                  <c:v>Ecosystem</c:v>
-                </c:pt>
-                <c:pt idx="4">
-                  <c:v>Lifecycle cost adv.</c:v>
-                </c:pt>
-                <c:pt idx="5">
-                  <c:v>Substitution resistance</c:v>
-                </c:pt>
-                <c:pt idx="6">
-                  <c:v>Demand horizon</c:v>
-                </c:pt>
-                <c:pt idx="7">
-                  <c:v>Capital allocation</c:v>
-                </c:pt>
-                <c:pt idx="8">
-                  <c:v>Reinvestment runway</c:v>
-                </c:pt>
-                <c:pt idx="9">
-                  <c:v>Reverse- Lindy</c:v>
-                </c:pt>
-              </c:strCache>
-            </c:strRef>
-          </c:cat>
-          <c:val>
-            <c:numRef>
-              <c:f>Sheet1!$B$2:$B$11</c:f>
-              <c:numCache>
-                <c:formatCode>General</c:formatCode>
-                <c:ptCount val="10"/>
-                <c:pt idx="0">
-                  <c:v>7.5</c:v>
-                </c:pt>
-                <c:pt idx="1">
-                  <c:v>6.0</c:v>
-                </c:pt>
-                <c:pt idx="2">
-                  <c:v>8.0</c:v>
-                </c:pt>
-                <c:pt idx="3">
-                  <c:v>2.0</c:v>
-                </c:pt>
-                <c:pt idx="4">
-                  <c:v>3.0</c:v>
-                </c:pt>
-                <c:pt idx="5">
-                  <c:v>3.5</c:v>
-                </c:pt>
-                <c:pt idx="6">
-                  <c:v>7.0</c:v>
-                </c:pt>
-                <c:pt idx="7">
-                  <c:v>2.0</c:v>
-                </c:pt>
-                <c:pt idx="8">
-                  <c:v>3.0</c:v>
-                </c:pt>
-                <c:pt idx="9">
-                  <c:v>4.0</c:v>
-                </c:pt>
-              </c:numCache>
-            </c:numRef>
-          </c:val>
-          <c:smooth val="0"/>
-        </c:ser>
-        <c:ser>
-          <c:idx val="1"/>
-          <c:order val="1"/>
-          <c:tx>
-            <c:strRef>
-              <c:f>Sheet1!$C$1</c:f>
-              <c:strCache>
-                <c:ptCount val="1"/>
-                <c:pt idx="0">
-                  <c:v>Concentric</c:v>
-                </c:pt>
-              </c:strCache>
-            </c:strRef>
-          </c:tx>
-          <c:spPr>
-            <a:ln w="28575">
-              <a:solidFill>
-                <a:srgbClr val="548235"/>
-              </a:solidFill>
-            </a:ln>
-          </c:spPr>
-          <c:cat>
-            <c:strRef>
-              <c:f>Sheet1!$A$2:$A$11</c:f>
-              <c:strCache>
-                <c:ptCount val="10"/>
-                <c:pt idx="0">
-                  <c:v>Criticality</c:v>
-                </c:pt>
-                <c:pt idx="1">
-                  <c:v>Standard premium</c:v>
-                </c:pt>
-                <c:pt idx="2">
-                  <c:v>Market hegemony</c:v>
-                </c:pt>
-                <c:pt idx="3">
-                  <c:v>Ecosystem</c:v>
-                </c:pt>
-                <c:pt idx="4">
-                  <c:v>Lifecycle cost adv.</c:v>
-                </c:pt>
-                <c:pt idx="5">
-                  <c:v>Substitution resistance</c:v>
-                </c:pt>
-                <c:pt idx="6">
-                  <c:v>Demand horizon</c:v>
-                </c:pt>
-                <c:pt idx="7">
-                  <c:v>Capital allocation</c:v>
-                </c:pt>
-                <c:pt idx="8">
-                  <c:v>Reinvestment runway</c:v>
-                </c:pt>
-                <c:pt idx="9">
-                  <c:v>Reverse- Lindy</c:v>
-                </c:pt>
-              </c:strCache>
-            </c:strRef>
-          </c:cat>
-          <c:val>
-            <c:numRef>
-              <c:f>Sheet1!$C$2:$C$11</c:f>
-              <c:numCache>
-                <c:formatCode>General</c:formatCode>
-                <c:ptCount val="10"/>
-                <c:pt idx="0">
-                  <c:v>7.0</c:v>
-                </c:pt>
-                <c:pt idx="1">
-                  <c:v>6.0</c:v>
-                </c:pt>
-                <c:pt idx="2">
-                  <c:v>7.5</c:v>
-                </c:pt>
-                <c:pt idx="3">
-                  <c:v>2.5</c:v>
-                </c:pt>
-                <c:pt idx="4">
-                  <c:v>7.0</c:v>
-                </c:pt>
-                <c:pt idx="5">
-                  <c:v>5.0</c:v>
-                </c:pt>
-                <c:pt idx="6">
-                  <c:v>7.5</c:v>
-                </c:pt>
-                <c:pt idx="7">
-                  <c:v>7.5</c:v>
-                </c:pt>
-                <c:pt idx="8">
-                  <c:v>7.0</c:v>
-                </c:pt>
-                <c:pt idx="9">
-                  <c:v>5.5</c:v>
-                </c:pt>
-              </c:numCache>
-            </c:numRef>
-          </c:val>
-          <c:smooth val="0"/>
-        </c:ser>
-        <c:ser>
-          <c:idx val="2"/>
-          <c:order val="2"/>
-          <c:tx>
-            <c:strRef>
-              <c:f>Sheet1!$D$1</c:f>
-              <c:strCache>
-                <c:ptCount val="1"/>
-                <c:pt idx="0">
-                  <c:v>Peer avg (6 scored)</c:v>
-                </c:pt>
-              </c:strCache>
-            </c:strRef>
-          </c:tx>
-          <c:spPr>
-            <a:ln w="28575">
-              <a:solidFill>
-                <a:srgbClr val="595959"/>
-              </a:solidFill>
-            </a:ln>
-          </c:spPr>
-          <c:cat>
-            <c:strRef>
-              <c:f>Sheet1!$A$2:$A$11</c:f>
-              <c:strCache>
-                <c:ptCount val="10"/>
-                <c:pt idx="0">
-                  <c:v>Criticality</c:v>
-                </c:pt>
-                <c:pt idx="1">
-                  <c:v>Standard premium</c:v>
-                </c:pt>
-                <c:pt idx="2">
-                  <c:v>Market hegemony</c:v>
-                </c:pt>
-                <c:pt idx="3">
-                  <c:v>Ecosystem</c:v>
-                </c:pt>
-                <c:pt idx="4">
-                  <c:v>Lifecycle cost adv.</c:v>
-                </c:pt>
-                <c:pt idx="5">
-                  <c:v>Substitution resistance</c:v>
-                </c:pt>
-                <c:pt idx="6">
-                  <c:v>Demand horizon</c:v>
-                </c:pt>
-                <c:pt idx="7">
-                  <c:v>Capital allocation</c:v>
-                </c:pt>
-                <c:pt idx="8">
-                  <c:v>Reinvestment runway</c:v>
-                </c:pt>
-                <c:pt idx="9">
-                  <c:v>Reverse- Lindy</c:v>
-                </c:pt>
-              </c:strCache>
-            </c:strRef>
-          </c:cat>
-          <c:val>
-            <c:numRef>
-              <c:f>Sheet1!$D$2:$D$11</c:f>
-              <c:numCache>
-                <c:formatCode>General</c:formatCode>
-                <c:ptCount val="10"/>
-                <c:pt idx="0">
-                  <c:v>7.17</c:v>
-                </c:pt>
-                <c:pt idx="1">
-                  <c:v>5.92</c:v>
-                </c:pt>
-                <c:pt idx="2">
-                  <c:v>6.58</c:v>
-                </c:pt>
-                <c:pt idx="3">
-                  <c:v>2.67</c:v>
-                </c:pt>
-                <c:pt idx="4">
-                  <c:v>4.75</c:v>
-                </c:pt>
-                <c:pt idx="5">
-                  <c:v>4.17</c:v>
-                </c:pt>
-                <c:pt idx="6">
-                  <c:v>6.75</c:v>
-                </c:pt>
-                <c:pt idx="7">
-                  <c:v>3.75</c:v>
-                </c:pt>
-                <c:pt idx="8">
-                  <c:v>5.08</c:v>
-                </c:pt>
-                <c:pt idx="9">
-                  <c:v>4.5</c:v>
-                </c:pt>
-              </c:numCache>
-            </c:numRef>
-          </c:val>
-          <c:smooth val="0"/>
-        </c:ser>
-        <c:axId val="2073612648"/>
-        <c:axId val="-2112772216"/>
-      </c:radarChart>
-      <c:catAx>
-        <c:axId val="2073612648"/>
-        <c:scaling>
-          <c:orientation val="minMax"/>
-        </c:scaling>
-        <c:delete val="0"/>
-        <c:axPos val="b"/>
-        <c:majorGridlines/>
-        <c:numFmt formatCode="m/d/yy" sourceLinked="1"/>
-        <c:majorTickMark val="out"/>
-        <c:minorTickMark val="none"/>
-        <c:tickLblPos val="nextTo"/>
-        <c:crossAx val="-2112772216"/>
-        <c:crosses val="autoZero"/>
-        <c:auto val="1"/>
-        <c:lblAlgn val="ctr"/>
-        <c:lblOffset val="100"/>
-        <c:noMultiLvlLbl val="0"/>
-      </c:catAx>
-      <c:valAx>
-        <c:axId val="-2112772216"/>
-        <c:scaling>
-          <c:orientation val="minMax"/>
-        </c:scaling>
-        <c:delete val="0"/>
-        <c:axPos val="l"/>
-        <c:majorGridlines/>
-        <c:numFmt formatCode="General" sourceLinked="1"/>
-        <c:majorTickMark val="cross"/>
-        <c:minorTickMark val="none"/>
-        <c:tickLblPos val="nextTo"/>
-        <c:crossAx val="2073612648"/>
-        <c:crosses val="autoZero"/>
-        <c:crossBetween val="between"/>
-      </c:valAx>
-    </c:plotArea>
-    <c:legend>
-      <c:legendPos val="b"/>
-      <c:overlay val="0"/>
-      <c:txPr>
-        <a:bodyPr/>
-        <a:lstStyle/>
-        <a:p>
-          <a:pPr>
-            <a:defRPr sz="1100"/>
-          </a:pPr>
-        </a:p>
-      </c:txPr>
-    </c:legend>
-    <c:plotVisOnly val="1"/>
-    <c:dispBlanksAs val="gap"/>
-    <c:showDLblsOverMax val="0"/>
   </c:chart>
   <c:txPr>
     <a:bodyPr/>
@@ -7011,6 +7250,315 @@
                   <a:srgbClr val="FFFFFF"/>
                 </a:solidFill>
               </a:rPr>
+              <a:t>Product-level proof: same pumps, half the contribution</a:t>
+            </a:r>
+          </a:p>
+        </p:txBody>
+      </p:sp>
+      <p:sp>
+        <p:nvSpPr>
+          <p:cNvPr id="3" name="TextBox 2"/>
+          <p:cNvSpPr txBox="1"/>
+          <p:nvPr/>
+        </p:nvSpPr>
+        <p:spPr>
+          <a:xfrm>
+            <a:off x="457200" y="914400"/>
+            <a:ext cx="11247120" cy="365760"/>
+          </a:xfrm>
+          <a:prstGeom prst="rect">
+            <a:avLst/>
+          </a:prstGeom>
+          <a:noFill/>
+        </p:spPr>
+        <p:txBody>
+          <a:bodyPr wrap="square">
+            <a:spAutoFit/>
+          </a:bodyPr>
+          <a:lstStyle/>
+          <a:p>
+            <a:pPr algn="l"/>
+            <a:r>
+              <a:rPr sz="1200" b="0">
+                <a:solidFill>
+                  <a:srgbClr val="595959"/>
+                </a:solidFill>
+              </a:rPr>
+              <a:t>Internal data both sides: TBKK (Thailand) profit by items Apr-Sep 2025 vs Concentric Group MR Pack Dec-2021 YTD. Contribution = sales minus variable costs</a:t>
+            </a:r>
+          </a:p>
+        </p:txBody>
+      </p:sp>
+      <p:graphicFrame>
+        <p:nvGraphicFramePr>
+          <p:cNvPr id="4" name="Chart 3"/>
+          <p:cNvGraphicFramePr>
+            <a:graphicFrameLocks noGrp="1"/>
+          </p:cNvGraphicFramePr>
+          <p:nvPr/>
+        </p:nvGraphicFramePr>
+        <p:xfrm>
+          <a:off x="457200" y="1463040"/>
+          <a:ext cx="6400800" cy="4206240"/>
+        </p:xfrm>
+        <a:graphic>
+          <a:graphicData uri="http://schemas.openxmlformats.org/drawingml/2006/chart">
+            <c:chart xmlns:c="http://schemas.openxmlformats.org/drawingml/2006/chart" r:id="rId2"/>
+          </a:graphicData>
+        </a:graphic>
+      </p:graphicFrame>
+      <p:sp>
+        <p:nvSpPr>
+          <p:cNvPr id="5" name="TextBox 4"/>
+          <p:cNvSpPr txBox="1"/>
+          <p:nvPr/>
+        </p:nvSpPr>
+        <p:spPr>
+          <a:xfrm>
+            <a:off x="7132320" y="1463040"/>
+            <a:ext cx="4617720" cy="2240280"/>
+          </a:xfrm>
+          <a:prstGeom prst="rect">
+            <a:avLst/>
+          </a:prstGeom>
+          <a:solidFill>
+            <a:srgbClr val="F2F2F2"/>
+          </a:solidFill>
+          <a:ln w="15875">
+            <a:solidFill>
+              <a:srgbClr val="1F4E78"/>
+            </a:solidFill>
+          </a:ln>
+        </p:spPr>
+        <p:txBody>
+          <a:bodyPr wrap="square" lIns="137160" rIns="137160" tIns="109728">
+            <a:spAutoFit/>
+          </a:bodyPr>
+          <a:lstStyle/>
+          <a:p>
+            <a:r>
+              <a:rPr sz="1500" b="1">
+                <a:solidFill>
+                  <a:srgbClr val="1F4E78"/>
+                </a:solidFill>
+              </a:rPr>
+              <a:t>Inside TBKK's own book</a:t>
+            </a:r>
+          </a:p>
+          <a:p>
+            <a:pPr>
+              <a:spcBef>
+                <a:spcPts val="400"/>
+              </a:spcBef>
+            </a:pPr>
+            <a:r>
+              <a:rPr sz="1150">
+                <a:solidFill>
+                  <a:srgbClr val="202020"/>
+                </a:solidFill>
+              </a:rPr>
+              <a:t>Pockets of real pricing power: Isuzu brake VD00 (HR) 64.1%, brake 700P 41.7%, gears 30.6%</a:t>
+            </a:r>
+          </a:p>
+          <a:p>
+            <a:pPr>
+              <a:spcBef>
+                <a:spcPts val="400"/>
+              </a:spcBef>
+            </a:pPr>
+            <a:r>
+              <a:rPr sz="1150">
+                <a:solidFill>
+                  <a:srgbClr val="202020"/>
+                </a:solidFill>
+              </a:rPr>
+              <a:t>Bleeding lines: GKN case-set/diff -30.2% (negative contribution), Suzuki -1.2%, ISZ W/P ES 1.7%</a:t>
+            </a:r>
+          </a:p>
+          <a:p>
+            <a:pPr>
+              <a:spcBef>
+                <a:spcPts val="400"/>
+              </a:spcBef>
+            </a:pPr>
+            <a:r>
+              <a:rPr sz="1150">
+                <a:solidFill>
+                  <a:srgbClr val="202020"/>
+                </a:solidFill>
+              </a:rPr>
+              <a:t>Customer curve: Isuzu 25.8% &gt; MMTH 23.0% &gt; ITT 22.6% &gt; Kubota 17.0%</a:t>
+            </a:r>
+          </a:p>
+        </p:txBody>
+      </p:sp>
+      <p:sp>
+        <p:nvSpPr>
+          <p:cNvPr id="6" name="TextBox 5"/>
+          <p:cNvSpPr txBox="1"/>
+          <p:nvPr/>
+        </p:nvSpPr>
+        <p:spPr>
+          <a:xfrm>
+            <a:off x="7132320" y="3840480"/>
+            <a:ext cx="4617720" cy="2240280"/>
+          </a:xfrm>
+          <a:prstGeom prst="rect">
+            <a:avLst/>
+          </a:prstGeom>
+          <a:solidFill>
+            <a:srgbClr val="F2F2F2"/>
+          </a:solidFill>
+          <a:ln w="15875">
+            <a:solidFill>
+              <a:srgbClr val="548235"/>
+            </a:solidFill>
+          </a:ln>
+        </p:spPr>
+        <p:txBody>
+          <a:bodyPr wrap="square" lIns="137160" rIns="137160" tIns="109728">
+            <a:spAutoFit/>
+          </a:bodyPr>
+          <a:lstStyle/>
+          <a:p>
+            <a:r>
+              <a:rPr sz="1500" b="1">
+                <a:solidFill>
+                  <a:srgbClr val="548235"/>
+                </a:solidFill>
+              </a:rPr>
+              <a:t>Concentric's ladder = TBK's roadmap</a:t>
+            </a:r>
+          </a:p>
+          <a:p>
+            <a:pPr>
+              <a:spcBef>
+                <a:spcPts val="400"/>
+              </a:spcBef>
+            </a:pPr>
+            <a:r>
+              <a:rPr sz="1150">
+                <a:solidFill>
+                  <a:srgbClr val="202020"/>
+                </a:solidFill>
+              </a:rPr>
+              <a:t>Conventional pump 38-43% -&gt; semi-variable 54% -&gt; electric 55% -&gt; system (ALFDEX) 56%</a:t>
+            </a:r>
+          </a:p>
+          <a:p>
+            <a:pPr>
+              <a:spcBef>
+                <a:spcPts val="400"/>
+              </a:spcBef>
+            </a:pPr>
+            <a:r>
+              <a:rPr sz="1150">
+                <a:solidFill>
+                  <a:srgbClr val="202020"/>
+                </a:solidFill>
+              </a:rPr>
+              <a:t>Each evolution step = roughly +15 points of contribution on the SAME base product</a:t>
+            </a:r>
+          </a:p>
+          <a:p>
+            <a:pPr>
+              <a:spcBef>
+                <a:spcPts val="400"/>
+              </a:spcBef>
+            </a:pPr>
+            <a:r>
+              <a:rPr sz="1150">
+                <a:solidFill>
+                  <a:srgbClr val="202020"/>
+                </a:solidFill>
+              </a:rPr>
+              <a:t>TBK's e-pump/TCU program targets exactly this ladder — the data proves the rungs exist</a:t>
+            </a:r>
+          </a:p>
+        </p:txBody>
+      </p:sp>
+      <p:sp>
+        <p:nvSpPr>
+          <p:cNvPr id="7" name="TextBox 6"/>
+          <p:cNvSpPr txBox="1"/>
+          <p:nvPr/>
+        </p:nvSpPr>
+        <p:spPr>
+          <a:xfrm>
+            <a:off x="457200" y="5897880"/>
+            <a:ext cx="11247120" cy="822960"/>
+          </a:xfrm>
+          <a:prstGeom prst="rect">
+            <a:avLst/>
+          </a:prstGeom>
+          <a:noFill/>
+        </p:spPr>
+        <p:txBody>
+          <a:bodyPr wrap="square">
+            <a:spAutoFit/>
+          </a:bodyPr>
+          <a:lstStyle/>
+          <a:p>
+            <a:pPr algn="l"/>
+            <a:r>
+              <a:rPr sz="1150" b="0">
+                <a:solidFill>
+                  <a:srgbClr val="595959"/>
+                </a:solidFill>
+              </a:rPr>
+              <a:t>This is the micro-mechanism behind every macro gap in this deck: gross margin, EBITA, and ROIC differences all begin at contribution per part number. Caveats: TBKK = Thai subsidiary (~26% of group sales); periods/currencies differ — ratios comparable, absolutes not; Concentric 2021 was a strong year. First actions are free: prune negative-contribution lines (GKN case-set), reprice near-zero lines.</a:t>
+            </a:r>
+          </a:p>
+        </p:txBody>
+      </p:sp>
+    </p:spTree>
+  </p:cSld>
+  <p:clrMapOvr>
+    <a:masterClrMapping/>
+  </p:clrMapOvr>
+</p:sld>
+</file>
+
+<file path=ppt/slides/slide12.xml><?xml version="1.0" encoding="utf-8"?>
+<p:sld xmlns:a="http://schemas.openxmlformats.org/drawingml/2006/main" xmlns:p="http://schemas.openxmlformats.org/presentationml/2006/main" xmlns:r="http://schemas.openxmlformats.org/officeDocument/2006/relationships">
+  <p:cSld>
+    <p:spTree>
+      <p:nvGrpSpPr>
+        <p:cNvPr id="1" name=""/>
+        <p:cNvGrpSpPr/>
+        <p:nvPr/>
+      </p:nvGrpSpPr>
+      <p:grpSpPr/>
+      <p:sp>
+        <p:nvSpPr>
+          <p:cNvPr id="2" name="TextBox 1"/>
+          <p:cNvSpPr txBox="1"/>
+          <p:nvPr/>
+        </p:nvSpPr>
+        <p:spPr>
+          <a:xfrm>
+            <a:off x="0" y="0"/>
+            <a:ext cx="12191695" cy="868680"/>
+          </a:xfrm>
+          <a:prstGeom prst="rect">
+            <a:avLst/>
+          </a:prstGeom>
+          <a:solidFill>
+            <a:srgbClr val="1F4E78"/>
+          </a:solidFill>
+        </p:spPr>
+        <p:txBody>
+          <a:bodyPr wrap="square" lIns="457200" tIns="164592">
+            <a:spAutoFit/>
+          </a:bodyPr>
+          <a:lstStyle/>
+          <a:p>
+            <a:r>
+              <a:rPr sz="2600" b="1">
+                <a:solidFill>
+                  <a:srgbClr val="FFFFFF"/>
+                </a:solidFill>
+              </a:rPr>
               <a:t>Why TBK looks lean on OPEX: its factory costs hide in COGS</a:t>
             </a:r>
           </a:p>
@@ -7370,7 +7918,7 @@
 </p:sld>
 </file>
 
-<file path=ppt/slides/slide12.xml><?xml version="1.0" encoding="utf-8"?>
+<file path=ppt/slides/slide13.xml><?xml version="1.0" encoding="utf-8"?>
 <p:sld xmlns:a="http://schemas.openxmlformats.org/drawingml/2006/main" xmlns:p="http://schemas.openxmlformats.org/presentationml/2006/main" xmlns:r="http://schemas.openxmlformats.org/officeDocument/2006/relationships">
   <p:cSld>
     <p:spTree>
@@ -7690,7 +8238,7 @@
 </p:sld>
 </file>
 
-<file path=ppt/slides/slide13.xml><?xml version="1.0" encoding="utf-8"?>
+<file path=ppt/slides/slide14.xml><?xml version="1.0" encoding="utf-8"?>
 <p:sld xmlns:a="http://schemas.openxmlformats.org/drawingml/2006/main" xmlns:p="http://schemas.openxmlformats.org/presentationml/2006/main" xmlns:r="http://schemas.openxmlformats.org/officeDocument/2006/relationships">
   <p:cSld>
     <p:spTree>
@@ -8078,7 +8626,7 @@
 </p:sld>
 </file>
 
-<file path=ppt/slides/slide14.xml><?xml version="1.0" encoding="utf-8"?>
+<file path=ppt/slides/slide15.xml><?xml version="1.0" encoding="utf-8"?>
 <p:sld xmlns:a="http://schemas.openxmlformats.org/drawingml/2006/main" xmlns:p="http://schemas.openxmlformats.org/presentationml/2006/main" xmlns:r="http://schemas.openxmlformats.org/officeDocument/2006/relationships">
   <p:cSld>
     <p:spTree>
@@ -8542,438 +9090,6 @@
                 </a:solidFill>
               </a:rPr>
               <a:t>Strategic point: TBK's quality reputation is held entirely inside the keiretsu — like its market share, it cannot be sold to new customers. Making quality externally legible (awards, certifications, published data) is a cheap, necessary complement to the R&amp;D program.</a:t>
-            </a:r>
-          </a:p>
-        </p:txBody>
-      </p:sp>
-    </p:spTree>
-  </p:cSld>
-  <p:clrMapOvr>
-    <a:masterClrMapping/>
-  </p:clrMapOvr>
-</p:sld>
-</file>
-
-<file path=ppt/slides/slide15.xml><?xml version="1.0" encoding="utf-8"?>
-<p:sld xmlns:a="http://schemas.openxmlformats.org/drawingml/2006/main" xmlns:p="http://schemas.openxmlformats.org/presentationml/2006/main" xmlns:r="http://schemas.openxmlformats.org/officeDocument/2006/relationships">
-  <p:cSld>
-    <p:spTree>
-      <p:nvGrpSpPr>
-        <p:cNvPr id="1" name=""/>
-        <p:cNvGrpSpPr/>
-        <p:nvPr/>
-      </p:nvGrpSpPr>
-      <p:grpSpPr/>
-      <p:sp>
-        <p:nvSpPr>
-          <p:cNvPr id="2" name="TextBox 1"/>
-          <p:cNvSpPr txBox="1"/>
-          <p:nvPr/>
-        </p:nvSpPr>
-        <p:spPr>
-          <a:xfrm>
-            <a:off x="0" y="0"/>
-            <a:ext cx="12191695" cy="868680"/>
-          </a:xfrm>
-          <a:prstGeom prst="rect">
-            <a:avLst/>
-          </a:prstGeom>
-          <a:solidFill>
-            <a:srgbClr val="1F4E78"/>
-          </a:solidFill>
-        </p:spPr>
-        <p:txBody>
-          <a:bodyPr wrap="square" lIns="457200" tIns="164592">
-            <a:spAutoFit/>
-          </a:bodyPr>
-          <a:lstStyle/>
-          <a:p>
-            <a:r>
-              <a:rPr sz="2600" b="1">
-                <a:solidFill>
-                  <a:srgbClr val="FFFFFF"/>
-                </a:solidFill>
-              </a:rPr>
-              <a:t>Product evaluation II: innovation output</a:t>
-            </a:r>
-          </a:p>
-        </p:txBody>
-      </p:sp>
-      <p:sp>
-        <p:nvSpPr>
-          <p:cNvPr id="3" name="TextBox 2"/>
-          <p:cNvSpPr txBox="1"/>
-          <p:nvPr/>
-        </p:nvSpPr>
-        <p:spPr>
-          <a:xfrm>
-            <a:off x="457200" y="914400"/>
-            <a:ext cx="11247120" cy="365760"/>
-          </a:xfrm>
-          <a:prstGeom prst="rect">
-            <a:avLst/>
-          </a:prstGeom>
-          <a:noFill/>
-        </p:spPr>
-        <p:txBody>
-          <a:bodyPr wrap="square">
-            <a:spAutoFit/>
-          </a:bodyPr>
-          <a:lstStyle/>
-          <a:p>
-            <a:pPr algn="l"/>
-            <a:r>
-              <a:rPr sz="1200" b="0">
-                <a:solidFill>
-                  <a:srgbClr val="595959"/>
-                </a:solidFill>
-              </a:rPr>
-              <a:t>Patents, documented product firsts, and technical-society awards — the externally visible output of R&amp;D</a:t>
-            </a:r>
-          </a:p>
-        </p:txBody>
-      </p:sp>
-      <p:sp>
-        <p:nvSpPr>
-          <p:cNvPr id="4" name="TextBox 3"/>
-          <p:cNvSpPr txBox="1"/>
-          <p:nvPr/>
-        </p:nvSpPr>
-        <p:spPr>
-          <a:xfrm>
-            <a:off x="457200" y="1417320"/>
-            <a:ext cx="5577840" cy="2286000"/>
-          </a:xfrm>
-          <a:prstGeom prst="rect">
-            <a:avLst/>
-          </a:prstGeom>
-          <a:solidFill>
-            <a:srgbClr val="F2F2F2"/>
-          </a:solidFill>
-          <a:ln w="15875">
-            <a:solidFill>
-              <a:srgbClr val="1F4E78"/>
-            </a:solidFill>
-          </a:ln>
-        </p:spPr>
-        <p:txBody>
-          <a:bodyPr wrap="square" lIns="137160" rIns="137160" tIns="109728">
-            <a:spAutoFit/>
-          </a:bodyPr>
-          <a:lstStyle/>
-          <a:p>
-            <a:r>
-              <a:rPr sz="1500" b="1">
-                <a:solidFill>
-                  <a:srgbClr val="1F4E78"/>
-                </a:solidFill>
-              </a:rPr>
-              <a:t>The patent gap (independent registries)</a:t>
-            </a:r>
-          </a:p>
-          <a:p>
-            <a:pPr>
-              <a:spcBef>
-                <a:spcPts val="400"/>
-              </a:spcBef>
-            </a:pPr>
-            <a:r>
-              <a:rPr sz="1100">
-                <a:solidFill>
-                  <a:srgbClr val="202020"/>
-                </a:solidFill>
-              </a:rPr>
-              <a:t>Knorr-Bremse: ~2,900 patent families / 10,900+ patents (~7,500 in the truck division)</a:t>
-            </a:r>
-          </a:p>
-          <a:p>
-            <a:pPr>
-              <a:spcBef>
-                <a:spcPts val="400"/>
-              </a:spcBef>
-            </a:pPr>
-            <a:r>
-              <a:rPr sz="1100">
-                <a:solidFill>
-                  <a:srgbClr val="202020"/>
-                </a:solidFill>
-              </a:rPr>
-              <a:t>Aisin: ~680 JP applications/yr; Clarivate Top-100 Global Innovator 7 consecutive years</a:t>
-            </a:r>
-          </a:p>
-          <a:p>
-            <a:pPr>
-              <a:spcBef>
-                <a:spcPts val="400"/>
-              </a:spcBef>
-            </a:pPr>
-            <a:r>
-              <a:rPr sz="1100">
-                <a:solidFill>
-                  <a:srgbClr val="202020"/>
-                </a:solidFill>
-              </a:rPr>
-              <a:t>Akebono: ~321 US-registered patents</a:t>
-            </a:r>
-          </a:p>
-          <a:p>
-            <a:pPr>
-              <a:spcBef>
-                <a:spcPts val="400"/>
-              </a:spcBef>
-            </a:pPr>
-            <a:r>
-              <a:rPr sz="1100">
-                <a:solidFill>
-                  <a:srgbClr val="202020"/>
-                </a:solidFill>
-              </a:rPr>
-              <a:t>Mikuni: e-oil-pump fault-detection patents — its BEV-truck win is engineering-backed</a:t>
-            </a:r>
-          </a:p>
-          <a:p>
-            <a:pPr>
-              <a:spcBef>
-                <a:spcPts val="400"/>
-              </a:spcBef>
-            </a:pPr>
-            <a:r>
-              <a:rPr sz="1100">
-                <a:solidFill>
-                  <a:srgbClr val="202020"/>
-                </a:solidFill>
-              </a:rPr>
-              <a:t>TBK: 2-3 patent GRANTS PER YEAR — two to three orders of magnitude below the leaders.</a:t>
-            </a:r>
-          </a:p>
-          <a:p>
-            <a:pPr>
-              <a:spcBef>
-                <a:spcPts val="400"/>
-              </a:spcBef>
-            </a:pPr>
-            <a:r>
-              <a:rPr sz="1100">
-                <a:solidFill>
-                  <a:srgbClr val="202020"/>
-                </a:solidFill>
-              </a:rPr>
-              <a:t>Independently confirms the capitalized-R&amp;D finding ($43M vs $2.6-5.6bn) from a different data source</a:t>
-            </a:r>
-          </a:p>
-        </p:txBody>
-      </p:sp>
-      <p:sp>
-        <p:nvSpPr>
-          <p:cNvPr id="5" name="TextBox 4"/>
-          <p:cNvSpPr txBox="1"/>
-          <p:nvPr/>
-        </p:nvSpPr>
-        <p:spPr>
-          <a:xfrm>
-            <a:off x="6217920" y="1417320"/>
-            <a:ext cx="5532120" cy="2286000"/>
-          </a:xfrm>
-          <a:prstGeom prst="rect">
-            <a:avLst/>
-          </a:prstGeom>
-          <a:solidFill>
-            <a:srgbClr val="F2F2F2"/>
-          </a:solidFill>
-          <a:ln w="15875">
-            <a:solidFill>
-              <a:srgbClr val="548235"/>
-            </a:solidFill>
-          </a:ln>
-        </p:spPr>
-        <p:txBody>
-          <a:bodyPr wrap="square" lIns="137160" rIns="137160" tIns="109728">
-            <a:spAutoFit/>
-          </a:bodyPr>
-          <a:lstStyle/>
-          <a:p>
-            <a:r>
-              <a:rPr sz="1500" b="1">
-                <a:solidFill>
-                  <a:srgbClr val="548235"/>
-                </a:solidFill>
-              </a:rPr>
-              <a:t>Documented product firsts</a:t>
-            </a:r>
-          </a:p>
-          <a:p>
-            <a:pPr>
-              <a:spcBef>
-                <a:spcPts val="400"/>
-              </a:spcBef>
-            </a:pPr>
-            <a:r>
-              <a:rPr sz="1100">
-                <a:solidFill>
-                  <a:srgbClr val="202020"/>
-                </a:solidFill>
-              </a:rPr>
-              <a:t>Knorr: EBS 1989; series air disc brake 1992; Actros/Scania volume 1996</a:t>
-            </a:r>
-          </a:p>
-          <a:p>
-            <a:pPr>
-              <a:spcBef>
-                <a:spcPts val="400"/>
-              </a:spcBef>
-            </a:pPr>
-            <a:r>
-              <a:rPr sz="1100">
-                <a:solidFill>
-                  <a:srgbClr val="202020"/>
-                </a:solidFill>
-              </a:rPr>
-              <a:t>Bendix ADB22X: 2005, now ~85% of NA air-disc wheel ends</a:t>
-            </a:r>
-          </a:p>
-          <a:p>
-            <a:pPr>
-              <a:spcBef>
-                <a:spcPts val="400"/>
-              </a:spcBef>
-            </a:pPr>
-            <a:r>
-              <a:rPr sz="1100">
-                <a:solidFill>
-                  <a:srgbClr val="202020"/>
-                </a:solidFill>
-              </a:rPr>
-              <a:t>UD Quon 2017: first all-disc Japanese heavy truck</a:t>
-            </a:r>
-          </a:p>
-          <a:p>
-            <a:pPr>
-              <a:spcBef>
-                <a:spcPts val="400"/>
-              </a:spcBef>
-            </a:pPr>
-            <a:r>
-              <a:rPr sz="1100">
-                <a:solidFill>
-                  <a:srgbClr val="202020"/>
-                </a:solidFill>
-              </a:rPr>
-              <a:t>Mikuni 2022: e-oil pump in production for a domestic small BEV truck</a:t>
-            </a:r>
-          </a:p>
-          <a:p>
-            <a:pPr>
-              <a:spcBef>
-                <a:spcPts val="400"/>
-              </a:spcBef>
-            </a:pPr>
-            <a:r>
-              <a:rPr sz="1100">
-                <a:solidFill>
-                  <a:srgbClr val="202020"/>
-                </a:solidFill>
-              </a:rPr>
-              <a:t>Akebono FY2023: JSME Technology Award — world-first electric parking brake unit for medium/light trucks (innovating through distress)</a:t>
-            </a:r>
-          </a:p>
-          <a:p>
-            <a:pPr>
-              <a:spcBef>
-                <a:spcPts val="400"/>
-              </a:spcBef>
-            </a:pPr>
-            <a:r>
-              <a:rPr sz="1100">
-                <a:solidFill>
-                  <a:srgbClr val="202020"/>
-                </a:solidFill>
-              </a:rPr>
-              <a:t>TBK: retarders since the 1960s; 19.5" ADB exhibited (year unconfirmed: 2019 vs 2022 sources conflict); e-pumps/TCU in development</a:t>
-            </a:r>
-          </a:p>
-        </p:txBody>
-      </p:sp>
-      <p:sp>
-        <p:nvSpPr>
-          <p:cNvPr id="6" name="TextBox 5"/>
-          <p:cNvSpPr txBox="1"/>
-          <p:nvPr/>
-        </p:nvSpPr>
-        <p:spPr>
-          <a:xfrm>
-            <a:off x="457200" y="3840480"/>
-            <a:ext cx="11292840" cy="1737360"/>
-          </a:xfrm>
-          <a:prstGeom prst="rect">
-            <a:avLst/>
-          </a:prstGeom>
-          <a:solidFill>
-            <a:srgbClr val="F2F2F2"/>
-          </a:solidFill>
-          <a:ln w="15875">
-            <a:solidFill>
-              <a:srgbClr val="1F4E78"/>
-            </a:solidFill>
-          </a:ln>
-        </p:spPr>
-        <p:txBody>
-          <a:bodyPr wrap="square" lIns="137160" rIns="137160" tIns="109728">
-            <a:spAutoFit/>
-          </a:bodyPr>
-          <a:lstStyle/>
-          <a:p>
-            <a:r>
-              <a:rPr sz="1500" b="1">
-                <a:solidFill>
-                  <a:srgbClr val="1F4E78"/>
-                </a:solidFill>
-              </a:rPr>
-              <a:t>The pattern — and TBK's fix</a:t>
-            </a:r>
-          </a:p>
-          <a:p>
-            <a:pPr>
-              <a:spcBef>
-                <a:spcPts val="400"/>
-              </a:spcBef>
-            </a:pPr>
-            <a:r>
-              <a:rPr sz="1150">
-                <a:solidFill>
-                  <a:srgbClr val="202020"/>
-                </a:solidFill>
-              </a:rPr>
-              <a:t>Innovation output tracks the moat and margin rankings almost perfectly: the companies with validated quality (Knorr, Cummins) also hold the patent fortresses and the product firsts; the distressed (Akebono) still out-publish TBK; even the similarly-sized peer (Mikuni) protects its e-pump work with patents.</a:t>
-            </a:r>
-          </a:p>
-          <a:p>
-            <a:pPr>
-              <a:spcBef>
-                <a:spcPts val="400"/>
-              </a:spcBef>
-            </a:pPr>
-            <a:r>
-              <a:rPr sz="1150">
-                <a:solidFill>
-                  <a:srgbClr val="202020"/>
-                </a:solidFill>
-              </a:rPr>
-              <a:t>TBK's innovation is real but INVISIBLE: 75 years of retarder/brake/pump engineering, an ADB prototype, e-pumps and a thermal control unit in development — none of it patented at scale, published at JSAE, or externally awarded. Invisible innovation cannot win sockets outside the keiretsu.</a:t>
-            </a:r>
-          </a:p>
-          <a:p>
-            <a:pPr>
-              <a:spcBef>
-                <a:spcPts val="400"/>
-              </a:spcBef>
-            </a:pPr>
-            <a:r>
-              <a:rPr sz="1150">
-                <a:solidFill>
-                  <a:srgbClr val="202020"/>
-                </a:solidFill>
-              </a:rPr>
-              <a:t>Fix costs little: patent the e-pump/TCU and ADB work (Mikuni shows the value), publish, pursue external validation — a required complement to the R&amp;D spend itself.</a:t>
             </a:r>
           </a:p>
         </p:txBody>
@@ -9026,6 +9142,438 @@
                   <a:srgbClr val="FFFFFF"/>
                 </a:solidFill>
               </a:rPr>
+              <a:t>Product evaluation II: innovation output</a:t>
+            </a:r>
+          </a:p>
+        </p:txBody>
+      </p:sp>
+      <p:sp>
+        <p:nvSpPr>
+          <p:cNvPr id="3" name="TextBox 2"/>
+          <p:cNvSpPr txBox="1"/>
+          <p:nvPr/>
+        </p:nvSpPr>
+        <p:spPr>
+          <a:xfrm>
+            <a:off x="457200" y="914400"/>
+            <a:ext cx="11247120" cy="365760"/>
+          </a:xfrm>
+          <a:prstGeom prst="rect">
+            <a:avLst/>
+          </a:prstGeom>
+          <a:noFill/>
+        </p:spPr>
+        <p:txBody>
+          <a:bodyPr wrap="square">
+            <a:spAutoFit/>
+          </a:bodyPr>
+          <a:lstStyle/>
+          <a:p>
+            <a:pPr algn="l"/>
+            <a:r>
+              <a:rPr sz="1200" b="0">
+                <a:solidFill>
+                  <a:srgbClr val="595959"/>
+                </a:solidFill>
+              </a:rPr>
+              <a:t>Patents, documented product firsts, and technical-society awards — the externally visible output of R&amp;D</a:t>
+            </a:r>
+          </a:p>
+        </p:txBody>
+      </p:sp>
+      <p:sp>
+        <p:nvSpPr>
+          <p:cNvPr id="4" name="TextBox 3"/>
+          <p:cNvSpPr txBox="1"/>
+          <p:nvPr/>
+        </p:nvSpPr>
+        <p:spPr>
+          <a:xfrm>
+            <a:off x="457200" y="1417320"/>
+            <a:ext cx="5577840" cy="2286000"/>
+          </a:xfrm>
+          <a:prstGeom prst="rect">
+            <a:avLst/>
+          </a:prstGeom>
+          <a:solidFill>
+            <a:srgbClr val="F2F2F2"/>
+          </a:solidFill>
+          <a:ln w="15875">
+            <a:solidFill>
+              <a:srgbClr val="1F4E78"/>
+            </a:solidFill>
+          </a:ln>
+        </p:spPr>
+        <p:txBody>
+          <a:bodyPr wrap="square" lIns="137160" rIns="137160" tIns="109728">
+            <a:spAutoFit/>
+          </a:bodyPr>
+          <a:lstStyle/>
+          <a:p>
+            <a:r>
+              <a:rPr sz="1500" b="1">
+                <a:solidFill>
+                  <a:srgbClr val="1F4E78"/>
+                </a:solidFill>
+              </a:rPr>
+              <a:t>The patent gap (independent registries)</a:t>
+            </a:r>
+          </a:p>
+          <a:p>
+            <a:pPr>
+              <a:spcBef>
+                <a:spcPts val="400"/>
+              </a:spcBef>
+            </a:pPr>
+            <a:r>
+              <a:rPr sz="1100">
+                <a:solidFill>
+                  <a:srgbClr val="202020"/>
+                </a:solidFill>
+              </a:rPr>
+              <a:t>Knorr-Bremse: ~2,900 patent families / 10,900+ patents (~7,500 in the truck division)</a:t>
+            </a:r>
+          </a:p>
+          <a:p>
+            <a:pPr>
+              <a:spcBef>
+                <a:spcPts val="400"/>
+              </a:spcBef>
+            </a:pPr>
+            <a:r>
+              <a:rPr sz="1100">
+                <a:solidFill>
+                  <a:srgbClr val="202020"/>
+                </a:solidFill>
+              </a:rPr>
+              <a:t>Aisin: ~680 JP applications/yr; Clarivate Top-100 Global Innovator 7 consecutive years</a:t>
+            </a:r>
+          </a:p>
+          <a:p>
+            <a:pPr>
+              <a:spcBef>
+                <a:spcPts val="400"/>
+              </a:spcBef>
+            </a:pPr>
+            <a:r>
+              <a:rPr sz="1100">
+                <a:solidFill>
+                  <a:srgbClr val="202020"/>
+                </a:solidFill>
+              </a:rPr>
+              <a:t>Akebono: ~321 US-registered patents</a:t>
+            </a:r>
+          </a:p>
+          <a:p>
+            <a:pPr>
+              <a:spcBef>
+                <a:spcPts val="400"/>
+              </a:spcBef>
+            </a:pPr>
+            <a:r>
+              <a:rPr sz="1100">
+                <a:solidFill>
+                  <a:srgbClr val="202020"/>
+                </a:solidFill>
+              </a:rPr>
+              <a:t>Mikuni: e-oil-pump fault-detection patents — its BEV-truck win is engineering-backed</a:t>
+            </a:r>
+          </a:p>
+          <a:p>
+            <a:pPr>
+              <a:spcBef>
+                <a:spcPts val="400"/>
+              </a:spcBef>
+            </a:pPr>
+            <a:r>
+              <a:rPr sz="1100">
+                <a:solidFill>
+                  <a:srgbClr val="202020"/>
+                </a:solidFill>
+              </a:rPr>
+              <a:t>TBK: 2-3 patent GRANTS PER YEAR — two to three orders of magnitude below the leaders.</a:t>
+            </a:r>
+          </a:p>
+          <a:p>
+            <a:pPr>
+              <a:spcBef>
+                <a:spcPts val="400"/>
+              </a:spcBef>
+            </a:pPr>
+            <a:r>
+              <a:rPr sz="1100">
+                <a:solidFill>
+                  <a:srgbClr val="202020"/>
+                </a:solidFill>
+              </a:rPr>
+              <a:t>Independently confirms the capitalized-R&amp;D finding ($43M vs $2.6-5.6bn) from a different data source</a:t>
+            </a:r>
+          </a:p>
+        </p:txBody>
+      </p:sp>
+      <p:sp>
+        <p:nvSpPr>
+          <p:cNvPr id="5" name="TextBox 4"/>
+          <p:cNvSpPr txBox="1"/>
+          <p:nvPr/>
+        </p:nvSpPr>
+        <p:spPr>
+          <a:xfrm>
+            <a:off x="6217920" y="1417320"/>
+            <a:ext cx="5532120" cy="2286000"/>
+          </a:xfrm>
+          <a:prstGeom prst="rect">
+            <a:avLst/>
+          </a:prstGeom>
+          <a:solidFill>
+            <a:srgbClr val="F2F2F2"/>
+          </a:solidFill>
+          <a:ln w="15875">
+            <a:solidFill>
+              <a:srgbClr val="548235"/>
+            </a:solidFill>
+          </a:ln>
+        </p:spPr>
+        <p:txBody>
+          <a:bodyPr wrap="square" lIns="137160" rIns="137160" tIns="109728">
+            <a:spAutoFit/>
+          </a:bodyPr>
+          <a:lstStyle/>
+          <a:p>
+            <a:r>
+              <a:rPr sz="1500" b="1">
+                <a:solidFill>
+                  <a:srgbClr val="548235"/>
+                </a:solidFill>
+              </a:rPr>
+              <a:t>Documented product firsts</a:t>
+            </a:r>
+          </a:p>
+          <a:p>
+            <a:pPr>
+              <a:spcBef>
+                <a:spcPts val="400"/>
+              </a:spcBef>
+            </a:pPr>
+            <a:r>
+              <a:rPr sz="1100">
+                <a:solidFill>
+                  <a:srgbClr val="202020"/>
+                </a:solidFill>
+              </a:rPr>
+              <a:t>Knorr: EBS 1989; series air disc brake 1992; Actros/Scania volume 1996</a:t>
+            </a:r>
+          </a:p>
+          <a:p>
+            <a:pPr>
+              <a:spcBef>
+                <a:spcPts val="400"/>
+              </a:spcBef>
+            </a:pPr>
+            <a:r>
+              <a:rPr sz="1100">
+                <a:solidFill>
+                  <a:srgbClr val="202020"/>
+                </a:solidFill>
+              </a:rPr>
+              <a:t>Bendix ADB22X: 2005, now ~85% of NA air-disc wheel ends</a:t>
+            </a:r>
+          </a:p>
+          <a:p>
+            <a:pPr>
+              <a:spcBef>
+                <a:spcPts val="400"/>
+              </a:spcBef>
+            </a:pPr>
+            <a:r>
+              <a:rPr sz="1100">
+                <a:solidFill>
+                  <a:srgbClr val="202020"/>
+                </a:solidFill>
+              </a:rPr>
+              <a:t>UD Quon 2017: first all-disc Japanese heavy truck</a:t>
+            </a:r>
+          </a:p>
+          <a:p>
+            <a:pPr>
+              <a:spcBef>
+                <a:spcPts val="400"/>
+              </a:spcBef>
+            </a:pPr>
+            <a:r>
+              <a:rPr sz="1100">
+                <a:solidFill>
+                  <a:srgbClr val="202020"/>
+                </a:solidFill>
+              </a:rPr>
+              <a:t>Mikuni 2022: e-oil pump in production for a domestic small BEV truck</a:t>
+            </a:r>
+          </a:p>
+          <a:p>
+            <a:pPr>
+              <a:spcBef>
+                <a:spcPts val="400"/>
+              </a:spcBef>
+            </a:pPr>
+            <a:r>
+              <a:rPr sz="1100">
+                <a:solidFill>
+                  <a:srgbClr val="202020"/>
+                </a:solidFill>
+              </a:rPr>
+              <a:t>Akebono FY2023: JSME Technology Award — world-first electric parking brake unit for medium/light trucks (innovating through distress)</a:t>
+            </a:r>
+          </a:p>
+          <a:p>
+            <a:pPr>
+              <a:spcBef>
+                <a:spcPts val="400"/>
+              </a:spcBef>
+            </a:pPr>
+            <a:r>
+              <a:rPr sz="1100">
+                <a:solidFill>
+                  <a:srgbClr val="202020"/>
+                </a:solidFill>
+              </a:rPr>
+              <a:t>TBK: retarders since the 1960s; 19.5" ADB exhibited (year unconfirmed: 2019 vs 2022 sources conflict); e-pumps/TCU in development</a:t>
+            </a:r>
+          </a:p>
+        </p:txBody>
+      </p:sp>
+      <p:sp>
+        <p:nvSpPr>
+          <p:cNvPr id="6" name="TextBox 5"/>
+          <p:cNvSpPr txBox="1"/>
+          <p:nvPr/>
+        </p:nvSpPr>
+        <p:spPr>
+          <a:xfrm>
+            <a:off x="457200" y="3840480"/>
+            <a:ext cx="11292840" cy="1737360"/>
+          </a:xfrm>
+          <a:prstGeom prst="rect">
+            <a:avLst/>
+          </a:prstGeom>
+          <a:solidFill>
+            <a:srgbClr val="F2F2F2"/>
+          </a:solidFill>
+          <a:ln w="15875">
+            <a:solidFill>
+              <a:srgbClr val="1F4E78"/>
+            </a:solidFill>
+          </a:ln>
+        </p:spPr>
+        <p:txBody>
+          <a:bodyPr wrap="square" lIns="137160" rIns="137160" tIns="109728">
+            <a:spAutoFit/>
+          </a:bodyPr>
+          <a:lstStyle/>
+          <a:p>
+            <a:r>
+              <a:rPr sz="1500" b="1">
+                <a:solidFill>
+                  <a:srgbClr val="1F4E78"/>
+                </a:solidFill>
+              </a:rPr>
+              <a:t>The pattern — and TBK's fix</a:t>
+            </a:r>
+          </a:p>
+          <a:p>
+            <a:pPr>
+              <a:spcBef>
+                <a:spcPts val="400"/>
+              </a:spcBef>
+            </a:pPr>
+            <a:r>
+              <a:rPr sz="1150">
+                <a:solidFill>
+                  <a:srgbClr val="202020"/>
+                </a:solidFill>
+              </a:rPr>
+              <a:t>Innovation output tracks the moat and margin rankings almost perfectly: the companies with validated quality (Knorr, Cummins) also hold the patent fortresses and the product firsts; the distressed (Akebono) still out-publish TBK; even the similarly-sized peer (Mikuni) protects its e-pump work with patents.</a:t>
+            </a:r>
+          </a:p>
+          <a:p>
+            <a:pPr>
+              <a:spcBef>
+                <a:spcPts val="400"/>
+              </a:spcBef>
+            </a:pPr>
+            <a:r>
+              <a:rPr sz="1150">
+                <a:solidFill>
+                  <a:srgbClr val="202020"/>
+                </a:solidFill>
+              </a:rPr>
+              <a:t>TBK's innovation is real but INVISIBLE: 75 years of retarder/brake/pump engineering, an ADB prototype, e-pumps and a thermal control unit in development — none of it patented at scale, published at JSAE, or externally awarded. Invisible innovation cannot win sockets outside the keiretsu.</a:t>
+            </a:r>
+          </a:p>
+          <a:p>
+            <a:pPr>
+              <a:spcBef>
+                <a:spcPts val="400"/>
+              </a:spcBef>
+            </a:pPr>
+            <a:r>
+              <a:rPr sz="1150">
+                <a:solidFill>
+                  <a:srgbClr val="202020"/>
+                </a:solidFill>
+              </a:rPr>
+              <a:t>Fix costs little: patent the e-pump/TCU and ADB work (Mikuni shows the value), publish, pursue external validation — a required complement to the R&amp;D spend itself.</a:t>
+            </a:r>
+          </a:p>
+        </p:txBody>
+      </p:sp>
+    </p:spTree>
+  </p:cSld>
+  <p:clrMapOvr>
+    <a:masterClrMapping/>
+  </p:clrMapOvr>
+</p:sld>
+</file>
+
+<file path=ppt/slides/slide17.xml><?xml version="1.0" encoding="utf-8"?>
+<p:sld xmlns:a="http://schemas.openxmlformats.org/drawingml/2006/main" xmlns:p="http://schemas.openxmlformats.org/presentationml/2006/main" xmlns:r="http://schemas.openxmlformats.org/officeDocument/2006/relationships">
+  <p:cSld>
+    <p:spTree>
+      <p:nvGrpSpPr>
+        <p:cNvPr id="1" name=""/>
+        <p:cNvGrpSpPr/>
+        <p:nvPr/>
+      </p:nvGrpSpPr>
+      <p:grpSpPr/>
+      <p:sp>
+        <p:nvSpPr>
+          <p:cNvPr id="2" name="TextBox 1"/>
+          <p:cNvSpPr txBox="1"/>
+          <p:nvPr/>
+        </p:nvSpPr>
+        <p:spPr>
+          <a:xfrm>
+            <a:off x="0" y="0"/>
+            <a:ext cx="12191695" cy="868680"/>
+          </a:xfrm>
+          <a:prstGeom prst="rect">
+            <a:avLst/>
+          </a:prstGeom>
+          <a:solidFill>
+            <a:srgbClr val="1F4E78"/>
+          </a:solidFill>
+        </p:spPr>
+        <p:txBody>
+          <a:bodyPr wrap="square" lIns="457200" tIns="164592">
+            <a:spAutoFit/>
+          </a:bodyPr>
+          <a:lstStyle/>
+          <a:p>
+            <a:r>
+              <a:rPr sz="2600" b="1">
+                <a:solidFill>
+                  <a:srgbClr val="FFFFFF"/>
+                </a:solidFill>
+              </a:rPr>
               <a:t>Moat framework ranking: TBK scores 5.38 — 9th of 13</a:t>
             </a:r>
           </a:p>
@@ -9396,7 +9944,7 @@
 </p:sld>
 </file>
 
-<file path=ppt/slides/slide17.xml><?xml version="1.0" encoding="utf-8"?>
+<file path=ppt/slides/slide18.xml><?xml version="1.0" encoding="utf-8"?>
 <p:sld xmlns:a="http://schemas.openxmlformats.org/drawingml/2006/main" xmlns:p="http://schemas.openxmlformats.org/presentationml/2006/main" xmlns:r="http://schemas.openxmlformats.org/officeDocument/2006/relationships">
   <p:cSld>
     <p:spTree>
@@ -9701,7 +10249,7 @@
 </p:sld>
 </file>
 
-<file path=ppt/slides/slide18.xml><?xml version="1.0" encoding="utf-8"?>
+<file path=ppt/slides/slide19.xml><?xml version="1.0" encoding="utf-8"?>
 <p:sld xmlns:a="http://schemas.openxmlformats.org/drawingml/2006/main" xmlns:p="http://schemas.openxmlformats.org/presentationml/2006/main" xmlns:r="http://schemas.openxmlformats.org/officeDocument/2006/relationships">
   <p:cSld>
     <p:spTree>
@@ -9858,7 +10406,639 @@
 </p:sld>
 </file>
 
-<file path=ppt/slides/slide19.xml><?xml version="1.0" encoding="utf-8"?>
+<file path=ppt/slides/slide2.xml><?xml version="1.0" encoding="utf-8"?>
+<p:sld xmlns:a="http://schemas.openxmlformats.org/drawingml/2006/main" xmlns:p="http://schemas.openxmlformats.org/presentationml/2006/main" xmlns:r="http://schemas.openxmlformats.org/officeDocument/2006/relationships">
+  <p:cSld>
+    <p:spTree>
+      <p:nvGrpSpPr>
+        <p:cNvPr id="1" name=""/>
+        <p:cNvGrpSpPr/>
+        <p:nvPr/>
+      </p:nvGrpSpPr>
+      <p:grpSpPr/>
+      <p:sp>
+        <p:nvSpPr>
+          <p:cNvPr id="2" name="TextBox 1"/>
+          <p:cNvSpPr txBox="1"/>
+          <p:nvPr/>
+        </p:nvSpPr>
+        <p:spPr>
+          <a:xfrm>
+            <a:off x="0" y="0"/>
+            <a:ext cx="12191695" cy="868680"/>
+          </a:xfrm>
+          <a:prstGeom prst="rect">
+            <a:avLst/>
+          </a:prstGeom>
+          <a:solidFill>
+            <a:srgbClr val="1F4E78"/>
+          </a:solidFill>
+        </p:spPr>
+        <p:txBody>
+          <a:bodyPr wrap="square" lIns="457200" tIns="164592">
+            <a:spAutoFit/>
+          </a:bodyPr>
+          <a:lstStyle/>
+          <a:p>
+            <a:r>
+              <a:rPr sz="2600" b="1">
+                <a:solidFill>
+                  <a:srgbClr val="FFFFFF"/>
+                </a:solidFill>
+              </a:rPr>
+              <a:t>Brakes: drum brakes are a shrinking island</a:t>
+            </a:r>
+          </a:p>
+        </p:txBody>
+      </p:sp>
+      <p:sp>
+        <p:nvSpPr>
+          <p:cNvPr id="3" name="TextBox 2"/>
+          <p:cNvSpPr txBox="1"/>
+          <p:nvPr/>
+        </p:nvSpPr>
+        <p:spPr>
+          <a:xfrm>
+            <a:off x="457200" y="914400"/>
+            <a:ext cx="11247120" cy="365760"/>
+          </a:xfrm>
+          <a:prstGeom prst="rect">
+            <a:avLst/>
+          </a:prstGeom>
+          <a:noFill/>
+        </p:spPr>
+        <p:txBody>
+          <a:bodyPr wrap="square">
+            <a:spAutoFit/>
+          </a:bodyPr>
+          <a:lstStyle/>
+          <a:p>
+            <a:pPr algn="l"/>
+            <a:r>
+              <a:rPr sz="1200" b="0">
+                <a:solidFill>
+                  <a:srgbClr val="595959"/>
+                </a:solidFill>
+              </a:rPr>
+              <a:t>Verified findings from peer-reviewed literature, regulatory records, and industry data</a:t>
+            </a:r>
+          </a:p>
+        </p:txBody>
+      </p:sp>
+      <p:sp>
+        <p:nvSpPr>
+          <p:cNvPr id="4" name="TextBox 3"/>
+          <p:cNvSpPr txBox="1"/>
+          <p:nvPr/>
+        </p:nvSpPr>
+        <p:spPr>
+          <a:xfrm>
+            <a:off x="457200" y="1417320"/>
+            <a:ext cx="3657600" cy="2834640"/>
+          </a:xfrm>
+          <a:prstGeom prst="rect">
+            <a:avLst/>
+          </a:prstGeom>
+          <a:solidFill>
+            <a:srgbClr val="F2F2F2"/>
+          </a:solidFill>
+          <a:ln w="15875">
+            <a:solidFill>
+              <a:srgbClr val="1F4E78"/>
+            </a:solidFill>
+          </a:ln>
+        </p:spPr>
+        <p:txBody>
+          <a:bodyPr wrap="square" lIns="137160" rIns="137160" tIns="109728">
+            <a:spAutoFit/>
+          </a:bodyPr>
+          <a:lstStyle/>
+          <a:p>
+            <a:r>
+              <a:rPr sz="1500" b="1">
+                <a:solidFill>
+                  <a:srgbClr val="1F4E78"/>
+                </a:solidFill>
+              </a:rPr>
+              <a:t>Europe — converted ~2000</a:t>
+            </a:r>
+          </a:p>
+          <a:p>
+            <a:pPr>
+              <a:spcBef>
+                <a:spcPts val="400"/>
+              </a:spcBef>
+            </a:pPr>
+            <a:r>
+              <a:rPr sz="1200">
+                <a:solidFill>
+                  <a:srgbClr val="202020"/>
+                </a:solidFill>
+              </a:rPr>
+              <a:t>1996 Actros: first heavy truck with</a:t>
+            </a:r>
+          </a:p>
+          <a:p>
+            <a:pPr>
+              <a:spcBef>
+                <a:spcPts val="400"/>
+              </a:spcBef>
+            </a:pPr>
+            <a:r>
+              <a:rPr sz="1200">
+                <a:solidFill>
+                  <a:srgbClr val="202020"/>
+                </a:solidFill>
+              </a:rPr>
+              <a:t>all-axle EBS disc brakes</a:t>
+            </a:r>
+          </a:p>
+          <a:p>
+            <a:pPr>
+              <a:spcBef>
+                <a:spcPts val="400"/>
+              </a:spcBef>
+            </a:pPr>
+            <a:r>
+              <a:rPr sz="1200">
+                <a:solidFill>
+                  <a:srgbClr val="202020"/>
+                </a:solidFill>
+              </a:rPr>
+              <a:t>~70% disc/EBS take rate by 2000</a:t>
+            </a:r>
+          </a:p>
+          <a:p>
+            <a:pPr>
+              <a:spcBef>
+                <a:spcPts val="400"/>
+              </a:spcBef>
+            </a:pPr>
+            <a:r>
+              <a:rPr sz="1200">
+                <a:solidFill>
+                  <a:srgbClr val="202020"/>
+                </a:solidFill>
+              </a:rPr>
+              <a:t>Near-universal on-highway since</a:t>
+            </a:r>
+          </a:p>
+          <a:p>
+            <a:pPr>
+              <a:spcBef>
+                <a:spcPts val="400"/>
+              </a:spcBef>
+            </a:pPr>
+            <a:r>
+              <a:rPr sz="1200">
+                <a:solidFill>
+                  <a:srgbClr val="202020"/>
+                </a:solidFill>
+              </a:rPr>
+              <a:t>Drums: ~18% of EU demand (off-road)</a:t>
+            </a:r>
+          </a:p>
+        </p:txBody>
+      </p:sp>
+      <p:sp>
+        <p:nvSpPr>
+          <p:cNvPr id="5" name="TextBox 4"/>
+          <p:cNvSpPr txBox="1"/>
+          <p:nvPr/>
+        </p:nvSpPr>
+        <p:spPr>
+          <a:xfrm>
+            <a:off x="4297680" y="1417320"/>
+            <a:ext cx="3657600" cy="2834640"/>
+          </a:xfrm>
+          <a:prstGeom prst="rect">
+            <a:avLst/>
+          </a:prstGeom>
+          <a:solidFill>
+            <a:srgbClr val="F2F2F2"/>
+          </a:solidFill>
+          <a:ln w="15875">
+            <a:solidFill>
+              <a:srgbClr val="1F4E78"/>
+            </a:solidFill>
+          </a:ln>
+        </p:spPr>
+        <p:txBody>
+          <a:bodyPr wrap="square" lIns="137160" rIns="137160" tIns="109728">
+            <a:spAutoFit/>
+          </a:bodyPr>
+          <a:lstStyle/>
+          <a:p>
+            <a:r>
+              <a:rPr sz="1500" b="1">
+                <a:solidFill>
+                  <a:srgbClr val="1F4E78"/>
+                </a:solidFill>
+              </a:rPr>
+              <a:t>North America — tipped 2023-24</a:t>
+            </a:r>
+          </a:p>
+          <a:p>
+            <a:pPr>
+              <a:spcBef>
+                <a:spcPts val="400"/>
+              </a:spcBef>
+            </a:pPr>
+            <a:r>
+              <a:rPr sz="1200">
+                <a:solidFill>
+                  <a:srgbClr val="202020"/>
+                </a:solidFill>
+              </a:rPr>
+              <a:t>FMVSS 121 (2009): −30% stopping</a:t>
+            </a:r>
+          </a:p>
+          <a:p>
+            <a:pPr>
+              <a:spcBef>
+                <a:spcPts val="400"/>
+              </a:spcBef>
+            </a:pPr>
+            <a:r>
+              <a:rPr sz="1200">
+                <a:solidFill>
+                  <a:srgbClr val="202020"/>
+                </a:solidFill>
+              </a:rPr>
+              <a:t>distance, drum-compatible by design</a:t>
+            </a:r>
+          </a:p>
+          <a:p>
+            <a:pPr>
+              <a:spcBef>
+                <a:spcPts val="400"/>
+              </a:spcBef>
+            </a:pPr>
+            <a:r>
+              <a:rPr sz="1200">
+                <a:solidFill>
+                  <a:srgbClr val="202020"/>
+                </a:solidFill>
+              </a:rPr>
+              <a:t>Tractors: &lt;5% disc (2011) → ~25%</a:t>
+            </a:r>
+          </a:p>
+          <a:p>
+            <a:pPr>
+              <a:spcBef>
+                <a:spcPts val="400"/>
+              </a:spcBef>
+            </a:pPr>
+            <a:r>
+              <a:rPr sz="1200">
+                <a:solidFill>
+                  <a:srgbClr val="202020"/>
+                </a:solidFill>
+              </a:rPr>
+              <a:t>(2018) → ~50%+ (2023-24)</a:t>
+            </a:r>
+          </a:p>
+          <a:p>
+            <a:pPr>
+              <a:spcBef>
+                <a:spcPts val="400"/>
+              </a:spcBef>
+            </a:pPr>
+            <a:r>
+              <a:rPr sz="1200">
+                <a:solidFill>
+                  <a:srgbClr val="202020"/>
+                </a:solidFill>
+              </a:rPr>
+              <a:t>Trailers still lag at ~15%</a:t>
+            </a:r>
+          </a:p>
+        </p:txBody>
+      </p:sp>
+      <p:sp>
+        <p:nvSpPr>
+          <p:cNvPr id="6" name="TextBox 5"/>
+          <p:cNvSpPr txBox="1"/>
+          <p:nvPr/>
+        </p:nvSpPr>
+        <p:spPr>
+          <a:xfrm>
+            <a:off x="8138160" y="1417320"/>
+            <a:ext cx="3611880" cy="2834640"/>
+          </a:xfrm>
+          <a:prstGeom prst="rect">
+            <a:avLst/>
+          </a:prstGeom>
+          <a:solidFill>
+            <a:srgbClr val="F2F2F2"/>
+          </a:solidFill>
+          <a:ln w="15875">
+            <a:solidFill>
+              <a:srgbClr val="7F1D1D"/>
+            </a:solidFill>
+          </a:ln>
+        </p:spPr>
+        <p:txBody>
+          <a:bodyPr wrap="square" lIns="137160" rIns="137160" tIns="109728">
+            <a:spAutoFit/>
+          </a:bodyPr>
+          <a:lstStyle/>
+          <a:p>
+            <a:r>
+              <a:rPr sz="1500" b="1">
+                <a:solidFill>
+                  <a:srgbClr val="7F1D1D"/>
+                </a:solidFill>
+              </a:rPr>
+              <a:t>Japan — the last drum market</a:t>
+            </a:r>
+          </a:p>
+          <a:p>
+            <a:pPr>
+              <a:spcBef>
+                <a:spcPts val="400"/>
+              </a:spcBef>
+            </a:pPr>
+            <a:r>
+              <a:rPr sz="1200">
+                <a:solidFill>
+                  <a:srgbClr val="202020"/>
+                </a:solidFill>
+              </a:rPr>
+              <a:t>Drums still majority on MD/HD trucks</a:t>
+            </a:r>
+          </a:p>
+          <a:p>
+            <a:pPr>
+              <a:spcBef>
+                <a:spcPts val="400"/>
+              </a:spcBef>
+            </a:pPr>
+            <a:r>
+              <a:rPr sz="1200">
+                <a:solidFill>
+                  <a:srgbClr val="202020"/>
+                </a:solidFill>
+              </a:rPr>
+              <a:t>UD Quon all-disc since 2017</a:t>
+            </a:r>
+          </a:p>
+          <a:p>
+            <a:pPr>
+              <a:spcBef>
+                <a:spcPts val="400"/>
+              </a:spcBef>
+            </a:pPr>
+            <a:r>
+              <a:rPr sz="1200">
+                <a:solidFill>
+                  <a:srgbClr val="202020"/>
+                </a:solidFill>
+              </a:rPr>
+              <a:t>New Giga tractor: all-wheel discs</a:t>
+            </a:r>
+          </a:p>
+          <a:p>
+            <a:pPr>
+              <a:spcBef>
+                <a:spcPts val="400"/>
+              </a:spcBef>
+            </a:pPr>
+            <a:r>
+              <a:rPr sz="1200">
+                <a:solidFill>
+                  <a:srgbClr val="202020"/>
+                </a:solidFill>
+              </a:rPr>
+              <a:t>Isuzu export heavies all-disc (MY25)</a:t>
+            </a:r>
+          </a:p>
+          <a:p>
+            <a:pPr>
+              <a:spcBef>
+                <a:spcPts val="400"/>
+              </a:spcBef>
+            </a:pPr>
+            <a:r>
+              <a:rPr sz="1200">
+                <a:solidFill>
+                  <a:srgbClr val="202020"/>
+                </a:solidFill>
+              </a:rPr>
+              <a:t>Domestic flip is when, not if</a:t>
+            </a:r>
+          </a:p>
+        </p:txBody>
+      </p:sp>
+      <p:sp>
+        <p:nvSpPr>
+          <p:cNvPr id="7" name="TextBox 6"/>
+          <p:cNvSpPr txBox="1"/>
+          <p:nvPr/>
+        </p:nvSpPr>
+        <p:spPr>
+          <a:xfrm>
+            <a:off x="457200" y="4434840"/>
+            <a:ext cx="5577840" cy="2103120"/>
+          </a:xfrm>
+          <a:prstGeom prst="rect">
+            <a:avLst/>
+          </a:prstGeom>
+          <a:solidFill>
+            <a:srgbClr val="F2F2F2"/>
+          </a:solidFill>
+          <a:ln w="15875">
+            <a:solidFill>
+              <a:srgbClr val="1F4E78"/>
+            </a:solidFill>
+          </a:ln>
+        </p:spPr>
+        <p:txBody>
+          <a:bodyPr wrap="square" lIns="137160" rIns="137160" tIns="109728">
+            <a:spAutoFit/>
+          </a:bodyPr>
+          <a:lstStyle/>
+          <a:p>
+            <a:r>
+              <a:rPr sz="1500" b="1">
+                <a:solidFill>
+                  <a:srgbClr val="1F4E78"/>
+                </a:solidFill>
+              </a:rPr>
+              <a:t>Why discs won (peer-reviewed)</a:t>
+            </a:r>
+          </a:p>
+          <a:p>
+            <a:pPr>
+              <a:spcBef>
+                <a:spcPts val="400"/>
+              </a:spcBef>
+            </a:pPr>
+            <a:r>
+              <a:rPr sz="1200">
+                <a:solidFill>
+                  <a:srgbClr val="202020"/>
+                </a:solidFill>
+              </a:rPr>
+              <a:t>Fade resistance under thermal load (SAE 902206, 1990; physics in Day et al. 1984)</a:t>
+            </a:r>
+          </a:p>
+          <a:p>
+            <a:pPr>
+              <a:spcBef>
+                <a:spcPts val="400"/>
+              </a:spcBef>
+            </a:pPr>
+            <a:r>
+              <a:rPr sz="1200">
+                <a:solidFill>
+                  <a:srgbClr val="202020"/>
+                </a:solidFill>
+              </a:rPr>
+              <a:t>~30% shorter stops vs standard drums (NHTSA simulator, 108 drivers)</a:t>
+            </a:r>
+          </a:p>
+          <a:p>
+            <a:pPr>
+              <a:spcBef>
+                <a:spcPts val="400"/>
+              </a:spcBef>
+            </a:pPr>
+            <a:r>
+              <a:rPr sz="1200">
+                <a:solidFill>
+                  <a:srgbClr val="202020"/>
+                </a:solidFill>
+              </a:rPr>
+              <a:t>10-20% braking advantage, 12-80% lifecycle savings in demanding duty (Ampadu 2023)</a:t>
+            </a:r>
+          </a:p>
+          <a:p>
+            <a:pPr>
+              <a:spcBef>
+                <a:spcPts val="400"/>
+              </a:spcBef>
+            </a:pPr>
+            <a:r>
+              <a:rPr sz="1200">
+                <a:solidFill>
+                  <a:srgbClr val="202020"/>
+                </a:solidFill>
+              </a:rPr>
+              <a:t>EBS/AEB/ADAS mandates favor disc actuation precision</a:t>
+            </a:r>
+          </a:p>
+        </p:txBody>
+      </p:sp>
+      <p:sp>
+        <p:nvSpPr>
+          <p:cNvPr id="8" name="TextBox 7"/>
+          <p:cNvSpPr txBox="1"/>
+          <p:nvPr/>
+        </p:nvSpPr>
+        <p:spPr>
+          <a:xfrm>
+            <a:off x="6217920" y="4434840"/>
+            <a:ext cx="5532120" cy="2103120"/>
+          </a:xfrm>
+          <a:prstGeom prst="rect">
+            <a:avLst/>
+          </a:prstGeom>
+          <a:solidFill>
+            <a:srgbClr val="F2F2F2"/>
+          </a:solidFill>
+          <a:ln w="15875">
+            <a:solidFill>
+              <a:srgbClr val="548235"/>
+            </a:solidFill>
+          </a:ln>
+        </p:spPr>
+        <p:txBody>
+          <a:bodyPr wrap="square" lIns="137160" rIns="137160" tIns="109728">
+            <a:spAutoFit/>
+          </a:bodyPr>
+          <a:lstStyle/>
+          <a:p>
+            <a:r>
+              <a:rPr sz="1500" b="1">
+                <a:solidFill>
+                  <a:srgbClr val="548235"/>
+                </a:solidFill>
+              </a:rPr>
+              <a:t>Electrification re-shuffles the deck</a:t>
+            </a:r>
+          </a:p>
+          <a:p>
+            <a:pPr>
+              <a:spcBef>
+                <a:spcPts val="400"/>
+              </a:spcBef>
+            </a:pPr>
+            <a:r>
+              <a:rPr sz="1200">
+                <a:solidFill>
+                  <a:srgbClr val="202020"/>
+                </a:solidFill>
+              </a:rPr>
+              <a:t>Regen braking cuts friction wear 64-95% (multiple peer-reviewed studies)</a:t>
+            </a:r>
+          </a:p>
+          <a:p>
+            <a:pPr>
+              <a:spcBef>
+                <a:spcPts val="400"/>
+              </a:spcBef>
+            </a:pPr>
+            <a:r>
+              <a:rPr sz="1200">
+                <a:solidFill>
+                  <a:srgbClr val="202020"/>
+                </a:solidFill>
+              </a:rPr>
+              <a:t>Friction aftermarket growth ~2% CAGR with EV headwind</a:t>
+            </a:r>
+          </a:p>
+          <a:p>
+            <a:pPr>
+              <a:spcBef>
+                <a:spcPts val="400"/>
+              </a:spcBef>
+            </a:pPr>
+            <a:r>
+              <a:rPr sz="1200">
+                <a:solidFill>
+                  <a:srgbClr val="202020"/>
+                </a:solidFill>
+              </a:rPr>
+              <a:t>EU brake-dust limits for heavy vehicles expected ~2030</a:t>
+            </a:r>
+          </a:p>
+          <a:p>
+            <a:pPr>
+              <a:spcBef>
+                <a:spcPts val="400"/>
+              </a:spcBef>
+            </a:pPr>
+            <a:r>
+              <a:rPr sz="1200">
+                <a:solidFill>
+                  <a:srgbClr val="202020"/>
+                </a:solidFill>
+              </a:rPr>
+              <a:t>Value shifts: wear parts → corrosion/NVH/low-dust + retarders &amp; blending</a:t>
+            </a:r>
+          </a:p>
+        </p:txBody>
+      </p:sp>
+    </p:spTree>
+  </p:cSld>
+  <p:clrMapOvr>
+    <a:masterClrMapping/>
+  </p:clrMapOvr>
+</p:sld>
+</file>
+
+<file path=ppt/slides/slide20.xml><?xml version="1.0" encoding="utf-8"?>
 <p:sld xmlns:a="http://schemas.openxmlformats.org/drawingml/2006/main" xmlns:p="http://schemas.openxmlformats.org/presentationml/2006/main" xmlns:r="http://schemas.openxmlformats.org/officeDocument/2006/relationships">
   <p:cSld>
     <p:spTree>
@@ -10375,639 +11555,7 @@
 </p:sld>
 </file>
 
-<file path=ppt/slides/slide2.xml><?xml version="1.0" encoding="utf-8"?>
-<p:sld xmlns:a="http://schemas.openxmlformats.org/drawingml/2006/main" xmlns:p="http://schemas.openxmlformats.org/presentationml/2006/main" xmlns:r="http://schemas.openxmlformats.org/officeDocument/2006/relationships">
-  <p:cSld>
-    <p:spTree>
-      <p:nvGrpSpPr>
-        <p:cNvPr id="1" name=""/>
-        <p:cNvGrpSpPr/>
-        <p:nvPr/>
-      </p:nvGrpSpPr>
-      <p:grpSpPr/>
-      <p:sp>
-        <p:nvSpPr>
-          <p:cNvPr id="2" name="TextBox 1"/>
-          <p:cNvSpPr txBox="1"/>
-          <p:nvPr/>
-        </p:nvSpPr>
-        <p:spPr>
-          <a:xfrm>
-            <a:off x="0" y="0"/>
-            <a:ext cx="12191695" cy="868680"/>
-          </a:xfrm>
-          <a:prstGeom prst="rect">
-            <a:avLst/>
-          </a:prstGeom>
-          <a:solidFill>
-            <a:srgbClr val="1F4E78"/>
-          </a:solidFill>
-        </p:spPr>
-        <p:txBody>
-          <a:bodyPr wrap="square" lIns="457200" tIns="164592">
-            <a:spAutoFit/>
-          </a:bodyPr>
-          <a:lstStyle/>
-          <a:p>
-            <a:r>
-              <a:rPr sz="2600" b="1">
-                <a:solidFill>
-                  <a:srgbClr val="FFFFFF"/>
-                </a:solidFill>
-              </a:rPr>
-              <a:t>Brakes: drum brakes are a shrinking island</a:t>
-            </a:r>
-          </a:p>
-        </p:txBody>
-      </p:sp>
-      <p:sp>
-        <p:nvSpPr>
-          <p:cNvPr id="3" name="TextBox 2"/>
-          <p:cNvSpPr txBox="1"/>
-          <p:nvPr/>
-        </p:nvSpPr>
-        <p:spPr>
-          <a:xfrm>
-            <a:off x="457200" y="914400"/>
-            <a:ext cx="11247120" cy="365760"/>
-          </a:xfrm>
-          <a:prstGeom prst="rect">
-            <a:avLst/>
-          </a:prstGeom>
-          <a:noFill/>
-        </p:spPr>
-        <p:txBody>
-          <a:bodyPr wrap="square">
-            <a:spAutoFit/>
-          </a:bodyPr>
-          <a:lstStyle/>
-          <a:p>
-            <a:pPr algn="l"/>
-            <a:r>
-              <a:rPr sz="1200" b="0">
-                <a:solidFill>
-                  <a:srgbClr val="595959"/>
-                </a:solidFill>
-              </a:rPr>
-              <a:t>Verified findings from peer-reviewed literature, regulatory records, and industry data</a:t>
-            </a:r>
-          </a:p>
-        </p:txBody>
-      </p:sp>
-      <p:sp>
-        <p:nvSpPr>
-          <p:cNvPr id="4" name="TextBox 3"/>
-          <p:cNvSpPr txBox="1"/>
-          <p:nvPr/>
-        </p:nvSpPr>
-        <p:spPr>
-          <a:xfrm>
-            <a:off x="457200" y="1417320"/>
-            <a:ext cx="3657600" cy="2834640"/>
-          </a:xfrm>
-          <a:prstGeom prst="rect">
-            <a:avLst/>
-          </a:prstGeom>
-          <a:solidFill>
-            <a:srgbClr val="F2F2F2"/>
-          </a:solidFill>
-          <a:ln w="15875">
-            <a:solidFill>
-              <a:srgbClr val="1F4E78"/>
-            </a:solidFill>
-          </a:ln>
-        </p:spPr>
-        <p:txBody>
-          <a:bodyPr wrap="square" lIns="137160" rIns="137160" tIns="109728">
-            <a:spAutoFit/>
-          </a:bodyPr>
-          <a:lstStyle/>
-          <a:p>
-            <a:r>
-              <a:rPr sz="1500" b="1">
-                <a:solidFill>
-                  <a:srgbClr val="1F4E78"/>
-                </a:solidFill>
-              </a:rPr>
-              <a:t>Europe — converted ~2000</a:t>
-            </a:r>
-          </a:p>
-          <a:p>
-            <a:pPr>
-              <a:spcBef>
-                <a:spcPts val="400"/>
-              </a:spcBef>
-            </a:pPr>
-            <a:r>
-              <a:rPr sz="1200">
-                <a:solidFill>
-                  <a:srgbClr val="202020"/>
-                </a:solidFill>
-              </a:rPr>
-              <a:t>1996 Actros: first heavy truck with</a:t>
-            </a:r>
-          </a:p>
-          <a:p>
-            <a:pPr>
-              <a:spcBef>
-                <a:spcPts val="400"/>
-              </a:spcBef>
-            </a:pPr>
-            <a:r>
-              <a:rPr sz="1200">
-                <a:solidFill>
-                  <a:srgbClr val="202020"/>
-                </a:solidFill>
-              </a:rPr>
-              <a:t>all-axle EBS disc brakes</a:t>
-            </a:r>
-          </a:p>
-          <a:p>
-            <a:pPr>
-              <a:spcBef>
-                <a:spcPts val="400"/>
-              </a:spcBef>
-            </a:pPr>
-            <a:r>
-              <a:rPr sz="1200">
-                <a:solidFill>
-                  <a:srgbClr val="202020"/>
-                </a:solidFill>
-              </a:rPr>
-              <a:t>~70% disc/EBS take rate by 2000</a:t>
-            </a:r>
-          </a:p>
-          <a:p>
-            <a:pPr>
-              <a:spcBef>
-                <a:spcPts val="400"/>
-              </a:spcBef>
-            </a:pPr>
-            <a:r>
-              <a:rPr sz="1200">
-                <a:solidFill>
-                  <a:srgbClr val="202020"/>
-                </a:solidFill>
-              </a:rPr>
-              <a:t>Near-universal on-highway since</a:t>
-            </a:r>
-          </a:p>
-          <a:p>
-            <a:pPr>
-              <a:spcBef>
-                <a:spcPts val="400"/>
-              </a:spcBef>
-            </a:pPr>
-            <a:r>
-              <a:rPr sz="1200">
-                <a:solidFill>
-                  <a:srgbClr val="202020"/>
-                </a:solidFill>
-              </a:rPr>
-              <a:t>Drums: ~18% of EU demand (off-road)</a:t>
-            </a:r>
-          </a:p>
-        </p:txBody>
-      </p:sp>
-      <p:sp>
-        <p:nvSpPr>
-          <p:cNvPr id="5" name="TextBox 4"/>
-          <p:cNvSpPr txBox="1"/>
-          <p:nvPr/>
-        </p:nvSpPr>
-        <p:spPr>
-          <a:xfrm>
-            <a:off x="4297680" y="1417320"/>
-            <a:ext cx="3657600" cy="2834640"/>
-          </a:xfrm>
-          <a:prstGeom prst="rect">
-            <a:avLst/>
-          </a:prstGeom>
-          <a:solidFill>
-            <a:srgbClr val="F2F2F2"/>
-          </a:solidFill>
-          <a:ln w="15875">
-            <a:solidFill>
-              <a:srgbClr val="1F4E78"/>
-            </a:solidFill>
-          </a:ln>
-        </p:spPr>
-        <p:txBody>
-          <a:bodyPr wrap="square" lIns="137160" rIns="137160" tIns="109728">
-            <a:spAutoFit/>
-          </a:bodyPr>
-          <a:lstStyle/>
-          <a:p>
-            <a:r>
-              <a:rPr sz="1500" b="1">
-                <a:solidFill>
-                  <a:srgbClr val="1F4E78"/>
-                </a:solidFill>
-              </a:rPr>
-              <a:t>North America — tipped 2023-24</a:t>
-            </a:r>
-          </a:p>
-          <a:p>
-            <a:pPr>
-              <a:spcBef>
-                <a:spcPts val="400"/>
-              </a:spcBef>
-            </a:pPr>
-            <a:r>
-              <a:rPr sz="1200">
-                <a:solidFill>
-                  <a:srgbClr val="202020"/>
-                </a:solidFill>
-              </a:rPr>
-              <a:t>FMVSS 121 (2009): −30% stopping</a:t>
-            </a:r>
-          </a:p>
-          <a:p>
-            <a:pPr>
-              <a:spcBef>
-                <a:spcPts val="400"/>
-              </a:spcBef>
-            </a:pPr>
-            <a:r>
-              <a:rPr sz="1200">
-                <a:solidFill>
-                  <a:srgbClr val="202020"/>
-                </a:solidFill>
-              </a:rPr>
-              <a:t>distance, drum-compatible by design</a:t>
-            </a:r>
-          </a:p>
-          <a:p>
-            <a:pPr>
-              <a:spcBef>
-                <a:spcPts val="400"/>
-              </a:spcBef>
-            </a:pPr>
-            <a:r>
-              <a:rPr sz="1200">
-                <a:solidFill>
-                  <a:srgbClr val="202020"/>
-                </a:solidFill>
-              </a:rPr>
-              <a:t>Tractors: &lt;5% disc (2011) → ~25%</a:t>
-            </a:r>
-          </a:p>
-          <a:p>
-            <a:pPr>
-              <a:spcBef>
-                <a:spcPts val="400"/>
-              </a:spcBef>
-            </a:pPr>
-            <a:r>
-              <a:rPr sz="1200">
-                <a:solidFill>
-                  <a:srgbClr val="202020"/>
-                </a:solidFill>
-              </a:rPr>
-              <a:t>(2018) → ~50%+ (2023-24)</a:t>
-            </a:r>
-          </a:p>
-          <a:p>
-            <a:pPr>
-              <a:spcBef>
-                <a:spcPts val="400"/>
-              </a:spcBef>
-            </a:pPr>
-            <a:r>
-              <a:rPr sz="1200">
-                <a:solidFill>
-                  <a:srgbClr val="202020"/>
-                </a:solidFill>
-              </a:rPr>
-              <a:t>Trailers still lag at ~15%</a:t>
-            </a:r>
-          </a:p>
-        </p:txBody>
-      </p:sp>
-      <p:sp>
-        <p:nvSpPr>
-          <p:cNvPr id="6" name="TextBox 5"/>
-          <p:cNvSpPr txBox="1"/>
-          <p:nvPr/>
-        </p:nvSpPr>
-        <p:spPr>
-          <a:xfrm>
-            <a:off x="8138160" y="1417320"/>
-            <a:ext cx="3611880" cy="2834640"/>
-          </a:xfrm>
-          <a:prstGeom prst="rect">
-            <a:avLst/>
-          </a:prstGeom>
-          <a:solidFill>
-            <a:srgbClr val="F2F2F2"/>
-          </a:solidFill>
-          <a:ln w="15875">
-            <a:solidFill>
-              <a:srgbClr val="7F1D1D"/>
-            </a:solidFill>
-          </a:ln>
-        </p:spPr>
-        <p:txBody>
-          <a:bodyPr wrap="square" lIns="137160" rIns="137160" tIns="109728">
-            <a:spAutoFit/>
-          </a:bodyPr>
-          <a:lstStyle/>
-          <a:p>
-            <a:r>
-              <a:rPr sz="1500" b="1">
-                <a:solidFill>
-                  <a:srgbClr val="7F1D1D"/>
-                </a:solidFill>
-              </a:rPr>
-              <a:t>Japan — the last drum market</a:t>
-            </a:r>
-          </a:p>
-          <a:p>
-            <a:pPr>
-              <a:spcBef>
-                <a:spcPts val="400"/>
-              </a:spcBef>
-            </a:pPr>
-            <a:r>
-              <a:rPr sz="1200">
-                <a:solidFill>
-                  <a:srgbClr val="202020"/>
-                </a:solidFill>
-              </a:rPr>
-              <a:t>Drums still majority on MD/HD trucks</a:t>
-            </a:r>
-          </a:p>
-          <a:p>
-            <a:pPr>
-              <a:spcBef>
-                <a:spcPts val="400"/>
-              </a:spcBef>
-            </a:pPr>
-            <a:r>
-              <a:rPr sz="1200">
-                <a:solidFill>
-                  <a:srgbClr val="202020"/>
-                </a:solidFill>
-              </a:rPr>
-              <a:t>UD Quon all-disc since 2017</a:t>
-            </a:r>
-          </a:p>
-          <a:p>
-            <a:pPr>
-              <a:spcBef>
-                <a:spcPts val="400"/>
-              </a:spcBef>
-            </a:pPr>
-            <a:r>
-              <a:rPr sz="1200">
-                <a:solidFill>
-                  <a:srgbClr val="202020"/>
-                </a:solidFill>
-              </a:rPr>
-              <a:t>New Giga tractor: all-wheel discs</a:t>
-            </a:r>
-          </a:p>
-          <a:p>
-            <a:pPr>
-              <a:spcBef>
-                <a:spcPts val="400"/>
-              </a:spcBef>
-            </a:pPr>
-            <a:r>
-              <a:rPr sz="1200">
-                <a:solidFill>
-                  <a:srgbClr val="202020"/>
-                </a:solidFill>
-              </a:rPr>
-              <a:t>Isuzu export heavies all-disc (MY25)</a:t>
-            </a:r>
-          </a:p>
-          <a:p>
-            <a:pPr>
-              <a:spcBef>
-                <a:spcPts val="400"/>
-              </a:spcBef>
-            </a:pPr>
-            <a:r>
-              <a:rPr sz="1200">
-                <a:solidFill>
-                  <a:srgbClr val="202020"/>
-                </a:solidFill>
-              </a:rPr>
-              <a:t>Domestic flip is when, not if</a:t>
-            </a:r>
-          </a:p>
-        </p:txBody>
-      </p:sp>
-      <p:sp>
-        <p:nvSpPr>
-          <p:cNvPr id="7" name="TextBox 6"/>
-          <p:cNvSpPr txBox="1"/>
-          <p:nvPr/>
-        </p:nvSpPr>
-        <p:spPr>
-          <a:xfrm>
-            <a:off x="457200" y="4434840"/>
-            <a:ext cx="5577840" cy="2103120"/>
-          </a:xfrm>
-          <a:prstGeom prst="rect">
-            <a:avLst/>
-          </a:prstGeom>
-          <a:solidFill>
-            <a:srgbClr val="F2F2F2"/>
-          </a:solidFill>
-          <a:ln w="15875">
-            <a:solidFill>
-              <a:srgbClr val="1F4E78"/>
-            </a:solidFill>
-          </a:ln>
-        </p:spPr>
-        <p:txBody>
-          <a:bodyPr wrap="square" lIns="137160" rIns="137160" tIns="109728">
-            <a:spAutoFit/>
-          </a:bodyPr>
-          <a:lstStyle/>
-          <a:p>
-            <a:r>
-              <a:rPr sz="1500" b="1">
-                <a:solidFill>
-                  <a:srgbClr val="1F4E78"/>
-                </a:solidFill>
-              </a:rPr>
-              <a:t>Why discs won (peer-reviewed)</a:t>
-            </a:r>
-          </a:p>
-          <a:p>
-            <a:pPr>
-              <a:spcBef>
-                <a:spcPts val="400"/>
-              </a:spcBef>
-            </a:pPr>
-            <a:r>
-              <a:rPr sz="1200">
-                <a:solidFill>
-                  <a:srgbClr val="202020"/>
-                </a:solidFill>
-              </a:rPr>
-              <a:t>Fade resistance under thermal load (SAE 902206, 1990; physics in Day et al. 1984)</a:t>
-            </a:r>
-          </a:p>
-          <a:p>
-            <a:pPr>
-              <a:spcBef>
-                <a:spcPts val="400"/>
-              </a:spcBef>
-            </a:pPr>
-            <a:r>
-              <a:rPr sz="1200">
-                <a:solidFill>
-                  <a:srgbClr val="202020"/>
-                </a:solidFill>
-              </a:rPr>
-              <a:t>~30% shorter stops vs standard drums (NHTSA simulator, 108 drivers)</a:t>
-            </a:r>
-          </a:p>
-          <a:p>
-            <a:pPr>
-              <a:spcBef>
-                <a:spcPts val="400"/>
-              </a:spcBef>
-            </a:pPr>
-            <a:r>
-              <a:rPr sz="1200">
-                <a:solidFill>
-                  <a:srgbClr val="202020"/>
-                </a:solidFill>
-              </a:rPr>
-              <a:t>10-20% braking advantage, 12-80% lifecycle savings in demanding duty (Ampadu 2023)</a:t>
-            </a:r>
-          </a:p>
-          <a:p>
-            <a:pPr>
-              <a:spcBef>
-                <a:spcPts val="400"/>
-              </a:spcBef>
-            </a:pPr>
-            <a:r>
-              <a:rPr sz="1200">
-                <a:solidFill>
-                  <a:srgbClr val="202020"/>
-                </a:solidFill>
-              </a:rPr>
-              <a:t>EBS/AEB/ADAS mandates favor disc actuation precision</a:t>
-            </a:r>
-          </a:p>
-        </p:txBody>
-      </p:sp>
-      <p:sp>
-        <p:nvSpPr>
-          <p:cNvPr id="8" name="TextBox 7"/>
-          <p:cNvSpPr txBox="1"/>
-          <p:nvPr/>
-        </p:nvSpPr>
-        <p:spPr>
-          <a:xfrm>
-            <a:off x="6217920" y="4434840"/>
-            <a:ext cx="5532120" cy="2103120"/>
-          </a:xfrm>
-          <a:prstGeom prst="rect">
-            <a:avLst/>
-          </a:prstGeom>
-          <a:solidFill>
-            <a:srgbClr val="F2F2F2"/>
-          </a:solidFill>
-          <a:ln w="15875">
-            <a:solidFill>
-              <a:srgbClr val="548235"/>
-            </a:solidFill>
-          </a:ln>
-        </p:spPr>
-        <p:txBody>
-          <a:bodyPr wrap="square" lIns="137160" rIns="137160" tIns="109728">
-            <a:spAutoFit/>
-          </a:bodyPr>
-          <a:lstStyle/>
-          <a:p>
-            <a:r>
-              <a:rPr sz="1500" b="1">
-                <a:solidFill>
-                  <a:srgbClr val="548235"/>
-                </a:solidFill>
-              </a:rPr>
-              <a:t>Electrification re-shuffles the deck</a:t>
-            </a:r>
-          </a:p>
-          <a:p>
-            <a:pPr>
-              <a:spcBef>
-                <a:spcPts val="400"/>
-              </a:spcBef>
-            </a:pPr>
-            <a:r>
-              <a:rPr sz="1200">
-                <a:solidFill>
-                  <a:srgbClr val="202020"/>
-                </a:solidFill>
-              </a:rPr>
-              <a:t>Regen braking cuts friction wear 64-95% (multiple peer-reviewed studies)</a:t>
-            </a:r>
-          </a:p>
-          <a:p>
-            <a:pPr>
-              <a:spcBef>
-                <a:spcPts val="400"/>
-              </a:spcBef>
-            </a:pPr>
-            <a:r>
-              <a:rPr sz="1200">
-                <a:solidFill>
-                  <a:srgbClr val="202020"/>
-                </a:solidFill>
-              </a:rPr>
-              <a:t>Friction aftermarket growth ~2% CAGR with EV headwind</a:t>
-            </a:r>
-          </a:p>
-          <a:p>
-            <a:pPr>
-              <a:spcBef>
-                <a:spcPts val="400"/>
-              </a:spcBef>
-            </a:pPr>
-            <a:r>
-              <a:rPr sz="1200">
-                <a:solidFill>
-                  <a:srgbClr val="202020"/>
-                </a:solidFill>
-              </a:rPr>
-              <a:t>EU brake-dust limits for heavy vehicles expected ~2030</a:t>
-            </a:r>
-          </a:p>
-          <a:p>
-            <a:pPr>
-              <a:spcBef>
-                <a:spcPts val="400"/>
-              </a:spcBef>
-            </a:pPr>
-            <a:r>
-              <a:rPr sz="1200">
-                <a:solidFill>
-                  <a:srgbClr val="202020"/>
-                </a:solidFill>
-              </a:rPr>
-              <a:t>Value shifts: wear parts → corrosion/NVH/low-dust + retarders &amp; blending</a:t>
-            </a:r>
-          </a:p>
-        </p:txBody>
-      </p:sp>
-    </p:spTree>
-  </p:cSld>
-  <p:clrMapOvr>
-    <a:masterClrMapping/>
-  </p:clrMapOvr>
-</p:sld>
-</file>
-
-<file path=ppt/slides/slide20.xml><?xml version="1.0" encoding="utf-8"?>
+<file path=ppt/slides/slide21.xml><?xml version="1.0" encoding="utf-8"?>
 <p:sld xmlns:a="http://schemas.openxmlformats.org/drawingml/2006/main" xmlns:p="http://schemas.openxmlformats.org/presentationml/2006/main" xmlns:r="http://schemas.openxmlformats.org/officeDocument/2006/relationships">
   <p:cSld>
     <p:spTree>

--- a/TBK_rd_gap_slides.pptx
+++ b/TBK_rd_gap_slides.pptx
@@ -26,6 +26,7 @@
     <p:sldId id="274" r:id="rId25"/>
     <p:sldId id="275" r:id="rId26"/>
     <p:sldId id="276" r:id="rId27"/>
+    <p:sldId id="277" r:id="rId28"/>
   </p:sldIdLst>
   <p:sldSz cx="12191695" cy="6858000" type="screen4x3"/>
   <p:notesSz cx="6858000" cy="9144000"/>
@@ -343,6 +344,233 @@
 <file path=ppt/charts/chart10.xml><?xml version="1.0" encoding="utf-8"?>
 <c:chartSpace xmlns:c="http://schemas.openxmlformats.org/drawingml/2006/chart" xmlns:a="http://schemas.openxmlformats.org/drawingml/2006/main" xmlns:r="http://schemas.openxmlformats.org/officeDocument/2006/relationships">
   <c:date1904 val="0"/>
+  <c:chart>
+    <c:title>
+      <c:tx>
+        <c:rich>
+          <a:bodyPr/>
+          <a:lstStyle/>
+          <a:p>
+            <a:r>
+              <a:rPr sz="1300"/>
+              <a:t>Final weighted moat scores (TBK in red)</a:t>
+            </a:r>
+          </a:p>
+        </c:rich>
+      </c:tx>
+      <c:layout/>
+      <c:overlay val="0"/>
+    </c:title>
+    <c:autoTitleDeleted val="0"/>
+    <c:plotArea>
+      <c:barChart>
+        <c:barDir val="bar"/>
+        <c:grouping val="clustered"/>
+        <c:ser>
+          <c:idx val="0"/>
+          <c:order val="0"/>
+          <c:tx>
+            <c:strRef>
+              <c:f>Sheet1!$B$1</c:f>
+              <c:strCache>
+                <c:ptCount val="1"/>
+                <c:pt idx="0">
+                  <c:v>Moat score</c:v>
+                </c:pt>
+              </c:strCache>
+            </c:strRef>
+          </c:tx>
+          <c:spPr>
+            <a:solidFill>
+              <a:srgbClr val="1F4E78"/>
+            </a:solidFill>
+          </c:spPr>
+          <c:dPt>
+            <c:idx val="4"/>
+            <c:spPr>
+              <a:solidFill>
+                <a:srgbClr val="7F1D1D"/>
+              </a:solidFill>
+            </c:spPr>
+          </c:dPt>
+          <c:cat>
+            <c:strRef>
+              <c:f>Sheet1!$A$2:$A$14</c:f>
+              <c:strCache>
+                <c:ptCount val="13"/>
+                <c:pt idx="0">
+                  <c:v>Akebono</c:v>
+                </c:pt>
+                <c:pt idx="1">
+                  <c:v>Mikuni</c:v>
+                </c:pt>
+                <c:pt idx="2">
+                  <c:v>ZF</c:v>
+                </c:pt>
+                <c:pt idx="3">
+                  <c:v>Mahle</c:v>
+                </c:pt>
+                <c:pt idx="4">
+                  <c:v>TBK</c:v>
+                </c:pt>
+                <c:pt idx="5">
+                  <c:v>TPR</c:v>
+                </c:pt>
+                <c:pt idx="6">
+                  <c:v>Hanon</c:v>
+                </c:pt>
+                <c:pt idx="7">
+                  <c:v>Aisin</c:v>
+                </c:pt>
+                <c:pt idx="8">
+                  <c:v>SAF-Holland</c:v>
+                </c:pt>
+                <c:pt idx="9">
+                  <c:v>Cummins</c:v>
+                </c:pt>
+                <c:pt idx="10">
+                  <c:v>Brembo</c:v>
+                </c:pt>
+                <c:pt idx="11">
+                  <c:v>Concentric</c:v>
+                </c:pt>
+                <c:pt idx="12">
+                  <c:v>Knorr-Bremse</c:v>
+                </c:pt>
+              </c:strCache>
+            </c:strRef>
+          </c:cat>
+          <c:val>
+            <c:numRef>
+              <c:f>Sheet1!$B$2:$B$14</c:f>
+              <c:numCache>
+                <c:formatCode>General</c:formatCode>
+                <c:ptCount val="13"/>
+                <c:pt idx="0">
+                  <c:v>4.95</c:v>
+                </c:pt>
+                <c:pt idx="1">
+                  <c:v>5.0</c:v>
+                </c:pt>
+                <c:pt idx="2">
+                  <c:v>5.25</c:v>
+                </c:pt>
+                <c:pt idx="3">
+                  <c:v>5.35</c:v>
+                </c:pt>
+                <c:pt idx="4">
+                  <c:v>5.38</c:v>
+                </c:pt>
+                <c:pt idx="5">
+                  <c:v>5.45</c:v>
+                </c:pt>
+                <c:pt idx="6">
+                  <c:v>5.88</c:v>
+                </c:pt>
+                <c:pt idx="7">
+                  <c:v>6.25</c:v>
+                </c:pt>
+                <c:pt idx="8">
+                  <c:v>6.59</c:v>
+                </c:pt>
+                <c:pt idx="9">
+                  <c:v>6.73</c:v>
+                </c:pt>
+                <c:pt idx="10">
+                  <c:v>6.73</c:v>
+                </c:pt>
+                <c:pt idx="11">
+                  <c:v>6.98</c:v>
+                </c:pt>
+                <c:pt idx="12">
+                  <c:v>7.55</c:v>
+                </c:pt>
+              </c:numCache>
+            </c:numRef>
+          </c:val>
+        </c:ser>
+        <c:dLbls>
+          <c:numFmt formatCode="0.00" sourceLinked="0"/>
+          <c:txPr>
+            <a:bodyPr/>
+            <a:lstStyle/>
+            <a:p>
+              <a:pPr>
+                <a:defRPr sz="1000"/>
+              </a:pPr>
+            </a:p>
+          </c:txPr>
+          <c:showLegendKey val="0"/>
+          <c:showVal val="1"/>
+          <c:showCatName val="0"/>
+          <c:showSerName val="0"/>
+          <c:showPercent val="0"/>
+          <c:showBubbleSize val="0"/>
+          <c:showLeaderLines val="1"/>
+        </c:dLbls>
+        <c:axId val="-2068027336"/>
+        <c:axId val="-2113994440"/>
+      </c:barChart>
+      <c:catAx>
+        <c:axId val="-2068027336"/>
+        <c:scaling>
+          <c:orientation val="minMax"/>
+        </c:scaling>
+        <c:delete val="0"/>
+        <c:axPos val="l"/>
+        <c:majorTickMark val="out"/>
+        <c:minorTickMark val="none"/>
+        <c:tickLblPos val="nextTo"/>
+        <c:txPr>
+          <a:bodyPr/>
+          <a:lstStyle/>
+          <a:p>
+            <a:pPr>
+              <a:defRPr sz="1000"/>
+            </a:pPr>
+          </a:p>
+        </c:txPr>
+        <c:crossAx val="-2113994440"/>
+        <c:crosses val="autoZero"/>
+        <c:auto val="1"/>
+        <c:lblAlgn val="ctr"/>
+        <c:lblOffset val="100"/>
+        <c:noMultiLvlLbl val="0"/>
+      </c:catAx>
+      <c:valAx>
+        <c:axId val="-2113994440"/>
+        <c:scaling/>
+        <c:delete val="0"/>
+        <c:axPos val="b"/>
+        <c:majorGridlines/>
+        <c:majorTickMark val="out"/>
+        <c:minorTickMark val="none"/>
+        <c:tickLblPos val="nextTo"/>
+        <c:crossAx val="-2068027336"/>
+        <c:crosses val="autoZero"/>
+      </c:valAx>
+    </c:plotArea>
+    <c:dispBlanksAs val="gap"/>
+  </c:chart>
+  <c:txPr>
+    <a:bodyPr/>
+    <a:lstStyle/>
+    <a:p>
+      <a:pPr>
+        <a:defRPr sz="1800"/>
+      </a:pPr>
+      <a:endParaRPr lang="en-US"/>
+    </a:p>
+  </c:txPr>
+  <c:externalData r:id="rId1">
+    <c:autoUpdate val="0"/>
+  </c:externalData>
+</c:chartSpace>
+</file>
+
+<file path=ppt/charts/chart11.xml><?xml version="1.0" encoding="utf-8"?>
+<c:chartSpace xmlns:c="http://schemas.openxmlformats.org/drawingml/2006/chart" xmlns:a="http://schemas.openxmlformats.org/drawingml/2006/main" xmlns:r="http://schemas.openxmlformats.org/officeDocument/2006/relationships">
+  <c:date1904 val="0"/>
   <c:roundedCorners val="0"/>
   <mc:AlternateContent xmlns:mc="http://schemas.openxmlformats.org/markup-compatibility/2006">
     <mc:Choice xmlns:c14="http://schemas.microsoft.com/office/drawing/2007/8/2/chart" Requires="c14">
@@ -731,7 +959,7 @@
 </c:chartSpace>
 </file>
 
-<file path=ppt/charts/chart11.xml><?xml version="1.0" encoding="utf-8"?>
+<file path=ppt/charts/chart12.xml><?xml version="1.0" encoding="utf-8"?>
 <c:chartSpace xmlns:c="http://schemas.openxmlformats.org/drawingml/2006/chart" xmlns:a="http://schemas.openxmlformats.org/drawingml/2006/main" xmlns:r="http://schemas.openxmlformats.org/officeDocument/2006/relationships">
   <c:date1904 val="0"/>
   <c:chart>
@@ -1233,7 +1461,7 @@
 </c:chartSpace>
 </file>
 
-<file path=ppt/charts/chart12.xml><?xml version="1.0" encoding="utf-8"?>
+<file path=ppt/charts/chart13.xml><?xml version="1.0" encoding="utf-8"?>
 <c:chartSpace xmlns:c="http://schemas.openxmlformats.org/drawingml/2006/chart" xmlns:a="http://schemas.openxmlformats.org/drawingml/2006/main" xmlns:r="http://schemas.openxmlformats.org/officeDocument/2006/relationships">
   <c:date1904 val="0"/>
   <c:chart>
@@ -2711,6 +2939,247 @@
           <a:lstStyle/>
           <a:p>
             <a:r>
+              <a:rPr sz="1200"/>
+              <a:t>Contribution by customer: keiretsu OEMs 17% blended vs non-keiretsu/aftermarket 30.5%</a:t>
+            </a:r>
+          </a:p>
+        </c:rich>
+      </c:tx>
+      <c:layout/>
+      <c:overlay val="0"/>
+    </c:title>
+    <c:autoTitleDeleted val="0"/>
+    <c:plotArea>
+      <c:barChart>
+        <c:barDir val="bar"/>
+        <c:grouping val="clustered"/>
+        <c:ser>
+          <c:idx val="0"/>
+          <c:order val="0"/>
+          <c:tx>
+            <c:strRef>
+              <c:f>Sheet1!$B$1</c:f>
+              <c:strCache>
+                <c:ptCount val="1"/>
+                <c:pt idx="0">
+                  <c:v>Contribution margin %</c:v>
+                </c:pt>
+              </c:strCache>
+            </c:strRef>
+          </c:tx>
+          <c:spPr>
+            <a:solidFill>
+              <a:srgbClr val="548235"/>
+            </a:solidFill>
+          </c:spPr>
+          <c:dPt>
+            <c:idx val="0"/>
+            <c:spPr>
+              <a:solidFill>
+                <a:srgbClr val="7F1D1D"/>
+              </a:solidFill>
+            </c:spPr>
+          </c:dPt>
+          <c:dPt>
+            <c:idx val="1"/>
+            <c:spPr>
+              <a:solidFill>
+                <a:srgbClr val="7F1D1D"/>
+              </a:solidFill>
+            </c:spPr>
+          </c:dPt>
+          <c:dPt>
+            <c:idx val="2"/>
+            <c:spPr>
+              <a:solidFill>
+                <a:srgbClr val="7F1D1D"/>
+              </a:solidFill>
+            </c:spPr>
+          </c:dPt>
+          <c:dPt>
+            <c:idx val="3"/>
+            <c:spPr>
+              <a:solidFill>
+                <a:srgbClr val="7F1D1D"/>
+              </a:solidFill>
+            </c:spPr>
+          </c:dPt>
+          <c:cat>
+            <c:strRef>
+              <c:f>Sheet1!$A$2:$A$12</c:f>
+              <c:strCache>
+                <c:ptCount val="11"/>
+                <c:pt idx="0">
+                  <c:v>UD Trucks</c:v>
+                </c:pt>
+                <c:pt idx="1">
+                  <c:v>MFTBC</c:v>
+                </c:pt>
+                <c:pt idx="2">
+                  <c:v>Isuzu</c:v>
+                </c:pt>
+                <c:pt idx="3">
+                  <c:v>Hino</c:v>
+                </c:pt>
+                <c:pt idx="4">
+                  <c:v>Kubota</c:v>
+                </c:pt>
+                <c:pt idx="5">
+                  <c:v>Aftermarket
+(TBK Sales)</c:v>
+                </c:pt>
+                <c:pt idx="6">
+                  <c:v>Caterpillar</c:v>
+                </c:pt>
+                <c:pt idx="7">
+                  <c:v>Komatsu-
+Oyama</c:v>
+                </c:pt>
+                <c:pt idx="8">
+                  <c:v>Toho</c:v>
+                </c:pt>
+                <c:pt idx="9">
+                  <c:v>Hitachi</c:v>
+                </c:pt>
+                <c:pt idx="10">
+                  <c:v>Cummins</c:v>
+                </c:pt>
+              </c:strCache>
+            </c:strRef>
+          </c:cat>
+          <c:val>
+            <c:numRef>
+              <c:f>Sheet1!$B$2:$B$12</c:f>
+              <c:numCache>
+                <c:formatCode>General</c:formatCode>
+                <c:ptCount val="11"/>
+                <c:pt idx="0">
+                  <c:v>8.1</c:v>
+                </c:pt>
+                <c:pt idx="1">
+                  <c:v>15.6</c:v>
+                </c:pt>
+                <c:pt idx="2">
+                  <c:v>16.8</c:v>
+                </c:pt>
+                <c:pt idx="3">
+                  <c:v>21.0</c:v>
+                </c:pt>
+                <c:pt idx="4">
+                  <c:v>22.3</c:v>
+                </c:pt>
+                <c:pt idx="5">
+                  <c:v>30.2</c:v>
+                </c:pt>
+                <c:pt idx="6">
+                  <c:v>30.5</c:v>
+                </c:pt>
+                <c:pt idx="7">
+                  <c:v>32.6</c:v>
+                </c:pt>
+                <c:pt idx="8">
+                  <c:v>43.5</c:v>
+                </c:pt>
+                <c:pt idx="9">
+                  <c:v>44.8</c:v>
+                </c:pt>
+                <c:pt idx="10">
+                  <c:v>79.8</c:v>
+                </c:pt>
+              </c:numCache>
+            </c:numRef>
+          </c:val>
+        </c:ser>
+        <c:dLbls>
+          <c:numFmt formatCode="0.0&quot;%&quot;" sourceLinked="0"/>
+          <c:txPr>
+            <a:bodyPr/>
+            <a:lstStyle/>
+            <a:p>
+              <a:pPr>
+                <a:defRPr sz="1000"/>
+              </a:pPr>
+            </a:p>
+          </c:txPr>
+          <c:showLegendKey val="0"/>
+          <c:showVal val="1"/>
+          <c:showCatName val="0"/>
+          <c:showSerName val="0"/>
+          <c:showPercent val="0"/>
+          <c:showBubbleSize val="0"/>
+          <c:showLeaderLines val="1"/>
+        </c:dLbls>
+        <c:axId val="-2068027336"/>
+        <c:axId val="-2113994440"/>
+      </c:barChart>
+      <c:catAx>
+        <c:axId val="-2068027336"/>
+        <c:scaling>
+          <c:orientation val="minMax"/>
+        </c:scaling>
+        <c:delete val="0"/>
+        <c:axPos val="l"/>
+        <c:majorTickMark val="out"/>
+        <c:minorTickMark val="none"/>
+        <c:tickLblPos val="nextTo"/>
+        <c:txPr>
+          <a:bodyPr/>
+          <a:lstStyle/>
+          <a:p>
+            <a:pPr>
+              <a:defRPr sz="900"/>
+            </a:pPr>
+          </a:p>
+        </c:txPr>
+        <c:crossAx val="-2113994440"/>
+        <c:crosses val="autoZero"/>
+        <c:auto val="1"/>
+        <c:lblAlgn val="ctr"/>
+        <c:lblOffset val="100"/>
+        <c:noMultiLvlLbl val="0"/>
+      </c:catAx>
+      <c:valAx>
+        <c:axId val="-2113994440"/>
+        <c:scaling/>
+        <c:delete val="0"/>
+        <c:axPos val="b"/>
+        <c:majorGridlines/>
+        <c:majorTickMark val="out"/>
+        <c:minorTickMark val="none"/>
+        <c:tickLblPos val="nextTo"/>
+        <c:crossAx val="-2068027336"/>
+        <c:crosses val="autoZero"/>
+      </c:valAx>
+    </c:plotArea>
+    <c:dispBlanksAs val="gap"/>
+  </c:chart>
+  <c:txPr>
+    <a:bodyPr/>
+    <a:lstStyle/>
+    <a:p>
+      <a:pPr>
+        <a:defRPr sz="1800"/>
+      </a:pPr>
+      <a:endParaRPr lang="en-US"/>
+    </a:p>
+  </c:txPr>
+  <c:externalData r:id="rId1">
+    <c:autoUpdate val="0"/>
+  </c:externalData>
+</c:chartSpace>
+</file>
+
+<file path=ppt/charts/chart7.xml><?xml version="1.0" encoding="utf-8"?>
+<c:chartSpace xmlns:c="http://schemas.openxmlformats.org/drawingml/2006/chart" xmlns:a="http://schemas.openxmlformats.org/drawingml/2006/main" xmlns:r="http://schemas.openxmlformats.org/officeDocument/2006/relationships">
+  <c:date1904 val="0"/>
+  <c:chart>
+    <c:title>
+      <c:tx>
+        <c:rich>
+          <a:bodyPr/>
+          <a:lstStyle/>
+          <a:p>
+            <a:r>
               <a:rPr sz="1400"/>
               <a:t>OPEX as % of sales: TBK vs peers, by business</a:t>
             </a:r>
@@ -2964,7 +3433,7 @@
 </c:chartSpace>
 </file>
 
-<file path=ppt/charts/chart7.xml><?xml version="1.0" encoding="utf-8"?>
+<file path=ppt/charts/chart8.xml><?xml version="1.0" encoding="utf-8"?>
 <c:chartSpace xmlns:c="http://schemas.openxmlformats.org/drawingml/2006/chart" xmlns:a="http://schemas.openxmlformats.org/drawingml/2006/main" xmlns:r="http://schemas.openxmlformats.org/officeDocument/2006/relationships">
   <c:date1904 val="0"/>
   <c:chart>
@@ -3190,267 +3659,6 @@
           <a:p>
             <a:pPr>
               <a:defRPr sz="1000"/>
-            </a:pPr>
-          </a:p>
-        </c:txPr>
-        <c:crossAx val="-2113994440"/>
-        <c:crosses val="autoZero"/>
-        <c:auto val="1"/>
-        <c:lblAlgn val="ctr"/>
-        <c:lblOffset val="100"/>
-        <c:noMultiLvlLbl val="0"/>
-      </c:catAx>
-      <c:valAx>
-        <c:axId val="-2113994440"/>
-        <c:scaling/>
-        <c:delete val="0"/>
-        <c:axPos val="l"/>
-        <c:majorGridlines/>
-        <c:majorTickMark val="out"/>
-        <c:minorTickMark val="none"/>
-        <c:tickLblPos val="nextTo"/>
-        <c:crossAx val="-2068027336"/>
-        <c:crosses val="autoZero"/>
-      </c:valAx>
-    </c:plotArea>
-    <c:legend>
-      <c:legendPos val="b"/>
-      <c:overlay val="0"/>
-      <c:txPr>
-        <a:bodyPr/>
-        <a:lstStyle/>
-        <a:p>
-          <a:pPr>
-            <a:defRPr sz="1100"/>
-          </a:pPr>
-        </a:p>
-      </c:txPr>
-    </c:legend>
-    <c:dispBlanksAs val="gap"/>
-  </c:chart>
-  <c:txPr>
-    <a:bodyPr/>
-    <a:lstStyle/>
-    <a:p>
-      <a:pPr>
-        <a:defRPr sz="1800"/>
-      </a:pPr>
-      <a:endParaRPr lang="en-US"/>
-    </a:p>
-  </c:txPr>
-  <c:externalData r:id="rId1">
-    <c:autoUpdate val="0"/>
-  </c:externalData>
-</c:chartSpace>
-</file>
-
-<file path=ppt/charts/chart8.xml><?xml version="1.0" encoding="utf-8"?>
-<c:chartSpace xmlns:c="http://schemas.openxmlformats.org/drawingml/2006/chart" xmlns:a="http://schemas.openxmlformats.org/drawingml/2006/main" xmlns:r="http://schemas.openxmlformats.org/officeDocument/2006/relationships">
-  <c:date1904 val="0"/>
-  <c:chart>
-    <c:title>
-      <c:tx>
-        <c:rich>
-          <a:bodyPr/>
-          <a:lstStyle/>
-          <a:p>
-            <a:r>
-              <a:rPr sz="1400"/>
-              <a:t>R&amp;D spend plan (US$M per year)</a:t>
-            </a:r>
-          </a:p>
-        </c:rich>
-      </c:tx>
-      <c:layout/>
-      <c:overlay val="0"/>
-    </c:title>
-    <c:autoTitleDeleted val="0"/>
-    <c:plotArea>
-      <c:barChart>
-        <c:barDir val="col"/>
-        <c:grouping val="stacked"/>
-        <c:ser>
-          <c:idx val="0"/>
-          <c:order val="0"/>
-          <c:tx>
-            <c:strRef>
-              <c:f>Sheet1!$B$1</c:f>
-              <c:strCache>
-                <c:ptCount val="1"/>
-                <c:pt idx="0">
-                  <c:v>Parity run-rate (~4.5-5% of sales)</c:v>
-                </c:pt>
-              </c:strCache>
-            </c:strRef>
-          </c:tx>
-          <c:spPr>
-            <a:solidFill>
-              <a:srgbClr val="1F4E78"/>
-            </a:solidFill>
-          </c:spPr>
-          <c:cat>
-            <c:strRef>
-              <c:f>Sheet1!$A$2:$A$8</c:f>
-              <c:strCache>
-                <c:ptCount val="7"/>
-                <c:pt idx="0">
-                  <c:v>FY26
-actual est.</c:v>
-                </c:pt>
-                <c:pt idx="1">
-                  <c:v>FY27</c:v>
-                </c:pt>
-                <c:pt idx="2">
-                  <c:v>FY28</c:v>
-                </c:pt>
-                <c:pt idx="3">
-                  <c:v>FY29</c:v>
-                </c:pt>
-                <c:pt idx="4">
-                  <c:v>FY30</c:v>
-                </c:pt>
-                <c:pt idx="5">
-                  <c:v>FY31</c:v>
-                </c:pt>
-                <c:pt idx="6">
-                  <c:v>Steady state
-FY32+</c:v>
-                </c:pt>
-              </c:strCache>
-            </c:strRef>
-          </c:cat>
-          <c:val>
-            <c:numRef>
-              <c:f>Sheet1!$B$2:$B$8</c:f>
-              <c:numCache>
-                <c:formatCode>General</c:formatCode>
-                <c:ptCount val="7"/>
-                <c:pt idx="0">
-                  <c:v>7.8</c:v>
-                </c:pt>
-                <c:pt idx="1">
-                  <c:v>17</c:v>
-                </c:pt>
-                <c:pt idx="2">
-                  <c:v>17</c:v>
-                </c:pt>
-                <c:pt idx="3">
-                  <c:v>17</c:v>
-                </c:pt>
-                <c:pt idx="4">
-                  <c:v>17</c:v>
-                </c:pt>
-                <c:pt idx="5">
-                  <c:v>17</c:v>
-                </c:pt>
-                <c:pt idx="6">
-                  <c:v>17</c:v>
-                </c:pt>
-              </c:numCache>
-            </c:numRef>
-          </c:val>
-        </c:ser>
-        <c:ser>
-          <c:idx val="1"/>
-          <c:order val="1"/>
-          <c:tx>
-            <c:strRef>
-              <c:f>Sheet1!$C$1</c:f>
-              <c:strCache>
-                <c:ptCount val="1"/>
-                <c:pt idx="0">
-                  <c:v>Deficit repayment (catch-up)</c:v>
-                </c:pt>
-              </c:strCache>
-            </c:strRef>
-          </c:tx>
-          <c:spPr>
-            <a:solidFill>
-              <a:srgbClr val="548235"/>
-            </a:solidFill>
-          </c:spPr>
-          <c:cat>
-            <c:strRef>
-              <c:f>Sheet1!$A$2:$A$8</c:f>
-              <c:strCache>
-                <c:ptCount val="7"/>
-                <c:pt idx="0">
-                  <c:v>FY26
-actual est.</c:v>
-                </c:pt>
-                <c:pt idx="1">
-                  <c:v>FY27</c:v>
-                </c:pt>
-                <c:pt idx="2">
-                  <c:v>FY28</c:v>
-                </c:pt>
-                <c:pt idx="3">
-                  <c:v>FY29</c:v>
-                </c:pt>
-                <c:pt idx="4">
-                  <c:v>FY30</c:v>
-                </c:pt>
-                <c:pt idx="5">
-                  <c:v>FY31</c:v>
-                </c:pt>
-                <c:pt idx="6">
-                  <c:v>Steady state
-FY32+</c:v>
-                </c:pt>
-              </c:strCache>
-            </c:strRef>
-          </c:cat>
-          <c:val>
-            <c:numRef>
-              <c:f>Sheet1!$C$2:$C$8</c:f>
-              <c:numCache>
-                <c:formatCode>General</c:formatCode>
-                <c:ptCount val="7"/>
-                <c:pt idx="0">
-                  <c:v>0</c:v>
-                </c:pt>
-                <c:pt idx="1">
-                  <c:v>10</c:v>
-                </c:pt>
-                <c:pt idx="2">
-                  <c:v>10</c:v>
-                </c:pt>
-                <c:pt idx="3">
-                  <c:v>10</c:v>
-                </c:pt>
-                <c:pt idx="4">
-                  <c:v>10</c:v>
-                </c:pt>
-                <c:pt idx="5">
-                  <c:v>10</c:v>
-                </c:pt>
-                <c:pt idx="6">
-                  <c:v>0</c:v>
-                </c:pt>
-              </c:numCache>
-            </c:numRef>
-          </c:val>
-        </c:ser>
-        <c:overlap val="100"/>
-        <c:axId val="-2068027336"/>
-        <c:axId val="-2113994440"/>
-      </c:barChart>
-      <c:catAx>
-        <c:axId val="-2068027336"/>
-        <c:scaling>
-          <c:orientation val="minMax"/>
-        </c:scaling>
-        <c:delete val="0"/>
-        <c:axPos val="b"/>
-        <c:majorTickMark val="out"/>
-        <c:minorTickMark val="none"/>
-        <c:tickLblPos val="nextTo"/>
-        <c:txPr>
-          <a:bodyPr/>
-          <a:lstStyle/>
-          <a:p>
-            <a:pPr>
-              <a:defRPr sz="900"/>
             </a:pPr>
           </a:p>
         </c:txPr>
@@ -3516,8 +3724,8 @@
           <a:lstStyle/>
           <a:p>
             <a:r>
-              <a:rPr sz="1300"/>
-              <a:t>Final weighted moat scores (TBK in red)</a:t>
+              <a:rPr sz="1400"/>
+              <a:t>R&amp;D spend plan (US$M per year)</a:t>
             </a:r>
           </a:p>
         </c:rich>
@@ -3528,8 +3736,8 @@
     <c:autoTitleDeleted val="0"/>
     <c:plotArea>
       <c:barChart>
-        <c:barDir val="bar"/>
-        <c:grouping val="clustered"/>
+        <c:barDir val="col"/>
+        <c:grouping val="stacked"/>
         <c:ser>
           <c:idx val="0"/>
           <c:order val="0"/>
@@ -3539,7 +3747,7 @@
               <c:strCache>
                 <c:ptCount val="1"/>
                 <c:pt idx="0">
-                  <c:v>Moat score</c:v>
+                  <c:v>Parity run-rate (~4.5-5% of sales)</c:v>
                 </c:pt>
               </c:strCache>
             </c:strRef>
@@ -3549,129 +3757,150 @@
               <a:srgbClr val="1F4E78"/>
             </a:solidFill>
           </c:spPr>
-          <c:dPt>
-            <c:idx val="4"/>
-            <c:spPr>
-              <a:solidFill>
-                <a:srgbClr val="7F1D1D"/>
-              </a:solidFill>
-            </c:spPr>
-          </c:dPt>
           <c:cat>
             <c:strRef>
-              <c:f>Sheet1!$A$2:$A$14</c:f>
+              <c:f>Sheet1!$A$2:$A$8</c:f>
               <c:strCache>
-                <c:ptCount val="13"/>
+                <c:ptCount val="7"/>
                 <c:pt idx="0">
-                  <c:v>Akebono</c:v>
+                  <c:v>FY26
+actual est.</c:v>
                 </c:pt>
                 <c:pt idx="1">
-                  <c:v>Mikuni</c:v>
+                  <c:v>FY27</c:v>
                 </c:pt>
                 <c:pt idx="2">
-                  <c:v>ZF</c:v>
+                  <c:v>FY28</c:v>
                 </c:pt>
                 <c:pt idx="3">
-                  <c:v>Mahle</c:v>
+                  <c:v>FY29</c:v>
                 </c:pt>
                 <c:pt idx="4">
-                  <c:v>TBK</c:v>
+                  <c:v>FY30</c:v>
                 </c:pt>
                 <c:pt idx="5">
-                  <c:v>TPR</c:v>
+                  <c:v>FY31</c:v>
                 </c:pt>
                 <c:pt idx="6">
-                  <c:v>Hanon</c:v>
-                </c:pt>
-                <c:pt idx="7">
-                  <c:v>Aisin</c:v>
-                </c:pt>
-                <c:pt idx="8">
-                  <c:v>SAF-Holland</c:v>
-                </c:pt>
-                <c:pt idx="9">
-                  <c:v>Cummins</c:v>
-                </c:pt>
-                <c:pt idx="10">
-                  <c:v>Brembo</c:v>
-                </c:pt>
-                <c:pt idx="11">
-                  <c:v>Concentric</c:v>
-                </c:pt>
-                <c:pt idx="12">
-                  <c:v>Knorr-Bremse</c:v>
+                  <c:v>Steady state
+FY32+</c:v>
                 </c:pt>
               </c:strCache>
             </c:strRef>
           </c:cat>
           <c:val>
             <c:numRef>
-              <c:f>Sheet1!$B$2:$B$14</c:f>
+              <c:f>Sheet1!$B$2:$B$8</c:f>
               <c:numCache>
                 <c:formatCode>General</c:formatCode>
-                <c:ptCount val="13"/>
+                <c:ptCount val="7"/>
                 <c:pt idx="0">
-                  <c:v>4.95</c:v>
+                  <c:v>7.8</c:v>
                 </c:pt>
                 <c:pt idx="1">
-                  <c:v>5.0</c:v>
+                  <c:v>17</c:v>
                 </c:pt>
                 <c:pt idx="2">
-                  <c:v>5.25</c:v>
+                  <c:v>17</c:v>
                 </c:pt>
                 <c:pt idx="3">
-                  <c:v>5.35</c:v>
+                  <c:v>17</c:v>
                 </c:pt>
                 <c:pt idx="4">
-                  <c:v>5.38</c:v>
+                  <c:v>17</c:v>
                 </c:pt>
                 <c:pt idx="5">
-                  <c:v>5.45</c:v>
+                  <c:v>17</c:v>
                 </c:pt>
                 <c:pt idx="6">
-                  <c:v>5.88</c:v>
-                </c:pt>
-                <c:pt idx="7">
-                  <c:v>6.25</c:v>
-                </c:pt>
-                <c:pt idx="8">
-                  <c:v>6.59</c:v>
-                </c:pt>
-                <c:pt idx="9">
-                  <c:v>6.73</c:v>
-                </c:pt>
-                <c:pt idx="10">
-                  <c:v>6.73</c:v>
-                </c:pt>
-                <c:pt idx="11">
-                  <c:v>6.98</c:v>
-                </c:pt>
-                <c:pt idx="12">
-                  <c:v>7.55</c:v>
+                  <c:v>17</c:v>
                 </c:pt>
               </c:numCache>
             </c:numRef>
           </c:val>
         </c:ser>
-        <c:dLbls>
-          <c:numFmt formatCode="0.00" sourceLinked="0"/>
-          <c:txPr>
-            <a:bodyPr/>
-            <a:lstStyle/>
-            <a:p>
-              <a:pPr>
-                <a:defRPr sz="1000"/>
-              </a:pPr>
-            </a:p>
-          </c:txPr>
-          <c:showLegendKey val="0"/>
-          <c:showVal val="1"/>
-          <c:showCatName val="0"/>
-          <c:showSerName val="0"/>
-          <c:showPercent val="0"/>
-          <c:showBubbleSize val="0"/>
-          <c:showLeaderLines val="1"/>
-        </c:dLbls>
+        <c:ser>
+          <c:idx val="1"/>
+          <c:order val="1"/>
+          <c:tx>
+            <c:strRef>
+              <c:f>Sheet1!$C$1</c:f>
+              <c:strCache>
+                <c:ptCount val="1"/>
+                <c:pt idx="0">
+                  <c:v>Deficit repayment (catch-up)</c:v>
+                </c:pt>
+              </c:strCache>
+            </c:strRef>
+          </c:tx>
+          <c:spPr>
+            <a:solidFill>
+              <a:srgbClr val="548235"/>
+            </a:solidFill>
+          </c:spPr>
+          <c:cat>
+            <c:strRef>
+              <c:f>Sheet1!$A$2:$A$8</c:f>
+              <c:strCache>
+                <c:ptCount val="7"/>
+                <c:pt idx="0">
+                  <c:v>FY26
+actual est.</c:v>
+                </c:pt>
+                <c:pt idx="1">
+                  <c:v>FY27</c:v>
+                </c:pt>
+                <c:pt idx="2">
+                  <c:v>FY28</c:v>
+                </c:pt>
+                <c:pt idx="3">
+                  <c:v>FY29</c:v>
+                </c:pt>
+                <c:pt idx="4">
+                  <c:v>FY30</c:v>
+                </c:pt>
+                <c:pt idx="5">
+                  <c:v>FY31</c:v>
+                </c:pt>
+                <c:pt idx="6">
+                  <c:v>Steady state
+FY32+</c:v>
+                </c:pt>
+              </c:strCache>
+            </c:strRef>
+          </c:cat>
+          <c:val>
+            <c:numRef>
+              <c:f>Sheet1!$C$2:$C$8</c:f>
+              <c:numCache>
+                <c:formatCode>General</c:formatCode>
+                <c:ptCount val="7"/>
+                <c:pt idx="0">
+                  <c:v>0</c:v>
+                </c:pt>
+                <c:pt idx="1">
+                  <c:v>10</c:v>
+                </c:pt>
+                <c:pt idx="2">
+                  <c:v>10</c:v>
+                </c:pt>
+                <c:pt idx="3">
+                  <c:v>10</c:v>
+                </c:pt>
+                <c:pt idx="4">
+                  <c:v>10</c:v>
+                </c:pt>
+                <c:pt idx="5">
+                  <c:v>10</c:v>
+                </c:pt>
+                <c:pt idx="6">
+                  <c:v>0</c:v>
+                </c:pt>
+              </c:numCache>
+            </c:numRef>
+          </c:val>
+        </c:ser>
+        <c:overlap val="100"/>
         <c:axId val="-2068027336"/>
         <c:axId val="-2113994440"/>
       </c:barChart>
@@ -3681,7 +3910,7 @@
           <c:orientation val="minMax"/>
         </c:scaling>
         <c:delete val="0"/>
-        <c:axPos val="l"/>
+        <c:axPos val="b"/>
         <c:majorTickMark val="out"/>
         <c:minorTickMark val="none"/>
         <c:tickLblPos val="nextTo"/>
@@ -3690,7 +3919,7 @@
           <a:lstStyle/>
           <a:p>
             <a:pPr>
-              <a:defRPr sz="1000"/>
+              <a:defRPr sz="900"/>
             </a:pPr>
           </a:p>
         </c:txPr>
@@ -3705,7 +3934,7 @@
         <c:axId val="-2113994440"/>
         <c:scaling/>
         <c:delete val="0"/>
-        <c:axPos val="b"/>
+        <c:axPos val="l"/>
         <c:majorGridlines/>
         <c:majorTickMark val="out"/>
         <c:minorTickMark val="none"/>
@@ -3714,6 +3943,19 @@
         <c:crosses val="autoZero"/>
       </c:valAx>
     </c:plotArea>
+    <c:legend>
+      <c:legendPos val="b"/>
+      <c:overlay val="0"/>
+      <c:txPr>
+        <a:bodyPr/>
+        <a:lstStyle/>
+        <a:p>
+          <a:pPr>
+            <a:defRPr sz="1100"/>
+          </a:pPr>
+        </a:p>
+      </c:txPr>
+    </c:legend>
     <c:dispBlanksAs val="gap"/>
   </c:chart>
   <c:txPr>
@@ -7559,6 +7801,330 @@
                   <a:srgbClr val="FFFFFF"/>
                 </a:solidFill>
               </a:rPr>
+              <a:t>Inside TBK Japan: the keiretsu discount, quantified</a:t>
+            </a:r>
+          </a:p>
+        </p:txBody>
+      </p:sp>
+      <p:sp>
+        <p:nvSpPr>
+          <p:cNvPr id="3" name="TextBox 2"/>
+          <p:cNvSpPr txBox="1"/>
+          <p:nvPr/>
+        </p:nvSpPr>
+        <p:spPr>
+          <a:xfrm>
+            <a:off x="457200" y="914400"/>
+            <a:ext cx="11247120" cy="365760"/>
+          </a:xfrm>
+          <a:prstGeom prst="rect">
+            <a:avLst/>
+          </a:prstGeom>
+          <a:noFill/>
+        </p:spPr>
+        <p:txBody>
+          <a:bodyPr wrap="square">
+            <a:spAutoFit/>
+          </a:bodyPr>
+          <a:lstStyle/>
+          <a:p>
+            <a:pPr algn="l"/>
+            <a:r>
+              <a:rPr sz="1200" b="0">
+                <a:solidFill>
+                  <a:srgbClr val="595959"/>
+                </a:solidFill>
+              </a:rPr>
+              <a:t>TBK parent FY2025 H1 profitability by customer and product (series delivery, K JPY) — contribution margin after direct material</a:t>
+            </a:r>
+          </a:p>
+        </p:txBody>
+      </p:sp>
+      <p:graphicFrame>
+        <p:nvGraphicFramePr>
+          <p:cNvPr id="4" name="Chart 3"/>
+          <p:cNvGraphicFramePr>
+            <a:graphicFrameLocks noGrp="1"/>
+          </p:cNvGraphicFramePr>
+          <p:nvPr/>
+        </p:nvGraphicFramePr>
+        <p:xfrm>
+          <a:off x="457200" y="1463040"/>
+          <a:ext cx="6035040" cy="4297680"/>
+        </p:xfrm>
+        <a:graphic>
+          <a:graphicData uri="http://schemas.openxmlformats.org/drawingml/2006/chart">
+            <c:chart xmlns:c="http://schemas.openxmlformats.org/drawingml/2006/chart" r:id="rId2"/>
+          </a:graphicData>
+        </a:graphic>
+      </p:graphicFrame>
+      <p:sp>
+        <p:nvSpPr>
+          <p:cNvPr id="5" name="TextBox 4"/>
+          <p:cNvSpPr txBox="1"/>
+          <p:nvPr/>
+        </p:nvSpPr>
+        <p:spPr>
+          <a:xfrm>
+            <a:off x="6766560" y="1463040"/>
+            <a:ext cx="4983480" cy="2240280"/>
+          </a:xfrm>
+          <a:prstGeom prst="rect">
+            <a:avLst/>
+          </a:prstGeom>
+          <a:solidFill>
+            <a:srgbClr val="F2F2F2"/>
+          </a:solidFill>
+          <a:ln w="15875">
+            <a:solidFill>
+              <a:srgbClr val="1F4E78"/>
+            </a:solidFill>
+          </a:ln>
+        </p:spPr>
+        <p:txBody>
+          <a:bodyPr wrap="square" lIns="137160" rIns="137160" tIns="109728">
+            <a:spAutoFit/>
+          </a:bodyPr>
+          <a:lstStyle/>
+          <a:p>
+            <a:r>
+              <a:rPr sz="1500" b="1">
+                <a:solidFill>
+                  <a:srgbClr val="1F4E78"/>
+                </a:solidFill>
+              </a:rPr>
+              <a:t>Product truths (Japan H1 FY2025)</a:t>
+            </a:r>
+          </a:p>
+          <a:p>
+            <a:pPr>
+              <a:spcBef>
+                <a:spcPts val="400"/>
+              </a:spcBef>
+            </a:pPr>
+            <a:r>
+              <a:rPr sz="1100">
+                <a:solidFill>
+                  <a:srgbClr val="202020"/>
+                </a:solidFill>
+              </a:rPr>
+              <a:t>DISC BRAKE: 68.7% contribution — TBK's HIGHEST-margin product (tiny ¥8.3M volume): the disc transition is margin-accretive, not just defensive</a:t>
+            </a:r>
+          </a:p>
+          <a:p>
+            <a:pPr>
+              <a:spcBef>
+                <a:spcPts val="400"/>
+              </a:spcBef>
+            </a:pPr>
+            <a:r>
+              <a:rPr sz="1100">
+                <a:solidFill>
+                  <a:srgbClr val="202020"/>
+                </a:solidFill>
+              </a:rPr>
+              <a:t>Precision niches price well: S/camshaft 52.7%, kits 55.5%</a:t>
+            </a:r>
+          </a:p>
+          <a:p>
+            <a:pPr>
+              <a:spcBef>
+                <a:spcPts val="400"/>
+              </a:spcBef>
+            </a:pPr>
+            <a:r>
+              <a:rPr sz="1100">
+                <a:solidFill>
+                  <a:srgbClr val="202020"/>
+                </a:solidFill>
+              </a:rPr>
+              <a:t>Negative lines: O/brake -4.9%, B/housing -8.7% (material &gt; sales)</a:t>
+            </a:r>
+          </a:p>
+          <a:p>
+            <a:pPr>
+              <a:spcBef>
+                <a:spcPts val="400"/>
+              </a:spcBef>
+            </a:pPr>
+            <a:r>
+              <a:rPr sz="1100">
+                <a:solidFill>
+                  <a:srgbClr val="202020"/>
+                </a:solidFill>
+              </a:rPr>
+              <a:t>Retarder only 10.4% — the electrification-winner product is underpriced</a:t>
+            </a:r>
+          </a:p>
+          <a:p>
+            <a:pPr>
+              <a:spcBef>
+                <a:spcPts val="400"/>
+              </a:spcBef>
+            </a:pPr>
+            <a:r>
+              <a:rPr sz="1100">
+                <a:solidFill>
+                  <a:srgbClr val="202020"/>
+                </a:solidFill>
+              </a:rPr>
+              <a:t>ECWP (electric W/P): -245.7% at pre-scale volume — the first rung of Concentric's ladder has an entry toll</a:t>
+            </a:r>
+          </a:p>
+        </p:txBody>
+      </p:sp>
+      <p:sp>
+        <p:nvSpPr>
+          <p:cNvPr id="6" name="TextBox 5"/>
+          <p:cNvSpPr txBox="1"/>
+          <p:nvPr/>
+        </p:nvSpPr>
+        <p:spPr>
+          <a:xfrm>
+            <a:off x="6766560" y="3840480"/>
+            <a:ext cx="4983480" cy="2240280"/>
+          </a:xfrm>
+          <a:prstGeom prst="rect">
+            <a:avLst/>
+          </a:prstGeom>
+          <a:solidFill>
+            <a:srgbClr val="F2F2F2"/>
+          </a:solidFill>
+          <a:ln w="15875">
+            <a:solidFill>
+              <a:srgbClr val="548235"/>
+            </a:solidFill>
+          </a:ln>
+        </p:spPr>
+        <p:txBody>
+          <a:bodyPr wrap="square" lIns="137160" rIns="137160" tIns="109728">
+            <a:spAutoFit/>
+          </a:bodyPr>
+          <a:lstStyle/>
+          <a:p>
+            <a:r>
+              <a:rPr sz="1500" b="1">
+                <a:solidFill>
+                  <a:srgbClr val="548235"/>
+                </a:solidFill>
+              </a:rPr>
+              <a:t>Share map &amp; pipeline</a:t>
+            </a:r>
+          </a:p>
+          <a:p>
+            <a:pPr>
+              <a:spcBef>
+                <a:spcPts val="400"/>
+              </a:spcBef>
+            </a:pPr>
+            <a:r>
+              <a:rPr sz="1100">
+                <a:solidFill>
+                  <a:srgbClr val="202020"/>
+                </a:solidFill>
+              </a:rPr>
+              <a:t>Share map: TBK holds Isuzu + Fuso cells across brake sizes and pump segments; mixed at Hino; ZERO UD cells (the all-disc, Knorr-supplied OEM) — the disc flip's cost, mapped</a:t>
+            </a:r>
+          </a:p>
+          <a:p>
+            <a:pPr>
+              <a:spcBef>
+                <a:spcPts val="400"/>
+              </a:spcBef>
+            </a:pPr>
+            <a:r>
+              <a:rPr sz="1100">
+                <a:solidFill>
+                  <a:srgbClr val="202020"/>
+                </a:solidFill>
+              </a:rPr>
+              <a:t>New-business pipeline: ¥8M (FY21) → ¥700M/yr (FY25) incl. ELF EV precharge box, e-W/Pump for Denso AC, Cummins/Komatsu wins — real momentum, but ~2.5% of parent sales: must steepen 10x</a:t>
+            </a:r>
+          </a:p>
+        </p:txBody>
+      </p:sp>
+      <p:sp>
+        <p:nvSpPr>
+          <p:cNvPr id="7" name="TextBox 6"/>
+          <p:cNvSpPr txBox="1"/>
+          <p:nvPr/>
+        </p:nvSpPr>
+        <p:spPr>
+          <a:xfrm>
+            <a:off x="457200" y="5897880"/>
+            <a:ext cx="11247120" cy="822960"/>
+          </a:xfrm>
+          <a:prstGeom prst="rect">
+            <a:avLst/>
+          </a:prstGeom>
+          <a:noFill/>
+        </p:spPr>
+        <p:txBody>
+          <a:bodyPr wrap="square">
+            <a:spAutoFit/>
+          </a:bodyPr>
+          <a:lstStyle/>
+          <a:p>
+            <a:pPr algn="l"/>
+            <a:r>
+              <a:rPr sz="1150" b="0">
+                <a:solidFill>
+                  <a:srgbClr val="595959"/>
+                </a:solidFill>
+              </a:rPr>
+              <a:t>Read with the previous page: Japan series contribution is 19.6% (vs TBKK 22.7%, Concentric 44.5%) — the gap is group-wide. The two cheapest margin levers need no R&amp;D: mix toward non-keiretsu/aftermarket/export customers who already pay ~2x, and price the differentiated products (disc, retarder) for what the data says they are worth.</a:t>
+            </a:r>
+          </a:p>
+        </p:txBody>
+      </p:sp>
+    </p:spTree>
+  </p:cSld>
+  <p:clrMapOvr>
+    <a:masterClrMapping/>
+  </p:clrMapOvr>
+</p:sld>
+</file>
+
+<file path=ppt/slides/slide13.xml><?xml version="1.0" encoding="utf-8"?>
+<p:sld xmlns:a="http://schemas.openxmlformats.org/drawingml/2006/main" xmlns:p="http://schemas.openxmlformats.org/presentationml/2006/main" xmlns:r="http://schemas.openxmlformats.org/officeDocument/2006/relationships">
+  <p:cSld>
+    <p:spTree>
+      <p:nvGrpSpPr>
+        <p:cNvPr id="1" name=""/>
+        <p:cNvGrpSpPr/>
+        <p:nvPr/>
+      </p:nvGrpSpPr>
+      <p:grpSpPr/>
+      <p:sp>
+        <p:nvSpPr>
+          <p:cNvPr id="2" name="TextBox 1"/>
+          <p:cNvSpPr txBox="1"/>
+          <p:nvPr/>
+        </p:nvSpPr>
+        <p:spPr>
+          <a:xfrm>
+            <a:off x="0" y="0"/>
+            <a:ext cx="12191695" cy="868680"/>
+          </a:xfrm>
+          <a:prstGeom prst="rect">
+            <a:avLst/>
+          </a:prstGeom>
+          <a:solidFill>
+            <a:srgbClr val="1F4E78"/>
+          </a:solidFill>
+        </p:spPr>
+        <p:txBody>
+          <a:bodyPr wrap="square" lIns="457200" tIns="164592">
+            <a:spAutoFit/>
+          </a:bodyPr>
+          <a:lstStyle/>
+          <a:p>
+            <a:r>
+              <a:rPr sz="2600" b="1">
+                <a:solidFill>
+                  <a:srgbClr val="FFFFFF"/>
+                </a:solidFill>
+              </a:rPr>
               <a:t>Why TBK looks lean on OPEX: its factory costs hide in COGS</a:t>
             </a:r>
           </a:p>
@@ -7918,7 +8484,7 @@
 </p:sld>
 </file>
 
-<file path=ppt/slides/slide13.xml><?xml version="1.0" encoding="utf-8"?>
+<file path=ppt/slides/slide14.xml><?xml version="1.0" encoding="utf-8"?>
 <p:sld xmlns:a="http://schemas.openxmlformats.org/drawingml/2006/main" xmlns:p="http://schemas.openxmlformats.org/presentationml/2006/main" xmlns:r="http://schemas.openxmlformats.org/officeDocument/2006/relationships">
   <p:cSld>
     <p:spTree>
@@ -8238,7 +8804,7 @@
 </p:sld>
 </file>
 
-<file path=ppt/slides/slide14.xml><?xml version="1.0" encoding="utf-8"?>
+<file path=ppt/slides/slide15.xml><?xml version="1.0" encoding="utf-8"?>
 <p:sld xmlns:a="http://schemas.openxmlformats.org/drawingml/2006/main" xmlns:p="http://schemas.openxmlformats.org/presentationml/2006/main" xmlns:r="http://schemas.openxmlformats.org/officeDocument/2006/relationships">
   <p:cSld>
     <p:spTree>
@@ -8626,7 +9192,7 @@
 </p:sld>
 </file>
 
-<file path=ppt/slides/slide15.xml><?xml version="1.0" encoding="utf-8"?>
+<file path=ppt/slides/slide16.xml><?xml version="1.0" encoding="utf-8"?>
 <p:sld xmlns:a="http://schemas.openxmlformats.org/drawingml/2006/main" xmlns:p="http://schemas.openxmlformats.org/presentationml/2006/main" xmlns:r="http://schemas.openxmlformats.org/officeDocument/2006/relationships">
   <p:cSld>
     <p:spTree>
@@ -9090,438 +9656,6 @@
                 </a:solidFill>
               </a:rPr>
               <a:t>Strategic point: TBK's quality reputation is held entirely inside the keiretsu — like its market share, it cannot be sold to new customers. Making quality externally legible (awards, certifications, published data) is a cheap, necessary complement to the R&amp;D program.</a:t>
-            </a:r>
-          </a:p>
-        </p:txBody>
-      </p:sp>
-    </p:spTree>
-  </p:cSld>
-  <p:clrMapOvr>
-    <a:masterClrMapping/>
-  </p:clrMapOvr>
-</p:sld>
-</file>
-
-<file path=ppt/slides/slide16.xml><?xml version="1.0" encoding="utf-8"?>
-<p:sld xmlns:a="http://schemas.openxmlformats.org/drawingml/2006/main" xmlns:p="http://schemas.openxmlformats.org/presentationml/2006/main" xmlns:r="http://schemas.openxmlformats.org/officeDocument/2006/relationships">
-  <p:cSld>
-    <p:spTree>
-      <p:nvGrpSpPr>
-        <p:cNvPr id="1" name=""/>
-        <p:cNvGrpSpPr/>
-        <p:nvPr/>
-      </p:nvGrpSpPr>
-      <p:grpSpPr/>
-      <p:sp>
-        <p:nvSpPr>
-          <p:cNvPr id="2" name="TextBox 1"/>
-          <p:cNvSpPr txBox="1"/>
-          <p:nvPr/>
-        </p:nvSpPr>
-        <p:spPr>
-          <a:xfrm>
-            <a:off x="0" y="0"/>
-            <a:ext cx="12191695" cy="868680"/>
-          </a:xfrm>
-          <a:prstGeom prst="rect">
-            <a:avLst/>
-          </a:prstGeom>
-          <a:solidFill>
-            <a:srgbClr val="1F4E78"/>
-          </a:solidFill>
-        </p:spPr>
-        <p:txBody>
-          <a:bodyPr wrap="square" lIns="457200" tIns="164592">
-            <a:spAutoFit/>
-          </a:bodyPr>
-          <a:lstStyle/>
-          <a:p>
-            <a:r>
-              <a:rPr sz="2600" b="1">
-                <a:solidFill>
-                  <a:srgbClr val="FFFFFF"/>
-                </a:solidFill>
-              </a:rPr>
-              <a:t>Product evaluation II: innovation output</a:t>
-            </a:r>
-          </a:p>
-        </p:txBody>
-      </p:sp>
-      <p:sp>
-        <p:nvSpPr>
-          <p:cNvPr id="3" name="TextBox 2"/>
-          <p:cNvSpPr txBox="1"/>
-          <p:nvPr/>
-        </p:nvSpPr>
-        <p:spPr>
-          <a:xfrm>
-            <a:off x="457200" y="914400"/>
-            <a:ext cx="11247120" cy="365760"/>
-          </a:xfrm>
-          <a:prstGeom prst="rect">
-            <a:avLst/>
-          </a:prstGeom>
-          <a:noFill/>
-        </p:spPr>
-        <p:txBody>
-          <a:bodyPr wrap="square">
-            <a:spAutoFit/>
-          </a:bodyPr>
-          <a:lstStyle/>
-          <a:p>
-            <a:pPr algn="l"/>
-            <a:r>
-              <a:rPr sz="1200" b="0">
-                <a:solidFill>
-                  <a:srgbClr val="595959"/>
-                </a:solidFill>
-              </a:rPr>
-              <a:t>Patents, documented product firsts, and technical-society awards — the externally visible output of R&amp;D</a:t>
-            </a:r>
-          </a:p>
-        </p:txBody>
-      </p:sp>
-      <p:sp>
-        <p:nvSpPr>
-          <p:cNvPr id="4" name="TextBox 3"/>
-          <p:cNvSpPr txBox="1"/>
-          <p:nvPr/>
-        </p:nvSpPr>
-        <p:spPr>
-          <a:xfrm>
-            <a:off x="457200" y="1417320"/>
-            <a:ext cx="5577840" cy="2286000"/>
-          </a:xfrm>
-          <a:prstGeom prst="rect">
-            <a:avLst/>
-          </a:prstGeom>
-          <a:solidFill>
-            <a:srgbClr val="F2F2F2"/>
-          </a:solidFill>
-          <a:ln w="15875">
-            <a:solidFill>
-              <a:srgbClr val="1F4E78"/>
-            </a:solidFill>
-          </a:ln>
-        </p:spPr>
-        <p:txBody>
-          <a:bodyPr wrap="square" lIns="137160" rIns="137160" tIns="109728">
-            <a:spAutoFit/>
-          </a:bodyPr>
-          <a:lstStyle/>
-          <a:p>
-            <a:r>
-              <a:rPr sz="1500" b="1">
-                <a:solidFill>
-                  <a:srgbClr val="1F4E78"/>
-                </a:solidFill>
-              </a:rPr>
-              <a:t>The patent gap (independent registries)</a:t>
-            </a:r>
-          </a:p>
-          <a:p>
-            <a:pPr>
-              <a:spcBef>
-                <a:spcPts val="400"/>
-              </a:spcBef>
-            </a:pPr>
-            <a:r>
-              <a:rPr sz="1100">
-                <a:solidFill>
-                  <a:srgbClr val="202020"/>
-                </a:solidFill>
-              </a:rPr>
-              <a:t>Knorr-Bremse: ~2,900 patent families / 10,900+ patents (~7,500 in the truck division)</a:t>
-            </a:r>
-          </a:p>
-          <a:p>
-            <a:pPr>
-              <a:spcBef>
-                <a:spcPts val="400"/>
-              </a:spcBef>
-            </a:pPr>
-            <a:r>
-              <a:rPr sz="1100">
-                <a:solidFill>
-                  <a:srgbClr val="202020"/>
-                </a:solidFill>
-              </a:rPr>
-              <a:t>Aisin: ~680 JP applications/yr; Clarivate Top-100 Global Innovator 7 consecutive years</a:t>
-            </a:r>
-          </a:p>
-          <a:p>
-            <a:pPr>
-              <a:spcBef>
-                <a:spcPts val="400"/>
-              </a:spcBef>
-            </a:pPr>
-            <a:r>
-              <a:rPr sz="1100">
-                <a:solidFill>
-                  <a:srgbClr val="202020"/>
-                </a:solidFill>
-              </a:rPr>
-              <a:t>Akebono: ~321 US-registered patents</a:t>
-            </a:r>
-          </a:p>
-          <a:p>
-            <a:pPr>
-              <a:spcBef>
-                <a:spcPts val="400"/>
-              </a:spcBef>
-            </a:pPr>
-            <a:r>
-              <a:rPr sz="1100">
-                <a:solidFill>
-                  <a:srgbClr val="202020"/>
-                </a:solidFill>
-              </a:rPr>
-              <a:t>Mikuni: e-oil-pump fault-detection patents — its BEV-truck win is engineering-backed</a:t>
-            </a:r>
-          </a:p>
-          <a:p>
-            <a:pPr>
-              <a:spcBef>
-                <a:spcPts val="400"/>
-              </a:spcBef>
-            </a:pPr>
-            <a:r>
-              <a:rPr sz="1100">
-                <a:solidFill>
-                  <a:srgbClr val="202020"/>
-                </a:solidFill>
-              </a:rPr>
-              <a:t>TBK: 2-3 patent GRANTS PER YEAR — two to three orders of magnitude below the leaders.</a:t>
-            </a:r>
-          </a:p>
-          <a:p>
-            <a:pPr>
-              <a:spcBef>
-                <a:spcPts val="400"/>
-              </a:spcBef>
-            </a:pPr>
-            <a:r>
-              <a:rPr sz="1100">
-                <a:solidFill>
-                  <a:srgbClr val="202020"/>
-                </a:solidFill>
-              </a:rPr>
-              <a:t>Independently confirms the capitalized-R&amp;D finding ($43M vs $2.6-5.6bn) from a different data source</a:t>
-            </a:r>
-          </a:p>
-        </p:txBody>
-      </p:sp>
-      <p:sp>
-        <p:nvSpPr>
-          <p:cNvPr id="5" name="TextBox 4"/>
-          <p:cNvSpPr txBox="1"/>
-          <p:nvPr/>
-        </p:nvSpPr>
-        <p:spPr>
-          <a:xfrm>
-            <a:off x="6217920" y="1417320"/>
-            <a:ext cx="5532120" cy="2286000"/>
-          </a:xfrm>
-          <a:prstGeom prst="rect">
-            <a:avLst/>
-          </a:prstGeom>
-          <a:solidFill>
-            <a:srgbClr val="F2F2F2"/>
-          </a:solidFill>
-          <a:ln w="15875">
-            <a:solidFill>
-              <a:srgbClr val="548235"/>
-            </a:solidFill>
-          </a:ln>
-        </p:spPr>
-        <p:txBody>
-          <a:bodyPr wrap="square" lIns="137160" rIns="137160" tIns="109728">
-            <a:spAutoFit/>
-          </a:bodyPr>
-          <a:lstStyle/>
-          <a:p>
-            <a:r>
-              <a:rPr sz="1500" b="1">
-                <a:solidFill>
-                  <a:srgbClr val="548235"/>
-                </a:solidFill>
-              </a:rPr>
-              <a:t>Documented product firsts</a:t>
-            </a:r>
-          </a:p>
-          <a:p>
-            <a:pPr>
-              <a:spcBef>
-                <a:spcPts val="400"/>
-              </a:spcBef>
-            </a:pPr>
-            <a:r>
-              <a:rPr sz="1100">
-                <a:solidFill>
-                  <a:srgbClr val="202020"/>
-                </a:solidFill>
-              </a:rPr>
-              <a:t>Knorr: EBS 1989; series air disc brake 1992; Actros/Scania volume 1996</a:t>
-            </a:r>
-          </a:p>
-          <a:p>
-            <a:pPr>
-              <a:spcBef>
-                <a:spcPts val="400"/>
-              </a:spcBef>
-            </a:pPr>
-            <a:r>
-              <a:rPr sz="1100">
-                <a:solidFill>
-                  <a:srgbClr val="202020"/>
-                </a:solidFill>
-              </a:rPr>
-              <a:t>Bendix ADB22X: 2005, now ~85% of NA air-disc wheel ends</a:t>
-            </a:r>
-          </a:p>
-          <a:p>
-            <a:pPr>
-              <a:spcBef>
-                <a:spcPts val="400"/>
-              </a:spcBef>
-            </a:pPr>
-            <a:r>
-              <a:rPr sz="1100">
-                <a:solidFill>
-                  <a:srgbClr val="202020"/>
-                </a:solidFill>
-              </a:rPr>
-              <a:t>UD Quon 2017: first all-disc Japanese heavy truck</a:t>
-            </a:r>
-          </a:p>
-          <a:p>
-            <a:pPr>
-              <a:spcBef>
-                <a:spcPts val="400"/>
-              </a:spcBef>
-            </a:pPr>
-            <a:r>
-              <a:rPr sz="1100">
-                <a:solidFill>
-                  <a:srgbClr val="202020"/>
-                </a:solidFill>
-              </a:rPr>
-              <a:t>Mikuni 2022: e-oil pump in production for a domestic small BEV truck</a:t>
-            </a:r>
-          </a:p>
-          <a:p>
-            <a:pPr>
-              <a:spcBef>
-                <a:spcPts val="400"/>
-              </a:spcBef>
-            </a:pPr>
-            <a:r>
-              <a:rPr sz="1100">
-                <a:solidFill>
-                  <a:srgbClr val="202020"/>
-                </a:solidFill>
-              </a:rPr>
-              <a:t>Akebono FY2023: JSME Technology Award — world-first electric parking brake unit for medium/light trucks (innovating through distress)</a:t>
-            </a:r>
-          </a:p>
-          <a:p>
-            <a:pPr>
-              <a:spcBef>
-                <a:spcPts val="400"/>
-              </a:spcBef>
-            </a:pPr>
-            <a:r>
-              <a:rPr sz="1100">
-                <a:solidFill>
-                  <a:srgbClr val="202020"/>
-                </a:solidFill>
-              </a:rPr>
-              <a:t>TBK: retarders since the 1960s; 19.5" ADB exhibited (year unconfirmed: 2019 vs 2022 sources conflict); e-pumps/TCU in development</a:t>
-            </a:r>
-          </a:p>
-        </p:txBody>
-      </p:sp>
-      <p:sp>
-        <p:nvSpPr>
-          <p:cNvPr id="6" name="TextBox 5"/>
-          <p:cNvSpPr txBox="1"/>
-          <p:nvPr/>
-        </p:nvSpPr>
-        <p:spPr>
-          <a:xfrm>
-            <a:off x="457200" y="3840480"/>
-            <a:ext cx="11292840" cy="1737360"/>
-          </a:xfrm>
-          <a:prstGeom prst="rect">
-            <a:avLst/>
-          </a:prstGeom>
-          <a:solidFill>
-            <a:srgbClr val="F2F2F2"/>
-          </a:solidFill>
-          <a:ln w="15875">
-            <a:solidFill>
-              <a:srgbClr val="1F4E78"/>
-            </a:solidFill>
-          </a:ln>
-        </p:spPr>
-        <p:txBody>
-          <a:bodyPr wrap="square" lIns="137160" rIns="137160" tIns="109728">
-            <a:spAutoFit/>
-          </a:bodyPr>
-          <a:lstStyle/>
-          <a:p>
-            <a:r>
-              <a:rPr sz="1500" b="1">
-                <a:solidFill>
-                  <a:srgbClr val="1F4E78"/>
-                </a:solidFill>
-              </a:rPr>
-              <a:t>The pattern — and TBK's fix</a:t>
-            </a:r>
-          </a:p>
-          <a:p>
-            <a:pPr>
-              <a:spcBef>
-                <a:spcPts val="400"/>
-              </a:spcBef>
-            </a:pPr>
-            <a:r>
-              <a:rPr sz="1150">
-                <a:solidFill>
-                  <a:srgbClr val="202020"/>
-                </a:solidFill>
-              </a:rPr>
-              <a:t>Innovation output tracks the moat and margin rankings almost perfectly: the companies with validated quality (Knorr, Cummins) also hold the patent fortresses and the product firsts; the distressed (Akebono) still out-publish TBK; even the similarly-sized peer (Mikuni) protects its e-pump work with patents.</a:t>
-            </a:r>
-          </a:p>
-          <a:p>
-            <a:pPr>
-              <a:spcBef>
-                <a:spcPts val="400"/>
-              </a:spcBef>
-            </a:pPr>
-            <a:r>
-              <a:rPr sz="1150">
-                <a:solidFill>
-                  <a:srgbClr val="202020"/>
-                </a:solidFill>
-              </a:rPr>
-              <a:t>TBK's innovation is real but INVISIBLE: 75 years of retarder/brake/pump engineering, an ADB prototype, e-pumps and a thermal control unit in development — none of it patented at scale, published at JSAE, or externally awarded. Invisible innovation cannot win sockets outside the keiretsu.</a:t>
-            </a:r>
-          </a:p>
-          <a:p>
-            <a:pPr>
-              <a:spcBef>
-                <a:spcPts val="400"/>
-              </a:spcBef>
-            </a:pPr>
-            <a:r>
-              <a:rPr sz="1150">
-                <a:solidFill>
-                  <a:srgbClr val="202020"/>
-                </a:solidFill>
-              </a:rPr>
-              <a:t>Fix costs little: patent the e-pump/TCU and ADB work (Mikuni shows the value), publish, pursue external validation — a required complement to the R&amp;D spend itself.</a:t>
             </a:r>
           </a:p>
         </p:txBody>
@@ -9574,6 +9708,438 @@
                   <a:srgbClr val="FFFFFF"/>
                 </a:solidFill>
               </a:rPr>
+              <a:t>Product evaluation II: innovation output</a:t>
+            </a:r>
+          </a:p>
+        </p:txBody>
+      </p:sp>
+      <p:sp>
+        <p:nvSpPr>
+          <p:cNvPr id="3" name="TextBox 2"/>
+          <p:cNvSpPr txBox="1"/>
+          <p:nvPr/>
+        </p:nvSpPr>
+        <p:spPr>
+          <a:xfrm>
+            <a:off x="457200" y="914400"/>
+            <a:ext cx="11247120" cy="365760"/>
+          </a:xfrm>
+          <a:prstGeom prst="rect">
+            <a:avLst/>
+          </a:prstGeom>
+          <a:noFill/>
+        </p:spPr>
+        <p:txBody>
+          <a:bodyPr wrap="square">
+            <a:spAutoFit/>
+          </a:bodyPr>
+          <a:lstStyle/>
+          <a:p>
+            <a:pPr algn="l"/>
+            <a:r>
+              <a:rPr sz="1200" b="0">
+                <a:solidFill>
+                  <a:srgbClr val="595959"/>
+                </a:solidFill>
+              </a:rPr>
+              <a:t>Patents, documented product firsts, and technical-society awards — the externally visible output of R&amp;D</a:t>
+            </a:r>
+          </a:p>
+        </p:txBody>
+      </p:sp>
+      <p:sp>
+        <p:nvSpPr>
+          <p:cNvPr id="4" name="TextBox 3"/>
+          <p:cNvSpPr txBox="1"/>
+          <p:nvPr/>
+        </p:nvSpPr>
+        <p:spPr>
+          <a:xfrm>
+            <a:off x="457200" y="1417320"/>
+            <a:ext cx="5577840" cy="2286000"/>
+          </a:xfrm>
+          <a:prstGeom prst="rect">
+            <a:avLst/>
+          </a:prstGeom>
+          <a:solidFill>
+            <a:srgbClr val="F2F2F2"/>
+          </a:solidFill>
+          <a:ln w="15875">
+            <a:solidFill>
+              <a:srgbClr val="1F4E78"/>
+            </a:solidFill>
+          </a:ln>
+        </p:spPr>
+        <p:txBody>
+          <a:bodyPr wrap="square" lIns="137160" rIns="137160" tIns="109728">
+            <a:spAutoFit/>
+          </a:bodyPr>
+          <a:lstStyle/>
+          <a:p>
+            <a:r>
+              <a:rPr sz="1500" b="1">
+                <a:solidFill>
+                  <a:srgbClr val="1F4E78"/>
+                </a:solidFill>
+              </a:rPr>
+              <a:t>The patent gap (independent registries)</a:t>
+            </a:r>
+          </a:p>
+          <a:p>
+            <a:pPr>
+              <a:spcBef>
+                <a:spcPts val="400"/>
+              </a:spcBef>
+            </a:pPr>
+            <a:r>
+              <a:rPr sz="1100">
+                <a:solidFill>
+                  <a:srgbClr val="202020"/>
+                </a:solidFill>
+              </a:rPr>
+              <a:t>Knorr-Bremse: ~2,900 patent families / 10,900+ patents (~7,500 in the truck division)</a:t>
+            </a:r>
+          </a:p>
+          <a:p>
+            <a:pPr>
+              <a:spcBef>
+                <a:spcPts val="400"/>
+              </a:spcBef>
+            </a:pPr>
+            <a:r>
+              <a:rPr sz="1100">
+                <a:solidFill>
+                  <a:srgbClr val="202020"/>
+                </a:solidFill>
+              </a:rPr>
+              <a:t>Aisin: ~680 JP applications/yr; Clarivate Top-100 Global Innovator 7 consecutive years</a:t>
+            </a:r>
+          </a:p>
+          <a:p>
+            <a:pPr>
+              <a:spcBef>
+                <a:spcPts val="400"/>
+              </a:spcBef>
+            </a:pPr>
+            <a:r>
+              <a:rPr sz="1100">
+                <a:solidFill>
+                  <a:srgbClr val="202020"/>
+                </a:solidFill>
+              </a:rPr>
+              <a:t>Akebono: ~321 US-registered patents</a:t>
+            </a:r>
+          </a:p>
+          <a:p>
+            <a:pPr>
+              <a:spcBef>
+                <a:spcPts val="400"/>
+              </a:spcBef>
+            </a:pPr>
+            <a:r>
+              <a:rPr sz="1100">
+                <a:solidFill>
+                  <a:srgbClr val="202020"/>
+                </a:solidFill>
+              </a:rPr>
+              <a:t>Mikuni: e-oil-pump fault-detection patents — its BEV-truck win is engineering-backed</a:t>
+            </a:r>
+          </a:p>
+          <a:p>
+            <a:pPr>
+              <a:spcBef>
+                <a:spcPts val="400"/>
+              </a:spcBef>
+            </a:pPr>
+            <a:r>
+              <a:rPr sz="1100">
+                <a:solidFill>
+                  <a:srgbClr val="202020"/>
+                </a:solidFill>
+              </a:rPr>
+              <a:t>TBK: 2-3 patent GRANTS PER YEAR — two to three orders of magnitude below the leaders.</a:t>
+            </a:r>
+          </a:p>
+          <a:p>
+            <a:pPr>
+              <a:spcBef>
+                <a:spcPts val="400"/>
+              </a:spcBef>
+            </a:pPr>
+            <a:r>
+              <a:rPr sz="1100">
+                <a:solidFill>
+                  <a:srgbClr val="202020"/>
+                </a:solidFill>
+              </a:rPr>
+              <a:t>Independently confirms the capitalized-R&amp;D finding ($43M vs $2.6-5.6bn) from a different data source</a:t>
+            </a:r>
+          </a:p>
+        </p:txBody>
+      </p:sp>
+      <p:sp>
+        <p:nvSpPr>
+          <p:cNvPr id="5" name="TextBox 4"/>
+          <p:cNvSpPr txBox="1"/>
+          <p:nvPr/>
+        </p:nvSpPr>
+        <p:spPr>
+          <a:xfrm>
+            <a:off x="6217920" y="1417320"/>
+            <a:ext cx="5532120" cy="2286000"/>
+          </a:xfrm>
+          <a:prstGeom prst="rect">
+            <a:avLst/>
+          </a:prstGeom>
+          <a:solidFill>
+            <a:srgbClr val="F2F2F2"/>
+          </a:solidFill>
+          <a:ln w="15875">
+            <a:solidFill>
+              <a:srgbClr val="548235"/>
+            </a:solidFill>
+          </a:ln>
+        </p:spPr>
+        <p:txBody>
+          <a:bodyPr wrap="square" lIns="137160" rIns="137160" tIns="109728">
+            <a:spAutoFit/>
+          </a:bodyPr>
+          <a:lstStyle/>
+          <a:p>
+            <a:r>
+              <a:rPr sz="1500" b="1">
+                <a:solidFill>
+                  <a:srgbClr val="548235"/>
+                </a:solidFill>
+              </a:rPr>
+              <a:t>Documented product firsts</a:t>
+            </a:r>
+          </a:p>
+          <a:p>
+            <a:pPr>
+              <a:spcBef>
+                <a:spcPts val="400"/>
+              </a:spcBef>
+            </a:pPr>
+            <a:r>
+              <a:rPr sz="1100">
+                <a:solidFill>
+                  <a:srgbClr val="202020"/>
+                </a:solidFill>
+              </a:rPr>
+              <a:t>Knorr: EBS 1989; series air disc brake 1992; Actros/Scania volume 1996</a:t>
+            </a:r>
+          </a:p>
+          <a:p>
+            <a:pPr>
+              <a:spcBef>
+                <a:spcPts val="400"/>
+              </a:spcBef>
+            </a:pPr>
+            <a:r>
+              <a:rPr sz="1100">
+                <a:solidFill>
+                  <a:srgbClr val="202020"/>
+                </a:solidFill>
+              </a:rPr>
+              <a:t>Bendix ADB22X: 2005, now ~85% of NA air-disc wheel ends</a:t>
+            </a:r>
+          </a:p>
+          <a:p>
+            <a:pPr>
+              <a:spcBef>
+                <a:spcPts val="400"/>
+              </a:spcBef>
+            </a:pPr>
+            <a:r>
+              <a:rPr sz="1100">
+                <a:solidFill>
+                  <a:srgbClr val="202020"/>
+                </a:solidFill>
+              </a:rPr>
+              <a:t>UD Quon 2017: first all-disc Japanese heavy truck</a:t>
+            </a:r>
+          </a:p>
+          <a:p>
+            <a:pPr>
+              <a:spcBef>
+                <a:spcPts val="400"/>
+              </a:spcBef>
+            </a:pPr>
+            <a:r>
+              <a:rPr sz="1100">
+                <a:solidFill>
+                  <a:srgbClr val="202020"/>
+                </a:solidFill>
+              </a:rPr>
+              <a:t>Mikuni 2022: e-oil pump in production for a domestic small BEV truck</a:t>
+            </a:r>
+          </a:p>
+          <a:p>
+            <a:pPr>
+              <a:spcBef>
+                <a:spcPts val="400"/>
+              </a:spcBef>
+            </a:pPr>
+            <a:r>
+              <a:rPr sz="1100">
+                <a:solidFill>
+                  <a:srgbClr val="202020"/>
+                </a:solidFill>
+              </a:rPr>
+              <a:t>Akebono FY2023: JSME Technology Award — world-first electric parking brake unit for medium/light trucks (innovating through distress)</a:t>
+            </a:r>
+          </a:p>
+          <a:p>
+            <a:pPr>
+              <a:spcBef>
+                <a:spcPts val="400"/>
+              </a:spcBef>
+            </a:pPr>
+            <a:r>
+              <a:rPr sz="1100">
+                <a:solidFill>
+                  <a:srgbClr val="202020"/>
+                </a:solidFill>
+              </a:rPr>
+              <a:t>TBK: retarders since the 1960s; 19.5" ADB exhibited (year unconfirmed: 2019 vs 2022 sources conflict); e-pumps/TCU in development</a:t>
+            </a:r>
+          </a:p>
+        </p:txBody>
+      </p:sp>
+      <p:sp>
+        <p:nvSpPr>
+          <p:cNvPr id="6" name="TextBox 5"/>
+          <p:cNvSpPr txBox="1"/>
+          <p:nvPr/>
+        </p:nvSpPr>
+        <p:spPr>
+          <a:xfrm>
+            <a:off x="457200" y="3840480"/>
+            <a:ext cx="11292840" cy="1737360"/>
+          </a:xfrm>
+          <a:prstGeom prst="rect">
+            <a:avLst/>
+          </a:prstGeom>
+          <a:solidFill>
+            <a:srgbClr val="F2F2F2"/>
+          </a:solidFill>
+          <a:ln w="15875">
+            <a:solidFill>
+              <a:srgbClr val="1F4E78"/>
+            </a:solidFill>
+          </a:ln>
+        </p:spPr>
+        <p:txBody>
+          <a:bodyPr wrap="square" lIns="137160" rIns="137160" tIns="109728">
+            <a:spAutoFit/>
+          </a:bodyPr>
+          <a:lstStyle/>
+          <a:p>
+            <a:r>
+              <a:rPr sz="1500" b="1">
+                <a:solidFill>
+                  <a:srgbClr val="1F4E78"/>
+                </a:solidFill>
+              </a:rPr>
+              <a:t>The pattern — and TBK's fix</a:t>
+            </a:r>
+          </a:p>
+          <a:p>
+            <a:pPr>
+              <a:spcBef>
+                <a:spcPts val="400"/>
+              </a:spcBef>
+            </a:pPr>
+            <a:r>
+              <a:rPr sz="1150">
+                <a:solidFill>
+                  <a:srgbClr val="202020"/>
+                </a:solidFill>
+              </a:rPr>
+              <a:t>Innovation output tracks the moat and margin rankings almost perfectly: the companies with validated quality (Knorr, Cummins) also hold the patent fortresses and the product firsts; the distressed (Akebono) still out-publish TBK; even the similarly-sized peer (Mikuni) protects its e-pump work with patents.</a:t>
+            </a:r>
+          </a:p>
+          <a:p>
+            <a:pPr>
+              <a:spcBef>
+                <a:spcPts val="400"/>
+              </a:spcBef>
+            </a:pPr>
+            <a:r>
+              <a:rPr sz="1150">
+                <a:solidFill>
+                  <a:srgbClr val="202020"/>
+                </a:solidFill>
+              </a:rPr>
+              <a:t>TBK's innovation is real but INVISIBLE: 75 years of retarder/brake/pump engineering, an ADB prototype, e-pumps and a thermal control unit in development — none of it patented at scale, published at JSAE, or externally awarded. Invisible innovation cannot win sockets outside the keiretsu.</a:t>
+            </a:r>
+          </a:p>
+          <a:p>
+            <a:pPr>
+              <a:spcBef>
+                <a:spcPts val="400"/>
+              </a:spcBef>
+            </a:pPr>
+            <a:r>
+              <a:rPr sz="1150">
+                <a:solidFill>
+                  <a:srgbClr val="202020"/>
+                </a:solidFill>
+              </a:rPr>
+              <a:t>Fix costs little: patent the e-pump/TCU and ADB work (Mikuni shows the value), publish, pursue external validation — a required complement to the R&amp;D spend itself.</a:t>
+            </a:r>
+          </a:p>
+        </p:txBody>
+      </p:sp>
+    </p:spTree>
+  </p:cSld>
+  <p:clrMapOvr>
+    <a:masterClrMapping/>
+  </p:clrMapOvr>
+</p:sld>
+</file>
+
+<file path=ppt/slides/slide18.xml><?xml version="1.0" encoding="utf-8"?>
+<p:sld xmlns:a="http://schemas.openxmlformats.org/drawingml/2006/main" xmlns:p="http://schemas.openxmlformats.org/presentationml/2006/main" xmlns:r="http://schemas.openxmlformats.org/officeDocument/2006/relationships">
+  <p:cSld>
+    <p:spTree>
+      <p:nvGrpSpPr>
+        <p:cNvPr id="1" name=""/>
+        <p:cNvGrpSpPr/>
+        <p:nvPr/>
+      </p:nvGrpSpPr>
+      <p:grpSpPr/>
+      <p:sp>
+        <p:nvSpPr>
+          <p:cNvPr id="2" name="TextBox 1"/>
+          <p:cNvSpPr txBox="1"/>
+          <p:nvPr/>
+        </p:nvSpPr>
+        <p:spPr>
+          <a:xfrm>
+            <a:off x="0" y="0"/>
+            <a:ext cx="12191695" cy="868680"/>
+          </a:xfrm>
+          <a:prstGeom prst="rect">
+            <a:avLst/>
+          </a:prstGeom>
+          <a:solidFill>
+            <a:srgbClr val="1F4E78"/>
+          </a:solidFill>
+        </p:spPr>
+        <p:txBody>
+          <a:bodyPr wrap="square" lIns="457200" tIns="164592">
+            <a:spAutoFit/>
+          </a:bodyPr>
+          <a:lstStyle/>
+          <a:p>
+            <a:r>
+              <a:rPr sz="2600" b="1">
+                <a:solidFill>
+                  <a:srgbClr val="FFFFFF"/>
+                </a:solidFill>
+              </a:rPr>
               <a:t>Moat framework ranking: TBK scores 5.38 — 9th of 13</a:t>
             </a:r>
           </a:p>
@@ -9944,7 +10510,7 @@
 </p:sld>
 </file>
 
-<file path=ppt/slides/slide18.xml><?xml version="1.0" encoding="utf-8"?>
+<file path=ppt/slides/slide19.xml><?xml version="1.0" encoding="utf-8"?>
 <p:sld xmlns:a="http://schemas.openxmlformats.org/drawingml/2006/main" xmlns:p="http://schemas.openxmlformats.org/presentationml/2006/main" xmlns:r="http://schemas.openxmlformats.org/officeDocument/2006/relationships">
   <p:cSld>
     <p:spTree>
@@ -10249,7 +10815,639 @@
 </p:sld>
 </file>
 
-<file path=ppt/slides/slide19.xml><?xml version="1.0" encoding="utf-8"?>
+<file path=ppt/slides/slide2.xml><?xml version="1.0" encoding="utf-8"?>
+<p:sld xmlns:a="http://schemas.openxmlformats.org/drawingml/2006/main" xmlns:p="http://schemas.openxmlformats.org/presentationml/2006/main" xmlns:r="http://schemas.openxmlformats.org/officeDocument/2006/relationships">
+  <p:cSld>
+    <p:spTree>
+      <p:nvGrpSpPr>
+        <p:cNvPr id="1" name=""/>
+        <p:cNvGrpSpPr/>
+        <p:nvPr/>
+      </p:nvGrpSpPr>
+      <p:grpSpPr/>
+      <p:sp>
+        <p:nvSpPr>
+          <p:cNvPr id="2" name="TextBox 1"/>
+          <p:cNvSpPr txBox="1"/>
+          <p:nvPr/>
+        </p:nvSpPr>
+        <p:spPr>
+          <a:xfrm>
+            <a:off x="0" y="0"/>
+            <a:ext cx="12191695" cy="868680"/>
+          </a:xfrm>
+          <a:prstGeom prst="rect">
+            <a:avLst/>
+          </a:prstGeom>
+          <a:solidFill>
+            <a:srgbClr val="1F4E78"/>
+          </a:solidFill>
+        </p:spPr>
+        <p:txBody>
+          <a:bodyPr wrap="square" lIns="457200" tIns="164592">
+            <a:spAutoFit/>
+          </a:bodyPr>
+          <a:lstStyle/>
+          <a:p>
+            <a:r>
+              <a:rPr sz="2600" b="1">
+                <a:solidFill>
+                  <a:srgbClr val="FFFFFF"/>
+                </a:solidFill>
+              </a:rPr>
+              <a:t>Brakes: drum brakes are a shrinking island</a:t>
+            </a:r>
+          </a:p>
+        </p:txBody>
+      </p:sp>
+      <p:sp>
+        <p:nvSpPr>
+          <p:cNvPr id="3" name="TextBox 2"/>
+          <p:cNvSpPr txBox="1"/>
+          <p:nvPr/>
+        </p:nvSpPr>
+        <p:spPr>
+          <a:xfrm>
+            <a:off x="457200" y="914400"/>
+            <a:ext cx="11247120" cy="365760"/>
+          </a:xfrm>
+          <a:prstGeom prst="rect">
+            <a:avLst/>
+          </a:prstGeom>
+          <a:noFill/>
+        </p:spPr>
+        <p:txBody>
+          <a:bodyPr wrap="square">
+            <a:spAutoFit/>
+          </a:bodyPr>
+          <a:lstStyle/>
+          <a:p>
+            <a:pPr algn="l"/>
+            <a:r>
+              <a:rPr sz="1200" b="0">
+                <a:solidFill>
+                  <a:srgbClr val="595959"/>
+                </a:solidFill>
+              </a:rPr>
+              <a:t>Verified findings from peer-reviewed literature, regulatory records, and industry data</a:t>
+            </a:r>
+          </a:p>
+        </p:txBody>
+      </p:sp>
+      <p:sp>
+        <p:nvSpPr>
+          <p:cNvPr id="4" name="TextBox 3"/>
+          <p:cNvSpPr txBox="1"/>
+          <p:nvPr/>
+        </p:nvSpPr>
+        <p:spPr>
+          <a:xfrm>
+            <a:off x="457200" y="1417320"/>
+            <a:ext cx="3657600" cy="2834640"/>
+          </a:xfrm>
+          <a:prstGeom prst="rect">
+            <a:avLst/>
+          </a:prstGeom>
+          <a:solidFill>
+            <a:srgbClr val="F2F2F2"/>
+          </a:solidFill>
+          <a:ln w="15875">
+            <a:solidFill>
+              <a:srgbClr val="1F4E78"/>
+            </a:solidFill>
+          </a:ln>
+        </p:spPr>
+        <p:txBody>
+          <a:bodyPr wrap="square" lIns="137160" rIns="137160" tIns="109728">
+            <a:spAutoFit/>
+          </a:bodyPr>
+          <a:lstStyle/>
+          <a:p>
+            <a:r>
+              <a:rPr sz="1500" b="1">
+                <a:solidFill>
+                  <a:srgbClr val="1F4E78"/>
+                </a:solidFill>
+              </a:rPr>
+              <a:t>Europe — converted ~2000</a:t>
+            </a:r>
+          </a:p>
+          <a:p>
+            <a:pPr>
+              <a:spcBef>
+                <a:spcPts val="400"/>
+              </a:spcBef>
+            </a:pPr>
+            <a:r>
+              <a:rPr sz="1200">
+                <a:solidFill>
+                  <a:srgbClr val="202020"/>
+                </a:solidFill>
+              </a:rPr>
+              <a:t>1996 Actros: first heavy truck with</a:t>
+            </a:r>
+          </a:p>
+          <a:p>
+            <a:pPr>
+              <a:spcBef>
+                <a:spcPts val="400"/>
+              </a:spcBef>
+            </a:pPr>
+            <a:r>
+              <a:rPr sz="1200">
+                <a:solidFill>
+                  <a:srgbClr val="202020"/>
+                </a:solidFill>
+              </a:rPr>
+              <a:t>all-axle EBS disc brakes</a:t>
+            </a:r>
+          </a:p>
+          <a:p>
+            <a:pPr>
+              <a:spcBef>
+                <a:spcPts val="400"/>
+              </a:spcBef>
+            </a:pPr>
+            <a:r>
+              <a:rPr sz="1200">
+                <a:solidFill>
+                  <a:srgbClr val="202020"/>
+                </a:solidFill>
+              </a:rPr>
+              <a:t>~70% disc/EBS take rate by 2000</a:t>
+            </a:r>
+          </a:p>
+          <a:p>
+            <a:pPr>
+              <a:spcBef>
+                <a:spcPts val="400"/>
+              </a:spcBef>
+            </a:pPr>
+            <a:r>
+              <a:rPr sz="1200">
+                <a:solidFill>
+                  <a:srgbClr val="202020"/>
+                </a:solidFill>
+              </a:rPr>
+              <a:t>Near-universal on-highway since</a:t>
+            </a:r>
+          </a:p>
+          <a:p>
+            <a:pPr>
+              <a:spcBef>
+                <a:spcPts val="400"/>
+              </a:spcBef>
+            </a:pPr>
+            <a:r>
+              <a:rPr sz="1200">
+                <a:solidFill>
+                  <a:srgbClr val="202020"/>
+                </a:solidFill>
+              </a:rPr>
+              <a:t>Drums: ~18% of EU demand (off-road)</a:t>
+            </a:r>
+          </a:p>
+        </p:txBody>
+      </p:sp>
+      <p:sp>
+        <p:nvSpPr>
+          <p:cNvPr id="5" name="TextBox 4"/>
+          <p:cNvSpPr txBox="1"/>
+          <p:nvPr/>
+        </p:nvSpPr>
+        <p:spPr>
+          <a:xfrm>
+            <a:off x="4297680" y="1417320"/>
+            <a:ext cx="3657600" cy="2834640"/>
+          </a:xfrm>
+          <a:prstGeom prst="rect">
+            <a:avLst/>
+          </a:prstGeom>
+          <a:solidFill>
+            <a:srgbClr val="F2F2F2"/>
+          </a:solidFill>
+          <a:ln w="15875">
+            <a:solidFill>
+              <a:srgbClr val="1F4E78"/>
+            </a:solidFill>
+          </a:ln>
+        </p:spPr>
+        <p:txBody>
+          <a:bodyPr wrap="square" lIns="137160" rIns="137160" tIns="109728">
+            <a:spAutoFit/>
+          </a:bodyPr>
+          <a:lstStyle/>
+          <a:p>
+            <a:r>
+              <a:rPr sz="1500" b="1">
+                <a:solidFill>
+                  <a:srgbClr val="1F4E78"/>
+                </a:solidFill>
+              </a:rPr>
+              <a:t>North America — tipped 2023-24</a:t>
+            </a:r>
+          </a:p>
+          <a:p>
+            <a:pPr>
+              <a:spcBef>
+                <a:spcPts val="400"/>
+              </a:spcBef>
+            </a:pPr>
+            <a:r>
+              <a:rPr sz="1200">
+                <a:solidFill>
+                  <a:srgbClr val="202020"/>
+                </a:solidFill>
+              </a:rPr>
+              <a:t>FMVSS 121 (2009): −30% stopping</a:t>
+            </a:r>
+          </a:p>
+          <a:p>
+            <a:pPr>
+              <a:spcBef>
+                <a:spcPts val="400"/>
+              </a:spcBef>
+            </a:pPr>
+            <a:r>
+              <a:rPr sz="1200">
+                <a:solidFill>
+                  <a:srgbClr val="202020"/>
+                </a:solidFill>
+              </a:rPr>
+              <a:t>distance, drum-compatible by design</a:t>
+            </a:r>
+          </a:p>
+          <a:p>
+            <a:pPr>
+              <a:spcBef>
+                <a:spcPts val="400"/>
+              </a:spcBef>
+            </a:pPr>
+            <a:r>
+              <a:rPr sz="1200">
+                <a:solidFill>
+                  <a:srgbClr val="202020"/>
+                </a:solidFill>
+              </a:rPr>
+              <a:t>Tractors: &lt;5% disc (2011) → ~25%</a:t>
+            </a:r>
+          </a:p>
+          <a:p>
+            <a:pPr>
+              <a:spcBef>
+                <a:spcPts val="400"/>
+              </a:spcBef>
+            </a:pPr>
+            <a:r>
+              <a:rPr sz="1200">
+                <a:solidFill>
+                  <a:srgbClr val="202020"/>
+                </a:solidFill>
+              </a:rPr>
+              <a:t>(2018) → ~50%+ (2023-24)</a:t>
+            </a:r>
+          </a:p>
+          <a:p>
+            <a:pPr>
+              <a:spcBef>
+                <a:spcPts val="400"/>
+              </a:spcBef>
+            </a:pPr>
+            <a:r>
+              <a:rPr sz="1200">
+                <a:solidFill>
+                  <a:srgbClr val="202020"/>
+                </a:solidFill>
+              </a:rPr>
+              <a:t>Trailers still lag at ~15%</a:t>
+            </a:r>
+          </a:p>
+        </p:txBody>
+      </p:sp>
+      <p:sp>
+        <p:nvSpPr>
+          <p:cNvPr id="6" name="TextBox 5"/>
+          <p:cNvSpPr txBox="1"/>
+          <p:nvPr/>
+        </p:nvSpPr>
+        <p:spPr>
+          <a:xfrm>
+            <a:off x="8138160" y="1417320"/>
+            <a:ext cx="3611880" cy="2834640"/>
+          </a:xfrm>
+          <a:prstGeom prst="rect">
+            <a:avLst/>
+          </a:prstGeom>
+          <a:solidFill>
+            <a:srgbClr val="F2F2F2"/>
+          </a:solidFill>
+          <a:ln w="15875">
+            <a:solidFill>
+              <a:srgbClr val="7F1D1D"/>
+            </a:solidFill>
+          </a:ln>
+        </p:spPr>
+        <p:txBody>
+          <a:bodyPr wrap="square" lIns="137160" rIns="137160" tIns="109728">
+            <a:spAutoFit/>
+          </a:bodyPr>
+          <a:lstStyle/>
+          <a:p>
+            <a:r>
+              <a:rPr sz="1500" b="1">
+                <a:solidFill>
+                  <a:srgbClr val="7F1D1D"/>
+                </a:solidFill>
+              </a:rPr>
+              <a:t>Japan — the last drum market</a:t>
+            </a:r>
+          </a:p>
+          <a:p>
+            <a:pPr>
+              <a:spcBef>
+                <a:spcPts val="400"/>
+              </a:spcBef>
+            </a:pPr>
+            <a:r>
+              <a:rPr sz="1200">
+                <a:solidFill>
+                  <a:srgbClr val="202020"/>
+                </a:solidFill>
+              </a:rPr>
+              <a:t>Drums still majority on MD/HD trucks</a:t>
+            </a:r>
+          </a:p>
+          <a:p>
+            <a:pPr>
+              <a:spcBef>
+                <a:spcPts val="400"/>
+              </a:spcBef>
+            </a:pPr>
+            <a:r>
+              <a:rPr sz="1200">
+                <a:solidFill>
+                  <a:srgbClr val="202020"/>
+                </a:solidFill>
+              </a:rPr>
+              <a:t>UD Quon all-disc since 2017</a:t>
+            </a:r>
+          </a:p>
+          <a:p>
+            <a:pPr>
+              <a:spcBef>
+                <a:spcPts val="400"/>
+              </a:spcBef>
+            </a:pPr>
+            <a:r>
+              <a:rPr sz="1200">
+                <a:solidFill>
+                  <a:srgbClr val="202020"/>
+                </a:solidFill>
+              </a:rPr>
+              <a:t>New Giga tractor: all-wheel discs</a:t>
+            </a:r>
+          </a:p>
+          <a:p>
+            <a:pPr>
+              <a:spcBef>
+                <a:spcPts val="400"/>
+              </a:spcBef>
+            </a:pPr>
+            <a:r>
+              <a:rPr sz="1200">
+                <a:solidFill>
+                  <a:srgbClr val="202020"/>
+                </a:solidFill>
+              </a:rPr>
+              <a:t>Isuzu export heavies all-disc (MY25)</a:t>
+            </a:r>
+          </a:p>
+          <a:p>
+            <a:pPr>
+              <a:spcBef>
+                <a:spcPts val="400"/>
+              </a:spcBef>
+            </a:pPr>
+            <a:r>
+              <a:rPr sz="1200">
+                <a:solidFill>
+                  <a:srgbClr val="202020"/>
+                </a:solidFill>
+              </a:rPr>
+              <a:t>Domestic flip is when, not if</a:t>
+            </a:r>
+          </a:p>
+        </p:txBody>
+      </p:sp>
+      <p:sp>
+        <p:nvSpPr>
+          <p:cNvPr id="7" name="TextBox 6"/>
+          <p:cNvSpPr txBox="1"/>
+          <p:nvPr/>
+        </p:nvSpPr>
+        <p:spPr>
+          <a:xfrm>
+            <a:off x="457200" y="4434840"/>
+            <a:ext cx="5577840" cy="2103120"/>
+          </a:xfrm>
+          <a:prstGeom prst="rect">
+            <a:avLst/>
+          </a:prstGeom>
+          <a:solidFill>
+            <a:srgbClr val="F2F2F2"/>
+          </a:solidFill>
+          <a:ln w="15875">
+            <a:solidFill>
+              <a:srgbClr val="1F4E78"/>
+            </a:solidFill>
+          </a:ln>
+        </p:spPr>
+        <p:txBody>
+          <a:bodyPr wrap="square" lIns="137160" rIns="137160" tIns="109728">
+            <a:spAutoFit/>
+          </a:bodyPr>
+          <a:lstStyle/>
+          <a:p>
+            <a:r>
+              <a:rPr sz="1500" b="1">
+                <a:solidFill>
+                  <a:srgbClr val="1F4E78"/>
+                </a:solidFill>
+              </a:rPr>
+              <a:t>Why discs won (peer-reviewed)</a:t>
+            </a:r>
+          </a:p>
+          <a:p>
+            <a:pPr>
+              <a:spcBef>
+                <a:spcPts val="400"/>
+              </a:spcBef>
+            </a:pPr>
+            <a:r>
+              <a:rPr sz="1200">
+                <a:solidFill>
+                  <a:srgbClr val="202020"/>
+                </a:solidFill>
+              </a:rPr>
+              <a:t>Fade resistance under thermal load (SAE 902206, 1990; physics in Day et al. 1984)</a:t>
+            </a:r>
+          </a:p>
+          <a:p>
+            <a:pPr>
+              <a:spcBef>
+                <a:spcPts val="400"/>
+              </a:spcBef>
+            </a:pPr>
+            <a:r>
+              <a:rPr sz="1200">
+                <a:solidFill>
+                  <a:srgbClr val="202020"/>
+                </a:solidFill>
+              </a:rPr>
+              <a:t>~30% shorter stops vs standard drums (NHTSA simulator, 108 drivers)</a:t>
+            </a:r>
+          </a:p>
+          <a:p>
+            <a:pPr>
+              <a:spcBef>
+                <a:spcPts val="400"/>
+              </a:spcBef>
+            </a:pPr>
+            <a:r>
+              <a:rPr sz="1200">
+                <a:solidFill>
+                  <a:srgbClr val="202020"/>
+                </a:solidFill>
+              </a:rPr>
+              <a:t>10-20% braking advantage, 12-80% lifecycle savings in demanding duty (Ampadu 2023)</a:t>
+            </a:r>
+          </a:p>
+          <a:p>
+            <a:pPr>
+              <a:spcBef>
+                <a:spcPts val="400"/>
+              </a:spcBef>
+            </a:pPr>
+            <a:r>
+              <a:rPr sz="1200">
+                <a:solidFill>
+                  <a:srgbClr val="202020"/>
+                </a:solidFill>
+              </a:rPr>
+              <a:t>EBS/AEB/ADAS mandates favor disc actuation precision</a:t>
+            </a:r>
+          </a:p>
+        </p:txBody>
+      </p:sp>
+      <p:sp>
+        <p:nvSpPr>
+          <p:cNvPr id="8" name="TextBox 7"/>
+          <p:cNvSpPr txBox="1"/>
+          <p:nvPr/>
+        </p:nvSpPr>
+        <p:spPr>
+          <a:xfrm>
+            <a:off x="6217920" y="4434840"/>
+            <a:ext cx="5532120" cy="2103120"/>
+          </a:xfrm>
+          <a:prstGeom prst="rect">
+            <a:avLst/>
+          </a:prstGeom>
+          <a:solidFill>
+            <a:srgbClr val="F2F2F2"/>
+          </a:solidFill>
+          <a:ln w="15875">
+            <a:solidFill>
+              <a:srgbClr val="548235"/>
+            </a:solidFill>
+          </a:ln>
+        </p:spPr>
+        <p:txBody>
+          <a:bodyPr wrap="square" lIns="137160" rIns="137160" tIns="109728">
+            <a:spAutoFit/>
+          </a:bodyPr>
+          <a:lstStyle/>
+          <a:p>
+            <a:r>
+              <a:rPr sz="1500" b="1">
+                <a:solidFill>
+                  <a:srgbClr val="548235"/>
+                </a:solidFill>
+              </a:rPr>
+              <a:t>Electrification re-shuffles the deck</a:t>
+            </a:r>
+          </a:p>
+          <a:p>
+            <a:pPr>
+              <a:spcBef>
+                <a:spcPts val="400"/>
+              </a:spcBef>
+            </a:pPr>
+            <a:r>
+              <a:rPr sz="1200">
+                <a:solidFill>
+                  <a:srgbClr val="202020"/>
+                </a:solidFill>
+              </a:rPr>
+              <a:t>Regen braking cuts friction wear 64-95% (multiple peer-reviewed studies)</a:t>
+            </a:r>
+          </a:p>
+          <a:p>
+            <a:pPr>
+              <a:spcBef>
+                <a:spcPts val="400"/>
+              </a:spcBef>
+            </a:pPr>
+            <a:r>
+              <a:rPr sz="1200">
+                <a:solidFill>
+                  <a:srgbClr val="202020"/>
+                </a:solidFill>
+              </a:rPr>
+              <a:t>Friction aftermarket growth ~2% CAGR with EV headwind</a:t>
+            </a:r>
+          </a:p>
+          <a:p>
+            <a:pPr>
+              <a:spcBef>
+                <a:spcPts val="400"/>
+              </a:spcBef>
+            </a:pPr>
+            <a:r>
+              <a:rPr sz="1200">
+                <a:solidFill>
+                  <a:srgbClr val="202020"/>
+                </a:solidFill>
+              </a:rPr>
+              <a:t>EU brake-dust limits for heavy vehicles expected ~2030</a:t>
+            </a:r>
+          </a:p>
+          <a:p>
+            <a:pPr>
+              <a:spcBef>
+                <a:spcPts val="400"/>
+              </a:spcBef>
+            </a:pPr>
+            <a:r>
+              <a:rPr sz="1200">
+                <a:solidFill>
+                  <a:srgbClr val="202020"/>
+                </a:solidFill>
+              </a:rPr>
+              <a:t>Value shifts: wear parts → corrosion/NVH/low-dust + retarders &amp; blending</a:t>
+            </a:r>
+          </a:p>
+        </p:txBody>
+      </p:sp>
+    </p:spTree>
+  </p:cSld>
+  <p:clrMapOvr>
+    <a:masterClrMapping/>
+  </p:clrMapOvr>
+</p:sld>
+</file>
+
+<file path=ppt/slides/slide20.xml><?xml version="1.0" encoding="utf-8"?>
 <p:sld xmlns:a="http://schemas.openxmlformats.org/drawingml/2006/main" xmlns:p="http://schemas.openxmlformats.org/presentationml/2006/main" xmlns:r="http://schemas.openxmlformats.org/officeDocument/2006/relationships">
   <p:cSld>
     <p:spTree>
@@ -10406,639 +11604,7 @@
 </p:sld>
 </file>
 
-<file path=ppt/slides/slide2.xml><?xml version="1.0" encoding="utf-8"?>
-<p:sld xmlns:a="http://schemas.openxmlformats.org/drawingml/2006/main" xmlns:p="http://schemas.openxmlformats.org/presentationml/2006/main" xmlns:r="http://schemas.openxmlformats.org/officeDocument/2006/relationships">
-  <p:cSld>
-    <p:spTree>
-      <p:nvGrpSpPr>
-        <p:cNvPr id="1" name=""/>
-        <p:cNvGrpSpPr/>
-        <p:nvPr/>
-      </p:nvGrpSpPr>
-      <p:grpSpPr/>
-      <p:sp>
-        <p:nvSpPr>
-          <p:cNvPr id="2" name="TextBox 1"/>
-          <p:cNvSpPr txBox="1"/>
-          <p:nvPr/>
-        </p:nvSpPr>
-        <p:spPr>
-          <a:xfrm>
-            <a:off x="0" y="0"/>
-            <a:ext cx="12191695" cy="868680"/>
-          </a:xfrm>
-          <a:prstGeom prst="rect">
-            <a:avLst/>
-          </a:prstGeom>
-          <a:solidFill>
-            <a:srgbClr val="1F4E78"/>
-          </a:solidFill>
-        </p:spPr>
-        <p:txBody>
-          <a:bodyPr wrap="square" lIns="457200" tIns="164592">
-            <a:spAutoFit/>
-          </a:bodyPr>
-          <a:lstStyle/>
-          <a:p>
-            <a:r>
-              <a:rPr sz="2600" b="1">
-                <a:solidFill>
-                  <a:srgbClr val="FFFFFF"/>
-                </a:solidFill>
-              </a:rPr>
-              <a:t>Brakes: drum brakes are a shrinking island</a:t>
-            </a:r>
-          </a:p>
-        </p:txBody>
-      </p:sp>
-      <p:sp>
-        <p:nvSpPr>
-          <p:cNvPr id="3" name="TextBox 2"/>
-          <p:cNvSpPr txBox="1"/>
-          <p:nvPr/>
-        </p:nvSpPr>
-        <p:spPr>
-          <a:xfrm>
-            <a:off x="457200" y="914400"/>
-            <a:ext cx="11247120" cy="365760"/>
-          </a:xfrm>
-          <a:prstGeom prst="rect">
-            <a:avLst/>
-          </a:prstGeom>
-          <a:noFill/>
-        </p:spPr>
-        <p:txBody>
-          <a:bodyPr wrap="square">
-            <a:spAutoFit/>
-          </a:bodyPr>
-          <a:lstStyle/>
-          <a:p>
-            <a:pPr algn="l"/>
-            <a:r>
-              <a:rPr sz="1200" b="0">
-                <a:solidFill>
-                  <a:srgbClr val="595959"/>
-                </a:solidFill>
-              </a:rPr>
-              <a:t>Verified findings from peer-reviewed literature, regulatory records, and industry data</a:t>
-            </a:r>
-          </a:p>
-        </p:txBody>
-      </p:sp>
-      <p:sp>
-        <p:nvSpPr>
-          <p:cNvPr id="4" name="TextBox 3"/>
-          <p:cNvSpPr txBox="1"/>
-          <p:nvPr/>
-        </p:nvSpPr>
-        <p:spPr>
-          <a:xfrm>
-            <a:off x="457200" y="1417320"/>
-            <a:ext cx="3657600" cy="2834640"/>
-          </a:xfrm>
-          <a:prstGeom prst="rect">
-            <a:avLst/>
-          </a:prstGeom>
-          <a:solidFill>
-            <a:srgbClr val="F2F2F2"/>
-          </a:solidFill>
-          <a:ln w="15875">
-            <a:solidFill>
-              <a:srgbClr val="1F4E78"/>
-            </a:solidFill>
-          </a:ln>
-        </p:spPr>
-        <p:txBody>
-          <a:bodyPr wrap="square" lIns="137160" rIns="137160" tIns="109728">
-            <a:spAutoFit/>
-          </a:bodyPr>
-          <a:lstStyle/>
-          <a:p>
-            <a:r>
-              <a:rPr sz="1500" b="1">
-                <a:solidFill>
-                  <a:srgbClr val="1F4E78"/>
-                </a:solidFill>
-              </a:rPr>
-              <a:t>Europe — converted ~2000</a:t>
-            </a:r>
-          </a:p>
-          <a:p>
-            <a:pPr>
-              <a:spcBef>
-                <a:spcPts val="400"/>
-              </a:spcBef>
-            </a:pPr>
-            <a:r>
-              <a:rPr sz="1200">
-                <a:solidFill>
-                  <a:srgbClr val="202020"/>
-                </a:solidFill>
-              </a:rPr>
-              <a:t>1996 Actros: first heavy truck with</a:t>
-            </a:r>
-          </a:p>
-          <a:p>
-            <a:pPr>
-              <a:spcBef>
-                <a:spcPts val="400"/>
-              </a:spcBef>
-            </a:pPr>
-            <a:r>
-              <a:rPr sz="1200">
-                <a:solidFill>
-                  <a:srgbClr val="202020"/>
-                </a:solidFill>
-              </a:rPr>
-              <a:t>all-axle EBS disc brakes</a:t>
-            </a:r>
-          </a:p>
-          <a:p>
-            <a:pPr>
-              <a:spcBef>
-                <a:spcPts val="400"/>
-              </a:spcBef>
-            </a:pPr>
-            <a:r>
-              <a:rPr sz="1200">
-                <a:solidFill>
-                  <a:srgbClr val="202020"/>
-                </a:solidFill>
-              </a:rPr>
-              <a:t>~70% disc/EBS take rate by 2000</a:t>
-            </a:r>
-          </a:p>
-          <a:p>
-            <a:pPr>
-              <a:spcBef>
-                <a:spcPts val="400"/>
-              </a:spcBef>
-            </a:pPr>
-            <a:r>
-              <a:rPr sz="1200">
-                <a:solidFill>
-                  <a:srgbClr val="202020"/>
-                </a:solidFill>
-              </a:rPr>
-              <a:t>Near-universal on-highway since</a:t>
-            </a:r>
-          </a:p>
-          <a:p>
-            <a:pPr>
-              <a:spcBef>
-                <a:spcPts val="400"/>
-              </a:spcBef>
-            </a:pPr>
-            <a:r>
-              <a:rPr sz="1200">
-                <a:solidFill>
-                  <a:srgbClr val="202020"/>
-                </a:solidFill>
-              </a:rPr>
-              <a:t>Drums: ~18% of EU demand (off-road)</a:t>
-            </a:r>
-          </a:p>
-        </p:txBody>
-      </p:sp>
-      <p:sp>
-        <p:nvSpPr>
-          <p:cNvPr id="5" name="TextBox 4"/>
-          <p:cNvSpPr txBox="1"/>
-          <p:nvPr/>
-        </p:nvSpPr>
-        <p:spPr>
-          <a:xfrm>
-            <a:off x="4297680" y="1417320"/>
-            <a:ext cx="3657600" cy="2834640"/>
-          </a:xfrm>
-          <a:prstGeom prst="rect">
-            <a:avLst/>
-          </a:prstGeom>
-          <a:solidFill>
-            <a:srgbClr val="F2F2F2"/>
-          </a:solidFill>
-          <a:ln w="15875">
-            <a:solidFill>
-              <a:srgbClr val="1F4E78"/>
-            </a:solidFill>
-          </a:ln>
-        </p:spPr>
-        <p:txBody>
-          <a:bodyPr wrap="square" lIns="137160" rIns="137160" tIns="109728">
-            <a:spAutoFit/>
-          </a:bodyPr>
-          <a:lstStyle/>
-          <a:p>
-            <a:r>
-              <a:rPr sz="1500" b="1">
-                <a:solidFill>
-                  <a:srgbClr val="1F4E78"/>
-                </a:solidFill>
-              </a:rPr>
-              <a:t>North America — tipped 2023-24</a:t>
-            </a:r>
-          </a:p>
-          <a:p>
-            <a:pPr>
-              <a:spcBef>
-                <a:spcPts val="400"/>
-              </a:spcBef>
-            </a:pPr>
-            <a:r>
-              <a:rPr sz="1200">
-                <a:solidFill>
-                  <a:srgbClr val="202020"/>
-                </a:solidFill>
-              </a:rPr>
-              <a:t>FMVSS 121 (2009): −30% stopping</a:t>
-            </a:r>
-          </a:p>
-          <a:p>
-            <a:pPr>
-              <a:spcBef>
-                <a:spcPts val="400"/>
-              </a:spcBef>
-            </a:pPr>
-            <a:r>
-              <a:rPr sz="1200">
-                <a:solidFill>
-                  <a:srgbClr val="202020"/>
-                </a:solidFill>
-              </a:rPr>
-              <a:t>distance, drum-compatible by design</a:t>
-            </a:r>
-          </a:p>
-          <a:p>
-            <a:pPr>
-              <a:spcBef>
-                <a:spcPts val="400"/>
-              </a:spcBef>
-            </a:pPr>
-            <a:r>
-              <a:rPr sz="1200">
-                <a:solidFill>
-                  <a:srgbClr val="202020"/>
-                </a:solidFill>
-              </a:rPr>
-              <a:t>Tractors: &lt;5% disc (2011) → ~25%</a:t>
-            </a:r>
-          </a:p>
-          <a:p>
-            <a:pPr>
-              <a:spcBef>
-                <a:spcPts val="400"/>
-              </a:spcBef>
-            </a:pPr>
-            <a:r>
-              <a:rPr sz="1200">
-                <a:solidFill>
-                  <a:srgbClr val="202020"/>
-                </a:solidFill>
-              </a:rPr>
-              <a:t>(2018) → ~50%+ (2023-24)</a:t>
-            </a:r>
-          </a:p>
-          <a:p>
-            <a:pPr>
-              <a:spcBef>
-                <a:spcPts val="400"/>
-              </a:spcBef>
-            </a:pPr>
-            <a:r>
-              <a:rPr sz="1200">
-                <a:solidFill>
-                  <a:srgbClr val="202020"/>
-                </a:solidFill>
-              </a:rPr>
-              <a:t>Trailers still lag at ~15%</a:t>
-            </a:r>
-          </a:p>
-        </p:txBody>
-      </p:sp>
-      <p:sp>
-        <p:nvSpPr>
-          <p:cNvPr id="6" name="TextBox 5"/>
-          <p:cNvSpPr txBox="1"/>
-          <p:nvPr/>
-        </p:nvSpPr>
-        <p:spPr>
-          <a:xfrm>
-            <a:off x="8138160" y="1417320"/>
-            <a:ext cx="3611880" cy="2834640"/>
-          </a:xfrm>
-          <a:prstGeom prst="rect">
-            <a:avLst/>
-          </a:prstGeom>
-          <a:solidFill>
-            <a:srgbClr val="F2F2F2"/>
-          </a:solidFill>
-          <a:ln w="15875">
-            <a:solidFill>
-              <a:srgbClr val="7F1D1D"/>
-            </a:solidFill>
-          </a:ln>
-        </p:spPr>
-        <p:txBody>
-          <a:bodyPr wrap="square" lIns="137160" rIns="137160" tIns="109728">
-            <a:spAutoFit/>
-          </a:bodyPr>
-          <a:lstStyle/>
-          <a:p>
-            <a:r>
-              <a:rPr sz="1500" b="1">
-                <a:solidFill>
-                  <a:srgbClr val="7F1D1D"/>
-                </a:solidFill>
-              </a:rPr>
-              <a:t>Japan — the last drum market</a:t>
-            </a:r>
-          </a:p>
-          <a:p>
-            <a:pPr>
-              <a:spcBef>
-                <a:spcPts val="400"/>
-              </a:spcBef>
-            </a:pPr>
-            <a:r>
-              <a:rPr sz="1200">
-                <a:solidFill>
-                  <a:srgbClr val="202020"/>
-                </a:solidFill>
-              </a:rPr>
-              <a:t>Drums still majority on MD/HD trucks</a:t>
-            </a:r>
-          </a:p>
-          <a:p>
-            <a:pPr>
-              <a:spcBef>
-                <a:spcPts val="400"/>
-              </a:spcBef>
-            </a:pPr>
-            <a:r>
-              <a:rPr sz="1200">
-                <a:solidFill>
-                  <a:srgbClr val="202020"/>
-                </a:solidFill>
-              </a:rPr>
-              <a:t>UD Quon all-disc since 2017</a:t>
-            </a:r>
-          </a:p>
-          <a:p>
-            <a:pPr>
-              <a:spcBef>
-                <a:spcPts val="400"/>
-              </a:spcBef>
-            </a:pPr>
-            <a:r>
-              <a:rPr sz="1200">
-                <a:solidFill>
-                  <a:srgbClr val="202020"/>
-                </a:solidFill>
-              </a:rPr>
-              <a:t>New Giga tractor: all-wheel discs</a:t>
-            </a:r>
-          </a:p>
-          <a:p>
-            <a:pPr>
-              <a:spcBef>
-                <a:spcPts val="400"/>
-              </a:spcBef>
-            </a:pPr>
-            <a:r>
-              <a:rPr sz="1200">
-                <a:solidFill>
-                  <a:srgbClr val="202020"/>
-                </a:solidFill>
-              </a:rPr>
-              <a:t>Isuzu export heavies all-disc (MY25)</a:t>
-            </a:r>
-          </a:p>
-          <a:p>
-            <a:pPr>
-              <a:spcBef>
-                <a:spcPts val="400"/>
-              </a:spcBef>
-            </a:pPr>
-            <a:r>
-              <a:rPr sz="1200">
-                <a:solidFill>
-                  <a:srgbClr val="202020"/>
-                </a:solidFill>
-              </a:rPr>
-              <a:t>Domestic flip is when, not if</a:t>
-            </a:r>
-          </a:p>
-        </p:txBody>
-      </p:sp>
-      <p:sp>
-        <p:nvSpPr>
-          <p:cNvPr id="7" name="TextBox 6"/>
-          <p:cNvSpPr txBox="1"/>
-          <p:nvPr/>
-        </p:nvSpPr>
-        <p:spPr>
-          <a:xfrm>
-            <a:off x="457200" y="4434840"/>
-            <a:ext cx="5577840" cy="2103120"/>
-          </a:xfrm>
-          <a:prstGeom prst="rect">
-            <a:avLst/>
-          </a:prstGeom>
-          <a:solidFill>
-            <a:srgbClr val="F2F2F2"/>
-          </a:solidFill>
-          <a:ln w="15875">
-            <a:solidFill>
-              <a:srgbClr val="1F4E78"/>
-            </a:solidFill>
-          </a:ln>
-        </p:spPr>
-        <p:txBody>
-          <a:bodyPr wrap="square" lIns="137160" rIns="137160" tIns="109728">
-            <a:spAutoFit/>
-          </a:bodyPr>
-          <a:lstStyle/>
-          <a:p>
-            <a:r>
-              <a:rPr sz="1500" b="1">
-                <a:solidFill>
-                  <a:srgbClr val="1F4E78"/>
-                </a:solidFill>
-              </a:rPr>
-              <a:t>Why discs won (peer-reviewed)</a:t>
-            </a:r>
-          </a:p>
-          <a:p>
-            <a:pPr>
-              <a:spcBef>
-                <a:spcPts val="400"/>
-              </a:spcBef>
-            </a:pPr>
-            <a:r>
-              <a:rPr sz="1200">
-                <a:solidFill>
-                  <a:srgbClr val="202020"/>
-                </a:solidFill>
-              </a:rPr>
-              <a:t>Fade resistance under thermal load (SAE 902206, 1990; physics in Day et al. 1984)</a:t>
-            </a:r>
-          </a:p>
-          <a:p>
-            <a:pPr>
-              <a:spcBef>
-                <a:spcPts val="400"/>
-              </a:spcBef>
-            </a:pPr>
-            <a:r>
-              <a:rPr sz="1200">
-                <a:solidFill>
-                  <a:srgbClr val="202020"/>
-                </a:solidFill>
-              </a:rPr>
-              <a:t>~30% shorter stops vs standard drums (NHTSA simulator, 108 drivers)</a:t>
-            </a:r>
-          </a:p>
-          <a:p>
-            <a:pPr>
-              <a:spcBef>
-                <a:spcPts val="400"/>
-              </a:spcBef>
-            </a:pPr>
-            <a:r>
-              <a:rPr sz="1200">
-                <a:solidFill>
-                  <a:srgbClr val="202020"/>
-                </a:solidFill>
-              </a:rPr>
-              <a:t>10-20% braking advantage, 12-80% lifecycle savings in demanding duty (Ampadu 2023)</a:t>
-            </a:r>
-          </a:p>
-          <a:p>
-            <a:pPr>
-              <a:spcBef>
-                <a:spcPts val="400"/>
-              </a:spcBef>
-            </a:pPr>
-            <a:r>
-              <a:rPr sz="1200">
-                <a:solidFill>
-                  <a:srgbClr val="202020"/>
-                </a:solidFill>
-              </a:rPr>
-              <a:t>EBS/AEB/ADAS mandates favor disc actuation precision</a:t>
-            </a:r>
-          </a:p>
-        </p:txBody>
-      </p:sp>
-      <p:sp>
-        <p:nvSpPr>
-          <p:cNvPr id="8" name="TextBox 7"/>
-          <p:cNvSpPr txBox="1"/>
-          <p:nvPr/>
-        </p:nvSpPr>
-        <p:spPr>
-          <a:xfrm>
-            <a:off x="6217920" y="4434840"/>
-            <a:ext cx="5532120" cy="2103120"/>
-          </a:xfrm>
-          <a:prstGeom prst="rect">
-            <a:avLst/>
-          </a:prstGeom>
-          <a:solidFill>
-            <a:srgbClr val="F2F2F2"/>
-          </a:solidFill>
-          <a:ln w="15875">
-            <a:solidFill>
-              <a:srgbClr val="548235"/>
-            </a:solidFill>
-          </a:ln>
-        </p:spPr>
-        <p:txBody>
-          <a:bodyPr wrap="square" lIns="137160" rIns="137160" tIns="109728">
-            <a:spAutoFit/>
-          </a:bodyPr>
-          <a:lstStyle/>
-          <a:p>
-            <a:r>
-              <a:rPr sz="1500" b="1">
-                <a:solidFill>
-                  <a:srgbClr val="548235"/>
-                </a:solidFill>
-              </a:rPr>
-              <a:t>Electrification re-shuffles the deck</a:t>
-            </a:r>
-          </a:p>
-          <a:p>
-            <a:pPr>
-              <a:spcBef>
-                <a:spcPts val="400"/>
-              </a:spcBef>
-            </a:pPr>
-            <a:r>
-              <a:rPr sz="1200">
-                <a:solidFill>
-                  <a:srgbClr val="202020"/>
-                </a:solidFill>
-              </a:rPr>
-              <a:t>Regen braking cuts friction wear 64-95% (multiple peer-reviewed studies)</a:t>
-            </a:r>
-          </a:p>
-          <a:p>
-            <a:pPr>
-              <a:spcBef>
-                <a:spcPts val="400"/>
-              </a:spcBef>
-            </a:pPr>
-            <a:r>
-              <a:rPr sz="1200">
-                <a:solidFill>
-                  <a:srgbClr val="202020"/>
-                </a:solidFill>
-              </a:rPr>
-              <a:t>Friction aftermarket growth ~2% CAGR with EV headwind</a:t>
-            </a:r>
-          </a:p>
-          <a:p>
-            <a:pPr>
-              <a:spcBef>
-                <a:spcPts val="400"/>
-              </a:spcBef>
-            </a:pPr>
-            <a:r>
-              <a:rPr sz="1200">
-                <a:solidFill>
-                  <a:srgbClr val="202020"/>
-                </a:solidFill>
-              </a:rPr>
-              <a:t>EU brake-dust limits for heavy vehicles expected ~2030</a:t>
-            </a:r>
-          </a:p>
-          <a:p>
-            <a:pPr>
-              <a:spcBef>
-                <a:spcPts val="400"/>
-              </a:spcBef>
-            </a:pPr>
-            <a:r>
-              <a:rPr sz="1200">
-                <a:solidFill>
-                  <a:srgbClr val="202020"/>
-                </a:solidFill>
-              </a:rPr>
-              <a:t>Value shifts: wear parts → corrosion/NVH/low-dust + retarders &amp; blending</a:t>
-            </a:r>
-          </a:p>
-        </p:txBody>
-      </p:sp>
-    </p:spTree>
-  </p:cSld>
-  <p:clrMapOvr>
-    <a:masterClrMapping/>
-  </p:clrMapOvr>
-</p:sld>
-</file>
-
-<file path=ppt/slides/slide20.xml><?xml version="1.0" encoding="utf-8"?>
+<file path=ppt/slides/slide21.xml><?xml version="1.0" encoding="utf-8"?>
 <p:sld xmlns:a="http://schemas.openxmlformats.org/drawingml/2006/main" xmlns:p="http://schemas.openxmlformats.org/presentationml/2006/main" xmlns:r="http://schemas.openxmlformats.org/officeDocument/2006/relationships">
   <p:cSld>
     <p:spTree>
@@ -11555,7 +12121,7 @@
 </p:sld>
 </file>
 
-<file path=ppt/slides/slide21.xml><?xml version="1.0" encoding="utf-8"?>
+<file path=ppt/slides/slide22.xml><?xml version="1.0" encoding="utf-8"?>
 <p:sld xmlns:a="http://schemas.openxmlformats.org/drawingml/2006/main" xmlns:p="http://schemas.openxmlformats.org/presentationml/2006/main" xmlns:r="http://schemas.openxmlformats.org/officeDocument/2006/relationships">
   <p:cSld>
     <p:spTree>

--- a/TBK_rd_gap_slides.pptx
+++ b/TBK_rd_gap_slides.pptx
@@ -27,6 +27,7 @@
     <p:sldId id="275" r:id="rId26"/>
     <p:sldId id="276" r:id="rId27"/>
     <p:sldId id="277" r:id="rId28"/>
+    <p:sldId id="278" r:id="rId29"/>
   </p:sldIdLst>
   <p:sldSz cx="12191695" cy="6858000" type="screen4x3"/>
   <p:notesSz cx="6858000" cy="9144000"/>
@@ -352,6 +353,267 @@
           <a:lstStyle/>
           <a:p>
             <a:r>
+              <a:rPr sz="1400"/>
+              <a:t>R&amp;D spend plan (US$M per year)</a:t>
+            </a:r>
+          </a:p>
+        </c:rich>
+      </c:tx>
+      <c:layout/>
+      <c:overlay val="0"/>
+    </c:title>
+    <c:autoTitleDeleted val="0"/>
+    <c:plotArea>
+      <c:barChart>
+        <c:barDir val="col"/>
+        <c:grouping val="stacked"/>
+        <c:ser>
+          <c:idx val="0"/>
+          <c:order val="0"/>
+          <c:tx>
+            <c:strRef>
+              <c:f>Sheet1!$B$1</c:f>
+              <c:strCache>
+                <c:ptCount val="1"/>
+                <c:pt idx="0">
+                  <c:v>Parity run-rate (~4.5-5% of sales)</c:v>
+                </c:pt>
+              </c:strCache>
+            </c:strRef>
+          </c:tx>
+          <c:spPr>
+            <a:solidFill>
+              <a:srgbClr val="1F4E78"/>
+            </a:solidFill>
+          </c:spPr>
+          <c:cat>
+            <c:strRef>
+              <c:f>Sheet1!$A$2:$A$8</c:f>
+              <c:strCache>
+                <c:ptCount val="7"/>
+                <c:pt idx="0">
+                  <c:v>FY26
+actual est.</c:v>
+                </c:pt>
+                <c:pt idx="1">
+                  <c:v>FY27</c:v>
+                </c:pt>
+                <c:pt idx="2">
+                  <c:v>FY28</c:v>
+                </c:pt>
+                <c:pt idx="3">
+                  <c:v>FY29</c:v>
+                </c:pt>
+                <c:pt idx="4">
+                  <c:v>FY30</c:v>
+                </c:pt>
+                <c:pt idx="5">
+                  <c:v>FY31</c:v>
+                </c:pt>
+                <c:pt idx="6">
+                  <c:v>Steady state
+FY32+</c:v>
+                </c:pt>
+              </c:strCache>
+            </c:strRef>
+          </c:cat>
+          <c:val>
+            <c:numRef>
+              <c:f>Sheet1!$B$2:$B$8</c:f>
+              <c:numCache>
+                <c:formatCode>General</c:formatCode>
+                <c:ptCount val="7"/>
+                <c:pt idx="0">
+                  <c:v>7.8</c:v>
+                </c:pt>
+                <c:pt idx="1">
+                  <c:v>17</c:v>
+                </c:pt>
+                <c:pt idx="2">
+                  <c:v>17</c:v>
+                </c:pt>
+                <c:pt idx="3">
+                  <c:v>17</c:v>
+                </c:pt>
+                <c:pt idx="4">
+                  <c:v>17</c:v>
+                </c:pt>
+                <c:pt idx="5">
+                  <c:v>17</c:v>
+                </c:pt>
+                <c:pt idx="6">
+                  <c:v>17</c:v>
+                </c:pt>
+              </c:numCache>
+            </c:numRef>
+          </c:val>
+        </c:ser>
+        <c:ser>
+          <c:idx val="1"/>
+          <c:order val="1"/>
+          <c:tx>
+            <c:strRef>
+              <c:f>Sheet1!$C$1</c:f>
+              <c:strCache>
+                <c:ptCount val="1"/>
+                <c:pt idx="0">
+                  <c:v>Deficit repayment (catch-up)</c:v>
+                </c:pt>
+              </c:strCache>
+            </c:strRef>
+          </c:tx>
+          <c:spPr>
+            <a:solidFill>
+              <a:srgbClr val="548235"/>
+            </a:solidFill>
+          </c:spPr>
+          <c:cat>
+            <c:strRef>
+              <c:f>Sheet1!$A$2:$A$8</c:f>
+              <c:strCache>
+                <c:ptCount val="7"/>
+                <c:pt idx="0">
+                  <c:v>FY26
+actual est.</c:v>
+                </c:pt>
+                <c:pt idx="1">
+                  <c:v>FY27</c:v>
+                </c:pt>
+                <c:pt idx="2">
+                  <c:v>FY28</c:v>
+                </c:pt>
+                <c:pt idx="3">
+                  <c:v>FY29</c:v>
+                </c:pt>
+                <c:pt idx="4">
+                  <c:v>FY30</c:v>
+                </c:pt>
+                <c:pt idx="5">
+                  <c:v>FY31</c:v>
+                </c:pt>
+                <c:pt idx="6">
+                  <c:v>Steady state
+FY32+</c:v>
+                </c:pt>
+              </c:strCache>
+            </c:strRef>
+          </c:cat>
+          <c:val>
+            <c:numRef>
+              <c:f>Sheet1!$C$2:$C$8</c:f>
+              <c:numCache>
+                <c:formatCode>General</c:formatCode>
+                <c:ptCount val="7"/>
+                <c:pt idx="0">
+                  <c:v>0</c:v>
+                </c:pt>
+                <c:pt idx="1">
+                  <c:v>10</c:v>
+                </c:pt>
+                <c:pt idx="2">
+                  <c:v>10</c:v>
+                </c:pt>
+                <c:pt idx="3">
+                  <c:v>10</c:v>
+                </c:pt>
+                <c:pt idx="4">
+                  <c:v>10</c:v>
+                </c:pt>
+                <c:pt idx="5">
+                  <c:v>10</c:v>
+                </c:pt>
+                <c:pt idx="6">
+                  <c:v>0</c:v>
+                </c:pt>
+              </c:numCache>
+            </c:numRef>
+          </c:val>
+        </c:ser>
+        <c:overlap val="100"/>
+        <c:axId val="-2068027336"/>
+        <c:axId val="-2113994440"/>
+      </c:barChart>
+      <c:catAx>
+        <c:axId val="-2068027336"/>
+        <c:scaling>
+          <c:orientation val="minMax"/>
+        </c:scaling>
+        <c:delete val="0"/>
+        <c:axPos val="b"/>
+        <c:majorTickMark val="out"/>
+        <c:minorTickMark val="none"/>
+        <c:tickLblPos val="nextTo"/>
+        <c:txPr>
+          <a:bodyPr/>
+          <a:lstStyle/>
+          <a:p>
+            <a:pPr>
+              <a:defRPr sz="900"/>
+            </a:pPr>
+          </a:p>
+        </c:txPr>
+        <c:crossAx val="-2113994440"/>
+        <c:crosses val="autoZero"/>
+        <c:auto val="1"/>
+        <c:lblAlgn val="ctr"/>
+        <c:lblOffset val="100"/>
+        <c:noMultiLvlLbl val="0"/>
+      </c:catAx>
+      <c:valAx>
+        <c:axId val="-2113994440"/>
+        <c:scaling/>
+        <c:delete val="0"/>
+        <c:axPos val="l"/>
+        <c:majorGridlines/>
+        <c:majorTickMark val="out"/>
+        <c:minorTickMark val="none"/>
+        <c:tickLblPos val="nextTo"/>
+        <c:crossAx val="-2068027336"/>
+        <c:crosses val="autoZero"/>
+      </c:valAx>
+    </c:plotArea>
+    <c:legend>
+      <c:legendPos val="b"/>
+      <c:overlay val="0"/>
+      <c:txPr>
+        <a:bodyPr/>
+        <a:lstStyle/>
+        <a:p>
+          <a:pPr>
+            <a:defRPr sz="1100"/>
+          </a:pPr>
+        </a:p>
+      </c:txPr>
+    </c:legend>
+    <c:dispBlanksAs val="gap"/>
+  </c:chart>
+  <c:txPr>
+    <a:bodyPr/>
+    <a:lstStyle/>
+    <a:p>
+      <a:pPr>
+        <a:defRPr sz="1800"/>
+      </a:pPr>
+      <a:endParaRPr lang="en-US"/>
+    </a:p>
+  </c:txPr>
+  <c:externalData r:id="rId1">
+    <c:autoUpdate val="0"/>
+  </c:externalData>
+</c:chartSpace>
+</file>
+
+<file path=ppt/charts/chart11.xml><?xml version="1.0" encoding="utf-8"?>
+<c:chartSpace xmlns:c="http://schemas.openxmlformats.org/drawingml/2006/chart" xmlns:a="http://schemas.openxmlformats.org/drawingml/2006/main" xmlns:r="http://schemas.openxmlformats.org/officeDocument/2006/relationships">
+  <c:date1904 val="0"/>
+  <c:chart>
+    <c:title>
+      <c:tx>
+        <c:rich>
+          <a:bodyPr/>
+          <a:lstStyle/>
+          <a:p>
+            <a:r>
               <a:rPr sz="1300"/>
               <a:t>Final weighted moat scores (TBK in red)</a:t>
             </a:r>
@@ -568,7 +830,7 @@
 </c:chartSpace>
 </file>
 
-<file path=ppt/charts/chart11.xml><?xml version="1.0" encoding="utf-8"?>
+<file path=ppt/charts/chart12.xml><?xml version="1.0" encoding="utf-8"?>
 <c:chartSpace xmlns:c="http://schemas.openxmlformats.org/drawingml/2006/chart" xmlns:a="http://schemas.openxmlformats.org/drawingml/2006/main" xmlns:r="http://schemas.openxmlformats.org/officeDocument/2006/relationships">
   <c:date1904 val="0"/>
   <c:roundedCorners val="0"/>
@@ -959,7 +1221,7 @@
 </c:chartSpace>
 </file>
 
-<file path=ppt/charts/chart12.xml><?xml version="1.0" encoding="utf-8"?>
+<file path=ppt/charts/chart13.xml><?xml version="1.0" encoding="utf-8"?>
 <c:chartSpace xmlns:c="http://schemas.openxmlformats.org/drawingml/2006/chart" xmlns:a="http://schemas.openxmlformats.org/drawingml/2006/main" xmlns:r="http://schemas.openxmlformats.org/officeDocument/2006/relationships">
   <c:date1904 val="0"/>
   <c:chart>
@@ -1461,7 +1723,7 @@
 </c:chartSpace>
 </file>
 
-<file path=ppt/charts/chart13.xml><?xml version="1.0" encoding="utf-8"?>
+<file path=ppt/charts/chart14.xml><?xml version="1.0" encoding="utf-8"?>
 <c:chartSpace xmlns:c="http://schemas.openxmlformats.org/drawingml/2006/chart" xmlns:a="http://schemas.openxmlformats.org/drawingml/2006/main" xmlns:r="http://schemas.openxmlformats.org/officeDocument/2006/relationships">
   <c:date1904 val="0"/>
   <c:chart>
@@ -3180,6 +3442,233 @@
           <a:lstStyle/>
           <a:p>
             <a:r>
+              <a:rPr sz="1200"/>
+              <a:t>Haldex segment economics (Sep YTD 2014): OE loses, aftermarket earns it all</a:t>
+            </a:r>
+          </a:p>
+        </c:rich>
+      </c:tx>
+      <c:layout/>
+      <c:overlay val="0"/>
+    </c:title>
+    <c:autoTitleDeleted val="0"/>
+    <c:plotArea>
+      <c:barChart>
+        <c:barDir val="col"/>
+        <c:grouping val="clustered"/>
+        <c:ser>
+          <c:idx val="0"/>
+          <c:order val="0"/>
+          <c:tx>
+            <c:strRef>
+              <c:f>Sheet1!$B$1</c:f>
+              <c:strCache>
+                <c:ptCount val="1"/>
+                <c:pt idx="0">
+                  <c:v>Contribution II %</c:v>
+                </c:pt>
+              </c:strCache>
+            </c:strRef>
+          </c:tx>
+          <c:spPr>
+            <a:solidFill>
+              <a:srgbClr val="1F4E78"/>
+            </a:solidFill>
+          </c:spPr>
+          <c:cat>
+            <c:strRef>
+              <c:f>Sheet1!$A$2:$A$4</c:f>
+              <c:strCache>
+                <c:ptCount val="3"/>
+                <c:pt idx="0">
+                  <c:v>Truck OE</c:v>
+                </c:pt>
+                <c:pt idx="1">
+                  <c:v>Trailer OE</c:v>
+                </c:pt>
+                <c:pt idx="2">
+                  <c:v>Aftermarket</c:v>
+                </c:pt>
+              </c:strCache>
+            </c:strRef>
+          </c:cat>
+          <c:val>
+            <c:numRef>
+              <c:f>Sheet1!$B$2:$B$4</c:f>
+              <c:numCache>
+                <c:formatCode>General</c:formatCode>
+                <c:ptCount val="3"/>
+                <c:pt idx="0">
+                  <c:v>22.4</c:v>
+                </c:pt>
+                <c:pt idx="1">
+                  <c:v>22.2</c:v>
+                </c:pt>
+                <c:pt idx="2">
+                  <c:v>48.6</c:v>
+                </c:pt>
+              </c:numCache>
+            </c:numRef>
+          </c:val>
+        </c:ser>
+        <c:ser>
+          <c:idx val="1"/>
+          <c:order val="1"/>
+          <c:tx>
+            <c:strRef>
+              <c:f>Sheet1!$C$1</c:f>
+              <c:strCache>
+                <c:ptCount val="1"/>
+                <c:pt idx="0">
+                  <c:v>EBIT %</c:v>
+                </c:pt>
+              </c:strCache>
+            </c:strRef>
+          </c:tx>
+          <c:spPr>
+            <a:solidFill>
+              <a:srgbClr val="548235"/>
+            </a:solidFill>
+          </c:spPr>
+          <c:cat>
+            <c:strRef>
+              <c:f>Sheet1!$A$2:$A$4</c:f>
+              <c:strCache>
+                <c:ptCount val="3"/>
+                <c:pt idx="0">
+                  <c:v>Truck OE</c:v>
+                </c:pt>
+                <c:pt idx="1">
+                  <c:v>Trailer OE</c:v>
+                </c:pt>
+                <c:pt idx="2">
+                  <c:v>Aftermarket</c:v>
+                </c:pt>
+              </c:strCache>
+            </c:strRef>
+          </c:cat>
+          <c:val>
+            <c:numRef>
+              <c:f>Sheet1!$C$2:$C$4</c:f>
+              <c:numCache>
+                <c:formatCode>General</c:formatCode>
+                <c:ptCount val="3"/>
+                <c:pt idx="0">
+                  <c:v>-3.9</c:v>
+                </c:pt>
+                <c:pt idx="1">
+                  <c:v>-9.9</c:v>
+                </c:pt>
+                <c:pt idx="2">
+                  <c:v>31.6</c:v>
+                </c:pt>
+              </c:numCache>
+            </c:numRef>
+          </c:val>
+        </c:ser>
+        <c:dLbls>
+          <c:numFmt formatCode="0.0&quot;%&quot;" sourceLinked="0"/>
+          <c:txPr>
+            <a:bodyPr/>
+            <a:lstStyle/>
+            <a:p>
+              <a:pPr>
+                <a:defRPr sz="1000"/>
+              </a:pPr>
+            </a:p>
+          </c:txPr>
+          <c:showLegendKey val="0"/>
+          <c:showVal val="1"/>
+          <c:showCatName val="0"/>
+          <c:showSerName val="0"/>
+          <c:showPercent val="0"/>
+          <c:showBubbleSize val="0"/>
+          <c:showLeaderLines val="1"/>
+        </c:dLbls>
+        <c:axId val="-2068027336"/>
+        <c:axId val="-2113994440"/>
+      </c:barChart>
+      <c:catAx>
+        <c:axId val="-2068027336"/>
+        <c:scaling>
+          <c:orientation val="minMax"/>
+        </c:scaling>
+        <c:delete val="0"/>
+        <c:axPos val="b"/>
+        <c:majorTickMark val="out"/>
+        <c:minorTickMark val="none"/>
+        <c:tickLblPos val="nextTo"/>
+        <c:txPr>
+          <a:bodyPr/>
+          <a:lstStyle/>
+          <a:p>
+            <a:pPr>
+              <a:defRPr sz="1100"/>
+            </a:pPr>
+          </a:p>
+        </c:txPr>
+        <c:crossAx val="-2113994440"/>
+        <c:crosses val="autoZero"/>
+        <c:auto val="1"/>
+        <c:lblAlgn val="ctr"/>
+        <c:lblOffset val="100"/>
+        <c:noMultiLvlLbl val="0"/>
+      </c:catAx>
+      <c:valAx>
+        <c:axId val="-2113994440"/>
+        <c:scaling/>
+        <c:delete val="0"/>
+        <c:axPos val="l"/>
+        <c:majorGridlines/>
+        <c:majorTickMark val="out"/>
+        <c:minorTickMark val="none"/>
+        <c:tickLblPos val="nextTo"/>
+        <c:crossAx val="-2068027336"/>
+        <c:crosses val="autoZero"/>
+      </c:valAx>
+    </c:plotArea>
+    <c:legend>
+      <c:legendPos val="b"/>
+      <c:overlay val="0"/>
+      <c:txPr>
+        <a:bodyPr/>
+        <a:lstStyle/>
+        <a:p>
+          <a:pPr>
+            <a:defRPr sz="1100"/>
+          </a:pPr>
+        </a:p>
+      </c:txPr>
+    </c:legend>
+    <c:dispBlanksAs val="gap"/>
+  </c:chart>
+  <c:txPr>
+    <a:bodyPr/>
+    <a:lstStyle/>
+    <a:p>
+      <a:pPr>
+        <a:defRPr sz="1800"/>
+      </a:pPr>
+      <a:endParaRPr lang="en-US"/>
+    </a:p>
+  </c:txPr>
+  <c:externalData r:id="rId1">
+    <c:autoUpdate val="0"/>
+  </c:externalData>
+</c:chartSpace>
+</file>
+
+<file path=ppt/charts/chart8.xml><?xml version="1.0" encoding="utf-8"?>
+<c:chartSpace xmlns:c="http://schemas.openxmlformats.org/drawingml/2006/chart" xmlns:a="http://schemas.openxmlformats.org/drawingml/2006/main" xmlns:r="http://schemas.openxmlformats.org/officeDocument/2006/relationships">
+  <c:date1904 val="0"/>
+  <c:chart>
+    <c:title>
+      <c:tx>
+        <c:rich>
+          <a:bodyPr/>
+          <a:lstStyle/>
+          <a:p>
+            <a:r>
               <a:rPr sz="1400"/>
               <a:t>OPEX as % of sales: TBK vs peers, by business</a:t>
             </a:r>
@@ -3433,7 +3922,7 @@
 </c:chartSpace>
 </file>
 
-<file path=ppt/charts/chart8.xml><?xml version="1.0" encoding="utf-8"?>
+<file path=ppt/charts/chart9.xml><?xml version="1.0" encoding="utf-8"?>
 <c:chartSpace xmlns:c="http://schemas.openxmlformats.org/drawingml/2006/chart" xmlns:a="http://schemas.openxmlformats.org/drawingml/2006/main" xmlns:r="http://schemas.openxmlformats.org/officeDocument/2006/relationships">
   <c:date1904 val="0"/>
   <c:chart>
@@ -3659,267 +4148,6 @@
           <a:p>
             <a:pPr>
               <a:defRPr sz="1000"/>
-            </a:pPr>
-          </a:p>
-        </c:txPr>
-        <c:crossAx val="-2113994440"/>
-        <c:crosses val="autoZero"/>
-        <c:auto val="1"/>
-        <c:lblAlgn val="ctr"/>
-        <c:lblOffset val="100"/>
-        <c:noMultiLvlLbl val="0"/>
-      </c:catAx>
-      <c:valAx>
-        <c:axId val="-2113994440"/>
-        <c:scaling/>
-        <c:delete val="0"/>
-        <c:axPos val="l"/>
-        <c:majorGridlines/>
-        <c:majorTickMark val="out"/>
-        <c:minorTickMark val="none"/>
-        <c:tickLblPos val="nextTo"/>
-        <c:crossAx val="-2068027336"/>
-        <c:crosses val="autoZero"/>
-      </c:valAx>
-    </c:plotArea>
-    <c:legend>
-      <c:legendPos val="b"/>
-      <c:overlay val="0"/>
-      <c:txPr>
-        <a:bodyPr/>
-        <a:lstStyle/>
-        <a:p>
-          <a:pPr>
-            <a:defRPr sz="1100"/>
-          </a:pPr>
-        </a:p>
-      </c:txPr>
-    </c:legend>
-    <c:dispBlanksAs val="gap"/>
-  </c:chart>
-  <c:txPr>
-    <a:bodyPr/>
-    <a:lstStyle/>
-    <a:p>
-      <a:pPr>
-        <a:defRPr sz="1800"/>
-      </a:pPr>
-      <a:endParaRPr lang="en-US"/>
-    </a:p>
-  </c:txPr>
-  <c:externalData r:id="rId1">
-    <c:autoUpdate val="0"/>
-  </c:externalData>
-</c:chartSpace>
-</file>
-
-<file path=ppt/charts/chart9.xml><?xml version="1.0" encoding="utf-8"?>
-<c:chartSpace xmlns:c="http://schemas.openxmlformats.org/drawingml/2006/chart" xmlns:a="http://schemas.openxmlformats.org/drawingml/2006/main" xmlns:r="http://schemas.openxmlformats.org/officeDocument/2006/relationships">
-  <c:date1904 val="0"/>
-  <c:chart>
-    <c:title>
-      <c:tx>
-        <c:rich>
-          <a:bodyPr/>
-          <a:lstStyle/>
-          <a:p>
-            <a:r>
-              <a:rPr sz="1400"/>
-              <a:t>R&amp;D spend plan (US$M per year)</a:t>
-            </a:r>
-          </a:p>
-        </c:rich>
-      </c:tx>
-      <c:layout/>
-      <c:overlay val="0"/>
-    </c:title>
-    <c:autoTitleDeleted val="0"/>
-    <c:plotArea>
-      <c:barChart>
-        <c:barDir val="col"/>
-        <c:grouping val="stacked"/>
-        <c:ser>
-          <c:idx val="0"/>
-          <c:order val="0"/>
-          <c:tx>
-            <c:strRef>
-              <c:f>Sheet1!$B$1</c:f>
-              <c:strCache>
-                <c:ptCount val="1"/>
-                <c:pt idx="0">
-                  <c:v>Parity run-rate (~4.5-5% of sales)</c:v>
-                </c:pt>
-              </c:strCache>
-            </c:strRef>
-          </c:tx>
-          <c:spPr>
-            <a:solidFill>
-              <a:srgbClr val="1F4E78"/>
-            </a:solidFill>
-          </c:spPr>
-          <c:cat>
-            <c:strRef>
-              <c:f>Sheet1!$A$2:$A$8</c:f>
-              <c:strCache>
-                <c:ptCount val="7"/>
-                <c:pt idx="0">
-                  <c:v>FY26
-actual est.</c:v>
-                </c:pt>
-                <c:pt idx="1">
-                  <c:v>FY27</c:v>
-                </c:pt>
-                <c:pt idx="2">
-                  <c:v>FY28</c:v>
-                </c:pt>
-                <c:pt idx="3">
-                  <c:v>FY29</c:v>
-                </c:pt>
-                <c:pt idx="4">
-                  <c:v>FY30</c:v>
-                </c:pt>
-                <c:pt idx="5">
-                  <c:v>FY31</c:v>
-                </c:pt>
-                <c:pt idx="6">
-                  <c:v>Steady state
-FY32+</c:v>
-                </c:pt>
-              </c:strCache>
-            </c:strRef>
-          </c:cat>
-          <c:val>
-            <c:numRef>
-              <c:f>Sheet1!$B$2:$B$8</c:f>
-              <c:numCache>
-                <c:formatCode>General</c:formatCode>
-                <c:ptCount val="7"/>
-                <c:pt idx="0">
-                  <c:v>7.8</c:v>
-                </c:pt>
-                <c:pt idx="1">
-                  <c:v>17</c:v>
-                </c:pt>
-                <c:pt idx="2">
-                  <c:v>17</c:v>
-                </c:pt>
-                <c:pt idx="3">
-                  <c:v>17</c:v>
-                </c:pt>
-                <c:pt idx="4">
-                  <c:v>17</c:v>
-                </c:pt>
-                <c:pt idx="5">
-                  <c:v>17</c:v>
-                </c:pt>
-                <c:pt idx="6">
-                  <c:v>17</c:v>
-                </c:pt>
-              </c:numCache>
-            </c:numRef>
-          </c:val>
-        </c:ser>
-        <c:ser>
-          <c:idx val="1"/>
-          <c:order val="1"/>
-          <c:tx>
-            <c:strRef>
-              <c:f>Sheet1!$C$1</c:f>
-              <c:strCache>
-                <c:ptCount val="1"/>
-                <c:pt idx="0">
-                  <c:v>Deficit repayment (catch-up)</c:v>
-                </c:pt>
-              </c:strCache>
-            </c:strRef>
-          </c:tx>
-          <c:spPr>
-            <a:solidFill>
-              <a:srgbClr val="548235"/>
-            </a:solidFill>
-          </c:spPr>
-          <c:cat>
-            <c:strRef>
-              <c:f>Sheet1!$A$2:$A$8</c:f>
-              <c:strCache>
-                <c:ptCount val="7"/>
-                <c:pt idx="0">
-                  <c:v>FY26
-actual est.</c:v>
-                </c:pt>
-                <c:pt idx="1">
-                  <c:v>FY27</c:v>
-                </c:pt>
-                <c:pt idx="2">
-                  <c:v>FY28</c:v>
-                </c:pt>
-                <c:pt idx="3">
-                  <c:v>FY29</c:v>
-                </c:pt>
-                <c:pt idx="4">
-                  <c:v>FY30</c:v>
-                </c:pt>
-                <c:pt idx="5">
-                  <c:v>FY31</c:v>
-                </c:pt>
-                <c:pt idx="6">
-                  <c:v>Steady state
-FY32+</c:v>
-                </c:pt>
-              </c:strCache>
-            </c:strRef>
-          </c:cat>
-          <c:val>
-            <c:numRef>
-              <c:f>Sheet1!$C$2:$C$8</c:f>
-              <c:numCache>
-                <c:formatCode>General</c:formatCode>
-                <c:ptCount val="7"/>
-                <c:pt idx="0">
-                  <c:v>0</c:v>
-                </c:pt>
-                <c:pt idx="1">
-                  <c:v>10</c:v>
-                </c:pt>
-                <c:pt idx="2">
-                  <c:v>10</c:v>
-                </c:pt>
-                <c:pt idx="3">
-                  <c:v>10</c:v>
-                </c:pt>
-                <c:pt idx="4">
-                  <c:v>10</c:v>
-                </c:pt>
-                <c:pt idx="5">
-                  <c:v>10</c:v>
-                </c:pt>
-                <c:pt idx="6">
-                  <c:v>0</c:v>
-                </c:pt>
-              </c:numCache>
-            </c:numRef>
-          </c:val>
-        </c:ser>
-        <c:overlap val="100"/>
-        <c:axId val="-2068027336"/>
-        <c:axId val="-2113994440"/>
-      </c:barChart>
-      <c:catAx>
-        <c:axId val="-2068027336"/>
-        <c:scaling>
-          <c:orientation val="minMax"/>
-        </c:scaling>
-        <c:delete val="0"/>
-        <c:axPos val="b"/>
-        <c:majorTickMark val="out"/>
-        <c:minorTickMark val="none"/>
-        <c:tickLblPos val="nextTo"/>
-        <c:txPr>
-          <a:bodyPr/>
-          <a:lstStyle/>
-          <a:p>
-            <a:pPr>
-              <a:defRPr sz="900"/>
             </a:pPr>
           </a:p>
         </c:txPr>
@@ -8125,6 +8353,315 @@
                   <a:srgbClr val="FFFFFF"/>
                 </a:solidFill>
               </a:rPr>
+              <a:t>The Haldex lesson: aftermarket is the profit pool — and subscale OE discs lose money</a:t>
+            </a:r>
+          </a:p>
+        </p:txBody>
+      </p:sp>
+      <p:sp>
+        <p:nvSpPr>
+          <p:cNvPr id="3" name="TextBox 2"/>
+          <p:cNvSpPr txBox="1"/>
+          <p:nvPr/>
+        </p:nvSpPr>
+        <p:spPr>
+          <a:xfrm>
+            <a:off x="457200" y="914400"/>
+            <a:ext cx="11247120" cy="365760"/>
+          </a:xfrm>
+          <a:prstGeom prst="rect">
+            <a:avLst/>
+          </a:prstGeom>
+          <a:noFill/>
+        </p:spPr>
+        <p:txBody>
+          <a:bodyPr wrap="square">
+            <a:spAutoFit/>
+          </a:bodyPr>
+          <a:lstStyle/>
+          <a:p>
+            <a:pPr algn="l"/>
+            <a:r>
+              <a:rPr sz="1200" b="0">
+                <a:solidFill>
+                  <a:srgbClr val="595959"/>
+                </a:solidFill>
+              </a:rPr>
+              <a:t>Haldex internal analysis (Dec 2019 file): segment P&amp;L Sep YTD 2014 + 2009-2019 history, MSEK — the only Western peer with internal segment economics in this study</a:t>
+            </a:r>
+          </a:p>
+        </p:txBody>
+      </p:sp>
+      <p:graphicFrame>
+        <p:nvGraphicFramePr>
+          <p:cNvPr id="4" name="Chart 3"/>
+          <p:cNvGraphicFramePr>
+            <a:graphicFrameLocks noGrp="1"/>
+          </p:cNvGraphicFramePr>
+          <p:nvPr/>
+        </p:nvGraphicFramePr>
+        <p:xfrm>
+          <a:off x="457200" y="1463040"/>
+          <a:ext cx="5852160" cy="4206240"/>
+        </p:xfrm>
+        <a:graphic>
+          <a:graphicData uri="http://schemas.openxmlformats.org/drawingml/2006/chart">
+            <c:chart xmlns:c="http://schemas.openxmlformats.org/drawingml/2006/chart" r:id="rId2"/>
+          </a:graphicData>
+        </a:graphic>
+      </p:graphicFrame>
+      <p:sp>
+        <p:nvSpPr>
+          <p:cNvPr id="5" name="TextBox 4"/>
+          <p:cNvSpPr txBox="1"/>
+          <p:nvPr/>
+        </p:nvSpPr>
+        <p:spPr>
+          <a:xfrm>
+            <a:off x="6583680" y="1463040"/>
+            <a:ext cx="5166360" cy="2240280"/>
+          </a:xfrm>
+          <a:prstGeom prst="rect">
+            <a:avLst/>
+          </a:prstGeom>
+          <a:solidFill>
+            <a:srgbClr val="F2F2F2"/>
+          </a:solidFill>
+          <a:ln w="15875">
+            <a:solidFill>
+              <a:srgbClr val="1F4E78"/>
+            </a:solidFill>
+          </a:ln>
+        </p:spPr>
+        <p:txBody>
+          <a:bodyPr wrap="square" lIns="137160" rIns="137160" tIns="109728">
+            <a:spAutoFit/>
+          </a:bodyPr>
+          <a:lstStyle/>
+          <a:p>
+            <a:r>
+              <a:rPr sz="1500" b="1">
+                <a:solidFill>
+                  <a:srgbClr val="1F4E78"/>
+                </a:solidFill>
+              </a:rPr>
+              <a:t>Lesson 1: TBK's ~20-23% OE contribution is the industry condition — aftermarket is the cure</a:t>
+            </a:r>
+          </a:p>
+          <a:p>
+            <a:pPr>
+              <a:spcBef>
+                <a:spcPts val="400"/>
+              </a:spcBef>
+            </a:pPr>
+            <a:r>
+              <a:rPr sz="1100">
+                <a:solidFill>
+                  <a:srgbClr val="202020"/>
+                </a:solidFill>
+              </a:rPr>
+              <a:t>Haldex OE truck/trailer: CII 22-32% every year 2009-19, EBIT NEGATIVE (-4 to -12%); Europe truck EBIT hit -32%</a:t>
+            </a:r>
+          </a:p>
+          <a:p>
+            <a:pPr>
+              <a:spcBef>
+                <a:spcPts val="400"/>
+              </a:spcBef>
+            </a:pPr>
+            <a:r>
+              <a:rPr sz="1100">
+                <a:solidFill>
+                  <a:srgbClr val="202020"/>
+                </a:solidFill>
+              </a:rPr>
+              <a:t>Aftermarket: CII 42-50% every year, EBIT +20-32% — it generated ALL of Haldex's profit</a:t>
+            </a:r>
+          </a:p>
+          <a:p>
+            <a:pPr>
+              <a:spcBef>
+                <a:spcPts val="400"/>
+              </a:spcBef>
+            </a:pPr>
+            <a:r>
+              <a:rPr sz="1100">
+                <a:solidFill>
+                  <a:srgbClr val="202020"/>
+                </a:solidFill>
+              </a:rPr>
+              <a:t>TBK's aftermarket (TBK Sales, 30.2% CM) is only ~10% of parent sales vs Haldex's 42% — the proven fastest route to group margin</a:t>
+            </a:r>
+          </a:p>
+        </p:txBody>
+      </p:sp>
+      <p:sp>
+        <p:nvSpPr>
+          <p:cNvPr id="6" name="TextBox 5"/>
+          <p:cNvSpPr txBox="1"/>
+          <p:nvPr/>
+        </p:nvSpPr>
+        <p:spPr>
+          <a:xfrm>
+            <a:off x="6583680" y="3840480"/>
+            <a:ext cx="5166360" cy="2240280"/>
+          </a:xfrm>
+          <a:prstGeom prst="rect">
+            <a:avLst/>
+          </a:prstGeom>
+          <a:solidFill>
+            <a:srgbClr val="F2F2F2"/>
+          </a:solidFill>
+          <a:ln w="15875">
+            <a:solidFill>
+              <a:srgbClr val="7F1D1D"/>
+            </a:solidFill>
+          </a:ln>
+        </p:spPr>
+        <p:txBody>
+          <a:bodyPr wrap="square" lIns="137160" rIns="137160" tIns="109728">
+            <a:spAutoFit/>
+          </a:bodyPr>
+          <a:lstStyle/>
+          <a:p>
+            <a:r>
+              <a:rPr sz="1500" b="1">
+                <a:solidFill>
+                  <a:srgbClr val="7F1D1D"/>
+                </a:solidFill>
+              </a:rPr>
+              <a:t>Lesson 2: the subscale OE disc warning</a:t>
+            </a:r>
+          </a:p>
+          <a:p>
+            <a:pPr>
+              <a:spcBef>
+                <a:spcPts val="400"/>
+              </a:spcBef>
+            </a:pPr>
+            <a:r>
+              <a:rPr sz="1100">
+                <a:solidFill>
+                  <a:srgbClr val="202020"/>
+                </a:solidFill>
+              </a:rPr>
+              <a:t>Haldex disc brakes 2013-14: CII just 12.6% -&gt; 15.3%, EBIT -10.4% -&gt; -3.9% — the #3 player fighting Knorr/Meritor for OE disc sockets LOST MONEY on every unit</a:t>
+            </a:r>
+          </a:p>
+          <a:p>
+            <a:pPr>
+              <a:spcBef>
+                <a:spcPts val="400"/>
+              </a:spcBef>
+            </a:pPr>
+            <a:r>
+              <a:rPr sz="1100">
+                <a:solidFill>
+                  <a:srgbClr val="202020"/>
+                </a:solidFill>
+              </a:rPr>
+              <a:t>Caution: TBK's 68.7% D/BRAKE contribution is small-batch/replacement pricing, not series-OE economics</a:t>
+            </a:r>
+          </a:p>
+          <a:p>
+            <a:pPr>
+              <a:spcBef>
+                <a:spcPts val="400"/>
+              </a:spcBef>
+            </a:pPr>
+            <a:r>
+              <a:rPr sz="1100">
+                <a:solidFill>
+                  <a:srgbClr val="202020"/>
+                </a:solidFill>
+              </a:rPr>
+              <a:t>ADB strategy must be niche/aftermarket-priced and partnered (Brakes India) — Haldex's P&amp;L is what a frontal OE assault looks like</a:t>
+            </a:r>
+          </a:p>
+        </p:txBody>
+      </p:sp>
+      <p:sp>
+        <p:nvSpPr>
+          <p:cNvPr id="7" name="TextBox 6"/>
+          <p:cNvSpPr txBox="1"/>
+          <p:nvPr/>
+        </p:nvSpPr>
+        <p:spPr>
+          <a:xfrm>
+            <a:off x="457200" y="5897880"/>
+            <a:ext cx="11247120" cy="822960"/>
+          </a:xfrm>
+          <a:prstGeom prst="rect">
+            <a:avLst/>
+          </a:prstGeom>
+          <a:noFill/>
+        </p:spPr>
+        <p:txBody>
+          <a:bodyPr wrap="square">
+            <a:spAutoFit/>
+          </a:bodyPr>
+          <a:lstStyle/>
+          <a:p>
+            <a:pPr algn="l"/>
+            <a:r>
+              <a:rPr sz="1150" b="0">
+                <a:solidFill>
+                  <a:srgbClr val="595959"/>
+                </a:solidFill>
+              </a:rPr>
+              <a:t>Haldex product detail confirms the pattern: niche-dominant and electronics-adjacent products priced well (air treatment 53.5%, suspension 46.0%, ABS 42.7%, brake adjusters 41.2% CII) while contested systems (EBS 31.7%, EBIT +1.6%) and commodity friction (22.8%) did not. Haldex's 25.5-28.5% gross margin = ~22-30% OE + aftermarket overlay — the same arithmetic TBK needs.</a:t>
+            </a:r>
+          </a:p>
+        </p:txBody>
+      </p:sp>
+    </p:spTree>
+  </p:cSld>
+  <p:clrMapOvr>
+    <a:masterClrMapping/>
+  </p:clrMapOvr>
+</p:sld>
+</file>
+
+<file path=ppt/slides/slide14.xml><?xml version="1.0" encoding="utf-8"?>
+<p:sld xmlns:a="http://schemas.openxmlformats.org/drawingml/2006/main" xmlns:p="http://schemas.openxmlformats.org/presentationml/2006/main" xmlns:r="http://schemas.openxmlformats.org/officeDocument/2006/relationships">
+  <p:cSld>
+    <p:spTree>
+      <p:nvGrpSpPr>
+        <p:cNvPr id="1" name=""/>
+        <p:cNvGrpSpPr/>
+        <p:nvPr/>
+      </p:nvGrpSpPr>
+      <p:grpSpPr/>
+      <p:sp>
+        <p:nvSpPr>
+          <p:cNvPr id="2" name="TextBox 1"/>
+          <p:cNvSpPr txBox="1"/>
+          <p:nvPr/>
+        </p:nvSpPr>
+        <p:spPr>
+          <a:xfrm>
+            <a:off x="0" y="0"/>
+            <a:ext cx="12191695" cy="868680"/>
+          </a:xfrm>
+          <a:prstGeom prst="rect">
+            <a:avLst/>
+          </a:prstGeom>
+          <a:solidFill>
+            <a:srgbClr val="1F4E78"/>
+          </a:solidFill>
+        </p:spPr>
+        <p:txBody>
+          <a:bodyPr wrap="square" lIns="457200" tIns="164592">
+            <a:spAutoFit/>
+          </a:bodyPr>
+          <a:lstStyle/>
+          <a:p>
+            <a:r>
+              <a:rPr sz="2600" b="1">
+                <a:solidFill>
+                  <a:srgbClr val="FFFFFF"/>
+                </a:solidFill>
+              </a:rPr>
               <a:t>Why TBK looks lean on OPEX: its factory costs hide in COGS</a:t>
             </a:r>
           </a:p>
@@ -8484,7 +9021,7 @@
 </p:sld>
 </file>
 
-<file path=ppt/slides/slide14.xml><?xml version="1.0" encoding="utf-8"?>
+<file path=ppt/slides/slide15.xml><?xml version="1.0" encoding="utf-8"?>
 <p:sld xmlns:a="http://schemas.openxmlformats.org/drawingml/2006/main" xmlns:p="http://schemas.openxmlformats.org/presentationml/2006/main" xmlns:r="http://schemas.openxmlformats.org/officeDocument/2006/relationships">
   <p:cSld>
     <p:spTree>
@@ -8804,7 +9341,7 @@
 </p:sld>
 </file>
 
-<file path=ppt/slides/slide15.xml><?xml version="1.0" encoding="utf-8"?>
+<file path=ppt/slides/slide16.xml><?xml version="1.0" encoding="utf-8"?>
 <p:sld xmlns:a="http://schemas.openxmlformats.org/drawingml/2006/main" xmlns:p="http://schemas.openxmlformats.org/presentationml/2006/main" xmlns:r="http://schemas.openxmlformats.org/officeDocument/2006/relationships">
   <p:cSld>
     <p:spTree>
@@ -9192,7 +9729,7 @@
 </p:sld>
 </file>
 
-<file path=ppt/slides/slide16.xml><?xml version="1.0" encoding="utf-8"?>
+<file path=ppt/slides/slide17.xml><?xml version="1.0" encoding="utf-8"?>
 <p:sld xmlns:a="http://schemas.openxmlformats.org/drawingml/2006/main" xmlns:p="http://schemas.openxmlformats.org/presentationml/2006/main" xmlns:r="http://schemas.openxmlformats.org/officeDocument/2006/relationships">
   <p:cSld>
     <p:spTree>
@@ -9656,438 +10193,6 @@
                 </a:solidFill>
               </a:rPr>
               <a:t>Strategic point: TBK's quality reputation is held entirely inside the keiretsu — like its market share, it cannot be sold to new customers. Making quality externally legible (awards, certifications, published data) is a cheap, necessary complement to the R&amp;D program.</a:t>
-            </a:r>
-          </a:p>
-        </p:txBody>
-      </p:sp>
-    </p:spTree>
-  </p:cSld>
-  <p:clrMapOvr>
-    <a:masterClrMapping/>
-  </p:clrMapOvr>
-</p:sld>
-</file>
-
-<file path=ppt/slides/slide17.xml><?xml version="1.0" encoding="utf-8"?>
-<p:sld xmlns:a="http://schemas.openxmlformats.org/drawingml/2006/main" xmlns:p="http://schemas.openxmlformats.org/presentationml/2006/main" xmlns:r="http://schemas.openxmlformats.org/officeDocument/2006/relationships">
-  <p:cSld>
-    <p:spTree>
-      <p:nvGrpSpPr>
-        <p:cNvPr id="1" name=""/>
-        <p:cNvGrpSpPr/>
-        <p:nvPr/>
-      </p:nvGrpSpPr>
-      <p:grpSpPr/>
-      <p:sp>
-        <p:nvSpPr>
-          <p:cNvPr id="2" name="TextBox 1"/>
-          <p:cNvSpPr txBox="1"/>
-          <p:nvPr/>
-        </p:nvSpPr>
-        <p:spPr>
-          <a:xfrm>
-            <a:off x="0" y="0"/>
-            <a:ext cx="12191695" cy="868680"/>
-          </a:xfrm>
-          <a:prstGeom prst="rect">
-            <a:avLst/>
-          </a:prstGeom>
-          <a:solidFill>
-            <a:srgbClr val="1F4E78"/>
-          </a:solidFill>
-        </p:spPr>
-        <p:txBody>
-          <a:bodyPr wrap="square" lIns="457200" tIns="164592">
-            <a:spAutoFit/>
-          </a:bodyPr>
-          <a:lstStyle/>
-          <a:p>
-            <a:r>
-              <a:rPr sz="2600" b="1">
-                <a:solidFill>
-                  <a:srgbClr val="FFFFFF"/>
-                </a:solidFill>
-              </a:rPr>
-              <a:t>Product evaluation II: innovation output</a:t>
-            </a:r>
-          </a:p>
-        </p:txBody>
-      </p:sp>
-      <p:sp>
-        <p:nvSpPr>
-          <p:cNvPr id="3" name="TextBox 2"/>
-          <p:cNvSpPr txBox="1"/>
-          <p:nvPr/>
-        </p:nvSpPr>
-        <p:spPr>
-          <a:xfrm>
-            <a:off x="457200" y="914400"/>
-            <a:ext cx="11247120" cy="365760"/>
-          </a:xfrm>
-          <a:prstGeom prst="rect">
-            <a:avLst/>
-          </a:prstGeom>
-          <a:noFill/>
-        </p:spPr>
-        <p:txBody>
-          <a:bodyPr wrap="square">
-            <a:spAutoFit/>
-          </a:bodyPr>
-          <a:lstStyle/>
-          <a:p>
-            <a:pPr algn="l"/>
-            <a:r>
-              <a:rPr sz="1200" b="0">
-                <a:solidFill>
-                  <a:srgbClr val="595959"/>
-                </a:solidFill>
-              </a:rPr>
-              <a:t>Patents, documented product firsts, and technical-society awards — the externally visible output of R&amp;D</a:t>
-            </a:r>
-          </a:p>
-        </p:txBody>
-      </p:sp>
-      <p:sp>
-        <p:nvSpPr>
-          <p:cNvPr id="4" name="TextBox 3"/>
-          <p:cNvSpPr txBox="1"/>
-          <p:nvPr/>
-        </p:nvSpPr>
-        <p:spPr>
-          <a:xfrm>
-            <a:off x="457200" y="1417320"/>
-            <a:ext cx="5577840" cy="2286000"/>
-          </a:xfrm>
-          <a:prstGeom prst="rect">
-            <a:avLst/>
-          </a:prstGeom>
-          <a:solidFill>
-            <a:srgbClr val="F2F2F2"/>
-          </a:solidFill>
-          <a:ln w="15875">
-            <a:solidFill>
-              <a:srgbClr val="1F4E78"/>
-            </a:solidFill>
-          </a:ln>
-        </p:spPr>
-        <p:txBody>
-          <a:bodyPr wrap="square" lIns="137160" rIns="137160" tIns="109728">
-            <a:spAutoFit/>
-          </a:bodyPr>
-          <a:lstStyle/>
-          <a:p>
-            <a:r>
-              <a:rPr sz="1500" b="1">
-                <a:solidFill>
-                  <a:srgbClr val="1F4E78"/>
-                </a:solidFill>
-              </a:rPr>
-              <a:t>The patent gap (independent registries)</a:t>
-            </a:r>
-          </a:p>
-          <a:p>
-            <a:pPr>
-              <a:spcBef>
-                <a:spcPts val="400"/>
-              </a:spcBef>
-            </a:pPr>
-            <a:r>
-              <a:rPr sz="1100">
-                <a:solidFill>
-                  <a:srgbClr val="202020"/>
-                </a:solidFill>
-              </a:rPr>
-              <a:t>Knorr-Bremse: ~2,900 patent families / 10,900+ patents (~7,500 in the truck division)</a:t>
-            </a:r>
-          </a:p>
-          <a:p>
-            <a:pPr>
-              <a:spcBef>
-                <a:spcPts val="400"/>
-              </a:spcBef>
-            </a:pPr>
-            <a:r>
-              <a:rPr sz="1100">
-                <a:solidFill>
-                  <a:srgbClr val="202020"/>
-                </a:solidFill>
-              </a:rPr>
-              <a:t>Aisin: ~680 JP applications/yr; Clarivate Top-100 Global Innovator 7 consecutive years</a:t>
-            </a:r>
-          </a:p>
-          <a:p>
-            <a:pPr>
-              <a:spcBef>
-                <a:spcPts val="400"/>
-              </a:spcBef>
-            </a:pPr>
-            <a:r>
-              <a:rPr sz="1100">
-                <a:solidFill>
-                  <a:srgbClr val="202020"/>
-                </a:solidFill>
-              </a:rPr>
-              <a:t>Akebono: ~321 US-registered patents</a:t>
-            </a:r>
-          </a:p>
-          <a:p>
-            <a:pPr>
-              <a:spcBef>
-                <a:spcPts val="400"/>
-              </a:spcBef>
-            </a:pPr>
-            <a:r>
-              <a:rPr sz="1100">
-                <a:solidFill>
-                  <a:srgbClr val="202020"/>
-                </a:solidFill>
-              </a:rPr>
-              <a:t>Mikuni: e-oil-pump fault-detection patents — its BEV-truck win is engineering-backed</a:t>
-            </a:r>
-          </a:p>
-          <a:p>
-            <a:pPr>
-              <a:spcBef>
-                <a:spcPts val="400"/>
-              </a:spcBef>
-            </a:pPr>
-            <a:r>
-              <a:rPr sz="1100">
-                <a:solidFill>
-                  <a:srgbClr val="202020"/>
-                </a:solidFill>
-              </a:rPr>
-              <a:t>TBK: 2-3 patent GRANTS PER YEAR — two to three orders of magnitude below the leaders.</a:t>
-            </a:r>
-          </a:p>
-          <a:p>
-            <a:pPr>
-              <a:spcBef>
-                <a:spcPts val="400"/>
-              </a:spcBef>
-            </a:pPr>
-            <a:r>
-              <a:rPr sz="1100">
-                <a:solidFill>
-                  <a:srgbClr val="202020"/>
-                </a:solidFill>
-              </a:rPr>
-              <a:t>Independently confirms the capitalized-R&amp;D finding ($43M vs $2.6-5.6bn) from a different data source</a:t>
-            </a:r>
-          </a:p>
-        </p:txBody>
-      </p:sp>
-      <p:sp>
-        <p:nvSpPr>
-          <p:cNvPr id="5" name="TextBox 4"/>
-          <p:cNvSpPr txBox="1"/>
-          <p:nvPr/>
-        </p:nvSpPr>
-        <p:spPr>
-          <a:xfrm>
-            <a:off x="6217920" y="1417320"/>
-            <a:ext cx="5532120" cy="2286000"/>
-          </a:xfrm>
-          <a:prstGeom prst="rect">
-            <a:avLst/>
-          </a:prstGeom>
-          <a:solidFill>
-            <a:srgbClr val="F2F2F2"/>
-          </a:solidFill>
-          <a:ln w="15875">
-            <a:solidFill>
-              <a:srgbClr val="548235"/>
-            </a:solidFill>
-          </a:ln>
-        </p:spPr>
-        <p:txBody>
-          <a:bodyPr wrap="square" lIns="137160" rIns="137160" tIns="109728">
-            <a:spAutoFit/>
-          </a:bodyPr>
-          <a:lstStyle/>
-          <a:p>
-            <a:r>
-              <a:rPr sz="1500" b="1">
-                <a:solidFill>
-                  <a:srgbClr val="548235"/>
-                </a:solidFill>
-              </a:rPr>
-              <a:t>Documented product firsts</a:t>
-            </a:r>
-          </a:p>
-          <a:p>
-            <a:pPr>
-              <a:spcBef>
-                <a:spcPts val="400"/>
-              </a:spcBef>
-            </a:pPr>
-            <a:r>
-              <a:rPr sz="1100">
-                <a:solidFill>
-                  <a:srgbClr val="202020"/>
-                </a:solidFill>
-              </a:rPr>
-              <a:t>Knorr: EBS 1989; series air disc brake 1992; Actros/Scania volume 1996</a:t>
-            </a:r>
-          </a:p>
-          <a:p>
-            <a:pPr>
-              <a:spcBef>
-                <a:spcPts val="400"/>
-              </a:spcBef>
-            </a:pPr>
-            <a:r>
-              <a:rPr sz="1100">
-                <a:solidFill>
-                  <a:srgbClr val="202020"/>
-                </a:solidFill>
-              </a:rPr>
-              <a:t>Bendix ADB22X: 2005, now ~85% of NA air-disc wheel ends</a:t>
-            </a:r>
-          </a:p>
-          <a:p>
-            <a:pPr>
-              <a:spcBef>
-                <a:spcPts val="400"/>
-              </a:spcBef>
-            </a:pPr>
-            <a:r>
-              <a:rPr sz="1100">
-                <a:solidFill>
-                  <a:srgbClr val="202020"/>
-                </a:solidFill>
-              </a:rPr>
-              <a:t>UD Quon 2017: first all-disc Japanese heavy truck</a:t>
-            </a:r>
-          </a:p>
-          <a:p>
-            <a:pPr>
-              <a:spcBef>
-                <a:spcPts val="400"/>
-              </a:spcBef>
-            </a:pPr>
-            <a:r>
-              <a:rPr sz="1100">
-                <a:solidFill>
-                  <a:srgbClr val="202020"/>
-                </a:solidFill>
-              </a:rPr>
-              <a:t>Mikuni 2022: e-oil pump in production for a domestic small BEV truck</a:t>
-            </a:r>
-          </a:p>
-          <a:p>
-            <a:pPr>
-              <a:spcBef>
-                <a:spcPts val="400"/>
-              </a:spcBef>
-            </a:pPr>
-            <a:r>
-              <a:rPr sz="1100">
-                <a:solidFill>
-                  <a:srgbClr val="202020"/>
-                </a:solidFill>
-              </a:rPr>
-              <a:t>Akebono FY2023: JSME Technology Award — world-first electric parking brake unit for medium/light trucks (innovating through distress)</a:t>
-            </a:r>
-          </a:p>
-          <a:p>
-            <a:pPr>
-              <a:spcBef>
-                <a:spcPts val="400"/>
-              </a:spcBef>
-            </a:pPr>
-            <a:r>
-              <a:rPr sz="1100">
-                <a:solidFill>
-                  <a:srgbClr val="202020"/>
-                </a:solidFill>
-              </a:rPr>
-              <a:t>TBK: retarders since the 1960s; 19.5" ADB exhibited (year unconfirmed: 2019 vs 2022 sources conflict); e-pumps/TCU in development</a:t>
-            </a:r>
-          </a:p>
-        </p:txBody>
-      </p:sp>
-      <p:sp>
-        <p:nvSpPr>
-          <p:cNvPr id="6" name="TextBox 5"/>
-          <p:cNvSpPr txBox="1"/>
-          <p:nvPr/>
-        </p:nvSpPr>
-        <p:spPr>
-          <a:xfrm>
-            <a:off x="457200" y="3840480"/>
-            <a:ext cx="11292840" cy="1737360"/>
-          </a:xfrm>
-          <a:prstGeom prst="rect">
-            <a:avLst/>
-          </a:prstGeom>
-          <a:solidFill>
-            <a:srgbClr val="F2F2F2"/>
-          </a:solidFill>
-          <a:ln w="15875">
-            <a:solidFill>
-              <a:srgbClr val="1F4E78"/>
-            </a:solidFill>
-          </a:ln>
-        </p:spPr>
-        <p:txBody>
-          <a:bodyPr wrap="square" lIns="137160" rIns="137160" tIns="109728">
-            <a:spAutoFit/>
-          </a:bodyPr>
-          <a:lstStyle/>
-          <a:p>
-            <a:r>
-              <a:rPr sz="1500" b="1">
-                <a:solidFill>
-                  <a:srgbClr val="1F4E78"/>
-                </a:solidFill>
-              </a:rPr>
-              <a:t>The pattern — and TBK's fix</a:t>
-            </a:r>
-          </a:p>
-          <a:p>
-            <a:pPr>
-              <a:spcBef>
-                <a:spcPts val="400"/>
-              </a:spcBef>
-            </a:pPr>
-            <a:r>
-              <a:rPr sz="1150">
-                <a:solidFill>
-                  <a:srgbClr val="202020"/>
-                </a:solidFill>
-              </a:rPr>
-              <a:t>Innovation output tracks the moat and margin rankings almost perfectly: the companies with validated quality (Knorr, Cummins) also hold the patent fortresses and the product firsts; the distressed (Akebono) still out-publish TBK; even the similarly-sized peer (Mikuni) protects its e-pump work with patents.</a:t>
-            </a:r>
-          </a:p>
-          <a:p>
-            <a:pPr>
-              <a:spcBef>
-                <a:spcPts val="400"/>
-              </a:spcBef>
-            </a:pPr>
-            <a:r>
-              <a:rPr sz="1150">
-                <a:solidFill>
-                  <a:srgbClr val="202020"/>
-                </a:solidFill>
-              </a:rPr>
-              <a:t>TBK's innovation is real but INVISIBLE: 75 years of retarder/brake/pump engineering, an ADB prototype, e-pumps and a thermal control unit in development — none of it patented at scale, published at JSAE, or externally awarded. Invisible innovation cannot win sockets outside the keiretsu.</a:t>
-            </a:r>
-          </a:p>
-          <a:p>
-            <a:pPr>
-              <a:spcBef>
-                <a:spcPts val="400"/>
-              </a:spcBef>
-            </a:pPr>
-            <a:r>
-              <a:rPr sz="1150">
-                <a:solidFill>
-                  <a:srgbClr val="202020"/>
-                </a:solidFill>
-              </a:rPr>
-              <a:t>Fix costs little: patent the e-pump/TCU and ADB work (Mikuni shows the value), publish, pursue external validation — a required complement to the R&amp;D spend itself.</a:t>
             </a:r>
           </a:p>
         </p:txBody>
@@ -10140,6 +10245,438 @@
                   <a:srgbClr val="FFFFFF"/>
                 </a:solidFill>
               </a:rPr>
+              <a:t>Product evaluation II: innovation output</a:t>
+            </a:r>
+          </a:p>
+        </p:txBody>
+      </p:sp>
+      <p:sp>
+        <p:nvSpPr>
+          <p:cNvPr id="3" name="TextBox 2"/>
+          <p:cNvSpPr txBox="1"/>
+          <p:nvPr/>
+        </p:nvSpPr>
+        <p:spPr>
+          <a:xfrm>
+            <a:off x="457200" y="914400"/>
+            <a:ext cx="11247120" cy="365760"/>
+          </a:xfrm>
+          <a:prstGeom prst="rect">
+            <a:avLst/>
+          </a:prstGeom>
+          <a:noFill/>
+        </p:spPr>
+        <p:txBody>
+          <a:bodyPr wrap="square">
+            <a:spAutoFit/>
+          </a:bodyPr>
+          <a:lstStyle/>
+          <a:p>
+            <a:pPr algn="l"/>
+            <a:r>
+              <a:rPr sz="1200" b="0">
+                <a:solidFill>
+                  <a:srgbClr val="595959"/>
+                </a:solidFill>
+              </a:rPr>
+              <a:t>Patents, documented product firsts, and technical-society awards — the externally visible output of R&amp;D</a:t>
+            </a:r>
+          </a:p>
+        </p:txBody>
+      </p:sp>
+      <p:sp>
+        <p:nvSpPr>
+          <p:cNvPr id="4" name="TextBox 3"/>
+          <p:cNvSpPr txBox="1"/>
+          <p:nvPr/>
+        </p:nvSpPr>
+        <p:spPr>
+          <a:xfrm>
+            <a:off x="457200" y="1417320"/>
+            <a:ext cx="5577840" cy="2286000"/>
+          </a:xfrm>
+          <a:prstGeom prst="rect">
+            <a:avLst/>
+          </a:prstGeom>
+          <a:solidFill>
+            <a:srgbClr val="F2F2F2"/>
+          </a:solidFill>
+          <a:ln w="15875">
+            <a:solidFill>
+              <a:srgbClr val="1F4E78"/>
+            </a:solidFill>
+          </a:ln>
+        </p:spPr>
+        <p:txBody>
+          <a:bodyPr wrap="square" lIns="137160" rIns="137160" tIns="109728">
+            <a:spAutoFit/>
+          </a:bodyPr>
+          <a:lstStyle/>
+          <a:p>
+            <a:r>
+              <a:rPr sz="1500" b="1">
+                <a:solidFill>
+                  <a:srgbClr val="1F4E78"/>
+                </a:solidFill>
+              </a:rPr>
+              <a:t>The patent gap (independent registries)</a:t>
+            </a:r>
+          </a:p>
+          <a:p>
+            <a:pPr>
+              <a:spcBef>
+                <a:spcPts val="400"/>
+              </a:spcBef>
+            </a:pPr>
+            <a:r>
+              <a:rPr sz="1100">
+                <a:solidFill>
+                  <a:srgbClr val="202020"/>
+                </a:solidFill>
+              </a:rPr>
+              <a:t>Knorr-Bremse: ~2,900 patent families / 10,900+ patents (~7,500 in the truck division)</a:t>
+            </a:r>
+          </a:p>
+          <a:p>
+            <a:pPr>
+              <a:spcBef>
+                <a:spcPts val="400"/>
+              </a:spcBef>
+            </a:pPr>
+            <a:r>
+              <a:rPr sz="1100">
+                <a:solidFill>
+                  <a:srgbClr val="202020"/>
+                </a:solidFill>
+              </a:rPr>
+              <a:t>Aisin: ~680 JP applications/yr; Clarivate Top-100 Global Innovator 7 consecutive years</a:t>
+            </a:r>
+          </a:p>
+          <a:p>
+            <a:pPr>
+              <a:spcBef>
+                <a:spcPts val="400"/>
+              </a:spcBef>
+            </a:pPr>
+            <a:r>
+              <a:rPr sz="1100">
+                <a:solidFill>
+                  <a:srgbClr val="202020"/>
+                </a:solidFill>
+              </a:rPr>
+              <a:t>Akebono: ~321 US-registered patents</a:t>
+            </a:r>
+          </a:p>
+          <a:p>
+            <a:pPr>
+              <a:spcBef>
+                <a:spcPts val="400"/>
+              </a:spcBef>
+            </a:pPr>
+            <a:r>
+              <a:rPr sz="1100">
+                <a:solidFill>
+                  <a:srgbClr val="202020"/>
+                </a:solidFill>
+              </a:rPr>
+              <a:t>Mikuni: e-oil-pump fault-detection patents — its BEV-truck win is engineering-backed</a:t>
+            </a:r>
+          </a:p>
+          <a:p>
+            <a:pPr>
+              <a:spcBef>
+                <a:spcPts val="400"/>
+              </a:spcBef>
+            </a:pPr>
+            <a:r>
+              <a:rPr sz="1100">
+                <a:solidFill>
+                  <a:srgbClr val="202020"/>
+                </a:solidFill>
+              </a:rPr>
+              <a:t>TBK: 2-3 patent GRANTS PER YEAR — two to three orders of magnitude below the leaders.</a:t>
+            </a:r>
+          </a:p>
+          <a:p>
+            <a:pPr>
+              <a:spcBef>
+                <a:spcPts val="400"/>
+              </a:spcBef>
+            </a:pPr>
+            <a:r>
+              <a:rPr sz="1100">
+                <a:solidFill>
+                  <a:srgbClr val="202020"/>
+                </a:solidFill>
+              </a:rPr>
+              <a:t>Independently confirms the capitalized-R&amp;D finding ($43M vs $2.6-5.6bn) from a different data source</a:t>
+            </a:r>
+          </a:p>
+        </p:txBody>
+      </p:sp>
+      <p:sp>
+        <p:nvSpPr>
+          <p:cNvPr id="5" name="TextBox 4"/>
+          <p:cNvSpPr txBox="1"/>
+          <p:nvPr/>
+        </p:nvSpPr>
+        <p:spPr>
+          <a:xfrm>
+            <a:off x="6217920" y="1417320"/>
+            <a:ext cx="5532120" cy="2286000"/>
+          </a:xfrm>
+          <a:prstGeom prst="rect">
+            <a:avLst/>
+          </a:prstGeom>
+          <a:solidFill>
+            <a:srgbClr val="F2F2F2"/>
+          </a:solidFill>
+          <a:ln w="15875">
+            <a:solidFill>
+              <a:srgbClr val="548235"/>
+            </a:solidFill>
+          </a:ln>
+        </p:spPr>
+        <p:txBody>
+          <a:bodyPr wrap="square" lIns="137160" rIns="137160" tIns="109728">
+            <a:spAutoFit/>
+          </a:bodyPr>
+          <a:lstStyle/>
+          <a:p>
+            <a:r>
+              <a:rPr sz="1500" b="1">
+                <a:solidFill>
+                  <a:srgbClr val="548235"/>
+                </a:solidFill>
+              </a:rPr>
+              <a:t>Documented product firsts</a:t>
+            </a:r>
+          </a:p>
+          <a:p>
+            <a:pPr>
+              <a:spcBef>
+                <a:spcPts val="400"/>
+              </a:spcBef>
+            </a:pPr>
+            <a:r>
+              <a:rPr sz="1100">
+                <a:solidFill>
+                  <a:srgbClr val="202020"/>
+                </a:solidFill>
+              </a:rPr>
+              <a:t>Knorr: EBS 1989; series air disc brake 1992; Actros/Scania volume 1996</a:t>
+            </a:r>
+          </a:p>
+          <a:p>
+            <a:pPr>
+              <a:spcBef>
+                <a:spcPts val="400"/>
+              </a:spcBef>
+            </a:pPr>
+            <a:r>
+              <a:rPr sz="1100">
+                <a:solidFill>
+                  <a:srgbClr val="202020"/>
+                </a:solidFill>
+              </a:rPr>
+              <a:t>Bendix ADB22X: 2005, now ~85% of NA air-disc wheel ends</a:t>
+            </a:r>
+          </a:p>
+          <a:p>
+            <a:pPr>
+              <a:spcBef>
+                <a:spcPts val="400"/>
+              </a:spcBef>
+            </a:pPr>
+            <a:r>
+              <a:rPr sz="1100">
+                <a:solidFill>
+                  <a:srgbClr val="202020"/>
+                </a:solidFill>
+              </a:rPr>
+              <a:t>UD Quon 2017: first all-disc Japanese heavy truck</a:t>
+            </a:r>
+          </a:p>
+          <a:p>
+            <a:pPr>
+              <a:spcBef>
+                <a:spcPts val="400"/>
+              </a:spcBef>
+            </a:pPr>
+            <a:r>
+              <a:rPr sz="1100">
+                <a:solidFill>
+                  <a:srgbClr val="202020"/>
+                </a:solidFill>
+              </a:rPr>
+              <a:t>Mikuni 2022: e-oil pump in production for a domestic small BEV truck</a:t>
+            </a:r>
+          </a:p>
+          <a:p>
+            <a:pPr>
+              <a:spcBef>
+                <a:spcPts val="400"/>
+              </a:spcBef>
+            </a:pPr>
+            <a:r>
+              <a:rPr sz="1100">
+                <a:solidFill>
+                  <a:srgbClr val="202020"/>
+                </a:solidFill>
+              </a:rPr>
+              <a:t>Akebono FY2023: JSME Technology Award — world-first electric parking brake unit for medium/light trucks (innovating through distress)</a:t>
+            </a:r>
+          </a:p>
+          <a:p>
+            <a:pPr>
+              <a:spcBef>
+                <a:spcPts val="400"/>
+              </a:spcBef>
+            </a:pPr>
+            <a:r>
+              <a:rPr sz="1100">
+                <a:solidFill>
+                  <a:srgbClr val="202020"/>
+                </a:solidFill>
+              </a:rPr>
+              <a:t>TBK: retarders since the 1960s; 19.5" ADB exhibited (year unconfirmed: 2019 vs 2022 sources conflict); e-pumps/TCU in development</a:t>
+            </a:r>
+          </a:p>
+        </p:txBody>
+      </p:sp>
+      <p:sp>
+        <p:nvSpPr>
+          <p:cNvPr id="6" name="TextBox 5"/>
+          <p:cNvSpPr txBox="1"/>
+          <p:nvPr/>
+        </p:nvSpPr>
+        <p:spPr>
+          <a:xfrm>
+            <a:off x="457200" y="3840480"/>
+            <a:ext cx="11292840" cy="1737360"/>
+          </a:xfrm>
+          <a:prstGeom prst="rect">
+            <a:avLst/>
+          </a:prstGeom>
+          <a:solidFill>
+            <a:srgbClr val="F2F2F2"/>
+          </a:solidFill>
+          <a:ln w="15875">
+            <a:solidFill>
+              <a:srgbClr val="1F4E78"/>
+            </a:solidFill>
+          </a:ln>
+        </p:spPr>
+        <p:txBody>
+          <a:bodyPr wrap="square" lIns="137160" rIns="137160" tIns="109728">
+            <a:spAutoFit/>
+          </a:bodyPr>
+          <a:lstStyle/>
+          <a:p>
+            <a:r>
+              <a:rPr sz="1500" b="1">
+                <a:solidFill>
+                  <a:srgbClr val="1F4E78"/>
+                </a:solidFill>
+              </a:rPr>
+              <a:t>The pattern — and TBK's fix</a:t>
+            </a:r>
+          </a:p>
+          <a:p>
+            <a:pPr>
+              <a:spcBef>
+                <a:spcPts val="400"/>
+              </a:spcBef>
+            </a:pPr>
+            <a:r>
+              <a:rPr sz="1150">
+                <a:solidFill>
+                  <a:srgbClr val="202020"/>
+                </a:solidFill>
+              </a:rPr>
+              <a:t>Innovation output tracks the moat and margin rankings almost perfectly: the companies with validated quality (Knorr, Cummins) also hold the patent fortresses and the product firsts; the distressed (Akebono) still out-publish TBK; even the similarly-sized peer (Mikuni) protects its e-pump work with patents.</a:t>
+            </a:r>
+          </a:p>
+          <a:p>
+            <a:pPr>
+              <a:spcBef>
+                <a:spcPts val="400"/>
+              </a:spcBef>
+            </a:pPr>
+            <a:r>
+              <a:rPr sz="1150">
+                <a:solidFill>
+                  <a:srgbClr val="202020"/>
+                </a:solidFill>
+              </a:rPr>
+              <a:t>TBK's innovation is real but INVISIBLE: 75 years of retarder/brake/pump engineering, an ADB prototype, e-pumps and a thermal control unit in development — none of it patented at scale, published at JSAE, or externally awarded. Invisible innovation cannot win sockets outside the keiretsu.</a:t>
+            </a:r>
+          </a:p>
+          <a:p>
+            <a:pPr>
+              <a:spcBef>
+                <a:spcPts val="400"/>
+              </a:spcBef>
+            </a:pPr>
+            <a:r>
+              <a:rPr sz="1150">
+                <a:solidFill>
+                  <a:srgbClr val="202020"/>
+                </a:solidFill>
+              </a:rPr>
+              <a:t>Fix costs little: patent the e-pump/TCU and ADB work (Mikuni shows the value), publish, pursue external validation — a required complement to the R&amp;D spend itself.</a:t>
+            </a:r>
+          </a:p>
+        </p:txBody>
+      </p:sp>
+    </p:spTree>
+  </p:cSld>
+  <p:clrMapOvr>
+    <a:masterClrMapping/>
+  </p:clrMapOvr>
+</p:sld>
+</file>
+
+<file path=ppt/slides/slide19.xml><?xml version="1.0" encoding="utf-8"?>
+<p:sld xmlns:a="http://schemas.openxmlformats.org/drawingml/2006/main" xmlns:p="http://schemas.openxmlformats.org/presentationml/2006/main" xmlns:r="http://schemas.openxmlformats.org/officeDocument/2006/relationships">
+  <p:cSld>
+    <p:spTree>
+      <p:nvGrpSpPr>
+        <p:cNvPr id="1" name=""/>
+        <p:cNvGrpSpPr/>
+        <p:nvPr/>
+      </p:nvGrpSpPr>
+      <p:grpSpPr/>
+      <p:sp>
+        <p:nvSpPr>
+          <p:cNvPr id="2" name="TextBox 1"/>
+          <p:cNvSpPr txBox="1"/>
+          <p:nvPr/>
+        </p:nvSpPr>
+        <p:spPr>
+          <a:xfrm>
+            <a:off x="0" y="0"/>
+            <a:ext cx="12191695" cy="868680"/>
+          </a:xfrm>
+          <a:prstGeom prst="rect">
+            <a:avLst/>
+          </a:prstGeom>
+          <a:solidFill>
+            <a:srgbClr val="1F4E78"/>
+          </a:solidFill>
+        </p:spPr>
+        <p:txBody>
+          <a:bodyPr wrap="square" lIns="457200" tIns="164592">
+            <a:spAutoFit/>
+          </a:bodyPr>
+          <a:lstStyle/>
+          <a:p>
+            <a:r>
+              <a:rPr sz="2600" b="1">
+                <a:solidFill>
+                  <a:srgbClr val="FFFFFF"/>
+                </a:solidFill>
+              </a:rPr>
               <a:t>Moat framework ranking: TBK scores 5.38 — 9th of 13</a:t>
             </a:r>
           </a:p>
@@ -10510,7 +11047,639 @@
 </p:sld>
 </file>
 
-<file path=ppt/slides/slide19.xml><?xml version="1.0" encoding="utf-8"?>
+<file path=ppt/slides/slide2.xml><?xml version="1.0" encoding="utf-8"?>
+<p:sld xmlns:a="http://schemas.openxmlformats.org/drawingml/2006/main" xmlns:p="http://schemas.openxmlformats.org/presentationml/2006/main" xmlns:r="http://schemas.openxmlformats.org/officeDocument/2006/relationships">
+  <p:cSld>
+    <p:spTree>
+      <p:nvGrpSpPr>
+        <p:cNvPr id="1" name=""/>
+        <p:cNvGrpSpPr/>
+        <p:nvPr/>
+      </p:nvGrpSpPr>
+      <p:grpSpPr/>
+      <p:sp>
+        <p:nvSpPr>
+          <p:cNvPr id="2" name="TextBox 1"/>
+          <p:cNvSpPr txBox="1"/>
+          <p:nvPr/>
+        </p:nvSpPr>
+        <p:spPr>
+          <a:xfrm>
+            <a:off x="0" y="0"/>
+            <a:ext cx="12191695" cy="868680"/>
+          </a:xfrm>
+          <a:prstGeom prst="rect">
+            <a:avLst/>
+          </a:prstGeom>
+          <a:solidFill>
+            <a:srgbClr val="1F4E78"/>
+          </a:solidFill>
+        </p:spPr>
+        <p:txBody>
+          <a:bodyPr wrap="square" lIns="457200" tIns="164592">
+            <a:spAutoFit/>
+          </a:bodyPr>
+          <a:lstStyle/>
+          <a:p>
+            <a:r>
+              <a:rPr sz="2600" b="1">
+                <a:solidFill>
+                  <a:srgbClr val="FFFFFF"/>
+                </a:solidFill>
+              </a:rPr>
+              <a:t>Brakes: drum brakes are a shrinking island</a:t>
+            </a:r>
+          </a:p>
+        </p:txBody>
+      </p:sp>
+      <p:sp>
+        <p:nvSpPr>
+          <p:cNvPr id="3" name="TextBox 2"/>
+          <p:cNvSpPr txBox="1"/>
+          <p:nvPr/>
+        </p:nvSpPr>
+        <p:spPr>
+          <a:xfrm>
+            <a:off x="457200" y="914400"/>
+            <a:ext cx="11247120" cy="365760"/>
+          </a:xfrm>
+          <a:prstGeom prst="rect">
+            <a:avLst/>
+          </a:prstGeom>
+          <a:noFill/>
+        </p:spPr>
+        <p:txBody>
+          <a:bodyPr wrap="square">
+            <a:spAutoFit/>
+          </a:bodyPr>
+          <a:lstStyle/>
+          <a:p>
+            <a:pPr algn="l"/>
+            <a:r>
+              <a:rPr sz="1200" b="0">
+                <a:solidFill>
+                  <a:srgbClr val="595959"/>
+                </a:solidFill>
+              </a:rPr>
+              <a:t>Verified findings from peer-reviewed literature, regulatory records, and industry data</a:t>
+            </a:r>
+          </a:p>
+        </p:txBody>
+      </p:sp>
+      <p:sp>
+        <p:nvSpPr>
+          <p:cNvPr id="4" name="TextBox 3"/>
+          <p:cNvSpPr txBox="1"/>
+          <p:nvPr/>
+        </p:nvSpPr>
+        <p:spPr>
+          <a:xfrm>
+            <a:off x="457200" y="1417320"/>
+            <a:ext cx="3657600" cy="2834640"/>
+          </a:xfrm>
+          <a:prstGeom prst="rect">
+            <a:avLst/>
+          </a:prstGeom>
+          <a:solidFill>
+            <a:srgbClr val="F2F2F2"/>
+          </a:solidFill>
+          <a:ln w="15875">
+            <a:solidFill>
+              <a:srgbClr val="1F4E78"/>
+            </a:solidFill>
+          </a:ln>
+        </p:spPr>
+        <p:txBody>
+          <a:bodyPr wrap="square" lIns="137160" rIns="137160" tIns="109728">
+            <a:spAutoFit/>
+          </a:bodyPr>
+          <a:lstStyle/>
+          <a:p>
+            <a:r>
+              <a:rPr sz="1500" b="1">
+                <a:solidFill>
+                  <a:srgbClr val="1F4E78"/>
+                </a:solidFill>
+              </a:rPr>
+              <a:t>Europe — converted ~2000</a:t>
+            </a:r>
+          </a:p>
+          <a:p>
+            <a:pPr>
+              <a:spcBef>
+                <a:spcPts val="400"/>
+              </a:spcBef>
+            </a:pPr>
+            <a:r>
+              <a:rPr sz="1200">
+                <a:solidFill>
+                  <a:srgbClr val="202020"/>
+                </a:solidFill>
+              </a:rPr>
+              <a:t>1996 Actros: first heavy truck with</a:t>
+            </a:r>
+          </a:p>
+          <a:p>
+            <a:pPr>
+              <a:spcBef>
+                <a:spcPts val="400"/>
+              </a:spcBef>
+            </a:pPr>
+            <a:r>
+              <a:rPr sz="1200">
+                <a:solidFill>
+                  <a:srgbClr val="202020"/>
+                </a:solidFill>
+              </a:rPr>
+              <a:t>all-axle EBS disc brakes</a:t>
+            </a:r>
+          </a:p>
+          <a:p>
+            <a:pPr>
+              <a:spcBef>
+                <a:spcPts val="400"/>
+              </a:spcBef>
+            </a:pPr>
+            <a:r>
+              <a:rPr sz="1200">
+                <a:solidFill>
+                  <a:srgbClr val="202020"/>
+                </a:solidFill>
+              </a:rPr>
+              <a:t>~70% disc/EBS take rate by 2000</a:t>
+            </a:r>
+          </a:p>
+          <a:p>
+            <a:pPr>
+              <a:spcBef>
+                <a:spcPts val="400"/>
+              </a:spcBef>
+            </a:pPr>
+            <a:r>
+              <a:rPr sz="1200">
+                <a:solidFill>
+                  <a:srgbClr val="202020"/>
+                </a:solidFill>
+              </a:rPr>
+              <a:t>Near-universal on-highway since</a:t>
+            </a:r>
+          </a:p>
+          <a:p>
+            <a:pPr>
+              <a:spcBef>
+                <a:spcPts val="400"/>
+              </a:spcBef>
+            </a:pPr>
+            <a:r>
+              <a:rPr sz="1200">
+                <a:solidFill>
+                  <a:srgbClr val="202020"/>
+                </a:solidFill>
+              </a:rPr>
+              <a:t>Drums: ~18% of EU demand (off-road)</a:t>
+            </a:r>
+          </a:p>
+        </p:txBody>
+      </p:sp>
+      <p:sp>
+        <p:nvSpPr>
+          <p:cNvPr id="5" name="TextBox 4"/>
+          <p:cNvSpPr txBox="1"/>
+          <p:nvPr/>
+        </p:nvSpPr>
+        <p:spPr>
+          <a:xfrm>
+            <a:off x="4297680" y="1417320"/>
+            <a:ext cx="3657600" cy="2834640"/>
+          </a:xfrm>
+          <a:prstGeom prst="rect">
+            <a:avLst/>
+          </a:prstGeom>
+          <a:solidFill>
+            <a:srgbClr val="F2F2F2"/>
+          </a:solidFill>
+          <a:ln w="15875">
+            <a:solidFill>
+              <a:srgbClr val="1F4E78"/>
+            </a:solidFill>
+          </a:ln>
+        </p:spPr>
+        <p:txBody>
+          <a:bodyPr wrap="square" lIns="137160" rIns="137160" tIns="109728">
+            <a:spAutoFit/>
+          </a:bodyPr>
+          <a:lstStyle/>
+          <a:p>
+            <a:r>
+              <a:rPr sz="1500" b="1">
+                <a:solidFill>
+                  <a:srgbClr val="1F4E78"/>
+                </a:solidFill>
+              </a:rPr>
+              <a:t>North America — tipped 2023-24</a:t>
+            </a:r>
+          </a:p>
+          <a:p>
+            <a:pPr>
+              <a:spcBef>
+                <a:spcPts val="400"/>
+              </a:spcBef>
+            </a:pPr>
+            <a:r>
+              <a:rPr sz="1200">
+                <a:solidFill>
+                  <a:srgbClr val="202020"/>
+                </a:solidFill>
+              </a:rPr>
+              <a:t>FMVSS 121 (2009): −30% stopping</a:t>
+            </a:r>
+          </a:p>
+          <a:p>
+            <a:pPr>
+              <a:spcBef>
+                <a:spcPts val="400"/>
+              </a:spcBef>
+            </a:pPr>
+            <a:r>
+              <a:rPr sz="1200">
+                <a:solidFill>
+                  <a:srgbClr val="202020"/>
+                </a:solidFill>
+              </a:rPr>
+              <a:t>distance, drum-compatible by design</a:t>
+            </a:r>
+          </a:p>
+          <a:p>
+            <a:pPr>
+              <a:spcBef>
+                <a:spcPts val="400"/>
+              </a:spcBef>
+            </a:pPr>
+            <a:r>
+              <a:rPr sz="1200">
+                <a:solidFill>
+                  <a:srgbClr val="202020"/>
+                </a:solidFill>
+              </a:rPr>
+              <a:t>Tractors: &lt;5% disc (2011) → ~25%</a:t>
+            </a:r>
+          </a:p>
+          <a:p>
+            <a:pPr>
+              <a:spcBef>
+                <a:spcPts val="400"/>
+              </a:spcBef>
+            </a:pPr>
+            <a:r>
+              <a:rPr sz="1200">
+                <a:solidFill>
+                  <a:srgbClr val="202020"/>
+                </a:solidFill>
+              </a:rPr>
+              <a:t>(2018) → ~50%+ (2023-24)</a:t>
+            </a:r>
+          </a:p>
+          <a:p>
+            <a:pPr>
+              <a:spcBef>
+                <a:spcPts val="400"/>
+              </a:spcBef>
+            </a:pPr>
+            <a:r>
+              <a:rPr sz="1200">
+                <a:solidFill>
+                  <a:srgbClr val="202020"/>
+                </a:solidFill>
+              </a:rPr>
+              <a:t>Trailers still lag at ~15%</a:t>
+            </a:r>
+          </a:p>
+        </p:txBody>
+      </p:sp>
+      <p:sp>
+        <p:nvSpPr>
+          <p:cNvPr id="6" name="TextBox 5"/>
+          <p:cNvSpPr txBox="1"/>
+          <p:nvPr/>
+        </p:nvSpPr>
+        <p:spPr>
+          <a:xfrm>
+            <a:off x="8138160" y="1417320"/>
+            <a:ext cx="3611880" cy="2834640"/>
+          </a:xfrm>
+          <a:prstGeom prst="rect">
+            <a:avLst/>
+          </a:prstGeom>
+          <a:solidFill>
+            <a:srgbClr val="F2F2F2"/>
+          </a:solidFill>
+          <a:ln w="15875">
+            <a:solidFill>
+              <a:srgbClr val="7F1D1D"/>
+            </a:solidFill>
+          </a:ln>
+        </p:spPr>
+        <p:txBody>
+          <a:bodyPr wrap="square" lIns="137160" rIns="137160" tIns="109728">
+            <a:spAutoFit/>
+          </a:bodyPr>
+          <a:lstStyle/>
+          <a:p>
+            <a:r>
+              <a:rPr sz="1500" b="1">
+                <a:solidFill>
+                  <a:srgbClr val="7F1D1D"/>
+                </a:solidFill>
+              </a:rPr>
+              <a:t>Japan — the last drum market</a:t>
+            </a:r>
+          </a:p>
+          <a:p>
+            <a:pPr>
+              <a:spcBef>
+                <a:spcPts val="400"/>
+              </a:spcBef>
+            </a:pPr>
+            <a:r>
+              <a:rPr sz="1200">
+                <a:solidFill>
+                  <a:srgbClr val="202020"/>
+                </a:solidFill>
+              </a:rPr>
+              <a:t>Drums still majority on MD/HD trucks</a:t>
+            </a:r>
+          </a:p>
+          <a:p>
+            <a:pPr>
+              <a:spcBef>
+                <a:spcPts val="400"/>
+              </a:spcBef>
+            </a:pPr>
+            <a:r>
+              <a:rPr sz="1200">
+                <a:solidFill>
+                  <a:srgbClr val="202020"/>
+                </a:solidFill>
+              </a:rPr>
+              <a:t>UD Quon all-disc since 2017</a:t>
+            </a:r>
+          </a:p>
+          <a:p>
+            <a:pPr>
+              <a:spcBef>
+                <a:spcPts val="400"/>
+              </a:spcBef>
+            </a:pPr>
+            <a:r>
+              <a:rPr sz="1200">
+                <a:solidFill>
+                  <a:srgbClr val="202020"/>
+                </a:solidFill>
+              </a:rPr>
+              <a:t>New Giga tractor: all-wheel discs</a:t>
+            </a:r>
+          </a:p>
+          <a:p>
+            <a:pPr>
+              <a:spcBef>
+                <a:spcPts val="400"/>
+              </a:spcBef>
+            </a:pPr>
+            <a:r>
+              <a:rPr sz="1200">
+                <a:solidFill>
+                  <a:srgbClr val="202020"/>
+                </a:solidFill>
+              </a:rPr>
+              <a:t>Isuzu export heavies all-disc (MY25)</a:t>
+            </a:r>
+          </a:p>
+          <a:p>
+            <a:pPr>
+              <a:spcBef>
+                <a:spcPts val="400"/>
+              </a:spcBef>
+            </a:pPr>
+            <a:r>
+              <a:rPr sz="1200">
+                <a:solidFill>
+                  <a:srgbClr val="202020"/>
+                </a:solidFill>
+              </a:rPr>
+              <a:t>Domestic flip is when, not if</a:t>
+            </a:r>
+          </a:p>
+        </p:txBody>
+      </p:sp>
+      <p:sp>
+        <p:nvSpPr>
+          <p:cNvPr id="7" name="TextBox 6"/>
+          <p:cNvSpPr txBox="1"/>
+          <p:nvPr/>
+        </p:nvSpPr>
+        <p:spPr>
+          <a:xfrm>
+            <a:off x="457200" y="4434840"/>
+            <a:ext cx="5577840" cy="2103120"/>
+          </a:xfrm>
+          <a:prstGeom prst="rect">
+            <a:avLst/>
+          </a:prstGeom>
+          <a:solidFill>
+            <a:srgbClr val="F2F2F2"/>
+          </a:solidFill>
+          <a:ln w="15875">
+            <a:solidFill>
+              <a:srgbClr val="1F4E78"/>
+            </a:solidFill>
+          </a:ln>
+        </p:spPr>
+        <p:txBody>
+          <a:bodyPr wrap="square" lIns="137160" rIns="137160" tIns="109728">
+            <a:spAutoFit/>
+          </a:bodyPr>
+          <a:lstStyle/>
+          <a:p>
+            <a:r>
+              <a:rPr sz="1500" b="1">
+                <a:solidFill>
+                  <a:srgbClr val="1F4E78"/>
+                </a:solidFill>
+              </a:rPr>
+              <a:t>Why discs won (peer-reviewed)</a:t>
+            </a:r>
+          </a:p>
+          <a:p>
+            <a:pPr>
+              <a:spcBef>
+                <a:spcPts val="400"/>
+              </a:spcBef>
+            </a:pPr>
+            <a:r>
+              <a:rPr sz="1200">
+                <a:solidFill>
+                  <a:srgbClr val="202020"/>
+                </a:solidFill>
+              </a:rPr>
+              <a:t>Fade resistance under thermal load (SAE 902206, 1990; physics in Day et al. 1984)</a:t>
+            </a:r>
+          </a:p>
+          <a:p>
+            <a:pPr>
+              <a:spcBef>
+                <a:spcPts val="400"/>
+              </a:spcBef>
+            </a:pPr>
+            <a:r>
+              <a:rPr sz="1200">
+                <a:solidFill>
+                  <a:srgbClr val="202020"/>
+                </a:solidFill>
+              </a:rPr>
+              <a:t>~30% shorter stops vs standard drums (NHTSA simulator, 108 drivers)</a:t>
+            </a:r>
+          </a:p>
+          <a:p>
+            <a:pPr>
+              <a:spcBef>
+                <a:spcPts val="400"/>
+              </a:spcBef>
+            </a:pPr>
+            <a:r>
+              <a:rPr sz="1200">
+                <a:solidFill>
+                  <a:srgbClr val="202020"/>
+                </a:solidFill>
+              </a:rPr>
+              <a:t>10-20% braking advantage, 12-80% lifecycle savings in demanding duty (Ampadu 2023)</a:t>
+            </a:r>
+          </a:p>
+          <a:p>
+            <a:pPr>
+              <a:spcBef>
+                <a:spcPts val="400"/>
+              </a:spcBef>
+            </a:pPr>
+            <a:r>
+              <a:rPr sz="1200">
+                <a:solidFill>
+                  <a:srgbClr val="202020"/>
+                </a:solidFill>
+              </a:rPr>
+              <a:t>EBS/AEB/ADAS mandates favor disc actuation precision</a:t>
+            </a:r>
+          </a:p>
+        </p:txBody>
+      </p:sp>
+      <p:sp>
+        <p:nvSpPr>
+          <p:cNvPr id="8" name="TextBox 7"/>
+          <p:cNvSpPr txBox="1"/>
+          <p:nvPr/>
+        </p:nvSpPr>
+        <p:spPr>
+          <a:xfrm>
+            <a:off x="6217920" y="4434840"/>
+            <a:ext cx="5532120" cy="2103120"/>
+          </a:xfrm>
+          <a:prstGeom prst="rect">
+            <a:avLst/>
+          </a:prstGeom>
+          <a:solidFill>
+            <a:srgbClr val="F2F2F2"/>
+          </a:solidFill>
+          <a:ln w="15875">
+            <a:solidFill>
+              <a:srgbClr val="548235"/>
+            </a:solidFill>
+          </a:ln>
+        </p:spPr>
+        <p:txBody>
+          <a:bodyPr wrap="square" lIns="137160" rIns="137160" tIns="109728">
+            <a:spAutoFit/>
+          </a:bodyPr>
+          <a:lstStyle/>
+          <a:p>
+            <a:r>
+              <a:rPr sz="1500" b="1">
+                <a:solidFill>
+                  <a:srgbClr val="548235"/>
+                </a:solidFill>
+              </a:rPr>
+              <a:t>Electrification re-shuffles the deck</a:t>
+            </a:r>
+          </a:p>
+          <a:p>
+            <a:pPr>
+              <a:spcBef>
+                <a:spcPts val="400"/>
+              </a:spcBef>
+            </a:pPr>
+            <a:r>
+              <a:rPr sz="1200">
+                <a:solidFill>
+                  <a:srgbClr val="202020"/>
+                </a:solidFill>
+              </a:rPr>
+              <a:t>Regen braking cuts friction wear 64-95% (multiple peer-reviewed studies)</a:t>
+            </a:r>
+          </a:p>
+          <a:p>
+            <a:pPr>
+              <a:spcBef>
+                <a:spcPts val="400"/>
+              </a:spcBef>
+            </a:pPr>
+            <a:r>
+              <a:rPr sz="1200">
+                <a:solidFill>
+                  <a:srgbClr val="202020"/>
+                </a:solidFill>
+              </a:rPr>
+              <a:t>Friction aftermarket growth ~2% CAGR with EV headwind</a:t>
+            </a:r>
+          </a:p>
+          <a:p>
+            <a:pPr>
+              <a:spcBef>
+                <a:spcPts val="400"/>
+              </a:spcBef>
+            </a:pPr>
+            <a:r>
+              <a:rPr sz="1200">
+                <a:solidFill>
+                  <a:srgbClr val="202020"/>
+                </a:solidFill>
+              </a:rPr>
+              <a:t>EU brake-dust limits for heavy vehicles expected ~2030</a:t>
+            </a:r>
+          </a:p>
+          <a:p>
+            <a:pPr>
+              <a:spcBef>
+                <a:spcPts val="400"/>
+              </a:spcBef>
+            </a:pPr>
+            <a:r>
+              <a:rPr sz="1200">
+                <a:solidFill>
+                  <a:srgbClr val="202020"/>
+                </a:solidFill>
+              </a:rPr>
+              <a:t>Value shifts: wear parts → corrosion/NVH/low-dust + retarders &amp; blending</a:t>
+            </a:r>
+          </a:p>
+        </p:txBody>
+      </p:sp>
+    </p:spTree>
+  </p:cSld>
+  <p:clrMapOvr>
+    <a:masterClrMapping/>
+  </p:clrMapOvr>
+</p:sld>
+</file>
+
+<file path=ppt/slides/slide20.xml><?xml version="1.0" encoding="utf-8"?>
 <p:sld xmlns:a="http://schemas.openxmlformats.org/drawingml/2006/main" xmlns:p="http://schemas.openxmlformats.org/presentationml/2006/main" xmlns:r="http://schemas.openxmlformats.org/officeDocument/2006/relationships">
   <p:cSld>
     <p:spTree>
@@ -10815,639 +11984,7 @@
 </p:sld>
 </file>
 
-<file path=ppt/slides/slide2.xml><?xml version="1.0" encoding="utf-8"?>
-<p:sld xmlns:a="http://schemas.openxmlformats.org/drawingml/2006/main" xmlns:p="http://schemas.openxmlformats.org/presentationml/2006/main" xmlns:r="http://schemas.openxmlformats.org/officeDocument/2006/relationships">
-  <p:cSld>
-    <p:spTree>
-      <p:nvGrpSpPr>
-        <p:cNvPr id="1" name=""/>
-        <p:cNvGrpSpPr/>
-        <p:nvPr/>
-      </p:nvGrpSpPr>
-      <p:grpSpPr/>
-      <p:sp>
-        <p:nvSpPr>
-          <p:cNvPr id="2" name="TextBox 1"/>
-          <p:cNvSpPr txBox="1"/>
-          <p:nvPr/>
-        </p:nvSpPr>
-        <p:spPr>
-          <a:xfrm>
-            <a:off x="0" y="0"/>
-            <a:ext cx="12191695" cy="868680"/>
-          </a:xfrm>
-          <a:prstGeom prst="rect">
-            <a:avLst/>
-          </a:prstGeom>
-          <a:solidFill>
-            <a:srgbClr val="1F4E78"/>
-          </a:solidFill>
-        </p:spPr>
-        <p:txBody>
-          <a:bodyPr wrap="square" lIns="457200" tIns="164592">
-            <a:spAutoFit/>
-          </a:bodyPr>
-          <a:lstStyle/>
-          <a:p>
-            <a:r>
-              <a:rPr sz="2600" b="1">
-                <a:solidFill>
-                  <a:srgbClr val="FFFFFF"/>
-                </a:solidFill>
-              </a:rPr>
-              <a:t>Brakes: drum brakes are a shrinking island</a:t>
-            </a:r>
-          </a:p>
-        </p:txBody>
-      </p:sp>
-      <p:sp>
-        <p:nvSpPr>
-          <p:cNvPr id="3" name="TextBox 2"/>
-          <p:cNvSpPr txBox="1"/>
-          <p:nvPr/>
-        </p:nvSpPr>
-        <p:spPr>
-          <a:xfrm>
-            <a:off x="457200" y="914400"/>
-            <a:ext cx="11247120" cy="365760"/>
-          </a:xfrm>
-          <a:prstGeom prst="rect">
-            <a:avLst/>
-          </a:prstGeom>
-          <a:noFill/>
-        </p:spPr>
-        <p:txBody>
-          <a:bodyPr wrap="square">
-            <a:spAutoFit/>
-          </a:bodyPr>
-          <a:lstStyle/>
-          <a:p>
-            <a:pPr algn="l"/>
-            <a:r>
-              <a:rPr sz="1200" b="0">
-                <a:solidFill>
-                  <a:srgbClr val="595959"/>
-                </a:solidFill>
-              </a:rPr>
-              <a:t>Verified findings from peer-reviewed literature, regulatory records, and industry data</a:t>
-            </a:r>
-          </a:p>
-        </p:txBody>
-      </p:sp>
-      <p:sp>
-        <p:nvSpPr>
-          <p:cNvPr id="4" name="TextBox 3"/>
-          <p:cNvSpPr txBox="1"/>
-          <p:nvPr/>
-        </p:nvSpPr>
-        <p:spPr>
-          <a:xfrm>
-            <a:off x="457200" y="1417320"/>
-            <a:ext cx="3657600" cy="2834640"/>
-          </a:xfrm>
-          <a:prstGeom prst="rect">
-            <a:avLst/>
-          </a:prstGeom>
-          <a:solidFill>
-            <a:srgbClr val="F2F2F2"/>
-          </a:solidFill>
-          <a:ln w="15875">
-            <a:solidFill>
-              <a:srgbClr val="1F4E78"/>
-            </a:solidFill>
-          </a:ln>
-        </p:spPr>
-        <p:txBody>
-          <a:bodyPr wrap="square" lIns="137160" rIns="137160" tIns="109728">
-            <a:spAutoFit/>
-          </a:bodyPr>
-          <a:lstStyle/>
-          <a:p>
-            <a:r>
-              <a:rPr sz="1500" b="1">
-                <a:solidFill>
-                  <a:srgbClr val="1F4E78"/>
-                </a:solidFill>
-              </a:rPr>
-              <a:t>Europe — converted ~2000</a:t>
-            </a:r>
-          </a:p>
-          <a:p>
-            <a:pPr>
-              <a:spcBef>
-                <a:spcPts val="400"/>
-              </a:spcBef>
-            </a:pPr>
-            <a:r>
-              <a:rPr sz="1200">
-                <a:solidFill>
-                  <a:srgbClr val="202020"/>
-                </a:solidFill>
-              </a:rPr>
-              <a:t>1996 Actros: first heavy truck with</a:t>
-            </a:r>
-          </a:p>
-          <a:p>
-            <a:pPr>
-              <a:spcBef>
-                <a:spcPts val="400"/>
-              </a:spcBef>
-            </a:pPr>
-            <a:r>
-              <a:rPr sz="1200">
-                <a:solidFill>
-                  <a:srgbClr val="202020"/>
-                </a:solidFill>
-              </a:rPr>
-              <a:t>all-axle EBS disc brakes</a:t>
-            </a:r>
-          </a:p>
-          <a:p>
-            <a:pPr>
-              <a:spcBef>
-                <a:spcPts val="400"/>
-              </a:spcBef>
-            </a:pPr>
-            <a:r>
-              <a:rPr sz="1200">
-                <a:solidFill>
-                  <a:srgbClr val="202020"/>
-                </a:solidFill>
-              </a:rPr>
-              <a:t>~70% disc/EBS take rate by 2000</a:t>
-            </a:r>
-          </a:p>
-          <a:p>
-            <a:pPr>
-              <a:spcBef>
-                <a:spcPts val="400"/>
-              </a:spcBef>
-            </a:pPr>
-            <a:r>
-              <a:rPr sz="1200">
-                <a:solidFill>
-                  <a:srgbClr val="202020"/>
-                </a:solidFill>
-              </a:rPr>
-              <a:t>Near-universal on-highway since</a:t>
-            </a:r>
-          </a:p>
-          <a:p>
-            <a:pPr>
-              <a:spcBef>
-                <a:spcPts val="400"/>
-              </a:spcBef>
-            </a:pPr>
-            <a:r>
-              <a:rPr sz="1200">
-                <a:solidFill>
-                  <a:srgbClr val="202020"/>
-                </a:solidFill>
-              </a:rPr>
-              <a:t>Drums: ~18% of EU demand (off-road)</a:t>
-            </a:r>
-          </a:p>
-        </p:txBody>
-      </p:sp>
-      <p:sp>
-        <p:nvSpPr>
-          <p:cNvPr id="5" name="TextBox 4"/>
-          <p:cNvSpPr txBox="1"/>
-          <p:nvPr/>
-        </p:nvSpPr>
-        <p:spPr>
-          <a:xfrm>
-            <a:off x="4297680" y="1417320"/>
-            <a:ext cx="3657600" cy="2834640"/>
-          </a:xfrm>
-          <a:prstGeom prst="rect">
-            <a:avLst/>
-          </a:prstGeom>
-          <a:solidFill>
-            <a:srgbClr val="F2F2F2"/>
-          </a:solidFill>
-          <a:ln w="15875">
-            <a:solidFill>
-              <a:srgbClr val="1F4E78"/>
-            </a:solidFill>
-          </a:ln>
-        </p:spPr>
-        <p:txBody>
-          <a:bodyPr wrap="square" lIns="137160" rIns="137160" tIns="109728">
-            <a:spAutoFit/>
-          </a:bodyPr>
-          <a:lstStyle/>
-          <a:p>
-            <a:r>
-              <a:rPr sz="1500" b="1">
-                <a:solidFill>
-                  <a:srgbClr val="1F4E78"/>
-                </a:solidFill>
-              </a:rPr>
-              <a:t>North America — tipped 2023-24</a:t>
-            </a:r>
-          </a:p>
-          <a:p>
-            <a:pPr>
-              <a:spcBef>
-                <a:spcPts val="400"/>
-              </a:spcBef>
-            </a:pPr>
-            <a:r>
-              <a:rPr sz="1200">
-                <a:solidFill>
-                  <a:srgbClr val="202020"/>
-                </a:solidFill>
-              </a:rPr>
-              <a:t>FMVSS 121 (2009): −30% stopping</a:t>
-            </a:r>
-          </a:p>
-          <a:p>
-            <a:pPr>
-              <a:spcBef>
-                <a:spcPts val="400"/>
-              </a:spcBef>
-            </a:pPr>
-            <a:r>
-              <a:rPr sz="1200">
-                <a:solidFill>
-                  <a:srgbClr val="202020"/>
-                </a:solidFill>
-              </a:rPr>
-              <a:t>distance, drum-compatible by design</a:t>
-            </a:r>
-          </a:p>
-          <a:p>
-            <a:pPr>
-              <a:spcBef>
-                <a:spcPts val="400"/>
-              </a:spcBef>
-            </a:pPr>
-            <a:r>
-              <a:rPr sz="1200">
-                <a:solidFill>
-                  <a:srgbClr val="202020"/>
-                </a:solidFill>
-              </a:rPr>
-              <a:t>Tractors: &lt;5% disc (2011) → ~25%</a:t>
-            </a:r>
-          </a:p>
-          <a:p>
-            <a:pPr>
-              <a:spcBef>
-                <a:spcPts val="400"/>
-              </a:spcBef>
-            </a:pPr>
-            <a:r>
-              <a:rPr sz="1200">
-                <a:solidFill>
-                  <a:srgbClr val="202020"/>
-                </a:solidFill>
-              </a:rPr>
-              <a:t>(2018) → ~50%+ (2023-24)</a:t>
-            </a:r>
-          </a:p>
-          <a:p>
-            <a:pPr>
-              <a:spcBef>
-                <a:spcPts val="400"/>
-              </a:spcBef>
-            </a:pPr>
-            <a:r>
-              <a:rPr sz="1200">
-                <a:solidFill>
-                  <a:srgbClr val="202020"/>
-                </a:solidFill>
-              </a:rPr>
-              <a:t>Trailers still lag at ~15%</a:t>
-            </a:r>
-          </a:p>
-        </p:txBody>
-      </p:sp>
-      <p:sp>
-        <p:nvSpPr>
-          <p:cNvPr id="6" name="TextBox 5"/>
-          <p:cNvSpPr txBox="1"/>
-          <p:nvPr/>
-        </p:nvSpPr>
-        <p:spPr>
-          <a:xfrm>
-            <a:off x="8138160" y="1417320"/>
-            <a:ext cx="3611880" cy="2834640"/>
-          </a:xfrm>
-          <a:prstGeom prst="rect">
-            <a:avLst/>
-          </a:prstGeom>
-          <a:solidFill>
-            <a:srgbClr val="F2F2F2"/>
-          </a:solidFill>
-          <a:ln w="15875">
-            <a:solidFill>
-              <a:srgbClr val="7F1D1D"/>
-            </a:solidFill>
-          </a:ln>
-        </p:spPr>
-        <p:txBody>
-          <a:bodyPr wrap="square" lIns="137160" rIns="137160" tIns="109728">
-            <a:spAutoFit/>
-          </a:bodyPr>
-          <a:lstStyle/>
-          <a:p>
-            <a:r>
-              <a:rPr sz="1500" b="1">
-                <a:solidFill>
-                  <a:srgbClr val="7F1D1D"/>
-                </a:solidFill>
-              </a:rPr>
-              <a:t>Japan — the last drum market</a:t>
-            </a:r>
-          </a:p>
-          <a:p>
-            <a:pPr>
-              <a:spcBef>
-                <a:spcPts val="400"/>
-              </a:spcBef>
-            </a:pPr>
-            <a:r>
-              <a:rPr sz="1200">
-                <a:solidFill>
-                  <a:srgbClr val="202020"/>
-                </a:solidFill>
-              </a:rPr>
-              <a:t>Drums still majority on MD/HD trucks</a:t>
-            </a:r>
-          </a:p>
-          <a:p>
-            <a:pPr>
-              <a:spcBef>
-                <a:spcPts val="400"/>
-              </a:spcBef>
-            </a:pPr>
-            <a:r>
-              <a:rPr sz="1200">
-                <a:solidFill>
-                  <a:srgbClr val="202020"/>
-                </a:solidFill>
-              </a:rPr>
-              <a:t>UD Quon all-disc since 2017</a:t>
-            </a:r>
-          </a:p>
-          <a:p>
-            <a:pPr>
-              <a:spcBef>
-                <a:spcPts val="400"/>
-              </a:spcBef>
-            </a:pPr>
-            <a:r>
-              <a:rPr sz="1200">
-                <a:solidFill>
-                  <a:srgbClr val="202020"/>
-                </a:solidFill>
-              </a:rPr>
-              <a:t>New Giga tractor: all-wheel discs</a:t>
-            </a:r>
-          </a:p>
-          <a:p>
-            <a:pPr>
-              <a:spcBef>
-                <a:spcPts val="400"/>
-              </a:spcBef>
-            </a:pPr>
-            <a:r>
-              <a:rPr sz="1200">
-                <a:solidFill>
-                  <a:srgbClr val="202020"/>
-                </a:solidFill>
-              </a:rPr>
-              <a:t>Isuzu export heavies all-disc (MY25)</a:t>
-            </a:r>
-          </a:p>
-          <a:p>
-            <a:pPr>
-              <a:spcBef>
-                <a:spcPts val="400"/>
-              </a:spcBef>
-            </a:pPr>
-            <a:r>
-              <a:rPr sz="1200">
-                <a:solidFill>
-                  <a:srgbClr val="202020"/>
-                </a:solidFill>
-              </a:rPr>
-              <a:t>Domestic flip is when, not if</a:t>
-            </a:r>
-          </a:p>
-        </p:txBody>
-      </p:sp>
-      <p:sp>
-        <p:nvSpPr>
-          <p:cNvPr id="7" name="TextBox 6"/>
-          <p:cNvSpPr txBox="1"/>
-          <p:nvPr/>
-        </p:nvSpPr>
-        <p:spPr>
-          <a:xfrm>
-            <a:off x="457200" y="4434840"/>
-            <a:ext cx="5577840" cy="2103120"/>
-          </a:xfrm>
-          <a:prstGeom prst="rect">
-            <a:avLst/>
-          </a:prstGeom>
-          <a:solidFill>
-            <a:srgbClr val="F2F2F2"/>
-          </a:solidFill>
-          <a:ln w="15875">
-            <a:solidFill>
-              <a:srgbClr val="1F4E78"/>
-            </a:solidFill>
-          </a:ln>
-        </p:spPr>
-        <p:txBody>
-          <a:bodyPr wrap="square" lIns="137160" rIns="137160" tIns="109728">
-            <a:spAutoFit/>
-          </a:bodyPr>
-          <a:lstStyle/>
-          <a:p>
-            <a:r>
-              <a:rPr sz="1500" b="1">
-                <a:solidFill>
-                  <a:srgbClr val="1F4E78"/>
-                </a:solidFill>
-              </a:rPr>
-              <a:t>Why discs won (peer-reviewed)</a:t>
-            </a:r>
-          </a:p>
-          <a:p>
-            <a:pPr>
-              <a:spcBef>
-                <a:spcPts val="400"/>
-              </a:spcBef>
-            </a:pPr>
-            <a:r>
-              <a:rPr sz="1200">
-                <a:solidFill>
-                  <a:srgbClr val="202020"/>
-                </a:solidFill>
-              </a:rPr>
-              <a:t>Fade resistance under thermal load (SAE 902206, 1990; physics in Day et al. 1984)</a:t>
-            </a:r>
-          </a:p>
-          <a:p>
-            <a:pPr>
-              <a:spcBef>
-                <a:spcPts val="400"/>
-              </a:spcBef>
-            </a:pPr>
-            <a:r>
-              <a:rPr sz="1200">
-                <a:solidFill>
-                  <a:srgbClr val="202020"/>
-                </a:solidFill>
-              </a:rPr>
-              <a:t>~30% shorter stops vs standard drums (NHTSA simulator, 108 drivers)</a:t>
-            </a:r>
-          </a:p>
-          <a:p>
-            <a:pPr>
-              <a:spcBef>
-                <a:spcPts val="400"/>
-              </a:spcBef>
-            </a:pPr>
-            <a:r>
-              <a:rPr sz="1200">
-                <a:solidFill>
-                  <a:srgbClr val="202020"/>
-                </a:solidFill>
-              </a:rPr>
-              <a:t>10-20% braking advantage, 12-80% lifecycle savings in demanding duty (Ampadu 2023)</a:t>
-            </a:r>
-          </a:p>
-          <a:p>
-            <a:pPr>
-              <a:spcBef>
-                <a:spcPts val="400"/>
-              </a:spcBef>
-            </a:pPr>
-            <a:r>
-              <a:rPr sz="1200">
-                <a:solidFill>
-                  <a:srgbClr val="202020"/>
-                </a:solidFill>
-              </a:rPr>
-              <a:t>EBS/AEB/ADAS mandates favor disc actuation precision</a:t>
-            </a:r>
-          </a:p>
-        </p:txBody>
-      </p:sp>
-      <p:sp>
-        <p:nvSpPr>
-          <p:cNvPr id="8" name="TextBox 7"/>
-          <p:cNvSpPr txBox="1"/>
-          <p:nvPr/>
-        </p:nvSpPr>
-        <p:spPr>
-          <a:xfrm>
-            <a:off x="6217920" y="4434840"/>
-            <a:ext cx="5532120" cy="2103120"/>
-          </a:xfrm>
-          <a:prstGeom prst="rect">
-            <a:avLst/>
-          </a:prstGeom>
-          <a:solidFill>
-            <a:srgbClr val="F2F2F2"/>
-          </a:solidFill>
-          <a:ln w="15875">
-            <a:solidFill>
-              <a:srgbClr val="548235"/>
-            </a:solidFill>
-          </a:ln>
-        </p:spPr>
-        <p:txBody>
-          <a:bodyPr wrap="square" lIns="137160" rIns="137160" tIns="109728">
-            <a:spAutoFit/>
-          </a:bodyPr>
-          <a:lstStyle/>
-          <a:p>
-            <a:r>
-              <a:rPr sz="1500" b="1">
-                <a:solidFill>
-                  <a:srgbClr val="548235"/>
-                </a:solidFill>
-              </a:rPr>
-              <a:t>Electrification re-shuffles the deck</a:t>
-            </a:r>
-          </a:p>
-          <a:p>
-            <a:pPr>
-              <a:spcBef>
-                <a:spcPts val="400"/>
-              </a:spcBef>
-            </a:pPr>
-            <a:r>
-              <a:rPr sz="1200">
-                <a:solidFill>
-                  <a:srgbClr val="202020"/>
-                </a:solidFill>
-              </a:rPr>
-              <a:t>Regen braking cuts friction wear 64-95% (multiple peer-reviewed studies)</a:t>
-            </a:r>
-          </a:p>
-          <a:p>
-            <a:pPr>
-              <a:spcBef>
-                <a:spcPts val="400"/>
-              </a:spcBef>
-            </a:pPr>
-            <a:r>
-              <a:rPr sz="1200">
-                <a:solidFill>
-                  <a:srgbClr val="202020"/>
-                </a:solidFill>
-              </a:rPr>
-              <a:t>Friction aftermarket growth ~2% CAGR with EV headwind</a:t>
-            </a:r>
-          </a:p>
-          <a:p>
-            <a:pPr>
-              <a:spcBef>
-                <a:spcPts val="400"/>
-              </a:spcBef>
-            </a:pPr>
-            <a:r>
-              <a:rPr sz="1200">
-                <a:solidFill>
-                  <a:srgbClr val="202020"/>
-                </a:solidFill>
-              </a:rPr>
-              <a:t>EU brake-dust limits for heavy vehicles expected ~2030</a:t>
-            </a:r>
-          </a:p>
-          <a:p>
-            <a:pPr>
-              <a:spcBef>
-                <a:spcPts val="400"/>
-              </a:spcBef>
-            </a:pPr>
-            <a:r>
-              <a:rPr sz="1200">
-                <a:solidFill>
-                  <a:srgbClr val="202020"/>
-                </a:solidFill>
-              </a:rPr>
-              <a:t>Value shifts: wear parts → corrosion/NVH/low-dust + retarders &amp; blending</a:t>
-            </a:r>
-          </a:p>
-        </p:txBody>
-      </p:sp>
-    </p:spTree>
-  </p:cSld>
-  <p:clrMapOvr>
-    <a:masterClrMapping/>
-  </p:clrMapOvr>
-</p:sld>
-</file>
-
-<file path=ppt/slides/slide20.xml><?xml version="1.0" encoding="utf-8"?>
+<file path=ppt/slides/slide21.xml><?xml version="1.0" encoding="utf-8"?>
 <p:sld xmlns:a="http://schemas.openxmlformats.org/drawingml/2006/main" xmlns:p="http://schemas.openxmlformats.org/presentationml/2006/main" xmlns:r="http://schemas.openxmlformats.org/officeDocument/2006/relationships">
   <p:cSld>
     <p:spTree>
@@ -11604,7 +12141,7 @@
 </p:sld>
 </file>
 
-<file path=ppt/slides/slide21.xml><?xml version="1.0" encoding="utf-8"?>
+<file path=ppt/slides/slide22.xml><?xml version="1.0" encoding="utf-8"?>
 <p:sld xmlns:a="http://schemas.openxmlformats.org/drawingml/2006/main" xmlns:p="http://schemas.openxmlformats.org/presentationml/2006/main" xmlns:r="http://schemas.openxmlformats.org/officeDocument/2006/relationships">
   <p:cSld>
     <p:spTree>
@@ -12121,7 +12658,7 @@
 </p:sld>
 </file>
 
-<file path=ppt/slides/slide22.xml><?xml version="1.0" encoding="utf-8"?>
+<file path=ppt/slides/slide23.xml><?xml version="1.0" encoding="utf-8"?>
 <p:sld xmlns:a="http://schemas.openxmlformats.org/drawingml/2006/main" xmlns:p="http://schemas.openxmlformats.org/presentationml/2006/main" xmlns:r="http://schemas.openxmlformats.org/officeDocument/2006/relationships">
   <p:cSld>
     <p:spTree>

--- a/TBK_rd_gap_slides.pptx
+++ b/TBK_rd_gap_slides.pptx
@@ -8418,8 +8418,8 @@
         </p:nvSpPr>
         <p:spPr>
           <a:xfrm>
-            <a:off x="6583680" y="1463040"/>
-            <a:ext cx="5166360" cy="2240280"/>
+            <a:off x="6583680" y="1417320"/>
+            <a:ext cx="5166360" cy="1481328"/>
           </a:xfrm>
           <a:prstGeom prst="rect">
             <a:avLst/>
@@ -8445,52 +8445,37 @@
                   <a:srgbClr val="1F4E78"/>
                 </a:solidFill>
               </a:rPr>
-              <a:t>Lesson 1: TBK's ~20-23% OE contribution is the industry condition — aftermarket is the cure</a:t>
-            </a:r>
-          </a:p>
-          <a:p>
-            <a:pPr>
-              <a:spcBef>
-                <a:spcPts val="400"/>
-              </a:spcBef>
-            </a:pPr>
-            <a:r>
-              <a:rPr sz="1100">
-                <a:solidFill>
-                  <a:srgbClr val="202020"/>
-                </a:solidFill>
-              </a:rPr>
-              <a:t>Haldex OE truck/trailer: CII 22-32% every year 2009-19, EBIT NEGATIVE (-4 to -12%); Europe truck EBIT hit -32%</a:t>
-            </a:r>
-          </a:p>
-          <a:p>
-            <a:pPr>
-              <a:spcBef>
-                <a:spcPts val="400"/>
-              </a:spcBef>
-            </a:pPr>
-            <a:r>
-              <a:rPr sz="1100">
-                <a:solidFill>
-                  <a:srgbClr val="202020"/>
-                </a:solidFill>
-              </a:rPr>
-              <a:t>Aftermarket: CII 42-50% every year, EBIT +20-32% — it generated ALL of Haldex's profit</a:t>
-            </a:r>
-          </a:p>
-          <a:p>
-            <a:pPr>
-              <a:spcBef>
-                <a:spcPts val="400"/>
-              </a:spcBef>
-            </a:pPr>
-            <a:r>
-              <a:rPr sz="1100">
-                <a:solidFill>
-                  <a:srgbClr val="202020"/>
-                </a:solidFill>
-              </a:rPr>
-              <a:t>TBK's aftermarket (TBK Sales, 30.2% CM) is only ~10% of parent sales vs Haldex's 42% — the proven fastest route to group margin</a:t>
+              <a:t>1. Aftermarket is the profit pool</a:t>
+            </a:r>
+          </a:p>
+          <a:p>
+            <a:pPr>
+              <a:spcBef>
+                <a:spcPts val="400"/>
+              </a:spcBef>
+            </a:pPr>
+            <a:r>
+              <a:rPr sz="1050">
+                <a:solidFill>
+                  <a:srgbClr val="202020"/>
+                </a:solidFill>
+              </a:rPr>
+              <a:t>OE truck/trailer: CII 22-32% every year 2009-19, EBIT NEGATIVE (Europe truck -27%); aftermarket CII 42-50%, EBIT +27-37% — ALL of Haldex's profit</a:t>
+            </a:r>
+          </a:p>
+          <a:p>
+            <a:pPr>
+              <a:spcBef>
+                <a:spcPts val="400"/>
+              </a:spcBef>
+            </a:pPr>
+            <a:r>
+              <a:rPr sz="1050">
+                <a:solidFill>
+                  <a:srgbClr val="202020"/>
+                </a:solidFill>
+              </a:rPr>
+              <a:t>TBK's aftermarket (30.2% CM) is ~10% of parent sales vs Haldex's 42% — the proven fastest route to group margin</a:t>
             </a:r>
           </a:p>
         </p:txBody>
@@ -8503,8 +8488,78 @@
         </p:nvSpPr>
         <p:spPr>
           <a:xfrm>
-            <a:off x="6583680" y="3840480"/>
-            <a:ext cx="5166360" cy="2240280"/>
+            <a:off x="6583680" y="2990088"/>
+            <a:ext cx="5166360" cy="1481328"/>
+          </a:xfrm>
+          <a:prstGeom prst="rect">
+            <a:avLst/>
+          </a:prstGeom>
+          <a:solidFill>
+            <a:srgbClr val="F2F2F2"/>
+          </a:solidFill>
+          <a:ln w="15875">
+            <a:solidFill>
+              <a:srgbClr val="548235"/>
+            </a:solidFill>
+          </a:ln>
+        </p:spPr>
+        <p:txBody>
+          <a:bodyPr wrap="square" lIns="137160" rIns="137160" tIns="109728">
+            <a:spAutoFit/>
+          </a:bodyPr>
+          <a:lstStyle/>
+          <a:p>
+            <a:r>
+              <a:rPr sz="1500" b="1">
+                <a:solidFill>
+                  <a:srgbClr val="548235"/>
+                </a:solidFill>
+              </a:rPr>
+              <a:t>2. The pruning playbook (executed at Haldex)</a:t>
+            </a:r>
+          </a:p>
+          <a:p>
+            <a:pPr>
+              <a:spcBef>
+                <a:spcPts val="400"/>
+              </a:spcBef>
+            </a:pPr>
+            <a:r>
+              <a:rPr sz="1050">
+                <a:solidFill>
+                  <a:srgbClr val="202020"/>
+                </a:solidFill>
+              </a:rPr>
+              <a:t>Core products earned 40-56% CII / 15-32% EBIT (air treatment 55.8%/31.6%, suspension 47.1%/20.9%, ABA 41.4%/19.7%) while two bleeders dragged: ModulAir -70.4% EBIT, disc brake -6.3%</a:t>
+            </a:r>
+          </a:p>
+          <a:p>
+            <a:pPr>
+              <a:spcBef>
+                <a:spcPts val="400"/>
+              </a:spcBef>
+            </a:pPr>
+            <a:r>
+              <a:rPr sz="1050">
+                <a:solidFill>
+                  <a:srgbClr val="202020"/>
+                </a:solidFill>
+              </a:rPr>
+              <a:t>Verified: excluding the two bleeders, May-2014 EBIT margin = 11.2% vs 8.8% reported — pruning took Haldex over 10%</a:t>
+            </a:r>
+          </a:p>
+        </p:txBody>
+      </p:sp>
+      <p:sp>
+        <p:nvSpPr>
+          <p:cNvPr id="7" name="TextBox 6"/>
+          <p:cNvSpPr txBox="1"/>
+          <p:nvPr/>
+        </p:nvSpPr>
+        <p:spPr>
+          <a:xfrm>
+            <a:off x="6583680" y="4562856"/>
+            <a:ext cx="5166360" cy="1481328"/>
           </a:xfrm>
           <a:prstGeom prst="rect">
             <a:avLst/>
@@ -8530,66 +8585,51 @@
                   <a:srgbClr val="7F1D1D"/>
                 </a:solidFill>
               </a:rPr>
-              <a:t>Lesson 2: the subscale OE disc warning</a:t>
-            </a:r>
-          </a:p>
-          <a:p>
-            <a:pPr>
-              <a:spcBef>
-                <a:spcPts val="400"/>
-              </a:spcBef>
-            </a:pPr>
-            <a:r>
-              <a:rPr sz="1100">
-                <a:solidFill>
-                  <a:srgbClr val="202020"/>
-                </a:solidFill>
-              </a:rPr>
-              <a:t>Haldex disc brakes 2013-14: CII just 12.6% -&gt; 15.3%, EBIT -10.4% -&gt; -3.9% — the #3 player fighting Knorr/Meritor for OE disc sockets LOST MONEY on every unit</a:t>
-            </a:r>
-          </a:p>
-          <a:p>
-            <a:pPr>
-              <a:spcBef>
-                <a:spcPts val="400"/>
-              </a:spcBef>
-            </a:pPr>
-            <a:r>
-              <a:rPr sz="1100">
-                <a:solidFill>
-                  <a:srgbClr val="202020"/>
-                </a:solidFill>
-              </a:rPr>
-              <a:t>Caution: TBK's 68.7% D/BRAKE contribution is small-batch/replacement pricing, not series-OE economics</a:t>
-            </a:r>
-          </a:p>
-          <a:p>
-            <a:pPr>
-              <a:spcBef>
-                <a:spcPts val="400"/>
-              </a:spcBef>
-            </a:pPr>
-            <a:r>
-              <a:rPr sz="1100">
-                <a:solidFill>
-                  <a:srgbClr val="202020"/>
-                </a:solidFill>
-              </a:rPr>
-              <a:t>ADB strategy must be niche/aftermarket-priced and partnered (Brakes India) — Haldex's P&amp;L is what a frontal OE assault looks like</a:t>
-            </a:r>
-          </a:p>
-        </p:txBody>
-      </p:sp>
-      <p:sp>
-        <p:nvSpPr>
-          <p:cNvPr id="7" name="TextBox 6"/>
+              <a:t>3. The subscale OE disc warning</a:t>
+            </a:r>
+          </a:p>
+          <a:p>
+            <a:pPr>
+              <a:spcBef>
+                <a:spcPts val="400"/>
+              </a:spcBef>
+            </a:pPr>
+            <a:r>
+              <a:rPr sz="1050">
+                <a:solidFill>
+                  <a:srgbClr val="202020"/>
+                </a:solidFill>
+              </a:rPr>
+              <a:t>Haldex disc brakes: CII 12-15%, EBIT -13.6% -&gt; -6.3% — the #3 player fighting Knorr/Meritor LOST money per unit (supplier price rises, stalled plant transfer)</a:t>
+            </a:r>
+          </a:p>
+          <a:p>
+            <a:pPr>
+              <a:spcBef>
+                <a:spcPts val="400"/>
+              </a:spcBef>
+            </a:pPr>
+            <a:r>
+              <a:rPr sz="1050">
+                <a:solidFill>
+                  <a:srgbClr val="202020"/>
+                </a:solidFill>
+              </a:rPr>
+              <a:t>TBK's 68.7% D/BRAKE is small-batch pricing, not series-OE economics — go niche/aftermarket/partnered (Brakes India), never frontal</a:t>
+            </a:r>
+          </a:p>
+        </p:txBody>
+      </p:sp>
+      <p:sp>
+        <p:nvSpPr>
+          <p:cNvPr id="8" name="TextBox 7"/>
           <p:cNvSpPr txBox="1"/>
           <p:nvPr/>
         </p:nvSpPr>
         <p:spPr>
           <a:xfrm>
             <a:off x="457200" y="5897880"/>
-            <a:ext cx="11247120" cy="822960"/>
+            <a:ext cx="11247120" cy="868680"/>
           </a:xfrm>
           <a:prstGeom prst="rect">
             <a:avLst/>
@@ -8604,12 +8644,12 @@
           <a:p>
             <a:pPr algn="l"/>
             <a:r>
-              <a:rPr sz="1150" b="0">
-                <a:solidFill>
-                  <a:srgbClr val="595959"/>
-                </a:solidFill>
-              </a:rPr>
-              <a:t>Haldex product detail confirms the pattern: niche-dominant and electronics-adjacent products priced well (air treatment 53.5%, suspension 46.0%, ABS 42.7%, brake adjusters 41.2% CII) while contested systems (EBS 31.7%, EBIT +1.6%) and commodity friction (22.8%) did not. Haldex's 25.5-28.5% gross margin = ~22-30% OE + aftermarket overlay — the same arithmetic TBK needs.</a:t>
+              <a:rPr sz="1150" b="1">
+                <a:solidFill>
+                  <a:srgbClr val="1F4E78"/>
+                </a:solidFill>
+              </a:rPr>
+              <a:t>Applied to TBK (Japan H1 FY2025 data): pruning the sub-10% non-strategic lines (O/brake, A/brake, B/housing, G/case, gear &amp; processed components = 6.5% of sales) lifts series contribution 19.6% -&gt; 20.9% immediately — and the EBIT gain is larger once attached capacity costs go. TBK's high-margin cohort (¥3.0bn of lines at &gt;=20% CM) already runs at 27.3%: a portfolio focused at the level of its better products + a grown aftermarket is the Haldex &gt;10% playbook, re-run.</a:t>
             </a:r>
           </a:p>
         </p:txBody>

--- a/TBK_rd_gap_slides.pptx
+++ b/TBK_rd_gap_slides.pptx
@@ -28,6 +28,8 @@
     <p:sldId id="276" r:id="rId27"/>
     <p:sldId id="277" r:id="rId28"/>
     <p:sldId id="278" r:id="rId29"/>
+    <p:sldId id="279" r:id="rId30"/>
+    <p:sldId id="280" r:id="rId31"/>
   </p:sldIdLst>
   <p:sldSz cx="12191695" cy="6858000" type="screen4x3"/>
   <p:notesSz cx="6858000" cy="9144000"/>
@@ -354,7 +356,7 @@
           <a:p>
             <a:r>
               <a:rPr sz="1400"/>
-              <a:t>R&amp;D spend plan (US$M per year)</a:t>
+              <a:t>OPEX as % of sales: TBK vs peers, by business</a:t>
             </a:r>
           </a:p>
         </c:rich>
@@ -366,7 +368,7 @@
     <c:plotArea>
       <c:barChart>
         <c:barDir val="col"/>
-        <c:grouping val="stacked"/>
+        <c:grouping val="clustered"/>
         <c:ser>
           <c:idx val="0"/>
           <c:order val="0"/>
@@ -376,73 +378,41 @@
               <c:strCache>
                 <c:ptCount val="1"/>
                 <c:pt idx="0">
-                  <c:v>Parity run-rate (~4.5-5% of sales)</c:v>
+                  <c:v>TBK (blended)</c:v>
                 </c:pt>
               </c:strCache>
             </c:strRef>
           </c:tx>
           <c:spPr>
             <a:solidFill>
-              <a:srgbClr val="1F4E78"/>
+              <a:srgbClr val="7F1D1D"/>
             </a:solidFill>
           </c:spPr>
           <c:cat>
             <c:strRef>
-              <c:f>Sheet1!$A$2:$A$8</c:f>
+              <c:f>Sheet1!$A$2:$A$3</c:f>
               <c:strCache>
-                <c:ptCount val="7"/>
+                <c:ptCount val="2"/>
                 <c:pt idx="0">
-                  <c:v>FY26
-actual est.</c:v>
+                  <c:v>BRAKES panel</c:v>
                 </c:pt>
                 <c:pt idx="1">
-                  <c:v>FY27</c:v>
-                </c:pt>
-                <c:pt idx="2">
-                  <c:v>FY28</c:v>
-                </c:pt>
-                <c:pt idx="3">
-                  <c:v>FY29</c:v>
-                </c:pt>
-                <c:pt idx="4">
-                  <c:v>FY30</c:v>
-                </c:pt>
-                <c:pt idx="5">
-                  <c:v>FY31</c:v>
-                </c:pt>
-                <c:pt idx="6">
-                  <c:v>Steady state
-FY32+</c:v>
+                  <c:v>PUMPS panel</c:v>
                 </c:pt>
               </c:strCache>
             </c:strRef>
           </c:cat>
           <c:val>
             <c:numRef>
-              <c:f>Sheet1!$B$2:$B$8</c:f>
+              <c:f>Sheet1!$B$2:$B$3</c:f>
               <c:numCache>
                 <c:formatCode>General</c:formatCode>
-                <c:ptCount val="7"/>
+                <c:ptCount val="2"/>
                 <c:pt idx="0">
-                  <c:v>7.8</c:v>
+                  <c:v>9.7</c:v>
                 </c:pt>
                 <c:pt idx="1">
-                  <c:v>17</c:v>
-                </c:pt>
-                <c:pt idx="2">
-                  <c:v>17</c:v>
-                </c:pt>
-                <c:pt idx="3">
-                  <c:v>17</c:v>
-                </c:pt>
-                <c:pt idx="4">
-                  <c:v>17</c:v>
-                </c:pt>
-                <c:pt idx="5">
-                  <c:v>17</c:v>
-                </c:pt>
-                <c:pt idx="6">
-                  <c:v>17</c:v>
+                  <c:v>9.7</c:v>
                 </c:pt>
               </c:numCache>
             </c:numRef>
@@ -457,7 +427,56 @@
               <c:strCache>
                 <c:ptCount val="1"/>
                 <c:pt idx="0">
-                  <c:v>Deficit repayment (catch-up)</c:v>
+                  <c:v>Peer average</c:v>
+                </c:pt>
+              </c:strCache>
+            </c:strRef>
+          </c:tx>
+          <c:spPr>
+            <a:solidFill>
+              <a:srgbClr val="1F4E78"/>
+            </a:solidFill>
+          </c:spPr>
+          <c:cat>
+            <c:strRef>
+              <c:f>Sheet1!$A$2:$A$3</c:f>
+              <c:strCache>
+                <c:ptCount val="2"/>
+                <c:pt idx="0">
+                  <c:v>BRAKES panel</c:v>
+                </c:pt>
+                <c:pt idx="1">
+                  <c:v>PUMPS panel</c:v>
+                </c:pt>
+              </c:strCache>
+            </c:strRef>
+          </c:cat>
+          <c:val>
+            <c:numRef>
+              <c:f>Sheet1!$C$2:$C$3</c:f>
+              <c:numCache>
+                <c:formatCode>General</c:formatCode>
+                <c:ptCount val="2"/>
+                <c:pt idx="0">
+                  <c:v>13.8</c:v>
+                </c:pt>
+                <c:pt idx="1">
+                  <c:v>10.4</c:v>
+                </c:pt>
+              </c:numCache>
+            </c:numRef>
+          </c:val>
+        </c:ser>
+        <c:ser>
+          <c:idx val="2"/>
+          <c:order val="2"/>
+          <c:tx>
+            <c:strRef>
+              <c:f>Sheet1!$D$1</c:f>
+              <c:strCache>
+                <c:ptCount val="1"/>
+                <c:pt idx="0">
+                  <c:v>Peer median</c:v>
                 </c:pt>
               </c:strCache>
             </c:strRef>
@@ -469,67 +488,53 @@
           </c:spPr>
           <c:cat>
             <c:strRef>
-              <c:f>Sheet1!$A$2:$A$8</c:f>
+              <c:f>Sheet1!$A$2:$A$3</c:f>
               <c:strCache>
-                <c:ptCount val="7"/>
+                <c:ptCount val="2"/>
                 <c:pt idx="0">
-                  <c:v>FY26
-actual est.</c:v>
+                  <c:v>BRAKES panel</c:v>
                 </c:pt>
                 <c:pt idx="1">
-                  <c:v>FY27</c:v>
-                </c:pt>
-                <c:pt idx="2">
-                  <c:v>FY28</c:v>
-                </c:pt>
-                <c:pt idx="3">
-                  <c:v>FY29</c:v>
-                </c:pt>
-                <c:pt idx="4">
-                  <c:v>FY30</c:v>
-                </c:pt>
-                <c:pt idx="5">
-                  <c:v>FY31</c:v>
-                </c:pt>
-                <c:pt idx="6">
-                  <c:v>Steady state
-FY32+</c:v>
+                  <c:v>PUMPS panel</c:v>
                 </c:pt>
               </c:strCache>
             </c:strRef>
           </c:cat>
           <c:val>
             <c:numRef>
-              <c:f>Sheet1!$C$2:$C$8</c:f>
+              <c:f>Sheet1!$D$2:$D$3</c:f>
               <c:numCache>
                 <c:formatCode>General</c:formatCode>
-                <c:ptCount val="7"/>
+                <c:ptCount val="2"/>
                 <c:pt idx="0">
-                  <c:v>0</c:v>
+                  <c:v>13.6</c:v>
                 </c:pt>
                 <c:pt idx="1">
-                  <c:v>10</c:v>
-                </c:pt>
-                <c:pt idx="2">
-                  <c:v>10</c:v>
-                </c:pt>
-                <c:pt idx="3">
-                  <c:v>10</c:v>
-                </c:pt>
-                <c:pt idx="4">
-                  <c:v>10</c:v>
-                </c:pt>
-                <c:pt idx="5">
-                  <c:v>10</c:v>
-                </c:pt>
-                <c:pt idx="6">
-                  <c:v>0</c:v>
+                  <c:v>9.3</c:v>
                 </c:pt>
               </c:numCache>
             </c:numRef>
           </c:val>
         </c:ser>
-        <c:overlap val="100"/>
+        <c:dLbls>
+          <c:numFmt formatCode="0.0&quot;%&quot;" sourceLinked="0"/>
+          <c:txPr>
+            <a:bodyPr/>
+            <a:lstStyle/>
+            <a:p>
+              <a:pPr>
+                <a:defRPr sz="1100"/>
+              </a:pPr>
+            </a:p>
+          </c:txPr>
+          <c:showLegendKey val="0"/>
+          <c:showVal val="1"/>
+          <c:showCatName val="0"/>
+          <c:showSerName val="0"/>
+          <c:showPercent val="0"/>
+          <c:showBubbleSize val="0"/>
+          <c:showLeaderLines val="1"/>
+        </c:dLbls>
         <c:axId val="-2068027336"/>
         <c:axId val="-2113994440"/>
       </c:barChart>
@@ -548,7 +553,287 @@
           <a:lstStyle/>
           <a:p>
             <a:pPr>
-              <a:defRPr sz="900"/>
+              <a:defRPr sz="1100"/>
+            </a:pPr>
+          </a:p>
+        </c:txPr>
+        <c:crossAx val="-2113994440"/>
+        <c:crosses val="autoZero"/>
+        <c:auto val="1"/>
+        <c:lblAlgn val="ctr"/>
+        <c:lblOffset val="100"/>
+        <c:noMultiLvlLbl val="0"/>
+      </c:catAx>
+      <c:valAx>
+        <c:axId val="-2113994440"/>
+        <c:scaling/>
+        <c:delete val="0"/>
+        <c:axPos val="l"/>
+        <c:majorGridlines/>
+        <c:majorTickMark val="out"/>
+        <c:minorTickMark val="none"/>
+        <c:tickLblPos val="nextTo"/>
+        <c:crossAx val="-2068027336"/>
+        <c:crosses val="autoZero"/>
+      </c:valAx>
+    </c:plotArea>
+    <c:legend>
+      <c:legendPos val="b"/>
+      <c:overlay val="0"/>
+      <c:txPr>
+        <a:bodyPr/>
+        <a:lstStyle/>
+        <a:p>
+          <a:pPr>
+            <a:defRPr sz="1200"/>
+          </a:pPr>
+        </a:p>
+      </c:txPr>
+    </c:legend>
+    <c:dispBlanksAs val="gap"/>
+  </c:chart>
+  <c:txPr>
+    <a:bodyPr/>
+    <a:lstStyle/>
+    <a:p>
+      <a:pPr>
+        <a:defRPr sz="1800"/>
+      </a:pPr>
+      <a:endParaRPr lang="en-US"/>
+    </a:p>
+  </c:txPr>
+  <c:externalData r:id="rId1">
+    <c:autoUpdate val="0"/>
+  </c:externalData>
+</c:chartSpace>
+</file>
+
+<file path=ppt/charts/chart11.xml><?xml version="1.0" encoding="utf-8"?>
+<c:chartSpace xmlns:c="http://schemas.openxmlformats.org/drawingml/2006/chart" xmlns:a="http://schemas.openxmlformats.org/drawingml/2006/main" xmlns:r="http://schemas.openxmlformats.org/officeDocument/2006/relationships">
+  <c:date1904 val="0"/>
+  <c:chart>
+    <c:title>
+      <c:tx>
+        <c:rich>
+          <a:bodyPr/>
+          <a:lstStyle/>
+          <a:p>
+            <a:r>
+              <a:rPr sz="1400"/>
+              <a:t>Actual R&amp;D vs peer-floor benchmark (US$M)</a:t>
+            </a:r>
+          </a:p>
+        </c:rich>
+      </c:tx>
+      <c:layout/>
+      <c:overlay val="0"/>
+    </c:title>
+    <c:autoTitleDeleted val="0"/>
+    <c:plotArea>
+      <c:barChart>
+        <c:barDir val="col"/>
+        <c:grouping val="clustered"/>
+        <c:ser>
+          <c:idx val="0"/>
+          <c:order val="0"/>
+          <c:tx>
+            <c:strRef>
+              <c:f>Sheet1!$B$1</c:f>
+              <c:strCache>
+                <c:ptCount val="1"/>
+                <c:pt idx="0">
+                  <c:v>TBK actual R&amp;D ($M)</c:v>
+                </c:pt>
+              </c:strCache>
+            </c:strRef>
+          </c:tx>
+          <c:spPr>
+            <a:solidFill>
+              <a:srgbClr val="7F1D1D"/>
+            </a:solidFill>
+          </c:spPr>
+          <c:cat>
+            <c:strRef>
+              <c:f>Sheet1!$A$2:$A$10</c:f>
+              <c:strCache>
+                <c:ptCount val="9"/>
+                <c:pt idx="0">
+                  <c:v>2017</c:v>
+                </c:pt>
+                <c:pt idx="1">
+                  <c:v>2018</c:v>
+                </c:pt>
+                <c:pt idx="2">
+                  <c:v>2019</c:v>
+                </c:pt>
+                <c:pt idx="3">
+                  <c:v>2020</c:v>
+                </c:pt>
+                <c:pt idx="4">
+                  <c:v>2021</c:v>
+                </c:pt>
+                <c:pt idx="5">
+                  <c:v>2022</c:v>
+                </c:pt>
+                <c:pt idx="6">
+                  <c:v>2023</c:v>
+                </c:pt>
+                <c:pt idx="7">
+                  <c:v>2024</c:v>
+                </c:pt>
+                <c:pt idx="8">
+                  <c:v>2025</c:v>
+                </c:pt>
+              </c:strCache>
+            </c:strRef>
+          </c:cat>
+          <c:val>
+            <c:numRef>
+              <c:f>Sheet1!$B$2:$B$10</c:f>
+              <c:numCache>
+                <c:formatCode>General</c:formatCode>
+                <c:ptCount val="9"/>
+                <c:pt idx="0">
+                  <c:v>11.1</c:v>
+                </c:pt>
+                <c:pt idx="1">
+                  <c:v>11.4</c:v>
+                </c:pt>
+                <c:pt idx="2">
+                  <c:v>10.6</c:v>
+                </c:pt>
+                <c:pt idx="3">
+                  <c:v>11.4</c:v>
+                </c:pt>
+                <c:pt idx="4">
+                  <c:v>11.6</c:v>
+                </c:pt>
+                <c:pt idx="5">
+                  <c:v>11.8</c:v>
+                </c:pt>
+                <c:pt idx="6">
+                  <c:v>8.9</c:v>
+                </c:pt>
+                <c:pt idx="7">
+                  <c:v>8.1</c:v>
+                </c:pt>
+                <c:pt idx="8">
+                  <c:v>7.8</c:v>
+                </c:pt>
+              </c:numCache>
+            </c:numRef>
+          </c:val>
+        </c:ser>
+        <c:ser>
+          <c:idx val="1"/>
+          <c:order val="1"/>
+          <c:tx>
+            <c:strRef>
+              <c:f>Sheet1!$C$1</c:f>
+              <c:strCache>
+                <c:ptCount val="1"/>
+                <c:pt idx="0">
+                  <c:v>At 4.5% of sales ($M)</c:v>
+                </c:pt>
+              </c:strCache>
+            </c:strRef>
+          </c:tx>
+          <c:spPr>
+            <a:solidFill>
+              <a:srgbClr val="1F4E78"/>
+            </a:solidFill>
+          </c:spPr>
+          <c:cat>
+            <c:strRef>
+              <c:f>Sheet1!$A$2:$A$10</c:f>
+              <c:strCache>
+                <c:ptCount val="9"/>
+                <c:pt idx="0">
+                  <c:v>2017</c:v>
+                </c:pt>
+                <c:pt idx="1">
+                  <c:v>2018</c:v>
+                </c:pt>
+                <c:pt idx="2">
+                  <c:v>2019</c:v>
+                </c:pt>
+                <c:pt idx="3">
+                  <c:v>2020</c:v>
+                </c:pt>
+                <c:pt idx="4">
+                  <c:v>2021</c:v>
+                </c:pt>
+                <c:pt idx="5">
+                  <c:v>2022</c:v>
+                </c:pt>
+                <c:pt idx="6">
+                  <c:v>2023</c:v>
+                </c:pt>
+                <c:pt idx="7">
+                  <c:v>2024</c:v>
+                </c:pt>
+                <c:pt idx="8">
+                  <c:v>2025</c:v>
+                </c:pt>
+              </c:strCache>
+            </c:strRef>
+          </c:cat>
+          <c:val>
+            <c:numRef>
+              <c:f>Sheet1!$C$2:$C$10</c:f>
+              <c:numCache>
+                <c:formatCode>General</c:formatCode>
+                <c:ptCount val="9"/>
+                <c:pt idx="0">
+                  <c:v>19.4</c:v>
+                </c:pt>
+                <c:pt idx="1">
+                  <c:v>20.9</c:v>
+                </c:pt>
+                <c:pt idx="2">
+                  <c:v>21.8</c:v>
+                </c:pt>
+                <c:pt idx="3">
+                  <c:v>21.3</c:v>
+                </c:pt>
+                <c:pt idx="4">
+                  <c:v>18.7</c:v>
+                </c:pt>
+                <c:pt idx="5">
+                  <c:v>20.5</c:v>
+                </c:pt>
+                <c:pt idx="6">
+                  <c:v>17.8</c:v>
+                </c:pt>
+                <c:pt idx="7">
+                  <c:v>17.7</c:v>
+                </c:pt>
+                <c:pt idx="8">
+                  <c:v>16.1</c:v>
+                </c:pt>
+              </c:numCache>
+            </c:numRef>
+          </c:val>
+        </c:ser>
+        <c:axId val="-2068027336"/>
+        <c:axId val="-2113994440"/>
+      </c:barChart>
+      <c:catAx>
+        <c:axId val="-2068027336"/>
+        <c:scaling>
+          <c:orientation val="minMax"/>
+        </c:scaling>
+        <c:delete val="0"/>
+        <c:axPos val="b"/>
+        <c:majorTickMark val="out"/>
+        <c:minorTickMark val="none"/>
+        <c:tickLblPos val="nextTo"/>
+        <c:txPr>
+          <a:bodyPr/>
+          <a:lstStyle/>
+          <a:p>
+            <a:pPr>
+              <a:defRPr sz="1000"/>
             </a:pPr>
           </a:p>
         </c:txPr>
@@ -603,7 +888,268 @@
 </c:chartSpace>
 </file>
 
-<file path=ppt/charts/chart11.xml><?xml version="1.0" encoding="utf-8"?>
+<file path=ppt/charts/chart12.xml><?xml version="1.0" encoding="utf-8"?>
+<c:chartSpace xmlns:c="http://schemas.openxmlformats.org/drawingml/2006/chart" xmlns:a="http://schemas.openxmlformats.org/drawingml/2006/main" xmlns:r="http://schemas.openxmlformats.org/officeDocument/2006/relationships">
+  <c:date1904 val="0"/>
+  <c:chart>
+    <c:title>
+      <c:tx>
+        <c:rich>
+          <a:bodyPr/>
+          <a:lstStyle/>
+          <a:p>
+            <a:r>
+              <a:rPr sz="1400"/>
+              <a:t>R&amp;D spend plan (US$M per year)</a:t>
+            </a:r>
+          </a:p>
+        </c:rich>
+      </c:tx>
+      <c:layout/>
+      <c:overlay val="0"/>
+    </c:title>
+    <c:autoTitleDeleted val="0"/>
+    <c:plotArea>
+      <c:barChart>
+        <c:barDir val="col"/>
+        <c:grouping val="stacked"/>
+        <c:ser>
+          <c:idx val="0"/>
+          <c:order val="0"/>
+          <c:tx>
+            <c:strRef>
+              <c:f>Sheet1!$B$1</c:f>
+              <c:strCache>
+                <c:ptCount val="1"/>
+                <c:pt idx="0">
+                  <c:v>Parity run-rate (~4.5-5% of sales)</c:v>
+                </c:pt>
+              </c:strCache>
+            </c:strRef>
+          </c:tx>
+          <c:spPr>
+            <a:solidFill>
+              <a:srgbClr val="1F4E78"/>
+            </a:solidFill>
+          </c:spPr>
+          <c:cat>
+            <c:strRef>
+              <c:f>Sheet1!$A$2:$A$8</c:f>
+              <c:strCache>
+                <c:ptCount val="7"/>
+                <c:pt idx="0">
+                  <c:v>FY26
+actual est.</c:v>
+                </c:pt>
+                <c:pt idx="1">
+                  <c:v>FY27</c:v>
+                </c:pt>
+                <c:pt idx="2">
+                  <c:v>FY28</c:v>
+                </c:pt>
+                <c:pt idx="3">
+                  <c:v>FY29</c:v>
+                </c:pt>
+                <c:pt idx="4">
+                  <c:v>FY30</c:v>
+                </c:pt>
+                <c:pt idx="5">
+                  <c:v>FY31</c:v>
+                </c:pt>
+                <c:pt idx="6">
+                  <c:v>Steady state
+FY32+</c:v>
+                </c:pt>
+              </c:strCache>
+            </c:strRef>
+          </c:cat>
+          <c:val>
+            <c:numRef>
+              <c:f>Sheet1!$B$2:$B$8</c:f>
+              <c:numCache>
+                <c:formatCode>General</c:formatCode>
+                <c:ptCount val="7"/>
+                <c:pt idx="0">
+                  <c:v>7.8</c:v>
+                </c:pt>
+                <c:pt idx="1">
+                  <c:v>17</c:v>
+                </c:pt>
+                <c:pt idx="2">
+                  <c:v>17</c:v>
+                </c:pt>
+                <c:pt idx="3">
+                  <c:v>17</c:v>
+                </c:pt>
+                <c:pt idx="4">
+                  <c:v>17</c:v>
+                </c:pt>
+                <c:pt idx="5">
+                  <c:v>17</c:v>
+                </c:pt>
+                <c:pt idx="6">
+                  <c:v>17</c:v>
+                </c:pt>
+              </c:numCache>
+            </c:numRef>
+          </c:val>
+        </c:ser>
+        <c:ser>
+          <c:idx val="1"/>
+          <c:order val="1"/>
+          <c:tx>
+            <c:strRef>
+              <c:f>Sheet1!$C$1</c:f>
+              <c:strCache>
+                <c:ptCount val="1"/>
+                <c:pt idx="0">
+                  <c:v>Deficit repayment (catch-up)</c:v>
+                </c:pt>
+              </c:strCache>
+            </c:strRef>
+          </c:tx>
+          <c:spPr>
+            <a:solidFill>
+              <a:srgbClr val="548235"/>
+            </a:solidFill>
+          </c:spPr>
+          <c:cat>
+            <c:strRef>
+              <c:f>Sheet1!$A$2:$A$8</c:f>
+              <c:strCache>
+                <c:ptCount val="7"/>
+                <c:pt idx="0">
+                  <c:v>FY26
+actual est.</c:v>
+                </c:pt>
+                <c:pt idx="1">
+                  <c:v>FY27</c:v>
+                </c:pt>
+                <c:pt idx="2">
+                  <c:v>FY28</c:v>
+                </c:pt>
+                <c:pt idx="3">
+                  <c:v>FY29</c:v>
+                </c:pt>
+                <c:pt idx="4">
+                  <c:v>FY30</c:v>
+                </c:pt>
+                <c:pt idx="5">
+                  <c:v>FY31</c:v>
+                </c:pt>
+                <c:pt idx="6">
+                  <c:v>Steady state
+FY32+</c:v>
+                </c:pt>
+              </c:strCache>
+            </c:strRef>
+          </c:cat>
+          <c:val>
+            <c:numRef>
+              <c:f>Sheet1!$C$2:$C$8</c:f>
+              <c:numCache>
+                <c:formatCode>General</c:formatCode>
+                <c:ptCount val="7"/>
+                <c:pt idx="0">
+                  <c:v>0</c:v>
+                </c:pt>
+                <c:pt idx="1">
+                  <c:v>10</c:v>
+                </c:pt>
+                <c:pt idx="2">
+                  <c:v>10</c:v>
+                </c:pt>
+                <c:pt idx="3">
+                  <c:v>10</c:v>
+                </c:pt>
+                <c:pt idx="4">
+                  <c:v>10</c:v>
+                </c:pt>
+                <c:pt idx="5">
+                  <c:v>10</c:v>
+                </c:pt>
+                <c:pt idx="6">
+                  <c:v>0</c:v>
+                </c:pt>
+              </c:numCache>
+            </c:numRef>
+          </c:val>
+        </c:ser>
+        <c:overlap val="100"/>
+        <c:axId val="-2068027336"/>
+        <c:axId val="-2113994440"/>
+      </c:barChart>
+      <c:catAx>
+        <c:axId val="-2068027336"/>
+        <c:scaling>
+          <c:orientation val="minMax"/>
+        </c:scaling>
+        <c:delete val="0"/>
+        <c:axPos val="b"/>
+        <c:majorTickMark val="out"/>
+        <c:minorTickMark val="none"/>
+        <c:tickLblPos val="nextTo"/>
+        <c:txPr>
+          <a:bodyPr/>
+          <a:lstStyle/>
+          <a:p>
+            <a:pPr>
+              <a:defRPr sz="900"/>
+            </a:pPr>
+          </a:p>
+        </c:txPr>
+        <c:crossAx val="-2113994440"/>
+        <c:crosses val="autoZero"/>
+        <c:auto val="1"/>
+        <c:lblAlgn val="ctr"/>
+        <c:lblOffset val="100"/>
+        <c:noMultiLvlLbl val="0"/>
+      </c:catAx>
+      <c:valAx>
+        <c:axId val="-2113994440"/>
+        <c:scaling/>
+        <c:delete val="0"/>
+        <c:axPos val="l"/>
+        <c:majorGridlines/>
+        <c:majorTickMark val="out"/>
+        <c:minorTickMark val="none"/>
+        <c:tickLblPos val="nextTo"/>
+        <c:crossAx val="-2068027336"/>
+        <c:crosses val="autoZero"/>
+      </c:valAx>
+    </c:plotArea>
+    <c:legend>
+      <c:legendPos val="b"/>
+      <c:overlay val="0"/>
+      <c:txPr>
+        <a:bodyPr/>
+        <a:lstStyle/>
+        <a:p>
+          <a:pPr>
+            <a:defRPr sz="1100"/>
+          </a:pPr>
+        </a:p>
+      </c:txPr>
+    </c:legend>
+    <c:dispBlanksAs val="gap"/>
+  </c:chart>
+  <c:txPr>
+    <a:bodyPr/>
+    <a:lstStyle/>
+    <a:p>
+      <a:pPr>
+        <a:defRPr sz="1800"/>
+      </a:pPr>
+      <a:endParaRPr lang="en-US"/>
+    </a:p>
+  </c:txPr>
+  <c:externalData r:id="rId1">
+    <c:autoUpdate val="0"/>
+  </c:externalData>
+</c:chartSpace>
+</file>
+
+<file path=ppt/charts/chart13.xml><?xml version="1.0" encoding="utf-8"?>
 <c:chartSpace xmlns:c="http://schemas.openxmlformats.org/drawingml/2006/chart" xmlns:a="http://schemas.openxmlformats.org/drawingml/2006/main" xmlns:r="http://schemas.openxmlformats.org/officeDocument/2006/relationships">
   <c:date1904 val="0"/>
   <c:chart>
@@ -830,7 +1376,7 @@
 </c:chartSpace>
 </file>
 
-<file path=ppt/charts/chart12.xml><?xml version="1.0" encoding="utf-8"?>
+<file path=ppt/charts/chart14.xml><?xml version="1.0" encoding="utf-8"?>
 <c:chartSpace xmlns:c="http://schemas.openxmlformats.org/drawingml/2006/chart" xmlns:a="http://schemas.openxmlformats.org/drawingml/2006/main" xmlns:r="http://schemas.openxmlformats.org/officeDocument/2006/relationships">
   <c:date1904 val="0"/>
   <c:roundedCorners val="0"/>
@@ -1221,7 +1767,7 @@
 </c:chartSpace>
 </file>
 
-<file path=ppt/charts/chart13.xml><?xml version="1.0" encoding="utf-8"?>
+<file path=ppt/charts/chart15.xml><?xml version="1.0" encoding="utf-8"?>
 <c:chartSpace xmlns:c="http://schemas.openxmlformats.org/drawingml/2006/chart" xmlns:a="http://schemas.openxmlformats.org/drawingml/2006/main" xmlns:r="http://schemas.openxmlformats.org/officeDocument/2006/relationships">
   <c:date1904 val="0"/>
   <c:chart>
@@ -1723,7 +2269,7 @@
 </c:chartSpace>
 </file>
 
-<file path=ppt/charts/chart14.xml><?xml version="1.0" encoding="utf-8"?>
+<file path=ppt/charts/chart16.xml><?xml version="1.0" encoding="utf-8"?>
 <c:chartSpace xmlns:c="http://schemas.openxmlformats.org/drawingml/2006/chart" xmlns:a="http://schemas.openxmlformats.org/drawingml/2006/main" xmlns:r="http://schemas.openxmlformats.org/officeDocument/2006/relationships">
   <c:date1904 val="0"/>
   <c:chart>
@@ -3669,8 +4215,8 @@
           <a:lstStyle/>
           <a:p>
             <a:r>
-              <a:rPr sz="1400"/>
-              <a:t>OPEX as % of sales: TBK vs peers, by business</a:t>
+              <a:rPr sz="1300"/>
+              <a:t>Contribution margin by brake product (%)</a:t>
             </a:r>
           </a:p>
         </c:rich>
@@ -3692,7 +4238,7 @@
               <c:strCache>
                 <c:ptCount val="1"/>
                 <c:pt idx="0">
-                  <c:v>TBK (blended)</c:v>
+                  <c:v>TBK</c:v>
                 </c:pt>
               </c:strCache>
             </c:strRef>
@@ -3704,29 +4250,59 @@
           </c:spPr>
           <c:cat>
             <c:strRef>
-              <c:f>Sheet1!$A$2:$A$3</c:f>
+              <c:f>Sheet1!$A$2:$A$8</c:f>
               <c:strCache>
-                <c:ptCount val="2"/>
+                <c:ptCount val="7"/>
                 <c:pt idx="0">
-                  <c:v>BRAKES panel</c:v>
+                  <c:v>Foundation
+drum (2L)</c:v>
                 </c:pt>
                 <c:pt idx="1">
-                  <c:v>PUMPS panel</c:v>
+                  <c:v>Friction /
+linings</c:v>
+                </c:pt>
+                <c:pt idx="2">
+                  <c:v>Brake
+drum</c:v>
+                </c:pt>
+                <c:pt idx="3">
+                  <c:v>Disc
+brake</c:v>
+                </c:pt>
+                <c:pt idx="4">
+                  <c:v>Brake adjusters
+(ABA)</c:v>
+                </c:pt>
+                <c:pt idx="5">
+                  <c:v>ABS / EBS
+electronics</c:v>
+                </c:pt>
+                <c:pt idx="6">
+                  <c:v>Aftermarket</c:v>
                 </c:pt>
               </c:strCache>
             </c:strRef>
           </c:cat>
           <c:val>
             <c:numRef>
-              <c:f>Sheet1!$B$2:$B$3</c:f>
+              <c:f>Sheet1!$B$2:$B$8</c:f>
               <c:numCache>
                 <c:formatCode>General</c:formatCode>
-                <c:ptCount val="2"/>
+                <c:ptCount val="7"/>
                 <c:pt idx="0">
-                  <c:v>9.7</c:v>
+                  <c:v>15.8</c:v>
                 </c:pt>
                 <c:pt idx="1">
-                  <c:v>9.7</c:v>
+                  <c:v>25.1</c:v>
+                </c:pt>
+                <c:pt idx="2">
+                  <c:v>22.9</c:v>
+                </c:pt>
+                <c:pt idx="3">
+                  <c:v>68.7</c:v>
+                </c:pt>
+                <c:pt idx="6">
+                  <c:v>30.2</c:v>
                 </c:pt>
               </c:numCache>
             </c:numRef>
@@ -3741,7 +4317,7 @@
               <c:strCache>
                 <c:ptCount val="1"/>
                 <c:pt idx="0">
-                  <c:v>Peer average</c:v>
+                  <c:v>Haldex</c:v>
                 </c:pt>
               </c:strCache>
             </c:strRef>
@@ -3753,78 +4329,59 @@
           </c:spPr>
           <c:cat>
             <c:strRef>
-              <c:f>Sheet1!$A$2:$A$3</c:f>
+              <c:f>Sheet1!$A$2:$A$8</c:f>
               <c:strCache>
-                <c:ptCount val="2"/>
+                <c:ptCount val="7"/>
                 <c:pt idx="0">
-                  <c:v>BRAKES panel</c:v>
+                  <c:v>Foundation
+drum (2L)</c:v>
                 </c:pt>
                 <c:pt idx="1">
-                  <c:v>PUMPS panel</c:v>
+                  <c:v>Friction /
+linings</c:v>
+                </c:pt>
+                <c:pt idx="2">
+                  <c:v>Brake
+drum</c:v>
+                </c:pt>
+                <c:pt idx="3">
+                  <c:v>Disc
+brake</c:v>
+                </c:pt>
+                <c:pt idx="4">
+                  <c:v>Brake adjusters
+(ABA)</c:v>
+                </c:pt>
+                <c:pt idx="5">
+                  <c:v>ABS / EBS
+electronics</c:v>
+                </c:pt>
+                <c:pt idx="6">
+                  <c:v>Aftermarket</c:v>
                 </c:pt>
               </c:strCache>
             </c:strRef>
           </c:cat>
           <c:val>
             <c:numRef>
-              <c:f>Sheet1!$C$2:$C$3</c:f>
+              <c:f>Sheet1!$C$2:$C$8</c:f>
               <c:numCache>
                 <c:formatCode>General</c:formatCode>
-                <c:ptCount val="2"/>
-                <c:pt idx="0">
-                  <c:v>13.8</c:v>
-                </c:pt>
+                <c:ptCount val="7"/>
                 <c:pt idx="1">
-                  <c:v>10.4</c:v>
-                </c:pt>
-              </c:numCache>
-            </c:numRef>
-          </c:val>
-        </c:ser>
-        <c:ser>
-          <c:idx val="2"/>
-          <c:order val="2"/>
-          <c:tx>
-            <c:strRef>
-              <c:f>Sheet1!$D$1</c:f>
-              <c:strCache>
-                <c:ptCount val="1"/>
-                <c:pt idx="0">
-                  <c:v>Peer median</c:v>
-                </c:pt>
-              </c:strCache>
-            </c:strRef>
-          </c:tx>
-          <c:spPr>
-            <a:solidFill>
-              <a:srgbClr val="548235"/>
-            </a:solidFill>
-          </c:spPr>
-          <c:cat>
-            <c:strRef>
-              <c:f>Sheet1!$A$2:$A$3</c:f>
-              <c:strCache>
-                <c:ptCount val="2"/>
-                <c:pt idx="0">
-                  <c:v>BRAKES panel</c:v>
-                </c:pt>
-                <c:pt idx="1">
-                  <c:v>PUMPS panel</c:v>
-                </c:pt>
-              </c:strCache>
-            </c:strRef>
-          </c:cat>
-          <c:val>
-            <c:numRef>
-              <c:f>Sheet1!$D$2:$D$3</c:f>
-              <c:numCache>
-                <c:formatCode>General</c:formatCode>
-                <c:ptCount val="2"/>
-                <c:pt idx="0">
-                  <c:v>13.6</c:v>
-                </c:pt>
-                <c:pt idx="1">
-                  <c:v>9.3</c:v>
+                  <c:v>23.2</c:v>
+                </c:pt>
+                <c:pt idx="3">
+                  <c:v>14.0</c:v>
+                </c:pt>
+                <c:pt idx="4">
+                  <c:v>41.4</c:v>
+                </c:pt>
+                <c:pt idx="5">
+                  <c:v>43.4</c:v>
+                </c:pt>
+                <c:pt idx="6">
+                  <c:v>48.2</c:v>
                 </c:pt>
               </c:numCache>
             </c:numRef>
@@ -3837,7 +4394,7 @@
             <a:lstStyle/>
             <a:p>
               <a:pPr>
-                <a:defRPr sz="1100"/>
+                <a:defRPr sz="1000"/>
               </a:pPr>
             </a:p>
           </c:txPr>
@@ -3867,7 +4424,7 @@
           <a:lstStyle/>
           <a:p>
             <a:pPr>
-              <a:defRPr sz="1100"/>
+              <a:defRPr sz="900"/>
             </a:pPr>
           </a:p>
         </c:txPr>
@@ -3899,7 +4456,7 @@
         <a:lstStyle/>
         <a:p>
           <a:pPr>
-            <a:defRPr sz="1200"/>
+            <a:defRPr sz="1100"/>
           </a:pPr>
         </a:p>
       </c:txPr>
@@ -3933,8 +4490,8 @@
           <a:lstStyle/>
           <a:p>
             <a:r>
-              <a:rPr sz="1400"/>
-              <a:t>Actual R&amp;D vs peer-floor benchmark (US$M)</a:t>
+              <a:rPr sz="1300"/>
+              <a:t>Contribution margin by pump product (%)</a:t>
             </a:r>
           </a:p>
         </c:rich>
@@ -3956,7 +4513,7 @@
               <c:strCache>
                 <c:ptCount val="1"/>
                 <c:pt idx="0">
-                  <c:v>TBK actual R&amp;D ($M)</c:v>
+                  <c:v>TBK (Japan)</c:v>
                 </c:pt>
               </c:strCache>
             </c:strRef>
@@ -3968,71 +4525,45 @@
           </c:spPr>
           <c:cat>
             <c:strRef>
-              <c:f>Sheet1!$A$2:$A$10</c:f>
+              <c:f>Sheet1!$A$2:$A$7</c:f>
               <c:strCache>
-                <c:ptCount val="9"/>
+                <c:ptCount val="6"/>
                 <c:pt idx="0">
-                  <c:v>2017</c:v>
+                  <c:v>Water pumps</c:v>
                 </c:pt>
                 <c:pt idx="1">
-                  <c:v>2018</c:v>
+                  <c:v>Oil pumps</c:v>
                 </c:pt>
                 <c:pt idx="2">
-                  <c:v>2019</c:v>
+                  <c:v>Semi-variable
+water pump</c:v>
                 </c:pt>
                 <c:pt idx="3">
-                  <c:v>2020</c:v>
+                  <c:v>Electric
+water pump</c:v>
                 </c:pt>
                 <c:pt idx="4">
-                  <c:v>2021</c:v>
+                  <c:v>Electric
+oil pump</c:v>
                 </c:pt>
                 <c:pt idx="5">
-                  <c:v>2022</c:v>
-                </c:pt>
-                <c:pt idx="6">
-                  <c:v>2023</c:v>
-                </c:pt>
-                <c:pt idx="7">
-                  <c:v>2024</c:v>
-                </c:pt>
-                <c:pt idx="8">
-                  <c:v>2025</c:v>
+                  <c:v>Fuel / transm.
+pumps</c:v>
                 </c:pt>
               </c:strCache>
             </c:strRef>
           </c:cat>
           <c:val>
             <c:numRef>
-              <c:f>Sheet1!$B$2:$B$10</c:f>
+              <c:f>Sheet1!$B$2:$B$7</c:f>
               <c:numCache>
                 <c:formatCode>General</c:formatCode>
-                <c:ptCount val="9"/>
+                <c:ptCount val="6"/>
                 <c:pt idx="0">
-                  <c:v>11.1</c:v>
+                  <c:v>18.5</c:v>
                 </c:pt>
                 <c:pt idx="1">
-                  <c:v>11.4</c:v>
-                </c:pt>
-                <c:pt idx="2">
-                  <c:v>10.6</c:v>
-                </c:pt>
-                <c:pt idx="3">
-                  <c:v>11.4</c:v>
-                </c:pt>
-                <c:pt idx="4">
-                  <c:v>11.6</c:v>
-                </c:pt>
-                <c:pt idx="5">
-                  <c:v>11.8</c:v>
-                </c:pt>
-                <c:pt idx="6">
-                  <c:v>8.9</c:v>
-                </c:pt>
-                <c:pt idx="7">
-                  <c:v>8.1</c:v>
-                </c:pt>
-                <c:pt idx="8">
-                  <c:v>7.8</c:v>
+                  <c:v>26.0</c:v>
                 </c:pt>
               </c:numCache>
             </c:numRef>
@@ -4047,88 +4578,158 @@
               <c:strCache>
                 <c:ptCount val="1"/>
                 <c:pt idx="0">
-                  <c:v>At 4.5% of sales ($M)</c:v>
+                  <c:v>TBKK (Thailand)</c:v>
                 </c:pt>
               </c:strCache>
             </c:strRef>
           </c:tx>
           <c:spPr>
             <a:solidFill>
-              <a:srgbClr val="1F4E78"/>
+              <a:srgbClr val="C06C2C"/>
             </a:solidFill>
           </c:spPr>
           <c:cat>
             <c:strRef>
-              <c:f>Sheet1!$A$2:$A$10</c:f>
+              <c:f>Sheet1!$A$2:$A$7</c:f>
               <c:strCache>
-                <c:ptCount val="9"/>
+                <c:ptCount val="6"/>
                 <c:pt idx="0">
-                  <c:v>2017</c:v>
+                  <c:v>Water pumps</c:v>
                 </c:pt>
                 <c:pt idx="1">
-                  <c:v>2018</c:v>
+                  <c:v>Oil pumps</c:v>
                 </c:pt>
                 <c:pt idx="2">
-                  <c:v>2019</c:v>
+                  <c:v>Semi-variable
+water pump</c:v>
                 </c:pt>
                 <c:pt idx="3">
-                  <c:v>2020</c:v>
+                  <c:v>Electric
+water pump</c:v>
                 </c:pt>
                 <c:pt idx="4">
-                  <c:v>2021</c:v>
+                  <c:v>Electric
+oil pump</c:v>
                 </c:pt>
                 <c:pt idx="5">
-                  <c:v>2022</c:v>
-                </c:pt>
-                <c:pt idx="6">
-                  <c:v>2023</c:v>
-                </c:pt>
-                <c:pt idx="7">
-                  <c:v>2024</c:v>
-                </c:pt>
-                <c:pt idx="8">
-                  <c:v>2025</c:v>
+                  <c:v>Fuel / transm.
+pumps</c:v>
                 </c:pt>
               </c:strCache>
             </c:strRef>
           </c:cat>
           <c:val>
             <c:numRef>
-              <c:f>Sheet1!$C$2:$C$10</c:f>
+              <c:f>Sheet1!$C$2:$C$7</c:f>
               <c:numCache>
                 <c:formatCode>General</c:formatCode>
-                <c:ptCount val="9"/>
+                <c:ptCount val="6"/>
                 <c:pt idx="0">
-                  <c:v>19.4</c:v>
+                  <c:v>19.5</c:v>
                 </c:pt>
                 <c:pt idx="1">
-                  <c:v>20.9</c:v>
-                </c:pt>
-                <c:pt idx="2">
-                  <c:v>21.8</c:v>
-                </c:pt>
-                <c:pt idx="3">
-                  <c:v>21.3</c:v>
-                </c:pt>
-                <c:pt idx="4">
-                  <c:v>18.7</c:v>
-                </c:pt>
-                <c:pt idx="5">
-                  <c:v>20.5</c:v>
-                </c:pt>
-                <c:pt idx="6">
-                  <c:v>17.8</c:v>
-                </c:pt>
-                <c:pt idx="7">
-                  <c:v>17.7</c:v>
-                </c:pt>
-                <c:pt idx="8">
-                  <c:v>16.1</c:v>
+                  <c:v>22.6</c:v>
                 </c:pt>
               </c:numCache>
             </c:numRef>
           </c:val>
         </c:ser>
+        <c:ser>
+          <c:idx val="2"/>
+          <c:order val="2"/>
+          <c:tx>
+            <c:strRef>
+              <c:f>Sheet1!$D$1</c:f>
+              <c:strCache>
+                <c:ptCount val="1"/>
+                <c:pt idx="0">
+                  <c:v>Concentric</c:v>
+                </c:pt>
+              </c:strCache>
+            </c:strRef>
+          </c:tx>
+          <c:spPr>
+            <a:solidFill>
+              <a:srgbClr val="548235"/>
+            </a:solidFill>
+          </c:spPr>
+          <c:cat>
+            <c:strRef>
+              <c:f>Sheet1!$A$2:$A$7</c:f>
+              <c:strCache>
+                <c:ptCount val="6"/>
+                <c:pt idx="0">
+                  <c:v>Water pumps</c:v>
+                </c:pt>
+                <c:pt idx="1">
+                  <c:v>Oil pumps</c:v>
+                </c:pt>
+                <c:pt idx="2">
+                  <c:v>Semi-variable
+water pump</c:v>
+                </c:pt>
+                <c:pt idx="3">
+                  <c:v>Electric
+water pump</c:v>
+                </c:pt>
+                <c:pt idx="4">
+                  <c:v>Electric
+oil pump</c:v>
+                </c:pt>
+                <c:pt idx="5">
+                  <c:v>Fuel / transm.
+pumps</c:v>
+                </c:pt>
+              </c:strCache>
+            </c:strRef>
+          </c:cat>
+          <c:val>
+            <c:numRef>
+              <c:f>Sheet1!$D$2:$D$7</c:f>
+              <c:numCache>
+                <c:formatCode>General</c:formatCode>
+                <c:ptCount val="6"/>
+                <c:pt idx="0">
+                  <c:v>38.2</c:v>
+                </c:pt>
+                <c:pt idx="1">
+                  <c:v>42.9</c:v>
+                </c:pt>
+                <c:pt idx="2">
+                  <c:v>54.1</c:v>
+                </c:pt>
+                <c:pt idx="3">
+                  <c:v>54.8</c:v>
+                </c:pt>
+                <c:pt idx="4">
+                  <c:v>40.5</c:v>
+                </c:pt>
+                <c:pt idx="5">
+                  <c:v>55.6</c:v>
+                </c:pt>
+              </c:numCache>
+            </c:numRef>
+          </c:val>
+        </c:ser>
+        <c:dLbls>
+          <c:numFmt formatCode="0.0&quot;%&quot;" sourceLinked="0"/>
+          <c:txPr>
+            <a:bodyPr/>
+            <a:lstStyle/>
+            <a:p>
+              <a:pPr>
+                <a:defRPr sz="1000"/>
+              </a:pPr>
+            </a:p>
+          </c:txPr>
+          <c:showLegendKey val="0"/>
+          <c:showVal val="1"/>
+          <c:showCatName val="0"/>
+          <c:showSerName val="0"/>
+          <c:showPercent val="0"/>
+          <c:showBubbleSize val="0"/>
+          <c:showLeaderLines val="1"/>
+        </c:dLbls>
         <c:axId val="-2068027336"/>
         <c:axId val="-2113994440"/>
       </c:barChart>
@@ -4147,7 +4748,7 @@
           <a:lstStyle/>
           <a:p>
             <a:pPr>
-              <a:defRPr sz="1000"/>
+              <a:defRPr sz="900"/>
             </a:pPr>
           </a:p>
         </c:txPr>
@@ -8702,6 +9303,624 @@
                   <a:srgbClr val="FFFFFF"/>
                 </a:solidFill>
               </a:rPr>
+              <a:t>Brake segment: TBK vs Haldex — product-level contribution</a:t>
+            </a:r>
+          </a:p>
+        </p:txBody>
+      </p:sp>
+      <p:sp>
+        <p:nvSpPr>
+          <p:cNvPr id="3" name="TextBox 2"/>
+          <p:cNvSpPr txBox="1"/>
+          <p:nvPr/>
+        </p:nvSpPr>
+        <p:spPr>
+          <a:xfrm>
+            <a:off x="457200" y="914400"/>
+            <a:ext cx="11247120" cy="365760"/>
+          </a:xfrm>
+          <a:prstGeom prst="rect">
+            <a:avLst/>
+          </a:prstGeom>
+          <a:noFill/>
+        </p:spPr>
+        <p:txBody>
+          <a:bodyPr wrap="square">
+            <a:spAutoFit/>
+          </a:bodyPr>
+          <a:lstStyle/>
+          <a:p>
+            <a:pPr algn="l"/>
+            <a:r>
+              <a:rPr sz="1200" b="0">
+                <a:solidFill>
+                  <a:srgbClr val="595959"/>
+                </a:solidFill>
+              </a:rPr>
+              <a:t>TBK Japan H1 FY2025 (CM after direct material) vs Haldex May-2014 YTD (CII). Concentric makes no brakes. Periods differ — structure, not cycle, is the message</a:t>
+            </a:r>
+          </a:p>
+        </p:txBody>
+      </p:sp>
+      <p:graphicFrame>
+        <p:nvGraphicFramePr>
+          <p:cNvPr id="4" name="Chart 3"/>
+          <p:cNvGraphicFramePr>
+            <a:graphicFrameLocks noGrp="1"/>
+          </p:cNvGraphicFramePr>
+          <p:nvPr/>
+        </p:nvGraphicFramePr>
+        <p:xfrm>
+          <a:off x="457200" y="1463040"/>
+          <a:ext cx="6766560" cy="4206240"/>
+        </p:xfrm>
+        <a:graphic>
+          <a:graphicData uri="http://schemas.openxmlformats.org/drawingml/2006/chart">
+            <c:chart xmlns:c="http://schemas.openxmlformats.org/drawingml/2006/chart" r:id="rId2"/>
+          </a:graphicData>
+        </a:graphic>
+      </p:graphicFrame>
+      <p:sp>
+        <p:nvSpPr>
+          <p:cNvPr id="5" name="TextBox 4"/>
+          <p:cNvSpPr txBox="1"/>
+          <p:nvPr/>
+        </p:nvSpPr>
+        <p:spPr>
+          <a:xfrm>
+            <a:off x="7498079" y="1463040"/>
+            <a:ext cx="4251960" cy="2240280"/>
+          </a:xfrm>
+          <a:prstGeom prst="rect">
+            <a:avLst/>
+          </a:prstGeom>
+          <a:solidFill>
+            <a:srgbClr val="F2F2F2"/>
+          </a:solidFill>
+          <a:ln w="15875">
+            <a:solidFill>
+              <a:srgbClr val="1F4E78"/>
+            </a:solidFill>
+          </a:ln>
+        </p:spPr>
+        <p:txBody>
+          <a:bodyPr wrap="square" lIns="137160" rIns="137160" tIns="109728">
+            <a:spAutoFit/>
+          </a:bodyPr>
+          <a:lstStyle/>
+          <a:p>
+            <a:r>
+              <a:rPr sz="1500" b="1">
+                <a:solidFill>
+                  <a:srgbClr val="1F4E78"/>
+                </a:solidFill>
+              </a:rPr>
+              <a:t>Where the gap lives</a:t>
+            </a:r>
+          </a:p>
+          <a:p>
+            <a:pPr>
+              <a:spcBef>
+                <a:spcPts val="400"/>
+              </a:spcBef>
+            </a:pPr>
+            <a:r>
+              <a:rPr sz="1100">
+                <a:solidFill>
+                  <a:srgbClr val="202020"/>
+                </a:solidFill>
+              </a:rPr>
+              <a:t>On overlapping products, near-parity: friction/linings 25.1% vs 23.2%</a:t>
+            </a:r>
+          </a:p>
+          <a:p>
+            <a:pPr>
+              <a:spcBef>
+                <a:spcPts val="400"/>
+              </a:spcBef>
+            </a:pPr>
+            <a:r>
+              <a:rPr sz="1100">
+                <a:solidFill>
+                  <a:srgbClr val="202020"/>
+                </a:solidFill>
+              </a:rPr>
+              <a:t>Haldex's premium came from CONTENT TBK doesn't make: brake adjusters 41.4%, ABS 43.4%, air treatment 55.8% — mechatronic niches</a:t>
+            </a:r>
+          </a:p>
+          <a:p>
+            <a:pPr>
+              <a:spcBef>
+                <a:spcPts val="400"/>
+              </a:spcBef>
+            </a:pPr>
+            <a:r>
+              <a:rPr sz="1100">
+                <a:solidFill>
+                  <a:srgbClr val="202020"/>
+                </a:solidFill>
+              </a:rPr>
+              <a:t>…and the AFTERMARKET annuity: 48.2% CII vs TBK Sales 30.2%, on 4x the sales weight</a:t>
+            </a:r>
+          </a:p>
+        </p:txBody>
+      </p:sp>
+      <p:sp>
+        <p:nvSpPr>
+          <p:cNvPr id="6" name="TextBox 5"/>
+          <p:cNvSpPr txBox="1"/>
+          <p:nvPr/>
+        </p:nvSpPr>
+        <p:spPr>
+          <a:xfrm>
+            <a:off x="7498079" y="3840480"/>
+            <a:ext cx="4251960" cy="2240280"/>
+          </a:xfrm>
+          <a:prstGeom prst="rect">
+            <a:avLst/>
+          </a:prstGeom>
+          <a:solidFill>
+            <a:srgbClr val="F2F2F2"/>
+          </a:solidFill>
+          <a:ln w="15875">
+            <a:solidFill>
+              <a:srgbClr val="548235"/>
+            </a:solidFill>
+          </a:ln>
+        </p:spPr>
+        <p:txBody>
+          <a:bodyPr wrap="square" lIns="137160" rIns="137160" tIns="109728">
+            <a:spAutoFit/>
+          </a:bodyPr>
+          <a:lstStyle/>
+          <a:p>
+            <a:r>
+              <a:rPr sz="1500" b="1">
+                <a:solidFill>
+                  <a:srgbClr val="548235"/>
+                </a:solidFill>
+              </a:rPr>
+              <a:t>The disc paradox, resolved</a:t>
+            </a:r>
+          </a:p>
+          <a:p>
+            <a:pPr>
+              <a:spcBef>
+                <a:spcPts val="400"/>
+              </a:spcBef>
+            </a:pPr>
+            <a:r>
+              <a:rPr sz="1100">
+                <a:solidFill>
+                  <a:srgbClr val="202020"/>
+                </a:solidFill>
+              </a:rPr>
+              <a:t>TBK disc 68.7% = small-batch/replacement pricing on ¥8.3M</a:t>
+            </a:r>
+          </a:p>
+          <a:p>
+            <a:pPr>
+              <a:spcBef>
+                <a:spcPts val="400"/>
+              </a:spcBef>
+            </a:pPr>
+            <a:r>
+              <a:rPr sz="1100">
+                <a:solidFill>
+                  <a:srgbClr val="202020"/>
+                </a:solidFill>
+              </a:rPr>
+              <a:t>Haldex disc 14.0% (EBIT -6.3%) = series-OE pricing fighting Knorr at scale</a:t>
+            </a:r>
+          </a:p>
+          <a:p>
+            <a:pPr>
+              <a:spcBef>
+                <a:spcPts val="400"/>
+              </a:spcBef>
+            </a:pPr>
+            <a:r>
+              <a:rPr sz="1100">
+                <a:solidFill>
+                  <a:srgbClr val="202020"/>
+                </a:solidFill>
+              </a:rPr>
+              <a:t>Both are true: discs pay in niches and aftermarket, bleed in frontal OE — TBK's ADB entry must choose the first route</a:t>
+            </a:r>
+          </a:p>
+        </p:txBody>
+      </p:sp>
+      <p:sp>
+        <p:nvSpPr>
+          <p:cNvPr id="7" name="TextBox 6"/>
+          <p:cNvSpPr txBox="1"/>
+          <p:nvPr/>
+        </p:nvSpPr>
+        <p:spPr>
+          <a:xfrm>
+            <a:off x="457200" y="5897880"/>
+            <a:ext cx="11247120" cy="822960"/>
+          </a:xfrm>
+          <a:prstGeom prst="rect">
+            <a:avLst/>
+          </a:prstGeom>
+          <a:noFill/>
+        </p:spPr>
+        <p:txBody>
+          <a:bodyPr wrap="square">
+            <a:spAutoFit/>
+          </a:bodyPr>
+          <a:lstStyle/>
+          <a:p>
+            <a:pPr algn="l"/>
+            <a:r>
+              <a:rPr sz="1150" b="0">
+                <a:solidFill>
+                  <a:srgbClr val="595959"/>
+                </a:solidFill>
+              </a:rPr>
+              <a:t>Gross-profit read: TBK's brake book (2L/brake 15.8%, A/brake 7.6%, O/brake -4.9%, drum 22.9%, lining 25.1%) clusters at 16-25% contribution; Haldex's brake-adjacent book ran 23-56% because every point of extra margin came from mechatronics and aftermarket, not from better drum pricing. The brake gap is a PRODUCT-CONTENT gap, not a cost gap.</a:t>
+            </a:r>
+          </a:p>
+        </p:txBody>
+      </p:sp>
+    </p:spTree>
+  </p:cSld>
+  <p:clrMapOvr>
+    <a:masterClrMapping/>
+  </p:clrMapOvr>
+</p:sld>
+</file>
+
+<file path=ppt/slides/slide15.xml><?xml version="1.0" encoding="utf-8"?>
+<p:sld xmlns:a="http://schemas.openxmlformats.org/drawingml/2006/main" xmlns:p="http://schemas.openxmlformats.org/presentationml/2006/main" xmlns:r="http://schemas.openxmlformats.org/officeDocument/2006/relationships">
+  <p:cSld>
+    <p:spTree>
+      <p:nvGrpSpPr>
+        <p:cNvPr id="1" name=""/>
+        <p:cNvGrpSpPr/>
+        <p:nvPr/>
+      </p:nvGrpSpPr>
+      <p:grpSpPr/>
+      <p:sp>
+        <p:nvSpPr>
+          <p:cNvPr id="2" name="TextBox 1"/>
+          <p:cNvSpPr txBox="1"/>
+          <p:nvPr/>
+        </p:nvSpPr>
+        <p:spPr>
+          <a:xfrm>
+            <a:off x="0" y="0"/>
+            <a:ext cx="12191695" cy="868680"/>
+          </a:xfrm>
+          <a:prstGeom prst="rect">
+            <a:avLst/>
+          </a:prstGeom>
+          <a:solidFill>
+            <a:srgbClr val="1F4E78"/>
+          </a:solidFill>
+        </p:spPr>
+        <p:txBody>
+          <a:bodyPr wrap="square" lIns="457200" tIns="164592">
+            <a:spAutoFit/>
+          </a:bodyPr>
+          <a:lstStyle/>
+          <a:p>
+            <a:r>
+              <a:rPr sz="2600" b="1">
+                <a:solidFill>
+                  <a:srgbClr val="FFFFFF"/>
+                </a:solidFill>
+              </a:rPr>
+              <a:t>Pump segment: TBK vs Concentric — product-level contribution</a:t>
+            </a:r>
+          </a:p>
+        </p:txBody>
+      </p:sp>
+      <p:sp>
+        <p:nvSpPr>
+          <p:cNvPr id="3" name="TextBox 2"/>
+          <p:cNvSpPr txBox="1"/>
+          <p:nvPr/>
+        </p:nvSpPr>
+        <p:spPr>
+          <a:xfrm>
+            <a:off x="457200" y="914400"/>
+            <a:ext cx="11247120" cy="365760"/>
+          </a:xfrm>
+          <a:prstGeom prst="rect">
+            <a:avLst/>
+          </a:prstGeom>
+          <a:noFill/>
+        </p:spPr>
+        <p:txBody>
+          <a:bodyPr wrap="square">
+            <a:spAutoFit/>
+          </a:bodyPr>
+          <a:lstStyle/>
+          <a:p>
+            <a:pPr algn="l"/>
+            <a:r>
+              <a:rPr sz="1200" b="0">
+                <a:solidFill>
+                  <a:srgbClr val="595959"/>
+                </a:solidFill>
+              </a:rPr>
+              <a:t>TBK Japan H1 FY2025 + TBKK Thailand vs Concentric Dec-2021 YTD CB I. Haldex has no pumps — its hydraulics division IS Concentric (spun off 2011)</a:t>
+            </a:r>
+          </a:p>
+        </p:txBody>
+      </p:sp>
+      <p:graphicFrame>
+        <p:nvGraphicFramePr>
+          <p:cNvPr id="4" name="Chart 3"/>
+          <p:cNvGraphicFramePr>
+            <a:graphicFrameLocks noGrp="1"/>
+          </p:cNvGraphicFramePr>
+          <p:nvPr/>
+        </p:nvGraphicFramePr>
+        <p:xfrm>
+          <a:off x="457200" y="1463040"/>
+          <a:ext cx="6766560" cy="4206240"/>
+        </p:xfrm>
+        <a:graphic>
+          <a:graphicData uri="http://schemas.openxmlformats.org/drawingml/2006/chart">
+            <c:chart xmlns:c="http://schemas.openxmlformats.org/drawingml/2006/chart" r:id="rId2"/>
+          </a:graphicData>
+        </a:graphic>
+      </p:graphicFrame>
+      <p:sp>
+        <p:nvSpPr>
+          <p:cNvPr id="5" name="TextBox 4"/>
+          <p:cNvSpPr txBox="1"/>
+          <p:nvPr/>
+        </p:nvSpPr>
+        <p:spPr>
+          <a:xfrm>
+            <a:off x="7498079" y="1463040"/>
+            <a:ext cx="4251960" cy="2240280"/>
+          </a:xfrm>
+          <a:prstGeom prst="rect">
+            <a:avLst/>
+          </a:prstGeom>
+          <a:solidFill>
+            <a:srgbClr val="F2F2F2"/>
+          </a:solidFill>
+          <a:ln w="15875">
+            <a:solidFill>
+              <a:srgbClr val="1F4E78"/>
+            </a:solidFill>
+          </a:ln>
+        </p:spPr>
+        <p:txBody>
+          <a:bodyPr wrap="square" lIns="137160" rIns="137160" tIns="109728">
+            <a:spAutoFit/>
+          </a:bodyPr>
+          <a:lstStyle/>
+          <a:p>
+            <a:r>
+              <a:rPr sz="1500" b="1">
+                <a:solidFill>
+                  <a:srgbClr val="1F4E78"/>
+                </a:solidFill>
+              </a:rPr>
+              <a:t>The 2x gap on identical products</a:t>
+            </a:r>
+          </a:p>
+          <a:p>
+            <a:pPr>
+              <a:spcBef>
+                <a:spcPts val="400"/>
+              </a:spcBef>
+            </a:pPr>
+            <a:r>
+              <a:rPr sz="1100">
+                <a:solidFill>
+                  <a:srgbClr val="202020"/>
+                </a:solidFill>
+              </a:rPr>
+              <a:t>Same conventional water pump: TBK 18.5-19.5% vs Concentric 38.2% — DOUBLE</a:t>
+            </a:r>
+          </a:p>
+          <a:p>
+            <a:pPr>
+              <a:spcBef>
+                <a:spcPts val="400"/>
+              </a:spcBef>
+            </a:pPr>
+            <a:r>
+              <a:rPr sz="1100">
+                <a:solidFill>
+                  <a:srgbClr val="202020"/>
+                </a:solidFill>
+              </a:rPr>
+              <a:t>Same oil pump: 22.6-26.0% vs 42.9%</a:t>
+            </a:r>
+          </a:p>
+          <a:p>
+            <a:pPr>
+              <a:spcBef>
+                <a:spcPts val="400"/>
+              </a:spcBef>
+            </a:pPr>
+            <a:r>
+              <a:rPr sz="1100">
+                <a:solidFill>
+                  <a:srgbClr val="202020"/>
+                </a:solidFill>
+              </a:rPr>
+              <a:t>Consistent in two TBK countries → not a factory or FX artifact: it is price and customer mix (keiretsu price-downs vs Concentric's Cummins/CAT niche pricing)</a:t>
+            </a:r>
+          </a:p>
+        </p:txBody>
+      </p:sp>
+      <p:sp>
+        <p:nvSpPr>
+          <p:cNvPr id="6" name="TextBox 5"/>
+          <p:cNvSpPr txBox="1"/>
+          <p:nvPr/>
+        </p:nvSpPr>
+        <p:spPr>
+          <a:xfrm>
+            <a:off x="7498079" y="3840480"/>
+            <a:ext cx="4251960" cy="2240280"/>
+          </a:xfrm>
+          <a:prstGeom prst="rect">
+            <a:avLst/>
+          </a:prstGeom>
+          <a:solidFill>
+            <a:srgbClr val="F2F2F2"/>
+          </a:solidFill>
+          <a:ln w="15875">
+            <a:solidFill>
+              <a:srgbClr val="548235"/>
+            </a:solidFill>
+          </a:ln>
+        </p:spPr>
+        <p:txBody>
+          <a:bodyPr wrap="square" lIns="137160" rIns="137160" tIns="109728">
+            <a:spAutoFit/>
+          </a:bodyPr>
+          <a:lstStyle/>
+          <a:p>
+            <a:r>
+              <a:rPr sz="1500" b="1">
+                <a:solidFill>
+                  <a:srgbClr val="548235"/>
+                </a:solidFill>
+              </a:rPr>
+              <a:t>The ladder TBK hasn't climbed</a:t>
+            </a:r>
+          </a:p>
+          <a:p>
+            <a:pPr>
+              <a:spcBef>
+                <a:spcPts val="400"/>
+              </a:spcBef>
+            </a:pPr>
+            <a:r>
+              <a:rPr sz="1100">
+                <a:solidFill>
+                  <a:srgbClr val="202020"/>
+                </a:solidFill>
+              </a:rPr>
+              <a:t>Concentric's evolved variants: semi-variable 54.1%, electric W/P 54.8%, fuel/transmission 55.6% — each rung ≈ +15pts on the same base product</a:t>
+            </a:r>
+          </a:p>
+          <a:p>
+            <a:pPr>
+              <a:spcBef>
+                <a:spcPts val="400"/>
+              </a:spcBef>
+            </a:pPr>
+            <a:r>
+              <a:rPr sz="1100">
+                <a:solidFill>
+                  <a:srgbClr val="202020"/>
+                </a:solidFill>
+              </a:rPr>
+              <a:t>TBK's first rung is bought but not yet scaled: ECWP at -245.7% contribution on ¥2.6M pre-scale volume (off-chart)</a:t>
+            </a:r>
+          </a:p>
+          <a:p>
+            <a:pPr>
+              <a:spcBef>
+                <a:spcPts val="400"/>
+              </a:spcBef>
+            </a:pPr>
+            <a:r>
+              <a:rPr sz="1100">
+                <a:solidFill>
+                  <a:srgbClr val="202020"/>
+                </a:solidFill>
+              </a:rPr>
+              <a:t>NB: Concentric = the former Haldex hydraulics division — proof the climb is doable from CV-supplier DNA</a:t>
+            </a:r>
+          </a:p>
+        </p:txBody>
+      </p:sp>
+      <p:sp>
+        <p:nvSpPr>
+          <p:cNvPr id="7" name="TextBox 6"/>
+          <p:cNvSpPr txBox="1"/>
+          <p:nvPr/>
+        </p:nvSpPr>
+        <p:spPr>
+          <a:xfrm>
+            <a:off x="457200" y="5897880"/>
+            <a:ext cx="11247120" cy="822960"/>
+          </a:xfrm>
+          <a:prstGeom prst="rect">
+            <a:avLst/>
+          </a:prstGeom>
+          <a:noFill/>
+        </p:spPr>
+        <p:txBody>
+          <a:bodyPr wrap="square">
+            <a:spAutoFit/>
+          </a:bodyPr>
+          <a:lstStyle/>
+          <a:p>
+            <a:pPr algn="l"/>
+            <a:r>
+              <a:rPr sz="1150" b="0">
+                <a:solidFill>
+                  <a:srgbClr val="595959"/>
+                </a:solidFill>
+              </a:rPr>
+              <a:t>Gross-profit read: if TBK's pump book (W/P + O/P = ¥4.9bn of H1 parent sales) earned Concentric's conventional-pump margins, contribution would rise ~¥0.9-1.0bn per HALF-YEAR on those two lines alone — before any ladder-climbing. The pump gap is a PRICING-POWER gap on identical hardware; the brake gap (previous page) is a content gap. Different cures: pricing/mix vs product development.</a:t>
+            </a:r>
+          </a:p>
+        </p:txBody>
+      </p:sp>
+    </p:spTree>
+  </p:cSld>
+  <p:clrMapOvr>
+    <a:masterClrMapping/>
+  </p:clrMapOvr>
+</p:sld>
+</file>
+
+<file path=ppt/slides/slide16.xml><?xml version="1.0" encoding="utf-8"?>
+<p:sld xmlns:a="http://schemas.openxmlformats.org/drawingml/2006/main" xmlns:p="http://schemas.openxmlformats.org/presentationml/2006/main" xmlns:r="http://schemas.openxmlformats.org/officeDocument/2006/relationships">
+  <p:cSld>
+    <p:spTree>
+      <p:nvGrpSpPr>
+        <p:cNvPr id="1" name=""/>
+        <p:cNvGrpSpPr/>
+        <p:nvPr/>
+      </p:nvGrpSpPr>
+      <p:grpSpPr/>
+      <p:sp>
+        <p:nvSpPr>
+          <p:cNvPr id="2" name="TextBox 1"/>
+          <p:cNvSpPr txBox="1"/>
+          <p:nvPr/>
+        </p:nvSpPr>
+        <p:spPr>
+          <a:xfrm>
+            <a:off x="0" y="0"/>
+            <a:ext cx="12191695" cy="868680"/>
+          </a:xfrm>
+          <a:prstGeom prst="rect">
+            <a:avLst/>
+          </a:prstGeom>
+          <a:solidFill>
+            <a:srgbClr val="1F4E78"/>
+          </a:solidFill>
+        </p:spPr>
+        <p:txBody>
+          <a:bodyPr wrap="square" lIns="457200" tIns="164592">
+            <a:spAutoFit/>
+          </a:bodyPr>
+          <a:lstStyle/>
+          <a:p>
+            <a:r>
+              <a:rPr sz="2600" b="1">
+                <a:solidFill>
+                  <a:srgbClr val="FFFFFF"/>
+                </a:solidFill>
+              </a:rPr>
               <a:t>Why TBK looks lean on OPEX: its factory costs hide in COGS</a:t>
             </a:r>
           </a:p>
@@ -9061,7 +10280,7 @@
 </p:sld>
 </file>
 
-<file path=ppt/slides/slide15.xml><?xml version="1.0" encoding="utf-8"?>
+<file path=ppt/slides/slide17.xml><?xml version="1.0" encoding="utf-8"?>
 <p:sld xmlns:a="http://schemas.openxmlformats.org/drawingml/2006/main" xmlns:p="http://schemas.openxmlformats.org/presentationml/2006/main" xmlns:r="http://schemas.openxmlformats.org/officeDocument/2006/relationships">
   <p:cSld>
     <p:spTree>
@@ -9381,7 +10600,7 @@
 </p:sld>
 </file>
 
-<file path=ppt/slides/slide16.xml><?xml version="1.0" encoding="utf-8"?>
+<file path=ppt/slides/slide18.xml><?xml version="1.0" encoding="utf-8"?>
 <p:sld xmlns:a="http://schemas.openxmlformats.org/drawingml/2006/main" xmlns:p="http://schemas.openxmlformats.org/presentationml/2006/main" xmlns:r="http://schemas.openxmlformats.org/officeDocument/2006/relationships">
   <p:cSld>
     <p:spTree>
@@ -9769,7 +10988,7 @@
 </p:sld>
 </file>
 
-<file path=ppt/slides/slide17.xml><?xml version="1.0" encoding="utf-8"?>
+<file path=ppt/slides/slide19.xml><?xml version="1.0" encoding="utf-8"?>
 <p:sld xmlns:a="http://schemas.openxmlformats.org/drawingml/2006/main" xmlns:p="http://schemas.openxmlformats.org/presentationml/2006/main" xmlns:r="http://schemas.openxmlformats.org/officeDocument/2006/relationships">
   <p:cSld>
     <p:spTree>
@@ -10245,7 +11464,639 @@
 </p:sld>
 </file>
 
-<file path=ppt/slides/slide18.xml><?xml version="1.0" encoding="utf-8"?>
+<file path=ppt/slides/slide2.xml><?xml version="1.0" encoding="utf-8"?>
+<p:sld xmlns:a="http://schemas.openxmlformats.org/drawingml/2006/main" xmlns:p="http://schemas.openxmlformats.org/presentationml/2006/main" xmlns:r="http://schemas.openxmlformats.org/officeDocument/2006/relationships">
+  <p:cSld>
+    <p:spTree>
+      <p:nvGrpSpPr>
+        <p:cNvPr id="1" name=""/>
+        <p:cNvGrpSpPr/>
+        <p:nvPr/>
+      </p:nvGrpSpPr>
+      <p:grpSpPr/>
+      <p:sp>
+        <p:nvSpPr>
+          <p:cNvPr id="2" name="TextBox 1"/>
+          <p:cNvSpPr txBox="1"/>
+          <p:nvPr/>
+        </p:nvSpPr>
+        <p:spPr>
+          <a:xfrm>
+            <a:off x="0" y="0"/>
+            <a:ext cx="12191695" cy="868680"/>
+          </a:xfrm>
+          <a:prstGeom prst="rect">
+            <a:avLst/>
+          </a:prstGeom>
+          <a:solidFill>
+            <a:srgbClr val="1F4E78"/>
+          </a:solidFill>
+        </p:spPr>
+        <p:txBody>
+          <a:bodyPr wrap="square" lIns="457200" tIns="164592">
+            <a:spAutoFit/>
+          </a:bodyPr>
+          <a:lstStyle/>
+          <a:p>
+            <a:r>
+              <a:rPr sz="2600" b="1">
+                <a:solidFill>
+                  <a:srgbClr val="FFFFFF"/>
+                </a:solidFill>
+              </a:rPr>
+              <a:t>Brakes: drum brakes are a shrinking island</a:t>
+            </a:r>
+          </a:p>
+        </p:txBody>
+      </p:sp>
+      <p:sp>
+        <p:nvSpPr>
+          <p:cNvPr id="3" name="TextBox 2"/>
+          <p:cNvSpPr txBox="1"/>
+          <p:nvPr/>
+        </p:nvSpPr>
+        <p:spPr>
+          <a:xfrm>
+            <a:off x="457200" y="914400"/>
+            <a:ext cx="11247120" cy="365760"/>
+          </a:xfrm>
+          <a:prstGeom prst="rect">
+            <a:avLst/>
+          </a:prstGeom>
+          <a:noFill/>
+        </p:spPr>
+        <p:txBody>
+          <a:bodyPr wrap="square">
+            <a:spAutoFit/>
+          </a:bodyPr>
+          <a:lstStyle/>
+          <a:p>
+            <a:pPr algn="l"/>
+            <a:r>
+              <a:rPr sz="1200" b="0">
+                <a:solidFill>
+                  <a:srgbClr val="595959"/>
+                </a:solidFill>
+              </a:rPr>
+              <a:t>Verified findings from peer-reviewed literature, regulatory records, and industry data</a:t>
+            </a:r>
+          </a:p>
+        </p:txBody>
+      </p:sp>
+      <p:sp>
+        <p:nvSpPr>
+          <p:cNvPr id="4" name="TextBox 3"/>
+          <p:cNvSpPr txBox="1"/>
+          <p:nvPr/>
+        </p:nvSpPr>
+        <p:spPr>
+          <a:xfrm>
+            <a:off x="457200" y="1417320"/>
+            <a:ext cx="3657600" cy="2834640"/>
+          </a:xfrm>
+          <a:prstGeom prst="rect">
+            <a:avLst/>
+          </a:prstGeom>
+          <a:solidFill>
+            <a:srgbClr val="F2F2F2"/>
+          </a:solidFill>
+          <a:ln w="15875">
+            <a:solidFill>
+              <a:srgbClr val="1F4E78"/>
+            </a:solidFill>
+          </a:ln>
+        </p:spPr>
+        <p:txBody>
+          <a:bodyPr wrap="square" lIns="137160" rIns="137160" tIns="109728">
+            <a:spAutoFit/>
+          </a:bodyPr>
+          <a:lstStyle/>
+          <a:p>
+            <a:r>
+              <a:rPr sz="1500" b="1">
+                <a:solidFill>
+                  <a:srgbClr val="1F4E78"/>
+                </a:solidFill>
+              </a:rPr>
+              <a:t>Europe — converted ~2000</a:t>
+            </a:r>
+          </a:p>
+          <a:p>
+            <a:pPr>
+              <a:spcBef>
+                <a:spcPts val="400"/>
+              </a:spcBef>
+            </a:pPr>
+            <a:r>
+              <a:rPr sz="1200">
+                <a:solidFill>
+                  <a:srgbClr val="202020"/>
+                </a:solidFill>
+              </a:rPr>
+              <a:t>1996 Actros: first heavy truck with</a:t>
+            </a:r>
+          </a:p>
+          <a:p>
+            <a:pPr>
+              <a:spcBef>
+                <a:spcPts val="400"/>
+              </a:spcBef>
+            </a:pPr>
+            <a:r>
+              <a:rPr sz="1200">
+                <a:solidFill>
+                  <a:srgbClr val="202020"/>
+                </a:solidFill>
+              </a:rPr>
+              <a:t>all-axle EBS disc brakes</a:t>
+            </a:r>
+          </a:p>
+          <a:p>
+            <a:pPr>
+              <a:spcBef>
+                <a:spcPts val="400"/>
+              </a:spcBef>
+            </a:pPr>
+            <a:r>
+              <a:rPr sz="1200">
+                <a:solidFill>
+                  <a:srgbClr val="202020"/>
+                </a:solidFill>
+              </a:rPr>
+              <a:t>~70% disc/EBS take rate by 2000</a:t>
+            </a:r>
+          </a:p>
+          <a:p>
+            <a:pPr>
+              <a:spcBef>
+                <a:spcPts val="400"/>
+              </a:spcBef>
+            </a:pPr>
+            <a:r>
+              <a:rPr sz="1200">
+                <a:solidFill>
+                  <a:srgbClr val="202020"/>
+                </a:solidFill>
+              </a:rPr>
+              <a:t>Near-universal on-highway since</a:t>
+            </a:r>
+          </a:p>
+          <a:p>
+            <a:pPr>
+              <a:spcBef>
+                <a:spcPts val="400"/>
+              </a:spcBef>
+            </a:pPr>
+            <a:r>
+              <a:rPr sz="1200">
+                <a:solidFill>
+                  <a:srgbClr val="202020"/>
+                </a:solidFill>
+              </a:rPr>
+              <a:t>Drums: ~18% of EU demand (off-road)</a:t>
+            </a:r>
+          </a:p>
+        </p:txBody>
+      </p:sp>
+      <p:sp>
+        <p:nvSpPr>
+          <p:cNvPr id="5" name="TextBox 4"/>
+          <p:cNvSpPr txBox="1"/>
+          <p:nvPr/>
+        </p:nvSpPr>
+        <p:spPr>
+          <a:xfrm>
+            <a:off x="4297680" y="1417320"/>
+            <a:ext cx="3657600" cy="2834640"/>
+          </a:xfrm>
+          <a:prstGeom prst="rect">
+            <a:avLst/>
+          </a:prstGeom>
+          <a:solidFill>
+            <a:srgbClr val="F2F2F2"/>
+          </a:solidFill>
+          <a:ln w="15875">
+            <a:solidFill>
+              <a:srgbClr val="1F4E78"/>
+            </a:solidFill>
+          </a:ln>
+        </p:spPr>
+        <p:txBody>
+          <a:bodyPr wrap="square" lIns="137160" rIns="137160" tIns="109728">
+            <a:spAutoFit/>
+          </a:bodyPr>
+          <a:lstStyle/>
+          <a:p>
+            <a:r>
+              <a:rPr sz="1500" b="1">
+                <a:solidFill>
+                  <a:srgbClr val="1F4E78"/>
+                </a:solidFill>
+              </a:rPr>
+              <a:t>North America — tipped 2023-24</a:t>
+            </a:r>
+          </a:p>
+          <a:p>
+            <a:pPr>
+              <a:spcBef>
+                <a:spcPts val="400"/>
+              </a:spcBef>
+            </a:pPr>
+            <a:r>
+              <a:rPr sz="1200">
+                <a:solidFill>
+                  <a:srgbClr val="202020"/>
+                </a:solidFill>
+              </a:rPr>
+              <a:t>FMVSS 121 (2009): −30% stopping</a:t>
+            </a:r>
+          </a:p>
+          <a:p>
+            <a:pPr>
+              <a:spcBef>
+                <a:spcPts val="400"/>
+              </a:spcBef>
+            </a:pPr>
+            <a:r>
+              <a:rPr sz="1200">
+                <a:solidFill>
+                  <a:srgbClr val="202020"/>
+                </a:solidFill>
+              </a:rPr>
+              <a:t>distance, drum-compatible by design</a:t>
+            </a:r>
+          </a:p>
+          <a:p>
+            <a:pPr>
+              <a:spcBef>
+                <a:spcPts val="400"/>
+              </a:spcBef>
+            </a:pPr>
+            <a:r>
+              <a:rPr sz="1200">
+                <a:solidFill>
+                  <a:srgbClr val="202020"/>
+                </a:solidFill>
+              </a:rPr>
+              <a:t>Tractors: &lt;5% disc (2011) → ~25%</a:t>
+            </a:r>
+          </a:p>
+          <a:p>
+            <a:pPr>
+              <a:spcBef>
+                <a:spcPts val="400"/>
+              </a:spcBef>
+            </a:pPr>
+            <a:r>
+              <a:rPr sz="1200">
+                <a:solidFill>
+                  <a:srgbClr val="202020"/>
+                </a:solidFill>
+              </a:rPr>
+              <a:t>(2018) → ~50%+ (2023-24)</a:t>
+            </a:r>
+          </a:p>
+          <a:p>
+            <a:pPr>
+              <a:spcBef>
+                <a:spcPts val="400"/>
+              </a:spcBef>
+            </a:pPr>
+            <a:r>
+              <a:rPr sz="1200">
+                <a:solidFill>
+                  <a:srgbClr val="202020"/>
+                </a:solidFill>
+              </a:rPr>
+              <a:t>Trailers still lag at ~15%</a:t>
+            </a:r>
+          </a:p>
+        </p:txBody>
+      </p:sp>
+      <p:sp>
+        <p:nvSpPr>
+          <p:cNvPr id="6" name="TextBox 5"/>
+          <p:cNvSpPr txBox="1"/>
+          <p:nvPr/>
+        </p:nvSpPr>
+        <p:spPr>
+          <a:xfrm>
+            <a:off x="8138160" y="1417320"/>
+            <a:ext cx="3611880" cy="2834640"/>
+          </a:xfrm>
+          <a:prstGeom prst="rect">
+            <a:avLst/>
+          </a:prstGeom>
+          <a:solidFill>
+            <a:srgbClr val="F2F2F2"/>
+          </a:solidFill>
+          <a:ln w="15875">
+            <a:solidFill>
+              <a:srgbClr val="7F1D1D"/>
+            </a:solidFill>
+          </a:ln>
+        </p:spPr>
+        <p:txBody>
+          <a:bodyPr wrap="square" lIns="137160" rIns="137160" tIns="109728">
+            <a:spAutoFit/>
+          </a:bodyPr>
+          <a:lstStyle/>
+          <a:p>
+            <a:r>
+              <a:rPr sz="1500" b="1">
+                <a:solidFill>
+                  <a:srgbClr val="7F1D1D"/>
+                </a:solidFill>
+              </a:rPr>
+              <a:t>Japan — the last drum market</a:t>
+            </a:r>
+          </a:p>
+          <a:p>
+            <a:pPr>
+              <a:spcBef>
+                <a:spcPts val="400"/>
+              </a:spcBef>
+            </a:pPr>
+            <a:r>
+              <a:rPr sz="1200">
+                <a:solidFill>
+                  <a:srgbClr val="202020"/>
+                </a:solidFill>
+              </a:rPr>
+              <a:t>Drums still majority on MD/HD trucks</a:t>
+            </a:r>
+          </a:p>
+          <a:p>
+            <a:pPr>
+              <a:spcBef>
+                <a:spcPts val="400"/>
+              </a:spcBef>
+            </a:pPr>
+            <a:r>
+              <a:rPr sz="1200">
+                <a:solidFill>
+                  <a:srgbClr val="202020"/>
+                </a:solidFill>
+              </a:rPr>
+              <a:t>UD Quon all-disc since 2017</a:t>
+            </a:r>
+          </a:p>
+          <a:p>
+            <a:pPr>
+              <a:spcBef>
+                <a:spcPts val="400"/>
+              </a:spcBef>
+            </a:pPr>
+            <a:r>
+              <a:rPr sz="1200">
+                <a:solidFill>
+                  <a:srgbClr val="202020"/>
+                </a:solidFill>
+              </a:rPr>
+              <a:t>New Giga tractor: all-wheel discs</a:t>
+            </a:r>
+          </a:p>
+          <a:p>
+            <a:pPr>
+              <a:spcBef>
+                <a:spcPts val="400"/>
+              </a:spcBef>
+            </a:pPr>
+            <a:r>
+              <a:rPr sz="1200">
+                <a:solidFill>
+                  <a:srgbClr val="202020"/>
+                </a:solidFill>
+              </a:rPr>
+              <a:t>Isuzu export heavies all-disc (MY25)</a:t>
+            </a:r>
+          </a:p>
+          <a:p>
+            <a:pPr>
+              <a:spcBef>
+                <a:spcPts val="400"/>
+              </a:spcBef>
+            </a:pPr>
+            <a:r>
+              <a:rPr sz="1200">
+                <a:solidFill>
+                  <a:srgbClr val="202020"/>
+                </a:solidFill>
+              </a:rPr>
+              <a:t>Domestic flip is when, not if</a:t>
+            </a:r>
+          </a:p>
+        </p:txBody>
+      </p:sp>
+      <p:sp>
+        <p:nvSpPr>
+          <p:cNvPr id="7" name="TextBox 6"/>
+          <p:cNvSpPr txBox="1"/>
+          <p:nvPr/>
+        </p:nvSpPr>
+        <p:spPr>
+          <a:xfrm>
+            <a:off x="457200" y="4434840"/>
+            <a:ext cx="5577840" cy="2103120"/>
+          </a:xfrm>
+          <a:prstGeom prst="rect">
+            <a:avLst/>
+          </a:prstGeom>
+          <a:solidFill>
+            <a:srgbClr val="F2F2F2"/>
+          </a:solidFill>
+          <a:ln w="15875">
+            <a:solidFill>
+              <a:srgbClr val="1F4E78"/>
+            </a:solidFill>
+          </a:ln>
+        </p:spPr>
+        <p:txBody>
+          <a:bodyPr wrap="square" lIns="137160" rIns="137160" tIns="109728">
+            <a:spAutoFit/>
+          </a:bodyPr>
+          <a:lstStyle/>
+          <a:p>
+            <a:r>
+              <a:rPr sz="1500" b="1">
+                <a:solidFill>
+                  <a:srgbClr val="1F4E78"/>
+                </a:solidFill>
+              </a:rPr>
+              <a:t>Why discs won (peer-reviewed)</a:t>
+            </a:r>
+          </a:p>
+          <a:p>
+            <a:pPr>
+              <a:spcBef>
+                <a:spcPts val="400"/>
+              </a:spcBef>
+            </a:pPr>
+            <a:r>
+              <a:rPr sz="1200">
+                <a:solidFill>
+                  <a:srgbClr val="202020"/>
+                </a:solidFill>
+              </a:rPr>
+              <a:t>Fade resistance under thermal load (SAE 902206, 1990; physics in Day et al. 1984)</a:t>
+            </a:r>
+          </a:p>
+          <a:p>
+            <a:pPr>
+              <a:spcBef>
+                <a:spcPts val="400"/>
+              </a:spcBef>
+            </a:pPr>
+            <a:r>
+              <a:rPr sz="1200">
+                <a:solidFill>
+                  <a:srgbClr val="202020"/>
+                </a:solidFill>
+              </a:rPr>
+              <a:t>~30% shorter stops vs standard drums (NHTSA simulator, 108 drivers)</a:t>
+            </a:r>
+          </a:p>
+          <a:p>
+            <a:pPr>
+              <a:spcBef>
+                <a:spcPts val="400"/>
+              </a:spcBef>
+            </a:pPr>
+            <a:r>
+              <a:rPr sz="1200">
+                <a:solidFill>
+                  <a:srgbClr val="202020"/>
+                </a:solidFill>
+              </a:rPr>
+              <a:t>10-20% braking advantage, 12-80% lifecycle savings in demanding duty (Ampadu 2023)</a:t>
+            </a:r>
+          </a:p>
+          <a:p>
+            <a:pPr>
+              <a:spcBef>
+                <a:spcPts val="400"/>
+              </a:spcBef>
+            </a:pPr>
+            <a:r>
+              <a:rPr sz="1200">
+                <a:solidFill>
+                  <a:srgbClr val="202020"/>
+                </a:solidFill>
+              </a:rPr>
+              <a:t>EBS/AEB/ADAS mandates favor disc actuation precision</a:t>
+            </a:r>
+          </a:p>
+        </p:txBody>
+      </p:sp>
+      <p:sp>
+        <p:nvSpPr>
+          <p:cNvPr id="8" name="TextBox 7"/>
+          <p:cNvSpPr txBox="1"/>
+          <p:nvPr/>
+        </p:nvSpPr>
+        <p:spPr>
+          <a:xfrm>
+            <a:off x="6217920" y="4434840"/>
+            <a:ext cx="5532120" cy="2103120"/>
+          </a:xfrm>
+          <a:prstGeom prst="rect">
+            <a:avLst/>
+          </a:prstGeom>
+          <a:solidFill>
+            <a:srgbClr val="F2F2F2"/>
+          </a:solidFill>
+          <a:ln w="15875">
+            <a:solidFill>
+              <a:srgbClr val="548235"/>
+            </a:solidFill>
+          </a:ln>
+        </p:spPr>
+        <p:txBody>
+          <a:bodyPr wrap="square" lIns="137160" rIns="137160" tIns="109728">
+            <a:spAutoFit/>
+          </a:bodyPr>
+          <a:lstStyle/>
+          <a:p>
+            <a:r>
+              <a:rPr sz="1500" b="1">
+                <a:solidFill>
+                  <a:srgbClr val="548235"/>
+                </a:solidFill>
+              </a:rPr>
+              <a:t>Electrification re-shuffles the deck</a:t>
+            </a:r>
+          </a:p>
+          <a:p>
+            <a:pPr>
+              <a:spcBef>
+                <a:spcPts val="400"/>
+              </a:spcBef>
+            </a:pPr>
+            <a:r>
+              <a:rPr sz="1200">
+                <a:solidFill>
+                  <a:srgbClr val="202020"/>
+                </a:solidFill>
+              </a:rPr>
+              <a:t>Regen braking cuts friction wear 64-95% (multiple peer-reviewed studies)</a:t>
+            </a:r>
+          </a:p>
+          <a:p>
+            <a:pPr>
+              <a:spcBef>
+                <a:spcPts val="400"/>
+              </a:spcBef>
+            </a:pPr>
+            <a:r>
+              <a:rPr sz="1200">
+                <a:solidFill>
+                  <a:srgbClr val="202020"/>
+                </a:solidFill>
+              </a:rPr>
+              <a:t>Friction aftermarket growth ~2% CAGR with EV headwind</a:t>
+            </a:r>
+          </a:p>
+          <a:p>
+            <a:pPr>
+              <a:spcBef>
+                <a:spcPts val="400"/>
+              </a:spcBef>
+            </a:pPr>
+            <a:r>
+              <a:rPr sz="1200">
+                <a:solidFill>
+                  <a:srgbClr val="202020"/>
+                </a:solidFill>
+              </a:rPr>
+              <a:t>EU brake-dust limits for heavy vehicles expected ~2030</a:t>
+            </a:r>
+          </a:p>
+          <a:p>
+            <a:pPr>
+              <a:spcBef>
+                <a:spcPts val="400"/>
+              </a:spcBef>
+            </a:pPr>
+            <a:r>
+              <a:rPr sz="1200">
+                <a:solidFill>
+                  <a:srgbClr val="202020"/>
+                </a:solidFill>
+              </a:rPr>
+              <a:t>Value shifts: wear parts → corrosion/NVH/low-dust + retarders &amp; blending</a:t>
+            </a:r>
+          </a:p>
+        </p:txBody>
+      </p:sp>
+    </p:spTree>
+  </p:cSld>
+  <p:clrMapOvr>
+    <a:masterClrMapping/>
+  </p:clrMapOvr>
+</p:sld>
+</file>
+
+<file path=ppt/slides/slide20.xml><?xml version="1.0" encoding="utf-8"?>
 <p:sld xmlns:a="http://schemas.openxmlformats.org/drawingml/2006/main" xmlns:p="http://schemas.openxmlformats.org/presentationml/2006/main" xmlns:r="http://schemas.openxmlformats.org/officeDocument/2006/relationships">
   <p:cSld>
     <p:spTree>
@@ -10677,7 +12528,7 @@
 </p:sld>
 </file>
 
-<file path=ppt/slides/slide19.xml><?xml version="1.0" encoding="utf-8"?>
+<file path=ppt/slides/slide21.xml><?xml version="1.0" encoding="utf-8"?>
 <p:sld xmlns:a="http://schemas.openxmlformats.org/drawingml/2006/main" xmlns:p="http://schemas.openxmlformats.org/presentationml/2006/main" xmlns:r="http://schemas.openxmlformats.org/officeDocument/2006/relationships">
   <p:cSld>
     <p:spTree>
@@ -11087,639 +12938,7 @@
 </p:sld>
 </file>
 
-<file path=ppt/slides/slide2.xml><?xml version="1.0" encoding="utf-8"?>
-<p:sld xmlns:a="http://schemas.openxmlformats.org/drawingml/2006/main" xmlns:p="http://schemas.openxmlformats.org/presentationml/2006/main" xmlns:r="http://schemas.openxmlformats.org/officeDocument/2006/relationships">
-  <p:cSld>
-    <p:spTree>
-      <p:nvGrpSpPr>
-        <p:cNvPr id="1" name=""/>
-        <p:cNvGrpSpPr/>
-        <p:nvPr/>
-      </p:nvGrpSpPr>
-      <p:grpSpPr/>
-      <p:sp>
-        <p:nvSpPr>
-          <p:cNvPr id="2" name="TextBox 1"/>
-          <p:cNvSpPr txBox="1"/>
-          <p:nvPr/>
-        </p:nvSpPr>
-        <p:spPr>
-          <a:xfrm>
-            <a:off x="0" y="0"/>
-            <a:ext cx="12191695" cy="868680"/>
-          </a:xfrm>
-          <a:prstGeom prst="rect">
-            <a:avLst/>
-          </a:prstGeom>
-          <a:solidFill>
-            <a:srgbClr val="1F4E78"/>
-          </a:solidFill>
-        </p:spPr>
-        <p:txBody>
-          <a:bodyPr wrap="square" lIns="457200" tIns="164592">
-            <a:spAutoFit/>
-          </a:bodyPr>
-          <a:lstStyle/>
-          <a:p>
-            <a:r>
-              <a:rPr sz="2600" b="1">
-                <a:solidFill>
-                  <a:srgbClr val="FFFFFF"/>
-                </a:solidFill>
-              </a:rPr>
-              <a:t>Brakes: drum brakes are a shrinking island</a:t>
-            </a:r>
-          </a:p>
-        </p:txBody>
-      </p:sp>
-      <p:sp>
-        <p:nvSpPr>
-          <p:cNvPr id="3" name="TextBox 2"/>
-          <p:cNvSpPr txBox="1"/>
-          <p:nvPr/>
-        </p:nvSpPr>
-        <p:spPr>
-          <a:xfrm>
-            <a:off x="457200" y="914400"/>
-            <a:ext cx="11247120" cy="365760"/>
-          </a:xfrm>
-          <a:prstGeom prst="rect">
-            <a:avLst/>
-          </a:prstGeom>
-          <a:noFill/>
-        </p:spPr>
-        <p:txBody>
-          <a:bodyPr wrap="square">
-            <a:spAutoFit/>
-          </a:bodyPr>
-          <a:lstStyle/>
-          <a:p>
-            <a:pPr algn="l"/>
-            <a:r>
-              <a:rPr sz="1200" b="0">
-                <a:solidFill>
-                  <a:srgbClr val="595959"/>
-                </a:solidFill>
-              </a:rPr>
-              <a:t>Verified findings from peer-reviewed literature, regulatory records, and industry data</a:t>
-            </a:r>
-          </a:p>
-        </p:txBody>
-      </p:sp>
-      <p:sp>
-        <p:nvSpPr>
-          <p:cNvPr id="4" name="TextBox 3"/>
-          <p:cNvSpPr txBox="1"/>
-          <p:nvPr/>
-        </p:nvSpPr>
-        <p:spPr>
-          <a:xfrm>
-            <a:off x="457200" y="1417320"/>
-            <a:ext cx="3657600" cy="2834640"/>
-          </a:xfrm>
-          <a:prstGeom prst="rect">
-            <a:avLst/>
-          </a:prstGeom>
-          <a:solidFill>
-            <a:srgbClr val="F2F2F2"/>
-          </a:solidFill>
-          <a:ln w="15875">
-            <a:solidFill>
-              <a:srgbClr val="1F4E78"/>
-            </a:solidFill>
-          </a:ln>
-        </p:spPr>
-        <p:txBody>
-          <a:bodyPr wrap="square" lIns="137160" rIns="137160" tIns="109728">
-            <a:spAutoFit/>
-          </a:bodyPr>
-          <a:lstStyle/>
-          <a:p>
-            <a:r>
-              <a:rPr sz="1500" b="1">
-                <a:solidFill>
-                  <a:srgbClr val="1F4E78"/>
-                </a:solidFill>
-              </a:rPr>
-              <a:t>Europe — converted ~2000</a:t>
-            </a:r>
-          </a:p>
-          <a:p>
-            <a:pPr>
-              <a:spcBef>
-                <a:spcPts val="400"/>
-              </a:spcBef>
-            </a:pPr>
-            <a:r>
-              <a:rPr sz="1200">
-                <a:solidFill>
-                  <a:srgbClr val="202020"/>
-                </a:solidFill>
-              </a:rPr>
-              <a:t>1996 Actros: first heavy truck with</a:t>
-            </a:r>
-          </a:p>
-          <a:p>
-            <a:pPr>
-              <a:spcBef>
-                <a:spcPts val="400"/>
-              </a:spcBef>
-            </a:pPr>
-            <a:r>
-              <a:rPr sz="1200">
-                <a:solidFill>
-                  <a:srgbClr val="202020"/>
-                </a:solidFill>
-              </a:rPr>
-              <a:t>all-axle EBS disc brakes</a:t>
-            </a:r>
-          </a:p>
-          <a:p>
-            <a:pPr>
-              <a:spcBef>
-                <a:spcPts val="400"/>
-              </a:spcBef>
-            </a:pPr>
-            <a:r>
-              <a:rPr sz="1200">
-                <a:solidFill>
-                  <a:srgbClr val="202020"/>
-                </a:solidFill>
-              </a:rPr>
-              <a:t>~70% disc/EBS take rate by 2000</a:t>
-            </a:r>
-          </a:p>
-          <a:p>
-            <a:pPr>
-              <a:spcBef>
-                <a:spcPts val="400"/>
-              </a:spcBef>
-            </a:pPr>
-            <a:r>
-              <a:rPr sz="1200">
-                <a:solidFill>
-                  <a:srgbClr val="202020"/>
-                </a:solidFill>
-              </a:rPr>
-              <a:t>Near-universal on-highway since</a:t>
-            </a:r>
-          </a:p>
-          <a:p>
-            <a:pPr>
-              <a:spcBef>
-                <a:spcPts val="400"/>
-              </a:spcBef>
-            </a:pPr>
-            <a:r>
-              <a:rPr sz="1200">
-                <a:solidFill>
-                  <a:srgbClr val="202020"/>
-                </a:solidFill>
-              </a:rPr>
-              <a:t>Drums: ~18% of EU demand (off-road)</a:t>
-            </a:r>
-          </a:p>
-        </p:txBody>
-      </p:sp>
-      <p:sp>
-        <p:nvSpPr>
-          <p:cNvPr id="5" name="TextBox 4"/>
-          <p:cNvSpPr txBox="1"/>
-          <p:nvPr/>
-        </p:nvSpPr>
-        <p:spPr>
-          <a:xfrm>
-            <a:off x="4297680" y="1417320"/>
-            <a:ext cx="3657600" cy="2834640"/>
-          </a:xfrm>
-          <a:prstGeom prst="rect">
-            <a:avLst/>
-          </a:prstGeom>
-          <a:solidFill>
-            <a:srgbClr val="F2F2F2"/>
-          </a:solidFill>
-          <a:ln w="15875">
-            <a:solidFill>
-              <a:srgbClr val="1F4E78"/>
-            </a:solidFill>
-          </a:ln>
-        </p:spPr>
-        <p:txBody>
-          <a:bodyPr wrap="square" lIns="137160" rIns="137160" tIns="109728">
-            <a:spAutoFit/>
-          </a:bodyPr>
-          <a:lstStyle/>
-          <a:p>
-            <a:r>
-              <a:rPr sz="1500" b="1">
-                <a:solidFill>
-                  <a:srgbClr val="1F4E78"/>
-                </a:solidFill>
-              </a:rPr>
-              <a:t>North America — tipped 2023-24</a:t>
-            </a:r>
-          </a:p>
-          <a:p>
-            <a:pPr>
-              <a:spcBef>
-                <a:spcPts val="400"/>
-              </a:spcBef>
-            </a:pPr>
-            <a:r>
-              <a:rPr sz="1200">
-                <a:solidFill>
-                  <a:srgbClr val="202020"/>
-                </a:solidFill>
-              </a:rPr>
-              <a:t>FMVSS 121 (2009): −30% stopping</a:t>
-            </a:r>
-          </a:p>
-          <a:p>
-            <a:pPr>
-              <a:spcBef>
-                <a:spcPts val="400"/>
-              </a:spcBef>
-            </a:pPr>
-            <a:r>
-              <a:rPr sz="1200">
-                <a:solidFill>
-                  <a:srgbClr val="202020"/>
-                </a:solidFill>
-              </a:rPr>
-              <a:t>distance, drum-compatible by design</a:t>
-            </a:r>
-          </a:p>
-          <a:p>
-            <a:pPr>
-              <a:spcBef>
-                <a:spcPts val="400"/>
-              </a:spcBef>
-            </a:pPr>
-            <a:r>
-              <a:rPr sz="1200">
-                <a:solidFill>
-                  <a:srgbClr val="202020"/>
-                </a:solidFill>
-              </a:rPr>
-              <a:t>Tractors: &lt;5% disc (2011) → ~25%</a:t>
-            </a:r>
-          </a:p>
-          <a:p>
-            <a:pPr>
-              <a:spcBef>
-                <a:spcPts val="400"/>
-              </a:spcBef>
-            </a:pPr>
-            <a:r>
-              <a:rPr sz="1200">
-                <a:solidFill>
-                  <a:srgbClr val="202020"/>
-                </a:solidFill>
-              </a:rPr>
-              <a:t>(2018) → ~50%+ (2023-24)</a:t>
-            </a:r>
-          </a:p>
-          <a:p>
-            <a:pPr>
-              <a:spcBef>
-                <a:spcPts val="400"/>
-              </a:spcBef>
-            </a:pPr>
-            <a:r>
-              <a:rPr sz="1200">
-                <a:solidFill>
-                  <a:srgbClr val="202020"/>
-                </a:solidFill>
-              </a:rPr>
-              <a:t>Trailers still lag at ~15%</a:t>
-            </a:r>
-          </a:p>
-        </p:txBody>
-      </p:sp>
-      <p:sp>
-        <p:nvSpPr>
-          <p:cNvPr id="6" name="TextBox 5"/>
-          <p:cNvSpPr txBox="1"/>
-          <p:nvPr/>
-        </p:nvSpPr>
-        <p:spPr>
-          <a:xfrm>
-            <a:off x="8138160" y="1417320"/>
-            <a:ext cx="3611880" cy="2834640"/>
-          </a:xfrm>
-          <a:prstGeom prst="rect">
-            <a:avLst/>
-          </a:prstGeom>
-          <a:solidFill>
-            <a:srgbClr val="F2F2F2"/>
-          </a:solidFill>
-          <a:ln w="15875">
-            <a:solidFill>
-              <a:srgbClr val="7F1D1D"/>
-            </a:solidFill>
-          </a:ln>
-        </p:spPr>
-        <p:txBody>
-          <a:bodyPr wrap="square" lIns="137160" rIns="137160" tIns="109728">
-            <a:spAutoFit/>
-          </a:bodyPr>
-          <a:lstStyle/>
-          <a:p>
-            <a:r>
-              <a:rPr sz="1500" b="1">
-                <a:solidFill>
-                  <a:srgbClr val="7F1D1D"/>
-                </a:solidFill>
-              </a:rPr>
-              <a:t>Japan — the last drum market</a:t>
-            </a:r>
-          </a:p>
-          <a:p>
-            <a:pPr>
-              <a:spcBef>
-                <a:spcPts val="400"/>
-              </a:spcBef>
-            </a:pPr>
-            <a:r>
-              <a:rPr sz="1200">
-                <a:solidFill>
-                  <a:srgbClr val="202020"/>
-                </a:solidFill>
-              </a:rPr>
-              <a:t>Drums still majority on MD/HD trucks</a:t>
-            </a:r>
-          </a:p>
-          <a:p>
-            <a:pPr>
-              <a:spcBef>
-                <a:spcPts val="400"/>
-              </a:spcBef>
-            </a:pPr>
-            <a:r>
-              <a:rPr sz="1200">
-                <a:solidFill>
-                  <a:srgbClr val="202020"/>
-                </a:solidFill>
-              </a:rPr>
-              <a:t>UD Quon all-disc since 2017</a:t>
-            </a:r>
-          </a:p>
-          <a:p>
-            <a:pPr>
-              <a:spcBef>
-                <a:spcPts val="400"/>
-              </a:spcBef>
-            </a:pPr>
-            <a:r>
-              <a:rPr sz="1200">
-                <a:solidFill>
-                  <a:srgbClr val="202020"/>
-                </a:solidFill>
-              </a:rPr>
-              <a:t>New Giga tractor: all-wheel discs</a:t>
-            </a:r>
-          </a:p>
-          <a:p>
-            <a:pPr>
-              <a:spcBef>
-                <a:spcPts val="400"/>
-              </a:spcBef>
-            </a:pPr>
-            <a:r>
-              <a:rPr sz="1200">
-                <a:solidFill>
-                  <a:srgbClr val="202020"/>
-                </a:solidFill>
-              </a:rPr>
-              <a:t>Isuzu export heavies all-disc (MY25)</a:t>
-            </a:r>
-          </a:p>
-          <a:p>
-            <a:pPr>
-              <a:spcBef>
-                <a:spcPts val="400"/>
-              </a:spcBef>
-            </a:pPr>
-            <a:r>
-              <a:rPr sz="1200">
-                <a:solidFill>
-                  <a:srgbClr val="202020"/>
-                </a:solidFill>
-              </a:rPr>
-              <a:t>Domestic flip is when, not if</a:t>
-            </a:r>
-          </a:p>
-        </p:txBody>
-      </p:sp>
-      <p:sp>
-        <p:nvSpPr>
-          <p:cNvPr id="7" name="TextBox 6"/>
-          <p:cNvSpPr txBox="1"/>
-          <p:nvPr/>
-        </p:nvSpPr>
-        <p:spPr>
-          <a:xfrm>
-            <a:off x="457200" y="4434840"/>
-            <a:ext cx="5577840" cy="2103120"/>
-          </a:xfrm>
-          <a:prstGeom prst="rect">
-            <a:avLst/>
-          </a:prstGeom>
-          <a:solidFill>
-            <a:srgbClr val="F2F2F2"/>
-          </a:solidFill>
-          <a:ln w="15875">
-            <a:solidFill>
-              <a:srgbClr val="1F4E78"/>
-            </a:solidFill>
-          </a:ln>
-        </p:spPr>
-        <p:txBody>
-          <a:bodyPr wrap="square" lIns="137160" rIns="137160" tIns="109728">
-            <a:spAutoFit/>
-          </a:bodyPr>
-          <a:lstStyle/>
-          <a:p>
-            <a:r>
-              <a:rPr sz="1500" b="1">
-                <a:solidFill>
-                  <a:srgbClr val="1F4E78"/>
-                </a:solidFill>
-              </a:rPr>
-              <a:t>Why discs won (peer-reviewed)</a:t>
-            </a:r>
-          </a:p>
-          <a:p>
-            <a:pPr>
-              <a:spcBef>
-                <a:spcPts val="400"/>
-              </a:spcBef>
-            </a:pPr>
-            <a:r>
-              <a:rPr sz="1200">
-                <a:solidFill>
-                  <a:srgbClr val="202020"/>
-                </a:solidFill>
-              </a:rPr>
-              <a:t>Fade resistance under thermal load (SAE 902206, 1990; physics in Day et al. 1984)</a:t>
-            </a:r>
-          </a:p>
-          <a:p>
-            <a:pPr>
-              <a:spcBef>
-                <a:spcPts val="400"/>
-              </a:spcBef>
-            </a:pPr>
-            <a:r>
-              <a:rPr sz="1200">
-                <a:solidFill>
-                  <a:srgbClr val="202020"/>
-                </a:solidFill>
-              </a:rPr>
-              <a:t>~30% shorter stops vs standard drums (NHTSA simulator, 108 drivers)</a:t>
-            </a:r>
-          </a:p>
-          <a:p>
-            <a:pPr>
-              <a:spcBef>
-                <a:spcPts val="400"/>
-              </a:spcBef>
-            </a:pPr>
-            <a:r>
-              <a:rPr sz="1200">
-                <a:solidFill>
-                  <a:srgbClr val="202020"/>
-                </a:solidFill>
-              </a:rPr>
-              <a:t>10-20% braking advantage, 12-80% lifecycle savings in demanding duty (Ampadu 2023)</a:t>
-            </a:r>
-          </a:p>
-          <a:p>
-            <a:pPr>
-              <a:spcBef>
-                <a:spcPts val="400"/>
-              </a:spcBef>
-            </a:pPr>
-            <a:r>
-              <a:rPr sz="1200">
-                <a:solidFill>
-                  <a:srgbClr val="202020"/>
-                </a:solidFill>
-              </a:rPr>
-              <a:t>EBS/AEB/ADAS mandates favor disc actuation precision</a:t>
-            </a:r>
-          </a:p>
-        </p:txBody>
-      </p:sp>
-      <p:sp>
-        <p:nvSpPr>
-          <p:cNvPr id="8" name="TextBox 7"/>
-          <p:cNvSpPr txBox="1"/>
-          <p:nvPr/>
-        </p:nvSpPr>
-        <p:spPr>
-          <a:xfrm>
-            <a:off x="6217920" y="4434840"/>
-            <a:ext cx="5532120" cy="2103120"/>
-          </a:xfrm>
-          <a:prstGeom prst="rect">
-            <a:avLst/>
-          </a:prstGeom>
-          <a:solidFill>
-            <a:srgbClr val="F2F2F2"/>
-          </a:solidFill>
-          <a:ln w="15875">
-            <a:solidFill>
-              <a:srgbClr val="548235"/>
-            </a:solidFill>
-          </a:ln>
-        </p:spPr>
-        <p:txBody>
-          <a:bodyPr wrap="square" lIns="137160" rIns="137160" tIns="109728">
-            <a:spAutoFit/>
-          </a:bodyPr>
-          <a:lstStyle/>
-          <a:p>
-            <a:r>
-              <a:rPr sz="1500" b="1">
-                <a:solidFill>
-                  <a:srgbClr val="548235"/>
-                </a:solidFill>
-              </a:rPr>
-              <a:t>Electrification re-shuffles the deck</a:t>
-            </a:r>
-          </a:p>
-          <a:p>
-            <a:pPr>
-              <a:spcBef>
-                <a:spcPts val="400"/>
-              </a:spcBef>
-            </a:pPr>
-            <a:r>
-              <a:rPr sz="1200">
-                <a:solidFill>
-                  <a:srgbClr val="202020"/>
-                </a:solidFill>
-              </a:rPr>
-              <a:t>Regen braking cuts friction wear 64-95% (multiple peer-reviewed studies)</a:t>
-            </a:r>
-          </a:p>
-          <a:p>
-            <a:pPr>
-              <a:spcBef>
-                <a:spcPts val="400"/>
-              </a:spcBef>
-            </a:pPr>
-            <a:r>
-              <a:rPr sz="1200">
-                <a:solidFill>
-                  <a:srgbClr val="202020"/>
-                </a:solidFill>
-              </a:rPr>
-              <a:t>Friction aftermarket growth ~2% CAGR with EV headwind</a:t>
-            </a:r>
-          </a:p>
-          <a:p>
-            <a:pPr>
-              <a:spcBef>
-                <a:spcPts val="400"/>
-              </a:spcBef>
-            </a:pPr>
-            <a:r>
-              <a:rPr sz="1200">
-                <a:solidFill>
-                  <a:srgbClr val="202020"/>
-                </a:solidFill>
-              </a:rPr>
-              <a:t>EU brake-dust limits for heavy vehicles expected ~2030</a:t>
-            </a:r>
-          </a:p>
-          <a:p>
-            <a:pPr>
-              <a:spcBef>
-                <a:spcPts val="400"/>
-              </a:spcBef>
-            </a:pPr>
-            <a:r>
-              <a:rPr sz="1200">
-                <a:solidFill>
-                  <a:srgbClr val="202020"/>
-                </a:solidFill>
-              </a:rPr>
-              <a:t>Value shifts: wear parts → corrosion/NVH/low-dust + retarders &amp; blending</a:t>
-            </a:r>
-          </a:p>
-        </p:txBody>
-      </p:sp>
-    </p:spTree>
-  </p:cSld>
-  <p:clrMapOvr>
-    <a:masterClrMapping/>
-  </p:clrMapOvr>
-</p:sld>
-</file>
-
-<file path=ppt/slides/slide20.xml><?xml version="1.0" encoding="utf-8"?>
+<file path=ppt/slides/slide22.xml><?xml version="1.0" encoding="utf-8"?>
 <p:sld xmlns:a="http://schemas.openxmlformats.org/drawingml/2006/main" xmlns:p="http://schemas.openxmlformats.org/presentationml/2006/main" xmlns:r="http://schemas.openxmlformats.org/officeDocument/2006/relationships">
   <p:cSld>
     <p:spTree>
@@ -12024,7 +13243,7 @@
 </p:sld>
 </file>
 
-<file path=ppt/slides/slide21.xml><?xml version="1.0" encoding="utf-8"?>
+<file path=ppt/slides/slide23.xml><?xml version="1.0" encoding="utf-8"?>
 <p:sld xmlns:a="http://schemas.openxmlformats.org/drawingml/2006/main" xmlns:p="http://schemas.openxmlformats.org/presentationml/2006/main" xmlns:r="http://schemas.openxmlformats.org/officeDocument/2006/relationships">
   <p:cSld>
     <p:spTree>
@@ -12181,7 +13400,7 @@
 </p:sld>
 </file>
 
-<file path=ppt/slides/slide22.xml><?xml version="1.0" encoding="utf-8"?>
+<file path=ppt/slides/slide24.xml><?xml version="1.0" encoding="utf-8"?>
 <p:sld xmlns:a="http://schemas.openxmlformats.org/drawingml/2006/main" xmlns:p="http://schemas.openxmlformats.org/presentationml/2006/main" xmlns:r="http://schemas.openxmlformats.org/officeDocument/2006/relationships">
   <p:cSld>
     <p:spTree>
@@ -12698,7 +13917,7 @@
 </p:sld>
 </file>
 
-<file path=ppt/slides/slide23.xml><?xml version="1.0" encoding="utf-8"?>
+<file path=ppt/slides/slide25.xml><?xml version="1.0" encoding="utf-8"?>
 <p:sld xmlns:a="http://schemas.openxmlformats.org/drawingml/2006/main" xmlns:p="http://schemas.openxmlformats.org/presentationml/2006/main" xmlns:r="http://schemas.openxmlformats.org/officeDocument/2006/relationships">
   <p:cSld>
     <p:spTree>

--- a/TBK_rd_gap_slides.pptx
+++ b/TBK_rd_gap_slides.pptx
@@ -30,6 +30,7 @@
     <p:sldId id="278" r:id="rId29"/>
     <p:sldId id="279" r:id="rId30"/>
     <p:sldId id="280" r:id="rId31"/>
+    <p:sldId id="281" r:id="rId32"/>
   </p:sldIdLst>
   <p:sldSz cx="12191695" cy="6858000" type="screen4x3"/>
   <p:notesSz cx="6858000" cy="9144000"/>
@@ -355,6 +356,330 @@
           <a:lstStyle/>
           <a:p>
             <a:r>
+              <a:rPr sz="1300"/>
+              <a:t>Contribution margin by pump product (%)</a:t>
+            </a:r>
+          </a:p>
+        </c:rich>
+      </c:tx>
+      <c:layout/>
+      <c:overlay val="0"/>
+    </c:title>
+    <c:autoTitleDeleted val="0"/>
+    <c:plotArea>
+      <c:barChart>
+        <c:barDir val="col"/>
+        <c:grouping val="clustered"/>
+        <c:ser>
+          <c:idx val="0"/>
+          <c:order val="0"/>
+          <c:tx>
+            <c:strRef>
+              <c:f>Sheet1!$B$1</c:f>
+              <c:strCache>
+                <c:ptCount val="1"/>
+                <c:pt idx="0">
+                  <c:v>TBK (Japan)</c:v>
+                </c:pt>
+              </c:strCache>
+            </c:strRef>
+          </c:tx>
+          <c:spPr>
+            <a:solidFill>
+              <a:srgbClr val="7F1D1D"/>
+            </a:solidFill>
+          </c:spPr>
+          <c:cat>
+            <c:strRef>
+              <c:f>Sheet1!$A$2:$A$7</c:f>
+              <c:strCache>
+                <c:ptCount val="6"/>
+                <c:pt idx="0">
+                  <c:v>Water pumps</c:v>
+                </c:pt>
+                <c:pt idx="1">
+                  <c:v>Oil pumps</c:v>
+                </c:pt>
+                <c:pt idx="2">
+                  <c:v>Semi-variable
+water pump</c:v>
+                </c:pt>
+                <c:pt idx="3">
+                  <c:v>Electric
+water pump</c:v>
+                </c:pt>
+                <c:pt idx="4">
+                  <c:v>Electric
+oil pump</c:v>
+                </c:pt>
+                <c:pt idx="5">
+                  <c:v>Fuel / transm.
+pumps</c:v>
+                </c:pt>
+              </c:strCache>
+            </c:strRef>
+          </c:cat>
+          <c:val>
+            <c:numRef>
+              <c:f>Sheet1!$B$2:$B$7</c:f>
+              <c:numCache>
+                <c:formatCode>General</c:formatCode>
+                <c:ptCount val="6"/>
+                <c:pt idx="0">
+                  <c:v>18.5</c:v>
+                </c:pt>
+                <c:pt idx="1">
+                  <c:v>26.0</c:v>
+                </c:pt>
+              </c:numCache>
+            </c:numRef>
+          </c:val>
+        </c:ser>
+        <c:ser>
+          <c:idx val="1"/>
+          <c:order val="1"/>
+          <c:tx>
+            <c:strRef>
+              <c:f>Sheet1!$C$1</c:f>
+              <c:strCache>
+                <c:ptCount val="1"/>
+                <c:pt idx="0">
+                  <c:v>TBKK (Thailand)</c:v>
+                </c:pt>
+              </c:strCache>
+            </c:strRef>
+          </c:tx>
+          <c:spPr>
+            <a:solidFill>
+              <a:srgbClr val="C06C2C"/>
+            </a:solidFill>
+          </c:spPr>
+          <c:cat>
+            <c:strRef>
+              <c:f>Sheet1!$A$2:$A$7</c:f>
+              <c:strCache>
+                <c:ptCount val="6"/>
+                <c:pt idx="0">
+                  <c:v>Water pumps</c:v>
+                </c:pt>
+                <c:pt idx="1">
+                  <c:v>Oil pumps</c:v>
+                </c:pt>
+                <c:pt idx="2">
+                  <c:v>Semi-variable
+water pump</c:v>
+                </c:pt>
+                <c:pt idx="3">
+                  <c:v>Electric
+water pump</c:v>
+                </c:pt>
+                <c:pt idx="4">
+                  <c:v>Electric
+oil pump</c:v>
+                </c:pt>
+                <c:pt idx="5">
+                  <c:v>Fuel / transm.
+pumps</c:v>
+                </c:pt>
+              </c:strCache>
+            </c:strRef>
+          </c:cat>
+          <c:val>
+            <c:numRef>
+              <c:f>Sheet1!$C$2:$C$7</c:f>
+              <c:numCache>
+                <c:formatCode>General</c:formatCode>
+                <c:ptCount val="6"/>
+                <c:pt idx="0">
+                  <c:v>19.5</c:v>
+                </c:pt>
+                <c:pt idx="1">
+                  <c:v>22.6</c:v>
+                </c:pt>
+              </c:numCache>
+            </c:numRef>
+          </c:val>
+        </c:ser>
+        <c:ser>
+          <c:idx val="2"/>
+          <c:order val="2"/>
+          <c:tx>
+            <c:strRef>
+              <c:f>Sheet1!$D$1</c:f>
+              <c:strCache>
+                <c:ptCount val="1"/>
+                <c:pt idx="0">
+                  <c:v>Concentric</c:v>
+                </c:pt>
+              </c:strCache>
+            </c:strRef>
+          </c:tx>
+          <c:spPr>
+            <a:solidFill>
+              <a:srgbClr val="548235"/>
+            </a:solidFill>
+          </c:spPr>
+          <c:cat>
+            <c:strRef>
+              <c:f>Sheet1!$A$2:$A$7</c:f>
+              <c:strCache>
+                <c:ptCount val="6"/>
+                <c:pt idx="0">
+                  <c:v>Water pumps</c:v>
+                </c:pt>
+                <c:pt idx="1">
+                  <c:v>Oil pumps</c:v>
+                </c:pt>
+                <c:pt idx="2">
+                  <c:v>Semi-variable
+water pump</c:v>
+                </c:pt>
+                <c:pt idx="3">
+                  <c:v>Electric
+water pump</c:v>
+                </c:pt>
+                <c:pt idx="4">
+                  <c:v>Electric
+oil pump</c:v>
+                </c:pt>
+                <c:pt idx="5">
+                  <c:v>Fuel / transm.
+pumps</c:v>
+                </c:pt>
+              </c:strCache>
+            </c:strRef>
+          </c:cat>
+          <c:val>
+            <c:numRef>
+              <c:f>Sheet1!$D$2:$D$7</c:f>
+              <c:numCache>
+                <c:formatCode>General</c:formatCode>
+                <c:ptCount val="6"/>
+                <c:pt idx="0">
+                  <c:v>38.2</c:v>
+                </c:pt>
+                <c:pt idx="1">
+                  <c:v>42.9</c:v>
+                </c:pt>
+                <c:pt idx="2">
+                  <c:v>54.1</c:v>
+                </c:pt>
+                <c:pt idx="3">
+                  <c:v>54.8</c:v>
+                </c:pt>
+                <c:pt idx="4">
+                  <c:v>40.5</c:v>
+                </c:pt>
+                <c:pt idx="5">
+                  <c:v>55.6</c:v>
+                </c:pt>
+              </c:numCache>
+            </c:numRef>
+          </c:val>
+        </c:ser>
+        <c:dLbls>
+          <c:numFmt formatCode="0.0&quot;%&quot;" sourceLinked="0"/>
+          <c:txPr>
+            <a:bodyPr/>
+            <a:lstStyle/>
+            <a:p>
+              <a:pPr>
+                <a:defRPr sz="1000"/>
+              </a:pPr>
+            </a:p>
+          </c:txPr>
+          <c:showLegendKey val="0"/>
+          <c:showVal val="1"/>
+          <c:showCatName val="0"/>
+          <c:showSerName val="0"/>
+          <c:showPercent val="0"/>
+          <c:showBubbleSize val="0"/>
+          <c:showLeaderLines val="1"/>
+        </c:dLbls>
+        <c:axId val="-2068027336"/>
+        <c:axId val="-2113994440"/>
+      </c:barChart>
+      <c:catAx>
+        <c:axId val="-2068027336"/>
+        <c:scaling>
+          <c:orientation val="minMax"/>
+        </c:scaling>
+        <c:delete val="0"/>
+        <c:axPos val="b"/>
+        <c:majorTickMark val="out"/>
+        <c:minorTickMark val="none"/>
+        <c:tickLblPos val="nextTo"/>
+        <c:txPr>
+          <a:bodyPr/>
+          <a:lstStyle/>
+          <a:p>
+            <a:pPr>
+              <a:defRPr sz="900"/>
+            </a:pPr>
+          </a:p>
+        </c:txPr>
+        <c:crossAx val="-2113994440"/>
+        <c:crosses val="autoZero"/>
+        <c:auto val="1"/>
+        <c:lblAlgn val="ctr"/>
+        <c:lblOffset val="100"/>
+        <c:noMultiLvlLbl val="0"/>
+      </c:catAx>
+      <c:valAx>
+        <c:axId val="-2113994440"/>
+        <c:scaling/>
+        <c:delete val="0"/>
+        <c:axPos val="l"/>
+        <c:majorGridlines/>
+        <c:majorTickMark val="out"/>
+        <c:minorTickMark val="none"/>
+        <c:tickLblPos val="nextTo"/>
+        <c:crossAx val="-2068027336"/>
+        <c:crosses val="autoZero"/>
+      </c:valAx>
+    </c:plotArea>
+    <c:legend>
+      <c:legendPos val="b"/>
+      <c:overlay val="0"/>
+      <c:txPr>
+        <a:bodyPr/>
+        <a:lstStyle/>
+        <a:p>
+          <a:pPr>
+            <a:defRPr sz="1100"/>
+          </a:pPr>
+        </a:p>
+      </c:txPr>
+    </c:legend>
+    <c:dispBlanksAs val="gap"/>
+  </c:chart>
+  <c:txPr>
+    <a:bodyPr/>
+    <a:lstStyle/>
+    <a:p>
+      <a:pPr>
+        <a:defRPr sz="1800"/>
+      </a:pPr>
+      <a:endParaRPr lang="en-US"/>
+    </a:p>
+  </c:txPr>
+  <c:externalData r:id="rId1">
+    <c:autoUpdate val="0"/>
+  </c:externalData>
+</c:chartSpace>
+</file>
+
+<file path=ppt/charts/chart11.xml><?xml version="1.0" encoding="utf-8"?>
+<c:chartSpace xmlns:c="http://schemas.openxmlformats.org/drawingml/2006/chart" xmlns:a="http://schemas.openxmlformats.org/drawingml/2006/main" xmlns:r="http://schemas.openxmlformats.org/officeDocument/2006/relationships">
+  <c:date1904 val="0"/>
+  <c:chart>
+    <c:title>
+      <c:tx>
+        <c:rich>
+          <a:bodyPr/>
+          <a:lstStyle/>
+          <a:p>
+            <a:r>
               <a:rPr sz="1400"/>
               <a:t>OPEX as % of sales: TBK vs peers, by business</a:t>
             </a:r>
@@ -608,7 +933,7 @@
 </c:chartSpace>
 </file>
 
-<file path=ppt/charts/chart11.xml><?xml version="1.0" encoding="utf-8"?>
+<file path=ppt/charts/chart12.xml><?xml version="1.0" encoding="utf-8"?>
 <c:chartSpace xmlns:c="http://schemas.openxmlformats.org/drawingml/2006/chart" xmlns:a="http://schemas.openxmlformats.org/drawingml/2006/main" xmlns:r="http://schemas.openxmlformats.org/officeDocument/2006/relationships">
   <c:date1904 val="0"/>
   <c:chart>
@@ -834,267 +1159,6 @@
           <a:p>
             <a:pPr>
               <a:defRPr sz="1000"/>
-            </a:pPr>
-          </a:p>
-        </c:txPr>
-        <c:crossAx val="-2113994440"/>
-        <c:crosses val="autoZero"/>
-        <c:auto val="1"/>
-        <c:lblAlgn val="ctr"/>
-        <c:lblOffset val="100"/>
-        <c:noMultiLvlLbl val="0"/>
-      </c:catAx>
-      <c:valAx>
-        <c:axId val="-2113994440"/>
-        <c:scaling/>
-        <c:delete val="0"/>
-        <c:axPos val="l"/>
-        <c:majorGridlines/>
-        <c:majorTickMark val="out"/>
-        <c:minorTickMark val="none"/>
-        <c:tickLblPos val="nextTo"/>
-        <c:crossAx val="-2068027336"/>
-        <c:crosses val="autoZero"/>
-      </c:valAx>
-    </c:plotArea>
-    <c:legend>
-      <c:legendPos val="b"/>
-      <c:overlay val="0"/>
-      <c:txPr>
-        <a:bodyPr/>
-        <a:lstStyle/>
-        <a:p>
-          <a:pPr>
-            <a:defRPr sz="1100"/>
-          </a:pPr>
-        </a:p>
-      </c:txPr>
-    </c:legend>
-    <c:dispBlanksAs val="gap"/>
-  </c:chart>
-  <c:txPr>
-    <a:bodyPr/>
-    <a:lstStyle/>
-    <a:p>
-      <a:pPr>
-        <a:defRPr sz="1800"/>
-      </a:pPr>
-      <a:endParaRPr lang="en-US"/>
-    </a:p>
-  </c:txPr>
-  <c:externalData r:id="rId1">
-    <c:autoUpdate val="0"/>
-  </c:externalData>
-</c:chartSpace>
-</file>
-
-<file path=ppt/charts/chart12.xml><?xml version="1.0" encoding="utf-8"?>
-<c:chartSpace xmlns:c="http://schemas.openxmlformats.org/drawingml/2006/chart" xmlns:a="http://schemas.openxmlformats.org/drawingml/2006/main" xmlns:r="http://schemas.openxmlformats.org/officeDocument/2006/relationships">
-  <c:date1904 val="0"/>
-  <c:chart>
-    <c:title>
-      <c:tx>
-        <c:rich>
-          <a:bodyPr/>
-          <a:lstStyle/>
-          <a:p>
-            <a:r>
-              <a:rPr sz="1400"/>
-              <a:t>R&amp;D spend plan (US$M per year)</a:t>
-            </a:r>
-          </a:p>
-        </c:rich>
-      </c:tx>
-      <c:layout/>
-      <c:overlay val="0"/>
-    </c:title>
-    <c:autoTitleDeleted val="0"/>
-    <c:plotArea>
-      <c:barChart>
-        <c:barDir val="col"/>
-        <c:grouping val="stacked"/>
-        <c:ser>
-          <c:idx val="0"/>
-          <c:order val="0"/>
-          <c:tx>
-            <c:strRef>
-              <c:f>Sheet1!$B$1</c:f>
-              <c:strCache>
-                <c:ptCount val="1"/>
-                <c:pt idx="0">
-                  <c:v>Parity run-rate (~4.5-5% of sales)</c:v>
-                </c:pt>
-              </c:strCache>
-            </c:strRef>
-          </c:tx>
-          <c:spPr>
-            <a:solidFill>
-              <a:srgbClr val="1F4E78"/>
-            </a:solidFill>
-          </c:spPr>
-          <c:cat>
-            <c:strRef>
-              <c:f>Sheet1!$A$2:$A$8</c:f>
-              <c:strCache>
-                <c:ptCount val="7"/>
-                <c:pt idx="0">
-                  <c:v>FY26
-actual est.</c:v>
-                </c:pt>
-                <c:pt idx="1">
-                  <c:v>FY27</c:v>
-                </c:pt>
-                <c:pt idx="2">
-                  <c:v>FY28</c:v>
-                </c:pt>
-                <c:pt idx="3">
-                  <c:v>FY29</c:v>
-                </c:pt>
-                <c:pt idx="4">
-                  <c:v>FY30</c:v>
-                </c:pt>
-                <c:pt idx="5">
-                  <c:v>FY31</c:v>
-                </c:pt>
-                <c:pt idx="6">
-                  <c:v>Steady state
-FY32+</c:v>
-                </c:pt>
-              </c:strCache>
-            </c:strRef>
-          </c:cat>
-          <c:val>
-            <c:numRef>
-              <c:f>Sheet1!$B$2:$B$8</c:f>
-              <c:numCache>
-                <c:formatCode>General</c:formatCode>
-                <c:ptCount val="7"/>
-                <c:pt idx="0">
-                  <c:v>7.8</c:v>
-                </c:pt>
-                <c:pt idx="1">
-                  <c:v>17</c:v>
-                </c:pt>
-                <c:pt idx="2">
-                  <c:v>17</c:v>
-                </c:pt>
-                <c:pt idx="3">
-                  <c:v>17</c:v>
-                </c:pt>
-                <c:pt idx="4">
-                  <c:v>17</c:v>
-                </c:pt>
-                <c:pt idx="5">
-                  <c:v>17</c:v>
-                </c:pt>
-                <c:pt idx="6">
-                  <c:v>17</c:v>
-                </c:pt>
-              </c:numCache>
-            </c:numRef>
-          </c:val>
-        </c:ser>
-        <c:ser>
-          <c:idx val="1"/>
-          <c:order val="1"/>
-          <c:tx>
-            <c:strRef>
-              <c:f>Sheet1!$C$1</c:f>
-              <c:strCache>
-                <c:ptCount val="1"/>
-                <c:pt idx="0">
-                  <c:v>Deficit repayment (catch-up)</c:v>
-                </c:pt>
-              </c:strCache>
-            </c:strRef>
-          </c:tx>
-          <c:spPr>
-            <a:solidFill>
-              <a:srgbClr val="548235"/>
-            </a:solidFill>
-          </c:spPr>
-          <c:cat>
-            <c:strRef>
-              <c:f>Sheet1!$A$2:$A$8</c:f>
-              <c:strCache>
-                <c:ptCount val="7"/>
-                <c:pt idx="0">
-                  <c:v>FY26
-actual est.</c:v>
-                </c:pt>
-                <c:pt idx="1">
-                  <c:v>FY27</c:v>
-                </c:pt>
-                <c:pt idx="2">
-                  <c:v>FY28</c:v>
-                </c:pt>
-                <c:pt idx="3">
-                  <c:v>FY29</c:v>
-                </c:pt>
-                <c:pt idx="4">
-                  <c:v>FY30</c:v>
-                </c:pt>
-                <c:pt idx="5">
-                  <c:v>FY31</c:v>
-                </c:pt>
-                <c:pt idx="6">
-                  <c:v>Steady state
-FY32+</c:v>
-                </c:pt>
-              </c:strCache>
-            </c:strRef>
-          </c:cat>
-          <c:val>
-            <c:numRef>
-              <c:f>Sheet1!$C$2:$C$8</c:f>
-              <c:numCache>
-                <c:formatCode>General</c:formatCode>
-                <c:ptCount val="7"/>
-                <c:pt idx="0">
-                  <c:v>0</c:v>
-                </c:pt>
-                <c:pt idx="1">
-                  <c:v>10</c:v>
-                </c:pt>
-                <c:pt idx="2">
-                  <c:v>10</c:v>
-                </c:pt>
-                <c:pt idx="3">
-                  <c:v>10</c:v>
-                </c:pt>
-                <c:pt idx="4">
-                  <c:v>10</c:v>
-                </c:pt>
-                <c:pt idx="5">
-                  <c:v>10</c:v>
-                </c:pt>
-                <c:pt idx="6">
-                  <c:v>0</c:v>
-                </c:pt>
-              </c:numCache>
-            </c:numRef>
-          </c:val>
-        </c:ser>
-        <c:overlap val="100"/>
-        <c:axId val="-2068027336"/>
-        <c:axId val="-2113994440"/>
-      </c:barChart>
-      <c:catAx>
-        <c:axId val="-2068027336"/>
-        <c:scaling>
-          <c:orientation val="minMax"/>
-        </c:scaling>
-        <c:delete val="0"/>
-        <c:axPos val="b"/>
-        <c:majorTickMark val="out"/>
-        <c:minorTickMark val="none"/>
-        <c:tickLblPos val="nextTo"/>
-        <c:txPr>
-          <a:bodyPr/>
-          <a:lstStyle/>
-          <a:p>
-            <a:pPr>
-              <a:defRPr sz="900"/>
             </a:pPr>
           </a:p>
         </c:txPr>
@@ -1160,6 +1224,267 @@
           <a:lstStyle/>
           <a:p>
             <a:r>
+              <a:rPr sz="1400"/>
+              <a:t>R&amp;D spend plan (US$M per year)</a:t>
+            </a:r>
+          </a:p>
+        </c:rich>
+      </c:tx>
+      <c:layout/>
+      <c:overlay val="0"/>
+    </c:title>
+    <c:autoTitleDeleted val="0"/>
+    <c:plotArea>
+      <c:barChart>
+        <c:barDir val="col"/>
+        <c:grouping val="stacked"/>
+        <c:ser>
+          <c:idx val="0"/>
+          <c:order val="0"/>
+          <c:tx>
+            <c:strRef>
+              <c:f>Sheet1!$B$1</c:f>
+              <c:strCache>
+                <c:ptCount val="1"/>
+                <c:pt idx="0">
+                  <c:v>Parity run-rate (~4.5-5% of sales)</c:v>
+                </c:pt>
+              </c:strCache>
+            </c:strRef>
+          </c:tx>
+          <c:spPr>
+            <a:solidFill>
+              <a:srgbClr val="1F4E78"/>
+            </a:solidFill>
+          </c:spPr>
+          <c:cat>
+            <c:strRef>
+              <c:f>Sheet1!$A$2:$A$8</c:f>
+              <c:strCache>
+                <c:ptCount val="7"/>
+                <c:pt idx="0">
+                  <c:v>FY26
+actual est.</c:v>
+                </c:pt>
+                <c:pt idx="1">
+                  <c:v>FY27</c:v>
+                </c:pt>
+                <c:pt idx="2">
+                  <c:v>FY28</c:v>
+                </c:pt>
+                <c:pt idx="3">
+                  <c:v>FY29</c:v>
+                </c:pt>
+                <c:pt idx="4">
+                  <c:v>FY30</c:v>
+                </c:pt>
+                <c:pt idx="5">
+                  <c:v>FY31</c:v>
+                </c:pt>
+                <c:pt idx="6">
+                  <c:v>Steady state
+FY32+</c:v>
+                </c:pt>
+              </c:strCache>
+            </c:strRef>
+          </c:cat>
+          <c:val>
+            <c:numRef>
+              <c:f>Sheet1!$B$2:$B$8</c:f>
+              <c:numCache>
+                <c:formatCode>General</c:formatCode>
+                <c:ptCount val="7"/>
+                <c:pt idx="0">
+                  <c:v>7.8</c:v>
+                </c:pt>
+                <c:pt idx="1">
+                  <c:v>17</c:v>
+                </c:pt>
+                <c:pt idx="2">
+                  <c:v>17</c:v>
+                </c:pt>
+                <c:pt idx="3">
+                  <c:v>17</c:v>
+                </c:pt>
+                <c:pt idx="4">
+                  <c:v>17</c:v>
+                </c:pt>
+                <c:pt idx="5">
+                  <c:v>17</c:v>
+                </c:pt>
+                <c:pt idx="6">
+                  <c:v>17</c:v>
+                </c:pt>
+              </c:numCache>
+            </c:numRef>
+          </c:val>
+        </c:ser>
+        <c:ser>
+          <c:idx val="1"/>
+          <c:order val="1"/>
+          <c:tx>
+            <c:strRef>
+              <c:f>Sheet1!$C$1</c:f>
+              <c:strCache>
+                <c:ptCount val="1"/>
+                <c:pt idx="0">
+                  <c:v>Deficit repayment (catch-up)</c:v>
+                </c:pt>
+              </c:strCache>
+            </c:strRef>
+          </c:tx>
+          <c:spPr>
+            <a:solidFill>
+              <a:srgbClr val="548235"/>
+            </a:solidFill>
+          </c:spPr>
+          <c:cat>
+            <c:strRef>
+              <c:f>Sheet1!$A$2:$A$8</c:f>
+              <c:strCache>
+                <c:ptCount val="7"/>
+                <c:pt idx="0">
+                  <c:v>FY26
+actual est.</c:v>
+                </c:pt>
+                <c:pt idx="1">
+                  <c:v>FY27</c:v>
+                </c:pt>
+                <c:pt idx="2">
+                  <c:v>FY28</c:v>
+                </c:pt>
+                <c:pt idx="3">
+                  <c:v>FY29</c:v>
+                </c:pt>
+                <c:pt idx="4">
+                  <c:v>FY30</c:v>
+                </c:pt>
+                <c:pt idx="5">
+                  <c:v>FY31</c:v>
+                </c:pt>
+                <c:pt idx="6">
+                  <c:v>Steady state
+FY32+</c:v>
+                </c:pt>
+              </c:strCache>
+            </c:strRef>
+          </c:cat>
+          <c:val>
+            <c:numRef>
+              <c:f>Sheet1!$C$2:$C$8</c:f>
+              <c:numCache>
+                <c:formatCode>General</c:formatCode>
+                <c:ptCount val="7"/>
+                <c:pt idx="0">
+                  <c:v>0</c:v>
+                </c:pt>
+                <c:pt idx="1">
+                  <c:v>10</c:v>
+                </c:pt>
+                <c:pt idx="2">
+                  <c:v>10</c:v>
+                </c:pt>
+                <c:pt idx="3">
+                  <c:v>10</c:v>
+                </c:pt>
+                <c:pt idx="4">
+                  <c:v>10</c:v>
+                </c:pt>
+                <c:pt idx="5">
+                  <c:v>10</c:v>
+                </c:pt>
+                <c:pt idx="6">
+                  <c:v>0</c:v>
+                </c:pt>
+              </c:numCache>
+            </c:numRef>
+          </c:val>
+        </c:ser>
+        <c:overlap val="100"/>
+        <c:axId val="-2068027336"/>
+        <c:axId val="-2113994440"/>
+      </c:barChart>
+      <c:catAx>
+        <c:axId val="-2068027336"/>
+        <c:scaling>
+          <c:orientation val="minMax"/>
+        </c:scaling>
+        <c:delete val="0"/>
+        <c:axPos val="b"/>
+        <c:majorTickMark val="out"/>
+        <c:minorTickMark val="none"/>
+        <c:tickLblPos val="nextTo"/>
+        <c:txPr>
+          <a:bodyPr/>
+          <a:lstStyle/>
+          <a:p>
+            <a:pPr>
+              <a:defRPr sz="900"/>
+            </a:pPr>
+          </a:p>
+        </c:txPr>
+        <c:crossAx val="-2113994440"/>
+        <c:crosses val="autoZero"/>
+        <c:auto val="1"/>
+        <c:lblAlgn val="ctr"/>
+        <c:lblOffset val="100"/>
+        <c:noMultiLvlLbl val="0"/>
+      </c:catAx>
+      <c:valAx>
+        <c:axId val="-2113994440"/>
+        <c:scaling/>
+        <c:delete val="0"/>
+        <c:axPos val="l"/>
+        <c:majorGridlines/>
+        <c:majorTickMark val="out"/>
+        <c:minorTickMark val="none"/>
+        <c:tickLblPos val="nextTo"/>
+        <c:crossAx val="-2068027336"/>
+        <c:crosses val="autoZero"/>
+      </c:valAx>
+    </c:plotArea>
+    <c:legend>
+      <c:legendPos val="b"/>
+      <c:overlay val="0"/>
+      <c:txPr>
+        <a:bodyPr/>
+        <a:lstStyle/>
+        <a:p>
+          <a:pPr>
+            <a:defRPr sz="1100"/>
+          </a:pPr>
+        </a:p>
+      </c:txPr>
+    </c:legend>
+    <c:dispBlanksAs val="gap"/>
+  </c:chart>
+  <c:txPr>
+    <a:bodyPr/>
+    <a:lstStyle/>
+    <a:p>
+      <a:pPr>
+        <a:defRPr sz="1800"/>
+      </a:pPr>
+      <a:endParaRPr lang="en-US"/>
+    </a:p>
+  </c:txPr>
+  <c:externalData r:id="rId1">
+    <c:autoUpdate val="0"/>
+  </c:externalData>
+</c:chartSpace>
+</file>
+
+<file path=ppt/charts/chart14.xml><?xml version="1.0" encoding="utf-8"?>
+<c:chartSpace xmlns:c="http://schemas.openxmlformats.org/drawingml/2006/chart" xmlns:a="http://schemas.openxmlformats.org/drawingml/2006/main" xmlns:r="http://schemas.openxmlformats.org/officeDocument/2006/relationships">
+  <c:date1904 val="0"/>
+  <c:chart>
+    <c:title>
+      <c:tx>
+        <c:rich>
+          <a:bodyPr/>
+          <a:lstStyle/>
+          <a:p>
+            <a:r>
               <a:rPr sz="1300"/>
               <a:t>Final weighted moat scores (TBK in red)</a:t>
             </a:r>
@@ -1376,7 +1701,7 @@
 </c:chartSpace>
 </file>
 
-<file path=ppt/charts/chart14.xml><?xml version="1.0" encoding="utf-8"?>
+<file path=ppt/charts/chart15.xml><?xml version="1.0" encoding="utf-8"?>
 <c:chartSpace xmlns:c="http://schemas.openxmlformats.org/drawingml/2006/chart" xmlns:a="http://schemas.openxmlformats.org/drawingml/2006/main" xmlns:r="http://schemas.openxmlformats.org/officeDocument/2006/relationships">
   <c:date1904 val="0"/>
   <c:roundedCorners val="0"/>
@@ -1767,7 +2092,7 @@
 </c:chartSpace>
 </file>
 
-<file path=ppt/charts/chart15.xml><?xml version="1.0" encoding="utf-8"?>
+<file path=ppt/charts/chart16.xml><?xml version="1.0" encoding="utf-8"?>
 <c:chartSpace xmlns:c="http://schemas.openxmlformats.org/drawingml/2006/chart" xmlns:a="http://schemas.openxmlformats.org/drawingml/2006/main" xmlns:r="http://schemas.openxmlformats.org/officeDocument/2006/relationships">
   <c:date1904 val="0"/>
   <c:chart>
@@ -2269,7 +2594,7 @@
 </c:chartSpace>
 </file>
 
-<file path=ppt/charts/chart16.xml><?xml version="1.0" encoding="utf-8"?>
+<file path=ppt/charts/chart17.xml><?xml version="1.0" encoding="utf-8"?>
 <c:chartSpace xmlns:c="http://schemas.openxmlformats.org/drawingml/2006/chart" xmlns:a="http://schemas.openxmlformats.org/drawingml/2006/main" xmlns:r="http://schemas.openxmlformats.org/officeDocument/2006/relationships">
   <c:date1904 val="0"/>
   <c:chart>
@@ -4250,34 +4575,38 @@
           </c:spPr>
           <c:cat>
             <c:strRef>
-              <c:f>Sheet1!$A$2:$A$8</c:f>
+              <c:f>Sheet1!$A$2:$A$9</c:f>
               <c:strCache>
-                <c:ptCount val="7"/>
+                <c:ptCount val="8"/>
                 <c:pt idx="0">
+                  <c:v>SAW drum
+(flagship)</c:v>
+                </c:pt>
+                <c:pt idx="1">
                   <c:v>Foundation
 drum (2L)</c:v>
                 </c:pt>
-                <c:pt idx="1">
+                <c:pt idx="2">
                   <c:v>Friction /
 linings</c:v>
                 </c:pt>
-                <c:pt idx="2">
+                <c:pt idx="3">
                   <c:v>Brake
 drum</c:v>
                 </c:pt>
-                <c:pt idx="3">
+                <c:pt idx="4">
                   <c:v>Disc
 brake</c:v>
                 </c:pt>
-                <c:pt idx="4">
+                <c:pt idx="5">
                   <c:v>Brake adjusters
 (ABA)</c:v>
                 </c:pt>
-                <c:pt idx="5">
+                <c:pt idx="6">
                   <c:v>ABS / EBS
 electronics</c:v>
                 </c:pt>
-                <c:pt idx="6">
+                <c:pt idx="7">
                   <c:v>Aftermarket</c:v>
                 </c:pt>
               </c:strCache>
@@ -4285,23 +4614,26 @@
           </c:cat>
           <c:val>
             <c:numRef>
-              <c:f>Sheet1!$B$2:$B$8</c:f>
+              <c:f>Sheet1!$B$2:$B$9</c:f>
               <c:numCache>
                 <c:formatCode>General</c:formatCode>
-                <c:ptCount val="7"/>
+                <c:ptCount val="8"/>
                 <c:pt idx="0">
+                  <c:v>19.5</c:v>
+                </c:pt>
+                <c:pt idx="1">
                   <c:v>15.8</c:v>
                 </c:pt>
-                <c:pt idx="1">
+                <c:pt idx="2">
                   <c:v>25.1</c:v>
                 </c:pt>
-                <c:pt idx="2">
+                <c:pt idx="3">
                   <c:v>22.9</c:v>
                 </c:pt>
-                <c:pt idx="3">
+                <c:pt idx="4">
                   <c:v>68.7</c:v>
                 </c:pt>
-                <c:pt idx="6">
+                <c:pt idx="7">
                   <c:v>30.2</c:v>
                 </c:pt>
               </c:numCache>
@@ -4329,34 +4661,38 @@
           </c:spPr>
           <c:cat>
             <c:strRef>
-              <c:f>Sheet1!$A$2:$A$8</c:f>
+              <c:f>Sheet1!$A$2:$A$9</c:f>
               <c:strCache>
-                <c:ptCount val="7"/>
+                <c:ptCount val="8"/>
                 <c:pt idx="0">
+                  <c:v>SAW drum
+(flagship)</c:v>
+                </c:pt>
+                <c:pt idx="1">
                   <c:v>Foundation
 drum (2L)</c:v>
                 </c:pt>
-                <c:pt idx="1">
+                <c:pt idx="2">
                   <c:v>Friction /
 linings</c:v>
                 </c:pt>
-                <c:pt idx="2">
+                <c:pt idx="3">
                   <c:v>Brake
 drum</c:v>
                 </c:pt>
-                <c:pt idx="3">
+                <c:pt idx="4">
                   <c:v>Disc
 brake</c:v>
                 </c:pt>
-                <c:pt idx="4">
+                <c:pt idx="5">
                   <c:v>Brake adjusters
 (ABA)</c:v>
                 </c:pt>
-                <c:pt idx="5">
+                <c:pt idx="6">
                   <c:v>ABS / EBS
 electronics</c:v>
                 </c:pt>
-                <c:pt idx="6">
+                <c:pt idx="7">
                   <c:v>Aftermarket</c:v>
                 </c:pt>
               </c:strCache>
@@ -4364,23 +4700,23 @@
           </c:cat>
           <c:val>
             <c:numRef>
-              <c:f>Sheet1!$C$2:$C$8</c:f>
+              <c:f>Sheet1!$C$2:$C$9</c:f>
               <c:numCache>
                 <c:formatCode>General</c:formatCode>
-                <c:ptCount val="7"/>
-                <c:pt idx="1">
+                <c:ptCount val="8"/>
+                <c:pt idx="2">
                   <c:v>23.2</c:v>
                 </c:pt>
-                <c:pt idx="3">
+                <c:pt idx="4">
                   <c:v>14.0</c:v>
                 </c:pt>
-                <c:pt idx="4">
+                <c:pt idx="5">
                   <c:v>41.4</c:v>
                 </c:pt>
-                <c:pt idx="5">
+                <c:pt idx="6">
                   <c:v>43.4</c:v>
                 </c:pt>
-                <c:pt idx="6">
+                <c:pt idx="7">
                   <c:v>48.2</c:v>
                 </c:pt>
               </c:numCache>
@@ -4490,8 +4826,8 @@
           <a:lstStyle/>
           <a:p>
             <a:r>
-              <a:rPr sz="1300"/>
-              <a:t>Contribution margin by pump product (%)</a:t>
+              <a:rPr sz="1200"/>
+              <a:t>SAW contribution: actual vs at-market-price scenarios (vs peer core products)</a:t>
             </a:r>
           </a:p>
         </c:rich>
@@ -4513,199 +4849,88 @@
               <c:strCache>
                 <c:ptCount val="1"/>
                 <c:pt idx="0">
-                  <c:v>TBK (Japan)</c:v>
+                  <c:v>Contribution margin %</c:v>
                 </c:pt>
               </c:strCache>
             </c:strRef>
           </c:tx>
           <c:spPr>
             <a:solidFill>
-              <a:srgbClr val="7F1D1D"/>
+              <a:srgbClr val="1F4E78"/>
             </a:solidFill>
           </c:spPr>
+          <c:dPt>
+            <c:idx val="0"/>
+            <c:spPr>
+              <a:solidFill>
+                <a:srgbClr val="7F1D1D"/>
+              </a:solidFill>
+            </c:spPr>
+          </c:dPt>
+          <c:dPt>
+            <c:idx val="1"/>
+            <c:spPr>
+              <a:solidFill>
+                <a:srgbClr val="548235"/>
+              </a:solidFill>
+            </c:spPr>
+          </c:dPt>
+          <c:dPt>
+            <c:idx val="2"/>
+            <c:spPr>
+              <a:solidFill>
+                <a:srgbClr val="548235"/>
+              </a:solidFill>
+            </c:spPr>
+          </c:dPt>
           <c:cat>
             <c:strRef>
-              <c:f>Sheet1!$A$2:$A$7</c:f>
+              <c:f>Sheet1!$A$2:$A$6</c:f>
               <c:strCache>
-                <c:ptCount val="6"/>
+                <c:ptCount val="5"/>
                 <c:pt idx="0">
-                  <c:v>Water pumps</c:v>
+                  <c:v>SAW today
+(keiretsu price)</c:v>
                 </c:pt>
                 <c:pt idx="1">
-                  <c:v>Oil pumps</c:v>
+                  <c:v>SAW at market
+(+30% price)</c:v>
                 </c:pt>
                 <c:pt idx="2">
-                  <c:v>Semi-variable
-water pump</c:v>
+                  <c:v>SAW at market
+(price / 0.7)</c:v>
                 </c:pt>
                 <c:pt idx="3">
-                  <c:v>Electric
-water pump</c:v>
+                  <c:v>Haldex core products
+(ABA/ABS/air, ref.)</c:v>
                 </c:pt>
                 <c:pt idx="4">
-                  <c:v>Electric
-oil pump</c:v>
-                </c:pt>
-                <c:pt idx="5">
-                  <c:v>Fuel / transm.
-pumps</c:v>
+                  <c:v>Concentric conv.
+pumps (ref.)</c:v>
                 </c:pt>
               </c:strCache>
             </c:strRef>
           </c:cat>
           <c:val>
             <c:numRef>
-              <c:f>Sheet1!$B$2:$B$7</c:f>
+              <c:f>Sheet1!$B$2:$B$6</c:f>
               <c:numCache>
                 <c:formatCode>General</c:formatCode>
-                <c:ptCount val="6"/>
-                <c:pt idx="0">
-                  <c:v>18.5</c:v>
-                </c:pt>
-                <c:pt idx="1">
-                  <c:v>26.0</c:v>
-                </c:pt>
-              </c:numCache>
-            </c:numRef>
-          </c:val>
-        </c:ser>
-        <c:ser>
-          <c:idx val="1"/>
-          <c:order val="1"/>
-          <c:tx>
-            <c:strRef>
-              <c:f>Sheet1!$C$1</c:f>
-              <c:strCache>
-                <c:ptCount val="1"/>
-                <c:pt idx="0">
-                  <c:v>TBKK (Thailand)</c:v>
-                </c:pt>
-              </c:strCache>
-            </c:strRef>
-          </c:tx>
-          <c:spPr>
-            <a:solidFill>
-              <a:srgbClr val="C06C2C"/>
-            </a:solidFill>
-          </c:spPr>
-          <c:cat>
-            <c:strRef>
-              <c:f>Sheet1!$A$2:$A$7</c:f>
-              <c:strCache>
-                <c:ptCount val="6"/>
-                <c:pt idx="0">
-                  <c:v>Water pumps</c:v>
-                </c:pt>
-                <c:pt idx="1">
-                  <c:v>Oil pumps</c:v>
-                </c:pt>
-                <c:pt idx="2">
-                  <c:v>Semi-variable
-water pump</c:v>
-                </c:pt>
-                <c:pt idx="3">
-                  <c:v>Electric
-water pump</c:v>
-                </c:pt>
-                <c:pt idx="4">
-                  <c:v>Electric
-oil pump</c:v>
-                </c:pt>
-                <c:pt idx="5">
-                  <c:v>Fuel / transm.
-pumps</c:v>
-                </c:pt>
-              </c:strCache>
-            </c:strRef>
-          </c:cat>
-          <c:val>
-            <c:numRef>
-              <c:f>Sheet1!$C$2:$C$7</c:f>
-              <c:numCache>
-                <c:formatCode>General</c:formatCode>
-                <c:ptCount val="6"/>
+                <c:ptCount val="5"/>
                 <c:pt idx="0">
                   <c:v>19.5</c:v>
                 </c:pt>
                 <c:pt idx="1">
-                  <c:v>22.6</c:v>
-                </c:pt>
-              </c:numCache>
-            </c:numRef>
-          </c:val>
-        </c:ser>
-        <c:ser>
-          <c:idx val="2"/>
-          <c:order val="2"/>
-          <c:tx>
-            <c:strRef>
-              <c:f>Sheet1!$D$1</c:f>
-              <c:strCache>
-                <c:ptCount val="1"/>
-                <c:pt idx="0">
-                  <c:v>Concentric</c:v>
-                </c:pt>
-              </c:strCache>
-            </c:strRef>
-          </c:tx>
-          <c:spPr>
-            <a:solidFill>
-              <a:srgbClr val="548235"/>
-            </a:solidFill>
-          </c:spPr>
-          <c:cat>
-            <c:strRef>
-              <c:f>Sheet1!$A$2:$A$7</c:f>
-              <c:strCache>
-                <c:ptCount val="6"/>
-                <c:pt idx="0">
-                  <c:v>Water pumps</c:v>
-                </c:pt>
-                <c:pt idx="1">
-                  <c:v>Oil pumps</c:v>
+                  <c:v>38.1</c:v>
                 </c:pt>
                 <c:pt idx="2">
-                  <c:v>Semi-variable
-water pump</c:v>
+                  <c:v>43.6</c:v>
                 </c:pt>
                 <c:pt idx="3">
-                  <c:v>Electric
-water pump</c:v>
-                </c:pt>
-                <c:pt idx="4">
-                  <c:v>Electric
-oil pump</c:v>
-                </c:pt>
-                <c:pt idx="5">
-                  <c:v>Fuel / transm.
-pumps</c:v>
-                </c:pt>
-              </c:strCache>
-            </c:strRef>
-          </c:cat>
-          <c:val>
-            <c:numRef>
-              <c:f>Sheet1!$D$2:$D$7</c:f>
-              <c:numCache>
-                <c:formatCode>General</c:formatCode>
-                <c:ptCount val="6"/>
-                <c:pt idx="0">
-                  <c:v>38.2</c:v>
-                </c:pt>
-                <c:pt idx="1">
-                  <c:v>42.9</c:v>
-                </c:pt>
-                <c:pt idx="2">
-                  <c:v>54.1</c:v>
-                </c:pt>
-                <c:pt idx="3">
-                  <c:v>54.8</c:v>
+                  <c:v>43.0</c:v>
                 </c:pt>
                 <c:pt idx="4">
                   <c:v>40.5</c:v>
-                </c:pt>
-                <c:pt idx="5">
-                  <c:v>55.6</c:v>
                 </c:pt>
               </c:numCache>
             </c:numRef>
@@ -4718,7 +4943,7 @@
             <a:lstStyle/>
             <a:p>
               <a:pPr>
-                <a:defRPr sz="1000"/>
+                <a:defRPr sz="1100"/>
               </a:pPr>
             </a:p>
           </c:txPr>
@@ -4772,19 +4997,6 @@
         <c:crosses val="autoZero"/>
       </c:valAx>
     </c:plotArea>
-    <c:legend>
-      <c:legendPos val="b"/>
-      <c:overlay val="0"/>
-      <c:txPr>
-        <a:bodyPr/>
-        <a:lstStyle/>
-        <a:p>
-          <a:pPr>
-            <a:defRPr sz="1100"/>
-          </a:pPr>
-        </a:p>
-      </c:txPr>
-    </c:legend>
     <c:dispBlanksAs val="gap"/>
   </c:chart>
   <c:txPr>
@@ -9612,6 +9824,315 @@
                   <a:srgbClr val="FFFFFF"/>
                 </a:solidFill>
               </a:rPr>
+              <a:t>The SAW case: TBK's best product, sold ~30% below market</a:t>
+            </a:r>
+          </a:p>
+        </p:txBody>
+      </p:sp>
+      <p:sp>
+        <p:nvSpPr>
+          <p:cNvPr id="3" name="TextBox 2"/>
+          <p:cNvSpPr txBox="1"/>
+          <p:nvPr/>
+        </p:nvSpPr>
+        <p:spPr>
+          <a:xfrm>
+            <a:off x="457200" y="914400"/>
+            <a:ext cx="11247120" cy="365760"/>
+          </a:xfrm>
+          <a:prstGeom prst="rect">
+            <a:avLst/>
+          </a:prstGeom>
+          <a:noFill/>
+        </p:spPr>
+        <p:txBody>
+          <a:bodyPr wrap="square">
+            <a:spAutoFit/>
+          </a:bodyPr>
+          <a:lstStyle/>
+          <a:p>
+            <a:pPr algn="l"/>
+            <a:r>
+              <a:rPr sz="1200" b="0">
+                <a:solidFill>
+                  <a:srgbClr val="595959"/>
+                </a:solidFill>
+              </a:rPr>
+              <a:t>SAW = TBK's flagship drum brake — class-leading stopping time, energy efficiency and weight (per management). ¥4.31bn = 36% of parent H1 series sales, at just 19.5% contribution</a:t>
+            </a:r>
+          </a:p>
+        </p:txBody>
+      </p:sp>
+      <p:graphicFrame>
+        <p:nvGraphicFramePr>
+          <p:cNvPr id="4" name="Chart 3"/>
+          <p:cNvGraphicFramePr>
+            <a:graphicFrameLocks noGrp="1"/>
+          </p:cNvGraphicFramePr>
+          <p:nvPr/>
+        </p:nvGraphicFramePr>
+        <p:xfrm>
+          <a:off x="457200" y="1463040"/>
+          <a:ext cx="6400800" cy="4206240"/>
+        </p:xfrm>
+        <a:graphic>
+          <a:graphicData uri="http://schemas.openxmlformats.org/drawingml/2006/chart">
+            <c:chart xmlns:c="http://schemas.openxmlformats.org/drawingml/2006/chart" r:id="rId2"/>
+          </a:graphicData>
+        </a:graphic>
+      </p:graphicFrame>
+      <p:sp>
+        <p:nvSpPr>
+          <p:cNvPr id="5" name="TextBox 4"/>
+          <p:cNvSpPr txBox="1"/>
+          <p:nvPr/>
+        </p:nvSpPr>
+        <p:spPr>
+          <a:xfrm>
+            <a:off x="7132320" y="1463040"/>
+            <a:ext cx="4617720" cy="2240280"/>
+          </a:xfrm>
+          <a:prstGeom prst="rect">
+            <a:avLst/>
+          </a:prstGeom>
+          <a:solidFill>
+            <a:srgbClr val="F2F2F2"/>
+          </a:solidFill>
+          <a:ln w="15875">
+            <a:solidFill>
+              <a:srgbClr val="1F4E78"/>
+            </a:solidFill>
+          </a:ln>
+        </p:spPr>
+        <p:txBody>
+          <a:bodyPr wrap="square" lIns="137160" rIns="137160" tIns="109728">
+            <a:spAutoFit/>
+          </a:bodyPr>
+          <a:lstStyle/>
+          <a:p>
+            <a:r>
+              <a:rPr sz="1500" b="1">
+                <a:solidFill>
+                  <a:srgbClr val="1F4E78"/>
+                </a:solidFill>
+              </a:rPr>
+              <a:t>The triangulation</a:t>
+            </a:r>
+          </a:p>
+          <a:p>
+            <a:pPr>
+              <a:spcBef>
+                <a:spcPts val="400"/>
+              </a:spcBef>
+            </a:pPr>
+            <a:r>
+              <a:rPr sz="1150">
+                <a:solidFill>
+                  <a:srgbClr val="202020"/>
+                </a:solidFill>
+              </a:rPr>
+              <a:t>At market price, SAW earns 38-44% contribution — EXACTLY the level of Haldex's core products (41-44%) and Concentric's conventional pumps (38-43%)</a:t>
+            </a:r>
+          </a:p>
+          <a:p>
+            <a:pPr>
+              <a:spcBef>
+                <a:spcPts val="400"/>
+              </a:spcBef>
+            </a:pPr>
+            <a:r>
+              <a:rPr sz="1150">
+                <a:solidFill>
+                  <a:srgbClr val="202020"/>
+                </a:solidFill>
+              </a:rPr>
+              <a:t>The keiretsu discount fully explains the flagship's gap: a world-leading product, peer-level economics, captured by the customer</a:t>
+            </a:r>
+          </a:p>
+          <a:p>
+            <a:pPr>
+              <a:spcBef>
+                <a:spcPts val="400"/>
+              </a:spcBef>
+            </a:pPr>
+            <a:r>
+              <a:rPr sz="1150">
+                <a:solidFill>
+                  <a:srgbClr val="202020"/>
+                </a:solidFill>
+              </a:rPr>
+              <a:t>Price flows straight to contribution: no cost change needed</a:t>
+            </a:r>
+          </a:p>
+        </p:txBody>
+      </p:sp>
+      <p:sp>
+        <p:nvSpPr>
+          <p:cNvPr id="6" name="TextBox 5"/>
+          <p:cNvSpPr txBox="1"/>
+          <p:nvPr/>
+        </p:nvSpPr>
+        <p:spPr>
+          <a:xfrm>
+            <a:off x="7132320" y="3840480"/>
+            <a:ext cx="4617720" cy="2240280"/>
+          </a:xfrm>
+          <a:prstGeom prst="rect">
+            <a:avLst/>
+          </a:prstGeom>
+          <a:solidFill>
+            <a:srgbClr val="F2F2F2"/>
+          </a:solidFill>
+          <a:ln w="15875">
+            <a:solidFill>
+              <a:srgbClr val="548235"/>
+            </a:solidFill>
+          </a:ln>
+        </p:spPr>
+        <p:txBody>
+          <a:bodyPr wrap="square" lIns="137160" rIns="137160" tIns="109728">
+            <a:spAutoFit/>
+          </a:bodyPr>
+          <a:lstStyle/>
+          <a:p>
+            <a:r>
+              <a:rPr sz="1500" b="1">
+                <a:solidFill>
+                  <a:srgbClr val="548235"/>
+                </a:solidFill>
+              </a:rPr>
+              <a:t>What it is worth — and how to get it</a:t>
+            </a:r>
+          </a:p>
+          <a:p>
+            <a:pPr>
+              <a:spcBef>
+                <a:spcPts val="400"/>
+              </a:spcBef>
+            </a:pPr>
+            <a:r>
+              <a:rPr sz="1150">
+                <a:solidFill>
+                  <a:srgbClr val="202020"/>
+                </a:solidFill>
+              </a:rPr>
+              <a:t>SAW repriced to market: +¥2.6-3.7bn contribution PER YEAR; parent series CM 19.6% -&gt; 27-30% from this one product</a:t>
+            </a:r>
+          </a:p>
+          <a:p>
+            <a:pPr>
+              <a:spcBef>
+                <a:spcPts val="400"/>
+              </a:spcBef>
+            </a:pPr>
+            <a:r>
+              <a:rPr sz="1150">
+                <a:solidFill>
+                  <a:srgbClr val="202020"/>
+                </a:solidFill>
+              </a:rPr>
+              <a:t>Realistically gradual at home (keiretsu contracts) — so arbitrage it: SELL SAW AT MARKET PRICE where market prices rule: exports, aftermarket, and India via Brakes India, where drum demand persists at scale</a:t>
+            </a:r>
+          </a:p>
+          <a:p>
+            <a:pPr>
+              <a:spcBef>
+                <a:spcPts val="400"/>
+              </a:spcBef>
+            </a:pPr>
+            <a:r>
+              <a:rPr sz="1150">
+                <a:solidFill>
+                  <a:srgbClr val="202020"/>
+                </a:solidFill>
+              </a:rPr>
+              <a:t>Class-leading tech + below-market price = the export business case writes itself</a:t>
+            </a:r>
+          </a:p>
+        </p:txBody>
+      </p:sp>
+      <p:sp>
+        <p:nvSpPr>
+          <p:cNvPr id="7" name="TextBox 6"/>
+          <p:cNvSpPr txBox="1"/>
+          <p:nvPr/>
+        </p:nvSpPr>
+        <p:spPr>
+          <a:xfrm>
+            <a:off x="457200" y="5897880"/>
+            <a:ext cx="11247120" cy="822960"/>
+          </a:xfrm>
+          <a:prstGeom prst="rect">
+            <a:avLst/>
+          </a:prstGeom>
+          <a:noFill/>
+        </p:spPr>
+        <p:txBody>
+          <a:bodyPr wrap="square">
+            <a:spAutoFit/>
+          </a:bodyPr>
+          <a:lstStyle/>
+          <a:p>
+            <a:pPr algn="l"/>
+            <a:r>
+              <a:rPr sz="1100" b="0">
+                <a:solidFill>
+                  <a:srgbClr val="595959"/>
+                </a:solidFill>
+              </a:rPr>
+              <a:t>Note: 'leading drum brake in stopping time, energy save and weight' and the ~30% below-market pricing are management/first-hand information, not externally verified — consistent, however, with the customer-gradient data (non-keiretsu customers pay ~2x) and with TBK's zero-recall record. If the ~30% discount applies beyond SAW (management indicates Japanese customers broadly), the parent-wide repricing prize is correspondingly larger.</a:t>
+            </a:r>
+          </a:p>
+        </p:txBody>
+      </p:sp>
+    </p:spTree>
+  </p:cSld>
+  <p:clrMapOvr>
+    <a:masterClrMapping/>
+  </p:clrMapOvr>
+</p:sld>
+</file>
+
+<file path=ppt/slides/slide16.xml><?xml version="1.0" encoding="utf-8"?>
+<p:sld xmlns:a="http://schemas.openxmlformats.org/drawingml/2006/main" xmlns:p="http://schemas.openxmlformats.org/presentationml/2006/main" xmlns:r="http://schemas.openxmlformats.org/officeDocument/2006/relationships">
+  <p:cSld>
+    <p:spTree>
+      <p:nvGrpSpPr>
+        <p:cNvPr id="1" name=""/>
+        <p:cNvGrpSpPr/>
+        <p:nvPr/>
+      </p:nvGrpSpPr>
+      <p:grpSpPr/>
+      <p:sp>
+        <p:nvSpPr>
+          <p:cNvPr id="2" name="TextBox 1"/>
+          <p:cNvSpPr txBox="1"/>
+          <p:nvPr/>
+        </p:nvSpPr>
+        <p:spPr>
+          <a:xfrm>
+            <a:off x="0" y="0"/>
+            <a:ext cx="12191695" cy="868680"/>
+          </a:xfrm>
+          <a:prstGeom prst="rect">
+            <a:avLst/>
+          </a:prstGeom>
+          <a:solidFill>
+            <a:srgbClr val="1F4E78"/>
+          </a:solidFill>
+        </p:spPr>
+        <p:txBody>
+          <a:bodyPr wrap="square" lIns="457200" tIns="164592">
+            <a:spAutoFit/>
+          </a:bodyPr>
+          <a:lstStyle/>
+          <a:p>
+            <a:r>
+              <a:rPr sz="2600" b="1">
+                <a:solidFill>
+                  <a:srgbClr val="FFFFFF"/>
+                </a:solidFill>
+              </a:rPr>
               <a:t>Pump segment: TBK vs Concentric — product-level contribution</a:t>
             </a:r>
           </a:p>
@@ -9881,7 +10402,7 @@
 </p:sld>
 </file>
 
-<file path=ppt/slides/slide16.xml><?xml version="1.0" encoding="utf-8"?>
+<file path=ppt/slides/slide17.xml><?xml version="1.0" encoding="utf-8"?>
 <p:sld xmlns:a="http://schemas.openxmlformats.org/drawingml/2006/main" xmlns:p="http://schemas.openxmlformats.org/presentationml/2006/main" xmlns:r="http://schemas.openxmlformats.org/officeDocument/2006/relationships">
   <p:cSld>
     <p:spTree>
@@ -10280,7 +10801,7 @@
 </p:sld>
 </file>
 
-<file path=ppt/slides/slide17.xml><?xml version="1.0" encoding="utf-8"?>
+<file path=ppt/slides/slide18.xml><?xml version="1.0" encoding="utf-8"?>
 <p:sld xmlns:a="http://schemas.openxmlformats.org/drawingml/2006/main" xmlns:p="http://schemas.openxmlformats.org/presentationml/2006/main" xmlns:r="http://schemas.openxmlformats.org/officeDocument/2006/relationships">
   <p:cSld>
     <p:spTree>
@@ -10600,7 +11121,7 @@
 </p:sld>
 </file>
 
-<file path=ppt/slides/slide18.xml><?xml version="1.0" encoding="utf-8"?>
+<file path=ppt/slides/slide19.xml><?xml version="1.0" encoding="utf-8"?>
 <p:sld xmlns:a="http://schemas.openxmlformats.org/drawingml/2006/main" xmlns:p="http://schemas.openxmlformats.org/presentationml/2006/main" xmlns:r="http://schemas.openxmlformats.org/officeDocument/2006/relationships">
   <p:cSld>
     <p:spTree>
@@ -10988,482 +11509,6 @@
 </p:sld>
 </file>
 
-<file path=ppt/slides/slide19.xml><?xml version="1.0" encoding="utf-8"?>
-<p:sld xmlns:a="http://schemas.openxmlformats.org/drawingml/2006/main" xmlns:p="http://schemas.openxmlformats.org/presentationml/2006/main" xmlns:r="http://schemas.openxmlformats.org/officeDocument/2006/relationships">
-  <p:cSld>
-    <p:spTree>
-      <p:nvGrpSpPr>
-        <p:cNvPr id="1" name=""/>
-        <p:cNvGrpSpPr/>
-        <p:nvPr/>
-      </p:nvGrpSpPr>
-      <p:grpSpPr/>
-      <p:sp>
-        <p:nvSpPr>
-          <p:cNvPr id="2" name="TextBox 1"/>
-          <p:cNvSpPr txBox="1"/>
-          <p:nvPr/>
-        </p:nvSpPr>
-        <p:spPr>
-          <a:xfrm>
-            <a:off x="0" y="0"/>
-            <a:ext cx="12191695" cy="868680"/>
-          </a:xfrm>
-          <a:prstGeom prst="rect">
-            <a:avLst/>
-          </a:prstGeom>
-          <a:solidFill>
-            <a:srgbClr val="1F4E78"/>
-          </a:solidFill>
-        </p:spPr>
-        <p:txBody>
-          <a:bodyPr wrap="square" lIns="457200" tIns="164592">
-            <a:spAutoFit/>
-          </a:bodyPr>
-          <a:lstStyle/>
-          <a:p>
-            <a:r>
-              <a:rPr sz="2600" b="1">
-                <a:solidFill>
-                  <a:srgbClr val="FFFFFF"/>
-                </a:solidFill>
-              </a:rPr>
-              <a:t>Product evaluation I: external quality &amp; service evidence</a:t>
-            </a:r>
-          </a:p>
-        </p:txBody>
-      </p:sp>
-      <p:sp>
-        <p:nvSpPr>
-          <p:cNvPr id="3" name="TextBox 2"/>
-          <p:cNvSpPr txBox="1"/>
-          <p:nvPr/>
-        </p:nvSpPr>
-        <p:spPr>
-          <a:xfrm>
-            <a:off x="457200" y="914400"/>
-            <a:ext cx="11247120" cy="365760"/>
-          </a:xfrm>
-          <a:prstGeom prst="rect">
-            <a:avLst/>
-          </a:prstGeom>
-          <a:noFill/>
-        </p:spPr>
-        <p:txBody>
-          <a:bodyPr wrap="square">
-            <a:spAutoFit/>
-          </a:bodyPr>
-          <a:lstStyle/>
-          <a:p>
-            <a:pPr algn="l"/>
-            <a:r>
-              <a:rPr sz="1200" b="0">
-                <a:solidFill>
-                  <a:srgbClr val="595959"/>
-                </a:solidFill>
-              </a:rPr>
-              <a:t>Evidence hierarchy: NHTSA recalls (supplier named by law) &gt; OEM-granted awards &gt; independent surveys &gt; patents &gt; self-claims. Japan's MLIT does not name suppliers</a:t>
-            </a:r>
-          </a:p>
-        </p:txBody>
-      </p:sp>
-      <p:sp>
-        <p:nvSpPr>
-          <p:cNvPr id="4" name="TextBox 3"/>
-          <p:cNvSpPr txBox="1"/>
-          <p:nvPr/>
-        </p:nvSpPr>
-        <p:spPr>
-          <a:xfrm>
-            <a:off x="457200" y="1417320"/>
-            <a:ext cx="5577840" cy="2286000"/>
-          </a:xfrm>
-          <a:prstGeom prst="rect">
-            <a:avLst/>
-          </a:prstGeom>
-          <a:solidFill>
-            <a:srgbClr val="F2F2F2"/>
-          </a:solidFill>
-          <a:ln w="15875">
-            <a:solidFill>
-              <a:srgbClr val="1F4E78"/>
-            </a:solidFill>
-          </a:ln>
-        </p:spPr>
-        <p:txBody>
-          <a:bodyPr wrap="square" lIns="137160" rIns="137160" tIns="109728">
-            <a:spAutoFit/>
-          </a:bodyPr>
-          <a:lstStyle/>
-          <a:p>
-            <a:r>
-              <a:rPr sz="1500" b="1">
-                <a:solidFill>
-                  <a:srgbClr val="1F4E78"/>
-                </a:solidFill>
-              </a:rPr>
-              <a:t>The validated leaders</a:t>
-            </a:r>
-          </a:p>
-          <a:p>
-            <a:pPr>
-              <a:spcBef>
-                <a:spcPts val="400"/>
-              </a:spcBef>
-            </a:pPr>
-            <a:r>
-              <a:rPr sz="1100">
-                <a:solidFill>
-                  <a:srgbClr val="202020"/>
-                </a:solidFill>
-              </a:rPr>
-              <a:t>Knorr-Bremse/Bendix: PACCAR supplier-performance award 6 consecutive yrs; 3 plants on PACCAR's &lt;=10 defects-per-million list; ETM 'Best Brand - Brakes' (German fleet/driver vote) 19 YEARS RUNNING; ~85% of NA air-disc wheel ends</a:t>
-            </a:r>
-          </a:p>
-          <a:p>
-            <a:pPr>
-              <a:spcBef>
-                <a:spcPts val="400"/>
-              </a:spcBef>
-            </a:pPr>
-            <a:r>
-              <a:rPr sz="1100">
-                <a:solidFill>
-                  <a:srgbClr val="202020"/>
-                </a:solidFill>
-              </a:rPr>
-              <a:t>Meritor/Cummins: Daimler 'Masters of Quality' + 2020 global quality award ('1.3M axles/brakes at low defect rate'); DTNA EXTENDED its ADB contract — revealed preference</a:t>
-            </a:r>
-          </a:p>
-          <a:p>
-            <a:pPr>
-              <a:spcBef>
-                <a:spcPts val="400"/>
-              </a:spcBef>
-            </a:pPr>
-            <a:r>
-              <a:rPr sz="1100">
-                <a:solidFill>
-                  <a:srgbClr val="202020"/>
-                </a:solidFill>
-              </a:rPr>
-              <a:t>Brembo: all 10 F1 teams; AMS brake-brand vote 11 of 13 years</a:t>
-            </a:r>
-          </a:p>
-        </p:txBody>
-      </p:sp>
-      <p:sp>
-        <p:nvSpPr>
-          <p:cNvPr id="5" name="TextBox 4"/>
-          <p:cNvSpPr txBox="1"/>
-          <p:nvPr/>
-        </p:nvSpPr>
-        <p:spPr>
-          <a:xfrm>
-            <a:off x="6217920" y="1417320"/>
-            <a:ext cx="5532120" cy="2286000"/>
-          </a:xfrm>
-          <a:prstGeom prst="rect">
-            <a:avLst/>
-          </a:prstGeom>
-          <a:solidFill>
-            <a:srgbClr val="F2F2F2"/>
-          </a:solidFill>
-          <a:ln w="15875">
-            <a:solidFill>
-              <a:srgbClr val="7F1D1D"/>
-            </a:solidFill>
-          </a:ln>
-        </p:spPr>
-        <p:txBody>
-          <a:bodyPr wrap="square" lIns="137160" rIns="137160" tIns="109728">
-            <a:spAutoFit/>
-          </a:bodyPr>
-          <a:lstStyle/>
-          <a:p>
-            <a:r>
-              <a:rPr sz="1500" b="1">
-                <a:solidFill>
-                  <a:srgbClr val="7F1D1D"/>
-                </a:solidFill>
-              </a:rPr>
-              <a:t>The adverse records</a:t>
-            </a:r>
-          </a:p>
-          <a:p>
-            <a:pPr>
-              <a:spcBef>
-                <a:spcPts val="400"/>
-              </a:spcBef>
-            </a:pPr>
-            <a:r>
-              <a:rPr sz="1100">
-                <a:solidFill>
-                  <a:srgbClr val="202020"/>
-                </a:solidFill>
-              </a:rPr>
-              <a:t>Bendix: 2019 ADB22X caliper recall (fire risk); 2024-25 EC-80 ECU recall, 442k units (software fix) — scale produces both install base and recalls</a:t>
-            </a:r>
-          </a:p>
-          <a:p>
-            <a:pPr>
-              <a:spcBef>
-                <a:spcPts val="400"/>
-              </a:spcBef>
-            </a:pPr>
-            <a:r>
-              <a:rPr sz="1100">
-                <a:solidFill>
-                  <a:srgbClr val="202020"/>
-                </a:solidFill>
-              </a:rPr>
-              <a:t>Haldex: lost a WILLFUL patent-infringement verdict to Bendix (copied its ADB); two modest component recalls</a:t>
-            </a:r>
-          </a:p>
-          <a:p>
-            <a:pPr>
-              <a:spcBef>
-                <a:spcPts val="400"/>
-              </a:spcBef>
-            </a:pPr>
-            <a:r>
-              <a:rPr sz="1100">
-                <a:solidFill>
-                  <a:srgbClr val="202020"/>
-                </a:solidFill>
-              </a:rPr>
-              <a:t>Akebono: the only Japanese supplier with documented adverse events — 2015 GM recall of its brake products + 2019-21 inspection-data falsification (no recall, governance black mark)</a:t>
-            </a:r>
-          </a:p>
-        </p:txBody>
-      </p:sp>
-      <p:sp>
-        <p:nvSpPr>
-          <p:cNvPr id="6" name="TextBox 5"/>
-          <p:cNvSpPr txBox="1"/>
-          <p:nvPr/>
-        </p:nvSpPr>
-        <p:spPr>
-          <a:xfrm>
-            <a:off x="457200" y="3840480"/>
-            <a:ext cx="5577840" cy="2240280"/>
-          </a:xfrm>
-          <a:prstGeom prst="rect">
-            <a:avLst/>
-          </a:prstGeom>
-          <a:solidFill>
-            <a:srgbClr val="F2F2F2"/>
-          </a:solidFill>
-          <a:ln w="15875">
-            <a:solidFill>
-              <a:srgbClr val="1F4E78"/>
-            </a:solidFill>
-          </a:ln>
-        </p:spPr>
-        <p:txBody>
-          <a:bodyPr wrap="square" lIns="137160" rIns="137160" tIns="109728">
-            <a:spAutoFit/>
-          </a:bodyPr>
-          <a:lstStyle/>
-          <a:p>
-            <a:r>
-              <a:rPr sz="1500" b="1">
-                <a:solidFill>
-                  <a:srgbClr val="1F4E78"/>
-                </a:solidFill>
-              </a:rPr>
-              <a:t>TBK: externally invisible — in BOTH directions</a:t>
-            </a:r>
-          </a:p>
-          <a:p>
-            <a:pPr>
-              <a:spcBef>
-                <a:spcPts val="400"/>
-              </a:spcBef>
-            </a:pPr>
-            <a:r>
-              <a:rPr sz="1100">
-                <a:solidFill>
-                  <a:srgbClr val="202020"/>
-                </a:solidFill>
-              </a:rPr>
-              <a:t>No OEM award findable, no survey presence, no service network beyond Japan/Thailand</a:t>
-            </a:r>
-          </a:p>
-          <a:p>
-            <a:pPr>
-              <a:spcBef>
-                <a:spcPts val="400"/>
-              </a:spcBef>
-            </a:pPr>
-            <a:r>
-              <a:rPr sz="1100">
-                <a:solidFill>
-                  <a:srgbClr val="202020"/>
-                </a:solidFill>
-              </a:rPr>
-              <a:t>BUT also: no recall, no scandal, no misconduct report in Japanese-language search — a meaningful null in a scandal-rich industry (cf. Akebono)</a:t>
-            </a:r>
-          </a:p>
-          <a:p>
-            <a:pPr>
-              <a:spcBef>
-                <a:spcPts val="400"/>
-              </a:spcBef>
-            </a:pPr>
-            <a:r>
-              <a:rPr sz="1100">
-                <a:solidFill>
-                  <a:srgbClr val="202020"/>
-                </a:solidFill>
-              </a:rPr>
-              <a:t>75 years inside Isuzu/Fuso/Hino = quality is probably fine; 'probably fine, unproven' is the ceiling the evidence supports</a:t>
-            </a:r>
-          </a:p>
-          <a:p>
-            <a:pPr>
-              <a:spcBef>
-                <a:spcPts val="400"/>
-              </a:spcBef>
-            </a:pPr>
-            <a:r>
-              <a:rPr sz="1100">
-                <a:solidFill>
-                  <a:srgbClr val="202020"/>
-                </a:solidFill>
-              </a:rPr>
-              <a:t>Dataset moat scores align: Knorr 7.55 top, Akebono 4.95 bottom — TBK was unscored: literally unmeasurable from outside</a:t>
-            </a:r>
-          </a:p>
-        </p:txBody>
-      </p:sp>
-      <p:sp>
-        <p:nvSpPr>
-          <p:cNvPr id="7" name="TextBox 6"/>
-          <p:cNvSpPr txBox="1"/>
-          <p:nvPr/>
-        </p:nvSpPr>
-        <p:spPr>
-          <a:xfrm>
-            <a:off x="6217920" y="3840480"/>
-            <a:ext cx="5532120" cy="2240280"/>
-          </a:xfrm>
-          <a:prstGeom prst="rect">
-            <a:avLst/>
-          </a:prstGeom>
-          <a:solidFill>
-            <a:srgbClr val="F2F2F2"/>
-          </a:solidFill>
-          <a:ln w="15875">
-            <a:solidFill>
-              <a:srgbClr val="548235"/>
-            </a:solidFill>
-          </a:ln>
-        </p:spPr>
-        <p:txBody>
-          <a:bodyPr wrap="square" lIns="137160" rIns="137160" tIns="109728">
-            <a:spAutoFit/>
-          </a:bodyPr>
-          <a:lstStyle/>
-          <a:p>
-            <a:r>
-              <a:rPr sz="1500" b="1">
-                <a:solidFill>
-                  <a:srgbClr val="548235"/>
-                </a:solidFill>
-              </a:rPr>
-              <a:t>TCO &amp; service: only proxies exist</a:t>
-            </a:r>
-          </a:p>
-          <a:p>
-            <a:pPr>
-              <a:spcBef>
-                <a:spcPts val="400"/>
-              </a:spcBef>
-            </a:pPr>
-            <a:r>
-              <a:rPr sz="1100">
-                <a:solidFill>
-                  <a:srgbClr val="202020"/>
-                </a:solidFill>
-              </a:rPr>
-              <a:t>Brand-level TCO data is NOT public (fleets don't publish; IMR studies paywalled) — standing must be inferred:</a:t>
-            </a:r>
-          </a:p>
-          <a:p>
-            <a:pPr>
-              <a:spcBef>
-                <a:spcPts val="400"/>
-              </a:spcBef>
-            </a:pPr>
-            <a:r>
-              <a:rPr sz="1100">
-                <a:solidFill>
-                  <a:srgbClr val="202020"/>
-                </a:solidFill>
-              </a:rPr>
-              <a:t>Install base: Bendix 20M+ ADBs in field | Contract renewals: Meritor-DTNA extension | Networks: Knorr's pan-EMEA certified workshop network vs TBK's Japan+Thailand footprint</a:t>
-            </a:r>
-          </a:p>
-          <a:p>
-            <a:pPr>
-              <a:spcBef>
-                <a:spcPts val="400"/>
-              </a:spcBef>
-            </a:pPr>
-            <a:r>
-              <a:rPr sz="1100">
-                <a:solidFill>
-                  <a:srgbClr val="202020"/>
-                </a:solidFill>
-              </a:rPr>
-              <a:t>On every proxy the systems players lead — and TBK does not appear</a:t>
-            </a:r>
-          </a:p>
-        </p:txBody>
-      </p:sp>
-      <p:sp>
-        <p:nvSpPr>
-          <p:cNvPr id="8" name="TextBox 7"/>
-          <p:cNvSpPr txBox="1"/>
-          <p:nvPr/>
-        </p:nvSpPr>
-        <p:spPr>
-          <a:xfrm>
-            <a:off x="457200" y="6172200"/>
-            <a:ext cx="11247120" cy="548640"/>
-          </a:xfrm>
-          <a:prstGeom prst="rect">
-            <a:avLst/>
-          </a:prstGeom>
-          <a:noFill/>
-        </p:spPr>
-        <p:txBody>
-          <a:bodyPr wrap="square">
-            <a:spAutoFit/>
-          </a:bodyPr>
-          <a:lstStyle/>
-          <a:p>
-            <a:pPr algn="l"/>
-            <a:r>
-              <a:rPr sz="1200" b="1">
-                <a:solidFill>
-                  <a:srgbClr val="1F4E78"/>
-                </a:solidFill>
-              </a:rPr>
-              <a:t>Strategic point: TBK's quality reputation is held entirely inside the keiretsu — like its market share, it cannot be sold to new customers. Making quality externally legible (awards, certifications, published data) is a cheap, necessary complement to the R&amp;D program.</a:t>
-            </a:r>
-          </a:p>
-        </p:txBody>
-      </p:sp>
-    </p:spTree>
-  </p:cSld>
-  <p:clrMapOvr>
-    <a:masterClrMapping/>
-  </p:clrMapOvr>
-</p:sld>
-</file>
-
 <file path=ppt/slides/slide2.xml><?xml version="1.0" encoding="utf-8"?>
 <p:sld xmlns:a="http://schemas.openxmlformats.org/drawingml/2006/main" xmlns:p="http://schemas.openxmlformats.org/presentationml/2006/main" xmlns:r="http://schemas.openxmlformats.org/officeDocument/2006/relationships">
   <p:cSld>
@@ -12136,7 +12181,7 @@
                   <a:srgbClr val="FFFFFF"/>
                 </a:solidFill>
               </a:rPr>
-              <a:t>Product evaluation II: innovation output</a:t>
+              <a:t>Product evaluation I: external quality &amp; service evidence</a:t>
             </a:r>
           </a:p>
         </p:txBody>
@@ -12170,7 +12215,7 @@
                   <a:srgbClr val="595959"/>
                 </a:solidFill>
               </a:rPr>
-              <a:t>Patents, documented product firsts, and technical-society awards — the externally visible output of R&amp;D</a:t>
+              <a:t>Evidence hierarchy: NHTSA recalls (supplier named by law) &gt; OEM-granted awards &gt; independent surveys &gt; patents &gt; self-claims. Japan's MLIT does not name suppliers</a:t>
             </a:r>
           </a:p>
         </p:txBody>
@@ -12210,7 +12255,7 @@
                   <a:srgbClr val="1F4E78"/>
                 </a:solidFill>
               </a:rPr>
-              <a:t>The patent gap (independent registries)</a:t>
+              <a:t>The validated leaders</a:t>
             </a:r>
           </a:p>
           <a:p>
@@ -12225,7 +12270,7 @@
                   <a:srgbClr val="202020"/>
                 </a:solidFill>
               </a:rPr>
-              <a:t>Knorr-Bremse: ~2,900 patent families / 10,900+ patents (~7,500 in the truck division)</a:t>
+              <a:t>Knorr-Bremse/Bendix: PACCAR supplier-performance award 6 consecutive yrs; 3 plants on PACCAR's &lt;=10 defects-per-million list; ETM 'Best Brand - Brakes' (German fleet/driver vote) 19 YEARS RUNNING; ~85% of NA air-disc wheel ends</a:t>
             </a:r>
           </a:p>
           <a:p>
@@ -12240,7 +12285,7 @@
                   <a:srgbClr val="202020"/>
                 </a:solidFill>
               </a:rPr>
-              <a:t>Aisin: ~680 JP applications/yr; Clarivate Top-100 Global Innovator 7 consecutive years</a:t>
+              <a:t>Meritor/Cummins: Daimler 'Masters of Quality' + 2020 global quality award ('1.3M axles/brakes at low defect rate'); DTNA EXTENDED its ADB contract — revealed preference</a:t>
             </a:r>
           </a:p>
           <a:p>
@@ -12255,52 +12300,7 @@
                   <a:srgbClr val="202020"/>
                 </a:solidFill>
               </a:rPr>
-              <a:t>Akebono: ~321 US-registered patents</a:t>
-            </a:r>
-          </a:p>
-          <a:p>
-            <a:pPr>
-              <a:spcBef>
-                <a:spcPts val="400"/>
-              </a:spcBef>
-            </a:pPr>
-            <a:r>
-              <a:rPr sz="1100">
-                <a:solidFill>
-                  <a:srgbClr val="202020"/>
-                </a:solidFill>
-              </a:rPr>
-              <a:t>Mikuni: e-oil-pump fault-detection patents — its BEV-truck win is engineering-backed</a:t>
-            </a:r>
-          </a:p>
-          <a:p>
-            <a:pPr>
-              <a:spcBef>
-                <a:spcPts val="400"/>
-              </a:spcBef>
-            </a:pPr>
-            <a:r>
-              <a:rPr sz="1100">
-                <a:solidFill>
-                  <a:srgbClr val="202020"/>
-                </a:solidFill>
-              </a:rPr>
-              <a:t>TBK: 2-3 patent GRANTS PER YEAR — two to three orders of magnitude below the leaders.</a:t>
-            </a:r>
-          </a:p>
-          <a:p>
-            <a:pPr>
-              <a:spcBef>
-                <a:spcPts val="400"/>
-              </a:spcBef>
-            </a:pPr>
-            <a:r>
-              <a:rPr sz="1100">
-                <a:solidFill>
-                  <a:srgbClr val="202020"/>
-                </a:solidFill>
-              </a:rPr>
-              <a:t>Independently confirms the capitalized-R&amp;D finding ($43M vs $2.6-5.6bn) from a different data source</a:t>
+              <a:t>Brembo: all 10 F1 teams; AMS brake-brand vote 11 of 13 years</a:t>
             </a:r>
           </a:p>
         </p:txBody>
@@ -12324,7 +12324,7 @@
           </a:solidFill>
           <a:ln w="15875">
             <a:solidFill>
-              <a:srgbClr val="548235"/>
+              <a:srgbClr val="7F1D1D"/>
             </a:solidFill>
           </a:ln>
         </p:spPr>
@@ -12337,10 +12337,10 @@
             <a:r>
               <a:rPr sz="1500" b="1">
                 <a:solidFill>
-                  <a:srgbClr val="548235"/>
-                </a:solidFill>
-              </a:rPr>
-              <a:t>Documented product firsts</a:t>
+                  <a:srgbClr val="7F1D1D"/>
+                </a:solidFill>
+              </a:rPr>
+              <a:t>The adverse records</a:t>
             </a:r>
           </a:p>
           <a:p>
@@ -12355,7 +12355,7 @@
                   <a:srgbClr val="202020"/>
                 </a:solidFill>
               </a:rPr>
-              <a:t>Knorr: EBS 1989; series air disc brake 1992; Actros/Scania volume 1996</a:t>
+              <a:t>Bendix: 2019 ADB22X caliper recall (fire risk); 2024-25 EC-80 ECU recall, 442k units (software fix) — scale produces both install base and recalls</a:t>
             </a:r>
           </a:p>
           <a:p>
@@ -12370,7 +12370,7 @@
                   <a:srgbClr val="202020"/>
                 </a:solidFill>
               </a:rPr>
-              <a:t>Bendix ADB22X: 2005, now ~85% of NA air-disc wheel ends</a:t>
+              <a:t>Haldex: lost a WILLFUL patent-infringement verdict to Bendix (copied its ADB); two modest component recalls</a:t>
             </a:r>
           </a:p>
           <a:p>
@@ -12385,52 +12385,7 @@
                   <a:srgbClr val="202020"/>
                 </a:solidFill>
               </a:rPr>
-              <a:t>UD Quon 2017: first all-disc Japanese heavy truck</a:t>
-            </a:r>
-          </a:p>
-          <a:p>
-            <a:pPr>
-              <a:spcBef>
-                <a:spcPts val="400"/>
-              </a:spcBef>
-            </a:pPr>
-            <a:r>
-              <a:rPr sz="1100">
-                <a:solidFill>
-                  <a:srgbClr val="202020"/>
-                </a:solidFill>
-              </a:rPr>
-              <a:t>Mikuni 2022: e-oil pump in production for a domestic small BEV truck</a:t>
-            </a:r>
-          </a:p>
-          <a:p>
-            <a:pPr>
-              <a:spcBef>
-                <a:spcPts val="400"/>
-              </a:spcBef>
-            </a:pPr>
-            <a:r>
-              <a:rPr sz="1100">
-                <a:solidFill>
-                  <a:srgbClr val="202020"/>
-                </a:solidFill>
-              </a:rPr>
-              <a:t>Akebono FY2023: JSME Technology Award — world-first electric parking brake unit for medium/light trucks (innovating through distress)</a:t>
-            </a:r>
-          </a:p>
-          <a:p>
-            <a:pPr>
-              <a:spcBef>
-                <a:spcPts val="400"/>
-              </a:spcBef>
-            </a:pPr>
-            <a:r>
-              <a:rPr sz="1100">
-                <a:solidFill>
-                  <a:srgbClr val="202020"/>
-                </a:solidFill>
-              </a:rPr>
-              <a:t>TBK: retarders since the 1960s; 19.5" ADB exhibited (year unconfirmed: 2019 vs 2022 sources conflict); e-pumps/TCU in development</a:t>
+              <a:t>Akebono: the only Japanese supplier with documented adverse events — 2015 GM recall of its brake products + 2019-21 inspection-data falsification (no recall, governance black mark)</a:t>
             </a:r>
           </a:p>
         </p:txBody>
@@ -12444,7 +12399,7 @@
         <p:spPr>
           <a:xfrm>
             <a:off x="457200" y="3840480"/>
-            <a:ext cx="11292840" cy="1737360"/>
+            <a:ext cx="5577840" cy="2240280"/>
           </a:xfrm>
           <a:prstGeom prst="rect">
             <a:avLst/>
@@ -12470,52 +12425,186 @@
                   <a:srgbClr val="1F4E78"/>
                 </a:solidFill>
               </a:rPr>
-              <a:t>The pattern — and TBK's fix</a:t>
-            </a:r>
-          </a:p>
-          <a:p>
-            <a:pPr>
-              <a:spcBef>
-                <a:spcPts val="400"/>
-              </a:spcBef>
-            </a:pPr>
-            <a:r>
-              <a:rPr sz="1150">
-                <a:solidFill>
-                  <a:srgbClr val="202020"/>
-                </a:solidFill>
-              </a:rPr>
-              <a:t>Innovation output tracks the moat and margin rankings almost perfectly: the companies with validated quality (Knorr, Cummins) also hold the patent fortresses and the product firsts; the distressed (Akebono) still out-publish TBK; even the similarly-sized peer (Mikuni) protects its e-pump work with patents.</a:t>
-            </a:r>
-          </a:p>
-          <a:p>
-            <a:pPr>
-              <a:spcBef>
-                <a:spcPts val="400"/>
-              </a:spcBef>
-            </a:pPr>
-            <a:r>
-              <a:rPr sz="1150">
-                <a:solidFill>
-                  <a:srgbClr val="202020"/>
-                </a:solidFill>
-              </a:rPr>
-              <a:t>TBK's innovation is real but INVISIBLE: 75 years of retarder/brake/pump engineering, an ADB prototype, e-pumps and a thermal control unit in development — none of it patented at scale, published at JSAE, or externally awarded. Invisible innovation cannot win sockets outside the keiretsu.</a:t>
-            </a:r>
-          </a:p>
-          <a:p>
-            <a:pPr>
-              <a:spcBef>
-                <a:spcPts val="400"/>
-              </a:spcBef>
-            </a:pPr>
-            <a:r>
-              <a:rPr sz="1150">
-                <a:solidFill>
-                  <a:srgbClr val="202020"/>
-                </a:solidFill>
-              </a:rPr>
-              <a:t>Fix costs little: patent the e-pump/TCU and ADB work (Mikuni shows the value), publish, pursue external validation — a required complement to the R&amp;D spend itself.</a:t>
+              <a:t>TBK: externally invisible — in BOTH directions</a:t>
+            </a:r>
+          </a:p>
+          <a:p>
+            <a:pPr>
+              <a:spcBef>
+                <a:spcPts val="400"/>
+              </a:spcBef>
+            </a:pPr>
+            <a:r>
+              <a:rPr sz="1100">
+                <a:solidFill>
+                  <a:srgbClr val="202020"/>
+                </a:solidFill>
+              </a:rPr>
+              <a:t>No OEM award findable, no survey presence, no service network beyond Japan/Thailand</a:t>
+            </a:r>
+          </a:p>
+          <a:p>
+            <a:pPr>
+              <a:spcBef>
+                <a:spcPts val="400"/>
+              </a:spcBef>
+            </a:pPr>
+            <a:r>
+              <a:rPr sz="1100">
+                <a:solidFill>
+                  <a:srgbClr val="202020"/>
+                </a:solidFill>
+              </a:rPr>
+              <a:t>BUT also: no recall, no scandal, no misconduct report in Japanese-language search — a meaningful null in a scandal-rich industry (cf. Akebono)</a:t>
+            </a:r>
+          </a:p>
+          <a:p>
+            <a:pPr>
+              <a:spcBef>
+                <a:spcPts val="400"/>
+              </a:spcBef>
+            </a:pPr>
+            <a:r>
+              <a:rPr sz="1100">
+                <a:solidFill>
+                  <a:srgbClr val="202020"/>
+                </a:solidFill>
+              </a:rPr>
+              <a:t>75 years inside Isuzu/Fuso/Hino = quality is probably fine; 'probably fine, unproven' is the ceiling the evidence supports</a:t>
+            </a:r>
+          </a:p>
+          <a:p>
+            <a:pPr>
+              <a:spcBef>
+                <a:spcPts val="400"/>
+              </a:spcBef>
+            </a:pPr>
+            <a:r>
+              <a:rPr sz="1100">
+                <a:solidFill>
+                  <a:srgbClr val="202020"/>
+                </a:solidFill>
+              </a:rPr>
+              <a:t>Dataset moat scores align: Knorr 7.55 top, Akebono 4.95 bottom — TBK was unscored: literally unmeasurable from outside</a:t>
+            </a:r>
+          </a:p>
+        </p:txBody>
+      </p:sp>
+      <p:sp>
+        <p:nvSpPr>
+          <p:cNvPr id="7" name="TextBox 6"/>
+          <p:cNvSpPr txBox="1"/>
+          <p:nvPr/>
+        </p:nvSpPr>
+        <p:spPr>
+          <a:xfrm>
+            <a:off x="6217920" y="3840480"/>
+            <a:ext cx="5532120" cy="2240280"/>
+          </a:xfrm>
+          <a:prstGeom prst="rect">
+            <a:avLst/>
+          </a:prstGeom>
+          <a:solidFill>
+            <a:srgbClr val="F2F2F2"/>
+          </a:solidFill>
+          <a:ln w="15875">
+            <a:solidFill>
+              <a:srgbClr val="548235"/>
+            </a:solidFill>
+          </a:ln>
+        </p:spPr>
+        <p:txBody>
+          <a:bodyPr wrap="square" lIns="137160" rIns="137160" tIns="109728">
+            <a:spAutoFit/>
+          </a:bodyPr>
+          <a:lstStyle/>
+          <a:p>
+            <a:r>
+              <a:rPr sz="1500" b="1">
+                <a:solidFill>
+                  <a:srgbClr val="548235"/>
+                </a:solidFill>
+              </a:rPr>
+              <a:t>TCO &amp; service: only proxies exist</a:t>
+            </a:r>
+          </a:p>
+          <a:p>
+            <a:pPr>
+              <a:spcBef>
+                <a:spcPts val="400"/>
+              </a:spcBef>
+            </a:pPr>
+            <a:r>
+              <a:rPr sz="1100">
+                <a:solidFill>
+                  <a:srgbClr val="202020"/>
+                </a:solidFill>
+              </a:rPr>
+              <a:t>Brand-level TCO data is NOT public (fleets don't publish; IMR studies paywalled) — standing must be inferred:</a:t>
+            </a:r>
+          </a:p>
+          <a:p>
+            <a:pPr>
+              <a:spcBef>
+                <a:spcPts val="400"/>
+              </a:spcBef>
+            </a:pPr>
+            <a:r>
+              <a:rPr sz="1100">
+                <a:solidFill>
+                  <a:srgbClr val="202020"/>
+                </a:solidFill>
+              </a:rPr>
+              <a:t>Install base: Bendix 20M+ ADBs in field | Contract renewals: Meritor-DTNA extension | Networks: Knorr's pan-EMEA certified workshop network vs TBK's Japan+Thailand footprint</a:t>
+            </a:r>
+          </a:p>
+          <a:p>
+            <a:pPr>
+              <a:spcBef>
+                <a:spcPts val="400"/>
+              </a:spcBef>
+            </a:pPr>
+            <a:r>
+              <a:rPr sz="1100">
+                <a:solidFill>
+                  <a:srgbClr val="202020"/>
+                </a:solidFill>
+              </a:rPr>
+              <a:t>On every proxy the systems players lead — and TBK does not appear</a:t>
+            </a:r>
+          </a:p>
+        </p:txBody>
+      </p:sp>
+      <p:sp>
+        <p:nvSpPr>
+          <p:cNvPr id="8" name="TextBox 7"/>
+          <p:cNvSpPr txBox="1"/>
+          <p:nvPr/>
+        </p:nvSpPr>
+        <p:spPr>
+          <a:xfrm>
+            <a:off x="457200" y="6172200"/>
+            <a:ext cx="11247120" cy="548640"/>
+          </a:xfrm>
+          <a:prstGeom prst="rect">
+            <a:avLst/>
+          </a:prstGeom>
+          <a:noFill/>
+        </p:spPr>
+        <p:txBody>
+          <a:bodyPr wrap="square">
+            <a:spAutoFit/>
+          </a:bodyPr>
+          <a:lstStyle/>
+          <a:p>
+            <a:pPr algn="l"/>
+            <a:r>
+              <a:rPr sz="1200" b="1">
+                <a:solidFill>
+                  <a:srgbClr val="1F4E78"/>
+                </a:solidFill>
+              </a:rPr>
+              <a:t>Strategic point: TBK's quality reputation is held entirely inside the keiretsu — like its market share, it cannot be sold to new customers. Making quality externally legible (awards, certifications, published data) is a cheap, necessary complement to the R&amp;D program.</a:t>
             </a:r>
           </a:p>
         </p:txBody>
@@ -12568,6 +12657,438 @@
                   <a:srgbClr val="FFFFFF"/>
                 </a:solidFill>
               </a:rPr>
+              <a:t>Product evaluation II: innovation output</a:t>
+            </a:r>
+          </a:p>
+        </p:txBody>
+      </p:sp>
+      <p:sp>
+        <p:nvSpPr>
+          <p:cNvPr id="3" name="TextBox 2"/>
+          <p:cNvSpPr txBox="1"/>
+          <p:nvPr/>
+        </p:nvSpPr>
+        <p:spPr>
+          <a:xfrm>
+            <a:off x="457200" y="914400"/>
+            <a:ext cx="11247120" cy="365760"/>
+          </a:xfrm>
+          <a:prstGeom prst="rect">
+            <a:avLst/>
+          </a:prstGeom>
+          <a:noFill/>
+        </p:spPr>
+        <p:txBody>
+          <a:bodyPr wrap="square">
+            <a:spAutoFit/>
+          </a:bodyPr>
+          <a:lstStyle/>
+          <a:p>
+            <a:pPr algn="l"/>
+            <a:r>
+              <a:rPr sz="1200" b="0">
+                <a:solidFill>
+                  <a:srgbClr val="595959"/>
+                </a:solidFill>
+              </a:rPr>
+              <a:t>Patents, documented product firsts, and technical-society awards — the externally visible output of R&amp;D</a:t>
+            </a:r>
+          </a:p>
+        </p:txBody>
+      </p:sp>
+      <p:sp>
+        <p:nvSpPr>
+          <p:cNvPr id="4" name="TextBox 3"/>
+          <p:cNvSpPr txBox="1"/>
+          <p:nvPr/>
+        </p:nvSpPr>
+        <p:spPr>
+          <a:xfrm>
+            <a:off x="457200" y="1417320"/>
+            <a:ext cx="5577840" cy="2286000"/>
+          </a:xfrm>
+          <a:prstGeom prst="rect">
+            <a:avLst/>
+          </a:prstGeom>
+          <a:solidFill>
+            <a:srgbClr val="F2F2F2"/>
+          </a:solidFill>
+          <a:ln w="15875">
+            <a:solidFill>
+              <a:srgbClr val="1F4E78"/>
+            </a:solidFill>
+          </a:ln>
+        </p:spPr>
+        <p:txBody>
+          <a:bodyPr wrap="square" lIns="137160" rIns="137160" tIns="109728">
+            <a:spAutoFit/>
+          </a:bodyPr>
+          <a:lstStyle/>
+          <a:p>
+            <a:r>
+              <a:rPr sz="1500" b="1">
+                <a:solidFill>
+                  <a:srgbClr val="1F4E78"/>
+                </a:solidFill>
+              </a:rPr>
+              <a:t>The patent gap (independent registries)</a:t>
+            </a:r>
+          </a:p>
+          <a:p>
+            <a:pPr>
+              <a:spcBef>
+                <a:spcPts val="400"/>
+              </a:spcBef>
+            </a:pPr>
+            <a:r>
+              <a:rPr sz="1100">
+                <a:solidFill>
+                  <a:srgbClr val="202020"/>
+                </a:solidFill>
+              </a:rPr>
+              <a:t>Knorr-Bremse: ~2,900 patent families / 10,900+ patents (~7,500 in the truck division)</a:t>
+            </a:r>
+          </a:p>
+          <a:p>
+            <a:pPr>
+              <a:spcBef>
+                <a:spcPts val="400"/>
+              </a:spcBef>
+            </a:pPr>
+            <a:r>
+              <a:rPr sz="1100">
+                <a:solidFill>
+                  <a:srgbClr val="202020"/>
+                </a:solidFill>
+              </a:rPr>
+              <a:t>Aisin: ~680 JP applications/yr; Clarivate Top-100 Global Innovator 7 consecutive years</a:t>
+            </a:r>
+          </a:p>
+          <a:p>
+            <a:pPr>
+              <a:spcBef>
+                <a:spcPts val="400"/>
+              </a:spcBef>
+            </a:pPr>
+            <a:r>
+              <a:rPr sz="1100">
+                <a:solidFill>
+                  <a:srgbClr val="202020"/>
+                </a:solidFill>
+              </a:rPr>
+              <a:t>Akebono: ~321 US-registered patents</a:t>
+            </a:r>
+          </a:p>
+          <a:p>
+            <a:pPr>
+              <a:spcBef>
+                <a:spcPts val="400"/>
+              </a:spcBef>
+            </a:pPr>
+            <a:r>
+              <a:rPr sz="1100">
+                <a:solidFill>
+                  <a:srgbClr val="202020"/>
+                </a:solidFill>
+              </a:rPr>
+              <a:t>Mikuni: e-oil-pump fault-detection patents — its BEV-truck win is engineering-backed</a:t>
+            </a:r>
+          </a:p>
+          <a:p>
+            <a:pPr>
+              <a:spcBef>
+                <a:spcPts val="400"/>
+              </a:spcBef>
+            </a:pPr>
+            <a:r>
+              <a:rPr sz="1100">
+                <a:solidFill>
+                  <a:srgbClr val="202020"/>
+                </a:solidFill>
+              </a:rPr>
+              <a:t>TBK: 2-3 patent GRANTS PER YEAR — two to three orders of magnitude below the leaders.</a:t>
+            </a:r>
+          </a:p>
+          <a:p>
+            <a:pPr>
+              <a:spcBef>
+                <a:spcPts val="400"/>
+              </a:spcBef>
+            </a:pPr>
+            <a:r>
+              <a:rPr sz="1100">
+                <a:solidFill>
+                  <a:srgbClr val="202020"/>
+                </a:solidFill>
+              </a:rPr>
+              <a:t>Independently confirms the capitalized-R&amp;D finding ($43M vs $2.6-5.6bn) from a different data source</a:t>
+            </a:r>
+          </a:p>
+        </p:txBody>
+      </p:sp>
+      <p:sp>
+        <p:nvSpPr>
+          <p:cNvPr id="5" name="TextBox 4"/>
+          <p:cNvSpPr txBox="1"/>
+          <p:nvPr/>
+        </p:nvSpPr>
+        <p:spPr>
+          <a:xfrm>
+            <a:off x="6217920" y="1417320"/>
+            <a:ext cx="5532120" cy="2286000"/>
+          </a:xfrm>
+          <a:prstGeom prst="rect">
+            <a:avLst/>
+          </a:prstGeom>
+          <a:solidFill>
+            <a:srgbClr val="F2F2F2"/>
+          </a:solidFill>
+          <a:ln w="15875">
+            <a:solidFill>
+              <a:srgbClr val="548235"/>
+            </a:solidFill>
+          </a:ln>
+        </p:spPr>
+        <p:txBody>
+          <a:bodyPr wrap="square" lIns="137160" rIns="137160" tIns="109728">
+            <a:spAutoFit/>
+          </a:bodyPr>
+          <a:lstStyle/>
+          <a:p>
+            <a:r>
+              <a:rPr sz="1500" b="1">
+                <a:solidFill>
+                  <a:srgbClr val="548235"/>
+                </a:solidFill>
+              </a:rPr>
+              <a:t>Documented product firsts</a:t>
+            </a:r>
+          </a:p>
+          <a:p>
+            <a:pPr>
+              <a:spcBef>
+                <a:spcPts val="400"/>
+              </a:spcBef>
+            </a:pPr>
+            <a:r>
+              <a:rPr sz="1100">
+                <a:solidFill>
+                  <a:srgbClr val="202020"/>
+                </a:solidFill>
+              </a:rPr>
+              <a:t>Knorr: EBS 1989; series air disc brake 1992; Actros/Scania volume 1996</a:t>
+            </a:r>
+          </a:p>
+          <a:p>
+            <a:pPr>
+              <a:spcBef>
+                <a:spcPts val="400"/>
+              </a:spcBef>
+            </a:pPr>
+            <a:r>
+              <a:rPr sz="1100">
+                <a:solidFill>
+                  <a:srgbClr val="202020"/>
+                </a:solidFill>
+              </a:rPr>
+              <a:t>Bendix ADB22X: 2005, now ~85% of NA air-disc wheel ends</a:t>
+            </a:r>
+          </a:p>
+          <a:p>
+            <a:pPr>
+              <a:spcBef>
+                <a:spcPts val="400"/>
+              </a:spcBef>
+            </a:pPr>
+            <a:r>
+              <a:rPr sz="1100">
+                <a:solidFill>
+                  <a:srgbClr val="202020"/>
+                </a:solidFill>
+              </a:rPr>
+              <a:t>UD Quon 2017: first all-disc Japanese heavy truck</a:t>
+            </a:r>
+          </a:p>
+          <a:p>
+            <a:pPr>
+              <a:spcBef>
+                <a:spcPts val="400"/>
+              </a:spcBef>
+            </a:pPr>
+            <a:r>
+              <a:rPr sz="1100">
+                <a:solidFill>
+                  <a:srgbClr val="202020"/>
+                </a:solidFill>
+              </a:rPr>
+              <a:t>Mikuni 2022: e-oil pump in production for a domestic small BEV truck</a:t>
+            </a:r>
+          </a:p>
+          <a:p>
+            <a:pPr>
+              <a:spcBef>
+                <a:spcPts val="400"/>
+              </a:spcBef>
+            </a:pPr>
+            <a:r>
+              <a:rPr sz="1100">
+                <a:solidFill>
+                  <a:srgbClr val="202020"/>
+                </a:solidFill>
+              </a:rPr>
+              <a:t>Akebono FY2023: JSME Technology Award — world-first electric parking brake unit for medium/light trucks (innovating through distress)</a:t>
+            </a:r>
+          </a:p>
+          <a:p>
+            <a:pPr>
+              <a:spcBef>
+                <a:spcPts val="400"/>
+              </a:spcBef>
+            </a:pPr>
+            <a:r>
+              <a:rPr sz="1100">
+                <a:solidFill>
+                  <a:srgbClr val="202020"/>
+                </a:solidFill>
+              </a:rPr>
+              <a:t>TBK: retarders since the 1960s; 19.5" ADB exhibited (year unconfirmed: 2019 vs 2022 sources conflict); e-pumps/TCU in development</a:t>
+            </a:r>
+          </a:p>
+        </p:txBody>
+      </p:sp>
+      <p:sp>
+        <p:nvSpPr>
+          <p:cNvPr id="6" name="TextBox 5"/>
+          <p:cNvSpPr txBox="1"/>
+          <p:nvPr/>
+        </p:nvSpPr>
+        <p:spPr>
+          <a:xfrm>
+            <a:off x="457200" y="3840480"/>
+            <a:ext cx="11292840" cy="1737360"/>
+          </a:xfrm>
+          <a:prstGeom prst="rect">
+            <a:avLst/>
+          </a:prstGeom>
+          <a:solidFill>
+            <a:srgbClr val="F2F2F2"/>
+          </a:solidFill>
+          <a:ln w="15875">
+            <a:solidFill>
+              <a:srgbClr val="1F4E78"/>
+            </a:solidFill>
+          </a:ln>
+        </p:spPr>
+        <p:txBody>
+          <a:bodyPr wrap="square" lIns="137160" rIns="137160" tIns="109728">
+            <a:spAutoFit/>
+          </a:bodyPr>
+          <a:lstStyle/>
+          <a:p>
+            <a:r>
+              <a:rPr sz="1500" b="1">
+                <a:solidFill>
+                  <a:srgbClr val="1F4E78"/>
+                </a:solidFill>
+              </a:rPr>
+              <a:t>The pattern — and TBK's fix</a:t>
+            </a:r>
+          </a:p>
+          <a:p>
+            <a:pPr>
+              <a:spcBef>
+                <a:spcPts val="400"/>
+              </a:spcBef>
+            </a:pPr>
+            <a:r>
+              <a:rPr sz="1150">
+                <a:solidFill>
+                  <a:srgbClr val="202020"/>
+                </a:solidFill>
+              </a:rPr>
+              <a:t>Innovation output tracks the moat and margin rankings almost perfectly: the companies with validated quality (Knorr, Cummins) also hold the patent fortresses and the product firsts; the distressed (Akebono) still out-publish TBK; even the similarly-sized peer (Mikuni) protects its e-pump work with patents.</a:t>
+            </a:r>
+          </a:p>
+          <a:p>
+            <a:pPr>
+              <a:spcBef>
+                <a:spcPts val="400"/>
+              </a:spcBef>
+            </a:pPr>
+            <a:r>
+              <a:rPr sz="1150">
+                <a:solidFill>
+                  <a:srgbClr val="202020"/>
+                </a:solidFill>
+              </a:rPr>
+              <a:t>TBK's innovation is real but INVISIBLE: 75 years of retarder/brake/pump engineering, an ADB prototype, e-pumps and a thermal control unit in development — none of it patented at scale, published at JSAE, or externally awarded. Invisible innovation cannot win sockets outside the keiretsu.</a:t>
+            </a:r>
+          </a:p>
+          <a:p>
+            <a:pPr>
+              <a:spcBef>
+                <a:spcPts val="400"/>
+              </a:spcBef>
+            </a:pPr>
+            <a:r>
+              <a:rPr sz="1150">
+                <a:solidFill>
+                  <a:srgbClr val="202020"/>
+                </a:solidFill>
+              </a:rPr>
+              <a:t>Fix costs little: patent the e-pump/TCU and ADB work (Mikuni shows the value), publish, pursue external validation — a required complement to the R&amp;D spend itself.</a:t>
+            </a:r>
+          </a:p>
+        </p:txBody>
+      </p:sp>
+    </p:spTree>
+  </p:cSld>
+  <p:clrMapOvr>
+    <a:masterClrMapping/>
+  </p:clrMapOvr>
+</p:sld>
+</file>
+
+<file path=ppt/slides/slide22.xml><?xml version="1.0" encoding="utf-8"?>
+<p:sld xmlns:a="http://schemas.openxmlformats.org/drawingml/2006/main" xmlns:p="http://schemas.openxmlformats.org/presentationml/2006/main" xmlns:r="http://schemas.openxmlformats.org/officeDocument/2006/relationships">
+  <p:cSld>
+    <p:spTree>
+      <p:nvGrpSpPr>
+        <p:cNvPr id="1" name=""/>
+        <p:cNvGrpSpPr/>
+        <p:nvPr/>
+      </p:nvGrpSpPr>
+      <p:grpSpPr/>
+      <p:sp>
+        <p:nvSpPr>
+          <p:cNvPr id="2" name="TextBox 1"/>
+          <p:cNvSpPr txBox="1"/>
+          <p:nvPr/>
+        </p:nvSpPr>
+        <p:spPr>
+          <a:xfrm>
+            <a:off x="0" y="0"/>
+            <a:ext cx="12191695" cy="868680"/>
+          </a:xfrm>
+          <a:prstGeom prst="rect">
+            <a:avLst/>
+          </a:prstGeom>
+          <a:solidFill>
+            <a:srgbClr val="1F4E78"/>
+          </a:solidFill>
+        </p:spPr>
+        <p:txBody>
+          <a:bodyPr wrap="square" lIns="457200" tIns="164592">
+            <a:spAutoFit/>
+          </a:bodyPr>
+          <a:lstStyle/>
+          <a:p>
+            <a:r>
+              <a:rPr sz="2600" b="1">
+                <a:solidFill>
+                  <a:srgbClr val="FFFFFF"/>
+                </a:solidFill>
+              </a:rPr>
               <a:t>Moat framework ranking: TBK scores 5.38 — 9th of 13</a:t>
             </a:r>
           </a:p>
@@ -12938,7 +13459,7 @@
 </p:sld>
 </file>
 
-<file path=ppt/slides/slide22.xml><?xml version="1.0" encoding="utf-8"?>
+<file path=ppt/slides/slide23.xml><?xml version="1.0" encoding="utf-8"?>
 <p:sld xmlns:a="http://schemas.openxmlformats.org/drawingml/2006/main" xmlns:p="http://schemas.openxmlformats.org/presentationml/2006/main" xmlns:r="http://schemas.openxmlformats.org/officeDocument/2006/relationships">
   <p:cSld>
     <p:spTree>
@@ -13243,7 +13764,7 @@
 </p:sld>
 </file>
 
-<file path=ppt/slides/slide23.xml><?xml version="1.0" encoding="utf-8"?>
+<file path=ppt/slides/slide24.xml><?xml version="1.0" encoding="utf-8"?>
 <p:sld xmlns:a="http://schemas.openxmlformats.org/drawingml/2006/main" xmlns:p="http://schemas.openxmlformats.org/presentationml/2006/main" xmlns:r="http://schemas.openxmlformats.org/officeDocument/2006/relationships">
   <p:cSld>
     <p:spTree>
@@ -13400,7 +13921,7 @@
 </p:sld>
 </file>
 
-<file path=ppt/slides/slide24.xml><?xml version="1.0" encoding="utf-8"?>
+<file path=ppt/slides/slide25.xml><?xml version="1.0" encoding="utf-8"?>
 <p:sld xmlns:a="http://schemas.openxmlformats.org/drawingml/2006/main" xmlns:p="http://schemas.openxmlformats.org/presentationml/2006/main" xmlns:r="http://schemas.openxmlformats.org/officeDocument/2006/relationships">
   <p:cSld>
     <p:spTree>
@@ -13917,7 +14438,7 @@
 </p:sld>
 </file>
 
-<file path=ppt/slides/slide25.xml><?xml version="1.0" encoding="utf-8"?>
+<file path=ppt/slides/slide26.xml><?xml version="1.0" encoding="utf-8"?>
 <p:sld xmlns:a="http://schemas.openxmlformats.org/drawingml/2006/main" xmlns:p="http://schemas.openxmlformats.org/presentationml/2006/main" xmlns:r="http://schemas.openxmlformats.org/officeDocument/2006/relationships">
   <p:cSld>
     <p:spTree>

--- a/TBK_rd_gap_slides.pptx
+++ b/TBK_rd_gap_slides.pptx
@@ -31,6 +31,7 @@
     <p:sldId id="279" r:id="rId30"/>
     <p:sldId id="280" r:id="rId31"/>
     <p:sldId id="281" r:id="rId32"/>
+    <p:sldId id="282" r:id="rId33"/>
   </p:sldIdLst>
   <p:sldSz cx="12191695" cy="6858000" type="screen4x3"/>
   <p:notesSz cx="6858000" cy="9144000"/>
@@ -357,6 +358,214 @@
           <a:p>
             <a:r>
               <a:rPr sz="1300"/>
+              <a:t>Operating profit bridge: ¥1.5bn (2.7%) -&gt; ¥4.1bn (7.1%)</a:t>
+            </a:r>
+          </a:p>
+        </c:rich>
+      </c:tx>
+      <c:layout/>
+      <c:overlay val="0"/>
+    </c:title>
+    <c:autoTitleDeleted val="0"/>
+    <c:plotArea>
+      <c:barChart>
+        <c:barDir val="col"/>
+        <c:grouping val="clustered"/>
+        <c:ser>
+          <c:idx val="0"/>
+          <c:order val="0"/>
+          <c:tx>
+            <c:strRef>
+              <c:f>Sheet1!$B$1</c:f>
+              <c:strCache>
+                <c:ptCount val="1"/>
+                <c:pt idx="0">
+                  <c:v>Operating profit bridge (¥M)</c:v>
+                </c:pt>
+              </c:strCache>
+            </c:strRef>
+          </c:tx>
+          <c:spPr>
+            <a:solidFill>
+              <a:srgbClr val="1F4E78"/>
+            </a:solidFill>
+          </c:spPr>
+          <c:dPt>
+            <c:idx val="1"/>
+            <c:spPr>
+              <a:solidFill>
+                <a:srgbClr val="548235"/>
+              </a:solidFill>
+            </c:spPr>
+          </c:dPt>
+          <c:dPt>
+            <c:idx val="2"/>
+            <c:spPr>
+              <a:solidFill>
+                <a:srgbClr val="548235"/>
+              </a:solidFill>
+            </c:spPr>
+          </c:dPt>
+          <c:dPt>
+            <c:idx val="3"/>
+            <c:spPr>
+              <a:solidFill>
+                <a:srgbClr val="7F1D1D"/>
+              </a:solidFill>
+            </c:spPr>
+          </c:dPt>
+          <c:dPt>
+            <c:idx val="4"/>
+            <c:spPr>
+              <a:solidFill>
+                <a:srgbClr val="2E592E"/>
+              </a:solidFill>
+            </c:spPr>
+          </c:dPt>
+          <c:cat>
+            <c:strRef>
+              <c:f>Sheet1!$A$2:$A$6</c:f>
+              <c:strCache>
+                <c:ptCount val="5"/>
+                <c:pt idx="0">
+                  <c:v>Actual
+FY3/26 OP</c:v>
+                </c:pt>
+                <c:pt idx="1">
+                  <c:v>+ SAW repriced
+to market</c:v>
+                </c:pt>
+                <c:pt idx="2">
+                  <c:v>+ Factory
+structure</c:v>
+                </c:pt>
+                <c:pt idx="3">
+                  <c:v>- Competitive
+R&amp;D (4.7%)</c:v>
+                </c:pt>
+                <c:pt idx="4">
+                  <c:v>Pro-forma
+OP</c:v>
+                </c:pt>
+              </c:strCache>
+            </c:strRef>
+          </c:cat>
+          <c:val>
+            <c:numRef>
+              <c:f>Sheet1!$B$2:$B$6</c:f>
+              <c:numCache>
+                <c:formatCode>General</c:formatCode>
+                <c:ptCount val="5"/>
+                <c:pt idx="0">
+                  <c:v>1496</c:v>
+                </c:pt>
+                <c:pt idx="1">
+                  <c:v>2585</c:v>
+                </c:pt>
+                <c:pt idx="2">
+                  <c:v>1500</c:v>
+                </c:pt>
+                <c:pt idx="3">
+                  <c:v>-1525</c:v>
+                </c:pt>
+                <c:pt idx="4">
+                  <c:v>4056</c:v>
+                </c:pt>
+              </c:numCache>
+            </c:numRef>
+          </c:val>
+        </c:ser>
+        <c:dLbls>
+          <c:numFmt formatCode="#,##0" sourceLinked="0"/>
+          <c:txPr>
+            <a:bodyPr/>
+            <a:lstStyle/>
+            <a:p>
+              <a:pPr>
+                <a:defRPr sz="1000"/>
+              </a:pPr>
+            </a:p>
+          </c:txPr>
+          <c:showLegendKey val="0"/>
+          <c:showVal val="1"/>
+          <c:showCatName val="0"/>
+          <c:showSerName val="0"/>
+          <c:showPercent val="0"/>
+          <c:showBubbleSize val="0"/>
+          <c:showLeaderLines val="1"/>
+        </c:dLbls>
+        <c:axId val="-2068027336"/>
+        <c:axId val="-2113994440"/>
+      </c:barChart>
+      <c:catAx>
+        <c:axId val="-2068027336"/>
+        <c:scaling>
+          <c:orientation val="minMax"/>
+        </c:scaling>
+        <c:delete val="0"/>
+        <c:axPos val="b"/>
+        <c:majorTickMark val="out"/>
+        <c:minorTickMark val="none"/>
+        <c:tickLblPos val="nextTo"/>
+        <c:txPr>
+          <a:bodyPr/>
+          <a:lstStyle/>
+          <a:p>
+            <a:pPr>
+              <a:defRPr sz="900"/>
+            </a:pPr>
+          </a:p>
+        </c:txPr>
+        <c:crossAx val="-2113994440"/>
+        <c:crosses val="autoZero"/>
+        <c:auto val="1"/>
+        <c:lblAlgn val="ctr"/>
+        <c:lblOffset val="100"/>
+        <c:noMultiLvlLbl val="0"/>
+      </c:catAx>
+      <c:valAx>
+        <c:axId val="-2113994440"/>
+        <c:scaling/>
+        <c:delete val="0"/>
+        <c:axPos val="l"/>
+        <c:majorGridlines/>
+        <c:majorTickMark val="out"/>
+        <c:minorTickMark val="none"/>
+        <c:tickLblPos val="nextTo"/>
+        <c:crossAx val="-2068027336"/>
+        <c:crosses val="autoZero"/>
+      </c:valAx>
+    </c:plotArea>
+    <c:dispBlanksAs val="gap"/>
+  </c:chart>
+  <c:txPr>
+    <a:bodyPr/>
+    <a:lstStyle/>
+    <a:p>
+      <a:pPr>
+        <a:defRPr sz="1800"/>
+      </a:pPr>
+      <a:endParaRPr lang="en-US"/>
+    </a:p>
+  </c:txPr>
+  <c:externalData r:id="rId1">
+    <c:autoUpdate val="0"/>
+  </c:externalData>
+</c:chartSpace>
+</file>
+
+<file path=ppt/charts/chart11.xml><?xml version="1.0" encoding="utf-8"?>
+<c:chartSpace xmlns:c="http://schemas.openxmlformats.org/drawingml/2006/chart" xmlns:a="http://schemas.openxmlformats.org/drawingml/2006/main" xmlns:r="http://schemas.openxmlformats.org/officeDocument/2006/relationships">
+  <c:date1904 val="0"/>
+  <c:chart>
+    <c:title>
+      <c:tx>
+        <c:rich>
+          <a:bodyPr/>
+          <a:lstStyle/>
+          <a:p>
+            <a:r>
+              <a:rPr sz="1300"/>
               <a:t>Contribution margin by pump product (%)</a:t>
             </a:r>
           </a:p>
@@ -669,7 +878,7 @@
 </c:chartSpace>
 </file>
 
-<file path=ppt/charts/chart11.xml><?xml version="1.0" encoding="utf-8"?>
+<file path=ppt/charts/chart12.xml><?xml version="1.0" encoding="utf-8"?>
 <c:chartSpace xmlns:c="http://schemas.openxmlformats.org/drawingml/2006/chart" xmlns:a="http://schemas.openxmlformats.org/drawingml/2006/main" xmlns:r="http://schemas.openxmlformats.org/officeDocument/2006/relationships">
   <c:date1904 val="0"/>
   <c:chart>
@@ -933,7 +1142,7 @@
 </c:chartSpace>
 </file>
 
-<file path=ppt/charts/chart12.xml><?xml version="1.0" encoding="utf-8"?>
+<file path=ppt/charts/chart13.xml><?xml version="1.0" encoding="utf-8"?>
 <c:chartSpace xmlns:c="http://schemas.openxmlformats.org/drawingml/2006/chart" xmlns:a="http://schemas.openxmlformats.org/drawingml/2006/main" xmlns:r="http://schemas.openxmlformats.org/officeDocument/2006/relationships">
   <c:date1904 val="0"/>
   <c:chart>
@@ -1159,267 +1368,6 @@
           <a:p>
             <a:pPr>
               <a:defRPr sz="1000"/>
-            </a:pPr>
-          </a:p>
-        </c:txPr>
-        <c:crossAx val="-2113994440"/>
-        <c:crosses val="autoZero"/>
-        <c:auto val="1"/>
-        <c:lblAlgn val="ctr"/>
-        <c:lblOffset val="100"/>
-        <c:noMultiLvlLbl val="0"/>
-      </c:catAx>
-      <c:valAx>
-        <c:axId val="-2113994440"/>
-        <c:scaling/>
-        <c:delete val="0"/>
-        <c:axPos val="l"/>
-        <c:majorGridlines/>
-        <c:majorTickMark val="out"/>
-        <c:minorTickMark val="none"/>
-        <c:tickLblPos val="nextTo"/>
-        <c:crossAx val="-2068027336"/>
-        <c:crosses val="autoZero"/>
-      </c:valAx>
-    </c:plotArea>
-    <c:legend>
-      <c:legendPos val="b"/>
-      <c:overlay val="0"/>
-      <c:txPr>
-        <a:bodyPr/>
-        <a:lstStyle/>
-        <a:p>
-          <a:pPr>
-            <a:defRPr sz="1100"/>
-          </a:pPr>
-        </a:p>
-      </c:txPr>
-    </c:legend>
-    <c:dispBlanksAs val="gap"/>
-  </c:chart>
-  <c:txPr>
-    <a:bodyPr/>
-    <a:lstStyle/>
-    <a:p>
-      <a:pPr>
-        <a:defRPr sz="1800"/>
-      </a:pPr>
-      <a:endParaRPr lang="en-US"/>
-    </a:p>
-  </c:txPr>
-  <c:externalData r:id="rId1">
-    <c:autoUpdate val="0"/>
-  </c:externalData>
-</c:chartSpace>
-</file>
-
-<file path=ppt/charts/chart13.xml><?xml version="1.0" encoding="utf-8"?>
-<c:chartSpace xmlns:c="http://schemas.openxmlformats.org/drawingml/2006/chart" xmlns:a="http://schemas.openxmlformats.org/drawingml/2006/main" xmlns:r="http://schemas.openxmlformats.org/officeDocument/2006/relationships">
-  <c:date1904 val="0"/>
-  <c:chart>
-    <c:title>
-      <c:tx>
-        <c:rich>
-          <a:bodyPr/>
-          <a:lstStyle/>
-          <a:p>
-            <a:r>
-              <a:rPr sz="1400"/>
-              <a:t>R&amp;D spend plan (US$M per year)</a:t>
-            </a:r>
-          </a:p>
-        </c:rich>
-      </c:tx>
-      <c:layout/>
-      <c:overlay val="0"/>
-    </c:title>
-    <c:autoTitleDeleted val="0"/>
-    <c:plotArea>
-      <c:barChart>
-        <c:barDir val="col"/>
-        <c:grouping val="stacked"/>
-        <c:ser>
-          <c:idx val="0"/>
-          <c:order val="0"/>
-          <c:tx>
-            <c:strRef>
-              <c:f>Sheet1!$B$1</c:f>
-              <c:strCache>
-                <c:ptCount val="1"/>
-                <c:pt idx="0">
-                  <c:v>Parity run-rate (~4.5-5% of sales)</c:v>
-                </c:pt>
-              </c:strCache>
-            </c:strRef>
-          </c:tx>
-          <c:spPr>
-            <a:solidFill>
-              <a:srgbClr val="1F4E78"/>
-            </a:solidFill>
-          </c:spPr>
-          <c:cat>
-            <c:strRef>
-              <c:f>Sheet1!$A$2:$A$8</c:f>
-              <c:strCache>
-                <c:ptCount val="7"/>
-                <c:pt idx="0">
-                  <c:v>FY26
-actual est.</c:v>
-                </c:pt>
-                <c:pt idx="1">
-                  <c:v>FY27</c:v>
-                </c:pt>
-                <c:pt idx="2">
-                  <c:v>FY28</c:v>
-                </c:pt>
-                <c:pt idx="3">
-                  <c:v>FY29</c:v>
-                </c:pt>
-                <c:pt idx="4">
-                  <c:v>FY30</c:v>
-                </c:pt>
-                <c:pt idx="5">
-                  <c:v>FY31</c:v>
-                </c:pt>
-                <c:pt idx="6">
-                  <c:v>Steady state
-FY32+</c:v>
-                </c:pt>
-              </c:strCache>
-            </c:strRef>
-          </c:cat>
-          <c:val>
-            <c:numRef>
-              <c:f>Sheet1!$B$2:$B$8</c:f>
-              <c:numCache>
-                <c:formatCode>General</c:formatCode>
-                <c:ptCount val="7"/>
-                <c:pt idx="0">
-                  <c:v>7.8</c:v>
-                </c:pt>
-                <c:pt idx="1">
-                  <c:v>17</c:v>
-                </c:pt>
-                <c:pt idx="2">
-                  <c:v>17</c:v>
-                </c:pt>
-                <c:pt idx="3">
-                  <c:v>17</c:v>
-                </c:pt>
-                <c:pt idx="4">
-                  <c:v>17</c:v>
-                </c:pt>
-                <c:pt idx="5">
-                  <c:v>17</c:v>
-                </c:pt>
-                <c:pt idx="6">
-                  <c:v>17</c:v>
-                </c:pt>
-              </c:numCache>
-            </c:numRef>
-          </c:val>
-        </c:ser>
-        <c:ser>
-          <c:idx val="1"/>
-          <c:order val="1"/>
-          <c:tx>
-            <c:strRef>
-              <c:f>Sheet1!$C$1</c:f>
-              <c:strCache>
-                <c:ptCount val="1"/>
-                <c:pt idx="0">
-                  <c:v>Deficit repayment (catch-up)</c:v>
-                </c:pt>
-              </c:strCache>
-            </c:strRef>
-          </c:tx>
-          <c:spPr>
-            <a:solidFill>
-              <a:srgbClr val="548235"/>
-            </a:solidFill>
-          </c:spPr>
-          <c:cat>
-            <c:strRef>
-              <c:f>Sheet1!$A$2:$A$8</c:f>
-              <c:strCache>
-                <c:ptCount val="7"/>
-                <c:pt idx="0">
-                  <c:v>FY26
-actual est.</c:v>
-                </c:pt>
-                <c:pt idx="1">
-                  <c:v>FY27</c:v>
-                </c:pt>
-                <c:pt idx="2">
-                  <c:v>FY28</c:v>
-                </c:pt>
-                <c:pt idx="3">
-                  <c:v>FY29</c:v>
-                </c:pt>
-                <c:pt idx="4">
-                  <c:v>FY30</c:v>
-                </c:pt>
-                <c:pt idx="5">
-                  <c:v>FY31</c:v>
-                </c:pt>
-                <c:pt idx="6">
-                  <c:v>Steady state
-FY32+</c:v>
-                </c:pt>
-              </c:strCache>
-            </c:strRef>
-          </c:cat>
-          <c:val>
-            <c:numRef>
-              <c:f>Sheet1!$C$2:$C$8</c:f>
-              <c:numCache>
-                <c:formatCode>General</c:formatCode>
-                <c:ptCount val="7"/>
-                <c:pt idx="0">
-                  <c:v>0</c:v>
-                </c:pt>
-                <c:pt idx="1">
-                  <c:v>10</c:v>
-                </c:pt>
-                <c:pt idx="2">
-                  <c:v>10</c:v>
-                </c:pt>
-                <c:pt idx="3">
-                  <c:v>10</c:v>
-                </c:pt>
-                <c:pt idx="4">
-                  <c:v>10</c:v>
-                </c:pt>
-                <c:pt idx="5">
-                  <c:v>10</c:v>
-                </c:pt>
-                <c:pt idx="6">
-                  <c:v>0</c:v>
-                </c:pt>
-              </c:numCache>
-            </c:numRef>
-          </c:val>
-        </c:ser>
-        <c:overlap val="100"/>
-        <c:axId val="-2068027336"/>
-        <c:axId val="-2113994440"/>
-      </c:barChart>
-      <c:catAx>
-        <c:axId val="-2068027336"/>
-        <c:scaling>
-          <c:orientation val="minMax"/>
-        </c:scaling>
-        <c:delete val="0"/>
-        <c:axPos val="b"/>
-        <c:majorTickMark val="out"/>
-        <c:minorTickMark val="none"/>
-        <c:tickLblPos val="nextTo"/>
-        <c:txPr>
-          <a:bodyPr/>
-          <a:lstStyle/>
-          <a:p>
-            <a:pPr>
-              <a:defRPr sz="900"/>
             </a:pPr>
           </a:p>
         </c:txPr>
@@ -1485,6 +1433,267 @@
           <a:lstStyle/>
           <a:p>
             <a:r>
+              <a:rPr sz="1400"/>
+              <a:t>R&amp;D spend plan (US$M per year)</a:t>
+            </a:r>
+          </a:p>
+        </c:rich>
+      </c:tx>
+      <c:layout/>
+      <c:overlay val="0"/>
+    </c:title>
+    <c:autoTitleDeleted val="0"/>
+    <c:plotArea>
+      <c:barChart>
+        <c:barDir val="col"/>
+        <c:grouping val="stacked"/>
+        <c:ser>
+          <c:idx val="0"/>
+          <c:order val="0"/>
+          <c:tx>
+            <c:strRef>
+              <c:f>Sheet1!$B$1</c:f>
+              <c:strCache>
+                <c:ptCount val="1"/>
+                <c:pt idx="0">
+                  <c:v>Parity run-rate (~4.5-5% of sales)</c:v>
+                </c:pt>
+              </c:strCache>
+            </c:strRef>
+          </c:tx>
+          <c:spPr>
+            <a:solidFill>
+              <a:srgbClr val="1F4E78"/>
+            </a:solidFill>
+          </c:spPr>
+          <c:cat>
+            <c:strRef>
+              <c:f>Sheet1!$A$2:$A$8</c:f>
+              <c:strCache>
+                <c:ptCount val="7"/>
+                <c:pt idx="0">
+                  <c:v>FY26
+actual est.</c:v>
+                </c:pt>
+                <c:pt idx="1">
+                  <c:v>FY27</c:v>
+                </c:pt>
+                <c:pt idx="2">
+                  <c:v>FY28</c:v>
+                </c:pt>
+                <c:pt idx="3">
+                  <c:v>FY29</c:v>
+                </c:pt>
+                <c:pt idx="4">
+                  <c:v>FY30</c:v>
+                </c:pt>
+                <c:pt idx="5">
+                  <c:v>FY31</c:v>
+                </c:pt>
+                <c:pt idx="6">
+                  <c:v>Steady state
+FY32+</c:v>
+                </c:pt>
+              </c:strCache>
+            </c:strRef>
+          </c:cat>
+          <c:val>
+            <c:numRef>
+              <c:f>Sheet1!$B$2:$B$8</c:f>
+              <c:numCache>
+                <c:formatCode>General</c:formatCode>
+                <c:ptCount val="7"/>
+                <c:pt idx="0">
+                  <c:v>7.8</c:v>
+                </c:pt>
+                <c:pt idx="1">
+                  <c:v>17</c:v>
+                </c:pt>
+                <c:pt idx="2">
+                  <c:v>17</c:v>
+                </c:pt>
+                <c:pt idx="3">
+                  <c:v>17</c:v>
+                </c:pt>
+                <c:pt idx="4">
+                  <c:v>17</c:v>
+                </c:pt>
+                <c:pt idx="5">
+                  <c:v>17</c:v>
+                </c:pt>
+                <c:pt idx="6">
+                  <c:v>17</c:v>
+                </c:pt>
+              </c:numCache>
+            </c:numRef>
+          </c:val>
+        </c:ser>
+        <c:ser>
+          <c:idx val="1"/>
+          <c:order val="1"/>
+          <c:tx>
+            <c:strRef>
+              <c:f>Sheet1!$C$1</c:f>
+              <c:strCache>
+                <c:ptCount val="1"/>
+                <c:pt idx="0">
+                  <c:v>Deficit repayment (catch-up)</c:v>
+                </c:pt>
+              </c:strCache>
+            </c:strRef>
+          </c:tx>
+          <c:spPr>
+            <a:solidFill>
+              <a:srgbClr val="548235"/>
+            </a:solidFill>
+          </c:spPr>
+          <c:cat>
+            <c:strRef>
+              <c:f>Sheet1!$A$2:$A$8</c:f>
+              <c:strCache>
+                <c:ptCount val="7"/>
+                <c:pt idx="0">
+                  <c:v>FY26
+actual est.</c:v>
+                </c:pt>
+                <c:pt idx="1">
+                  <c:v>FY27</c:v>
+                </c:pt>
+                <c:pt idx="2">
+                  <c:v>FY28</c:v>
+                </c:pt>
+                <c:pt idx="3">
+                  <c:v>FY29</c:v>
+                </c:pt>
+                <c:pt idx="4">
+                  <c:v>FY30</c:v>
+                </c:pt>
+                <c:pt idx="5">
+                  <c:v>FY31</c:v>
+                </c:pt>
+                <c:pt idx="6">
+                  <c:v>Steady state
+FY32+</c:v>
+                </c:pt>
+              </c:strCache>
+            </c:strRef>
+          </c:cat>
+          <c:val>
+            <c:numRef>
+              <c:f>Sheet1!$C$2:$C$8</c:f>
+              <c:numCache>
+                <c:formatCode>General</c:formatCode>
+                <c:ptCount val="7"/>
+                <c:pt idx="0">
+                  <c:v>0</c:v>
+                </c:pt>
+                <c:pt idx="1">
+                  <c:v>10</c:v>
+                </c:pt>
+                <c:pt idx="2">
+                  <c:v>10</c:v>
+                </c:pt>
+                <c:pt idx="3">
+                  <c:v>10</c:v>
+                </c:pt>
+                <c:pt idx="4">
+                  <c:v>10</c:v>
+                </c:pt>
+                <c:pt idx="5">
+                  <c:v>10</c:v>
+                </c:pt>
+                <c:pt idx="6">
+                  <c:v>0</c:v>
+                </c:pt>
+              </c:numCache>
+            </c:numRef>
+          </c:val>
+        </c:ser>
+        <c:overlap val="100"/>
+        <c:axId val="-2068027336"/>
+        <c:axId val="-2113994440"/>
+      </c:barChart>
+      <c:catAx>
+        <c:axId val="-2068027336"/>
+        <c:scaling>
+          <c:orientation val="minMax"/>
+        </c:scaling>
+        <c:delete val="0"/>
+        <c:axPos val="b"/>
+        <c:majorTickMark val="out"/>
+        <c:minorTickMark val="none"/>
+        <c:tickLblPos val="nextTo"/>
+        <c:txPr>
+          <a:bodyPr/>
+          <a:lstStyle/>
+          <a:p>
+            <a:pPr>
+              <a:defRPr sz="900"/>
+            </a:pPr>
+          </a:p>
+        </c:txPr>
+        <c:crossAx val="-2113994440"/>
+        <c:crosses val="autoZero"/>
+        <c:auto val="1"/>
+        <c:lblAlgn val="ctr"/>
+        <c:lblOffset val="100"/>
+        <c:noMultiLvlLbl val="0"/>
+      </c:catAx>
+      <c:valAx>
+        <c:axId val="-2113994440"/>
+        <c:scaling/>
+        <c:delete val="0"/>
+        <c:axPos val="l"/>
+        <c:majorGridlines/>
+        <c:majorTickMark val="out"/>
+        <c:minorTickMark val="none"/>
+        <c:tickLblPos val="nextTo"/>
+        <c:crossAx val="-2068027336"/>
+        <c:crosses val="autoZero"/>
+      </c:valAx>
+    </c:plotArea>
+    <c:legend>
+      <c:legendPos val="b"/>
+      <c:overlay val="0"/>
+      <c:txPr>
+        <a:bodyPr/>
+        <a:lstStyle/>
+        <a:p>
+          <a:pPr>
+            <a:defRPr sz="1100"/>
+          </a:pPr>
+        </a:p>
+      </c:txPr>
+    </c:legend>
+    <c:dispBlanksAs val="gap"/>
+  </c:chart>
+  <c:txPr>
+    <a:bodyPr/>
+    <a:lstStyle/>
+    <a:p>
+      <a:pPr>
+        <a:defRPr sz="1800"/>
+      </a:pPr>
+      <a:endParaRPr lang="en-US"/>
+    </a:p>
+  </c:txPr>
+  <c:externalData r:id="rId1">
+    <c:autoUpdate val="0"/>
+  </c:externalData>
+</c:chartSpace>
+</file>
+
+<file path=ppt/charts/chart15.xml><?xml version="1.0" encoding="utf-8"?>
+<c:chartSpace xmlns:c="http://schemas.openxmlformats.org/drawingml/2006/chart" xmlns:a="http://schemas.openxmlformats.org/drawingml/2006/main" xmlns:r="http://schemas.openxmlformats.org/officeDocument/2006/relationships">
+  <c:date1904 val="0"/>
+  <c:chart>
+    <c:title>
+      <c:tx>
+        <c:rich>
+          <a:bodyPr/>
+          <a:lstStyle/>
+          <a:p>
+            <a:r>
               <a:rPr sz="1300"/>
               <a:t>Final weighted moat scores (TBK in red)</a:t>
             </a:r>
@@ -1701,7 +1910,7 @@
 </c:chartSpace>
 </file>
 
-<file path=ppt/charts/chart15.xml><?xml version="1.0" encoding="utf-8"?>
+<file path=ppt/charts/chart16.xml><?xml version="1.0" encoding="utf-8"?>
 <c:chartSpace xmlns:c="http://schemas.openxmlformats.org/drawingml/2006/chart" xmlns:a="http://schemas.openxmlformats.org/drawingml/2006/main" xmlns:r="http://schemas.openxmlformats.org/officeDocument/2006/relationships">
   <c:date1904 val="0"/>
   <c:roundedCorners val="0"/>
@@ -2092,7 +2301,7 @@
 </c:chartSpace>
 </file>
 
-<file path=ppt/charts/chart16.xml><?xml version="1.0" encoding="utf-8"?>
+<file path=ppt/charts/chart17.xml><?xml version="1.0" encoding="utf-8"?>
 <c:chartSpace xmlns:c="http://schemas.openxmlformats.org/drawingml/2006/chart" xmlns:a="http://schemas.openxmlformats.org/drawingml/2006/main" xmlns:r="http://schemas.openxmlformats.org/officeDocument/2006/relationships">
   <c:date1904 val="0"/>
   <c:chart>
@@ -2594,7 +2803,7 @@
 </c:chartSpace>
 </file>
 
-<file path=ppt/charts/chart17.xml><?xml version="1.0" encoding="utf-8"?>
+<file path=ppt/charts/chart18.xml><?xml version="1.0" encoding="utf-8"?>
 <c:chartSpace xmlns:c="http://schemas.openxmlformats.org/drawingml/2006/chart" xmlns:a="http://schemas.openxmlformats.org/drawingml/2006/main" xmlns:r="http://schemas.openxmlformats.org/officeDocument/2006/relationships">
   <c:date1904 val="0"/>
   <c:chart>
@@ -10133,6 +10342,375 @@
                   <a:srgbClr val="FFFFFF"/>
                 </a:solidFill>
               </a:rPr>
+              <a:t>The normalized TBK: right prices, right factories, real R&amp;D</a:t>
+            </a:r>
+          </a:p>
+        </p:txBody>
+      </p:sp>
+      <p:sp>
+        <p:nvSpPr>
+          <p:cNvPr id="3" name="TextBox 2"/>
+          <p:cNvSpPr txBox="1"/>
+          <p:nvPr/>
+        </p:nvSpPr>
+        <p:spPr>
+          <a:xfrm>
+            <a:off x="457200" y="914400"/>
+            <a:ext cx="11247120" cy="365760"/>
+          </a:xfrm>
+          <a:prstGeom prst="rect">
+            <a:avLst/>
+          </a:prstGeom>
+          <a:noFill/>
+        </p:spPr>
+        <p:txBody>
+          <a:bodyPr wrap="square">
+            <a:spAutoFit/>
+          </a:bodyPr>
+          <a:lstStyle/>
+          <a:p>
+            <a:pPr algn="l"/>
+            <a:r>
+              <a:rPr sz="1200" b="0">
+                <a:solidFill>
+                  <a:srgbClr val="595959"/>
+                </a:solidFill>
+              </a:rPr>
+              <a:t>Pro-forma on audited FY3/2026 — pricing corrected (SAW only), factory structure fixed, competitive R&amp;D loaded. Deficit repayment kept separate, per scope</a:t>
+            </a:r>
+          </a:p>
+        </p:txBody>
+      </p:sp>
+      <p:graphicFrame>
+        <p:nvGraphicFramePr>
+          <p:cNvPr id="4" name="Chart 3"/>
+          <p:cNvGraphicFramePr>
+            <a:graphicFrameLocks noGrp="1"/>
+          </p:cNvGraphicFramePr>
+          <p:nvPr/>
+        </p:nvGraphicFramePr>
+        <p:xfrm>
+          <a:off x="457200" y="1463040"/>
+          <a:ext cx="6309360" cy="4206240"/>
+        </p:xfrm>
+        <a:graphic>
+          <a:graphicData uri="http://schemas.openxmlformats.org/drawingml/2006/chart">
+            <c:chart xmlns:c="http://schemas.openxmlformats.org/drawingml/2006/chart" r:id="rId2"/>
+          </a:graphicData>
+        </a:graphic>
+      </p:graphicFrame>
+      <p:sp>
+        <p:nvSpPr>
+          <p:cNvPr id="5" name="TextBox 4"/>
+          <p:cNvSpPr txBox="1"/>
+          <p:nvPr/>
+        </p:nvSpPr>
+        <p:spPr>
+          <a:xfrm>
+            <a:off x="7040880" y="1463040"/>
+            <a:ext cx="4709160" cy="2240280"/>
+          </a:xfrm>
+          <a:prstGeom prst="rect">
+            <a:avLst/>
+          </a:prstGeom>
+          <a:solidFill>
+            <a:srgbClr val="F2F2F2"/>
+          </a:solidFill>
+          <a:ln w="15875">
+            <a:solidFill>
+              <a:srgbClr val="1F4E78"/>
+            </a:solidFill>
+          </a:ln>
+        </p:spPr>
+        <p:txBody>
+          <a:bodyPr wrap="square" lIns="137160" rIns="137160" tIns="109728">
+            <a:spAutoFit/>
+          </a:bodyPr>
+          <a:lstStyle/>
+          <a:p>
+            <a:r>
+              <a:rPr sz="1500" b="1">
+                <a:solidFill>
+                  <a:srgbClr val="1F4E78"/>
+                </a:solidFill>
+              </a:rPr>
+              <a:t>The normalized P&amp;L (¥M)</a:t>
+            </a:r>
+          </a:p>
+          <a:p>
+            <a:pPr>
+              <a:spcBef>
+                <a:spcPts val="400"/>
+              </a:spcBef>
+            </a:pPr>
+            <a:r>
+              <a:rPr sz="1150">
+                <a:solidFill>
+                  <a:srgbClr val="202020"/>
+                </a:solidFill>
+              </a:rPr>
+              <a:t>Sales 57,341 (+SAW reprice)</a:t>
+            </a:r>
+          </a:p>
+          <a:p>
+            <a:pPr>
+              <a:spcBef>
+                <a:spcPts val="400"/>
+              </a:spcBef>
+            </a:pPr>
+            <a:r>
+              <a:rPr sz="1150">
+                <a:solidFill>
+                  <a:srgbClr val="202020"/>
+                </a:solidFill>
+              </a:rPr>
+              <a:t>Gross profit 10,910 = 19.0% (vs 12.5%)</a:t>
+            </a:r>
+          </a:p>
+          <a:p>
+            <a:pPr>
+              <a:spcBef>
+                <a:spcPts val="400"/>
+              </a:spcBef>
+            </a:pPr>
+            <a:r>
+              <a:rPr sz="1150">
+                <a:solidFill>
+                  <a:srgbClr val="202020"/>
+                </a:solidFill>
+              </a:rPr>
+              <a:t>R&amp;D 2,695 = 4.7% of sales (peer level, vs ~2.2%)</a:t>
+            </a:r>
+          </a:p>
+          <a:p>
+            <a:pPr>
+              <a:spcBef>
+                <a:spcPts val="400"/>
+              </a:spcBef>
+            </a:pPr>
+            <a:r>
+              <a:rPr sz="1150">
+                <a:solidFill>
+                  <a:srgbClr val="202020"/>
+                </a:solidFill>
+              </a:rPr>
+              <a:t>Operating profit 4,056 = 7.1% (vs 2.7%)</a:t>
+            </a:r>
+          </a:p>
+          <a:p>
+            <a:pPr>
+              <a:spcBef>
+                <a:spcPts val="400"/>
+              </a:spcBef>
+            </a:pPr>
+            <a:r>
+              <a:rPr sz="1150">
+                <a:solidFill>
+                  <a:srgbClr val="202020"/>
+                </a:solidFill>
+              </a:rPr>
+              <a:t>Net attributable ~2,853 = ¥90 EPS (vs -¥4.4)</a:t>
+            </a:r>
+          </a:p>
+          <a:p>
+            <a:pPr>
+              <a:spcBef>
+                <a:spcPts val="400"/>
+              </a:spcBef>
+            </a:pPr>
+            <a:r>
+              <a:rPr sz="1150">
+                <a:solidFill>
+                  <a:srgbClr val="202020"/>
+                </a:solidFill>
+              </a:rPr>
+              <a:t>~3.4x earnings at current market cap (~¥9.6bn)</a:t>
+            </a:r>
+          </a:p>
+        </p:txBody>
+      </p:sp>
+      <p:sp>
+        <p:nvSpPr>
+          <p:cNvPr id="6" name="TextBox 5"/>
+          <p:cNvSpPr txBox="1"/>
+          <p:nvPr/>
+        </p:nvSpPr>
+        <p:spPr>
+          <a:xfrm>
+            <a:off x="7040880" y="3840480"/>
+            <a:ext cx="4709160" cy="2240280"/>
+          </a:xfrm>
+          <a:prstGeom prst="rect">
+            <a:avLst/>
+          </a:prstGeom>
+          <a:solidFill>
+            <a:srgbClr val="F2F2F2"/>
+          </a:solidFill>
+          <a:ln w="15875">
+            <a:solidFill>
+              <a:srgbClr val="548235"/>
+            </a:solidFill>
+          </a:ln>
+        </p:spPr>
+        <p:txBody>
+          <a:bodyPr wrap="square" lIns="137160" rIns="137160" tIns="109728">
+            <a:spAutoFit/>
+          </a:bodyPr>
+          <a:lstStyle/>
+          <a:p>
+            <a:r>
+              <a:rPr sz="1500" b="1">
+                <a:solidFill>
+                  <a:srgbClr val="548235"/>
+                </a:solidFill>
+              </a:rPr>
+              <a:t>Deliberately conservative — and coherent</a:t>
+            </a:r>
+          </a:p>
+          <a:p>
+            <a:pPr>
+              <a:spcBef>
+                <a:spcPts val="400"/>
+              </a:spcBef>
+            </a:pPr>
+            <a:r>
+              <a:rPr sz="1100">
+                <a:solidFill>
+                  <a:srgbClr val="202020"/>
+                </a:solidFill>
+              </a:rPr>
+              <a:t>Only SAW repriced; broader keiretsu book, aftermarket growth, e-pump/ADB revenue all EXCLUDED</a:t>
+            </a:r>
+          </a:p>
+          <a:p>
+            <a:pPr>
+              <a:spcBef>
+                <a:spcPts val="400"/>
+              </a:spcBef>
+            </a:pPr>
+            <a:r>
+              <a:rPr sz="1100">
+                <a:solidFill>
+                  <a:srgbClr val="202020"/>
+                </a:solidFill>
+              </a:rPr>
+              <a:t>Factory gain ¥1.5bn vs FY3/26's proven ¥0.7bn cut + &gt;¥1bn/yr extraordinary charges normalizing</a:t>
+            </a:r>
+          </a:p>
+          <a:p>
+            <a:pPr>
+              <a:spcBef>
+                <a:spcPts val="400"/>
+              </a:spcBef>
+            </a:pPr>
+            <a:r>
+              <a:rPr sz="1100">
+                <a:solidFill>
+                  <a:srgbClr val="202020"/>
+                </a:solidFill>
+              </a:rPr>
+              <a:t>Coherence: pro-forma OPM 7.1% = brake-peer average 7.2%; GM 19.0% inside the 15-22% peer band</a:t>
+            </a:r>
+          </a:p>
+          <a:p>
+            <a:pPr>
+              <a:spcBef>
+                <a:spcPts val="400"/>
+              </a:spcBef>
+            </a:pPr>
+            <a:r>
+              <a:rPr sz="1100">
+                <a:solidFill>
+                  <a:srgbClr val="202020"/>
+                </a:solidFill>
+              </a:rPr>
+              <a:t>MEMO (separate financing item): R&amp;D deficit repayment ~¥1.5bn/yr x 5 yrs; ADB capex ¥4.5-7.5bn one-off</a:t>
+            </a:r>
+          </a:p>
+        </p:txBody>
+      </p:sp>
+      <p:sp>
+        <p:nvSpPr>
+          <p:cNvPr id="7" name="TextBox 6"/>
+          <p:cNvSpPr txBox="1"/>
+          <p:nvPr/>
+        </p:nvSpPr>
+        <p:spPr>
+          <a:xfrm>
+            <a:off x="457200" y="5897880"/>
+            <a:ext cx="11247120" cy="822960"/>
+          </a:xfrm>
+          <a:prstGeom prst="rect">
+            <a:avLst/>
+          </a:prstGeom>
+          <a:noFill/>
+        </p:spPr>
+        <p:txBody>
+          <a:bodyPr wrap="square">
+            <a:spAutoFit/>
+          </a:bodyPr>
+          <a:lstStyle/>
+          <a:p>
+            <a:pPr algn="l"/>
+            <a:r>
+              <a:rPr sz="1150" b="1">
+                <a:solidFill>
+                  <a:srgbClr val="1F4E78"/>
+                </a:solidFill>
+              </a:rPr>
+              <a:t>Read: nothing in this statement requires new products or new customers — it is TBK's existing book at honest prices, loaded factories, and peer-level R&amp;D. The competitive R&amp;D (¥2.7bn/yr) is fully absorbed and the company still earns peer-average margins. The deficit repayment and ADB line are financing/balance-sheet items — they determine how fast TBK gets here, not whether the destination exists.</a:t>
+            </a:r>
+          </a:p>
+        </p:txBody>
+      </p:sp>
+    </p:spTree>
+  </p:cSld>
+  <p:clrMapOvr>
+    <a:masterClrMapping/>
+  </p:clrMapOvr>
+</p:sld>
+</file>
+
+<file path=ppt/slides/slide17.xml><?xml version="1.0" encoding="utf-8"?>
+<p:sld xmlns:a="http://schemas.openxmlformats.org/drawingml/2006/main" xmlns:p="http://schemas.openxmlformats.org/presentationml/2006/main" xmlns:r="http://schemas.openxmlformats.org/officeDocument/2006/relationships">
+  <p:cSld>
+    <p:spTree>
+      <p:nvGrpSpPr>
+        <p:cNvPr id="1" name=""/>
+        <p:cNvGrpSpPr/>
+        <p:nvPr/>
+      </p:nvGrpSpPr>
+      <p:grpSpPr/>
+      <p:sp>
+        <p:nvSpPr>
+          <p:cNvPr id="2" name="TextBox 1"/>
+          <p:cNvSpPr txBox="1"/>
+          <p:nvPr/>
+        </p:nvSpPr>
+        <p:spPr>
+          <a:xfrm>
+            <a:off x="0" y="0"/>
+            <a:ext cx="12191695" cy="868680"/>
+          </a:xfrm>
+          <a:prstGeom prst="rect">
+            <a:avLst/>
+          </a:prstGeom>
+          <a:solidFill>
+            <a:srgbClr val="1F4E78"/>
+          </a:solidFill>
+        </p:spPr>
+        <p:txBody>
+          <a:bodyPr wrap="square" lIns="457200" tIns="164592">
+            <a:spAutoFit/>
+          </a:bodyPr>
+          <a:lstStyle/>
+          <a:p>
+            <a:r>
+              <a:rPr sz="2600" b="1">
+                <a:solidFill>
+                  <a:srgbClr val="FFFFFF"/>
+                </a:solidFill>
+              </a:rPr>
               <a:t>Pump segment: TBK vs Concentric — product-level contribution</a:t>
             </a:r>
           </a:p>
@@ -10402,7 +10980,7 @@
 </p:sld>
 </file>
 
-<file path=ppt/slides/slide17.xml><?xml version="1.0" encoding="utf-8"?>
+<file path=ppt/slides/slide18.xml><?xml version="1.0" encoding="utf-8"?>
 <p:sld xmlns:a="http://schemas.openxmlformats.org/drawingml/2006/main" xmlns:p="http://schemas.openxmlformats.org/presentationml/2006/main" xmlns:r="http://schemas.openxmlformats.org/officeDocument/2006/relationships">
   <p:cSld>
     <p:spTree>
@@ -10801,7 +11379,7 @@
 </p:sld>
 </file>
 
-<file path=ppt/slides/slide18.xml><?xml version="1.0" encoding="utf-8"?>
+<file path=ppt/slides/slide19.xml><?xml version="1.0" encoding="utf-8"?>
 <p:sld xmlns:a="http://schemas.openxmlformats.org/drawingml/2006/main" xmlns:p="http://schemas.openxmlformats.org/presentationml/2006/main" xmlns:r="http://schemas.openxmlformats.org/officeDocument/2006/relationships">
   <p:cSld>
     <p:spTree>
@@ -11121,7 +11699,639 @@
 </p:sld>
 </file>
 
-<file path=ppt/slides/slide19.xml><?xml version="1.0" encoding="utf-8"?>
+<file path=ppt/slides/slide2.xml><?xml version="1.0" encoding="utf-8"?>
+<p:sld xmlns:a="http://schemas.openxmlformats.org/drawingml/2006/main" xmlns:p="http://schemas.openxmlformats.org/presentationml/2006/main" xmlns:r="http://schemas.openxmlformats.org/officeDocument/2006/relationships">
+  <p:cSld>
+    <p:spTree>
+      <p:nvGrpSpPr>
+        <p:cNvPr id="1" name=""/>
+        <p:cNvGrpSpPr/>
+        <p:nvPr/>
+      </p:nvGrpSpPr>
+      <p:grpSpPr/>
+      <p:sp>
+        <p:nvSpPr>
+          <p:cNvPr id="2" name="TextBox 1"/>
+          <p:cNvSpPr txBox="1"/>
+          <p:nvPr/>
+        </p:nvSpPr>
+        <p:spPr>
+          <a:xfrm>
+            <a:off x="0" y="0"/>
+            <a:ext cx="12191695" cy="868680"/>
+          </a:xfrm>
+          <a:prstGeom prst="rect">
+            <a:avLst/>
+          </a:prstGeom>
+          <a:solidFill>
+            <a:srgbClr val="1F4E78"/>
+          </a:solidFill>
+        </p:spPr>
+        <p:txBody>
+          <a:bodyPr wrap="square" lIns="457200" tIns="164592">
+            <a:spAutoFit/>
+          </a:bodyPr>
+          <a:lstStyle/>
+          <a:p>
+            <a:r>
+              <a:rPr sz="2600" b="1">
+                <a:solidFill>
+                  <a:srgbClr val="FFFFFF"/>
+                </a:solidFill>
+              </a:rPr>
+              <a:t>Brakes: drum brakes are a shrinking island</a:t>
+            </a:r>
+          </a:p>
+        </p:txBody>
+      </p:sp>
+      <p:sp>
+        <p:nvSpPr>
+          <p:cNvPr id="3" name="TextBox 2"/>
+          <p:cNvSpPr txBox="1"/>
+          <p:nvPr/>
+        </p:nvSpPr>
+        <p:spPr>
+          <a:xfrm>
+            <a:off x="457200" y="914400"/>
+            <a:ext cx="11247120" cy="365760"/>
+          </a:xfrm>
+          <a:prstGeom prst="rect">
+            <a:avLst/>
+          </a:prstGeom>
+          <a:noFill/>
+        </p:spPr>
+        <p:txBody>
+          <a:bodyPr wrap="square">
+            <a:spAutoFit/>
+          </a:bodyPr>
+          <a:lstStyle/>
+          <a:p>
+            <a:pPr algn="l"/>
+            <a:r>
+              <a:rPr sz="1200" b="0">
+                <a:solidFill>
+                  <a:srgbClr val="595959"/>
+                </a:solidFill>
+              </a:rPr>
+              <a:t>Verified findings from peer-reviewed literature, regulatory records, and industry data</a:t>
+            </a:r>
+          </a:p>
+        </p:txBody>
+      </p:sp>
+      <p:sp>
+        <p:nvSpPr>
+          <p:cNvPr id="4" name="TextBox 3"/>
+          <p:cNvSpPr txBox="1"/>
+          <p:nvPr/>
+        </p:nvSpPr>
+        <p:spPr>
+          <a:xfrm>
+            <a:off x="457200" y="1417320"/>
+            <a:ext cx="3657600" cy="2834640"/>
+          </a:xfrm>
+          <a:prstGeom prst="rect">
+            <a:avLst/>
+          </a:prstGeom>
+          <a:solidFill>
+            <a:srgbClr val="F2F2F2"/>
+          </a:solidFill>
+          <a:ln w="15875">
+            <a:solidFill>
+              <a:srgbClr val="1F4E78"/>
+            </a:solidFill>
+          </a:ln>
+        </p:spPr>
+        <p:txBody>
+          <a:bodyPr wrap="square" lIns="137160" rIns="137160" tIns="109728">
+            <a:spAutoFit/>
+          </a:bodyPr>
+          <a:lstStyle/>
+          <a:p>
+            <a:r>
+              <a:rPr sz="1500" b="1">
+                <a:solidFill>
+                  <a:srgbClr val="1F4E78"/>
+                </a:solidFill>
+              </a:rPr>
+              <a:t>Europe — converted ~2000</a:t>
+            </a:r>
+          </a:p>
+          <a:p>
+            <a:pPr>
+              <a:spcBef>
+                <a:spcPts val="400"/>
+              </a:spcBef>
+            </a:pPr>
+            <a:r>
+              <a:rPr sz="1200">
+                <a:solidFill>
+                  <a:srgbClr val="202020"/>
+                </a:solidFill>
+              </a:rPr>
+              <a:t>1996 Actros: first heavy truck with</a:t>
+            </a:r>
+          </a:p>
+          <a:p>
+            <a:pPr>
+              <a:spcBef>
+                <a:spcPts val="400"/>
+              </a:spcBef>
+            </a:pPr>
+            <a:r>
+              <a:rPr sz="1200">
+                <a:solidFill>
+                  <a:srgbClr val="202020"/>
+                </a:solidFill>
+              </a:rPr>
+              <a:t>all-axle EBS disc brakes</a:t>
+            </a:r>
+          </a:p>
+          <a:p>
+            <a:pPr>
+              <a:spcBef>
+                <a:spcPts val="400"/>
+              </a:spcBef>
+            </a:pPr>
+            <a:r>
+              <a:rPr sz="1200">
+                <a:solidFill>
+                  <a:srgbClr val="202020"/>
+                </a:solidFill>
+              </a:rPr>
+              <a:t>~70% disc/EBS take rate by 2000</a:t>
+            </a:r>
+          </a:p>
+          <a:p>
+            <a:pPr>
+              <a:spcBef>
+                <a:spcPts val="400"/>
+              </a:spcBef>
+            </a:pPr>
+            <a:r>
+              <a:rPr sz="1200">
+                <a:solidFill>
+                  <a:srgbClr val="202020"/>
+                </a:solidFill>
+              </a:rPr>
+              <a:t>Near-universal on-highway since</a:t>
+            </a:r>
+          </a:p>
+          <a:p>
+            <a:pPr>
+              <a:spcBef>
+                <a:spcPts val="400"/>
+              </a:spcBef>
+            </a:pPr>
+            <a:r>
+              <a:rPr sz="1200">
+                <a:solidFill>
+                  <a:srgbClr val="202020"/>
+                </a:solidFill>
+              </a:rPr>
+              <a:t>Drums: ~18% of EU demand (off-road)</a:t>
+            </a:r>
+          </a:p>
+        </p:txBody>
+      </p:sp>
+      <p:sp>
+        <p:nvSpPr>
+          <p:cNvPr id="5" name="TextBox 4"/>
+          <p:cNvSpPr txBox="1"/>
+          <p:nvPr/>
+        </p:nvSpPr>
+        <p:spPr>
+          <a:xfrm>
+            <a:off x="4297680" y="1417320"/>
+            <a:ext cx="3657600" cy="2834640"/>
+          </a:xfrm>
+          <a:prstGeom prst="rect">
+            <a:avLst/>
+          </a:prstGeom>
+          <a:solidFill>
+            <a:srgbClr val="F2F2F2"/>
+          </a:solidFill>
+          <a:ln w="15875">
+            <a:solidFill>
+              <a:srgbClr val="1F4E78"/>
+            </a:solidFill>
+          </a:ln>
+        </p:spPr>
+        <p:txBody>
+          <a:bodyPr wrap="square" lIns="137160" rIns="137160" tIns="109728">
+            <a:spAutoFit/>
+          </a:bodyPr>
+          <a:lstStyle/>
+          <a:p>
+            <a:r>
+              <a:rPr sz="1500" b="1">
+                <a:solidFill>
+                  <a:srgbClr val="1F4E78"/>
+                </a:solidFill>
+              </a:rPr>
+              <a:t>North America — tipped 2023-24</a:t>
+            </a:r>
+          </a:p>
+          <a:p>
+            <a:pPr>
+              <a:spcBef>
+                <a:spcPts val="400"/>
+              </a:spcBef>
+            </a:pPr>
+            <a:r>
+              <a:rPr sz="1200">
+                <a:solidFill>
+                  <a:srgbClr val="202020"/>
+                </a:solidFill>
+              </a:rPr>
+              <a:t>FMVSS 121 (2009): −30% stopping</a:t>
+            </a:r>
+          </a:p>
+          <a:p>
+            <a:pPr>
+              <a:spcBef>
+                <a:spcPts val="400"/>
+              </a:spcBef>
+            </a:pPr>
+            <a:r>
+              <a:rPr sz="1200">
+                <a:solidFill>
+                  <a:srgbClr val="202020"/>
+                </a:solidFill>
+              </a:rPr>
+              <a:t>distance, drum-compatible by design</a:t>
+            </a:r>
+          </a:p>
+          <a:p>
+            <a:pPr>
+              <a:spcBef>
+                <a:spcPts val="400"/>
+              </a:spcBef>
+            </a:pPr>
+            <a:r>
+              <a:rPr sz="1200">
+                <a:solidFill>
+                  <a:srgbClr val="202020"/>
+                </a:solidFill>
+              </a:rPr>
+              <a:t>Tractors: &lt;5% disc (2011) → ~25%</a:t>
+            </a:r>
+          </a:p>
+          <a:p>
+            <a:pPr>
+              <a:spcBef>
+                <a:spcPts val="400"/>
+              </a:spcBef>
+            </a:pPr>
+            <a:r>
+              <a:rPr sz="1200">
+                <a:solidFill>
+                  <a:srgbClr val="202020"/>
+                </a:solidFill>
+              </a:rPr>
+              <a:t>(2018) → ~50%+ (2023-24)</a:t>
+            </a:r>
+          </a:p>
+          <a:p>
+            <a:pPr>
+              <a:spcBef>
+                <a:spcPts val="400"/>
+              </a:spcBef>
+            </a:pPr>
+            <a:r>
+              <a:rPr sz="1200">
+                <a:solidFill>
+                  <a:srgbClr val="202020"/>
+                </a:solidFill>
+              </a:rPr>
+              <a:t>Trailers still lag at ~15%</a:t>
+            </a:r>
+          </a:p>
+        </p:txBody>
+      </p:sp>
+      <p:sp>
+        <p:nvSpPr>
+          <p:cNvPr id="6" name="TextBox 5"/>
+          <p:cNvSpPr txBox="1"/>
+          <p:nvPr/>
+        </p:nvSpPr>
+        <p:spPr>
+          <a:xfrm>
+            <a:off x="8138160" y="1417320"/>
+            <a:ext cx="3611880" cy="2834640"/>
+          </a:xfrm>
+          <a:prstGeom prst="rect">
+            <a:avLst/>
+          </a:prstGeom>
+          <a:solidFill>
+            <a:srgbClr val="F2F2F2"/>
+          </a:solidFill>
+          <a:ln w="15875">
+            <a:solidFill>
+              <a:srgbClr val="7F1D1D"/>
+            </a:solidFill>
+          </a:ln>
+        </p:spPr>
+        <p:txBody>
+          <a:bodyPr wrap="square" lIns="137160" rIns="137160" tIns="109728">
+            <a:spAutoFit/>
+          </a:bodyPr>
+          <a:lstStyle/>
+          <a:p>
+            <a:r>
+              <a:rPr sz="1500" b="1">
+                <a:solidFill>
+                  <a:srgbClr val="7F1D1D"/>
+                </a:solidFill>
+              </a:rPr>
+              <a:t>Japan — the last drum market</a:t>
+            </a:r>
+          </a:p>
+          <a:p>
+            <a:pPr>
+              <a:spcBef>
+                <a:spcPts val="400"/>
+              </a:spcBef>
+            </a:pPr>
+            <a:r>
+              <a:rPr sz="1200">
+                <a:solidFill>
+                  <a:srgbClr val="202020"/>
+                </a:solidFill>
+              </a:rPr>
+              <a:t>Drums still majority on MD/HD trucks</a:t>
+            </a:r>
+          </a:p>
+          <a:p>
+            <a:pPr>
+              <a:spcBef>
+                <a:spcPts val="400"/>
+              </a:spcBef>
+            </a:pPr>
+            <a:r>
+              <a:rPr sz="1200">
+                <a:solidFill>
+                  <a:srgbClr val="202020"/>
+                </a:solidFill>
+              </a:rPr>
+              <a:t>UD Quon all-disc since 2017</a:t>
+            </a:r>
+          </a:p>
+          <a:p>
+            <a:pPr>
+              <a:spcBef>
+                <a:spcPts val="400"/>
+              </a:spcBef>
+            </a:pPr>
+            <a:r>
+              <a:rPr sz="1200">
+                <a:solidFill>
+                  <a:srgbClr val="202020"/>
+                </a:solidFill>
+              </a:rPr>
+              <a:t>New Giga tractor: all-wheel discs</a:t>
+            </a:r>
+          </a:p>
+          <a:p>
+            <a:pPr>
+              <a:spcBef>
+                <a:spcPts val="400"/>
+              </a:spcBef>
+            </a:pPr>
+            <a:r>
+              <a:rPr sz="1200">
+                <a:solidFill>
+                  <a:srgbClr val="202020"/>
+                </a:solidFill>
+              </a:rPr>
+              <a:t>Isuzu export heavies all-disc (MY25)</a:t>
+            </a:r>
+          </a:p>
+          <a:p>
+            <a:pPr>
+              <a:spcBef>
+                <a:spcPts val="400"/>
+              </a:spcBef>
+            </a:pPr>
+            <a:r>
+              <a:rPr sz="1200">
+                <a:solidFill>
+                  <a:srgbClr val="202020"/>
+                </a:solidFill>
+              </a:rPr>
+              <a:t>Domestic flip is when, not if</a:t>
+            </a:r>
+          </a:p>
+        </p:txBody>
+      </p:sp>
+      <p:sp>
+        <p:nvSpPr>
+          <p:cNvPr id="7" name="TextBox 6"/>
+          <p:cNvSpPr txBox="1"/>
+          <p:nvPr/>
+        </p:nvSpPr>
+        <p:spPr>
+          <a:xfrm>
+            <a:off x="457200" y="4434840"/>
+            <a:ext cx="5577840" cy="2103120"/>
+          </a:xfrm>
+          <a:prstGeom prst="rect">
+            <a:avLst/>
+          </a:prstGeom>
+          <a:solidFill>
+            <a:srgbClr val="F2F2F2"/>
+          </a:solidFill>
+          <a:ln w="15875">
+            <a:solidFill>
+              <a:srgbClr val="1F4E78"/>
+            </a:solidFill>
+          </a:ln>
+        </p:spPr>
+        <p:txBody>
+          <a:bodyPr wrap="square" lIns="137160" rIns="137160" tIns="109728">
+            <a:spAutoFit/>
+          </a:bodyPr>
+          <a:lstStyle/>
+          <a:p>
+            <a:r>
+              <a:rPr sz="1500" b="1">
+                <a:solidFill>
+                  <a:srgbClr val="1F4E78"/>
+                </a:solidFill>
+              </a:rPr>
+              <a:t>Why discs won (peer-reviewed)</a:t>
+            </a:r>
+          </a:p>
+          <a:p>
+            <a:pPr>
+              <a:spcBef>
+                <a:spcPts val="400"/>
+              </a:spcBef>
+            </a:pPr>
+            <a:r>
+              <a:rPr sz="1200">
+                <a:solidFill>
+                  <a:srgbClr val="202020"/>
+                </a:solidFill>
+              </a:rPr>
+              <a:t>Fade resistance under thermal load (SAE 902206, 1990; physics in Day et al. 1984)</a:t>
+            </a:r>
+          </a:p>
+          <a:p>
+            <a:pPr>
+              <a:spcBef>
+                <a:spcPts val="400"/>
+              </a:spcBef>
+            </a:pPr>
+            <a:r>
+              <a:rPr sz="1200">
+                <a:solidFill>
+                  <a:srgbClr val="202020"/>
+                </a:solidFill>
+              </a:rPr>
+              <a:t>~30% shorter stops vs standard drums (NHTSA simulator, 108 drivers)</a:t>
+            </a:r>
+          </a:p>
+          <a:p>
+            <a:pPr>
+              <a:spcBef>
+                <a:spcPts val="400"/>
+              </a:spcBef>
+            </a:pPr>
+            <a:r>
+              <a:rPr sz="1200">
+                <a:solidFill>
+                  <a:srgbClr val="202020"/>
+                </a:solidFill>
+              </a:rPr>
+              <a:t>10-20% braking advantage, 12-80% lifecycle savings in demanding duty (Ampadu 2023)</a:t>
+            </a:r>
+          </a:p>
+          <a:p>
+            <a:pPr>
+              <a:spcBef>
+                <a:spcPts val="400"/>
+              </a:spcBef>
+            </a:pPr>
+            <a:r>
+              <a:rPr sz="1200">
+                <a:solidFill>
+                  <a:srgbClr val="202020"/>
+                </a:solidFill>
+              </a:rPr>
+              <a:t>EBS/AEB/ADAS mandates favor disc actuation precision</a:t>
+            </a:r>
+          </a:p>
+        </p:txBody>
+      </p:sp>
+      <p:sp>
+        <p:nvSpPr>
+          <p:cNvPr id="8" name="TextBox 7"/>
+          <p:cNvSpPr txBox="1"/>
+          <p:nvPr/>
+        </p:nvSpPr>
+        <p:spPr>
+          <a:xfrm>
+            <a:off x="6217920" y="4434840"/>
+            <a:ext cx="5532120" cy="2103120"/>
+          </a:xfrm>
+          <a:prstGeom prst="rect">
+            <a:avLst/>
+          </a:prstGeom>
+          <a:solidFill>
+            <a:srgbClr val="F2F2F2"/>
+          </a:solidFill>
+          <a:ln w="15875">
+            <a:solidFill>
+              <a:srgbClr val="548235"/>
+            </a:solidFill>
+          </a:ln>
+        </p:spPr>
+        <p:txBody>
+          <a:bodyPr wrap="square" lIns="137160" rIns="137160" tIns="109728">
+            <a:spAutoFit/>
+          </a:bodyPr>
+          <a:lstStyle/>
+          <a:p>
+            <a:r>
+              <a:rPr sz="1500" b="1">
+                <a:solidFill>
+                  <a:srgbClr val="548235"/>
+                </a:solidFill>
+              </a:rPr>
+              <a:t>Electrification re-shuffles the deck</a:t>
+            </a:r>
+          </a:p>
+          <a:p>
+            <a:pPr>
+              <a:spcBef>
+                <a:spcPts val="400"/>
+              </a:spcBef>
+            </a:pPr>
+            <a:r>
+              <a:rPr sz="1200">
+                <a:solidFill>
+                  <a:srgbClr val="202020"/>
+                </a:solidFill>
+              </a:rPr>
+              <a:t>Regen braking cuts friction wear 64-95% (multiple peer-reviewed studies)</a:t>
+            </a:r>
+          </a:p>
+          <a:p>
+            <a:pPr>
+              <a:spcBef>
+                <a:spcPts val="400"/>
+              </a:spcBef>
+            </a:pPr>
+            <a:r>
+              <a:rPr sz="1200">
+                <a:solidFill>
+                  <a:srgbClr val="202020"/>
+                </a:solidFill>
+              </a:rPr>
+              <a:t>Friction aftermarket growth ~2% CAGR with EV headwind</a:t>
+            </a:r>
+          </a:p>
+          <a:p>
+            <a:pPr>
+              <a:spcBef>
+                <a:spcPts val="400"/>
+              </a:spcBef>
+            </a:pPr>
+            <a:r>
+              <a:rPr sz="1200">
+                <a:solidFill>
+                  <a:srgbClr val="202020"/>
+                </a:solidFill>
+              </a:rPr>
+              <a:t>EU brake-dust limits for heavy vehicles expected ~2030</a:t>
+            </a:r>
+          </a:p>
+          <a:p>
+            <a:pPr>
+              <a:spcBef>
+                <a:spcPts val="400"/>
+              </a:spcBef>
+            </a:pPr>
+            <a:r>
+              <a:rPr sz="1200">
+                <a:solidFill>
+                  <a:srgbClr val="202020"/>
+                </a:solidFill>
+              </a:rPr>
+              <a:t>Value shifts: wear parts → corrosion/NVH/low-dust + retarders &amp; blending</a:t>
+            </a:r>
+          </a:p>
+        </p:txBody>
+      </p:sp>
+    </p:spTree>
+  </p:cSld>
+  <p:clrMapOvr>
+    <a:masterClrMapping/>
+  </p:clrMapOvr>
+</p:sld>
+</file>
+
+<file path=ppt/slides/slide20.xml><?xml version="1.0" encoding="utf-8"?>
 <p:sld xmlns:a="http://schemas.openxmlformats.org/drawingml/2006/main" xmlns:p="http://schemas.openxmlformats.org/presentationml/2006/main" xmlns:r="http://schemas.openxmlformats.org/officeDocument/2006/relationships">
   <p:cSld>
     <p:spTree>
@@ -11509,639 +12719,7 @@
 </p:sld>
 </file>
 
-<file path=ppt/slides/slide2.xml><?xml version="1.0" encoding="utf-8"?>
-<p:sld xmlns:a="http://schemas.openxmlformats.org/drawingml/2006/main" xmlns:p="http://schemas.openxmlformats.org/presentationml/2006/main" xmlns:r="http://schemas.openxmlformats.org/officeDocument/2006/relationships">
-  <p:cSld>
-    <p:spTree>
-      <p:nvGrpSpPr>
-        <p:cNvPr id="1" name=""/>
-        <p:cNvGrpSpPr/>
-        <p:nvPr/>
-      </p:nvGrpSpPr>
-      <p:grpSpPr/>
-      <p:sp>
-        <p:nvSpPr>
-          <p:cNvPr id="2" name="TextBox 1"/>
-          <p:cNvSpPr txBox="1"/>
-          <p:nvPr/>
-        </p:nvSpPr>
-        <p:spPr>
-          <a:xfrm>
-            <a:off x="0" y="0"/>
-            <a:ext cx="12191695" cy="868680"/>
-          </a:xfrm>
-          <a:prstGeom prst="rect">
-            <a:avLst/>
-          </a:prstGeom>
-          <a:solidFill>
-            <a:srgbClr val="1F4E78"/>
-          </a:solidFill>
-        </p:spPr>
-        <p:txBody>
-          <a:bodyPr wrap="square" lIns="457200" tIns="164592">
-            <a:spAutoFit/>
-          </a:bodyPr>
-          <a:lstStyle/>
-          <a:p>
-            <a:r>
-              <a:rPr sz="2600" b="1">
-                <a:solidFill>
-                  <a:srgbClr val="FFFFFF"/>
-                </a:solidFill>
-              </a:rPr>
-              <a:t>Brakes: drum brakes are a shrinking island</a:t>
-            </a:r>
-          </a:p>
-        </p:txBody>
-      </p:sp>
-      <p:sp>
-        <p:nvSpPr>
-          <p:cNvPr id="3" name="TextBox 2"/>
-          <p:cNvSpPr txBox="1"/>
-          <p:nvPr/>
-        </p:nvSpPr>
-        <p:spPr>
-          <a:xfrm>
-            <a:off x="457200" y="914400"/>
-            <a:ext cx="11247120" cy="365760"/>
-          </a:xfrm>
-          <a:prstGeom prst="rect">
-            <a:avLst/>
-          </a:prstGeom>
-          <a:noFill/>
-        </p:spPr>
-        <p:txBody>
-          <a:bodyPr wrap="square">
-            <a:spAutoFit/>
-          </a:bodyPr>
-          <a:lstStyle/>
-          <a:p>
-            <a:pPr algn="l"/>
-            <a:r>
-              <a:rPr sz="1200" b="0">
-                <a:solidFill>
-                  <a:srgbClr val="595959"/>
-                </a:solidFill>
-              </a:rPr>
-              <a:t>Verified findings from peer-reviewed literature, regulatory records, and industry data</a:t>
-            </a:r>
-          </a:p>
-        </p:txBody>
-      </p:sp>
-      <p:sp>
-        <p:nvSpPr>
-          <p:cNvPr id="4" name="TextBox 3"/>
-          <p:cNvSpPr txBox="1"/>
-          <p:nvPr/>
-        </p:nvSpPr>
-        <p:spPr>
-          <a:xfrm>
-            <a:off x="457200" y="1417320"/>
-            <a:ext cx="3657600" cy="2834640"/>
-          </a:xfrm>
-          <a:prstGeom prst="rect">
-            <a:avLst/>
-          </a:prstGeom>
-          <a:solidFill>
-            <a:srgbClr val="F2F2F2"/>
-          </a:solidFill>
-          <a:ln w="15875">
-            <a:solidFill>
-              <a:srgbClr val="1F4E78"/>
-            </a:solidFill>
-          </a:ln>
-        </p:spPr>
-        <p:txBody>
-          <a:bodyPr wrap="square" lIns="137160" rIns="137160" tIns="109728">
-            <a:spAutoFit/>
-          </a:bodyPr>
-          <a:lstStyle/>
-          <a:p>
-            <a:r>
-              <a:rPr sz="1500" b="1">
-                <a:solidFill>
-                  <a:srgbClr val="1F4E78"/>
-                </a:solidFill>
-              </a:rPr>
-              <a:t>Europe — converted ~2000</a:t>
-            </a:r>
-          </a:p>
-          <a:p>
-            <a:pPr>
-              <a:spcBef>
-                <a:spcPts val="400"/>
-              </a:spcBef>
-            </a:pPr>
-            <a:r>
-              <a:rPr sz="1200">
-                <a:solidFill>
-                  <a:srgbClr val="202020"/>
-                </a:solidFill>
-              </a:rPr>
-              <a:t>1996 Actros: first heavy truck with</a:t>
-            </a:r>
-          </a:p>
-          <a:p>
-            <a:pPr>
-              <a:spcBef>
-                <a:spcPts val="400"/>
-              </a:spcBef>
-            </a:pPr>
-            <a:r>
-              <a:rPr sz="1200">
-                <a:solidFill>
-                  <a:srgbClr val="202020"/>
-                </a:solidFill>
-              </a:rPr>
-              <a:t>all-axle EBS disc brakes</a:t>
-            </a:r>
-          </a:p>
-          <a:p>
-            <a:pPr>
-              <a:spcBef>
-                <a:spcPts val="400"/>
-              </a:spcBef>
-            </a:pPr>
-            <a:r>
-              <a:rPr sz="1200">
-                <a:solidFill>
-                  <a:srgbClr val="202020"/>
-                </a:solidFill>
-              </a:rPr>
-              <a:t>~70% disc/EBS take rate by 2000</a:t>
-            </a:r>
-          </a:p>
-          <a:p>
-            <a:pPr>
-              <a:spcBef>
-                <a:spcPts val="400"/>
-              </a:spcBef>
-            </a:pPr>
-            <a:r>
-              <a:rPr sz="1200">
-                <a:solidFill>
-                  <a:srgbClr val="202020"/>
-                </a:solidFill>
-              </a:rPr>
-              <a:t>Near-universal on-highway since</a:t>
-            </a:r>
-          </a:p>
-          <a:p>
-            <a:pPr>
-              <a:spcBef>
-                <a:spcPts val="400"/>
-              </a:spcBef>
-            </a:pPr>
-            <a:r>
-              <a:rPr sz="1200">
-                <a:solidFill>
-                  <a:srgbClr val="202020"/>
-                </a:solidFill>
-              </a:rPr>
-              <a:t>Drums: ~18% of EU demand (off-road)</a:t>
-            </a:r>
-          </a:p>
-        </p:txBody>
-      </p:sp>
-      <p:sp>
-        <p:nvSpPr>
-          <p:cNvPr id="5" name="TextBox 4"/>
-          <p:cNvSpPr txBox="1"/>
-          <p:nvPr/>
-        </p:nvSpPr>
-        <p:spPr>
-          <a:xfrm>
-            <a:off x="4297680" y="1417320"/>
-            <a:ext cx="3657600" cy="2834640"/>
-          </a:xfrm>
-          <a:prstGeom prst="rect">
-            <a:avLst/>
-          </a:prstGeom>
-          <a:solidFill>
-            <a:srgbClr val="F2F2F2"/>
-          </a:solidFill>
-          <a:ln w="15875">
-            <a:solidFill>
-              <a:srgbClr val="1F4E78"/>
-            </a:solidFill>
-          </a:ln>
-        </p:spPr>
-        <p:txBody>
-          <a:bodyPr wrap="square" lIns="137160" rIns="137160" tIns="109728">
-            <a:spAutoFit/>
-          </a:bodyPr>
-          <a:lstStyle/>
-          <a:p>
-            <a:r>
-              <a:rPr sz="1500" b="1">
-                <a:solidFill>
-                  <a:srgbClr val="1F4E78"/>
-                </a:solidFill>
-              </a:rPr>
-              <a:t>North America — tipped 2023-24</a:t>
-            </a:r>
-          </a:p>
-          <a:p>
-            <a:pPr>
-              <a:spcBef>
-                <a:spcPts val="400"/>
-              </a:spcBef>
-            </a:pPr>
-            <a:r>
-              <a:rPr sz="1200">
-                <a:solidFill>
-                  <a:srgbClr val="202020"/>
-                </a:solidFill>
-              </a:rPr>
-              <a:t>FMVSS 121 (2009): −30% stopping</a:t>
-            </a:r>
-          </a:p>
-          <a:p>
-            <a:pPr>
-              <a:spcBef>
-                <a:spcPts val="400"/>
-              </a:spcBef>
-            </a:pPr>
-            <a:r>
-              <a:rPr sz="1200">
-                <a:solidFill>
-                  <a:srgbClr val="202020"/>
-                </a:solidFill>
-              </a:rPr>
-              <a:t>distance, drum-compatible by design</a:t>
-            </a:r>
-          </a:p>
-          <a:p>
-            <a:pPr>
-              <a:spcBef>
-                <a:spcPts val="400"/>
-              </a:spcBef>
-            </a:pPr>
-            <a:r>
-              <a:rPr sz="1200">
-                <a:solidFill>
-                  <a:srgbClr val="202020"/>
-                </a:solidFill>
-              </a:rPr>
-              <a:t>Tractors: &lt;5% disc (2011) → ~25%</a:t>
-            </a:r>
-          </a:p>
-          <a:p>
-            <a:pPr>
-              <a:spcBef>
-                <a:spcPts val="400"/>
-              </a:spcBef>
-            </a:pPr>
-            <a:r>
-              <a:rPr sz="1200">
-                <a:solidFill>
-                  <a:srgbClr val="202020"/>
-                </a:solidFill>
-              </a:rPr>
-              <a:t>(2018) → ~50%+ (2023-24)</a:t>
-            </a:r>
-          </a:p>
-          <a:p>
-            <a:pPr>
-              <a:spcBef>
-                <a:spcPts val="400"/>
-              </a:spcBef>
-            </a:pPr>
-            <a:r>
-              <a:rPr sz="1200">
-                <a:solidFill>
-                  <a:srgbClr val="202020"/>
-                </a:solidFill>
-              </a:rPr>
-              <a:t>Trailers still lag at ~15%</a:t>
-            </a:r>
-          </a:p>
-        </p:txBody>
-      </p:sp>
-      <p:sp>
-        <p:nvSpPr>
-          <p:cNvPr id="6" name="TextBox 5"/>
-          <p:cNvSpPr txBox="1"/>
-          <p:nvPr/>
-        </p:nvSpPr>
-        <p:spPr>
-          <a:xfrm>
-            <a:off x="8138160" y="1417320"/>
-            <a:ext cx="3611880" cy="2834640"/>
-          </a:xfrm>
-          <a:prstGeom prst="rect">
-            <a:avLst/>
-          </a:prstGeom>
-          <a:solidFill>
-            <a:srgbClr val="F2F2F2"/>
-          </a:solidFill>
-          <a:ln w="15875">
-            <a:solidFill>
-              <a:srgbClr val="7F1D1D"/>
-            </a:solidFill>
-          </a:ln>
-        </p:spPr>
-        <p:txBody>
-          <a:bodyPr wrap="square" lIns="137160" rIns="137160" tIns="109728">
-            <a:spAutoFit/>
-          </a:bodyPr>
-          <a:lstStyle/>
-          <a:p>
-            <a:r>
-              <a:rPr sz="1500" b="1">
-                <a:solidFill>
-                  <a:srgbClr val="7F1D1D"/>
-                </a:solidFill>
-              </a:rPr>
-              <a:t>Japan — the last drum market</a:t>
-            </a:r>
-          </a:p>
-          <a:p>
-            <a:pPr>
-              <a:spcBef>
-                <a:spcPts val="400"/>
-              </a:spcBef>
-            </a:pPr>
-            <a:r>
-              <a:rPr sz="1200">
-                <a:solidFill>
-                  <a:srgbClr val="202020"/>
-                </a:solidFill>
-              </a:rPr>
-              <a:t>Drums still majority on MD/HD trucks</a:t>
-            </a:r>
-          </a:p>
-          <a:p>
-            <a:pPr>
-              <a:spcBef>
-                <a:spcPts val="400"/>
-              </a:spcBef>
-            </a:pPr>
-            <a:r>
-              <a:rPr sz="1200">
-                <a:solidFill>
-                  <a:srgbClr val="202020"/>
-                </a:solidFill>
-              </a:rPr>
-              <a:t>UD Quon all-disc since 2017</a:t>
-            </a:r>
-          </a:p>
-          <a:p>
-            <a:pPr>
-              <a:spcBef>
-                <a:spcPts val="400"/>
-              </a:spcBef>
-            </a:pPr>
-            <a:r>
-              <a:rPr sz="1200">
-                <a:solidFill>
-                  <a:srgbClr val="202020"/>
-                </a:solidFill>
-              </a:rPr>
-              <a:t>New Giga tractor: all-wheel discs</a:t>
-            </a:r>
-          </a:p>
-          <a:p>
-            <a:pPr>
-              <a:spcBef>
-                <a:spcPts val="400"/>
-              </a:spcBef>
-            </a:pPr>
-            <a:r>
-              <a:rPr sz="1200">
-                <a:solidFill>
-                  <a:srgbClr val="202020"/>
-                </a:solidFill>
-              </a:rPr>
-              <a:t>Isuzu export heavies all-disc (MY25)</a:t>
-            </a:r>
-          </a:p>
-          <a:p>
-            <a:pPr>
-              <a:spcBef>
-                <a:spcPts val="400"/>
-              </a:spcBef>
-            </a:pPr>
-            <a:r>
-              <a:rPr sz="1200">
-                <a:solidFill>
-                  <a:srgbClr val="202020"/>
-                </a:solidFill>
-              </a:rPr>
-              <a:t>Domestic flip is when, not if</a:t>
-            </a:r>
-          </a:p>
-        </p:txBody>
-      </p:sp>
-      <p:sp>
-        <p:nvSpPr>
-          <p:cNvPr id="7" name="TextBox 6"/>
-          <p:cNvSpPr txBox="1"/>
-          <p:nvPr/>
-        </p:nvSpPr>
-        <p:spPr>
-          <a:xfrm>
-            <a:off x="457200" y="4434840"/>
-            <a:ext cx="5577840" cy="2103120"/>
-          </a:xfrm>
-          <a:prstGeom prst="rect">
-            <a:avLst/>
-          </a:prstGeom>
-          <a:solidFill>
-            <a:srgbClr val="F2F2F2"/>
-          </a:solidFill>
-          <a:ln w="15875">
-            <a:solidFill>
-              <a:srgbClr val="1F4E78"/>
-            </a:solidFill>
-          </a:ln>
-        </p:spPr>
-        <p:txBody>
-          <a:bodyPr wrap="square" lIns="137160" rIns="137160" tIns="109728">
-            <a:spAutoFit/>
-          </a:bodyPr>
-          <a:lstStyle/>
-          <a:p>
-            <a:r>
-              <a:rPr sz="1500" b="1">
-                <a:solidFill>
-                  <a:srgbClr val="1F4E78"/>
-                </a:solidFill>
-              </a:rPr>
-              <a:t>Why discs won (peer-reviewed)</a:t>
-            </a:r>
-          </a:p>
-          <a:p>
-            <a:pPr>
-              <a:spcBef>
-                <a:spcPts val="400"/>
-              </a:spcBef>
-            </a:pPr>
-            <a:r>
-              <a:rPr sz="1200">
-                <a:solidFill>
-                  <a:srgbClr val="202020"/>
-                </a:solidFill>
-              </a:rPr>
-              <a:t>Fade resistance under thermal load (SAE 902206, 1990; physics in Day et al. 1984)</a:t>
-            </a:r>
-          </a:p>
-          <a:p>
-            <a:pPr>
-              <a:spcBef>
-                <a:spcPts val="400"/>
-              </a:spcBef>
-            </a:pPr>
-            <a:r>
-              <a:rPr sz="1200">
-                <a:solidFill>
-                  <a:srgbClr val="202020"/>
-                </a:solidFill>
-              </a:rPr>
-              <a:t>~30% shorter stops vs standard drums (NHTSA simulator, 108 drivers)</a:t>
-            </a:r>
-          </a:p>
-          <a:p>
-            <a:pPr>
-              <a:spcBef>
-                <a:spcPts val="400"/>
-              </a:spcBef>
-            </a:pPr>
-            <a:r>
-              <a:rPr sz="1200">
-                <a:solidFill>
-                  <a:srgbClr val="202020"/>
-                </a:solidFill>
-              </a:rPr>
-              <a:t>10-20% braking advantage, 12-80% lifecycle savings in demanding duty (Ampadu 2023)</a:t>
-            </a:r>
-          </a:p>
-          <a:p>
-            <a:pPr>
-              <a:spcBef>
-                <a:spcPts val="400"/>
-              </a:spcBef>
-            </a:pPr>
-            <a:r>
-              <a:rPr sz="1200">
-                <a:solidFill>
-                  <a:srgbClr val="202020"/>
-                </a:solidFill>
-              </a:rPr>
-              <a:t>EBS/AEB/ADAS mandates favor disc actuation precision</a:t>
-            </a:r>
-          </a:p>
-        </p:txBody>
-      </p:sp>
-      <p:sp>
-        <p:nvSpPr>
-          <p:cNvPr id="8" name="TextBox 7"/>
-          <p:cNvSpPr txBox="1"/>
-          <p:nvPr/>
-        </p:nvSpPr>
-        <p:spPr>
-          <a:xfrm>
-            <a:off x="6217920" y="4434840"/>
-            <a:ext cx="5532120" cy="2103120"/>
-          </a:xfrm>
-          <a:prstGeom prst="rect">
-            <a:avLst/>
-          </a:prstGeom>
-          <a:solidFill>
-            <a:srgbClr val="F2F2F2"/>
-          </a:solidFill>
-          <a:ln w="15875">
-            <a:solidFill>
-              <a:srgbClr val="548235"/>
-            </a:solidFill>
-          </a:ln>
-        </p:spPr>
-        <p:txBody>
-          <a:bodyPr wrap="square" lIns="137160" rIns="137160" tIns="109728">
-            <a:spAutoFit/>
-          </a:bodyPr>
-          <a:lstStyle/>
-          <a:p>
-            <a:r>
-              <a:rPr sz="1500" b="1">
-                <a:solidFill>
-                  <a:srgbClr val="548235"/>
-                </a:solidFill>
-              </a:rPr>
-              <a:t>Electrification re-shuffles the deck</a:t>
-            </a:r>
-          </a:p>
-          <a:p>
-            <a:pPr>
-              <a:spcBef>
-                <a:spcPts val="400"/>
-              </a:spcBef>
-            </a:pPr>
-            <a:r>
-              <a:rPr sz="1200">
-                <a:solidFill>
-                  <a:srgbClr val="202020"/>
-                </a:solidFill>
-              </a:rPr>
-              <a:t>Regen braking cuts friction wear 64-95% (multiple peer-reviewed studies)</a:t>
-            </a:r>
-          </a:p>
-          <a:p>
-            <a:pPr>
-              <a:spcBef>
-                <a:spcPts val="400"/>
-              </a:spcBef>
-            </a:pPr>
-            <a:r>
-              <a:rPr sz="1200">
-                <a:solidFill>
-                  <a:srgbClr val="202020"/>
-                </a:solidFill>
-              </a:rPr>
-              <a:t>Friction aftermarket growth ~2% CAGR with EV headwind</a:t>
-            </a:r>
-          </a:p>
-          <a:p>
-            <a:pPr>
-              <a:spcBef>
-                <a:spcPts val="400"/>
-              </a:spcBef>
-            </a:pPr>
-            <a:r>
-              <a:rPr sz="1200">
-                <a:solidFill>
-                  <a:srgbClr val="202020"/>
-                </a:solidFill>
-              </a:rPr>
-              <a:t>EU brake-dust limits for heavy vehicles expected ~2030</a:t>
-            </a:r>
-          </a:p>
-          <a:p>
-            <a:pPr>
-              <a:spcBef>
-                <a:spcPts val="400"/>
-              </a:spcBef>
-            </a:pPr>
-            <a:r>
-              <a:rPr sz="1200">
-                <a:solidFill>
-                  <a:srgbClr val="202020"/>
-                </a:solidFill>
-              </a:rPr>
-              <a:t>Value shifts: wear parts → corrosion/NVH/low-dust + retarders &amp; blending</a:t>
-            </a:r>
-          </a:p>
-        </p:txBody>
-      </p:sp>
-    </p:spTree>
-  </p:cSld>
-  <p:clrMapOvr>
-    <a:masterClrMapping/>
-  </p:clrMapOvr>
-</p:sld>
-</file>
-
-<file path=ppt/slides/slide20.xml><?xml version="1.0" encoding="utf-8"?>
+<file path=ppt/slides/slide21.xml><?xml version="1.0" encoding="utf-8"?>
 <p:sld xmlns:a="http://schemas.openxmlformats.org/drawingml/2006/main" xmlns:p="http://schemas.openxmlformats.org/presentationml/2006/main" xmlns:r="http://schemas.openxmlformats.org/officeDocument/2006/relationships">
   <p:cSld>
     <p:spTree>
@@ -12605,438 +13183,6 @@
                 </a:solidFill>
               </a:rPr>
               <a:t>Strategic point: TBK's quality reputation is held entirely inside the keiretsu — like its market share, it cannot be sold to new customers. Making quality externally legible (awards, certifications, published data) is a cheap, necessary complement to the R&amp;D program.</a:t>
-            </a:r>
-          </a:p>
-        </p:txBody>
-      </p:sp>
-    </p:spTree>
-  </p:cSld>
-  <p:clrMapOvr>
-    <a:masterClrMapping/>
-  </p:clrMapOvr>
-</p:sld>
-</file>
-
-<file path=ppt/slides/slide21.xml><?xml version="1.0" encoding="utf-8"?>
-<p:sld xmlns:a="http://schemas.openxmlformats.org/drawingml/2006/main" xmlns:p="http://schemas.openxmlformats.org/presentationml/2006/main" xmlns:r="http://schemas.openxmlformats.org/officeDocument/2006/relationships">
-  <p:cSld>
-    <p:spTree>
-      <p:nvGrpSpPr>
-        <p:cNvPr id="1" name=""/>
-        <p:cNvGrpSpPr/>
-        <p:nvPr/>
-      </p:nvGrpSpPr>
-      <p:grpSpPr/>
-      <p:sp>
-        <p:nvSpPr>
-          <p:cNvPr id="2" name="TextBox 1"/>
-          <p:cNvSpPr txBox="1"/>
-          <p:nvPr/>
-        </p:nvSpPr>
-        <p:spPr>
-          <a:xfrm>
-            <a:off x="0" y="0"/>
-            <a:ext cx="12191695" cy="868680"/>
-          </a:xfrm>
-          <a:prstGeom prst="rect">
-            <a:avLst/>
-          </a:prstGeom>
-          <a:solidFill>
-            <a:srgbClr val="1F4E78"/>
-          </a:solidFill>
-        </p:spPr>
-        <p:txBody>
-          <a:bodyPr wrap="square" lIns="457200" tIns="164592">
-            <a:spAutoFit/>
-          </a:bodyPr>
-          <a:lstStyle/>
-          <a:p>
-            <a:r>
-              <a:rPr sz="2600" b="1">
-                <a:solidFill>
-                  <a:srgbClr val="FFFFFF"/>
-                </a:solidFill>
-              </a:rPr>
-              <a:t>Product evaluation II: innovation output</a:t>
-            </a:r>
-          </a:p>
-        </p:txBody>
-      </p:sp>
-      <p:sp>
-        <p:nvSpPr>
-          <p:cNvPr id="3" name="TextBox 2"/>
-          <p:cNvSpPr txBox="1"/>
-          <p:nvPr/>
-        </p:nvSpPr>
-        <p:spPr>
-          <a:xfrm>
-            <a:off x="457200" y="914400"/>
-            <a:ext cx="11247120" cy="365760"/>
-          </a:xfrm>
-          <a:prstGeom prst="rect">
-            <a:avLst/>
-          </a:prstGeom>
-          <a:noFill/>
-        </p:spPr>
-        <p:txBody>
-          <a:bodyPr wrap="square">
-            <a:spAutoFit/>
-          </a:bodyPr>
-          <a:lstStyle/>
-          <a:p>
-            <a:pPr algn="l"/>
-            <a:r>
-              <a:rPr sz="1200" b="0">
-                <a:solidFill>
-                  <a:srgbClr val="595959"/>
-                </a:solidFill>
-              </a:rPr>
-              <a:t>Patents, documented product firsts, and technical-society awards — the externally visible output of R&amp;D</a:t>
-            </a:r>
-          </a:p>
-        </p:txBody>
-      </p:sp>
-      <p:sp>
-        <p:nvSpPr>
-          <p:cNvPr id="4" name="TextBox 3"/>
-          <p:cNvSpPr txBox="1"/>
-          <p:nvPr/>
-        </p:nvSpPr>
-        <p:spPr>
-          <a:xfrm>
-            <a:off x="457200" y="1417320"/>
-            <a:ext cx="5577840" cy="2286000"/>
-          </a:xfrm>
-          <a:prstGeom prst="rect">
-            <a:avLst/>
-          </a:prstGeom>
-          <a:solidFill>
-            <a:srgbClr val="F2F2F2"/>
-          </a:solidFill>
-          <a:ln w="15875">
-            <a:solidFill>
-              <a:srgbClr val="1F4E78"/>
-            </a:solidFill>
-          </a:ln>
-        </p:spPr>
-        <p:txBody>
-          <a:bodyPr wrap="square" lIns="137160" rIns="137160" tIns="109728">
-            <a:spAutoFit/>
-          </a:bodyPr>
-          <a:lstStyle/>
-          <a:p>
-            <a:r>
-              <a:rPr sz="1500" b="1">
-                <a:solidFill>
-                  <a:srgbClr val="1F4E78"/>
-                </a:solidFill>
-              </a:rPr>
-              <a:t>The patent gap (independent registries)</a:t>
-            </a:r>
-          </a:p>
-          <a:p>
-            <a:pPr>
-              <a:spcBef>
-                <a:spcPts val="400"/>
-              </a:spcBef>
-            </a:pPr>
-            <a:r>
-              <a:rPr sz="1100">
-                <a:solidFill>
-                  <a:srgbClr val="202020"/>
-                </a:solidFill>
-              </a:rPr>
-              <a:t>Knorr-Bremse: ~2,900 patent families / 10,900+ patents (~7,500 in the truck division)</a:t>
-            </a:r>
-          </a:p>
-          <a:p>
-            <a:pPr>
-              <a:spcBef>
-                <a:spcPts val="400"/>
-              </a:spcBef>
-            </a:pPr>
-            <a:r>
-              <a:rPr sz="1100">
-                <a:solidFill>
-                  <a:srgbClr val="202020"/>
-                </a:solidFill>
-              </a:rPr>
-              <a:t>Aisin: ~680 JP applications/yr; Clarivate Top-100 Global Innovator 7 consecutive years</a:t>
-            </a:r>
-          </a:p>
-          <a:p>
-            <a:pPr>
-              <a:spcBef>
-                <a:spcPts val="400"/>
-              </a:spcBef>
-            </a:pPr>
-            <a:r>
-              <a:rPr sz="1100">
-                <a:solidFill>
-                  <a:srgbClr val="202020"/>
-                </a:solidFill>
-              </a:rPr>
-              <a:t>Akebono: ~321 US-registered patents</a:t>
-            </a:r>
-          </a:p>
-          <a:p>
-            <a:pPr>
-              <a:spcBef>
-                <a:spcPts val="400"/>
-              </a:spcBef>
-            </a:pPr>
-            <a:r>
-              <a:rPr sz="1100">
-                <a:solidFill>
-                  <a:srgbClr val="202020"/>
-                </a:solidFill>
-              </a:rPr>
-              <a:t>Mikuni: e-oil-pump fault-detection patents — its BEV-truck win is engineering-backed</a:t>
-            </a:r>
-          </a:p>
-          <a:p>
-            <a:pPr>
-              <a:spcBef>
-                <a:spcPts val="400"/>
-              </a:spcBef>
-            </a:pPr>
-            <a:r>
-              <a:rPr sz="1100">
-                <a:solidFill>
-                  <a:srgbClr val="202020"/>
-                </a:solidFill>
-              </a:rPr>
-              <a:t>TBK: 2-3 patent GRANTS PER YEAR — two to three orders of magnitude below the leaders.</a:t>
-            </a:r>
-          </a:p>
-          <a:p>
-            <a:pPr>
-              <a:spcBef>
-                <a:spcPts val="400"/>
-              </a:spcBef>
-            </a:pPr>
-            <a:r>
-              <a:rPr sz="1100">
-                <a:solidFill>
-                  <a:srgbClr val="202020"/>
-                </a:solidFill>
-              </a:rPr>
-              <a:t>Independently confirms the capitalized-R&amp;D finding ($43M vs $2.6-5.6bn) from a different data source</a:t>
-            </a:r>
-          </a:p>
-        </p:txBody>
-      </p:sp>
-      <p:sp>
-        <p:nvSpPr>
-          <p:cNvPr id="5" name="TextBox 4"/>
-          <p:cNvSpPr txBox="1"/>
-          <p:nvPr/>
-        </p:nvSpPr>
-        <p:spPr>
-          <a:xfrm>
-            <a:off x="6217920" y="1417320"/>
-            <a:ext cx="5532120" cy="2286000"/>
-          </a:xfrm>
-          <a:prstGeom prst="rect">
-            <a:avLst/>
-          </a:prstGeom>
-          <a:solidFill>
-            <a:srgbClr val="F2F2F2"/>
-          </a:solidFill>
-          <a:ln w="15875">
-            <a:solidFill>
-              <a:srgbClr val="548235"/>
-            </a:solidFill>
-          </a:ln>
-        </p:spPr>
-        <p:txBody>
-          <a:bodyPr wrap="square" lIns="137160" rIns="137160" tIns="109728">
-            <a:spAutoFit/>
-          </a:bodyPr>
-          <a:lstStyle/>
-          <a:p>
-            <a:r>
-              <a:rPr sz="1500" b="1">
-                <a:solidFill>
-                  <a:srgbClr val="548235"/>
-                </a:solidFill>
-              </a:rPr>
-              <a:t>Documented product firsts</a:t>
-            </a:r>
-          </a:p>
-          <a:p>
-            <a:pPr>
-              <a:spcBef>
-                <a:spcPts val="400"/>
-              </a:spcBef>
-            </a:pPr>
-            <a:r>
-              <a:rPr sz="1100">
-                <a:solidFill>
-                  <a:srgbClr val="202020"/>
-                </a:solidFill>
-              </a:rPr>
-              <a:t>Knorr: EBS 1989; series air disc brake 1992; Actros/Scania volume 1996</a:t>
-            </a:r>
-          </a:p>
-          <a:p>
-            <a:pPr>
-              <a:spcBef>
-                <a:spcPts val="400"/>
-              </a:spcBef>
-            </a:pPr>
-            <a:r>
-              <a:rPr sz="1100">
-                <a:solidFill>
-                  <a:srgbClr val="202020"/>
-                </a:solidFill>
-              </a:rPr>
-              <a:t>Bendix ADB22X: 2005, now ~85% of NA air-disc wheel ends</a:t>
-            </a:r>
-          </a:p>
-          <a:p>
-            <a:pPr>
-              <a:spcBef>
-                <a:spcPts val="400"/>
-              </a:spcBef>
-            </a:pPr>
-            <a:r>
-              <a:rPr sz="1100">
-                <a:solidFill>
-                  <a:srgbClr val="202020"/>
-                </a:solidFill>
-              </a:rPr>
-              <a:t>UD Quon 2017: first all-disc Japanese heavy truck</a:t>
-            </a:r>
-          </a:p>
-          <a:p>
-            <a:pPr>
-              <a:spcBef>
-                <a:spcPts val="400"/>
-              </a:spcBef>
-            </a:pPr>
-            <a:r>
-              <a:rPr sz="1100">
-                <a:solidFill>
-                  <a:srgbClr val="202020"/>
-                </a:solidFill>
-              </a:rPr>
-              <a:t>Mikuni 2022: e-oil pump in production for a domestic small BEV truck</a:t>
-            </a:r>
-          </a:p>
-          <a:p>
-            <a:pPr>
-              <a:spcBef>
-                <a:spcPts val="400"/>
-              </a:spcBef>
-            </a:pPr>
-            <a:r>
-              <a:rPr sz="1100">
-                <a:solidFill>
-                  <a:srgbClr val="202020"/>
-                </a:solidFill>
-              </a:rPr>
-              <a:t>Akebono FY2023: JSME Technology Award — world-first electric parking brake unit for medium/light trucks (innovating through distress)</a:t>
-            </a:r>
-          </a:p>
-          <a:p>
-            <a:pPr>
-              <a:spcBef>
-                <a:spcPts val="400"/>
-              </a:spcBef>
-            </a:pPr>
-            <a:r>
-              <a:rPr sz="1100">
-                <a:solidFill>
-                  <a:srgbClr val="202020"/>
-                </a:solidFill>
-              </a:rPr>
-              <a:t>TBK: retarders since the 1960s; 19.5" ADB exhibited (year unconfirmed: 2019 vs 2022 sources conflict); e-pumps/TCU in development</a:t>
-            </a:r>
-          </a:p>
-        </p:txBody>
-      </p:sp>
-      <p:sp>
-        <p:nvSpPr>
-          <p:cNvPr id="6" name="TextBox 5"/>
-          <p:cNvSpPr txBox="1"/>
-          <p:nvPr/>
-        </p:nvSpPr>
-        <p:spPr>
-          <a:xfrm>
-            <a:off x="457200" y="3840480"/>
-            <a:ext cx="11292840" cy="1737360"/>
-          </a:xfrm>
-          <a:prstGeom prst="rect">
-            <a:avLst/>
-          </a:prstGeom>
-          <a:solidFill>
-            <a:srgbClr val="F2F2F2"/>
-          </a:solidFill>
-          <a:ln w="15875">
-            <a:solidFill>
-              <a:srgbClr val="1F4E78"/>
-            </a:solidFill>
-          </a:ln>
-        </p:spPr>
-        <p:txBody>
-          <a:bodyPr wrap="square" lIns="137160" rIns="137160" tIns="109728">
-            <a:spAutoFit/>
-          </a:bodyPr>
-          <a:lstStyle/>
-          <a:p>
-            <a:r>
-              <a:rPr sz="1500" b="1">
-                <a:solidFill>
-                  <a:srgbClr val="1F4E78"/>
-                </a:solidFill>
-              </a:rPr>
-              <a:t>The pattern — and TBK's fix</a:t>
-            </a:r>
-          </a:p>
-          <a:p>
-            <a:pPr>
-              <a:spcBef>
-                <a:spcPts val="400"/>
-              </a:spcBef>
-            </a:pPr>
-            <a:r>
-              <a:rPr sz="1150">
-                <a:solidFill>
-                  <a:srgbClr val="202020"/>
-                </a:solidFill>
-              </a:rPr>
-              <a:t>Innovation output tracks the moat and margin rankings almost perfectly: the companies with validated quality (Knorr, Cummins) also hold the patent fortresses and the product firsts; the distressed (Akebono) still out-publish TBK; even the similarly-sized peer (Mikuni) protects its e-pump work with patents.</a:t>
-            </a:r>
-          </a:p>
-          <a:p>
-            <a:pPr>
-              <a:spcBef>
-                <a:spcPts val="400"/>
-              </a:spcBef>
-            </a:pPr>
-            <a:r>
-              <a:rPr sz="1150">
-                <a:solidFill>
-                  <a:srgbClr val="202020"/>
-                </a:solidFill>
-              </a:rPr>
-              <a:t>TBK's innovation is real but INVISIBLE: 75 years of retarder/brake/pump engineering, an ADB prototype, e-pumps and a thermal control unit in development — none of it patented at scale, published at JSAE, or externally awarded. Invisible innovation cannot win sockets outside the keiretsu.</a:t>
-            </a:r>
-          </a:p>
-          <a:p>
-            <a:pPr>
-              <a:spcBef>
-                <a:spcPts val="400"/>
-              </a:spcBef>
-            </a:pPr>
-            <a:r>
-              <a:rPr sz="1150">
-                <a:solidFill>
-                  <a:srgbClr val="202020"/>
-                </a:solidFill>
-              </a:rPr>
-              <a:t>Fix costs little: patent the e-pump/TCU and ADB work (Mikuni shows the value), publish, pursue external validation — a required complement to the R&amp;D spend itself.</a:t>
             </a:r>
           </a:p>
         </p:txBody>
@@ -13089,6 +13235,438 @@
                   <a:srgbClr val="FFFFFF"/>
                 </a:solidFill>
               </a:rPr>
+              <a:t>Product evaluation II: innovation output</a:t>
+            </a:r>
+          </a:p>
+        </p:txBody>
+      </p:sp>
+      <p:sp>
+        <p:nvSpPr>
+          <p:cNvPr id="3" name="TextBox 2"/>
+          <p:cNvSpPr txBox="1"/>
+          <p:nvPr/>
+        </p:nvSpPr>
+        <p:spPr>
+          <a:xfrm>
+            <a:off x="457200" y="914400"/>
+            <a:ext cx="11247120" cy="365760"/>
+          </a:xfrm>
+          <a:prstGeom prst="rect">
+            <a:avLst/>
+          </a:prstGeom>
+          <a:noFill/>
+        </p:spPr>
+        <p:txBody>
+          <a:bodyPr wrap="square">
+            <a:spAutoFit/>
+          </a:bodyPr>
+          <a:lstStyle/>
+          <a:p>
+            <a:pPr algn="l"/>
+            <a:r>
+              <a:rPr sz="1200" b="0">
+                <a:solidFill>
+                  <a:srgbClr val="595959"/>
+                </a:solidFill>
+              </a:rPr>
+              <a:t>Patents, documented product firsts, and technical-society awards — the externally visible output of R&amp;D</a:t>
+            </a:r>
+          </a:p>
+        </p:txBody>
+      </p:sp>
+      <p:sp>
+        <p:nvSpPr>
+          <p:cNvPr id="4" name="TextBox 3"/>
+          <p:cNvSpPr txBox="1"/>
+          <p:nvPr/>
+        </p:nvSpPr>
+        <p:spPr>
+          <a:xfrm>
+            <a:off x="457200" y="1417320"/>
+            <a:ext cx="5577840" cy="2286000"/>
+          </a:xfrm>
+          <a:prstGeom prst="rect">
+            <a:avLst/>
+          </a:prstGeom>
+          <a:solidFill>
+            <a:srgbClr val="F2F2F2"/>
+          </a:solidFill>
+          <a:ln w="15875">
+            <a:solidFill>
+              <a:srgbClr val="1F4E78"/>
+            </a:solidFill>
+          </a:ln>
+        </p:spPr>
+        <p:txBody>
+          <a:bodyPr wrap="square" lIns="137160" rIns="137160" tIns="109728">
+            <a:spAutoFit/>
+          </a:bodyPr>
+          <a:lstStyle/>
+          <a:p>
+            <a:r>
+              <a:rPr sz="1500" b="1">
+                <a:solidFill>
+                  <a:srgbClr val="1F4E78"/>
+                </a:solidFill>
+              </a:rPr>
+              <a:t>The patent gap (independent registries)</a:t>
+            </a:r>
+          </a:p>
+          <a:p>
+            <a:pPr>
+              <a:spcBef>
+                <a:spcPts val="400"/>
+              </a:spcBef>
+            </a:pPr>
+            <a:r>
+              <a:rPr sz="1100">
+                <a:solidFill>
+                  <a:srgbClr val="202020"/>
+                </a:solidFill>
+              </a:rPr>
+              <a:t>Knorr-Bremse: ~2,900 patent families / 10,900+ patents (~7,500 in the truck division)</a:t>
+            </a:r>
+          </a:p>
+          <a:p>
+            <a:pPr>
+              <a:spcBef>
+                <a:spcPts val="400"/>
+              </a:spcBef>
+            </a:pPr>
+            <a:r>
+              <a:rPr sz="1100">
+                <a:solidFill>
+                  <a:srgbClr val="202020"/>
+                </a:solidFill>
+              </a:rPr>
+              <a:t>Aisin: ~680 JP applications/yr; Clarivate Top-100 Global Innovator 7 consecutive years</a:t>
+            </a:r>
+          </a:p>
+          <a:p>
+            <a:pPr>
+              <a:spcBef>
+                <a:spcPts val="400"/>
+              </a:spcBef>
+            </a:pPr>
+            <a:r>
+              <a:rPr sz="1100">
+                <a:solidFill>
+                  <a:srgbClr val="202020"/>
+                </a:solidFill>
+              </a:rPr>
+              <a:t>Akebono: ~321 US-registered patents</a:t>
+            </a:r>
+          </a:p>
+          <a:p>
+            <a:pPr>
+              <a:spcBef>
+                <a:spcPts val="400"/>
+              </a:spcBef>
+            </a:pPr>
+            <a:r>
+              <a:rPr sz="1100">
+                <a:solidFill>
+                  <a:srgbClr val="202020"/>
+                </a:solidFill>
+              </a:rPr>
+              <a:t>Mikuni: e-oil-pump fault-detection patents — its BEV-truck win is engineering-backed</a:t>
+            </a:r>
+          </a:p>
+          <a:p>
+            <a:pPr>
+              <a:spcBef>
+                <a:spcPts val="400"/>
+              </a:spcBef>
+            </a:pPr>
+            <a:r>
+              <a:rPr sz="1100">
+                <a:solidFill>
+                  <a:srgbClr val="202020"/>
+                </a:solidFill>
+              </a:rPr>
+              <a:t>TBK: 2-3 patent GRANTS PER YEAR — two to three orders of magnitude below the leaders.</a:t>
+            </a:r>
+          </a:p>
+          <a:p>
+            <a:pPr>
+              <a:spcBef>
+                <a:spcPts val="400"/>
+              </a:spcBef>
+            </a:pPr>
+            <a:r>
+              <a:rPr sz="1100">
+                <a:solidFill>
+                  <a:srgbClr val="202020"/>
+                </a:solidFill>
+              </a:rPr>
+              <a:t>Independently confirms the capitalized-R&amp;D finding ($43M vs $2.6-5.6bn) from a different data source</a:t>
+            </a:r>
+          </a:p>
+        </p:txBody>
+      </p:sp>
+      <p:sp>
+        <p:nvSpPr>
+          <p:cNvPr id="5" name="TextBox 4"/>
+          <p:cNvSpPr txBox="1"/>
+          <p:nvPr/>
+        </p:nvSpPr>
+        <p:spPr>
+          <a:xfrm>
+            <a:off x="6217920" y="1417320"/>
+            <a:ext cx="5532120" cy="2286000"/>
+          </a:xfrm>
+          <a:prstGeom prst="rect">
+            <a:avLst/>
+          </a:prstGeom>
+          <a:solidFill>
+            <a:srgbClr val="F2F2F2"/>
+          </a:solidFill>
+          <a:ln w="15875">
+            <a:solidFill>
+              <a:srgbClr val="548235"/>
+            </a:solidFill>
+          </a:ln>
+        </p:spPr>
+        <p:txBody>
+          <a:bodyPr wrap="square" lIns="137160" rIns="137160" tIns="109728">
+            <a:spAutoFit/>
+          </a:bodyPr>
+          <a:lstStyle/>
+          <a:p>
+            <a:r>
+              <a:rPr sz="1500" b="1">
+                <a:solidFill>
+                  <a:srgbClr val="548235"/>
+                </a:solidFill>
+              </a:rPr>
+              <a:t>Documented product firsts</a:t>
+            </a:r>
+          </a:p>
+          <a:p>
+            <a:pPr>
+              <a:spcBef>
+                <a:spcPts val="400"/>
+              </a:spcBef>
+            </a:pPr>
+            <a:r>
+              <a:rPr sz="1100">
+                <a:solidFill>
+                  <a:srgbClr val="202020"/>
+                </a:solidFill>
+              </a:rPr>
+              <a:t>Knorr: EBS 1989; series air disc brake 1992; Actros/Scania volume 1996</a:t>
+            </a:r>
+          </a:p>
+          <a:p>
+            <a:pPr>
+              <a:spcBef>
+                <a:spcPts val="400"/>
+              </a:spcBef>
+            </a:pPr>
+            <a:r>
+              <a:rPr sz="1100">
+                <a:solidFill>
+                  <a:srgbClr val="202020"/>
+                </a:solidFill>
+              </a:rPr>
+              <a:t>Bendix ADB22X: 2005, now ~85% of NA air-disc wheel ends</a:t>
+            </a:r>
+          </a:p>
+          <a:p>
+            <a:pPr>
+              <a:spcBef>
+                <a:spcPts val="400"/>
+              </a:spcBef>
+            </a:pPr>
+            <a:r>
+              <a:rPr sz="1100">
+                <a:solidFill>
+                  <a:srgbClr val="202020"/>
+                </a:solidFill>
+              </a:rPr>
+              <a:t>UD Quon 2017: first all-disc Japanese heavy truck</a:t>
+            </a:r>
+          </a:p>
+          <a:p>
+            <a:pPr>
+              <a:spcBef>
+                <a:spcPts val="400"/>
+              </a:spcBef>
+            </a:pPr>
+            <a:r>
+              <a:rPr sz="1100">
+                <a:solidFill>
+                  <a:srgbClr val="202020"/>
+                </a:solidFill>
+              </a:rPr>
+              <a:t>Mikuni 2022: e-oil pump in production for a domestic small BEV truck</a:t>
+            </a:r>
+          </a:p>
+          <a:p>
+            <a:pPr>
+              <a:spcBef>
+                <a:spcPts val="400"/>
+              </a:spcBef>
+            </a:pPr>
+            <a:r>
+              <a:rPr sz="1100">
+                <a:solidFill>
+                  <a:srgbClr val="202020"/>
+                </a:solidFill>
+              </a:rPr>
+              <a:t>Akebono FY2023: JSME Technology Award — world-first electric parking brake unit for medium/light trucks (innovating through distress)</a:t>
+            </a:r>
+          </a:p>
+          <a:p>
+            <a:pPr>
+              <a:spcBef>
+                <a:spcPts val="400"/>
+              </a:spcBef>
+            </a:pPr>
+            <a:r>
+              <a:rPr sz="1100">
+                <a:solidFill>
+                  <a:srgbClr val="202020"/>
+                </a:solidFill>
+              </a:rPr>
+              <a:t>TBK: retarders since the 1960s; 19.5" ADB exhibited (year unconfirmed: 2019 vs 2022 sources conflict); e-pumps/TCU in development</a:t>
+            </a:r>
+          </a:p>
+        </p:txBody>
+      </p:sp>
+      <p:sp>
+        <p:nvSpPr>
+          <p:cNvPr id="6" name="TextBox 5"/>
+          <p:cNvSpPr txBox="1"/>
+          <p:nvPr/>
+        </p:nvSpPr>
+        <p:spPr>
+          <a:xfrm>
+            <a:off x="457200" y="3840480"/>
+            <a:ext cx="11292840" cy="1737360"/>
+          </a:xfrm>
+          <a:prstGeom prst="rect">
+            <a:avLst/>
+          </a:prstGeom>
+          <a:solidFill>
+            <a:srgbClr val="F2F2F2"/>
+          </a:solidFill>
+          <a:ln w="15875">
+            <a:solidFill>
+              <a:srgbClr val="1F4E78"/>
+            </a:solidFill>
+          </a:ln>
+        </p:spPr>
+        <p:txBody>
+          <a:bodyPr wrap="square" lIns="137160" rIns="137160" tIns="109728">
+            <a:spAutoFit/>
+          </a:bodyPr>
+          <a:lstStyle/>
+          <a:p>
+            <a:r>
+              <a:rPr sz="1500" b="1">
+                <a:solidFill>
+                  <a:srgbClr val="1F4E78"/>
+                </a:solidFill>
+              </a:rPr>
+              <a:t>The pattern — and TBK's fix</a:t>
+            </a:r>
+          </a:p>
+          <a:p>
+            <a:pPr>
+              <a:spcBef>
+                <a:spcPts val="400"/>
+              </a:spcBef>
+            </a:pPr>
+            <a:r>
+              <a:rPr sz="1150">
+                <a:solidFill>
+                  <a:srgbClr val="202020"/>
+                </a:solidFill>
+              </a:rPr>
+              <a:t>Innovation output tracks the moat and margin rankings almost perfectly: the companies with validated quality (Knorr, Cummins) also hold the patent fortresses and the product firsts; the distressed (Akebono) still out-publish TBK; even the similarly-sized peer (Mikuni) protects its e-pump work with patents.</a:t>
+            </a:r>
+          </a:p>
+          <a:p>
+            <a:pPr>
+              <a:spcBef>
+                <a:spcPts val="400"/>
+              </a:spcBef>
+            </a:pPr>
+            <a:r>
+              <a:rPr sz="1150">
+                <a:solidFill>
+                  <a:srgbClr val="202020"/>
+                </a:solidFill>
+              </a:rPr>
+              <a:t>TBK's innovation is real but INVISIBLE: 75 years of retarder/brake/pump engineering, an ADB prototype, e-pumps and a thermal control unit in development — none of it patented at scale, published at JSAE, or externally awarded. Invisible innovation cannot win sockets outside the keiretsu.</a:t>
+            </a:r>
+          </a:p>
+          <a:p>
+            <a:pPr>
+              <a:spcBef>
+                <a:spcPts val="400"/>
+              </a:spcBef>
+            </a:pPr>
+            <a:r>
+              <a:rPr sz="1150">
+                <a:solidFill>
+                  <a:srgbClr val="202020"/>
+                </a:solidFill>
+              </a:rPr>
+              <a:t>Fix costs little: patent the e-pump/TCU and ADB work (Mikuni shows the value), publish, pursue external validation — a required complement to the R&amp;D spend itself.</a:t>
+            </a:r>
+          </a:p>
+        </p:txBody>
+      </p:sp>
+    </p:spTree>
+  </p:cSld>
+  <p:clrMapOvr>
+    <a:masterClrMapping/>
+  </p:clrMapOvr>
+</p:sld>
+</file>
+
+<file path=ppt/slides/slide23.xml><?xml version="1.0" encoding="utf-8"?>
+<p:sld xmlns:a="http://schemas.openxmlformats.org/drawingml/2006/main" xmlns:p="http://schemas.openxmlformats.org/presentationml/2006/main" xmlns:r="http://schemas.openxmlformats.org/officeDocument/2006/relationships">
+  <p:cSld>
+    <p:spTree>
+      <p:nvGrpSpPr>
+        <p:cNvPr id="1" name=""/>
+        <p:cNvGrpSpPr/>
+        <p:nvPr/>
+      </p:nvGrpSpPr>
+      <p:grpSpPr/>
+      <p:sp>
+        <p:nvSpPr>
+          <p:cNvPr id="2" name="TextBox 1"/>
+          <p:cNvSpPr txBox="1"/>
+          <p:nvPr/>
+        </p:nvSpPr>
+        <p:spPr>
+          <a:xfrm>
+            <a:off x="0" y="0"/>
+            <a:ext cx="12191695" cy="868680"/>
+          </a:xfrm>
+          <a:prstGeom prst="rect">
+            <a:avLst/>
+          </a:prstGeom>
+          <a:solidFill>
+            <a:srgbClr val="1F4E78"/>
+          </a:solidFill>
+        </p:spPr>
+        <p:txBody>
+          <a:bodyPr wrap="square" lIns="457200" tIns="164592">
+            <a:spAutoFit/>
+          </a:bodyPr>
+          <a:lstStyle/>
+          <a:p>
+            <a:r>
+              <a:rPr sz="2600" b="1">
+                <a:solidFill>
+                  <a:srgbClr val="FFFFFF"/>
+                </a:solidFill>
+              </a:rPr>
               <a:t>Moat framework ranking: TBK scores 5.38 — 9th of 13</a:t>
             </a:r>
           </a:p>
@@ -13459,7 +14037,7 @@
 </p:sld>
 </file>
 
-<file path=ppt/slides/slide23.xml><?xml version="1.0" encoding="utf-8"?>
+<file path=ppt/slides/slide24.xml><?xml version="1.0" encoding="utf-8"?>
 <p:sld xmlns:a="http://schemas.openxmlformats.org/drawingml/2006/main" xmlns:p="http://schemas.openxmlformats.org/presentationml/2006/main" xmlns:r="http://schemas.openxmlformats.org/officeDocument/2006/relationships">
   <p:cSld>
     <p:spTree>
@@ -13764,7 +14342,7 @@
 </p:sld>
 </file>
 
-<file path=ppt/slides/slide24.xml><?xml version="1.0" encoding="utf-8"?>
+<file path=ppt/slides/slide25.xml><?xml version="1.0" encoding="utf-8"?>
 <p:sld xmlns:a="http://schemas.openxmlformats.org/drawingml/2006/main" xmlns:p="http://schemas.openxmlformats.org/presentationml/2006/main" xmlns:r="http://schemas.openxmlformats.org/officeDocument/2006/relationships">
   <p:cSld>
     <p:spTree>
@@ -13921,7 +14499,7 @@
 </p:sld>
 </file>
 
-<file path=ppt/slides/slide25.xml><?xml version="1.0" encoding="utf-8"?>
+<file path=ppt/slides/slide26.xml><?xml version="1.0" encoding="utf-8"?>
 <p:sld xmlns:a="http://schemas.openxmlformats.org/drawingml/2006/main" xmlns:p="http://schemas.openxmlformats.org/presentationml/2006/main" xmlns:r="http://schemas.openxmlformats.org/officeDocument/2006/relationships">
   <p:cSld>
     <p:spTree>
@@ -14438,7 +15016,7 @@
 </p:sld>
 </file>
 
-<file path=ppt/slides/slide26.xml><?xml version="1.0" encoding="utf-8"?>
+<file path=ppt/slides/slide27.xml><?xml version="1.0" encoding="utf-8"?>
 <p:sld xmlns:a="http://schemas.openxmlformats.org/drawingml/2006/main" xmlns:p="http://schemas.openxmlformats.org/presentationml/2006/main" xmlns:r="http://schemas.openxmlformats.org/officeDocument/2006/relationships">
   <p:cSld>
     <p:spTree>

--- a/TBK_rd_gap_slides.pptx
+++ b/TBK_rd_gap_slides.pptx
@@ -358,7 +358,7 @@
           <a:p>
             <a:r>
               <a:rPr sz="1300"/>
-              <a:t>Operating profit bridge: ¥1.5bn (2.7%) -&gt; ¥4.1bn (7.1%)</a:t>
+              <a:t>Operating profit: 2.7% -&gt; 7.1% -&gt; 15.0% -&gt; 26.6% margin</a:t>
             </a:r>
           </a:p>
         </c:rich>
@@ -380,7 +380,7 @@
               <c:strCache>
                 <c:ptCount val="1"/>
                 <c:pt idx="0">
-                  <c:v>Operating profit bridge (¥M)</c:v>
+                  <c:v>Operating profit ¥bn</c:v>
                 </c:pt>
               </c:strCache>
             </c:strRef>
@@ -391,10 +391,18 @@
             </a:solidFill>
           </c:spPr>
           <c:dPt>
+            <c:idx val="0"/>
+            <c:spPr>
+              <a:solidFill>
+                <a:srgbClr val="7F1D1D"/>
+              </a:solidFill>
+            </c:spPr>
+          </c:dPt>
+          <c:dPt>
             <c:idx val="1"/>
             <c:spPr>
               <a:solidFill>
-                <a:srgbClr val="548235"/>
+                <a:srgbClr val="595959"/>
               </a:solidFill>
             </c:spPr>
           </c:dPt>
@@ -410,79 +418,64 @@
             <c:idx val="3"/>
             <c:spPr>
               <a:solidFill>
-                <a:srgbClr val="7F1D1D"/>
-              </a:solidFill>
-            </c:spPr>
-          </c:dPt>
-          <c:dPt>
-            <c:idx val="4"/>
-            <c:spPr>
-              <a:solidFill>
                 <a:srgbClr val="2E592E"/>
               </a:solidFill>
             </c:spPr>
           </c:dPt>
           <c:cat>
             <c:strRef>
-              <c:f>Sheet1!$A$2:$A$6</c:f>
+              <c:f>Sheet1!$A$2:$A$5</c:f>
               <c:strCache>
-                <c:ptCount val="5"/>
+                <c:ptCount val="4"/>
                 <c:pt idx="0">
                   <c:v>Actual
-FY3/26 OP</c:v>
+FY3/26</c:v>
                 </c:pt>
                 <c:pt idx="1">
-                  <c:v>+ SAW repriced
-to market</c:v>
+                  <c:v>FLOOR
+SAW-only reprice</c:v>
                 </c:pt>
                 <c:pt idx="2">
-                  <c:v>+ Factory
-structure</c:v>
+                  <c:v>BASE
++15% all, 500 heads</c:v>
                 </c:pt>
                 <c:pt idx="3">
-                  <c:v>- Competitive
-R&amp;D (4.7%)</c:v>
-                </c:pt>
-                <c:pt idx="4">
-                  <c:v>Pro-forma
-OP</c:v>
+                  <c:v>FULL premises
++30% all, 1,000 heads</c:v>
                 </c:pt>
               </c:strCache>
             </c:strRef>
           </c:cat>
           <c:val>
             <c:numRef>
-              <c:f>Sheet1!$B$2:$B$6</c:f>
+              <c:f>Sheet1!$B$2:$B$5</c:f>
               <c:numCache>
                 <c:formatCode>General</c:formatCode>
-                <c:ptCount val="5"/>
+                <c:ptCount val="4"/>
                 <c:pt idx="0">
-                  <c:v>1496</c:v>
+                  <c:v>1.5</c:v>
                 </c:pt>
                 <c:pt idx="1">
-                  <c:v>2585</c:v>
+                  <c:v>4.1</c:v>
                 </c:pt>
                 <c:pt idx="2">
-                  <c:v>1500</c:v>
+                  <c:v>9.4</c:v>
                 </c:pt>
                 <c:pt idx="3">
-                  <c:v>-1525</c:v>
-                </c:pt>
-                <c:pt idx="4">
-                  <c:v>4056</c:v>
+                  <c:v>18.7</c:v>
                 </c:pt>
               </c:numCache>
             </c:numRef>
           </c:val>
         </c:ser>
         <c:dLbls>
-          <c:numFmt formatCode="#,##0" sourceLinked="0"/>
+          <c:numFmt formatCode="0.0&quot;bn&quot;" sourceLinked="0"/>
           <c:txPr>
             <a:bodyPr/>
             <a:lstStyle/>
             <a:p>
               <a:pPr>
-                <a:defRPr sz="1000"/>
+                <a:defRPr sz="1100"/>
               </a:pPr>
             </a:p>
           </c:txPr>
@@ -10434,97 +10427,97 @@
                   <a:srgbClr val="1F4E78"/>
                 </a:solidFill>
               </a:rPr>
-              <a:t>The normalized P&amp;L (¥M)</a:t>
-            </a:r>
-          </a:p>
-          <a:p>
-            <a:pPr>
-              <a:spcBef>
-                <a:spcPts val="400"/>
-              </a:spcBef>
-            </a:pPr>
-            <a:r>
-              <a:rPr sz="1150">
-                <a:solidFill>
-                  <a:srgbClr val="202020"/>
-                </a:solidFill>
-              </a:rPr>
-              <a:t>Sales 57,341 (+SAW reprice)</a:t>
-            </a:r>
-          </a:p>
-          <a:p>
-            <a:pPr>
-              <a:spcBef>
-                <a:spcPts val="400"/>
-              </a:spcBef>
-            </a:pPr>
-            <a:r>
-              <a:rPr sz="1150">
-                <a:solidFill>
-                  <a:srgbClr val="202020"/>
-                </a:solidFill>
-              </a:rPr>
-              <a:t>Gross profit 10,910 = 19.0% (vs 12.5%)</a:t>
-            </a:r>
-          </a:p>
-          <a:p>
-            <a:pPr>
-              <a:spcBef>
-                <a:spcPts val="400"/>
-              </a:spcBef>
-            </a:pPr>
-            <a:r>
-              <a:rPr sz="1150">
-                <a:solidFill>
-                  <a:srgbClr val="202020"/>
-                </a:solidFill>
-              </a:rPr>
-              <a:t>R&amp;D 2,695 = 4.7% of sales (peer level, vs ~2.2%)</a:t>
-            </a:r>
-          </a:p>
-          <a:p>
-            <a:pPr>
-              <a:spcBef>
-                <a:spcPts val="400"/>
-              </a:spcBef>
-            </a:pPr>
-            <a:r>
-              <a:rPr sz="1150">
-                <a:solidFill>
-                  <a:srgbClr val="202020"/>
-                </a:solidFill>
-              </a:rPr>
-              <a:t>Operating profit 4,056 = 7.1% (vs 2.7%)</a:t>
-            </a:r>
-          </a:p>
-          <a:p>
-            <a:pPr>
-              <a:spcBef>
-                <a:spcPts val="400"/>
-              </a:spcBef>
-            </a:pPr>
-            <a:r>
-              <a:rPr sz="1150">
-                <a:solidFill>
-                  <a:srgbClr val="202020"/>
-                </a:solidFill>
-              </a:rPr>
-              <a:t>Net attributable ~2,853 = ¥90 EPS (vs -¥4.4)</a:t>
-            </a:r>
-          </a:p>
-          <a:p>
-            <a:pPr>
-              <a:spcBef>
-                <a:spcPts val="400"/>
-              </a:spcBef>
-            </a:pPr>
-            <a:r>
-              <a:rPr sz="1150">
-                <a:solidFill>
-                  <a:srgbClr val="202020"/>
-                </a:solidFill>
-              </a:rPr>
-              <a:t>~3.4x earnings at current market cap (~¥9.6bn)</a:t>
+              <a:t>BASE case (the investable one): ¥M</a:t>
+            </a:r>
+          </a:p>
+          <a:p>
+            <a:pPr>
+              <a:spcBef>
+                <a:spcPts val="400"/>
+              </a:spcBef>
+            </a:pPr>
+            <a:r>
+              <a:rPr sz="1100">
+                <a:solidFill>
+                  <a:srgbClr val="202020"/>
+                </a:solidFill>
+              </a:rPr>
+              <a:t>Sales 62,399 (+15% avg reprice on ¥51bn OEM book)</a:t>
+            </a:r>
+          </a:p>
+          <a:p>
+            <a:pPr>
+              <a:spcBef>
+                <a:spcPts val="400"/>
+              </a:spcBef>
+            </a:pPr>
+            <a:r>
+              <a:rPr sz="1100">
+                <a:solidFill>
+                  <a:srgbClr val="202020"/>
+                </a:solidFill>
+              </a:rPr>
+              <a:t>Gross profit 16,468 = 26.4% (peer top quartile)</a:t>
+            </a:r>
+          </a:p>
+          <a:p>
+            <a:pPr>
+              <a:spcBef>
+                <a:spcPts val="400"/>
+              </a:spcBef>
+            </a:pPr>
+            <a:r>
+              <a:rPr sz="1100">
+                <a:solidFill>
+                  <a:srgbClr val="202020"/>
+                </a:solidFill>
+              </a:rPr>
+              <a:t>R&amp;D 2,933 = 4.7% of sales — peer level, fully absorbed</a:t>
+            </a:r>
+          </a:p>
+          <a:p>
+            <a:pPr>
+              <a:spcBef>
+                <a:spcPts val="400"/>
+              </a:spcBef>
+            </a:pPr>
+            <a:r>
+              <a:rPr sz="1100">
+                <a:solidFill>
+                  <a:srgbClr val="202020"/>
+                </a:solidFill>
+              </a:rPr>
+              <a:t>Operating profit 9,377 = 15.0% — Knorr-Bremse-class</a:t>
+            </a:r>
+          </a:p>
+          <a:p>
+            <a:pPr>
+              <a:spcBef>
+                <a:spcPts val="400"/>
+              </a:spcBef>
+            </a:pPr>
+            <a:r>
+              <a:rPr sz="1100">
+                <a:solidFill>
+                  <a:srgbClr val="202020"/>
+                </a:solidFill>
+              </a:rPr>
+              <a:t>Net ~6,577 = ¥207 EPS -&gt; ~1.5x current market cap</a:t>
+            </a:r>
+          </a:p>
+          <a:p>
+            <a:pPr>
+              <a:spcBef>
+                <a:spcPts val="400"/>
+              </a:spcBef>
+            </a:pPr>
+            <a:r>
+              <a:rPr sz="1100">
+                <a:solidFill>
+                  <a:srgbClr val="202020"/>
+                </a:solidFill>
+              </a:rPr>
+              <a:t>Assumes OEM resistance/competition erodes HALF the stated gap</a:t>
             </a:r>
           </a:p>
         </p:txBody>
@@ -10564,7 +10557,7 @@
                   <a:srgbClr val="548235"/>
                 </a:solidFill>
               </a:rPr>
-              <a:t>Deliberately conservative — and coherent</a:t>
+              <a:t>FULL premises = the leakage meter</a:t>
             </a:r>
           </a:p>
           <a:p>
@@ -10579,7 +10572,7 @@
                   <a:srgbClr val="202020"/>
                 </a:solidFill>
               </a:rPr>
-              <a:t>Only SAW repriced; broader keiretsu book, aftermarket growth, e-pump/ADB revenue all EXCLUDED</a:t>
+              <a:t>All products +30% (management: Japanese customers pay ~30% below market) + 1,000 excess heads (company's own claim) @ ¥4M/head blended</a:t>
             </a:r>
           </a:p>
           <a:p>
@@ -10594,7 +10587,7 @@
                   <a:srgbClr val="202020"/>
                 </a:solidFill>
               </a:rPr>
-              <a:t>Factory gain ¥1.5bn vs FY3/26's proven ¥0.7bn cut + &gt;¥1bn/yr extraordinary charges normalizing</a:t>
+              <a:t>OP 18,661 = 26.6% — ABOVE every Western peer: read as the ANNUAL VALUE LEAKAGE (~¥17bn to customers + idle capacity), not a forecast</a:t>
             </a:r>
           </a:p>
           <a:p>
@@ -10609,22 +10602,7 @@
                   <a:srgbClr val="202020"/>
                 </a:solidFill>
               </a:rPr>
-              <a:t>Coherence: pro-forma OPM 7.1% = brake-peer average 7.2%; GM 19.0% inside the 15-22% peer band</a:t>
-            </a:r>
-          </a:p>
-          <a:p>
-            <a:pPr>
-              <a:spcBef>
-                <a:spcPts val="400"/>
-              </a:spcBef>
-            </a:pPr>
-            <a:r>
-              <a:rPr sz="1100">
-                <a:solidFill>
-                  <a:srgbClr val="202020"/>
-                </a:solidFill>
-              </a:rPr>
-              <a:t>MEMO (separate financing item): R&amp;D deficit repayment ~¥1.5bn/yr x 5 yrs; ADB capex ¥4.5-7.5bn one-off</a:t>
+              <a:t>MEMO (separate financing): R&amp;D deficit ~¥1.5bn/yr x5; ADB capex ¥4.5-7.5bn; restructuring cash ~¥4-6bn one-off</a:t>
             </a:r>
           </a:p>
         </p:txBody>
@@ -10658,7 +10636,7 @@
                   <a:srgbClr val="1F4E78"/>
                 </a:solidFill>
               </a:rPr>
-              <a:t>Read: nothing in this statement requires new products or new customers — it is TBK's existing book at honest prices, loaded factories, and peer-level R&amp;D. The competitive R&amp;D (¥2.7bn/yr) is fully absorbed and the company still earns peer-average margins. The deficit repayment and ADB line are financing/balance-sheet items — they determine how fast TBK gets here, not whether the destination exists.</a:t>
+              <a:t>Nothing here requires new products or customers — existing book, honest prices, loaded factories, peer-level R&amp;D. Even the BASE case self-funds the entire R&amp;D catch-up within ~18 months. Premises (30% discount, 1,000 heads) are management/first-hand information; the tiering makes the statement robust to how much of each is captured.</a:t>
             </a:r>
           </a:p>
         </p:txBody>

--- a/TBK_rd_gap_slides.pptx
+++ b/TBK_rd_gap_slides.pptx
@@ -358,7 +358,7 @@
           <a:p>
             <a:r>
               <a:rPr sz="1300"/>
-              <a:t>Operating profit: 2.7% -&gt; 7.1% -&gt; 15.0% -&gt; 26.6% margin</a:t>
+              <a:t>Operating margin by phase: 2.7% -&gt; ~10% (phase 1) -&gt; 15% -&gt; 26.6% ceiling</a:t>
             </a:r>
           </a:p>
         </c:rich>
@@ -380,7 +380,7 @@
               <c:strCache>
                 <c:ptCount val="1"/>
                 <c:pt idx="0">
-                  <c:v>Operating profit ¥bn</c:v>
+                  <c:v>Operating margin %</c:v>
                 </c:pt>
               </c:strCache>
             </c:strRef>
@@ -402,7 +402,7 @@
             <c:idx val="1"/>
             <c:spPr>
               <a:solidFill>
-                <a:srgbClr val="595959"/>
+                <a:srgbClr val="548235"/>
               </a:solidFill>
             </c:spPr>
           </c:dPt>
@@ -410,7 +410,7 @@
             <c:idx val="2"/>
             <c:spPr>
               <a:solidFill>
-                <a:srgbClr val="548235"/>
+                <a:srgbClr val="2E592E"/>
               </a:solidFill>
             </c:spPr>
           </c:dPt>
@@ -418,58 +418,62 @@
             <c:idx val="3"/>
             <c:spPr>
               <a:solidFill>
-                <a:srgbClr val="2E592E"/>
+                <a:srgbClr val="595959"/>
               </a:solidFill>
             </c:spPr>
           </c:dPt>
           <c:cat>
             <c:strRef>
-              <c:f>Sheet1!$A$2:$A$5</c:f>
+              <c:f>Sheet1!$A$2:$A$6</c:f>
               <c:strCache>
-                <c:ptCount val="4"/>
+                <c:ptCount val="5"/>
                 <c:pt idx="0">
                   <c:v>Actual
 FY3/26</c:v>
                 </c:pt>
                 <c:pt idx="1">
-                  <c:v>FLOOR
-SAW-only reprice</c:v>
+                  <c:v>PHASE 1 (realistic)
++9% reprice, ~450 heads</c:v>
                 </c:pt>
                 <c:pt idx="2">
-                  <c:v>BASE
-+15% all, 500 heads</c:v>
+                  <c:v>PHASE 2 (full realization)
++15%, 500 heads</c:v>
                 </c:pt>
                 <c:pt idx="3">
                   <c:v>FULL premises
-+30% all, 1,000 heads</c:v>
+(leakage meter)</c:v>
+                </c:pt>
+                <c:pt idx="4">
+                  <c:v>Refs: Concentric peak 22%
+Haldex US-only ~30%</c:v>
                 </c:pt>
               </c:strCache>
             </c:strRef>
           </c:cat>
           <c:val>
             <c:numRef>
-              <c:f>Sheet1!$B$2:$B$5</c:f>
+              <c:f>Sheet1!$B$2:$B$6</c:f>
               <c:numCache>
                 <c:formatCode>General</c:formatCode>
-                <c:ptCount val="4"/>
+                <c:ptCount val="5"/>
                 <c:pt idx="0">
-                  <c:v>1.5</c:v>
+                  <c:v>2.7</c:v>
                 </c:pt>
                 <c:pt idx="1">
-                  <c:v>4.1</c:v>
+                  <c:v>10.6</c:v>
                 </c:pt>
                 <c:pt idx="2">
-                  <c:v>9.4</c:v>
+                  <c:v>15.0</c:v>
                 </c:pt>
                 <c:pt idx="3">
-                  <c:v>18.7</c:v>
+                  <c:v>26.6</c:v>
                 </c:pt>
               </c:numCache>
             </c:numRef>
           </c:val>
         </c:ser>
         <c:dLbls>
-          <c:numFmt formatCode="0.0&quot;bn&quot;" sourceLinked="0"/>
+          <c:numFmt formatCode="0.0&quot;%&quot;" sourceLinked="0"/>
           <c:txPr>
             <a:bodyPr/>
             <a:lstStyle/>
@@ -505,7 +509,7 @@
           <a:lstStyle/>
           <a:p>
             <a:pPr>
-              <a:defRPr sz="900"/>
+              <a:defRPr sz="800"/>
             </a:pPr>
           </a:p>
         </c:txPr>
@@ -10427,7 +10431,7 @@
                   <a:srgbClr val="1F4E78"/>
                 </a:solidFill>
               </a:rPr>
-              <a:t>BASE case (the investable one): ¥M</a:t>
+              <a:t>PHASE 1 — the realistic target: ~10% OPM</a:t>
             </a:r>
           </a:p>
           <a:p>
@@ -10442,7 +10446,7 @@
                   <a:srgbClr val="202020"/>
                 </a:solidFill>
               </a:rPr>
-              <a:t>Sales 62,399 (+15% avg reprice on ¥51bn OEM book)</a:t>
+              <a:t>Sales 59,342 | GP 13,211 (22.3%) | R&amp;D 2,789 at 4.7% | OP 6,263 (10.6%) | Net 4,398 = ¥138 EPS (~2.2x mkt cap)</a:t>
             </a:r>
           </a:p>
           <a:p>
@@ -10457,7 +10461,7 @@
                   <a:srgbClr val="202020"/>
                 </a:solidFill>
               </a:rPr>
-              <a:t>Gross profit 16,468 = 26.4% (peer top quartile)</a:t>
+              <a:t>Captures only ~1/3 of the stated pricing gap + ~45% of excess heads — via pruning, renewal-cycle repricing, aftermarket/non-keiretsu mix, first consolidations</a:t>
             </a:r>
           </a:p>
           <a:p>
@@ -10472,52 +10476,7 @@
                   <a:srgbClr val="202020"/>
                 </a:solidFill>
               </a:rPr>
-              <a:t>R&amp;D 2,933 = 4.7% of sales — peer level, fully absorbed</a:t>
-            </a:r>
-          </a:p>
-          <a:p>
-            <a:pPr>
-              <a:spcBef>
-                <a:spcPts val="400"/>
-              </a:spcBef>
-            </a:pPr>
-            <a:r>
-              <a:rPr sz="1100">
-                <a:solidFill>
-                  <a:srgbClr val="202020"/>
-                </a:solidFill>
-              </a:rPr>
-              <a:t>Operating profit 9,377 = 15.0% — Knorr-Bremse-class</a:t>
-            </a:r>
-          </a:p>
-          <a:p>
-            <a:pPr>
-              <a:spcBef>
-                <a:spcPts val="400"/>
-              </a:spcBef>
-            </a:pPr>
-            <a:r>
-              <a:rPr sz="1100">
-                <a:solidFill>
-                  <a:srgbClr val="202020"/>
-                </a:solidFill>
-              </a:rPr>
-              <a:t>Net ~6,577 = ¥207 EPS -&gt; ~1.5x current market cap</a:t>
-            </a:r>
-          </a:p>
-          <a:p>
-            <a:pPr>
-              <a:spcBef>
-                <a:spcPts val="400"/>
-              </a:spcBef>
-            </a:pPr>
-            <a:r>
-              <a:rPr sz="1100">
-                <a:solidFill>
-                  <a:srgbClr val="202020"/>
-                </a:solidFill>
-              </a:rPr>
-              <a:t>Assumes OEM resistance/competition erodes HALF the stated gap</a:t>
+              <a:t>Funds the entire R&amp;D program (incl. deficit memo) in ~18-24 months</a:t>
             </a:r>
           </a:p>
         </p:txBody>
@@ -10557,7 +10516,7 @@
                   <a:srgbClr val="548235"/>
                 </a:solidFill>
               </a:rPr>
-              <a:t>FULL premises = the leakage meter</a:t>
+              <a:t>Why not more, at first — operator calibration</a:t>
             </a:r>
           </a:p>
           <a:p>
@@ -10572,7 +10531,7 @@
                   <a:srgbClr val="202020"/>
                 </a:solidFill>
               </a:rPr>
-              <a:t>All products +30% (management: Japanese customers pay ~30% below market) + 1,000 excess heads (company's own claim) @ ¥4M/head blended</a:t>
+              <a:t>Concentric peaked at ~22% OPM — on best-in-class FULL price realization, a discipline built over years</a:t>
             </a:r>
           </a:p>
           <a:p>
@@ -10587,7 +10546,7 @@
                   <a:srgbClr val="202020"/>
                 </a:solidFill>
               </a:rPr>
-              <a:t>OP 18,661 = 26.6% — ABOVE every Western peer: read as the ANNUAL VALUE LEAKAGE (~¥17bn to customers + idle capacity), not a forecast</a:t>
+              <a:t>Haldex could have reached ~30% by shedding Europe for the US — portfolio focus is the second lever</a:t>
             </a:r>
           </a:p>
           <a:p>
@@ -10602,7 +10561,7 @@
                   <a:srgbClr val="202020"/>
                 </a:solidFill>
               </a:rPr>
-              <a:t>MEMO (separate financing): R&amp;D deficit ~¥1.5bn/yr x5; ADB capex ¥4.5-7.5bn; restructuring cash ~¥4-6bn one-off</a:t>
+              <a:t>Above ~10% in phase 1 is difficult: keiretsu contracts reprice at renewal, factories close on multi-year clocks. Phase 2 (15%) = Concentric-grade realization + grown aftermarket. FULL premises (26.6%) = leakage meter, not a plan</a:t>
             </a:r>
           </a:p>
         </p:txBody>
@@ -10636,7 +10595,7 @@
                   <a:srgbClr val="1F4E78"/>
                 </a:solidFill>
               </a:rPr>
-              <a:t>Nothing here requires new products or customers — existing book, honest prices, loaded factories, peer-level R&amp;D. Even the BASE case self-funds the entire R&amp;D catch-up within ~18 months. Premises (30% discount, 1,000 heads) are management/first-hand information; the tiering makes the statement robust to how much of each is captured.</a:t>
+              <a:t>Nothing here requires new products or customers — existing book, honest prices, loaded factories, peer-level R&amp;D (4.7%) absorbed in every phase. MEMO (separate financing): R&amp;D deficit ~¥1.5bn/yr x5, ADB capex ¥4.5-7.5bn, restructuring cash ~¥2-3bn. Premises are management/first-hand information; phasing reflects operator experience at Concentric and Haldex.</a:t>
             </a:r>
           </a:p>
         </p:txBody>

--- a/TBK_rd_gap_slides.pptx
+++ b/TBK_rd_gap_slides.pptx
@@ -358,6 +358,330 @@
           <a:p>
             <a:r>
               <a:rPr sz="1300"/>
+              <a:t>Contribution margin by pump product (%)</a:t>
+            </a:r>
+          </a:p>
+        </c:rich>
+      </c:tx>
+      <c:layout/>
+      <c:overlay val="0"/>
+    </c:title>
+    <c:autoTitleDeleted val="0"/>
+    <c:plotArea>
+      <c:barChart>
+        <c:barDir val="col"/>
+        <c:grouping val="clustered"/>
+        <c:ser>
+          <c:idx val="0"/>
+          <c:order val="0"/>
+          <c:tx>
+            <c:strRef>
+              <c:f>Sheet1!$B$1</c:f>
+              <c:strCache>
+                <c:ptCount val="1"/>
+                <c:pt idx="0">
+                  <c:v>TBK (Japan)</c:v>
+                </c:pt>
+              </c:strCache>
+            </c:strRef>
+          </c:tx>
+          <c:spPr>
+            <a:solidFill>
+              <a:srgbClr val="7F1D1D"/>
+            </a:solidFill>
+          </c:spPr>
+          <c:cat>
+            <c:strRef>
+              <c:f>Sheet1!$A$2:$A$7</c:f>
+              <c:strCache>
+                <c:ptCount val="6"/>
+                <c:pt idx="0">
+                  <c:v>Water pumps</c:v>
+                </c:pt>
+                <c:pt idx="1">
+                  <c:v>Oil pumps</c:v>
+                </c:pt>
+                <c:pt idx="2">
+                  <c:v>Semi-variable
+water pump</c:v>
+                </c:pt>
+                <c:pt idx="3">
+                  <c:v>Electric
+water pump</c:v>
+                </c:pt>
+                <c:pt idx="4">
+                  <c:v>Electric
+oil pump</c:v>
+                </c:pt>
+                <c:pt idx="5">
+                  <c:v>Fuel / transm.
+pumps</c:v>
+                </c:pt>
+              </c:strCache>
+            </c:strRef>
+          </c:cat>
+          <c:val>
+            <c:numRef>
+              <c:f>Sheet1!$B$2:$B$7</c:f>
+              <c:numCache>
+                <c:formatCode>General</c:formatCode>
+                <c:ptCount val="6"/>
+                <c:pt idx="0">
+                  <c:v>18.5</c:v>
+                </c:pt>
+                <c:pt idx="1">
+                  <c:v>26.0</c:v>
+                </c:pt>
+              </c:numCache>
+            </c:numRef>
+          </c:val>
+        </c:ser>
+        <c:ser>
+          <c:idx val="1"/>
+          <c:order val="1"/>
+          <c:tx>
+            <c:strRef>
+              <c:f>Sheet1!$C$1</c:f>
+              <c:strCache>
+                <c:ptCount val="1"/>
+                <c:pt idx="0">
+                  <c:v>TBKK (Thailand)</c:v>
+                </c:pt>
+              </c:strCache>
+            </c:strRef>
+          </c:tx>
+          <c:spPr>
+            <a:solidFill>
+              <a:srgbClr val="C06C2C"/>
+            </a:solidFill>
+          </c:spPr>
+          <c:cat>
+            <c:strRef>
+              <c:f>Sheet1!$A$2:$A$7</c:f>
+              <c:strCache>
+                <c:ptCount val="6"/>
+                <c:pt idx="0">
+                  <c:v>Water pumps</c:v>
+                </c:pt>
+                <c:pt idx="1">
+                  <c:v>Oil pumps</c:v>
+                </c:pt>
+                <c:pt idx="2">
+                  <c:v>Semi-variable
+water pump</c:v>
+                </c:pt>
+                <c:pt idx="3">
+                  <c:v>Electric
+water pump</c:v>
+                </c:pt>
+                <c:pt idx="4">
+                  <c:v>Electric
+oil pump</c:v>
+                </c:pt>
+                <c:pt idx="5">
+                  <c:v>Fuel / transm.
+pumps</c:v>
+                </c:pt>
+              </c:strCache>
+            </c:strRef>
+          </c:cat>
+          <c:val>
+            <c:numRef>
+              <c:f>Sheet1!$C$2:$C$7</c:f>
+              <c:numCache>
+                <c:formatCode>General</c:formatCode>
+                <c:ptCount val="6"/>
+                <c:pt idx="0">
+                  <c:v>19.5</c:v>
+                </c:pt>
+                <c:pt idx="1">
+                  <c:v>22.6</c:v>
+                </c:pt>
+              </c:numCache>
+            </c:numRef>
+          </c:val>
+        </c:ser>
+        <c:ser>
+          <c:idx val="2"/>
+          <c:order val="2"/>
+          <c:tx>
+            <c:strRef>
+              <c:f>Sheet1!$D$1</c:f>
+              <c:strCache>
+                <c:ptCount val="1"/>
+                <c:pt idx="0">
+                  <c:v>Concentric</c:v>
+                </c:pt>
+              </c:strCache>
+            </c:strRef>
+          </c:tx>
+          <c:spPr>
+            <a:solidFill>
+              <a:srgbClr val="548235"/>
+            </a:solidFill>
+          </c:spPr>
+          <c:cat>
+            <c:strRef>
+              <c:f>Sheet1!$A$2:$A$7</c:f>
+              <c:strCache>
+                <c:ptCount val="6"/>
+                <c:pt idx="0">
+                  <c:v>Water pumps</c:v>
+                </c:pt>
+                <c:pt idx="1">
+                  <c:v>Oil pumps</c:v>
+                </c:pt>
+                <c:pt idx="2">
+                  <c:v>Semi-variable
+water pump</c:v>
+                </c:pt>
+                <c:pt idx="3">
+                  <c:v>Electric
+water pump</c:v>
+                </c:pt>
+                <c:pt idx="4">
+                  <c:v>Electric
+oil pump</c:v>
+                </c:pt>
+                <c:pt idx="5">
+                  <c:v>Fuel / transm.
+pumps</c:v>
+                </c:pt>
+              </c:strCache>
+            </c:strRef>
+          </c:cat>
+          <c:val>
+            <c:numRef>
+              <c:f>Sheet1!$D$2:$D$7</c:f>
+              <c:numCache>
+                <c:formatCode>General</c:formatCode>
+                <c:ptCount val="6"/>
+                <c:pt idx="0">
+                  <c:v>38.2</c:v>
+                </c:pt>
+                <c:pt idx="1">
+                  <c:v>42.9</c:v>
+                </c:pt>
+                <c:pt idx="2">
+                  <c:v>54.1</c:v>
+                </c:pt>
+                <c:pt idx="3">
+                  <c:v>54.8</c:v>
+                </c:pt>
+                <c:pt idx="4">
+                  <c:v>40.5</c:v>
+                </c:pt>
+                <c:pt idx="5">
+                  <c:v>55.6</c:v>
+                </c:pt>
+              </c:numCache>
+            </c:numRef>
+          </c:val>
+        </c:ser>
+        <c:dLbls>
+          <c:numFmt formatCode="0.0&quot;%&quot;" sourceLinked="0"/>
+          <c:txPr>
+            <a:bodyPr/>
+            <a:lstStyle/>
+            <a:p>
+              <a:pPr>
+                <a:defRPr sz="1000"/>
+              </a:pPr>
+            </a:p>
+          </c:txPr>
+          <c:showLegendKey val="0"/>
+          <c:showVal val="1"/>
+          <c:showCatName val="0"/>
+          <c:showSerName val="0"/>
+          <c:showPercent val="0"/>
+          <c:showBubbleSize val="0"/>
+          <c:showLeaderLines val="1"/>
+        </c:dLbls>
+        <c:axId val="-2068027336"/>
+        <c:axId val="-2113994440"/>
+      </c:barChart>
+      <c:catAx>
+        <c:axId val="-2068027336"/>
+        <c:scaling>
+          <c:orientation val="minMax"/>
+        </c:scaling>
+        <c:delete val="0"/>
+        <c:axPos val="b"/>
+        <c:majorTickMark val="out"/>
+        <c:minorTickMark val="none"/>
+        <c:tickLblPos val="nextTo"/>
+        <c:txPr>
+          <a:bodyPr/>
+          <a:lstStyle/>
+          <a:p>
+            <a:pPr>
+              <a:defRPr sz="900"/>
+            </a:pPr>
+          </a:p>
+        </c:txPr>
+        <c:crossAx val="-2113994440"/>
+        <c:crosses val="autoZero"/>
+        <c:auto val="1"/>
+        <c:lblAlgn val="ctr"/>
+        <c:lblOffset val="100"/>
+        <c:noMultiLvlLbl val="0"/>
+      </c:catAx>
+      <c:valAx>
+        <c:axId val="-2113994440"/>
+        <c:scaling/>
+        <c:delete val="0"/>
+        <c:axPos val="l"/>
+        <c:majorGridlines/>
+        <c:majorTickMark val="out"/>
+        <c:minorTickMark val="none"/>
+        <c:tickLblPos val="nextTo"/>
+        <c:crossAx val="-2068027336"/>
+        <c:crosses val="autoZero"/>
+      </c:valAx>
+    </c:plotArea>
+    <c:legend>
+      <c:legendPos val="b"/>
+      <c:overlay val="0"/>
+      <c:txPr>
+        <a:bodyPr/>
+        <a:lstStyle/>
+        <a:p>
+          <a:pPr>
+            <a:defRPr sz="1100"/>
+          </a:pPr>
+        </a:p>
+      </c:txPr>
+    </c:legend>
+    <c:dispBlanksAs val="gap"/>
+  </c:chart>
+  <c:txPr>
+    <a:bodyPr/>
+    <a:lstStyle/>
+    <a:p>
+      <a:pPr>
+        <a:defRPr sz="1800"/>
+      </a:pPr>
+      <a:endParaRPr lang="en-US"/>
+    </a:p>
+  </c:txPr>
+  <c:externalData r:id="rId1">
+    <c:autoUpdate val="0"/>
+  </c:externalData>
+</c:chartSpace>
+</file>
+
+<file path=ppt/charts/chart11.xml><?xml version="1.0" encoding="utf-8"?>
+<c:chartSpace xmlns:c="http://schemas.openxmlformats.org/drawingml/2006/chart" xmlns:a="http://schemas.openxmlformats.org/drawingml/2006/main" xmlns:r="http://schemas.openxmlformats.org/officeDocument/2006/relationships">
+  <c:date1904 val="0"/>
+  <c:chart>
+    <c:title>
+      <c:tx>
+        <c:rich>
+          <a:bodyPr/>
+          <a:lstStyle/>
+          <a:p>
+            <a:r>
+              <a:rPr sz="1300"/>
               <a:t>Operating margin by phase: 2.7% -&gt; ~10% (phase 1) -&gt; 15% -&gt; 26.6% ceiling</a:t>
             </a:r>
           </a:p>
@@ -424,9 +748,9 @@
           </c:dPt>
           <c:cat>
             <c:strRef>
-              <c:f>Sheet1!$A$2:$A$6</c:f>
+              <c:f>Sheet1!$A$2:$A$5</c:f>
               <c:strCache>
-                <c:ptCount val="5"/>
+                <c:ptCount val="4"/>
                 <c:pt idx="0">
                   <c:v>Actual
 FY3/26</c:v>
@@ -442,20 +766,16 @@
                 <c:pt idx="3">
                   <c:v>FULL premises
 (leakage meter)</c:v>
-                </c:pt>
-                <c:pt idx="4">
-                  <c:v>Refs: Concentric peak 22%
-Haldex US-only ~30%</c:v>
                 </c:pt>
               </c:strCache>
             </c:strRef>
           </c:cat>
           <c:val>
             <c:numRef>
-              <c:f>Sheet1!$B$2:$B$6</c:f>
+              <c:f>Sheet1!$B$2:$B$5</c:f>
               <c:numCache>
                 <c:formatCode>General</c:formatCode>
-                <c:ptCount val="5"/>
+                <c:ptCount val="4"/>
                 <c:pt idx="0">
                   <c:v>2.7</c:v>
                 </c:pt>
@@ -533,330 +853,6 @@
         <c:crosses val="autoZero"/>
       </c:valAx>
     </c:plotArea>
-    <c:dispBlanksAs val="gap"/>
-  </c:chart>
-  <c:txPr>
-    <a:bodyPr/>
-    <a:lstStyle/>
-    <a:p>
-      <a:pPr>
-        <a:defRPr sz="1800"/>
-      </a:pPr>
-      <a:endParaRPr lang="en-US"/>
-    </a:p>
-  </c:txPr>
-  <c:externalData r:id="rId1">
-    <c:autoUpdate val="0"/>
-  </c:externalData>
-</c:chartSpace>
-</file>
-
-<file path=ppt/charts/chart11.xml><?xml version="1.0" encoding="utf-8"?>
-<c:chartSpace xmlns:c="http://schemas.openxmlformats.org/drawingml/2006/chart" xmlns:a="http://schemas.openxmlformats.org/drawingml/2006/main" xmlns:r="http://schemas.openxmlformats.org/officeDocument/2006/relationships">
-  <c:date1904 val="0"/>
-  <c:chart>
-    <c:title>
-      <c:tx>
-        <c:rich>
-          <a:bodyPr/>
-          <a:lstStyle/>
-          <a:p>
-            <a:r>
-              <a:rPr sz="1300"/>
-              <a:t>Contribution margin by pump product (%)</a:t>
-            </a:r>
-          </a:p>
-        </c:rich>
-      </c:tx>
-      <c:layout/>
-      <c:overlay val="0"/>
-    </c:title>
-    <c:autoTitleDeleted val="0"/>
-    <c:plotArea>
-      <c:barChart>
-        <c:barDir val="col"/>
-        <c:grouping val="clustered"/>
-        <c:ser>
-          <c:idx val="0"/>
-          <c:order val="0"/>
-          <c:tx>
-            <c:strRef>
-              <c:f>Sheet1!$B$1</c:f>
-              <c:strCache>
-                <c:ptCount val="1"/>
-                <c:pt idx="0">
-                  <c:v>TBK (Japan)</c:v>
-                </c:pt>
-              </c:strCache>
-            </c:strRef>
-          </c:tx>
-          <c:spPr>
-            <a:solidFill>
-              <a:srgbClr val="7F1D1D"/>
-            </a:solidFill>
-          </c:spPr>
-          <c:cat>
-            <c:strRef>
-              <c:f>Sheet1!$A$2:$A$7</c:f>
-              <c:strCache>
-                <c:ptCount val="6"/>
-                <c:pt idx="0">
-                  <c:v>Water pumps</c:v>
-                </c:pt>
-                <c:pt idx="1">
-                  <c:v>Oil pumps</c:v>
-                </c:pt>
-                <c:pt idx="2">
-                  <c:v>Semi-variable
-water pump</c:v>
-                </c:pt>
-                <c:pt idx="3">
-                  <c:v>Electric
-water pump</c:v>
-                </c:pt>
-                <c:pt idx="4">
-                  <c:v>Electric
-oil pump</c:v>
-                </c:pt>
-                <c:pt idx="5">
-                  <c:v>Fuel / transm.
-pumps</c:v>
-                </c:pt>
-              </c:strCache>
-            </c:strRef>
-          </c:cat>
-          <c:val>
-            <c:numRef>
-              <c:f>Sheet1!$B$2:$B$7</c:f>
-              <c:numCache>
-                <c:formatCode>General</c:formatCode>
-                <c:ptCount val="6"/>
-                <c:pt idx="0">
-                  <c:v>18.5</c:v>
-                </c:pt>
-                <c:pt idx="1">
-                  <c:v>26.0</c:v>
-                </c:pt>
-              </c:numCache>
-            </c:numRef>
-          </c:val>
-        </c:ser>
-        <c:ser>
-          <c:idx val="1"/>
-          <c:order val="1"/>
-          <c:tx>
-            <c:strRef>
-              <c:f>Sheet1!$C$1</c:f>
-              <c:strCache>
-                <c:ptCount val="1"/>
-                <c:pt idx="0">
-                  <c:v>TBKK (Thailand)</c:v>
-                </c:pt>
-              </c:strCache>
-            </c:strRef>
-          </c:tx>
-          <c:spPr>
-            <a:solidFill>
-              <a:srgbClr val="C06C2C"/>
-            </a:solidFill>
-          </c:spPr>
-          <c:cat>
-            <c:strRef>
-              <c:f>Sheet1!$A$2:$A$7</c:f>
-              <c:strCache>
-                <c:ptCount val="6"/>
-                <c:pt idx="0">
-                  <c:v>Water pumps</c:v>
-                </c:pt>
-                <c:pt idx="1">
-                  <c:v>Oil pumps</c:v>
-                </c:pt>
-                <c:pt idx="2">
-                  <c:v>Semi-variable
-water pump</c:v>
-                </c:pt>
-                <c:pt idx="3">
-                  <c:v>Electric
-water pump</c:v>
-                </c:pt>
-                <c:pt idx="4">
-                  <c:v>Electric
-oil pump</c:v>
-                </c:pt>
-                <c:pt idx="5">
-                  <c:v>Fuel / transm.
-pumps</c:v>
-                </c:pt>
-              </c:strCache>
-            </c:strRef>
-          </c:cat>
-          <c:val>
-            <c:numRef>
-              <c:f>Sheet1!$C$2:$C$7</c:f>
-              <c:numCache>
-                <c:formatCode>General</c:formatCode>
-                <c:ptCount val="6"/>
-                <c:pt idx="0">
-                  <c:v>19.5</c:v>
-                </c:pt>
-                <c:pt idx="1">
-                  <c:v>22.6</c:v>
-                </c:pt>
-              </c:numCache>
-            </c:numRef>
-          </c:val>
-        </c:ser>
-        <c:ser>
-          <c:idx val="2"/>
-          <c:order val="2"/>
-          <c:tx>
-            <c:strRef>
-              <c:f>Sheet1!$D$1</c:f>
-              <c:strCache>
-                <c:ptCount val="1"/>
-                <c:pt idx="0">
-                  <c:v>Concentric</c:v>
-                </c:pt>
-              </c:strCache>
-            </c:strRef>
-          </c:tx>
-          <c:spPr>
-            <a:solidFill>
-              <a:srgbClr val="548235"/>
-            </a:solidFill>
-          </c:spPr>
-          <c:cat>
-            <c:strRef>
-              <c:f>Sheet1!$A$2:$A$7</c:f>
-              <c:strCache>
-                <c:ptCount val="6"/>
-                <c:pt idx="0">
-                  <c:v>Water pumps</c:v>
-                </c:pt>
-                <c:pt idx="1">
-                  <c:v>Oil pumps</c:v>
-                </c:pt>
-                <c:pt idx="2">
-                  <c:v>Semi-variable
-water pump</c:v>
-                </c:pt>
-                <c:pt idx="3">
-                  <c:v>Electric
-water pump</c:v>
-                </c:pt>
-                <c:pt idx="4">
-                  <c:v>Electric
-oil pump</c:v>
-                </c:pt>
-                <c:pt idx="5">
-                  <c:v>Fuel / transm.
-pumps</c:v>
-                </c:pt>
-              </c:strCache>
-            </c:strRef>
-          </c:cat>
-          <c:val>
-            <c:numRef>
-              <c:f>Sheet1!$D$2:$D$7</c:f>
-              <c:numCache>
-                <c:formatCode>General</c:formatCode>
-                <c:ptCount val="6"/>
-                <c:pt idx="0">
-                  <c:v>38.2</c:v>
-                </c:pt>
-                <c:pt idx="1">
-                  <c:v>42.9</c:v>
-                </c:pt>
-                <c:pt idx="2">
-                  <c:v>54.1</c:v>
-                </c:pt>
-                <c:pt idx="3">
-                  <c:v>54.8</c:v>
-                </c:pt>
-                <c:pt idx="4">
-                  <c:v>40.5</c:v>
-                </c:pt>
-                <c:pt idx="5">
-                  <c:v>55.6</c:v>
-                </c:pt>
-              </c:numCache>
-            </c:numRef>
-          </c:val>
-        </c:ser>
-        <c:dLbls>
-          <c:numFmt formatCode="0.0&quot;%&quot;" sourceLinked="0"/>
-          <c:txPr>
-            <a:bodyPr/>
-            <a:lstStyle/>
-            <a:p>
-              <a:pPr>
-                <a:defRPr sz="1000"/>
-              </a:pPr>
-            </a:p>
-          </c:txPr>
-          <c:showLegendKey val="0"/>
-          <c:showVal val="1"/>
-          <c:showCatName val="0"/>
-          <c:showSerName val="0"/>
-          <c:showPercent val="0"/>
-          <c:showBubbleSize val="0"/>
-          <c:showLeaderLines val="1"/>
-        </c:dLbls>
-        <c:axId val="-2068027336"/>
-        <c:axId val="-2113994440"/>
-      </c:barChart>
-      <c:catAx>
-        <c:axId val="-2068027336"/>
-        <c:scaling>
-          <c:orientation val="minMax"/>
-        </c:scaling>
-        <c:delete val="0"/>
-        <c:axPos val="b"/>
-        <c:majorTickMark val="out"/>
-        <c:minorTickMark val="none"/>
-        <c:tickLblPos val="nextTo"/>
-        <c:txPr>
-          <a:bodyPr/>
-          <a:lstStyle/>
-          <a:p>
-            <a:pPr>
-              <a:defRPr sz="900"/>
-            </a:pPr>
-          </a:p>
-        </c:txPr>
-        <c:crossAx val="-2113994440"/>
-        <c:crosses val="autoZero"/>
-        <c:auto val="1"/>
-        <c:lblAlgn val="ctr"/>
-        <c:lblOffset val="100"/>
-        <c:noMultiLvlLbl val="0"/>
-      </c:catAx>
-      <c:valAx>
-        <c:axId val="-2113994440"/>
-        <c:scaling/>
-        <c:delete val="0"/>
-        <c:axPos val="l"/>
-        <c:majorGridlines/>
-        <c:majorTickMark val="out"/>
-        <c:minorTickMark val="none"/>
-        <c:tickLblPos val="nextTo"/>
-        <c:crossAx val="-2068027336"/>
-        <c:crosses val="autoZero"/>
-      </c:valAx>
-    </c:plotArea>
-    <c:legend>
-      <c:legendPos val="b"/>
-      <c:overlay val="0"/>
-      <c:txPr>
-        <a:bodyPr/>
-        <a:lstStyle/>
-        <a:p>
-          <a:pPr>
-            <a:defRPr sz="1100"/>
-          </a:pPr>
-        </a:p>
-      </c:txPr>
-    </c:legend>
     <c:dispBlanksAs val="gap"/>
   </c:chart>
   <c:txPr>
@@ -2135,7 +2131,7 @@
               <c:strCache>
                 <c:ptCount val="1"/>
                 <c:pt idx="0">
-                  <c:v>Peer avg (6 scored)</c:v>
+                  <c:v>Peer average (5 peers)</c:v>
                 </c:pt>
               </c:strCache>
             </c:strRef>
@@ -2192,34 +2188,34 @@
                 <c:formatCode>General</c:formatCode>
                 <c:ptCount val="10"/>
                 <c:pt idx="0">
-                  <c:v>7.17</c:v>
+                  <c:v>7.1</c:v>
                 </c:pt>
                 <c:pt idx="1">
-                  <c:v>5.92</c:v>
+                  <c:v>5.9</c:v>
                 </c:pt>
                 <c:pt idx="2">
-                  <c:v>6.58</c:v>
+                  <c:v>6.3</c:v>
                 </c:pt>
                 <c:pt idx="3">
-                  <c:v>2.67</c:v>
+                  <c:v>2.8</c:v>
                 </c:pt>
                 <c:pt idx="4">
-                  <c:v>4.75</c:v>
+                  <c:v>5.1</c:v>
                 </c:pt>
                 <c:pt idx="5">
-                  <c:v>4.17</c:v>
+                  <c:v>4.3</c:v>
                 </c:pt>
                 <c:pt idx="6">
-                  <c:v>6.75</c:v>
+                  <c:v>6.7</c:v>
                 </c:pt>
                 <c:pt idx="7">
-                  <c:v>3.75</c:v>
+                  <c:v>4.1</c:v>
                 </c:pt>
                 <c:pt idx="8">
-                  <c:v>5.08</c:v>
+                  <c:v>5.5</c:v>
                 </c:pt>
                 <c:pt idx="9">
-                  <c:v>4.5</c:v>
+                  <c:v>4.6</c:v>
                 </c:pt>
               </c:numCache>
             </c:numRef>
@@ -5107,12 +5103,12 @@
 (price / 0.7)</c:v>
                 </c:pt>
                 <c:pt idx="3">
-                  <c:v>Haldex core products
-(ABA/ABS/air, ref.)</c:v>
+                  <c:v>Haldex ABA/ABS
+avg (ref.)</c:v>
                 </c:pt>
                 <c:pt idx="4">
                   <c:v>Concentric conv.
-pumps (ref.)</c:v>
+pumps avg (ref.)</c:v>
                 </c:pt>
               </c:strCache>
             </c:strRef>
@@ -5133,7 +5129,7 @@
                   <c:v>43.6</c:v>
                 </c:pt>
                 <c:pt idx="3">
-                  <c:v>43.0</c:v>
+                  <c:v>42.4</c:v>
                 </c:pt>
                 <c:pt idx="4">
                   <c:v>40.5</c:v>
@@ -8325,7 +8321,7 @@
                   <a:srgbClr val="A8B8C8"/>
                 </a:solidFill>
               </a:rPr>
-              <a:t>Based on peer-reviewed and adversarially verified research, competitor filings (incl. Concentric AR2023), and TBK's audited FY3/2026 results  |  June 2026</a:t>
+              <a:t>Based on peer-reviewed and adversarially verified research, competitor filings, TBK's audited FY3/2026 results, and company-internal product economics (TBK, Concentric AR2023 + MR pack, Haldex)  |  June 2026</a:t>
             </a:r>
           </a:p>
         </p:txBody>
@@ -8652,7 +8648,22 @@
                   <a:srgbClr val="202020"/>
                 </a:solidFill>
               </a:rPr>
-              <a:t>(margin 10.6% → 12.5%) — the path is proven, not theoretical</a:t>
+              <a:t>(margin 10.6% → 12.5%) — and the phased pro-forma</a:t>
+            </a:r>
+          </a:p>
+          <a:p>
+            <a:pPr>
+              <a:spcBef>
+                <a:spcPts val="400"/>
+              </a:spcBef>
+            </a:pPr>
+            <a:r>
+              <a:rPr sz="1300">
+                <a:solidFill>
+                  <a:srgbClr val="202020"/>
+                </a:solidFill>
+              </a:rPr>
+              <a:t>(later page) shows the full management-premise view</a:t>
             </a:r>
           </a:p>
         </p:txBody>
@@ -10137,7 +10148,7 @@
                   <a:srgbClr val="202020"/>
                 </a:solidFill>
               </a:rPr>
-              <a:t>At market price, SAW earns 38-44% contribution — EXACTLY the level of Haldex's core products (41-44%) and Concentric's conventional pumps (38-43%)</a:t>
+              <a:t>At market price, SAW earns 38-44% contribution — exactly the level of Haldex's core products (ABA 41.4%, ABS 43.4%) and Concentric's conventional pumps (38-43%)</a:t>
             </a:r>
           </a:p>
           <a:p>
@@ -10339,6 +10350,315 @@
                   <a:srgbClr val="FFFFFF"/>
                 </a:solidFill>
               </a:rPr>
+              <a:t>Pump segment: TBK vs Concentric — product-level contribution</a:t>
+            </a:r>
+          </a:p>
+        </p:txBody>
+      </p:sp>
+      <p:sp>
+        <p:nvSpPr>
+          <p:cNvPr id="3" name="TextBox 2"/>
+          <p:cNvSpPr txBox="1"/>
+          <p:nvPr/>
+        </p:nvSpPr>
+        <p:spPr>
+          <a:xfrm>
+            <a:off x="457200" y="914400"/>
+            <a:ext cx="11247120" cy="365760"/>
+          </a:xfrm>
+          <a:prstGeom prst="rect">
+            <a:avLst/>
+          </a:prstGeom>
+          <a:noFill/>
+        </p:spPr>
+        <p:txBody>
+          <a:bodyPr wrap="square">
+            <a:spAutoFit/>
+          </a:bodyPr>
+          <a:lstStyle/>
+          <a:p>
+            <a:pPr algn="l"/>
+            <a:r>
+              <a:rPr sz="1200" b="0">
+                <a:solidFill>
+                  <a:srgbClr val="595959"/>
+                </a:solidFill>
+              </a:rPr>
+              <a:t>TBK Japan H1 FY2025 + TBKK Thailand vs Concentric Dec-2021 YTD CB I. Haldex has no pumps — its hydraulics division IS Concentric (spun off 2011)</a:t>
+            </a:r>
+          </a:p>
+        </p:txBody>
+      </p:sp>
+      <p:graphicFrame>
+        <p:nvGraphicFramePr>
+          <p:cNvPr id="4" name="Chart 3"/>
+          <p:cNvGraphicFramePr>
+            <a:graphicFrameLocks noGrp="1"/>
+          </p:cNvGraphicFramePr>
+          <p:nvPr/>
+        </p:nvGraphicFramePr>
+        <p:xfrm>
+          <a:off x="457200" y="1463040"/>
+          <a:ext cx="6766560" cy="4206240"/>
+        </p:xfrm>
+        <a:graphic>
+          <a:graphicData uri="http://schemas.openxmlformats.org/drawingml/2006/chart">
+            <c:chart xmlns:c="http://schemas.openxmlformats.org/drawingml/2006/chart" r:id="rId2"/>
+          </a:graphicData>
+        </a:graphic>
+      </p:graphicFrame>
+      <p:sp>
+        <p:nvSpPr>
+          <p:cNvPr id="5" name="TextBox 4"/>
+          <p:cNvSpPr txBox="1"/>
+          <p:nvPr/>
+        </p:nvSpPr>
+        <p:spPr>
+          <a:xfrm>
+            <a:off x="7498079" y="1463040"/>
+            <a:ext cx="4251960" cy="2240280"/>
+          </a:xfrm>
+          <a:prstGeom prst="rect">
+            <a:avLst/>
+          </a:prstGeom>
+          <a:solidFill>
+            <a:srgbClr val="F2F2F2"/>
+          </a:solidFill>
+          <a:ln w="15875">
+            <a:solidFill>
+              <a:srgbClr val="1F4E78"/>
+            </a:solidFill>
+          </a:ln>
+        </p:spPr>
+        <p:txBody>
+          <a:bodyPr wrap="square" lIns="137160" rIns="137160" tIns="109728">
+            <a:spAutoFit/>
+          </a:bodyPr>
+          <a:lstStyle/>
+          <a:p>
+            <a:r>
+              <a:rPr sz="1500" b="1">
+                <a:solidFill>
+                  <a:srgbClr val="1F4E78"/>
+                </a:solidFill>
+              </a:rPr>
+              <a:t>The 2x gap on identical products</a:t>
+            </a:r>
+          </a:p>
+          <a:p>
+            <a:pPr>
+              <a:spcBef>
+                <a:spcPts val="400"/>
+              </a:spcBef>
+            </a:pPr>
+            <a:r>
+              <a:rPr sz="1100">
+                <a:solidFill>
+                  <a:srgbClr val="202020"/>
+                </a:solidFill>
+              </a:rPr>
+              <a:t>Same conventional water pump: TBK 18.5-19.5% vs Concentric 38.2% — DOUBLE</a:t>
+            </a:r>
+          </a:p>
+          <a:p>
+            <a:pPr>
+              <a:spcBef>
+                <a:spcPts val="400"/>
+              </a:spcBef>
+            </a:pPr>
+            <a:r>
+              <a:rPr sz="1100">
+                <a:solidFill>
+                  <a:srgbClr val="202020"/>
+                </a:solidFill>
+              </a:rPr>
+              <a:t>Same oil pump: 22.6-26.0% vs 42.9%</a:t>
+            </a:r>
+          </a:p>
+          <a:p>
+            <a:pPr>
+              <a:spcBef>
+                <a:spcPts val="400"/>
+              </a:spcBef>
+            </a:pPr>
+            <a:r>
+              <a:rPr sz="1100">
+                <a:solidFill>
+                  <a:srgbClr val="202020"/>
+                </a:solidFill>
+              </a:rPr>
+              <a:t>Consistent in two TBK countries → not a factory or FX artifact: it is price and customer mix (keiretsu price-downs vs Concentric's Cummins/CAT niche pricing)</a:t>
+            </a:r>
+          </a:p>
+        </p:txBody>
+      </p:sp>
+      <p:sp>
+        <p:nvSpPr>
+          <p:cNvPr id="6" name="TextBox 5"/>
+          <p:cNvSpPr txBox="1"/>
+          <p:nvPr/>
+        </p:nvSpPr>
+        <p:spPr>
+          <a:xfrm>
+            <a:off x="7498079" y="3840480"/>
+            <a:ext cx="4251960" cy="2240280"/>
+          </a:xfrm>
+          <a:prstGeom prst="rect">
+            <a:avLst/>
+          </a:prstGeom>
+          <a:solidFill>
+            <a:srgbClr val="F2F2F2"/>
+          </a:solidFill>
+          <a:ln w="15875">
+            <a:solidFill>
+              <a:srgbClr val="548235"/>
+            </a:solidFill>
+          </a:ln>
+        </p:spPr>
+        <p:txBody>
+          <a:bodyPr wrap="square" lIns="137160" rIns="137160" tIns="109728">
+            <a:spAutoFit/>
+          </a:bodyPr>
+          <a:lstStyle/>
+          <a:p>
+            <a:r>
+              <a:rPr sz="1500" b="1">
+                <a:solidFill>
+                  <a:srgbClr val="548235"/>
+                </a:solidFill>
+              </a:rPr>
+              <a:t>The ladder TBK hasn't climbed</a:t>
+            </a:r>
+          </a:p>
+          <a:p>
+            <a:pPr>
+              <a:spcBef>
+                <a:spcPts val="400"/>
+              </a:spcBef>
+            </a:pPr>
+            <a:r>
+              <a:rPr sz="1100">
+                <a:solidFill>
+                  <a:srgbClr val="202020"/>
+                </a:solidFill>
+              </a:rPr>
+              <a:t>Concentric's evolved variants: semi-variable 54.1%, electric W/P 54.8%, fuel/transmission 55.6% — each rung ≈ +15pts on the same base product</a:t>
+            </a:r>
+          </a:p>
+          <a:p>
+            <a:pPr>
+              <a:spcBef>
+                <a:spcPts val="400"/>
+              </a:spcBef>
+            </a:pPr>
+            <a:r>
+              <a:rPr sz="1100">
+                <a:solidFill>
+                  <a:srgbClr val="202020"/>
+                </a:solidFill>
+              </a:rPr>
+              <a:t>TBK's first rung is bought but not yet scaled: ECWP at -245.7% contribution on ¥2.6M pre-scale volume (off-chart)</a:t>
+            </a:r>
+          </a:p>
+          <a:p>
+            <a:pPr>
+              <a:spcBef>
+                <a:spcPts val="400"/>
+              </a:spcBef>
+            </a:pPr>
+            <a:r>
+              <a:rPr sz="1100">
+                <a:solidFill>
+                  <a:srgbClr val="202020"/>
+                </a:solidFill>
+              </a:rPr>
+              <a:t>NB: Concentric = the former Haldex hydraulics division — proof the climb is doable from CV-supplier DNA</a:t>
+            </a:r>
+          </a:p>
+        </p:txBody>
+      </p:sp>
+      <p:sp>
+        <p:nvSpPr>
+          <p:cNvPr id="7" name="TextBox 6"/>
+          <p:cNvSpPr txBox="1"/>
+          <p:nvPr/>
+        </p:nvSpPr>
+        <p:spPr>
+          <a:xfrm>
+            <a:off x="457200" y="5897880"/>
+            <a:ext cx="11247120" cy="822960"/>
+          </a:xfrm>
+          <a:prstGeom prst="rect">
+            <a:avLst/>
+          </a:prstGeom>
+          <a:noFill/>
+        </p:spPr>
+        <p:txBody>
+          <a:bodyPr wrap="square">
+            <a:spAutoFit/>
+          </a:bodyPr>
+          <a:lstStyle/>
+          <a:p>
+            <a:pPr algn="l"/>
+            <a:r>
+              <a:rPr sz="1150" b="0">
+                <a:solidFill>
+                  <a:srgbClr val="595959"/>
+                </a:solidFill>
+              </a:rPr>
+              <a:t>Gross-profit read: if TBK's pump book (W/P + O/P = ¥4.9bn of H1 parent sales) earned Concentric's conventional-pump margins, contribution would rise ~¥0.9-1.0bn per HALF-YEAR on those two lines alone — before any ladder-climbing. The pump gap is a PRICING-POWER gap on identical hardware; the brake gap (previous page) is a content gap. Different cures: pricing/mix vs product development.</a:t>
+            </a:r>
+          </a:p>
+        </p:txBody>
+      </p:sp>
+    </p:spTree>
+  </p:cSld>
+  <p:clrMapOvr>
+    <a:masterClrMapping/>
+  </p:clrMapOvr>
+</p:sld>
+</file>
+
+<file path=ppt/slides/slide17.xml><?xml version="1.0" encoding="utf-8"?>
+<p:sld xmlns:a="http://schemas.openxmlformats.org/drawingml/2006/main" xmlns:p="http://schemas.openxmlformats.org/presentationml/2006/main" xmlns:r="http://schemas.openxmlformats.org/officeDocument/2006/relationships">
+  <p:cSld>
+    <p:spTree>
+      <p:nvGrpSpPr>
+        <p:cNvPr id="1" name=""/>
+        <p:cNvGrpSpPr/>
+        <p:nvPr/>
+      </p:nvGrpSpPr>
+      <p:grpSpPr/>
+      <p:sp>
+        <p:nvSpPr>
+          <p:cNvPr id="2" name="TextBox 1"/>
+          <p:cNvSpPr txBox="1"/>
+          <p:nvPr/>
+        </p:nvSpPr>
+        <p:spPr>
+          <a:xfrm>
+            <a:off x="0" y="0"/>
+            <a:ext cx="12191695" cy="868680"/>
+          </a:xfrm>
+          <a:prstGeom prst="rect">
+            <a:avLst/>
+          </a:prstGeom>
+          <a:solidFill>
+            <a:srgbClr val="1F4E78"/>
+          </a:solidFill>
+        </p:spPr>
+        <p:txBody>
+          <a:bodyPr wrap="square" lIns="457200" tIns="164592">
+            <a:spAutoFit/>
+          </a:bodyPr>
+          <a:lstStyle/>
+          <a:p>
+            <a:r>
+              <a:rPr sz="2600" b="1">
+                <a:solidFill>
+                  <a:srgbClr val="FFFFFF"/>
+                </a:solidFill>
+              </a:rPr>
               <a:t>The normalized TBK: right prices, right factories, real R&amp;D</a:t>
             </a:r>
           </a:p>
@@ -10608,315 +10928,6 @@
 </p:sld>
 </file>
 
-<file path=ppt/slides/slide17.xml><?xml version="1.0" encoding="utf-8"?>
-<p:sld xmlns:a="http://schemas.openxmlformats.org/drawingml/2006/main" xmlns:p="http://schemas.openxmlformats.org/presentationml/2006/main" xmlns:r="http://schemas.openxmlformats.org/officeDocument/2006/relationships">
-  <p:cSld>
-    <p:spTree>
-      <p:nvGrpSpPr>
-        <p:cNvPr id="1" name=""/>
-        <p:cNvGrpSpPr/>
-        <p:nvPr/>
-      </p:nvGrpSpPr>
-      <p:grpSpPr/>
-      <p:sp>
-        <p:nvSpPr>
-          <p:cNvPr id="2" name="TextBox 1"/>
-          <p:cNvSpPr txBox="1"/>
-          <p:nvPr/>
-        </p:nvSpPr>
-        <p:spPr>
-          <a:xfrm>
-            <a:off x="0" y="0"/>
-            <a:ext cx="12191695" cy="868680"/>
-          </a:xfrm>
-          <a:prstGeom prst="rect">
-            <a:avLst/>
-          </a:prstGeom>
-          <a:solidFill>
-            <a:srgbClr val="1F4E78"/>
-          </a:solidFill>
-        </p:spPr>
-        <p:txBody>
-          <a:bodyPr wrap="square" lIns="457200" tIns="164592">
-            <a:spAutoFit/>
-          </a:bodyPr>
-          <a:lstStyle/>
-          <a:p>
-            <a:r>
-              <a:rPr sz="2600" b="1">
-                <a:solidFill>
-                  <a:srgbClr val="FFFFFF"/>
-                </a:solidFill>
-              </a:rPr>
-              <a:t>Pump segment: TBK vs Concentric — product-level contribution</a:t>
-            </a:r>
-          </a:p>
-        </p:txBody>
-      </p:sp>
-      <p:sp>
-        <p:nvSpPr>
-          <p:cNvPr id="3" name="TextBox 2"/>
-          <p:cNvSpPr txBox="1"/>
-          <p:nvPr/>
-        </p:nvSpPr>
-        <p:spPr>
-          <a:xfrm>
-            <a:off x="457200" y="914400"/>
-            <a:ext cx="11247120" cy="365760"/>
-          </a:xfrm>
-          <a:prstGeom prst="rect">
-            <a:avLst/>
-          </a:prstGeom>
-          <a:noFill/>
-        </p:spPr>
-        <p:txBody>
-          <a:bodyPr wrap="square">
-            <a:spAutoFit/>
-          </a:bodyPr>
-          <a:lstStyle/>
-          <a:p>
-            <a:pPr algn="l"/>
-            <a:r>
-              <a:rPr sz="1200" b="0">
-                <a:solidFill>
-                  <a:srgbClr val="595959"/>
-                </a:solidFill>
-              </a:rPr>
-              <a:t>TBK Japan H1 FY2025 + TBKK Thailand vs Concentric Dec-2021 YTD CB I. Haldex has no pumps — its hydraulics division IS Concentric (spun off 2011)</a:t>
-            </a:r>
-          </a:p>
-        </p:txBody>
-      </p:sp>
-      <p:graphicFrame>
-        <p:nvGraphicFramePr>
-          <p:cNvPr id="4" name="Chart 3"/>
-          <p:cNvGraphicFramePr>
-            <a:graphicFrameLocks noGrp="1"/>
-          </p:cNvGraphicFramePr>
-          <p:nvPr/>
-        </p:nvGraphicFramePr>
-        <p:xfrm>
-          <a:off x="457200" y="1463040"/>
-          <a:ext cx="6766560" cy="4206240"/>
-        </p:xfrm>
-        <a:graphic>
-          <a:graphicData uri="http://schemas.openxmlformats.org/drawingml/2006/chart">
-            <c:chart xmlns:c="http://schemas.openxmlformats.org/drawingml/2006/chart" r:id="rId2"/>
-          </a:graphicData>
-        </a:graphic>
-      </p:graphicFrame>
-      <p:sp>
-        <p:nvSpPr>
-          <p:cNvPr id="5" name="TextBox 4"/>
-          <p:cNvSpPr txBox="1"/>
-          <p:nvPr/>
-        </p:nvSpPr>
-        <p:spPr>
-          <a:xfrm>
-            <a:off x="7498079" y="1463040"/>
-            <a:ext cx="4251960" cy="2240280"/>
-          </a:xfrm>
-          <a:prstGeom prst="rect">
-            <a:avLst/>
-          </a:prstGeom>
-          <a:solidFill>
-            <a:srgbClr val="F2F2F2"/>
-          </a:solidFill>
-          <a:ln w="15875">
-            <a:solidFill>
-              <a:srgbClr val="1F4E78"/>
-            </a:solidFill>
-          </a:ln>
-        </p:spPr>
-        <p:txBody>
-          <a:bodyPr wrap="square" lIns="137160" rIns="137160" tIns="109728">
-            <a:spAutoFit/>
-          </a:bodyPr>
-          <a:lstStyle/>
-          <a:p>
-            <a:r>
-              <a:rPr sz="1500" b="1">
-                <a:solidFill>
-                  <a:srgbClr val="1F4E78"/>
-                </a:solidFill>
-              </a:rPr>
-              <a:t>The 2x gap on identical products</a:t>
-            </a:r>
-          </a:p>
-          <a:p>
-            <a:pPr>
-              <a:spcBef>
-                <a:spcPts val="400"/>
-              </a:spcBef>
-            </a:pPr>
-            <a:r>
-              <a:rPr sz="1100">
-                <a:solidFill>
-                  <a:srgbClr val="202020"/>
-                </a:solidFill>
-              </a:rPr>
-              <a:t>Same conventional water pump: TBK 18.5-19.5% vs Concentric 38.2% — DOUBLE</a:t>
-            </a:r>
-          </a:p>
-          <a:p>
-            <a:pPr>
-              <a:spcBef>
-                <a:spcPts val="400"/>
-              </a:spcBef>
-            </a:pPr>
-            <a:r>
-              <a:rPr sz="1100">
-                <a:solidFill>
-                  <a:srgbClr val="202020"/>
-                </a:solidFill>
-              </a:rPr>
-              <a:t>Same oil pump: 22.6-26.0% vs 42.9%</a:t>
-            </a:r>
-          </a:p>
-          <a:p>
-            <a:pPr>
-              <a:spcBef>
-                <a:spcPts val="400"/>
-              </a:spcBef>
-            </a:pPr>
-            <a:r>
-              <a:rPr sz="1100">
-                <a:solidFill>
-                  <a:srgbClr val="202020"/>
-                </a:solidFill>
-              </a:rPr>
-              <a:t>Consistent in two TBK countries → not a factory or FX artifact: it is price and customer mix (keiretsu price-downs vs Concentric's Cummins/CAT niche pricing)</a:t>
-            </a:r>
-          </a:p>
-        </p:txBody>
-      </p:sp>
-      <p:sp>
-        <p:nvSpPr>
-          <p:cNvPr id="6" name="TextBox 5"/>
-          <p:cNvSpPr txBox="1"/>
-          <p:nvPr/>
-        </p:nvSpPr>
-        <p:spPr>
-          <a:xfrm>
-            <a:off x="7498079" y="3840480"/>
-            <a:ext cx="4251960" cy="2240280"/>
-          </a:xfrm>
-          <a:prstGeom prst="rect">
-            <a:avLst/>
-          </a:prstGeom>
-          <a:solidFill>
-            <a:srgbClr val="F2F2F2"/>
-          </a:solidFill>
-          <a:ln w="15875">
-            <a:solidFill>
-              <a:srgbClr val="548235"/>
-            </a:solidFill>
-          </a:ln>
-        </p:spPr>
-        <p:txBody>
-          <a:bodyPr wrap="square" lIns="137160" rIns="137160" tIns="109728">
-            <a:spAutoFit/>
-          </a:bodyPr>
-          <a:lstStyle/>
-          <a:p>
-            <a:r>
-              <a:rPr sz="1500" b="1">
-                <a:solidFill>
-                  <a:srgbClr val="548235"/>
-                </a:solidFill>
-              </a:rPr>
-              <a:t>The ladder TBK hasn't climbed</a:t>
-            </a:r>
-          </a:p>
-          <a:p>
-            <a:pPr>
-              <a:spcBef>
-                <a:spcPts val="400"/>
-              </a:spcBef>
-            </a:pPr>
-            <a:r>
-              <a:rPr sz="1100">
-                <a:solidFill>
-                  <a:srgbClr val="202020"/>
-                </a:solidFill>
-              </a:rPr>
-              <a:t>Concentric's evolved variants: semi-variable 54.1%, electric W/P 54.8%, fuel/transmission 55.6% — each rung ≈ +15pts on the same base product</a:t>
-            </a:r>
-          </a:p>
-          <a:p>
-            <a:pPr>
-              <a:spcBef>
-                <a:spcPts val="400"/>
-              </a:spcBef>
-            </a:pPr>
-            <a:r>
-              <a:rPr sz="1100">
-                <a:solidFill>
-                  <a:srgbClr val="202020"/>
-                </a:solidFill>
-              </a:rPr>
-              <a:t>TBK's first rung is bought but not yet scaled: ECWP at -245.7% contribution on ¥2.6M pre-scale volume (off-chart)</a:t>
-            </a:r>
-          </a:p>
-          <a:p>
-            <a:pPr>
-              <a:spcBef>
-                <a:spcPts val="400"/>
-              </a:spcBef>
-            </a:pPr>
-            <a:r>
-              <a:rPr sz="1100">
-                <a:solidFill>
-                  <a:srgbClr val="202020"/>
-                </a:solidFill>
-              </a:rPr>
-              <a:t>NB: Concentric = the former Haldex hydraulics division — proof the climb is doable from CV-supplier DNA</a:t>
-            </a:r>
-          </a:p>
-        </p:txBody>
-      </p:sp>
-      <p:sp>
-        <p:nvSpPr>
-          <p:cNvPr id="7" name="TextBox 6"/>
-          <p:cNvSpPr txBox="1"/>
-          <p:nvPr/>
-        </p:nvSpPr>
-        <p:spPr>
-          <a:xfrm>
-            <a:off x="457200" y="5897880"/>
-            <a:ext cx="11247120" cy="822960"/>
-          </a:xfrm>
-          <a:prstGeom prst="rect">
-            <a:avLst/>
-          </a:prstGeom>
-          <a:noFill/>
-        </p:spPr>
-        <p:txBody>
-          <a:bodyPr wrap="square">
-            <a:spAutoFit/>
-          </a:bodyPr>
-          <a:lstStyle/>
-          <a:p>
-            <a:pPr algn="l"/>
-            <a:r>
-              <a:rPr sz="1150" b="0">
-                <a:solidFill>
-                  <a:srgbClr val="595959"/>
-                </a:solidFill>
-              </a:rPr>
-              <a:t>Gross-profit read: if TBK's pump book (W/P + O/P = ¥4.9bn of H1 parent sales) earned Concentric's conventional-pump margins, contribution would rise ~¥0.9-1.0bn per HALF-YEAR on those two lines alone — before any ladder-climbing. The pump gap is a PRICING-POWER gap on identical hardware; the brake gap (previous page) is a content gap. Different cures: pricing/mix vs product development.</a:t>
-            </a:r>
-          </a:p>
-        </p:txBody>
-      </p:sp>
-    </p:spTree>
-  </p:cSld>
-  <p:clrMapOvr>
-    <a:masterClrMapping/>
-  </p:clrMapOvr>
-</p:sld>
-</file>
-
 <file path=ppt/slides/slide18.xml><?xml version="1.0" encoding="utf-8"?>
 <p:sld xmlns:a="http://schemas.openxmlformats.org/drawingml/2006/main" xmlns:p="http://schemas.openxmlformats.org/presentationml/2006/main" xmlns:r="http://schemas.openxmlformats.org/officeDocument/2006/relationships">
   <p:cSld>
@@ -12643,7 +12654,7 @@
                   <a:srgbClr val="595959"/>
                 </a:solidFill>
               </a:rPr>
-              <a:t>Allocation discipline, per domain: (1) brakes — ADB industrialization for the Japanese disc flip, systems/ADAS access via Brakes India, timed to regulation and platform renewals; (2) pumps — e-pump/TCU sockets on Isuzu/Fuso/Hino electrified programs, timed to program kick-offs happening NOW. Funding: the ~$22-24M/yr peer-margin prize covers the ~$27M/yr program almost fully. The Concentric lesson: focused niche engineering at 2.3% intensity earns 25% gross margins — spend must buy sockets, not just scale.</a:t>
+              <a:t>Allocation discipline, per domain: (1) brakes — ADB industrialization for the Japanese disc flip, systems/ADAS access via Brakes India, timed to regulation and platform renewals; (2) pumps — e-pump/TCU sockets on Isuzu/Fuso/Hino electrified programs, timed to program kick-offs happening NOW. Funding: the phase-1 pro-forma uplift (+¥4.8bn / ~$32M operating profit vs actual) more than covers the ~$27M/yr program. The Concentric lesson: focused niche engineering at 2.3% intensity earns 25% gross margins — spend must buy sockets, not just scale.</a:t>
             </a:r>
           </a:p>
         </p:txBody>
@@ -14048,7 +14059,7 @@
                   <a:srgbClr val="595959"/>
                 </a:solidFill>
               </a:rPr>
-              <a:t>Chapter scores (1-10) — TBK vs Concentric (best newly-scored) vs Mikuni vs average of the 6 newly-scored peers</a:t>
+              <a:t>Chapter scores (1-10) — TBK vs Concentric (best newly scored) vs the average of the five newly scored peers (TBK excluded from the average)</a:t>
             </a:r>
           </a:p>
         </p:txBody>
@@ -14743,6 +14754,21 @@
               <a:t>Aggregator's 'TBK FY26 ¥138M profit' contradicted by the audited tanshin (-¥131M)</a:t>
             </a:r>
           </a:p>
+          <a:p>
+            <a:pPr>
+              <a:spcBef>
+                <a:spcPts val="400"/>
+              </a:spcBef>
+            </a:pPr>
+            <a:r>
+              <a:rPr sz="1100">
+                <a:solidFill>
+                  <a:srgbClr val="202020"/>
+                </a:solidFill>
+              </a:rPr>
+              <a:t>TBK ADB exhibit year unresolved (2019 vs 2022 sources conflict); Concentric MR pack period 2112 = Dec 2021</a:t>
+            </a:r>
+          </a:p>
         </p:txBody>
       </p:sp>
       <p:sp>
@@ -14896,6 +14922,21 @@
                 </a:solidFill>
               </a:rPr>
               <a:t>Where sources conflict, the audited primary document wins (e.g., TBK tanshin over aggregators)</a:t>
+            </a:r>
+          </a:p>
+          <a:p>
+            <a:pPr>
+              <a:spcBef>
+                <a:spcPts val="400"/>
+              </a:spcBef>
+            </a:pPr>
+            <a:r>
+              <a:rPr sz="1100">
+                <a:solidFill>
+                  <a:srgbClr val="202020"/>
+                </a:solidFill>
+              </a:rPr>
+              <a:t>Company-internal documents (TBK/TBKK product P&amp;Ls, Concentric MR pack, Haldex packs) and management statements (~30% below-market pricing, ~1,000 excess heads) are first-hand but NOT externally verified — labeled wherever used</a:t>
             </a:r>
           </a:p>
           <a:p>
@@ -15078,7 +15119,22 @@
                   <a:srgbClr val="202020"/>
                 </a:solidFill>
               </a:rPr>
-              <a:t>User-provided datasets: TBK 10-year financials; Peers 10-year; Peers LTM (7 companies, consistent methodology)</a:t>
+              <a:t>User-provided datasets: TBK 10-year financials; Peers 10-year; Peers LTM (7 companies, consistent methodology); moat methodology v3.2</a:t>
+            </a:r>
+          </a:p>
+          <a:p>
+            <a:pPr>
+              <a:spcBef>
+                <a:spcPts val="400"/>
+              </a:spcBef>
+            </a:pPr>
+            <a:r>
+              <a:rPr sz="1000">
+                <a:solidFill>
+                  <a:srgbClr val="202020"/>
+                </a:solidFill>
+              </a:rPr>
+              <a:t>Internal management documents: TBK Japan profitability by product/customer + share map + acquired projects (H1 FY2025); TBKK Thailand profit by items (Apr-Sep 2025); Concentric Group MR Pack (Dec 2021); Haldex analysis file (2019) and May-2014 MR pack</a:t>
             </a:r>
           </a:p>
           <a:p>

--- a/TBK_rd_gap_slides.pptx
+++ b/TBK_rd_gap_slides.pptx
@@ -33,6 +33,7 @@
     <p:sldId id="281" r:id="rId32"/>
     <p:sldId id="282" r:id="rId33"/>
     <p:sldId id="283" r:id="rId34"/>
+    <p:sldId id="284" r:id="rId35"/>
   </p:sldIdLst>
   <p:sldSz cx="12191695" cy="6858000" type="screen4x3"/>
   <p:notesSz cx="6858000" cy="9144000"/>
@@ -13343,6 +13344,22 @@
           <a:p>
             <a:pPr>
               <a:spcBef>
+                <a:spcPts val="300"/>
+              </a:spcBef>
+            </a:pPr>
+            <a:r>
+              <a:rPr sz="1150" b="0">
+                <a:solidFill>
+                  <a:srgbClr val="556A83"/>
+                </a:solidFill>
+                <a:latin typeface="Arial"/>
+              </a:rPr>
+              <a:t>22   The first 180 days</a:t>
+            </a:r>
+          </a:p>
+          <a:p>
+            <a:pPr>
+              <a:spcBef>
                 <a:spcPts val="1000"/>
               </a:spcBef>
             </a:pPr>
@@ -13369,7 +13386,7 @@
                 </a:solidFill>
                 <a:latin typeface="Arial"/>
               </a:rPr>
-              <a:t>22   Product evaluation I: quality &amp; service</a:t>
+              <a:t>23   Product evaluation I: quality &amp; service</a:t>
             </a:r>
           </a:p>
           <a:p>
@@ -13385,7 +13402,7 @@
                 </a:solidFill>
                 <a:latin typeface="Arial"/>
               </a:rPr>
-              <a:t>23   Product evaluation II: innovation output</a:t>
+              <a:t>24   Product evaluation II: innovation output</a:t>
             </a:r>
           </a:p>
           <a:p>
@@ -13401,7 +13418,7 @@
                 </a:solidFill>
                 <a:latin typeface="Arial"/>
               </a:rPr>
-              <a:t>24   Moat framework ranking</a:t>
+              <a:t>25   Moat framework ranking</a:t>
             </a:r>
           </a:p>
           <a:p>
@@ -13417,7 +13434,7 @@
                 </a:solidFill>
                 <a:latin typeface="Arial"/>
               </a:rPr>
-              <a:t>25   TBK's moat profile: strengths &amp; weaknesses</a:t>
+              <a:t>26   TBK's moat profile: strengths &amp; weaknesses</a:t>
             </a:r>
           </a:p>
           <a:p>
@@ -13433,7 +13450,7 @@
                 </a:solidFill>
                 <a:latin typeface="Arial"/>
               </a:rPr>
-              <a:t>26   Moat criteria: TBK vs competitors</a:t>
+              <a:t>27   Moat criteria: TBK vs competitors</a:t>
             </a:r>
           </a:p>
           <a:p>
@@ -13465,7 +13482,7 @@
                 </a:solidFill>
                 <a:latin typeface="Arial"/>
               </a:rPr>
-              <a:t>27   Research quality &amp; methodology notes</a:t>
+              <a:t>28   Research quality &amp; methodology notes</a:t>
             </a:r>
           </a:p>
           <a:p>
@@ -13481,7 +13498,7 @@
                 </a:solidFill>
                 <a:latin typeface="Arial"/>
               </a:rPr>
-              <a:t>28   Sources</a:t>
+              <a:t>29   Sources</a:t>
             </a:r>
           </a:p>
         </p:txBody>
@@ -14477,7 +14494,7 @@
                 </a:solidFill>
                 <a:latin typeface="Times New Roman"/>
               </a:rPr>
-              <a:t>Product evaluation I: external quality &amp; service evidence</a:t>
+              <a:t>The first 180 days: making the 10% path irreversible</a:t>
             </a:r>
           </a:p>
         </p:txBody>
@@ -14565,7 +14582,7 @@
                 </a:solidFill>
                 <a:latin typeface="Arial"/>
               </a:rPr>
-              <a:t>Evidence hierarchy: NHTSA recalls (supplier named by law) &gt; OEM-granted awards &gt; independent surveys &gt; patents &gt; self-claims. Japan's MLIT does not name suppliers</a:t>
+              <a:t>Four workstreams, one owner each, weekly CEO steering — scoreboard is the OP run-rate bridge ¥1.5bn -&gt; ¥6.3bn (10.6%) by month 18</a:t>
             </a:r>
           </a:p>
         </p:txBody>
@@ -14579,7 +14596,7 @@
         <p:spPr>
           <a:xfrm>
             <a:off x="457200" y="1417320"/>
-            <a:ext cx="5577840" cy="2286000"/>
+            <a:ext cx="2743200" cy="4160520"/>
           </a:xfrm>
           <a:prstGeom prst="rect">
             <a:avLst/>
@@ -14606,55 +14623,103 @@
                 </a:solidFill>
                 <a:latin typeface="Arial"/>
               </a:rPr>
-              <a:t>The validated leaders</a:t>
-            </a:r>
-          </a:p>
-          <a:p>
-            <a:pPr>
-              <a:spcBef>
-                <a:spcPts val="400"/>
-              </a:spcBef>
-            </a:pPr>
-            <a:r>
-              <a:rPr sz="1100">
-                <a:solidFill>
-                  <a:srgbClr val="152130"/>
-                </a:solidFill>
-                <a:latin typeface="Arial"/>
-              </a:rPr>
-              <a:t>Knorr-Bremse/Bendix: PACCAR supplier-performance award 6 consecutive yrs; 3 plants on PACCAR's &lt;=10 defects-per-million list; ETM 'Best Brand - Brakes' (German fleet/driver vote) 19 YEARS RUNNING; ~85% of NA air-disc wheel ends</a:t>
-            </a:r>
-          </a:p>
-          <a:p>
-            <a:pPr>
-              <a:spcBef>
-                <a:spcPts val="400"/>
-              </a:spcBef>
-            </a:pPr>
-            <a:r>
-              <a:rPr sz="1100">
-                <a:solidFill>
-                  <a:srgbClr val="152130"/>
-                </a:solidFill>
-                <a:latin typeface="Arial"/>
-              </a:rPr>
-              <a:t>Meritor/Cummins: Daimler 'Masters of Quality' + 2020 global quality award ('1.3M axles/brakes at low defect rate'); DTNA EXTENDED its ADB contract — revealed preference</a:t>
-            </a:r>
-          </a:p>
-          <a:p>
-            <a:pPr>
-              <a:spcBef>
-                <a:spcPts val="400"/>
-              </a:spcBef>
-            </a:pPr>
-            <a:r>
-              <a:rPr sz="1100">
-                <a:solidFill>
-                  <a:srgbClr val="152130"/>
-                </a:solidFill>
-                <a:latin typeface="Arial"/>
-              </a:rPr>
-              <a:t>Brembo: all 10 F1 teams; AMS brake-brand vote 11 of 13 years</a:t>
+              <a:t>Days 0-30: mandate &amp; truth</a:t>
+            </a:r>
+          </a:p>
+          <a:p>
+            <a:pPr>
+              <a:spcBef>
+                <a:spcPts val="400"/>
+              </a:spcBef>
+            </a:pPr>
+            <a:r>
+              <a:rPr sz="1000">
+                <a:solidFill>
+                  <a:srgbClr val="152130"/>
+                </a:solidFill>
+                <a:latin typeface="Arial"/>
+              </a:rPr>
+              <a:t>Board locks 10% OPM @ month 18; 4 owners named</a:t>
+            </a:r>
+          </a:p>
+          <a:p>
+            <a:pPr>
+              <a:spcBef>
+                <a:spcPts val="400"/>
+              </a:spcBef>
+            </a:pPr>
+            <a:r>
+              <a:rPr sz="1000">
+                <a:solidFill>
+                  <a:srgbClr val="152130"/>
+                </a:solidFill>
+                <a:latin typeface="Arial"/>
+              </a:rPr>
+              <a:t>Product/customer P&amp;L packs monthly, group-wide — single source of truth</a:t>
+            </a:r>
+          </a:p>
+          <a:p>
+            <a:pPr>
+              <a:spcBef>
+                <a:spcPts val="400"/>
+              </a:spcBef>
+            </a:pPr>
+            <a:r>
+              <a:rPr sz="1000">
+                <a:solidFill>
+                  <a:srgbClr val="152130"/>
+                </a:solidFill>
+                <a:latin typeface="Arial"/>
+              </a:rPr>
+              <a:t>Quote freeze below 20% CM floor</a:t>
+            </a:r>
+          </a:p>
+          <a:p>
+            <a:pPr>
+              <a:spcBef>
+                <a:spcPts val="400"/>
+              </a:spcBef>
+            </a:pPr>
+            <a:r>
+              <a:rPr sz="1000">
+                <a:solidFill>
+                  <a:srgbClr val="152130"/>
+                </a:solidFill>
+                <a:latin typeface="Arial"/>
+              </a:rPr>
+              <a:t>Keiretsu contract map + SAW evidence pack (performance + 30% gap)</a:t>
+            </a:r>
+          </a:p>
+          <a:p>
+            <a:pPr>
+              <a:spcBef>
+                <a:spcPts val="400"/>
+              </a:spcBef>
+            </a:pPr>
+            <a:r>
+              <a:rPr sz="1000">
+                <a:solidFill>
+                  <a:srgbClr val="152130"/>
+                </a:solidFill>
+                <a:latin typeface="Arial"/>
+              </a:rPr>
+              <a:t>Stop-loss list drafted (~¥2bn sales: GKN, Suzuki, O/brake, B/housing...)</a:t>
+            </a:r>
+          </a:p>
+          <a:p>
+            <a:pPr>
+              <a:spcBef>
+                <a:spcPts val="400"/>
+              </a:spcBef>
+            </a:pPr>
+            <a:r>
+              <a:rPr sz="1000">
+                <a:solidFill>
+                  <a:srgbClr val="152130"/>
+                </a:solidFill>
+                <a:latin typeface="Arial"/>
+              </a:rPr>
+              <a:t>R&amp;D program leads named; Brakes India roadmap workshop</a:t>
             </a:r>
           </a:p>
         </p:txBody>
@@ -14667,97 +14732,8 @@
         </p:nvSpPr>
         <p:spPr>
           <a:xfrm>
-            <a:off x="6217920" y="1417320"/>
-            <a:ext cx="5532120" cy="2286000"/>
-          </a:xfrm>
-          <a:prstGeom prst="rect">
-            <a:avLst/>
-          </a:prstGeom>
-          <a:solidFill>
-            <a:srgbClr val="F6F7F9"/>
-          </a:solidFill>
-          <a:ln w="15875">
-            <a:solidFill>
-              <a:srgbClr val="3C3937"/>
-            </a:solidFill>
-          </a:ln>
-        </p:spPr>
-        <p:txBody>
-          <a:bodyPr wrap="square" lIns="137160" rIns="137160" tIns="109728">
-            <a:spAutoFit/>
-          </a:bodyPr>
-          <a:lstStyle/>
-          <a:p>
-            <a:r>
-              <a:rPr sz="1450" b="1">
-                <a:solidFill>
-                  <a:srgbClr val="3C3937"/>
-                </a:solidFill>
-                <a:latin typeface="Arial"/>
-              </a:rPr>
-              <a:t>The adverse records</a:t>
-            </a:r>
-          </a:p>
-          <a:p>
-            <a:pPr>
-              <a:spcBef>
-                <a:spcPts val="400"/>
-              </a:spcBef>
-            </a:pPr>
-            <a:r>
-              <a:rPr sz="1100">
-                <a:solidFill>
-                  <a:srgbClr val="152130"/>
-                </a:solidFill>
-                <a:latin typeface="Arial"/>
-              </a:rPr>
-              <a:t>Bendix: 2019 ADB22X caliper recall (fire risk); 2024-25 EC-80 ECU recall, 442k units (software fix) — scale produces both install base and recalls</a:t>
-            </a:r>
-          </a:p>
-          <a:p>
-            <a:pPr>
-              <a:spcBef>
-                <a:spcPts val="400"/>
-              </a:spcBef>
-            </a:pPr>
-            <a:r>
-              <a:rPr sz="1100">
-                <a:solidFill>
-                  <a:srgbClr val="152130"/>
-                </a:solidFill>
-                <a:latin typeface="Arial"/>
-              </a:rPr>
-              <a:t>Haldex: lost a WILLFUL patent-infringement verdict to Bendix (copied its ADB); two modest component recalls</a:t>
-            </a:r>
-          </a:p>
-          <a:p>
-            <a:pPr>
-              <a:spcBef>
-                <a:spcPts val="400"/>
-              </a:spcBef>
-            </a:pPr>
-            <a:r>
-              <a:rPr sz="1100">
-                <a:solidFill>
-                  <a:srgbClr val="152130"/>
-                </a:solidFill>
-                <a:latin typeface="Arial"/>
-              </a:rPr>
-              <a:t>Akebono: the only Japanese supplier with documented adverse events — 2015 GM recall of its brake products + 2019-21 inspection-data falsification (no recall, governance black mark)</a:t>
-            </a:r>
-          </a:p>
-        </p:txBody>
-      </p:sp>
-      <p:sp>
-        <p:nvSpPr>
-          <p:cNvPr id="8" name="TextBox 7"/>
-          <p:cNvSpPr txBox="1"/>
-          <p:nvPr/>
-        </p:nvSpPr>
-        <p:spPr>
-          <a:xfrm>
-            <a:off x="457200" y="3840480"/>
-            <a:ext cx="5577840" cy="2240280"/>
+            <a:off x="3310128" y="1417320"/>
+            <a:ext cx="2743200" cy="4160520"/>
           </a:xfrm>
           <a:prstGeom prst="rect">
             <a:avLst/>
@@ -14784,71 +14760,208 @@
                 </a:solidFill>
                 <a:latin typeface="Arial"/>
               </a:rPr>
-              <a:t>TBK: externally invisible — in BOTH directions</a:t>
-            </a:r>
-          </a:p>
-          <a:p>
-            <a:pPr>
-              <a:spcBef>
-                <a:spcPts val="400"/>
-              </a:spcBef>
-            </a:pPr>
-            <a:r>
-              <a:rPr sz="1100">
-                <a:solidFill>
-                  <a:srgbClr val="152130"/>
-                </a:solidFill>
-                <a:latin typeface="Arial"/>
-              </a:rPr>
-              <a:t>No OEM award findable, no survey presence, no service network beyond Japan/Thailand</a:t>
-            </a:r>
-          </a:p>
-          <a:p>
-            <a:pPr>
-              <a:spcBef>
-                <a:spcPts val="400"/>
-              </a:spcBef>
-            </a:pPr>
-            <a:r>
-              <a:rPr sz="1100">
-                <a:solidFill>
-                  <a:srgbClr val="152130"/>
-                </a:solidFill>
-                <a:latin typeface="Arial"/>
-              </a:rPr>
-              <a:t>BUT also: no recall, no scandal, no misconduct report in Japanese-language search — a meaningful null in a scandal-rich industry (cf. Akebono)</a:t>
-            </a:r>
-          </a:p>
-          <a:p>
-            <a:pPr>
-              <a:spcBef>
-                <a:spcPts val="400"/>
-              </a:spcBef>
-            </a:pPr>
-            <a:r>
-              <a:rPr sz="1100">
-                <a:solidFill>
-                  <a:srgbClr val="152130"/>
-                </a:solidFill>
-                <a:latin typeface="Arial"/>
-              </a:rPr>
-              <a:t>75 years inside Isuzu/Fuso/Hino = quality is probably fine; 'probably fine, unproven' is the ceiling the evidence supports</a:t>
-            </a:r>
-          </a:p>
-          <a:p>
-            <a:pPr>
-              <a:spcBef>
-                <a:spcPts val="400"/>
-              </a:spcBef>
-            </a:pPr>
-            <a:r>
-              <a:rPr sz="1100">
-                <a:solidFill>
-                  <a:srgbClr val="152130"/>
-                </a:solidFill>
-                <a:latin typeface="Arial"/>
-              </a:rPr>
-              <a:t>Dataset moat scores align: Knorr 7.55 top, Akebono 4.95 bottom — TBK was unscored: literally unmeasurable from outside</a:t>
+              <a:t>Days 31-60: decisions</a:t>
+            </a:r>
+          </a:p>
+          <a:p>
+            <a:pPr>
+              <a:spcBef>
+                <a:spcPts val="400"/>
+              </a:spcBef>
+            </a:pPr>
+            <a:r>
+              <a:rPr sz="1000">
+                <a:solidFill>
+                  <a:srgbClr val="152130"/>
+                </a:solidFill>
+                <a:latin typeface="Arial"/>
+              </a:rPr>
+              <a:t>Exit / &gt;=15% reprice notices for the stop-loss list</a:t>
+            </a:r>
+          </a:p>
+          <a:p>
+            <a:pPr>
+              <a:spcBef>
+                <a:spcPts val="400"/>
+              </a:spcBef>
+            </a:pPr>
+            <a:r>
+              <a:rPr sz="1000">
+                <a:solidFill>
+                  <a:srgbClr val="152130"/>
+                </a:solidFill>
+                <a:latin typeface="Arial"/>
+              </a:rPr>
+              <a:t>Footprint blueprint: China fix-or-exit; Japan consolidation study; voluntary program designed (450 heads tranche 1, ¥2-3bn cash)</a:t>
+            </a:r>
+          </a:p>
+          <a:p>
+            <a:pPr>
+              <a:spcBef>
+                <a:spcPts val="400"/>
+              </a:spcBef>
+            </a:pPr>
+            <a:r>
+              <a:rPr sz="1000">
+                <a:solidFill>
+                  <a:srgbClr val="152130"/>
+                </a:solidFill>
+                <a:latin typeface="Arial"/>
+              </a:rPr>
+              <a:t>Aftermarket prices +10% NOW (~¥240M/yr; 30.2% CM proves headroom)</a:t>
+            </a:r>
+          </a:p>
+          <a:p>
+            <a:pPr>
+              <a:spcBef>
+                <a:spcPts val="400"/>
+              </a:spcBef>
+            </a:pPr>
+            <a:r>
+              <a:rPr sz="1000">
+                <a:solidFill>
+                  <a:srgbClr val="152130"/>
+                </a:solidFill>
+                <a:latin typeface="Arial"/>
+              </a:rPr>
+              <a:t>SAW renegotiation opened with Isuzu/Fuso — price paired with ADB/e-pump roadmap giveback</a:t>
+            </a:r>
+          </a:p>
+          <a:p>
+            <a:pPr>
+              <a:spcBef>
+                <a:spcPts val="400"/>
+              </a:spcBef>
+            </a:pPr>
+            <a:r>
+              <a:rPr sz="1000">
+                <a:solidFill>
+                  <a:srgbClr val="152130"/>
+                </a:solidFill>
+                <a:latin typeface="Arial"/>
+              </a:rPr>
+              <a:t>R&amp;D rebased to ¥2.7-2.8bn gated; 30-40 engineers hiring plan</a:t>
+            </a:r>
+          </a:p>
+        </p:txBody>
+      </p:sp>
+      <p:sp>
+        <p:nvSpPr>
+          <p:cNvPr id="8" name="TextBox 7"/>
+          <p:cNvSpPr txBox="1"/>
+          <p:nvPr/>
+        </p:nvSpPr>
+        <p:spPr>
+          <a:xfrm>
+            <a:off x="6163056" y="1417320"/>
+            <a:ext cx="2743200" cy="4160520"/>
+          </a:xfrm>
+          <a:prstGeom prst="rect">
+            <a:avLst/>
+          </a:prstGeom>
+          <a:solidFill>
+            <a:srgbClr val="F6F7F9"/>
+          </a:solidFill>
+          <a:ln w="15875">
+            <a:solidFill>
+              <a:srgbClr val="152130"/>
+            </a:solidFill>
+          </a:ln>
+        </p:spPr>
+        <p:txBody>
+          <a:bodyPr wrap="square" lIns="137160" rIns="137160" tIns="109728">
+            <a:spAutoFit/>
+          </a:bodyPr>
+          <a:lstStyle/>
+          <a:p>
+            <a:r>
+              <a:rPr sz="1450" b="1">
+                <a:solidFill>
+                  <a:srgbClr val="152130"/>
+                </a:solidFill>
+                <a:latin typeface="Arial"/>
+              </a:rPr>
+              <a:t>Days 61-90: execution</a:t>
+            </a:r>
+          </a:p>
+          <a:p>
+            <a:pPr>
+              <a:spcBef>
+                <a:spcPts val="400"/>
+              </a:spcBef>
+            </a:pPr>
+            <a:r>
+              <a:rPr sz="1000">
+                <a:solidFill>
+                  <a:srgbClr val="152130"/>
+                </a:solidFill>
+                <a:latin typeface="Arial"/>
+              </a:rPr>
+              <a:t>First reprice letters out; first exits done</a:t>
+            </a:r>
+          </a:p>
+          <a:p>
+            <a:pPr>
+              <a:spcBef>
+                <a:spcPts val="400"/>
+              </a:spcBef>
+            </a:pPr>
+            <a:r>
+              <a:rPr sz="1000">
+                <a:solidFill>
+                  <a:srgbClr val="152130"/>
+                </a:solidFill>
+                <a:latin typeface="Arial"/>
+              </a:rPr>
+              <a:t>Voluntary retirement launched; China decision announced</a:t>
+            </a:r>
+          </a:p>
+          <a:p>
+            <a:pPr>
+              <a:spcBef>
+                <a:spcPts val="400"/>
+              </a:spcBef>
+            </a:pPr>
+            <a:r>
+              <a:rPr sz="1000">
+                <a:solidFill>
+                  <a:srgbClr val="152130"/>
+                </a:solidFill>
+                <a:latin typeface="Arial"/>
+              </a:rPr>
+              <a:t>ADB pilot-line case to board (¥4.5-7.5bn phased, Brakes India co-invest)</a:t>
+            </a:r>
+          </a:p>
+          <a:p>
+            <a:pPr>
+              <a:spcBef>
+                <a:spcPts val="400"/>
+              </a:spcBef>
+            </a:pPr>
+            <a:r>
+              <a:rPr sz="1000">
+                <a:solidFill>
+                  <a:srgbClr val="152130"/>
+                </a:solidFill>
+                <a:latin typeface="Arial"/>
+              </a:rPr>
+              <a:t>E-pump: 2 development sockets converted to committed programs (ELF EV precharge; Denso AC ECWP)</a:t>
+            </a:r>
+          </a:p>
+          <a:p>
+            <a:pPr>
+              <a:spcBef>
+                <a:spcPts val="400"/>
+              </a:spcBef>
+            </a:pPr>
+            <a:r>
+              <a:rPr sz="1000">
+                <a:solidFill>
+                  <a:srgbClr val="152130"/>
+                </a:solidFill>
+                <a:latin typeface="Arial"/>
+              </a:rPr>
+              <a:t>KPI cockpit live: CM by product/customer, price capture, heads, OP bridge</a:t>
             </a:r>
           </a:p>
         </p:txBody>
@@ -14861,8 +14974,8 @@
         </p:nvSpPr>
         <p:spPr>
           <a:xfrm>
-            <a:off x="6217920" y="3840480"/>
-            <a:ext cx="5532120" cy="2240280"/>
+            <a:off x="9015984" y="1417320"/>
+            <a:ext cx="2715768" cy="4160520"/>
           </a:xfrm>
           <a:prstGeom prst="rect">
             <a:avLst/>
@@ -14889,55 +15002,87 @@
                 </a:solidFill>
                 <a:latin typeface="Arial"/>
               </a:rPr>
-              <a:t>TCO &amp; service: only proxies exist</a:t>
-            </a:r>
-          </a:p>
-          <a:p>
-            <a:pPr>
-              <a:spcBef>
-                <a:spcPts val="400"/>
-              </a:spcBef>
-            </a:pPr>
-            <a:r>
-              <a:rPr sz="1100">
-                <a:solidFill>
-                  <a:srgbClr val="152130"/>
-                </a:solidFill>
-                <a:latin typeface="Arial"/>
-              </a:rPr>
-              <a:t>Brand-level TCO data is NOT public (fleets don't publish; IMR studies paywalled) — standing must be inferred:</a:t>
-            </a:r>
-          </a:p>
-          <a:p>
-            <a:pPr>
-              <a:spcBef>
-                <a:spcPts val="400"/>
-              </a:spcBef>
-            </a:pPr>
-            <a:r>
-              <a:rPr sz="1100">
-                <a:solidFill>
-                  <a:srgbClr val="152130"/>
-                </a:solidFill>
-                <a:latin typeface="Arial"/>
-              </a:rPr>
-              <a:t>Install base: Bendix 20M+ ADBs in field | Contract renewals: Meritor-DTNA extension | Networks: Knorr's pan-EMEA certified workshop network vs TBK's Japan+Thailand footprint</a:t>
-            </a:r>
-          </a:p>
-          <a:p>
-            <a:pPr>
-              <a:spcBef>
-                <a:spcPts val="400"/>
-              </a:spcBef>
-            </a:pPr>
-            <a:r>
-              <a:rPr sz="1100">
-                <a:solidFill>
-                  <a:srgbClr val="152130"/>
-                </a:solidFill>
-                <a:latin typeface="Arial"/>
-              </a:rPr>
-              <a:t>On every proxy the systems players lead — and TBK does not appear</a:t>
+              <a:t>Days 91-180: lock-in</a:t>
+            </a:r>
+          </a:p>
+          <a:p>
+            <a:pPr>
+              <a:spcBef>
+                <a:spcPts val="400"/>
+              </a:spcBef>
+            </a:pPr>
+            <a:r>
+              <a:rPr sz="1000">
+                <a:solidFill>
+                  <a:srgbClr val="152130"/>
+                </a:solidFill>
+                <a:latin typeface="Arial"/>
+              </a:rPr>
+              <a:t>&gt;=2 of top-5 keiretsu contracts repriced (+6-9% realized); ONE demonstrated walk-away — the credibility event; sole-source cells first</a:t>
+            </a:r>
+          </a:p>
+          <a:p>
+            <a:pPr>
+              <a:spcBef>
+                <a:spcPts val="400"/>
+              </a:spcBef>
+            </a:pPr>
+            <a:r>
+              <a:rPr sz="1000">
+                <a:solidFill>
+                  <a:srgbClr val="152130"/>
+                </a:solidFill>
+                <a:latin typeface="Arial"/>
+              </a:rPr>
+              <a:t>200-250 heads out by day 180 (450 by month 12); first consolidation announced</a:t>
+            </a:r>
+          </a:p>
+          <a:p>
+            <a:pPr>
+              <a:spcBef>
+                <a:spcPts val="400"/>
+              </a:spcBef>
+            </a:pPr>
+            <a:r>
+              <a:rPr sz="1000">
+                <a:solidFill>
+                  <a:srgbClr val="152130"/>
+                </a:solidFill>
+                <a:latin typeface="Arial"/>
+              </a:rPr>
+              <a:t>R&amp;D full run-rate; first e-pump/TCU + SAW patents filed; JSAE paper</a:t>
+            </a:r>
+          </a:p>
+          <a:p>
+            <a:pPr>
+              <a:spcBef>
+                <a:spcPts val="400"/>
+              </a:spcBef>
+            </a:pPr>
+            <a:r>
+              <a:rPr sz="1000">
+                <a:solidFill>
+                  <a:srgbClr val="152130"/>
+                </a:solidFill>
+                <a:latin typeface="Arial"/>
+              </a:rPr>
+              <a:t>India pilot: SAW-class drums at MARKET price via Brakes India</a:t>
+            </a:r>
+          </a:p>
+          <a:p>
+            <a:pPr>
+              <a:spcBef>
+                <a:spcPts val="400"/>
+              </a:spcBef>
+            </a:pPr>
+            <a:r>
+              <a:rPr sz="1000">
+                <a:solidFill>
+                  <a:srgbClr val="152130"/>
+                </a:solidFill>
+                <a:latin typeface="Arial"/>
+              </a:rPr>
+              <a:t>Day-180 gate: OP run-rate &gt;= ¥3.5bn</a:t>
             </a:r>
           </a:p>
         </p:txBody>
@@ -14950,8 +15095,8 @@
         </p:nvSpPr>
         <p:spPr>
           <a:xfrm>
-            <a:off x="457200" y="6172200"/>
-            <a:ext cx="11247120" cy="548640"/>
+            <a:off x="457200" y="5760720"/>
+            <a:ext cx="11247120" cy="914400"/>
           </a:xfrm>
           <a:prstGeom prst="rect">
             <a:avLst/>
@@ -14966,13 +15111,13 @@
           <a:p>
             <a:pPr algn="l"/>
             <a:r>
-              <a:rPr sz="1200" b="1">
-                <a:solidFill>
-                  <a:srgbClr val="152130"/>
-                </a:solidFill>
-                <a:latin typeface="Arial"/>
-              </a:rPr>
-              <a:t>Strategic point: TBK's quality reputation is held entirely inside the keiretsu — like its market share, it cannot be sold to new customers. Making quality externally legible (awards, certifications, published data) is a cheap, necessary complement to the R&amp;D program.</a:t>
+              <a:rPr sz="1050" b="1">
+                <a:solidFill>
+                  <a:srgbClr val="152130"/>
+                </a:solidFill>
+                <a:latin typeface="Arial"/>
+              </a:rPr>
+              <a:t>Trajectory: ¥1.5bn (day 0) -&gt; &gt;=¥3.5bn/~6% (day 180: aftermarket pricing, pruning, first heads) -&gt; ~¥5bn/~8% (month 12: heads complete, China resolved, first renewals) -&gt; ¥6.3bn/10.6% (month 18: second renewal wave + consolidation, full R&amp;D absorbed). Self-funding from ~month 6; bridge via Brakes India proceeds, net-cash balance sheet, pruned-asset disposals. The discipline: four workstreams only — TBK's negative-ROIIC history shows the failure mode is spreading effort.</a:t>
             </a:r>
           </a:p>
         </p:txBody>
@@ -15059,7 +15204,7 @@
                 </a:solidFill>
                 <a:latin typeface="Times New Roman"/>
               </a:rPr>
-              <a:t>Product evaluation II: innovation output</a:t>
+              <a:t>Product evaluation I: external quality &amp; service evidence</a:t>
             </a:r>
           </a:p>
         </p:txBody>
@@ -15147,7 +15292,7 @@
                 </a:solidFill>
                 <a:latin typeface="Arial"/>
               </a:rPr>
-              <a:t>Patents, documented product firsts, and technical-society awards — the externally visible output of R&amp;D</a:t>
+              <a:t>Evidence hierarchy: NHTSA recalls (supplier named by law) &gt; OEM-granted awards &gt; independent surveys &gt; patents &gt; self-claims. Japan's MLIT does not name suppliers</a:t>
             </a:r>
           </a:p>
         </p:txBody>
@@ -15188,7 +15333,7 @@
                 </a:solidFill>
                 <a:latin typeface="Arial"/>
               </a:rPr>
-              <a:t>The patent gap (independent registries)</a:t>
+              <a:t>The validated leaders</a:t>
             </a:r>
           </a:p>
           <a:p>
@@ -15204,7 +15349,7 @@
                 </a:solidFill>
                 <a:latin typeface="Arial"/>
               </a:rPr>
-              <a:t>Knorr-Bremse: ~2,900 patent families / 10,900+ patents (~7,500 in the truck division)</a:t>
+              <a:t>Knorr-Bremse/Bendix: PACCAR supplier-performance award 6 consecutive yrs; 3 plants on PACCAR's &lt;=10 defects-per-million list; ETM 'Best Brand - Brakes' (German fleet/driver vote) 19 YEARS RUNNING; ~85% of NA air-disc wheel ends</a:t>
             </a:r>
           </a:p>
           <a:p>
@@ -15220,7 +15365,7 @@
                 </a:solidFill>
                 <a:latin typeface="Arial"/>
               </a:rPr>
-              <a:t>Aisin: ~680 JP applications/yr; Clarivate Top-100 Global Innovator 7 consecutive years</a:t>
+              <a:t>Meritor/Cummins: Daimler 'Masters of Quality' + 2020 global quality award ('1.3M axles/brakes at low defect rate'); DTNA EXTENDED its ADB contract — revealed preference</a:t>
             </a:r>
           </a:p>
           <a:p>
@@ -15236,55 +15381,7 @@
                 </a:solidFill>
                 <a:latin typeface="Arial"/>
               </a:rPr>
-              <a:t>Akebono: ~321 US-registered patents</a:t>
-            </a:r>
-          </a:p>
-          <a:p>
-            <a:pPr>
-              <a:spcBef>
-                <a:spcPts val="400"/>
-              </a:spcBef>
-            </a:pPr>
-            <a:r>
-              <a:rPr sz="1100">
-                <a:solidFill>
-                  <a:srgbClr val="152130"/>
-                </a:solidFill>
-                <a:latin typeface="Arial"/>
-              </a:rPr>
-              <a:t>Mikuni: e-oil-pump fault-detection patents — its BEV-truck win is engineering-backed</a:t>
-            </a:r>
-          </a:p>
-          <a:p>
-            <a:pPr>
-              <a:spcBef>
-                <a:spcPts val="400"/>
-              </a:spcBef>
-            </a:pPr>
-            <a:r>
-              <a:rPr sz="1100">
-                <a:solidFill>
-                  <a:srgbClr val="152130"/>
-                </a:solidFill>
-                <a:latin typeface="Arial"/>
-              </a:rPr>
-              <a:t>TBK: 2-3 patent GRANTS PER YEAR — two to three orders of magnitude below the leaders.</a:t>
-            </a:r>
-          </a:p>
-          <a:p>
-            <a:pPr>
-              <a:spcBef>
-                <a:spcPts val="400"/>
-              </a:spcBef>
-            </a:pPr>
-            <a:r>
-              <a:rPr sz="1100">
-                <a:solidFill>
-                  <a:srgbClr val="152130"/>
-                </a:solidFill>
-                <a:latin typeface="Arial"/>
-              </a:rPr>
-              <a:t>Independently confirms the capitalized-R&amp;D finding ($43M vs $2.6-5.6bn) from a different data source</a:t>
+              <a:t>Brembo: all 10 F1 teams; AMS brake-brand vote 11 of 13 years</a:t>
             </a:r>
           </a:p>
         </p:txBody>
@@ -15299,6 +15396,200 @@
           <a:xfrm>
             <a:off x="6217920" y="1417320"/>
             <a:ext cx="5532120" cy="2286000"/>
+          </a:xfrm>
+          <a:prstGeom prst="rect">
+            <a:avLst/>
+          </a:prstGeom>
+          <a:solidFill>
+            <a:srgbClr val="F6F7F9"/>
+          </a:solidFill>
+          <a:ln w="15875">
+            <a:solidFill>
+              <a:srgbClr val="3C3937"/>
+            </a:solidFill>
+          </a:ln>
+        </p:spPr>
+        <p:txBody>
+          <a:bodyPr wrap="square" lIns="137160" rIns="137160" tIns="109728">
+            <a:spAutoFit/>
+          </a:bodyPr>
+          <a:lstStyle/>
+          <a:p>
+            <a:r>
+              <a:rPr sz="1450" b="1">
+                <a:solidFill>
+                  <a:srgbClr val="3C3937"/>
+                </a:solidFill>
+                <a:latin typeface="Arial"/>
+              </a:rPr>
+              <a:t>The adverse records</a:t>
+            </a:r>
+          </a:p>
+          <a:p>
+            <a:pPr>
+              <a:spcBef>
+                <a:spcPts val="400"/>
+              </a:spcBef>
+            </a:pPr>
+            <a:r>
+              <a:rPr sz="1100">
+                <a:solidFill>
+                  <a:srgbClr val="152130"/>
+                </a:solidFill>
+                <a:latin typeface="Arial"/>
+              </a:rPr>
+              <a:t>Bendix: 2019 ADB22X caliper recall (fire risk); 2024-25 EC-80 ECU recall, 442k units (software fix) — scale produces both install base and recalls</a:t>
+            </a:r>
+          </a:p>
+          <a:p>
+            <a:pPr>
+              <a:spcBef>
+                <a:spcPts val="400"/>
+              </a:spcBef>
+            </a:pPr>
+            <a:r>
+              <a:rPr sz="1100">
+                <a:solidFill>
+                  <a:srgbClr val="152130"/>
+                </a:solidFill>
+                <a:latin typeface="Arial"/>
+              </a:rPr>
+              <a:t>Haldex: lost a WILLFUL patent-infringement verdict to Bendix (copied its ADB); two modest component recalls</a:t>
+            </a:r>
+          </a:p>
+          <a:p>
+            <a:pPr>
+              <a:spcBef>
+                <a:spcPts val="400"/>
+              </a:spcBef>
+            </a:pPr>
+            <a:r>
+              <a:rPr sz="1100">
+                <a:solidFill>
+                  <a:srgbClr val="152130"/>
+                </a:solidFill>
+                <a:latin typeface="Arial"/>
+              </a:rPr>
+              <a:t>Akebono: the only Japanese supplier with documented adverse events — 2015 GM recall of its brake products + 2019-21 inspection-data falsification (no recall, governance black mark)</a:t>
+            </a:r>
+          </a:p>
+        </p:txBody>
+      </p:sp>
+      <p:sp>
+        <p:nvSpPr>
+          <p:cNvPr id="8" name="TextBox 7"/>
+          <p:cNvSpPr txBox="1"/>
+          <p:nvPr/>
+        </p:nvSpPr>
+        <p:spPr>
+          <a:xfrm>
+            <a:off x="457200" y="3840480"/>
+            <a:ext cx="5577840" cy="2240280"/>
+          </a:xfrm>
+          <a:prstGeom prst="rect">
+            <a:avLst/>
+          </a:prstGeom>
+          <a:solidFill>
+            <a:srgbClr val="F6F7F9"/>
+          </a:solidFill>
+          <a:ln w="15875">
+            <a:solidFill>
+              <a:srgbClr val="152130"/>
+            </a:solidFill>
+          </a:ln>
+        </p:spPr>
+        <p:txBody>
+          <a:bodyPr wrap="square" lIns="137160" rIns="137160" tIns="109728">
+            <a:spAutoFit/>
+          </a:bodyPr>
+          <a:lstStyle/>
+          <a:p>
+            <a:r>
+              <a:rPr sz="1450" b="1">
+                <a:solidFill>
+                  <a:srgbClr val="152130"/>
+                </a:solidFill>
+                <a:latin typeface="Arial"/>
+              </a:rPr>
+              <a:t>TBK: externally invisible — in BOTH directions</a:t>
+            </a:r>
+          </a:p>
+          <a:p>
+            <a:pPr>
+              <a:spcBef>
+                <a:spcPts val="400"/>
+              </a:spcBef>
+            </a:pPr>
+            <a:r>
+              <a:rPr sz="1100">
+                <a:solidFill>
+                  <a:srgbClr val="152130"/>
+                </a:solidFill>
+                <a:latin typeface="Arial"/>
+              </a:rPr>
+              <a:t>No OEM award findable, no survey presence, no service network beyond Japan/Thailand</a:t>
+            </a:r>
+          </a:p>
+          <a:p>
+            <a:pPr>
+              <a:spcBef>
+                <a:spcPts val="400"/>
+              </a:spcBef>
+            </a:pPr>
+            <a:r>
+              <a:rPr sz="1100">
+                <a:solidFill>
+                  <a:srgbClr val="152130"/>
+                </a:solidFill>
+                <a:latin typeface="Arial"/>
+              </a:rPr>
+              <a:t>BUT also: no recall, no scandal, no misconduct report in Japanese-language search — a meaningful null in a scandal-rich industry (cf. Akebono)</a:t>
+            </a:r>
+          </a:p>
+          <a:p>
+            <a:pPr>
+              <a:spcBef>
+                <a:spcPts val="400"/>
+              </a:spcBef>
+            </a:pPr>
+            <a:r>
+              <a:rPr sz="1100">
+                <a:solidFill>
+                  <a:srgbClr val="152130"/>
+                </a:solidFill>
+                <a:latin typeface="Arial"/>
+              </a:rPr>
+              <a:t>75 years inside Isuzu/Fuso/Hino = quality is probably fine; 'probably fine, unproven' is the ceiling the evidence supports</a:t>
+            </a:r>
+          </a:p>
+          <a:p>
+            <a:pPr>
+              <a:spcBef>
+                <a:spcPts val="400"/>
+              </a:spcBef>
+            </a:pPr>
+            <a:r>
+              <a:rPr sz="1100">
+                <a:solidFill>
+                  <a:srgbClr val="152130"/>
+                </a:solidFill>
+                <a:latin typeface="Arial"/>
+              </a:rPr>
+              <a:t>Dataset moat scores align: Knorr 7.55 top, Akebono 4.95 bottom — TBK was unscored: literally unmeasurable from outside</a:t>
+            </a:r>
+          </a:p>
+        </p:txBody>
+      </p:sp>
+      <p:sp>
+        <p:nvSpPr>
+          <p:cNvPr id="9" name="TextBox 8"/>
+          <p:cNvSpPr txBox="1"/>
+          <p:nvPr/>
+        </p:nvSpPr>
+        <p:spPr>
+          <a:xfrm>
+            <a:off x="6217920" y="3840480"/>
+            <a:ext cx="5532120" cy="2240280"/>
           </a:xfrm>
           <a:prstGeom prst="rect">
             <a:avLst/>
@@ -15325,7 +15616,7 @@
                 </a:solidFill>
                 <a:latin typeface="Arial"/>
               </a:rPr>
-              <a:t>Documented product firsts</a:t>
+              <a:t>TCO &amp; service: only proxies exist</a:t>
             </a:r>
           </a:p>
           <a:p>
@@ -15341,7 +15632,7 @@
                 </a:solidFill>
                 <a:latin typeface="Arial"/>
               </a:rPr>
-              <a:t>Knorr: EBS 1989; series air disc brake 1992; Actros/Scania volume 1996</a:t>
+              <a:t>Brand-level TCO data is NOT public (fleets don't publish; IMR studies paywalled) — standing must be inferred:</a:t>
             </a:r>
           </a:p>
           <a:p>
@@ -15357,7 +15648,7 @@
                 </a:solidFill>
                 <a:latin typeface="Arial"/>
               </a:rPr>
-              <a:t>Bendix ADB22X: 2005, now ~85% of NA air-disc wheel ends</a:t>
+              <a:t>Install base: Bendix 20M+ ADBs in field | Contract renewals: Meritor-DTNA extension | Networks: Knorr's pan-EMEA certified workshop network vs TBK's Japan+Thailand footprint</a:t>
             </a:r>
           </a:p>
           <a:p>
@@ -15373,151 +15664,49 @@
                 </a:solidFill>
                 <a:latin typeface="Arial"/>
               </a:rPr>
-              <a:t>UD Quon 2017: first all-disc Japanese heavy truck</a:t>
-            </a:r>
-          </a:p>
-          <a:p>
-            <a:pPr>
-              <a:spcBef>
-                <a:spcPts val="400"/>
-              </a:spcBef>
-            </a:pPr>
-            <a:r>
-              <a:rPr sz="1100">
-                <a:solidFill>
-                  <a:srgbClr val="152130"/>
-                </a:solidFill>
-                <a:latin typeface="Arial"/>
-              </a:rPr>
-              <a:t>Mikuni 2022: e-oil pump in production for a domestic small BEV truck</a:t>
-            </a:r>
-          </a:p>
-          <a:p>
-            <a:pPr>
-              <a:spcBef>
-                <a:spcPts val="400"/>
-              </a:spcBef>
-            </a:pPr>
-            <a:r>
-              <a:rPr sz="1100">
-                <a:solidFill>
-                  <a:srgbClr val="152130"/>
-                </a:solidFill>
-                <a:latin typeface="Arial"/>
-              </a:rPr>
-              <a:t>Akebono FY2023: JSME Technology Award — world-first electric parking brake unit for medium/light trucks (innovating through distress)</a:t>
-            </a:r>
-          </a:p>
-          <a:p>
-            <a:pPr>
-              <a:spcBef>
-                <a:spcPts val="400"/>
-              </a:spcBef>
-            </a:pPr>
-            <a:r>
-              <a:rPr sz="1100">
-                <a:solidFill>
-                  <a:srgbClr val="152130"/>
-                </a:solidFill>
-                <a:latin typeface="Arial"/>
-              </a:rPr>
-              <a:t>TBK: retarders since the 1960s; 19.5" ADB exhibited (year unconfirmed: 2019 vs 2022 sources conflict); e-pumps/TCU in development</a:t>
-            </a:r>
-          </a:p>
-        </p:txBody>
-      </p:sp>
-      <p:sp>
-        <p:nvSpPr>
-          <p:cNvPr id="8" name="TextBox 7"/>
+              <a:t>On every proxy the systems players lead — and TBK does not appear</a:t>
+            </a:r>
+          </a:p>
+        </p:txBody>
+      </p:sp>
+      <p:sp>
+        <p:nvSpPr>
+          <p:cNvPr id="10" name="TextBox 9"/>
           <p:cNvSpPr txBox="1"/>
           <p:nvPr/>
         </p:nvSpPr>
         <p:spPr>
           <a:xfrm>
-            <a:off x="457200" y="3840480"/>
-            <a:ext cx="11292840" cy="1737360"/>
-          </a:xfrm>
-          <a:prstGeom prst="rect">
-            <a:avLst/>
-          </a:prstGeom>
-          <a:solidFill>
-            <a:srgbClr val="F6F7F9"/>
-          </a:solidFill>
-          <a:ln w="15875">
-            <a:solidFill>
-              <a:srgbClr val="152130"/>
-            </a:solidFill>
-          </a:ln>
-        </p:spPr>
-        <p:txBody>
-          <a:bodyPr wrap="square" lIns="137160" rIns="137160" tIns="109728">
+            <a:off x="457200" y="6172200"/>
+            <a:ext cx="11247120" cy="548640"/>
+          </a:xfrm>
+          <a:prstGeom prst="rect">
+            <a:avLst/>
+          </a:prstGeom>
+          <a:noFill/>
+        </p:spPr>
+        <p:txBody>
+          <a:bodyPr wrap="square">
             <a:spAutoFit/>
           </a:bodyPr>
           <a:lstStyle/>
           <a:p>
-            <a:r>
-              <a:rPr sz="1450" b="1">
-                <a:solidFill>
-                  <a:srgbClr val="152130"/>
-                </a:solidFill>
-                <a:latin typeface="Arial"/>
-              </a:rPr>
-              <a:t>The pattern — and TBK's fix</a:t>
-            </a:r>
-          </a:p>
-          <a:p>
-            <a:pPr>
-              <a:spcBef>
-                <a:spcPts val="400"/>
-              </a:spcBef>
-            </a:pPr>
-            <a:r>
-              <a:rPr sz="1150">
-                <a:solidFill>
-                  <a:srgbClr val="152130"/>
-                </a:solidFill>
-                <a:latin typeface="Arial"/>
-              </a:rPr>
-              <a:t>Innovation output tracks the moat and margin rankings almost perfectly: the companies with validated quality (Knorr, Cummins) also hold the patent fortresses and the product firsts; the distressed (Akebono) still out-publish TBK; even the similarly-sized peer (Mikuni) protects its e-pump work with patents.</a:t>
-            </a:r>
-          </a:p>
-          <a:p>
-            <a:pPr>
-              <a:spcBef>
-                <a:spcPts val="400"/>
-              </a:spcBef>
-            </a:pPr>
-            <a:r>
-              <a:rPr sz="1150">
-                <a:solidFill>
-                  <a:srgbClr val="152130"/>
-                </a:solidFill>
-                <a:latin typeface="Arial"/>
-              </a:rPr>
-              <a:t>TBK's innovation is real but INVISIBLE: 75 years of retarder/brake/pump engineering, an ADB prototype, e-pumps and a thermal control unit in development — none of it patented at scale, published at JSAE, or externally awarded. Invisible innovation cannot win sockets outside the keiretsu.</a:t>
-            </a:r>
-          </a:p>
-          <a:p>
-            <a:pPr>
-              <a:spcBef>
-                <a:spcPts val="400"/>
-              </a:spcBef>
-            </a:pPr>
-            <a:r>
-              <a:rPr sz="1150">
-                <a:solidFill>
-                  <a:srgbClr val="152130"/>
-                </a:solidFill>
-                <a:latin typeface="Arial"/>
-              </a:rPr>
-              <a:t>Fix costs little: patent the e-pump/TCU and ADB work (Mikuni shows the value), publish, pursue external validation — a required complement to the R&amp;D spend itself.</a:t>
-            </a:r>
-          </a:p>
-        </p:txBody>
-      </p:sp>
-      <p:sp>
-        <p:nvSpPr>
-          <p:cNvPr id="9" name="TextBox 8"/>
+            <a:pPr algn="l"/>
+            <a:r>
+              <a:rPr sz="1200" b="1">
+                <a:solidFill>
+                  <a:srgbClr val="152130"/>
+                </a:solidFill>
+                <a:latin typeface="Arial"/>
+              </a:rPr>
+              <a:t>Strategic point: TBK's quality reputation is held entirely inside the keiretsu — like its market share, it cannot be sold to new customers. Making quality externally legible (awards, certifications, published data) is a cheap, necessary complement to the R&amp;D program.</a:t>
+            </a:r>
+          </a:p>
+        </p:txBody>
+      </p:sp>
+      <p:sp>
+        <p:nvSpPr>
+          <p:cNvPr id="11" name="TextBox 10"/>
           <p:cNvSpPr txBox="1"/>
           <p:nvPr/>
         </p:nvSpPr>
@@ -15597,7 +15786,7 @@
                 </a:solidFill>
                 <a:latin typeface="Times New Roman"/>
               </a:rPr>
-              <a:t>Moat framework ranking: TBK scores 5.38 — 9th of 13</a:t>
+              <a:t>Product evaluation II: innovation output</a:t>
             </a:r>
           </a:p>
         </p:txBody>
@@ -15685,39 +15874,21 @@
                 </a:solidFill>
                 <a:latin typeface="Arial"/>
               </a:rPr>
-              <a:t>Unified Niche Compounder Methodology v3.2: 10 weighted criteria, domain-blended internal/external evidence. Thresholds: &gt;7.8 Compounder, 6.5-7.8 Watchlist, &lt;6.5 Pass</a:t>
-            </a:r>
-          </a:p>
-        </p:txBody>
-      </p:sp>
-      <p:graphicFrame>
-        <p:nvGraphicFramePr>
-          <p:cNvPr id="6" name="Chart 5"/>
-          <p:cNvGraphicFramePr>
-            <a:graphicFrameLocks noGrp="1"/>
-          </p:cNvGraphicFramePr>
-          <p:nvPr/>
-        </p:nvGraphicFramePr>
-        <p:xfrm>
-          <a:off x="457200" y="1463040"/>
-          <a:ext cx="6675120" cy="4572000"/>
-        </p:xfrm>
-        <a:graphic>
-          <a:graphicData uri="http://schemas.openxmlformats.org/drawingml/2006/chart">
-            <c:chart xmlns:c="http://schemas.openxmlformats.org/drawingml/2006/chart" r:id="rId3"/>
-          </a:graphicData>
-        </a:graphic>
-      </p:graphicFrame>
-      <p:sp>
-        <p:nvSpPr>
-          <p:cNvPr id="7" name="TextBox 6"/>
+              <a:t>Patents, documented product firsts, and technical-society awards — the externally visible output of R&amp;D</a:t>
+            </a:r>
+          </a:p>
+        </p:txBody>
+      </p:sp>
+      <p:sp>
+        <p:nvSpPr>
+          <p:cNvPr id="6" name="TextBox 5"/>
           <p:cNvSpPr txBox="1"/>
           <p:nvPr/>
         </p:nvSpPr>
         <p:spPr>
           <a:xfrm>
-            <a:off x="7406640" y="1463040"/>
-            <a:ext cx="4343400" cy="2194560"/>
+            <a:off x="457200" y="1417320"/>
+            <a:ext cx="5577840" cy="2286000"/>
           </a:xfrm>
           <a:prstGeom prst="rect">
             <a:avLst/>
@@ -15744,133 +15915,117 @@
                 </a:solidFill>
                 <a:latin typeface="Arial"/>
               </a:rPr>
-              <a:t>Bands</a:t>
-            </a:r>
-          </a:p>
-          <a:p>
-            <a:pPr>
-              <a:spcBef>
-                <a:spcPts val="400"/>
-              </a:spcBef>
-            </a:pPr>
-            <a:r>
-              <a:rPr sz="1200">
-                <a:solidFill>
-                  <a:srgbClr val="152130"/>
-                </a:solidFill>
-                <a:latin typeface="Arial"/>
-              </a:rPr>
-              <a:t>Compounder Target (&gt;7.8): NONE —</a:t>
-            </a:r>
-          </a:p>
-          <a:p>
-            <a:pPr>
-              <a:spcBef>
-                <a:spcPts val="400"/>
-              </a:spcBef>
-            </a:pPr>
-            <a:r>
-              <a:rPr sz="1200">
-                <a:solidFill>
-                  <a:srgbClr val="152130"/>
-                </a:solidFill>
-                <a:latin typeface="Arial"/>
-              </a:rPr>
-              <a:t>no company in this industry qualifies</a:t>
-            </a:r>
-          </a:p>
-          <a:p>
-            <a:pPr>
-              <a:spcBef>
-                <a:spcPts val="400"/>
-              </a:spcBef>
-            </a:pPr>
-            <a:r>
-              <a:rPr sz="1200">
-                <a:solidFill>
-                  <a:srgbClr val="152130"/>
-                </a:solidFill>
-                <a:latin typeface="Arial"/>
-              </a:rPr>
-              <a:t>Watchlist (6.5-7.8): Knorr 7.55,</a:t>
-            </a:r>
-          </a:p>
-          <a:p>
-            <a:pPr>
-              <a:spcBef>
-                <a:spcPts val="400"/>
-              </a:spcBef>
-            </a:pPr>
-            <a:r>
-              <a:rPr sz="1200">
-                <a:solidFill>
-                  <a:srgbClr val="152130"/>
-                </a:solidFill>
-                <a:latin typeface="Arial"/>
-              </a:rPr>
-              <a:t>Concentric 6.98, Brembo/Cummins 6.73,</a:t>
-            </a:r>
-          </a:p>
-          <a:p>
-            <a:pPr>
-              <a:spcBef>
-                <a:spcPts val="400"/>
-              </a:spcBef>
-            </a:pPr>
-            <a:r>
-              <a:rPr sz="1200">
-                <a:solidFill>
-                  <a:srgbClr val="152130"/>
-                </a:solidFill>
-                <a:latin typeface="Arial"/>
-              </a:rPr>
-              <a:t>SAF-Holland 6.59</a:t>
-            </a:r>
-          </a:p>
-          <a:p>
-            <a:pPr>
-              <a:spcBef>
-                <a:spcPts val="400"/>
-              </a:spcBef>
-            </a:pPr>
-            <a:r>
-              <a:rPr sz="1200">
-                <a:solidFill>
-                  <a:srgbClr val="152130"/>
-                </a:solidFill>
-                <a:latin typeface="Arial"/>
-              </a:rPr>
-              <a:t>Pass (&lt;6.5): everyone else —</a:t>
-            </a:r>
-          </a:p>
-          <a:p>
-            <a:pPr>
-              <a:spcBef>
-                <a:spcPts val="400"/>
-              </a:spcBef>
-            </a:pPr>
-            <a:r>
-              <a:rPr sz="1200">
-                <a:solidFill>
-                  <a:srgbClr val="152130"/>
-                </a:solidFill>
-                <a:latin typeface="Arial"/>
-              </a:rPr>
-              <a:t>incl. TBK 5.38, Mikuni 5.00</a:t>
-            </a:r>
-          </a:p>
-        </p:txBody>
-      </p:sp>
-      <p:sp>
-        <p:nvSpPr>
-          <p:cNvPr id="8" name="TextBox 7"/>
+              <a:t>The patent gap (independent registries)</a:t>
+            </a:r>
+          </a:p>
+          <a:p>
+            <a:pPr>
+              <a:spcBef>
+                <a:spcPts val="400"/>
+              </a:spcBef>
+            </a:pPr>
+            <a:r>
+              <a:rPr sz="1100">
+                <a:solidFill>
+                  <a:srgbClr val="152130"/>
+                </a:solidFill>
+                <a:latin typeface="Arial"/>
+              </a:rPr>
+              <a:t>Knorr-Bremse: ~2,900 patent families / 10,900+ patents (~7,500 in the truck division)</a:t>
+            </a:r>
+          </a:p>
+          <a:p>
+            <a:pPr>
+              <a:spcBef>
+                <a:spcPts val="400"/>
+              </a:spcBef>
+            </a:pPr>
+            <a:r>
+              <a:rPr sz="1100">
+                <a:solidFill>
+                  <a:srgbClr val="152130"/>
+                </a:solidFill>
+                <a:latin typeface="Arial"/>
+              </a:rPr>
+              <a:t>Aisin: ~680 JP applications/yr; Clarivate Top-100 Global Innovator 7 consecutive years</a:t>
+            </a:r>
+          </a:p>
+          <a:p>
+            <a:pPr>
+              <a:spcBef>
+                <a:spcPts val="400"/>
+              </a:spcBef>
+            </a:pPr>
+            <a:r>
+              <a:rPr sz="1100">
+                <a:solidFill>
+                  <a:srgbClr val="152130"/>
+                </a:solidFill>
+                <a:latin typeface="Arial"/>
+              </a:rPr>
+              <a:t>Akebono: ~321 US-registered patents</a:t>
+            </a:r>
+          </a:p>
+          <a:p>
+            <a:pPr>
+              <a:spcBef>
+                <a:spcPts val="400"/>
+              </a:spcBef>
+            </a:pPr>
+            <a:r>
+              <a:rPr sz="1100">
+                <a:solidFill>
+                  <a:srgbClr val="152130"/>
+                </a:solidFill>
+                <a:latin typeface="Arial"/>
+              </a:rPr>
+              <a:t>Mikuni: e-oil-pump fault-detection patents — its BEV-truck win is engineering-backed</a:t>
+            </a:r>
+          </a:p>
+          <a:p>
+            <a:pPr>
+              <a:spcBef>
+                <a:spcPts val="400"/>
+              </a:spcBef>
+            </a:pPr>
+            <a:r>
+              <a:rPr sz="1100">
+                <a:solidFill>
+                  <a:srgbClr val="152130"/>
+                </a:solidFill>
+                <a:latin typeface="Arial"/>
+              </a:rPr>
+              <a:t>TBK: 2-3 patent GRANTS PER YEAR — two to three orders of magnitude below the leaders.</a:t>
+            </a:r>
+          </a:p>
+          <a:p>
+            <a:pPr>
+              <a:spcBef>
+                <a:spcPts val="400"/>
+              </a:spcBef>
+            </a:pPr>
+            <a:r>
+              <a:rPr sz="1100">
+                <a:solidFill>
+                  <a:srgbClr val="152130"/>
+                </a:solidFill>
+                <a:latin typeface="Arial"/>
+              </a:rPr>
+              <a:t>Independently confirms the capitalized-R&amp;D finding ($43M vs $2.6-5.6bn) from a different data source</a:t>
+            </a:r>
+          </a:p>
+        </p:txBody>
+      </p:sp>
+      <p:sp>
+        <p:nvSpPr>
+          <p:cNvPr id="7" name="TextBox 6"/>
           <p:cNvSpPr txBox="1"/>
           <p:nvPr/>
         </p:nvSpPr>
         <p:spPr>
           <a:xfrm>
-            <a:off x="7406640" y="3794760"/>
-            <a:ext cx="4343400" cy="2240280"/>
+            <a:off x="6217920" y="1417320"/>
+            <a:ext cx="5532120" cy="2286000"/>
           </a:xfrm>
           <a:prstGeom prst="rect">
             <a:avLst/>
@@ -15880,7 +16035,7 @@
           </a:solidFill>
           <a:ln w="15875">
             <a:solidFill>
-              <a:srgbClr val="3C3937"/>
+              <a:srgbClr val="6F8990"/>
             </a:solidFill>
           </a:ln>
         </p:spPr>
@@ -15893,139 +16048,196 @@
             <a:r>
               <a:rPr sz="1450" b="1">
                 <a:solidFill>
-                  <a:srgbClr val="3C3937"/>
-                </a:solidFill>
-                <a:latin typeface="Arial"/>
-              </a:rPr>
-              <a:t>TBK's decomposition is unique</a:t>
-            </a:r>
-          </a:p>
-          <a:p>
-            <a:pPr>
-              <a:spcBef>
-                <a:spcPts val="400"/>
-              </a:spcBef>
-            </a:pPr>
-            <a:r>
-              <a:rPr sz="1200">
-                <a:solidFill>
-                  <a:srgbClr val="152130"/>
-                </a:solidFill>
-                <a:latin typeface="Arial"/>
-              </a:rPr>
-              <a:t>The strongest STATIC moat of the</a:t>
-            </a:r>
-          </a:p>
-          <a:p>
-            <a:pPr>
-              <a:spcBef>
-                <a:spcPts val="400"/>
-              </a:spcBef>
-            </a:pPr>
-            <a:r>
-              <a:rPr sz="1200">
-                <a:solidFill>
-                  <a:srgbClr val="152130"/>
-                </a:solidFill>
-                <a:latin typeface="Arial"/>
-              </a:rPr>
-              <a:t>unscored set (Criticality 7.5 +</a:t>
-            </a:r>
-          </a:p>
-          <a:p>
-            <a:pPr>
-              <a:spcBef>
-                <a:spcPts val="400"/>
-              </a:spcBef>
-            </a:pPr>
-            <a:r>
-              <a:rPr sz="1200">
-                <a:solidFill>
-                  <a:srgbClr val="152130"/>
-                </a:solidFill>
-                <a:latin typeface="Arial"/>
-              </a:rPr>
-              <a:t>Hegemony 8.0 = 2.33 of its 5.38)</a:t>
-            </a:r>
-          </a:p>
-          <a:p>
-            <a:pPr>
-              <a:spcBef>
-                <a:spcPts val="400"/>
-              </a:spcBef>
-            </a:pPr>
-            <a:r>
-              <a:rPr sz="1200">
-                <a:solidFill>
-                  <a:srgbClr val="152130"/>
-                </a:solidFill>
-                <a:latin typeface="Arial"/>
-              </a:rPr>
-              <a:t>…drained by the worst COMPOUNDING</a:t>
-            </a:r>
-          </a:p>
-          <a:p>
-            <a:pPr>
-              <a:spcBef>
-                <a:spcPts val="400"/>
-              </a:spcBef>
-            </a:pPr>
-            <a:r>
-              <a:rPr sz="1200">
-                <a:solidFill>
-                  <a:srgbClr val="152130"/>
-                </a:solidFill>
-                <a:latin typeface="Arial"/>
-              </a:rPr>
-              <a:t>engine in the whole group (Capital</a:t>
-            </a:r>
-          </a:p>
-          <a:p>
-            <a:pPr>
-              <a:spcBef>
-                <a:spcPts val="400"/>
-              </a:spcBef>
-            </a:pPr>
-            <a:r>
-              <a:rPr sz="1200">
-                <a:solidFill>
-                  <a:srgbClr val="152130"/>
-                </a:solidFill>
-                <a:latin typeface="Arial"/>
-              </a:rPr>
-              <a:t>allocation 2.0 + Runway 3.0 = just</a:t>
-            </a:r>
-          </a:p>
-          <a:p>
-            <a:pPr>
-              <a:spcBef>
-                <a:spcPts val="400"/>
-              </a:spcBef>
-            </a:pPr>
-            <a:r>
-              <a:rPr sz="1200">
-                <a:solidFill>
-                  <a:srgbClr val="152130"/>
-                </a:solidFill>
-                <a:latin typeface="Arial"/>
-              </a:rPr>
-              <a:t>0.50 of a possible 2.00)</a:t>
-            </a:r>
-          </a:p>
-          <a:p>
-            <a:pPr>
-              <a:spcBef>
-                <a:spcPts val="400"/>
-              </a:spcBef>
-            </a:pPr>
-            <a:r>
-              <a:rPr sz="1200">
-                <a:solidFill>
-                  <a:srgbClr val="152130"/>
-                </a:solidFill>
-                <a:latin typeface="Arial"/>
-              </a:rPr>
-              <a:t>Durable problem, fragile solution</a:t>
+                  <a:srgbClr val="6F8990"/>
+                </a:solidFill>
+                <a:latin typeface="Arial"/>
+              </a:rPr>
+              <a:t>Documented product firsts</a:t>
+            </a:r>
+          </a:p>
+          <a:p>
+            <a:pPr>
+              <a:spcBef>
+                <a:spcPts val="400"/>
+              </a:spcBef>
+            </a:pPr>
+            <a:r>
+              <a:rPr sz="1100">
+                <a:solidFill>
+                  <a:srgbClr val="152130"/>
+                </a:solidFill>
+                <a:latin typeface="Arial"/>
+              </a:rPr>
+              <a:t>Knorr: EBS 1989; series air disc brake 1992; Actros/Scania volume 1996</a:t>
+            </a:r>
+          </a:p>
+          <a:p>
+            <a:pPr>
+              <a:spcBef>
+                <a:spcPts val="400"/>
+              </a:spcBef>
+            </a:pPr>
+            <a:r>
+              <a:rPr sz="1100">
+                <a:solidFill>
+                  <a:srgbClr val="152130"/>
+                </a:solidFill>
+                <a:latin typeface="Arial"/>
+              </a:rPr>
+              <a:t>Bendix ADB22X: 2005, now ~85% of NA air-disc wheel ends</a:t>
+            </a:r>
+          </a:p>
+          <a:p>
+            <a:pPr>
+              <a:spcBef>
+                <a:spcPts val="400"/>
+              </a:spcBef>
+            </a:pPr>
+            <a:r>
+              <a:rPr sz="1100">
+                <a:solidFill>
+                  <a:srgbClr val="152130"/>
+                </a:solidFill>
+                <a:latin typeface="Arial"/>
+              </a:rPr>
+              <a:t>UD Quon 2017: first all-disc Japanese heavy truck</a:t>
+            </a:r>
+          </a:p>
+          <a:p>
+            <a:pPr>
+              <a:spcBef>
+                <a:spcPts val="400"/>
+              </a:spcBef>
+            </a:pPr>
+            <a:r>
+              <a:rPr sz="1100">
+                <a:solidFill>
+                  <a:srgbClr val="152130"/>
+                </a:solidFill>
+                <a:latin typeface="Arial"/>
+              </a:rPr>
+              <a:t>Mikuni 2022: e-oil pump in production for a domestic small BEV truck</a:t>
+            </a:r>
+          </a:p>
+          <a:p>
+            <a:pPr>
+              <a:spcBef>
+                <a:spcPts val="400"/>
+              </a:spcBef>
+            </a:pPr>
+            <a:r>
+              <a:rPr sz="1100">
+                <a:solidFill>
+                  <a:srgbClr val="152130"/>
+                </a:solidFill>
+                <a:latin typeface="Arial"/>
+              </a:rPr>
+              <a:t>Akebono FY2023: JSME Technology Award — world-first electric parking brake unit for medium/light trucks (innovating through distress)</a:t>
+            </a:r>
+          </a:p>
+          <a:p>
+            <a:pPr>
+              <a:spcBef>
+                <a:spcPts val="400"/>
+              </a:spcBef>
+            </a:pPr>
+            <a:r>
+              <a:rPr sz="1100">
+                <a:solidFill>
+                  <a:srgbClr val="152130"/>
+                </a:solidFill>
+                <a:latin typeface="Arial"/>
+              </a:rPr>
+              <a:t>TBK: retarders since the 1960s; 19.5" ADB exhibited (year unconfirmed: 2019 vs 2022 sources conflict); e-pumps/TCU in development</a:t>
+            </a:r>
+          </a:p>
+        </p:txBody>
+      </p:sp>
+      <p:sp>
+        <p:nvSpPr>
+          <p:cNvPr id="8" name="TextBox 7"/>
+          <p:cNvSpPr txBox="1"/>
+          <p:nvPr/>
+        </p:nvSpPr>
+        <p:spPr>
+          <a:xfrm>
+            <a:off x="457200" y="3840480"/>
+            <a:ext cx="11292840" cy="1737360"/>
+          </a:xfrm>
+          <a:prstGeom prst="rect">
+            <a:avLst/>
+          </a:prstGeom>
+          <a:solidFill>
+            <a:srgbClr val="F6F7F9"/>
+          </a:solidFill>
+          <a:ln w="15875">
+            <a:solidFill>
+              <a:srgbClr val="152130"/>
+            </a:solidFill>
+          </a:ln>
+        </p:spPr>
+        <p:txBody>
+          <a:bodyPr wrap="square" lIns="137160" rIns="137160" tIns="109728">
+            <a:spAutoFit/>
+          </a:bodyPr>
+          <a:lstStyle/>
+          <a:p>
+            <a:r>
+              <a:rPr sz="1450" b="1">
+                <a:solidFill>
+                  <a:srgbClr val="152130"/>
+                </a:solidFill>
+                <a:latin typeface="Arial"/>
+              </a:rPr>
+              <a:t>The pattern — and TBK's fix</a:t>
+            </a:r>
+          </a:p>
+          <a:p>
+            <a:pPr>
+              <a:spcBef>
+                <a:spcPts val="400"/>
+              </a:spcBef>
+            </a:pPr>
+            <a:r>
+              <a:rPr sz="1150">
+                <a:solidFill>
+                  <a:srgbClr val="152130"/>
+                </a:solidFill>
+                <a:latin typeface="Arial"/>
+              </a:rPr>
+              <a:t>Innovation output tracks the moat and margin rankings almost perfectly: the companies with validated quality (Knorr, Cummins) also hold the patent fortresses and the product firsts; the distressed (Akebono) still out-publish TBK; even the similarly-sized peer (Mikuni) protects its e-pump work with patents.</a:t>
+            </a:r>
+          </a:p>
+          <a:p>
+            <a:pPr>
+              <a:spcBef>
+                <a:spcPts val="400"/>
+              </a:spcBef>
+            </a:pPr>
+            <a:r>
+              <a:rPr sz="1150">
+                <a:solidFill>
+                  <a:srgbClr val="152130"/>
+                </a:solidFill>
+                <a:latin typeface="Arial"/>
+              </a:rPr>
+              <a:t>TBK's innovation is real but INVISIBLE: 75 years of retarder/brake/pump engineering, an ADB prototype, e-pumps and a thermal control unit in development — none of it patented at scale, published at JSAE, or externally awarded. Invisible innovation cannot win sockets outside the keiretsu.</a:t>
+            </a:r>
+          </a:p>
+          <a:p>
+            <a:pPr>
+              <a:spcBef>
+                <a:spcPts val="400"/>
+              </a:spcBef>
+            </a:pPr>
+            <a:r>
+              <a:rPr sz="1150">
+                <a:solidFill>
+                  <a:srgbClr val="152130"/>
+                </a:solidFill>
+                <a:latin typeface="Arial"/>
+              </a:rPr>
+              <a:t>Fix costs little: patent the e-pump/TCU and ADB work (Mikuni shows the value), publish, pursue external validation — a required complement to the R&amp;D spend itself.</a:t>
             </a:r>
           </a:p>
         </p:txBody>
@@ -16112,7 +16324,7 @@
                 </a:solidFill>
                 <a:latin typeface="Times New Roman"/>
               </a:rPr>
-              <a:t>TBK's moat profile: where it is strong, where it bleeds</a:t>
+              <a:t>Moat framework ranking: TBK scores 5.38 — 9th of 13</a:t>
             </a:r>
           </a:p>
         </p:txBody>
@@ -16200,7 +16412,7 @@
                 </a:solidFill>
                 <a:latin typeface="Arial"/>
               </a:rPr>
-              <a:t>Chapter scores (1-10) — TBK vs Concentric (best newly scored) vs the average of the five newly scored peers (TBK excluded from the average)</a:t>
+              <a:t>Unified Niche Compounder Methodology v3.2: 10 weighted criteria, domain-blended internal/external evidence. Thresholds: &gt;7.8 Compounder, 6.5-7.8 Watchlist, &lt;6.5 Pass</a:t>
             </a:r>
           </a:p>
         </p:txBody>
@@ -16214,8 +16426,8 @@
           <p:nvPr/>
         </p:nvGraphicFramePr>
         <p:xfrm>
-          <a:off x="365760" y="1371600"/>
-          <a:ext cx="6400800" cy="4846320"/>
+          <a:off x="457200" y="1463040"/>
+          <a:ext cx="6675120" cy="4572000"/>
         </p:xfrm>
         <a:graphic>
           <a:graphicData uri="http://schemas.openxmlformats.org/drawingml/2006/chart">
@@ -16231,8 +16443,8 @@
         </p:nvSpPr>
         <p:spPr>
           <a:xfrm>
-            <a:off x="7040880" y="1417320"/>
-            <a:ext cx="4709160" cy="2286000"/>
+            <a:off x="7406640" y="1463040"/>
+            <a:ext cx="4343400" cy="2194560"/>
           </a:xfrm>
           <a:prstGeom prst="rect">
             <a:avLst/>
@@ -16242,7 +16454,7 @@
           </a:solidFill>
           <a:ln w="15875">
             <a:solidFill>
-              <a:srgbClr val="6F8990"/>
+              <a:srgbClr val="152130"/>
             </a:solidFill>
           </a:ln>
         </p:spPr>
@@ -16255,59 +16467,123 @@
             <a:r>
               <a:rPr sz="1450" b="1">
                 <a:solidFill>
-                  <a:srgbClr val="6F8990"/>
-                </a:solidFill>
-                <a:latin typeface="Arial"/>
-              </a:rPr>
-              <a:t>TBK's STRONG points</a:t>
-            </a:r>
-          </a:p>
-          <a:p>
-            <a:pPr>
-              <a:spcBef>
-                <a:spcPts val="400"/>
-              </a:spcBef>
-            </a:pPr>
-            <a:r>
-              <a:rPr sz="1150">
-                <a:solidFill>
-                  <a:srgbClr val="152130"/>
-                </a:solidFill>
-                <a:latin typeface="Arial"/>
-              </a:rPr>
-              <a:t>Market hegemony 8.0 — top domestic share in entry-proof niches (best score in the set on this criterion)</a:t>
-            </a:r>
-          </a:p>
-          <a:p>
-            <a:pPr>
-              <a:spcBef>
-                <a:spcPts val="400"/>
-              </a:spcBef>
-            </a:pPr>
-            <a:r>
-              <a:rPr sz="1150">
-                <a:solidFill>
-                  <a:srgbClr val="152130"/>
-                </a:solidFill>
-                <a:latin typeface="Arial"/>
-              </a:rPr>
-              <a:t>Criticality 7.5 — life-support product: &lt;1% of truck cost protecting 100% of value</a:t>
-            </a:r>
-          </a:p>
-          <a:p>
-            <a:pPr>
-              <a:spcBef>
-                <a:spcPts val="400"/>
-              </a:spcBef>
-            </a:pPr>
-            <a:r>
-              <a:rPr sz="1150">
-                <a:solidFill>
-                  <a:srgbClr val="152130"/>
-                </a:solidFill>
-                <a:latin typeface="Arial"/>
-              </a:rPr>
-              <a:t>Demand horizon 7.0 — stopping &amp; cooling heavy trucks is permanent; content GROWS with electrification</a:t>
+                  <a:srgbClr val="152130"/>
+                </a:solidFill>
+                <a:latin typeface="Arial"/>
+              </a:rPr>
+              <a:t>Bands</a:t>
+            </a:r>
+          </a:p>
+          <a:p>
+            <a:pPr>
+              <a:spcBef>
+                <a:spcPts val="400"/>
+              </a:spcBef>
+            </a:pPr>
+            <a:r>
+              <a:rPr sz="1200">
+                <a:solidFill>
+                  <a:srgbClr val="152130"/>
+                </a:solidFill>
+                <a:latin typeface="Arial"/>
+              </a:rPr>
+              <a:t>Compounder Target (&gt;7.8): NONE —</a:t>
+            </a:r>
+          </a:p>
+          <a:p>
+            <a:pPr>
+              <a:spcBef>
+                <a:spcPts val="400"/>
+              </a:spcBef>
+            </a:pPr>
+            <a:r>
+              <a:rPr sz="1200">
+                <a:solidFill>
+                  <a:srgbClr val="152130"/>
+                </a:solidFill>
+                <a:latin typeface="Arial"/>
+              </a:rPr>
+              <a:t>no company in this industry qualifies</a:t>
+            </a:r>
+          </a:p>
+          <a:p>
+            <a:pPr>
+              <a:spcBef>
+                <a:spcPts val="400"/>
+              </a:spcBef>
+            </a:pPr>
+            <a:r>
+              <a:rPr sz="1200">
+                <a:solidFill>
+                  <a:srgbClr val="152130"/>
+                </a:solidFill>
+                <a:latin typeface="Arial"/>
+              </a:rPr>
+              <a:t>Watchlist (6.5-7.8): Knorr 7.55,</a:t>
+            </a:r>
+          </a:p>
+          <a:p>
+            <a:pPr>
+              <a:spcBef>
+                <a:spcPts val="400"/>
+              </a:spcBef>
+            </a:pPr>
+            <a:r>
+              <a:rPr sz="1200">
+                <a:solidFill>
+                  <a:srgbClr val="152130"/>
+                </a:solidFill>
+                <a:latin typeface="Arial"/>
+              </a:rPr>
+              <a:t>Concentric 6.98, Brembo/Cummins 6.73,</a:t>
+            </a:r>
+          </a:p>
+          <a:p>
+            <a:pPr>
+              <a:spcBef>
+                <a:spcPts val="400"/>
+              </a:spcBef>
+            </a:pPr>
+            <a:r>
+              <a:rPr sz="1200">
+                <a:solidFill>
+                  <a:srgbClr val="152130"/>
+                </a:solidFill>
+                <a:latin typeface="Arial"/>
+              </a:rPr>
+              <a:t>SAF-Holland 6.59</a:t>
+            </a:r>
+          </a:p>
+          <a:p>
+            <a:pPr>
+              <a:spcBef>
+                <a:spcPts val="400"/>
+              </a:spcBef>
+            </a:pPr>
+            <a:r>
+              <a:rPr sz="1200">
+                <a:solidFill>
+                  <a:srgbClr val="152130"/>
+                </a:solidFill>
+                <a:latin typeface="Arial"/>
+              </a:rPr>
+              <a:t>Pass (&lt;6.5): everyone else —</a:t>
+            </a:r>
+          </a:p>
+          <a:p>
+            <a:pPr>
+              <a:spcBef>
+                <a:spcPts val="400"/>
+              </a:spcBef>
+            </a:pPr>
+            <a:r>
+              <a:rPr sz="1200">
+                <a:solidFill>
+                  <a:srgbClr val="152130"/>
+                </a:solidFill>
+                <a:latin typeface="Arial"/>
+              </a:rPr>
+              <a:t>incl. TBK 5.38, Mikuni 5.00</a:t>
             </a:r>
           </a:p>
         </p:txBody>
@@ -16320,8 +16596,8 @@
         </p:nvSpPr>
         <p:spPr>
           <a:xfrm>
-            <a:off x="7040880" y="3840480"/>
-            <a:ext cx="4709160" cy="2286000"/>
+            <a:off x="7406640" y="3794760"/>
+            <a:ext cx="4343400" cy="2240280"/>
           </a:xfrm>
           <a:prstGeom prst="rect">
             <a:avLst/>
@@ -16348,87 +16624,135 @@
                 </a:solidFill>
                 <a:latin typeface="Arial"/>
               </a:rPr>
-              <a:t>TBK's WEAK points</a:t>
-            </a:r>
-          </a:p>
-          <a:p>
-            <a:pPr>
-              <a:spcBef>
-                <a:spcPts val="400"/>
-              </a:spcBef>
-            </a:pPr>
-            <a:r>
-              <a:rPr sz="1150">
-                <a:solidFill>
-                  <a:srgbClr val="152130"/>
-                </a:solidFill>
-                <a:latin typeface="Arial"/>
-              </a:rPr>
-              <a:t>Capital allocation 2.0 — ROIIC negative at every horizon with 100% reinvestment (worst in the group)</a:t>
-            </a:r>
-          </a:p>
-          <a:p>
-            <a:pPr>
-              <a:spcBef>
-                <a:spcPts val="400"/>
-              </a:spcBef>
-            </a:pPr>
-            <a:r>
-              <a:rPr sz="1150">
-                <a:solidFill>
-                  <a:srgbClr val="152130"/>
-                </a:solidFill>
-                <a:latin typeface="Arial"/>
-              </a:rPr>
-              <a:t>Ecosystem 2.0 — standalone hardware, no installed-base annuity (vs Knorr's EBS/TruckServices)</a:t>
-            </a:r>
-          </a:p>
-          <a:p>
-            <a:pPr>
-              <a:spcBef>
-                <a:spcPts val="400"/>
-              </a:spcBef>
-            </a:pPr>
-            <a:r>
-              <a:rPr sz="1150">
-                <a:solidFill>
-                  <a:srgbClr val="152130"/>
-                </a:solidFill>
-                <a:latin typeface="Arial"/>
-              </a:rPr>
-              <a:t>Lifecycle cost 3.0 — no cost edge: underloaded plants in COGS</a:t>
-            </a:r>
-          </a:p>
-          <a:p>
-            <a:pPr>
-              <a:spcBef>
-                <a:spcPts val="400"/>
-              </a:spcBef>
-            </a:pPr>
-            <a:r>
-              <a:rPr sz="1150">
-                <a:solidFill>
-                  <a:srgbClr val="152130"/>
-                </a:solidFill>
-                <a:latin typeface="Arial"/>
-              </a:rPr>
-              <a:t>Reinvestment runway 3.0 — runway exists but unproven; $43M knowledge stock</a:t>
-            </a:r>
-          </a:p>
-          <a:p>
-            <a:pPr>
-              <a:spcBef>
-                <a:spcPts val="400"/>
-              </a:spcBef>
-            </a:pPr>
-            <a:r>
-              <a:rPr sz="1150">
-                <a:solidFill>
-                  <a:srgbClr val="152130"/>
-                </a:solidFill>
-                <a:latin typeface="Arial"/>
-              </a:rPr>
-              <a:t>Substitution 3.5 — both products in active displacement</a:t>
+              <a:t>TBK's decomposition is unique</a:t>
+            </a:r>
+          </a:p>
+          <a:p>
+            <a:pPr>
+              <a:spcBef>
+                <a:spcPts val="400"/>
+              </a:spcBef>
+            </a:pPr>
+            <a:r>
+              <a:rPr sz="1200">
+                <a:solidFill>
+                  <a:srgbClr val="152130"/>
+                </a:solidFill>
+                <a:latin typeface="Arial"/>
+              </a:rPr>
+              <a:t>The strongest STATIC moat of the</a:t>
+            </a:r>
+          </a:p>
+          <a:p>
+            <a:pPr>
+              <a:spcBef>
+                <a:spcPts val="400"/>
+              </a:spcBef>
+            </a:pPr>
+            <a:r>
+              <a:rPr sz="1200">
+                <a:solidFill>
+                  <a:srgbClr val="152130"/>
+                </a:solidFill>
+                <a:latin typeface="Arial"/>
+              </a:rPr>
+              <a:t>unscored set (Criticality 7.5 +</a:t>
+            </a:r>
+          </a:p>
+          <a:p>
+            <a:pPr>
+              <a:spcBef>
+                <a:spcPts val="400"/>
+              </a:spcBef>
+            </a:pPr>
+            <a:r>
+              <a:rPr sz="1200">
+                <a:solidFill>
+                  <a:srgbClr val="152130"/>
+                </a:solidFill>
+                <a:latin typeface="Arial"/>
+              </a:rPr>
+              <a:t>Hegemony 8.0 = 2.33 of its 5.38)</a:t>
+            </a:r>
+          </a:p>
+          <a:p>
+            <a:pPr>
+              <a:spcBef>
+                <a:spcPts val="400"/>
+              </a:spcBef>
+            </a:pPr>
+            <a:r>
+              <a:rPr sz="1200">
+                <a:solidFill>
+                  <a:srgbClr val="152130"/>
+                </a:solidFill>
+                <a:latin typeface="Arial"/>
+              </a:rPr>
+              <a:t>…drained by the worst COMPOUNDING</a:t>
+            </a:r>
+          </a:p>
+          <a:p>
+            <a:pPr>
+              <a:spcBef>
+                <a:spcPts val="400"/>
+              </a:spcBef>
+            </a:pPr>
+            <a:r>
+              <a:rPr sz="1200">
+                <a:solidFill>
+                  <a:srgbClr val="152130"/>
+                </a:solidFill>
+                <a:latin typeface="Arial"/>
+              </a:rPr>
+              <a:t>engine in the whole group (Capital</a:t>
+            </a:r>
+          </a:p>
+          <a:p>
+            <a:pPr>
+              <a:spcBef>
+                <a:spcPts val="400"/>
+              </a:spcBef>
+            </a:pPr>
+            <a:r>
+              <a:rPr sz="1200">
+                <a:solidFill>
+                  <a:srgbClr val="152130"/>
+                </a:solidFill>
+                <a:latin typeface="Arial"/>
+              </a:rPr>
+              <a:t>allocation 2.0 + Runway 3.0 = just</a:t>
+            </a:r>
+          </a:p>
+          <a:p>
+            <a:pPr>
+              <a:spcBef>
+                <a:spcPts val="400"/>
+              </a:spcBef>
+            </a:pPr>
+            <a:r>
+              <a:rPr sz="1200">
+                <a:solidFill>
+                  <a:srgbClr val="152130"/>
+                </a:solidFill>
+                <a:latin typeface="Arial"/>
+              </a:rPr>
+              <a:t>0.50 of a possible 2.00)</a:t>
+            </a:r>
+          </a:p>
+          <a:p>
+            <a:pPr>
+              <a:spcBef>
+                <a:spcPts val="400"/>
+              </a:spcBef>
+            </a:pPr>
+            <a:r>
+              <a:rPr sz="1200">
+                <a:solidFill>
+                  <a:srgbClr val="152130"/>
+                </a:solidFill>
+                <a:latin typeface="Arial"/>
+              </a:rPr>
+              <a:t>Durable problem, fragile solution</a:t>
             </a:r>
           </a:p>
         </p:txBody>
@@ -16515,7 +16839,7 @@
                 </a:solidFill>
                 <a:latin typeface="Times New Roman"/>
               </a:rPr>
-              <a:t>Moat criteria: TBK vs competitors, criterion by criterion</a:t>
+              <a:t>TBK's moat profile: where it is strong, where it bleeds</a:t>
             </a:r>
           </a:p>
         </p:txBody>
@@ -16603,7 +16927,7 @@
                 </a:solidFill>
                 <a:latin typeface="Arial"/>
               </a:rPr>
-              <a:t>Newly-scored companies (chapter detail unavailable for the 5 pre-scored names). TBK in red</a:t>
+              <a:t>Chapter scores (1-10) — TBK vs Concentric (best newly scored) vs the average of the five newly scored peers (TBK excluded from the average)</a:t>
             </a:r>
           </a:p>
         </p:txBody>
@@ -16617,8 +16941,8 @@
           <p:nvPr/>
         </p:nvGraphicFramePr>
         <p:xfrm>
-          <a:off x="365760" y="1417320"/>
-          <a:ext cx="5669280" cy="4297680"/>
+          <a:off x="365760" y="1371600"/>
+          <a:ext cx="6400800" cy="4846320"/>
         </p:xfrm>
         <a:graphic>
           <a:graphicData uri="http://schemas.openxmlformats.org/drawingml/2006/chart">
@@ -16626,24 +16950,95 @@
           </a:graphicData>
         </a:graphic>
       </p:graphicFrame>
-      <p:graphicFrame>
-        <p:nvGraphicFramePr>
-          <p:cNvPr id="7" name="Chart 6"/>
-          <p:cNvGraphicFramePr>
-            <a:graphicFrameLocks noGrp="1"/>
-          </p:cNvGraphicFramePr>
-          <p:nvPr/>
-        </p:nvGraphicFramePr>
-        <p:xfrm>
-          <a:off x="6172200" y="1417320"/>
-          <a:ext cx="5669280" cy="4297680"/>
-        </p:xfrm>
-        <a:graphic>
-          <a:graphicData uri="http://schemas.openxmlformats.org/drawingml/2006/chart">
-            <c:chart xmlns:c="http://schemas.openxmlformats.org/drawingml/2006/chart" r:id="rId4"/>
-          </a:graphicData>
-        </a:graphic>
-      </p:graphicFrame>
+      <p:sp>
+        <p:nvSpPr>
+          <p:cNvPr id="7" name="TextBox 6"/>
+          <p:cNvSpPr txBox="1"/>
+          <p:nvPr/>
+        </p:nvSpPr>
+        <p:spPr>
+          <a:xfrm>
+            <a:off x="7040880" y="1417320"/>
+            <a:ext cx="4709160" cy="2286000"/>
+          </a:xfrm>
+          <a:prstGeom prst="rect">
+            <a:avLst/>
+          </a:prstGeom>
+          <a:solidFill>
+            <a:srgbClr val="F6F7F9"/>
+          </a:solidFill>
+          <a:ln w="15875">
+            <a:solidFill>
+              <a:srgbClr val="6F8990"/>
+            </a:solidFill>
+          </a:ln>
+        </p:spPr>
+        <p:txBody>
+          <a:bodyPr wrap="square" lIns="137160" rIns="137160" tIns="109728">
+            <a:spAutoFit/>
+          </a:bodyPr>
+          <a:lstStyle/>
+          <a:p>
+            <a:r>
+              <a:rPr sz="1450" b="1">
+                <a:solidFill>
+                  <a:srgbClr val="6F8990"/>
+                </a:solidFill>
+                <a:latin typeface="Arial"/>
+              </a:rPr>
+              <a:t>TBK's STRONG points</a:t>
+            </a:r>
+          </a:p>
+          <a:p>
+            <a:pPr>
+              <a:spcBef>
+                <a:spcPts val="400"/>
+              </a:spcBef>
+            </a:pPr>
+            <a:r>
+              <a:rPr sz="1150">
+                <a:solidFill>
+                  <a:srgbClr val="152130"/>
+                </a:solidFill>
+                <a:latin typeface="Arial"/>
+              </a:rPr>
+              <a:t>Market hegemony 8.0 — top domestic share in entry-proof niches (best score in the set on this criterion)</a:t>
+            </a:r>
+          </a:p>
+          <a:p>
+            <a:pPr>
+              <a:spcBef>
+                <a:spcPts val="400"/>
+              </a:spcBef>
+            </a:pPr>
+            <a:r>
+              <a:rPr sz="1150">
+                <a:solidFill>
+                  <a:srgbClr val="152130"/>
+                </a:solidFill>
+                <a:latin typeface="Arial"/>
+              </a:rPr>
+              <a:t>Criticality 7.5 — life-support product: &lt;1% of truck cost protecting 100% of value</a:t>
+            </a:r>
+          </a:p>
+          <a:p>
+            <a:pPr>
+              <a:spcBef>
+                <a:spcPts val="400"/>
+              </a:spcBef>
+            </a:pPr>
+            <a:r>
+              <a:rPr sz="1150">
+                <a:solidFill>
+                  <a:srgbClr val="152130"/>
+                </a:solidFill>
+                <a:latin typeface="Arial"/>
+              </a:rPr>
+              <a:t>Demand horizon 7.0 — stopping &amp; cooling heavy trucks is permanent; content GROWS with electrification</a:t>
+            </a:r>
+          </a:p>
+        </p:txBody>
+      </p:sp>
       <p:sp>
         <p:nvSpPr>
           <p:cNvPr id="8" name="TextBox 7"/>
@@ -16652,29 +17047,115 @@
         </p:nvSpPr>
         <p:spPr>
           <a:xfrm>
-            <a:off x="457200" y="5897880"/>
-            <a:ext cx="11247120" cy="777240"/>
-          </a:xfrm>
-          <a:prstGeom prst="rect">
-            <a:avLst/>
-          </a:prstGeom>
-          <a:noFill/>
-        </p:spPr>
-        <p:txBody>
-          <a:bodyPr wrap="square">
+            <a:off x="7040880" y="3840480"/>
+            <a:ext cx="4709160" cy="2286000"/>
+          </a:xfrm>
+          <a:prstGeom prst="rect">
+            <a:avLst/>
+          </a:prstGeom>
+          <a:solidFill>
+            <a:srgbClr val="F6F7F9"/>
+          </a:solidFill>
+          <a:ln w="15875">
+            <a:solidFill>
+              <a:srgbClr val="3C3937"/>
+            </a:solidFill>
+          </a:ln>
+        </p:spPr>
+        <p:txBody>
+          <a:bodyPr wrap="square" lIns="137160" rIns="137160" tIns="109728">
             <a:spAutoFit/>
           </a:bodyPr>
           <a:lstStyle/>
           <a:p>
-            <a:pPr algn="l"/>
-            <a:r>
-              <a:rPr sz="1050" b="0">
-                <a:solidFill>
-                  <a:srgbClr val="556A83"/>
-                </a:solidFill>
-                <a:latin typeface="Arial"/>
-              </a:rPr>
-              <a:t>Read: in Phase 1 (left) TBK leads or matches on Criticality and Hegemony and collapses on Ecosystem/Lifecycle cost. In Phases 2-3 (right) TBK is last or near-last on every engine criterion — while Concentric (green) leads precisely there. Closing the gap to Concentric is execution (allocation, substitution positioning), not moat-building: the moat already exists.</a:t>
+            <a:r>
+              <a:rPr sz="1450" b="1">
+                <a:solidFill>
+                  <a:srgbClr val="3C3937"/>
+                </a:solidFill>
+                <a:latin typeface="Arial"/>
+              </a:rPr>
+              <a:t>TBK's WEAK points</a:t>
+            </a:r>
+          </a:p>
+          <a:p>
+            <a:pPr>
+              <a:spcBef>
+                <a:spcPts val="400"/>
+              </a:spcBef>
+            </a:pPr>
+            <a:r>
+              <a:rPr sz="1150">
+                <a:solidFill>
+                  <a:srgbClr val="152130"/>
+                </a:solidFill>
+                <a:latin typeface="Arial"/>
+              </a:rPr>
+              <a:t>Capital allocation 2.0 — ROIIC negative at every horizon with 100% reinvestment (worst in the group)</a:t>
+            </a:r>
+          </a:p>
+          <a:p>
+            <a:pPr>
+              <a:spcBef>
+                <a:spcPts val="400"/>
+              </a:spcBef>
+            </a:pPr>
+            <a:r>
+              <a:rPr sz="1150">
+                <a:solidFill>
+                  <a:srgbClr val="152130"/>
+                </a:solidFill>
+                <a:latin typeface="Arial"/>
+              </a:rPr>
+              <a:t>Ecosystem 2.0 — standalone hardware, no installed-base annuity (vs Knorr's EBS/TruckServices)</a:t>
+            </a:r>
+          </a:p>
+          <a:p>
+            <a:pPr>
+              <a:spcBef>
+                <a:spcPts val="400"/>
+              </a:spcBef>
+            </a:pPr>
+            <a:r>
+              <a:rPr sz="1150">
+                <a:solidFill>
+                  <a:srgbClr val="152130"/>
+                </a:solidFill>
+                <a:latin typeface="Arial"/>
+              </a:rPr>
+              <a:t>Lifecycle cost 3.0 — no cost edge: underloaded plants in COGS</a:t>
+            </a:r>
+          </a:p>
+          <a:p>
+            <a:pPr>
+              <a:spcBef>
+                <a:spcPts val="400"/>
+              </a:spcBef>
+            </a:pPr>
+            <a:r>
+              <a:rPr sz="1150">
+                <a:solidFill>
+                  <a:srgbClr val="152130"/>
+                </a:solidFill>
+                <a:latin typeface="Arial"/>
+              </a:rPr>
+              <a:t>Reinvestment runway 3.0 — runway exists but unproven; $43M knowledge stock</a:t>
+            </a:r>
+          </a:p>
+          <a:p>
+            <a:pPr>
+              <a:spcBef>
+                <a:spcPts val="400"/>
+              </a:spcBef>
+            </a:pPr>
+            <a:r>
+              <a:rPr sz="1150">
+                <a:solidFill>
+                  <a:srgbClr val="152130"/>
+                </a:solidFill>
+                <a:latin typeface="Arial"/>
+              </a:rPr>
+              <a:t>Substitution 3.5 — both products in active displacement</a:t>
             </a:r>
           </a:p>
         </p:txBody>
@@ -16761,7 +17242,7 @@
                 </a:solidFill>
                 <a:latin typeface="Times New Roman"/>
               </a:rPr>
-              <a:t>Research quality &amp; methodology notes</a:t>
+              <a:t>Moat criteria: TBK vs competitors, criterion by criterion</a:t>
             </a:r>
           </a:p>
         </p:txBody>
@@ -16849,370 +17330,78 @@
                 </a:solidFill>
                 <a:latin typeface="Arial"/>
               </a:rPr>
-              <a:t>How this material was produced, verified, and where its limits are</a:t>
-            </a:r>
-          </a:p>
-        </p:txBody>
-      </p:sp>
-      <p:sp>
-        <p:nvSpPr>
-          <p:cNvPr id="6" name="TextBox 5"/>
+              <a:t>Newly-scored companies (chapter detail unavailable for the 5 pre-scored names). TBK in red</a:t>
+            </a:r>
+          </a:p>
+        </p:txBody>
+      </p:sp>
+      <p:graphicFrame>
+        <p:nvGraphicFramePr>
+          <p:cNvPr id="6" name="Chart 5"/>
+          <p:cNvGraphicFramePr>
+            <a:graphicFrameLocks noGrp="1"/>
+          </p:cNvGraphicFramePr>
+          <p:nvPr/>
+        </p:nvGraphicFramePr>
+        <p:xfrm>
+          <a:off x="365760" y="1417320"/>
+          <a:ext cx="5669280" cy="4297680"/>
+        </p:xfrm>
+        <a:graphic>
+          <a:graphicData uri="http://schemas.openxmlformats.org/drawingml/2006/chart">
+            <c:chart xmlns:c="http://schemas.openxmlformats.org/drawingml/2006/chart" r:id="rId3"/>
+          </a:graphicData>
+        </a:graphic>
+      </p:graphicFrame>
+      <p:graphicFrame>
+        <p:nvGraphicFramePr>
+          <p:cNvPr id="7" name="Chart 6"/>
+          <p:cNvGraphicFramePr>
+            <a:graphicFrameLocks noGrp="1"/>
+          </p:cNvGraphicFramePr>
+          <p:nvPr/>
+        </p:nvGraphicFramePr>
+        <p:xfrm>
+          <a:off x="6172200" y="1417320"/>
+          <a:ext cx="5669280" cy="4297680"/>
+        </p:xfrm>
+        <a:graphic>
+          <a:graphicData uri="http://schemas.openxmlformats.org/drawingml/2006/chart">
+            <c:chart xmlns:c="http://schemas.openxmlformats.org/drawingml/2006/chart" r:id="rId4"/>
+          </a:graphicData>
+        </a:graphic>
+      </p:graphicFrame>
+      <p:sp>
+        <p:nvSpPr>
+          <p:cNvPr id="8" name="TextBox 7"/>
           <p:cNvSpPr txBox="1"/>
           <p:nvPr/>
         </p:nvSpPr>
         <p:spPr>
           <a:xfrm>
-            <a:off x="457200" y="1417320"/>
-            <a:ext cx="5577840" cy="2377440"/>
-          </a:xfrm>
-          <a:prstGeom prst="rect">
-            <a:avLst/>
-          </a:prstGeom>
-          <a:solidFill>
-            <a:srgbClr val="F6F7F9"/>
-          </a:solidFill>
-          <a:ln w="15875">
-            <a:solidFill>
-              <a:srgbClr val="152130"/>
-            </a:solidFill>
-          </a:ln>
-        </p:spPr>
-        <p:txBody>
-          <a:bodyPr wrap="square" lIns="137160" rIns="137160" tIns="109728">
+            <a:off x="457200" y="5897880"/>
+            <a:ext cx="11247120" cy="777240"/>
+          </a:xfrm>
+          <a:prstGeom prst="rect">
+            <a:avLst/>
+          </a:prstGeom>
+          <a:noFill/>
+        </p:spPr>
+        <p:txBody>
+          <a:bodyPr wrap="square">
             <a:spAutoFit/>
           </a:bodyPr>
           <a:lstStyle/>
           <a:p>
-            <a:r>
-              <a:rPr sz="1450" b="1">
-                <a:solidFill>
-                  <a:srgbClr val="152130"/>
-                </a:solidFill>
-                <a:latin typeface="Arial"/>
-              </a:rPr>
-              <a:t>Method &amp; confidence tiers</a:t>
-            </a:r>
-          </a:p>
-          <a:p>
-            <a:pPr>
-              <a:spcBef>
-                <a:spcPts val="400"/>
-              </a:spcBef>
-            </a:pPr>
-            <a:r>
-              <a:rPr sz="1100">
-                <a:solidFill>
-                  <a:srgbClr val="152130"/>
-                </a:solidFill>
-                <a:latin typeface="Arial"/>
-              </a:rPr>
-              <a:t>Two deep-research studies (brake market; pump market): 5 parallel search angles each, claims extracted as falsifiable statements, then ADVERSARIAL VERIFICATION — 3 independent voters per claim set, actively attempting refutation</a:t>
-            </a:r>
-          </a:p>
-          <a:p>
-            <a:pPr>
-              <a:spcBef>
-                <a:spcPts val="400"/>
-              </a:spcBef>
-            </a:pPr>
-            <a:r>
-              <a:rPr sz="1100">
-                <a:solidFill>
-                  <a:srgbClr val="152130"/>
-                </a:solidFill>
-                <a:latin typeface="Arial"/>
-              </a:rPr>
-              <a:t>Tier 1: peer-reviewed papers, primary regulation, audited filings (TBK tanshin, Concentric AR2023, SEC)</a:t>
-            </a:r>
-          </a:p>
-          <a:p>
-            <a:pPr>
-              <a:spcBef>
-                <a:spcPts val="400"/>
-              </a:spcBef>
-            </a:pPr>
-            <a:r>
-              <a:rPr sz="1100">
-                <a:solidFill>
-                  <a:srgbClr val="152130"/>
-                </a:solidFill>
-                <a:latin typeface="Arial"/>
-              </a:rPr>
-              <a:t>Tier 2: government data and multi-source-verified company/industry figures</a:t>
-            </a:r>
-          </a:p>
-          <a:p>
-            <a:pPr>
-              <a:spcBef>
-                <a:spcPts val="400"/>
-              </a:spcBef>
-            </a:pPr>
-            <a:r>
-              <a:rPr sz="1100">
-                <a:solidFill>
-                  <a:srgbClr val="152130"/>
-                </a:solidFill>
-                <a:latin typeface="Arial"/>
-              </a:rPr>
-              <a:t>Tier 3: single-source estimates and market research — always labeled in the underlying documents</a:t>
-            </a:r>
-          </a:p>
-        </p:txBody>
-      </p:sp>
-      <p:sp>
-        <p:nvSpPr>
-          <p:cNvPr id="7" name="TextBox 6"/>
-          <p:cNvSpPr txBox="1"/>
-          <p:nvPr/>
-        </p:nvSpPr>
-        <p:spPr>
-          <a:xfrm>
-            <a:off x="6217920" y="1417320"/>
-            <a:ext cx="5532120" cy="2377440"/>
-          </a:xfrm>
-          <a:prstGeom prst="rect">
-            <a:avLst/>
-          </a:prstGeom>
-          <a:solidFill>
-            <a:srgbClr val="F6F7F9"/>
-          </a:solidFill>
-          <a:ln w="15875">
-            <a:solidFill>
-              <a:srgbClr val="3C3937"/>
-            </a:solidFill>
-          </a:ln>
-        </p:spPr>
-        <p:txBody>
-          <a:bodyPr wrap="square" lIns="137160" rIns="137160" tIns="109728">
-            <a:spAutoFit/>
-          </a:bodyPr>
-          <a:lstStyle/>
-          <a:p>
-            <a:r>
-              <a:rPr sz="1450" b="1">
-                <a:solidFill>
-                  <a:srgbClr val="3C3937"/>
-                </a:solidFill>
-                <a:latin typeface="Arial"/>
-              </a:rPr>
-              <a:t>Corrections made by verification (transparency)</a:t>
-            </a:r>
-          </a:p>
-          <a:p>
-            <a:pPr>
-              <a:spcBef>
-                <a:spcPts val="400"/>
-              </a:spcBef>
-            </a:pPr>
-            <a:r>
-              <a:rPr sz="1100">
-                <a:solidFill>
-                  <a:srgbClr val="152130"/>
-                </a:solidFill>
-                <a:latin typeface="Arial"/>
-              </a:rPr>
-              <a:t>TBK's famous '~70% share' belongs to its WATER PUMPS, not brakes (brakes: 'top share', unaudited)</a:t>
-            </a:r>
-          </a:p>
-          <a:p>
-            <a:pPr>
-              <a:spcBef>
-                <a:spcPts val="400"/>
-              </a:spcBef>
-            </a:pPr>
-            <a:r>
-              <a:rPr sz="1100">
-                <a:solidFill>
-                  <a:srgbClr val="152130"/>
-                </a:solidFill>
-                <a:latin typeface="Arial"/>
-              </a:rPr>
-              <a:t>Euro 7 heavy-duty brake-dust limits apply ~2030, not 2028/29 (those are exhaust dates)</a:t>
-            </a:r>
-          </a:p>
-          <a:p>
-            <a:pPr>
-              <a:spcBef>
-                <a:spcPts val="400"/>
-              </a:spcBef>
-            </a:pPr>
-            <a:r>
-              <a:rPr sz="1100">
-                <a:solidFill>
-                  <a:srgbClr val="152130"/>
-                </a:solidFill>
-                <a:latin typeface="Arial"/>
-              </a:rPr>
-              <a:t>Concentric R&amp;D = 2.3% of sales per AR2023 — the circulating '~5%' was wrong</a:t>
-            </a:r>
-          </a:p>
-          <a:p>
-            <a:pPr>
-              <a:spcBef>
-                <a:spcPts val="400"/>
-              </a:spcBef>
-            </a:pPr>
-            <a:r>
-              <a:rPr sz="1100">
-                <a:solidFill>
-                  <a:srgbClr val="152130"/>
-                </a:solidFill>
-                <a:latin typeface="Arial"/>
-              </a:rPr>
-              <a:t>'85-90% of Asia on drums' could not be corroborated — stated as 'majority' only</a:t>
-            </a:r>
-          </a:p>
-          <a:p>
-            <a:pPr>
-              <a:spcBef>
-                <a:spcPts val="400"/>
-              </a:spcBef>
-            </a:pPr>
-            <a:r>
-              <a:rPr sz="1100">
-                <a:solidFill>
-                  <a:srgbClr val="152130"/>
-                </a:solidFill>
-                <a:latin typeface="Arial"/>
-              </a:rPr>
-              <a:t>A claimed TBK-Mikuni alliance is erroneous (conflation with Mikuni-Suzuki)</a:t>
-            </a:r>
-          </a:p>
-          <a:p>
-            <a:pPr>
-              <a:spcBef>
-                <a:spcPts val="400"/>
-              </a:spcBef>
-            </a:pPr>
-            <a:r>
-              <a:rPr sz="1100">
-                <a:solidFill>
-                  <a:srgbClr val="152130"/>
-                </a:solidFill>
-                <a:latin typeface="Arial"/>
-              </a:rPr>
-              <a:t>Aggregator's 'TBK FY26 ¥138M profit' contradicted by the audited tanshin (-¥131M)</a:t>
-            </a:r>
-          </a:p>
-          <a:p>
-            <a:pPr>
-              <a:spcBef>
-                <a:spcPts val="400"/>
-              </a:spcBef>
-            </a:pPr>
-            <a:r>
-              <a:rPr sz="1100">
-                <a:solidFill>
-                  <a:srgbClr val="152130"/>
-                </a:solidFill>
-                <a:latin typeface="Arial"/>
-              </a:rPr>
-              <a:t>TBK ADB exhibit year unresolved (2019 vs 2022 sources conflict); Concentric MR pack period 2112 = Dec 2021</a:t>
-            </a:r>
-          </a:p>
-        </p:txBody>
-      </p:sp>
-      <p:sp>
-        <p:nvSpPr>
-          <p:cNvPr id="8" name="TextBox 7"/>
-          <p:cNvSpPr txBox="1"/>
-          <p:nvPr/>
-        </p:nvSpPr>
-        <p:spPr>
-          <a:xfrm>
-            <a:off x="457200" y="3931920"/>
-            <a:ext cx="5577840" cy="2377440"/>
-          </a:xfrm>
-          <a:prstGeom prst="rect">
-            <a:avLst/>
-          </a:prstGeom>
-          <a:solidFill>
-            <a:srgbClr val="F6F7F9"/>
-          </a:solidFill>
-          <a:ln w="15875">
-            <a:solidFill>
-              <a:srgbClr val="152130"/>
-            </a:solidFill>
-          </a:ln>
-        </p:spPr>
-        <p:txBody>
-          <a:bodyPr wrap="square" lIns="137160" rIns="137160" tIns="109728">
-            <a:spAutoFit/>
-          </a:bodyPr>
-          <a:lstStyle/>
-          <a:p>
-            <a:r>
-              <a:rPr sz="1450" b="1">
-                <a:solidFill>
-                  <a:srgbClr val="152130"/>
-                </a:solidFill>
-                <a:latin typeface="Arial"/>
-              </a:rPr>
-              <a:t>Known limitations</a:t>
-            </a:r>
-          </a:p>
-          <a:p>
-            <a:pPr>
-              <a:spcBef>
-                <a:spcPts val="400"/>
-              </a:spcBef>
-            </a:pPr>
-            <a:r>
-              <a:rPr sz="1100">
-                <a:solidFill>
-                  <a:srgbClr val="152130"/>
-                </a:solidFill>
-                <a:latin typeface="Arial"/>
-              </a:rPr>
-              <a:t>Full-text retrieval was blocked in the research environment: paywalled SAE/journal numbers rest on abstracts; flagged where unverified</a:t>
-            </a:r>
-          </a:p>
-          <a:p>
-            <a:pPr>
-              <a:spcBef>
-                <a:spcPts val="400"/>
-              </a:spcBef>
-            </a:pPr>
-            <a:r>
-              <a:rPr sz="1100">
-                <a:solidFill>
-                  <a:srgbClr val="152130"/>
-                </a:solidFill>
-                <a:latin typeface="Arial"/>
-              </a:rPr>
-              <a:t>No peer discloses brake-only or pump-only R&amp;D, gross profit, or segment margins — group figures used; ratios are the valid comparison</a:t>
-            </a:r>
-          </a:p>
-          <a:p>
-            <a:pPr>
-              <a:spcBef>
-                <a:spcPts val="400"/>
-              </a:spcBef>
-            </a:pPr>
-            <a:r>
-              <a:rPr sz="1100">
-                <a:solidFill>
-                  <a:srgbClr val="152130"/>
-                </a:solidFill>
-                <a:latin typeface="Arial"/>
-              </a:rPr>
-              <a:t>Accounting bases differ: German/Italian nature-of-expense 'gross margins' (Knorr ~50%, Brembo ~50%) are materials-only and EXCLUDED from margin comparisons; JGAAP fully expenses R&amp;D while IFRS peers capitalize part</a:t>
-            </a:r>
-          </a:p>
-          <a:p>
-            <a:pPr>
-              <a:spcBef>
-                <a:spcPts val="400"/>
-              </a:spcBef>
-            </a:pPr>
-            <a:r>
-              <a:rPr sz="1100">
-                <a:solidFill>
-                  <a:srgbClr val="152130"/>
-                </a:solidFill>
-                <a:latin typeface="Arial"/>
-              </a:rPr>
-              <a:t>TBK FY3/26 division split estimated from FY3/25 (yuho due June 2026); USD at ¥150/USD</a:t>
+            <a:pPr algn="l"/>
+            <a:r>
+              <a:rPr sz="1050" b="0">
+                <a:solidFill>
+                  <a:srgbClr val="556A83"/>
+                </a:solidFill>
+                <a:latin typeface="Arial"/>
+              </a:rPr>
+              <a:t>Read: in Phase 1 (left) TBK leads or matches on Criticality and Hegemony and collapses on Ecosystem/Lifecycle cost. In Phases 2-3 (right) TBK is last or near-last on every engine criterion — while Concentric (green) leads precisely there. Closing the gap to Concentric is execution (allocation, substitution positioning), not moat-building: the moat already exists.</a:t>
             </a:r>
           </a:p>
         </p:txBody>
@@ -17220,127 +17409,6 @@
       <p:sp>
         <p:nvSpPr>
           <p:cNvPr id="9" name="TextBox 8"/>
-          <p:cNvSpPr txBox="1"/>
-          <p:nvPr/>
-        </p:nvSpPr>
-        <p:spPr>
-          <a:xfrm>
-            <a:off x="6217920" y="3931920"/>
-            <a:ext cx="5532120" cy="2377440"/>
-          </a:xfrm>
-          <a:prstGeom prst="rect">
-            <a:avLst/>
-          </a:prstGeom>
-          <a:solidFill>
-            <a:srgbClr val="F6F7F9"/>
-          </a:solidFill>
-          <a:ln w="15875">
-            <a:solidFill>
-              <a:srgbClr val="6F8990"/>
-            </a:solidFill>
-          </a:ln>
-        </p:spPr>
-        <p:txBody>
-          <a:bodyPr wrap="square" lIns="137160" rIns="137160" tIns="109728">
-            <a:spAutoFit/>
-          </a:bodyPr>
-          <a:lstStyle/>
-          <a:p>
-            <a:r>
-              <a:rPr sz="1450" b="1">
-                <a:solidFill>
-                  <a:srgbClr val="6F8990"/>
-                </a:solidFill>
-                <a:latin typeface="Arial"/>
-              </a:rPr>
-              <a:t>Data hierarchy &amp; framework constructs</a:t>
-            </a:r>
-          </a:p>
-          <a:p>
-            <a:pPr>
-              <a:spcBef>
-                <a:spcPts val="400"/>
-              </a:spcBef>
-            </a:pPr>
-            <a:r>
-              <a:rPr sz="1100">
-                <a:solidFill>
-                  <a:srgbClr val="152130"/>
-                </a:solidFill>
-                <a:latin typeface="Arial"/>
-              </a:rPr>
-              <a:t>Where sources conflict, the audited primary document wins (e.g., TBK tanshin over aggregators)</a:t>
-            </a:r>
-          </a:p>
-          <a:p>
-            <a:pPr>
-              <a:spcBef>
-                <a:spcPts val="400"/>
-              </a:spcBef>
-            </a:pPr>
-            <a:r>
-              <a:rPr sz="1100">
-                <a:solidFill>
-                  <a:srgbClr val="152130"/>
-                </a:solidFill>
-                <a:latin typeface="Arial"/>
-              </a:rPr>
-              <a:t>Company-internal documents (TBK/TBKK product P&amp;Ls, Concentric MR pack, Haldex packs) and management statements (~30% below-market pricing, ~1,000 excess heads) are first-hand but NOT externally verified — labeled wherever used</a:t>
-            </a:r>
-          </a:p>
-          <a:p>
-            <a:pPr>
-              <a:spcBef>
-                <a:spcPts val="400"/>
-              </a:spcBef>
-            </a:pPr>
-            <a:r>
-              <a:rPr sz="1100">
-                <a:solidFill>
-                  <a:srgbClr val="152130"/>
-                </a:solidFill>
-                <a:latin typeface="Arial"/>
-              </a:rPr>
-              <a:t>Consistent-basis peer metrics (margins, R&amp;D, ROIC) come from the user-provided 10-year/LTM peer dataset — same methodology across all 7 companies</a:t>
-            </a:r>
-          </a:p>
-          <a:p>
-            <a:pPr>
-              <a:spcBef>
-                <a:spcPts val="400"/>
-              </a:spcBef>
-            </a:pPr>
-            <a:r>
-              <a:rPr sz="1100">
-                <a:solidFill>
-                  <a:srgbClr val="152130"/>
-                </a:solidFill>
-                <a:latin typeface="Arial"/>
-              </a:rPr>
-              <a:t>ROIIC (ROICm) = return on incremental invested capital over the stated horizon; RR = reinvestment rate; R&amp;D Capital Base = cumulative R&amp;D capitalized/amortized per the dataset framework — a modeling construct, not a balance-sheet line</a:t>
-            </a:r>
-          </a:p>
-          <a:p>
-            <a:pPr>
-              <a:spcBef>
-                <a:spcPts val="400"/>
-              </a:spcBef>
-            </a:pPr>
-            <a:r>
-              <a:rPr sz="1100">
-                <a:solidFill>
-                  <a:srgbClr val="152130"/>
-                </a:solidFill>
-                <a:latin typeface="Arial"/>
-              </a:rPr>
-              <a:t>Scenario pages state assumptions on-slide; peer-margin scenarios use comparable reporters only</a:t>
-            </a:r>
-          </a:p>
-        </p:txBody>
-      </p:sp>
-      <p:sp>
-        <p:nvSpPr>
-          <p:cNvPr id="10" name="TextBox 9"/>
           <p:cNvSpPr txBox="1"/>
           <p:nvPr/>
         </p:nvSpPr>
@@ -17420,7 +17488,7 @@
                 </a:solidFill>
                 <a:latin typeface="Times New Roman"/>
               </a:rPr>
-              <a:t>Sources</a:t>
+              <a:t>Research quality &amp; methodology notes</a:t>
             </a:r>
           </a:p>
         </p:txBody>
@@ -17486,8 +17554,43 @@
         </p:nvSpPr>
         <p:spPr>
           <a:xfrm>
-            <a:off x="457200" y="1188720"/>
-            <a:ext cx="5577840" cy="2606040"/>
+            <a:off x="457200" y="923544"/>
+            <a:ext cx="11247120" cy="457200"/>
+          </a:xfrm>
+          <a:prstGeom prst="rect">
+            <a:avLst/>
+          </a:prstGeom>
+          <a:noFill/>
+        </p:spPr>
+        <p:txBody>
+          <a:bodyPr wrap="square">
+            <a:spAutoFit/>
+          </a:bodyPr>
+          <a:lstStyle/>
+          <a:p>
+            <a:pPr algn="l"/>
+            <a:r>
+              <a:rPr sz="1050" b="0">
+                <a:solidFill>
+                  <a:srgbClr val="556A83"/>
+                </a:solidFill>
+                <a:latin typeface="Arial"/>
+              </a:rPr>
+              <a:t>How this material was produced, verified, and where its limits are</a:t>
+            </a:r>
+          </a:p>
+        </p:txBody>
+      </p:sp>
+      <p:sp>
+        <p:nvSpPr>
+          <p:cNvPr id="6" name="TextBox 5"/>
+          <p:cNvSpPr txBox="1"/>
+          <p:nvPr/>
+        </p:nvSpPr>
+        <p:spPr>
+          <a:xfrm>
+            <a:off x="457200" y="1417320"/>
+            <a:ext cx="5577840" cy="2377440"/>
           </a:xfrm>
           <a:prstGeom prst="rect">
             <a:avLst/>
@@ -17514,117 +17617,238 @@
                 </a:solidFill>
                 <a:latin typeface="Arial"/>
               </a:rPr>
-              <a:t>Primary &amp; audited</a:t>
-            </a:r>
-          </a:p>
-          <a:p>
-            <a:pPr>
-              <a:spcBef>
-                <a:spcPts val="400"/>
-              </a:spcBef>
-            </a:pPr>
-            <a:r>
-              <a:rPr sz="1000">
-                <a:solidFill>
-                  <a:srgbClr val="152130"/>
-                </a:solidFill>
-                <a:latin typeface="Arial"/>
-              </a:rPr>
-              <a:t>TBK Co., Ltd. — Consolidated Financial Results FY ended 31 Mar 2026 (tanshin, 14 May 2026); securities-report risk factors (有価証券報告書 via kitaishihon/irbank)</a:t>
-            </a:r>
-          </a:p>
-          <a:p>
-            <a:pPr>
-              <a:spcBef>
-                <a:spcPts val="400"/>
-              </a:spcBef>
-            </a:pPr>
-            <a:r>
-              <a:rPr sz="1000">
-                <a:solidFill>
-                  <a:srgbClr val="152130"/>
-                </a:solidFill>
-                <a:latin typeface="Arial"/>
-              </a:rPr>
-              <a:t>Concentric AB — Annual Report 2023 (income statement, balance sheet, 5-year key figures)</a:t>
-            </a:r>
-          </a:p>
-          <a:p>
-            <a:pPr>
-              <a:spcBef>
-                <a:spcPts val="400"/>
-              </a:spcBef>
-            </a:pPr>
-            <a:r>
-              <a:rPr sz="1000">
-                <a:solidFill>
-                  <a:srgbClr val="152130"/>
-                </a:solidFill>
-                <a:latin typeface="Arial"/>
-              </a:rPr>
-              <a:t>User-provided datasets: TBK 10-year financials; Peers 10-year; Peers LTM (7 companies, consistent methodology); moat methodology v3.2</a:t>
-            </a:r>
-          </a:p>
-          <a:p>
-            <a:pPr>
-              <a:spcBef>
-                <a:spcPts val="400"/>
-              </a:spcBef>
-            </a:pPr>
-            <a:r>
-              <a:rPr sz="1000">
-                <a:solidFill>
-                  <a:srgbClr val="152130"/>
-                </a:solidFill>
-                <a:latin typeface="Arial"/>
-              </a:rPr>
-              <a:t>Internal management documents: TBK Japan profitability by product/customer + share map + acquired projects (H1 FY2025); TBKK Thailand profit by items (Apr-Sep 2025); Concentric Group MR Pack (Dec 2021); Haldex analysis file (2019) and May-2014 MR pack</a:t>
-            </a:r>
-          </a:p>
-          <a:p>
-            <a:pPr>
-              <a:spcBef>
-                <a:spcPts val="400"/>
-              </a:spcBef>
-            </a:pPr>
-            <a:r>
-              <a:rPr sz="1000">
-                <a:solidFill>
-                  <a:srgbClr val="152130"/>
-                </a:solidFill>
-                <a:latin typeface="Arial"/>
-              </a:rPr>
-              <a:t>SEC filings: Cummins 10-K/10-Q/8-K (FY2024-25); WABCO &amp; Meritor merger 8-Ks</a:t>
-            </a:r>
-          </a:p>
-          <a:p>
-            <a:pPr>
-              <a:spcBef>
-                <a:spcPts val="400"/>
-              </a:spcBef>
-            </a:pPr>
-            <a:r>
-              <a:rPr sz="1000">
-                <a:solidFill>
-                  <a:srgbClr val="152130"/>
-                </a:solidFill>
-                <a:latin typeface="Arial"/>
-              </a:rPr>
-              <a:t>Company releases: Knorr-Bremse FY2023-25; ZF AR2024-25; SAF-Holland AR2024; Mahle AR2024-25; Haldex year-end 2021; Rheinmetall FY2025 + AEQUITA divestment (3 Jun 2026); Circle BidCo/A.P. Møller offer documents (2024); Brakes India-TBK alliance (Dec 2025)</a:t>
-            </a:r>
-          </a:p>
-        </p:txBody>
-      </p:sp>
-      <p:sp>
-        <p:nvSpPr>
-          <p:cNvPr id="6" name="TextBox 5"/>
+              <a:t>Method &amp; confidence tiers</a:t>
+            </a:r>
+          </a:p>
+          <a:p>
+            <a:pPr>
+              <a:spcBef>
+                <a:spcPts val="400"/>
+              </a:spcBef>
+            </a:pPr>
+            <a:r>
+              <a:rPr sz="1100">
+                <a:solidFill>
+                  <a:srgbClr val="152130"/>
+                </a:solidFill>
+                <a:latin typeface="Arial"/>
+              </a:rPr>
+              <a:t>Two deep-research studies (brake market; pump market): 5 parallel search angles each, claims extracted as falsifiable statements, then ADVERSARIAL VERIFICATION — 3 independent voters per claim set, actively attempting refutation</a:t>
+            </a:r>
+          </a:p>
+          <a:p>
+            <a:pPr>
+              <a:spcBef>
+                <a:spcPts val="400"/>
+              </a:spcBef>
+            </a:pPr>
+            <a:r>
+              <a:rPr sz="1100">
+                <a:solidFill>
+                  <a:srgbClr val="152130"/>
+                </a:solidFill>
+                <a:latin typeface="Arial"/>
+              </a:rPr>
+              <a:t>Tier 1: peer-reviewed papers, primary regulation, audited filings (TBK tanshin, Concentric AR2023, SEC)</a:t>
+            </a:r>
+          </a:p>
+          <a:p>
+            <a:pPr>
+              <a:spcBef>
+                <a:spcPts val="400"/>
+              </a:spcBef>
+            </a:pPr>
+            <a:r>
+              <a:rPr sz="1100">
+                <a:solidFill>
+                  <a:srgbClr val="152130"/>
+                </a:solidFill>
+                <a:latin typeface="Arial"/>
+              </a:rPr>
+              <a:t>Tier 2: government data and multi-source-verified company/industry figures</a:t>
+            </a:r>
+          </a:p>
+          <a:p>
+            <a:pPr>
+              <a:spcBef>
+                <a:spcPts val="400"/>
+              </a:spcBef>
+            </a:pPr>
+            <a:r>
+              <a:rPr sz="1100">
+                <a:solidFill>
+                  <a:srgbClr val="152130"/>
+                </a:solidFill>
+                <a:latin typeface="Arial"/>
+              </a:rPr>
+              <a:t>Tier 3: single-source estimates and market research — always labeled in the underlying documents</a:t>
+            </a:r>
+          </a:p>
+        </p:txBody>
+      </p:sp>
+      <p:sp>
+        <p:nvSpPr>
+          <p:cNvPr id="7" name="TextBox 6"/>
           <p:cNvSpPr txBox="1"/>
           <p:nvPr/>
         </p:nvSpPr>
         <p:spPr>
           <a:xfrm>
-            <a:off x="6217920" y="1188720"/>
-            <a:ext cx="5532120" cy="2606040"/>
+            <a:off x="6217920" y="1417320"/>
+            <a:ext cx="5532120" cy="2377440"/>
+          </a:xfrm>
+          <a:prstGeom prst="rect">
+            <a:avLst/>
+          </a:prstGeom>
+          <a:solidFill>
+            <a:srgbClr val="F6F7F9"/>
+          </a:solidFill>
+          <a:ln w="15875">
+            <a:solidFill>
+              <a:srgbClr val="3C3937"/>
+            </a:solidFill>
+          </a:ln>
+        </p:spPr>
+        <p:txBody>
+          <a:bodyPr wrap="square" lIns="137160" rIns="137160" tIns="109728">
+            <a:spAutoFit/>
+          </a:bodyPr>
+          <a:lstStyle/>
+          <a:p>
+            <a:r>
+              <a:rPr sz="1450" b="1">
+                <a:solidFill>
+                  <a:srgbClr val="3C3937"/>
+                </a:solidFill>
+                <a:latin typeface="Arial"/>
+              </a:rPr>
+              <a:t>Corrections made by verification (transparency)</a:t>
+            </a:r>
+          </a:p>
+          <a:p>
+            <a:pPr>
+              <a:spcBef>
+                <a:spcPts val="400"/>
+              </a:spcBef>
+            </a:pPr>
+            <a:r>
+              <a:rPr sz="1100">
+                <a:solidFill>
+                  <a:srgbClr val="152130"/>
+                </a:solidFill>
+                <a:latin typeface="Arial"/>
+              </a:rPr>
+              <a:t>TBK's famous '~70% share' belongs to its WATER PUMPS, not brakes (brakes: 'top share', unaudited)</a:t>
+            </a:r>
+          </a:p>
+          <a:p>
+            <a:pPr>
+              <a:spcBef>
+                <a:spcPts val="400"/>
+              </a:spcBef>
+            </a:pPr>
+            <a:r>
+              <a:rPr sz="1100">
+                <a:solidFill>
+                  <a:srgbClr val="152130"/>
+                </a:solidFill>
+                <a:latin typeface="Arial"/>
+              </a:rPr>
+              <a:t>Euro 7 heavy-duty brake-dust limits apply ~2030, not 2028/29 (those are exhaust dates)</a:t>
+            </a:r>
+          </a:p>
+          <a:p>
+            <a:pPr>
+              <a:spcBef>
+                <a:spcPts val="400"/>
+              </a:spcBef>
+            </a:pPr>
+            <a:r>
+              <a:rPr sz="1100">
+                <a:solidFill>
+                  <a:srgbClr val="152130"/>
+                </a:solidFill>
+                <a:latin typeface="Arial"/>
+              </a:rPr>
+              <a:t>Concentric R&amp;D = 2.3% of sales per AR2023 — the circulating '~5%' was wrong</a:t>
+            </a:r>
+          </a:p>
+          <a:p>
+            <a:pPr>
+              <a:spcBef>
+                <a:spcPts val="400"/>
+              </a:spcBef>
+            </a:pPr>
+            <a:r>
+              <a:rPr sz="1100">
+                <a:solidFill>
+                  <a:srgbClr val="152130"/>
+                </a:solidFill>
+                <a:latin typeface="Arial"/>
+              </a:rPr>
+              <a:t>'85-90% of Asia on drums' could not be corroborated — stated as 'majority' only</a:t>
+            </a:r>
+          </a:p>
+          <a:p>
+            <a:pPr>
+              <a:spcBef>
+                <a:spcPts val="400"/>
+              </a:spcBef>
+            </a:pPr>
+            <a:r>
+              <a:rPr sz="1100">
+                <a:solidFill>
+                  <a:srgbClr val="152130"/>
+                </a:solidFill>
+                <a:latin typeface="Arial"/>
+              </a:rPr>
+              <a:t>A claimed TBK-Mikuni alliance is erroneous (conflation with Mikuni-Suzuki)</a:t>
+            </a:r>
+          </a:p>
+          <a:p>
+            <a:pPr>
+              <a:spcBef>
+                <a:spcPts val="400"/>
+              </a:spcBef>
+            </a:pPr>
+            <a:r>
+              <a:rPr sz="1100">
+                <a:solidFill>
+                  <a:srgbClr val="152130"/>
+                </a:solidFill>
+                <a:latin typeface="Arial"/>
+              </a:rPr>
+              <a:t>Aggregator's 'TBK FY26 ¥138M profit' contradicted by the audited tanshin (-¥131M)</a:t>
+            </a:r>
+          </a:p>
+          <a:p>
+            <a:pPr>
+              <a:spcBef>
+                <a:spcPts val="400"/>
+              </a:spcBef>
+            </a:pPr>
+            <a:r>
+              <a:rPr sz="1100">
+                <a:solidFill>
+                  <a:srgbClr val="152130"/>
+                </a:solidFill>
+                <a:latin typeface="Arial"/>
+              </a:rPr>
+              <a:t>TBK ADB exhibit year unresolved (2019 vs 2022 sources conflict); Concentric MR pack period 2112 = Dec 2021</a:t>
+            </a:r>
+          </a:p>
+        </p:txBody>
+      </p:sp>
+      <p:sp>
+        <p:nvSpPr>
+          <p:cNvPr id="8" name="TextBox 7"/>
+          <p:cNvSpPr txBox="1"/>
+          <p:nvPr/>
+        </p:nvSpPr>
+        <p:spPr>
+          <a:xfrm>
+            <a:off x="457200" y="3931920"/>
+            <a:ext cx="5577840" cy="2377440"/>
           </a:xfrm>
           <a:prstGeom prst="rect">
             <a:avLst/>
@@ -17651,100 +17875,345 @@
                 </a:solidFill>
                 <a:latin typeface="Arial"/>
               </a:rPr>
-              <a:t>Peer-reviewed &amp; academic</a:t>
-            </a:r>
-          </a:p>
-          <a:p>
-            <a:pPr>
-              <a:spcBef>
-                <a:spcPts val="400"/>
-              </a:spcBef>
-            </a:pPr>
-            <a:r>
-              <a:rPr sz="1000">
-                <a:solidFill>
-                  <a:srgbClr val="152130"/>
-                </a:solidFill>
-                <a:latin typeface="Arial"/>
-              </a:rPr>
-              <a:t>Göhring &amp; von Glasner, SAE 902206 (1990); Kajiyama et al. (Isuzu/TBK), SAE 902200 (1990); Day, Harding &amp; Newcomb, Proc IMechE (1984); Hoover et al., SAE 2005-01-3614; Subel &amp; Kienhöfer, Proc IMechE D (2020)</a:t>
-            </a:r>
-          </a:p>
-          <a:p>
-            <a:pPr>
-              <a:spcBef>
-                <a:spcPts val="400"/>
-              </a:spcBef>
-            </a:pPr>
-            <a:r>
-              <a:rPr sz="1000">
-                <a:solidFill>
-                  <a:srgbClr val="152130"/>
-                </a:solidFill>
-                <a:latin typeface="Arial"/>
-              </a:rPr>
-              <a:t>Ampadu, Alrejjal &amp; Ksaibati, JSDTL 8(1) 2023 — disc vs drum cost-effectiveness</a:t>
-            </a:r>
-          </a:p>
-          <a:p>
-            <a:pPr>
-              <a:spcBef>
-                <a:spcPts val="400"/>
-              </a:spcBef>
-            </a:pPr>
-            <a:r>
-              <a:rPr sz="1000">
-                <a:solidFill>
-                  <a:srgbClr val="152130"/>
-                </a:solidFill>
-                <a:latin typeface="Arial"/>
-              </a:rPr>
-              <a:t>Granitz et al., SN Applied Sciences (2021) — e-coolant pump, 13L HD diesel; Bitsis &amp; Miwa, SAE 2018-01-0980; Cummins SuperTruck 2, SAE 2019-01-0247; MIT S.M. thesis (2012) — HD parasitic losses</a:t>
-            </a:r>
-          </a:p>
-          <a:p>
-            <a:pPr>
-              <a:spcBef>
-                <a:spcPts val="400"/>
-              </a:spcBef>
-            </a:pPr>
-            <a:r>
-              <a:rPr sz="1000">
-                <a:solidFill>
-                  <a:srgbClr val="152130"/>
-                </a:solidFill>
-                <a:latin typeface="Arial"/>
-              </a:rPr>
-              <a:t>Zhang et al., J. Hazardous Materials 465 (2024); Hagino, Atmosphere 15:75 (2024, JARI); Environmental Pollution (2023) — regen braking &amp; brake wear</a:t>
-            </a:r>
-          </a:p>
-          <a:p>
-            <a:pPr>
-              <a:spcBef>
-                <a:spcPts val="400"/>
-              </a:spcBef>
-            </a:pPr>
-            <a:r>
-              <a:rPr sz="1000">
-                <a:solidFill>
-                  <a:srgbClr val="152130"/>
-                </a:solidFill>
-                <a:latin typeface="Arial"/>
-              </a:rPr>
-              <a:t>Energies 16:4024 (2023), 19:1748 (2026); Sustainability 15:3132 (2023); Energies 16:168 (2023) — BEV/FCEV truck &amp; bus thermal management</a:t>
-            </a:r>
-          </a:p>
-        </p:txBody>
-      </p:sp>
-      <p:sp>
-        <p:nvSpPr>
-          <p:cNvPr id="7" name="TextBox 6"/>
+              <a:t>Known limitations</a:t>
+            </a:r>
+          </a:p>
+          <a:p>
+            <a:pPr>
+              <a:spcBef>
+                <a:spcPts val="400"/>
+              </a:spcBef>
+            </a:pPr>
+            <a:r>
+              <a:rPr sz="1100">
+                <a:solidFill>
+                  <a:srgbClr val="152130"/>
+                </a:solidFill>
+                <a:latin typeface="Arial"/>
+              </a:rPr>
+              <a:t>Full-text retrieval was blocked in the research environment: paywalled SAE/journal numbers rest on abstracts; flagged where unverified</a:t>
+            </a:r>
+          </a:p>
+          <a:p>
+            <a:pPr>
+              <a:spcBef>
+                <a:spcPts val="400"/>
+              </a:spcBef>
+            </a:pPr>
+            <a:r>
+              <a:rPr sz="1100">
+                <a:solidFill>
+                  <a:srgbClr val="152130"/>
+                </a:solidFill>
+                <a:latin typeface="Arial"/>
+              </a:rPr>
+              <a:t>No peer discloses brake-only or pump-only R&amp;D, gross profit, or segment margins — group figures used; ratios are the valid comparison</a:t>
+            </a:r>
+          </a:p>
+          <a:p>
+            <a:pPr>
+              <a:spcBef>
+                <a:spcPts val="400"/>
+              </a:spcBef>
+            </a:pPr>
+            <a:r>
+              <a:rPr sz="1100">
+                <a:solidFill>
+                  <a:srgbClr val="152130"/>
+                </a:solidFill>
+                <a:latin typeface="Arial"/>
+              </a:rPr>
+              <a:t>Accounting bases differ: German/Italian nature-of-expense 'gross margins' (Knorr ~50%, Brembo ~50%) are materials-only and EXCLUDED from margin comparisons; JGAAP fully expenses R&amp;D while IFRS peers capitalize part</a:t>
+            </a:r>
+          </a:p>
+          <a:p>
+            <a:pPr>
+              <a:spcBef>
+                <a:spcPts val="400"/>
+              </a:spcBef>
+            </a:pPr>
+            <a:r>
+              <a:rPr sz="1100">
+                <a:solidFill>
+                  <a:srgbClr val="152130"/>
+                </a:solidFill>
+                <a:latin typeface="Arial"/>
+              </a:rPr>
+              <a:t>TBK FY3/26 division split estimated from FY3/25 (yuho due June 2026); USD at ¥150/USD</a:t>
+            </a:r>
+          </a:p>
+        </p:txBody>
+      </p:sp>
+      <p:sp>
+        <p:nvSpPr>
+          <p:cNvPr id="9" name="TextBox 8"/>
           <p:cNvSpPr txBox="1"/>
           <p:nvPr/>
         </p:nvSpPr>
         <p:spPr>
           <a:xfrm>
-            <a:off x="457200" y="3977639"/>
+            <a:off x="6217920" y="3931920"/>
+            <a:ext cx="5532120" cy="2377440"/>
+          </a:xfrm>
+          <a:prstGeom prst="rect">
+            <a:avLst/>
+          </a:prstGeom>
+          <a:solidFill>
+            <a:srgbClr val="F6F7F9"/>
+          </a:solidFill>
+          <a:ln w="15875">
+            <a:solidFill>
+              <a:srgbClr val="6F8990"/>
+            </a:solidFill>
+          </a:ln>
+        </p:spPr>
+        <p:txBody>
+          <a:bodyPr wrap="square" lIns="137160" rIns="137160" tIns="109728">
+            <a:spAutoFit/>
+          </a:bodyPr>
+          <a:lstStyle/>
+          <a:p>
+            <a:r>
+              <a:rPr sz="1450" b="1">
+                <a:solidFill>
+                  <a:srgbClr val="6F8990"/>
+                </a:solidFill>
+                <a:latin typeface="Arial"/>
+              </a:rPr>
+              <a:t>Data hierarchy &amp; framework constructs</a:t>
+            </a:r>
+          </a:p>
+          <a:p>
+            <a:pPr>
+              <a:spcBef>
+                <a:spcPts val="400"/>
+              </a:spcBef>
+            </a:pPr>
+            <a:r>
+              <a:rPr sz="1100">
+                <a:solidFill>
+                  <a:srgbClr val="152130"/>
+                </a:solidFill>
+                <a:latin typeface="Arial"/>
+              </a:rPr>
+              <a:t>Where sources conflict, the audited primary document wins (e.g., TBK tanshin over aggregators)</a:t>
+            </a:r>
+          </a:p>
+          <a:p>
+            <a:pPr>
+              <a:spcBef>
+                <a:spcPts val="400"/>
+              </a:spcBef>
+            </a:pPr>
+            <a:r>
+              <a:rPr sz="1100">
+                <a:solidFill>
+                  <a:srgbClr val="152130"/>
+                </a:solidFill>
+                <a:latin typeface="Arial"/>
+              </a:rPr>
+              <a:t>Company-internal documents (TBK/TBKK product P&amp;Ls, Concentric MR pack, Haldex packs) and management statements (~30% below-market pricing, ~1,000 excess heads) are first-hand but NOT externally verified — labeled wherever used</a:t>
+            </a:r>
+          </a:p>
+          <a:p>
+            <a:pPr>
+              <a:spcBef>
+                <a:spcPts val="400"/>
+              </a:spcBef>
+            </a:pPr>
+            <a:r>
+              <a:rPr sz="1100">
+                <a:solidFill>
+                  <a:srgbClr val="152130"/>
+                </a:solidFill>
+                <a:latin typeface="Arial"/>
+              </a:rPr>
+              <a:t>Consistent-basis peer metrics (margins, R&amp;D, ROIC) come from the user-provided 10-year/LTM peer dataset — same methodology across all 7 companies</a:t>
+            </a:r>
+          </a:p>
+          <a:p>
+            <a:pPr>
+              <a:spcBef>
+                <a:spcPts val="400"/>
+              </a:spcBef>
+            </a:pPr>
+            <a:r>
+              <a:rPr sz="1100">
+                <a:solidFill>
+                  <a:srgbClr val="152130"/>
+                </a:solidFill>
+                <a:latin typeface="Arial"/>
+              </a:rPr>
+              <a:t>ROIIC (ROICm) = return on incremental invested capital over the stated horizon; RR = reinvestment rate; R&amp;D Capital Base = cumulative R&amp;D capitalized/amortized per the dataset framework — a modeling construct, not a balance-sheet line</a:t>
+            </a:r>
+          </a:p>
+          <a:p>
+            <a:pPr>
+              <a:spcBef>
+                <a:spcPts val="400"/>
+              </a:spcBef>
+            </a:pPr>
+            <a:r>
+              <a:rPr sz="1100">
+                <a:solidFill>
+                  <a:srgbClr val="152130"/>
+                </a:solidFill>
+                <a:latin typeface="Arial"/>
+              </a:rPr>
+              <a:t>Scenario pages state assumptions on-slide; peer-margin scenarios use comparable reporters only</a:t>
+            </a:r>
+          </a:p>
+        </p:txBody>
+      </p:sp>
+      <p:sp>
+        <p:nvSpPr>
+          <p:cNvPr id="10" name="TextBox 9"/>
+          <p:cNvSpPr txBox="1"/>
+          <p:nvPr/>
+        </p:nvSpPr>
+        <p:spPr>
+          <a:xfrm>
+            <a:off x="11658600" y="6510528"/>
+            <a:ext cx="411480" cy="274320"/>
+          </a:xfrm>
+          <a:prstGeom prst="rect">
+            <a:avLst/>
+          </a:prstGeom>
+          <a:noFill/>
+        </p:spPr>
+        <p:txBody>
+          <a:bodyPr wrap="none">
+            <a:spAutoFit/>
+          </a:bodyPr>
+          <a:lstStyle/>
+          <a:p>
+            <a:pPr algn="r"/>
+            <a:r>
+              <a:rPr sz="900">
+                <a:solidFill>
+                  <a:srgbClr val="556A83"/>
+                </a:solidFill>
+                <a:latin typeface="Arial"/>
+              </a:rPr>
+              <a:t>28</a:t>
+            </a:r>
+          </a:p>
+        </p:txBody>
+      </p:sp>
+    </p:spTree>
+  </p:cSld>
+  <p:clrMapOvr>
+    <a:masterClrMapping/>
+  </p:clrMapOvr>
+</p:sld>
+</file>
+
+<file path=ppt/slides/slide29.xml><?xml version="1.0" encoding="utf-8"?>
+<p:sld xmlns:a="http://schemas.openxmlformats.org/drawingml/2006/main" xmlns:p="http://schemas.openxmlformats.org/presentationml/2006/main" xmlns:r="http://schemas.openxmlformats.org/officeDocument/2006/relationships">
+  <p:cSld>
+    <p:spTree>
+      <p:nvGrpSpPr>
+        <p:cNvPr id="1" name=""/>
+        <p:cNvGrpSpPr/>
+        <p:nvPr/>
+      </p:nvGrpSpPr>
+      <p:grpSpPr/>
+      <p:sp>
+        <p:nvSpPr>
+          <p:cNvPr id="2" name="TextBox 1"/>
+          <p:cNvSpPr txBox="1"/>
+          <p:nvPr/>
+        </p:nvSpPr>
+        <p:spPr>
+          <a:xfrm>
+            <a:off x="457200" y="164592"/>
+            <a:ext cx="9784080" cy="658368"/>
+          </a:xfrm>
+          <a:prstGeom prst="rect">
+            <a:avLst/>
+          </a:prstGeom>
+          <a:noFill/>
+        </p:spPr>
+        <p:txBody>
+          <a:bodyPr wrap="none">
+            <a:spAutoFit/>
+          </a:bodyPr>
+          <a:lstStyle/>
+          <a:p>
+            <a:r>
+              <a:rPr sz="2700" b="0">
+                <a:solidFill>
+                  <a:srgbClr val="152130"/>
+                </a:solidFill>
+                <a:latin typeface="Times New Roman"/>
+              </a:rPr>
+              <a:t>Sources</a:t>
+            </a:r>
+          </a:p>
+        </p:txBody>
+      </p:sp>
+      <p:pic>
+        <p:nvPicPr>
+          <p:cNvPr id="3" name="Picture 2" descr="athanase_logo_dark.png"/>
+          <p:cNvPicPr>
+            <a:picLocks noChangeAspect="1"/>
+          </p:cNvPicPr>
+          <p:nvPr/>
+        </p:nvPicPr>
+        <p:blipFill>
+          <a:blip r:embed="rId2"/>
+          <a:stretch>
+            <a:fillRect/>
+          </a:stretch>
+        </p:blipFill>
+        <p:spPr>
+          <a:xfrm>
+            <a:off x="10469880" y="292608"/>
+            <a:ext cx="1325880" cy="273903"/>
+          </a:xfrm>
+          <a:prstGeom prst="rect">
+            <a:avLst/>
+          </a:prstGeom>
+        </p:spPr>
+      </p:pic>
+      <p:sp>
+        <p:nvSpPr>
+          <p:cNvPr id="4" name="TextBox 3"/>
+          <p:cNvSpPr txBox="1"/>
+          <p:nvPr/>
+        </p:nvSpPr>
+        <p:spPr>
+          <a:xfrm>
+            <a:off x="457200" y="850392"/>
+            <a:ext cx="11274552" cy="18288"/>
+          </a:xfrm>
+          <a:prstGeom prst="rect">
+            <a:avLst/>
+          </a:prstGeom>
+          <a:solidFill>
+            <a:srgbClr val="E2E5E9"/>
+          </a:solidFill>
+          <a:ln>
+            <a:noFill/>
+          </a:ln>
+        </p:spPr>
+        <p:txBody>
+          <a:bodyPr wrap="none">
+            <a:spAutoFit/>
+          </a:bodyPr>
+          <a:lstStyle/>
+          <a:p/>
+        </p:txBody>
+      </p:sp>
+      <p:sp>
+        <p:nvSpPr>
+          <p:cNvPr id="5" name="TextBox 4"/>
+          <p:cNvSpPr txBox="1"/>
+          <p:nvPr/>
+        </p:nvSpPr>
+        <p:spPr>
+          <a:xfrm>
+            <a:off x="457200" y="1188720"/>
             <a:ext cx="5577840" cy="2606040"/>
           </a:xfrm>
           <a:prstGeom prst="rect">
@@ -17772,7 +18241,7 @@
                 </a:solidFill>
                 <a:latin typeface="Arial"/>
               </a:rPr>
-              <a:t>Regulatory &amp; legal</a:t>
+              <a:t>Primary &amp; audited</a:t>
             </a:r>
           </a:p>
           <a:p>
@@ -17788,7 +18257,7 @@
                 </a:solidFill>
                 <a:latin typeface="Arial"/>
               </a:rPr>
-              <a:t>NHTSA: FMVSS 121 final rule 74 FR 37122 (2009) + Regulatory Impact Analysis; DOT HS 811 367 (2010, NADS simulator); ESV 07-0242 (2007); heavy-vehicle AEB NPRM (2023)</a:t>
+              <a:t>TBK Co., Ltd. — Consolidated Financial Results FY ended 31 Mar 2026 (tanshin, 14 May 2026); securities-report risk factors (有価証券報告書 via kitaishihon/irbank)</a:t>
             </a:r>
           </a:p>
           <a:p>
@@ -17804,7 +18273,7 @@
                 </a:solidFill>
                 <a:latin typeface="Arial"/>
               </a:rPr>
-              <a:t>UNECE Regulation No. 13 (braking, Type-II fade tests)</a:t>
+              <a:t>Concentric AB — Annual Report 2023 (income statement, balance sheet, 5-year key figures)</a:t>
             </a:r>
           </a:p>
           <a:p>
@@ -17820,7 +18289,7 @@
                 </a:solidFill>
                 <a:latin typeface="Arial"/>
               </a:rPr>
-              <a:t>EU: Reg 2019/1242 &amp; 2024/1610 (HDV CO2); Reg 2024/1257 (Euro 7); Reg 2017/2400 Annex IX (VECTO auxiliaries) + JRC112015; EPA Phase 2 (40 CFR 1037.520 accessory credits) &amp; Phase 3 (2024)</a:t>
+              <a:t>User-provided datasets: TBK 10-year financials; Peers 10-year; Peers LTM (7 companies, consistent methodology); moat methodology v3.2</a:t>
             </a:r>
           </a:p>
           <a:p>
@@ -17836,7 +18305,7 @@
                 </a:solidFill>
                 <a:latin typeface="Arial"/>
               </a:rPr>
-              <a:t>EC merger decisions: M.8102 Valeo/FTE (2017, 90-100% concentration, Raicam remedy); Knorr-Bremse/Haldex Phase II (IP-17-2126, 2017)</a:t>
+              <a:t>Internal management documents: TBK Japan profitability by product/customer + share map + acquired projects (H1 FY2025); TBKK Thailand profit by items (Apr-Sep 2025); Concentric Group MR Pack (Dec 2021); Haldex analysis file (2019) and May-2014 MR pack</a:t>
             </a:r>
           </a:p>
           <a:p>
@@ -17852,20 +18321,36 @@
                 </a:solidFill>
                 <a:latin typeface="Arial"/>
               </a:rPr>
-              <a:t>Japan: MY2025 HDV fuel-economy standards (via ICCT/TransportPolicy); METI supplier-transition studies (2023, 2025); FMCSA Crash Cost Methodology (2025); AAA Foundation (2017)</a:t>
-            </a:r>
-          </a:p>
-        </p:txBody>
-      </p:sp>
-      <p:sp>
-        <p:nvSpPr>
-          <p:cNvPr id="8" name="TextBox 7"/>
+              <a:t>SEC filings: Cummins 10-K/10-Q/8-K (FY2024-25); WABCO &amp; Meritor merger 8-Ks</a:t>
+            </a:r>
+          </a:p>
+          <a:p>
+            <a:pPr>
+              <a:spcBef>
+                <a:spcPts val="400"/>
+              </a:spcBef>
+            </a:pPr>
+            <a:r>
+              <a:rPr sz="1000">
+                <a:solidFill>
+                  <a:srgbClr val="152130"/>
+                </a:solidFill>
+                <a:latin typeface="Arial"/>
+              </a:rPr>
+              <a:t>Company releases: Knorr-Bremse FY2023-25; ZF AR2024-25; SAF-Holland AR2024; Mahle AR2024-25; Haldex year-end 2021; Rheinmetall FY2025 + AEQUITA divestment (3 Jun 2026); Circle BidCo/A.P. Møller offer documents (2024); Brakes India-TBK alliance (Dec 2025)</a:t>
+            </a:r>
+          </a:p>
+        </p:txBody>
+      </p:sp>
+      <p:sp>
+        <p:nvSpPr>
+          <p:cNvPr id="6" name="TextBox 5"/>
           <p:cNvSpPr txBox="1"/>
           <p:nvPr/>
         </p:nvSpPr>
         <p:spPr>
           <a:xfrm>
-            <a:off x="6217920" y="3977639"/>
+            <a:off x="6217920" y="1188720"/>
             <a:ext cx="5532120" cy="2606040"/>
           </a:xfrm>
           <a:prstGeom prst="rect">
@@ -17893,6 +18378,248 @@
                 </a:solidFill>
                 <a:latin typeface="Arial"/>
               </a:rPr>
+              <a:t>Peer-reviewed &amp; academic</a:t>
+            </a:r>
+          </a:p>
+          <a:p>
+            <a:pPr>
+              <a:spcBef>
+                <a:spcPts val="400"/>
+              </a:spcBef>
+            </a:pPr>
+            <a:r>
+              <a:rPr sz="1000">
+                <a:solidFill>
+                  <a:srgbClr val="152130"/>
+                </a:solidFill>
+                <a:latin typeface="Arial"/>
+              </a:rPr>
+              <a:t>Göhring &amp; von Glasner, SAE 902206 (1990); Kajiyama et al. (Isuzu/TBK), SAE 902200 (1990); Day, Harding &amp; Newcomb, Proc IMechE (1984); Hoover et al., SAE 2005-01-3614; Subel &amp; Kienhöfer, Proc IMechE D (2020)</a:t>
+            </a:r>
+          </a:p>
+          <a:p>
+            <a:pPr>
+              <a:spcBef>
+                <a:spcPts val="400"/>
+              </a:spcBef>
+            </a:pPr>
+            <a:r>
+              <a:rPr sz="1000">
+                <a:solidFill>
+                  <a:srgbClr val="152130"/>
+                </a:solidFill>
+                <a:latin typeface="Arial"/>
+              </a:rPr>
+              <a:t>Ampadu, Alrejjal &amp; Ksaibati, JSDTL 8(1) 2023 — disc vs drum cost-effectiveness</a:t>
+            </a:r>
+          </a:p>
+          <a:p>
+            <a:pPr>
+              <a:spcBef>
+                <a:spcPts val="400"/>
+              </a:spcBef>
+            </a:pPr>
+            <a:r>
+              <a:rPr sz="1000">
+                <a:solidFill>
+                  <a:srgbClr val="152130"/>
+                </a:solidFill>
+                <a:latin typeface="Arial"/>
+              </a:rPr>
+              <a:t>Granitz et al., SN Applied Sciences (2021) — e-coolant pump, 13L HD diesel; Bitsis &amp; Miwa, SAE 2018-01-0980; Cummins SuperTruck 2, SAE 2019-01-0247; MIT S.M. thesis (2012) — HD parasitic losses</a:t>
+            </a:r>
+          </a:p>
+          <a:p>
+            <a:pPr>
+              <a:spcBef>
+                <a:spcPts val="400"/>
+              </a:spcBef>
+            </a:pPr>
+            <a:r>
+              <a:rPr sz="1000">
+                <a:solidFill>
+                  <a:srgbClr val="152130"/>
+                </a:solidFill>
+                <a:latin typeface="Arial"/>
+              </a:rPr>
+              <a:t>Zhang et al., J. Hazardous Materials 465 (2024); Hagino, Atmosphere 15:75 (2024, JARI); Environmental Pollution (2023) — regen braking &amp; brake wear</a:t>
+            </a:r>
+          </a:p>
+          <a:p>
+            <a:pPr>
+              <a:spcBef>
+                <a:spcPts val="400"/>
+              </a:spcBef>
+            </a:pPr>
+            <a:r>
+              <a:rPr sz="1000">
+                <a:solidFill>
+                  <a:srgbClr val="152130"/>
+                </a:solidFill>
+                <a:latin typeface="Arial"/>
+              </a:rPr>
+              <a:t>Energies 16:4024 (2023), 19:1748 (2026); Sustainability 15:3132 (2023); Energies 16:168 (2023) — BEV/FCEV truck &amp; bus thermal management</a:t>
+            </a:r>
+          </a:p>
+        </p:txBody>
+      </p:sp>
+      <p:sp>
+        <p:nvSpPr>
+          <p:cNvPr id="7" name="TextBox 6"/>
+          <p:cNvSpPr txBox="1"/>
+          <p:nvPr/>
+        </p:nvSpPr>
+        <p:spPr>
+          <a:xfrm>
+            <a:off x="457200" y="3977639"/>
+            <a:ext cx="5577840" cy="2606040"/>
+          </a:xfrm>
+          <a:prstGeom prst="rect">
+            <a:avLst/>
+          </a:prstGeom>
+          <a:solidFill>
+            <a:srgbClr val="F6F7F9"/>
+          </a:solidFill>
+          <a:ln w="15875">
+            <a:solidFill>
+              <a:srgbClr val="152130"/>
+            </a:solidFill>
+          </a:ln>
+        </p:spPr>
+        <p:txBody>
+          <a:bodyPr wrap="square" lIns="137160" rIns="137160" tIns="109728">
+            <a:spAutoFit/>
+          </a:bodyPr>
+          <a:lstStyle/>
+          <a:p>
+            <a:r>
+              <a:rPr sz="1450" b="1">
+                <a:solidFill>
+                  <a:srgbClr val="152130"/>
+                </a:solidFill>
+                <a:latin typeface="Arial"/>
+              </a:rPr>
+              <a:t>Regulatory &amp; legal</a:t>
+            </a:r>
+          </a:p>
+          <a:p>
+            <a:pPr>
+              <a:spcBef>
+                <a:spcPts val="400"/>
+              </a:spcBef>
+            </a:pPr>
+            <a:r>
+              <a:rPr sz="1000">
+                <a:solidFill>
+                  <a:srgbClr val="152130"/>
+                </a:solidFill>
+                <a:latin typeface="Arial"/>
+              </a:rPr>
+              <a:t>NHTSA: FMVSS 121 final rule 74 FR 37122 (2009) + Regulatory Impact Analysis; DOT HS 811 367 (2010, NADS simulator); ESV 07-0242 (2007); heavy-vehicle AEB NPRM (2023)</a:t>
+            </a:r>
+          </a:p>
+          <a:p>
+            <a:pPr>
+              <a:spcBef>
+                <a:spcPts val="400"/>
+              </a:spcBef>
+            </a:pPr>
+            <a:r>
+              <a:rPr sz="1000">
+                <a:solidFill>
+                  <a:srgbClr val="152130"/>
+                </a:solidFill>
+                <a:latin typeface="Arial"/>
+              </a:rPr>
+              <a:t>UNECE Regulation No. 13 (braking, Type-II fade tests)</a:t>
+            </a:r>
+          </a:p>
+          <a:p>
+            <a:pPr>
+              <a:spcBef>
+                <a:spcPts val="400"/>
+              </a:spcBef>
+            </a:pPr>
+            <a:r>
+              <a:rPr sz="1000">
+                <a:solidFill>
+                  <a:srgbClr val="152130"/>
+                </a:solidFill>
+                <a:latin typeface="Arial"/>
+              </a:rPr>
+              <a:t>EU: Reg 2019/1242 &amp; 2024/1610 (HDV CO2); Reg 2024/1257 (Euro 7); Reg 2017/2400 Annex IX (VECTO auxiliaries) + JRC112015; EPA Phase 2 (40 CFR 1037.520 accessory credits) &amp; Phase 3 (2024)</a:t>
+            </a:r>
+          </a:p>
+          <a:p>
+            <a:pPr>
+              <a:spcBef>
+                <a:spcPts val="400"/>
+              </a:spcBef>
+            </a:pPr>
+            <a:r>
+              <a:rPr sz="1000">
+                <a:solidFill>
+                  <a:srgbClr val="152130"/>
+                </a:solidFill>
+                <a:latin typeface="Arial"/>
+              </a:rPr>
+              <a:t>EC merger decisions: M.8102 Valeo/FTE (2017, 90-100% concentration, Raicam remedy); Knorr-Bremse/Haldex Phase II (IP-17-2126, 2017)</a:t>
+            </a:r>
+          </a:p>
+          <a:p>
+            <a:pPr>
+              <a:spcBef>
+                <a:spcPts val="400"/>
+              </a:spcBef>
+            </a:pPr>
+            <a:r>
+              <a:rPr sz="1000">
+                <a:solidFill>
+                  <a:srgbClr val="152130"/>
+                </a:solidFill>
+                <a:latin typeface="Arial"/>
+              </a:rPr>
+              <a:t>Japan: MY2025 HDV fuel-economy standards (via ICCT/TransportPolicy); METI supplier-transition studies (2023, 2025); FMCSA Crash Cost Methodology (2025); AAA Foundation (2017)</a:t>
+            </a:r>
+          </a:p>
+        </p:txBody>
+      </p:sp>
+      <p:sp>
+        <p:nvSpPr>
+          <p:cNvPr id="8" name="TextBox 7"/>
+          <p:cNvSpPr txBox="1"/>
+          <p:nvPr/>
+        </p:nvSpPr>
+        <p:spPr>
+          <a:xfrm>
+            <a:off x="6217920" y="3977639"/>
+            <a:ext cx="5532120" cy="2606040"/>
+          </a:xfrm>
+          <a:prstGeom prst="rect">
+            <a:avLst/>
+          </a:prstGeom>
+          <a:solidFill>
+            <a:srgbClr val="F6F7F9"/>
+          </a:solidFill>
+          <a:ln w="15875">
+            <a:solidFill>
+              <a:srgbClr val="152130"/>
+            </a:solidFill>
+          </a:ln>
+        </p:spPr>
+        <p:txBody>
+          <a:bodyPr wrap="square" lIns="137160" rIns="137160" tIns="109728">
+            <a:spAutoFit/>
+          </a:bodyPr>
+          <a:lstStyle/>
+          <a:p>
+            <a:r>
+              <a:rPr sz="1450" b="1">
+                <a:solidFill>
+                  <a:srgbClr val="152130"/>
+                </a:solidFill>
+                <a:latin typeface="Arial"/>
+              </a:rPr>
               <a:t>Industry &amp; financial data (verified, labeled where single-source)</a:t>
             </a:r>
           </a:p>
@@ -17992,7 +18719,7 @@
                 </a:solidFill>
                 <a:latin typeface="Arial"/>
               </a:rPr>
-              <a:t>28</a:t>
+              <a:t>29</a:t>
             </a:r>
           </a:p>
         </p:txBody>

--- a/TBK_rd_gap_slides.pptx
+++ b/TBK_rd_gap_slides.pptx
@@ -1377,6 +1377,27 @@
             </c:numRef>
           </c:val>
         </c:ser>
+        <c:dLbls>
+          <c:numFmt formatCode="0.0" sourceLinked="0"/>
+          <c:txPr>
+            <a:bodyPr/>
+            <a:lstStyle/>
+            <a:p>
+              <a:pPr>
+                <a:defRPr sz="800">
+                  <a:latin typeface="Arial"/>
+                </a:defRPr>
+              </a:pPr>
+            </a:p>
+          </c:txPr>
+          <c:showLegendKey val="0"/>
+          <c:showVal val="1"/>
+          <c:showCatName val="0"/>
+          <c:showSerName val="0"/>
+          <c:showPercent val="0"/>
+          <c:showBubbleSize val="0"/>
+          <c:showLeaderLines val="1"/>
+        </c:dLbls>
         <c:axId val="-2068027336"/>
         <c:axId val="-2113994440"/>
       </c:barChart>
@@ -1644,6 +1665,30 @@
             </c:numRef>
           </c:val>
         </c:ser>
+        <c:dLbls>
+          <c:numFmt formatCode="0" sourceLinked="0"/>
+          <c:txPr>
+            <a:bodyPr/>
+            <a:lstStyle/>
+            <a:p>
+              <a:pPr>
+                <a:defRPr sz="900">
+                  <a:solidFill>
+                    <a:srgbClr val="FFFFFF"/>
+                  </a:solidFill>
+                  <a:latin typeface="Arial"/>
+                </a:defRPr>
+              </a:pPr>
+            </a:p>
+          </c:txPr>
+          <c:showLegendKey val="0"/>
+          <c:showVal val="1"/>
+          <c:showCatName val="0"/>
+          <c:showSerName val="0"/>
+          <c:showPercent val="0"/>
+          <c:showBubbleSize val="0"/>
+          <c:showLeaderLines val="1"/>
+        </c:dLbls>
         <c:overlap val="100"/>
         <c:axId val="-2068027336"/>
         <c:axId val="-2113994440"/>

--- a/TBK_rd_gap_slides.pptx
+++ b/TBK_rd_gap_slides.pptx
@@ -2822,6 +2822,30 @@
             </c:numRef>
           </c:val>
         </c:ser>
+        <c:dLbls>
+          <c:numFmt formatCode="0.0" sourceLinked="0"/>
+          <c:txPr>
+            <a:bodyPr/>
+            <a:lstStyle/>
+            <a:p>
+              <a:pPr>
+                <a:defRPr sz="650">
+                  <a:solidFill>
+                    <a:srgbClr val="556A83"/>
+                  </a:solidFill>
+                  <a:latin typeface="Arial"/>
+                </a:defRPr>
+              </a:pPr>
+            </a:p>
+          </c:txPr>
+          <c:showLegendKey val="0"/>
+          <c:showVal val="1"/>
+          <c:showCatName val="0"/>
+          <c:showSerName val="0"/>
+          <c:showPercent val="0"/>
+          <c:showBubbleSize val="0"/>
+          <c:showLeaderLines val="1"/>
+        </c:dLbls>
         <c:axId val="-2068027336"/>
         <c:axId val="-2113994440"/>
       </c:barChart>
@@ -3331,6 +3355,30 @@
             </c:numRef>
           </c:val>
         </c:ser>
+        <c:dLbls>
+          <c:numFmt formatCode="0.0" sourceLinked="0"/>
+          <c:txPr>
+            <a:bodyPr/>
+            <a:lstStyle/>
+            <a:p>
+              <a:pPr>
+                <a:defRPr sz="650">
+                  <a:solidFill>
+                    <a:srgbClr val="556A83"/>
+                  </a:solidFill>
+                  <a:latin typeface="Arial"/>
+                </a:defRPr>
+              </a:pPr>
+            </a:p>
+          </c:txPr>
+          <c:showLegendKey val="0"/>
+          <c:showVal val="1"/>
+          <c:showCatName val="0"/>
+          <c:showSerName val="0"/>
+          <c:showPercent val="0"/>
+          <c:showBubbleSize val="0"/>
+          <c:showLeaderLines val="1"/>
+        </c:dLbls>
         <c:axId val="-2068027336"/>
         <c:axId val="-2113994440"/>
       </c:barChart>
@@ -17672,7 +17720,7 @@
               </a:spcBef>
             </a:pPr>
             <a:r>
-              <a:rPr sz="1100">
+              <a:rPr sz="950">
                 <a:solidFill>
                   <a:srgbClr val="152130"/>
                 </a:solidFill>
@@ -17688,7 +17736,7 @@
               </a:spcBef>
             </a:pPr>
             <a:r>
-              <a:rPr sz="1100">
+              <a:rPr sz="950">
                 <a:solidFill>
                   <a:srgbClr val="152130"/>
                 </a:solidFill>
@@ -17704,7 +17752,7 @@
               </a:spcBef>
             </a:pPr>
             <a:r>
-              <a:rPr sz="1100">
+              <a:rPr sz="950">
                 <a:solidFill>
                   <a:srgbClr val="152130"/>
                 </a:solidFill>
@@ -17720,7 +17768,7 @@
               </a:spcBef>
             </a:pPr>
             <a:r>
-              <a:rPr sz="1100">
+              <a:rPr sz="950">
                 <a:solidFill>
                   <a:srgbClr val="152130"/>
                 </a:solidFill>
@@ -17777,7 +17825,7 @@
               </a:spcBef>
             </a:pPr>
             <a:r>
-              <a:rPr sz="1100">
+              <a:rPr sz="950">
                 <a:solidFill>
                   <a:srgbClr val="152130"/>
                 </a:solidFill>
@@ -17793,7 +17841,7 @@
               </a:spcBef>
             </a:pPr>
             <a:r>
-              <a:rPr sz="1100">
+              <a:rPr sz="950">
                 <a:solidFill>
                   <a:srgbClr val="152130"/>
                 </a:solidFill>
@@ -17809,7 +17857,7 @@
               </a:spcBef>
             </a:pPr>
             <a:r>
-              <a:rPr sz="1100">
+              <a:rPr sz="950">
                 <a:solidFill>
                   <a:srgbClr val="152130"/>
                 </a:solidFill>
@@ -17825,7 +17873,7 @@
               </a:spcBef>
             </a:pPr>
             <a:r>
-              <a:rPr sz="1100">
+              <a:rPr sz="950">
                 <a:solidFill>
                   <a:srgbClr val="152130"/>
                 </a:solidFill>
@@ -17841,7 +17889,7 @@
               </a:spcBef>
             </a:pPr>
             <a:r>
-              <a:rPr sz="1100">
+              <a:rPr sz="950">
                 <a:solidFill>
                   <a:srgbClr val="152130"/>
                 </a:solidFill>
@@ -17857,7 +17905,7 @@
               </a:spcBef>
             </a:pPr>
             <a:r>
-              <a:rPr sz="1100">
+              <a:rPr sz="950">
                 <a:solidFill>
                   <a:srgbClr val="152130"/>
                 </a:solidFill>
@@ -17873,7 +17921,7 @@
               </a:spcBef>
             </a:pPr>
             <a:r>
-              <a:rPr sz="1100">
+              <a:rPr sz="950">
                 <a:solidFill>
                   <a:srgbClr val="152130"/>
                 </a:solidFill>
@@ -17930,7 +17978,7 @@
               </a:spcBef>
             </a:pPr>
             <a:r>
-              <a:rPr sz="1100">
+              <a:rPr sz="950">
                 <a:solidFill>
                   <a:srgbClr val="152130"/>
                 </a:solidFill>
@@ -17946,7 +17994,7 @@
               </a:spcBef>
             </a:pPr>
             <a:r>
-              <a:rPr sz="1100">
+              <a:rPr sz="950">
                 <a:solidFill>
                   <a:srgbClr val="152130"/>
                 </a:solidFill>
@@ -17962,7 +18010,7 @@
               </a:spcBef>
             </a:pPr>
             <a:r>
-              <a:rPr sz="1100">
+              <a:rPr sz="950">
                 <a:solidFill>
                   <a:srgbClr val="152130"/>
                 </a:solidFill>
@@ -17978,7 +18026,7 @@
               </a:spcBef>
             </a:pPr>
             <a:r>
-              <a:rPr sz="1100">
+              <a:rPr sz="950">
                 <a:solidFill>
                   <a:srgbClr val="152130"/>
                 </a:solidFill>
@@ -18035,7 +18083,7 @@
               </a:spcBef>
             </a:pPr>
             <a:r>
-              <a:rPr sz="1100">
+              <a:rPr sz="950">
                 <a:solidFill>
                   <a:srgbClr val="152130"/>
                 </a:solidFill>
@@ -18051,7 +18099,7 @@
               </a:spcBef>
             </a:pPr>
             <a:r>
-              <a:rPr sz="1100">
+              <a:rPr sz="950">
                 <a:solidFill>
                   <a:srgbClr val="152130"/>
                 </a:solidFill>
@@ -18067,7 +18115,7 @@
               </a:spcBef>
             </a:pPr>
             <a:r>
-              <a:rPr sz="1100">
+              <a:rPr sz="950">
                 <a:solidFill>
                   <a:srgbClr val="152130"/>
                 </a:solidFill>
@@ -18083,7 +18131,7 @@
               </a:spcBef>
             </a:pPr>
             <a:r>
-              <a:rPr sz="1100">
+              <a:rPr sz="950">
                 <a:solidFill>
                   <a:srgbClr val="152130"/>
                 </a:solidFill>
@@ -18099,7 +18147,7 @@
               </a:spcBef>
             </a:pPr>
             <a:r>
-              <a:rPr sz="1100">
+              <a:rPr sz="950">
                 <a:solidFill>
                   <a:srgbClr val="152130"/>
                 </a:solidFill>

--- a/TBK_rd_gap_slides.pptx
+++ b/TBK_rd_gap_slides.pptx
@@ -8983,7 +8983,7 @@
                 </a:solidFill>
                 <a:latin typeface="Arial"/>
               </a:rPr>
-              <a:t>TBK does not disclose gross profit per division, so its blended 12.5% is shown against both panels. Even on the most charitable reading — assuming all underperformance sits in one business — TBK is below peer average in the other. Peer set: IFRS cost-of-sales / JGAAP reporters only.</a:t>
+              <a:t>TBK does not disclose gross profit per division, so its blended 12.5% is shown against both panels. Even on the most charitable reading, TBK is below peer average in the other business. Robustness: on the accounting-HARMONIZED peer dataset the same gap shows at EBITA level — Western peers 8-13% vs TBK ~3% averaged over a decade — so the conclusion does not depend on gross-margin treatment.</a:t>
             </a:r>
           </a:p>
         </p:txBody>
@@ -9322,7 +9322,7 @@
                 </a:solidFill>
                 <a:latin typeface="Arial"/>
               </a:rPr>
-              <a:t>What it funds</a:t>
+              <a:t>What it funds — sequencing, not circularity</a:t>
             </a:r>
           </a:p>
           <a:p>
@@ -9338,7 +9338,7 @@
                 </a:solidFill>
                 <a:latin typeface="Arial"/>
               </a:rPr>
-              <a:t>The entire R&amp;D catch-up program costs ~$27M/yr</a:t>
+              <a:t>The margin levers need NO new products: reprice the EXISTING book (non-keiretsu buyers already pay ~2x for identical parts), prune, fix the footprint, shift mix</a:t>
             </a:r>
           </a:p>
           <a:p>
@@ -9354,7 +9354,7 @@
                 </a:solidFill>
                 <a:latin typeface="Arial"/>
               </a:rPr>
-              <a:t>(parity run-rate $17M + deficit repayment $10M)</a:t>
+              <a:t>→ those fund the ~$27M/yr R&amp;D program, which closes the CONTENT gap later</a:t>
             </a:r>
           </a:p>
           <a:p>
@@ -9370,62 +9370,7 @@
                 </a:solidFill>
                 <a:latin typeface="Arial"/>
               </a:rPr>
-              <a:t>→ closing ~90% of the margin gap pays for ALL of it</a:t>
-            </a:r>
-          </a:p>
-          <a:p>
-            <a:pPr>
-              <a:spcBef>
-                <a:spcPts val="400"/>
-              </a:spcBef>
-            </a:pPr>
-          </a:p>
-          <a:p>
-            <a:pPr>
-              <a:spcBef>
-                <a:spcPts val="400"/>
-              </a:spcBef>
-            </a:pPr>
-            <a:r>
-              <a:rPr sz="1300">
-                <a:solidFill>
-                  <a:srgbClr val="152130"/>
-                </a:solidFill>
-                <a:latin typeface="Arial"/>
-              </a:rPr>
-              <a:t>FY3/2026 already delivered the first ~$7M/yr</a:t>
-            </a:r>
-          </a:p>
-          <a:p>
-            <a:pPr>
-              <a:spcBef>
-                <a:spcPts val="400"/>
-              </a:spcBef>
-            </a:pPr>
-            <a:r>
-              <a:rPr sz="1300">
-                <a:solidFill>
-                  <a:srgbClr val="152130"/>
-                </a:solidFill>
-                <a:latin typeface="Arial"/>
-              </a:rPr>
-              <a:t>(margin 10.6% → 12.5%) — and the phased pro-forma</a:t>
-            </a:r>
-          </a:p>
-          <a:p>
-            <a:pPr>
-              <a:spcBef>
-                <a:spcPts val="400"/>
-              </a:spcBef>
-            </a:pPr>
-            <a:r>
-              <a:rPr sz="1300">
-                <a:solidFill>
-                  <a:srgbClr val="152130"/>
-                </a:solidFill>
-                <a:latin typeface="Arial"/>
-              </a:rPr>
-              <a:t>(later page) shows the full management-premise view</a:t>
+              <a:t>FY3/2026 already delivered the first ~$7M/yr (10.6% → 12.5%) before any new product</a:t>
             </a:r>
           </a:p>
         </p:txBody>
@@ -16314,7 +16259,7 @@
                 </a:solidFill>
                 <a:latin typeface="Arial"/>
               </a:rPr>
-              <a:t>TBK's innovation is real but INVISIBLE: 75 years of retarder/brake/pump engineering, an ADB prototype, e-pumps and a thermal control unit in development — none of it patented at scale, published at JSAE, or externally awarded. Invisible innovation cannot win sockets outside the keiretsu.</a:t>
+              <a:t>TBK's innovation is DOCUMENTED BUT EXTERNALLY UNVALIDATED: the product facts are verifiable (retarders since the 1960s, e-pumps and a TCU in development, an ADB prototype) — their competitiveness is not externally evidenced, and 'no recalls in 75 years' is absence-of-negatives, not proof of excellence. Either way the commercial conclusion holds: unvalidated innovation cannot win sockets outside the keiretsu.</a:t>
             </a:r>
           </a:p>
           <a:p>
@@ -18016,7 +17961,7 @@
                 </a:solidFill>
                 <a:latin typeface="Arial"/>
               </a:rPr>
-              <a:t>Accounting bases differ: German/Italian nature-of-expense 'gross margins' (Knorr ~50%, Brembo ~50%) are materials-only and EXCLUDED from margin comparisons; JGAAP fully expenses R&amp;D while IFRS peers capitalize part</a:t>
+              <a:t>Accounting: the consistent-basis peer dataset (margins, EBITA, R&amp;D, ROIC for the 7 companies) is HARMONIZED to the same treatment — cross-GAAP caveats apply only to raw-filing figures for non-dataset peers; nature-of-expense 'gross margins' (Knorr/Brembo ~50%) remain excluded. The margin gap also shows at EBITA level (peers 8-13% vs Japanese cohort ~3-3.5% for a decade) — treatment-independent</a:t>
             </a:r>
           </a:p>
           <a:p>
@@ -21683,7 +21628,7 @@
                 </a:solidFill>
                 <a:latin typeface="Arial"/>
               </a:rPr>
-              <a:t>Brake systems players spend 6-9% of sales; large pump/thermal players cluster at 4-5.5%; Akebono now at 4.3% (EMB + copper-free friction ramp, per consistent peer dataset). TBK sits at 2.2%. *Concentric (AR2023, verified): expensed product development only 2.3% — yet 25% gross margin: niche dominance, not raw R&amp;D scale, drives pump profitability. *Hanon mid-range of conflicting filings.</a:t>
+              <a:t>Brake systems players spend 6-9%; pump/thermal players 4-5.5%; Akebono 4.3% (EMB ramp); TBK 2.2%. *Concentric's 2.3% is NOT a counter-example: it is the lean steady state of a firm whose knowledge stock is already BUILT — decades of niche IP, IFRS-capitalized development, plus the $147M EMP acquisition (purchased R&amp;D stock), with e-products already 20% of sales. TBK's 4.7% is transition spend to cross the disc/e-pump discontinuity Concentric crossed years ago. Different phases, not a contradiction. *Hanon mid-range of conflicting filings.</a:t>
             </a:r>
           </a:p>
         </p:txBody>
@@ -21917,103 +21862,119 @@
                 </a:solidFill>
                 <a:latin typeface="Arial"/>
               </a:rPr>
-              <a:t>The stock gap</a:t>
-            </a:r>
-          </a:p>
-          <a:p>
-            <a:pPr>
-              <a:spcBef>
-                <a:spcPts val="400"/>
-              </a:spcBef>
-            </a:pPr>
-            <a:r>
-              <a:rPr sz="1250">
-                <a:solidFill>
-                  <a:srgbClr val="152130"/>
-                </a:solidFill>
-                <a:latin typeface="Arial"/>
-              </a:rPr>
-              <a:t>Cummins $5.6bn — 130x TBK</a:t>
-            </a:r>
-          </a:p>
-          <a:p>
-            <a:pPr>
-              <a:spcBef>
-                <a:spcPts val="400"/>
-              </a:spcBef>
-            </a:pPr>
-            <a:r>
-              <a:rPr sz="1250">
-                <a:solidFill>
-                  <a:srgbClr val="152130"/>
-                </a:solidFill>
-                <a:latin typeface="Arial"/>
-              </a:rPr>
-              <a:t>Knorr-Bremse $2.6bn — 60x TBK</a:t>
-            </a:r>
-          </a:p>
-          <a:p>
-            <a:pPr>
-              <a:spcBef>
-                <a:spcPts val="400"/>
-              </a:spcBef>
-            </a:pPr>
-            <a:r>
-              <a:rPr sz="1250">
-                <a:solidFill>
-                  <a:srgbClr val="152130"/>
-                </a:solidFill>
-                <a:latin typeface="Arial"/>
-              </a:rPr>
-              <a:t>Mikuni $194M — 4.5x TBK</a:t>
-            </a:r>
-          </a:p>
-          <a:p>
-            <a:pPr>
-              <a:spcBef>
-                <a:spcPts val="400"/>
-              </a:spcBef>
-            </a:pPr>
-            <a:r>
-              <a:rPr sz="1250">
-                <a:solidFill>
-                  <a:srgbClr val="152130"/>
-                </a:solidFill>
-                <a:latin typeface="Arial"/>
-              </a:rPr>
-              <a:t>SAF-Holland $131M | Akebono $123M</a:t>
-            </a:r>
-          </a:p>
-          <a:p>
-            <a:pPr>
-              <a:spcBef>
-                <a:spcPts val="400"/>
-              </a:spcBef>
-            </a:pPr>
-            <a:r>
-              <a:rPr sz="1250">
-                <a:solidFill>
-                  <a:srgbClr val="152130"/>
-                </a:solidFill>
-                <a:latin typeface="Arial"/>
-              </a:rPr>
-              <a:t>TBK: $43M — the smallest knowledge</a:t>
-            </a:r>
-          </a:p>
-          <a:p>
-            <a:pPr>
-              <a:spcBef>
-                <a:spcPts val="400"/>
-              </a:spcBef>
-            </a:pPr>
-            <a:r>
-              <a:rPr sz="1250">
-                <a:solidFill>
-                  <a:srgbClr val="152130"/>
-                </a:solidFill>
-                <a:latin typeface="Arial"/>
-              </a:rPr>
-              <a:t>base in the peer set</a:t>
+              <a:t>The like-for-like signals</a:t>
+            </a:r>
+          </a:p>
+          <a:p>
+            <a:pPr>
+              <a:spcBef>
+                <a:spcPts val="400"/>
+              </a:spcBef>
+            </a:pPr>
+            <a:r>
+              <a:rPr sz="1200">
+                <a:solidFill>
+                  <a:srgbClr val="152130"/>
+                </a:solidFill>
+                <a:latin typeface="Arial"/>
+              </a:rPr>
+              <a:t>Same-size comparator: Mikuni $194M</a:t>
+            </a:r>
+          </a:p>
+          <a:p>
+            <a:pPr>
+              <a:spcBef>
+                <a:spcPts val="400"/>
+              </a:spcBef>
+            </a:pPr>
+            <a:r>
+              <a:rPr sz="1200">
+                <a:solidFill>
+                  <a:srgbClr val="152130"/>
+                </a:solidFill>
+                <a:latin typeface="Arial"/>
+              </a:rPr>
+              <a:t>— 4.5x TBK at ~2x the revenue</a:t>
+            </a:r>
+          </a:p>
+          <a:p>
+            <a:pPr>
+              <a:spcBef>
+                <a:spcPts val="400"/>
+              </a:spcBef>
+            </a:pPr>
+            <a:r>
+              <a:rPr sz="1200">
+                <a:solidFill>
+                  <a:srgbClr val="152130"/>
+                </a:solidFill>
+                <a:latin typeface="Arial"/>
+              </a:rPr>
+              <a:t>Intensity: TBK 12% of sales vs</a:t>
+            </a:r>
+          </a:p>
+          <a:p>
+            <a:pPr>
+              <a:spcBef>
+                <a:spcPts val="400"/>
+              </a:spcBef>
+            </a:pPr>
+            <a:r>
+              <a:rPr sz="1200">
+                <a:solidFill>
+                  <a:srgbClr val="152130"/>
+                </a:solidFill>
+                <a:latin typeface="Arial"/>
+              </a:rPr>
+              <a:t>Mikuni/Knorr 29%, Cummins 17%</a:t>
+            </a:r>
+          </a:p>
+          <a:p>
+            <a:pPr>
+              <a:spcBef>
+                <a:spcPts val="400"/>
+              </a:spcBef>
+            </a:pPr>
+            <a:r>
+              <a:rPr sz="1200">
+                <a:solidFill>
+                  <a:srgbClr val="152130"/>
+                </a:solidFill>
+                <a:latin typeface="Arial"/>
+              </a:rPr>
+              <a:t>Giants ($2.6-5.6bn) shown for context</a:t>
+            </a:r>
+          </a:p>
+          <a:p>
+            <a:pPr>
+              <a:spcBef>
+                <a:spcPts val="400"/>
+              </a:spcBef>
+            </a:pPr>
+            <a:r>
+              <a:rPr sz="1200">
+                <a:solidFill>
+                  <a:srgbClr val="152130"/>
+                </a:solidFill>
+                <a:latin typeface="Arial"/>
+              </a:rPr>
+              <a:t>only — absolute stock scales with</a:t>
+            </a:r>
+          </a:p>
+          <a:p>
+            <a:pPr>
+              <a:spcBef>
+                <a:spcPts val="400"/>
+              </a:spcBef>
+            </a:pPr>
+            <a:r>
+              <a:rPr sz="1200">
+                <a:solidFill>
+                  <a:srgbClr val="152130"/>
+                </a:solidFill>
+                <a:latin typeface="Arial"/>
+              </a:rPr>
+              <a:t>company size; ratios are the test</a:t>
             </a:r>
           </a:p>
         </p:txBody>
@@ -22185,7 +22146,7 @@
                 </a:solidFill>
                 <a:latin typeface="Arial"/>
               </a:rPr>
-              <a:t>Why it matters: the R&amp;D gap is cumulative, not annual. A decade of under-spending leaves TBK rebuilding a depleted asset while competitors amortize billions of accumulated know-how into every bid (brake control software, ADB iterations, e-pump motor/inverter design). This is why the catch-up phase must run YEARS at elevated spend — one good budget year cannot rebuild a stock — and why partnering (Brakes India) to borrow an existing knowledge base is rational.</a:t>
+              <a:t>Why it matters: the R&amp;D gap is cumulative, not annual — and it holds on the size-adjusted measures (intensity, same-size peers), not just the headline billions. A decade of under-spending leaves TBK rebuilding a depleted asset while competitors amortize accumulated know-how into every bid (brake control software, ADB iterations, e-pump motor/inverter design). This is why the catch-up phase must run YEARS at elevated spend — one good budget year cannot rebuild a stock — and why partnering (Brakes India) to borrow an existing knowledge base is rational.</a:t>
             </a:r>
           </a:p>
         </p:txBody>
@@ -22538,7 +22499,23 @@
                 </a:solidFill>
                 <a:latin typeface="Arial"/>
               </a:rPr>
-              <a:t>Inverted economics = pricing power sits with the customer: keiretsu concentration (Isuzu alone ¥12bn = 22% of sales) and annual price-downs, against commodity drum/mechanical products with no systems, electronics or branded-aftermarket content to defend price</a:t>
+              <a:t>Inverted economics = pricing power sits with the customer: keiretsu concentration (Isuzu alone ¥12bn = 22% of sales) and annual price-downs</a:t>
+            </a:r>
+          </a:p>
+          <a:p>
+            <a:pPr>
+              <a:spcBef>
+                <a:spcPts val="400"/>
+              </a:spcBef>
+            </a:pPr>
+            <a:r>
+              <a:rPr sz="1150">
+                <a:solidFill>
+                  <a:srgbClr val="152130"/>
+                </a:solidFill>
+                <a:latin typeface="Arial"/>
+              </a:rPr>
+              <a:t>Critically: the SAME commodity products fetch ~2x from non-keiretsu buyers and 30%+ more at market — the pricing gap exists BEFORE any content upgrade; systems/aftermarket content is the second, later lever</a:t>
             </a:r>
           </a:p>
         </p:txBody>

--- a/TBK_rd_gap_slides.pptx
+++ b/TBK_rd_gap_slides.pptx
@@ -3473,7 +3473,7 @@
                 </a:solidFill>
                 <a:latin typeface="Arial"/>
               </a:rPr>
-              <a:t>Capitalized R&amp;D stock, US$M (2025)</a:t>
+              <a:t>Capitalized R&amp;D stock, size-class peers only, US$M (2025)</a:t>
             </a:r>
           </a:p>
         </c:rich>
@@ -3507,36 +3507,34 @@
           </c:spPr>
           <c:cat>
             <c:strRef>
-              <c:f>Sheet1!$A$2:$A$7</c:f>
+              <c:f>Sheet1!$A$2:$A$5</c:f>
               <c:strCache>
-                <c:ptCount val="6"/>
+                <c:ptCount val="4"/>
                 <c:pt idx="0">
-                  <c:v>TBK</c:v>
+                  <c:v>TBK
+(12% of sales)</c:v>
                 </c:pt>
                 <c:pt idx="1">
-                  <c:v>Akebono</c:v>
+                  <c:v>Akebono
+(12%)</c:v>
                 </c:pt>
                 <c:pt idx="2">
-                  <c:v>SAF-Holland</c:v>
+                  <c:v>SAF-Holland
+(7%)</c:v>
                 </c:pt>
                 <c:pt idx="3">
-                  <c:v>Mikuni</c:v>
-                </c:pt>
-                <c:pt idx="4">
-                  <c:v>Knorr-Bremse</c:v>
-                </c:pt>
-                <c:pt idx="5">
-                  <c:v>Cummins</c:v>
+                  <c:v>Mikuni
+(29%)</c:v>
                 </c:pt>
               </c:strCache>
             </c:strRef>
           </c:cat>
           <c:val>
             <c:numRef>
-              <c:f>Sheet1!$B$2:$B$7</c:f>
+              <c:f>Sheet1!$B$2:$B$5</c:f>
               <c:numCache>
                 <c:formatCode>General</c:formatCode>
-                <c:ptCount val="6"/>
+                <c:ptCount val="4"/>
                 <c:pt idx="0">
                   <c:v>43</c:v>
                 </c:pt>
@@ -3548,12 +3546,6 @@
                 </c:pt>
                 <c:pt idx="3">
                   <c:v>194</c:v>
-                </c:pt>
-                <c:pt idx="4">
-                  <c:v>2569</c:v>
-                </c:pt>
-                <c:pt idx="5">
-                  <c:v>5594</c:v>
                 </c:pt>
               </c:numCache>
             </c:numRef>
@@ -9338,7 +9330,7 @@
                 </a:solidFill>
                 <a:latin typeface="Arial"/>
               </a:rPr>
-              <a:t>The margin levers need NO new products: reprice the EXISTING book (non-keiretsu buyers already pay ~2x for identical parts), prune, fix the footprint, shift mix</a:t>
+              <a:t>The IMMEDIATE funding lever is the asset base, not theoretical pricing: &gt;¥2.2bn of impairments/restructuring in 2 yrs, a loss-making China segment, PP&amp;E at 39% of sales — footprint consolidation and utilization free cash NOW</a:t>
             </a:r>
           </a:p>
           <a:p>
@@ -9354,7 +9346,7 @@
                 </a:solidFill>
                 <a:latin typeface="Arial"/>
               </a:rPr>
-              <a:t>→ those fund the ~$27M/yr R&amp;D program, which closes the CONTENT gap later</a:t>
+              <a:t>Repricing the existing book (non-keiretsu already pay ~2x) adds the second leg — still no new products needed</a:t>
             </a:r>
           </a:p>
           <a:p>
@@ -9370,7 +9362,7 @@
                 </a:solidFill>
                 <a:latin typeface="Arial"/>
               </a:rPr>
-              <a:t>FY3/2026 already delivered the first ~$7M/yr (10.6% → 12.5%) before any new product</a:t>
+              <a:t>→ together they fund the ~$27M/yr R&amp;D, which closes the CONTENT gap later. FY3/26 proved it: +~$7M/yr before any new product</a:t>
             </a:r>
           </a:p>
         </p:txBody>
@@ -14757,6 +14749,38 @@
                 </a:solidFill>
                 <a:latin typeface="Arial"/>
               </a:rPr>
+              <a:t>Compel internal quality evidence: OEM scorecards, warranty rates, PPM data from Isuzu/Fuso/Hino</a:t>
+            </a:r>
+          </a:p>
+          <a:p>
+            <a:pPr>
+              <a:spcBef>
+                <a:spcPts val="400"/>
+              </a:spcBef>
+            </a:pPr>
+            <a:r>
+              <a:rPr sz="1000">
+                <a:solidFill>
+                  <a:srgbClr val="152130"/>
+                </a:solidFill>
+                <a:latin typeface="Arial"/>
+              </a:rPr>
+              <a:t>Pipeline audit: e-pumps in A/B sample testing; ADB homologation timeline</a:t>
+            </a:r>
+          </a:p>
+          <a:p>
+            <a:pPr>
+              <a:spcBef>
+                <a:spcPts val="400"/>
+              </a:spcBef>
+            </a:pPr>
+            <a:r>
+              <a:rPr sz="1000">
+                <a:solidFill>
+                  <a:srgbClr val="152130"/>
+                </a:solidFill>
+                <a:latin typeface="Arial"/>
+              </a:rPr>
               <a:t>R&amp;D program leads named; Brakes India roadmap workshop</a:t>
             </a:r>
           </a:p>
@@ -16275,7 +16299,7 @@
                 </a:solidFill>
                 <a:latin typeface="Arial"/>
               </a:rPr>
-              <a:t>Fix costs little: patent the e-pump/TCU and ADB work (Mikuni shows the value), publish, pursue external validation — a required complement to the R&amp;D spend itself.</a:t>
+              <a:t>Fix costs little — and ownership can compel the evidence: demand the OEM supplier scorecards, warranty-claim rates and PPM defect data from Isuzu/Fuso/Hino (they exist internally); audit the pipeline — how many e-pumps are in A/B samples with OEMs, what is the ADB homologation timeline. Then patent, publish, validate externally.</a:t>
             </a:r>
           </a:p>
         </p:txBody>
@@ -21628,7 +21652,7 @@
                 </a:solidFill>
                 <a:latin typeface="Arial"/>
               </a:rPr>
-              <a:t>Brake systems players spend 6-9%; pump/thermal players 4-5.5%; Akebono 4.3% (EMB ramp); TBK 2.2%. *Concentric's 2.3% is NOT a counter-example: it is the lean steady state of a firm whose knowledge stock is already BUILT — decades of niche IP, IFRS-capitalized development, plus the $147M EMP acquisition (purchased R&amp;D stock), with e-products already 20% of sales. TBK's 4.7% is transition spend to cross the disc/e-pump discontinuity Concentric crossed years ago. Different phases, not a contradiction. *Hanon mid-range of conflicting filings.</a:t>
+              <a:t>Brake systems players spend 6-9%; pump/thermal players 4-5.5%; Akebono 4.3% (EMB ramp); TBK 2.2%. *Concentric's 2.3% is NOT a counter-example: it is the lean steady state of a firm whose knowledge stock is already BUILT — decades of niche IP, IFRS-capitalized development, plus the $147M EMP acquisition (purchased R&amp;D stock), with e-products already 20% of sales. TBK's 4.7% is transition spend to cross the discontinuity Concentric crossed years ago. The real variable is not the %, it is ROIIC: Concentric deploys into protected electrified niches at high incremental returns; TBK spreads 2.2% defending dying drum/mechanical platforms at NEGATIVE ROIIC — starving its future to defend a shrinking past. *Hanon mid-range of conflicting filings.</a:t>
             </a:r>
           </a:p>
         </p:txBody>
@@ -21862,119 +21886,119 @@
                 </a:solidFill>
                 <a:latin typeface="Arial"/>
               </a:rPr>
-              <a:t>The like-for-like signals</a:t>
-            </a:r>
-          </a:p>
-          <a:p>
-            <a:pPr>
-              <a:spcBef>
-                <a:spcPts val="400"/>
-              </a:spcBef>
-            </a:pPr>
-            <a:r>
-              <a:rPr sz="1200">
-                <a:solidFill>
-                  <a:srgbClr val="152130"/>
-                </a:solidFill>
-                <a:latin typeface="Arial"/>
-              </a:rPr>
-              <a:t>Same-size comparator: Mikuni $194M</a:t>
-            </a:r>
-          </a:p>
-          <a:p>
-            <a:pPr>
-              <a:spcBef>
-                <a:spcPts val="400"/>
-              </a:spcBef>
-            </a:pPr>
-            <a:r>
-              <a:rPr sz="1200">
-                <a:solidFill>
-                  <a:srgbClr val="152130"/>
-                </a:solidFill>
-                <a:latin typeface="Arial"/>
-              </a:rPr>
-              <a:t>— 4.5x TBK at ~2x the revenue</a:t>
-            </a:r>
-          </a:p>
-          <a:p>
-            <a:pPr>
-              <a:spcBef>
-                <a:spcPts val="400"/>
-              </a:spcBef>
-            </a:pPr>
-            <a:r>
-              <a:rPr sz="1200">
-                <a:solidFill>
-                  <a:srgbClr val="152130"/>
-                </a:solidFill>
-                <a:latin typeface="Arial"/>
-              </a:rPr>
-              <a:t>Intensity: TBK 12% of sales vs</a:t>
-            </a:r>
-          </a:p>
-          <a:p>
-            <a:pPr>
-              <a:spcBef>
-                <a:spcPts val="400"/>
-              </a:spcBef>
-            </a:pPr>
-            <a:r>
-              <a:rPr sz="1200">
-                <a:solidFill>
-                  <a:srgbClr val="152130"/>
-                </a:solidFill>
-                <a:latin typeface="Arial"/>
-              </a:rPr>
-              <a:t>Mikuni/Knorr 29%, Cummins 17%</a:t>
-            </a:r>
-          </a:p>
-          <a:p>
-            <a:pPr>
-              <a:spcBef>
-                <a:spcPts val="400"/>
-              </a:spcBef>
-            </a:pPr>
-            <a:r>
-              <a:rPr sz="1200">
-                <a:solidFill>
-                  <a:srgbClr val="152130"/>
-                </a:solidFill>
-                <a:latin typeface="Arial"/>
-              </a:rPr>
-              <a:t>Giants ($2.6-5.6bn) shown for context</a:t>
-            </a:r>
-          </a:p>
-          <a:p>
-            <a:pPr>
-              <a:spcBef>
-                <a:spcPts val="400"/>
-              </a:spcBef>
-            </a:pPr>
-            <a:r>
-              <a:rPr sz="1200">
-                <a:solidFill>
-                  <a:srgbClr val="152130"/>
-                </a:solidFill>
-                <a:latin typeface="Arial"/>
-              </a:rPr>
-              <a:t>only — absolute stock scales with</a:t>
-            </a:r>
-          </a:p>
-          <a:p>
-            <a:pPr>
-              <a:spcBef>
-                <a:spcPts val="400"/>
-              </a:spcBef>
-            </a:pPr>
-            <a:r>
-              <a:rPr sz="1200">
-                <a:solidFill>
-                  <a:srgbClr val="152130"/>
-                </a:solidFill>
-                <a:latin typeface="Arial"/>
-              </a:rPr>
-              <a:t>company size; ratios are the test</a:t>
+              <a:t>The damning comparison is the direct one</a:t>
+            </a:r>
+          </a:p>
+          <a:p>
+            <a:pPr>
+              <a:spcBef>
+                <a:spcPts val="400"/>
+              </a:spcBef>
+            </a:pPr>
+            <a:r>
+              <a:rPr sz="1150">
+                <a:solidFill>
+                  <a:srgbClr val="152130"/>
+                </a:solidFill>
+                <a:latin typeface="Arial"/>
+              </a:rPr>
+              <a:t>Mikuni — a domestic peer in similar</a:t>
+            </a:r>
+          </a:p>
+          <a:p>
+            <a:pPr>
+              <a:spcBef>
+                <a:spcPts val="400"/>
+              </a:spcBef>
+            </a:pPr>
+            <a:r>
+              <a:rPr sz="1150">
+                <a:solidFill>
+                  <a:srgbClr val="152130"/>
+                </a:solidFill>
+                <a:latin typeface="Arial"/>
+              </a:rPr>
+              <a:t>adjacencies — holds $194M of knowledge</a:t>
+            </a:r>
+          </a:p>
+          <a:p>
+            <a:pPr>
+              <a:spcBef>
+                <a:spcPts val="400"/>
+              </a:spcBef>
+            </a:pPr>
+            <a:r>
+              <a:rPr sz="1150">
+                <a:solidFill>
+                  <a:srgbClr val="152130"/>
+                </a:solidFill>
+                <a:latin typeface="Arial"/>
+              </a:rPr>
+              <a:t>stock: 4.5x TBK at only ~2x the revenue</a:t>
+            </a:r>
+          </a:p>
+          <a:p>
+            <a:pPr>
+              <a:spcBef>
+                <a:spcPts val="400"/>
+              </a:spcBef>
+            </a:pPr>
+            <a:r>
+              <a:rPr sz="1150">
+                <a:solidFill>
+                  <a:srgbClr val="152130"/>
+                </a:solidFill>
+                <a:latin typeface="Arial"/>
+              </a:rPr>
+              <a:t>Even distressed Akebono holds 3x TBK</a:t>
+            </a:r>
+          </a:p>
+          <a:p>
+            <a:pPr>
+              <a:spcBef>
+                <a:spcPts val="400"/>
+              </a:spcBef>
+            </a:pPr>
+            <a:r>
+              <a:rPr sz="1150">
+                <a:solidFill>
+                  <a:srgbClr val="152130"/>
+                </a:solidFill>
+                <a:latin typeface="Arial"/>
+              </a:rPr>
+              <a:t>The deficit is real against SIMILARLY</a:t>
+            </a:r>
+          </a:p>
+          <a:p>
+            <a:pPr>
+              <a:spcBef>
+                <a:spcPts val="400"/>
+              </a:spcBef>
+            </a:pPr>
+            <a:r>
+              <a:rPr sz="1150">
+                <a:solidFill>
+                  <a:srgbClr val="152130"/>
+                </a:solidFill>
+                <a:latin typeface="Arial"/>
+              </a:rPr>
+              <a:t>SCALED competitors, not just giants</a:t>
+            </a:r>
+          </a:p>
+          <a:p>
+            <a:pPr>
+              <a:spcBef>
+                <a:spcPts val="400"/>
+              </a:spcBef>
+            </a:pPr>
+            <a:r>
+              <a:rPr sz="1150">
+                <a:solidFill>
+                  <a:srgbClr val="152130"/>
+                </a:solidFill>
+                <a:latin typeface="Arial"/>
+              </a:rPr>
+              <a:t>(Knorr $2.6bn / Cummins $5.6bn = context)</a:t>
             </a:r>
           </a:p>
         </p:txBody>

--- a/TBK_rd_gap_slides.pptx
+++ b/TBK_rd_gap_slides.pptx
@@ -34,6 +34,7 @@
     <p:sldId id="282" r:id="rId33"/>
     <p:sldId id="283" r:id="rId34"/>
     <p:sldId id="284" r:id="rId35"/>
+    <p:sldId id="285" r:id="rId36"/>
   </p:sldIdLst>
   <p:sldSz cx="12191695" cy="6858000" type="screen4x3"/>
   <p:notesSz cx="6858000" cy="9144000"/>
@@ -3438,6 +3439,229 @@
         </a:p>
       </c:txPr>
     </c:legend>
+    <c:dispBlanksAs val="gap"/>
+  </c:chart>
+  <c:txPr>
+    <a:bodyPr/>
+    <a:lstStyle/>
+    <a:p>
+      <a:pPr>
+        <a:defRPr sz="1800"/>
+      </a:pPr>
+      <a:endParaRPr lang="en-US"/>
+    </a:p>
+  </c:txPr>
+  <c:externalData r:id="rId1">
+    <c:autoUpdate val="0"/>
+  </c:externalData>
+</c:chartSpace>
+</file>
+
+<file path=ppt/charts/chart19.xml><?xml version="1.0" encoding="utf-8"?>
+<c:chartSpace xmlns:c="http://schemas.openxmlformats.org/drawingml/2006/chart" xmlns:a="http://schemas.openxmlformats.org/drawingml/2006/main" xmlns:r="http://schemas.openxmlformats.org/officeDocument/2006/relationships">
+  <c:date1904 val="0"/>
+  <c:chart>
+    <c:title>
+      <c:tx>
+        <c:rich>
+          <a:bodyPr/>
+          <a:lstStyle/>
+          <a:p>
+            <a:r>
+              <a:rPr sz="1300" b="1">
+                <a:solidFill>
+                  <a:srgbClr val="152130"/>
+                </a:solidFill>
+                <a:latin typeface="Arial"/>
+              </a:rPr>
+              <a:t>Trajectory: crosses the 6.5 Watchlist threshold at year 3</a:t>
+            </a:r>
+          </a:p>
+        </c:rich>
+      </c:tx>
+      <c:layout/>
+      <c:overlay val="0"/>
+    </c:title>
+    <c:autoTitleDeleted val="0"/>
+    <c:plotArea>
+      <c:barChart>
+        <c:barDir val="col"/>
+        <c:grouping val="clustered"/>
+        <c:ser>
+          <c:idx val="0"/>
+          <c:order val="0"/>
+          <c:tx>
+            <c:strRef>
+              <c:f>Sheet1!$B$1</c:f>
+              <c:strCache>
+                <c:ptCount val="1"/>
+                <c:pt idx="0">
+                  <c:v>Moat score</c:v>
+                </c:pt>
+              </c:strCache>
+            </c:strRef>
+          </c:tx>
+          <c:spPr>
+            <a:solidFill>
+              <a:srgbClr val="152130"/>
+            </a:solidFill>
+          </c:spPr>
+          <c:dPt>
+            <c:idx val="0"/>
+            <c:spPr>
+              <a:solidFill>
+                <a:srgbClr val="3C3937"/>
+              </a:solidFill>
+            </c:spPr>
+          </c:dPt>
+          <c:dPt>
+            <c:idx val="1"/>
+            <c:spPr>
+              <a:solidFill>
+                <a:srgbClr val="6F8990"/>
+              </a:solidFill>
+            </c:spPr>
+          </c:dPt>
+          <c:dPt>
+            <c:idx val="2"/>
+            <c:spPr>
+              <a:solidFill>
+                <a:srgbClr val="6F8990"/>
+              </a:solidFill>
+            </c:spPr>
+          </c:dPt>
+          <c:dPt>
+            <c:idx val="3"/>
+            <c:spPr>
+              <a:solidFill>
+                <a:srgbClr val="314359"/>
+              </a:solidFill>
+            </c:spPr>
+          </c:dPt>
+          <c:dPt>
+            <c:idx val="4"/>
+            <c:spPr>
+              <a:solidFill>
+                <a:srgbClr val="E2E5E9"/>
+              </a:solidFill>
+            </c:spPr>
+          </c:dPt>
+          <c:cat>
+            <c:strRef>
+              <c:f>Sheet1!$A$2:$A$6</c:f>
+              <c:strCache>
+                <c:ptCount val="5"/>
+                <c:pt idx="0">
+                  <c:v>Today</c:v>
+                </c:pt>
+                <c:pt idx="1">
+                  <c:v>18 months</c:v>
+                </c:pt>
+                <c:pt idx="2">
+                  <c:v>3 years</c:v>
+                </c:pt>
+                <c:pt idx="3">
+                  <c:v>5 years</c:v>
+                </c:pt>
+                <c:pt idx="4">
+                  <c:v>Concentric
+(the frontier)</c:v>
+                </c:pt>
+              </c:strCache>
+            </c:strRef>
+          </c:cat>
+          <c:val>
+            <c:numRef>
+              <c:f>Sheet1!$B$2:$B$6</c:f>
+              <c:numCache>
+                <c:formatCode>General</c:formatCode>
+                <c:ptCount val="5"/>
+                <c:pt idx="0">
+                  <c:v>5.38</c:v>
+                </c:pt>
+                <c:pt idx="1">
+                  <c:v>5.9</c:v>
+                </c:pt>
+                <c:pt idx="2">
+                  <c:v>6.6</c:v>
+                </c:pt>
+                <c:pt idx="3">
+                  <c:v>7.0</c:v>
+                </c:pt>
+                <c:pt idx="4">
+                  <c:v>6.98</c:v>
+                </c:pt>
+              </c:numCache>
+            </c:numRef>
+          </c:val>
+        </c:ser>
+        <c:dLbls>
+          <c:numFmt formatCode="0.00" sourceLinked="0"/>
+          <c:txPr>
+            <a:bodyPr/>
+            <a:lstStyle/>
+            <a:p>
+              <a:pPr>
+                <a:defRPr sz="1100">
+                  <a:latin typeface="Arial"/>
+                </a:defRPr>
+              </a:pPr>
+            </a:p>
+          </c:txPr>
+          <c:showLegendKey val="0"/>
+          <c:showVal val="1"/>
+          <c:showCatName val="0"/>
+          <c:showSerName val="0"/>
+          <c:showPercent val="0"/>
+          <c:showBubbleSize val="0"/>
+          <c:showLeaderLines val="1"/>
+        </c:dLbls>
+        <c:axId val="-2068027336"/>
+        <c:axId val="-2113994440"/>
+      </c:barChart>
+      <c:catAx>
+        <c:axId val="-2068027336"/>
+        <c:scaling>
+          <c:orientation val="minMax"/>
+        </c:scaling>
+        <c:delete val="0"/>
+        <c:axPos val="b"/>
+        <c:majorTickMark val="out"/>
+        <c:minorTickMark val="none"/>
+        <c:tickLblPos val="nextTo"/>
+        <c:txPr>
+          <a:bodyPr/>
+          <a:lstStyle/>
+          <a:p>
+            <a:pPr>
+              <a:defRPr sz="1000">
+                <a:latin typeface="Arial"/>
+              </a:defRPr>
+            </a:pPr>
+          </a:p>
+        </c:txPr>
+        <c:crossAx val="-2113994440"/>
+        <c:crosses val="autoZero"/>
+        <c:auto val="1"/>
+        <c:lblAlgn val="ctr"/>
+        <c:lblOffset val="100"/>
+        <c:noMultiLvlLbl val="0"/>
+      </c:catAx>
+      <c:valAx>
+        <c:axId val="-2113994440"/>
+        <c:scaling>
+          <c:max val="8.0"/>
+        </c:scaling>
+        <c:delete val="0"/>
+        <c:axPos val="l"/>
+        <c:majorGridlines/>
+        <c:majorTickMark val="out"/>
+        <c:minorTickMark val="none"/>
+        <c:tickLblPos val="nextTo"/>
+        <c:crossAx val="-2068027336"/>
+        <c:crosses val="autoZero"/>
+      </c:valAx>
+    </c:plotArea>
     <c:dispBlanksAs val="gap"/>
   </c:chart>
   <c:txPr>
@@ -13486,6 +13710,22 @@
           <a:p>
             <a:pPr>
               <a:spcBef>
+                <a:spcPts val="300"/>
+              </a:spcBef>
+            </a:pPr>
+            <a:r>
+              <a:rPr sz="1150" b="0">
+                <a:solidFill>
+                  <a:srgbClr val="556A83"/>
+                </a:solidFill>
+                <a:latin typeface="Arial"/>
+              </a:rPr>
+              <a:t>28   Raising the moat: the score-per-yen plan</a:t>
+            </a:r>
+          </a:p>
+          <a:p>
+            <a:pPr>
+              <a:spcBef>
                 <a:spcPts val="1000"/>
               </a:spcBef>
             </a:pPr>
@@ -13512,7 +13752,7 @@
                 </a:solidFill>
                 <a:latin typeface="Arial"/>
               </a:rPr>
-              <a:t>28   Research quality &amp; methodology notes</a:t>
+              <a:t>29   Research quality &amp; methodology notes</a:t>
             </a:r>
           </a:p>
           <a:p>
@@ -13528,7 +13768,7 @@
                 </a:solidFill>
                 <a:latin typeface="Arial"/>
               </a:rPr>
-              <a:t>29   Sources</a:t>
+              <a:t>30   Sources</a:t>
             </a:r>
           </a:p>
         </p:txBody>
@@ -17544,13 +17784,13 @@
           <a:lstStyle/>
           <a:p>
             <a:r>
-              <a:rPr sz="2700" b="0">
+              <a:rPr sz="2200" b="0">
                 <a:solidFill>
                   <a:srgbClr val="152130"/>
                 </a:solidFill>
                 <a:latin typeface="Times New Roman"/>
               </a:rPr>
-              <a:t>Research quality &amp; methodology notes</a:t>
+              <a:t>Raising the moat: to Watchlist in 3 years — mostly for free</a:t>
             </a:r>
           </a:p>
         </p:txBody>
@@ -17638,21 +17878,39 @@
                 </a:solidFill>
                 <a:latin typeface="Arial"/>
               </a:rPr>
-              <a:t>How this material was produced, verified, and where its limits are</a:t>
-            </a:r>
-          </a:p>
-        </p:txBody>
-      </p:sp>
-      <p:sp>
-        <p:nvSpPr>
-          <p:cNvPr id="6" name="TextBox 5"/>
+              <a:t>Levers ranked by weighted score gain per yen. ~80% of the uplift needs no money beyond the committed program — the rest costs ~¥2-5bn over 3 years</a:t>
+            </a:r>
+          </a:p>
+        </p:txBody>
+      </p:sp>
+      <p:graphicFrame>
+        <p:nvGraphicFramePr>
+          <p:cNvPr id="6" name="Chart 5"/>
+          <p:cNvGraphicFramePr>
+            <a:graphicFrameLocks noGrp="1"/>
+          </p:cNvGraphicFramePr>
+          <p:nvPr/>
+        </p:nvGraphicFramePr>
+        <p:xfrm>
+          <a:off x="457200" y="1463040"/>
+          <a:ext cx="5852160" cy="4206240"/>
+        </p:xfrm>
+        <a:graphic>
+          <a:graphicData uri="http://schemas.openxmlformats.org/drawingml/2006/chart">
+            <c:chart xmlns:c="http://schemas.openxmlformats.org/drawingml/2006/chart" r:id="rId3"/>
+          </a:graphicData>
+        </a:graphic>
+      </p:graphicFrame>
+      <p:sp>
+        <p:nvSpPr>
+          <p:cNvPr id="7" name="TextBox 6"/>
           <p:cNvSpPr txBox="1"/>
           <p:nvPr/>
         </p:nvSpPr>
         <p:spPr>
           <a:xfrm>
-            <a:off x="457200" y="1417320"/>
-            <a:ext cx="5577840" cy="2377440"/>
+            <a:off x="6492240" y="1463040"/>
+            <a:ext cx="5257800" cy="2240280"/>
           </a:xfrm>
           <a:prstGeom prst="rect">
             <a:avLst/>
@@ -17679,224 +17937,55 @@
                 </a:solidFill>
                 <a:latin typeface="Arial"/>
               </a:rPr>
-              <a:t>Method &amp; confidence tiers</a:t>
-            </a:r>
-          </a:p>
-          <a:p>
-            <a:pPr>
-              <a:spcBef>
-                <a:spcPts val="400"/>
-              </a:spcBef>
-            </a:pPr>
-            <a:r>
-              <a:rPr sz="950">
-                <a:solidFill>
-                  <a:srgbClr val="152130"/>
-                </a:solidFill>
-                <a:latin typeface="Arial"/>
-              </a:rPr>
-              <a:t>Two deep-research studies (brake market; pump market): 5 parallel search angles each, claims extracted as falsifiable statements, then ADVERSARIAL VERIFICATION — 3 independent voters per claim set, actively attempting refutation</a:t>
-            </a:r>
-          </a:p>
-          <a:p>
-            <a:pPr>
-              <a:spcBef>
-                <a:spcPts val="400"/>
-              </a:spcBef>
-            </a:pPr>
-            <a:r>
-              <a:rPr sz="950">
-                <a:solidFill>
-                  <a:srgbClr val="152130"/>
-                </a:solidFill>
-                <a:latin typeface="Arial"/>
-              </a:rPr>
-              <a:t>Tier 1: peer-reviewed papers, primary regulation, audited filings (TBK tanshin, Concentric AR2023, SEC)</a:t>
-            </a:r>
-          </a:p>
-          <a:p>
-            <a:pPr>
-              <a:spcBef>
-                <a:spcPts val="400"/>
-              </a:spcBef>
-            </a:pPr>
-            <a:r>
-              <a:rPr sz="950">
-                <a:solidFill>
-                  <a:srgbClr val="152130"/>
-                </a:solidFill>
-                <a:latin typeface="Arial"/>
-              </a:rPr>
-              <a:t>Tier 2: government data and multi-source-verified company/industry figures</a:t>
-            </a:r>
-          </a:p>
-          <a:p>
-            <a:pPr>
-              <a:spcBef>
-                <a:spcPts val="400"/>
-              </a:spcBef>
-            </a:pPr>
-            <a:r>
-              <a:rPr sz="950">
-                <a:solidFill>
-                  <a:srgbClr val="152130"/>
-                </a:solidFill>
-                <a:latin typeface="Arial"/>
-              </a:rPr>
-              <a:t>Tier 3: single-source estimates and market research — always labeled in the underlying documents</a:t>
-            </a:r>
-          </a:p>
-        </p:txBody>
-      </p:sp>
-      <p:sp>
-        <p:nvSpPr>
-          <p:cNvPr id="7" name="TextBox 6"/>
-          <p:cNvSpPr txBox="1"/>
-          <p:nvPr/>
-        </p:nvSpPr>
-        <p:spPr>
-          <a:xfrm>
-            <a:off x="6217920" y="1417320"/>
-            <a:ext cx="5532120" cy="2377440"/>
-          </a:xfrm>
-          <a:prstGeom prst="rect">
-            <a:avLst/>
-          </a:prstGeom>
-          <a:solidFill>
-            <a:srgbClr val="F6F7F9"/>
-          </a:solidFill>
-          <a:ln w="15875">
-            <a:solidFill>
-              <a:srgbClr val="3C3937"/>
-            </a:solidFill>
-          </a:ln>
-        </p:spPr>
-        <p:txBody>
-          <a:bodyPr wrap="square" lIns="137160" rIns="137160" tIns="109728">
-            <a:spAutoFit/>
-          </a:bodyPr>
-          <a:lstStyle/>
-          <a:p>
-            <a:r>
-              <a:rPr sz="1450" b="1">
-                <a:solidFill>
-                  <a:srgbClr val="3C3937"/>
-                </a:solidFill>
-                <a:latin typeface="Arial"/>
-              </a:rPr>
-              <a:t>Corrections made by verification (transparency)</a:t>
-            </a:r>
-          </a:p>
-          <a:p>
-            <a:pPr>
-              <a:spcBef>
-                <a:spcPts val="400"/>
-              </a:spcBef>
-            </a:pPr>
-            <a:r>
-              <a:rPr sz="950">
-                <a:solidFill>
-                  <a:srgbClr val="152130"/>
-                </a:solidFill>
-                <a:latin typeface="Arial"/>
-              </a:rPr>
-              <a:t>TBK's famous '~70% share' belongs to its WATER PUMPS, not brakes (brakes: 'top share', unaudited)</a:t>
-            </a:r>
-          </a:p>
-          <a:p>
-            <a:pPr>
-              <a:spcBef>
-                <a:spcPts val="400"/>
-              </a:spcBef>
-            </a:pPr>
-            <a:r>
-              <a:rPr sz="950">
-                <a:solidFill>
-                  <a:srgbClr val="152130"/>
-                </a:solidFill>
-                <a:latin typeface="Arial"/>
-              </a:rPr>
-              <a:t>Euro 7 heavy-duty brake-dust limits apply ~2030, not 2028/29 (those are exhaust dates)</a:t>
-            </a:r>
-          </a:p>
-          <a:p>
-            <a:pPr>
-              <a:spcBef>
-                <a:spcPts val="400"/>
-              </a:spcBef>
-            </a:pPr>
-            <a:r>
-              <a:rPr sz="950">
-                <a:solidFill>
-                  <a:srgbClr val="152130"/>
-                </a:solidFill>
-                <a:latin typeface="Arial"/>
-              </a:rPr>
-              <a:t>Concentric R&amp;D = 2.3% of sales per AR2023 — the circulating '~5%' was wrong</a:t>
-            </a:r>
-          </a:p>
-          <a:p>
-            <a:pPr>
-              <a:spcBef>
-                <a:spcPts val="400"/>
-              </a:spcBef>
-            </a:pPr>
-            <a:r>
-              <a:rPr sz="950">
-                <a:solidFill>
-                  <a:srgbClr val="152130"/>
-                </a:solidFill>
-                <a:latin typeface="Arial"/>
-              </a:rPr>
-              <a:t>'85-90% of Asia on drums' could not be corroborated — stated as 'majority' only</a:t>
-            </a:r>
-          </a:p>
-          <a:p>
-            <a:pPr>
-              <a:spcBef>
-                <a:spcPts val="400"/>
-              </a:spcBef>
-            </a:pPr>
-            <a:r>
-              <a:rPr sz="950">
-                <a:solidFill>
-                  <a:srgbClr val="152130"/>
-                </a:solidFill>
-                <a:latin typeface="Arial"/>
-              </a:rPr>
-              <a:t>A claimed TBK-Mikuni alliance is erroneous (conflation with Mikuni-Suzuki)</a:t>
-            </a:r>
-          </a:p>
-          <a:p>
-            <a:pPr>
-              <a:spcBef>
-                <a:spcPts val="400"/>
-              </a:spcBef>
-            </a:pPr>
-            <a:r>
-              <a:rPr sz="950">
-                <a:solidFill>
-                  <a:srgbClr val="152130"/>
-                </a:solidFill>
-                <a:latin typeface="Arial"/>
-              </a:rPr>
-              <a:t>Aggregator's 'TBK FY26 ¥138M profit' contradicted by the audited tanshin (-¥131M)</a:t>
-            </a:r>
-          </a:p>
-          <a:p>
-            <a:pPr>
-              <a:spcBef>
-                <a:spcPts val="400"/>
-              </a:spcBef>
-            </a:pPr>
-            <a:r>
-              <a:rPr sz="950">
-                <a:solidFill>
-                  <a:srgbClr val="152130"/>
-                </a:solidFill>
-                <a:latin typeface="Arial"/>
-              </a:rPr>
-              <a:t>TBK ADB exhibit year unresolved (2019 vs 2022 sources conflict); Concentric MR pack period 2112 = Dec 2021</a:t>
+              <a:t>The three best levers — nearly free</a:t>
+            </a:r>
+          </a:p>
+          <a:p>
+            <a:pPr>
+              <a:spcBef>
+                <a:spcPts val="400"/>
+              </a:spcBef>
+            </a:pPr>
+            <a:r>
+              <a:rPr sz="1050">
+                <a:solidFill>
+                  <a:srgbClr val="152130"/>
+                </a:solidFill>
+                <a:latin typeface="Arial"/>
+              </a:rPr>
+              <a:t>1. CAPITAL ALLOCATION (+0.35): gated reinvestment, pruning, and buybacks instead of 100% reinvestment at negative ROIIC. At 1.5-2.2x phase-1 earnings, each ¥1bn buyback retires ~10% of the market cap — the market is selling TBK's own moat points</a:t>
+            </a:r>
+          </a:p>
+          <a:p>
+            <a:pPr>
+              <a:spcBef>
+                <a:spcPts val="400"/>
+              </a:spcBef>
+            </a:pPr>
+            <a:r>
+              <a:rPr sz="1050">
+                <a:solidFill>
+                  <a:srgbClr val="152130"/>
+                </a:solidFill>
+                <a:latin typeface="Arial"/>
+              </a:rPr>
+              <a:t>2. FOOTPRINT (+0.25): the ¥2-3bn restructuring the P&amp;L repays anyway — moat points as a byproduct</a:t>
+            </a:r>
+          </a:p>
+          <a:p>
+            <a:pPr>
+              <a:spcBef>
+                <a:spcPts val="400"/>
+              </a:spcBef>
+            </a:pPr>
+            <a:r>
+              <a:rPr sz="1050">
+                <a:solidFill>
+                  <a:srgbClr val="152130"/>
+                </a:solidFill>
+                <a:latin typeface="Arial"/>
+              </a:rPr>
+              <a:t>3. LEGIBILITY (+0.15 for ~¥0.15bn/yr): patent the work already done (20-30/yr), publish at JSAE, disclose PPM/warranty data — makes quality sellable outside the keiretsu</a:t>
             </a:r>
           </a:p>
         </p:txBody>
@@ -17909,113 +17998,8 @@
         </p:nvSpPr>
         <p:spPr>
           <a:xfrm>
-            <a:off x="457200" y="3931920"/>
-            <a:ext cx="5577840" cy="2377440"/>
-          </a:xfrm>
-          <a:prstGeom prst="rect">
-            <a:avLst/>
-          </a:prstGeom>
-          <a:solidFill>
-            <a:srgbClr val="F6F7F9"/>
-          </a:solidFill>
-          <a:ln w="15875">
-            <a:solidFill>
-              <a:srgbClr val="152130"/>
-            </a:solidFill>
-          </a:ln>
-        </p:spPr>
-        <p:txBody>
-          <a:bodyPr wrap="square" lIns="137160" rIns="137160" tIns="109728">
-            <a:spAutoFit/>
-          </a:bodyPr>
-          <a:lstStyle/>
-          <a:p>
-            <a:r>
-              <a:rPr sz="1450" b="1">
-                <a:solidFill>
-                  <a:srgbClr val="152130"/>
-                </a:solidFill>
-                <a:latin typeface="Arial"/>
-              </a:rPr>
-              <a:t>Known limitations</a:t>
-            </a:r>
-          </a:p>
-          <a:p>
-            <a:pPr>
-              <a:spcBef>
-                <a:spcPts val="400"/>
-              </a:spcBef>
-            </a:pPr>
-            <a:r>
-              <a:rPr sz="950">
-                <a:solidFill>
-                  <a:srgbClr val="152130"/>
-                </a:solidFill>
-                <a:latin typeface="Arial"/>
-              </a:rPr>
-              <a:t>Full-text retrieval was blocked in the research environment: paywalled SAE/journal numbers rest on abstracts; flagged where unverified</a:t>
-            </a:r>
-          </a:p>
-          <a:p>
-            <a:pPr>
-              <a:spcBef>
-                <a:spcPts val="400"/>
-              </a:spcBef>
-            </a:pPr>
-            <a:r>
-              <a:rPr sz="950">
-                <a:solidFill>
-                  <a:srgbClr val="152130"/>
-                </a:solidFill>
-                <a:latin typeface="Arial"/>
-              </a:rPr>
-              <a:t>No peer discloses brake-only or pump-only R&amp;D, gross profit, or segment margins — group figures used; ratios are the valid comparison</a:t>
-            </a:r>
-          </a:p>
-          <a:p>
-            <a:pPr>
-              <a:spcBef>
-                <a:spcPts val="400"/>
-              </a:spcBef>
-            </a:pPr>
-            <a:r>
-              <a:rPr sz="950">
-                <a:solidFill>
-                  <a:srgbClr val="152130"/>
-                </a:solidFill>
-                <a:latin typeface="Arial"/>
-              </a:rPr>
-              <a:t>Accounting: the consistent-basis peer dataset (margins, EBITA, R&amp;D, ROIC for the 7 companies) is HARMONIZED to the same treatment — cross-GAAP caveats apply only to raw-filing figures for non-dataset peers; nature-of-expense 'gross margins' (Knorr/Brembo ~50%) remain excluded. The margin gap also shows at EBITA level (peers 8-13% vs Japanese cohort ~3-3.5% for a decade) — treatment-independent</a:t>
-            </a:r>
-          </a:p>
-          <a:p>
-            <a:pPr>
-              <a:spcBef>
-                <a:spcPts val="400"/>
-              </a:spcBef>
-            </a:pPr>
-            <a:r>
-              <a:rPr sz="950">
-                <a:solidFill>
-                  <a:srgbClr val="152130"/>
-                </a:solidFill>
-                <a:latin typeface="Arial"/>
-              </a:rPr>
-              <a:t>TBK FY3/26 division split estimated from FY3/25 (yuho due June 2026); USD at ¥150/USD</a:t>
-            </a:r>
-          </a:p>
-        </p:txBody>
-      </p:sp>
-      <p:sp>
-        <p:nvSpPr>
-          <p:cNvPr id="9" name="TextBox 8"/>
-          <p:cNvSpPr txBox="1"/>
-          <p:nvPr/>
-        </p:nvSpPr>
-        <p:spPr>
-          <a:xfrm>
-            <a:off x="6217920" y="3931920"/>
-            <a:ext cx="5532120" cy="2377440"/>
+            <a:off x="6492240" y="3840480"/>
+            <a:ext cx="5257800" cy="2240280"/>
           </a:xfrm>
           <a:prstGeom prst="rect">
             <a:avLst/>
@@ -18042,87 +18026,90 @@
                 </a:solidFill>
                 <a:latin typeface="Arial"/>
               </a:rPr>
-              <a:t>Data hierarchy &amp; framework constructs</a:t>
-            </a:r>
-          </a:p>
-          <a:p>
-            <a:pPr>
-              <a:spcBef>
-                <a:spcPts val="400"/>
-              </a:spcBef>
-            </a:pPr>
-            <a:r>
-              <a:rPr sz="950">
-                <a:solidFill>
-                  <a:srgbClr val="152130"/>
-                </a:solidFill>
-                <a:latin typeface="Arial"/>
-              </a:rPr>
-              <a:t>Where sources conflict, the audited primary document wins (e.g., TBK tanshin over aggregators)</a:t>
-            </a:r>
-          </a:p>
-          <a:p>
-            <a:pPr>
-              <a:spcBef>
-                <a:spcPts val="400"/>
-              </a:spcBef>
-            </a:pPr>
-            <a:r>
-              <a:rPr sz="950">
-                <a:solidFill>
-                  <a:srgbClr val="152130"/>
-                </a:solidFill>
-                <a:latin typeface="Arial"/>
-              </a:rPr>
-              <a:t>Company-internal documents (TBK/TBKK product P&amp;Ls, Concentric MR pack, Haldex packs) and management statements (~30% below-market pricing, ~1,000 excess heads) are first-hand but NOT externally verified — labeled wherever used</a:t>
-            </a:r>
-          </a:p>
-          <a:p>
-            <a:pPr>
-              <a:spcBef>
-                <a:spcPts val="400"/>
-              </a:spcBef>
-            </a:pPr>
-            <a:r>
-              <a:rPr sz="950">
-                <a:solidFill>
-                  <a:srgbClr val="152130"/>
-                </a:solidFill>
-                <a:latin typeface="Arial"/>
-              </a:rPr>
-              <a:t>Consistent-basis peer metrics (margins, R&amp;D, ROIC) come from the user-provided 10-year/LTM peer dataset — same methodology across all 7 companies</a:t>
-            </a:r>
-          </a:p>
-          <a:p>
-            <a:pPr>
-              <a:spcBef>
-                <a:spcPts val="400"/>
-              </a:spcBef>
-            </a:pPr>
-            <a:r>
-              <a:rPr sz="950">
-                <a:solidFill>
-                  <a:srgbClr val="152130"/>
-                </a:solidFill>
-                <a:latin typeface="Arial"/>
-              </a:rPr>
-              <a:t>ROIIC (ROICm) = return on incremental invested capital over the stated horizon; RR = reinvestment rate; R&amp;D Capital Base = cumulative R&amp;D capitalized/amortized per the dataset framework — a modeling construct, not a balance-sheet line</a:t>
-            </a:r>
-          </a:p>
-          <a:p>
-            <a:pPr>
-              <a:spcBef>
-                <a:spcPts val="400"/>
-              </a:spcBef>
-            </a:pPr>
-            <a:r>
-              <a:rPr sz="950">
-                <a:solidFill>
-                  <a:srgbClr val="152130"/>
-                </a:solidFill>
-                <a:latin typeface="Arial"/>
-              </a:rPr>
-              <a:t>Scenario pages state assumptions on-slide; peer-margin scenarios use comparable reporters only</a:t>
+              <a:t>Rides free on the committed program — and the one defense</a:t>
+            </a:r>
+          </a:p>
+          <a:p>
+            <a:pPr>
+              <a:spcBef>
+                <a:spcPts val="400"/>
+              </a:spcBef>
+            </a:pPr>
+            <a:r>
+              <a:rPr sz="1050">
+                <a:solidFill>
+                  <a:srgbClr val="152130"/>
+                </a:solidFill>
+                <a:latin typeface="Arial"/>
+              </a:rPr>
+              <a:t>Substitution + runway (+0.50 combined): the ¥2.7bn/yr R&amp;D program and ADB capex are already committed for P&amp;L reasons — their moat contribution (socket wins, riding the disc/e-pump shift) comes free on top</a:t>
+            </a:r>
+          </a:p>
+          <a:p>
+            <a:pPr>
+              <a:spcBef>
+                <a:spcPts val="400"/>
+              </a:spcBef>
+            </a:pPr>
+            <a:r>
+              <a:rPr sz="1050">
+                <a:solidFill>
+                  <a:srgbClr val="152130"/>
+                </a:solidFill>
+                <a:latin typeface="Arial"/>
+              </a:rPr>
+              <a:t>Ecosystem (+0.20): aftermarket annuity + TCU software layer, ~¥1-2bn over 3 yrs — the achievable version of Knorr's installed base</a:t>
+            </a:r>
+          </a:p>
+          <a:p>
+            <a:pPr>
+              <a:spcBef>
+                <a:spcPts val="400"/>
+              </a:spcBef>
+            </a:pPr>
+            <a:r>
+              <a:rPr sz="1050">
+                <a:solidFill>
+                  <a:srgbClr val="152130"/>
+                </a:solidFill>
+                <a:latin typeface="Arial"/>
+              </a:rPr>
+              <a:t>DEFEND Hegemony (8.0): the ADB program is insurance against repeating UD — where TBK holds zero cells. Total incremental: ~¥2-5bn / 3 yrs</a:t>
+            </a:r>
+          </a:p>
+        </p:txBody>
+      </p:sp>
+      <p:sp>
+        <p:nvSpPr>
+          <p:cNvPr id="9" name="TextBox 8"/>
+          <p:cNvSpPr txBox="1"/>
+          <p:nvPr/>
+        </p:nvSpPr>
+        <p:spPr>
+          <a:xfrm>
+            <a:off x="457200" y="5897880"/>
+            <a:ext cx="11247120" cy="777240"/>
+          </a:xfrm>
+          <a:prstGeom prst="rect">
+            <a:avLst/>
+          </a:prstGeom>
+          <a:noFill/>
+        </p:spPr>
+        <p:txBody>
+          <a:bodyPr wrap="square">
+            <a:spAutoFit/>
+          </a:bodyPr>
+          <a:lstStyle/>
+          <a:p>
+            <a:pPr algn="l"/>
+            <a:r>
+              <a:rPr sz="1050" b="1">
+                <a:solidFill>
+                  <a:srgbClr val="152130"/>
+                </a:solidFill>
+                <a:latin typeface="Arial"/>
+              </a:rPr>
+              <a:t>The compounding logic: allocation discipline (Ch8) makes every other chapter's evidence credible — capital that stops being destroyed validates the runway, the sockets, and the legibility story. Ceiling honesty: 7.8 (Compounder) is unreachable in this industry — nobody is there; Concentric's 6.98 is the practical frontier and the 5-year path reaches it.</a:t>
             </a:r>
           </a:p>
         </p:txBody>
@@ -18209,7 +18196,7 @@
                 </a:solidFill>
                 <a:latin typeface="Times New Roman"/>
               </a:rPr>
-              <a:t>Sources</a:t>
+              <a:t>Research quality &amp; methodology notes</a:t>
             </a:r>
           </a:p>
         </p:txBody>
@@ -18275,8 +18262,43 @@
         </p:nvSpPr>
         <p:spPr>
           <a:xfrm>
-            <a:off x="457200" y="1188720"/>
-            <a:ext cx="5577840" cy="2606040"/>
+            <a:off x="457200" y="923544"/>
+            <a:ext cx="11247120" cy="457200"/>
+          </a:xfrm>
+          <a:prstGeom prst="rect">
+            <a:avLst/>
+          </a:prstGeom>
+          <a:noFill/>
+        </p:spPr>
+        <p:txBody>
+          <a:bodyPr wrap="square">
+            <a:spAutoFit/>
+          </a:bodyPr>
+          <a:lstStyle/>
+          <a:p>
+            <a:pPr algn="l"/>
+            <a:r>
+              <a:rPr sz="1050" b="0">
+                <a:solidFill>
+                  <a:srgbClr val="556A83"/>
+                </a:solidFill>
+                <a:latin typeface="Arial"/>
+              </a:rPr>
+              <a:t>How this material was produced, verified, and where its limits are</a:t>
+            </a:r>
+          </a:p>
+        </p:txBody>
+      </p:sp>
+      <p:sp>
+        <p:nvSpPr>
+          <p:cNvPr id="6" name="TextBox 5"/>
+          <p:cNvSpPr txBox="1"/>
+          <p:nvPr/>
+        </p:nvSpPr>
+        <p:spPr>
+          <a:xfrm>
+            <a:off x="457200" y="1417320"/>
+            <a:ext cx="5577840" cy="2377440"/>
           </a:xfrm>
           <a:prstGeom prst="rect">
             <a:avLst/>
@@ -18303,117 +18325,238 @@
                 </a:solidFill>
                 <a:latin typeface="Arial"/>
               </a:rPr>
-              <a:t>Primary &amp; audited</a:t>
-            </a:r>
-          </a:p>
-          <a:p>
-            <a:pPr>
-              <a:spcBef>
-                <a:spcPts val="400"/>
-              </a:spcBef>
-            </a:pPr>
-            <a:r>
-              <a:rPr sz="1000">
-                <a:solidFill>
-                  <a:srgbClr val="152130"/>
-                </a:solidFill>
-                <a:latin typeface="Arial"/>
-              </a:rPr>
-              <a:t>TBK Co., Ltd. — Consolidated Financial Results FY ended 31 Mar 2026 (tanshin, 14 May 2026); securities-report risk factors (有価証券報告書 via kitaishihon/irbank)</a:t>
-            </a:r>
-          </a:p>
-          <a:p>
-            <a:pPr>
-              <a:spcBef>
-                <a:spcPts val="400"/>
-              </a:spcBef>
-            </a:pPr>
-            <a:r>
-              <a:rPr sz="1000">
-                <a:solidFill>
-                  <a:srgbClr val="152130"/>
-                </a:solidFill>
-                <a:latin typeface="Arial"/>
-              </a:rPr>
-              <a:t>Concentric AB — Annual Report 2023 (income statement, balance sheet, 5-year key figures)</a:t>
-            </a:r>
-          </a:p>
-          <a:p>
-            <a:pPr>
-              <a:spcBef>
-                <a:spcPts val="400"/>
-              </a:spcBef>
-            </a:pPr>
-            <a:r>
-              <a:rPr sz="1000">
-                <a:solidFill>
-                  <a:srgbClr val="152130"/>
-                </a:solidFill>
-                <a:latin typeface="Arial"/>
-              </a:rPr>
-              <a:t>User-provided datasets: TBK 10-year financials; Peers 10-year; Peers LTM (7 companies, consistent methodology); moat methodology v3.2</a:t>
-            </a:r>
-          </a:p>
-          <a:p>
-            <a:pPr>
-              <a:spcBef>
-                <a:spcPts val="400"/>
-              </a:spcBef>
-            </a:pPr>
-            <a:r>
-              <a:rPr sz="1000">
-                <a:solidFill>
-                  <a:srgbClr val="152130"/>
-                </a:solidFill>
-                <a:latin typeface="Arial"/>
-              </a:rPr>
-              <a:t>Internal management documents: TBK Japan profitability by product/customer + share map + acquired projects (H1 FY2025); TBKK Thailand profit by items (Apr-Sep 2025); Concentric Group MR Pack (Dec 2021); Haldex analysis file (2019) and May-2014 MR pack</a:t>
-            </a:r>
-          </a:p>
-          <a:p>
-            <a:pPr>
-              <a:spcBef>
-                <a:spcPts val="400"/>
-              </a:spcBef>
-            </a:pPr>
-            <a:r>
-              <a:rPr sz="1000">
-                <a:solidFill>
-                  <a:srgbClr val="152130"/>
-                </a:solidFill>
-                <a:latin typeface="Arial"/>
-              </a:rPr>
-              <a:t>SEC filings: Cummins 10-K/10-Q/8-K (FY2024-25); WABCO &amp; Meritor merger 8-Ks</a:t>
-            </a:r>
-          </a:p>
-          <a:p>
-            <a:pPr>
-              <a:spcBef>
-                <a:spcPts val="400"/>
-              </a:spcBef>
-            </a:pPr>
-            <a:r>
-              <a:rPr sz="1000">
-                <a:solidFill>
-                  <a:srgbClr val="152130"/>
-                </a:solidFill>
-                <a:latin typeface="Arial"/>
-              </a:rPr>
-              <a:t>Company releases: Knorr-Bremse FY2023-25; ZF AR2024-25; SAF-Holland AR2024; Mahle AR2024-25; Haldex year-end 2021; Rheinmetall FY2025 + AEQUITA divestment (3 Jun 2026); Circle BidCo/A.P. Møller offer documents (2024); Brakes India-TBK alliance (Dec 2025)</a:t>
-            </a:r>
-          </a:p>
-        </p:txBody>
-      </p:sp>
-      <p:sp>
-        <p:nvSpPr>
-          <p:cNvPr id="6" name="TextBox 5"/>
+              <a:t>Method &amp; confidence tiers</a:t>
+            </a:r>
+          </a:p>
+          <a:p>
+            <a:pPr>
+              <a:spcBef>
+                <a:spcPts val="400"/>
+              </a:spcBef>
+            </a:pPr>
+            <a:r>
+              <a:rPr sz="950">
+                <a:solidFill>
+                  <a:srgbClr val="152130"/>
+                </a:solidFill>
+                <a:latin typeface="Arial"/>
+              </a:rPr>
+              <a:t>Two deep-research studies (brake market; pump market): 5 parallel search angles each, claims extracted as falsifiable statements, then ADVERSARIAL VERIFICATION — 3 independent voters per claim set, actively attempting refutation</a:t>
+            </a:r>
+          </a:p>
+          <a:p>
+            <a:pPr>
+              <a:spcBef>
+                <a:spcPts val="400"/>
+              </a:spcBef>
+            </a:pPr>
+            <a:r>
+              <a:rPr sz="950">
+                <a:solidFill>
+                  <a:srgbClr val="152130"/>
+                </a:solidFill>
+                <a:latin typeface="Arial"/>
+              </a:rPr>
+              <a:t>Tier 1: peer-reviewed papers, primary regulation, audited filings (TBK tanshin, Concentric AR2023, SEC)</a:t>
+            </a:r>
+          </a:p>
+          <a:p>
+            <a:pPr>
+              <a:spcBef>
+                <a:spcPts val="400"/>
+              </a:spcBef>
+            </a:pPr>
+            <a:r>
+              <a:rPr sz="950">
+                <a:solidFill>
+                  <a:srgbClr val="152130"/>
+                </a:solidFill>
+                <a:latin typeface="Arial"/>
+              </a:rPr>
+              <a:t>Tier 2: government data and multi-source-verified company/industry figures</a:t>
+            </a:r>
+          </a:p>
+          <a:p>
+            <a:pPr>
+              <a:spcBef>
+                <a:spcPts val="400"/>
+              </a:spcBef>
+            </a:pPr>
+            <a:r>
+              <a:rPr sz="950">
+                <a:solidFill>
+                  <a:srgbClr val="152130"/>
+                </a:solidFill>
+                <a:latin typeface="Arial"/>
+              </a:rPr>
+              <a:t>Tier 3: single-source estimates and market research — always labeled in the underlying documents</a:t>
+            </a:r>
+          </a:p>
+        </p:txBody>
+      </p:sp>
+      <p:sp>
+        <p:nvSpPr>
+          <p:cNvPr id="7" name="TextBox 6"/>
           <p:cNvSpPr txBox="1"/>
           <p:nvPr/>
         </p:nvSpPr>
         <p:spPr>
           <a:xfrm>
-            <a:off x="6217920" y="1188720"/>
-            <a:ext cx="5532120" cy="2606040"/>
+            <a:off x="6217920" y="1417320"/>
+            <a:ext cx="5532120" cy="2377440"/>
+          </a:xfrm>
+          <a:prstGeom prst="rect">
+            <a:avLst/>
+          </a:prstGeom>
+          <a:solidFill>
+            <a:srgbClr val="F6F7F9"/>
+          </a:solidFill>
+          <a:ln w="15875">
+            <a:solidFill>
+              <a:srgbClr val="3C3937"/>
+            </a:solidFill>
+          </a:ln>
+        </p:spPr>
+        <p:txBody>
+          <a:bodyPr wrap="square" lIns="137160" rIns="137160" tIns="109728">
+            <a:spAutoFit/>
+          </a:bodyPr>
+          <a:lstStyle/>
+          <a:p>
+            <a:r>
+              <a:rPr sz="1450" b="1">
+                <a:solidFill>
+                  <a:srgbClr val="3C3937"/>
+                </a:solidFill>
+                <a:latin typeface="Arial"/>
+              </a:rPr>
+              <a:t>Corrections made by verification (transparency)</a:t>
+            </a:r>
+          </a:p>
+          <a:p>
+            <a:pPr>
+              <a:spcBef>
+                <a:spcPts val="400"/>
+              </a:spcBef>
+            </a:pPr>
+            <a:r>
+              <a:rPr sz="950">
+                <a:solidFill>
+                  <a:srgbClr val="152130"/>
+                </a:solidFill>
+                <a:latin typeface="Arial"/>
+              </a:rPr>
+              <a:t>TBK's famous '~70% share' belongs to its WATER PUMPS, not brakes (brakes: 'top share', unaudited)</a:t>
+            </a:r>
+          </a:p>
+          <a:p>
+            <a:pPr>
+              <a:spcBef>
+                <a:spcPts val="400"/>
+              </a:spcBef>
+            </a:pPr>
+            <a:r>
+              <a:rPr sz="950">
+                <a:solidFill>
+                  <a:srgbClr val="152130"/>
+                </a:solidFill>
+                <a:latin typeface="Arial"/>
+              </a:rPr>
+              <a:t>Euro 7 heavy-duty brake-dust limits apply ~2030, not 2028/29 (those are exhaust dates)</a:t>
+            </a:r>
+          </a:p>
+          <a:p>
+            <a:pPr>
+              <a:spcBef>
+                <a:spcPts val="400"/>
+              </a:spcBef>
+            </a:pPr>
+            <a:r>
+              <a:rPr sz="950">
+                <a:solidFill>
+                  <a:srgbClr val="152130"/>
+                </a:solidFill>
+                <a:latin typeface="Arial"/>
+              </a:rPr>
+              <a:t>Concentric R&amp;D = 2.3% of sales per AR2023 — the circulating '~5%' was wrong</a:t>
+            </a:r>
+          </a:p>
+          <a:p>
+            <a:pPr>
+              <a:spcBef>
+                <a:spcPts val="400"/>
+              </a:spcBef>
+            </a:pPr>
+            <a:r>
+              <a:rPr sz="950">
+                <a:solidFill>
+                  <a:srgbClr val="152130"/>
+                </a:solidFill>
+                <a:latin typeface="Arial"/>
+              </a:rPr>
+              <a:t>'85-90% of Asia on drums' could not be corroborated — stated as 'majority' only</a:t>
+            </a:r>
+          </a:p>
+          <a:p>
+            <a:pPr>
+              <a:spcBef>
+                <a:spcPts val="400"/>
+              </a:spcBef>
+            </a:pPr>
+            <a:r>
+              <a:rPr sz="950">
+                <a:solidFill>
+                  <a:srgbClr val="152130"/>
+                </a:solidFill>
+                <a:latin typeface="Arial"/>
+              </a:rPr>
+              <a:t>A claimed TBK-Mikuni alliance is erroneous (conflation with Mikuni-Suzuki)</a:t>
+            </a:r>
+          </a:p>
+          <a:p>
+            <a:pPr>
+              <a:spcBef>
+                <a:spcPts val="400"/>
+              </a:spcBef>
+            </a:pPr>
+            <a:r>
+              <a:rPr sz="950">
+                <a:solidFill>
+                  <a:srgbClr val="152130"/>
+                </a:solidFill>
+                <a:latin typeface="Arial"/>
+              </a:rPr>
+              <a:t>Aggregator's 'TBK FY26 ¥138M profit' contradicted by the audited tanshin (-¥131M)</a:t>
+            </a:r>
+          </a:p>
+          <a:p>
+            <a:pPr>
+              <a:spcBef>
+                <a:spcPts val="400"/>
+              </a:spcBef>
+            </a:pPr>
+            <a:r>
+              <a:rPr sz="950">
+                <a:solidFill>
+                  <a:srgbClr val="152130"/>
+                </a:solidFill>
+                <a:latin typeface="Arial"/>
+              </a:rPr>
+              <a:t>TBK ADB exhibit year unresolved (2019 vs 2022 sources conflict); Concentric MR pack period 2112 = Dec 2021</a:t>
+            </a:r>
+          </a:p>
+        </p:txBody>
+      </p:sp>
+      <p:sp>
+        <p:nvSpPr>
+          <p:cNvPr id="8" name="TextBox 7"/>
+          <p:cNvSpPr txBox="1"/>
+          <p:nvPr/>
+        </p:nvSpPr>
+        <p:spPr>
+          <a:xfrm>
+            <a:off x="457200" y="3931920"/>
+            <a:ext cx="5577840" cy="2377440"/>
           </a:xfrm>
           <a:prstGeom prst="rect">
             <a:avLst/>
@@ -18440,101 +18583,85 @@
                 </a:solidFill>
                 <a:latin typeface="Arial"/>
               </a:rPr>
-              <a:t>Peer-reviewed &amp; academic</a:t>
-            </a:r>
-          </a:p>
-          <a:p>
-            <a:pPr>
-              <a:spcBef>
-                <a:spcPts val="400"/>
-              </a:spcBef>
-            </a:pPr>
-            <a:r>
-              <a:rPr sz="1000">
-                <a:solidFill>
-                  <a:srgbClr val="152130"/>
-                </a:solidFill>
-                <a:latin typeface="Arial"/>
-              </a:rPr>
-              <a:t>Göhring &amp; von Glasner, SAE 902206 (1990); Kajiyama et al. (Isuzu/TBK), SAE 902200 (1990); Day, Harding &amp; Newcomb, Proc IMechE (1984); Hoover et al., SAE 2005-01-3614; Subel &amp; Kienhöfer, Proc IMechE D (2020)</a:t>
-            </a:r>
-          </a:p>
-          <a:p>
-            <a:pPr>
-              <a:spcBef>
-                <a:spcPts val="400"/>
-              </a:spcBef>
-            </a:pPr>
-            <a:r>
-              <a:rPr sz="1000">
-                <a:solidFill>
-                  <a:srgbClr val="152130"/>
-                </a:solidFill>
-                <a:latin typeface="Arial"/>
-              </a:rPr>
-              <a:t>Ampadu, Alrejjal &amp; Ksaibati, JSDTL 8(1) 2023 — disc vs drum cost-effectiveness</a:t>
-            </a:r>
-          </a:p>
-          <a:p>
-            <a:pPr>
-              <a:spcBef>
-                <a:spcPts val="400"/>
-              </a:spcBef>
-            </a:pPr>
-            <a:r>
-              <a:rPr sz="1000">
-                <a:solidFill>
-                  <a:srgbClr val="152130"/>
-                </a:solidFill>
-                <a:latin typeface="Arial"/>
-              </a:rPr>
-              <a:t>Granitz et al., SN Applied Sciences (2021) — e-coolant pump, 13L HD diesel; Bitsis &amp; Miwa, SAE 2018-01-0980; Cummins SuperTruck 2, SAE 2019-01-0247; MIT S.M. thesis (2012) — HD parasitic losses</a:t>
-            </a:r>
-          </a:p>
-          <a:p>
-            <a:pPr>
-              <a:spcBef>
-                <a:spcPts val="400"/>
-              </a:spcBef>
-            </a:pPr>
-            <a:r>
-              <a:rPr sz="1000">
-                <a:solidFill>
-                  <a:srgbClr val="152130"/>
-                </a:solidFill>
-                <a:latin typeface="Arial"/>
-              </a:rPr>
-              <a:t>Zhang et al., J. Hazardous Materials 465 (2024); Hagino, Atmosphere 15:75 (2024, JARI); Environmental Pollution (2023) — regen braking &amp; brake wear</a:t>
-            </a:r>
-          </a:p>
-          <a:p>
-            <a:pPr>
-              <a:spcBef>
-                <a:spcPts val="400"/>
-              </a:spcBef>
-            </a:pPr>
-            <a:r>
-              <a:rPr sz="1000">
-                <a:solidFill>
-                  <a:srgbClr val="152130"/>
-                </a:solidFill>
-                <a:latin typeface="Arial"/>
-              </a:rPr>
-              <a:t>Energies 16:4024 (2023), 19:1748 (2026); Sustainability 15:3132 (2023); Energies 16:168 (2023) — BEV/FCEV truck &amp; bus thermal management</a:t>
-            </a:r>
-          </a:p>
-        </p:txBody>
-      </p:sp>
-      <p:sp>
-        <p:nvSpPr>
-          <p:cNvPr id="7" name="TextBox 6"/>
+              <a:t>Known limitations</a:t>
+            </a:r>
+          </a:p>
+          <a:p>
+            <a:pPr>
+              <a:spcBef>
+                <a:spcPts val="400"/>
+              </a:spcBef>
+            </a:pPr>
+            <a:r>
+              <a:rPr sz="950">
+                <a:solidFill>
+                  <a:srgbClr val="152130"/>
+                </a:solidFill>
+                <a:latin typeface="Arial"/>
+              </a:rPr>
+              <a:t>Full-text retrieval was blocked in the research environment: paywalled SAE/journal numbers rest on abstracts; flagged where unverified</a:t>
+            </a:r>
+          </a:p>
+          <a:p>
+            <a:pPr>
+              <a:spcBef>
+                <a:spcPts val="400"/>
+              </a:spcBef>
+            </a:pPr>
+            <a:r>
+              <a:rPr sz="950">
+                <a:solidFill>
+                  <a:srgbClr val="152130"/>
+                </a:solidFill>
+                <a:latin typeface="Arial"/>
+              </a:rPr>
+              <a:t>No peer discloses brake-only or pump-only R&amp;D, gross profit, or segment margins — group figures used; ratios are the valid comparison</a:t>
+            </a:r>
+          </a:p>
+          <a:p>
+            <a:pPr>
+              <a:spcBef>
+                <a:spcPts val="400"/>
+              </a:spcBef>
+            </a:pPr>
+            <a:r>
+              <a:rPr sz="950">
+                <a:solidFill>
+                  <a:srgbClr val="152130"/>
+                </a:solidFill>
+                <a:latin typeface="Arial"/>
+              </a:rPr>
+              <a:t>Accounting: the consistent-basis peer dataset (margins, EBITA, R&amp;D, ROIC for the 7 companies) is HARMONIZED to the same treatment — cross-GAAP caveats apply only to raw-filing figures for non-dataset peers; nature-of-expense 'gross margins' (Knorr/Brembo ~50%) remain excluded. The margin gap also shows at EBITA level (peers 8-13% vs Japanese cohort ~3-3.5% for a decade) — treatment-independent</a:t>
+            </a:r>
+          </a:p>
+          <a:p>
+            <a:pPr>
+              <a:spcBef>
+                <a:spcPts val="400"/>
+              </a:spcBef>
+            </a:pPr>
+            <a:r>
+              <a:rPr sz="950">
+                <a:solidFill>
+                  <a:srgbClr val="152130"/>
+                </a:solidFill>
+                <a:latin typeface="Arial"/>
+              </a:rPr>
+              <a:t>TBK FY3/26 division split estimated from FY3/25 (yuho due June 2026); USD at ¥150/USD</a:t>
+            </a:r>
+          </a:p>
+        </p:txBody>
+      </p:sp>
+      <p:sp>
+        <p:nvSpPr>
+          <p:cNvPr id="9" name="TextBox 8"/>
           <p:cNvSpPr txBox="1"/>
           <p:nvPr/>
         </p:nvSpPr>
         <p:spPr>
           <a:xfrm>
-            <a:off x="457200" y="3977639"/>
-            <a:ext cx="5577840" cy="2606040"/>
+            <a:off x="6217920" y="3931920"/>
+            <a:ext cx="5532120" cy="2377440"/>
           </a:xfrm>
           <a:prstGeom prst="rect">
             <a:avLst/>
@@ -18544,7 +18671,7 @@
           </a:solidFill>
           <a:ln w="15875">
             <a:solidFill>
-              <a:srgbClr val="152130"/>
+              <a:srgbClr val="6F8990"/>
             </a:solidFill>
           </a:ln>
         </p:spPr>
@@ -18557,203 +18684,98 @@
             <a:r>
               <a:rPr sz="1450" b="1">
                 <a:solidFill>
-                  <a:srgbClr val="152130"/>
-                </a:solidFill>
-                <a:latin typeface="Arial"/>
-              </a:rPr>
-              <a:t>Regulatory &amp; legal</a:t>
-            </a:r>
-          </a:p>
-          <a:p>
-            <a:pPr>
-              <a:spcBef>
-                <a:spcPts val="400"/>
-              </a:spcBef>
-            </a:pPr>
-            <a:r>
-              <a:rPr sz="1000">
-                <a:solidFill>
-                  <a:srgbClr val="152130"/>
-                </a:solidFill>
-                <a:latin typeface="Arial"/>
-              </a:rPr>
-              <a:t>NHTSA: FMVSS 121 final rule 74 FR 37122 (2009) + Regulatory Impact Analysis; DOT HS 811 367 (2010, NADS simulator); ESV 07-0242 (2007); heavy-vehicle AEB NPRM (2023)</a:t>
-            </a:r>
-          </a:p>
-          <a:p>
-            <a:pPr>
-              <a:spcBef>
-                <a:spcPts val="400"/>
-              </a:spcBef>
-            </a:pPr>
-            <a:r>
-              <a:rPr sz="1000">
-                <a:solidFill>
-                  <a:srgbClr val="152130"/>
-                </a:solidFill>
-                <a:latin typeface="Arial"/>
-              </a:rPr>
-              <a:t>UNECE Regulation No. 13 (braking, Type-II fade tests)</a:t>
-            </a:r>
-          </a:p>
-          <a:p>
-            <a:pPr>
-              <a:spcBef>
-                <a:spcPts val="400"/>
-              </a:spcBef>
-            </a:pPr>
-            <a:r>
-              <a:rPr sz="1000">
-                <a:solidFill>
-                  <a:srgbClr val="152130"/>
-                </a:solidFill>
-                <a:latin typeface="Arial"/>
-              </a:rPr>
-              <a:t>EU: Reg 2019/1242 &amp; 2024/1610 (HDV CO2); Reg 2024/1257 (Euro 7); Reg 2017/2400 Annex IX (VECTO auxiliaries) + JRC112015; EPA Phase 2 (40 CFR 1037.520 accessory credits) &amp; Phase 3 (2024)</a:t>
-            </a:r>
-          </a:p>
-          <a:p>
-            <a:pPr>
-              <a:spcBef>
-                <a:spcPts val="400"/>
-              </a:spcBef>
-            </a:pPr>
-            <a:r>
-              <a:rPr sz="1000">
-                <a:solidFill>
-                  <a:srgbClr val="152130"/>
-                </a:solidFill>
-                <a:latin typeface="Arial"/>
-              </a:rPr>
-              <a:t>EC merger decisions: M.8102 Valeo/FTE (2017, 90-100% concentration, Raicam remedy); Knorr-Bremse/Haldex Phase II (IP-17-2126, 2017)</a:t>
-            </a:r>
-          </a:p>
-          <a:p>
-            <a:pPr>
-              <a:spcBef>
-                <a:spcPts val="400"/>
-              </a:spcBef>
-            </a:pPr>
-            <a:r>
-              <a:rPr sz="1000">
-                <a:solidFill>
-                  <a:srgbClr val="152130"/>
-                </a:solidFill>
-                <a:latin typeface="Arial"/>
-              </a:rPr>
-              <a:t>Japan: MY2025 HDV fuel-economy standards (via ICCT/TransportPolicy); METI supplier-transition studies (2023, 2025); FMCSA Crash Cost Methodology (2025); AAA Foundation (2017)</a:t>
-            </a:r>
-          </a:p>
-        </p:txBody>
-      </p:sp>
-      <p:sp>
-        <p:nvSpPr>
-          <p:cNvPr id="8" name="TextBox 7"/>
-          <p:cNvSpPr txBox="1"/>
-          <p:nvPr/>
-        </p:nvSpPr>
-        <p:spPr>
-          <a:xfrm>
-            <a:off x="6217920" y="3977639"/>
-            <a:ext cx="5532120" cy="2606040"/>
-          </a:xfrm>
-          <a:prstGeom prst="rect">
-            <a:avLst/>
-          </a:prstGeom>
-          <a:solidFill>
-            <a:srgbClr val="F6F7F9"/>
-          </a:solidFill>
-          <a:ln w="15875">
-            <a:solidFill>
-              <a:srgbClr val="152130"/>
-            </a:solidFill>
-          </a:ln>
-        </p:spPr>
-        <p:txBody>
-          <a:bodyPr wrap="square" lIns="137160" rIns="137160" tIns="109728">
-            <a:spAutoFit/>
-          </a:bodyPr>
-          <a:lstStyle/>
-          <a:p>
-            <a:r>
-              <a:rPr sz="1450" b="1">
-                <a:solidFill>
-                  <a:srgbClr val="152130"/>
-                </a:solidFill>
-                <a:latin typeface="Arial"/>
-              </a:rPr>
-              <a:t>Industry &amp; financial data (verified, labeled where single-source)</a:t>
-            </a:r>
-          </a:p>
-          <a:p>
-            <a:pPr>
-              <a:spcBef>
-                <a:spcPts val="400"/>
-              </a:spcBef>
-            </a:pPr>
-            <a:r>
-              <a:rPr sz="1000">
-                <a:solidFill>
-                  <a:srgbClr val="152130"/>
-                </a:solidFill>
-                <a:latin typeface="Arial"/>
-              </a:rPr>
-              <a:t>Adoption data: Haldex ADB history; Bendix/Knorr production milestones; FleetOwner, TruckingInfo, Fleet Maintenance, Transport Topics, Fleet Equipment; NACFE confidence reports; NAS 25542; DOE SuperTruck (OSTI)</a:t>
-            </a:r>
-          </a:p>
-          <a:p>
-            <a:pPr>
-              <a:spcBef>
-                <a:spcPts val="400"/>
-              </a:spcBef>
-            </a:pPr>
-            <a:r>
-              <a:rPr sz="1000">
-                <a:solidFill>
-                  <a:srgbClr val="152130"/>
-                </a:solidFill>
-                <a:latin typeface="Arial"/>
-              </a:rPr>
-              <a:t>Deal records: Knorr-Bremse-Bendix (2002); ZF-Wabco $7bn (2020); Cummins-Meritor $3.7bn (2022); SAF-Holland-Haldex (2022); Concentric take-private SEK 230 (2024); Pierburg-AEQUITA €350M (2026)</a:t>
-            </a:r>
-          </a:p>
-          <a:p>
-            <a:pPr>
-              <a:spcBef>
-                <a:spcPts val="400"/>
-              </a:spcBef>
-            </a:pPr>
-            <a:r>
-              <a:rPr sz="1000">
-                <a:solidFill>
-                  <a:srgbClr val="152130"/>
-                </a:solidFill>
-                <a:latin typeface="Arial"/>
-              </a:rPr>
-              <a:t>Japanese filings via irbank, kitaishihon, buffett-code, kabutan, MarkLines (incl. TBK JSAE 2022 exhibit; Mikuni 2022 BEV-truck e-oil pump disclosure; Yamada e-water pump adoptions)</a:t>
-            </a:r>
-          </a:p>
-          <a:p>
-            <a:pPr>
-              <a:spcBef>
-                <a:spcPts val="400"/>
-              </a:spcBef>
-            </a:pPr>
-            <a:r>
-              <a:rPr sz="1000">
-                <a:solidFill>
-                  <a:srgbClr val="152130"/>
-                </a:solidFill>
-                <a:latin typeface="Arial"/>
-              </a:rPr>
-              <a:t>Aggregators for computed ratios: macrotrends, stockanalysis, Simply Wall St — cross-checked against filings; market research (MarketsandMarkets, GVR, IDTechEx) used directionally only</a:t>
-            </a:r>
-          </a:p>
-        </p:txBody>
-      </p:sp>
-      <p:sp>
-        <p:nvSpPr>
-          <p:cNvPr id="9" name="TextBox 8"/>
+                  <a:srgbClr val="6F8990"/>
+                </a:solidFill>
+                <a:latin typeface="Arial"/>
+              </a:rPr>
+              <a:t>Data hierarchy &amp; framework constructs</a:t>
+            </a:r>
+          </a:p>
+          <a:p>
+            <a:pPr>
+              <a:spcBef>
+                <a:spcPts val="400"/>
+              </a:spcBef>
+            </a:pPr>
+            <a:r>
+              <a:rPr sz="950">
+                <a:solidFill>
+                  <a:srgbClr val="152130"/>
+                </a:solidFill>
+                <a:latin typeface="Arial"/>
+              </a:rPr>
+              <a:t>Where sources conflict, the audited primary document wins (e.g., TBK tanshin over aggregators)</a:t>
+            </a:r>
+          </a:p>
+          <a:p>
+            <a:pPr>
+              <a:spcBef>
+                <a:spcPts val="400"/>
+              </a:spcBef>
+            </a:pPr>
+            <a:r>
+              <a:rPr sz="950">
+                <a:solidFill>
+                  <a:srgbClr val="152130"/>
+                </a:solidFill>
+                <a:latin typeface="Arial"/>
+              </a:rPr>
+              <a:t>Company-internal documents (TBK/TBKK product P&amp;Ls, Concentric MR pack, Haldex packs) and management statements (~30% below-market pricing, ~1,000 excess heads) are first-hand but NOT externally verified — labeled wherever used</a:t>
+            </a:r>
+          </a:p>
+          <a:p>
+            <a:pPr>
+              <a:spcBef>
+                <a:spcPts val="400"/>
+              </a:spcBef>
+            </a:pPr>
+            <a:r>
+              <a:rPr sz="950">
+                <a:solidFill>
+                  <a:srgbClr val="152130"/>
+                </a:solidFill>
+                <a:latin typeface="Arial"/>
+              </a:rPr>
+              <a:t>Consistent-basis peer metrics (margins, R&amp;D, ROIC) come from the user-provided 10-year/LTM peer dataset — same methodology across all 7 companies</a:t>
+            </a:r>
+          </a:p>
+          <a:p>
+            <a:pPr>
+              <a:spcBef>
+                <a:spcPts val="400"/>
+              </a:spcBef>
+            </a:pPr>
+            <a:r>
+              <a:rPr sz="950">
+                <a:solidFill>
+                  <a:srgbClr val="152130"/>
+                </a:solidFill>
+                <a:latin typeface="Arial"/>
+              </a:rPr>
+              <a:t>ROIIC (ROICm) = return on incremental invested capital over the stated horizon; RR = reinvestment rate; R&amp;D Capital Base = cumulative R&amp;D capitalized/amortized per the dataset framework — a modeling construct, not a balance-sheet line</a:t>
+            </a:r>
+          </a:p>
+          <a:p>
+            <a:pPr>
+              <a:spcBef>
+                <a:spcPts val="400"/>
+              </a:spcBef>
+            </a:pPr>
+            <a:r>
+              <a:rPr sz="950">
+                <a:solidFill>
+                  <a:srgbClr val="152130"/>
+                </a:solidFill>
+                <a:latin typeface="Arial"/>
+              </a:rPr>
+              <a:t>Scenario pages state assumptions on-slide; peer-margin scenarios use comparable reporters only</a:t>
+            </a:r>
+          </a:p>
+        </p:txBody>
+      </p:sp>
+      <p:sp>
+        <p:nvSpPr>
+          <p:cNvPr id="10" name="TextBox 9"/>
           <p:cNvSpPr txBox="1"/>
           <p:nvPr/>
         </p:nvSpPr>
@@ -19530,6 +19552,630 @@
                 <a:latin typeface="Arial"/>
               </a:rPr>
               <a:t>3</a:t>
+            </a:r>
+          </a:p>
+        </p:txBody>
+      </p:sp>
+    </p:spTree>
+  </p:cSld>
+  <p:clrMapOvr>
+    <a:masterClrMapping/>
+  </p:clrMapOvr>
+</p:sld>
+</file>
+
+<file path=ppt/slides/slide30.xml><?xml version="1.0" encoding="utf-8"?>
+<p:sld xmlns:a="http://schemas.openxmlformats.org/drawingml/2006/main" xmlns:p="http://schemas.openxmlformats.org/presentationml/2006/main" xmlns:r="http://schemas.openxmlformats.org/officeDocument/2006/relationships">
+  <p:cSld>
+    <p:spTree>
+      <p:nvGrpSpPr>
+        <p:cNvPr id="1" name=""/>
+        <p:cNvGrpSpPr/>
+        <p:nvPr/>
+      </p:nvGrpSpPr>
+      <p:grpSpPr/>
+      <p:sp>
+        <p:nvSpPr>
+          <p:cNvPr id="2" name="TextBox 1"/>
+          <p:cNvSpPr txBox="1"/>
+          <p:nvPr/>
+        </p:nvSpPr>
+        <p:spPr>
+          <a:xfrm>
+            <a:off x="457200" y="164592"/>
+            <a:ext cx="9784080" cy="658368"/>
+          </a:xfrm>
+          <a:prstGeom prst="rect">
+            <a:avLst/>
+          </a:prstGeom>
+          <a:noFill/>
+        </p:spPr>
+        <p:txBody>
+          <a:bodyPr wrap="none">
+            <a:spAutoFit/>
+          </a:bodyPr>
+          <a:lstStyle/>
+          <a:p>
+            <a:r>
+              <a:rPr sz="2700" b="0">
+                <a:solidFill>
+                  <a:srgbClr val="152130"/>
+                </a:solidFill>
+                <a:latin typeface="Times New Roman"/>
+              </a:rPr>
+              <a:t>Sources</a:t>
+            </a:r>
+          </a:p>
+        </p:txBody>
+      </p:sp>
+      <p:pic>
+        <p:nvPicPr>
+          <p:cNvPr id="3" name="Picture 2" descr="athanase_logo_dark.png"/>
+          <p:cNvPicPr>
+            <a:picLocks noChangeAspect="1"/>
+          </p:cNvPicPr>
+          <p:nvPr/>
+        </p:nvPicPr>
+        <p:blipFill>
+          <a:blip r:embed="rId2"/>
+          <a:stretch>
+            <a:fillRect/>
+          </a:stretch>
+        </p:blipFill>
+        <p:spPr>
+          <a:xfrm>
+            <a:off x="10469880" y="292608"/>
+            <a:ext cx="1325880" cy="273903"/>
+          </a:xfrm>
+          <a:prstGeom prst="rect">
+            <a:avLst/>
+          </a:prstGeom>
+        </p:spPr>
+      </p:pic>
+      <p:sp>
+        <p:nvSpPr>
+          <p:cNvPr id="4" name="TextBox 3"/>
+          <p:cNvSpPr txBox="1"/>
+          <p:nvPr/>
+        </p:nvSpPr>
+        <p:spPr>
+          <a:xfrm>
+            <a:off x="457200" y="850392"/>
+            <a:ext cx="11274552" cy="18288"/>
+          </a:xfrm>
+          <a:prstGeom prst="rect">
+            <a:avLst/>
+          </a:prstGeom>
+          <a:solidFill>
+            <a:srgbClr val="E2E5E9"/>
+          </a:solidFill>
+          <a:ln>
+            <a:noFill/>
+          </a:ln>
+        </p:spPr>
+        <p:txBody>
+          <a:bodyPr wrap="none">
+            <a:spAutoFit/>
+          </a:bodyPr>
+          <a:lstStyle/>
+          <a:p/>
+        </p:txBody>
+      </p:sp>
+      <p:sp>
+        <p:nvSpPr>
+          <p:cNvPr id="5" name="TextBox 4"/>
+          <p:cNvSpPr txBox="1"/>
+          <p:nvPr/>
+        </p:nvSpPr>
+        <p:spPr>
+          <a:xfrm>
+            <a:off x="457200" y="1188720"/>
+            <a:ext cx="5577840" cy="2606040"/>
+          </a:xfrm>
+          <a:prstGeom prst="rect">
+            <a:avLst/>
+          </a:prstGeom>
+          <a:solidFill>
+            <a:srgbClr val="F6F7F9"/>
+          </a:solidFill>
+          <a:ln w="15875">
+            <a:solidFill>
+              <a:srgbClr val="152130"/>
+            </a:solidFill>
+          </a:ln>
+        </p:spPr>
+        <p:txBody>
+          <a:bodyPr wrap="square" lIns="137160" rIns="137160" tIns="109728">
+            <a:spAutoFit/>
+          </a:bodyPr>
+          <a:lstStyle/>
+          <a:p>
+            <a:r>
+              <a:rPr sz="1450" b="1">
+                <a:solidFill>
+                  <a:srgbClr val="152130"/>
+                </a:solidFill>
+                <a:latin typeface="Arial"/>
+              </a:rPr>
+              <a:t>Primary &amp; audited</a:t>
+            </a:r>
+          </a:p>
+          <a:p>
+            <a:pPr>
+              <a:spcBef>
+                <a:spcPts val="400"/>
+              </a:spcBef>
+            </a:pPr>
+            <a:r>
+              <a:rPr sz="1000">
+                <a:solidFill>
+                  <a:srgbClr val="152130"/>
+                </a:solidFill>
+                <a:latin typeface="Arial"/>
+              </a:rPr>
+              <a:t>TBK Co., Ltd. — Consolidated Financial Results FY ended 31 Mar 2026 (tanshin, 14 May 2026); securities-report risk factors (有価証券報告書 via kitaishihon/irbank)</a:t>
+            </a:r>
+          </a:p>
+          <a:p>
+            <a:pPr>
+              <a:spcBef>
+                <a:spcPts val="400"/>
+              </a:spcBef>
+            </a:pPr>
+            <a:r>
+              <a:rPr sz="1000">
+                <a:solidFill>
+                  <a:srgbClr val="152130"/>
+                </a:solidFill>
+                <a:latin typeface="Arial"/>
+              </a:rPr>
+              <a:t>Concentric AB — Annual Report 2023 (income statement, balance sheet, 5-year key figures)</a:t>
+            </a:r>
+          </a:p>
+          <a:p>
+            <a:pPr>
+              <a:spcBef>
+                <a:spcPts val="400"/>
+              </a:spcBef>
+            </a:pPr>
+            <a:r>
+              <a:rPr sz="1000">
+                <a:solidFill>
+                  <a:srgbClr val="152130"/>
+                </a:solidFill>
+                <a:latin typeface="Arial"/>
+              </a:rPr>
+              <a:t>User-provided datasets: TBK 10-year financials; Peers 10-year; Peers LTM (7 companies, consistent methodology); moat methodology v3.2</a:t>
+            </a:r>
+          </a:p>
+          <a:p>
+            <a:pPr>
+              <a:spcBef>
+                <a:spcPts val="400"/>
+              </a:spcBef>
+            </a:pPr>
+            <a:r>
+              <a:rPr sz="1000">
+                <a:solidFill>
+                  <a:srgbClr val="152130"/>
+                </a:solidFill>
+                <a:latin typeface="Arial"/>
+              </a:rPr>
+              <a:t>Internal management documents: TBK Japan profitability by product/customer + share map + acquired projects (H1 FY2025); TBKK Thailand profit by items (Apr-Sep 2025); Concentric Group MR Pack (Dec 2021); Haldex analysis file (2019) and May-2014 MR pack</a:t>
+            </a:r>
+          </a:p>
+          <a:p>
+            <a:pPr>
+              <a:spcBef>
+                <a:spcPts val="400"/>
+              </a:spcBef>
+            </a:pPr>
+            <a:r>
+              <a:rPr sz="1000">
+                <a:solidFill>
+                  <a:srgbClr val="152130"/>
+                </a:solidFill>
+                <a:latin typeface="Arial"/>
+              </a:rPr>
+              <a:t>SEC filings: Cummins 10-K/10-Q/8-K (FY2024-25); WABCO &amp; Meritor merger 8-Ks</a:t>
+            </a:r>
+          </a:p>
+          <a:p>
+            <a:pPr>
+              <a:spcBef>
+                <a:spcPts val="400"/>
+              </a:spcBef>
+            </a:pPr>
+            <a:r>
+              <a:rPr sz="1000">
+                <a:solidFill>
+                  <a:srgbClr val="152130"/>
+                </a:solidFill>
+                <a:latin typeface="Arial"/>
+              </a:rPr>
+              <a:t>Company releases: Knorr-Bremse FY2023-25; ZF AR2024-25; SAF-Holland AR2024; Mahle AR2024-25; Haldex year-end 2021; Rheinmetall FY2025 + AEQUITA divestment (3 Jun 2026); Circle BidCo/A.P. Møller offer documents (2024); Brakes India-TBK alliance (Dec 2025)</a:t>
+            </a:r>
+          </a:p>
+        </p:txBody>
+      </p:sp>
+      <p:sp>
+        <p:nvSpPr>
+          <p:cNvPr id="6" name="TextBox 5"/>
+          <p:cNvSpPr txBox="1"/>
+          <p:nvPr/>
+        </p:nvSpPr>
+        <p:spPr>
+          <a:xfrm>
+            <a:off x="6217920" y="1188720"/>
+            <a:ext cx="5532120" cy="2606040"/>
+          </a:xfrm>
+          <a:prstGeom prst="rect">
+            <a:avLst/>
+          </a:prstGeom>
+          <a:solidFill>
+            <a:srgbClr val="F6F7F9"/>
+          </a:solidFill>
+          <a:ln w="15875">
+            <a:solidFill>
+              <a:srgbClr val="152130"/>
+            </a:solidFill>
+          </a:ln>
+        </p:spPr>
+        <p:txBody>
+          <a:bodyPr wrap="square" lIns="137160" rIns="137160" tIns="109728">
+            <a:spAutoFit/>
+          </a:bodyPr>
+          <a:lstStyle/>
+          <a:p>
+            <a:r>
+              <a:rPr sz="1450" b="1">
+                <a:solidFill>
+                  <a:srgbClr val="152130"/>
+                </a:solidFill>
+                <a:latin typeface="Arial"/>
+              </a:rPr>
+              <a:t>Peer-reviewed &amp; academic</a:t>
+            </a:r>
+          </a:p>
+          <a:p>
+            <a:pPr>
+              <a:spcBef>
+                <a:spcPts val="400"/>
+              </a:spcBef>
+            </a:pPr>
+            <a:r>
+              <a:rPr sz="1000">
+                <a:solidFill>
+                  <a:srgbClr val="152130"/>
+                </a:solidFill>
+                <a:latin typeface="Arial"/>
+              </a:rPr>
+              <a:t>Göhring &amp; von Glasner, SAE 902206 (1990); Kajiyama et al. (Isuzu/TBK), SAE 902200 (1990); Day, Harding &amp; Newcomb, Proc IMechE (1984); Hoover et al., SAE 2005-01-3614; Subel &amp; Kienhöfer, Proc IMechE D (2020)</a:t>
+            </a:r>
+          </a:p>
+          <a:p>
+            <a:pPr>
+              <a:spcBef>
+                <a:spcPts val="400"/>
+              </a:spcBef>
+            </a:pPr>
+            <a:r>
+              <a:rPr sz="1000">
+                <a:solidFill>
+                  <a:srgbClr val="152130"/>
+                </a:solidFill>
+                <a:latin typeface="Arial"/>
+              </a:rPr>
+              <a:t>Ampadu, Alrejjal &amp; Ksaibati, JSDTL 8(1) 2023 — disc vs drum cost-effectiveness</a:t>
+            </a:r>
+          </a:p>
+          <a:p>
+            <a:pPr>
+              <a:spcBef>
+                <a:spcPts val="400"/>
+              </a:spcBef>
+            </a:pPr>
+            <a:r>
+              <a:rPr sz="1000">
+                <a:solidFill>
+                  <a:srgbClr val="152130"/>
+                </a:solidFill>
+                <a:latin typeface="Arial"/>
+              </a:rPr>
+              <a:t>Granitz et al., SN Applied Sciences (2021) — e-coolant pump, 13L HD diesel; Bitsis &amp; Miwa, SAE 2018-01-0980; Cummins SuperTruck 2, SAE 2019-01-0247; MIT S.M. thesis (2012) — HD parasitic losses</a:t>
+            </a:r>
+          </a:p>
+          <a:p>
+            <a:pPr>
+              <a:spcBef>
+                <a:spcPts val="400"/>
+              </a:spcBef>
+            </a:pPr>
+            <a:r>
+              <a:rPr sz="1000">
+                <a:solidFill>
+                  <a:srgbClr val="152130"/>
+                </a:solidFill>
+                <a:latin typeface="Arial"/>
+              </a:rPr>
+              <a:t>Zhang et al., J. Hazardous Materials 465 (2024); Hagino, Atmosphere 15:75 (2024, JARI); Environmental Pollution (2023) — regen braking &amp; brake wear</a:t>
+            </a:r>
+          </a:p>
+          <a:p>
+            <a:pPr>
+              <a:spcBef>
+                <a:spcPts val="400"/>
+              </a:spcBef>
+            </a:pPr>
+            <a:r>
+              <a:rPr sz="1000">
+                <a:solidFill>
+                  <a:srgbClr val="152130"/>
+                </a:solidFill>
+                <a:latin typeface="Arial"/>
+              </a:rPr>
+              <a:t>Energies 16:4024 (2023), 19:1748 (2026); Sustainability 15:3132 (2023); Energies 16:168 (2023) — BEV/FCEV truck &amp; bus thermal management</a:t>
+            </a:r>
+          </a:p>
+        </p:txBody>
+      </p:sp>
+      <p:sp>
+        <p:nvSpPr>
+          <p:cNvPr id="7" name="TextBox 6"/>
+          <p:cNvSpPr txBox="1"/>
+          <p:nvPr/>
+        </p:nvSpPr>
+        <p:spPr>
+          <a:xfrm>
+            <a:off x="457200" y="3977639"/>
+            <a:ext cx="5577840" cy="2606040"/>
+          </a:xfrm>
+          <a:prstGeom prst="rect">
+            <a:avLst/>
+          </a:prstGeom>
+          <a:solidFill>
+            <a:srgbClr val="F6F7F9"/>
+          </a:solidFill>
+          <a:ln w="15875">
+            <a:solidFill>
+              <a:srgbClr val="152130"/>
+            </a:solidFill>
+          </a:ln>
+        </p:spPr>
+        <p:txBody>
+          <a:bodyPr wrap="square" lIns="137160" rIns="137160" tIns="109728">
+            <a:spAutoFit/>
+          </a:bodyPr>
+          <a:lstStyle/>
+          <a:p>
+            <a:r>
+              <a:rPr sz="1450" b="1">
+                <a:solidFill>
+                  <a:srgbClr val="152130"/>
+                </a:solidFill>
+                <a:latin typeface="Arial"/>
+              </a:rPr>
+              <a:t>Regulatory &amp; legal</a:t>
+            </a:r>
+          </a:p>
+          <a:p>
+            <a:pPr>
+              <a:spcBef>
+                <a:spcPts val="400"/>
+              </a:spcBef>
+            </a:pPr>
+            <a:r>
+              <a:rPr sz="1000">
+                <a:solidFill>
+                  <a:srgbClr val="152130"/>
+                </a:solidFill>
+                <a:latin typeface="Arial"/>
+              </a:rPr>
+              <a:t>NHTSA: FMVSS 121 final rule 74 FR 37122 (2009) + Regulatory Impact Analysis; DOT HS 811 367 (2010, NADS simulator); ESV 07-0242 (2007); heavy-vehicle AEB NPRM (2023)</a:t>
+            </a:r>
+          </a:p>
+          <a:p>
+            <a:pPr>
+              <a:spcBef>
+                <a:spcPts val="400"/>
+              </a:spcBef>
+            </a:pPr>
+            <a:r>
+              <a:rPr sz="1000">
+                <a:solidFill>
+                  <a:srgbClr val="152130"/>
+                </a:solidFill>
+                <a:latin typeface="Arial"/>
+              </a:rPr>
+              <a:t>UNECE Regulation No. 13 (braking, Type-II fade tests)</a:t>
+            </a:r>
+          </a:p>
+          <a:p>
+            <a:pPr>
+              <a:spcBef>
+                <a:spcPts val="400"/>
+              </a:spcBef>
+            </a:pPr>
+            <a:r>
+              <a:rPr sz="1000">
+                <a:solidFill>
+                  <a:srgbClr val="152130"/>
+                </a:solidFill>
+                <a:latin typeface="Arial"/>
+              </a:rPr>
+              <a:t>EU: Reg 2019/1242 &amp; 2024/1610 (HDV CO2); Reg 2024/1257 (Euro 7); Reg 2017/2400 Annex IX (VECTO auxiliaries) + JRC112015; EPA Phase 2 (40 CFR 1037.520 accessory credits) &amp; Phase 3 (2024)</a:t>
+            </a:r>
+          </a:p>
+          <a:p>
+            <a:pPr>
+              <a:spcBef>
+                <a:spcPts val="400"/>
+              </a:spcBef>
+            </a:pPr>
+            <a:r>
+              <a:rPr sz="1000">
+                <a:solidFill>
+                  <a:srgbClr val="152130"/>
+                </a:solidFill>
+                <a:latin typeface="Arial"/>
+              </a:rPr>
+              <a:t>EC merger decisions: M.8102 Valeo/FTE (2017, 90-100% concentration, Raicam remedy); Knorr-Bremse/Haldex Phase II (IP-17-2126, 2017)</a:t>
+            </a:r>
+          </a:p>
+          <a:p>
+            <a:pPr>
+              <a:spcBef>
+                <a:spcPts val="400"/>
+              </a:spcBef>
+            </a:pPr>
+            <a:r>
+              <a:rPr sz="1000">
+                <a:solidFill>
+                  <a:srgbClr val="152130"/>
+                </a:solidFill>
+                <a:latin typeface="Arial"/>
+              </a:rPr>
+              <a:t>Japan: MY2025 HDV fuel-economy standards (via ICCT/TransportPolicy); METI supplier-transition studies (2023, 2025); FMCSA Crash Cost Methodology (2025); AAA Foundation (2017)</a:t>
+            </a:r>
+          </a:p>
+        </p:txBody>
+      </p:sp>
+      <p:sp>
+        <p:nvSpPr>
+          <p:cNvPr id="8" name="TextBox 7"/>
+          <p:cNvSpPr txBox="1"/>
+          <p:nvPr/>
+        </p:nvSpPr>
+        <p:spPr>
+          <a:xfrm>
+            <a:off x="6217920" y="3977639"/>
+            <a:ext cx="5532120" cy="2606040"/>
+          </a:xfrm>
+          <a:prstGeom prst="rect">
+            <a:avLst/>
+          </a:prstGeom>
+          <a:solidFill>
+            <a:srgbClr val="F6F7F9"/>
+          </a:solidFill>
+          <a:ln w="15875">
+            <a:solidFill>
+              <a:srgbClr val="152130"/>
+            </a:solidFill>
+          </a:ln>
+        </p:spPr>
+        <p:txBody>
+          <a:bodyPr wrap="square" lIns="137160" rIns="137160" tIns="109728">
+            <a:spAutoFit/>
+          </a:bodyPr>
+          <a:lstStyle/>
+          <a:p>
+            <a:r>
+              <a:rPr sz="1450" b="1">
+                <a:solidFill>
+                  <a:srgbClr val="152130"/>
+                </a:solidFill>
+                <a:latin typeface="Arial"/>
+              </a:rPr>
+              <a:t>Industry &amp; financial data (verified, labeled where single-source)</a:t>
+            </a:r>
+          </a:p>
+          <a:p>
+            <a:pPr>
+              <a:spcBef>
+                <a:spcPts val="400"/>
+              </a:spcBef>
+            </a:pPr>
+            <a:r>
+              <a:rPr sz="1000">
+                <a:solidFill>
+                  <a:srgbClr val="152130"/>
+                </a:solidFill>
+                <a:latin typeface="Arial"/>
+              </a:rPr>
+              <a:t>Adoption data: Haldex ADB history; Bendix/Knorr production milestones; FleetOwner, TruckingInfo, Fleet Maintenance, Transport Topics, Fleet Equipment; NACFE confidence reports; NAS 25542; DOE SuperTruck (OSTI)</a:t>
+            </a:r>
+          </a:p>
+          <a:p>
+            <a:pPr>
+              <a:spcBef>
+                <a:spcPts val="400"/>
+              </a:spcBef>
+            </a:pPr>
+            <a:r>
+              <a:rPr sz="1000">
+                <a:solidFill>
+                  <a:srgbClr val="152130"/>
+                </a:solidFill>
+                <a:latin typeface="Arial"/>
+              </a:rPr>
+              <a:t>Deal records: Knorr-Bremse-Bendix (2002); ZF-Wabco $7bn (2020); Cummins-Meritor $3.7bn (2022); SAF-Holland-Haldex (2022); Concentric take-private SEK 230 (2024); Pierburg-AEQUITA €350M (2026)</a:t>
+            </a:r>
+          </a:p>
+          <a:p>
+            <a:pPr>
+              <a:spcBef>
+                <a:spcPts val="400"/>
+              </a:spcBef>
+            </a:pPr>
+            <a:r>
+              <a:rPr sz="1000">
+                <a:solidFill>
+                  <a:srgbClr val="152130"/>
+                </a:solidFill>
+                <a:latin typeface="Arial"/>
+              </a:rPr>
+              <a:t>Japanese filings via irbank, kitaishihon, buffett-code, kabutan, MarkLines (incl. TBK JSAE 2022 exhibit; Mikuni 2022 BEV-truck e-oil pump disclosure; Yamada e-water pump adoptions)</a:t>
+            </a:r>
+          </a:p>
+          <a:p>
+            <a:pPr>
+              <a:spcBef>
+                <a:spcPts val="400"/>
+              </a:spcBef>
+            </a:pPr>
+            <a:r>
+              <a:rPr sz="1000">
+                <a:solidFill>
+                  <a:srgbClr val="152130"/>
+                </a:solidFill>
+                <a:latin typeface="Arial"/>
+              </a:rPr>
+              <a:t>Aggregators for computed ratios: macrotrends, stockanalysis, Simply Wall St — cross-checked against filings; market research (MarketsandMarkets, GVR, IDTechEx) used directionally only</a:t>
+            </a:r>
+          </a:p>
+        </p:txBody>
+      </p:sp>
+      <p:sp>
+        <p:nvSpPr>
+          <p:cNvPr id="9" name="TextBox 8"/>
+          <p:cNvSpPr txBox="1"/>
+          <p:nvPr/>
+        </p:nvSpPr>
+        <p:spPr>
+          <a:xfrm>
+            <a:off x="11658600" y="6510528"/>
+            <a:ext cx="411480" cy="274320"/>
+          </a:xfrm>
+          <a:prstGeom prst="rect">
+            <a:avLst/>
+          </a:prstGeom>
+          <a:noFill/>
+        </p:spPr>
+        <p:txBody>
+          <a:bodyPr wrap="none">
+            <a:spAutoFit/>
+          </a:bodyPr>
+          <a:lstStyle/>
+          <a:p>
+            <a:pPr algn="r"/>
+            <a:r>
+              <a:rPr sz="900">
+                <a:solidFill>
+                  <a:srgbClr val="556A83"/>
+                </a:solidFill>
+                <a:latin typeface="Arial"/>
+              </a:rPr>
+              <a:t>30</a:t>
             </a:r>
           </a:p>
         </p:txBody>

--- a/TBK_rd_gap_slides.pptx
+++ b/TBK_rd_gap_slides.pptx
@@ -17947,45 +17947,45 @@
               </a:spcBef>
             </a:pPr>
             <a:r>
-              <a:rPr sz="1050">
-                <a:solidFill>
-                  <a:srgbClr val="152130"/>
-                </a:solidFill>
-                <a:latin typeface="Arial"/>
-              </a:rPr>
-              <a:t>1. CAPITAL ALLOCATION (+0.35): gated reinvestment, pruning, and buybacks instead of 100% reinvestment at negative ROIIC. At 1.5-2.2x phase-1 earnings, each ¥1bn buyback retires ~10% of the market cap — the market is selling TBK's own moat points</a:t>
-            </a:r>
-          </a:p>
-          <a:p>
-            <a:pPr>
-              <a:spcBef>
-                <a:spcPts val="400"/>
-              </a:spcBef>
-            </a:pPr>
-            <a:r>
-              <a:rPr sz="1050">
-                <a:solidFill>
-                  <a:srgbClr val="152130"/>
-                </a:solidFill>
-                <a:latin typeface="Arial"/>
-              </a:rPr>
-              <a:t>2. FOOTPRINT (+0.25): the ¥2-3bn restructuring the P&amp;L repays anyway — moat points as a byproduct</a:t>
-            </a:r>
-          </a:p>
-          <a:p>
-            <a:pPr>
-              <a:spcBef>
-                <a:spcPts val="400"/>
-              </a:spcBef>
-            </a:pPr>
-            <a:r>
-              <a:rPr sz="1050">
-                <a:solidFill>
-                  <a:srgbClr val="152130"/>
-                </a:solidFill>
-                <a:latin typeface="Arial"/>
-              </a:rPr>
-              <a:t>3. LEGIBILITY (+0.15 for ~¥0.15bn/yr): patent the work already done (20-30/yr), publish at JSAE, disclose PPM/warranty data — makes quality sellable outside the keiretsu</a:t>
+              <a:rPr sz="1000">
+                <a:solidFill>
+                  <a:srgbClr val="152130"/>
+                </a:solidFill>
+                <a:latin typeface="Arial"/>
+              </a:rPr>
+              <a:t>1. CAPITAL ALLOCATION (+0.35): gated reinvestment, pruning, buybacks instead of RR=1.00 at negative ROIIC. At 1.5-2.2x earnings, each ¥1bn buyback retires ~10% of market cap</a:t>
+            </a:r>
+          </a:p>
+          <a:p>
+            <a:pPr>
+              <a:spcBef>
+                <a:spcPts val="400"/>
+              </a:spcBef>
+            </a:pPr>
+            <a:r>
+              <a:rPr sz="1000">
+                <a:solidFill>
+                  <a:srgbClr val="152130"/>
+                </a:solidFill>
+                <a:latin typeface="Arial"/>
+              </a:rPr>
+              <a:t>2. FOOTPRINT (+0.25): the ¥2-3bn restructuring the P&amp;L repays anyway</a:t>
+            </a:r>
+          </a:p>
+          <a:p>
+            <a:pPr>
+              <a:spcBef>
+                <a:spcPts val="400"/>
+              </a:spcBef>
+            </a:pPr>
+            <a:r>
+              <a:rPr sz="1000">
+                <a:solidFill>
+                  <a:srgbClr val="152130"/>
+                </a:solidFill>
+                <a:latin typeface="Arial"/>
+              </a:rPr>
+              <a:t>3. LEGIBILITY (+0.15, ~¥0.15bn/yr): patent existing work, publish at JSAE, disclose PPM data — quality sellable outside the keiretsu</a:t>
             </a:r>
           </a:p>
         </p:txBody>
@@ -18026,55 +18026,71 @@
                 </a:solidFill>
                 <a:latin typeface="Arial"/>
               </a:rPr>
-              <a:t>Rides free on the committed program — and the one defense</a:t>
-            </a:r>
-          </a:p>
-          <a:p>
-            <a:pPr>
-              <a:spcBef>
-                <a:spcPts val="400"/>
-              </a:spcBef>
-            </a:pPr>
-            <a:r>
-              <a:rPr sz="1050">
-                <a:solidFill>
-                  <a:srgbClr val="152130"/>
-                </a:solidFill>
-                <a:latin typeface="Arial"/>
-              </a:rPr>
-              <a:t>Substitution + runway (+0.50 combined): the ¥2.7bn/yr R&amp;D program and ADB capex are already committed for P&amp;L reasons — their moat contribution (socket wins, riding the disc/e-pump shift) comes free on top</a:t>
-            </a:r>
-          </a:p>
-          <a:p>
-            <a:pPr>
-              <a:spcBef>
-                <a:spcPts val="400"/>
-              </a:spcBef>
-            </a:pPr>
-            <a:r>
-              <a:rPr sz="1050">
-                <a:solidFill>
-                  <a:srgbClr val="152130"/>
-                </a:solidFill>
-                <a:latin typeface="Arial"/>
-              </a:rPr>
-              <a:t>Ecosystem (+0.20): aftermarket annuity + TCU software layer, ~¥1-2bn over 3 yrs — the achievable version of Knorr's installed base</a:t>
-            </a:r>
-          </a:p>
-          <a:p>
-            <a:pPr>
-              <a:spcBef>
-                <a:spcPts val="400"/>
-              </a:spcBef>
-            </a:pPr>
-            <a:r>
-              <a:rPr sz="1050">
-                <a:solidFill>
-                  <a:srgbClr val="152130"/>
-                </a:solidFill>
-                <a:latin typeface="Arial"/>
-              </a:rPr>
-              <a:t>DEFEND Hegemony (8.0): the ADB program is insurance against repeating UD — where TBK holds zero cells. Total incremental: ~¥2-5bn / 3 yrs</a:t>
+              <a:t>Rides free — plus the one defense</a:t>
+            </a:r>
+          </a:p>
+          <a:p>
+            <a:pPr>
+              <a:spcBef>
+                <a:spcPts val="400"/>
+              </a:spcBef>
+            </a:pPr>
+            <a:r>
+              <a:rPr sz="1000">
+                <a:solidFill>
+                  <a:srgbClr val="152130"/>
+                </a:solidFill>
+                <a:latin typeface="Arial"/>
+              </a:rPr>
+              <a:t>Substitution + runway (+0.50): the committed ¥2.7bn/yr R&amp;D + ADB capex deliver these moat points free on top of their P&amp;L case</a:t>
+            </a:r>
+          </a:p>
+          <a:p>
+            <a:pPr>
+              <a:spcBef>
+                <a:spcPts val="400"/>
+              </a:spcBef>
+            </a:pPr>
+            <a:r>
+              <a:rPr sz="1000">
+                <a:solidFill>
+                  <a:srgbClr val="152130"/>
+                </a:solidFill>
+                <a:latin typeface="Arial"/>
+              </a:rPr>
+              <a:t>Ecosystem (+0.20): aftermarket annuity + TCU software, ~¥1-2bn / 3 yrs</a:t>
+            </a:r>
+          </a:p>
+          <a:p>
+            <a:pPr>
+              <a:spcBef>
+                <a:spcPts val="400"/>
+              </a:spcBef>
+            </a:pPr>
+            <a:r>
+              <a:rPr sz="1000">
+                <a:solidFill>
+                  <a:srgbClr val="152130"/>
+                </a:solidFill>
+                <a:latin typeface="Arial"/>
+              </a:rPr>
+              <a:t>DEFEND Hegemony (8.0): ADB is insurance against repeating UD, where TBK holds zero cells</a:t>
+            </a:r>
+          </a:p>
+          <a:p>
+            <a:pPr>
+              <a:spcBef>
+                <a:spcPts val="400"/>
+              </a:spcBef>
+            </a:pPr>
+            <a:r>
+              <a:rPr sz="1000">
+                <a:solidFill>
+                  <a:srgbClr val="152130"/>
+                </a:solidFill>
+                <a:latin typeface="Arial"/>
+              </a:rPr>
+              <a:t>Total incremental: ~¥2-5bn over 3 years</a:t>
             </a:r>
           </a:p>
         </p:txBody>

--- a/TBK_rd_gap_slides.pptx
+++ b/TBK_rd_gap_slides.pptx
@@ -16450,7 +16450,7 @@
                 </a:solidFill>
                 <a:latin typeface="Arial"/>
               </a:rPr>
-              <a:t>TBK: retarders since the 1960s; 19.5" ADB exhibited (year unconfirmed: 2019 vs 2022 sources conflict); e-pumps/TCU in development</a:t>
+              <a:t>TBK's OWN firsts: the SAW drum brake system it pioneered (class-leading today); CV disc-brake work with Isuzu as early as 1990 (SAE 902200); retarders since the 1960s; 19.5" ADB exhibited; e-pumps/TCU in development</a:t>
             </a:r>
           </a:p>
         </p:txBody>
@@ -16523,7 +16523,7 @@
                 </a:solidFill>
                 <a:latin typeface="Arial"/>
               </a:rPr>
-              <a:t>TBK's innovation is DOCUMENTED BUT EXTERNALLY UNVALIDATED: the product facts are verifiable (retarders since the 1960s, e-pumps and a TCU in development, an ADB prototype) — their competitiveness is not externally evidenced, and 'no recalls in 75 years' is absence-of-negatives, not proof of excellence. Either way the commercial conclusion holds: unvalidated innovation cannot win sockets outside the keiretsu.</a:t>
+              <a:t>TBK's engineering DNA is DEEPER than the patent count implies — it pioneered the SAW system, co-authored CV disc work with Isuzu in 1990, and has built retarders for six decades. The failure is CONVERSION, not capability: that DNA was never turned into protected IP, external validation, or market-priced revenue. This reframes the R&amp;D risk: the question is not whether TBK can engineer, but whether it will finally capitalize what it engineers.</a:t>
             </a:r>
           </a:p>
           <a:p>

--- a/TBK_rd_gap_slides.pptx
+++ b/TBK_rd_gap_slides.pptx
@@ -35,6 +35,7 @@
     <p:sldId id="283" r:id="rId34"/>
     <p:sldId id="284" r:id="rId35"/>
     <p:sldId id="285" r:id="rId36"/>
+    <p:sldId id="286" r:id="rId37"/>
   </p:sldIdLst>
   <p:sldSz cx="12191695" cy="6858000" type="screen4x3"/>
   <p:notesSz cx="6858000" cy="9144000"/>
@@ -13726,6 +13727,22 @@
           <a:p>
             <a:pPr>
               <a:spcBef>
+                <a:spcPts val="300"/>
+              </a:spcBef>
+            </a:pPr>
+            <a:r>
+              <a:rPr sz="1150" b="0">
+                <a:solidFill>
+                  <a:srgbClr val="556A83"/>
+                </a:solidFill>
+                <a:latin typeface="Arial"/>
+              </a:rPr>
+              <a:t>29   Conclusion: proven engineering, broken monetization</a:t>
+            </a:r>
+          </a:p>
+          <a:p>
+            <a:pPr>
+              <a:spcBef>
                 <a:spcPts val="1000"/>
               </a:spcBef>
             </a:pPr>
@@ -13752,7 +13769,7 @@
                 </a:solidFill>
                 <a:latin typeface="Arial"/>
               </a:rPr>
-              <a:t>29   Research quality &amp; methodology notes</a:t>
+              <a:t>30   Research quality &amp; methodology notes</a:t>
             </a:r>
           </a:p>
           <a:p>
@@ -13768,7 +13785,7 @@
                 </a:solidFill>
                 <a:latin typeface="Arial"/>
               </a:rPr>
-              <a:t>30   Sources</a:t>
+              <a:t>31   Sources</a:t>
             </a:r>
           </a:p>
         </p:txBody>
@@ -18212,7 +18229,7 @@
                 </a:solidFill>
                 <a:latin typeface="Times New Roman"/>
               </a:rPr>
-              <a:t>Research quality &amp; methodology notes</a:t>
+              <a:t>Conclusion: TBK can build it — it just doesn't sell it</a:t>
             </a:r>
           </a:p>
         </p:txBody>
@@ -18300,7 +18317,7 @@
                 </a:solidFill>
                 <a:latin typeface="Arial"/>
               </a:rPr>
-              <a:t>How this material was produced, verified, and where its limits are</a:t>
+              <a:t>The engineering is proven. What needs fixing is go-to-market, pricing, and the customer relationship — managerial problems, which ownership can address</a:t>
             </a:r>
           </a:p>
         </p:txBody>
@@ -18314,7 +18331,7 @@
         <p:spPr>
           <a:xfrm>
             <a:off x="457200" y="1417320"/>
-            <a:ext cx="5577840" cy="2377440"/>
+            <a:ext cx="3657600" cy="4160520"/>
           </a:xfrm>
           <a:prstGeom prst="rect">
             <a:avLst/>
@@ -18341,71 +18358,103 @@
                 </a:solidFill>
                 <a:latin typeface="Arial"/>
               </a:rPr>
-              <a:t>Method &amp; confidence tiers</a:t>
-            </a:r>
-          </a:p>
-          <a:p>
-            <a:pPr>
-              <a:spcBef>
-                <a:spcPts val="400"/>
-              </a:spcBef>
-            </a:pPr>
-            <a:r>
-              <a:rPr sz="950">
-                <a:solidFill>
-                  <a:srgbClr val="152130"/>
-                </a:solidFill>
-                <a:latin typeface="Arial"/>
-              </a:rPr>
-              <a:t>Two deep-research studies (brake market; pump market): 5 parallel search angles each, claims extracted as falsifiable statements, then ADVERSARIAL VERIFICATION — 3 independent voters per claim set, actively attempting refutation</a:t>
-            </a:r>
-          </a:p>
-          <a:p>
-            <a:pPr>
-              <a:spcBef>
-                <a:spcPts val="400"/>
-              </a:spcBef>
-            </a:pPr>
-            <a:r>
-              <a:rPr sz="950">
-                <a:solidFill>
-                  <a:srgbClr val="152130"/>
-                </a:solidFill>
-                <a:latin typeface="Arial"/>
-              </a:rPr>
-              <a:t>Tier 1: peer-reviewed papers, primary regulation, audited filings (TBK tanshin, Concentric AR2023, SEC)</a:t>
-            </a:r>
-          </a:p>
-          <a:p>
-            <a:pPr>
-              <a:spcBef>
-                <a:spcPts val="400"/>
-              </a:spcBef>
-            </a:pPr>
-            <a:r>
-              <a:rPr sz="950">
-                <a:solidFill>
-                  <a:srgbClr val="152130"/>
-                </a:solidFill>
-                <a:latin typeface="Arial"/>
-              </a:rPr>
-              <a:t>Tier 2: government data and multi-source-verified company/industry figures</a:t>
-            </a:r>
-          </a:p>
-          <a:p>
-            <a:pPr>
-              <a:spcBef>
-                <a:spcPts val="400"/>
-              </a:spcBef>
-            </a:pPr>
-            <a:r>
-              <a:rPr sz="950">
-                <a:solidFill>
-                  <a:srgbClr val="152130"/>
-                </a:solidFill>
-                <a:latin typeface="Arial"/>
-              </a:rPr>
-              <a:t>Tier 3: single-source estimates and market research — always labeled in the underlying documents</a:t>
+              <a:t>PROVEN: the engineering</a:t>
+            </a:r>
+          </a:p>
+          <a:p>
+            <a:pPr>
+              <a:spcBef>
+                <a:spcPts val="400"/>
+              </a:spcBef>
+            </a:pPr>
+            <a:r>
+              <a:rPr sz="1050">
+                <a:solidFill>
+                  <a:srgbClr val="152130"/>
+                </a:solidFill>
+                <a:latin typeface="Arial"/>
+              </a:rPr>
+              <a:t>Pioneered the SAW system — class-leading drum brake in stopping, energy and weight, TODAY</a:t>
+            </a:r>
+          </a:p>
+          <a:p>
+            <a:pPr>
+              <a:spcBef>
+                <a:spcPts val="400"/>
+              </a:spcBef>
+            </a:pPr>
+            <a:r>
+              <a:rPr sz="1050">
+                <a:solidFill>
+                  <a:srgbClr val="152130"/>
+                </a:solidFill>
+                <a:latin typeface="Arial"/>
+              </a:rPr>
+              <a:t>Co-authored CV disc-brake work with Isuzu in 1990 (SAE 902200) — before discs were mainstream</a:t>
+            </a:r>
+          </a:p>
+          <a:p>
+            <a:pPr>
+              <a:spcBef>
+                <a:spcPts val="400"/>
+              </a:spcBef>
+            </a:pPr>
+            <a:r>
+              <a:rPr sz="1050">
+                <a:solidFill>
+                  <a:srgbClr val="152130"/>
+                </a:solidFill>
+                <a:latin typeface="Arial"/>
+              </a:rPr>
+              <a:t>Retarders engineered for six decades; e-pumps and a thermal control unit in development</a:t>
+            </a:r>
+          </a:p>
+          <a:p>
+            <a:pPr>
+              <a:spcBef>
+                <a:spcPts val="400"/>
+              </a:spcBef>
+            </a:pPr>
+            <a:r>
+              <a:rPr sz="1050">
+                <a:solidFill>
+                  <a:srgbClr val="152130"/>
+                </a:solidFill>
+                <a:latin typeface="Arial"/>
+              </a:rPr>
+              <a:t>Zero findable recalls or scandals in 75 years supplying Japan's toughest customers</a:t>
+            </a:r>
+          </a:p>
+          <a:p>
+            <a:pPr>
+              <a:spcBef>
+                <a:spcPts val="400"/>
+              </a:spcBef>
+            </a:pPr>
+            <a:r>
+              <a:rPr sz="1050">
+                <a:solidFill>
+                  <a:srgbClr val="152130"/>
+                </a:solidFill>
+                <a:latin typeface="Arial"/>
+              </a:rPr>
+              <a:t>Owns its product designs (confirmed)</a:t>
+            </a:r>
+          </a:p>
+          <a:p>
+            <a:pPr>
+              <a:spcBef>
+                <a:spcPts val="400"/>
+              </a:spcBef>
+            </a:pPr>
+            <a:r>
+              <a:rPr sz="1050">
+                <a:solidFill>
+                  <a:srgbClr val="152130"/>
+                </a:solidFill>
+                <a:latin typeface="Arial"/>
+              </a:rPr>
+              <a:t>Small-batch disc brakes earn 68.7% contribution — when TBK prices, the product carries it</a:t>
             </a:r>
           </a:p>
         </p:txBody>
@@ -18418,8 +18467,8 @@
         </p:nvSpPr>
         <p:spPr>
           <a:xfrm>
-            <a:off x="6217920" y="1417320"/>
-            <a:ext cx="5532120" cy="2377440"/>
+            <a:off x="4224528" y="1417320"/>
+            <a:ext cx="3657600" cy="4160520"/>
           </a:xfrm>
           <a:prstGeom prst="rect">
             <a:avLst/>
@@ -18446,119 +18495,55 @@
                 </a:solidFill>
                 <a:latin typeface="Arial"/>
               </a:rPr>
-              <a:t>Corrections made by verification (transparency)</a:t>
-            </a:r>
-          </a:p>
-          <a:p>
-            <a:pPr>
-              <a:spcBef>
-                <a:spcPts val="400"/>
-              </a:spcBef>
-            </a:pPr>
-            <a:r>
-              <a:rPr sz="950">
-                <a:solidFill>
-                  <a:srgbClr val="152130"/>
-                </a:solidFill>
-                <a:latin typeface="Arial"/>
-              </a:rPr>
-              <a:t>TBK's famous '~70% share' belongs to its WATER PUMPS, not brakes (brakes: 'top share', unaudited)</a:t>
-            </a:r>
-          </a:p>
-          <a:p>
-            <a:pPr>
-              <a:spcBef>
-                <a:spcPts val="400"/>
-              </a:spcBef>
-            </a:pPr>
-            <a:r>
-              <a:rPr sz="950">
-                <a:solidFill>
-                  <a:srgbClr val="152130"/>
-                </a:solidFill>
-                <a:latin typeface="Arial"/>
-              </a:rPr>
-              <a:t>Euro 7 heavy-duty brake-dust limits apply ~2030, not 2028/29 (those are exhaust dates)</a:t>
-            </a:r>
-          </a:p>
-          <a:p>
-            <a:pPr>
-              <a:spcBef>
-                <a:spcPts val="400"/>
-              </a:spcBef>
-            </a:pPr>
-            <a:r>
-              <a:rPr sz="950">
-                <a:solidFill>
-                  <a:srgbClr val="152130"/>
-                </a:solidFill>
-                <a:latin typeface="Arial"/>
-              </a:rPr>
-              <a:t>Concentric R&amp;D = 2.3% of sales per AR2023 — the circulating '~5%' was wrong</a:t>
-            </a:r>
-          </a:p>
-          <a:p>
-            <a:pPr>
-              <a:spcBef>
-                <a:spcPts val="400"/>
-              </a:spcBef>
-            </a:pPr>
-            <a:r>
-              <a:rPr sz="950">
-                <a:solidFill>
-                  <a:srgbClr val="152130"/>
-                </a:solidFill>
-                <a:latin typeface="Arial"/>
-              </a:rPr>
-              <a:t>'85-90% of Asia on drums' could not be corroborated — stated as 'majority' only</a:t>
-            </a:r>
-          </a:p>
-          <a:p>
-            <a:pPr>
-              <a:spcBef>
-                <a:spcPts val="400"/>
-              </a:spcBef>
-            </a:pPr>
-            <a:r>
-              <a:rPr sz="950">
-                <a:solidFill>
-                  <a:srgbClr val="152130"/>
-                </a:solidFill>
-                <a:latin typeface="Arial"/>
-              </a:rPr>
-              <a:t>A claimed TBK-Mikuni alliance is erroneous (conflation with Mikuni-Suzuki)</a:t>
-            </a:r>
-          </a:p>
-          <a:p>
-            <a:pPr>
-              <a:spcBef>
-                <a:spcPts val="400"/>
-              </a:spcBef>
-            </a:pPr>
-            <a:r>
-              <a:rPr sz="950">
-                <a:solidFill>
-                  <a:srgbClr val="152130"/>
-                </a:solidFill>
-                <a:latin typeface="Arial"/>
-              </a:rPr>
-              <a:t>Aggregator's 'TBK FY26 ¥138M profit' contradicted by the audited tanshin (-¥131M)</a:t>
-            </a:r>
-          </a:p>
-          <a:p>
-            <a:pPr>
-              <a:spcBef>
-                <a:spcPts val="400"/>
-              </a:spcBef>
-            </a:pPr>
-            <a:r>
-              <a:rPr sz="950">
-                <a:solidFill>
-                  <a:srgbClr val="152130"/>
-                </a:solidFill>
-                <a:latin typeface="Arial"/>
-              </a:rPr>
-              <a:t>TBK ADB exhibit year unresolved (2019 vs 2022 sources conflict); Concentric MR pack period 2112 = Dec 2021</a:t>
+              <a:t>BROKEN: the monetization</a:t>
+            </a:r>
+          </a:p>
+          <a:p>
+            <a:pPr>
+              <a:spcBef>
+                <a:spcPts val="400"/>
+              </a:spcBef>
+            </a:pPr>
+            <a:r>
+              <a:rPr sz="1050">
+                <a:solidFill>
+                  <a:srgbClr val="152130"/>
+                </a:solidFill>
+                <a:latin typeface="Arial"/>
+              </a:rPr>
+              <a:t>PRICING: ~30% below market across the book; SAW — the best product — earns just 19.5% contribution; keiretsu customers pay 17% blended vs 30.5% from everyone else</a:t>
+            </a:r>
+          </a:p>
+          <a:p>
+            <a:pPr>
+              <a:spcBef>
+                <a:spcPts val="400"/>
+              </a:spcBef>
+            </a:pPr>
+            <a:r>
+              <a:rPr sz="1050">
+                <a:solidFill>
+                  <a:srgbClr val="152130"/>
+                </a:solidFill>
+                <a:latin typeface="Arial"/>
+              </a:rPr>
+              <a:t>GO-TO-MARKET: ~90% of sales through channels that set TBK's prices; aftermarket only ~10% of sales (Haldex: 42%); exports marginal; zero external proof points — 2-3 patents/yr, no awards, no published quality data</a:t>
+            </a:r>
+          </a:p>
+          <a:p>
+            <a:pPr>
+              <a:spcBef>
+                <a:spcPts val="400"/>
+              </a:spcBef>
+            </a:pPr>
+            <a:r>
+              <a:rPr sz="1050">
+                <a:solidFill>
+                  <a:srgbClr val="152130"/>
+                </a:solidFill>
+                <a:latin typeface="Arial"/>
+              </a:rPr>
+              <a:t>RELATIONSHIPS: Isuzu alone = 22% of sales; 75 years of price-downs accepted; the customer captures the value the engineering creates</a:t>
             </a:r>
           </a:p>
         </p:txBody>
@@ -18571,113 +18556,8 @@
         </p:nvSpPr>
         <p:spPr>
           <a:xfrm>
-            <a:off x="457200" y="3931920"/>
-            <a:ext cx="5577840" cy="2377440"/>
-          </a:xfrm>
-          <a:prstGeom prst="rect">
-            <a:avLst/>
-          </a:prstGeom>
-          <a:solidFill>
-            <a:srgbClr val="F6F7F9"/>
-          </a:solidFill>
-          <a:ln w="15875">
-            <a:solidFill>
-              <a:srgbClr val="152130"/>
-            </a:solidFill>
-          </a:ln>
-        </p:spPr>
-        <p:txBody>
-          <a:bodyPr wrap="square" lIns="137160" rIns="137160" tIns="109728">
-            <a:spAutoFit/>
-          </a:bodyPr>
-          <a:lstStyle/>
-          <a:p>
-            <a:r>
-              <a:rPr sz="1450" b="1">
-                <a:solidFill>
-                  <a:srgbClr val="152130"/>
-                </a:solidFill>
-                <a:latin typeface="Arial"/>
-              </a:rPr>
-              <a:t>Known limitations</a:t>
-            </a:r>
-          </a:p>
-          <a:p>
-            <a:pPr>
-              <a:spcBef>
-                <a:spcPts val="400"/>
-              </a:spcBef>
-            </a:pPr>
-            <a:r>
-              <a:rPr sz="950">
-                <a:solidFill>
-                  <a:srgbClr val="152130"/>
-                </a:solidFill>
-                <a:latin typeface="Arial"/>
-              </a:rPr>
-              <a:t>Full-text retrieval was blocked in the research environment: paywalled SAE/journal numbers rest on abstracts; flagged where unverified</a:t>
-            </a:r>
-          </a:p>
-          <a:p>
-            <a:pPr>
-              <a:spcBef>
-                <a:spcPts val="400"/>
-              </a:spcBef>
-            </a:pPr>
-            <a:r>
-              <a:rPr sz="950">
-                <a:solidFill>
-                  <a:srgbClr val="152130"/>
-                </a:solidFill>
-                <a:latin typeface="Arial"/>
-              </a:rPr>
-              <a:t>No peer discloses brake-only or pump-only R&amp;D, gross profit, or segment margins — group figures used; ratios are the valid comparison</a:t>
-            </a:r>
-          </a:p>
-          <a:p>
-            <a:pPr>
-              <a:spcBef>
-                <a:spcPts val="400"/>
-              </a:spcBef>
-            </a:pPr>
-            <a:r>
-              <a:rPr sz="950">
-                <a:solidFill>
-                  <a:srgbClr val="152130"/>
-                </a:solidFill>
-                <a:latin typeface="Arial"/>
-              </a:rPr>
-              <a:t>Accounting: the consistent-basis peer dataset (margins, EBITA, R&amp;D, ROIC for the 7 companies) is HARMONIZED to the same treatment — cross-GAAP caveats apply only to raw-filing figures for non-dataset peers; nature-of-expense 'gross margins' (Knorr/Brembo ~50%) remain excluded. The margin gap also shows at EBITA level (peers 8-13% vs Japanese cohort ~3-3.5% for a decade) — treatment-independent</a:t>
-            </a:r>
-          </a:p>
-          <a:p>
-            <a:pPr>
-              <a:spcBef>
-                <a:spcPts val="400"/>
-              </a:spcBef>
-            </a:pPr>
-            <a:r>
-              <a:rPr sz="950">
-                <a:solidFill>
-                  <a:srgbClr val="152130"/>
-                </a:solidFill>
-                <a:latin typeface="Arial"/>
-              </a:rPr>
-              <a:t>TBK FY3/26 division split estimated from FY3/25 (yuho due June 2026); USD at ¥150/USD</a:t>
-            </a:r>
-          </a:p>
-        </p:txBody>
-      </p:sp>
-      <p:sp>
-        <p:nvSpPr>
-          <p:cNvPr id="9" name="TextBox 8"/>
-          <p:cNvSpPr txBox="1"/>
-          <p:nvPr/>
-        </p:nvSpPr>
-        <p:spPr>
-          <a:xfrm>
-            <a:off x="6217920" y="3931920"/>
-            <a:ext cx="5532120" cy="2377440"/>
+            <a:off x="7991856" y="1417320"/>
+            <a:ext cx="3749039" cy="4160520"/>
           </a:xfrm>
           <a:prstGeom prst="rect">
             <a:avLst/>
@@ -18704,87 +18584,122 @@
                 </a:solidFill>
                 <a:latin typeface="Arial"/>
               </a:rPr>
-              <a:t>Data hierarchy &amp; framework constructs</a:t>
-            </a:r>
-          </a:p>
-          <a:p>
-            <a:pPr>
-              <a:spcBef>
-                <a:spcPts val="400"/>
-              </a:spcBef>
-            </a:pPr>
-            <a:r>
-              <a:rPr sz="950">
-                <a:solidFill>
-                  <a:srgbClr val="152130"/>
-                </a:solidFill>
-                <a:latin typeface="Arial"/>
-              </a:rPr>
-              <a:t>Where sources conflict, the audited primary document wins (e.g., TBK tanshin over aggregators)</a:t>
-            </a:r>
-          </a:p>
-          <a:p>
-            <a:pPr>
-              <a:spcBef>
-                <a:spcPts val="400"/>
-              </a:spcBef>
-            </a:pPr>
-            <a:r>
-              <a:rPr sz="950">
-                <a:solidFill>
-                  <a:srgbClr val="152130"/>
-                </a:solidFill>
-                <a:latin typeface="Arial"/>
-              </a:rPr>
-              <a:t>Company-internal documents (TBK/TBKK product P&amp;Ls, Concentric MR pack, Haldex packs) and management statements (~30% below-market pricing, ~1,000 excess heads) are first-hand but NOT externally verified — labeled wherever used</a:t>
-            </a:r>
-          </a:p>
-          <a:p>
-            <a:pPr>
-              <a:spcBef>
-                <a:spcPts val="400"/>
-              </a:spcBef>
-            </a:pPr>
-            <a:r>
-              <a:rPr sz="950">
-                <a:solidFill>
-                  <a:srgbClr val="152130"/>
-                </a:solidFill>
-                <a:latin typeface="Arial"/>
-              </a:rPr>
-              <a:t>Consistent-basis peer metrics (margins, R&amp;D, ROIC) come from the user-provided 10-year/LTM peer dataset — same methodology across all 7 companies</a:t>
-            </a:r>
-          </a:p>
-          <a:p>
-            <a:pPr>
-              <a:spcBef>
-                <a:spcPts val="400"/>
-              </a:spcBef>
-            </a:pPr>
-            <a:r>
-              <a:rPr sz="950">
-                <a:solidFill>
-                  <a:srgbClr val="152130"/>
-                </a:solidFill>
-                <a:latin typeface="Arial"/>
-              </a:rPr>
-              <a:t>ROIIC (ROICm) = return on incremental invested capital over the stated horizon; RR = reinvestment rate; R&amp;D Capital Base = cumulative R&amp;D capitalized/amortized per the dataset framework — a modeling construct, not a balance-sheet line</a:t>
-            </a:r>
-          </a:p>
-          <a:p>
-            <a:pPr>
-              <a:spcBef>
-                <a:spcPts val="400"/>
-              </a:spcBef>
-            </a:pPr>
-            <a:r>
-              <a:rPr sz="950">
-                <a:solidFill>
-                  <a:srgbClr val="152130"/>
-                </a:solidFill>
-                <a:latin typeface="Arial"/>
-              </a:rPr>
-              <a:t>Scenario pages state assumptions on-slide; peer-margin scenarios use comparable reporters only</a:t>
+              <a:t>THE FIX — managerial, not technical</a:t>
+            </a:r>
+          </a:p>
+          <a:p>
+            <a:pPr>
+              <a:spcBef>
+                <a:spcPts val="400"/>
+              </a:spcBef>
+            </a:pPr>
+            <a:r>
+              <a:rPr sz="1050">
+                <a:solidFill>
+                  <a:srgbClr val="152130"/>
+                </a:solidFill>
+                <a:latin typeface="Arial"/>
+              </a:rPr>
+              <a:t>Reprice what is already excellent: SAW to market over renewal cycles, aftermarket +10% now</a:t>
+            </a:r>
+          </a:p>
+          <a:p>
+            <a:pPr>
+              <a:spcBef>
+                <a:spcPts val="400"/>
+              </a:spcBef>
+            </a:pPr>
+            <a:r>
+              <a:rPr sz="1050">
+                <a:solidFill>
+                  <a:srgbClr val="152130"/>
+                </a:solidFill>
+                <a:latin typeface="Arial"/>
+              </a:rPr>
+              <a:t>Open channels TBK controls: aftermarket expansion, India/export via Brakes India at market prices</a:t>
+            </a:r>
+          </a:p>
+          <a:p>
+            <a:pPr>
+              <a:spcBef>
+                <a:spcPts val="400"/>
+              </a:spcBef>
+            </a:pPr>
+            <a:r>
+              <a:rPr sz="1050">
+                <a:solidFill>
+                  <a:srgbClr val="152130"/>
+                </a:solidFill>
+                <a:latin typeface="Arial"/>
+              </a:rPr>
+              <a:t>Make the engineering legible: patent it, publish it, certify it — sellable outside the keiretsu</a:t>
+            </a:r>
+          </a:p>
+          <a:p>
+            <a:pPr>
+              <a:spcBef>
+                <a:spcPts val="400"/>
+              </a:spcBef>
+            </a:pPr>
+            <a:r>
+              <a:rPr sz="1050">
+                <a:solidFill>
+                  <a:srgbClr val="152130"/>
+                </a:solidFill>
+                <a:latin typeface="Arial"/>
+              </a:rPr>
+              <a:t>Reset the relationship: price paired with the ADB/e-pump roadmap — supply security and future tech in exchange for honest prices</a:t>
+            </a:r>
+          </a:p>
+          <a:p>
+            <a:pPr>
+              <a:spcBef>
+                <a:spcPts val="400"/>
+              </a:spcBef>
+            </a:pPr>
+            <a:r>
+              <a:rPr sz="1050">
+                <a:solidFill>
+                  <a:srgbClr val="152130"/>
+                </a:solidFill>
+                <a:latin typeface="Arial"/>
+              </a:rPr>
+              <a:t>None of this requires inventing anything new — only capitalizing what 75 years of engineering already built</a:t>
+            </a:r>
+          </a:p>
+        </p:txBody>
+      </p:sp>
+      <p:sp>
+        <p:nvSpPr>
+          <p:cNvPr id="9" name="TextBox 8"/>
+          <p:cNvSpPr txBox="1"/>
+          <p:nvPr/>
+        </p:nvSpPr>
+        <p:spPr>
+          <a:xfrm>
+            <a:off x="457200" y="5760720"/>
+            <a:ext cx="11247120" cy="914400"/>
+          </a:xfrm>
+          <a:prstGeom prst="rect">
+            <a:avLst/>
+          </a:prstGeom>
+          <a:noFill/>
+        </p:spPr>
+        <p:txBody>
+          <a:bodyPr wrap="square">
+            <a:spAutoFit/>
+          </a:bodyPr>
+          <a:lstStyle/>
+          <a:p>
+            <a:pPr algn="l"/>
+            <a:r>
+              <a:rPr sz="1150" b="1">
+                <a:solidFill>
+                  <a:srgbClr val="152130"/>
+                </a:solidFill>
+                <a:latin typeface="Arial"/>
+              </a:rPr>
+              <a:t>The investment logic in one line: technical risk is what ownership cannot fix — and TBK has little of it. Managerial risk is what engaged ownership exists to fix — and that is nearly all of TBK's problem. A company that can engineer market-leading products but cannot price, channel, or protect them is not a value trap; it is an unmanaged asset.</a:t>
             </a:r>
           </a:p>
         </p:txBody>
@@ -19619,7 +19534,7 @@
                 </a:solidFill>
                 <a:latin typeface="Times New Roman"/>
               </a:rPr>
-              <a:t>Sources</a:t>
+              <a:t>Research quality &amp; methodology notes</a:t>
             </a:r>
           </a:p>
         </p:txBody>
@@ -19685,8 +19600,43 @@
         </p:nvSpPr>
         <p:spPr>
           <a:xfrm>
-            <a:off x="457200" y="1188720"/>
-            <a:ext cx="5577840" cy="2606040"/>
+            <a:off x="457200" y="923544"/>
+            <a:ext cx="11247120" cy="457200"/>
+          </a:xfrm>
+          <a:prstGeom prst="rect">
+            <a:avLst/>
+          </a:prstGeom>
+          <a:noFill/>
+        </p:spPr>
+        <p:txBody>
+          <a:bodyPr wrap="square">
+            <a:spAutoFit/>
+          </a:bodyPr>
+          <a:lstStyle/>
+          <a:p>
+            <a:pPr algn="l"/>
+            <a:r>
+              <a:rPr sz="1050" b="0">
+                <a:solidFill>
+                  <a:srgbClr val="556A83"/>
+                </a:solidFill>
+                <a:latin typeface="Arial"/>
+              </a:rPr>
+              <a:t>How this material was produced, verified, and where its limits are</a:t>
+            </a:r>
+          </a:p>
+        </p:txBody>
+      </p:sp>
+      <p:sp>
+        <p:nvSpPr>
+          <p:cNvPr id="6" name="TextBox 5"/>
+          <p:cNvSpPr txBox="1"/>
+          <p:nvPr/>
+        </p:nvSpPr>
+        <p:spPr>
+          <a:xfrm>
+            <a:off x="457200" y="1417320"/>
+            <a:ext cx="5577840" cy="2377440"/>
           </a:xfrm>
           <a:prstGeom prst="rect">
             <a:avLst/>
@@ -19713,117 +19663,238 @@
                 </a:solidFill>
                 <a:latin typeface="Arial"/>
               </a:rPr>
-              <a:t>Primary &amp; audited</a:t>
-            </a:r>
-          </a:p>
-          <a:p>
-            <a:pPr>
-              <a:spcBef>
-                <a:spcPts val="400"/>
-              </a:spcBef>
-            </a:pPr>
-            <a:r>
-              <a:rPr sz="1000">
-                <a:solidFill>
-                  <a:srgbClr val="152130"/>
-                </a:solidFill>
-                <a:latin typeface="Arial"/>
-              </a:rPr>
-              <a:t>TBK Co., Ltd. — Consolidated Financial Results FY ended 31 Mar 2026 (tanshin, 14 May 2026); securities-report risk factors (有価証券報告書 via kitaishihon/irbank)</a:t>
-            </a:r>
-          </a:p>
-          <a:p>
-            <a:pPr>
-              <a:spcBef>
-                <a:spcPts val="400"/>
-              </a:spcBef>
-            </a:pPr>
-            <a:r>
-              <a:rPr sz="1000">
-                <a:solidFill>
-                  <a:srgbClr val="152130"/>
-                </a:solidFill>
-                <a:latin typeface="Arial"/>
-              </a:rPr>
-              <a:t>Concentric AB — Annual Report 2023 (income statement, balance sheet, 5-year key figures)</a:t>
-            </a:r>
-          </a:p>
-          <a:p>
-            <a:pPr>
-              <a:spcBef>
-                <a:spcPts val="400"/>
-              </a:spcBef>
-            </a:pPr>
-            <a:r>
-              <a:rPr sz="1000">
-                <a:solidFill>
-                  <a:srgbClr val="152130"/>
-                </a:solidFill>
-                <a:latin typeface="Arial"/>
-              </a:rPr>
-              <a:t>User-provided datasets: TBK 10-year financials; Peers 10-year; Peers LTM (7 companies, consistent methodology); moat methodology v3.2</a:t>
-            </a:r>
-          </a:p>
-          <a:p>
-            <a:pPr>
-              <a:spcBef>
-                <a:spcPts val="400"/>
-              </a:spcBef>
-            </a:pPr>
-            <a:r>
-              <a:rPr sz="1000">
-                <a:solidFill>
-                  <a:srgbClr val="152130"/>
-                </a:solidFill>
-                <a:latin typeface="Arial"/>
-              </a:rPr>
-              <a:t>Internal management documents: TBK Japan profitability by product/customer + share map + acquired projects (H1 FY2025); TBKK Thailand profit by items (Apr-Sep 2025); Concentric Group MR Pack (Dec 2021); Haldex analysis file (2019) and May-2014 MR pack</a:t>
-            </a:r>
-          </a:p>
-          <a:p>
-            <a:pPr>
-              <a:spcBef>
-                <a:spcPts val="400"/>
-              </a:spcBef>
-            </a:pPr>
-            <a:r>
-              <a:rPr sz="1000">
-                <a:solidFill>
-                  <a:srgbClr val="152130"/>
-                </a:solidFill>
-                <a:latin typeface="Arial"/>
-              </a:rPr>
-              <a:t>SEC filings: Cummins 10-K/10-Q/8-K (FY2024-25); WABCO &amp; Meritor merger 8-Ks</a:t>
-            </a:r>
-          </a:p>
-          <a:p>
-            <a:pPr>
-              <a:spcBef>
-                <a:spcPts val="400"/>
-              </a:spcBef>
-            </a:pPr>
-            <a:r>
-              <a:rPr sz="1000">
-                <a:solidFill>
-                  <a:srgbClr val="152130"/>
-                </a:solidFill>
-                <a:latin typeface="Arial"/>
-              </a:rPr>
-              <a:t>Company releases: Knorr-Bremse FY2023-25; ZF AR2024-25; SAF-Holland AR2024; Mahle AR2024-25; Haldex year-end 2021; Rheinmetall FY2025 + AEQUITA divestment (3 Jun 2026); Circle BidCo/A.P. Møller offer documents (2024); Brakes India-TBK alliance (Dec 2025)</a:t>
-            </a:r>
-          </a:p>
-        </p:txBody>
-      </p:sp>
-      <p:sp>
-        <p:nvSpPr>
-          <p:cNvPr id="6" name="TextBox 5"/>
+              <a:t>Method &amp; confidence tiers</a:t>
+            </a:r>
+          </a:p>
+          <a:p>
+            <a:pPr>
+              <a:spcBef>
+                <a:spcPts val="400"/>
+              </a:spcBef>
+            </a:pPr>
+            <a:r>
+              <a:rPr sz="950">
+                <a:solidFill>
+                  <a:srgbClr val="152130"/>
+                </a:solidFill>
+                <a:latin typeface="Arial"/>
+              </a:rPr>
+              <a:t>Two deep-research studies (brake market; pump market): 5 parallel search angles each, claims extracted as falsifiable statements, then ADVERSARIAL VERIFICATION — 3 independent voters per claim set, actively attempting refutation</a:t>
+            </a:r>
+          </a:p>
+          <a:p>
+            <a:pPr>
+              <a:spcBef>
+                <a:spcPts val="400"/>
+              </a:spcBef>
+            </a:pPr>
+            <a:r>
+              <a:rPr sz="950">
+                <a:solidFill>
+                  <a:srgbClr val="152130"/>
+                </a:solidFill>
+                <a:latin typeface="Arial"/>
+              </a:rPr>
+              <a:t>Tier 1: peer-reviewed papers, primary regulation, audited filings (TBK tanshin, Concentric AR2023, SEC)</a:t>
+            </a:r>
+          </a:p>
+          <a:p>
+            <a:pPr>
+              <a:spcBef>
+                <a:spcPts val="400"/>
+              </a:spcBef>
+            </a:pPr>
+            <a:r>
+              <a:rPr sz="950">
+                <a:solidFill>
+                  <a:srgbClr val="152130"/>
+                </a:solidFill>
+                <a:latin typeface="Arial"/>
+              </a:rPr>
+              <a:t>Tier 2: government data and multi-source-verified company/industry figures</a:t>
+            </a:r>
+          </a:p>
+          <a:p>
+            <a:pPr>
+              <a:spcBef>
+                <a:spcPts val="400"/>
+              </a:spcBef>
+            </a:pPr>
+            <a:r>
+              <a:rPr sz="950">
+                <a:solidFill>
+                  <a:srgbClr val="152130"/>
+                </a:solidFill>
+                <a:latin typeface="Arial"/>
+              </a:rPr>
+              <a:t>Tier 3: single-source estimates and market research — always labeled in the underlying documents</a:t>
+            </a:r>
+          </a:p>
+        </p:txBody>
+      </p:sp>
+      <p:sp>
+        <p:nvSpPr>
+          <p:cNvPr id="7" name="TextBox 6"/>
           <p:cNvSpPr txBox="1"/>
           <p:nvPr/>
         </p:nvSpPr>
         <p:spPr>
           <a:xfrm>
-            <a:off x="6217920" y="1188720"/>
-            <a:ext cx="5532120" cy="2606040"/>
+            <a:off x="6217920" y="1417320"/>
+            <a:ext cx="5532120" cy="2377440"/>
+          </a:xfrm>
+          <a:prstGeom prst="rect">
+            <a:avLst/>
+          </a:prstGeom>
+          <a:solidFill>
+            <a:srgbClr val="F6F7F9"/>
+          </a:solidFill>
+          <a:ln w="15875">
+            <a:solidFill>
+              <a:srgbClr val="3C3937"/>
+            </a:solidFill>
+          </a:ln>
+        </p:spPr>
+        <p:txBody>
+          <a:bodyPr wrap="square" lIns="137160" rIns="137160" tIns="109728">
+            <a:spAutoFit/>
+          </a:bodyPr>
+          <a:lstStyle/>
+          <a:p>
+            <a:r>
+              <a:rPr sz="1450" b="1">
+                <a:solidFill>
+                  <a:srgbClr val="3C3937"/>
+                </a:solidFill>
+                <a:latin typeface="Arial"/>
+              </a:rPr>
+              <a:t>Corrections made by verification (transparency)</a:t>
+            </a:r>
+          </a:p>
+          <a:p>
+            <a:pPr>
+              <a:spcBef>
+                <a:spcPts val="400"/>
+              </a:spcBef>
+            </a:pPr>
+            <a:r>
+              <a:rPr sz="950">
+                <a:solidFill>
+                  <a:srgbClr val="152130"/>
+                </a:solidFill>
+                <a:latin typeface="Arial"/>
+              </a:rPr>
+              <a:t>TBK's famous '~70% share' belongs to its WATER PUMPS, not brakes (brakes: 'top share', unaudited)</a:t>
+            </a:r>
+          </a:p>
+          <a:p>
+            <a:pPr>
+              <a:spcBef>
+                <a:spcPts val="400"/>
+              </a:spcBef>
+            </a:pPr>
+            <a:r>
+              <a:rPr sz="950">
+                <a:solidFill>
+                  <a:srgbClr val="152130"/>
+                </a:solidFill>
+                <a:latin typeface="Arial"/>
+              </a:rPr>
+              <a:t>Euro 7 heavy-duty brake-dust limits apply ~2030, not 2028/29 (those are exhaust dates)</a:t>
+            </a:r>
+          </a:p>
+          <a:p>
+            <a:pPr>
+              <a:spcBef>
+                <a:spcPts val="400"/>
+              </a:spcBef>
+            </a:pPr>
+            <a:r>
+              <a:rPr sz="950">
+                <a:solidFill>
+                  <a:srgbClr val="152130"/>
+                </a:solidFill>
+                <a:latin typeface="Arial"/>
+              </a:rPr>
+              <a:t>Concentric R&amp;D = 2.3% of sales per AR2023 — the circulating '~5%' was wrong</a:t>
+            </a:r>
+          </a:p>
+          <a:p>
+            <a:pPr>
+              <a:spcBef>
+                <a:spcPts val="400"/>
+              </a:spcBef>
+            </a:pPr>
+            <a:r>
+              <a:rPr sz="950">
+                <a:solidFill>
+                  <a:srgbClr val="152130"/>
+                </a:solidFill>
+                <a:latin typeface="Arial"/>
+              </a:rPr>
+              <a:t>'85-90% of Asia on drums' could not be corroborated — stated as 'majority' only</a:t>
+            </a:r>
+          </a:p>
+          <a:p>
+            <a:pPr>
+              <a:spcBef>
+                <a:spcPts val="400"/>
+              </a:spcBef>
+            </a:pPr>
+            <a:r>
+              <a:rPr sz="950">
+                <a:solidFill>
+                  <a:srgbClr val="152130"/>
+                </a:solidFill>
+                <a:latin typeface="Arial"/>
+              </a:rPr>
+              <a:t>A claimed TBK-Mikuni alliance is erroneous (conflation with Mikuni-Suzuki)</a:t>
+            </a:r>
+          </a:p>
+          <a:p>
+            <a:pPr>
+              <a:spcBef>
+                <a:spcPts val="400"/>
+              </a:spcBef>
+            </a:pPr>
+            <a:r>
+              <a:rPr sz="950">
+                <a:solidFill>
+                  <a:srgbClr val="152130"/>
+                </a:solidFill>
+                <a:latin typeface="Arial"/>
+              </a:rPr>
+              <a:t>Aggregator's 'TBK FY26 ¥138M profit' contradicted by the audited tanshin (-¥131M)</a:t>
+            </a:r>
+          </a:p>
+          <a:p>
+            <a:pPr>
+              <a:spcBef>
+                <a:spcPts val="400"/>
+              </a:spcBef>
+            </a:pPr>
+            <a:r>
+              <a:rPr sz="950">
+                <a:solidFill>
+                  <a:srgbClr val="152130"/>
+                </a:solidFill>
+                <a:latin typeface="Arial"/>
+              </a:rPr>
+              <a:t>TBK ADB exhibit year unresolved (2019 vs 2022 sources conflict); Concentric MR pack period 2112 = Dec 2021</a:t>
+            </a:r>
+          </a:p>
+        </p:txBody>
+      </p:sp>
+      <p:sp>
+        <p:nvSpPr>
+          <p:cNvPr id="8" name="TextBox 7"/>
+          <p:cNvSpPr txBox="1"/>
+          <p:nvPr/>
+        </p:nvSpPr>
+        <p:spPr>
+          <a:xfrm>
+            <a:off x="457200" y="3931920"/>
+            <a:ext cx="5577840" cy="2377440"/>
           </a:xfrm>
           <a:prstGeom prst="rect">
             <a:avLst/>
@@ -19850,100 +19921,345 @@
                 </a:solidFill>
                 <a:latin typeface="Arial"/>
               </a:rPr>
-              <a:t>Peer-reviewed &amp; academic</a:t>
-            </a:r>
-          </a:p>
-          <a:p>
-            <a:pPr>
-              <a:spcBef>
-                <a:spcPts val="400"/>
-              </a:spcBef>
-            </a:pPr>
-            <a:r>
-              <a:rPr sz="1000">
-                <a:solidFill>
-                  <a:srgbClr val="152130"/>
-                </a:solidFill>
-                <a:latin typeface="Arial"/>
-              </a:rPr>
-              <a:t>Göhring &amp; von Glasner, SAE 902206 (1990); Kajiyama et al. (Isuzu/TBK), SAE 902200 (1990); Day, Harding &amp; Newcomb, Proc IMechE (1984); Hoover et al., SAE 2005-01-3614; Subel &amp; Kienhöfer, Proc IMechE D (2020)</a:t>
-            </a:r>
-          </a:p>
-          <a:p>
-            <a:pPr>
-              <a:spcBef>
-                <a:spcPts val="400"/>
-              </a:spcBef>
-            </a:pPr>
-            <a:r>
-              <a:rPr sz="1000">
-                <a:solidFill>
-                  <a:srgbClr val="152130"/>
-                </a:solidFill>
-                <a:latin typeface="Arial"/>
-              </a:rPr>
-              <a:t>Ampadu, Alrejjal &amp; Ksaibati, JSDTL 8(1) 2023 — disc vs drum cost-effectiveness</a:t>
-            </a:r>
-          </a:p>
-          <a:p>
-            <a:pPr>
-              <a:spcBef>
-                <a:spcPts val="400"/>
-              </a:spcBef>
-            </a:pPr>
-            <a:r>
-              <a:rPr sz="1000">
-                <a:solidFill>
-                  <a:srgbClr val="152130"/>
-                </a:solidFill>
-                <a:latin typeface="Arial"/>
-              </a:rPr>
-              <a:t>Granitz et al., SN Applied Sciences (2021) — e-coolant pump, 13L HD diesel; Bitsis &amp; Miwa, SAE 2018-01-0980; Cummins SuperTruck 2, SAE 2019-01-0247; MIT S.M. thesis (2012) — HD parasitic losses</a:t>
-            </a:r>
-          </a:p>
-          <a:p>
-            <a:pPr>
-              <a:spcBef>
-                <a:spcPts val="400"/>
-              </a:spcBef>
-            </a:pPr>
-            <a:r>
-              <a:rPr sz="1000">
-                <a:solidFill>
-                  <a:srgbClr val="152130"/>
-                </a:solidFill>
-                <a:latin typeface="Arial"/>
-              </a:rPr>
-              <a:t>Zhang et al., J. Hazardous Materials 465 (2024); Hagino, Atmosphere 15:75 (2024, JARI); Environmental Pollution (2023) — regen braking &amp; brake wear</a:t>
-            </a:r>
-          </a:p>
-          <a:p>
-            <a:pPr>
-              <a:spcBef>
-                <a:spcPts val="400"/>
-              </a:spcBef>
-            </a:pPr>
-            <a:r>
-              <a:rPr sz="1000">
-                <a:solidFill>
-                  <a:srgbClr val="152130"/>
-                </a:solidFill>
-                <a:latin typeface="Arial"/>
-              </a:rPr>
-              <a:t>Energies 16:4024 (2023), 19:1748 (2026); Sustainability 15:3132 (2023); Energies 16:168 (2023) — BEV/FCEV truck &amp; bus thermal management</a:t>
-            </a:r>
-          </a:p>
-        </p:txBody>
-      </p:sp>
-      <p:sp>
-        <p:nvSpPr>
-          <p:cNvPr id="7" name="TextBox 6"/>
+              <a:t>Known limitations</a:t>
+            </a:r>
+          </a:p>
+          <a:p>
+            <a:pPr>
+              <a:spcBef>
+                <a:spcPts val="400"/>
+              </a:spcBef>
+            </a:pPr>
+            <a:r>
+              <a:rPr sz="950">
+                <a:solidFill>
+                  <a:srgbClr val="152130"/>
+                </a:solidFill>
+                <a:latin typeface="Arial"/>
+              </a:rPr>
+              <a:t>Full-text retrieval was blocked in the research environment: paywalled SAE/journal numbers rest on abstracts; flagged where unverified</a:t>
+            </a:r>
+          </a:p>
+          <a:p>
+            <a:pPr>
+              <a:spcBef>
+                <a:spcPts val="400"/>
+              </a:spcBef>
+            </a:pPr>
+            <a:r>
+              <a:rPr sz="950">
+                <a:solidFill>
+                  <a:srgbClr val="152130"/>
+                </a:solidFill>
+                <a:latin typeface="Arial"/>
+              </a:rPr>
+              <a:t>No peer discloses brake-only or pump-only R&amp;D, gross profit, or segment margins — group figures used; ratios are the valid comparison</a:t>
+            </a:r>
+          </a:p>
+          <a:p>
+            <a:pPr>
+              <a:spcBef>
+                <a:spcPts val="400"/>
+              </a:spcBef>
+            </a:pPr>
+            <a:r>
+              <a:rPr sz="950">
+                <a:solidFill>
+                  <a:srgbClr val="152130"/>
+                </a:solidFill>
+                <a:latin typeface="Arial"/>
+              </a:rPr>
+              <a:t>Accounting: the consistent-basis peer dataset (margins, EBITA, R&amp;D, ROIC for the 7 companies) is HARMONIZED to the same treatment — cross-GAAP caveats apply only to raw-filing figures for non-dataset peers; nature-of-expense 'gross margins' (Knorr/Brembo ~50%) remain excluded. The margin gap also shows at EBITA level (peers 8-13% vs Japanese cohort ~3-3.5% for a decade) — treatment-independent</a:t>
+            </a:r>
+          </a:p>
+          <a:p>
+            <a:pPr>
+              <a:spcBef>
+                <a:spcPts val="400"/>
+              </a:spcBef>
+            </a:pPr>
+            <a:r>
+              <a:rPr sz="950">
+                <a:solidFill>
+                  <a:srgbClr val="152130"/>
+                </a:solidFill>
+                <a:latin typeface="Arial"/>
+              </a:rPr>
+              <a:t>TBK FY3/26 division split estimated from FY3/25 (yuho due June 2026); USD at ¥150/USD</a:t>
+            </a:r>
+          </a:p>
+        </p:txBody>
+      </p:sp>
+      <p:sp>
+        <p:nvSpPr>
+          <p:cNvPr id="9" name="TextBox 8"/>
           <p:cNvSpPr txBox="1"/>
           <p:nvPr/>
         </p:nvSpPr>
         <p:spPr>
           <a:xfrm>
-            <a:off x="457200" y="3977639"/>
+            <a:off x="6217920" y="3931920"/>
+            <a:ext cx="5532120" cy="2377440"/>
+          </a:xfrm>
+          <a:prstGeom prst="rect">
+            <a:avLst/>
+          </a:prstGeom>
+          <a:solidFill>
+            <a:srgbClr val="F6F7F9"/>
+          </a:solidFill>
+          <a:ln w="15875">
+            <a:solidFill>
+              <a:srgbClr val="6F8990"/>
+            </a:solidFill>
+          </a:ln>
+        </p:spPr>
+        <p:txBody>
+          <a:bodyPr wrap="square" lIns="137160" rIns="137160" tIns="109728">
+            <a:spAutoFit/>
+          </a:bodyPr>
+          <a:lstStyle/>
+          <a:p>
+            <a:r>
+              <a:rPr sz="1450" b="1">
+                <a:solidFill>
+                  <a:srgbClr val="6F8990"/>
+                </a:solidFill>
+                <a:latin typeface="Arial"/>
+              </a:rPr>
+              <a:t>Data hierarchy &amp; framework constructs</a:t>
+            </a:r>
+          </a:p>
+          <a:p>
+            <a:pPr>
+              <a:spcBef>
+                <a:spcPts val="400"/>
+              </a:spcBef>
+            </a:pPr>
+            <a:r>
+              <a:rPr sz="950">
+                <a:solidFill>
+                  <a:srgbClr val="152130"/>
+                </a:solidFill>
+                <a:latin typeface="Arial"/>
+              </a:rPr>
+              <a:t>Where sources conflict, the audited primary document wins (e.g., TBK tanshin over aggregators)</a:t>
+            </a:r>
+          </a:p>
+          <a:p>
+            <a:pPr>
+              <a:spcBef>
+                <a:spcPts val="400"/>
+              </a:spcBef>
+            </a:pPr>
+            <a:r>
+              <a:rPr sz="950">
+                <a:solidFill>
+                  <a:srgbClr val="152130"/>
+                </a:solidFill>
+                <a:latin typeface="Arial"/>
+              </a:rPr>
+              <a:t>Company-internal documents (TBK/TBKK product P&amp;Ls, Concentric MR pack, Haldex packs) and management statements (~30% below-market pricing, ~1,000 excess heads) are first-hand but NOT externally verified — labeled wherever used</a:t>
+            </a:r>
+          </a:p>
+          <a:p>
+            <a:pPr>
+              <a:spcBef>
+                <a:spcPts val="400"/>
+              </a:spcBef>
+            </a:pPr>
+            <a:r>
+              <a:rPr sz="950">
+                <a:solidFill>
+                  <a:srgbClr val="152130"/>
+                </a:solidFill>
+                <a:latin typeface="Arial"/>
+              </a:rPr>
+              <a:t>Consistent-basis peer metrics (margins, R&amp;D, ROIC) come from the user-provided 10-year/LTM peer dataset — same methodology across all 7 companies</a:t>
+            </a:r>
+          </a:p>
+          <a:p>
+            <a:pPr>
+              <a:spcBef>
+                <a:spcPts val="400"/>
+              </a:spcBef>
+            </a:pPr>
+            <a:r>
+              <a:rPr sz="950">
+                <a:solidFill>
+                  <a:srgbClr val="152130"/>
+                </a:solidFill>
+                <a:latin typeface="Arial"/>
+              </a:rPr>
+              <a:t>ROIIC (ROICm) = return on incremental invested capital over the stated horizon; RR = reinvestment rate; R&amp;D Capital Base = cumulative R&amp;D capitalized/amortized per the dataset framework — a modeling construct, not a balance-sheet line</a:t>
+            </a:r>
+          </a:p>
+          <a:p>
+            <a:pPr>
+              <a:spcBef>
+                <a:spcPts val="400"/>
+              </a:spcBef>
+            </a:pPr>
+            <a:r>
+              <a:rPr sz="950">
+                <a:solidFill>
+                  <a:srgbClr val="152130"/>
+                </a:solidFill>
+                <a:latin typeface="Arial"/>
+              </a:rPr>
+              <a:t>Scenario pages state assumptions on-slide; peer-margin scenarios use comparable reporters only</a:t>
+            </a:r>
+          </a:p>
+        </p:txBody>
+      </p:sp>
+      <p:sp>
+        <p:nvSpPr>
+          <p:cNvPr id="10" name="TextBox 9"/>
+          <p:cNvSpPr txBox="1"/>
+          <p:nvPr/>
+        </p:nvSpPr>
+        <p:spPr>
+          <a:xfrm>
+            <a:off x="11658600" y="6510528"/>
+            <a:ext cx="411480" cy="274320"/>
+          </a:xfrm>
+          <a:prstGeom prst="rect">
+            <a:avLst/>
+          </a:prstGeom>
+          <a:noFill/>
+        </p:spPr>
+        <p:txBody>
+          <a:bodyPr wrap="none">
+            <a:spAutoFit/>
+          </a:bodyPr>
+          <a:lstStyle/>
+          <a:p>
+            <a:pPr algn="r"/>
+            <a:r>
+              <a:rPr sz="900">
+                <a:solidFill>
+                  <a:srgbClr val="556A83"/>
+                </a:solidFill>
+                <a:latin typeface="Arial"/>
+              </a:rPr>
+              <a:t>30</a:t>
+            </a:r>
+          </a:p>
+        </p:txBody>
+      </p:sp>
+    </p:spTree>
+  </p:cSld>
+  <p:clrMapOvr>
+    <a:masterClrMapping/>
+  </p:clrMapOvr>
+</p:sld>
+</file>
+
+<file path=ppt/slides/slide31.xml><?xml version="1.0" encoding="utf-8"?>
+<p:sld xmlns:a="http://schemas.openxmlformats.org/drawingml/2006/main" xmlns:p="http://schemas.openxmlformats.org/presentationml/2006/main" xmlns:r="http://schemas.openxmlformats.org/officeDocument/2006/relationships">
+  <p:cSld>
+    <p:spTree>
+      <p:nvGrpSpPr>
+        <p:cNvPr id="1" name=""/>
+        <p:cNvGrpSpPr/>
+        <p:nvPr/>
+      </p:nvGrpSpPr>
+      <p:grpSpPr/>
+      <p:sp>
+        <p:nvSpPr>
+          <p:cNvPr id="2" name="TextBox 1"/>
+          <p:cNvSpPr txBox="1"/>
+          <p:nvPr/>
+        </p:nvSpPr>
+        <p:spPr>
+          <a:xfrm>
+            <a:off x="457200" y="164592"/>
+            <a:ext cx="9784080" cy="658368"/>
+          </a:xfrm>
+          <a:prstGeom prst="rect">
+            <a:avLst/>
+          </a:prstGeom>
+          <a:noFill/>
+        </p:spPr>
+        <p:txBody>
+          <a:bodyPr wrap="none">
+            <a:spAutoFit/>
+          </a:bodyPr>
+          <a:lstStyle/>
+          <a:p>
+            <a:r>
+              <a:rPr sz="2700" b="0">
+                <a:solidFill>
+                  <a:srgbClr val="152130"/>
+                </a:solidFill>
+                <a:latin typeface="Times New Roman"/>
+              </a:rPr>
+              <a:t>Sources</a:t>
+            </a:r>
+          </a:p>
+        </p:txBody>
+      </p:sp>
+      <p:pic>
+        <p:nvPicPr>
+          <p:cNvPr id="3" name="Picture 2" descr="athanase_logo_dark.png"/>
+          <p:cNvPicPr>
+            <a:picLocks noChangeAspect="1"/>
+          </p:cNvPicPr>
+          <p:nvPr/>
+        </p:nvPicPr>
+        <p:blipFill>
+          <a:blip r:embed="rId2"/>
+          <a:stretch>
+            <a:fillRect/>
+          </a:stretch>
+        </p:blipFill>
+        <p:spPr>
+          <a:xfrm>
+            <a:off x="10469880" y="292608"/>
+            <a:ext cx="1325880" cy="273903"/>
+          </a:xfrm>
+          <a:prstGeom prst="rect">
+            <a:avLst/>
+          </a:prstGeom>
+        </p:spPr>
+      </p:pic>
+      <p:sp>
+        <p:nvSpPr>
+          <p:cNvPr id="4" name="TextBox 3"/>
+          <p:cNvSpPr txBox="1"/>
+          <p:nvPr/>
+        </p:nvSpPr>
+        <p:spPr>
+          <a:xfrm>
+            <a:off x="457200" y="850392"/>
+            <a:ext cx="11274552" cy="18288"/>
+          </a:xfrm>
+          <a:prstGeom prst="rect">
+            <a:avLst/>
+          </a:prstGeom>
+          <a:solidFill>
+            <a:srgbClr val="E2E5E9"/>
+          </a:solidFill>
+          <a:ln>
+            <a:noFill/>
+          </a:ln>
+        </p:spPr>
+        <p:txBody>
+          <a:bodyPr wrap="none">
+            <a:spAutoFit/>
+          </a:bodyPr>
+          <a:lstStyle/>
+          <a:p/>
+        </p:txBody>
+      </p:sp>
+      <p:sp>
+        <p:nvSpPr>
+          <p:cNvPr id="5" name="TextBox 4"/>
+          <p:cNvSpPr txBox="1"/>
+          <p:nvPr/>
+        </p:nvSpPr>
+        <p:spPr>
+          <a:xfrm>
+            <a:off x="457200" y="1188720"/>
             <a:ext cx="5577840" cy="2606040"/>
           </a:xfrm>
           <a:prstGeom prst="rect">
@@ -19971,7 +20287,7 @@
                 </a:solidFill>
                 <a:latin typeface="Arial"/>
               </a:rPr>
-              <a:t>Regulatory &amp; legal</a:t>
+              <a:t>Primary &amp; audited</a:t>
             </a:r>
           </a:p>
           <a:p>
@@ -19987,7 +20303,7 @@
                 </a:solidFill>
                 <a:latin typeface="Arial"/>
               </a:rPr>
-              <a:t>NHTSA: FMVSS 121 final rule 74 FR 37122 (2009) + Regulatory Impact Analysis; DOT HS 811 367 (2010, NADS simulator); ESV 07-0242 (2007); heavy-vehicle AEB NPRM (2023)</a:t>
+              <a:t>TBK Co., Ltd. — Consolidated Financial Results FY ended 31 Mar 2026 (tanshin, 14 May 2026); securities-report risk factors (有価証券報告書 via kitaishihon/irbank)</a:t>
             </a:r>
           </a:p>
           <a:p>
@@ -20003,7 +20319,7 @@
                 </a:solidFill>
                 <a:latin typeface="Arial"/>
               </a:rPr>
-              <a:t>UNECE Regulation No. 13 (braking, Type-II fade tests)</a:t>
+              <a:t>Concentric AB — Annual Report 2023 (income statement, balance sheet, 5-year key figures)</a:t>
             </a:r>
           </a:p>
           <a:p>
@@ -20019,7 +20335,7 @@
                 </a:solidFill>
                 <a:latin typeface="Arial"/>
               </a:rPr>
-              <a:t>EU: Reg 2019/1242 &amp; 2024/1610 (HDV CO2); Reg 2024/1257 (Euro 7); Reg 2017/2400 Annex IX (VECTO auxiliaries) + JRC112015; EPA Phase 2 (40 CFR 1037.520 accessory credits) &amp; Phase 3 (2024)</a:t>
+              <a:t>User-provided datasets: TBK 10-year financials; Peers 10-year; Peers LTM (7 companies, consistent methodology); moat methodology v3.2</a:t>
             </a:r>
           </a:p>
           <a:p>
@@ -20035,7 +20351,7 @@
                 </a:solidFill>
                 <a:latin typeface="Arial"/>
               </a:rPr>
-              <a:t>EC merger decisions: M.8102 Valeo/FTE (2017, 90-100% concentration, Raicam remedy); Knorr-Bremse/Haldex Phase II (IP-17-2126, 2017)</a:t>
+              <a:t>Internal management documents: TBK Japan profitability by product/customer + share map + acquired projects (H1 FY2025); TBKK Thailand profit by items (Apr-Sep 2025); Concentric Group MR Pack (Dec 2021); Haldex analysis file (2019) and May-2014 MR pack</a:t>
             </a:r>
           </a:p>
           <a:p>
@@ -20051,20 +20367,36 @@
                 </a:solidFill>
                 <a:latin typeface="Arial"/>
               </a:rPr>
-              <a:t>Japan: MY2025 HDV fuel-economy standards (via ICCT/TransportPolicy); METI supplier-transition studies (2023, 2025); FMCSA Crash Cost Methodology (2025); AAA Foundation (2017)</a:t>
-            </a:r>
-          </a:p>
-        </p:txBody>
-      </p:sp>
-      <p:sp>
-        <p:nvSpPr>
-          <p:cNvPr id="8" name="TextBox 7"/>
+              <a:t>SEC filings: Cummins 10-K/10-Q/8-K (FY2024-25); WABCO &amp; Meritor merger 8-Ks</a:t>
+            </a:r>
+          </a:p>
+          <a:p>
+            <a:pPr>
+              <a:spcBef>
+                <a:spcPts val="400"/>
+              </a:spcBef>
+            </a:pPr>
+            <a:r>
+              <a:rPr sz="1000">
+                <a:solidFill>
+                  <a:srgbClr val="152130"/>
+                </a:solidFill>
+                <a:latin typeface="Arial"/>
+              </a:rPr>
+              <a:t>Company releases: Knorr-Bremse FY2023-25; ZF AR2024-25; SAF-Holland AR2024; Mahle AR2024-25; Haldex year-end 2021; Rheinmetall FY2025 + AEQUITA divestment (3 Jun 2026); Circle BidCo/A.P. Møller offer documents (2024); Brakes India-TBK alliance (Dec 2025)</a:t>
+            </a:r>
+          </a:p>
+        </p:txBody>
+      </p:sp>
+      <p:sp>
+        <p:nvSpPr>
+          <p:cNvPr id="6" name="TextBox 5"/>
           <p:cNvSpPr txBox="1"/>
           <p:nvPr/>
         </p:nvSpPr>
         <p:spPr>
           <a:xfrm>
-            <a:off x="6217920" y="3977639"/>
+            <a:off x="6217920" y="1188720"/>
             <a:ext cx="5532120" cy="2606040"/>
           </a:xfrm>
           <a:prstGeom prst="rect">
@@ -20092,6 +20424,248 @@
                 </a:solidFill>
                 <a:latin typeface="Arial"/>
               </a:rPr>
+              <a:t>Peer-reviewed &amp; academic</a:t>
+            </a:r>
+          </a:p>
+          <a:p>
+            <a:pPr>
+              <a:spcBef>
+                <a:spcPts val="400"/>
+              </a:spcBef>
+            </a:pPr>
+            <a:r>
+              <a:rPr sz="1000">
+                <a:solidFill>
+                  <a:srgbClr val="152130"/>
+                </a:solidFill>
+                <a:latin typeface="Arial"/>
+              </a:rPr>
+              <a:t>Göhring &amp; von Glasner, SAE 902206 (1990); Kajiyama et al. (Isuzu/TBK), SAE 902200 (1990); Day, Harding &amp; Newcomb, Proc IMechE (1984); Hoover et al., SAE 2005-01-3614; Subel &amp; Kienhöfer, Proc IMechE D (2020)</a:t>
+            </a:r>
+          </a:p>
+          <a:p>
+            <a:pPr>
+              <a:spcBef>
+                <a:spcPts val="400"/>
+              </a:spcBef>
+            </a:pPr>
+            <a:r>
+              <a:rPr sz="1000">
+                <a:solidFill>
+                  <a:srgbClr val="152130"/>
+                </a:solidFill>
+                <a:latin typeface="Arial"/>
+              </a:rPr>
+              <a:t>Ampadu, Alrejjal &amp; Ksaibati, JSDTL 8(1) 2023 — disc vs drum cost-effectiveness</a:t>
+            </a:r>
+          </a:p>
+          <a:p>
+            <a:pPr>
+              <a:spcBef>
+                <a:spcPts val="400"/>
+              </a:spcBef>
+            </a:pPr>
+            <a:r>
+              <a:rPr sz="1000">
+                <a:solidFill>
+                  <a:srgbClr val="152130"/>
+                </a:solidFill>
+                <a:latin typeface="Arial"/>
+              </a:rPr>
+              <a:t>Granitz et al., SN Applied Sciences (2021) — e-coolant pump, 13L HD diesel; Bitsis &amp; Miwa, SAE 2018-01-0980; Cummins SuperTruck 2, SAE 2019-01-0247; MIT S.M. thesis (2012) — HD parasitic losses</a:t>
+            </a:r>
+          </a:p>
+          <a:p>
+            <a:pPr>
+              <a:spcBef>
+                <a:spcPts val="400"/>
+              </a:spcBef>
+            </a:pPr>
+            <a:r>
+              <a:rPr sz="1000">
+                <a:solidFill>
+                  <a:srgbClr val="152130"/>
+                </a:solidFill>
+                <a:latin typeface="Arial"/>
+              </a:rPr>
+              <a:t>Zhang et al., J. Hazardous Materials 465 (2024); Hagino, Atmosphere 15:75 (2024, JARI); Environmental Pollution (2023) — regen braking &amp; brake wear</a:t>
+            </a:r>
+          </a:p>
+          <a:p>
+            <a:pPr>
+              <a:spcBef>
+                <a:spcPts val="400"/>
+              </a:spcBef>
+            </a:pPr>
+            <a:r>
+              <a:rPr sz="1000">
+                <a:solidFill>
+                  <a:srgbClr val="152130"/>
+                </a:solidFill>
+                <a:latin typeface="Arial"/>
+              </a:rPr>
+              <a:t>Energies 16:4024 (2023), 19:1748 (2026); Sustainability 15:3132 (2023); Energies 16:168 (2023) — BEV/FCEV truck &amp; bus thermal management</a:t>
+            </a:r>
+          </a:p>
+        </p:txBody>
+      </p:sp>
+      <p:sp>
+        <p:nvSpPr>
+          <p:cNvPr id="7" name="TextBox 6"/>
+          <p:cNvSpPr txBox="1"/>
+          <p:nvPr/>
+        </p:nvSpPr>
+        <p:spPr>
+          <a:xfrm>
+            <a:off x="457200" y="3977639"/>
+            <a:ext cx="5577840" cy="2606040"/>
+          </a:xfrm>
+          <a:prstGeom prst="rect">
+            <a:avLst/>
+          </a:prstGeom>
+          <a:solidFill>
+            <a:srgbClr val="F6F7F9"/>
+          </a:solidFill>
+          <a:ln w="15875">
+            <a:solidFill>
+              <a:srgbClr val="152130"/>
+            </a:solidFill>
+          </a:ln>
+        </p:spPr>
+        <p:txBody>
+          <a:bodyPr wrap="square" lIns="137160" rIns="137160" tIns="109728">
+            <a:spAutoFit/>
+          </a:bodyPr>
+          <a:lstStyle/>
+          <a:p>
+            <a:r>
+              <a:rPr sz="1450" b="1">
+                <a:solidFill>
+                  <a:srgbClr val="152130"/>
+                </a:solidFill>
+                <a:latin typeface="Arial"/>
+              </a:rPr>
+              <a:t>Regulatory &amp; legal</a:t>
+            </a:r>
+          </a:p>
+          <a:p>
+            <a:pPr>
+              <a:spcBef>
+                <a:spcPts val="400"/>
+              </a:spcBef>
+            </a:pPr>
+            <a:r>
+              <a:rPr sz="1000">
+                <a:solidFill>
+                  <a:srgbClr val="152130"/>
+                </a:solidFill>
+                <a:latin typeface="Arial"/>
+              </a:rPr>
+              <a:t>NHTSA: FMVSS 121 final rule 74 FR 37122 (2009) + Regulatory Impact Analysis; DOT HS 811 367 (2010, NADS simulator); ESV 07-0242 (2007); heavy-vehicle AEB NPRM (2023)</a:t>
+            </a:r>
+          </a:p>
+          <a:p>
+            <a:pPr>
+              <a:spcBef>
+                <a:spcPts val="400"/>
+              </a:spcBef>
+            </a:pPr>
+            <a:r>
+              <a:rPr sz="1000">
+                <a:solidFill>
+                  <a:srgbClr val="152130"/>
+                </a:solidFill>
+                <a:latin typeface="Arial"/>
+              </a:rPr>
+              <a:t>UNECE Regulation No. 13 (braking, Type-II fade tests)</a:t>
+            </a:r>
+          </a:p>
+          <a:p>
+            <a:pPr>
+              <a:spcBef>
+                <a:spcPts val="400"/>
+              </a:spcBef>
+            </a:pPr>
+            <a:r>
+              <a:rPr sz="1000">
+                <a:solidFill>
+                  <a:srgbClr val="152130"/>
+                </a:solidFill>
+                <a:latin typeface="Arial"/>
+              </a:rPr>
+              <a:t>EU: Reg 2019/1242 &amp; 2024/1610 (HDV CO2); Reg 2024/1257 (Euro 7); Reg 2017/2400 Annex IX (VECTO auxiliaries) + JRC112015; EPA Phase 2 (40 CFR 1037.520 accessory credits) &amp; Phase 3 (2024)</a:t>
+            </a:r>
+          </a:p>
+          <a:p>
+            <a:pPr>
+              <a:spcBef>
+                <a:spcPts val="400"/>
+              </a:spcBef>
+            </a:pPr>
+            <a:r>
+              <a:rPr sz="1000">
+                <a:solidFill>
+                  <a:srgbClr val="152130"/>
+                </a:solidFill>
+                <a:latin typeface="Arial"/>
+              </a:rPr>
+              <a:t>EC merger decisions: M.8102 Valeo/FTE (2017, 90-100% concentration, Raicam remedy); Knorr-Bremse/Haldex Phase II (IP-17-2126, 2017)</a:t>
+            </a:r>
+          </a:p>
+          <a:p>
+            <a:pPr>
+              <a:spcBef>
+                <a:spcPts val="400"/>
+              </a:spcBef>
+            </a:pPr>
+            <a:r>
+              <a:rPr sz="1000">
+                <a:solidFill>
+                  <a:srgbClr val="152130"/>
+                </a:solidFill>
+                <a:latin typeface="Arial"/>
+              </a:rPr>
+              <a:t>Japan: MY2025 HDV fuel-economy standards (via ICCT/TransportPolicy); METI supplier-transition studies (2023, 2025); FMCSA Crash Cost Methodology (2025); AAA Foundation (2017)</a:t>
+            </a:r>
+          </a:p>
+        </p:txBody>
+      </p:sp>
+      <p:sp>
+        <p:nvSpPr>
+          <p:cNvPr id="8" name="TextBox 7"/>
+          <p:cNvSpPr txBox="1"/>
+          <p:nvPr/>
+        </p:nvSpPr>
+        <p:spPr>
+          <a:xfrm>
+            <a:off x="6217920" y="3977639"/>
+            <a:ext cx="5532120" cy="2606040"/>
+          </a:xfrm>
+          <a:prstGeom prst="rect">
+            <a:avLst/>
+          </a:prstGeom>
+          <a:solidFill>
+            <a:srgbClr val="F6F7F9"/>
+          </a:solidFill>
+          <a:ln w="15875">
+            <a:solidFill>
+              <a:srgbClr val="152130"/>
+            </a:solidFill>
+          </a:ln>
+        </p:spPr>
+        <p:txBody>
+          <a:bodyPr wrap="square" lIns="137160" rIns="137160" tIns="109728">
+            <a:spAutoFit/>
+          </a:bodyPr>
+          <a:lstStyle/>
+          <a:p>
+            <a:r>
+              <a:rPr sz="1450" b="1">
+                <a:solidFill>
+                  <a:srgbClr val="152130"/>
+                </a:solidFill>
+                <a:latin typeface="Arial"/>
+              </a:rPr>
               <a:t>Industry &amp; financial data (verified, labeled where single-source)</a:t>
             </a:r>
           </a:p>
@@ -20191,7 +20765,7 @@
                 </a:solidFill>
                 <a:latin typeface="Arial"/>
               </a:rPr>
-              <a:t>30</a:t>
+              <a:t>31</a:t>
             </a:r>
           </a:p>
         </p:txBody>

--- a/TBK_rd_gap_slides.pptx
+++ b/TBK_rd_gap_slides.pptx
@@ -36,6 +36,7 @@
     <p:sldId id="284" r:id="rId35"/>
     <p:sldId id="285" r:id="rId36"/>
     <p:sldId id="286" r:id="rId37"/>
+    <p:sldId id="287" r:id="rId38"/>
   </p:sldIdLst>
   <p:sldSz cx="12191695" cy="6858000" type="screen4x3"/>
   <p:notesSz cx="6858000" cy="9144000"/>
@@ -13788,6 +13789,38 @@
               <a:t>31   Sources</a:t>
             </a:r>
           </a:p>
+          <a:p>
+            <a:pPr>
+              <a:spcBef>
+                <a:spcPts val="1000"/>
+              </a:spcBef>
+            </a:pPr>
+            <a:r>
+              <a:rPr sz="1300" b="1">
+                <a:solidFill>
+                  <a:srgbClr val="152130"/>
+                </a:solidFill>
+                <a:latin typeface="Arial"/>
+              </a:rPr>
+              <a:t>Appendix</a:t>
+            </a:r>
+          </a:p>
+          <a:p>
+            <a:pPr>
+              <a:spcBef>
+                <a:spcPts val="300"/>
+              </a:spcBef>
+            </a:pPr>
+            <a:r>
+              <a:rPr sz="1150" b="0">
+                <a:solidFill>
+                  <a:srgbClr val="556A83"/>
+                </a:solidFill>
+                <a:latin typeface="Arial"/>
+              </a:rPr>
+              <a:t>32   TBK 10-year income statement</a:t>
+            </a:r>
+          </a:p>
         </p:txBody>
       </p:sp>
       <p:sp>
@@ -20766,6 +20799,3821 @@
                 <a:latin typeface="Arial"/>
               </a:rPr>
               <a:t>31</a:t>
+            </a:r>
+          </a:p>
+        </p:txBody>
+      </p:sp>
+    </p:spTree>
+  </p:cSld>
+  <p:clrMapOvr>
+    <a:masterClrMapping/>
+  </p:clrMapOvr>
+</p:sld>
+</file>
+
+<file path=ppt/slides/slide32.xml><?xml version="1.0" encoding="utf-8"?>
+<p:sld xmlns:a="http://schemas.openxmlformats.org/drawingml/2006/main" xmlns:p="http://schemas.openxmlformats.org/presentationml/2006/main" xmlns:r="http://schemas.openxmlformats.org/officeDocument/2006/relationships">
+  <p:cSld>
+    <p:spTree>
+      <p:nvGrpSpPr>
+        <p:cNvPr id="1" name=""/>
+        <p:cNvGrpSpPr/>
+        <p:nvPr/>
+      </p:nvGrpSpPr>
+      <p:grpSpPr/>
+      <p:sp>
+        <p:nvSpPr>
+          <p:cNvPr id="2" name="TextBox 1"/>
+          <p:cNvSpPr txBox="1"/>
+          <p:nvPr/>
+        </p:nvSpPr>
+        <p:spPr>
+          <a:xfrm>
+            <a:off x="457200" y="164592"/>
+            <a:ext cx="9784080" cy="658368"/>
+          </a:xfrm>
+          <a:prstGeom prst="rect">
+            <a:avLst/>
+          </a:prstGeom>
+          <a:noFill/>
+        </p:spPr>
+        <p:txBody>
+          <a:bodyPr wrap="none">
+            <a:spAutoFit/>
+          </a:bodyPr>
+          <a:lstStyle/>
+          <a:p>
+            <a:r>
+              <a:rPr sz="2700" b="0">
+                <a:solidFill>
+                  <a:srgbClr val="152130"/>
+                </a:solidFill>
+                <a:latin typeface="Times New Roman"/>
+              </a:rPr>
+              <a:t>Appendix — TBK 10-year income statement</a:t>
+            </a:r>
+          </a:p>
+        </p:txBody>
+      </p:sp>
+      <p:pic>
+        <p:nvPicPr>
+          <p:cNvPr id="3" name="Picture 2" descr="athanase_logo_dark.png"/>
+          <p:cNvPicPr>
+            <a:picLocks noChangeAspect="1"/>
+          </p:cNvPicPr>
+          <p:nvPr/>
+        </p:nvPicPr>
+        <p:blipFill>
+          <a:blip r:embed="rId2"/>
+          <a:stretch>
+            <a:fillRect/>
+          </a:stretch>
+        </p:blipFill>
+        <p:spPr>
+          <a:xfrm>
+            <a:off x="10469880" y="292608"/>
+            <a:ext cx="1325880" cy="273903"/>
+          </a:xfrm>
+          <a:prstGeom prst="rect">
+            <a:avLst/>
+          </a:prstGeom>
+        </p:spPr>
+      </p:pic>
+      <p:sp>
+        <p:nvSpPr>
+          <p:cNvPr id="4" name="TextBox 3"/>
+          <p:cNvSpPr txBox="1"/>
+          <p:nvPr/>
+        </p:nvSpPr>
+        <p:spPr>
+          <a:xfrm>
+            <a:off x="457200" y="850392"/>
+            <a:ext cx="11274552" cy="18288"/>
+          </a:xfrm>
+          <a:prstGeom prst="rect">
+            <a:avLst/>
+          </a:prstGeom>
+          <a:solidFill>
+            <a:srgbClr val="E2E5E9"/>
+          </a:solidFill>
+          <a:ln>
+            <a:noFill/>
+          </a:ln>
+        </p:spPr>
+        <p:txBody>
+          <a:bodyPr wrap="none">
+            <a:spAutoFit/>
+          </a:bodyPr>
+          <a:lstStyle/>
+          <a:p/>
+        </p:txBody>
+      </p:sp>
+      <p:sp>
+        <p:nvSpPr>
+          <p:cNvPr id="5" name="TextBox 4"/>
+          <p:cNvSpPr txBox="1"/>
+          <p:nvPr/>
+        </p:nvSpPr>
+        <p:spPr>
+          <a:xfrm>
+            <a:off x="457200" y="923544"/>
+            <a:ext cx="11247120" cy="457200"/>
+          </a:xfrm>
+          <a:prstGeom prst="rect">
+            <a:avLst/>
+          </a:prstGeom>
+          <a:noFill/>
+        </p:spPr>
+        <p:txBody>
+          <a:bodyPr wrap="square">
+            <a:spAutoFit/>
+          </a:bodyPr>
+          <a:lstStyle/>
+          <a:p>
+            <a:pPr algn="l"/>
+            <a:r>
+              <a:rPr sz="1050" b="0">
+                <a:solidFill>
+                  <a:srgbClr val="556A83"/>
+                </a:solidFill>
+                <a:latin typeface="Arial"/>
+              </a:rPr>
+              <a:t>Fiscal years ending 31 March. Figures in millions (source currency, USD-converted dataset). Margins and EV multiples derived</a:t>
+            </a:r>
+          </a:p>
+        </p:txBody>
+      </p:sp>
+      <p:graphicFrame>
+        <p:nvGraphicFramePr>
+          <p:cNvPr id="6" name="Table 5"/>
+          <p:cNvGraphicFramePr>
+            <a:graphicFrameLocks noGrp="1"/>
+          </p:cNvGraphicFramePr>
+          <p:nvPr/>
+        </p:nvGraphicFramePr>
+        <p:xfrm>
+          <a:off x="365760" y="1371600"/>
+          <a:ext cx="11430000" cy="4352544"/>
+        </p:xfrm>
+        <a:graphic>
+          <a:graphicData uri="http://schemas.openxmlformats.org/drawingml/2006/table">
+            <a:tbl>
+              <a:tblPr>
+                <a:tableStyleId>{5C22544A-7EE6-4342-B048-85BDC9FD1C3A}</a:tableStyleId>
+              </a:tblPr>
+              <a:tblGrid>
+                <a:gridCol w="2377440"/>
+                <a:gridCol w="905256"/>
+                <a:gridCol w="905256"/>
+                <a:gridCol w="905256"/>
+                <a:gridCol w="905256"/>
+                <a:gridCol w="905256"/>
+                <a:gridCol w="905256"/>
+                <a:gridCol w="905256"/>
+                <a:gridCol w="905256"/>
+                <a:gridCol w="905256"/>
+                <a:gridCol w="905256"/>
+              </a:tblGrid>
+              <a:tr h="310896">
+                <a:tc>
+                  <a:txBody>
+                    <a:bodyPr wrap="none" lIns="36000" rIns="36000" tIns="18000" bIns="18000"/>
+                    <a:lstStyle/>
+                    <a:p>
+                      <a:pPr algn="l"/>
+                      <a:r>
+                        <a:rPr sz="900" b="1">
+                          <a:solidFill>
+                            <a:srgbClr val="FFFFFF"/>
+                          </a:solidFill>
+                          <a:latin typeface="Arial"/>
+                        </a:rPr>
+                        <a:t>Line item</a:t>
+                      </a:r>
+                    </a:p>
+                  </a:txBody>
+                  <a:tcPr>
+                    <a:solidFill>
+                      <a:srgbClr val="152130"/>
+                    </a:solidFill>
+                  </a:tcPr>
+                </a:tc>
+                <a:tc>
+                  <a:txBody>
+                    <a:bodyPr wrap="none" lIns="36000" rIns="36000" tIns="18000" bIns="18000"/>
+                    <a:lstStyle/>
+                    <a:p>
+                      <a:pPr algn="r"/>
+                      <a:r>
+                        <a:rPr sz="900" b="1">
+                          <a:solidFill>
+                            <a:srgbClr val="FFFFFF"/>
+                          </a:solidFill>
+                          <a:latin typeface="Arial"/>
+                        </a:rPr>
+                        <a:t>FY2016</a:t>
+                      </a:r>
+                    </a:p>
+                  </a:txBody>
+                  <a:tcPr>
+                    <a:solidFill>
+                      <a:srgbClr val="152130"/>
+                    </a:solidFill>
+                  </a:tcPr>
+                </a:tc>
+                <a:tc>
+                  <a:txBody>
+                    <a:bodyPr wrap="none" lIns="36000" rIns="36000" tIns="18000" bIns="18000"/>
+                    <a:lstStyle/>
+                    <a:p>
+                      <a:pPr algn="r"/>
+                      <a:r>
+                        <a:rPr sz="900" b="1">
+                          <a:solidFill>
+                            <a:srgbClr val="FFFFFF"/>
+                          </a:solidFill>
+                          <a:latin typeface="Arial"/>
+                        </a:rPr>
+                        <a:t>FY2017</a:t>
+                      </a:r>
+                    </a:p>
+                  </a:txBody>
+                  <a:tcPr>
+                    <a:solidFill>
+                      <a:srgbClr val="152130"/>
+                    </a:solidFill>
+                  </a:tcPr>
+                </a:tc>
+                <a:tc>
+                  <a:txBody>
+                    <a:bodyPr wrap="none" lIns="36000" rIns="36000" tIns="18000" bIns="18000"/>
+                    <a:lstStyle/>
+                    <a:p>
+                      <a:pPr algn="r"/>
+                      <a:r>
+                        <a:rPr sz="900" b="1">
+                          <a:solidFill>
+                            <a:srgbClr val="FFFFFF"/>
+                          </a:solidFill>
+                          <a:latin typeface="Arial"/>
+                        </a:rPr>
+                        <a:t>FY2018</a:t>
+                      </a:r>
+                    </a:p>
+                  </a:txBody>
+                  <a:tcPr>
+                    <a:solidFill>
+                      <a:srgbClr val="152130"/>
+                    </a:solidFill>
+                  </a:tcPr>
+                </a:tc>
+                <a:tc>
+                  <a:txBody>
+                    <a:bodyPr wrap="none" lIns="36000" rIns="36000" tIns="18000" bIns="18000"/>
+                    <a:lstStyle/>
+                    <a:p>
+                      <a:pPr algn="r"/>
+                      <a:r>
+                        <a:rPr sz="900" b="1">
+                          <a:solidFill>
+                            <a:srgbClr val="FFFFFF"/>
+                          </a:solidFill>
+                          <a:latin typeface="Arial"/>
+                        </a:rPr>
+                        <a:t>FY2019</a:t>
+                      </a:r>
+                    </a:p>
+                  </a:txBody>
+                  <a:tcPr>
+                    <a:solidFill>
+                      <a:srgbClr val="152130"/>
+                    </a:solidFill>
+                  </a:tcPr>
+                </a:tc>
+                <a:tc>
+                  <a:txBody>
+                    <a:bodyPr wrap="none" lIns="36000" rIns="36000" tIns="18000" bIns="18000"/>
+                    <a:lstStyle/>
+                    <a:p>
+                      <a:pPr algn="r"/>
+                      <a:r>
+                        <a:rPr sz="900" b="1">
+                          <a:solidFill>
+                            <a:srgbClr val="FFFFFF"/>
+                          </a:solidFill>
+                          <a:latin typeface="Arial"/>
+                        </a:rPr>
+                        <a:t>FY2020</a:t>
+                      </a:r>
+                    </a:p>
+                  </a:txBody>
+                  <a:tcPr>
+                    <a:solidFill>
+                      <a:srgbClr val="152130"/>
+                    </a:solidFill>
+                  </a:tcPr>
+                </a:tc>
+                <a:tc>
+                  <a:txBody>
+                    <a:bodyPr wrap="none" lIns="36000" rIns="36000" tIns="18000" bIns="18000"/>
+                    <a:lstStyle/>
+                    <a:p>
+                      <a:pPr algn="r"/>
+                      <a:r>
+                        <a:rPr sz="900" b="1">
+                          <a:solidFill>
+                            <a:srgbClr val="FFFFFF"/>
+                          </a:solidFill>
+                          <a:latin typeface="Arial"/>
+                        </a:rPr>
+                        <a:t>FY2021</a:t>
+                      </a:r>
+                    </a:p>
+                  </a:txBody>
+                  <a:tcPr>
+                    <a:solidFill>
+                      <a:srgbClr val="152130"/>
+                    </a:solidFill>
+                  </a:tcPr>
+                </a:tc>
+                <a:tc>
+                  <a:txBody>
+                    <a:bodyPr wrap="none" lIns="36000" rIns="36000" tIns="18000" bIns="18000"/>
+                    <a:lstStyle/>
+                    <a:p>
+                      <a:pPr algn="r"/>
+                      <a:r>
+                        <a:rPr sz="900" b="1">
+                          <a:solidFill>
+                            <a:srgbClr val="FFFFFF"/>
+                          </a:solidFill>
+                          <a:latin typeface="Arial"/>
+                        </a:rPr>
+                        <a:t>FY2022</a:t>
+                      </a:r>
+                    </a:p>
+                  </a:txBody>
+                  <a:tcPr>
+                    <a:solidFill>
+                      <a:srgbClr val="152130"/>
+                    </a:solidFill>
+                  </a:tcPr>
+                </a:tc>
+                <a:tc>
+                  <a:txBody>
+                    <a:bodyPr wrap="none" lIns="36000" rIns="36000" tIns="18000" bIns="18000"/>
+                    <a:lstStyle/>
+                    <a:p>
+                      <a:pPr algn="r"/>
+                      <a:r>
+                        <a:rPr sz="900" b="1">
+                          <a:solidFill>
+                            <a:srgbClr val="FFFFFF"/>
+                          </a:solidFill>
+                          <a:latin typeface="Arial"/>
+                        </a:rPr>
+                        <a:t>FY2023</a:t>
+                      </a:r>
+                    </a:p>
+                  </a:txBody>
+                  <a:tcPr>
+                    <a:solidFill>
+                      <a:srgbClr val="152130"/>
+                    </a:solidFill>
+                  </a:tcPr>
+                </a:tc>
+                <a:tc>
+                  <a:txBody>
+                    <a:bodyPr wrap="none" lIns="36000" rIns="36000" tIns="18000" bIns="18000"/>
+                    <a:lstStyle/>
+                    <a:p>
+                      <a:pPr algn="r"/>
+                      <a:r>
+                        <a:rPr sz="900" b="1">
+                          <a:solidFill>
+                            <a:srgbClr val="FFFFFF"/>
+                          </a:solidFill>
+                          <a:latin typeface="Arial"/>
+                        </a:rPr>
+                        <a:t>FY2024</a:t>
+                      </a:r>
+                    </a:p>
+                  </a:txBody>
+                  <a:tcPr>
+                    <a:solidFill>
+                      <a:srgbClr val="152130"/>
+                    </a:solidFill>
+                  </a:tcPr>
+                </a:tc>
+                <a:tc>
+                  <a:txBody>
+                    <a:bodyPr wrap="none" lIns="36000" rIns="36000" tIns="18000" bIns="18000"/>
+                    <a:lstStyle/>
+                    <a:p>
+                      <a:pPr algn="r"/>
+                      <a:r>
+                        <a:rPr sz="900" b="1">
+                          <a:solidFill>
+                            <a:srgbClr val="FFFFFF"/>
+                          </a:solidFill>
+                          <a:latin typeface="Arial"/>
+                        </a:rPr>
+                        <a:t>FY2025</a:t>
+                      </a:r>
+                    </a:p>
+                  </a:txBody>
+                  <a:tcPr>
+                    <a:solidFill>
+                      <a:srgbClr val="152130"/>
+                    </a:solidFill>
+                  </a:tcPr>
+                </a:tc>
+              </a:tr>
+              <a:tr h="310896">
+                <a:tc>
+                  <a:txBody>
+                    <a:bodyPr wrap="none" lIns="36000" rIns="36000" tIns="9000" bIns="9000"/>
+                    <a:lstStyle/>
+                    <a:p>
+                      <a:pPr algn="l"/>
+                      <a:r>
+                        <a:rPr sz="850" b="1">
+                          <a:solidFill>
+                            <a:srgbClr val="152130"/>
+                          </a:solidFill>
+                          <a:latin typeface="Arial"/>
+                        </a:rPr>
+                        <a:t>Sales</a:t>
+                      </a:r>
+                    </a:p>
+                  </a:txBody>
+                  <a:tcPr>
+                    <a:solidFill>
+                      <a:srgbClr val="FFFFFF"/>
+                    </a:solidFill>
+                  </a:tcPr>
+                </a:tc>
+                <a:tc>
+                  <a:txBody>
+                    <a:bodyPr wrap="none" lIns="36000" rIns="36000" tIns="9000" bIns="9000"/>
+                    <a:lstStyle/>
+                    <a:p>
+                      <a:pPr algn="r"/>
+                      <a:r>
+                        <a:rPr sz="850" b="1">
+                          <a:solidFill>
+                            <a:srgbClr val="152130"/>
+                          </a:solidFill>
+                          <a:latin typeface="Arial"/>
+                        </a:rPr>
+                        <a:t>392.5</a:t>
+                      </a:r>
+                    </a:p>
+                  </a:txBody>
+                  <a:tcPr>
+                    <a:solidFill>
+                      <a:srgbClr val="FFFFFF"/>
+                    </a:solidFill>
+                  </a:tcPr>
+                </a:tc>
+                <a:tc>
+                  <a:txBody>
+                    <a:bodyPr wrap="none" lIns="36000" rIns="36000" tIns="9000" bIns="9000"/>
+                    <a:lstStyle/>
+                    <a:p>
+                      <a:pPr algn="r"/>
+                      <a:r>
+                        <a:rPr sz="850" b="1">
+                          <a:solidFill>
+                            <a:srgbClr val="152130"/>
+                          </a:solidFill>
+                          <a:latin typeface="Arial"/>
+                        </a:rPr>
+                        <a:t>431.5</a:t>
+                      </a:r>
+                    </a:p>
+                  </a:txBody>
+                  <a:tcPr>
+                    <a:solidFill>
+                      <a:srgbClr val="FFFFFF"/>
+                    </a:solidFill>
+                  </a:tcPr>
+                </a:tc>
+                <a:tc>
+                  <a:txBody>
+                    <a:bodyPr wrap="none" lIns="36000" rIns="36000" tIns="9000" bIns="9000"/>
+                    <a:lstStyle/>
+                    <a:p>
+                      <a:pPr algn="r"/>
+                      <a:r>
+                        <a:rPr sz="850" b="1">
+                          <a:solidFill>
+                            <a:srgbClr val="152130"/>
+                          </a:solidFill>
+                          <a:latin typeface="Arial"/>
+                        </a:rPr>
+                        <a:t>463.7</a:t>
+                      </a:r>
+                    </a:p>
+                  </a:txBody>
+                  <a:tcPr>
+                    <a:solidFill>
+                      <a:srgbClr val="FFFFFF"/>
+                    </a:solidFill>
+                  </a:tcPr>
+                </a:tc>
+                <a:tc>
+                  <a:txBody>
+                    <a:bodyPr wrap="none" lIns="36000" rIns="36000" tIns="9000" bIns="9000"/>
+                    <a:lstStyle/>
+                    <a:p>
+                      <a:pPr algn="r"/>
+                      <a:r>
+                        <a:rPr sz="850" b="1">
+                          <a:solidFill>
+                            <a:srgbClr val="152130"/>
+                          </a:solidFill>
+                          <a:latin typeface="Arial"/>
+                        </a:rPr>
+                        <a:t>483.9</a:t>
+                      </a:r>
+                    </a:p>
+                  </a:txBody>
+                  <a:tcPr>
+                    <a:solidFill>
+                      <a:srgbClr val="FFFFFF"/>
+                    </a:solidFill>
+                  </a:tcPr>
+                </a:tc>
+                <a:tc>
+                  <a:txBody>
+                    <a:bodyPr wrap="none" lIns="36000" rIns="36000" tIns="9000" bIns="9000"/>
+                    <a:lstStyle/>
+                    <a:p>
+                      <a:pPr algn="r"/>
+                      <a:r>
+                        <a:rPr sz="850" b="1">
+                          <a:solidFill>
+                            <a:srgbClr val="152130"/>
+                          </a:solidFill>
+                          <a:latin typeface="Arial"/>
+                        </a:rPr>
+                        <a:t>472.3</a:t>
+                      </a:r>
+                    </a:p>
+                  </a:txBody>
+                  <a:tcPr>
+                    <a:solidFill>
+                      <a:srgbClr val="FFFFFF"/>
+                    </a:solidFill>
+                  </a:tcPr>
+                </a:tc>
+                <a:tc>
+                  <a:txBody>
+                    <a:bodyPr wrap="none" lIns="36000" rIns="36000" tIns="9000" bIns="9000"/>
+                    <a:lstStyle/>
+                    <a:p>
+                      <a:pPr algn="r"/>
+                      <a:r>
+                        <a:rPr sz="850" b="1">
+                          <a:solidFill>
+                            <a:srgbClr val="152130"/>
+                          </a:solidFill>
+                          <a:latin typeface="Arial"/>
+                        </a:rPr>
+                        <a:t>414.7</a:t>
+                      </a:r>
+                    </a:p>
+                  </a:txBody>
+                  <a:tcPr>
+                    <a:solidFill>
+                      <a:srgbClr val="FFFFFF"/>
+                    </a:solidFill>
+                  </a:tcPr>
+                </a:tc>
+                <a:tc>
+                  <a:txBody>
+                    <a:bodyPr wrap="none" lIns="36000" rIns="36000" tIns="9000" bIns="9000"/>
+                    <a:lstStyle/>
+                    <a:p>
+                      <a:pPr algn="r"/>
+                      <a:r>
+                        <a:rPr sz="850" b="1">
+                          <a:solidFill>
+                            <a:srgbClr val="152130"/>
+                          </a:solidFill>
+                          <a:latin typeface="Arial"/>
+                        </a:rPr>
+                        <a:t>456.1</a:t>
+                      </a:r>
+                    </a:p>
+                  </a:txBody>
+                  <a:tcPr>
+                    <a:solidFill>
+                      <a:srgbClr val="FFFFFF"/>
+                    </a:solidFill>
+                  </a:tcPr>
+                </a:tc>
+                <a:tc>
+                  <a:txBody>
+                    <a:bodyPr wrap="none" lIns="36000" rIns="36000" tIns="9000" bIns="9000"/>
+                    <a:lstStyle/>
+                    <a:p>
+                      <a:pPr algn="r"/>
+                      <a:r>
+                        <a:rPr sz="850" b="1">
+                          <a:solidFill>
+                            <a:srgbClr val="152130"/>
+                          </a:solidFill>
+                          <a:latin typeface="Arial"/>
+                        </a:rPr>
+                        <a:t>396.1</a:t>
+                      </a:r>
+                    </a:p>
+                  </a:txBody>
+                  <a:tcPr>
+                    <a:solidFill>
+                      <a:srgbClr val="FFFFFF"/>
+                    </a:solidFill>
+                  </a:tcPr>
+                </a:tc>
+                <a:tc>
+                  <a:txBody>
+                    <a:bodyPr wrap="none" lIns="36000" rIns="36000" tIns="9000" bIns="9000"/>
+                    <a:lstStyle/>
+                    <a:p>
+                      <a:pPr algn="r"/>
+                      <a:r>
+                        <a:rPr sz="850" b="1">
+                          <a:solidFill>
+                            <a:srgbClr val="152130"/>
+                          </a:solidFill>
+                          <a:latin typeface="Arial"/>
+                        </a:rPr>
+                        <a:t>392.5</a:t>
+                      </a:r>
+                    </a:p>
+                  </a:txBody>
+                  <a:tcPr>
+                    <a:solidFill>
+                      <a:srgbClr val="FFFFFF"/>
+                    </a:solidFill>
+                  </a:tcPr>
+                </a:tc>
+                <a:tc>
+                  <a:txBody>
+                    <a:bodyPr wrap="none" lIns="36000" rIns="36000" tIns="9000" bIns="9000"/>
+                    <a:lstStyle/>
+                    <a:p>
+                      <a:pPr algn="r"/>
+                      <a:r>
+                        <a:rPr sz="850" b="1">
+                          <a:solidFill>
+                            <a:srgbClr val="152130"/>
+                          </a:solidFill>
+                          <a:latin typeface="Arial"/>
+                        </a:rPr>
+                        <a:t>357.3</a:t>
+                      </a:r>
+                    </a:p>
+                  </a:txBody>
+                  <a:tcPr>
+                    <a:solidFill>
+                      <a:srgbClr val="FFFFFF"/>
+                    </a:solidFill>
+                  </a:tcPr>
+                </a:tc>
+              </a:tr>
+              <a:tr h="310896">
+                <a:tc>
+                  <a:txBody>
+                    <a:bodyPr wrap="none" lIns="36000" rIns="36000" tIns="9000" bIns="9000"/>
+                    <a:lstStyle/>
+                    <a:p>
+                      <a:pPr algn="l"/>
+                      <a:r>
+                        <a:rPr sz="850" b="0">
+                          <a:solidFill>
+                            <a:srgbClr val="152130"/>
+                          </a:solidFill>
+                          <a:latin typeface="Arial"/>
+                        </a:rPr>
+                        <a:t>Gross profit</a:t>
+                      </a:r>
+                    </a:p>
+                  </a:txBody>
+                  <a:tcPr>
+                    <a:solidFill>
+                      <a:srgbClr val="F6F7F9"/>
+                    </a:solidFill>
+                  </a:tcPr>
+                </a:tc>
+                <a:tc>
+                  <a:txBody>
+                    <a:bodyPr wrap="none" lIns="36000" rIns="36000" tIns="9000" bIns="9000"/>
+                    <a:lstStyle/>
+                    <a:p>
+                      <a:pPr algn="r"/>
+                      <a:r>
+                        <a:rPr sz="850" b="0">
+                          <a:solidFill>
+                            <a:srgbClr val="556A83"/>
+                          </a:solidFill>
+                          <a:latin typeface="Arial"/>
+                        </a:rPr>
+                        <a:t>44.7</a:t>
+                      </a:r>
+                    </a:p>
+                  </a:txBody>
+                  <a:tcPr>
+                    <a:solidFill>
+                      <a:srgbClr val="F6F7F9"/>
+                    </a:solidFill>
+                  </a:tcPr>
+                </a:tc>
+                <a:tc>
+                  <a:txBody>
+                    <a:bodyPr wrap="none" lIns="36000" rIns="36000" tIns="9000" bIns="9000"/>
+                    <a:lstStyle/>
+                    <a:p>
+                      <a:pPr algn="r"/>
+                      <a:r>
+                        <a:rPr sz="850" b="0">
+                          <a:solidFill>
+                            <a:srgbClr val="556A83"/>
+                          </a:solidFill>
+                          <a:latin typeface="Arial"/>
+                        </a:rPr>
+                        <a:t>55.4</a:t>
+                      </a:r>
+                    </a:p>
+                  </a:txBody>
+                  <a:tcPr>
+                    <a:solidFill>
+                      <a:srgbClr val="F6F7F9"/>
+                    </a:solidFill>
+                  </a:tcPr>
+                </a:tc>
+                <a:tc>
+                  <a:txBody>
+                    <a:bodyPr wrap="none" lIns="36000" rIns="36000" tIns="9000" bIns="9000"/>
+                    <a:lstStyle/>
+                    <a:p>
+                      <a:pPr algn="r"/>
+                      <a:r>
+                        <a:rPr sz="850" b="0">
+                          <a:solidFill>
+                            <a:srgbClr val="556A83"/>
+                          </a:solidFill>
+                          <a:latin typeface="Arial"/>
+                        </a:rPr>
+                        <a:t>54.7</a:t>
+                      </a:r>
+                    </a:p>
+                  </a:txBody>
+                  <a:tcPr>
+                    <a:solidFill>
+                      <a:srgbClr val="F6F7F9"/>
+                    </a:solidFill>
+                  </a:tcPr>
+                </a:tc>
+                <a:tc>
+                  <a:txBody>
+                    <a:bodyPr wrap="none" lIns="36000" rIns="36000" tIns="9000" bIns="9000"/>
+                    <a:lstStyle/>
+                    <a:p>
+                      <a:pPr algn="r"/>
+                      <a:r>
+                        <a:rPr sz="850" b="0">
+                          <a:solidFill>
+                            <a:srgbClr val="556A83"/>
+                          </a:solidFill>
+                          <a:latin typeface="Arial"/>
+                        </a:rPr>
+                        <a:t>57.3</a:t>
+                      </a:r>
+                    </a:p>
+                  </a:txBody>
+                  <a:tcPr>
+                    <a:solidFill>
+                      <a:srgbClr val="F6F7F9"/>
+                    </a:solidFill>
+                  </a:tcPr>
+                </a:tc>
+                <a:tc>
+                  <a:txBody>
+                    <a:bodyPr wrap="none" lIns="36000" rIns="36000" tIns="9000" bIns="9000"/>
+                    <a:lstStyle/>
+                    <a:p>
+                      <a:pPr algn="r"/>
+                      <a:r>
+                        <a:rPr sz="850" b="0">
+                          <a:solidFill>
+                            <a:srgbClr val="556A83"/>
+                          </a:solidFill>
+                          <a:latin typeface="Arial"/>
+                        </a:rPr>
+                        <a:t>54.5</a:t>
+                      </a:r>
+                    </a:p>
+                  </a:txBody>
+                  <a:tcPr>
+                    <a:solidFill>
+                      <a:srgbClr val="F6F7F9"/>
+                    </a:solidFill>
+                  </a:tcPr>
+                </a:tc>
+                <a:tc>
+                  <a:txBody>
+                    <a:bodyPr wrap="none" lIns="36000" rIns="36000" tIns="9000" bIns="9000"/>
+                    <a:lstStyle/>
+                    <a:p>
+                      <a:pPr algn="r"/>
+                      <a:r>
+                        <a:rPr sz="850" b="0">
+                          <a:solidFill>
+                            <a:srgbClr val="556A83"/>
+                          </a:solidFill>
+                          <a:latin typeface="Arial"/>
+                        </a:rPr>
+                        <a:t>47.2</a:t>
+                      </a:r>
+                    </a:p>
+                  </a:txBody>
+                  <a:tcPr>
+                    <a:solidFill>
+                      <a:srgbClr val="F6F7F9"/>
+                    </a:solidFill>
+                  </a:tcPr>
+                </a:tc>
+                <a:tc>
+                  <a:txBody>
+                    <a:bodyPr wrap="none" lIns="36000" rIns="36000" tIns="9000" bIns="9000"/>
+                    <a:lstStyle/>
+                    <a:p>
+                      <a:pPr algn="r"/>
+                      <a:r>
+                        <a:rPr sz="850" b="0">
+                          <a:solidFill>
+                            <a:srgbClr val="556A83"/>
+                          </a:solidFill>
+                          <a:latin typeface="Arial"/>
+                        </a:rPr>
+                        <a:t>47.9</a:t>
+                      </a:r>
+                    </a:p>
+                  </a:txBody>
+                  <a:tcPr>
+                    <a:solidFill>
+                      <a:srgbClr val="F6F7F9"/>
+                    </a:solidFill>
+                  </a:tcPr>
+                </a:tc>
+                <a:tc>
+                  <a:txBody>
+                    <a:bodyPr wrap="none" lIns="36000" rIns="36000" tIns="9000" bIns="9000"/>
+                    <a:lstStyle/>
+                    <a:p>
+                      <a:pPr algn="r"/>
+                      <a:r>
+                        <a:rPr sz="850" b="0">
+                          <a:solidFill>
+                            <a:srgbClr val="556A83"/>
+                          </a:solidFill>
+                          <a:latin typeface="Arial"/>
+                        </a:rPr>
+                        <a:t>32.4</a:t>
+                      </a:r>
+                    </a:p>
+                  </a:txBody>
+                  <a:tcPr>
+                    <a:solidFill>
+                      <a:srgbClr val="F6F7F9"/>
+                    </a:solidFill>
+                  </a:tcPr>
+                </a:tc>
+                <a:tc>
+                  <a:txBody>
+                    <a:bodyPr wrap="none" lIns="36000" rIns="36000" tIns="9000" bIns="9000"/>
+                    <a:lstStyle/>
+                    <a:p>
+                      <a:pPr algn="r"/>
+                      <a:r>
+                        <a:rPr sz="850" b="0">
+                          <a:solidFill>
+                            <a:srgbClr val="556A83"/>
+                          </a:solidFill>
+                          <a:latin typeface="Arial"/>
+                        </a:rPr>
+                        <a:t>41.4</a:t>
+                      </a:r>
+                    </a:p>
+                  </a:txBody>
+                  <a:tcPr>
+                    <a:solidFill>
+                      <a:srgbClr val="F6F7F9"/>
+                    </a:solidFill>
+                  </a:tcPr>
+                </a:tc>
+                <a:tc>
+                  <a:txBody>
+                    <a:bodyPr wrap="none" lIns="36000" rIns="36000" tIns="9000" bIns="9000"/>
+                    <a:lstStyle/>
+                    <a:p>
+                      <a:pPr algn="r"/>
+                      <a:r>
+                        <a:rPr sz="850" b="0">
+                          <a:solidFill>
+                            <a:srgbClr val="556A83"/>
+                          </a:solidFill>
+                          <a:latin typeface="Arial"/>
+                        </a:rPr>
+                        <a:t>38.0</a:t>
+                      </a:r>
+                    </a:p>
+                  </a:txBody>
+                  <a:tcPr>
+                    <a:solidFill>
+                      <a:srgbClr val="F6F7F9"/>
+                    </a:solidFill>
+                  </a:tcPr>
+                </a:tc>
+              </a:tr>
+              <a:tr h="310896">
+                <a:tc>
+                  <a:txBody>
+                    <a:bodyPr wrap="none" lIns="36000" rIns="36000" tIns="9000" bIns="9000"/>
+                    <a:lstStyle/>
+                    <a:p>
+                      <a:pPr algn="l"/>
+                      <a:r>
+                        <a:rPr sz="850" b="0">
+                          <a:solidFill>
+                            <a:srgbClr val="152130"/>
+                          </a:solidFill>
+                          <a:latin typeface="Arial"/>
+                        </a:rPr>
+                        <a:t>Gross margin %</a:t>
+                      </a:r>
+                    </a:p>
+                  </a:txBody>
+                  <a:tcPr>
+                    <a:solidFill>
+                      <a:srgbClr val="FFFFFF"/>
+                    </a:solidFill>
+                  </a:tcPr>
+                </a:tc>
+                <a:tc>
+                  <a:txBody>
+                    <a:bodyPr wrap="none" lIns="36000" rIns="36000" tIns="9000" bIns="9000"/>
+                    <a:lstStyle/>
+                    <a:p>
+                      <a:pPr algn="r"/>
+                      <a:r>
+                        <a:rPr sz="850" b="0">
+                          <a:solidFill>
+                            <a:srgbClr val="556A83"/>
+                          </a:solidFill>
+                          <a:latin typeface="Arial"/>
+                        </a:rPr>
+                        <a:t>11.4%</a:t>
+                      </a:r>
+                    </a:p>
+                  </a:txBody>
+                  <a:tcPr>
+                    <a:solidFill>
+                      <a:srgbClr val="FFFFFF"/>
+                    </a:solidFill>
+                  </a:tcPr>
+                </a:tc>
+                <a:tc>
+                  <a:txBody>
+                    <a:bodyPr wrap="none" lIns="36000" rIns="36000" tIns="9000" bIns="9000"/>
+                    <a:lstStyle/>
+                    <a:p>
+                      <a:pPr algn="r"/>
+                      <a:r>
+                        <a:rPr sz="850" b="0">
+                          <a:solidFill>
+                            <a:srgbClr val="556A83"/>
+                          </a:solidFill>
+                          <a:latin typeface="Arial"/>
+                        </a:rPr>
+                        <a:t>12.8%</a:t>
+                      </a:r>
+                    </a:p>
+                  </a:txBody>
+                  <a:tcPr>
+                    <a:solidFill>
+                      <a:srgbClr val="FFFFFF"/>
+                    </a:solidFill>
+                  </a:tcPr>
+                </a:tc>
+                <a:tc>
+                  <a:txBody>
+                    <a:bodyPr wrap="none" lIns="36000" rIns="36000" tIns="9000" bIns="9000"/>
+                    <a:lstStyle/>
+                    <a:p>
+                      <a:pPr algn="r"/>
+                      <a:r>
+                        <a:rPr sz="850" b="0">
+                          <a:solidFill>
+                            <a:srgbClr val="556A83"/>
+                          </a:solidFill>
+                          <a:latin typeface="Arial"/>
+                        </a:rPr>
+                        <a:t>11.8%</a:t>
+                      </a:r>
+                    </a:p>
+                  </a:txBody>
+                  <a:tcPr>
+                    <a:solidFill>
+                      <a:srgbClr val="FFFFFF"/>
+                    </a:solidFill>
+                  </a:tcPr>
+                </a:tc>
+                <a:tc>
+                  <a:txBody>
+                    <a:bodyPr wrap="none" lIns="36000" rIns="36000" tIns="9000" bIns="9000"/>
+                    <a:lstStyle/>
+                    <a:p>
+                      <a:pPr algn="r"/>
+                      <a:r>
+                        <a:rPr sz="850" b="0">
+                          <a:solidFill>
+                            <a:srgbClr val="556A83"/>
+                          </a:solidFill>
+                          <a:latin typeface="Arial"/>
+                        </a:rPr>
+                        <a:t>11.8%</a:t>
+                      </a:r>
+                    </a:p>
+                  </a:txBody>
+                  <a:tcPr>
+                    <a:solidFill>
+                      <a:srgbClr val="FFFFFF"/>
+                    </a:solidFill>
+                  </a:tcPr>
+                </a:tc>
+                <a:tc>
+                  <a:txBody>
+                    <a:bodyPr wrap="none" lIns="36000" rIns="36000" tIns="9000" bIns="9000"/>
+                    <a:lstStyle/>
+                    <a:p>
+                      <a:pPr algn="r"/>
+                      <a:r>
+                        <a:rPr sz="850" b="0">
+                          <a:solidFill>
+                            <a:srgbClr val="556A83"/>
+                          </a:solidFill>
+                          <a:latin typeface="Arial"/>
+                        </a:rPr>
+                        <a:t>11.5%</a:t>
+                      </a:r>
+                    </a:p>
+                  </a:txBody>
+                  <a:tcPr>
+                    <a:solidFill>
+                      <a:srgbClr val="FFFFFF"/>
+                    </a:solidFill>
+                  </a:tcPr>
+                </a:tc>
+                <a:tc>
+                  <a:txBody>
+                    <a:bodyPr wrap="none" lIns="36000" rIns="36000" tIns="9000" bIns="9000"/>
+                    <a:lstStyle/>
+                    <a:p>
+                      <a:pPr algn="r"/>
+                      <a:r>
+                        <a:rPr sz="850" b="0">
+                          <a:solidFill>
+                            <a:srgbClr val="556A83"/>
+                          </a:solidFill>
+                          <a:latin typeface="Arial"/>
+                        </a:rPr>
+                        <a:t>11.4%</a:t>
+                      </a:r>
+                    </a:p>
+                  </a:txBody>
+                  <a:tcPr>
+                    <a:solidFill>
+                      <a:srgbClr val="FFFFFF"/>
+                    </a:solidFill>
+                  </a:tcPr>
+                </a:tc>
+                <a:tc>
+                  <a:txBody>
+                    <a:bodyPr wrap="none" lIns="36000" rIns="36000" tIns="9000" bIns="9000"/>
+                    <a:lstStyle/>
+                    <a:p>
+                      <a:pPr algn="r"/>
+                      <a:r>
+                        <a:rPr sz="850" b="0">
+                          <a:solidFill>
+                            <a:srgbClr val="556A83"/>
+                          </a:solidFill>
+                          <a:latin typeface="Arial"/>
+                        </a:rPr>
+                        <a:t>10.5%</a:t>
+                      </a:r>
+                    </a:p>
+                  </a:txBody>
+                  <a:tcPr>
+                    <a:solidFill>
+                      <a:srgbClr val="FFFFFF"/>
+                    </a:solidFill>
+                  </a:tcPr>
+                </a:tc>
+                <a:tc>
+                  <a:txBody>
+                    <a:bodyPr wrap="none" lIns="36000" rIns="36000" tIns="9000" bIns="9000"/>
+                    <a:lstStyle/>
+                    <a:p>
+                      <a:pPr algn="r"/>
+                      <a:r>
+                        <a:rPr sz="850" b="0">
+                          <a:solidFill>
+                            <a:srgbClr val="556A83"/>
+                          </a:solidFill>
+                          <a:latin typeface="Arial"/>
+                        </a:rPr>
+                        <a:t>8.2%</a:t>
+                      </a:r>
+                    </a:p>
+                  </a:txBody>
+                  <a:tcPr>
+                    <a:solidFill>
+                      <a:srgbClr val="FFFFFF"/>
+                    </a:solidFill>
+                  </a:tcPr>
+                </a:tc>
+                <a:tc>
+                  <a:txBody>
+                    <a:bodyPr wrap="none" lIns="36000" rIns="36000" tIns="9000" bIns="9000"/>
+                    <a:lstStyle/>
+                    <a:p>
+                      <a:pPr algn="r"/>
+                      <a:r>
+                        <a:rPr sz="850" b="0">
+                          <a:solidFill>
+                            <a:srgbClr val="556A83"/>
+                          </a:solidFill>
+                          <a:latin typeface="Arial"/>
+                        </a:rPr>
+                        <a:t>10.6%</a:t>
+                      </a:r>
+                    </a:p>
+                  </a:txBody>
+                  <a:tcPr>
+                    <a:solidFill>
+                      <a:srgbClr val="FFFFFF"/>
+                    </a:solidFill>
+                  </a:tcPr>
+                </a:tc>
+                <a:tc>
+                  <a:txBody>
+                    <a:bodyPr wrap="none" lIns="36000" rIns="36000" tIns="9000" bIns="9000"/>
+                    <a:lstStyle/>
+                    <a:p>
+                      <a:pPr algn="r"/>
+                      <a:r>
+                        <a:rPr sz="850" b="0">
+                          <a:solidFill>
+                            <a:srgbClr val="556A83"/>
+                          </a:solidFill>
+                          <a:latin typeface="Arial"/>
+                        </a:rPr>
+                        <a:t>10.6%</a:t>
+                      </a:r>
+                    </a:p>
+                  </a:txBody>
+                  <a:tcPr>
+                    <a:solidFill>
+                      <a:srgbClr val="FFFFFF"/>
+                    </a:solidFill>
+                  </a:tcPr>
+                </a:tc>
+              </a:tr>
+              <a:tr h="310896">
+                <a:tc>
+                  <a:txBody>
+                    <a:bodyPr wrap="none" lIns="36000" rIns="36000" tIns="9000" bIns="9000"/>
+                    <a:lstStyle/>
+                    <a:p>
+                      <a:pPr algn="l"/>
+                      <a:r>
+                        <a:rPr sz="850" b="1">
+                          <a:solidFill>
+                            <a:srgbClr val="152130"/>
+                          </a:solidFill>
+                          <a:latin typeface="Arial"/>
+                        </a:rPr>
+                        <a:t>Reported EBIT</a:t>
+                      </a:r>
+                    </a:p>
+                  </a:txBody>
+                  <a:tcPr>
+                    <a:solidFill>
+                      <a:srgbClr val="F6F7F9"/>
+                    </a:solidFill>
+                  </a:tcPr>
+                </a:tc>
+                <a:tc>
+                  <a:txBody>
+                    <a:bodyPr wrap="none" lIns="36000" rIns="36000" tIns="9000" bIns="9000"/>
+                    <a:lstStyle/>
+                    <a:p>
+                      <a:pPr algn="r"/>
+                      <a:r>
+                        <a:rPr sz="850" b="1">
+                          <a:solidFill>
+                            <a:srgbClr val="152130"/>
+                          </a:solidFill>
+                          <a:latin typeface="Arial"/>
+                        </a:rPr>
+                        <a:t>11.2</a:t>
+                      </a:r>
+                    </a:p>
+                  </a:txBody>
+                  <a:tcPr>
+                    <a:solidFill>
+                      <a:srgbClr val="F6F7F9"/>
+                    </a:solidFill>
+                  </a:tcPr>
+                </a:tc>
+                <a:tc>
+                  <a:txBody>
+                    <a:bodyPr wrap="none" lIns="36000" rIns="36000" tIns="9000" bIns="9000"/>
+                    <a:lstStyle/>
+                    <a:p>
+                      <a:pPr algn="r"/>
+                      <a:r>
+                        <a:rPr sz="850" b="1">
+                          <a:solidFill>
+                            <a:srgbClr val="152130"/>
+                          </a:solidFill>
+                          <a:latin typeface="Arial"/>
+                        </a:rPr>
+                        <a:t>16.8</a:t>
+                      </a:r>
+                    </a:p>
+                  </a:txBody>
+                  <a:tcPr>
+                    <a:solidFill>
+                      <a:srgbClr val="F6F7F9"/>
+                    </a:solidFill>
+                  </a:tcPr>
+                </a:tc>
+                <a:tc>
+                  <a:txBody>
+                    <a:bodyPr wrap="none" lIns="36000" rIns="36000" tIns="9000" bIns="9000"/>
+                    <a:lstStyle/>
+                    <a:p>
+                      <a:pPr algn="r"/>
+                      <a:r>
+                        <a:rPr sz="850" b="1">
+                          <a:solidFill>
+                            <a:srgbClr val="152130"/>
+                          </a:solidFill>
+                          <a:latin typeface="Arial"/>
+                        </a:rPr>
+                        <a:t>17.1</a:t>
+                      </a:r>
+                    </a:p>
+                  </a:txBody>
+                  <a:tcPr>
+                    <a:solidFill>
+                      <a:srgbClr val="F6F7F9"/>
+                    </a:solidFill>
+                  </a:tcPr>
+                </a:tc>
+                <a:tc>
+                  <a:txBody>
+                    <a:bodyPr wrap="none" lIns="36000" rIns="36000" tIns="9000" bIns="9000"/>
+                    <a:lstStyle/>
+                    <a:p>
+                      <a:pPr algn="r"/>
+                      <a:r>
+                        <a:rPr sz="850" b="1">
+                          <a:solidFill>
+                            <a:srgbClr val="152130"/>
+                          </a:solidFill>
+                          <a:latin typeface="Arial"/>
+                        </a:rPr>
+                        <a:t>13.6</a:t>
+                      </a:r>
+                    </a:p>
+                  </a:txBody>
+                  <a:tcPr>
+                    <a:solidFill>
+                      <a:srgbClr val="F6F7F9"/>
+                    </a:solidFill>
+                  </a:tcPr>
+                </a:tc>
+                <a:tc>
+                  <a:txBody>
+                    <a:bodyPr wrap="none" lIns="36000" rIns="36000" tIns="9000" bIns="9000"/>
+                    <a:lstStyle/>
+                    <a:p>
+                      <a:pPr algn="r"/>
+                      <a:r>
+                        <a:rPr sz="850" b="1">
+                          <a:solidFill>
+                            <a:srgbClr val="152130"/>
+                          </a:solidFill>
+                          <a:latin typeface="Arial"/>
+                        </a:rPr>
+                        <a:t>11.6</a:t>
+                      </a:r>
+                    </a:p>
+                  </a:txBody>
+                  <a:tcPr>
+                    <a:solidFill>
+                      <a:srgbClr val="F6F7F9"/>
+                    </a:solidFill>
+                  </a:tcPr>
+                </a:tc>
+                <a:tc>
+                  <a:txBody>
+                    <a:bodyPr wrap="none" lIns="36000" rIns="36000" tIns="9000" bIns="9000"/>
+                    <a:lstStyle/>
+                    <a:p>
+                      <a:pPr algn="r"/>
+                      <a:r>
+                        <a:rPr sz="850" b="1">
+                          <a:solidFill>
+                            <a:srgbClr val="152130"/>
+                          </a:solidFill>
+                          <a:latin typeface="Arial"/>
+                        </a:rPr>
+                        <a:t>6.1</a:t>
+                      </a:r>
+                    </a:p>
+                  </a:txBody>
+                  <a:tcPr>
+                    <a:solidFill>
+                      <a:srgbClr val="F6F7F9"/>
+                    </a:solidFill>
+                  </a:tcPr>
+                </a:tc>
+                <a:tc>
+                  <a:txBody>
+                    <a:bodyPr wrap="none" lIns="36000" rIns="36000" tIns="9000" bIns="9000"/>
+                    <a:lstStyle/>
+                    <a:p>
+                      <a:pPr algn="r"/>
+                      <a:r>
+                        <a:rPr sz="850" b="1">
+                          <a:solidFill>
+                            <a:srgbClr val="152130"/>
+                          </a:solidFill>
+                          <a:latin typeface="Arial"/>
+                        </a:rPr>
+                        <a:t>5.4</a:t>
+                      </a:r>
+                    </a:p>
+                  </a:txBody>
+                  <a:tcPr>
+                    <a:solidFill>
+                      <a:srgbClr val="F6F7F9"/>
+                    </a:solidFill>
+                  </a:tcPr>
+                </a:tc>
+                <a:tc>
+                  <a:txBody>
+                    <a:bodyPr wrap="none" lIns="36000" rIns="36000" tIns="9000" bIns="9000"/>
+                    <a:lstStyle/>
+                    <a:p>
+                      <a:pPr algn="r"/>
+                      <a:r>
+                        <a:rPr sz="850" b="1">
+                          <a:solidFill>
+                            <a:srgbClr val="152130"/>
+                          </a:solidFill>
+                          <a:latin typeface="Arial"/>
+                        </a:rPr>
+                        <a:t>-4.6</a:t>
+                      </a:r>
+                    </a:p>
+                  </a:txBody>
+                  <a:tcPr>
+                    <a:solidFill>
+                      <a:srgbClr val="F6F7F9"/>
+                    </a:solidFill>
+                  </a:tcPr>
+                </a:tc>
+                <a:tc>
+                  <a:txBody>
+                    <a:bodyPr wrap="none" lIns="36000" rIns="36000" tIns="9000" bIns="9000"/>
+                    <a:lstStyle/>
+                    <a:p>
+                      <a:pPr algn="r"/>
+                      <a:r>
+                        <a:rPr sz="850" b="1">
+                          <a:solidFill>
+                            <a:srgbClr val="152130"/>
+                          </a:solidFill>
+                          <a:latin typeface="Arial"/>
+                        </a:rPr>
+                        <a:t>6.3</a:t>
+                      </a:r>
+                    </a:p>
+                  </a:txBody>
+                  <a:tcPr>
+                    <a:solidFill>
+                      <a:srgbClr val="F6F7F9"/>
+                    </a:solidFill>
+                  </a:tcPr>
+                </a:tc>
+                <a:tc>
+                  <a:txBody>
+                    <a:bodyPr wrap="none" lIns="36000" rIns="36000" tIns="9000" bIns="9000"/>
+                    <a:lstStyle/>
+                    <a:p>
+                      <a:pPr algn="r"/>
+                      <a:r>
+                        <a:rPr sz="850" b="1">
+                          <a:solidFill>
+                            <a:srgbClr val="152130"/>
+                          </a:solidFill>
+                          <a:latin typeface="Arial"/>
+                        </a:rPr>
+                        <a:t>6.2</a:t>
+                      </a:r>
+                    </a:p>
+                  </a:txBody>
+                  <a:tcPr>
+                    <a:solidFill>
+                      <a:srgbClr val="F6F7F9"/>
+                    </a:solidFill>
+                  </a:tcPr>
+                </a:tc>
+              </a:tr>
+              <a:tr h="310896">
+                <a:tc>
+                  <a:txBody>
+                    <a:bodyPr wrap="none" lIns="36000" rIns="36000" tIns="9000" bIns="9000"/>
+                    <a:lstStyle/>
+                    <a:p>
+                      <a:pPr algn="l"/>
+                      <a:r>
+                        <a:rPr sz="850" b="0">
+                          <a:solidFill>
+                            <a:srgbClr val="152130"/>
+                          </a:solidFill>
+                          <a:latin typeface="Arial"/>
+                        </a:rPr>
+                        <a:t>EBIT margin %</a:t>
+                      </a:r>
+                    </a:p>
+                  </a:txBody>
+                  <a:tcPr>
+                    <a:solidFill>
+                      <a:srgbClr val="FFFFFF"/>
+                    </a:solidFill>
+                  </a:tcPr>
+                </a:tc>
+                <a:tc>
+                  <a:txBody>
+                    <a:bodyPr wrap="none" lIns="36000" rIns="36000" tIns="9000" bIns="9000"/>
+                    <a:lstStyle/>
+                    <a:p>
+                      <a:pPr algn="r"/>
+                      <a:r>
+                        <a:rPr sz="850" b="0">
+                          <a:solidFill>
+                            <a:srgbClr val="556A83"/>
+                          </a:solidFill>
+                          <a:latin typeface="Arial"/>
+                        </a:rPr>
+                        <a:t>2.9%</a:t>
+                      </a:r>
+                    </a:p>
+                  </a:txBody>
+                  <a:tcPr>
+                    <a:solidFill>
+                      <a:srgbClr val="FFFFFF"/>
+                    </a:solidFill>
+                  </a:tcPr>
+                </a:tc>
+                <a:tc>
+                  <a:txBody>
+                    <a:bodyPr wrap="none" lIns="36000" rIns="36000" tIns="9000" bIns="9000"/>
+                    <a:lstStyle/>
+                    <a:p>
+                      <a:pPr algn="r"/>
+                      <a:r>
+                        <a:rPr sz="850" b="0">
+                          <a:solidFill>
+                            <a:srgbClr val="556A83"/>
+                          </a:solidFill>
+                          <a:latin typeface="Arial"/>
+                        </a:rPr>
+                        <a:t>3.9%</a:t>
+                      </a:r>
+                    </a:p>
+                  </a:txBody>
+                  <a:tcPr>
+                    <a:solidFill>
+                      <a:srgbClr val="FFFFFF"/>
+                    </a:solidFill>
+                  </a:tcPr>
+                </a:tc>
+                <a:tc>
+                  <a:txBody>
+                    <a:bodyPr wrap="none" lIns="36000" rIns="36000" tIns="9000" bIns="9000"/>
+                    <a:lstStyle/>
+                    <a:p>
+                      <a:pPr algn="r"/>
+                      <a:r>
+                        <a:rPr sz="850" b="0">
+                          <a:solidFill>
+                            <a:srgbClr val="556A83"/>
+                          </a:solidFill>
+                          <a:latin typeface="Arial"/>
+                        </a:rPr>
+                        <a:t>3.7%</a:t>
+                      </a:r>
+                    </a:p>
+                  </a:txBody>
+                  <a:tcPr>
+                    <a:solidFill>
+                      <a:srgbClr val="FFFFFF"/>
+                    </a:solidFill>
+                  </a:tcPr>
+                </a:tc>
+                <a:tc>
+                  <a:txBody>
+                    <a:bodyPr wrap="none" lIns="36000" rIns="36000" tIns="9000" bIns="9000"/>
+                    <a:lstStyle/>
+                    <a:p>
+                      <a:pPr algn="r"/>
+                      <a:r>
+                        <a:rPr sz="850" b="0">
+                          <a:solidFill>
+                            <a:srgbClr val="556A83"/>
+                          </a:solidFill>
+                          <a:latin typeface="Arial"/>
+                        </a:rPr>
+                        <a:t>2.8%</a:t>
+                      </a:r>
+                    </a:p>
+                  </a:txBody>
+                  <a:tcPr>
+                    <a:solidFill>
+                      <a:srgbClr val="FFFFFF"/>
+                    </a:solidFill>
+                  </a:tcPr>
+                </a:tc>
+                <a:tc>
+                  <a:txBody>
+                    <a:bodyPr wrap="none" lIns="36000" rIns="36000" tIns="9000" bIns="9000"/>
+                    <a:lstStyle/>
+                    <a:p>
+                      <a:pPr algn="r"/>
+                      <a:r>
+                        <a:rPr sz="850" b="0">
+                          <a:solidFill>
+                            <a:srgbClr val="556A83"/>
+                          </a:solidFill>
+                          <a:latin typeface="Arial"/>
+                        </a:rPr>
+                        <a:t>2.5%</a:t>
+                      </a:r>
+                    </a:p>
+                  </a:txBody>
+                  <a:tcPr>
+                    <a:solidFill>
+                      <a:srgbClr val="FFFFFF"/>
+                    </a:solidFill>
+                  </a:tcPr>
+                </a:tc>
+                <a:tc>
+                  <a:txBody>
+                    <a:bodyPr wrap="none" lIns="36000" rIns="36000" tIns="9000" bIns="9000"/>
+                    <a:lstStyle/>
+                    <a:p>
+                      <a:pPr algn="r"/>
+                      <a:r>
+                        <a:rPr sz="850" b="0">
+                          <a:solidFill>
+                            <a:srgbClr val="556A83"/>
+                          </a:solidFill>
+                          <a:latin typeface="Arial"/>
+                        </a:rPr>
+                        <a:t>1.5%</a:t>
+                      </a:r>
+                    </a:p>
+                  </a:txBody>
+                  <a:tcPr>
+                    <a:solidFill>
+                      <a:srgbClr val="FFFFFF"/>
+                    </a:solidFill>
+                  </a:tcPr>
+                </a:tc>
+                <a:tc>
+                  <a:txBody>
+                    <a:bodyPr wrap="none" lIns="36000" rIns="36000" tIns="9000" bIns="9000"/>
+                    <a:lstStyle/>
+                    <a:p>
+                      <a:pPr algn="r"/>
+                      <a:r>
+                        <a:rPr sz="850" b="0">
+                          <a:solidFill>
+                            <a:srgbClr val="556A83"/>
+                          </a:solidFill>
+                          <a:latin typeface="Arial"/>
+                        </a:rPr>
+                        <a:t>1.2%</a:t>
+                      </a:r>
+                    </a:p>
+                  </a:txBody>
+                  <a:tcPr>
+                    <a:solidFill>
+                      <a:srgbClr val="FFFFFF"/>
+                    </a:solidFill>
+                  </a:tcPr>
+                </a:tc>
+                <a:tc>
+                  <a:txBody>
+                    <a:bodyPr wrap="none" lIns="36000" rIns="36000" tIns="9000" bIns="9000"/>
+                    <a:lstStyle/>
+                    <a:p>
+                      <a:pPr algn="r"/>
+                      <a:r>
+                        <a:rPr sz="850" b="0">
+                          <a:solidFill>
+                            <a:srgbClr val="556A83"/>
+                          </a:solidFill>
+                          <a:latin typeface="Arial"/>
+                        </a:rPr>
+                        <a:t>-1.2%</a:t>
+                      </a:r>
+                    </a:p>
+                  </a:txBody>
+                  <a:tcPr>
+                    <a:solidFill>
+                      <a:srgbClr val="FFFFFF"/>
+                    </a:solidFill>
+                  </a:tcPr>
+                </a:tc>
+                <a:tc>
+                  <a:txBody>
+                    <a:bodyPr wrap="none" lIns="36000" rIns="36000" tIns="9000" bIns="9000"/>
+                    <a:lstStyle/>
+                    <a:p>
+                      <a:pPr algn="r"/>
+                      <a:r>
+                        <a:rPr sz="850" b="0">
+                          <a:solidFill>
+                            <a:srgbClr val="556A83"/>
+                          </a:solidFill>
+                          <a:latin typeface="Arial"/>
+                        </a:rPr>
+                        <a:t>1.6%</a:t>
+                      </a:r>
+                    </a:p>
+                  </a:txBody>
+                  <a:tcPr>
+                    <a:solidFill>
+                      <a:srgbClr val="FFFFFF"/>
+                    </a:solidFill>
+                  </a:tcPr>
+                </a:tc>
+                <a:tc>
+                  <a:txBody>
+                    <a:bodyPr wrap="none" lIns="36000" rIns="36000" tIns="9000" bIns="9000"/>
+                    <a:lstStyle/>
+                    <a:p>
+                      <a:pPr algn="r"/>
+                      <a:r>
+                        <a:rPr sz="850" b="0">
+                          <a:solidFill>
+                            <a:srgbClr val="556A83"/>
+                          </a:solidFill>
+                          <a:latin typeface="Arial"/>
+                        </a:rPr>
+                        <a:t>1.7%</a:t>
+                      </a:r>
+                    </a:p>
+                  </a:txBody>
+                  <a:tcPr>
+                    <a:solidFill>
+                      <a:srgbClr val="FFFFFF"/>
+                    </a:solidFill>
+                  </a:tcPr>
+                </a:tc>
+              </a:tr>
+              <a:tr h="310896">
+                <a:tc>
+                  <a:txBody>
+                    <a:bodyPr wrap="none" lIns="36000" rIns="36000" tIns="9000" bIns="9000"/>
+                    <a:lstStyle/>
+                    <a:p>
+                      <a:pPr algn="l"/>
+                      <a:r>
+                        <a:rPr sz="850" b="1">
+                          <a:solidFill>
+                            <a:srgbClr val="152130"/>
+                          </a:solidFill>
+                          <a:latin typeface="Arial"/>
+                        </a:rPr>
+                        <a:t>EBITA</a:t>
+                      </a:r>
+                    </a:p>
+                  </a:txBody>
+                  <a:tcPr>
+                    <a:solidFill>
+                      <a:srgbClr val="F6F7F9"/>
+                    </a:solidFill>
+                  </a:tcPr>
+                </a:tc>
+                <a:tc>
+                  <a:txBody>
+                    <a:bodyPr wrap="none" lIns="36000" rIns="36000" tIns="9000" bIns="9000"/>
+                    <a:lstStyle/>
+                    <a:p>
+                      <a:pPr algn="r"/>
+                      <a:r>
+                        <a:rPr sz="850" b="1">
+                          <a:solidFill>
+                            <a:srgbClr val="152130"/>
+                          </a:solidFill>
+                          <a:latin typeface="Arial"/>
+                        </a:rPr>
+                        <a:t>8.1</a:t>
+                      </a:r>
+                    </a:p>
+                  </a:txBody>
+                  <a:tcPr>
+                    <a:solidFill>
+                      <a:srgbClr val="F6F7F9"/>
+                    </a:solidFill>
+                  </a:tcPr>
+                </a:tc>
+                <a:tc>
+                  <a:txBody>
+                    <a:bodyPr wrap="none" lIns="36000" rIns="36000" tIns="9000" bIns="9000"/>
+                    <a:lstStyle/>
+                    <a:p>
+                      <a:pPr algn="r"/>
+                      <a:r>
+                        <a:rPr sz="850" b="1">
+                          <a:solidFill>
+                            <a:srgbClr val="152130"/>
+                          </a:solidFill>
+                          <a:latin typeface="Arial"/>
+                        </a:rPr>
+                        <a:t>13.4</a:t>
+                      </a:r>
+                    </a:p>
+                  </a:txBody>
+                  <a:tcPr>
+                    <a:solidFill>
+                      <a:srgbClr val="F6F7F9"/>
+                    </a:solidFill>
+                  </a:tcPr>
+                </a:tc>
+                <a:tc>
+                  <a:txBody>
+                    <a:bodyPr wrap="none" lIns="36000" rIns="36000" tIns="9000" bIns="9000"/>
+                    <a:lstStyle/>
+                    <a:p>
+                      <a:pPr algn="r"/>
+                      <a:r>
+                        <a:rPr sz="850" b="1">
+                          <a:solidFill>
+                            <a:srgbClr val="152130"/>
+                          </a:solidFill>
+                          <a:latin typeface="Arial"/>
+                        </a:rPr>
+                        <a:t>27.4</a:t>
+                      </a:r>
+                    </a:p>
+                  </a:txBody>
+                  <a:tcPr>
+                    <a:solidFill>
+                      <a:srgbClr val="F6F7F9"/>
+                    </a:solidFill>
+                  </a:tcPr>
+                </a:tc>
+                <a:tc>
+                  <a:txBody>
+                    <a:bodyPr wrap="none" lIns="36000" rIns="36000" tIns="9000" bIns="9000"/>
+                    <a:lstStyle/>
+                    <a:p>
+                      <a:pPr algn="r"/>
+                      <a:r>
+                        <a:rPr sz="850" b="1">
+                          <a:solidFill>
+                            <a:srgbClr val="152130"/>
+                          </a:solidFill>
+                          <a:latin typeface="Arial"/>
+                        </a:rPr>
+                        <a:t>11.2</a:t>
+                      </a:r>
+                    </a:p>
+                  </a:txBody>
+                  <a:tcPr>
+                    <a:solidFill>
+                      <a:srgbClr val="F6F7F9"/>
+                    </a:solidFill>
+                  </a:tcPr>
+                </a:tc>
+                <a:tc>
+                  <a:txBody>
+                    <a:bodyPr wrap="none" lIns="36000" rIns="36000" tIns="9000" bIns="9000"/>
+                    <a:lstStyle/>
+                    <a:p>
+                      <a:pPr algn="r"/>
+                      <a:r>
+                        <a:rPr sz="850" b="1">
+                          <a:solidFill>
+                            <a:srgbClr val="152130"/>
+                          </a:solidFill>
+                          <a:latin typeface="Arial"/>
+                        </a:rPr>
+                        <a:t>41.6</a:t>
+                      </a:r>
+                    </a:p>
+                  </a:txBody>
+                  <a:tcPr>
+                    <a:solidFill>
+                      <a:srgbClr val="F6F7F9"/>
+                    </a:solidFill>
+                  </a:tcPr>
+                </a:tc>
+                <a:tc>
+                  <a:txBody>
+                    <a:bodyPr wrap="none" lIns="36000" rIns="36000" tIns="9000" bIns="9000"/>
+                    <a:lstStyle/>
+                    <a:p>
+                      <a:pPr algn="r"/>
+                      <a:r>
+                        <a:rPr sz="850" b="1">
+                          <a:solidFill>
+                            <a:srgbClr val="152130"/>
+                          </a:solidFill>
+                          <a:latin typeface="Arial"/>
+                        </a:rPr>
+                        <a:t>17.0</a:t>
+                      </a:r>
+                    </a:p>
+                  </a:txBody>
+                  <a:tcPr>
+                    <a:solidFill>
+                      <a:srgbClr val="F6F7F9"/>
+                    </a:solidFill>
+                  </a:tcPr>
+                </a:tc>
+                <a:tc>
+                  <a:txBody>
+                    <a:bodyPr wrap="none" lIns="36000" rIns="36000" tIns="9000" bIns="9000"/>
+                    <a:lstStyle/>
+                    <a:p>
+                      <a:pPr algn="r"/>
+                      <a:r>
+                        <a:rPr sz="850" b="1">
+                          <a:solidFill>
+                            <a:srgbClr val="152130"/>
+                          </a:solidFill>
+                          <a:latin typeface="Arial"/>
+                        </a:rPr>
+                        <a:t>2.0</a:t>
+                      </a:r>
+                    </a:p>
+                  </a:txBody>
+                  <a:tcPr>
+                    <a:solidFill>
+                      <a:srgbClr val="F6F7F9"/>
+                    </a:solidFill>
+                  </a:tcPr>
+                </a:tc>
+                <a:tc>
+                  <a:txBody>
+                    <a:bodyPr wrap="none" lIns="36000" rIns="36000" tIns="9000" bIns="9000"/>
+                    <a:lstStyle/>
+                    <a:p>
+                      <a:pPr algn="r"/>
+                      <a:r>
+                        <a:rPr sz="850" b="1">
+                          <a:solidFill>
+                            <a:srgbClr val="152130"/>
+                          </a:solidFill>
+                          <a:latin typeface="Arial"/>
+                        </a:rPr>
+                        <a:t>-8.1</a:t>
+                      </a:r>
+                    </a:p>
+                  </a:txBody>
+                  <a:tcPr>
+                    <a:solidFill>
+                      <a:srgbClr val="F6F7F9"/>
+                    </a:solidFill>
+                  </a:tcPr>
+                </a:tc>
+                <a:tc>
+                  <a:txBody>
+                    <a:bodyPr wrap="none" lIns="36000" rIns="36000" tIns="9000" bIns="9000"/>
+                    <a:lstStyle/>
+                    <a:p>
+                      <a:pPr algn="r"/>
+                      <a:r>
+                        <a:rPr sz="850" b="1">
+                          <a:solidFill>
+                            <a:srgbClr val="152130"/>
+                          </a:solidFill>
+                          <a:latin typeface="Arial"/>
+                        </a:rPr>
+                        <a:t>2.8</a:t>
+                      </a:r>
+                    </a:p>
+                  </a:txBody>
+                  <a:tcPr>
+                    <a:solidFill>
+                      <a:srgbClr val="F6F7F9"/>
+                    </a:solidFill>
+                  </a:tcPr>
+                </a:tc>
+                <a:tc>
+                  <a:txBody>
+                    <a:bodyPr wrap="none" lIns="36000" rIns="36000" tIns="9000" bIns="9000"/>
+                    <a:lstStyle/>
+                    <a:p>
+                      <a:pPr algn="r"/>
+                      <a:r>
+                        <a:rPr sz="850" b="1">
+                          <a:solidFill>
+                            <a:srgbClr val="152130"/>
+                          </a:solidFill>
+                          <a:latin typeface="Arial"/>
+                        </a:rPr>
+                        <a:t>10.9</a:t>
+                      </a:r>
+                    </a:p>
+                  </a:txBody>
+                  <a:tcPr>
+                    <a:solidFill>
+                      <a:srgbClr val="F6F7F9"/>
+                    </a:solidFill>
+                  </a:tcPr>
+                </a:tc>
+              </a:tr>
+              <a:tr h="310896">
+                <a:tc>
+                  <a:txBody>
+                    <a:bodyPr wrap="none" lIns="36000" rIns="36000" tIns="9000" bIns="9000"/>
+                    <a:lstStyle/>
+                    <a:p>
+                      <a:pPr algn="l"/>
+                      <a:r>
+                        <a:rPr sz="850" b="0">
+                          <a:solidFill>
+                            <a:srgbClr val="152130"/>
+                          </a:solidFill>
+                          <a:latin typeface="Arial"/>
+                        </a:rPr>
+                        <a:t>EBITA margin %</a:t>
+                      </a:r>
+                    </a:p>
+                  </a:txBody>
+                  <a:tcPr>
+                    <a:solidFill>
+                      <a:srgbClr val="FFFFFF"/>
+                    </a:solidFill>
+                  </a:tcPr>
+                </a:tc>
+                <a:tc>
+                  <a:txBody>
+                    <a:bodyPr wrap="none" lIns="36000" rIns="36000" tIns="9000" bIns="9000"/>
+                    <a:lstStyle/>
+                    <a:p>
+                      <a:pPr algn="r"/>
+                      <a:r>
+                        <a:rPr sz="850" b="0">
+                          <a:solidFill>
+                            <a:srgbClr val="556A83"/>
+                          </a:solidFill>
+                          <a:latin typeface="Arial"/>
+                        </a:rPr>
+                        <a:t>2.1%</a:t>
+                      </a:r>
+                    </a:p>
+                  </a:txBody>
+                  <a:tcPr>
+                    <a:solidFill>
+                      <a:srgbClr val="FFFFFF"/>
+                    </a:solidFill>
+                  </a:tcPr>
+                </a:tc>
+                <a:tc>
+                  <a:txBody>
+                    <a:bodyPr wrap="none" lIns="36000" rIns="36000" tIns="9000" bIns="9000"/>
+                    <a:lstStyle/>
+                    <a:p>
+                      <a:pPr algn="r"/>
+                      <a:r>
+                        <a:rPr sz="850" b="0">
+                          <a:solidFill>
+                            <a:srgbClr val="556A83"/>
+                          </a:solidFill>
+                          <a:latin typeface="Arial"/>
+                        </a:rPr>
+                        <a:t>3.1%</a:t>
+                      </a:r>
+                    </a:p>
+                  </a:txBody>
+                  <a:tcPr>
+                    <a:solidFill>
+                      <a:srgbClr val="FFFFFF"/>
+                    </a:solidFill>
+                  </a:tcPr>
+                </a:tc>
+                <a:tc>
+                  <a:txBody>
+                    <a:bodyPr wrap="none" lIns="36000" rIns="36000" tIns="9000" bIns="9000"/>
+                    <a:lstStyle/>
+                    <a:p>
+                      <a:pPr algn="r"/>
+                      <a:r>
+                        <a:rPr sz="850" b="0">
+                          <a:solidFill>
+                            <a:srgbClr val="556A83"/>
+                          </a:solidFill>
+                          <a:latin typeface="Arial"/>
+                        </a:rPr>
+                        <a:t>5.9%</a:t>
+                      </a:r>
+                    </a:p>
+                  </a:txBody>
+                  <a:tcPr>
+                    <a:solidFill>
+                      <a:srgbClr val="FFFFFF"/>
+                    </a:solidFill>
+                  </a:tcPr>
+                </a:tc>
+                <a:tc>
+                  <a:txBody>
+                    <a:bodyPr wrap="none" lIns="36000" rIns="36000" tIns="9000" bIns="9000"/>
+                    <a:lstStyle/>
+                    <a:p>
+                      <a:pPr algn="r"/>
+                      <a:r>
+                        <a:rPr sz="850" b="0">
+                          <a:solidFill>
+                            <a:srgbClr val="556A83"/>
+                          </a:solidFill>
+                          <a:latin typeface="Arial"/>
+                        </a:rPr>
+                        <a:t>2.3%</a:t>
+                      </a:r>
+                    </a:p>
+                  </a:txBody>
+                  <a:tcPr>
+                    <a:solidFill>
+                      <a:srgbClr val="FFFFFF"/>
+                    </a:solidFill>
+                  </a:tcPr>
+                </a:tc>
+                <a:tc>
+                  <a:txBody>
+                    <a:bodyPr wrap="none" lIns="36000" rIns="36000" tIns="9000" bIns="9000"/>
+                    <a:lstStyle/>
+                    <a:p>
+                      <a:pPr algn="r"/>
+                      <a:r>
+                        <a:rPr sz="850" b="0">
+                          <a:solidFill>
+                            <a:srgbClr val="556A83"/>
+                          </a:solidFill>
+                          <a:latin typeface="Arial"/>
+                        </a:rPr>
+                        <a:t>8.8%</a:t>
+                      </a:r>
+                    </a:p>
+                  </a:txBody>
+                  <a:tcPr>
+                    <a:solidFill>
+                      <a:srgbClr val="FFFFFF"/>
+                    </a:solidFill>
+                  </a:tcPr>
+                </a:tc>
+                <a:tc>
+                  <a:txBody>
+                    <a:bodyPr wrap="none" lIns="36000" rIns="36000" tIns="9000" bIns="9000"/>
+                    <a:lstStyle/>
+                    <a:p>
+                      <a:pPr algn="r"/>
+                      <a:r>
+                        <a:rPr sz="850" b="0">
+                          <a:solidFill>
+                            <a:srgbClr val="556A83"/>
+                          </a:solidFill>
+                          <a:latin typeface="Arial"/>
+                        </a:rPr>
+                        <a:t>4.1%</a:t>
+                      </a:r>
+                    </a:p>
+                  </a:txBody>
+                  <a:tcPr>
+                    <a:solidFill>
+                      <a:srgbClr val="FFFFFF"/>
+                    </a:solidFill>
+                  </a:tcPr>
+                </a:tc>
+                <a:tc>
+                  <a:txBody>
+                    <a:bodyPr wrap="none" lIns="36000" rIns="36000" tIns="9000" bIns="9000"/>
+                    <a:lstStyle/>
+                    <a:p>
+                      <a:pPr algn="r"/>
+                      <a:r>
+                        <a:rPr sz="850" b="0">
+                          <a:solidFill>
+                            <a:srgbClr val="556A83"/>
+                          </a:solidFill>
+                          <a:latin typeface="Arial"/>
+                        </a:rPr>
+                        <a:t>0.4%</a:t>
+                      </a:r>
+                    </a:p>
+                  </a:txBody>
+                  <a:tcPr>
+                    <a:solidFill>
+                      <a:srgbClr val="FFFFFF"/>
+                    </a:solidFill>
+                  </a:tcPr>
+                </a:tc>
+                <a:tc>
+                  <a:txBody>
+                    <a:bodyPr wrap="none" lIns="36000" rIns="36000" tIns="9000" bIns="9000"/>
+                    <a:lstStyle/>
+                    <a:p>
+                      <a:pPr algn="r"/>
+                      <a:r>
+                        <a:rPr sz="850" b="0">
+                          <a:solidFill>
+                            <a:srgbClr val="556A83"/>
+                          </a:solidFill>
+                          <a:latin typeface="Arial"/>
+                        </a:rPr>
+                        <a:t>-2.0%</a:t>
+                      </a:r>
+                    </a:p>
+                  </a:txBody>
+                  <a:tcPr>
+                    <a:solidFill>
+                      <a:srgbClr val="FFFFFF"/>
+                    </a:solidFill>
+                  </a:tcPr>
+                </a:tc>
+                <a:tc>
+                  <a:txBody>
+                    <a:bodyPr wrap="none" lIns="36000" rIns="36000" tIns="9000" bIns="9000"/>
+                    <a:lstStyle/>
+                    <a:p>
+                      <a:pPr algn="r"/>
+                      <a:r>
+                        <a:rPr sz="850" b="0">
+                          <a:solidFill>
+                            <a:srgbClr val="556A83"/>
+                          </a:solidFill>
+                          <a:latin typeface="Arial"/>
+                        </a:rPr>
+                        <a:t>0.7%</a:t>
+                      </a:r>
+                    </a:p>
+                  </a:txBody>
+                  <a:tcPr>
+                    <a:solidFill>
+                      <a:srgbClr val="FFFFFF"/>
+                    </a:solidFill>
+                  </a:tcPr>
+                </a:tc>
+                <a:tc>
+                  <a:txBody>
+                    <a:bodyPr wrap="none" lIns="36000" rIns="36000" tIns="9000" bIns="9000"/>
+                    <a:lstStyle/>
+                    <a:p>
+                      <a:pPr algn="r"/>
+                      <a:r>
+                        <a:rPr sz="850" b="0">
+                          <a:solidFill>
+                            <a:srgbClr val="556A83"/>
+                          </a:solidFill>
+                          <a:latin typeface="Arial"/>
+                        </a:rPr>
+                        <a:t>3.0%</a:t>
+                      </a:r>
+                    </a:p>
+                  </a:txBody>
+                  <a:tcPr>
+                    <a:solidFill>
+                      <a:srgbClr val="FFFFFF"/>
+                    </a:solidFill>
+                  </a:tcPr>
+                </a:tc>
+              </a:tr>
+              <a:tr h="310896">
+                <a:tc>
+                  <a:txBody>
+                    <a:bodyPr wrap="none" lIns="36000" rIns="36000" tIns="9000" bIns="9000"/>
+                    <a:lstStyle/>
+                    <a:p>
+                      <a:pPr algn="l"/>
+                      <a:r>
+                        <a:rPr sz="850" b="1">
+                          <a:solidFill>
+                            <a:srgbClr val="152130"/>
+                          </a:solidFill>
+                          <a:latin typeface="Arial"/>
+                        </a:rPr>
+                        <a:t>New Operating Income</a:t>
+                      </a:r>
+                    </a:p>
+                  </a:txBody>
+                  <a:tcPr>
+                    <a:solidFill>
+                      <a:srgbClr val="F6F7F9"/>
+                    </a:solidFill>
+                  </a:tcPr>
+                </a:tc>
+                <a:tc>
+                  <a:txBody>
+                    <a:bodyPr wrap="none" lIns="36000" rIns="36000" tIns="9000" bIns="9000"/>
+                    <a:lstStyle/>
+                    <a:p>
+                      <a:pPr algn="r"/>
+                      <a:r>
+                        <a:rPr sz="850" b="1">
+                          <a:solidFill>
+                            <a:srgbClr val="152130"/>
+                          </a:solidFill>
+                          <a:latin typeface="Arial"/>
+                        </a:rPr>
+                        <a:t>16.1</a:t>
+                      </a:r>
+                    </a:p>
+                  </a:txBody>
+                  <a:tcPr>
+                    <a:solidFill>
+                      <a:srgbClr val="F6F7F9"/>
+                    </a:solidFill>
+                  </a:tcPr>
+                </a:tc>
+                <a:tc>
+                  <a:txBody>
+                    <a:bodyPr wrap="none" lIns="36000" rIns="36000" tIns="9000" bIns="9000"/>
+                    <a:lstStyle/>
+                    <a:p>
+                      <a:pPr algn="r"/>
+                      <a:r>
+                        <a:rPr sz="850" b="1">
+                          <a:solidFill>
+                            <a:srgbClr val="152130"/>
+                          </a:solidFill>
+                          <a:latin typeface="Arial"/>
+                        </a:rPr>
+                        <a:t>25.6</a:t>
+                      </a:r>
+                    </a:p>
+                  </a:txBody>
+                  <a:tcPr>
+                    <a:solidFill>
+                      <a:srgbClr val="F6F7F9"/>
+                    </a:solidFill>
+                  </a:tcPr>
+                </a:tc>
+                <a:tc>
+                  <a:txBody>
+                    <a:bodyPr wrap="none" lIns="36000" rIns="36000" tIns="9000" bIns="9000"/>
+                    <a:lstStyle/>
+                    <a:p>
+                      <a:pPr algn="r"/>
+                      <a:r>
+                        <a:rPr sz="850" b="1">
+                          <a:solidFill>
+                            <a:srgbClr val="152130"/>
+                          </a:solidFill>
+                          <a:latin typeface="Arial"/>
+                        </a:rPr>
+                        <a:t>24.8</a:t>
+                      </a:r>
+                    </a:p>
+                  </a:txBody>
+                  <a:tcPr>
+                    <a:solidFill>
+                      <a:srgbClr val="F6F7F9"/>
+                    </a:solidFill>
+                  </a:tcPr>
+                </a:tc>
+                <a:tc>
+                  <a:txBody>
+                    <a:bodyPr wrap="none" lIns="36000" rIns="36000" tIns="9000" bIns="9000"/>
+                    <a:lstStyle/>
+                    <a:p>
+                      <a:pPr algn="r"/>
+                      <a:r>
+                        <a:rPr sz="850" b="1">
+                          <a:solidFill>
+                            <a:srgbClr val="152130"/>
+                          </a:solidFill>
+                          <a:latin typeface="Arial"/>
+                        </a:rPr>
+                        <a:t>21.7</a:t>
+                      </a:r>
+                    </a:p>
+                  </a:txBody>
+                  <a:tcPr>
+                    <a:solidFill>
+                      <a:srgbClr val="F6F7F9"/>
+                    </a:solidFill>
+                  </a:tcPr>
+                </a:tc>
+                <a:tc>
+                  <a:txBody>
+                    <a:bodyPr wrap="none" lIns="36000" rIns="36000" tIns="9000" bIns="9000"/>
+                    <a:lstStyle/>
+                    <a:p>
+                      <a:pPr algn="r"/>
+                      <a:r>
+                        <a:rPr sz="850" b="1">
+                          <a:solidFill>
+                            <a:srgbClr val="152130"/>
+                          </a:solidFill>
+                          <a:latin typeface="Arial"/>
+                        </a:rPr>
+                        <a:t>19.9</a:t>
+                      </a:r>
+                    </a:p>
+                  </a:txBody>
+                  <a:tcPr>
+                    <a:solidFill>
+                      <a:srgbClr val="F6F7F9"/>
+                    </a:solidFill>
+                  </a:tcPr>
+                </a:tc>
+                <a:tc>
+                  <a:txBody>
+                    <a:bodyPr wrap="none" lIns="36000" rIns="36000" tIns="9000" bIns="9000"/>
+                    <a:lstStyle/>
+                    <a:p>
+                      <a:pPr algn="r"/>
+                      <a:r>
+                        <a:rPr sz="850" b="1">
+                          <a:solidFill>
+                            <a:srgbClr val="152130"/>
+                          </a:solidFill>
+                          <a:latin typeface="Arial"/>
+                        </a:rPr>
+                        <a:t>15.4</a:t>
+                      </a:r>
+                    </a:p>
+                  </a:txBody>
+                  <a:tcPr>
+                    <a:solidFill>
+                      <a:srgbClr val="F6F7F9"/>
+                    </a:solidFill>
+                  </a:tcPr>
+                </a:tc>
+                <a:tc>
+                  <a:txBody>
+                    <a:bodyPr wrap="none" lIns="36000" rIns="36000" tIns="9000" bIns="9000"/>
+                    <a:lstStyle/>
+                    <a:p>
+                      <a:pPr algn="r"/>
+                      <a:r>
+                        <a:rPr sz="850" b="1">
+                          <a:solidFill>
+                            <a:srgbClr val="152130"/>
+                          </a:solidFill>
+                          <a:latin typeface="Arial"/>
+                        </a:rPr>
+                        <a:t>12.9</a:t>
+                      </a:r>
+                    </a:p>
+                  </a:txBody>
+                  <a:tcPr>
+                    <a:solidFill>
+                      <a:srgbClr val="F6F7F9"/>
+                    </a:solidFill>
+                  </a:tcPr>
+                </a:tc>
+                <a:tc>
+                  <a:txBody>
+                    <a:bodyPr wrap="none" lIns="36000" rIns="36000" tIns="9000" bIns="9000"/>
+                    <a:lstStyle/>
+                    <a:p>
+                      <a:pPr algn="r"/>
+                      <a:r>
+                        <a:rPr sz="850" b="1">
+                          <a:solidFill>
+                            <a:srgbClr val="152130"/>
+                          </a:solidFill>
+                          <a:latin typeface="Arial"/>
+                        </a:rPr>
+                        <a:t>5.8</a:t>
+                      </a:r>
+                    </a:p>
+                  </a:txBody>
+                  <a:tcPr>
+                    <a:solidFill>
+                      <a:srgbClr val="F6F7F9"/>
+                    </a:solidFill>
+                  </a:tcPr>
+                </a:tc>
+                <a:tc>
+                  <a:txBody>
+                    <a:bodyPr wrap="none" lIns="36000" rIns="36000" tIns="9000" bIns="9000"/>
+                    <a:lstStyle/>
+                    <a:p>
+                      <a:pPr algn="r"/>
+                      <a:r>
+                        <a:rPr sz="850" b="1">
+                          <a:solidFill>
+                            <a:srgbClr val="152130"/>
+                          </a:solidFill>
+                          <a:latin typeface="Arial"/>
+                        </a:rPr>
+                        <a:t>3.8</a:t>
+                      </a:r>
+                    </a:p>
+                  </a:txBody>
+                  <a:tcPr>
+                    <a:solidFill>
+                      <a:srgbClr val="F6F7F9"/>
+                    </a:solidFill>
+                  </a:tcPr>
+                </a:tc>
+                <a:tc>
+                  <a:txBody>
+                    <a:bodyPr wrap="none" lIns="36000" rIns="36000" tIns="9000" bIns="9000"/>
+                    <a:lstStyle/>
+                    <a:p>
+                      <a:pPr algn="r"/>
+                      <a:r>
+                        <a:rPr sz="850" b="1">
+                          <a:solidFill>
+                            <a:srgbClr val="152130"/>
+                          </a:solidFill>
+                          <a:latin typeface="Arial"/>
+                        </a:rPr>
+                        <a:t>2.3</a:t>
+                      </a:r>
+                    </a:p>
+                  </a:txBody>
+                  <a:tcPr>
+                    <a:solidFill>
+                      <a:srgbClr val="F6F7F9"/>
+                    </a:solidFill>
+                  </a:tcPr>
+                </a:tc>
+              </a:tr>
+              <a:tr h="310896">
+                <a:tc>
+                  <a:txBody>
+                    <a:bodyPr wrap="none" lIns="36000" rIns="36000" tIns="9000" bIns="9000"/>
+                    <a:lstStyle/>
+                    <a:p>
+                      <a:pPr algn="l"/>
+                      <a:r>
+                        <a:rPr sz="850" b="0">
+                          <a:solidFill>
+                            <a:srgbClr val="152130"/>
+                          </a:solidFill>
+                          <a:latin typeface="Arial"/>
+                        </a:rPr>
+                        <a:t>New Op. Income margin %</a:t>
+                      </a:r>
+                    </a:p>
+                  </a:txBody>
+                  <a:tcPr>
+                    <a:solidFill>
+                      <a:srgbClr val="FFFFFF"/>
+                    </a:solidFill>
+                  </a:tcPr>
+                </a:tc>
+                <a:tc>
+                  <a:txBody>
+                    <a:bodyPr wrap="none" lIns="36000" rIns="36000" tIns="9000" bIns="9000"/>
+                    <a:lstStyle/>
+                    <a:p>
+                      <a:pPr algn="r"/>
+                      <a:r>
+                        <a:rPr sz="850" b="0">
+                          <a:solidFill>
+                            <a:srgbClr val="556A83"/>
+                          </a:solidFill>
+                          <a:latin typeface="Arial"/>
+                        </a:rPr>
+                        <a:t>4.1%</a:t>
+                      </a:r>
+                    </a:p>
+                  </a:txBody>
+                  <a:tcPr>
+                    <a:solidFill>
+                      <a:srgbClr val="FFFFFF"/>
+                    </a:solidFill>
+                  </a:tcPr>
+                </a:tc>
+                <a:tc>
+                  <a:txBody>
+                    <a:bodyPr wrap="none" lIns="36000" rIns="36000" tIns="9000" bIns="9000"/>
+                    <a:lstStyle/>
+                    <a:p>
+                      <a:pPr algn="r"/>
+                      <a:r>
+                        <a:rPr sz="850" b="0">
+                          <a:solidFill>
+                            <a:srgbClr val="556A83"/>
+                          </a:solidFill>
+                          <a:latin typeface="Arial"/>
+                        </a:rPr>
+                        <a:t>5.9%</a:t>
+                      </a:r>
+                    </a:p>
+                  </a:txBody>
+                  <a:tcPr>
+                    <a:solidFill>
+                      <a:srgbClr val="FFFFFF"/>
+                    </a:solidFill>
+                  </a:tcPr>
+                </a:tc>
+                <a:tc>
+                  <a:txBody>
+                    <a:bodyPr wrap="none" lIns="36000" rIns="36000" tIns="9000" bIns="9000"/>
+                    <a:lstStyle/>
+                    <a:p>
+                      <a:pPr algn="r"/>
+                      <a:r>
+                        <a:rPr sz="850" b="0">
+                          <a:solidFill>
+                            <a:srgbClr val="556A83"/>
+                          </a:solidFill>
+                          <a:latin typeface="Arial"/>
+                        </a:rPr>
+                        <a:t>5.3%</a:t>
+                      </a:r>
+                    </a:p>
+                  </a:txBody>
+                  <a:tcPr>
+                    <a:solidFill>
+                      <a:srgbClr val="FFFFFF"/>
+                    </a:solidFill>
+                  </a:tcPr>
+                </a:tc>
+                <a:tc>
+                  <a:txBody>
+                    <a:bodyPr wrap="none" lIns="36000" rIns="36000" tIns="9000" bIns="9000"/>
+                    <a:lstStyle/>
+                    <a:p>
+                      <a:pPr algn="r"/>
+                      <a:r>
+                        <a:rPr sz="850" b="0">
+                          <a:solidFill>
+                            <a:srgbClr val="556A83"/>
+                          </a:solidFill>
+                          <a:latin typeface="Arial"/>
+                        </a:rPr>
+                        <a:t>4.5%</a:t>
+                      </a:r>
+                    </a:p>
+                  </a:txBody>
+                  <a:tcPr>
+                    <a:solidFill>
+                      <a:srgbClr val="FFFFFF"/>
+                    </a:solidFill>
+                  </a:tcPr>
+                </a:tc>
+                <a:tc>
+                  <a:txBody>
+                    <a:bodyPr wrap="none" lIns="36000" rIns="36000" tIns="9000" bIns="9000"/>
+                    <a:lstStyle/>
+                    <a:p>
+                      <a:pPr algn="r"/>
+                      <a:r>
+                        <a:rPr sz="850" b="0">
+                          <a:solidFill>
+                            <a:srgbClr val="556A83"/>
+                          </a:solidFill>
+                          <a:latin typeface="Arial"/>
+                        </a:rPr>
+                        <a:t>4.2%</a:t>
+                      </a:r>
+                    </a:p>
+                  </a:txBody>
+                  <a:tcPr>
+                    <a:solidFill>
+                      <a:srgbClr val="FFFFFF"/>
+                    </a:solidFill>
+                  </a:tcPr>
+                </a:tc>
+                <a:tc>
+                  <a:txBody>
+                    <a:bodyPr wrap="none" lIns="36000" rIns="36000" tIns="9000" bIns="9000"/>
+                    <a:lstStyle/>
+                    <a:p>
+                      <a:pPr algn="r"/>
+                      <a:r>
+                        <a:rPr sz="850" b="0">
+                          <a:solidFill>
+                            <a:srgbClr val="556A83"/>
+                          </a:solidFill>
+                          <a:latin typeface="Arial"/>
+                        </a:rPr>
+                        <a:t>3.7%</a:t>
+                      </a:r>
+                    </a:p>
+                  </a:txBody>
+                  <a:tcPr>
+                    <a:solidFill>
+                      <a:srgbClr val="FFFFFF"/>
+                    </a:solidFill>
+                  </a:tcPr>
+                </a:tc>
+                <a:tc>
+                  <a:txBody>
+                    <a:bodyPr wrap="none" lIns="36000" rIns="36000" tIns="9000" bIns="9000"/>
+                    <a:lstStyle/>
+                    <a:p>
+                      <a:pPr algn="r"/>
+                      <a:r>
+                        <a:rPr sz="850" b="0">
+                          <a:solidFill>
+                            <a:srgbClr val="556A83"/>
+                          </a:solidFill>
+                          <a:latin typeface="Arial"/>
+                        </a:rPr>
+                        <a:t>2.8%</a:t>
+                      </a:r>
+                    </a:p>
+                  </a:txBody>
+                  <a:tcPr>
+                    <a:solidFill>
+                      <a:srgbClr val="FFFFFF"/>
+                    </a:solidFill>
+                  </a:tcPr>
+                </a:tc>
+                <a:tc>
+                  <a:txBody>
+                    <a:bodyPr wrap="none" lIns="36000" rIns="36000" tIns="9000" bIns="9000"/>
+                    <a:lstStyle/>
+                    <a:p>
+                      <a:pPr algn="r"/>
+                      <a:r>
+                        <a:rPr sz="850" b="0">
+                          <a:solidFill>
+                            <a:srgbClr val="556A83"/>
+                          </a:solidFill>
+                          <a:latin typeface="Arial"/>
+                        </a:rPr>
+                        <a:t>1.5%</a:t>
+                      </a:r>
+                    </a:p>
+                  </a:txBody>
+                  <a:tcPr>
+                    <a:solidFill>
+                      <a:srgbClr val="FFFFFF"/>
+                    </a:solidFill>
+                  </a:tcPr>
+                </a:tc>
+                <a:tc>
+                  <a:txBody>
+                    <a:bodyPr wrap="none" lIns="36000" rIns="36000" tIns="9000" bIns="9000"/>
+                    <a:lstStyle/>
+                    <a:p>
+                      <a:pPr algn="r"/>
+                      <a:r>
+                        <a:rPr sz="850" b="0">
+                          <a:solidFill>
+                            <a:srgbClr val="556A83"/>
+                          </a:solidFill>
+                          <a:latin typeface="Arial"/>
+                        </a:rPr>
+                        <a:t>1.0%</a:t>
+                      </a:r>
+                    </a:p>
+                  </a:txBody>
+                  <a:tcPr>
+                    <a:solidFill>
+                      <a:srgbClr val="FFFFFF"/>
+                    </a:solidFill>
+                  </a:tcPr>
+                </a:tc>
+                <a:tc>
+                  <a:txBody>
+                    <a:bodyPr wrap="none" lIns="36000" rIns="36000" tIns="9000" bIns="9000"/>
+                    <a:lstStyle/>
+                    <a:p>
+                      <a:pPr algn="r"/>
+                      <a:r>
+                        <a:rPr sz="850" b="0">
+                          <a:solidFill>
+                            <a:srgbClr val="556A83"/>
+                          </a:solidFill>
+                          <a:latin typeface="Arial"/>
+                        </a:rPr>
+                        <a:t>0.6%</a:t>
+                      </a:r>
+                    </a:p>
+                  </a:txBody>
+                  <a:tcPr>
+                    <a:solidFill>
+                      <a:srgbClr val="FFFFFF"/>
+                    </a:solidFill>
+                  </a:tcPr>
+                </a:tc>
+              </a:tr>
+              <a:tr h="310896">
+                <a:tc>
+                  <a:txBody>
+                    <a:bodyPr wrap="none" lIns="36000" rIns="36000" tIns="9000" bIns="9000"/>
+                    <a:lstStyle/>
+                    <a:p>
+                      <a:pPr algn="l"/>
+                      <a:r>
+                        <a:rPr sz="850" b="1">
+                          <a:solidFill>
+                            <a:srgbClr val="152130"/>
+                          </a:solidFill>
+                          <a:latin typeface="Arial"/>
+                        </a:rPr>
+                        <a:t>Enterprise Value (EV)</a:t>
+                      </a:r>
+                    </a:p>
+                  </a:txBody>
+                  <a:tcPr>
+                    <a:solidFill>
+                      <a:srgbClr val="F6F7F9"/>
+                    </a:solidFill>
+                  </a:tcPr>
+                </a:tc>
+                <a:tc>
+                  <a:txBody>
+                    <a:bodyPr wrap="none" lIns="36000" rIns="36000" tIns="9000" bIns="9000"/>
+                    <a:lstStyle/>
+                    <a:p>
+                      <a:pPr algn="r"/>
+                      <a:r>
+                        <a:rPr sz="850" b="1">
+                          <a:solidFill>
+                            <a:srgbClr val="152130"/>
+                          </a:solidFill>
+                          <a:latin typeface="Arial"/>
+                        </a:rPr>
+                        <a:t>221.1</a:t>
+                      </a:r>
+                    </a:p>
+                  </a:txBody>
+                  <a:tcPr>
+                    <a:solidFill>
+                      <a:srgbClr val="F6F7F9"/>
+                    </a:solidFill>
+                  </a:tcPr>
+                </a:tc>
+                <a:tc>
+                  <a:txBody>
+                    <a:bodyPr wrap="none" lIns="36000" rIns="36000" tIns="9000" bIns="9000"/>
+                    <a:lstStyle/>
+                    <a:p>
+                      <a:pPr algn="r"/>
+                      <a:r>
+                        <a:rPr sz="850" b="1">
+                          <a:solidFill>
+                            <a:srgbClr val="152130"/>
+                          </a:solidFill>
+                          <a:latin typeface="Arial"/>
+                        </a:rPr>
+                        <a:t>206.6</a:t>
+                      </a:r>
+                    </a:p>
+                  </a:txBody>
+                  <a:tcPr>
+                    <a:solidFill>
+                      <a:srgbClr val="F6F7F9"/>
+                    </a:solidFill>
+                  </a:tcPr>
+                </a:tc>
+                <a:tc>
+                  <a:txBody>
+                    <a:bodyPr wrap="none" lIns="36000" rIns="36000" tIns="9000" bIns="9000"/>
+                    <a:lstStyle/>
+                    <a:p>
+                      <a:pPr algn="r"/>
+                      <a:r>
+                        <a:rPr sz="850" b="1">
+                          <a:solidFill>
+                            <a:srgbClr val="152130"/>
+                          </a:solidFill>
+                          <a:latin typeface="Arial"/>
+                        </a:rPr>
+                        <a:t>221.7</a:t>
+                      </a:r>
+                    </a:p>
+                  </a:txBody>
+                  <a:tcPr>
+                    <a:solidFill>
+                      <a:srgbClr val="F6F7F9"/>
+                    </a:solidFill>
+                  </a:tcPr>
+                </a:tc>
+                <a:tc>
+                  <a:txBody>
+                    <a:bodyPr wrap="none" lIns="36000" rIns="36000" tIns="9000" bIns="9000"/>
+                    <a:lstStyle/>
+                    <a:p>
+                      <a:pPr algn="r"/>
+                      <a:r>
+                        <a:rPr sz="850" b="1">
+                          <a:solidFill>
+                            <a:srgbClr val="152130"/>
+                          </a:solidFill>
+                          <a:latin typeface="Arial"/>
+                        </a:rPr>
+                        <a:t>172.4</a:t>
+                      </a:r>
+                    </a:p>
+                  </a:txBody>
+                  <a:tcPr>
+                    <a:solidFill>
+                      <a:srgbClr val="F6F7F9"/>
+                    </a:solidFill>
+                  </a:tcPr>
+                </a:tc>
+                <a:tc>
+                  <a:txBody>
+                    <a:bodyPr wrap="none" lIns="36000" rIns="36000" tIns="9000" bIns="9000"/>
+                    <a:lstStyle/>
+                    <a:p>
+                      <a:pPr algn="r"/>
+                      <a:r>
+                        <a:rPr sz="850" b="1">
+                          <a:solidFill>
+                            <a:srgbClr val="152130"/>
+                          </a:solidFill>
+                          <a:latin typeface="Arial"/>
+                        </a:rPr>
+                        <a:t>203.4</a:t>
+                      </a:r>
+                    </a:p>
+                  </a:txBody>
+                  <a:tcPr>
+                    <a:solidFill>
+                      <a:srgbClr val="F6F7F9"/>
+                    </a:solidFill>
+                  </a:tcPr>
+                </a:tc>
+                <a:tc>
+                  <a:txBody>
+                    <a:bodyPr wrap="none" lIns="36000" rIns="36000" tIns="9000" bIns="9000"/>
+                    <a:lstStyle/>
+                    <a:p>
+                      <a:pPr algn="r"/>
+                      <a:r>
+                        <a:rPr sz="850" b="1">
+                          <a:solidFill>
+                            <a:srgbClr val="152130"/>
+                          </a:solidFill>
+                          <a:latin typeface="Arial"/>
+                        </a:rPr>
+                        <a:t>167.5</a:t>
+                      </a:r>
+                    </a:p>
+                  </a:txBody>
+                  <a:tcPr>
+                    <a:solidFill>
+                      <a:srgbClr val="F6F7F9"/>
+                    </a:solidFill>
+                  </a:tcPr>
+                </a:tc>
+                <a:tc>
+                  <a:txBody>
+                    <a:bodyPr wrap="none" lIns="36000" rIns="36000" tIns="9000" bIns="9000"/>
+                    <a:lstStyle/>
+                    <a:p>
+                      <a:pPr algn="r"/>
+                      <a:r>
+                        <a:rPr sz="850" b="1">
+                          <a:solidFill>
+                            <a:srgbClr val="152130"/>
+                          </a:solidFill>
+                          <a:latin typeface="Arial"/>
+                        </a:rPr>
+                        <a:t>122.2</a:t>
+                      </a:r>
+                    </a:p>
+                  </a:txBody>
+                  <a:tcPr>
+                    <a:solidFill>
+                      <a:srgbClr val="F6F7F9"/>
+                    </a:solidFill>
+                  </a:tcPr>
+                </a:tc>
+                <a:tc>
+                  <a:txBody>
+                    <a:bodyPr wrap="none" lIns="36000" rIns="36000" tIns="9000" bIns="9000"/>
+                    <a:lstStyle/>
+                    <a:p>
+                      <a:pPr algn="r"/>
+                      <a:r>
+                        <a:rPr sz="850" b="1">
+                          <a:solidFill>
+                            <a:srgbClr val="152130"/>
+                          </a:solidFill>
+                          <a:latin typeface="Arial"/>
+                        </a:rPr>
+                        <a:t>105.2</a:t>
+                      </a:r>
+                    </a:p>
+                  </a:txBody>
+                  <a:tcPr>
+                    <a:solidFill>
+                      <a:srgbClr val="F6F7F9"/>
+                    </a:solidFill>
+                  </a:tcPr>
+                </a:tc>
+                <a:tc>
+                  <a:txBody>
+                    <a:bodyPr wrap="none" lIns="36000" rIns="36000" tIns="9000" bIns="9000"/>
+                    <a:lstStyle/>
+                    <a:p>
+                      <a:pPr algn="r"/>
+                      <a:r>
+                        <a:rPr sz="850" b="1">
+                          <a:solidFill>
+                            <a:srgbClr val="152130"/>
+                          </a:solidFill>
+                          <a:latin typeface="Arial"/>
+                        </a:rPr>
+                        <a:t>109.0</a:t>
+                      </a:r>
+                    </a:p>
+                  </a:txBody>
+                  <a:tcPr>
+                    <a:solidFill>
+                      <a:srgbClr val="F6F7F9"/>
+                    </a:solidFill>
+                  </a:tcPr>
+                </a:tc>
+                <a:tc>
+                  <a:txBody>
+                    <a:bodyPr wrap="none" lIns="36000" rIns="36000" tIns="9000" bIns="9000"/>
+                    <a:lstStyle/>
+                    <a:p>
+                      <a:pPr algn="r"/>
+                      <a:r>
+                        <a:rPr sz="850" b="1">
+                          <a:solidFill>
+                            <a:srgbClr val="152130"/>
+                          </a:solidFill>
+                          <a:latin typeface="Arial"/>
+                        </a:rPr>
+                        <a:t>87.2</a:t>
+                      </a:r>
+                    </a:p>
+                  </a:txBody>
+                  <a:tcPr>
+                    <a:solidFill>
+                      <a:srgbClr val="F6F7F9"/>
+                    </a:solidFill>
+                  </a:tcPr>
+                </a:tc>
+              </a:tr>
+              <a:tr h="310896">
+                <a:tc>
+                  <a:txBody>
+                    <a:bodyPr wrap="none" lIns="36000" rIns="36000" tIns="9000" bIns="9000"/>
+                    <a:lstStyle/>
+                    <a:p>
+                      <a:pPr algn="l"/>
+                      <a:r>
+                        <a:rPr sz="850" b="1">
+                          <a:solidFill>
+                            <a:srgbClr val="152130"/>
+                          </a:solidFill>
+                          <a:latin typeface="Arial"/>
+                        </a:rPr>
+                        <a:t>Market capitalisation</a:t>
+                      </a:r>
+                    </a:p>
+                  </a:txBody>
+                  <a:tcPr>
+                    <a:solidFill>
+                      <a:srgbClr val="FFFFFF"/>
+                    </a:solidFill>
+                  </a:tcPr>
+                </a:tc>
+                <a:tc>
+                  <a:txBody>
+                    <a:bodyPr wrap="none" lIns="36000" rIns="36000" tIns="9000" bIns="9000"/>
+                    <a:lstStyle/>
+                    <a:p>
+                      <a:pPr algn="r"/>
+                      <a:r>
+                        <a:rPr sz="850" b="1">
+                          <a:solidFill>
+                            <a:srgbClr val="152130"/>
+                          </a:solidFill>
+                          <a:latin typeface="Arial"/>
+                        </a:rPr>
+                        <a:t>104.8</a:t>
+                      </a:r>
+                    </a:p>
+                  </a:txBody>
+                  <a:tcPr>
+                    <a:solidFill>
+                      <a:srgbClr val="FFFFFF"/>
+                    </a:solidFill>
+                  </a:tcPr>
+                </a:tc>
+                <a:tc>
+                  <a:txBody>
+                    <a:bodyPr wrap="none" lIns="36000" rIns="36000" tIns="9000" bIns="9000"/>
+                    <a:lstStyle/>
+                    <a:p>
+                      <a:pPr algn="r"/>
+                      <a:r>
+                        <a:rPr sz="850" b="1">
+                          <a:solidFill>
+                            <a:srgbClr val="152130"/>
+                          </a:solidFill>
+                          <a:latin typeface="Arial"/>
+                        </a:rPr>
+                        <a:t>132.6</a:t>
+                      </a:r>
+                    </a:p>
+                  </a:txBody>
+                  <a:tcPr>
+                    <a:solidFill>
+                      <a:srgbClr val="FFFFFF"/>
+                    </a:solidFill>
+                  </a:tcPr>
+                </a:tc>
+                <a:tc>
+                  <a:txBody>
+                    <a:bodyPr wrap="none" lIns="36000" rIns="36000" tIns="9000" bIns="9000"/>
+                    <a:lstStyle/>
+                    <a:p>
+                      <a:pPr algn="r"/>
+                      <a:r>
+                        <a:rPr sz="850" b="1">
+                          <a:solidFill>
+                            <a:srgbClr val="152130"/>
+                          </a:solidFill>
+                          <a:latin typeface="Arial"/>
+                        </a:rPr>
+                        <a:t>140.9</a:t>
+                      </a:r>
+                    </a:p>
+                  </a:txBody>
+                  <a:tcPr>
+                    <a:solidFill>
+                      <a:srgbClr val="FFFFFF"/>
+                    </a:solidFill>
+                  </a:tcPr>
+                </a:tc>
+                <a:tc>
+                  <a:txBody>
+                    <a:bodyPr wrap="none" lIns="36000" rIns="36000" tIns="9000" bIns="9000"/>
+                    <a:lstStyle/>
+                    <a:p>
+                      <a:pPr algn="r"/>
+                      <a:r>
+                        <a:rPr sz="850" b="1">
+                          <a:solidFill>
+                            <a:srgbClr val="152130"/>
+                          </a:solidFill>
+                          <a:latin typeface="Arial"/>
+                        </a:rPr>
+                        <a:t>108.6</a:t>
+                      </a:r>
+                    </a:p>
+                  </a:txBody>
+                  <a:tcPr>
+                    <a:solidFill>
+                      <a:srgbClr val="FFFFFF"/>
+                    </a:solidFill>
+                  </a:tcPr>
+                </a:tc>
+                <a:tc>
+                  <a:txBody>
+                    <a:bodyPr wrap="none" lIns="36000" rIns="36000" tIns="9000" bIns="9000"/>
+                    <a:lstStyle/>
+                    <a:p>
+                      <a:pPr algn="r"/>
+                      <a:r>
+                        <a:rPr sz="850" b="1">
+                          <a:solidFill>
+                            <a:srgbClr val="152130"/>
+                          </a:solidFill>
+                          <a:latin typeface="Arial"/>
+                        </a:rPr>
+                        <a:t>127.8</a:t>
+                      </a:r>
+                    </a:p>
+                  </a:txBody>
+                  <a:tcPr>
+                    <a:solidFill>
+                      <a:srgbClr val="FFFFFF"/>
+                    </a:solidFill>
+                  </a:tcPr>
+                </a:tc>
+                <a:tc>
+                  <a:txBody>
+                    <a:bodyPr wrap="none" lIns="36000" rIns="36000" tIns="9000" bIns="9000"/>
+                    <a:lstStyle/>
+                    <a:p>
+                      <a:pPr algn="r"/>
+                      <a:r>
+                        <a:rPr sz="850" b="1">
+                          <a:solidFill>
+                            <a:srgbClr val="152130"/>
+                          </a:solidFill>
+                          <a:latin typeface="Arial"/>
+                        </a:rPr>
+                        <a:t>119.9</a:t>
+                      </a:r>
+                    </a:p>
+                  </a:txBody>
+                  <a:tcPr>
+                    <a:solidFill>
+                      <a:srgbClr val="FFFFFF"/>
+                    </a:solidFill>
+                  </a:tcPr>
+                </a:tc>
+                <a:tc>
+                  <a:txBody>
+                    <a:bodyPr wrap="none" lIns="36000" rIns="36000" tIns="9000" bIns="9000"/>
+                    <a:lstStyle/>
+                    <a:p>
+                      <a:pPr algn="r"/>
+                      <a:r>
+                        <a:rPr sz="850" b="1">
+                          <a:solidFill>
+                            <a:srgbClr val="152130"/>
+                          </a:solidFill>
+                          <a:latin typeface="Arial"/>
+                        </a:rPr>
+                        <a:t>90.0</a:t>
+                      </a:r>
+                    </a:p>
+                  </a:txBody>
+                  <a:tcPr>
+                    <a:solidFill>
+                      <a:srgbClr val="FFFFFF"/>
+                    </a:solidFill>
+                  </a:tcPr>
+                </a:tc>
+                <a:tc>
+                  <a:txBody>
+                    <a:bodyPr wrap="none" lIns="36000" rIns="36000" tIns="9000" bIns="9000"/>
+                    <a:lstStyle/>
+                    <a:p>
+                      <a:pPr algn="r"/>
+                      <a:r>
+                        <a:rPr sz="850" b="1">
+                          <a:solidFill>
+                            <a:srgbClr val="152130"/>
+                          </a:solidFill>
+                          <a:latin typeface="Arial"/>
+                        </a:rPr>
+                        <a:t>61.8</a:t>
+                      </a:r>
+                    </a:p>
+                  </a:txBody>
+                  <a:tcPr>
+                    <a:solidFill>
+                      <a:srgbClr val="FFFFFF"/>
+                    </a:solidFill>
+                  </a:tcPr>
+                </a:tc>
+                <a:tc>
+                  <a:txBody>
+                    <a:bodyPr wrap="none" lIns="36000" rIns="36000" tIns="9000" bIns="9000"/>
+                    <a:lstStyle/>
+                    <a:p>
+                      <a:pPr algn="r"/>
+                      <a:r>
+                        <a:rPr sz="850" b="1">
+                          <a:solidFill>
+                            <a:srgbClr val="152130"/>
+                          </a:solidFill>
+                          <a:latin typeface="Arial"/>
+                        </a:rPr>
+                        <a:t>73.3</a:t>
+                      </a:r>
+                    </a:p>
+                  </a:txBody>
+                  <a:tcPr>
+                    <a:solidFill>
+                      <a:srgbClr val="FFFFFF"/>
+                    </a:solidFill>
+                  </a:tcPr>
+                </a:tc>
+                <a:tc>
+                  <a:txBody>
+                    <a:bodyPr wrap="none" lIns="36000" rIns="36000" tIns="9000" bIns="9000"/>
+                    <a:lstStyle/>
+                    <a:p>
+                      <a:pPr algn="r"/>
+                      <a:r>
+                        <a:rPr sz="850" b="1">
+                          <a:solidFill>
+                            <a:srgbClr val="152130"/>
+                          </a:solidFill>
+                          <a:latin typeface="Arial"/>
+                        </a:rPr>
+                        <a:t>58.3</a:t>
+                      </a:r>
+                    </a:p>
+                  </a:txBody>
+                  <a:tcPr>
+                    <a:solidFill>
+                      <a:srgbClr val="FFFFFF"/>
+                    </a:solidFill>
+                  </a:tcPr>
+                </a:tc>
+              </a:tr>
+              <a:tr h="310896">
+                <a:tc>
+                  <a:txBody>
+                    <a:bodyPr wrap="none" lIns="36000" rIns="36000" tIns="9000" bIns="9000"/>
+                    <a:lstStyle/>
+                    <a:p>
+                      <a:pPr algn="l"/>
+                      <a:r>
+                        <a:rPr sz="850" b="0">
+                          <a:solidFill>
+                            <a:srgbClr val="152130"/>
+                          </a:solidFill>
+                          <a:latin typeface="Arial"/>
+                        </a:rPr>
+                        <a:t>EV / Sales</a:t>
+                      </a:r>
+                    </a:p>
+                  </a:txBody>
+                  <a:tcPr>
+                    <a:solidFill>
+                      <a:srgbClr val="F6F7F9"/>
+                    </a:solidFill>
+                  </a:tcPr>
+                </a:tc>
+                <a:tc>
+                  <a:txBody>
+                    <a:bodyPr wrap="none" lIns="36000" rIns="36000" tIns="9000" bIns="9000"/>
+                    <a:lstStyle/>
+                    <a:p>
+                      <a:pPr algn="r"/>
+                      <a:r>
+                        <a:rPr sz="850" b="0">
+                          <a:solidFill>
+                            <a:srgbClr val="556A83"/>
+                          </a:solidFill>
+                          <a:latin typeface="Arial"/>
+                        </a:rPr>
+                        <a:t>0.56x</a:t>
+                      </a:r>
+                    </a:p>
+                  </a:txBody>
+                  <a:tcPr>
+                    <a:solidFill>
+                      <a:srgbClr val="F6F7F9"/>
+                    </a:solidFill>
+                  </a:tcPr>
+                </a:tc>
+                <a:tc>
+                  <a:txBody>
+                    <a:bodyPr wrap="none" lIns="36000" rIns="36000" tIns="9000" bIns="9000"/>
+                    <a:lstStyle/>
+                    <a:p>
+                      <a:pPr algn="r"/>
+                      <a:r>
+                        <a:rPr sz="850" b="0">
+                          <a:solidFill>
+                            <a:srgbClr val="556A83"/>
+                          </a:solidFill>
+                          <a:latin typeface="Arial"/>
+                        </a:rPr>
+                        <a:t>0.48x</a:t>
+                      </a:r>
+                    </a:p>
+                  </a:txBody>
+                  <a:tcPr>
+                    <a:solidFill>
+                      <a:srgbClr val="F6F7F9"/>
+                    </a:solidFill>
+                  </a:tcPr>
+                </a:tc>
+                <a:tc>
+                  <a:txBody>
+                    <a:bodyPr wrap="none" lIns="36000" rIns="36000" tIns="9000" bIns="9000"/>
+                    <a:lstStyle/>
+                    <a:p>
+                      <a:pPr algn="r"/>
+                      <a:r>
+                        <a:rPr sz="850" b="0">
+                          <a:solidFill>
+                            <a:srgbClr val="556A83"/>
+                          </a:solidFill>
+                          <a:latin typeface="Arial"/>
+                        </a:rPr>
+                        <a:t>0.48x</a:t>
+                      </a:r>
+                    </a:p>
+                  </a:txBody>
+                  <a:tcPr>
+                    <a:solidFill>
+                      <a:srgbClr val="F6F7F9"/>
+                    </a:solidFill>
+                  </a:tcPr>
+                </a:tc>
+                <a:tc>
+                  <a:txBody>
+                    <a:bodyPr wrap="none" lIns="36000" rIns="36000" tIns="9000" bIns="9000"/>
+                    <a:lstStyle/>
+                    <a:p>
+                      <a:pPr algn="r"/>
+                      <a:r>
+                        <a:rPr sz="850" b="0">
+                          <a:solidFill>
+                            <a:srgbClr val="556A83"/>
+                          </a:solidFill>
+                          <a:latin typeface="Arial"/>
+                        </a:rPr>
+                        <a:t>0.36x</a:t>
+                      </a:r>
+                    </a:p>
+                  </a:txBody>
+                  <a:tcPr>
+                    <a:solidFill>
+                      <a:srgbClr val="F6F7F9"/>
+                    </a:solidFill>
+                  </a:tcPr>
+                </a:tc>
+                <a:tc>
+                  <a:txBody>
+                    <a:bodyPr wrap="none" lIns="36000" rIns="36000" tIns="9000" bIns="9000"/>
+                    <a:lstStyle/>
+                    <a:p>
+                      <a:pPr algn="r"/>
+                      <a:r>
+                        <a:rPr sz="850" b="0">
+                          <a:solidFill>
+                            <a:srgbClr val="556A83"/>
+                          </a:solidFill>
+                          <a:latin typeface="Arial"/>
+                        </a:rPr>
+                        <a:t>0.43x</a:t>
+                      </a:r>
+                    </a:p>
+                  </a:txBody>
+                  <a:tcPr>
+                    <a:solidFill>
+                      <a:srgbClr val="F6F7F9"/>
+                    </a:solidFill>
+                  </a:tcPr>
+                </a:tc>
+                <a:tc>
+                  <a:txBody>
+                    <a:bodyPr wrap="none" lIns="36000" rIns="36000" tIns="9000" bIns="9000"/>
+                    <a:lstStyle/>
+                    <a:p>
+                      <a:pPr algn="r"/>
+                      <a:r>
+                        <a:rPr sz="850" b="0">
+                          <a:solidFill>
+                            <a:srgbClr val="556A83"/>
+                          </a:solidFill>
+                          <a:latin typeface="Arial"/>
+                        </a:rPr>
+                        <a:t>0.40x</a:t>
+                      </a:r>
+                    </a:p>
+                  </a:txBody>
+                  <a:tcPr>
+                    <a:solidFill>
+                      <a:srgbClr val="F6F7F9"/>
+                    </a:solidFill>
+                  </a:tcPr>
+                </a:tc>
+                <a:tc>
+                  <a:txBody>
+                    <a:bodyPr wrap="none" lIns="36000" rIns="36000" tIns="9000" bIns="9000"/>
+                    <a:lstStyle/>
+                    <a:p>
+                      <a:pPr algn="r"/>
+                      <a:r>
+                        <a:rPr sz="850" b="0">
+                          <a:solidFill>
+                            <a:srgbClr val="556A83"/>
+                          </a:solidFill>
+                          <a:latin typeface="Arial"/>
+                        </a:rPr>
+                        <a:t>0.27x</a:t>
+                      </a:r>
+                    </a:p>
+                  </a:txBody>
+                  <a:tcPr>
+                    <a:solidFill>
+                      <a:srgbClr val="F6F7F9"/>
+                    </a:solidFill>
+                  </a:tcPr>
+                </a:tc>
+                <a:tc>
+                  <a:txBody>
+                    <a:bodyPr wrap="none" lIns="36000" rIns="36000" tIns="9000" bIns="9000"/>
+                    <a:lstStyle/>
+                    <a:p>
+                      <a:pPr algn="r"/>
+                      <a:r>
+                        <a:rPr sz="850" b="0">
+                          <a:solidFill>
+                            <a:srgbClr val="556A83"/>
+                          </a:solidFill>
+                          <a:latin typeface="Arial"/>
+                        </a:rPr>
+                        <a:t>0.27x</a:t>
+                      </a:r>
+                    </a:p>
+                  </a:txBody>
+                  <a:tcPr>
+                    <a:solidFill>
+                      <a:srgbClr val="F6F7F9"/>
+                    </a:solidFill>
+                  </a:tcPr>
+                </a:tc>
+                <a:tc>
+                  <a:txBody>
+                    <a:bodyPr wrap="none" lIns="36000" rIns="36000" tIns="9000" bIns="9000"/>
+                    <a:lstStyle/>
+                    <a:p>
+                      <a:pPr algn="r"/>
+                      <a:r>
+                        <a:rPr sz="850" b="0">
+                          <a:solidFill>
+                            <a:srgbClr val="556A83"/>
+                          </a:solidFill>
+                          <a:latin typeface="Arial"/>
+                        </a:rPr>
+                        <a:t>0.28x</a:t>
+                      </a:r>
+                    </a:p>
+                  </a:txBody>
+                  <a:tcPr>
+                    <a:solidFill>
+                      <a:srgbClr val="F6F7F9"/>
+                    </a:solidFill>
+                  </a:tcPr>
+                </a:tc>
+                <a:tc>
+                  <a:txBody>
+                    <a:bodyPr wrap="none" lIns="36000" rIns="36000" tIns="9000" bIns="9000"/>
+                    <a:lstStyle/>
+                    <a:p>
+                      <a:pPr algn="r"/>
+                      <a:r>
+                        <a:rPr sz="850" b="0">
+                          <a:solidFill>
+                            <a:srgbClr val="556A83"/>
+                          </a:solidFill>
+                          <a:latin typeface="Arial"/>
+                        </a:rPr>
+                        <a:t>0.24x</a:t>
+                      </a:r>
+                    </a:p>
+                  </a:txBody>
+                  <a:tcPr>
+                    <a:solidFill>
+                      <a:srgbClr val="F6F7F9"/>
+                    </a:solidFill>
+                  </a:tcPr>
+                </a:tc>
+              </a:tr>
+              <a:tr h="310896">
+                <a:tc>
+                  <a:txBody>
+                    <a:bodyPr wrap="none" lIns="36000" rIns="36000" tIns="9000" bIns="9000"/>
+                    <a:lstStyle/>
+                    <a:p>
+                      <a:pPr algn="l"/>
+                      <a:r>
+                        <a:rPr sz="850" b="0">
+                          <a:solidFill>
+                            <a:srgbClr val="152130"/>
+                          </a:solidFill>
+                          <a:latin typeface="Arial"/>
+                        </a:rPr>
+                        <a:t>EV / EBITA</a:t>
+                      </a:r>
+                    </a:p>
+                  </a:txBody>
+                  <a:tcPr>
+                    <a:solidFill>
+                      <a:srgbClr val="FFFFFF"/>
+                    </a:solidFill>
+                  </a:tcPr>
+                </a:tc>
+                <a:tc>
+                  <a:txBody>
+                    <a:bodyPr wrap="none" lIns="36000" rIns="36000" tIns="9000" bIns="9000"/>
+                    <a:lstStyle/>
+                    <a:p>
+                      <a:pPr algn="r"/>
+                      <a:r>
+                        <a:rPr sz="850" b="0">
+                          <a:solidFill>
+                            <a:srgbClr val="556A83"/>
+                          </a:solidFill>
+                          <a:latin typeface="Arial"/>
+                        </a:rPr>
+                        <a:t>27.2x</a:t>
+                      </a:r>
+                    </a:p>
+                  </a:txBody>
+                  <a:tcPr>
+                    <a:solidFill>
+                      <a:srgbClr val="FFFFFF"/>
+                    </a:solidFill>
+                  </a:tcPr>
+                </a:tc>
+                <a:tc>
+                  <a:txBody>
+                    <a:bodyPr wrap="none" lIns="36000" rIns="36000" tIns="9000" bIns="9000"/>
+                    <a:lstStyle/>
+                    <a:p>
+                      <a:pPr algn="r"/>
+                      <a:r>
+                        <a:rPr sz="850" b="0">
+                          <a:solidFill>
+                            <a:srgbClr val="556A83"/>
+                          </a:solidFill>
+                          <a:latin typeface="Arial"/>
+                        </a:rPr>
+                        <a:t>15.4x</a:t>
+                      </a:r>
+                    </a:p>
+                  </a:txBody>
+                  <a:tcPr>
+                    <a:solidFill>
+                      <a:srgbClr val="FFFFFF"/>
+                    </a:solidFill>
+                  </a:tcPr>
+                </a:tc>
+                <a:tc>
+                  <a:txBody>
+                    <a:bodyPr wrap="none" lIns="36000" rIns="36000" tIns="9000" bIns="9000"/>
+                    <a:lstStyle/>
+                    <a:p>
+                      <a:pPr algn="r"/>
+                      <a:r>
+                        <a:rPr sz="850" b="0">
+                          <a:solidFill>
+                            <a:srgbClr val="556A83"/>
+                          </a:solidFill>
+                          <a:latin typeface="Arial"/>
+                        </a:rPr>
+                        <a:t>8.1x</a:t>
+                      </a:r>
+                    </a:p>
+                  </a:txBody>
+                  <a:tcPr>
+                    <a:solidFill>
+                      <a:srgbClr val="FFFFFF"/>
+                    </a:solidFill>
+                  </a:tcPr>
+                </a:tc>
+                <a:tc>
+                  <a:txBody>
+                    <a:bodyPr wrap="none" lIns="36000" rIns="36000" tIns="9000" bIns="9000"/>
+                    <a:lstStyle/>
+                    <a:p>
+                      <a:pPr algn="r"/>
+                      <a:r>
+                        <a:rPr sz="850" b="0">
+                          <a:solidFill>
+                            <a:srgbClr val="556A83"/>
+                          </a:solidFill>
+                          <a:latin typeface="Arial"/>
+                        </a:rPr>
+                        <a:t>15.4x</a:t>
+                      </a:r>
+                    </a:p>
+                  </a:txBody>
+                  <a:tcPr>
+                    <a:solidFill>
+                      <a:srgbClr val="FFFFFF"/>
+                    </a:solidFill>
+                  </a:tcPr>
+                </a:tc>
+                <a:tc>
+                  <a:txBody>
+                    <a:bodyPr wrap="none" lIns="36000" rIns="36000" tIns="9000" bIns="9000"/>
+                    <a:lstStyle/>
+                    <a:p>
+                      <a:pPr algn="r"/>
+                      <a:r>
+                        <a:rPr sz="850" b="0">
+                          <a:solidFill>
+                            <a:srgbClr val="556A83"/>
+                          </a:solidFill>
+                          <a:latin typeface="Arial"/>
+                        </a:rPr>
+                        <a:t>4.9x</a:t>
+                      </a:r>
+                    </a:p>
+                  </a:txBody>
+                  <a:tcPr>
+                    <a:solidFill>
+                      <a:srgbClr val="FFFFFF"/>
+                    </a:solidFill>
+                  </a:tcPr>
+                </a:tc>
+                <a:tc>
+                  <a:txBody>
+                    <a:bodyPr wrap="none" lIns="36000" rIns="36000" tIns="9000" bIns="9000"/>
+                    <a:lstStyle/>
+                    <a:p>
+                      <a:pPr algn="r"/>
+                      <a:r>
+                        <a:rPr sz="850" b="0">
+                          <a:solidFill>
+                            <a:srgbClr val="556A83"/>
+                          </a:solidFill>
+                          <a:latin typeface="Arial"/>
+                        </a:rPr>
+                        <a:t>9.9x</a:t>
+                      </a:r>
+                    </a:p>
+                  </a:txBody>
+                  <a:tcPr>
+                    <a:solidFill>
+                      <a:srgbClr val="FFFFFF"/>
+                    </a:solidFill>
+                  </a:tcPr>
+                </a:tc>
+                <a:tc>
+                  <a:txBody>
+                    <a:bodyPr wrap="none" lIns="36000" rIns="36000" tIns="9000" bIns="9000"/>
+                    <a:lstStyle/>
+                    <a:p>
+                      <a:pPr algn="r"/>
+                      <a:r>
+                        <a:rPr sz="850" b="0">
+                          <a:solidFill>
+                            <a:srgbClr val="556A83"/>
+                          </a:solidFill>
+                          <a:latin typeface="Arial"/>
+                        </a:rPr>
+                        <a:t>61.7x</a:t>
+                      </a:r>
+                    </a:p>
+                  </a:txBody>
+                  <a:tcPr>
+                    <a:solidFill>
+                      <a:srgbClr val="FFFFFF"/>
+                    </a:solidFill>
+                  </a:tcPr>
+                </a:tc>
+                <a:tc>
+                  <a:txBody>
+                    <a:bodyPr wrap="none" lIns="36000" rIns="36000" tIns="9000" bIns="9000"/>
+                    <a:lstStyle/>
+                    <a:p>
+                      <a:pPr algn="r"/>
+                      <a:r>
+                        <a:rPr sz="850" b="0">
+                          <a:solidFill>
+                            <a:srgbClr val="556A83"/>
+                          </a:solidFill>
+                          <a:latin typeface="Arial"/>
+                        </a:rPr>
+                        <a:t>n/m</a:t>
+                      </a:r>
+                    </a:p>
+                  </a:txBody>
+                  <a:tcPr>
+                    <a:solidFill>
+                      <a:srgbClr val="FFFFFF"/>
+                    </a:solidFill>
+                  </a:tcPr>
+                </a:tc>
+                <a:tc>
+                  <a:txBody>
+                    <a:bodyPr wrap="none" lIns="36000" rIns="36000" tIns="9000" bIns="9000"/>
+                    <a:lstStyle/>
+                    <a:p>
+                      <a:pPr algn="r"/>
+                      <a:r>
+                        <a:rPr sz="850" b="0">
+                          <a:solidFill>
+                            <a:srgbClr val="556A83"/>
+                          </a:solidFill>
+                          <a:latin typeface="Arial"/>
+                        </a:rPr>
+                        <a:t>38.9x</a:t>
+                      </a:r>
+                    </a:p>
+                  </a:txBody>
+                  <a:tcPr>
+                    <a:solidFill>
+                      <a:srgbClr val="FFFFFF"/>
+                    </a:solidFill>
+                  </a:tcPr>
+                </a:tc>
+                <a:tc>
+                  <a:txBody>
+                    <a:bodyPr wrap="none" lIns="36000" rIns="36000" tIns="9000" bIns="9000"/>
+                    <a:lstStyle/>
+                    <a:p>
+                      <a:pPr algn="r"/>
+                      <a:r>
+                        <a:rPr sz="850" b="0">
+                          <a:solidFill>
+                            <a:srgbClr val="556A83"/>
+                          </a:solidFill>
+                          <a:latin typeface="Arial"/>
+                        </a:rPr>
+                        <a:t>8.0x</a:t>
+                      </a:r>
+                    </a:p>
+                  </a:txBody>
+                  <a:tcPr>
+                    <a:solidFill>
+                      <a:srgbClr val="FFFFFF"/>
+                    </a:solidFill>
+                  </a:tcPr>
+                </a:tc>
+              </a:tr>
+            </a:tbl>
+          </a:graphicData>
+        </a:graphic>
+      </p:graphicFrame>
+      <p:sp>
+        <p:nvSpPr>
+          <p:cNvPr id="7" name="TextBox 6"/>
+          <p:cNvSpPr txBox="1"/>
+          <p:nvPr/>
+        </p:nvSpPr>
+        <p:spPr>
+          <a:xfrm>
+            <a:off x="365760" y="6053328"/>
+            <a:ext cx="11430000" cy="640080"/>
+          </a:xfrm>
+          <a:prstGeom prst="rect">
+            <a:avLst/>
+          </a:prstGeom>
+          <a:noFill/>
+        </p:spPr>
+        <p:txBody>
+          <a:bodyPr wrap="square">
+            <a:spAutoFit/>
+          </a:bodyPr>
+          <a:lstStyle/>
+          <a:p>
+            <a:pPr algn="l"/>
+            <a:r>
+              <a:rPr sz="950" b="0">
+                <a:solidFill>
+                  <a:srgbClr val="556A83"/>
+                </a:solidFill>
+                <a:latin typeface="Arial"/>
+              </a:rPr>
+              <a:t>Source: TBK consolidated dataset (FY2016-FY2025). Sales declined ~9% over the decade; gross margin compressed from 12.8% peak (FY2017) to a 8.2% trough (FY2023), recovering to ~10.6%. EV de-rated from ~221 to ~87 and market cap roughly halved — the market pricing the value leakage as permanent. EV/EBITA shown n/m in FY2023 (negative EBITA).</a:t>
+            </a:r>
+          </a:p>
+        </p:txBody>
+      </p:sp>
+      <p:sp>
+        <p:nvSpPr>
+          <p:cNvPr id="8" name="TextBox 7"/>
+          <p:cNvSpPr txBox="1"/>
+          <p:nvPr/>
+        </p:nvSpPr>
+        <p:spPr>
+          <a:xfrm>
+            <a:off x="11658600" y="6510528"/>
+            <a:ext cx="411480" cy="274320"/>
+          </a:xfrm>
+          <a:prstGeom prst="rect">
+            <a:avLst/>
+          </a:prstGeom>
+          <a:noFill/>
+        </p:spPr>
+        <p:txBody>
+          <a:bodyPr wrap="none">
+            <a:spAutoFit/>
+          </a:bodyPr>
+          <a:lstStyle/>
+          <a:p>
+            <a:pPr algn="r"/>
+            <a:r>
+              <a:rPr sz="900">
+                <a:solidFill>
+                  <a:srgbClr val="556A83"/>
+                </a:solidFill>
+                <a:latin typeface="Arial"/>
+              </a:rPr>
+              <a:t>32</a:t>
             </a:r>
           </a:p>
         </p:txBody>

--- a/TBK_rd_gap_slides.pptx
+++ b/TBK_rd_gap_slides.pptx
@@ -37,6 +37,7 @@
     <p:sldId id="285" r:id="rId36"/>
     <p:sldId id="286" r:id="rId37"/>
     <p:sldId id="287" r:id="rId38"/>
+    <p:sldId id="288" r:id="rId39"/>
   </p:sldIdLst>
   <p:sldSz cx="12191695" cy="6858000" type="screen4x3"/>
   <p:notesSz cx="6858000" cy="9144000"/>
@@ -13819,6 +13820,22 @@
                 <a:latin typeface="Arial"/>
               </a:rPr>
               <a:t>32   TBK 10-year income statement</a:t>
+            </a:r>
+          </a:p>
+          <a:p>
+            <a:pPr>
+              <a:spcBef>
+                <a:spcPts val="300"/>
+              </a:spcBef>
+            </a:pPr>
+            <a:r>
+              <a:rPr sz="1150" b="0">
+                <a:solidFill>
+                  <a:srgbClr val="556A83"/>
+                </a:solidFill>
+                <a:latin typeface="Arial"/>
+              </a:rPr>
+              <a:t>33   Capital returns &amp; value-creation rate</a:t>
             </a:r>
           </a:p>
         </p:txBody>
@@ -24626,6 +24643,2868 @@
 </p:sld>
 </file>
 
+<file path=ppt/slides/slide33.xml><?xml version="1.0" encoding="utf-8"?>
+<p:sld xmlns:a="http://schemas.openxmlformats.org/drawingml/2006/main" xmlns:p="http://schemas.openxmlformats.org/presentationml/2006/main" xmlns:r="http://schemas.openxmlformats.org/officeDocument/2006/relationships">
+  <p:cSld>
+    <p:spTree>
+      <p:nvGrpSpPr>
+        <p:cNvPr id="1" name=""/>
+        <p:cNvGrpSpPr/>
+        <p:nvPr/>
+      </p:nvGrpSpPr>
+      <p:grpSpPr/>
+      <p:sp>
+        <p:nvSpPr>
+          <p:cNvPr id="2" name="TextBox 1"/>
+          <p:cNvSpPr txBox="1"/>
+          <p:nvPr/>
+        </p:nvSpPr>
+        <p:spPr>
+          <a:xfrm>
+            <a:off x="457200" y="164592"/>
+            <a:ext cx="9784080" cy="658368"/>
+          </a:xfrm>
+          <a:prstGeom prst="rect">
+            <a:avLst/>
+          </a:prstGeom>
+          <a:noFill/>
+        </p:spPr>
+        <p:txBody>
+          <a:bodyPr wrap="none">
+            <a:spAutoFit/>
+          </a:bodyPr>
+          <a:lstStyle/>
+          <a:p>
+            <a:r>
+              <a:rPr sz="2700" b="0">
+                <a:solidFill>
+                  <a:srgbClr val="152130"/>
+                </a:solidFill>
+                <a:latin typeface="Times New Roman"/>
+              </a:rPr>
+              <a:t>Appendix — capital returns and the value-creation rate</a:t>
+            </a:r>
+          </a:p>
+        </p:txBody>
+      </p:sp>
+      <p:pic>
+        <p:nvPicPr>
+          <p:cNvPr id="3" name="Picture 2" descr="athanase_logo_dark.png"/>
+          <p:cNvPicPr>
+            <a:picLocks noChangeAspect="1"/>
+          </p:cNvPicPr>
+          <p:nvPr/>
+        </p:nvPicPr>
+        <p:blipFill>
+          <a:blip r:embed="rId2"/>
+          <a:stretch>
+            <a:fillRect/>
+          </a:stretch>
+        </p:blipFill>
+        <p:spPr>
+          <a:xfrm>
+            <a:off x="10469880" y="292608"/>
+            <a:ext cx="1325880" cy="273903"/>
+          </a:xfrm>
+          <a:prstGeom prst="rect">
+            <a:avLst/>
+          </a:prstGeom>
+        </p:spPr>
+      </p:pic>
+      <p:sp>
+        <p:nvSpPr>
+          <p:cNvPr id="4" name="TextBox 3"/>
+          <p:cNvSpPr txBox="1"/>
+          <p:nvPr/>
+        </p:nvSpPr>
+        <p:spPr>
+          <a:xfrm>
+            <a:off x="457200" y="850392"/>
+            <a:ext cx="11274552" cy="18288"/>
+          </a:xfrm>
+          <a:prstGeom prst="rect">
+            <a:avLst/>
+          </a:prstGeom>
+          <a:solidFill>
+            <a:srgbClr val="E2E5E9"/>
+          </a:solidFill>
+          <a:ln>
+            <a:noFill/>
+          </a:ln>
+        </p:spPr>
+        <p:txBody>
+          <a:bodyPr wrap="none">
+            <a:spAutoFit/>
+          </a:bodyPr>
+          <a:lstStyle/>
+          <a:p/>
+        </p:txBody>
+      </p:sp>
+      <p:sp>
+        <p:nvSpPr>
+          <p:cNvPr id="5" name="TextBox 4"/>
+          <p:cNvSpPr txBox="1"/>
+          <p:nvPr/>
+        </p:nvSpPr>
+        <p:spPr>
+          <a:xfrm>
+            <a:off x="457200" y="923544"/>
+            <a:ext cx="11247120" cy="457200"/>
+          </a:xfrm>
+          <a:prstGeom prst="rect">
+            <a:avLst/>
+          </a:prstGeom>
+          <a:noFill/>
+        </p:spPr>
+        <p:txBody>
+          <a:bodyPr wrap="square">
+            <a:spAutoFit/>
+          </a:bodyPr>
+          <a:lstStyle/>
+          <a:p>
+            <a:pPr algn="l"/>
+            <a:r>
+              <a:rPr sz="1050" b="0">
+                <a:solidFill>
+                  <a:srgbClr val="556A83"/>
+                </a:solidFill>
+                <a:latin typeface="Arial"/>
+              </a:rPr>
+              <a:t>ROIIC (=ROICm) and RR from the consistent peer dataset, four horizons. Return = ROIIC x RR = the intrinsic-value compounding rate from reinvestment</a:t>
+            </a:r>
+          </a:p>
+        </p:txBody>
+      </p:sp>
+      <p:graphicFrame>
+        <p:nvGraphicFramePr>
+          <p:cNvPr id="6" name="Table 5"/>
+          <p:cNvGraphicFramePr>
+            <a:graphicFrameLocks noGrp="1"/>
+          </p:cNvGraphicFramePr>
+          <p:nvPr/>
+        </p:nvGraphicFramePr>
+        <p:xfrm>
+          <a:off x="274320" y="1417320"/>
+          <a:ext cx="11640312" cy="2926080"/>
+        </p:xfrm>
+        <a:graphic>
+          <a:graphicData uri="http://schemas.openxmlformats.org/drawingml/2006/table">
+            <a:tbl>
+              <a:tblPr>
+                <a:tableStyleId>{5C22544A-7EE6-4342-B048-85BDC9FD1C3A}</a:tableStyleId>
+              </a:tblPr>
+              <a:tblGrid>
+                <a:gridCol w="1417320"/>
+                <a:gridCol w="786384"/>
+                <a:gridCol w="786384"/>
+                <a:gridCol w="786384"/>
+                <a:gridCol w="786384"/>
+                <a:gridCol w="786384"/>
+                <a:gridCol w="786384"/>
+                <a:gridCol w="786384"/>
+                <a:gridCol w="786384"/>
+                <a:gridCol w="786384"/>
+                <a:gridCol w="786384"/>
+                <a:gridCol w="786384"/>
+                <a:gridCol w="786384"/>
+                <a:gridCol w="786384"/>
+              </a:tblGrid>
+              <a:tr h="365760">
+                <a:tc>
+                  <a:txBody>
+                    <a:bodyPr wrap="square" lIns="18000" rIns="18000" tIns="12000" bIns="12000"/>
+                    <a:lstStyle/>
+                    <a:p>
+                      <a:pPr algn="l"/>
+                      <a:r>
+                        <a:rPr sz="750" b="1">
+                          <a:solidFill>
+                            <a:srgbClr val="FFFFFF"/>
+                          </a:solidFill>
+                          <a:latin typeface="Arial"/>
+                        </a:rPr>
+                        <a:t>Company</a:t>
+                      </a:r>
+                    </a:p>
+                  </a:txBody>
+                  <a:tcPr>
+                    <a:solidFill>
+                      <a:srgbClr val="152130"/>
+                    </a:solidFill>
+                  </a:tcPr>
+                </a:tc>
+                <a:tc>
+                  <a:txBody>
+                    <a:bodyPr wrap="square" lIns="18000" rIns="18000" tIns="12000" bIns="12000"/>
+                    <a:lstStyle/>
+                    <a:p>
+                      <a:pPr algn="r"/>
+                      <a:r>
+                        <a:rPr sz="750" b="1">
+                          <a:solidFill>
+                            <a:srgbClr val="FFFFFF"/>
+                          </a:solidFill>
+                          <a:latin typeface="Arial"/>
+                        </a:rPr>
+                        <a:t>ROIIC 3y</a:t>
+                      </a:r>
+                    </a:p>
+                  </a:txBody>
+                  <a:tcPr>
+                    <a:solidFill>
+                      <a:srgbClr val="152130"/>
+                    </a:solidFill>
+                  </a:tcPr>
+                </a:tc>
+                <a:tc>
+                  <a:txBody>
+                    <a:bodyPr wrap="square" lIns="18000" rIns="18000" tIns="12000" bIns="12000"/>
+                    <a:lstStyle/>
+                    <a:p>
+                      <a:pPr algn="r"/>
+                      <a:r>
+                        <a:rPr sz="750" b="1">
+                          <a:solidFill>
+                            <a:srgbClr val="FFFFFF"/>
+                          </a:solidFill>
+                          <a:latin typeface="Arial"/>
+                        </a:rPr>
+                        <a:t>ROIIC 7y</a:t>
+                      </a:r>
+                    </a:p>
+                  </a:txBody>
+                  <a:tcPr>
+                    <a:solidFill>
+                      <a:srgbClr val="152130"/>
+                    </a:solidFill>
+                  </a:tcPr>
+                </a:tc>
+                <a:tc>
+                  <a:txBody>
+                    <a:bodyPr wrap="square" lIns="18000" rIns="18000" tIns="12000" bIns="12000"/>
+                    <a:lstStyle/>
+                    <a:p>
+                      <a:pPr algn="r"/>
+                      <a:r>
+                        <a:rPr sz="750" b="1">
+                          <a:solidFill>
+                            <a:srgbClr val="FFFFFF"/>
+                          </a:solidFill>
+                          <a:latin typeface="Arial"/>
+                        </a:rPr>
+                        <a:t>ROIIC 14y</a:t>
+                      </a:r>
+                    </a:p>
+                  </a:txBody>
+                  <a:tcPr>
+                    <a:solidFill>
+                      <a:srgbClr val="152130"/>
+                    </a:solidFill>
+                  </a:tcPr>
+                </a:tc>
+                <a:tc>
+                  <a:txBody>
+                    <a:bodyPr wrap="square" lIns="18000" rIns="18000" tIns="12000" bIns="12000"/>
+                    <a:lstStyle/>
+                    <a:p>
+                      <a:pPr algn="r"/>
+                      <a:r>
+                        <a:rPr sz="750" b="1">
+                          <a:solidFill>
+                            <a:srgbClr val="FFFFFF"/>
+                          </a:solidFill>
+                          <a:latin typeface="Arial"/>
+                        </a:rPr>
+                        <a:t>ROIIC 21y</a:t>
+                      </a:r>
+                    </a:p>
+                  </a:txBody>
+                  <a:tcPr>
+                    <a:solidFill>
+                      <a:srgbClr val="152130"/>
+                    </a:solidFill>
+                  </a:tcPr>
+                </a:tc>
+                <a:tc>
+                  <a:txBody>
+                    <a:bodyPr wrap="square" lIns="18000" rIns="18000" tIns="12000" bIns="12000"/>
+                    <a:lstStyle/>
+                    <a:p>
+                      <a:pPr algn="r"/>
+                      <a:r>
+                        <a:rPr sz="750" b="1">
+                          <a:solidFill>
+                            <a:srgbClr val="FFFFFF"/>
+                          </a:solidFill>
+                          <a:latin typeface="Arial"/>
+                        </a:rPr>
+                        <a:t>ROIC 7y</a:t>
+                      </a:r>
+                    </a:p>
+                  </a:txBody>
+                  <a:tcPr>
+                    <a:solidFill>
+                      <a:srgbClr val="152130"/>
+                    </a:solidFill>
+                  </a:tcPr>
+                </a:tc>
+                <a:tc>
+                  <a:txBody>
+                    <a:bodyPr wrap="square" lIns="18000" rIns="18000" tIns="12000" bIns="12000"/>
+                    <a:lstStyle/>
+                    <a:p>
+                      <a:pPr algn="r"/>
+                      <a:r>
+                        <a:rPr sz="750" b="1">
+                          <a:solidFill>
+                            <a:srgbClr val="FFFFFF"/>
+                          </a:solidFill>
+                          <a:latin typeface="Arial"/>
+                        </a:rPr>
+                        <a:t>RR 3y</a:t>
+                      </a:r>
+                    </a:p>
+                  </a:txBody>
+                  <a:tcPr>
+                    <a:solidFill>
+                      <a:srgbClr val="152130"/>
+                    </a:solidFill>
+                  </a:tcPr>
+                </a:tc>
+                <a:tc>
+                  <a:txBody>
+                    <a:bodyPr wrap="square" lIns="18000" rIns="18000" tIns="12000" bIns="12000"/>
+                    <a:lstStyle/>
+                    <a:p>
+                      <a:pPr algn="r"/>
+                      <a:r>
+                        <a:rPr sz="750" b="1">
+                          <a:solidFill>
+                            <a:srgbClr val="FFFFFF"/>
+                          </a:solidFill>
+                          <a:latin typeface="Arial"/>
+                        </a:rPr>
+                        <a:t>RR 7y</a:t>
+                      </a:r>
+                    </a:p>
+                  </a:txBody>
+                  <a:tcPr>
+                    <a:solidFill>
+                      <a:srgbClr val="152130"/>
+                    </a:solidFill>
+                  </a:tcPr>
+                </a:tc>
+                <a:tc>
+                  <a:txBody>
+                    <a:bodyPr wrap="square" lIns="18000" rIns="18000" tIns="12000" bIns="12000"/>
+                    <a:lstStyle/>
+                    <a:p>
+                      <a:pPr algn="r"/>
+                      <a:r>
+                        <a:rPr sz="750" b="1">
+                          <a:solidFill>
+                            <a:srgbClr val="FFFFFF"/>
+                          </a:solidFill>
+                          <a:latin typeface="Arial"/>
+                        </a:rPr>
+                        <a:t>RR 14y</a:t>
+                      </a:r>
+                    </a:p>
+                  </a:txBody>
+                  <a:tcPr>
+                    <a:solidFill>
+                      <a:srgbClr val="152130"/>
+                    </a:solidFill>
+                  </a:tcPr>
+                </a:tc>
+                <a:tc>
+                  <a:txBody>
+                    <a:bodyPr wrap="square" lIns="18000" rIns="18000" tIns="12000" bIns="12000"/>
+                    <a:lstStyle/>
+                    <a:p>
+                      <a:pPr algn="r"/>
+                      <a:r>
+                        <a:rPr sz="750" b="1">
+                          <a:solidFill>
+                            <a:srgbClr val="FFFFFF"/>
+                          </a:solidFill>
+                          <a:latin typeface="Arial"/>
+                        </a:rPr>
+                        <a:t>RR 21y</a:t>
+                      </a:r>
+                    </a:p>
+                  </a:txBody>
+                  <a:tcPr>
+                    <a:solidFill>
+                      <a:srgbClr val="152130"/>
+                    </a:solidFill>
+                  </a:tcPr>
+                </a:tc>
+                <a:tc>
+                  <a:txBody>
+                    <a:bodyPr wrap="square" lIns="18000" rIns="18000" tIns="12000" bIns="12000"/>
+                    <a:lstStyle/>
+                    <a:p>
+                      <a:pPr algn="r"/>
+                      <a:r>
+                        <a:rPr sz="750" b="1">
+                          <a:solidFill>
+                            <a:srgbClr val="FFFFFF"/>
+                          </a:solidFill>
+                          <a:latin typeface="Arial"/>
+                        </a:rPr>
+                        <a:t>Return 3y</a:t>
+                      </a:r>
+                    </a:p>
+                  </a:txBody>
+                  <a:tcPr>
+                    <a:solidFill>
+                      <a:srgbClr val="152130"/>
+                    </a:solidFill>
+                  </a:tcPr>
+                </a:tc>
+                <a:tc>
+                  <a:txBody>
+                    <a:bodyPr wrap="square" lIns="18000" rIns="18000" tIns="12000" bIns="12000"/>
+                    <a:lstStyle/>
+                    <a:p>
+                      <a:pPr algn="r"/>
+                      <a:r>
+                        <a:rPr sz="750" b="1">
+                          <a:solidFill>
+                            <a:srgbClr val="FFFFFF"/>
+                          </a:solidFill>
+                          <a:latin typeface="Arial"/>
+                        </a:rPr>
+                        <a:t>Return 7y</a:t>
+                      </a:r>
+                    </a:p>
+                  </a:txBody>
+                  <a:tcPr>
+                    <a:solidFill>
+                      <a:srgbClr val="152130"/>
+                    </a:solidFill>
+                  </a:tcPr>
+                </a:tc>
+                <a:tc>
+                  <a:txBody>
+                    <a:bodyPr wrap="square" lIns="18000" rIns="18000" tIns="12000" bIns="12000"/>
+                    <a:lstStyle/>
+                    <a:p>
+                      <a:pPr algn="r"/>
+                      <a:r>
+                        <a:rPr sz="750" b="1">
+                          <a:solidFill>
+                            <a:srgbClr val="FFFFFF"/>
+                          </a:solidFill>
+                          <a:latin typeface="Arial"/>
+                        </a:rPr>
+                        <a:t>Return 14y</a:t>
+                      </a:r>
+                    </a:p>
+                  </a:txBody>
+                  <a:tcPr>
+                    <a:solidFill>
+                      <a:srgbClr val="152130"/>
+                    </a:solidFill>
+                  </a:tcPr>
+                </a:tc>
+                <a:tc>
+                  <a:txBody>
+                    <a:bodyPr wrap="square" lIns="18000" rIns="18000" tIns="12000" bIns="12000"/>
+                    <a:lstStyle/>
+                    <a:p>
+                      <a:pPr algn="r"/>
+                      <a:r>
+                        <a:rPr sz="750" b="1">
+                          <a:solidFill>
+                            <a:srgbClr val="FFFFFF"/>
+                          </a:solidFill>
+                          <a:latin typeface="Arial"/>
+                        </a:rPr>
+                        <a:t>Return 21y</a:t>
+                      </a:r>
+                    </a:p>
+                  </a:txBody>
+                  <a:tcPr>
+                    <a:solidFill>
+                      <a:srgbClr val="152130"/>
+                    </a:solidFill>
+                  </a:tcPr>
+                </a:tc>
+              </a:tr>
+              <a:tr h="365760">
+                <a:tc>
+                  <a:txBody>
+                    <a:bodyPr wrap="none" lIns="18000" rIns="18000" tIns="9000" bIns="9000"/>
+                    <a:lstStyle/>
+                    <a:p>
+                      <a:pPr algn="l"/>
+                      <a:r>
+                        <a:rPr sz="800" b="1">
+                          <a:solidFill>
+                            <a:srgbClr val="152130"/>
+                          </a:solidFill>
+                          <a:latin typeface="Arial"/>
+                        </a:rPr>
+                        <a:t>Knorr-Bremse</a:t>
+                      </a:r>
+                    </a:p>
+                  </a:txBody>
+                  <a:tcPr>
+                    <a:solidFill>
+                      <a:srgbClr val="FFFFFF"/>
+                    </a:solidFill>
+                  </a:tcPr>
+                </a:tc>
+                <a:tc>
+                  <a:txBody>
+                    <a:bodyPr wrap="none" lIns="18000" rIns="18000" tIns="9000" bIns="9000"/>
+                    <a:lstStyle/>
+                    <a:p>
+                      <a:pPr algn="r"/>
+                      <a:r>
+                        <a:rPr sz="800" b="0">
+                          <a:solidFill>
+                            <a:srgbClr val="314359"/>
+                          </a:solidFill>
+                          <a:latin typeface="Arial"/>
+                        </a:rPr>
+                        <a:t>5.5%</a:t>
+                      </a:r>
+                    </a:p>
+                  </a:txBody>
+                  <a:tcPr>
+                    <a:solidFill>
+                      <a:srgbClr val="FFFFFF"/>
+                    </a:solidFill>
+                  </a:tcPr>
+                </a:tc>
+                <a:tc>
+                  <a:txBody>
+                    <a:bodyPr wrap="none" lIns="18000" rIns="18000" tIns="9000" bIns="9000"/>
+                    <a:lstStyle/>
+                    <a:p>
+                      <a:pPr algn="r"/>
+                      <a:r>
+                        <a:rPr sz="800" b="0">
+                          <a:solidFill>
+                            <a:srgbClr val="314359"/>
+                          </a:solidFill>
+                          <a:latin typeface="Arial"/>
+                        </a:rPr>
+                        <a:t>0.3%</a:t>
+                      </a:r>
+                    </a:p>
+                  </a:txBody>
+                  <a:tcPr>
+                    <a:solidFill>
+                      <a:srgbClr val="FFFFFF"/>
+                    </a:solidFill>
+                  </a:tcPr>
+                </a:tc>
+                <a:tc>
+                  <a:txBody>
+                    <a:bodyPr wrap="none" lIns="18000" rIns="18000" tIns="9000" bIns="9000"/>
+                    <a:lstStyle/>
+                    <a:p>
+                      <a:pPr algn="r"/>
+                      <a:r>
+                        <a:rPr sz="800" b="0">
+                          <a:solidFill>
+                            <a:srgbClr val="314359"/>
+                          </a:solidFill>
+                          <a:latin typeface="Arial"/>
+                        </a:rPr>
+                        <a:t>13.2%</a:t>
+                      </a:r>
+                    </a:p>
+                  </a:txBody>
+                  <a:tcPr>
+                    <a:solidFill>
+                      <a:srgbClr val="FFFFFF"/>
+                    </a:solidFill>
+                  </a:tcPr>
+                </a:tc>
+                <a:tc>
+                  <a:txBody>
+                    <a:bodyPr wrap="none" lIns="18000" rIns="18000" tIns="9000" bIns="9000"/>
+                    <a:lstStyle/>
+                    <a:p>
+                      <a:pPr algn="r"/>
+                      <a:r>
+                        <a:rPr sz="800" b="0">
+                          <a:solidFill>
+                            <a:srgbClr val="556A83"/>
+                          </a:solidFill>
+                          <a:latin typeface="Arial"/>
+                        </a:rPr>
+                        <a:t>0.0%</a:t>
+                      </a:r>
+                    </a:p>
+                  </a:txBody>
+                  <a:tcPr>
+                    <a:solidFill>
+                      <a:srgbClr val="FFFFFF"/>
+                    </a:solidFill>
+                  </a:tcPr>
+                </a:tc>
+                <a:tc>
+                  <a:txBody>
+                    <a:bodyPr wrap="none" lIns="18000" rIns="18000" tIns="9000" bIns="9000"/>
+                    <a:lstStyle/>
+                    <a:p>
+                      <a:pPr algn="r"/>
+                      <a:r>
+                        <a:rPr sz="800" b="0">
+                          <a:solidFill>
+                            <a:srgbClr val="556A83"/>
+                          </a:solidFill>
+                          <a:latin typeface="Arial"/>
+                        </a:rPr>
+                        <a:t>15.9%</a:t>
+                      </a:r>
+                    </a:p>
+                  </a:txBody>
+                  <a:tcPr>
+                    <a:solidFill>
+                      <a:srgbClr val="FFFFFF"/>
+                    </a:solidFill>
+                  </a:tcPr>
+                </a:tc>
+                <a:tc>
+                  <a:txBody>
+                    <a:bodyPr wrap="none" lIns="18000" rIns="18000" tIns="9000" bIns="9000"/>
+                    <a:lstStyle/>
+                    <a:p>
+                      <a:pPr algn="r"/>
+                      <a:r>
+                        <a:rPr sz="800" b="0">
+                          <a:solidFill>
+                            <a:srgbClr val="556A83"/>
+                          </a:solidFill>
+                          <a:latin typeface="Arial"/>
+                        </a:rPr>
+                        <a:t>0.54</a:t>
+                      </a:r>
+                    </a:p>
+                  </a:txBody>
+                  <a:tcPr>
+                    <a:solidFill>
+                      <a:srgbClr val="FFFFFF"/>
+                    </a:solidFill>
+                  </a:tcPr>
+                </a:tc>
+                <a:tc>
+                  <a:txBody>
+                    <a:bodyPr wrap="none" lIns="18000" rIns="18000" tIns="9000" bIns="9000"/>
+                    <a:lstStyle/>
+                    <a:p>
+                      <a:pPr algn="r"/>
+                      <a:r>
+                        <a:rPr sz="800" b="0">
+                          <a:solidFill>
+                            <a:srgbClr val="556A83"/>
+                          </a:solidFill>
+                          <a:latin typeface="Arial"/>
+                        </a:rPr>
+                        <a:t>0.50</a:t>
+                      </a:r>
+                    </a:p>
+                  </a:txBody>
+                  <a:tcPr>
+                    <a:solidFill>
+                      <a:srgbClr val="FFFFFF"/>
+                    </a:solidFill>
+                  </a:tcPr>
+                </a:tc>
+                <a:tc>
+                  <a:txBody>
+                    <a:bodyPr wrap="none" lIns="18000" rIns="18000" tIns="9000" bIns="9000"/>
+                    <a:lstStyle/>
+                    <a:p>
+                      <a:pPr algn="r"/>
+                      <a:r>
+                        <a:rPr sz="800" b="0">
+                          <a:solidFill>
+                            <a:srgbClr val="556A83"/>
+                          </a:solidFill>
+                          <a:latin typeface="Arial"/>
+                        </a:rPr>
+                        <a:t>0.39</a:t>
+                      </a:r>
+                    </a:p>
+                  </a:txBody>
+                  <a:tcPr>
+                    <a:solidFill>
+                      <a:srgbClr val="FFFFFF"/>
+                    </a:solidFill>
+                  </a:tcPr>
+                </a:tc>
+                <a:tc>
+                  <a:txBody>
+                    <a:bodyPr wrap="none" lIns="18000" rIns="18000" tIns="9000" bIns="9000"/>
+                    <a:lstStyle/>
+                    <a:p>
+                      <a:pPr algn="r"/>
+                      <a:r>
+                        <a:rPr sz="800" b="0">
+                          <a:solidFill>
+                            <a:srgbClr val="556A83"/>
+                          </a:solidFill>
+                          <a:latin typeface="Arial"/>
+                        </a:rPr>
+                        <a:t>0.00</a:t>
+                      </a:r>
+                    </a:p>
+                  </a:txBody>
+                  <a:tcPr>
+                    <a:solidFill>
+                      <a:srgbClr val="FFFFFF"/>
+                    </a:solidFill>
+                  </a:tcPr>
+                </a:tc>
+                <a:tc>
+                  <a:txBody>
+                    <a:bodyPr wrap="none" lIns="18000" rIns="18000" tIns="9000" bIns="9000"/>
+                    <a:lstStyle/>
+                    <a:p>
+                      <a:pPr algn="r"/>
+                      <a:r>
+                        <a:rPr sz="800" b="0">
+                          <a:solidFill>
+                            <a:srgbClr val="314359"/>
+                          </a:solidFill>
+                          <a:latin typeface="Arial"/>
+                        </a:rPr>
+                        <a:t>2.9%</a:t>
+                      </a:r>
+                    </a:p>
+                  </a:txBody>
+                  <a:tcPr>
+                    <a:solidFill>
+                      <a:srgbClr val="FFFFFF"/>
+                    </a:solidFill>
+                  </a:tcPr>
+                </a:tc>
+                <a:tc>
+                  <a:txBody>
+                    <a:bodyPr wrap="none" lIns="18000" rIns="18000" tIns="9000" bIns="9000"/>
+                    <a:lstStyle/>
+                    <a:p>
+                      <a:pPr algn="r"/>
+                      <a:r>
+                        <a:rPr sz="800" b="0">
+                          <a:solidFill>
+                            <a:srgbClr val="314359"/>
+                          </a:solidFill>
+                          <a:latin typeface="Arial"/>
+                        </a:rPr>
+                        <a:t>0.2%</a:t>
+                      </a:r>
+                    </a:p>
+                  </a:txBody>
+                  <a:tcPr>
+                    <a:solidFill>
+                      <a:srgbClr val="FFFFFF"/>
+                    </a:solidFill>
+                  </a:tcPr>
+                </a:tc>
+                <a:tc>
+                  <a:txBody>
+                    <a:bodyPr wrap="none" lIns="18000" rIns="18000" tIns="9000" bIns="9000"/>
+                    <a:lstStyle/>
+                    <a:p>
+                      <a:pPr algn="r"/>
+                      <a:r>
+                        <a:rPr sz="800" b="0">
+                          <a:solidFill>
+                            <a:srgbClr val="314359"/>
+                          </a:solidFill>
+                          <a:latin typeface="Arial"/>
+                        </a:rPr>
+                        <a:t>5.2%</a:t>
+                      </a:r>
+                    </a:p>
+                  </a:txBody>
+                  <a:tcPr>
+                    <a:solidFill>
+                      <a:srgbClr val="FFFFFF"/>
+                    </a:solidFill>
+                  </a:tcPr>
+                </a:tc>
+                <a:tc>
+                  <a:txBody>
+                    <a:bodyPr wrap="none" lIns="18000" rIns="18000" tIns="9000" bIns="9000"/>
+                    <a:lstStyle/>
+                    <a:p>
+                      <a:pPr algn="r"/>
+                      <a:r>
+                        <a:rPr sz="800" b="0">
+                          <a:solidFill>
+                            <a:srgbClr val="556A83"/>
+                          </a:solidFill>
+                          <a:latin typeface="Arial"/>
+                        </a:rPr>
+                        <a:t>0.0%</a:t>
+                      </a:r>
+                    </a:p>
+                  </a:txBody>
+                  <a:tcPr>
+                    <a:solidFill>
+                      <a:srgbClr val="FFFFFF"/>
+                    </a:solidFill>
+                  </a:tcPr>
+                </a:tc>
+              </a:tr>
+              <a:tr h="365760">
+                <a:tc>
+                  <a:txBody>
+                    <a:bodyPr wrap="none" lIns="18000" rIns="18000" tIns="9000" bIns="9000"/>
+                    <a:lstStyle/>
+                    <a:p>
+                      <a:pPr algn="l"/>
+                      <a:r>
+                        <a:rPr sz="800" b="1">
+                          <a:solidFill>
+                            <a:srgbClr val="152130"/>
+                          </a:solidFill>
+                          <a:latin typeface="Arial"/>
+                        </a:rPr>
+                        <a:t>Cummins</a:t>
+                      </a:r>
+                    </a:p>
+                  </a:txBody>
+                  <a:tcPr>
+                    <a:solidFill>
+                      <a:srgbClr val="F6F7F9"/>
+                    </a:solidFill>
+                  </a:tcPr>
+                </a:tc>
+                <a:tc>
+                  <a:txBody>
+                    <a:bodyPr wrap="none" lIns="18000" rIns="18000" tIns="9000" bIns="9000"/>
+                    <a:lstStyle/>
+                    <a:p>
+                      <a:pPr algn="r"/>
+                      <a:r>
+                        <a:rPr sz="800" b="0">
+                          <a:solidFill>
+                            <a:srgbClr val="314359"/>
+                          </a:solidFill>
+                          <a:latin typeface="Arial"/>
+                        </a:rPr>
+                        <a:t>9.1%</a:t>
+                      </a:r>
+                    </a:p>
+                  </a:txBody>
+                  <a:tcPr>
+                    <a:solidFill>
+                      <a:srgbClr val="F6F7F9"/>
+                    </a:solidFill>
+                  </a:tcPr>
+                </a:tc>
+                <a:tc>
+                  <a:txBody>
+                    <a:bodyPr wrap="none" lIns="18000" rIns="18000" tIns="9000" bIns="9000"/>
+                    <a:lstStyle/>
+                    <a:p>
+                      <a:pPr algn="r"/>
+                      <a:r>
+                        <a:rPr sz="800" b="0">
+                          <a:solidFill>
+                            <a:srgbClr val="314359"/>
+                          </a:solidFill>
+                          <a:latin typeface="Arial"/>
+                        </a:rPr>
+                        <a:t>16.1%</a:t>
+                      </a:r>
+                    </a:p>
+                  </a:txBody>
+                  <a:tcPr>
+                    <a:solidFill>
+                      <a:srgbClr val="F6F7F9"/>
+                    </a:solidFill>
+                  </a:tcPr>
+                </a:tc>
+                <a:tc>
+                  <a:txBody>
+                    <a:bodyPr wrap="none" lIns="18000" rIns="18000" tIns="9000" bIns="9000"/>
+                    <a:lstStyle/>
+                    <a:p>
+                      <a:pPr algn="r"/>
+                      <a:r>
+                        <a:rPr sz="800" b="0">
+                          <a:solidFill>
+                            <a:srgbClr val="314359"/>
+                          </a:solidFill>
+                          <a:latin typeface="Arial"/>
+                        </a:rPr>
+                        <a:t>10.8%</a:t>
+                      </a:r>
+                    </a:p>
+                  </a:txBody>
+                  <a:tcPr>
+                    <a:solidFill>
+                      <a:srgbClr val="F6F7F9"/>
+                    </a:solidFill>
+                  </a:tcPr>
+                </a:tc>
+                <a:tc>
+                  <a:txBody>
+                    <a:bodyPr wrap="none" lIns="18000" rIns="18000" tIns="9000" bIns="9000"/>
+                    <a:lstStyle/>
+                    <a:p>
+                      <a:pPr algn="r"/>
+                      <a:r>
+                        <a:rPr sz="800" b="0">
+                          <a:solidFill>
+                            <a:srgbClr val="314359"/>
+                          </a:solidFill>
+                          <a:latin typeface="Arial"/>
+                        </a:rPr>
+                        <a:t>15.8%</a:t>
+                      </a:r>
+                    </a:p>
+                  </a:txBody>
+                  <a:tcPr>
+                    <a:solidFill>
+                      <a:srgbClr val="F6F7F9"/>
+                    </a:solidFill>
+                  </a:tcPr>
+                </a:tc>
+                <a:tc>
+                  <a:txBody>
+                    <a:bodyPr wrap="none" lIns="18000" rIns="18000" tIns="9000" bIns="9000"/>
+                    <a:lstStyle/>
+                    <a:p>
+                      <a:pPr algn="r"/>
+                      <a:r>
+                        <a:rPr sz="800" b="0">
+                          <a:solidFill>
+                            <a:srgbClr val="556A83"/>
+                          </a:solidFill>
+                          <a:latin typeface="Arial"/>
+                        </a:rPr>
+                        <a:t>12.8%</a:t>
+                      </a:r>
+                    </a:p>
+                  </a:txBody>
+                  <a:tcPr>
+                    <a:solidFill>
+                      <a:srgbClr val="F6F7F9"/>
+                    </a:solidFill>
+                  </a:tcPr>
+                </a:tc>
+                <a:tc>
+                  <a:txBody>
+                    <a:bodyPr wrap="none" lIns="18000" rIns="18000" tIns="9000" bIns="9000"/>
+                    <a:lstStyle/>
+                    <a:p>
+                      <a:pPr algn="r"/>
+                      <a:r>
+                        <a:rPr sz="800" b="0">
+                          <a:solidFill>
+                            <a:srgbClr val="556A83"/>
+                          </a:solidFill>
+                          <a:latin typeface="Arial"/>
+                        </a:rPr>
+                        <a:t>0.62</a:t>
+                      </a:r>
+                    </a:p>
+                  </a:txBody>
+                  <a:tcPr>
+                    <a:solidFill>
+                      <a:srgbClr val="F6F7F9"/>
+                    </a:solidFill>
+                  </a:tcPr>
+                </a:tc>
+                <a:tc>
+                  <a:txBody>
+                    <a:bodyPr wrap="none" lIns="18000" rIns="18000" tIns="9000" bIns="9000"/>
+                    <a:lstStyle/>
+                    <a:p>
+                      <a:pPr algn="r"/>
+                      <a:r>
+                        <a:rPr sz="800" b="0">
+                          <a:solidFill>
+                            <a:srgbClr val="556A83"/>
+                          </a:solidFill>
+                          <a:latin typeface="Arial"/>
+                        </a:rPr>
+                        <a:t>0.46</a:t>
+                      </a:r>
+                    </a:p>
+                  </a:txBody>
+                  <a:tcPr>
+                    <a:solidFill>
+                      <a:srgbClr val="F6F7F9"/>
+                    </a:solidFill>
+                  </a:tcPr>
+                </a:tc>
+                <a:tc>
+                  <a:txBody>
+                    <a:bodyPr wrap="none" lIns="18000" rIns="18000" tIns="9000" bIns="9000"/>
+                    <a:lstStyle/>
+                    <a:p>
+                      <a:pPr algn="r"/>
+                      <a:r>
+                        <a:rPr sz="800" b="0">
+                          <a:solidFill>
+                            <a:srgbClr val="556A83"/>
+                          </a:solidFill>
+                          <a:latin typeface="Arial"/>
+                        </a:rPr>
+                        <a:t>0.50</a:t>
+                      </a:r>
+                    </a:p>
+                  </a:txBody>
+                  <a:tcPr>
+                    <a:solidFill>
+                      <a:srgbClr val="F6F7F9"/>
+                    </a:solidFill>
+                  </a:tcPr>
+                </a:tc>
+                <a:tc>
+                  <a:txBody>
+                    <a:bodyPr wrap="none" lIns="18000" rIns="18000" tIns="9000" bIns="9000"/>
+                    <a:lstStyle/>
+                    <a:p>
+                      <a:pPr algn="r"/>
+                      <a:r>
+                        <a:rPr sz="800" b="0">
+                          <a:solidFill>
+                            <a:srgbClr val="556A83"/>
+                          </a:solidFill>
+                          <a:latin typeface="Arial"/>
+                        </a:rPr>
+                        <a:t>0.52</a:t>
+                      </a:r>
+                    </a:p>
+                  </a:txBody>
+                  <a:tcPr>
+                    <a:solidFill>
+                      <a:srgbClr val="F6F7F9"/>
+                    </a:solidFill>
+                  </a:tcPr>
+                </a:tc>
+                <a:tc>
+                  <a:txBody>
+                    <a:bodyPr wrap="none" lIns="18000" rIns="18000" tIns="9000" bIns="9000"/>
+                    <a:lstStyle/>
+                    <a:p>
+                      <a:pPr algn="r"/>
+                      <a:r>
+                        <a:rPr sz="800" b="0">
+                          <a:solidFill>
+                            <a:srgbClr val="314359"/>
+                          </a:solidFill>
+                          <a:latin typeface="Arial"/>
+                        </a:rPr>
+                        <a:t>5.6%</a:t>
+                      </a:r>
+                    </a:p>
+                  </a:txBody>
+                  <a:tcPr>
+                    <a:solidFill>
+                      <a:srgbClr val="F6F7F9"/>
+                    </a:solidFill>
+                  </a:tcPr>
+                </a:tc>
+                <a:tc>
+                  <a:txBody>
+                    <a:bodyPr wrap="none" lIns="18000" rIns="18000" tIns="9000" bIns="9000"/>
+                    <a:lstStyle/>
+                    <a:p>
+                      <a:pPr algn="r"/>
+                      <a:r>
+                        <a:rPr sz="800" b="0">
+                          <a:solidFill>
+                            <a:srgbClr val="314359"/>
+                          </a:solidFill>
+                          <a:latin typeface="Arial"/>
+                        </a:rPr>
+                        <a:t>7.5%</a:t>
+                      </a:r>
+                    </a:p>
+                  </a:txBody>
+                  <a:tcPr>
+                    <a:solidFill>
+                      <a:srgbClr val="F6F7F9"/>
+                    </a:solidFill>
+                  </a:tcPr>
+                </a:tc>
+                <a:tc>
+                  <a:txBody>
+                    <a:bodyPr wrap="none" lIns="18000" rIns="18000" tIns="9000" bIns="9000"/>
+                    <a:lstStyle/>
+                    <a:p>
+                      <a:pPr algn="r"/>
+                      <a:r>
+                        <a:rPr sz="800" b="0">
+                          <a:solidFill>
+                            <a:srgbClr val="314359"/>
+                          </a:solidFill>
+                          <a:latin typeface="Arial"/>
+                        </a:rPr>
+                        <a:t>5.5%</a:t>
+                      </a:r>
+                    </a:p>
+                  </a:txBody>
+                  <a:tcPr>
+                    <a:solidFill>
+                      <a:srgbClr val="F6F7F9"/>
+                    </a:solidFill>
+                  </a:tcPr>
+                </a:tc>
+                <a:tc>
+                  <a:txBody>
+                    <a:bodyPr wrap="none" lIns="18000" rIns="18000" tIns="9000" bIns="9000"/>
+                    <a:lstStyle/>
+                    <a:p>
+                      <a:pPr algn="r"/>
+                      <a:r>
+                        <a:rPr sz="800" b="0">
+                          <a:solidFill>
+                            <a:srgbClr val="314359"/>
+                          </a:solidFill>
+                          <a:latin typeface="Arial"/>
+                        </a:rPr>
+                        <a:t>8.2%</a:t>
+                      </a:r>
+                    </a:p>
+                  </a:txBody>
+                  <a:tcPr>
+                    <a:solidFill>
+                      <a:srgbClr val="F6F7F9"/>
+                    </a:solidFill>
+                  </a:tcPr>
+                </a:tc>
+              </a:tr>
+              <a:tr h="365760">
+                <a:tc>
+                  <a:txBody>
+                    <a:bodyPr wrap="none" lIns="18000" rIns="18000" tIns="9000" bIns="9000"/>
+                    <a:lstStyle/>
+                    <a:p>
+                      <a:pPr algn="l"/>
+                      <a:r>
+                        <a:rPr sz="800" b="1">
+                          <a:solidFill>
+                            <a:srgbClr val="152130"/>
+                          </a:solidFill>
+                          <a:latin typeface="Arial"/>
+                        </a:rPr>
+                        <a:t>Brembo</a:t>
+                      </a:r>
+                    </a:p>
+                  </a:txBody>
+                  <a:tcPr>
+                    <a:solidFill>
+                      <a:srgbClr val="FFFFFF"/>
+                    </a:solidFill>
+                  </a:tcPr>
+                </a:tc>
+                <a:tc>
+                  <a:txBody>
+                    <a:bodyPr wrap="none" lIns="18000" rIns="18000" tIns="9000" bIns="9000"/>
+                    <a:lstStyle/>
+                    <a:p>
+                      <a:pPr algn="r"/>
+                      <a:r>
+                        <a:rPr sz="800" b="0">
+                          <a:solidFill>
+                            <a:srgbClr val="833C00"/>
+                          </a:solidFill>
+                          <a:latin typeface="Arial"/>
+                        </a:rPr>
+                        <a:t>-6.6%</a:t>
+                      </a:r>
+                    </a:p>
+                  </a:txBody>
+                  <a:tcPr>
+                    <a:solidFill>
+                      <a:srgbClr val="FFFFFF"/>
+                    </a:solidFill>
+                  </a:tcPr>
+                </a:tc>
+                <a:tc>
+                  <a:txBody>
+                    <a:bodyPr wrap="none" lIns="18000" rIns="18000" tIns="9000" bIns="9000"/>
+                    <a:lstStyle/>
+                    <a:p>
+                      <a:pPr algn="r"/>
+                      <a:r>
+                        <a:rPr sz="800" b="0">
+                          <a:solidFill>
+                            <a:srgbClr val="314359"/>
+                          </a:solidFill>
+                          <a:latin typeface="Arial"/>
+                        </a:rPr>
+                        <a:t>5.5%</a:t>
+                      </a:r>
+                    </a:p>
+                  </a:txBody>
+                  <a:tcPr>
+                    <a:solidFill>
+                      <a:srgbClr val="FFFFFF"/>
+                    </a:solidFill>
+                  </a:tcPr>
+                </a:tc>
+                <a:tc>
+                  <a:txBody>
+                    <a:bodyPr wrap="none" lIns="18000" rIns="18000" tIns="9000" bIns="9000"/>
+                    <a:lstStyle/>
+                    <a:p>
+                      <a:pPr algn="r"/>
+                      <a:r>
+                        <a:rPr sz="800" b="0">
+                          <a:solidFill>
+                            <a:srgbClr val="314359"/>
+                          </a:solidFill>
+                          <a:latin typeface="Arial"/>
+                        </a:rPr>
+                        <a:t>13.5%</a:t>
+                      </a:r>
+                    </a:p>
+                  </a:txBody>
+                  <a:tcPr>
+                    <a:solidFill>
+                      <a:srgbClr val="FFFFFF"/>
+                    </a:solidFill>
+                  </a:tcPr>
+                </a:tc>
+                <a:tc>
+                  <a:txBody>
+                    <a:bodyPr wrap="none" lIns="18000" rIns="18000" tIns="9000" bIns="9000"/>
+                    <a:lstStyle/>
+                    <a:p>
+                      <a:pPr algn="r"/>
+                      <a:r>
+                        <a:rPr sz="800" b="0">
+                          <a:solidFill>
+                            <a:srgbClr val="314359"/>
+                          </a:solidFill>
+                          <a:latin typeface="Arial"/>
+                        </a:rPr>
+                        <a:t>12.3%</a:t>
+                      </a:r>
+                    </a:p>
+                  </a:txBody>
+                  <a:tcPr>
+                    <a:solidFill>
+                      <a:srgbClr val="FFFFFF"/>
+                    </a:solidFill>
+                  </a:tcPr>
+                </a:tc>
+                <a:tc>
+                  <a:txBody>
+                    <a:bodyPr wrap="none" lIns="18000" rIns="18000" tIns="9000" bIns="9000"/>
+                    <a:lstStyle/>
+                    <a:p>
+                      <a:pPr algn="r"/>
+                      <a:r>
+                        <a:rPr sz="800" b="0">
+                          <a:solidFill>
+                            <a:srgbClr val="556A83"/>
+                          </a:solidFill>
+                          <a:latin typeface="Arial"/>
+                        </a:rPr>
+                        <a:t>9.7%</a:t>
+                      </a:r>
+                    </a:p>
+                  </a:txBody>
+                  <a:tcPr>
+                    <a:solidFill>
+                      <a:srgbClr val="FFFFFF"/>
+                    </a:solidFill>
+                  </a:tcPr>
+                </a:tc>
+                <a:tc>
+                  <a:txBody>
+                    <a:bodyPr wrap="none" lIns="18000" rIns="18000" tIns="9000" bIns="9000"/>
+                    <a:lstStyle/>
+                    <a:p>
+                      <a:pPr algn="r"/>
+                      <a:r>
+                        <a:rPr sz="800" b="0">
+                          <a:solidFill>
+                            <a:srgbClr val="556A83"/>
+                          </a:solidFill>
+                          <a:latin typeface="Arial"/>
+                        </a:rPr>
+                        <a:t>0.20</a:t>
+                      </a:r>
+                    </a:p>
+                  </a:txBody>
+                  <a:tcPr>
+                    <a:solidFill>
+                      <a:srgbClr val="FFFFFF"/>
+                    </a:solidFill>
+                  </a:tcPr>
+                </a:tc>
+                <a:tc>
+                  <a:txBody>
+                    <a:bodyPr wrap="none" lIns="18000" rIns="18000" tIns="9000" bIns="9000"/>
+                    <a:lstStyle/>
+                    <a:p>
+                      <a:pPr algn="r"/>
+                      <a:r>
+                        <a:rPr sz="800" b="0">
+                          <a:solidFill>
+                            <a:srgbClr val="556A83"/>
+                          </a:solidFill>
+                          <a:latin typeface="Arial"/>
+                        </a:rPr>
+                        <a:t>0.54</a:t>
+                      </a:r>
+                    </a:p>
+                  </a:txBody>
+                  <a:tcPr>
+                    <a:solidFill>
+                      <a:srgbClr val="FFFFFF"/>
+                    </a:solidFill>
+                  </a:tcPr>
+                </a:tc>
+                <a:tc>
+                  <a:txBody>
+                    <a:bodyPr wrap="none" lIns="18000" rIns="18000" tIns="9000" bIns="9000"/>
+                    <a:lstStyle/>
+                    <a:p>
+                      <a:pPr algn="r"/>
+                      <a:r>
+                        <a:rPr sz="800" b="0">
+                          <a:solidFill>
+                            <a:srgbClr val="556A83"/>
+                          </a:solidFill>
+                          <a:latin typeface="Arial"/>
+                        </a:rPr>
+                        <a:t>0.47</a:t>
+                      </a:r>
+                    </a:p>
+                  </a:txBody>
+                  <a:tcPr>
+                    <a:solidFill>
+                      <a:srgbClr val="FFFFFF"/>
+                    </a:solidFill>
+                  </a:tcPr>
+                </a:tc>
+                <a:tc>
+                  <a:txBody>
+                    <a:bodyPr wrap="none" lIns="18000" rIns="18000" tIns="9000" bIns="9000"/>
+                    <a:lstStyle/>
+                    <a:p>
+                      <a:pPr algn="r"/>
+                      <a:r>
+                        <a:rPr sz="800" b="0">
+                          <a:solidFill>
+                            <a:srgbClr val="556A83"/>
+                          </a:solidFill>
+                          <a:latin typeface="Arial"/>
+                        </a:rPr>
+                        <a:t>0.52</a:t>
+                      </a:r>
+                    </a:p>
+                  </a:txBody>
+                  <a:tcPr>
+                    <a:solidFill>
+                      <a:srgbClr val="FFFFFF"/>
+                    </a:solidFill>
+                  </a:tcPr>
+                </a:tc>
+                <a:tc>
+                  <a:txBody>
+                    <a:bodyPr wrap="none" lIns="18000" rIns="18000" tIns="9000" bIns="9000"/>
+                    <a:lstStyle/>
+                    <a:p>
+                      <a:pPr algn="r"/>
+                      <a:r>
+                        <a:rPr sz="800" b="0">
+                          <a:solidFill>
+                            <a:srgbClr val="833C00"/>
+                          </a:solidFill>
+                          <a:latin typeface="Arial"/>
+                        </a:rPr>
+                        <a:t>-1.3%</a:t>
+                      </a:r>
+                    </a:p>
+                  </a:txBody>
+                  <a:tcPr>
+                    <a:solidFill>
+                      <a:srgbClr val="FFFFFF"/>
+                    </a:solidFill>
+                  </a:tcPr>
+                </a:tc>
+                <a:tc>
+                  <a:txBody>
+                    <a:bodyPr wrap="none" lIns="18000" rIns="18000" tIns="9000" bIns="9000"/>
+                    <a:lstStyle/>
+                    <a:p>
+                      <a:pPr algn="r"/>
+                      <a:r>
+                        <a:rPr sz="800" b="0">
+                          <a:solidFill>
+                            <a:srgbClr val="314359"/>
+                          </a:solidFill>
+                          <a:latin typeface="Arial"/>
+                        </a:rPr>
+                        <a:t>3.0%</a:t>
+                      </a:r>
+                    </a:p>
+                  </a:txBody>
+                  <a:tcPr>
+                    <a:solidFill>
+                      <a:srgbClr val="FFFFFF"/>
+                    </a:solidFill>
+                  </a:tcPr>
+                </a:tc>
+                <a:tc>
+                  <a:txBody>
+                    <a:bodyPr wrap="none" lIns="18000" rIns="18000" tIns="9000" bIns="9000"/>
+                    <a:lstStyle/>
+                    <a:p>
+                      <a:pPr algn="r"/>
+                      <a:r>
+                        <a:rPr sz="800" b="0">
+                          <a:solidFill>
+                            <a:srgbClr val="314359"/>
+                          </a:solidFill>
+                          <a:latin typeface="Arial"/>
+                        </a:rPr>
+                        <a:t>6.4%</a:t>
+                      </a:r>
+                    </a:p>
+                  </a:txBody>
+                  <a:tcPr>
+                    <a:solidFill>
+                      <a:srgbClr val="FFFFFF"/>
+                    </a:solidFill>
+                  </a:tcPr>
+                </a:tc>
+                <a:tc>
+                  <a:txBody>
+                    <a:bodyPr wrap="none" lIns="18000" rIns="18000" tIns="9000" bIns="9000"/>
+                    <a:lstStyle/>
+                    <a:p>
+                      <a:pPr algn="r"/>
+                      <a:r>
+                        <a:rPr sz="800" b="0">
+                          <a:solidFill>
+                            <a:srgbClr val="314359"/>
+                          </a:solidFill>
+                          <a:latin typeface="Arial"/>
+                        </a:rPr>
+                        <a:t>6.4%</a:t>
+                      </a:r>
+                    </a:p>
+                  </a:txBody>
+                  <a:tcPr>
+                    <a:solidFill>
+                      <a:srgbClr val="FFFFFF"/>
+                    </a:solidFill>
+                  </a:tcPr>
+                </a:tc>
+              </a:tr>
+              <a:tr h="365760">
+                <a:tc>
+                  <a:txBody>
+                    <a:bodyPr wrap="none" lIns="18000" rIns="18000" tIns="9000" bIns="9000"/>
+                    <a:lstStyle/>
+                    <a:p>
+                      <a:pPr algn="l"/>
+                      <a:r>
+                        <a:rPr sz="800" b="1">
+                          <a:solidFill>
+                            <a:srgbClr val="152130"/>
+                          </a:solidFill>
+                          <a:latin typeface="Arial"/>
+                        </a:rPr>
+                        <a:t>SAF-Holland</a:t>
+                      </a:r>
+                    </a:p>
+                  </a:txBody>
+                  <a:tcPr>
+                    <a:solidFill>
+                      <a:srgbClr val="F6F7F9"/>
+                    </a:solidFill>
+                  </a:tcPr>
+                </a:tc>
+                <a:tc>
+                  <a:txBody>
+                    <a:bodyPr wrap="none" lIns="18000" rIns="18000" tIns="9000" bIns="9000"/>
+                    <a:lstStyle/>
+                    <a:p>
+                      <a:pPr algn="r"/>
+                      <a:r>
+                        <a:rPr sz="800" b="0">
+                          <a:solidFill>
+                            <a:srgbClr val="314359"/>
+                          </a:solidFill>
+                          <a:latin typeface="Arial"/>
+                        </a:rPr>
+                        <a:t>16.8%</a:t>
+                      </a:r>
+                    </a:p>
+                  </a:txBody>
+                  <a:tcPr>
+                    <a:solidFill>
+                      <a:srgbClr val="F6F7F9"/>
+                    </a:solidFill>
+                  </a:tcPr>
+                </a:tc>
+                <a:tc>
+                  <a:txBody>
+                    <a:bodyPr wrap="none" lIns="18000" rIns="18000" tIns="9000" bIns="9000"/>
+                    <a:lstStyle/>
+                    <a:p>
+                      <a:pPr algn="r"/>
+                      <a:r>
+                        <a:rPr sz="800" b="0">
+                          <a:solidFill>
+                            <a:srgbClr val="314359"/>
+                          </a:solidFill>
+                          <a:latin typeface="Arial"/>
+                        </a:rPr>
+                        <a:t>13.4%</a:t>
+                      </a:r>
+                    </a:p>
+                  </a:txBody>
+                  <a:tcPr>
+                    <a:solidFill>
+                      <a:srgbClr val="F6F7F9"/>
+                    </a:solidFill>
+                  </a:tcPr>
+                </a:tc>
+                <a:tc>
+                  <a:txBody>
+                    <a:bodyPr wrap="none" lIns="18000" rIns="18000" tIns="9000" bIns="9000"/>
+                    <a:lstStyle/>
+                    <a:p>
+                      <a:pPr algn="r"/>
+                      <a:r>
+                        <a:rPr sz="800" b="0">
+                          <a:solidFill>
+                            <a:srgbClr val="314359"/>
+                          </a:solidFill>
+                          <a:latin typeface="Arial"/>
+                        </a:rPr>
+                        <a:t>17.3%</a:t>
+                      </a:r>
+                    </a:p>
+                  </a:txBody>
+                  <a:tcPr>
+                    <a:solidFill>
+                      <a:srgbClr val="F6F7F9"/>
+                    </a:solidFill>
+                  </a:tcPr>
+                </a:tc>
+                <a:tc>
+                  <a:txBody>
+                    <a:bodyPr wrap="none" lIns="18000" rIns="18000" tIns="9000" bIns="9000"/>
+                    <a:lstStyle/>
+                    <a:p>
+                      <a:pPr algn="r"/>
+                      <a:r>
+                        <a:rPr sz="800" b="0">
+                          <a:solidFill>
+                            <a:srgbClr val="556A83"/>
+                          </a:solidFill>
+                          <a:latin typeface="Arial"/>
+                        </a:rPr>
+                        <a:t>0.0%</a:t>
+                      </a:r>
+                    </a:p>
+                  </a:txBody>
+                  <a:tcPr>
+                    <a:solidFill>
+                      <a:srgbClr val="F6F7F9"/>
+                    </a:solidFill>
+                  </a:tcPr>
+                </a:tc>
+                <a:tc>
+                  <a:txBody>
+                    <a:bodyPr wrap="none" lIns="18000" rIns="18000" tIns="9000" bIns="9000"/>
+                    <a:lstStyle/>
+                    <a:p>
+                      <a:pPr algn="r"/>
+                      <a:r>
+                        <a:rPr sz="800" b="0">
+                          <a:solidFill>
+                            <a:srgbClr val="556A83"/>
+                          </a:solidFill>
+                          <a:latin typeface="Arial"/>
+                        </a:rPr>
+                        <a:t>11.1%</a:t>
+                      </a:r>
+                    </a:p>
+                  </a:txBody>
+                  <a:tcPr>
+                    <a:solidFill>
+                      <a:srgbClr val="F6F7F9"/>
+                    </a:solidFill>
+                  </a:tcPr>
+                </a:tc>
+                <a:tc>
+                  <a:txBody>
+                    <a:bodyPr wrap="none" lIns="18000" rIns="18000" tIns="9000" bIns="9000"/>
+                    <a:lstStyle/>
+                    <a:p>
+                      <a:pPr algn="r"/>
+                      <a:r>
+                        <a:rPr sz="800" b="0">
+                          <a:solidFill>
+                            <a:srgbClr val="556A83"/>
+                          </a:solidFill>
+                          <a:latin typeface="Arial"/>
+                        </a:rPr>
+                        <a:t>0.53</a:t>
+                      </a:r>
+                    </a:p>
+                  </a:txBody>
+                  <a:tcPr>
+                    <a:solidFill>
+                      <a:srgbClr val="F6F7F9"/>
+                    </a:solidFill>
+                  </a:tcPr>
+                </a:tc>
+                <a:tc>
+                  <a:txBody>
+                    <a:bodyPr wrap="none" lIns="18000" rIns="18000" tIns="9000" bIns="9000"/>
+                    <a:lstStyle/>
+                    <a:p>
+                      <a:pPr algn="r"/>
+                      <a:r>
+                        <a:rPr sz="800" b="0">
+                          <a:solidFill>
+                            <a:srgbClr val="556A83"/>
+                          </a:solidFill>
+                          <a:latin typeface="Arial"/>
+                        </a:rPr>
+                        <a:t>0.39</a:t>
+                      </a:r>
+                    </a:p>
+                  </a:txBody>
+                  <a:tcPr>
+                    <a:solidFill>
+                      <a:srgbClr val="F6F7F9"/>
+                    </a:solidFill>
+                  </a:tcPr>
+                </a:tc>
+                <a:tc>
+                  <a:txBody>
+                    <a:bodyPr wrap="none" lIns="18000" rIns="18000" tIns="9000" bIns="9000"/>
+                    <a:lstStyle/>
+                    <a:p>
+                      <a:pPr algn="r"/>
+                      <a:r>
+                        <a:rPr sz="800" b="0">
+                          <a:solidFill>
+                            <a:srgbClr val="556A83"/>
+                          </a:solidFill>
+                          <a:latin typeface="Arial"/>
+                        </a:rPr>
+                        <a:t>0.43</a:t>
+                      </a:r>
+                    </a:p>
+                  </a:txBody>
+                  <a:tcPr>
+                    <a:solidFill>
+                      <a:srgbClr val="F6F7F9"/>
+                    </a:solidFill>
+                  </a:tcPr>
+                </a:tc>
+                <a:tc>
+                  <a:txBody>
+                    <a:bodyPr wrap="none" lIns="18000" rIns="18000" tIns="9000" bIns="9000"/>
+                    <a:lstStyle/>
+                    <a:p>
+                      <a:pPr algn="r"/>
+                      <a:r>
+                        <a:rPr sz="800" b="0">
+                          <a:solidFill>
+                            <a:srgbClr val="556A83"/>
+                          </a:solidFill>
+                          <a:latin typeface="Arial"/>
+                        </a:rPr>
+                        <a:t>0.00</a:t>
+                      </a:r>
+                    </a:p>
+                  </a:txBody>
+                  <a:tcPr>
+                    <a:solidFill>
+                      <a:srgbClr val="F6F7F9"/>
+                    </a:solidFill>
+                  </a:tcPr>
+                </a:tc>
+                <a:tc>
+                  <a:txBody>
+                    <a:bodyPr wrap="none" lIns="18000" rIns="18000" tIns="9000" bIns="9000"/>
+                    <a:lstStyle/>
+                    <a:p>
+                      <a:pPr algn="r"/>
+                      <a:r>
+                        <a:rPr sz="800" b="0">
+                          <a:solidFill>
+                            <a:srgbClr val="314359"/>
+                          </a:solidFill>
+                          <a:latin typeface="Arial"/>
+                        </a:rPr>
+                        <a:t>8.8%</a:t>
+                      </a:r>
+                    </a:p>
+                  </a:txBody>
+                  <a:tcPr>
+                    <a:solidFill>
+                      <a:srgbClr val="F6F7F9"/>
+                    </a:solidFill>
+                  </a:tcPr>
+                </a:tc>
+                <a:tc>
+                  <a:txBody>
+                    <a:bodyPr wrap="none" lIns="18000" rIns="18000" tIns="9000" bIns="9000"/>
+                    <a:lstStyle/>
+                    <a:p>
+                      <a:pPr algn="r"/>
+                      <a:r>
+                        <a:rPr sz="800" b="0">
+                          <a:solidFill>
+                            <a:srgbClr val="314359"/>
+                          </a:solidFill>
+                          <a:latin typeface="Arial"/>
+                        </a:rPr>
+                        <a:t>5.3%</a:t>
+                      </a:r>
+                    </a:p>
+                  </a:txBody>
+                  <a:tcPr>
+                    <a:solidFill>
+                      <a:srgbClr val="F6F7F9"/>
+                    </a:solidFill>
+                  </a:tcPr>
+                </a:tc>
+                <a:tc>
+                  <a:txBody>
+                    <a:bodyPr wrap="none" lIns="18000" rIns="18000" tIns="9000" bIns="9000"/>
+                    <a:lstStyle/>
+                    <a:p>
+                      <a:pPr algn="r"/>
+                      <a:r>
+                        <a:rPr sz="800" b="0">
+                          <a:solidFill>
+                            <a:srgbClr val="314359"/>
+                          </a:solidFill>
+                          <a:latin typeface="Arial"/>
+                        </a:rPr>
+                        <a:t>7.4%</a:t>
+                      </a:r>
+                    </a:p>
+                  </a:txBody>
+                  <a:tcPr>
+                    <a:solidFill>
+                      <a:srgbClr val="F6F7F9"/>
+                    </a:solidFill>
+                  </a:tcPr>
+                </a:tc>
+                <a:tc>
+                  <a:txBody>
+                    <a:bodyPr wrap="none" lIns="18000" rIns="18000" tIns="9000" bIns="9000"/>
+                    <a:lstStyle/>
+                    <a:p>
+                      <a:pPr algn="r"/>
+                      <a:r>
+                        <a:rPr sz="800" b="0">
+                          <a:solidFill>
+                            <a:srgbClr val="556A83"/>
+                          </a:solidFill>
+                          <a:latin typeface="Arial"/>
+                        </a:rPr>
+                        <a:t>0.0%</a:t>
+                      </a:r>
+                    </a:p>
+                  </a:txBody>
+                  <a:tcPr>
+                    <a:solidFill>
+                      <a:srgbClr val="F6F7F9"/>
+                    </a:solidFill>
+                  </a:tcPr>
+                </a:tc>
+              </a:tr>
+              <a:tr h="365760">
+                <a:tc>
+                  <a:txBody>
+                    <a:bodyPr wrap="none" lIns="18000" rIns="18000" tIns="9000" bIns="9000"/>
+                    <a:lstStyle/>
+                    <a:p>
+                      <a:pPr algn="l"/>
+                      <a:r>
+                        <a:rPr sz="800" b="1">
+                          <a:solidFill>
+                            <a:srgbClr val="152130"/>
+                          </a:solidFill>
+                          <a:latin typeface="Arial"/>
+                        </a:rPr>
+                        <a:t>Akebono</a:t>
+                      </a:r>
+                    </a:p>
+                  </a:txBody>
+                  <a:tcPr>
+                    <a:solidFill>
+                      <a:srgbClr val="FFFFFF"/>
+                    </a:solidFill>
+                  </a:tcPr>
+                </a:tc>
+                <a:tc>
+                  <a:txBody>
+                    <a:bodyPr wrap="none" lIns="18000" rIns="18000" tIns="9000" bIns="9000"/>
+                    <a:lstStyle/>
+                    <a:p>
+                      <a:pPr algn="r"/>
+                      <a:r>
+                        <a:rPr sz="800" b="0">
+                          <a:solidFill>
+                            <a:srgbClr val="314359"/>
+                          </a:solidFill>
+                          <a:latin typeface="Arial"/>
+                        </a:rPr>
+                        <a:t>7.2%</a:t>
+                      </a:r>
+                    </a:p>
+                  </a:txBody>
+                  <a:tcPr>
+                    <a:solidFill>
+                      <a:srgbClr val="FFFFFF"/>
+                    </a:solidFill>
+                  </a:tcPr>
+                </a:tc>
+                <a:tc>
+                  <a:txBody>
+                    <a:bodyPr wrap="none" lIns="18000" rIns="18000" tIns="9000" bIns="9000"/>
+                    <a:lstStyle/>
+                    <a:p>
+                      <a:pPr algn="r"/>
+                      <a:r>
+                        <a:rPr sz="800" b="0">
+                          <a:solidFill>
+                            <a:srgbClr val="833C00"/>
+                          </a:solidFill>
+                          <a:latin typeface="Arial"/>
+                        </a:rPr>
+                        <a:t>-2.9%</a:t>
+                      </a:r>
+                    </a:p>
+                  </a:txBody>
+                  <a:tcPr>
+                    <a:solidFill>
+                      <a:srgbClr val="FFFFFF"/>
+                    </a:solidFill>
+                  </a:tcPr>
+                </a:tc>
+                <a:tc>
+                  <a:txBody>
+                    <a:bodyPr wrap="none" lIns="18000" rIns="18000" tIns="9000" bIns="9000"/>
+                    <a:lstStyle/>
+                    <a:p>
+                      <a:pPr algn="r"/>
+                      <a:r>
+                        <a:rPr sz="800" b="0">
+                          <a:solidFill>
+                            <a:srgbClr val="833C00"/>
+                          </a:solidFill>
+                          <a:latin typeface="Arial"/>
+                        </a:rPr>
+                        <a:t>-4.4%</a:t>
+                      </a:r>
+                    </a:p>
+                  </a:txBody>
+                  <a:tcPr>
+                    <a:solidFill>
+                      <a:srgbClr val="FFFFFF"/>
+                    </a:solidFill>
+                  </a:tcPr>
+                </a:tc>
+                <a:tc>
+                  <a:txBody>
+                    <a:bodyPr wrap="none" lIns="18000" rIns="18000" tIns="9000" bIns="9000"/>
+                    <a:lstStyle/>
+                    <a:p>
+                      <a:pPr algn="r"/>
+                      <a:r>
+                        <a:rPr sz="800" b="0">
+                          <a:solidFill>
+                            <a:srgbClr val="314359"/>
+                          </a:solidFill>
+                          <a:latin typeface="Arial"/>
+                        </a:rPr>
+                        <a:t>0.8%</a:t>
+                      </a:r>
+                    </a:p>
+                  </a:txBody>
+                  <a:tcPr>
+                    <a:solidFill>
+                      <a:srgbClr val="FFFFFF"/>
+                    </a:solidFill>
+                  </a:tcPr>
+                </a:tc>
+                <a:tc>
+                  <a:txBody>
+                    <a:bodyPr wrap="none" lIns="18000" rIns="18000" tIns="9000" bIns="9000"/>
+                    <a:lstStyle/>
+                    <a:p>
+                      <a:pPr algn="r"/>
+                      <a:r>
+                        <a:rPr sz="800" b="0">
+                          <a:solidFill>
+                            <a:srgbClr val="556A83"/>
+                          </a:solidFill>
+                          <a:latin typeface="Arial"/>
+                        </a:rPr>
+                        <a:t>2.6%</a:t>
+                      </a:r>
+                    </a:p>
+                  </a:txBody>
+                  <a:tcPr>
+                    <a:solidFill>
+                      <a:srgbClr val="FFFFFF"/>
+                    </a:solidFill>
+                  </a:tcPr>
+                </a:tc>
+                <a:tc>
+                  <a:txBody>
+                    <a:bodyPr wrap="none" lIns="18000" rIns="18000" tIns="9000" bIns="9000"/>
+                    <a:lstStyle/>
+                    <a:p>
+                      <a:pPr algn="r"/>
+                      <a:r>
+                        <a:rPr sz="800" b="0">
+                          <a:solidFill>
+                            <a:srgbClr val="556A83"/>
+                          </a:solidFill>
+                          <a:latin typeface="Arial"/>
+                        </a:rPr>
+                        <a:t>1.00</a:t>
+                      </a:r>
+                    </a:p>
+                  </a:txBody>
+                  <a:tcPr>
+                    <a:solidFill>
+                      <a:srgbClr val="FFFFFF"/>
+                    </a:solidFill>
+                  </a:tcPr>
+                </a:tc>
+                <a:tc>
+                  <a:txBody>
+                    <a:bodyPr wrap="none" lIns="18000" rIns="18000" tIns="9000" bIns="9000"/>
+                    <a:lstStyle/>
+                    <a:p>
+                      <a:pPr algn="r"/>
+                      <a:r>
+                        <a:rPr sz="800" b="0">
+                          <a:solidFill>
+                            <a:srgbClr val="556A83"/>
+                          </a:solidFill>
+                          <a:latin typeface="Arial"/>
+                        </a:rPr>
+                        <a:t>1.00</a:t>
+                      </a:r>
+                    </a:p>
+                  </a:txBody>
+                  <a:tcPr>
+                    <a:solidFill>
+                      <a:srgbClr val="FFFFFF"/>
+                    </a:solidFill>
+                  </a:tcPr>
+                </a:tc>
+                <a:tc>
+                  <a:txBody>
+                    <a:bodyPr wrap="none" lIns="18000" rIns="18000" tIns="9000" bIns="9000"/>
+                    <a:lstStyle/>
+                    <a:p>
+                      <a:pPr algn="r"/>
+                      <a:r>
+                        <a:rPr sz="800" b="0">
+                          <a:solidFill>
+                            <a:srgbClr val="556A83"/>
+                          </a:solidFill>
+                          <a:latin typeface="Arial"/>
+                        </a:rPr>
+                        <a:t>1.00</a:t>
+                      </a:r>
+                    </a:p>
+                  </a:txBody>
+                  <a:tcPr>
+                    <a:solidFill>
+                      <a:srgbClr val="FFFFFF"/>
+                    </a:solidFill>
+                  </a:tcPr>
+                </a:tc>
+                <a:tc>
+                  <a:txBody>
+                    <a:bodyPr wrap="none" lIns="18000" rIns="18000" tIns="9000" bIns="9000"/>
+                    <a:lstStyle/>
+                    <a:p>
+                      <a:pPr algn="r"/>
+                      <a:r>
+                        <a:rPr sz="800" b="0">
+                          <a:solidFill>
+                            <a:srgbClr val="556A83"/>
+                          </a:solidFill>
+                          <a:latin typeface="Arial"/>
+                        </a:rPr>
+                        <a:t>1.00</a:t>
+                      </a:r>
+                    </a:p>
+                  </a:txBody>
+                  <a:tcPr>
+                    <a:solidFill>
+                      <a:srgbClr val="FFFFFF"/>
+                    </a:solidFill>
+                  </a:tcPr>
+                </a:tc>
+                <a:tc>
+                  <a:txBody>
+                    <a:bodyPr wrap="none" lIns="18000" rIns="18000" tIns="9000" bIns="9000"/>
+                    <a:lstStyle/>
+                    <a:p>
+                      <a:pPr algn="r"/>
+                      <a:r>
+                        <a:rPr sz="800" b="0">
+                          <a:solidFill>
+                            <a:srgbClr val="314359"/>
+                          </a:solidFill>
+                          <a:latin typeface="Arial"/>
+                        </a:rPr>
+                        <a:t>7.2%</a:t>
+                      </a:r>
+                    </a:p>
+                  </a:txBody>
+                  <a:tcPr>
+                    <a:solidFill>
+                      <a:srgbClr val="FFFFFF"/>
+                    </a:solidFill>
+                  </a:tcPr>
+                </a:tc>
+                <a:tc>
+                  <a:txBody>
+                    <a:bodyPr wrap="none" lIns="18000" rIns="18000" tIns="9000" bIns="9000"/>
+                    <a:lstStyle/>
+                    <a:p>
+                      <a:pPr algn="r"/>
+                      <a:r>
+                        <a:rPr sz="800" b="0">
+                          <a:solidFill>
+                            <a:srgbClr val="833C00"/>
+                          </a:solidFill>
+                          <a:latin typeface="Arial"/>
+                        </a:rPr>
+                        <a:t>-2.9%</a:t>
+                      </a:r>
+                    </a:p>
+                  </a:txBody>
+                  <a:tcPr>
+                    <a:solidFill>
+                      <a:srgbClr val="FFFFFF"/>
+                    </a:solidFill>
+                  </a:tcPr>
+                </a:tc>
+                <a:tc>
+                  <a:txBody>
+                    <a:bodyPr wrap="none" lIns="18000" rIns="18000" tIns="9000" bIns="9000"/>
+                    <a:lstStyle/>
+                    <a:p>
+                      <a:pPr algn="r"/>
+                      <a:r>
+                        <a:rPr sz="800" b="0">
+                          <a:solidFill>
+                            <a:srgbClr val="833C00"/>
+                          </a:solidFill>
+                          <a:latin typeface="Arial"/>
+                        </a:rPr>
+                        <a:t>-4.4%</a:t>
+                      </a:r>
+                    </a:p>
+                  </a:txBody>
+                  <a:tcPr>
+                    <a:solidFill>
+                      <a:srgbClr val="FFFFFF"/>
+                    </a:solidFill>
+                  </a:tcPr>
+                </a:tc>
+                <a:tc>
+                  <a:txBody>
+                    <a:bodyPr wrap="none" lIns="18000" rIns="18000" tIns="9000" bIns="9000"/>
+                    <a:lstStyle/>
+                    <a:p>
+                      <a:pPr algn="r"/>
+                      <a:r>
+                        <a:rPr sz="800" b="0">
+                          <a:solidFill>
+                            <a:srgbClr val="314359"/>
+                          </a:solidFill>
+                          <a:latin typeface="Arial"/>
+                        </a:rPr>
+                        <a:t>0.8%</a:t>
+                      </a:r>
+                    </a:p>
+                  </a:txBody>
+                  <a:tcPr>
+                    <a:solidFill>
+                      <a:srgbClr val="FFFFFF"/>
+                    </a:solidFill>
+                  </a:tcPr>
+                </a:tc>
+              </a:tr>
+              <a:tr h="365760">
+                <a:tc>
+                  <a:txBody>
+                    <a:bodyPr wrap="none" lIns="18000" rIns="18000" tIns="9000" bIns="9000"/>
+                    <a:lstStyle/>
+                    <a:p>
+                      <a:pPr algn="l"/>
+                      <a:r>
+                        <a:rPr sz="800" b="1">
+                          <a:solidFill>
+                            <a:srgbClr val="152130"/>
+                          </a:solidFill>
+                          <a:latin typeface="Arial"/>
+                        </a:rPr>
+                        <a:t>Mikuni</a:t>
+                      </a:r>
+                    </a:p>
+                  </a:txBody>
+                  <a:tcPr>
+                    <a:solidFill>
+                      <a:srgbClr val="F6F7F9"/>
+                    </a:solidFill>
+                  </a:tcPr>
+                </a:tc>
+                <a:tc>
+                  <a:txBody>
+                    <a:bodyPr wrap="none" lIns="18000" rIns="18000" tIns="9000" bIns="9000"/>
+                    <a:lstStyle/>
+                    <a:p>
+                      <a:pPr algn="r"/>
+                      <a:r>
+                        <a:rPr sz="800" b="0">
+                          <a:solidFill>
+                            <a:srgbClr val="833C00"/>
+                          </a:solidFill>
+                          <a:latin typeface="Arial"/>
+                        </a:rPr>
+                        <a:t>-2.9%</a:t>
+                      </a:r>
+                    </a:p>
+                  </a:txBody>
+                  <a:tcPr>
+                    <a:solidFill>
+                      <a:srgbClr val="F6F7F9"/>
+                    </a:solidFill>
+                  </a:tcPr>
+                </a:tc>
+                <a:tc>
+                  <a:txBody>
+                    <a:bodyPr wrap="none" lIns="18000" rIns="18000" tIns="9000" bIns="9000"/>
+                    <a:lstStyle/>
+                    <a:p>
+                      <a:pPr algn="r"/>
+                      <a:r>
+                        <a:rPr sz="800" b="0">
+                          <a:solidFill>
+                            <a:srgbClr val="833C00"/>
+                          </a:solidFill>
+                          <a:latin typeface="Arial"/>
+                        </a:rPr>
+                        <a:t>-5.8%</a:t>
+                      </a:r>
+                    </a:p>
+                  </a:txBody>
+                  <a:tcPr>
+                    <a:solidFill>
+                      <a:srgbClr val="F6F7F9"/>
+                    </a:solidFill>
+                  </a:tcPr>
+                </a:tc>
+                <a:tc>
+                  <a:txBody>
+                    <a:bodyPr wrap="none" lIns="18000" rIns="18000" tIns="9000" bIns="9000"/>
+                    <a:lstStyle/>
+                    <a:p>
+                      <a:pPr algn="r"/>
+                      <a:r>
+                        <a:rPr sz="800" b="0">
+                          <a:solidFill>
+                            <a:srgbClr val="833C00"/>
+                          </a:solidFill>
+                          <a:latin typeface="Arial"/>
+                        </a:rPr>
+                        <a:t>-0.7%</a:t>
+                      </a:r>
+                    </a:p>
+                  </a:txBody>
+                  <a:tcPr>
+                    <a:solidFill>
+                      <a:srgbClr val="F6F7F9"/>
+                    </a:solidFill>
+                  </a:tcPr>
+                </a:tc>
+                <a:tc>
+                  <a:txBody>
+                    <a:bodyPr wrap="none" lIns="18000" rIns="18000" tIns="9000" bIns="9000"/>
+                    <a:lstStyle/>
+                    <a:p>
+                      <a:pPr algn="r"/>
+                      <a:r>
+                        <a:rPr sz="800" b="0">
+                          <a:solidFill>
+                            <a:srgbClr val="833C00"/>
+                          </a:solidFill>
+                          <a:latin typeface="Arial"/>
+                        </a:rPr>
+                        <a:t>-0.2%</a:t>
+                      </a:r>
+                    </a:p>
+                  </a:txBody>
+                  <a:tcPr>
+                    <a:solidFill>
+                      <a:srgbClr val="F6F7F9"/>
+                    </a:solidFill>
+                  </a:tcPr>
+                </a:tc>
+                <a:tc>
+                  <a:txBody>
+                    <a:bodyPr wrap="none" lIns="18000" rIns="18000" tIns="9000" bIns="9000"/>
+                    <a:lstStyle/>
+                    <a:p>
+                      <a:pPr algn="r"/>
+                      <a:r>
+                        <a:rPr sz="800" b="0">
+                          <a:solidFill>
+                            <a:srgbClr val="556A83"/>
+                          </a:solidFill>
+                          <a:latin typeface="Arial"/>
+                        </a:rPr>
+                        <a:t>3.8%</a:t>
+                      </a:r>
+                    </a:p>
+                  </a:txBody>
+                  <a:tcPr>
+                    <a:solidFill>
+                      <a:srgbClr val="F6F7F9"/>
+                    </a:solidFill>
+                  </a:tcPr>
+                </a:tc>
+                <a:tc>
+                  <a:txBody>
+                    <a:bodyPr wrap="none" lIns="18000" rIns="18000" tIns="9000" bIns="9000"/>
+                    <a:lstStyle/>
+                    <a:p>
+                      <a:pPr algn="r"/>
+                      <a:r>
+                        <a:rPr sz="800" b="0">
+                          <a:solidFill>
+                            <a:srgbClr val="556A83"/>
+                          </a:solidFill>
+                          <a:latin typeface="Arial"/>
+                        </a:rPr>
+                        <a:t>1.00</a:t>
+                      </a:r>
+                    </a:p>
+                  </a:txBody>
+                  <a:tcPr>
+                    <a:solidFill>
+                      <a:srgbClr val="F6F7F9"/>
+                    </a:solidFill>
+                  </a:tcPr>
+                </a:tc>
+                <a:tc>
+                  <a:txBody>
+                    <a:bodyPr wrap="none" lIns="18000" rIns="18000" tIns="9000" bIns="9000"/>
+                    <a:lstStyle/>
+                    <a:p>
+                      <a:pPr algn="r"/>
+                      <a:r>
+                        <a:rPr sz="800" b="0">
+                          <a:solidFill>
+                            <a:srgbClr val="556A83"/>
+                          </a:solidFill>
+                          <a:latin typeface="Arial"/>
+                        </a:rPr>
+                        <a:t>1.00</a:t>
+                      </a:r>
+                    </a:p>
+                  </a:txBody>
+                  <a:tcPr>
+                    <a:solidFill>
+                      <a:srgbClr val="F6F7F9"/>
+                    </a:solidFill>
+                  </a:tcPr>
+                </a:tc>
+                <a:tc>
+                  <a:txBody>
+                    <a:bodyPr wrap="none" lIns="18000" rIns="18000" tIns="9000" bIns="9000"/>
+                    <a:lstStyle/>
+                    <a:p>
+                      <a:pPr algn="r"/>
+                      <a:r>
+                        <a:rPr sz="800" b="0">
+                          <a:solidFill>
+                            <a:srgbClr val="556A83"/>
+                          </a:solidFill>
+                          <a:latin typeface="Arial"/>
+                        </a:rPr>
+                        <a:t>1.00</a:t>
+                      </a:r>
+                    </a:p>
+                  </a:txBody>
+                  <a:tcPr>
+                    <a:solidFill>
+                      <a:srgbClr val="F6F7F9"/>
+                    </a:solidFill>
+                  </a:tcPr>
+                </a:tc>
+                <a:tc>
+                  <a:txBody>
+                    <a:bodyPr wrap="none" lIns="18000" rIns="18000" tIns="9000" bIns="9000"/>
+                    <a:lstStyle/>
+                    <a:p>
+                      <a:pPr algn="r"/>
+                      <a:r>
+                        <a:rPr sz="800" b="0">
+                          <a:solidFill>
+                            <a:srgbClr val="556A83"/>
+                          </a:solidFill>
+                          <a:latin typeface="Arial"/>
+                        </a:rPr>
+                        <a:t>1.00</a:t>
+                      </a:r>
+                    </a:p>
+                  </a:txBody>
+                  <a:tcPr>
+                    <a:solidFill>
+                      <a:srgbClr val="F6F7F9"/>
+                    </a:solidFill>
+                  </a:tcPr>
+                </a:tc>
+                <a:tc>
+                  <a:txBody>
+                    <a:bodyPr wrap="none" lIns="18000" rIns="18000" tIns="9000" bIns="9000"/>
+                    <a:lstStyle/>
+                    <a:p>
+                      <a:pPr algn="r"/>
+                      <a:r>
+                        <a:rPr sz="800" b="0">
+                          <a:solidFill>
+                            <a:srgbClr val="833C00"/>
+                          </a:solidFill>
+                          <a:latin typeface="Arial"/>
+                        </a:rPr>
+                        <a:t>-2.9%</a:t>
+                      </a:r>
+                    </a:p>
+                  </a:txBody>
+                  <a:tcPr>
+                    <a:solidFill>
+                      <a:srgbClr val="F6F7F9"/>
+                    </a:solidFill>
+                  </a:tcPr>
+                </a:tc>
+                <a:tc>
+                  <a:txBody>
+                    <a:bodyPr wrap="none" lIns="18000" rIns="18000" tIns="9000" bIns="9000"/>
+                    <a:lstStyle/>
+                    <a:p>
+                      <a:pPr algn="r"/>
+                      <a:r>
+                        <a:rPr sz="800" b="0">
+                          <a:solidFill>
+                            <a:srgbClr val="833C00"/>
+                          </a:solidFill>
+                          <a:latin typeface="Arial"/>
+                        </a:rPr>
+                        <a:t>-5.8%</a:t>
+                      </a:r>
+                    </a:p>
+                  </a:txBody>
+                  <a:tcPr>
+                    <a:solidFill>
+                      <a:srgbClr val="F6F7F9"/>
+                    </a:solidFill>
+                  </a:tcPr>
+                </a:tc>
+                <a:tc>
+                  <a:txBody>
+                    <a:bodyPr wrap="none" lIns="18000" rIns="18000" tIns="9000" bIns="9000"/>
+                    <a:lstStyle/>
+                    <a:p>
+                      <a:pPr algn="r"/>
+                      <a:r>
+                        <a:rPr sz="800" b="0">
+                          <a:solidFill>
+                            <a:srgbClr val="833C00"/>
+                          </a:solidFill>
+                          <a:latin typeface="Arial"/>
+                        </a:rPr>
+                        <a:t>-0.7%</a:t>
+                      </a:r>
+                    </a:p>
+                  </a:txBody>
+                  <a:tcPr>
+                    <a:solidFill>
+                      <a:srgbClr val="F6F7F9"/>
+                    </a:solidFill>
+                  </a:tcPr>
+                </a:tc>
+                <a:tc>
+                  <a:txBody>
+                    <a:bodyPr wrap="none" lIns="18000" rIns="18000" tIns="9000" bIns="9000"/>
+                    <a:lstStyle/>
+                    <a:p>
+                      <a:pPr algn="r"/>
+                      <a:r>
+                        <a:rPr sz="800" b="0">
+                          <a:solidFill>
+                            <a:srgbClr val="833C00"/>
+                          </a:solidFill>
+                          <a:latin typeface="Arial"/>
+                        </a:rPr>
+                        <a:t>-0.2%</a:t>
+                      </a:r>
+                    </a:p>
+                  </a:txBody>
+                  <a:tcPr>
+                    <a:solidFill>
+                      <a:srgbClr val="F6F7F9"/>
+                    </a:solidFill>
+                  </a:tcPr>
+                </a:tc>
+              </a:tr>
+              <a:tr h="365760">
+                <a:tc>
+                  <a:txBody>
+                    <a:bodyPr wrap="none" lIns="18000" rIns="18000" tIns="9000" bIns="9000"/>
+                    <a:lstStyle/>
+                    <a:p>
+                      <a:pPr algn="l"/>
+                      <a:r>
+                        <a:rPr sz="800" b="1">
+                          <a:solidFill>
+                            <a:srgbClr val="152130"/>
+                          </a:solidFill>
+                          <a:latin typeface="Arial"/>
+                        </a:rPr>
+                        <a:t>TBK</a:t>
+                      </a:r>
+                    </a:p>
+                  </a:txBody>
+                  <a:tcPr>
+                    <a:solidFill>
+                      <a:srgbClr val="E7EBEC"/>
+                    </a:solidFill>
+                  </a:tcPr>
+                </a:tc>
+                <a:tc>
+                  <a:txBody>
+                    <a:bodyPr wrap="none" lIns="18000" rIns="18000" tIns="9000" bIns="9000"/>
+                    <a:lstStyle/>
+                    <a:p>
+                      <a:pPr algn="r"/>
+                      <a:r>
+                        <a:rPr sz="800" b="1">
+                          <a:solidFill>
+                            <a:srgbClr val="833C00"/>
+                          </a:solidFill>
+                          <a:latin typeface="Arial"/>
+                        </a:rPr>
+                        <a:t>-26.2%</a:t>
+                      </a:r>
+                    </a:p>
+                  </a:txBody>
+                  <a:tcPr>
+                    <a:solidFill>
+                      <a:srgbClr val="E7EBEC"/>
+                    </a:solidFill>
+                  </a:tcPr>
+                </a:tc>
+                <a:tc>
+                  <a:txBody>
+                    <a:bodyPr wrap="none" lIns="18000" rIns="18000" tIns="9000" bIns="9000"/>
+                    <a:lstStyle/>
+                    <a:p>
+                      <a:pPr algn="r"/>
+                      <a:r>
+                        <a:rPr sz="800" b="1">
+                          <a:solidFill>
+                            <a:srgbClr val="833C00"/>
+                          </a:solidFill>
+                          <a:latin typeface="Arial"/>
+                        </a:rPr>
+                        <a:t>-10.0%</a:t>
+                      </a:r>
+                    </a:p>
+                  </a:txBody>
+                  <a:tcPr>
+                    <a:solidFill>
+                      <a:srgbClr val="E7EBEC"/>
+                    </a:solidFill>
+                  </a:tcPr>
+                </a:tc>
+                <a:tc>
+                  <a:txBody>
+                    <a:bodyPr wrap="none" lIns="18000" rIns="18000" tIns="9000" bIns="9000"/>
+                    <a:lstStyle/>
+                    <a:p>
+                      <a:pPr algn="r"/>
+                      <a:r>
+                        <a:rPr sz="800" b="1">
+                          <a:solidFill>
+                            <a:srgbClr val="833C00"/>
+                          </a:solidFill>
+                          <a:latin typeface="Arial"/>
+                        </a:rPr>
+                        <a:t>-4.3%</a:t>
+                      </a:r>
+                    </a:p>
+                  </a:txBody>
+                  <a:tcPr>
+                    <a:solidFill>
+                      <a:srgbClr val="E7EBEC"/>
+                    </a:solidFill>
+                  </a:tcPr>
+                </a:tc>
+                <a:tc>
+                  <a:txBody>
+                    <a:bodyPr wrap="none" lIns="18000" rIns="18000" tIns="9000" bIns="9000"/>
+                    <a:lstStyle/>
+                    <a:p>
+                      <a:pPr algn="r"/>
+                      <a:r>
+                        <a:rPr sz="800" b="1">
+                          <a:solidFill>
+                            <a:srgbClr val="833C00"/>
+                          </a:solidFill>
+                          <a:latin typeface="Arial"/>
+                        </a:rPr>
+                        <a:t>-0.8%</a:t>
+                      </a:r>
+                    </a:p>
+                  </a:txBody>
+                  <a:tcPr>
+                    <a:solidFill>
+                      <a:srgbClr val="E7EBEC"/>
+                    </a:solidFill>
+                  </a:tcPr>
+                </a:tc>
+                <a:tc>
+                  <a:txBody>
+                    <a:bodyPr wrap="none" lIns="18000" rIns="18000" tIns="9000" bIns="9000"/>
+                    <a:lstStyle/>
+                    <a:p>
+                      <a:pPr algn="r"/>
+                      <a:r>
+                        <a:rPr sz="800" b="1">
+                          <a:solidFill>
+                            <a:srgbClr val="152130"/>
+                          </a:solidFill>
+                          <a:latin typeface="Arial"/>
+                        </a:rPr>
+                        <a:t>3.2%</a:t>
+                      </a:r>
+                    </a:p>
+                  </a:txBody>
+                  <a:tcPr>
+                    <a:solidFill>
+                      <a:srgbClr val="E7EBEC"/>
+                    </a:solidFill>
+                  </a:tcPr>
+                </a:tc>
+                <a:tc>
+                  <a:txBody>
+                    <a:bodyPr wrap="none" lIns="18000" rIns="18000" tIns="9000" bIns="9000"/>
+                    <a:lstStyle/>
+                    <a:p>
+                      <a:pPr algn="r"/>
+                      <a:r>
+                        <a:rPr sz="800" b="1">
+                          <a:solidFill>
+                            <a:srgbClr val="152130"/>
+                          </a:solidFill>
+                          <a:latin typeface="Arial"/>
+                        </a:rPr>
+                        <a:t>1.00</a:t>
+                      </a:r>
+                    </a:p>
+                  </a:txBody>
+                  <a:tcPr>
+                    <a:solidFill>
+                      <a:srgbClr val="E7EBEC"/>
+                    </a:solidFill>
+                  </a:tcPr>
+                </a:tc>
+                <a:tc>
+                  <a:txBody>
+                    <a:bodyPr wrap="none" lIns="18000" rIns="18000" tIns="9000" bIns="9000"/>
+                    <a:lstStyle/>
+                    <a:p>
+                      <a:pPr algn="r"/>
+                      <a:r>
+                        <a:rPr sz="800" b="1">
+                          <a:solidFill>
+                            <a:srgbClr val="152130"/>
+                          </a:solidFill>
+                          <a:latin typeface="Arial"/>
+                        </a:rPr>
+                        <a:t>1.00</a:t>
+                      </a:r>
+                    </a:p>
+                  </a:txBody>
+                  <a:tcPr>
+                    <a:solidFill>
+                      <a:srgbClr val="E7EBEC"/>
+                    </a:solidFill>
+                  </a:tcPr>
+                </a:tc>
+                <a:tc>
+                  <a:txBody>
+                    <a:bodyPr wrap="none" lIns="18000" rIns="18000" tIns="9000" bIns="9000"/>
+                    <a:lstStyle/>
+                    <a:p>
+                      <a:pPr algn="r"/>
+                      <a:r>
+                        <a:rPr sz="800" b="1">
+                          <a:solidFill>
+                            <a:srgbClr val="152130"/>
+                          </a:solidFill>
+                          <a:latin typeface="Arial"/>
+                        </a:rPr>
+                        <a:t>1.00</a:t>
+                      </a:r>
+                    </a:p>
+                  </a:txBody>
+                  <a:tcPr>
+                    <a:solidFill>
+                      <a:srgbClr val="E7EBEC"/>
+                    </a:solidFill>
+                  </a:tcPr>
+                </a:tc>
+                <a:tc>
+                  <a:txBody>
+                    <a:bodyPr wrap="none" lIns="18000" rIns="18000" tIns="9000" bIns="9000"/>
+                    <a:lstStyle/>
+                    <a:p>
+                      <a:pPr algn="r"/>
+                      <a:r>
+                        <a:rPr sz="800" b="1">
+                          <a:solidFill>
+                            <a:srgbClr val="152130"/>
+                          </a:solidFill>
+                          <a:latin typeface="Arial"/>
+                        </a:rPr>
+                        <a:t>1.00</a:t>
+                      </a:r>
+                    </a:p>
+                  </a:txBody>
+                  <a:tcPr>
+                    <a:solidFill>
+                      <a:srgbClr val="E7EBEC"/>
+                    </a:solidFill>
+                  </a:tcPr>
+                </a:tc>
+                <a:tc>
+                  <a:txBody>
+                    <a:bodyPr wrap="none" lIns="18000" rIns="18000" tIns="9000" bIns="9000"/>
+                    <a:lstStyle/>
+                    <a:p>
+                      <a:pPr algn="r"/>
+                      <a:r>
+                        <a:rPr sz="800" b="1">
+                          <a:solidFill>
+                            <a:srgbClr val="833C00"/>
+                          </a:solidFill>
+                          <a:latin typeface="Arial"/>
+                        </a:rPr>
+                        <a:t>-26.2%</a:t>
+                      </a:r>
+                    </a:p>
+                  </a:txBody>
+                  <a:tcPr>
+                    <a:solidFill>
+                      <a:srgbClr val="E7EBEC"/>
+                    </a:solidFill>
+                  </a:tcPr>
+                </a:tc>
+                <a:tc>
+                  <a:txBody>
+                    <a:bodyPr wrap="none" lIns="18000" rIns="18000" tIns="9000" bIns="9000"/>
+                    <a:lstStyle/>
+                    <a:p>
+                      <a:pPr algn="r"/>
+                      <a:r>
+                        <a:rPr sz="800" b="1">
+                          <a:solidFill>
+                            <a:srgbClr val="833C00"/>
+                          </a:solidFill>
+                          <a:latin typeface="Arial"/>
+                        </a:rPr>
+                        <a:t>-10.0%</a:t>
+                      </a:r>
+                    </a:p>
+                  </a:txBody>
+                  <a:tcPr>
+                    <a:solidFill>
+                      <a:srgbClr val="E7EBEC"/>
+                    </a:solidFill>
+                  </a:tcPr>
+                </a:tc>
+                <a:tc>
+                  <a:txBody>
+                    <a:bodyPr wrap="none" lIns="18000" rIns="18000" tIns="9000" bIns="9000"/>
+                    <a:lstStyle/>
+                    <a:p>
+                      <a:pPr algn="r"/>
+                      <a:r>
+                        <a:rPr sz="800" b="1">
+                          <a:solidFill>
+                            <a:srgbClr val="833C00"/>
+                          </a:solidFill>
+                          <a:latin typeface="Arial"/>
+                        </a:rPr>
+                        <a:t>-4.3%</a:t>
+                      </a:r>
+                    </a:p>
+                  </a:txBody>
+                  <a:tcPr>
+                    <a:solidFill>
+                      <a:srgbClr val="E7EBEC"/>
+                    </a:solidFill>
+                  </a:tcPr>
+                </a:tc>
+                <a:tc>
+                  <a:txBody>
+                    <a:bodyPr wrap="none" lIns="18000" rIns="18000" tIns="9000" bIns="9000"/>
+                    <a:lstStyle/>
+                    <a:p>
+                      <a:pPr algn="r"/>
+                      <a:r>
+                        <a:rPr sz="800" b="1">
+                          <a:solidFill>
+                            <a:srgbClr val="833C00"/>
+                          </a:solidFill>
+                          <a:latin typeface="Arial"/>
+                        </a:rPr>
+                        <a:t>-0.8%</a:t>
+                      </a:r>
+                    </a:p>
+                  </a:txBody>
+                  <a:tcPr>
+                    <a:solidFill>
+                      <a:srgbClr val="E7EBEC"/>
+                    </a:solidFill>
+                  </a:tcPr>
+                </a:tc>
+              </a:tr>
+            </a:tbl>
+          </a:graphicData>
+        </a:graphic>
+      </p:graphicFrame>
+      <p:sp>
+        <p:nvSpPr>
+          <p:cNvPr id="7" name="TextBox 6"/>
+          <p:cNvSpPr txBox="1"/>
+          <p:nvPr/>
+        </p:nvSpPr>
+        <p:spPr>
+          <a:xfrm>
+            <a:off x="274320" y="5029200"/>
+            <a:ext cx="11640312" cy="1417320"/>
+          </a:xfrm>
+          <a:prstGeom prst="rect">
+            <a:avLst/>
+          </a:prstGeom>
+          <a:solidFill>
+            <a:srgbClr val="F6F7F9"/>
+          </a:solidFill>
+          <a:ln w="15875">
+            <a:solidFill>
+              <a:srgbClr val="152130"/>
+            </a:solidFill>
+          </a:ln>
+        </p:spPr>
+        <p:txBody>
+          <a:bodyPr wrap="square" lIns="137160" rIns="137160" tIns="109728">
+            <a:spAutoFit/>
+          </a:bodyPr>
+          <a:lstStyle/>
+          <a:p>
+            <a:r>
+              <a:rPr sz="1450" b="1">
+                <a:solidFill>
+                  <a:srgbClr val="152130"/>
+                </a:solidFill>
+                <a:latin typeface="Arial"/>
+              </a:rPr>
+              <a:t>Reading the value-creation rate (Return = ROIIC x RR)</a:t>
+            </a:r>
+          </a:p>
+          <a:p>
+            <a:pPr>
+              <a:spcBef>
+                <a:spcPts val="400"/>
+              </a:spcBef>
+            </a:pPr>
+            <a:r>
+              <a:rPr sz="1000">
+                <a:solidFill>
+                  <a:srgbClr val="152130"/>
+                </a:solidFill>
+                <a:latin typeface="Arial"/>
+              </a:rPr>
+              <a:t>Return is what reinvestment does to intrinsic value: positive ROIIC x the share of profit reinvested = organic compounding; negative ROIIC means reinvestment SHRINKS value. The disciplined compounders (Cummins, SAF-Holland) earn +5 to +8% by reinvesting only ~40-55% of profit at POSITIVE incremental returns. TBK reinvests 100% (RR=1.00) at sharply NEGATIVE ROIIC — value destruction at every horizon, worst in the set short-term (-26% 3y, -10% 7y). The single clearest number behind the capital-allocation thesis: stop reinvesting at negative returns (prune, return cash, gate) and the destruction reverses before any operational gain.</a:t>
+            </a:r>
+          </a:p>
+        </p:txBody>
+      </p:sp>
+      <p:sp>
+        <p:nvSpPr>
+          <p:cNvPr id="8" name="TextBox 7"/>
+          <p:cNvSpPr txBox="1"/>
+          <p:nvPr/>
+        </p:nvSpPr>
+        <p:spPr>
+          <a:xfrm>
+            <a:off x="11658600" y="6510528"/>
+            <a:ext cx="411480" cy="274320"/>
+          </a:xfrm>
+          <a:prstGeom prst="rect">
+            <a:avLst/>
+          </a:prstGeom>
+          <a:noFill/>
+        </p:spPr>
+        <p:txBody>
+          <a:bodyPr wrap="none">
+            <a:spAutoFit/>
+          </a:bodyPr>
+          <a:lstStyle/>
+          <a:p>
+            <a:pPr algn="r"/>
+            <a:r>
+              <a:rPr sz="900">
+                <a:solidFill>
+                  <a:srgbClr val="556A83"/>
+                </a:solidFill>
+                <a:latin typeface="Arial"/>
+              </a:rPr>
+              <a:t>33</a:t>
+            </a:r>
+          </a:p>
+        </p:txBody>
+      </p:sp>
+    </p:spTree>
+  </p:cSld>
+  <p:clrMapOvr>
+    <a:masterClrMapping/>
+  </p:clrMapOvr>
+</p:sld>
+</file>
+
 <file path=ppt/slides/slide4.xml><?xml version="1.0" encoding="utf-8"?>
 <p:sld xmlns:a="http://schemas.openxmlformats.org/drawingml/2006/main" xmlns:p="http://schemas.openxmlformats.org/presentationml/2006/main" xmlns:r="http://schemas.openxmlformats.org/officeDocument/2006/relationships">
   <p:cSld>
